--- a/docs/decks/L04.pptx
+++ b/docs/decks/L04.pptx
@@ -4404,7 +4404,7 @@
                 <a:ea typeface="Courier New" pitchFamily="34" charset="-122"/>
                 <a:cs typeface="Courier New" pitchFamily="34" charset="-120"/>
               </a:rPr>
-              <a:t>ретрай (W7)</a:t>
+              <a:t>ретрай (урок 7)</a:t>
             </a:r>
             <a:endParaRPr lang="en-US" sz="1100" dirty="0"/>
           </a:p>
@@ -4508,7 +4508,7 @@
                 <a:ea typeface="Courier New" pitchFamily="34" charset="-122"/>
                 <a:cs typeface="Courier New" pitchFamily="34" charset="-120"/>
               </a:rPr>
-              <a:t>fallback (W7)</a:t>
+              <a:t>fallback (урок 7)</a:t>
             </a:r>
             <a:endParaRPr lang="en-US" sz="1100" dirty="0"/>
           </a:p>
@@ -4617,7 +4617,7 @@
                 <a:ea typeface="Courier New" pitchFamily="34" charset="-122"/>
                 <a:cs typeface="Courier New" pitchFamily="34" charset="-120"/>
               </a:rPr>
-              <a:t>tool-цикл (W6)</a:t>
+              <a:t>tool-цикл (урок 6)</a:t>
             </a:r>
             <a:endParaRPr lang="en-US" sz="1100" dirty="0"/>
           </a:p>
@@ -4726,7 +4726,7 @@
                 <a:ea typeface="Courier New" pitchFamily="34" charset="-122"/>
                 <a:cs typeface="Courier New" pitchFamily="34" charset="-120"/>
               </a:rPr>
-              <a:t>класифікатор (W3/W8)</a:t>
+              <a:t>класифікатор (уроки 3 і 8)</a:t>
             </a:r>
             <a:endParaRPr lang="en-US" sz="1100" dirty="0"/>
           </a:p>
@@ -10303,7 +10303,7 @@
             </a:avLst>
           </a:prstGeom>
           <a:solidFill>
-            <a:srgbClr val="ECEBFB"/>
+            <a:srgbClr val="F8F0E2"/>
           </a:solidFill>
           <a:ln/>
         </p:spPr>
@@ -10335,13 +10335,13 @@
             <a:r>
               <a:rPr lang="en-US" sz="900" b="1" spc="100" kern="0" dirty="0">
                 <a:solidFill>
-                  <a:srgbClr val="4038C4"/>
+                  <a:srgbClr val="9A5B12"/>
                 </a:solidFill>
                 <a:latin typeface="Courier New" pitchFamily="34" charset="0"/>
                 <a:ea typeface="Courier New" pitchFamily="34" charset="-122"/>
                 <a:cs typeface="Courier New" pitchFamily="34" charset="-120"/>
               </a:rPr>
-              <a:t>ТЕОРІЯ</a:t>
+              <a:t>РЕФЛЕКСІЯ</a:t>
             </a:r>
             <a:endParaRPr lang="en-US" sz="900" dirty="0"/>
           </a:p>
@@ -12671,7 +12671,7 @@
             </a:avLst>
           </a:prstGeom>
           <a:solidFill>
-            <a:srgbClr val="ECEBFB"/>
+            <a:srgbClr val="F8F0E2"/>
           </a:solidFill>
           <a:ln/>
         </p:spPr>
@@ -12703,13 +12703,13 @@
             <a:r>
               <a:rPr lang="en-US" sz="900" b="1" spc="100" kern="0" dirty="0">
                 <a:solidFill>
-                  <a:srgbClr val="4038C4"/>
+                  <a:srgbClr val="9A5B12"/>
                 </a:solidFill>
                 <a:latin typeface="Courier New" pitchFamily="34" charset="0"/>
                 <a:ea typeface="Courier New" pitchFamily="34" charset="-122"/>
                 <a:cs typeface="Courier New" pitchFamily="34" charset="-120"/>
               </a:rPr>
-              <a:t>ТЕОРІЯ</a:t>
+              <a:t>РЕФЛЕКСІЯ</a:t>
             </a:r>
             <a:endParaRPr lang="en-US" sz="900" dirty="0"/>
           </a:p>

--- a/docs/decks/L04.pptx
+++ b/docs/decks/L04.pptx
@@ -14690,9 +14690,14 @@
             </a:avLst>
           </a:prstGeom>
           <a:solidFill>
-            <a:srgbClr val="ECEBFB"/>
+            <a:srgbClr val="FFFFFF"/>
           </a:solidFill>
-          <a:ln/>
+          <a:ln w="12700">
+            <a:solidFill>
+              <a:srgbClr val="E4E6EC"/>
+            </a:solidFill>
+            <a:prstDash val="solid"/>
+          </a:ln>
         </p:spPr>
       </p:sp>
       <p:sp>
@@ -14710,7 +14715,7 @@
             <a:avLst/>
           </a:prstGeom>
           <a:solidFill>
-            <a:srgbClr val="4038C4"/>
+            <a:srgbClr val="1B1D23"/>
           </a:solidFill>
           <a:ln/>
         </p:spPr>
@@ -14742,7 +14747,7 @@
             <a:r>
               <a:rPr lang="en-US" sz="1200" b="1" dirty="0">
                 <a:solidFill>
-                  <a:srgbClr val="ECEBFB"/>
+                  <a:srgbClr val="FFFFFF"/>
                 </a:solidFill>
                 <a:latin typeface="Courier New" pitchFamily="34" charset="0"/>
                 <a:ea typeface="Courier New" pitchFamily="34" charset="-122"/>
@@ -14781,7 +14786,7 @@
             <a:r>
               <a:rPr lang="en-US" sz="1450" b="1" dirty="0">
                 <a:solidFill>
-                  <a:srgbClr val="4038C4"/>
+                  <a:srgbClr val="1B1D23"/>
                 </a:solidFill>
                 <a:latin typeface="Calibri" pitchFamily="34" charset="0"/>
                 <a:ea typeface="Calibri" pitchFamily="34" charset="-122"/>
@@ -14810,9 +14815,14 @@
             </a:avLst>
           </a:prstGeom>
           <a:solidFill>
-            <a:srgbClr val="ECEBFB"/>
+            <a:srgbClr val="FFFFFF"/>
           </a:solidFill>
-          <a:ln/>
+          <a:ln w="12700">
+            <a:solidFill>
+              <a:srgbClr val="E4E6EC"/>
+            </a:solidFill>
+            <a:prstDash val="solid"/>
+          </a:ln>
         </p:spPr>
       </p:sp>
       <p:sp>
@@ -14830,7 +14840,7 @@
             <a:avLst/>
           </a:prstGeom>
           <a:solidFill>
-            <a:srgbClr val="4038C4"/>
+            <a:srgbClr val="1B1D23"/>
           </a:solidFill>
           <a:ln/>
         </p:spPr>
@@ -14862,7 +14872,7 @@
             <a:r>
               <a:rPr lang="en-US" sz="1200" b="1" dirty="0">
                 <a:solidFill>
-                  <a:srgbClr val="ECEBFB"/>
+                  <a:srgbClr val="FFFFFF"/>
                 </a:solidFill>
                 <a:latin typeface="Courier New" pitchFamily="34" charset="0"/>
                 <a:ea typeface="Courier New" pitchFamily="34" charset="-122"/>
@@ -14901,7 +14911,7 @@
             <a:r>
               <a:rPr lang="en-US" sz="1450" b="1" dirty="0">
                 <a:solidFill>
-                  <a:srgbClr val="4038C4"/>
+                  <a:srgbClr val="1B1D23"/>
                 </a:solidFill>
                 <a:latin typeface="Calibri" pitchFamily="34" charset="0"/>
                 <a:ea typeface="Calibri" pitchFamily="34" charset="-122"/>
@@ -14930,9 +14940,14 @@
             </a:avLst>
           </a:prstGeom>
           <a:solidFill>
-            <a:srgbClr val="ECEBFB"/>
+            <a:srgbClr val="FFFFFF"/>
           </a:solidFill>
-          <a:ln/>
+          <a:ln w="12700">
+            <a:solidFill>
+              <a:srgbClr val="E4E6EC"/>
+            </a:solidFill>
+            <a:prstDash val="solid"/>
+          </a:ln>
         </p:spPr>
       </p:sp>
       <p:sp>
@@ -14950,7 +14965,7 @@
             <a:avLst/>
           </a:prstGeom>
           <a:solidFill>
-            <a:srgbClr val="4038C4"/>
+            <a:srgbClr val="1B1D23"/>
           </a:solidFill>
           <a:ln/>
         </p:spPr>
@@ -14982,7 +14997,7 @@
             <a:r>
               <a:rPr lang="en-US" sz="1200" b="1" dirty="0">
                 <a:solidFill>
-                  <a:srgbClr val="ECEBFB"/>
+                  <a:srgbClr val="FFFFFF"/>
                 </a:solidFill>
                 <a:latin typeface="Courier New" pitchFamily="34" charset="0"/>
                 <a:ea typeface="Courier New" pitchFamily="34" charset="-122"/>
@@ -15021,7 +15036,7 @@
             <a:r>
               <a:rPr lang="en-US" sz="1450" b="1" dirty="0">
                 <a:solidFill>
-                  <a:srgbClr val="4038C4"/>
+                  <a:srgbClr val="1B1D23"/>
                 </a:solidFill>
                 <a:latin typeface="Calibri" pitchFamily="34" charset="0"/>
                 <a:ea typeface="Calibri" pitchFamily="34" charset="-122"/>
@@ -15050,9 +15065,14 @@
             </a:avLst>
           </a:prstGeom>
           <a:solidFill>
-            <a:srgbClr val="ECEBFB"/>
+            <a:srgbClr val="FFFFFF"/>
           </a:solidFill>
-          <a:ln/>
+          <a:ln w="12700">
+            <a:solidFill>
+              <a:srgbClr val="E4E6EC"/>
+            </a:solidFill>
+            <a:prstDash val="solid"/>
+          </a:ln>
         </p:spPr>
       </p:sp>
       <p:sp>
@@ -15070,7 +15090,7 @@
             <a:avLst/>
           </a:prstGeom>
           <a:solidFill>
-            <a:srgbClr val="4038C4"/>
+            <a:srgbClr val="1B1D23"/>
           </a:solidFill>
           <a:ln/>
         </p:spPr>
@@ -15102,7 +15122,7 @@
             <a:r>
               <a:rPr lang="en-US" sz="1200" b="1" dirty="0">
                 <a:solidFill>
-                  <a:srgbClr val="ECEBFB"/>
+                  <a:srgbClr val="FFFFFF"/>
                 </a:solidFill>
                 <a:latin typeface="Courier New" pitchFamily="34" charset="0"/>
                 <a:ea typeface="Courier New" pitchFamily="34" charset="-122"/>
@@ -15141,7 +15161,7 @@
             <a:r>
               <a:rPr lang="en-US" sz="1450" b="1" dirty="0">
                 <a:solidFill>
-                  <a:srgbClr val="4038C4"/>
+                  <a:srgbClr val="1B1D23"/>
                 </a:solidFill>
                 <a:latin typeface="Calibri" pitchFamily="34" charset="0"/>
                 <a:ea typeface="Calibri" pitchFamily="34" charset="-122"/>
@@ -15170,9 +15190,14 @@
             </a:avLst>
           </a:prstGeom>
           <a:solidFill>
-            <a:srgbClr val="ECEBFB"/>
+            <a:srgbClr val="FFFFFF"/>
           </a:solidFill>
-          <a:ln/>
+          <a:ln w="12700">
+            <a:solidFill>
+              <a:srgbClr val="E4E6EC"/>
+            </a:solidFill>
+            <a:prstDash val="solid"/>
+          </a:ln>
         </p:spPr>
       </p:sp>
       <p:sp>
@@ -15190,7 +15215,7 @@
             <a:avLst/>
           </a:prstGeom>
           <a:solidFill>
-            <a:srgbClr val="4038C4"/>
+            <a:srgbClr val="1B1D23"/>
           </a:solidFill>
           <a:ln/>
         </p:spPr>
@@ -15222,7 +15247,7 @@
             <a:r>
               <a:rPr lang="en-US" sz="1200" b="1" dirty="0">
                 <a:solidFill>
-                  <a:srgbClr val="ECEBFB"/>
+                  <a:srgbClr val="FFFFFF"/>
                 </a:solidFill>
                 <a:latin typeface="Courier New" pitchFamily="34" charset="0"/>
                 <a:ea typeface="Courier New" pitchFamily="34" charset="-122"/>
@@ -15261,7 +15286,7 @@
             <a:r>
               <a:rPr lang="en-US" sz="1450" b="1" dirty="0">
                 <a:solidFill>
-                  <a:srgbClr val="4038C4"/>
+                  <a:srgbClr val="1B1D23"/>
                 </a:solidFill>
                 <a:latin typeface="Calibri" pitchFamily="34" charset="0"/>
                 <a:ea typeface="Calibri" pitchFamily="34" charset="-122"/>

--- a/docs/decks/L04.pptx
+++ b/docs/decks/L04.pptx
@@ -3787,9 +3787,14 @@
             </a:avLst>
           </a:prstGeom>
           <a:solidFill>
-            <a:srgbClr val="141018"/>
+            <a:srgbClr val="F5F4FA"/>
           </a:solidFill>
-          <a:ln/>
+          <a:ln w="12700">
+            <a:solidFill>
+              <a:srgbClr val="E6E7EC"/>
+            </a:solidFill>
+            <a:prstDash val="solid"/>
+          </a:ln>
         </p:spPr>
       </p:sp>
       <p:sp>
@@ -3822,7 +3827,7 @@
             <a:r>
               <a:rPr lang="en-US" sz="1200" dirty="0">
                 <a:solidFill>
-                  <a:srgbClr val="6A7385"/>
+                  <a:srgbClr val="8A7FA6"/>
                 </a:solidFill>
                 <a:latin typeface="Courier New" pitchFamily="34" charset="0"/>
                 <a:ea typeface="Courier New" pitchFamily="34" charset="-122"/>
@@ -3842,7 +3847,7 @@
             <a:r>
               <a:rPr lang="en-US" sz="1200" dirty="0">
                 <a:solidFill>
-                  <a:srgbClr val="82AAFF"/>
+                  <a:srgbClr val="5A05F4"/>
                 </a:solidFill>
                 <a:latin typeface="Courier New" pitchFamily="34" charset="0"/>
                 <a:ea typeface="Courier New" pitchFamily="34" charset="-122"/>
@@ -3862,7 +3867,7 @@
             <a:r>
               <a:rPr lang="en-US" sz="1200" dirty="0">
                 <a:solidFill>
-                  <a:srgbClr val="ECE8F6"/>
+                  <a:srgbClr val="23262F"/>
                 </a:solidFill>
                 <a:latin typeface="Courier New" pitchFamily="34" charset="0"/>
                 <a:ea typeface="Courier New" pitchFamily="34" charset="-122"/>
@@ -3882,7 +3887,7 @@
             <a:r>
               <a:rPr lang="en-US" sz="1200" dirty="0">
                 <a:solidFill>
-                  <a:srgbClr val="ECE8F6"/>
+                  <a:srgbClr val="23262F"/>
                 </a:solidFill>
                 <a:latin typeface="Courier New" pitchFamily="34" charset="0"/>
                 <a:ea typeface="Courier New" pitchFamily="34" charset="-122"/>
@@ -3902,7 +3907,7 @@
             <a:r>
               <a:rPr lang="en-US" sz="1200" dirty="0">
                 <a:solidFill>
-                  <a:srgbClr val="F78C6C"/>
+                  <a:srgbClr val="B45309"/>
                 </a:solidFill>
                 <a:latin typeface="Courier New" pitchFamily="34" charset="0"/>
                 <a:ea typeface="Courier New" pitchFamily="34" charset="-122"/>
@@ -6035,9 +6040,14 @@
             </a:avLst>
           </a:prstGeom>
           <a:solidFill>
-            <a:srgbClr val="141018"/>
+            <a:srgbClr val="F5F4FA"/>
           </a:solidFill>
-          <a:ln/>
+          <a:ln w="12700">
+            <a:solidFill>
+              <a:srgbClr val="E6E7EC"/>
+            </a:solidFill>
+            <a:prstDash val="solid"/>
+          </a:ln>
         </p:spPr>
       </p:sp>
       <p:sp>
@@ -6070,7 +6080,7 @@
             <a:r>
               <a:rPr lang="en-US" sz="1100" dirty="0">
                 <a:solidFill>
-                  <a:srgbClr val="6A7385"/>
+                  <a:srgbClr val="8A7FA6"/>
                 </a:solidFill>
                 <a:latin typeface="Courier New" pitchFamily="34" charset="0"/>
                 <a:ea typeface="Courier New" pitchFamily="34" charset="-122"/>
@@ -6090,7 +6100,7 @@
             <a:r>
               <a:rPr lang="en-US" sz="1100" dirty="0">
                 <a:solidFill>
-                  <a:srgbClr val="82AAFF"/>
+                  <a:srgbClr val="5A05F4"/>
                 </a:solidFill>
                 <a:latin typeface="Courier New" pitchFamily="34" charset="0"/>
                 <a:ea typeface="Courier New" pitchFamily="34" charset="-122"/>
@@ -6110,7 +6120,7 @@
             <a:r>
               <a:rPr lang="en-US" sz="1100" dirty="0">
                 <a:solidFill>
-                  <a:srgbClr val="ECE8F6"/>
+                  <a:srgbClr val="23262F"/>
                 </a:solidFill>
                 <a:latin typeface="Courier New" pitchFamily="34" charset="0"/>
                 <a:ea typeface="Courier New" pitchFamily="34" charset="-122"/>
@@ -6130,7 +6140,7 @@
             <a:r>
               <a:rPr lang="en-US" sz="1100" dirty="0">
                 <a:solidFill>
-                  <a:srgbClr val="6A7385"/>
+                  <a:srgbClr val="8A7FA6"/>
                 </a:solidFill>
                 <a:latin typeface="Courier New" pitchFamily="34" charset="0"/>
                 <a:ea typeface="Courier New" pitchFamily="34" charset="-122"/>
@@ -6150,7 +6160,7 @@
             <a:r>
               <a:rPr lang="en-US" sz="1100" dirty="0">
                 <a:solidFill>
-                  <a:srgbClr val="82AAFF"/>
+                  <a:srgbClr val="5A05F4"/>
                 </a:solidFill>
                 <a:latin typeface="Courier New" pitchFamily="34" charset="0"/>
                 <a:ea typeface="Courier New" pitchFamily="34" charset="-122"/>
@@ -6589,9 +6599,14 @@
             </a:avLst>
           </a:prstGeom>
           <a:solidFill>
-            <a:srgbClr val="141018"/>
+            <a:srgbClr val="F5F4FA"/>
           </a:solidFill>
-          <a:ln/>
+          <a:ln w="12700">
+            <a:solidFill>
+              <a:srgbClr val="E6E7EC"/>
+            </a:solidFill>
+            <a:prstDash val="solid"/>
+          </a:ln>
         </p:spPr>
       </p:sp>
       <p:sp>
@@ -6624,7 +6639,7 @@
             <a:r>
               <a:rPr lang="en-US" sz="1150" dirty="0">
                 <a:solidFill>
-                  <a:srgbClr val="6A7385"/>
+                  <a:srgbClr val="8A7FA6"/>
                 </a:solidFill>
                 <a:latin typeface="Courier New" pitchFamily="34" charset="0"/>
                 <a:ea typeface="Courier New" pitchFamily="34" charset="-122"/>
@@ -6644,7 +6659,7 @@
             <a:r>
               <a:rPr lang="en-US" sz="1150" dirty="0">
                 <a:solidFill>
-                  <a:srgbClr val="6A7385"/>
+                  <a:srgbClr val="8A7FA6"/>
                 </a:solidFill>
                 <a:latin typeface="Courier New" pitchFamily="34" charset="0"/>
                 <a:ea typeface="Courier New" pitchFamily="34" charset="-122"/>
@@ -6664,7 +6679,7 @@
             <a:r>
               <a:rPr lang="en-US" sz="1150" dirty="0">
                 <a:solidFill>
-                  <a:srgbClr val="82AAFF"/>
+                  <a:srgbClr val="5A05F4"/>
                 </a:solidFill>
                 <a:latin typeface="Courier New" pitchFamily="34" charset="0"/>
                 <a:ea typeface="Courier New" pitchFamily="34" charset="-122"/>
@@ -6684,7 +6699,7 @@
             <a:r>
               <a:rPr lang="en-US" sz="1150" dirty="0">
                 <a:solidFill>
-                  <a:srgbClr val="ECE8F6"/>
+                  <a:srgbClr val="23262F"/>
                 </a:solidFill>
                 <a:latin typeface="Courier New" pitchFamily="34" charset="0"/>
                 <a:ea typeface="Courier New" pitchFamily="34" charset="-122"/>
@@ -6704,7 +6719,7 @@
             <a:r>
               <a:rPr lang="en-US" sz="1150" dirty="0">
                 <a:solidFill>
-                  <a:srgbClr val="ECE8F6"/>
+                  <a:srgbClr val="23262F"/>
                 </a:solidFill>
                 <a:latin typeface="Courier New" pitchFamily="34" charset="0"/>
                 <a:ea typeface="Courier New" pitchFamily="34" charset="-122"/>
@@ -7287,9 +7302,14 @@
             </a:avLst>
           </a:prstGeom>
           <a:solidFill>
-            <a:srgbClr val="141018"/>
+            <a:srgbClr val="F5F4FA"/>
           </a:solidFill>
-          <a:ln/>
+          <a:ln w="12700">
+            <a:solidFill>
+              <a:srgbClr val="E6E7EC"/>
+            </a:solidFill>
+            <a:prstDash val="solid"/>
+          </a:ln>
         </p:spPr>
       </p:sp>
       <p:sp>
@@ -7322,7 +7342,7 @@
             <a:r>
               <a:rPr lang="en-US" sz="1250" dirty="0">
                 <a:solidFill>
-                  <a:srgbClr val="82AAFF"/>
+                  <a:srgbClr val="5A05F4"/>
                 </a:solidFill>
                 <a:latin typeface="Courier New" pitchFamily="34" charset="0"/>
                 <a:ea typeface="Courier New" pitchFamily="34" charset="-122"/>
@@ -18199,9 +18219,14 @@
             </a:avLst>
           </a:prstGeom>
           <a:solidFill>
-            <a:srgbClr val="141018"/>
+            <a:srgbClr val="F5F4FA"/>
           </a:solidFill>
-          <a:ln/>
+          <a:ln w="12700">
+            <a:solidFill>
+              <a:srgbClr val="E6E7EC"/>
+            </a:solidFill>
+            <a:prstDash val="solid"/>
+          </a:ln>
         </p:spPr>
       </p:sp>
       <p:sp>
@@ -18234,7 +18259,7 @@
             <a:r>
               <a:rPr lang="en-US" sz="1300" dirty="0">
                 <a:solidFill>
-                  <a:srgbClr val="82AAFF"/>
+                  <a:srgbClr val="5A05F4"/>
                 </a:solidFill>
                 <a:latin typeface="Courier New" pitchFamily="34" charset="0"/>
                 <a:ea typeface="Courier New" pitchFamily="34" charset="-122"/>
@@ -18251,7 +18276,7 @@
             <a:r>
               <a:rPr lang="en-US" sz="1300" dirty="0">
                 <a:solidFill>
-                  <a:srgbClr val="ECE8F6"/>
+                  <a:srgbClr val="23262F"/>
                 </a:solidFill>
                 <a:latin typeface="Courier New" pitchFamily="34" charset="0"/>
                 <a:ea typeface="Courier New" pitchFamily="34" charset="-122"/>
@@ -18268,7 +18293,7 @@
             <a:r>
               <a:rPr lang="en-US" sz="1300" dirty="0">
                 <a:solidFill>
-                  <a:srgbClr val="82AAFF"/>
+                  <a:srgbClr val="5A05F4"/>
                 </a:solidFill>
                 <a:latin typeface="Courier New" pitchFamily="34" charset="0"/>
                 <a:ea typeface="Courier New" pitchFamily="34" charset="-122"/>
@@ -18285,7 +18310,7 @@
             <a:r>
               <a:rPr lang="en-US" sz="1300" dirty="0">
                 <a:solidFill>
-                  <a:srgbClr val="ECE8F6"/>
+                  <a:srgbClr val="23262F"/>
                 </a:solidFill>
                 <a:latin typeface="Courier New" pitchFamily="34" charset="0"/>
                 <a:ea typeface="Courier New" pitchFamily="34" charset="-122"/>
@@ -18305,7 +18330,7 @@
             <a:r>
               <a:rPr lang="en-US" sz="1300" dirty="0">
                 <a:solidFill>
-                  <a:srgbClr val="ECE8F6"/>
+                  <a:srgbClr val="23262F"/>
                 </a:solidFill>
                 <a:latin typeface="Courier New" pitchFamily="34" charset="0"/>
                 <a:ea typeface="Courier New" pitchFamily="34" charset="-122"/>
@@ -18322,7 +18347,7 @@
             <a:r>
               <a:rPr lang="en-US" sz="1300" dirty="0">
                 <a:solidFill>
-                  <a:srgbClr val="82AAFF"/>
+                  <a:srgbClr val="5A05F4"/>
                 </a:solidFill>
                 <a:latin typeface="Courier New" pitchFamily="34" charset="0"/>
                 <a:ea typeface="Courier New" pitchFamily="34" charset="-122"/>
@@ -18339,7 +18364,7 @@
             <a:r>
               <a:rPr lang="en-US" sz="1300" dirty="0">
                 <a:solidFill>
-                  <a:srgbClr val="ECE8F6"/>
+                  <a:srgbClr val="23262F"/>
                 </a:solidFill>
                 <a:latin typeface="Courier New" pitchFamily="34" charset="0"/>
                 <a:ea typeface="Courier New" pitchFamily="34" charset="-122"/>
@@ -19868,9 +19893,14 @@
             </a:avLst>
           </a:prstGeom>
           <a:solidFill>
-            <a:srgbClr val="141018"/>
+            <a:srgbClr val="F5F4FA"/>
           </a:solidFill>
-          <a:ln/>
+          <a:ln w="12700">
+            <a:solidFill>
+              <a:srgbClr val="E6E7EC"/>
+            </a:solidFill>
+            <a:prstDash val="solid"/>
+          </a:ln>
         </p:spPr>
       </p:sp>
       <p:sp>
@@ -19903,7 +19933,7 @@
             <a:r>
               <a:rPr lang="en-US" sz="1150" dirty="0">
                 <a:solidFill>
-                  <a:srgbClr val="6A7385"/>
+                  <a:srgbClr val="8A7FA6"/>
                 </a:solidFill>
                 <a:latin typeface="Courier New" pitchFamily="34" charset="0"/>
                 <a:ea typeface="Courier New" pitchFamily="34" charset="-122"/>
@@ -19923,7 +19953,7 @@
             <a:r>
               <a:rPr lang="en-US" sz="1150" dirty="0">
                 <a:solidFill>
-                  <a:srgbClr val="82AAFF"/>
+                  <a:srgbClr val="5A05F4"/>
                 </a:solidFill>
                 <a:latin typeface="Courier New" pitchFamily="34" charset="0"/>
                 <a:ea typeface="Courier New" pitchFamily="34" charset="-122"/>
@@ -19943,7 +19973,7 @@
             <a:r>
               <a:rPr lang="en-US" sz="1150" dirty="0">
                 <a:solidFill>
-                  <a:srgbClr val="ECE8F6"/>
+                  <a:srgbClr val="23262F"/>
                 </a:solidFill>
                 <a:latin typeface="Courier New" pitchFamily="34" charset="0"/>
                 <a:ea typeface="Courier New" pitchFamily="34" charset="-122"/>
@@ -19963,7 +19993,7 @@
             <a:r>
               <a:rPr lang="en-US" sz="1150" dirty="0">
                 <a:solidFill>
-                  <a:srgbClr val="C3E88D"/>
+                  <a:srgbClr val="177245"/>
                 </a:solidFill>
                 <a:latin typeface="Courier New" pitchFamily="34" charset="0"/>
                 <a:ea typeface="Courier New" pitchFamily="34" charset="-122"/>
@@ -19983,7 +20013,7 @@
             <a:r>
               <a:rPr lang="en-US" sz="1150" dirty="0">
                 <a:solidFill>
-                  <a:srgbClr val="C3E88D"/>
+                  <a:srgbClr val="177245"/>
                 </a:solidFill>
                 <a:latin typeface="Courier New" pitchFamily="34" charset="0"/>
                 <a:ea typeface="Courier New" pitchFamily="34" charset="-122"/>
@@ -20003,7 +20033,7 @@
             <a:r>
               <a:rPr lang="en-US" sz="1150" dirty="0">
                 <a:solidFill>
-                  <a:srgbClr val="ECE8F6"/>
+                  <a:srgbClr val="23262F"/>
                 </a:solidFill>
                 <a:latin typeface="Courier New" pitchFamily="34" charset="0"/>
                 <a:ea typeface="Courier New" pitchFamily="34" charset="-122"/>

--- a/docs/decks/L04.pptx
+++ b/docs/decks/L04.pptx
@@ -524,7 +524,7 @@
           <a:p>
             <a:r>
               <a:rPr lang="en-US" dirty="0"/>
-              <a:t/>
+              <a:t>Вітаю на четвертому уроці. «Скільки коштує наш AI?» — питання, на яке більшість команд відповідає рахунком провайдера наприкінці місяця. І це запізно: вартість LLM-фічі — не константа, вона залежить від моделі, довжини контексту, поведінки користувачів і навіть від того, як ви склеюєте промпт. Сьогодні наша система навчиться знати вартість кожного запиту в момент відповіді. Заведемо прайс моделей у сервісі, порахуємо просту формулу поверх usage, заповнимо поле cost_usd, яке стояло порожнім із першого уроку, і оживимо плитку «Вартість сьогодні» з бюджетом поруч. Це другий урок тижня «Routing + cost» — і саме сьогодні минулий урок окупиться на очах: ви побачите в базі, що ескалація на сильну модель коштує в рази більше за звичайне питання, і вперше порахуєте важіль роутингу в доларах, а не у відчуттях.</a:t>
             </a:r>
             <a:endParaRPr lang="en-US" dirty="0"/>
           </a:p>
@@ -612,7 +612,7 @@
           <a:p>
             <a:r>
               <a:rPr lang="en-US" dirty="0"/>
-              <a:t/>
+              <a:t>Другий шматок — сама вартість. Після парсингу відповіді, поруч із latency_ms: беремо usage, дістаємо ціну моделі з прайсу і рахуємо — вхідні токени на ставку вхідних плюс вихідні на ставку вихідних, поділені на тисячу. Дві операційні дрібниці, які виглядають дріб'язком, а насправді ні. Перша: якщо моделі немає у прайсі — пишемо null, а не нуль. Нуль — це брехня: «запит був безкоштовний». Null — чесне «не знаємо», яке легко знайти запитом і полагодити прайс. Єдиний випадок, де нуль у cost_usd чесний, — кеш-хіт, коли запит справді нічого не коштував; він з'явиться на уроці 5. Друга дрібниця: округлення до шести знаків збігається з типом колонки NUMERIC(10,6). На копійчаних цифрах mock це неважливо — на мільйонах реальних запитів неузгоджене округлення дає розбіжності, які потім шукають тижнями. І все — costUsd їде в LogRequest, у поле, що стояло порожнім із уроку 1. Кожен рядок лога тепер відповідає на питання «скільки коштував цей конкретний запит».</a:t>
             </a:r>
             <a:endParaRPr lang="en-US" dirty="0"/>
           </a:p>
@@ -700,7 +700,7 @@
           <a:p>
             <a:r>
               <a:rPr lang="en-US" dirty="0"/>
-              <a:t/>
+              <a:t>Найпідступніша помилка в обліку вартості робиться не в арифметиці, а в одиниці вимірювання. Ви порахували ціну виклику — і вважаєте, що знаєте ціну запиту. Це правда рівно доти, доки в системі немає нічого з того, що ми будуємо далі. Подивіться, що станеться з одним питанням користувача, коли контур доросте. Ретрай після 429 або таймаута — виклик другий, і токени за перший, невдалий, вам теж порахують, якщо модель уже почала відповідати. Fallback на іншу модель — виклик третій, причому за іншим прайсом: резерв часто дорожчий, бо береться сильніша модель. Tool-цикл з уроку 6 — це два виклики на одне питання, і другий несе в собі і промпт, і результат інструмента. Guardrail-класифікатор чи класифікатор маршруту — ще один виклик, якщо він модельний. Тобто одне питання цілком реально коштує чотирьох викликів — і в лозі це чотири рядки. Якщо рахувати «середню вартість запиту» як середнє по рядках, ви рахуєте середню вартість виклику — зовсім іншу, значно меншу й приємнішу цифру. Помилка в рази, у бік «у нас усе дешево». У нашому контурі поки рівно один виклик на звернення, тому request_id як первинного ключа достатньо. Коли викликів стане більше, схема зміниться: окремий id стає первинним ключем, request_id — колонкою з індексом, спільною для всіх викликів звернення, — і вартість звернення це SUM із GROUP BY, а не AVG. Принцип «ключ звернення не дорівнює ключу виклику» запам'ятайте зараз — застосуєте при першій появі другого виклику. І практична деталь: ретрай і fallback — виклики, які не дійшли до користувача, але гроші за них списані. Розрізняйте в лозі виклик успішний і виклик-спробу — інакше одного дня вартість зросте на 40% при незмінній кількості відповідей, і ви півдня шукатимете «звідки», поки не згадаєте про інцидент у провайдера й лавину ретраїв.</a:t>
             </a:r>
             <a:endParaRPr lang="en-US" dirty="0"/>
           </a:p>
@@ -788,7 +788,7 @@
           <a:p>
             <a:r>
               <a:rPr lang="en-US" dirty="0"/>
-              <a:t/>
+              <a:t>Остання одиниця, до якої варто дійти, — не технічна. Керівництву й фінансам байдужа ціна токена; їм зрозуміла ціна вирішеного звернення: скільки коштує закрити один запит користувача без людини. Ця цифра рахується елементарно, коли є облік по request_id і будь-яка ознака результату — ескалація сталася чи ні. І саме вона перетворює вашу роботу на аргумент: «фіча обробляє N звернень на тиждень по X центів за звернення проти Y хвилин оператора». Та сама цифра — єдиний спосіб чесно порівняти дешеву модель із сильною. Дешева модель, яка вдвічі частіше ескалює на людину, не економить нічого: ви зменшили ціну виклику і збільшили ціну результату. Порівнювати прайси в такій ситуації безглуздо — порівнювати треба вартість вирішеного звернення. До KPI-мови ми повернемося на останньому уроці, але лічильники для неї закладаються тут: cost_usd у кожному рядку плюс ознака результату — і бізнес-цифра готова.</a:t>
             </a:r>
             <a:endParaRPr lang="en-US" dirty="0"/>
           </a:p>
@@ -876,7 +876,7 @@
           <a:p>
             <a:r>
               <a:rPr lang="en-US" dirty="0"/>
-              <a:t/>
+              <a:t>«Ми витратили 400 доларів цього місяця» — марна цифра: з неї не випливає жодної дії. «310 з них — ескалації на strong-моделі, з яких третина за ключовими словами могла піти на mini» — це вже рішення з порахованим ефектом. Різниця між першим і другим — атрибуція: вміння розкласти суму за осями. Мінімальний набір розрізів у нас уже є, бо все лежить в одному лог-рядку: за моделлю — чи справді дороге дістається тільки складному; за днем — тренд і сплески. Дорослі розрізи — per-team, per-feature, per-tenant — це не нова система, а додаткові колонки в тому самому рядку: хто спитав, з якої фічі, для якого клієнта. Записали в момент запиту — і будь-який зріз коштує один GROUP BY. Не записали — і реконструювати заднім числом уже неможливо. Як це працює в бою — розслідування сплеску вартості за три запити. Крок перший: групування за днем — коли почалося; у вівторок. Крок другий: той самий день, групування за моделлю — розподіл трафіку не змінився, отже справа не в роутері. Крок третій: групування за версією промпта з середніми prompt_tokens — а у вівторок якраз активували нову версію, вдвічі довшу, і кожен запит повіз зайві токени. П'ять хвилин від «чому дорого» до конкретної активації — проти археології з блока 01, яка займала тижні. Уся різниця — в тому, що поля були записані в момент запиту. І типова помилка: оптимізувати вартість зміною промпта наосліп. Без цифри до/після ви не знаєте ні ефекту, ні побічної шкоди якості. Спершу зріз по лозі, потім зміна, потім той самий зріз — інакше це не оптимізація, а ритуал.</a:t>
             </a:r>
             <a:endParaRPr lang="en-US" dirty="0"/>
           </a:p>
@@ -964,7 +964,7 @@
           <a:p>
             <a:r>
               <a:rPr lang="en-US" dirty="0"/>
-              <a:t/>
+              <a:t>Третій шматок оживляє консоль. Ендпоінт /cost: сума за сьогодні — прямо з лога, одним запитом. Поруч — budget_usd: у нас це поки константа, і це свідомо. Головна дія відбувається в консолі: плитка «Вартість сьогодні» замість «—» оживає. Одна чесна дрібниця: ендпоінт віддає точне значення — наприклад, нуль цілих дві десятитисячні долара, — а готова консоль округлює до центів. Тож на mock плитка показує нуль доларів нуль центів проти п'яти доларів бюджету, і це очікувано; точне значення перевіряйте через GET /cost. Цифри на mock смішні — механіка бойова: та сама плитка з реальним ключем показуватиме реальні долари, не змінивши жодного рядка. Навіщо бюджет у відповіді, якщо він константа? Бо бюджет — це поріг дії, а не звіт. Цифра витрати без порогу поруч — просто число: незрозуміло, радіти йому чи бити на сполох. Пара «витрачено / ліміт» — це вже стан системи, на який можна вішати реакції — і саме це опційна частина сьогоднішнього уроку.</a:t>
             </a:r>
             <a:endParaRPr lang="en-US" dirty="0"/>
           </a:p>
@@ -1052,7 +1052,7 @@
           <a:p>
             <a:r>
               <a:rPr lang="en-US" dirty="0"/>
-              <a:t/>
+              <a:t>Сьогоднішній облік — це ще й момент, коли минулий урок окупається на очах. Напишіть боту звичайне питання і ескалацію, потім один SELECT по двох останніх рядках лога: ескалація на mock-strong коштує в рази більше за FAQ на mock-mini — при однаковій довжині розмови. Тепер уявіть, що роутера немає і весь трафік іде на strong: помножте різницю на добовий обсяг — це і є ціна рішення «одна модель на все», тільки тепер вона порахована, а не відчута. Звідси головний висновок тижня: маршрутизація — не «оптимізація потім», а найбільший важіль вартості, який у вас є. Промпт-дієти і кеш — наступний тиждень — економлять відсотки; правильний розподіл трафіку між моделями — рази. І ще один наслідок, вартий фіксації: тепер будь-яку зміну в системі можна оцінювати в грошах. Нова версія промпта стала довшою — зріз по prompt_version покаже, наскільки подорожчав середній запит. Змінили правила роутера — розподіл по моделях і сума за день скажуть, чи виправдано. Облік перетворює суперечки «здається, стало дорого» на порівняння двох SQL-запитів.</a:t>
             </a:r>
             <a:endParaRPr lang="en-US" dirty="0"/>
           </a:p>
@@ -1140,7 +1140,7 @@
           <a:p>
             <a:r>
               <a:rPr lang="en-US" dirty="0"/>
-              <a:t/>
+              <a:t>Це опційний блок — і опційна частина ДЗ тижня 2. Цифра і поріг є — можна вішати політику: реакцію на наближення до бюджету. Три робочі варіанти, за зростанням рішучості. Алерт: при вісімдесяти відсотках бюджету писати подію в лог, а на проді — в канал чергового. Це мінімум, який мусить бути завжди: перевитрата не має бути сюрпризом. Деградація: вище порогу routing примусово переводить неескалаційний трафік на дешевшу модель. Якість трохи просідає, сервіс живе, бюджет цілий. Відсікання: не-критичні запити отримують заготовлену відповідь без походу в модель. Найжорсткіший варіант — але чесніший за мовчазне падіння, коли бюджет реально твердий. Зверніть увагу на форму всіх трьох: умова на цифрі з лога — зміна поведінки control plane. Це шаблон, у який далі ляжуть і fallback на тижні 4, і гейт якості на тижні 6. Механізм щоразу новий — форма рішення та сама. Практична дрібниця для реалізації: перевірка порогу — це той самий запит, що і в /cost, тож найпростіше місце для неї — початок /chat, до вибору моделі. Дорого на кожен запит? Тоді фонова перевірка раз на хвилину, яка виставляє прапорець «економний режим», — а роутер лише читає прапорець. Обидва варіанти робочі; головне, щоб рішення про режим і його причина потрапляли в лог.</a:t>
             </a:r>
             <a:endParaRPr lang="en-US" dirty="0"/>
           </a:p>
@@ -1228,7 +1228,7 @@
           <a:p>
             <a:r>
               <a:rPr lang="en-US" dirty="0"/>
-              <a:t/>
+              <a:t>Перш ніж перейти до екрана — що саме ви зараз побачите і навіщо. Послідовність така: прайс у коді сервісу — дві моделі, чотири числа; звичайне питання і ескалація в чаті — роутер з минулого уроку розводить їх по різних моделях; SELECT по свіжих рядках лога — cost_usd заповнений, і в ескалації цифра помітно більша; і нарешті плитка «Вартість сьогодні» в консолі — жива, з бюджетом поруч. Навіщо це все: побачити гроші в момент відповіді, а не в рахунку наприкінці місяця, — і вперше побачити важіль роутингу порахованим, а не відчутим. [Ведучому: демо йде на бранчі w2 еталона; перед записом docker compose down -v і up. Після up дочекайтеся готовності gateway — health-ендпоінт або ~30 секунд: до готовності запити падають тихо, status=0 і нульові токени в лозі. Кирилиця інлайном у curl на Git Bash манглиться навіть після chcp 65001 — питання й ескалацію робіть через чат в UI або тілом з файлу; ASCII-маркери стійкі. Плитка консолі округлює до центів, тож на mock показує $0.00 / $5.00 — точне значення показуйте через GET /cost. Порти 4200/8080/4000/5432 мають бути вільні; шрифт термінала і psql — 14–16pt мінімум.]</a:t>
             </a:r>
             <a:endParaRPr lang="en-US" dirty="0"/>
           </a:p>
@@ -1316,7 +1316,7 @@
           <a:p>
             <a:r>
               <a:rPr lang="en-US" dirty="0"/>
-              <a:t/>
+              <a:t>Частина перша: завести прайс. Словник цін за тисячу токенів для mock-mini і mock-strong — пропорції як у реальних прайсів: strong помітно дорожча, вихідні дорожчі за вхідні. Частина друга: порахувати і записати. Після відповіді моделі: usage, формула, cost_usd, лог. Перевірити запитом SELECT model, cost_usd FROM requests ORDER BY created_at DESC — у ескалацій цифра помітно більша. Частина третя: оживити GET /cost. Сума за сьогодні з бази плюс бюджет; плитка в консолі показує суму і п'ять доларів бюджету замість «—». Пам'ятайте про округлення: плитка покаже нуль центів, точне значення — через GET /cost. Частина четверта, без коду: проговорити пороги. Що робити при вісімдесяти відсотках бюджету — алерт, деградація чи відсікання? Сформулюйте свій вибір одним реченням і запишіть поруч із fallback-порядком з минулого уроку. І опційна п'ята: реалізувати обрану політику в коді — умова на цифрі з /cost, зміна поведінки роутера або заглушка. Це опційна частина ДЗ тижня 2.</a:t>
             </a:r>
             <a:endParaRPr lang="en-US" dirty="0"/>
           </a:p>
@@ -1404,7 +1404,7 @@
           <a:p>
             <a:r>
               <a:rPr lang="en-US" dirty="0"/>
-              <a:t/>
+              <a:t>Зафіксуємо, що ми щойно побачили — і що це доводить. Перше: вартість тепер відома в момент відповіді. У кожному новому рядку лога заповнений cost_usd — рахунок провайдера перестав бути єдиним джерелом правди про гроші, і археологія з блока 01 нам більше не загрожує. Друге: важіль роутингу порахований. Ескалація на strong-моделі коштує в рази більше за FAQ на mini — це видно простим SELECT у базі. Минулий урок окупився на очах: розподіл трафіку між моделями — це рази, а не відсотки. Третє: пара «витрачено / ліміт» на плитці — це вже стан системи, а не просто число. На цей стан можна вішати реакції — алерт, деградацію, відсікання, — і саме це опційна частина ДЗ тижня. Разом ці три картинки закривають тиждень «Routing + cost»: система вміє обирати модель за задачею і знає, скільки коштує кожне її рішення.</a:t>
             </a:r>
             <a:endParaRPr lang="en-US" dirty="0"/>
           </a:p>
@@ -1492,7 +1492,7 @@
           <a:p>
             <a:r>
               <a:rPr lang="en-US" dirty="0"/>
-              <a:t/>
+              <a:t>Домовимось про результат уроку — конкретними діями. Після сьогоднішнього заняття ви зможете: завести прайс моделей у сервісі — поруч із Route(), там, де ухвалюється рішення про модель; порахувати вартість кожного запиту з блока usage і записати cost_usd у лог; показати одним SELECT, що ескалація коштує дорожче за FAQ — і це видно в базі; оживити GET /cost і плитку «Вартість сьогодні», щоб поруч із витратою стояв бюджет; розкласти витрати за моделлю, днем і версією промпта одним GROUP BY; і пояснити, чому перевірки якості та ретраї рахуються так само, як бойовий трафік, — і чому одне звернення користувача не дорівнює одному виклику моделі. Кожен пункт ви перевірите руками ще сьогодні — у лабораторній.</a:t>
             </a:r>
             <a:endParaRPr lang="en-US" dirty="0"/>
           </a:p>
@@ -1580,7 +1580,7 @@
           <a:p>
             <a:r>
               <a:rPr lang="en-US" dirty="0"/>
-              <a:t/>
+              <a:t>Перш ніж розійтися — чесна перевірка обов'язкової доріжки, без оцінок. Чотири пункти. Перший: у кожного нового запиту заповнений cost_usd — не null і не прочерк. Другий: ескалація коштує дорожче за FAQ, і це видно в базі простим SELECT — якщо цифри однакові, подивіться, чи роутер справді розводить питання по різних моделях. Третій: плитка вартості в консолі показує число і бюджет, а не «—»; пам'ятайте, що на mock вона покаже нуль центів через округлення — точне значення дає GET /cost. І четвертий, концептуальний: можу пояснити, чому evals треба рахувати теж. Підказка — принцип із блока 01: рахується все, що ходить у модель; judge-виклики — такі самі токени, як бойові. Якщо всі чотири пункти — «так», ДЗ тижня 2 у вас практично готове. Питання, які лишилися, — несіть у канал потоку або на Q&amp;A.</a:t>
             </a:r>
             <a:endParaRPr lang="en-US" dirty="0"/>
           </a:p>
@@ -1668,7 +1668,7 @@
           <a:p>
             <a:r>
               <a:rPr lang="en-US" dirty="0"/>
-              <a:t/>
+              <a:t>Чотири способи зіпсувати собі облік вартості — всі перевірені чужими граблями. Дізнаватися вартість із рахунку наприкінці місяця: це не облік, це розтин — діагноз точний, але пацієнта вже не врятувати. Рахувати «в середньому по лікарні»: сума без атрибуції за моделлю і задачею не дає жодного рішення — тільки тривогу. Різниця між «$400 за місяць» і «$310 — ескалації на strong» — це різниця між панікою і планом. Не рахувати judge- і eval-виклики, бо «це ж службове»: службові токени коштують стільки ж, скільки бойові. Виняток з обліку — майбутня стаття витрат, про яку ви дізнаєтесь останнім. І оптимізувати вартість без цифри до/після: скорочення промпта наосліп — це ритуал, а не інженерія. Спершу зріз по лозі, потім зміна, потім той самий зріз.</a:t>
             </a:r>
             <a:endParaRPr lang="en-US" dirty="0"/>
           </a:p>
@@ -1756,7 +1756,7 @@
           <a:p>
             <a:r>
               <a:rPr lang="en-US" dirty="0"/>
-              <a:t/>
+              <a:t>Сьогодні другий урок тижня — отже, ДЗ тижня 2 здається. Обидва уроки тижня здаються одним PR: маршрутизація з уроку 3 плюс сьогоднішній облік вартості. Критерії приймання коротко: звичайне питання і ескалація дають різні моделі в requests; cost_usd заповнюється ненульовими значеннями; GET /cost повертає today_usd і budget_usd, і плитка в консолі жива. Повні критерії — у файлі ДЗ тижня. Опційно, без оцінювання: budget-політика — при вісімдесяти відсотках бюджету алерт у лог або деградація на дешевшу модель; і третій маршрут — окремий tier для FAQ, ескалацій і «всього іншого». Нагадаю: опційна частина не впливає на прийняття PR — але обидві теми ми сьогодні розібрали настільки, що реалізація займе вечір.</a:t>
             </a:r>
             <a:endParaRPr lang="en-US" dirty="0"/>
           </a:p>
@@ -1844,7 +1844,7 @@
           <a:p>
             <a:r>
               <a:rPr lang="en-US" dirty="0"/>
-              <a:t/>
+              <a:t>Підсумуємо. Рахується все, що ходить у модель: бойовий трафік, ретраї, перевірки якості, службові виклики — будь-який виняток з обліку стане статтею витрат, про яку ви дізнаєтесь останнім. Вартість кожного запиту тепер відома в момент відповіді: usage, формула, cost_usd у лозі — і null замість нуля там, де ми чесно не знаємо. Звернення не дорівнює виклику: вартість міряється в одиницях, якими користується бізнес, — аж до ціни вирішеного звернення, яка і є чесним способом порівнювати моделі. Атрибуція важливіша за суму: поля, записані в момент запиту, перетворюють розслідування сплеску на три GROUP BY. І головний висновок тижня: маршрутизація — найбільший важіль вартості, рази проти відсотків, а бюджет поруч із витратою — це поріг дії, на який можна вішати політики. Наступний урок відкриває тиждень 3. Ми навчилися платити менше за той самий трафік — наступний крок радикальніший: найдешевший запит той, якого не було. Кеш: коли можна не ходити в модель узагалі, як міряти ефект через cache-hit ratio і чому кеш без метрики — це віра, а не інженерія. До зустрічі.</a:t>
             </a:r>
             <a:endParaRPr lang="en-US" dirty="0"/>
           </a:p>
@@ -1932,7 +1932,7 @@
           <a:p>
             <a:r>
               <a:rPr lang="en-US" dirty="0"/>
-              <a:t/>
+              <a:t>Маршрут такий. Спершу проблема: чому рахунок наприкінці місяця — це не облік, а розтин. Потім механіка: блок usage як єдине джерело правди, і чому українською той самий зміст обходиться дорожче. Далі три шматки сьогоднішньої роботи: прайс у сервісі, формула вартості на три рядки і ендпоінт GET /cost, що оживляє плитку консолі. Між ними — дві концептуальні речі, які коштують дорожче за код: чому одне звернення користувача не дорівнює одному виклику моделі, і чому атрибуція важливіша за загальну суму. Блок 08 з'єднає цей урок із минулим: важіль роутингу стане видимим у грошах. Опційний блок 09 — budget-політика: що робити, коли витрати наближаються до порогу. Потім лабораторна на чотири обов'язкові частини плюс опційна, антипатерни тижня і домашнє завдання — сьогодні воно вже зі здачею, бо тиждень 2 закривається.</a:t>
             </a:r>
             <a:endParaRPr lang="en-US" dirty="0"/>
           </a:p>
@@ -2020,7 +2020,7 @@
           <a:p>
             <a:r>
               <a:rPr lang="en-US" dirty="0"/>
-              <a:t/>
+              <a:t>Домовимось про шість слів. Usage — блок у відповіді провайдера з кількістю токенів: prompt_tokens це вхід, completion_tokens це вихід. Прайс — таблиця цін за тисячу токенів, окремо вхідних і вихідних; у нас вона живе в коді сервісу поруч із роутером. cost_usd — поле лога, куди ми запишемо пораховану вартість запиту; з уроку 1 воно стояло порожнім. Атрибуція — розклад витрат за розрізами: за моделлю, за днем, за версією промпта; саме вона перетворює тривогу на дію. Звернення — це питання користувача, а виклик — це похід у модель; одне звернення легко дає чотири виклики, і плутати їх дорого. І бюджет — цифра, з якою порівнюється сьогоднішня витрата: без неї сума нічого не означає. Далі кожне слово побачимо в коді.</a:t>
             </a:r>
             <a:endParaRPr lang="en-US" dirty="0"/>
           </a:p>
@@ -2108,7 +2108,7 @@
           <a:p>
             <a:r>
               <a:rPr lang="en-US" dirty="0"/>
-              <a:t/>
+              <a:t>Вартість LLM-фічі — не константа. Вона залежить від моделі, довжини контексту, поведінки користувачів і навіть від того, як ви склеюєте промпт. Поки обліку немає, сценарій завжди однаковий: фіча злітає, всі радіють, наприкінці місяця приходить рахунок удесятеро більший за очікуваний — і починається археологія. Хто витратив? На чому? Коли почалося? Лог мовчить, бо ніхто не писав туди грошей. Є і підступніший бік: оцінювання якості теж коштує. Перевірки на кшталт LLM-as-judge — це такі самі токени, як бойові запити. З практики: я бачив, як пайплайн оцінки з'їдав відчутну частку бюджету просто тому, що його ніхто не рахував окремо — у звіті були лише «бойові» виклики, а judge-виклики летіли повз облік. Звіт сходився, гроші — ні. З уроку 1 це властивість номер два LLM-систем: оплата за токен означає, що вартість визначається поведінкою, а не кількістю запитів. Тому й керувати нею треба на рівні запиту — там, де поведінка видима. Звідси принцип: рахується все, що ходить у модель — бойовий трафік, ретраї, перевірки якості, службові виклики. Будь-який виняток з обліку — це майбутня стаття витрат, про яку ви дізнаєтесь останнім.</a:t>
             </a:r>
             <a:endParaRPr lang="en-US" dirty="0"/>
           </a:p>
@@ -2196,7 +2196,7 @@
           <a:p>
             <a:r>
               <a:rPr lang="en-US" dirty="0"/>
-              <a:t/>
+              <a:t>Добра новина: все необхідне для обліку вже приходить із кожною відповіддю. Блок usage — стандартна частина відповіді моделі: prompt_tokens і completion_tokens. Наш сервіс парсить ці два числа з першого дня — подивіться в /chat, вони вже їдуть у лог. Вартість — проста формула поверх них: токени, помножені на ціну конкретної моделі, окремо для вхідних і вихідних, бо провайдери тарифікують їх по-різному — вихідні зазвичай у кілька разів дорожчі. Mock повертає реалістичний usage — оцінює токени за довжиною тексту, приблизно чотири символи на токен, — тому вся механіка сьогоднішнього уроку тренується без ключа і без витрат. З реальним провайдером зміняться лише цифри у прайсі: формула, лог і консоль не дізнаються про різницю. Окрема згадка про prompt_tokens: у реальних системах саме вони зазвичай домінують у рахунку, і це неочевидно, поки не подивишся в usage. Системний промпт їде в модель із кожним запитом. А в багатоходовому діалозі з кожним ходом їде і вся попередня історія: десятий хід може коштувати вдесятеро дорожче за перший при тій самій довжині відповіді. Наш SupportGW поки одноходовий, але коли додаватимете історію діалогу — пам'ятайте: розмір вікна контексту — це стаття витрат, якою треба керувати. І чому облік саме в момент запиту, а не з рахунку: рахунок провайдера — агрегат, сума за місяць по ключу. З нього неможливо відповісти на жодне операційне питання. Облік на рівні запиту дає ті самі гроші, але з роздільною здатністю, на якій можливі рішення.</a:t>
             </a:r>
             <a:endParaRPr lang="en-US" dirty="0"/>
           </a:p>
@@ -2284,7 +2284,7 @@
           <a:p>
             <a:r>
               <a:rPr lang="en-US" dirty="0"/>
-              <a:t/>
+              <a:t>Одиниця обліку — токен, і кількість токенів у тому самому змісті залежить від мови. Англійський текст ділиться приблизно по чотири символи на токен; український — гірше, бо кирилиця скромніше представлена у словниках токенізаторів, і слово часто розпадається на кілька частин. Порядок різниці варто виміряти самому на власних текстах — найпростіше прогнати десяток типових запитів і подивитися prompt_tokens у лозі. Але напрям стабільний: українською той самий зміст обходиться дорожче. З цього ростуть три рішення, які ухвалюють один раз і живуть з ними роками. Перше: мова системного промпта — він їде в кожному запиті, тож його довжина множиться на весь трафік. Друге: скільки історії діалогу тягнути — контекст оплачується повторно на кожному кроці, і українською вікно закінчується швидше. Третє: де тримати довгі інструкції та приклади — якщо вони стабільні, їхнє місце на початку промпта, щоб їх підхопив кеш префікса. І типова помилка: економити на промпті замість економити на моделі й повторах. «Скоротимо системний промпт на 30%» дає економію в межах вхідних токенів — найдешевшої з трьох ставок. Перевести просте питання з сильної моделі на дешеву — це минулий урок — або взагалі не питати вдруге те, що вже спитали — це урок 5 — дає різницю в разах, а не у відсотках. Оптимізуйте в порядку зменшення важеля, а не в порядку простоти.</a:t>
             </a:r>
             <a:endParaRPr lang="en-US" dirty="0"/>
           </a:p>
@@ -2372,7 +2372,7 @@
           <a:p>
             <a:r>
               <a:rPr lang="en-US" dirty="0"/>
-              <a:t/>
+              <a:t>Перший шматок сьогоднішньої роботи — табличка цін за тисячу токенів: словник із двох пар чисел, для mock-mini і mock-strong, окремо вхідні й вихідні. Числа навчальні, але пропорції списані з реальних прайсів: сильна модель дорожча за дешеву приблизно в шістнадцять разів, вихідні токени дорожчі за вхідні в чотири. Саме ці пропорції, а не абсолютні цифри, визначають операційні рішення — і саме тому routing з минулого уроку є головним важелем економії. Чому словник у коді, а не таблиця в базі чи конфіг адаптера? Для двох моделей — бо це найпростіше місце, яке видно в діфі. Принципово інше: прайс лежить поруч із точкою рішення — там же, де Route(). Ціна моделі — вхідний параметр маршрутизації, а не бухгалтерська довідка: змінюється прайс — переглядається політика. І суміжне питання, яке варто закрити явно: чому вартість рахує сервіс, а не адаптер, який теж бачить usage? З тієї ж причини, що й routing: вартість — це частина вашого лог-рядка, і рахувати її треба там, де відомий увесь контекст запиту — версія промпта, майбутні тенант і фіча. Адаптер знає ціну виклику, але не знає, чий це виклик; облік у чужому шарі означає вічний join двох систем із двома правдами. Джерело правди про гроші має жити поруч із рештою правди — у вашому лозі.</a:t>
             </a:r>
             <a:endParaRPr lang="en-US" dirty="0"/>
           </a:p>
@@ -2460,7 +2460,7 @@
           <a:p>
             <a:r>
               <a:rPr lang="en-US" dirty="0"/>
-              <a:t/>
+              <a:t>Тримайте прайс живим: застарілі ціни — це не разова помилка, а систематичне викривлення всіх звітів одразу. З практики платформи, де я веду облік вартості для голосових і чатових агентів: у каталозі моделей ми ловили застарілі ціни, які вже розійшлися з тарифами постачальника, — і виправляли їх окремими комітами, як баги. А ще тарифікація ускладнюється швидше, ніж здається: у реальних прайсів окрема ціна на кешовані токени, а в cost-записі довелося зробити обов'язковим поле регіону — та сама модель у різних регіонах коштує по-різному. Словник із двох пар чисел — правильний старт, але закладайте в голову: прайс — це живі дані з власником і датою, а не константа. Про кешовані токени варто сказати два речення, бо це вже мейнстрім тарифікації. Сучасні провайдери вміють кешувати префікс промпта на своєму боці: незмінна частина — системний промпт, схеми інструментів — на повторних викликах тарифікується в рази дешевше, ніж «свіжі» вхідні токени. Для систем із довгим системним промптом це помітна стаття економії, і в чесному прайсі тоді вже не дві ціни на модель, а три: вхідні, кешовані вхідні, вихідні. Не плутайте з кешем відповідей, який ми збудуємо наступного тижня: той прибирає виклик моделі цілком, цей — здешевлює виклик зсередини; вони не конкурують, а складаються. І лайфхак: раз на місяць звіряйте суму зі свого лога з рахунком провайдера. Розбіжність понад кілька відсотків — це діра в обліку: неврахований сервіс, службові виклики повз лог або застарілий прайс. Дешева звичка, яка ловить дорогі сюрпризи.</a:t>
             </a:r>
             <a:endParaRPr lang="en-US" dirty="0"/>
           </a:p>
@@ -3693,7 +3693,7 @@
         </p:nvSpPr>
         <p:spPr>
           <a:xfrm>
-            <a:off x="1280160" y="1024128"/>
+            <a:off x="1280160" y="1193140"/>
             <a:ext cx="777240" cy="256032"/>
           </a:xfrm>
           <a:prstGeom prst="roundRect">
@@ -3715,7 +3715,7 @@
         </p:nvSpPr>
         <p:spPr>
           <a:xfrm>
-            <a:off x="1280160" y="1024128"/>
+            <a:off x="1280160" y="1193140"/>
             <a:ext cx="777240" cy="256032"/>
           </a:xfrm>
           <a:prstGeom prst="rect">
@@ -3772,7 +3772,7 @@
       </p:pic>
       <p:sp>
         <p:nvSpPr>
-          <p:cNvPr id="7" name="Shape 4"/>
+          <p:cNvPr id="8" name="Shape 4"/>
           <p:cNvSpPr/>
           <p:nvPr/>
         </p:nvSpPr>
@@ -3799,7 +3799,7 @@
       </p:sp>
       <p:sp>
         <p:nvSpPr>
-          <p:cNvPr id="8" name="Text 5"/>
+          <p:cNvPr id="9" name="Text 5"/>
           <p:cNvSpPr/>
           <p:nvPr/>
         </p:nvSpPr>
@@ -3921,7 +3921,7 @@
       </p:sp>
       <p:sp>
         <p:nvSpPr>
-          <p:cNvPr id="9" name="Shape 6"/>
+          <p:cNvPr id="10" name="Shape 6"/>
           <p:cNvSpPr/>
           <p:nvPr/>
         </p:nvSpPr>
@@ -3943,7 +3943,7 @@
       </p:sp>
       <p:sp>
         <p:nvSpPr>
-          <p:cNvPr id="10" name="Text 7"/>
+          <p:cNvPr id="11" name="Text 7"/>
           <p:cNvSpPr/>
           <p:nvPr/>
         </p:nvSpPr>
@@ -3982,7 +3982,7 @@
       </p:sp>
       <p:sp>
         <p:nvSpPr>
-          <p:cNvPr id="11" name="Text 8"/>
+          <p:cNvPr id="12" name="Text 8"/>
           <p:cNvSpPr/>
           <p:nvPr/>
         </p:nvSpPr>
@@ -4024,7 +4024,7 @@
       </p:sp>
       <p:sp>
         <p:nvSpPr>
-          <p:cNvPr id="12" name="Shape 9"/>
+          <p:cNvPr id="13" name="Shape 9"/>
           <p:cNvSpPr/>
           <p:nvPr/>
         </p:nvSpPr>
@@ -4046,7 +4046,7 @@
       </p:sp>
       <p:sp>
         <p:nvSpPr>
-          <p:cNvPr id="13" name="Text 10"/>
+          <p:cNvPr id="14" name="Text 10"/>
           <p:cNvSpPr/>
           <p:nvPr/>
         </p:nvSpPr>
@@ -4085,7 +4085,7 @@
       </p:sp>
       <p:sp>
         <p:nvSpPr>
-          <p:cNvPr id="14" name="Text 11"/>
+          <p:cNvPr id="15" name="Text 11"/>
           <p:cNvSpPr/>
           <p:nvPr/>
         </p:nvSpPr>
@@ -4291,7 +4291,7 @@
         </p:nvSpPr>
         <p:spPr>
           <a:xfrm>
-            <a:off x="1280160" y="1024128"/>
+            <a:off x="1280160" y="1193140"/>
             <a:ext cx="777240" cy="256032"/>
           </a:xfrm>
           <a:prstGeom prst="roundRect">
@@ -4313,7 +4313,7 @@
         </p:nvSpPr>
         <p:spPr>
           <a:xfrm>
-            <a:off x="1280160" y="1024128"/>
+            <a:off x="1280160" y="1193140"/>
             <a:ext cx="777240" cy="256032"/>
           </a:xfrm>
           <a:prstGeom prst="rect">
@@ -4370,7 +4370,7 @@
       </p:pic>
       <p:sp>
         <p:nvSpPr>
-          <p:cNvPr id="7" name="Shape 4"/>
+          <p:cNvPr id="8" name="Shape 4"/>
           <p:cNvSpPr/>
           <p:nvPr/>
         </p:nvSpPr>
@@ -4397,7 +4397,7 @@
       </p:sp>
       <p:sp>
         <p:nvSpPr>
-          <p:cNvPr id="8" name="Text 5"/>
+          <p:cNvPr id="9" name="Text 5"/>
           <p:cNvSpPr/>
           <p:nvPr/>
         </p:nvSpPr>
@@ -4436,7 +4436,7 @@
       </p:sp>
       <p:sp>
         <p:nvSpPr>
-          <p:cNvPr id="9" name="Shape 6"/>
+          <p:cNvPr id="10" name="Shape 6"/>
           <p:cNvSpPr/>
           <p:nvPr/>
         </p:nvSpPr>
@@ -4459,7 +4459,7 @@
       </p:sp>
       <p:sp>
         <p:nvSpPr>
-          <p:cNvPr id="10" name="Shape 7"/>
+          <p:cNvPr id="11" name="Shape 7"/>
           <p:cNvSpPr/>
           <p:nvPr/>
         </p:nvSpPr>
@@ -4479,7 +4479,7 @@
       </p:sp>
       <p:sp>
         <p:nvSpPr>
-          <p:cNvPr id="11" name="Shape 8"/>
+          <p:cNvPr id="12" name="Shape 8"/>
           <p:cNvSpPr/>
           <p:nvPr/>
         </p:nvSpPr>
@@ -4501,7 +4501,7 @@
       </p:sp>
       <p:sp>
         <p:nvSpPr>
-          <p:cNvPr id="12" name="Text 9"/>
+          <p:cNvPr id="13" name="Text 9"/>
           <p:cNvSpPr/>
           <p:nvPr/>
         </p:nvSpPr>
@@ -4540,7 +4540,7 @@
       </p:sp>
       <p:sp>
         <p:nvSpPr>
-          <p:cNvPr id="13" name="Shape 10"/>
+          <p:cNvPr id="14" name="Shape 10"/>
           <p:cNvSpPr/>
           <p:nvPr/>
         </p:nvSpPr>
@@ -4563,7 +4563,7 @@
       </p:sp>
       <p:sp>
         <p:nvSpPr>
-          <p:cNvPr id="14" name="Shape 11"/>
+          <p:cNvPr id="15" name="Shape 11"/>
           <p:cNvSpPr/>
           <p:nvPr/>
         </p:nvSpPr>
@@ -4583,7 +4583,7 @@
       </p:sp>
       <p:sp>
         <p:nvSpPr>
-          <p:cNvPr id="15" name="Shape 12"/>
+          <p:cNvPr id="16" name="Shape 12"/>
           <p:cNvSpPr/>
           <p:nvPr/>
         </p:nvSpPr>
@@ -4610,7 +4610,7 @@
       </p:sp>
       <p:sp>
         <p:nvSpPr>
-          <p:cNvPr id="16" name="Text 13"/>
+          <p:cNvPr id="17" name="Text 13"/>
           <p:cNvSpPr/>
           <p:nvPr/>
         </p:nvSpPr>
@@ -4649,7 +4649,7 @@
       </p:sp>
       <p:sp>
         <p:nvSpPr>
-          <p:cNvPr id="17" name="Shape 14"/>
+          <p:cNvPr id="18" name="Shape 14"/>
           <p:cNvSpPr/>
           <p:nvPr/>
         </p:nvSpPr>
@@ -4672,7 +4672,7 @@
       </p:sp>
       <p:sp>
         <p:nvSpPr>
-          <p:cNvPr id="18" name="Shape 15"/>
+          <p:cNvPr id="19" name="Shape 15"/>
           <p:cNvSpPr/>
           <p:nvPr/>
         </p:nvSpPr>
@@ -4692,7 +4692,7 @@
       </p:sp>
       <p:sp>
         <p:nvSpPr>
-          <p:cNvPr id="19" name="Shape 16"/>
+          <p:cNvPr id="20" name="Shape 16"/>
           <p:cNvSpPr/>
           <p:nvPr/>
         </p:nvSpPr>
@@ -4719,7 +4719,7 @@
       </p:sp>
       <p:sp>
         <p:nvSpPr>
-          <p:cNvPr id="20" name="Text 17"/>
+          <p:cNvPr id="21" name="Text 17"/>
           <p:cNvSpPr/>
           <p:nvPr/>
         </p:nvSpPr>
@@ -4758,7 +4758,7 @@
       </p:sp>
       <p:sp>
         <p:nvSpPr>
-          <p:cNvPr id="21" name="Shape 18"/>
+          <p:cNvPr id="22" name="Shape 18"/>
           <p:cNvSpPr/>
           <p:nvPr/>
         </p:nvSpPr>
@@ -4780,7 +4780,7 @@
       </p:sp>
       <p:sp>
         <p:nvSpPr>
-          <p:cNvPr id="22" name="Text 19"/>
+          <p:cNvPr id="23" name="Text 19"/>
           <p:cNvSpPr/>
           <p:nvPr/>
         </p:nvSpPr>
@@ -4819,7 +4819,7 @@
       </p:sp>
       <p:sp>
         <p:nvSpPr>
-          <p:cNvPr id="23" name="Text 20"/>
+          <p:cNvPr id="24" name="Text 20"/>
           <p:cNvSpPr/>
           <p:nvPr/>
         </p:nvSpPr>
@@ -4858,7 +4858,7 @@
       </p:sp>
       <p:sp>
         <p:nvSpPr>
-          <p:cNvPr id="24" name="Shape 21"/>
+          <p:cNvPr id="25" name="Shape 21"/>
           <p:cNvSpPr/>
           <p:nvPr/>
         </p:nvSpPr>
@@ -4880,7 +4880,7 @@
       </p:sp>
       <p:sp>
         <p:nvSpPr>
-          <p:cNvPr id="25" name="Text 22"/>
+          <p:cNvPr id="26" name="Text 22"/>
           <p:cNvSpPr/>
           <p:nvPr/>
         </p:nvSpPr>
@@ -4914,7 +4914,7 @@
                 <a:ea typeface="Montserrat" pitchFamily="34" charset="-122"/>
                 <a:cs typeface="Montserrat" pitchFamily="34" charset="-120"/>
               </a:rPr>
-              <a:t>AVG по рядках рахує вартість виклику, а не звернення — помилка в рази, і завжди в бік «у нас усе дешево».</a:t>
+              <a:t>AVG по рядках рахує виклик, а не звернення — помилка завжди в бік «дешево».</a:t>
             </a:r>
             <a:endParaRPr lang="en-US" sz="1300" dirty="0"/>
           </a:p>
@@ -4922,7 +4922,7 @@
       </p:sp>
       <p:sp>
         <p:nvSpPr>
-          <p:cNvPr id="26" name="Shape 23"/>
+          <p:cNvPr id="27" name="Shape 23"/>
           <p:cNvSpPr/>
           <p:nvPr/>
         </p:nvSpPr>
@@ -4944,7 +4944,7 @@
       </p:sp>
       <p:sp>
         <p:nvSpPr>
-          <p:cNvPr id="27" name="Text 24"/>
+          <p:cNvPr id="28" name="Text 24"/>
           <p:cNvSpPr/>
           <p:nvPr/>
         </p:nvSpPr>
@@ -4983,7 +4983,7 @@
       </p:sp>
       <p:sp>
         <p:nvSpPr>
-          <p:cNvPr id="28" name="Text 25"/>
+          <p:cNvPr id="29" name="Text 25"/>
           <p:cNvSpPr/>
           <p:nvPr/>
         </p:nvSpPr>
@@ -5017,7 +5017,7 @@
                 <a:ea typeface="Montserrat" pitchFamily="34" charset="-122"/>
                 <a:cs typeface="Montserrat" pitchFamily="34" charset="-120"/>
               </a:rPr>
-              <a:t>Групуйте за ідентифікатором звернення, а не за рядком лога — інакше будь-яка цифра вартості систематично занижена.</a:t>
+              <a:t>Групуйте за зверненням, не за рядком лога — інакше цифра занижена.</a:t>
             </a:r>
             <a:endParaRPr lang="en-US" sz="1300" dirty="0"/>
           </a:p>
@@ -5189,7 +5189,7 @@
         </p:nvSpPr>
         <p:spPr>
           <a:xfrm>
-            <a:off x="1280160" y="1024128"/>
+            <a:off x="1280160" y="1193140"/>
             <a:ext cx="777240" cy="256032"/>
           </a:xfrm>
           <a:prstGeom prst="roundRect">
@@ -5211,7 +5211,7 @@
         </p:nvSpPr>
         <p:spPr>
           <a:xfrm>
-            <a:off x="1280160" y="1024128"/>
+            <a:off x="1280160" y="1193140"/>
             <a:ext cx="777240" cy="256032"/>
           </a:xfrm>
           <a:prstGeom prst="rect">
@@ -5268,7 +5268,7 @@
       </p:pic>
       <p:sp>
         <p:nvSpPr>
-          <p:cNvPr id="7" name="Shape 4"/>
+          <p:cNvPr id="8" name="Shape 4"/>
           <p:cNvSpPr/>
           <p:nvPr/>
         </p:nvSpPr>
@@ -5290,7 +5290,7 @@
       </p:sp>
       <p:sp>
         <p:nvSpPr>
-          <p:cNvPr id="8" name="Text 5"/>
+          <p:cNvPr id="9" name="Text 5"/>
           <p:cNvSpPr/>
           <p:nvPr/>
         </p:nvSpPr>
@@ -5329,7 +5329,7 @@
       </p:sp>
       <p:sp>
         <p:nvSpPr>
-          <p:cNvPr id="9" name="Text 6"/>
+          <p:cNvPr id="10" name="Text 6"/>
           <p:cNvSpPr/>
           <p:nvPr/>
         </p:nvSpPr>
@@ -5371,7 +5371,7 @@
       </p:sp>
       <p:sp>
         <p:nvSpPr>
-          <p:cNvPr id="10" name="Shape 7"/>
+          <p:cNvPr id="11" name="Shape 7"/>
           <p:cNvSpPr/>
           <p:nvPr/>
         </p:nvSpPr>
@@ -5398,7 +5398,7 @@
       </p:sp>
       <p:sp>
         <p:nvSpPr>
-          <p:cNvPr id="11" name="Text 8"/>
+          <p:cNvPr id="12" name="Text 8"/>
           <p:cNvSpPr/>
           <p:nvPr/>
         </p:nvSpPr>
@@ -5437,7 +5437,7 @@
       </p:sp>
       <p:sp>
         <p:nvSpPr>
-          <p:cNvPr id="12" name="Text 9"/>
+          <p:cNvPr id="13" name="Text 9"/>
           <p:cNvSpPr/>
           <p:nvPr/>
         </p:nvSpPr>
@@ -5479,7 +5479,7 @@
       </p:sp>
       <p:sp>
         <p:nvSpPr>
-          <p:cNvPr id="13" name="Shape 10"/>
+          <p:cNvPr id="14" name="Shape 10"/>
           <p:cNvSpPr/>
           <p:nvPr/>
         </p:nvSpPr>
@@ -5501,7 +5501,7 @@
       </p:sp>
       <p:sp>
         <p:nvSpPr>
-          <p:cNvPr id="14" name="Text 11"/>
+          <p:cNvPr id="15" name="Text 11"/>
           <p:cNvSpPr/>
           <p:nvPr/>
         </p:nvSpPr>
@@ -5540,7 +5540,7 @@
       </p:sp>
       <p:sp>
         <p:nvSpPr>
-          <p:cNvPr id="15" name="Text 12"/>
+          <p:cNvPr id="16" name="Text 12"/>
           <p:cNvSpPr/>
           <p:nvPr/>
         </p:nvSpPr>
@@ -5825,7 +5825,7 @@
       </p:pic>
       <p:sp>
         <p:nvSpPr>
-          <p:cNvPr id="7" name="Shape 4"/>
+          <p:cNvPr id="8" name="Shape 4"/>
           <p:cNvSpPr/>
           <p:nvPr/>
         </p:nvSpPr>
@@ -5847,7 +5847,7 @@
       </p:sp>
       <p:sp>
         <p:nvSpPr>
-          <p:cNvPr id="8" name="Text 5"/>
+          <p:cNvPr id="9" name="Text 5"/>
           <p:cNvSpPr/>
           <p:nvPr/>
         </p:nvSpPr>
@@ -5886,7 +5886,7 @@
       </p:sp>
       <p:sp>
         <p:nvSpPr>
-          <p:cNvPr id="9" name="Text 6"/>
+          <p:cNvPr id="10" name="Text 6"/>
           <p:cNvSpPr/>
           <p:nvPr/>
         </p:nvSpPr>
@@ -5925,7 +5925,7 @@
       </p:sp>
       <p:sp>
         <p:nvSpPr>
-          <p:cNvPr id="10" name="Shape 7"/>
+          <p:cNvPr id="11" name="Shape 7"/>
           <p:cNvSpPr/>
           <p:nvPr/>
         </p:nvSpPr>
@@ -5947,7 +5947,7 @@
       </p:sp>
       <p:sp>
         <p:nvSpPr>
-          <p:cNvPr id="11" name="Text 8"/>
+          <p:cNvPr id="12" name="Text 8"/>
           <p:cNvSpPr/>
           <p:nvPr/>
         </p:nvSpPr>
@@ -5986,7 +5986,7 @@
       </p:sp>
       <p:sp>
         <p:nvSpPr>
-          <p:cNvPr id="12" name="Text 9"/>
+          <p:cNvPr id="13" name="Text 9"/>
           <p:cNvSpPr/>
           <p:nvPr/>
         </p:nvSpPr>
@@ -6025,7 +6025,7 @@
       </p:sp>
       <p:sp>
         <p:nvSpPr>
-          <p:cNvPr id="13" name="Shape 10"/>
+          <p:cNvPr id="14" name="Shape 10"/>
           <p:cNvSpPr/>
           <p:nvPr/>
         </p:nvSpPr>
@@ -6052,7 +6052,7 @@
       </p:sp>
       <p:sp>
         <p:nvSpPr>
-          <p:cNvPr id="14" name="Text 11"/>
+          <p:cNvPr id="15" name="Text 11"/>
           <p:cNvSpPr/>
           <p:nvPr/>
         </p:nvSpPr>
@@ -6174,7 +6174,7 @@
       </p:sp>
       <p:sp>
         <p:nvSpPr>
-          <p:cNvPr id="15" name="Shape 12"/>
+          <p:cNvPr id="16" name="Shape 12"/>
           <p:cNvSpPr/>
           <p:nvPr/>
         </p:nvSpPr>
@@ -6196,7 +6196,7 @@
       </p:sp>
       <p:sp>
         <p:nvSpPr>
-          <p:cNvPr id="16" name="Text 13"/>
+          <p:cNvPr id="17" name="Text 13"/>
           <p:cNvSpPr/>
           <p:nvPr/>
         </p:nvSpPr>
@@ -6230,7 +6230,7 @@
                 <a:ea typeface="Montserrat" pitchFamily="34" charset="-122"/>
                 <a:cs typeface="Montserrat" pitchFamily="34" charset="-120"/>
               </a:rPr>
-              <a:t>Записали в момент запиту — будь-який зріз коштує один GROUP BY. Не записали — не реконструюєте вже ніколи.</a:t>
+              <a:t>Записали в момент запиту — зріз коштує один GROUP BY. Ні — вже ніколи.</a:t>
             </a:r>
             <a:endParaRPr lang="en-US" sz="1300" dirty="0"/>
           </a:p>
@@ -6238,7 +6238,7 @@
       </p:sp>
       <p:sp>
         <p:nvSpPr>
-          <p:cNvPr id="17" name="Shape 14"/>
+          <p:cNvPr id="18" name="Shape 14"/>
           <p:cNvSpPr/>
           <p:nvPr/>
         </p:nvSpPr>
@@ -6260,7 +6260,7 @@
       </p:sp>
       <p:sp>
         <p:nvSpPr>
-          <p:cNvPr id="18" name="Text 15"/>
+          <p:cNvPr id="19" name="Text 15"/>
           <p:cNvSpPr/>
           <p:nvPr/>
         </p:nvSpPr>
@@ -6299,7 +6299,7 @@
       </p:sp>
       <p:sp>
         <p:nvSpPr>
-          <p:cNvPr id="19" name="Text 16"/>
+          <p:cNvPr id="20" name="Text 16"/>
           <p:cNvSpPr/>
           <p:nvPr/>
         </p:nvSpPr>
@@ -6333,7 +6333,7 @@
                 <a:ea typeface="Montserrat" pitchFamily="34" charset="-122"/>
                 <a:cs typeface="Montserrat" pitchFamily="34" charset="-120"/>
               </a:rPr>
-              <a:t>Оптимізувати вартість зміною промпта наосліп: спершу зріз по лозі, потім зміна, потім той самий зріз.</a:t>
+              <a:t>Міняти промпт наосліп: спершу зріз по лозі, потім зміна, потім той самий зріз.</a:t>
             </a:r>
             <a:endParaRPr lang="en-US" sz="1300" dirty="0"/>
           </a:p>
@@ -6505,7 +6505,7 @@
         </p:nvSpPr>
         <p:spPr>
           <a:xfrm>
-            <a:off x="1280160" y="1024128"/>
+            <a:off x="1280160" y="1193140"/>
             <a:ext cx="777240" cy="256032"/>
           </a:xfrm>
           <a:prstGeom prst="roundRect">
@@ -6527,7 +6527,7 @@
         </p:nvSpPr>
         <p:spPr>
           <a:xfrm>
-            <a:off x="1280160" y="1024128"/>
+            <a:off x="1280160" y="1193140"/>
             <a:ext cx="777240" cy="256032"/>
           </a:xfrm>
           <a:prstGeom prst="rect">
@@ -6584,7 +6584,7 @@
       </p:pic>
       <p:sp>
         <p:nvSpPr>
-          <p:cNvPr id="7" name="Shape 4"/>
+          <p:cNvPr id="8" name="Shape 4"/>
           <p:cNvSpPr/>
           <p:nvPr/>
         </p:nvSpPr>
@@ -6611,7 +6611,7 @@
       </p:sp>
       <p:sp>
         <p:nvSpPr>
-          <p:cNvPr id="8" name="Text 5"/>
+          <p:cNvPr id="9" name="Text 5"/>
           <p:cNvSpPr/>
           <p:nvPr/>
         </p:nvSpPr>
@@ -6733,7 +6733,7 @@
       </p:sp>
       <p:sp>
         <p:nvSpPr>
-          <p:cNvPr id="9" name="Shape 6"/>
+          <p:cNvPr id="10" name="Shape 6"/>
           <p:cNvSpPr/>
           <p:nvPr/>
         </p:nvSpPr>
@@ -6760,7 +6760,7 @@
       </p:sp>
       <p:sp>
         <p:nvSpPr>
-          <p:cNvPr id="10" name="Text 7"/>
+          <p:cNvPr id="11" name="Text 7"/>
           <p:cNvSpPr/>
           <p:nvPr/>
         </p:nvSpPr>
@@ -6799,7 +6799,7 @@
       </p:sp>
       <p:sp>
         <p:nvSpPr>
-          <p:cNvPr id="11" name="Text 8"/>
+          <p:cNvPr id="12" name="Text 8"/>
           <p:cNvSpPr/>
           <p:nvPr/>
         </p:nvSpPr>
@@ -6838,7 +6838,7 @@
       </p:sp>
       <p:sp>
         <p:nvSpPr>
-          <p:cNvPr id="12" name="Text 9"/>
+          <p:cNvPr id="13" name="Text 9"/>
           <p:cNvSpPr/>
           <p:nvPr/>
         </p:nvSpPr>
@@ -6877,7 +6877,7 @@
       </p:sp>
       <p:sp>
         <p:nvSpPr>
-          <p:cNvPr id="13" name="Shape 10"/>
+          <p:cNvPr id="14" name="Shape 10"/>
           <p:cNvSpPr/>
           <p:nvPr/>
         </p:nvSpPr>
@@ -6899,7 +6899,7 @@
       </p:sp>
       <p:sp>
         <p:nvSpPr>
-          <p:cNvPr id="14" name="Text 11"/>
+          <p:cNvPr id="15" name="Text 11"/>
           <p:cNvSpPr/>
           <p:nvPr/>
         </p:nvSpPr>
@@ -6938,7 +6938,7 @@
       </p:sp>
       <p:sp>
         <p:nvSpPr>
-          <p:cNvPr id="15" name="Text 12"/>
+          <p:cNvPr id="16" name="Text 12"/>
           <p:cNvSpPr/>
           <p:nvPr/>
         </p:nvSpPr>
@@ -6980,7 +6980,7 @@
       </p:sp>
       <p:sp>
         <p:nvSpPr>
-          <p:cNvPr id="16" name="Shape 13"/>
+          <p:cNvPr id="17" name="Shape 13"/>
           <p:cNvSpPr/>
           <p:nvPr/>
         </p:nvSpPr>
@@ -7002,7 +7002,7 @@
       </p:sp>
       <p:sp>
         <p:nvSpPr>
-          <p:cNvPr id="17" name="Text 14"/>
+          <p:cNvPr id="18" name="Text 14"/>
           <p:cNvSpPr/>
           <p:nvPr/>
         </p:nvSpPr>
@@ -7287,7 +7287,7 @@
       </p:pic>
       <p:sp>
         <p:nvSpPr>
-          <p:cNvPr id="7" name="Shape 4"/>
+          <p:cNvPr id="8" name="Shape 4"/>
           <p:cNvSpPr/>
           <p:nvPr/>
         </p:nvSpPr>
@@ -7314,7 +7314,7 @@
       </p:sp>
       <p:sp>
         <p:nvSpPr>
-          <p:cNvPr id="8" name="Text 5"/>
+          <p:cNvPr id="9" name="Text 5"/>
           <p:cNvSpPr/>
           <p:nvPr/>
         </p:nvSpPr>
@@ -7356,7 +7356,7 @@
       </p:sp>
       <p:sp>
         <p:nvSpPr>
-          <p:cNvPr id="9" name="Text 6"/>
+          <p:cNvPr id="10" name="Text 6"/>
           <p:cNvSpPr/>
           <p:nvPr/>
         </p:nvSpPr>
@@ -7395,7 +7395,7 @@
       </p:sp>
       <p:sp>
         <p:nvSpPr>
-          <p:cNvPr id="10" name="Shape 7"/>
+          <p:cNvPr id="11" name="Shape 7"/>
           <p:cNvSpPr/>
           <p:nvPr/>
         </p:nvSpPr>
@@ -7417,7 +7417,7 @@
       </p:sp>
       <p:sp>
         <p:nvSpPr>
-          <p:cNvPr id="11" name="Text 8"/>
+          <p:cNvPr id="12" name="Text 8"/>
           <p:cNvSpPr/>
           <p:nvPr/>
         </p:nvSpPr>
@@ -7456,7 +7456,7 @@
       </p:sp>
       <p:sp>
         <p:nvSpPr>
-          <p:cNvPr id="12" name="Text 9"/>
+          <p:cNvPr id="13" name="Text 9"/>
           <p:cNvSpPr/>
           <p:nvPr/>
         </p:nvSpPr>
@@ -7495,7 +7495,7 @@
       </p:sp>
       <p:sp>
         <p:nvSpPr>
-          <p:cNvPr id="13" name="Shape 10"/>
+          <p:cNvPr id="14" name="Shape 10"/>
           <p:cNvSpPr/>
           <p:nvPr/>
         </p:nvSpPr>
@@ -7517,7 +7517,7 @@
       </p:sp>
       <p:sp>
         <p:nvSpPr>
-          <p:cNvPr id="14" name="Text 11"/>
+          <p:cNvPr id="15" name="Text 11"/>
           <p:cNvSpPr/>
           <p:nvPr/>
         </p:nvSpPr>
@@ -7556,7 +7556,7 @@
       </p:sp>
       <p:sp>
         <p:nvSpPr>
-          <p:cNvPr id="15" name="Shape 12"/>
+          <p:cNvPr id="16" name="Shape 12"/>
           <p:cNvSpPr/>
           <p:nvPr/>
         </p:nvSpPr>
@@ -7578,7 +7578,7 @@
       </p:sp>
       <p:sp>
         <p:nvSpPr>
-          <p:cNvPr id="16" name="Text 13"/>
+          <p:cNvPr id="17" name="Text 13"/>
           <p:cNvSpPr/>
           <p:nvPr/>
         </p:nvSpPr>
@@ -7620,7 +7620,7 @@
       </p:sp>
       <p:sp>
         <p:nvSpPr>
-          <p:cNvPr id="17" name="Shape 14"/>
+          <p:cNvPr id="18" name="Shape 14"/>
           <p:cNvSpPr/>
           <p:nvPr/>
         </p:nvSpPr>
@@ -7642,7 +7642,7 @@
       </p:sp>
       <p:sp>
         <p:nvSpPr>
-          <p:cNvPr id="18" name="Text 15"/>
+          <p:cNvPr id="19" name="Text 15"/>
           <p:cNvSpPr/>
           <p:nvPr/>
         </p:nvSpPr>
@@ -7681,7 +7681,7 @@
       </p:sp>
       <p:sp>
         <p:nvSpPr>
-          <p:cNvPr id="19" name="Text 16"/>
+          <p:cNvPr id="20" name="Text 16"/>
           <p:cNvSpPr/>
           <p:nvPr/>
         </p:nvSpPr>
@@ -7887,7 +7887,7 @@
         </p:nvSpPr>
         <p:spPr>
           <a:xfrm>
-            <a:off x="1280160" y="1024128"/>
+            <a:off x="1280160" y="1193140"/>
             <a:ext cx="777240" cy="256032"/>
           </a:xfrm>
           <a:prstGeom prst="roundRect">
@@ -7909,7 +7909,7 @@
         </p:nvSpPr>
         <p:spPr>
           <a:xfrm>
-            <a:off x="1280160" y="1024128"/>
+            <a:off x="1280160" y="1193140"/>
             <a:ext cx="777240" cy="256032"/>
           </a:xfrm>
           <a:prstGeom prst="rect">
@@ -7948,7 +7948,7 @@
         </p:nvSpPr>
         <p:spPr>
           <a:xfrm>
-            <a:off x="2167128" y="1024128"/>
+            <a:off x="2167128" y="1193140"/>
             <a:ext cx="864108" cy="256032"/>
           </a:xfrm>
           <a:prstGeom prst="roundRect">
@@ -7970,7 +7970,7 @@
         </p:nvSpPr>
         <p:spPr>
           <a:xfrm>
-            <a:off x="2167128" y="1024128"/>
+            <a:off x="2167128" y="1193140"/>
             <a:ext cx="864108" cy="256032"/>
           </a:xfrm>
           <a:prstGeom prst="rect">
@@ -8027,7 +8027,7 @@
       </p:pic>
       <p:sp>
         <p:nvSpPr>
-          <p:cNvPr id="9" name="Shape 6"/>
+          <p:cNvPr id="10" name="Shape 6"/>
           <p:cNvSpPr/>
           <p:nvPr/>
         </p:nvSpPr>
@@ -8054,7 +8054,7 @@
       </p:sp>
       <p:sp>
         <p:nvSpPr>
-          <p:cNvPr id="10" name="Text 7"/>
+          <p:cNvPr id="11" name="Text 7"/>
           <p:cNvSpPr/>
           <p:nvPr/>
         </p:nvSpPr>
@@ -8093,7 +8093,7 @@
       </p:sp>
       <p:sp>
         <p:nvSpPr>
-          <p:cNvPr id="11" name="Text 8"/>
+          <p:cNvPr id="12" name="Text 8"/>
           <p:cNvSpPr/>
           <p:nvPr/>
         </p:nvSpPr>
@@ -8132,7 +8132,7 @@
       </p:sp>
       <p:sp>
         <p:nvSpPr>
-          <p:cNvPr id="12" name="Shape 9"/>
+          <p:cNvPr id="13" name="Shape 9"/>
           <p:cNvSpPr/>
           <p:nvPr/>
         </p:nvSpPr>
@@ -8154,7 +8154,7 @@
       </p:sp>
       <p:sp>
         <p:nvSpPr>
-          <p:cNvPr id="13" name="Text 10"/>
+          <p:cNvPr id="14" name="Text 10"/>
           <p:cNvSpPr/>
           <p:nvPr/>
         </p:nvSpPr>
@@ -8193,7 +8193,7 @@
       </p:sp>
       <p:sp>
         <p:nvSpPr>
-          <p:cNvPr id="14" name="Text 11"/>
+          <p:cNvPr id="15" name="Text 11"/>
           <p:cNvSpPr/>
           <p:nvPr/>
         </p:nvSpPr>
@@ -8232,7 +8232,7 @@
       </p:sp>
       <p:sp>
         <p:nvSpPr>
-          <p:cNvPr id="15" name="Shape 12"/>
+          <p:cNvPr id="16" name="Shape 12"/>
           <p:cNvSpPr/>
           <p:nvPr/>
         </p:nvSpPr>
@@ -8254,7 +8254,7 @@
       </p:sp>
       <p:sp>
         <p:nvSpPr>
-          <p:cNvPr id="16" name="Text 13"/>
+          <p:cNvPr id="17" name="Text 13"/>
           <p:cNvSpPr/>
           <p:nvPr/>
         </p:nvSpPr>
@@ -8293,7 +8293,7 @@
       </p:sp>
       <p:sp>
         <p:nvSpPr>
-          <p:cNvPr id="17" name="Text 14"/>
+          <p:cNvPr id="18" name="Text 14"/>
           <p:cNvSpPr/>
           <p:nvPr/>
         </p:nvSpPr>
@@ -8332,7 +8332,7 @@
       </p:sp>
       <p:sp>
         <p:nvSpPr>
-          <p:cNvPr id="18" name="Shape 15"/>
+          <p:cNvPr id="19" name="Shape 15"/>
           <p:cNvSpPr/>
           <p:nvPr/>
         </p:nvSpPr>
@@ -8354,7 +8354,7 @@
       </p:sp>
       <p:sp>
         <p:nvSpPr>
-          <p:cNvPr id="19" name="Text 16"/>
+          <p:cNvPr id="20" name="Text 16"/>
           <p:cNvSpPr/>
           <p:nvPr/>
         </p:nvSpPr>
@@ -8393,7 +8393,7 @@
       </p:sp>
       <p:sp>
         <p:nvSpPr>
-          <p:cNvPr id="20" name="Text 17"/>
+          <p:cNvPr id="21" name="Text 17"/>
           <p:cNvSpPr/>
           <p:nvPr/>
         </p:nvSpPr>
@@ -8639,7 +8639,7 @@
       </p:pic>
       <p:sp>
         <p:nvSpPr>
-          <p:cNvPr id="6" name="Shape 3"/>
+          <p:cNvPr id="7" name="Shape 3"/>
           <p:cNvSpPr/>
           <p:nvPr/>
         </p:nvSpPr>
@@ -8661,7 +8661,7 @@
       </p:sp>
       <p:sp>
         <p:nvSpPr>
-          <p:cNvPr id="7" name="Shape 4"/>
+          <p:cNvPr id="8" name="Shape 4"/>
           <p:cNvSpPr/>
           <p:nvPr/>
         </p:nvSpPr>
@@ -8681,7 +8681,7 @@
       </p:sp>
       <p:sp>
         <p:nvSpPr>
-          <p:cNvPr id="8" name="Text 5"/>
+          <p:cNvPr id="9" name="Text 5"/>
           <p:cNvSpPr/>
           <p:nvPr/>
         </p:nvSpPr>
@@ -8720,7 +8720,7 @@
       </p:sp>
       <p:sp>
         <p:nvSpPr>
-          <p:cNvPr id="9" name="Text 6"/>
+          <p:cNvPr id="10" name="Text 6"/>
           <p:cNvSpPr/>
           <p:nvPr/>
         </p:nvSpPr>
@@ -8759,7 +8759,7 @@
       </p:sp>
       <p:sp>
         <p:nvSpPr>
-          <p:cNvPr id="10" name="Text 7"/>
+          <p:cNvPr id="11" name="Text 7"/>
           <p:cNvSpPr/>
           <p:nvPr/>
         </p:nvSpPr>
@@ -8801,7 +8801,7 @@
       </p:sp>
       <p:sp>
         <p:nvSpPr>
-          <p:cNvPr id="11" name="Shape 8"/>
+          <p:cNvPr id="12" name="Shape 8"/>
           <p:cNvSpPr/>
           <p:nvPr/>
         </p:nvSpPr>
@@ -8823,7 +8823,7 @@
       </p:sp>
       <p:sp>
         <p:nvSpPr>
-          <p:cNvPr id="12" name="Shape 9"/>
+          <p:cNvPr id="13" name="Shape 9"/>
           <p:cNvSpPr/>
           <p:nvPr/>
         </p:nvSpPr>
@@ -8843,7 +8843,7 @@
       </p:sp>
       <p:sp>
         <p:nvSpPr>
-          <p:cNvPr id="13" name="Text 10"/>
+          <p:cNvPr id="14" name="Text 10"/>
           <p:cNvSpPr/>
           <p:nvPr/>
         </p:nvSpPr>
@@ -8882,7 +8882,7 @@
       </p:sp>
       <p:sp>
         <p:nvSpPr>
-          <p:cNvPr id="14" name="Text 11"/>
+          <p:cNvPr id="15" name="Text 11"/>
           <p:cNvSpPr/>
           <p:nvPr/>
         </p:nvSpPr>
@@ -8921,7 +8921,7 @@
       </p:sp>
       <p:sp>
         <p:nvSpPr>
-          <p:cNvPr id="15" name="Text 12"/>
+          <p:cNvPr id="16" name="Text 12"/>
           <p:cNvSpPr/>
           <p:nvPr/>
         </p:nvSpPr>
@@ -8963,7 +8963,7 @@
       </p:sp>
       <p:sp>
         <p:nvSpPr>
-          <p:cNvPr id="16" name="Shape 13"/>
+          <p:cNvPr id="17" name="Shape 13"/>
           <p:cNvSpPr/>
           <p:nvPr/>
         </p:nvSpPr>
@@ -8985,7 +8985,7 @@
       </p:sp>
       <p:sp>
         <p:nvSpPr>
-          <p:cNvPr id="17" name="Shape 14"/>
+          <p:cNvPr id="18" name="Shape 14"/>
           <p:cNvSpPr/>
           <p:nvPr/>
         </p:nvSpPr>
@@ -9005,7 +9005,7 @@
       </p:sp>
       <p:sp>
         <p:nvSpPr>
-          <p:cNvPr id="18" name="Text 15"/>
+          <p:cNvPr id="19" name="Text 15"/>
           <p:cNvSpPr/>
           <p:nvPr/>
         </p:nvSpPr>
@@ -9044,7 +9044,7 @@
       </p:sp>
       <p:sp>
         <p:nvSpPr>
-          <p:cNvPr id="19" name="Text 16"/>
+          <p:cNvPr id="20" name="Text 16"/>
           <p:cNvSpPr/>
           <p:nvPr/>
         </p:nvSpPr>
@@ -9083,7 +9083,7 @@
       </p:sp>
       <p:sp>
         <p:nvSpPr>
-          <p:cNvPr id="20" name="Text 17"/>
+          <p:cNvPr id="21" name="Text 17"/>
           <p:cNvSpPr/>
           <p:nvPr/>
         </p:nvSpPr>
@@ -9125,7 +9125,7 @@
       </p:sp>
       <p:sp>
         <p:nvSpPr>
-          <p:cNvPr id="21" name="Shape 18"/>
+          <p:cNvPr id="22" name="Shape 18"/>
           <p:cNvSpPr/>
           <p:nvPr/>
         </p:nvSpPr>
@@ -9147,7 +9147,7 @@
       </p:sp>
       <p:sp>
         <p:nvSpPr>
-          <p:cNvPr id="22" name="Shape 19"/>
+          <p:cNvPr id="23" name="Shape 19"/>
           <p:cNvSpPr/>
           <p:nvPr/>
         </p:nvSpPr>
@@ -9167,7 +9167,7 @@
       </p:sp>
       <p:sp>
         <p:nvSpPr>
-          <p:cNvPr id="23" name="Text 20"/>
+          <p:cNvPr id="24" name="Text 20"/>
           <p:cNvSpPr/>
           <p:nvPr/>
         </p:nvSpPr>
@@ -9206,7 +9206,7 @@
       </p:sp>
       <p:sp>
         <p:nvSpPr>
-          <p:cNvPr id="24" name="Text 21"/>
+          <p:cNvPr id="25" name="Text 21"/>
           <p:cNvSpPr/>
           <p:nvPr/>
         </p:nvSpPr>
@@ -9245,7 +9245,7 @@
       </p:sp>
       <p:sp>
         <p:nvSpPr>
-          <p:cNvPr id="25" name="Text 22"/>
+          <p:cNvPr id="26" name="Text 22"/>
           <p:cNvSpPr/>
           <p:nvPr/>
         </p:nvSpPr>
@@ -9287,7 +9287,7 @@
       </p:sp>
       <p:sp>
         <p:nvSpPr>
-          <p:cNvPr id="26" name="Shape 23"/>
+          <p:cNvPr id="27" name="Shape 23"/>
           <p:cNvSpPr/>
           <p:nvPr/>
         </p:nvSpPr>
@@ -9309,7 +9309,7 @@
       </p:sp>
       <p:sp>
         <p:nvSpPr>
-          <p:cNvPr id="27" name="Text 24"/>
+          <p:cNvPr id="28" name="Text 24"/>
           <p:cNvSpPr/>
           <p:nvPr/>
         </p:nvSpPr>
@@ -9348,7 +9348,7 @@
       </p:sp>
       <p:sp>
         <p:nvSpPr>
-          <p:cNvPr id="28" name="Text 25"/>
+          <p:cNvPr id="29" name="Text 25"/>
           <p:cNvSpPr/>
           <p:nvPr/>
         </p:nvSpPr>
@@ -9594,7 +9594,7 @@
       </p:pic>
       <p:sp>
         <p:nvSpPr>
-          <p:cNvPr id="6" name="Shape 3"/>
+          <p:cNvPr id="7" name="Shape 3"/>
           <p:cNvSpPr/>
           <p:nvPr/>
         </p:nvSpPr>
@@ -9614,7 +9614,7 @@
       </p:sp>
       <p:sp>
         <p:nvSpPr>
-          <p:cNvPr id="7" name="Text 4"/>
+          <p:cNvPr id="8" name="Text 4"/>
           <p:cNvSpPr/>
           <p:nvPr/>
         </p:nvSpPr>
@@ -9653,7 +9653,7 @@
       </p:sp>
       <p:sp>
         <p:nvSpPr>
-          <p:cNvPr id="8" name="Text 5"/>
+          <p:cNvPr id="9" name="Text 5"/>
           <p:cNvSpPr/>
           <p:nvPr/>
         </p:nvSpPr>
@@ -9706,7 +9706,7 @@
       </p:sp>
       <p:sp>
         <p:nvSpPr>
-          <p:cNvPr id="9" name="Shape 6"/>
+          <p:cNvPr id="10" name="Shape 6"/>
           <p:cNvSpPr/>
           <p:nvPr/>
         </p:nvSpPr>
@@ -9726,7 +9726,7 @@
       </p:sp>
       <p:sp>
         <p:nvSpPr>
-          <p:cNvPr id="10" name="Text 7"/>
+          <p:cNvPr id="11" name="Text 7"/>
           <p:cNvSpPr/>
           <p:nvPr/>
         </p:nvSpPr>
@@ -9765,7 +9765,7 @@
       </p:sp>
       <p:sp>
         <p:nvSpPr>
-          <p:cNvPr id="11" name="Text 8"/>
+          <p:cNvPr id="12" name="Text 8"/>
           <p:cNvSpPr/>
           <p:nvPr/>
         </p:nvSpPr>
@@ -9818,7 +9818,7 @@
       </p:sp>
       <p:sp>
         <p:nvSpPr>
-          <p:cNvPr id="12" name="Shape 9"/>
+          <p:cNvPr id="13" name="Shape 9"/>
           <p:cNvSpPr/>
           <p:nvPr/>
         </p:nvSpPr>
@@ -9838,7 +9838,7 @@
       </p:sp>
       <p:sp>
         <p:nvSpPr>
-          <p:cNvPr id="13" name="Text 10"/>
+          <p:cNvPr id="14" name="Text 10"/>
           <p:cNvSpPr/>
           <p:nvPr/>
         </p:nvSpPr>
@@ -9877,7 +9877,7 @@
       </p:sp>
       <p:sp>
         <p:nvSpPr>
-          <p:cNvPr id="14" name="Text 11"/>
+          <p:cNvPr id="15" name="Text 11"/>
           <p:cNvSpPr/>
           <p:nvPr/>
         </p:nvSpPr>
@@ -9930,7 +9930,7 @@
       </p:sp>
       <p:sp>
         <p:nvSpPr>
-          <p:cNvPr id="15" name="Shape 12"/>
+          <p:cNvPr id="16" name="Shape 12"/>
           <p:cNvSpPr/>
           <p:nvPr/>
         </p:nvSpPr>
@@ -9950,7 +9950,7 @@
       </p:sp>
       <p:sp>
         <p:nvSpPr>
-          <p:cNvPr id="16" name="Text 13"/>
+          <p:cNvPr id="17" name="Text 13"/>
           <p:cNvSpPr/>
           <p:nvPr/>
         </p:nvSpPr>
@@ -9989,7 +9989,7 @@
       </p:sp>
       <p:sp>
         <p:nvSpPr>
-          <p:cNvPr id="17" name="Text 14"/>
+          <p:cNvPr id="18" name="Text 14"/>
           <p:cNvSpPr/>
           <p:nvPr/>
         </p:nvSpPr>
@@ -10042,7 +10042,7 @@
       </p:sp>
       <p:sp>
         <p:nvSpPr>
-          <p:cNvPr id="18" name="Shape 15"/>
+          <p:cNvPr id="19" name="Shape 15"/>
           <p:cNvSpPr/>
           <p:nvPr/>
         </p:nvSpPr>
@@ -10062,7 +10062,7 @@
       </p:sp>
       <p:sp>
         <p:nvSpPr>
-          <p:cNvPr id="19" name="Text 16"/>
+          <p:cNvPr id="20" name="Text 16"/>
           <p:cNvSpPr/>
           <p:nvPr/>
         </p:nvSpPr>
@@ -10101,7 +10101,7 @@
       </p:sp>
       <p:sp>
         <p:nvSpPr>
-          <p:cNvPr id="20" name="Text 17"/>
+          <p:cNvPr id="21" name="Text 17"/>
           <p:cNvSpPr/>
           <p:nvPr/>
         </p:nvSpPr>
@@ -10358,7 +10358,7 @@
       </p:pic>
       <p:sp>
         <p:nvSpPr>
-          <p:cNvPr id="6" name="Shape 3"/>
+          <p:cNvPr id="7" name="Shape 3"/>
           <p:cNvSpPr/>
           <p:nvPr/>
         </p:nvSpPr>
@@ -10380,7 +10380,7 @@
       </p:sp>
       <p:sp>
         <p:nvSpPr>
-          <p:cNvPr id="7" name="Text 4"/>
+          <p:cNvPr id="8" name="Text 4"/>
           <p:cNvSpPr/>
           <p:nvPr/>
         </p:nvSpPr>
@@ -10419,7 +10419,7 @@
       </p:sp>
       <p:sp>
         <p:nvSpPr>
-          <p:cNvPr id="8" name="Text 5"/>
+          <p:cNvPr id="9" name="Text 5"/>
           <p:cNvSpPr/>
           <p:nvPr/>
         </p:nvSpPr>
@@ -10461,7 +10461,7 @@
       </p:sp>
       <p:sp>
         <p:nvSpPr>
-          <p:cNvPr id="9" name="Shape 6"/>
+          <p:cNvPr id="10" name="Shape 6"/>
           <p:cNvSpPr/>
           <p:nvPr/>
         </p:nvSpPr>
@@ -10483,7 +10483,7 @@
       </p:sp>
       <p:sp>
         <p:nvSpPr>
-          <p:cNvPr id="10" name="Text 7"/>
+          <p:cNvPr id="11" name="Text 7"/>
           <p:cNvSpPr/>
           <p:nvPr/>
         </p:nvSpPr>
@@ -10522,7 +10522,7 @@
       </p:sp>
       <p:sp>
         <p:nvSpPr>
-          <p:cNvPr id="11" name="Text 8"/>
+          <p:cNvPr id="12" name="Text 8"/>
           <p:cNvSpPr/>
           <p:nvPr/>
         </p:nvSpPr>
@@ -10564,7 +10564,7 @@
       </p:sp>
       <p:sp>
         <p:nvSpPr>
-          <p:cNvPr id="12" name="Shape 9"/>
+          <p:cNvPr id="13" name="Shape 9"/>
           <p:cNvSpPr/>
           <p:nvPr/>
         </p:nvSpPr>
@@ -10591,7 +10591,7 @@
       </p:sp>
       <p:sp>
         <p:nvSpPr>
-          <p:cNvPr id="13" name="Text 10"/>
+          <p:cNvPr id="14" name="Text 10"/>
           <p:cNvSpPr/>
           <p:nvPr/>
         </p:nvSpPr>
@@ -10630,7 +10630,7 @@
       </p:sp>
       <p:sp>
         <p:nvSpPr>
-          <p:cNvPr id="14" name="Text 11"/>
+          <p:cNvPr id="15" name="Text 11"/>
           <p:cNvSpPr/>
           <p:nvPr/>
         </p:nvSpPr>
@@ -10672,7 +10672,7 @@
       </p:sp>
       <p:sp>
         <p:nvSpPr>
-          <p:cNvPr id="15" name="Shape 12"/>
+          <p:cNvPr id="16" name="Shape 12"/>
           <p:cNvSpPr/>
           <p:nvPr/>
         </p:nvSpPr>
@@ -10699,7 +10699,7 @@
       </p:sp>
       <p:sp>
         <p:nvSpPr>
-          <p:cNvPr id="16" name="Text 13"/>
+          <p:cNvPr id="17" name="Text 13"/>
           <p:cNvSpPr/>
           <p:nvPr/>
         </p:nvSpPr>
@@ -10987,7 +10987,7 @@
       </p:pic>
       <p:sp>
         <p:nvSpPr>
-          <p:cNvPr id="7" name="Shape 4"/>
+          <p:cNvPr id="8" name="Shape 4"/>
           <p:cNvSpPr/>
           <p:nvPr/>
         </p:nvSpPr>
@@ -11014,7 +11014,7 @@
       </p:sp>
       <p:sp>
         <p:nvSpPr>
-          <p:cNvPr id="8" name="Shape 5"/>
+          <p:cNvPr id="9" name="Shape 5"/>
           <p:cNvSpPr/>
           <p:nvPr/>
         </p:nvSpPr>
@@ -11034,7 +11034,7 @@
       </p:sp>
       <p:sp>
         <p:nvSpPr>
-          <p:cNvPr id="9" name="Text 6"/>
+          <p:cNvPr id="10" name="Text 6"/>
           <p:cNvSpPr/>
           <p:nvPr/>
         </p:nvSpPr>
@@ -11073,7 +11073,7 @@
       </p:sp>
       <p:sp>
         <p:nvSpPr>
-          <p:cNvPr id="10" name="Text 7"/>
+          <p:cNvPr id="11" name="Text 7"/>
           <p:cNvSpPr/>
           <p:nvPr/>
         </p:nvSpPr>
@@ -11112,7 +11112,7 @@
       </p:sp>
       <p:sp>
         <p:nvSpPr>
-          <p:cNvPr id="11" name="Text 8"/>
+          <p:cNvPr id="12" name="Text 8"/>
           <p:cNvSpPr/>
           <p:nvPr/>
         </p:nvSpPr>
@@ -11154,7 +11154,7 @@
       </p:sp>
       <p:sp>
         <p:nvSpPr>
-          <p:cNvPr id="12" name="Shape 9"/>
+          <p:cNvPr id="13" name="Shape 9"/>
           <p:cNvSpPr/>
           <p:nvPr/>
         </p:nvSpPr>
@@ -11181,7 +11181,7 @@
       </p:sp>
       <p:sp>
         <p:nvSpPr>
-          <p:cNvPr id="13" name="Shape 10"/>
+          <p:cNvPr id="14" name="Shape 10"/>
           <p:cNvSpPr/>
           <p:nvPr/>
         </p:nvSpPr>
@@ -11201,7 +11201,7 @@
       </p:sp>
       <p:sp>
         <p:nvSpPr>
-          <p:cNvPr id="14" name="Text 11"/>
+          <p:cNvPr id="15" name="Text 11"/>
           <p:cNvSpPr/>
           <p:nvPr/>
         </p:nvSpPr>
@@ -11240,7 +11240,7 @@
       </p:sp>
       <p:sp>
         <p:nvSpPr>
-          <p:cNvPr id="15" name="Text 12"/>
+          <p:cNvPr id="16" name="Text 12"/>
           <p:cNvSpPr/>
           <p:nvPr/>
         </p:nvSpPr>
@@ -11279,7 +11279,7 @@
       </p:sp>
       <p:sp>
         <p:nvSpPr>
-          <p:cNvPr id="16" name="Text 13"/>
+          <p:cNvPr id="17" name="Text 13"/>
           <p:cNvSpPr/>
           <p:nvPr/>
         </p:nvSpPr>
@@ -11321,7 +11321,7 @@
       </p:sp>
       <p:sp>
         <p:nvSpPr>
-          <p:cNvPr id="17" name="Shape 14"/>
+          <p:cNvPr id="18" name="Shape 14"/>
           <p:cNvSpPr/>
           <p:nvPr/>
         </p:nvSpPr>
@@ -11348,7 +11348,7 @@
       </p:sp>
       <p:sp>
         <p:nvSpPr>
-          <p:cNvPr id="18" name="Shape 15"/>
+          <p:cNvPr id="19" name="Shape 15"/>
           <p:cNvSpPr/>
           <p:nvPr/>
         </p:nvSpPr>
@@ -11368,7 +11368,7 @@
       </p:sp>
       <p:sp>
         <p:nvSpPr>
-          <p:cNvPr id="19" name="Text 16"/>
+          <p:cNvPr id="20" name="Text 16"/>
           <p:cNvSpPr/>
           <p:nvPr/>
         </p:nvSpPr>
@@ -11407,7 +11407,7 @@
       </p:sp>
       <p:sp>
         <p:nvSpPr>
-          <p:cNvPr id="20" name="Text 17"/>
+          <p:cNvPr id="21" name="Text 17"/>
           <p:cNvSpPr/>
           <p:nvPr/>
         </p:nvSpPr>
@@ -11446,7 +11446,7 @@
       </p:sp>
       <p:sp>
         <p:nvSpPr>
-          <p:cNvPr id="21" name="Text 18"/>
+          <p:cNvPr id="22" name="Text 18"/>
           <p:cNvSpPr/>
           <p:nvPr/>
         </p:nvSpPr>
@@ -11488,7 +11488,7 @@
       </p:sp>
       <p:sp>
         <p:nvSpPr>
-          <p:cNvPr id="22" name="Shape 19"/>
+          <p:cNvPr id="23" name="Shape 19"/>
           <p:cNvSpPr/>
           <p:nvPr/>
         </p:nvSpPr>
@@ -11515,7 +11515,7 @@
       </p:sp>
       <p:sp>
         <p:nvSpPr>
-          <p:cNvPr id="23" name="Shape 20"/>
+          <p:cNvPr id="24" name="Shape 20"/>
           <p:cNvSpPr/>
           <p:nvPr/>
         </p:nvSpPr>
@@ -11535,7 +11535,7 @@
       </p:sp>
       <p:sp>
         <p:nvSpPr>
-          <p:cNvPr id="24" name="Text 21"/>
+          <p:cNvPr id="25" name="Text 21"/>
           <p:cNvSpPr/>
           <p:nvPr/>
         </p:nvSpPr>
@@ -11574,7 +11574,7 @@
       </p:sp>
       <p:sp>
         <p:nvSpPr>
-          <p:cNvPr id="25" name="Text 22"/>
+          <p:cNvPr id="26" name="Text 22"/>
           <p:cNvSpPr/>
           <p:nvPr/>
         </p:nvSpPr>
@@ -11613,7 +11613,7 @@
       </p:sp>
       <p:sp>
         <p:nvSpPr>
-          <p:cNvPr id="26" name="Text 23"/>
+          <p:cNvPr id="27" name="Text 23"/>
           <p:cNvSpPr/>
           <p:nvPr/>
         </p:nvSpPr>
@@ -11655,7 +11655,7 @@
       </p:sp>
       <p:sp>
         <p:nvSpPr>
-          <p:cNvPr id="27" name="Shape 24"/>
+          <p:cNvPr id="28" name="Shape 24"/>
           <p:cNvSpPr/>
           <p:nvPr/>
         </p:nvSpPr>
@@ -11682,7 +11682,7 @@
       </p:sp>
       <p:sp>
         <p:nvSpPr>
-          <p:cNvPr id="28" name="Shape 25"/>
+          <p:cNvPr id="29" name="Shape 25"/>
           <p:cNvSpPr/>
           <p:nvPr/>
         </p:nvSpPr>
@@ -11702,7 +11702,7 @@
       </p:sp>
       <p:sp>
         <p:nvSpPr>
-          <p:cNvPr id="29" name="Text 26"/>
+          <p:cNvPr id="30" name="Text 26"/>
           <p:cNvSpPr/>
           <p:nvPr/>
         </p:nvSpPr>
@@ -11741,7 +11741,7 @@
       </p:sp>
       <p:sp>
         <p:nvSpPr>
-          <p:cNvPr id="30" name="Text 27"/>
+          <p:cNvPr id="31" name="Text 27"/>
           <p:cNvSpPr/>
           <p:nvPr/>
         </p:nvSpPr>
@@ -11780,7 +11780,7 @@
       </p:sp>
       <p:sp>
         <p:nvSpPr>
-          <p:cNvPr id="31" name="Text 28"/>
+          <p:cNvPr id="32" name="Text 28"/>
           <p:cNvSpPr/>
           <p:nvPr/>
         </p:nvSpPr>
@@ -12026,7 +12026,7 @@
       </p:pic>
       <p:sp>
         <p:nvSpPr>
-          <p:cNvPr id="6" name="Shape 3"/>
+          <p:cNvPr id="7" name="Shape 3"/>
           <p:cNvSpPr/>
           <p:nvPr/>
         </p:nvSpPr>
@@ -12053,7 +12053,7 @@
       </p:sp>
       <p:sp>
         <p:nvSpPr>
-          <p:cNvPr id="7" name="Shape 4"/>
+          <p:cNvPr id="8" name="Shape 4"/>
           <p:cNvSpPr/>
           <p:nvPr/>
         </p:nvSpPr>
@@ -12080,76 +12080,77 @@
       </p:sp>
       <p:sp>
         <p:nvSpPr>
-          <p:cNvPr id="8" name="Text 5"/>
-          <p:cNvSpPr/>
-          <p:nvPr/>
-        </p:nvSpPr>
-        <p:spPr>
-          <a:xfrm>
-            <a:off x="978408" y="2157984"/>
-            <a:ext cx="256032" cy="256032"/>
-          </a:xfrm>
-          <a:prstGeom prst="rect">
-            <a:avLst/>
-          </a:prstGeom>
-          <a:noFill/>
-          <a:ln/>
-        </p:spPr>
-        <p:txBody>
-          <a:bodyPr wrap="square" lIns="0" tIns="0" rIns="0" bIns="0" rtlCol="0" anchor="ctr"/>
-          <a:lstStyle/>
-          <a:p>
-            <a:pPr algn="ctr" indent="0" marL="0">
-              <a:buNone/>
-            </a:pPr>
-            <a:r>
-              <a:rPr lang="en-US" sz="1000" b="1" dirty="0">
-                <a:solidFill>
-                  <a:srgbClr val="5A05F4"/>
+          <p:cNvPr id="9" name="Shape 5"/>
+          <p:cNvSpPr/>
+          <p:nvPr/>
+        </p:nvSpPr>
+        <p:spPr>
+          <a:xfrm rot="2700000">
+            <a:off x="1041227" y="2297430"/>
+            <a:ext cx="58156" cy="27432"/>
+          </a:xfrm>
+          <a:prstGeom prst="rect">
+            <a:avLst/>
+          </a:prstGeom>
+          <a:solidFill>
+            <a:srgbClr val="5A05F4"/>
+          </a:solidFill>
+          <a:ln/>
+        </p:spPr>
+      </p:sp>
+      <p:sp>
+        <p:nvSpPr>
+          <p:cNvPr id="10" name="Shape 6"/>
+          <p:cNvSpPr/>
+          <p:nvPr/>
+        </p:nvSpPr>
+        <p:spPr>
+          <a:xfrm rot="-3000000">
+            <a:off x="1069025" y="2271370"/>
+            <a:ext cx="121432" cy="27432"/>
+          </a:xfrm>
+          <a:prstGeom prst="rect">
+            <a:avLst/>
+          </a:prstGeom>
+          <a:solidFill>
+            <a:srgbClr val="5A05F4"/>
+          </a:solidFill>
+          <a:ln/>
+        </p:spPr>
+      </p:sp>
+      <p:sp>
+        <p:nvSpPr>
+          <p:cNvPr id="11" name="Text 7"/>
+          <p:cNvSpPr/>
+          <p:nvPr/>
+        </p:nvSpPr>
+        <p:spPr>
+          <a:xfrm>
+            <a:off x="1362456" y="2103120"/>
+            <a:ext cx="4617720" cy="384048"/>
+          </a:xfrm>
+          <a:prstGeom prst="rect">
+            <a:avLst/>
+          </a:prstGeom>
+          <a:noFill/>
+          <a:ln/>
+        </p:spPr>
+        <p:txBody>
+          <a:bodyPr wrap="square" lIns="0" tIns="0" rIns="0" bIns="0" rtlCol="0" anchor="ctr"/>
+          <a:lstStyle/>
+          <a:p>
+            <a:pPr indent="0" marL="0">
+              <a:buNone/>
+            </a:pPr>
+            <a:r>
+              <a:rPr lang="en-US" sz="1250" dirty="0">
+                <a:solidFill>
+                  <a:srgbClr val="111318"/>
                 </a:solidFill>
                 <a:latin typeface="Montserrat" pitchFamily="34" charset="0"/>
                 <a:ea typeface="Montserrat" pitchFamily="34" charset="-122"/>
                 <a:cs typeface="Montserrat" pitchFamily="34" charset="-120"/>
               </a:rPr>
-              <a:t>✓</a:t>
-            </a:r>
-            <a:endParaRPr lang="en-US" sz="1000" dirty="0"/>
-          </a:p>
-        </p:txBody>
-      </p:sp>
-      <p:sp>
-        <p:nvSpPr>
-          <p:cNvPr id="9" name="Text 6"/>
-          <p:cNvSpPr/>
-          <p:nvPr/>
-        </p:nvSpPr>
-        <p:spPr>
-          <a:xfrm>
-            <a:off x="1362456" y="2103120"/>
-            <a:ext cx="4617720" cy="384048"/>
-          </a:xfrm>
-          <a:prstGeom prst="rect">
-            <a:avLst/>
-          </a:prstGeom>
-          <a:noFill/>
-          <a:ln/>
-        </p:spPr>
-        <p:txBody>
-          <a:bodyPr wrap="square" lIns="0" tIns="0" rIns="0" bIns="0" rtlCol="0" anchor="ctr"/>
-          <a:lstStyle/>
-          <a:p>
-            <a:pPr indent="0" marL="0">
-              <a:buNone/>
-            </a:pPr>
-            <a:r>
-              <a:rPr lang="en-US" sz="1250" dirty="0">
-                <a:solidFill>
-                  <a:srgbClr val="111318"/>
-                </a:solidFill>
-                <a:latin typeface="Montserrat" pitchFamily="34" charset="0"/>
-                <a:ea typeface="Montserrat" pitchFamily="34" charset="-122"/>
-                <a:cs typeface="Montserrat" pitchFamily="34" charset="-120"/>
-              </a:rPr>
               <a:t>cost_usd заповнений ненульовими значеннями</a:t>
             </a:r>
             <a:endParaRPr lang="en-US" sz="1250" dirty="0"/>
@@ -12158,7 +12159,7 @@
       </p:sp>
       <p:sp>
         <p:nvSpPr>
-          <p:cNvPr id="10" name="Shape 7"/>
+          <p:cNvPr id="12" name="Shape 8"/>
           <p:cNvSpPr/>
           <p:nvPr/>
         </p:nvSpPr>
@@ -12185,76 +12186,77 @@
       </p:sp>
       <p:sp>
         <p:nvSpPr>
-          <p:cNvPr id="11" name="Text 8"/>
-          <p:cNvSpPr/>
-          <p:nvPr/>
-        </p:nvSpPr>
-        <p:spPr>
-          <a:xfrm>
-            <a:off x="978408" y="2724912"/>
-            <a:ext cx="256032" cy="256032"/>
-          </a:xfrm>
-          <a:prstGeom prst="rect">
-            <a:avLst/>
-          </a:prstGeom>
-          <a:noFill/>
-          <a:ln/>
-        </p:spPr>
-        <p:txBody>
-          <a:bodyPr wrap="square" lIns="0" tIns="0" rIns="0" bIns="0" rtlCol="0" anchor="ctr"/>
-          <a:lstStyle/>
-          <a:p>
-            <a:pPr algn="ctr" indent="0" marL="0">
-              <a:buNone/>
-            </a:pPr>
-            <a:r>
-              <a:rPr lang="en-US" sz="1000" b="1" dirty="0">
-                <a:solidFill>
-                  <a:srgbClr val="5A05F4"/>
+          <p:cNvPr id="13" name="Shape 9"/>
+          <p:cNvSpPr/>
+          <p:nvPr/>
+        </p:nvSpPr>
+        <p:spPr>
+          <a:xfrm rot="2700000">
+            <a:off x="1041227" y="2864358"/>
+            <a:ext cx="58156" cy="27432"/>
+          </a:xfrm>
+          <a:prstGeom prst="rect">
+            <a:avLst/>
+          </a:prstGeom>
+          <a:solidFill>
+            <a:srgbClr val="5A05F4"/>
+          </a:solidFill>
+          <a:ln/>
+        </p:spPr>
+      </p:sp>
+      <p:sp>
+        <p:nvSpPr>
+          <p:cNvPr id="14" name="Shape 10"/>
+          <p:cNvSpPr/>
+          <p:nvPr/>
+        </p:nvSpPr>
+        <p:spPr>
+          <a:xfrm rot="-3000000">
+            <a:off x="1069025" y="2838298"/>
+            <a:ext cx="121432" cy="27432"/>
+          </a:xfrm>
+          <a:prstGeom prst="rect">
+            <a:avLst/>
+          </a:prstGeom>
+          <a:solidFill>
+            <a:srgbClr val="5A05F4"/>
+          </a:solidFill>
+          <a:ln/>
+        </p:spPr>
+      </p:sp>
+      <p:sp>
+        <p:nvSpPr>
+          <p:cNvPr id="15" name="Text 11"/>
+          <p:cNvSpPr/>
+          <p:nvPr/>
+        </p:nvSpPr>
+        <p:spPr>
+          <a:xfrm>
+            <a:off x="1362456" y="2670048"/>
+            <a:ext cx="4617720" cy="384048"/>
+          </a:xfrm>
+          <a:prstGeom prst="rect">
+            <a:avLst/>
+          </a:prstGeom>
+          <a:noFill/>
+          <a:ln/>
+        </p:spPr>
+        <p:txBody>
+          <a:bodyPr wrap="square" lIns="0" tIns="0" rIns="0" bIns="0" rtlCol="0" anchor="ctr"/>
+          <a:lstStyle/>
+          <a:p>
+            <a:pPr indent="0" marL="0">
+              <a:buNone/>
+            </a:pPr>
+            <a:r>
+              <a:rPr lang="en-US" sz="1250" dirty="0">
+                <a:solidFill>
+                  <a:srgbClr val="111318"/>
                 </a:solidFill>
                 <a:latin typeface="Montserrat" pitchFamily="34" charset="0"/>
                 <a:ea typeface="Montserrat" pitchFamily="34" charset="-122"/>
                 <a:cs typeface="Montserrat" pitchFamily="34" charset="-120"/>
               </a:rPr>
-              <a:t>✓</a:t>
-            </a:r>
-            <a:endParaRPr lang="en-US" sz="1000" dirty="0"/>
-          </a:p>
-        </p:txBody>
-      </p:sp>
-      <p:sp>
-        <p:nvSpPr>
-          <p:cNvPr id="12" name="Text 9"/>
-          <p:cNvSpPr/>
-          <p:nvPr/>
-        </p:nvSpPr>
-        <p:spPr>
-          <a:xfrm>
-            <a:off x="1362456" y="2670048"/>
-            <a:ext cx="4617720" cy="384048"/>
-          </a:xfrm>
-          <a:prstGeom prst="rect">
-            <a:avLst/>
-          </a:prstGeom>
-          <a:noFill/>
-          <a:ln/>
-        </p:spPr>
-        <p:txBody>
-          <a:bodyPr wrap="square" lIns="0" tIns="0" rIns="0" bIns="0" rtlCol="0" anchor="ctr"/>
-          <a:lstStyle/>
-          <a:p>
-            <a:pPr indent="0" marL="0">
-              <a:buNone/>
-            </a:pPr>
-            <a:r>
-              <a:rPr lang="en-US" sz="1250" dirty="0">
-                <a:solidFill>
-                  <a:srgbClr val="111318"/>
-                </a:solidFill>
-                <a:latin typeface="Montserrat" pitchFamily="34" charset="0"/>
-                <a:ea typeface="Montserrat" pitchFamily="34" charset="-122"/>
-                <a:cs typeface="Montserrat" pitchFamily="34" charset="-120"/>
-              </a:rPr>
               <a:t>ескалація дорожча за FAQ — видно SELECT'ом</a:t>
             </a:r>
             <a:endParaRPr lang="en-US" sz="1250" dirty="0"/>
@@ -12263,7 +12265,7 @@
       </p:sp>
       <p:sp>
         <p:nvSpPr>
-          <p:cNvPr id="13" name="Shape 10"/>
+          <p:cNvPr id="16" name="Shape 12"/>
           <p:cNvSpPr/>
           <p:nvPr/>
         </p:nvSpPr>
@@ -12290,76 +12292,77 @@
       </p:sp>
       <p:sp>
         <p:nvSpPr>
-          <p:cNvPr id="14" name="Text 11"/>
-          <p:cNvSpPr/>
-          <p:nvPr/>
-        </p:nvSpPr>
-        <p:spPr>
-          <a:xfrm>
-            <a:off x="6144768" y="2157984"/>
-            <a:ext cx="256032" cy="256032"/>
-          </a:xfrm>
-          <a:prstGeom prst="rect">
-            <a:avLst/>
-          </a:prstGeom>
-          <a:noFill/>
-          <a:ln/>
-        </p:spPr>
-        <p:txBody>
-          <a:bodyPr wrap="square" lIns="0" tIns="0" rIns="0" bIns="0" rtlCol="0" anchor="ctr"/>
-          <a:lstStyle/>
-          <a:p>
-            <a:pPr algn="ctr" indent="0" marL="0">
-              <a:buNone/>
-            </a:pPr>
-            <a:r>
-              <a:rPr lang="en-US" sz="1000" b="1" dirty="0">
-                <a:solidFill>
-                  <a:srgbClr val="5A05F4"/>
+          <p:cNvPr id="17" name="Shape 13"/>
+          <p:cNvSpPr/>
+          <p:nvPr/>
+        </p:nvSpPr>
+        <p:spPr>
+          <a:xfrm rot="2700000">
+            <a:off x="6207587" y="2297430"/>
+            <a:ext cx="58156" cy="27432"/>
+          </a:xfrm>
+          <a:prstGeom prst="rect">
+            <a:avLst/>
+          </a:prstGeom>
+          <a:solidFill>
+            <a:srgbClr val="5A05F4"/>
+          </a:solidFill>
+          <a:ln/>
+        </p:spPr>
+      </p:sp>
+      <p:sp>
+        <p:nvSpPr>
+          <p:cNvPr id="18" name="Shape 14"/>
+          <p:cNvSpPr/>
+          <p:nvPr/>
+        </p:nvSpPr>
+        <p:spPr>
+          <a:xfrm rot="-3000000">
+            <a:off x="6235385" y="2271370"/>
+            <a:ext cx="121432" cy="27432"/>
+          </a:xfrm>
+          <a:prstGeom prst="rect">
+            <a:avLst/>
+          </a:prstGeom>
+          <a:solidFill>
+            <a:srgbClr val="5A05F4"/>
+          </a:solidFill>
+          <a:ln/>
+        </p:spPr>
+      </p:sp>
+      <p:sp>
+        <p:nvSpPr>
+          <p:cNvPr id="19" name="Text 15"/>
+          <p:cNvSpPr/>
+          <p:nvPr/>
+        </p:nvSpPr>
+        <p:spPr>
+          <a:xfrm>
+            <a:off x="6528816" y="2103120"/>
+            <a:ext cx="4617720" cy="384048"/>
+          </a:xfrm>
+          <a:prstGeom prst="rect">
+            <a:avLst/>
+          </a:prstGeom>
+          <a:noFill/>
+          <a:ln/>
+        </p:spPr>
+        <p:txBody>
+          <a:bodyPr wrap="square" lIns="0" tIns="0" rIns="0" bIns="0" rtlCol="0" anchor="ctr"/>
+          <a:lstStyle/>
+          <a:p>
+            <a:pPr indent="0" marL="0">
+              <a:buNone/>
+            </a:pPr>
+            <a:r>
+              <a:rPr lang="en-US" sz="1250" dirty="0">
+                <a:solidFill>
+                  <a:srgbClr val="111318"/>
                 </a:solidFill>
                 <a:latin typeface="Montserrat" pitchFamily="34" charset="0"/>
                 <a:ea typeface="Montserrat" pitchFamily="34" charset="-122"/>
                 <a:cs typeface="Montserrat" pitchFamily="34" charset="-120"/>
               </a:rPr>
-              <a:t>✓</a:t>
-            </a:r>
-            <a:endParaRPr lang="en-US" sz="1000" dirty="0"/>
-          </a:p>
-        </p:txBody>
-      </p:sp>
-      <p:sp>
-        <p:nvSpPr>
-          <p:cNvPr id="15" name="Text 12"/>
-          <p:cNvSpPr/>
-          <p:nvPr/>
-        </p:nvSpPr>
-        <p:spPr>
-          <a:xfrm>
-            <a:off x="6528816" y="2103120"/>
-            <a:ext cx="4617720" cy="384048"/>
-          </a:xfrm>
-          <a:prstGeom prst="rect">
-            <a:avLst/>
-          </a:prstGeom>
-          <a:noFill/>
-          <a:ln/>
-        </p:spPr>
-        <p:txBody>
-          <a:bodyPr wrap="square" lIns="0" tIns="0" rIns="0" bIns="0" rtlCol="0" anchor="ctr"/>
-          <a:lstStyle/>
-          <a:p>
-            <a:pPr indent="0" marL="0">
-              <a:buNone/>
-            </a:pPr>
-            <a:r>
-              <a:rPr lang="en-US" sz="1250" dirty="0">
-                <a:solidFill>
-                  <a:srgbClr val="111318"/>
-                </a:solidFill>
-                <a:latin typeface="Montserrat" pitchFamily="34" charset="0"/>
-                <a:ea typeface="Montserrat" pitchFamily="34" charset="-122"/>
-                <a:cs typeface="Montserrat" pitchFamily="34" charset="-120"/>
-              </a:rPr>
               <a:t>GET /cost повертає today_usd і budget_usd</a:t>
             </a:r>
             <a:endParaRPr lang="en-US" sz="1250" dirty="0"/>
@@ -12368,7 +12371,7 @@
       </p:sp>
       <p:sp>
         <p:nvSpPr>
-          <p:cNvPr id="16" name="Shape 13"/>
+          <p:cNvPr id="20" name="Shape 16"/>
           <p:cNvSpPr/>
           <p:nvPr/>
         </p:nvSpPr>
@@ -12395,76 +12398,77 @@
       </p:sp>
       <p:sp>
         <p:nvSpPr>
-          <p:cNvPr id="17" name="Text 14"/>
-          <p:cNvSpPr/>
-          <p:nvPr/>
-        </p:nvSpPr>
-        <p:spPr>
-          <a:xfrm>
-            <a:off x="6144768" y="2724912"/>
-            <a:ext cx="256032" cy="256032"/>
-          </a:xfrm>
-          <a:prstGeom prst="rect">
-            <a:avLst/>
-          </a:prstGeom>
-          <a:noFill/>
-          <a:ln/>
-        </p:spPr>
-        <p:txBody>
-          <a:bodyPr wrap="square" lIns="0" tIns="0" rIns="0" bIns="0" rtlCol="0" anchor="ctr"/>
-          <a:lstStyle/>
-          <a:p>
-            <a:pPr algn="ctr" indent="0" marL="0">
-              <a:buNone/>
-            </a:pPr>
-            <a:r>
-              <a:rPr lang="en-US" sz="1000" b="1" dirty="0">
-                <a:solidFill>
-                  <a:srgbClr val="5A05F4"/>
+          <p:cNvPr id="21" name="Shape 17"/>
+          <p:cNvSpPr/>
+          <p:nvPr/>
+        </p:nvSpPr>
+        <p:spPr>
+          <a:xfrm rot="2700000">
+            <a:off x="6207587" y="2864358"/>
+            <a:ext cx="58156" cy="27432"/>
+          </a:xfrm>
+          <a:prstGeom prst="rect">
+            <a:avLst/>
+          </a:prstGeom>
+          <a:solidFill>
+            <a:srgbClr val="5A05F4"/>
+          </a:solidFill>
+          <a:ln/>
+        </p:spPr>
+      </p:sp>
+      <p:sp>
+        <p:nvSpPr>
+          <p:cNvPr id="22" name="Shape 18"/>
+          <p:cNvSpPr/>
+          <p:nvPr/>
+        </p:nvSpPr>
+        <p:spPr>
+          <a:xfrm rot="-3000000">
+            <a:off x="6235385" y="2838298"/>
+            <a:ext cx="121432" cy="27432"/>
+          </a:xfrm>
+          <a:prstGeom prst="rect">
+            <a:avLst/>
+          </a:prstGeom>
+          <a:solidFill>
+            <a:srgbClr val="5A05F4"/>
+          </a:solidFill>
+          <a:ln/>
+        </p:spPr>
+      </p:sp>
+      <p:sp>
+        <p:nvSpPr>
+          <p:cNvPr id="23" name="Text 19"/>
+          <p:cNvSpPr/>
+          <p:nvPr/>
+        </p:nvSpPr>
+        <p:spPr>
+          <a:xfrm>
+            <a:off x="6528816" y="2670048"/>
+            <a:ext cx="4617720" cy="384048"/>
+          </a:xfrm>
+          <a:prstGeom prst="rect">
+            <a:avLst/>
+          </a:prstGeom>
+          <a:noFill/>
+          <a:ln/>
+        </p:spPr>
+        <p:txBody>
+          <a:bodyPr wrap="square" lIns="0" tIns="0" rIns="0" bIns="0" rtlCol="0" anchor="ctr"/>
+          <a:lstStyle/>
+          <a:p>
+            <a:pPr indent="0" marL="0">
+              <a:buNone/>
+            </a:pPr>
+            <a:r>
+              <a:rPr lang="en-US" sz="1250" dirty="0">
+                <a:solidFill>
+                  <a:srgbClr val="111318"/>
                 </a:solidFill>
                 <a:latin typeface="Montserrat" pitchFamily="34" charset="0"/>
                 <a:ea typeface="Montserrat" pitchFamily="34" charset="-122"/>
                 <a:cs typeface="Montserrat" pitchFamily="34" charset="-120"/>
               </a:rPr>
-              <a:t>✓</a:t>
-            </a:r>
-            <a:endParaRPr lang="en-US" sz="1000" dirty="0"/>
-          </a:p>
-        </p:txBody>
-      </p:sp>
-      <p:sp>
-        <p:nvSpPr>
-          <p:cNvPr id="18" name="Text 15"/>
-          <p:cNvSpPr/>
-          <p:nvPr/>
-        </p:nvSpPr>
-        <p:spPr>
-          <a:xfrm>
-            <a:off x="6528816" y="2670048"/>
-            <a:ext cx="4617720" cy="384048"/>
-          </a:xfrm>
-          <a:prstGeom prst="rect">
-            <a:avLst/>
-          </a:prstGeom>
-          <a:noFill/>
-          <a:ln/>
-        </p:spPr>
-        <p:txBody>
-          <a:bodyPr wrap="square" lIns="0" tIns="0" rIns="0" bIns="0" rtlCol="0" anchor="ctr"/>
-          <a:lstStyle/>
-          <a:p>
-            <a:pPr indent="0" marL="0">
-              <a:buNone/>
-            </a:pPr>
-            <a:r>
-              <a:rPr lang="en-US" sz="1250" dirty="0">
-                <a:solidFill>
-                  <a:srgbClr val="111318"/>
-                </a:solidFill>
-                <a:latin typeface="Montserrat" pitchFamily="34" charset="0"/>
-                <a:ea typeface="Montserrat" pitchFamily="34" charset="-122"/>
-                <a:cs typeface="Montserrat" pitchFamily="34" charset="-120"/>
-              </a:rPr>
               <a:t>поясню, чому звернення ≠ виклик</a:t>
             </a:r>
             <a:endParaRPr lang="en-US" sz="1250" dirty="0"/>
@@ -12473,7 +12477,7 @@
       </p:sp>
       <p:sp>
         <p:nvSpPr>
-          <p:cNvPr id="19" name="Text 16"/>
+          <p:cNvPr id="24" name="Text 20"/>
           <p:cNvSpPr/>
           <p:nvPr/>
         </p:nvSpPr>
@@ -12716,7 +12720,7 @@
       </p:pic>
       <p:sp>
         <p:nvSpPr>
-          <p:cNvPr id="6" name="Shape 3"/>
+          <p:cNvPr id="7" name="Shape 3"/>
           <p:cNvSpPr/>
           <p:nvPr/>
         </p:nvSpPr>
@@ -12743,7 +12747,7 @@
       </p:sp>
       <p:sp>
         <p:nvSpPr>
-          <p:cNvPr id="7" name="Shape 4"/>
+          <p:cNvPr id="8" name="Shape 4"/>
           <p:cNvSpPr/>
           <p:nvPr/>
         </p:nvSpPr>
@@ -12763,90 +12767,91 @@
       </p:sp>
       <p:sp>
         <p:nvSpPr>
-          <p:cNvPr id="8" name="Text 5"/>
-          <p:cNvSpPr/>
-          <p:nvPr/>
-        </p:nvSpPr>
-        <p:spPr>
-          <a:xfrm>
-            <a:off x="768096" y="2020824"/>
-            <a:ext cx="384048" cy="384048"/>
-          </a:xfrm>
-          <a:prstGeom prst="rect">
-            <a:avLst/>
-          </a:prstGeom>
-          <a:noFill/>
-          <a:ln/>
-        </p:spPr>
-        <p:txBody>
-          <a:bodyPr wrap="square" lIns="0" tIns="0" rIns="0" bIns="0" rtlCol="0" anchor="ctr"/>
-          <a:lstStyle/>
-          <a:p>
-            <a:pPr algn="ctr" indent="0" marL="0">
-              <a:buNone/>
-            </a:pPr>
-            <a:r>
-              <a:rPr lang="en-US" sz="1300" b="1" dirty="0">
-                <a:solidFill>
-                  <a:srgbClr val="C62A2A"/>
+          <p:cNvPr id="9" name="Shape 5"/>
+          <p:cNvSpPr/>
+          <p:nvPr/>
+        </p:nvSpPr>
+        <p:spPr>
+          <a:xfrm rot="2700000">
+            <a:off x="871789" y="2197102"/>
+            <a:ext cx="176662" cy="31492"/>
+          </a:xfrm>
+          <a:prstGeom prst="rect">
+            <a:avLst/>
+          </a:prstGeom>
+          <a:solidFill>
+            <a:srgbClr val="C62A2A"/>
+          </a:solidFill>
+          <a:ln/>
+        </p:spPr>
+      </p:sp>
+      <p:sp>
+        <p:nvSpPr>
+          <p:cNvPr id="10" name="Shape 6"/>
+          <p:cNvSpPr/>
+          <p:nvPr/>
+        </p:nvSpPr>
+        <p:spPr>
+          <a:xfrm rot="-2700000">
+            <a:off x="871789" y="2197102"/>
+            <a:ext cx="176662" cy="31492"/>
+          </a:xfrm>
+          <a:prstGeom prst="rect">
+            <a:avLst/>
+          </a:prstGeom>
+          <a:solidFill>
+            <a:srgbClr val="C62A2A"/>
+          </a:solidFill>
+          <a:ln/>
+        </p:spPr>
+      </p:sp>
+      <p:sp>
+        <p:nvSpPr>
+          <p:cNvPr id="11" name="Text 7"/>
+          <p:cNvSpPr/>
+          <p:nvPr/>
+        </p:nvSpPr>
+        <p:spPr>
+          <a:xfrm>
+            <a:off x="1298448" y="1828800"/>
+            <a:ext cx="10149840" cy="777240"/>
+          </a:xfrm>
+          <a:prstGeom prst="rect">
+            <a:avLst/>
+          </a:prstGeom>
+          <a:noFill/>
+          <a:ln/>
+        </p:spPr>
+        <p:txBody>
+          <a:bodyPr wrap="square" lIns="0" tIns="0" rIns="0" bIns="0" rtlCol="0" anchor="ctr"/>
+          <a:lstStyle/>
+          <a:p>
+            <a:pPr indent="0" marL="0">
+              <a:buNone/>
+            </a:pPr>
+            <a:r>
+              <a:rPr lang="en-US" sz="1350" b="1" dirty="0">
+                <a:solidFill>
+                  <a:srgbClr val="111318"/>
                 </a:solidFill>
                 <a:latin typeface="Montserrat" pitchFamily="34" charset="0"/>
                 <a:ea typeface="Montserrat" pitchFamily="34" charset="-122"/>
                 <a:cs typeface="Montserrat" pitchFamily="34" charset="-120"/>
               </a:rPr>
-              <a:t>✕</a:t>
-            </a:r>
-            <a:endParaRPr lang="en-US" sz="1300" dirty="0"/>
-          </a:p>
-        </p:txBody>
-      </p:sp>
-      <p:sp>
-        <p:nvSpPr>
-          <p:cNvPr id="9" name="Text 6"/>
-          <p:cNvSpPr/>
-          <p:nvPr/>
-        </p:nvSpPr>
-        <p:spPr>
-          <a:xfrm>
-            <a:off x="1298448" y="1828800"/>
-            <a:ext cx="10149840" cy="777240"/>
-          </a:xfrm>
-          <a:prstGeom prst="rect">
-            <a:avLst/>
-          </a:prstGeom>
-          <a:noFill/>
-          <a:ln/>
-        </p:spPr>
-        <p:txBody>
-          <a:bodyPr wrap="square" lIns="0" tIns="0" rIns="0" bIns="0" rtlCol="0" anchor="ctr"/>
-          <a:lstStyle/>
-          <a:p>
-            <a:pPr indent="0" marL="0">
-              <a:buNone/>
-            </a:pPr>
-            <a:r>
-              <a:rPr lang="en-US" sz="1350" b="1" dirty="0">
-                <a:solidFill>
-                  <a:srgbClr val="111318"/>
+              <a:t>Нуль замість null у cost_usd   </a:t>
+            </a:r>
+            <a:pPr indent="0" marL="0">
+              <a:buNone/>
+            </a:pPr>
+            <a:r>
+              <a:rPr lang="en-US" sz="1200" dirty="0">
+                <a:solidFill>
+                  <a:srgbClr val="555B66"/>
                 </a:solidFill>
                 <a:latin typeface="Montserrat" pitchFamily="34" charset="0"/>
                 <a:ea typeface="Montserrat" pitchFamily="34" charset="-122"/>
                 <a:cs typeface="Montserrat" pitchFamily="34" charset="-120"/>
               </a:rPr>
-              <a:t>Нуль замість null у cost_usd   </a:t>
-            </a:r>
-            <a:pPr indent="0" marL="0">
-              <a:buNone/>
-            </a:pPr>
-            <a:r>
-              <a:rPr lang="en-US" sz="1200" dirty="0">
-                <a:solidFill>
-                  <a:srgbClr val="555B66"/>
-                </a:solidFill>
-                <a:latin typeface="Montserrat" pitchFamily="34" charset="0"/>
-                <a:ea typeface="Montserrat" pitchFamily="34" charset="-122"/>
-                <a:cs typeface="Montserrat" pitchFamily="34" charset="-120"/>
-              </a:rPr>
               <a:t>«безкоштовний запит» — брехня, яку неможливо знайти запитом</a:t>
             </a:r>
             <a:endParaRPr lang="en-US" sz="1350" dirty="0"/>
@@ -12855,7 +12860,7 @@
       </p:sp>
       <p:sp>
         <p:nvSpPr>
-          <p:cNvPr id="10" name="Shape 7"/>
+          <p:cNvPr id="12" name="Shape 8"/>
           <p:cNvSpPr/>
           <p:nvPr/>
         </p:nvSpPr>
@@ -12882,7 +12887,7 @@
       </p:sp>
       <p:sp>
         <p:nvSpPr>
-          <p:cNvPr id="11" name="Shape 8"/>
+          <p:cNvPr id="13" name="Shape 9"/>
           <p:cNvSpPr/>
           <p:nvPr/>
         </p:nvSpPr>
@@ -12902,90 +12907,91 @@
       </p:sp>
       <p:sp>
         <p:nvSpPr>
-          <p:cNvPr id="12" name="Text 9"/>
-          <p:cNvSpPr/>
-          <p:nvPr/>
-        </p:nvSpPr>
-        <p:spPr>
-          <a:xfrm>
-            <a:off x="768096" y="2935224"/>
-            <a:ext cx="384048" cy="384048"/>
-          </a:xfrm>
-          <a:prstGeom prst="rect">
-            <a:avLst/>
-          </a:prstGeom>
-          <a:noFill/>
-          <a:ln/>
-        </p:spPr>
-        <p:txBody>
-          <a:bodyPr wrap="square" lIns="0" tIns="0" rIns="0" bIns="0" rtlCol="0" anchor="ctr"/>
-          <a:lstStyle/>
-          <a:p>
-            <a:pPr algn="ctr" indent="0" marL="0">
-              <a:buNone/>
-            </a:pPr>
-            <a:r>
-              <a:rPr lang="en-US" sz="1300" b="1" dirty="0">
-                <a:solidFill>
-                  <a:srgbClr val="C62A2A"/>
+          <p:cNvPr id="14" name="Shape 10"/>
+          <p:cNvSpPr/>
+          <p:nvPr/>
+        </p:nvSpPr>
+        <p:spPr>
+          <a:xfrm rot="2700000">
+            <a:off x="871789" y="3111502"/>
+            <a:ext cx="176662" cy="31492"/>
+          </a:xfrm>
+          <a:prstGeom prst="rect">
+            <a:avLst/>
+          </a:prstGeom>
+          <a:solidFill>
+            <a:srgbClr val="C62A2A"/>
+          </a:solidFill>
+          <a:ln/>
+        </p:spPr>
+      </p:sp>
+      <p:sp>
+        <p:nvSpPr>
+          <p:cNvPr id="15" name="Shape 11"/>
+          <p:cNvSpPr/>
+          <p:nvPr/>
+        </p:nvSpPr>
+        <p:spPr>
+          <a:xfrm rot="-2700000">
+            <a:off x="871789" y="3111502"/>
+            <a:ext cx="176662" cy="31492"/>
+          </a:xfrm>
+          <a:prstGeom prst="rect">
+            <a:avLst/>
+          </a:prstGeom>
+          <a:solidFill>
+            <a:srgbClr val="C62A2A"/>
+          </a:solidFill>
+          <a:ln/>
+        </p:spPr>
+      </p:sp>
+      <p:sp>
+        <p:nvSpPr>
+          <p:cNvPr id="16" name="Text 12"/>
+          <p:cNvSpPr/>
+          <p:nvPr/>
+        </p:nvSpPr>
+        <p:spPr>
+          <a:xfrm>
+            <a:off x="1298448" y="2743200"/>
+            <a:ext cx="10149840" cy="777240"/>
+          </a:xfrm>
+          <a:prstGeom prst="rect">
+            <a:avLst/>
+          </a:prstGeom>
+          <a:noFill/>
+          <a:ln/>
+        </p:spPr>
+        <p:txBody>
+          <a:bodyPr wrap="square" lIns="0" tIns="0" rIns="0" bIns="0" rtlCol="0" anchor="ctr"/>
+          <a:lstStyle/>
+          <a:p>
+            <a:pPr indent="0" marL="0">
+              <a:buNone/>
+            </a:pPr>
+            <a:r>
+              <a:rPr lang="en-US" sz="1350" b="1" dirty="0">
+                <a:solidFill>
+                  <a:srgbClr val="111318"/>
                 </a:solidFill>
                 <a:latin typeface="Montserrat" pitchFamily="34" charset="0"/>
                 <a:ea typeface="Montserrat" pitchFamily="34" charset="-122"/>
                 <a:cs typeface="Montserrat" pitchFamily="34" charset="-120"/>
               </a:rPr>
-              <a:t>✕</a:t>
-            </a:r>
-            <a:endParaRPr lang="en-US" sz="1300" dirty="0"/>
-          </a:p>
-        </p:txBody>
-      </p:sp>
-      <p:sp>
-        <p:nvSpPr>
-          <p:cNvPr id="13" name="Text 10"/>
-          <p:cNvSpPr/>
-          <p:nvPr/>
-        </p:nvSpPr>
-        <p:spPr>
-          <a:xfrm>
-            <a:off x="1298448" y="2743200"/>
-            <a:ext cx="10149840" cy="777240"/>
-          </a:xfrm>
-          <a:prstGeom prst="rect">
-            <a:avLst/>
-          </a:prstGeom>
-          <a:noFill/>
-          <a:ln/>
-        </p:spPr>
-        <p:txBody>
-          <a:bodyPr wrap="square" lIns="0" tIns="0" rIns="0" bIns="0" rtlCol="0" anchor="ctr"/>
-          <a:lstStyle/>
-          <a:p>
-            <a:pPr indent="0" marL="0">
-              <a:buNone/>
-            </a:pPr>
-            <a:r>
-              <a:rPr lang="en-US" sz="1350" b="1" dirty="0">
-                <a:solidFill>
-                  <a:srgbClr val="111318"/>
+              <a:t>AVG по рядках лога   </a:t>
+            </a:r>
+            <a:pPr indent="0" marL="0">
+              <a:buNone/>
+            </a:pPr>
+            <a:r>
+              <a:rPr lang="en-US" sz="1200" dirty="0">
+                <a:solidFill>
+                  <a:srgbClr val="555B66"/>
                 </a:solidFill>
                 <a:latin typeface="Montserrat" pitchFamily="34" charset="0"/>
                 <a:ea typeface="Montserrat" pitchFamily="34" charset="-122"/>
                 <a:cs typeface="Montserrat" pitchFamily="34" charset="-120"/>
               </a:rPr>
-              <a:t>AVG по рядках лога   </a:t>
-            </a:r>
-            <a:pPr indent="0" marL="0">
-              <a:buNone/>
-            </a:pPr>
-            <a:r>
-              <a:rPr lang="en-US" sz="1200" dirty="0">
-                <a:solidFill>
-                  <a:srgbClr val="555B66"/>
-                </a:solidFill>
-                <a:latin typeface="Montserrat" pitchFamily="34" charset="0"/>
-                <a:ea typeface="Montserrat" pitchFamily="34" charset="-122"/>
-                <a:cs typeface="Montserrat" pitchFamily="34" charset="-120"/>
-              </a:rPr>
               <a:t>рахує вартість виклику, а не звернення — завжди в бік «дешево»</a:t>
             </a:r>
             <a:endParaRPr lang="en-US" sz="1350" dirty="0"/>
@@ -12994,7 +13000,7 @@
       </p:sp>
       <p:sp>
         <p:nvSpPr>
-          <p:cNvPr id="14" name="Shape 11"/>
+          <p:cNvPr id="17" name="Shape 13"/>
           <p:cNvSpPr/>
           <p:nvPr/>
         </p:nvSpPr>
@@ -13021,7 +13027,7 @@
       </p:sp>
       <p:sp>
         <p:nvSpPr>
-          <p:cNvPr id="15" name="Shape 12"/>
+          <p:cNvPr id="18" name="Shape 14"/>
           <p:cNvSpPr/>
           <p:nvPr/>
         </p:nvSpPr>
@@ -13041,90 +13047,91 @@
       </p:sp>
       <p:sp>
         <p:nvSpPr>
-          <p:cNvPr id="16" name="Text 13"/>
-          <p:cNvSpPr/>
-          <p:nvPr/>
-        </p:nvSpPr>
-        <p:spPr>
-          <a:xfrm>
-            <a:off x="768096" y="3849624"/>
-            <a:ext cx="384048" cy="384048"/>
-          </a:xfrm>
-          <a:prstGeom prst="rect">
-            <a:avLst/>
-          </a:prstGeom>
-          <a:noFill/>
-          <a:ln/>
-        </p:spPr>
-        <p:txBody>
-          <a:bodyPr wrap="square" lIns="0" tIns="0" rIns="0" bIns="0" rtlCol="0" anchor="ctr"/>
-          <a:lstStyle/>
-          <a:p>
-            <a:pPr algn="ctr" indent="0" marL="0">
-              <a:buNone/>
-            </a:pPr>
-            <a:r>
-              <a:rPr lang="en-US" sz="1300" b="1" dirty="0">
-                <a:solidFill>
-                  <a:srgbClr val="C62A2A"/>
+          <p:cNvPr id="19" name="Shape 15"/>
+          <p:cNvSpPr/>
+          <p:nvPr/>
+        </p:nvSpPr>
+        <p:spPr>
+          <a:xfrm rot="2700000">
+            <a:off x="871789" y="4025902"/>
+            <a:ext cx="176662" cy="31492"/>
+          </a:xfrm>
+          <a:prstGeom prst="rect">
+            <a:avLst/>
+          </a:prstGeom>
+          <a:solidFill>
+            <a:srgbClr val="C62A2A"/>
+          </a:solidFill>
+          <a:ln/>
+        </p:spPr>
+      </p:sp>
+      <p:sp>
+        <p:nvSpPr>
+          <p:cNvPr id="20" name="Shape 16"/>
+          <p:cNvSpPr/>
+          <p:nvPr/>
+        </p:nvSpPr>
+        <p:spPr>
+          <a:xfrm rot="-2700000">
+            <a:off x="871789" y="4025902"/>
+            <a:ext cx="176662" cy="31492"/>
+          </a:xfrm>
+          <a:prstGeom prst="rect">
+            <a:avLst/>
+          </a:prstGeom>
+          <a:solidFill>
+            <a:srgbClr val="C62A2A"/>
+          </a:solidFill>
+          <a:ln/>
+        </p:spPr>
+      </p:sp>
+      <p:sp>
+        <p:nvSpPr>
+          <p:cNvPr id="21" name="Text 17"/>
+          <p:cNvSpPr/>
+          <p:nvPr/>
+        </p:nvSpPr>
+        <p:spPr>
+          <a:xfrm>
+            <a:off x="1298448" y="3657600"/>
+            <a:ext cx="10149840" cy="777240"/>
+          </a:xfrm>
+          <a:prstGeom prst="rect">
+            <a:avLst/>
+          </a:prstGeom>
+          <a:noFill/>
+          <a:ln/>
+        </p:spPr>
+        <p:txBody>
+          <a:bodyPr wrap="square" lIns="0" tIns="0" rIns="0" bIns="0" rtlCol="0" anchor="ctr"/>
+          <a:lstStyle/>
+          <a:p>
+            <a:pPr indent="0" marL="0">
+              <a:buNone/>
+            </a:pPr>
+            <a:r>
+              <a:rPr lang="en-US" sz="1350" b="1" dirty="0">
+                <a:solidFill>
+                  <a:srgbClr val="111318"/>
                 </a:solidFill>
                 <a:latin typeface="Montserrat" pitchFamily="34" charset="0"/>
                 <a:ea typeface="Montserrat" pitchFamily="34" charset="-122"/>
                 <a:cs typeface="Montserrat" pitchFamily="34" charset="-120"/>
               </a:rPr>
-              <a:t>✕</a:t>
-            </a:r>
-            <a:endParaRPr lang="en-US" sz="1300" dirty="0"/>
-          </a:p>
-        </p:txBody>
-      </p:sp>
-      <p:sp>
-        <p:nvSpPr>
-          <p:cNvPr id="17" name="Text 14"/>
-          <p:cNvSpPr/>
-          <p:nvPr/>
-        </p:nvSpPr>
-        <p:spPr>
-          <a:xfrm>
-            <a:off x="1298448" y="3657600"/>
-            <a:ext cx="10149840" cy="777240"/>
-          </a:xfrm>
-          <a:prstGeom prst="rect">
-            <a:avLst/>
-          </a:prstGeom>
-          <a:noFill/>
-          <a:ln/>
-        </p:spPr>
-        <p:txBody>
-          <a:bodyPr wrap="square" lIns="0" tIns="0" rIns="0" bIns="0" rtlCol="0" anchor="ctr"/>
-          <a:lstStyle/>
-          <a:p>
-            <a:pPr indent="0" marL="0">
-              <a:buNone/>
-            </a:pPr>
-            <a:r>
-              <a:rPr lang="en-US" sz="1350" b="1" dirty="0">
-                <a:solidFill>
-                  <a:srgbClr val="111318"/>
+              <a:t>Прайс у голові або в вікі   </a:t>
+            </a:r>
+            <a:pPr indent="0" marL="0">
+              <a:buNone/>
+            </a:pPr>
+            <a:r>
+              <a:rPr lang="en-US" sz="1200" dirty="0">
+                <a:solidFill>
+                  <a:srgbClr val="555B66"/>
                 </a:solidFill>
                 <a:latin typeface="Montserrat" pitchFamily="34" charset="0"/>
                 <a:ea typeface="Montserrat" pitchFamily="34" charset="-122"/>
                 <a:cs typeface="Montserrat" pitchFamily="34" charset="-120"/>
               </a:rPr>
-              <a:t>Прайс у голові або в вікі   </a:t>
-            </a:r>
-            <a:pPr indent="0" marL="0">
-              <a:buNone/>
-            </a:pPr>
-            <a:r>
-              <a:rPr lang="en-US" sz="1200" dirty="0">
-                <a:solidFill>
-                  <a:srgbClr val="555B66"/>
-                </a:solidFill>
-                <a:latin typeface="Montserrat" pitchFamily="34" charset="0"/>
-                <a:ea typeface="Montserrat" pitchFamily="34" charset="-122"/>
-                <a:cs typeface="Montserrat" pitchFamily="34" charset="-120"/>
-              </a:rPr>
               <a:t>застаріла ціна викривляє всі рішення, а не одне</a:t>
             </a:r>
             <a:endParaRPr lang="en-US" sz="1350" dirty="0"/>
@@ -13133,7 +13140,7 @@
       </p:sp>
       <p:sp>
         <p:nvSpPr>
-          <p:cNvPr id="18" name="Shape 15"/>
+          <p:cNvPr id="22" name="Shape 18"/>
           <p:cNvSpPr/>
           <p:nvPr/>
         </p:nvSpPr>
@@ -13160,7 +13167,7 @@
       </p:sp>
       <p:sp>
         <p:nvSpPr>
-          <p:cNvPr id="19" name="Shape 16"/>
+          <p:cNvPr id="23" name="Shape 19"/>
           <p:cNvSpPr/>
           <p:nvPr/>
         </p:nvSpPr>
@@ -13180,46 +13187,47 @@
       </p:sp>
       <p:sp>
         <p:nvSpPr>
-          <p:cNvPr id="20" name="Text 17"/>
-          <p:cNvSpPr/>
-          <p:nvPr/>
-        </p:nvSpPr>
-        <p:spPr>
-          <a:xfrm>
-            <a:off x="768096" y="4764024"/>
-            <a:ext cx="384048" cy="384048"/>
-          </a:xfrm>
-          <a:prstGeom prst="rect">
-            <a:avLst/>
-          </a:prstGeom>
-          <a:noFill/>
-          <a:ln/>
-        </p:spPr>
-        <p:txBody>
-          <a:bodyPr wrap="square" lIns="0" tIns="0" rIns="0" bIns="0" rtlCol="0" anchor="ctr"/>
-          <a:lstStyle/>
-          <a:p>
-            <a:pPr algn="ctr" indent="0" marL="0">
-              <a:buNone/>
-            </a:pPr>
-            <a:r>
-              <a:rPr lang="en-US" sz="1300" b="1" dirty="0">
-                <a:solidFill>
-                  <a:srgbClr val="C62A2A"/>
-                </a:solidFill>
-                <a:latin typeface="Montserrat" pitchFamily="34" charset="0"/>
-                <a:ea typeface="Montserrat" pitchFamily="34" charset="-122"/>
-                <a:cs typeface="Montserrat" pitchFamily="34" charset="-120"/>
-              </a:rPr>
-              <a:t>✕</a:t>
-            </a:r>
-            <a:endParaRPr lang="en-US" sz="1300" dirty="0"/>
-          </a:p>
-        </p:txBody>
-      </p:sp>
-      <p:sp>
-        <p:nvSpPr>
-          <p:cNvPr id="21" name="Text 18"/>
+          <p:cNvPr id="24" name="Shape 20"/>
+          <p:cNvSpPr/>
+          <p:nvPr/>
+        </p:nvSpPr>
+        <p:spPr>
+          <a:xfrm rot="2700000">
+            <a:off x="871789" y="4940302"/>
+            <a:ext cx="176662" cy="31492"/>
+          </a:xfrm>
+          <a:prstGeom prst="rect">
+            <a:avLst/>
+          </a:prstGeom>
+          <a:solidFill>
+            <a:srgbClr val="C62A2A"/>
+          </a:solidFill>
+          <a:ln/>
+        </p:spPr>
+      </p:sp>
+      <p:sp>
+        <p:nvSpPr>
+          <p:cNvPr id="25" name="Shape 21"/>
+          <p:cNvSpPr/>
+          <p:nvPr/>
+        </p:nvSpPr>
+        <p:spPr>
+          <a:xfrm rot="-2700000">
+            <a:off x="871789" y="4940302"/>
+            <a:ext cx="176662" cy="31492"/>
+          </a:xfrm>
+          <a:prstGeom prst="rect">
+            <a:avLst/>
+          </a:prstGeom>
+          <a:solidFill>
+            <a:srgbClr val="C62A2A"/>
+          </a:solidFill>
+          <a:ln/>
+        </p:spPr>
+      </p:sp>
+      <p:sp>
+        <p:nvSpPr>
+          <p:cNvPr id="26" name="Text 22"/>
           <p:cNvSpPr/>
           <p:nvPr/>
         </p:nvSpPr>
@@ -13476,7 +13484,7 @@
       </p:pic>
       <p:sp>
         <p:nvSpPr>
-          <p:cNvPr id="6" name="Shape 3"/>
+          <p:cNvPr id="7" name="Shape 3"/>
           <p:cNvSpPr/>
           <p:nvPr/>
         </p:nvSpPr>
@@ -13503,7 +13511,7 @@
       </p:sp>
       <p:sp>
         <p:nvSpPr>
-          <p:cNvPr id="7" name="Text 4"/>
+          <p:cNvPr id="8" name="Text 4"/>
           <p:cNvSpPr/>
           <p:nvPr/>
         </p:nvSpPr>
@@ -13542,7 +13550,7 @@
       </p:sp>
       <p:sp>
         <p:nvSpPr>
-          <p:cNvPr id="8" name="Text 5"/>
+          <p:cNvPr id="9" name="Text 5"/>
           <p:cNvSpPr/>
           <p:nvPr/>
         </p:nvSpPr>
@@ -13581,7 +13589,7 @@
       </p:sp>
       <p:sp>
         <p:nvSpPr>
-          <p:cNvPr id="9" name="Text 6"/>
+          <p:cNvPr id="10" name="Text 6"/>
           <p:cNvSpPr/>
           <p:nvPr/>
         </p:nvSpPr>
@@ -13620,7 +13628,7 @@
       </p:sp>
       <p:sp>
         <p:nvSpPr>
-          <p:cNvPr id="10" name="Text 7"/>
+          <p:cNvPr id="11" name="Text 7"/>
           <p:cNvSpPr/>
           <p:nvPr/>
         </p:nvSpPr>
@@ -13673,7 +13681,7 @@
       </p:sp>
       <p:sp>
         <p:nvSpPr>
-          <p:cNvPr id="11" name="Text 8"/>
+          <p:cNvPr id="12" name="Text 8"/>
           <p:cNvSpPr/>
           <p:nvPr/>
         </p:nvSpPr>
@@ -13726,7 +13734,7 @@
       </p:sp>
       <p:sp>
         <p:nvSpPr>
-          <p:cNvPr id="12" name="Text 9"/>
+          <p:cNvPr id="13" name="Text 9"/>
           <p:cNvSpPr/>
           <p:nvPr/>
         </p:nvSpPr>
@@ -13779,7 +13787,7 @@
       </p:sp>
       <p:sp>
         <p:nvSpPr>
-          <p:cNvPr id="13" name="Shape 10"/>
+          <p:cNvPr id="14" name="Shape 10"/>
           <p:cNvSpPr/>
           <p:nvPr/>
         </p:nvSpPr>
@@ -13801,7 +13809,7 @@
       </p:sp>
       <p:sp>
         <p:nvSpPr>
-          <p:cNvPr id="14" name="Text 11"/>
+          <p:cNvPr id="15" name="Text 11"/>
           <p:cNvSpPr/>
           <p:nvPr/>
         </p:nvSpPr>
@@ -13840,7 +13848,7 @@
       </p:sp>
       <p:sp>
         <p:nvSpPr>
-          <p:cNvPr id="15" name="Text 12"/>
+          <p:cNvPr id="16" name="Text 12"/>
           <p:cNvSpPr/>
           <p:nvPr/>
         </p:nvSpPr>
@@ -14629,7 +14637,7 @@
       </p:pic>
       <p:sp>
         <p:nvSpPr>
-          <p:cNvPr id="6" name="Shape 3"/>
+          <p:cNvPr id="7" name="Shape 3"/>
           <p:cNvSpPr/>
           <p:nvPr/>
         </p:nvSpPr>
@@ -14656,7 +14664,7 @@
       </p:sp>
       <p:sp>
         <p:nvSpPr>
-          <p:cNvPr id="7" name="Shape 4"/>
+          <p:cNvPr id="8" name="Shape 4"/>
           <p:cNvSpPr/>
           <p:nvPr/>
         </p:nvSpPr>
@@ -14676,7 +14684,7 @@
       </p:sp>
       <p:sp>
         <p:nvSpPr>
-          <p:cNvPr id="8" name="Text 5"/>
+          <p:cNvPr id="9" name="Text 5"/>
           <p:cNvSpPr/>
           <p:nvPr/>
         </p:nvSpPr>
@@ -14715,7 +14723,7 @@
       </p:sp>
       <p:sp>
         <p:nvSpPr>
-          <p:cNvPr id="9" name="Text 6"/>
+          <p:cNvPr id="10" name="Text 6"/>
           <p:cNvSpPr/>
           <p:nvPr/>
         </p:nvSpPr>
@@ -14754,7 +14762,7 @@
       </p:sp>
       <p:sp>
         <p:nvSpPr>
-          <p:cNvPr id="10" name="Shape 7"/>
+          <p:cNvPr id="11" name="Shape 7"/>
           <p:cNvSpPr/>
           <p:nvPr/>
         </p:nvSpPr>
@@ -14781,7 +14789,7 @@
       </p:sp>
       <p:sp>
         <p:nvSpPr>
-          <p:cNvPr id="11" name="Shape 8"/>
+          <p:cNvPr id="12" name="Shape 8"/>
           <p:cNvSpPr/>
           <p:nvPr/>
         </p:nvSpPr>
@@ -14801,7 +14809,7 @@
       </p:sp>
       <p:sp>
         <p:nvSpPr>
-          <p:cNvPr id="12" name="Text 9"/>
+          <p:cNvPr id="13" name="Text 9"/>
           <p:cNvSpPr/>
           <p:nvPr/>
         </p:nvSpPr>
@@ -14840,7 +14848,7 @@
       </p:sp>
       <p:sp>
         <p:nvSpPr>
-          <p:cNvPr id="13" name="Text 10"/>
+          <p:cNvPr id="14" name="Text 10"/>
           <p:cNvSpPr/>
           <p:nvPr/>
         </p:nvSpPr>
@@ -14879,7 +14887,7 @@
       </p:sp>
       <p:sp>
         <p:nvSpPr>
-          <p:cNvPr id="14" name="Shape 11"/>
+          <p:cNvPr id="15" name="Shape 11"/>
           <p:cNvSpPr/>
           <p:nvPr/>
         </p:nvSpPr>
@@ -14906,7 +14914,7 @@
       </p:sp>
       <p:sp>
         <p:nvSpPr>
-          <p:cNvPr id="15" name="Shape 12"/>
+          <p:cNvPr id="16" name="Shape 12"/>
           <p:cNvSpPr/>
           <p:nvPr/>
         </p:nvSpPr>
@@ -14926,7 +14934,7 @@
       </p:sp>
       <p:sp>
         <p:nvSpPr>
-          <p:cNvPr id="16" name="Text 13"/>
+          <p:cNvPr id="17" name="Text 13"/>
           <p:cNvSpPr/>
           <p:nvPr/>
         </p:nvSpPr>
@@ -14965,7 +14973,7 @@
       </p:sp>
       <p:sp>
         <p:nvSpPr>
-          <p:cNvPr id="17" name="Text 14"/>
+          <p:cNvPr id="18" name="Text 14"/>
           <p:cNvSpPr/>
           <p:nvPr/>
         </p:nvSpPr>
@@ -15004,7 +15012,7 @@
       </p:sp>
       <p:sp>
         <p:nvSpPr>
-          <p:cNvPr id="18" name="Shape 15"/>
+          <p:cNvPr id="19" name="Shape 15"/>
           <p:cNvSpPr/>
           <p:nvPr/>
         </p:nvSpPr>
@@ -15031,7 +15039,7 @@
       </p:sp>
       <p:sp>
         <p:nvSpPr>
-          <p:cNvPr id="19" name="Shape 16"/>
+          <p:cNvPr id="20" name="Shape 16"/>
           <p:cNvSpPr/>
           <p:nvPr/>
         </p:nvSpPr>
@@ -15051,7 +15059,7 @@
       </p:sp>
       <p:sp>
         <p:nvSpPr>
-          <p:cNvPr id="20" name="Text 17"/>
+          <p:cNvPr id="21" name="Text 17"/>
           <p:cNvSpPr/>
           <p:nvPr/>
         </p:nvSpPr>
@@ -15090,7 +15098,7 @@
       </p:sp>
       <p:sp>
         <p:nvSpPr>
-          <p:cNvPr id="21" name="Text 18"/>
+          <p:cNvPr id="22" name="Text 18"/>
           <p:cNvSpPr/>
           <p:nvPr/>
         </p:nvSpPr>
@@ -15129,7 +15137,7 @@
       </p:sp>
       <p:sp>
         <p:nvSpPr>
-          <p:cNvPr id="22" name="Shape 19"/>
+          <p:cNvPr id="23" name="Shape 19"/>
           <p:cNvSpPr/>
           <p:nvPr/>
         </p:nvSpPr>
@@ -15156,7 +15164,7 @@
       </p:sp>
       <p:sp>
         <p:nvSpPr>
-          <p:cNvPr id="23" name="Shape 20"/>
+          <p:cNvPr id="24" name="Shape 20"/>
           <p:cNvSpPr/>
           <p:nvPr/>
         </p:nvSpPr>
@@ -15176,7 +15184,7 @@
       </p:sp>
       <p:sp>
         <p:nvSpPr>
-          <p:cNvPr id="24" name="Text 21"/>
+          <p:cNvPr id="25" name="Text 21"/>
           <p:cNvSpPr/>
           <p:nvPr/>
         </p:nvSpPr>
@@ -15215,7 +15223,7 @@
       </p:sp>
       <p:sp>
         <p:nvSpPr>
-          <p:cNvPr id="25" name="Text 22"/>
+          <p:cNvPr id="26" name="Text 22"/>
           <p:cNvSpPr/>
           <p:nvPr/>
         </p:nvSpPr>
@@ -15254,7 +15262,7 @@
       </p:sp>
       <p:sp>
         <p:nvSpPr>
-          <p:cNvPr id="26" name="Shape 23"/>
+          <p:cNvPr id="27" name="Shape 23"/>
           <p:cNvSpPr/>
           <p:nvPr/>
         </p:nvSpPr>
@@ -15281,7 +15289,7 @@
       </p:sp>
       <p:sp>
         <p:nvSpPr>
-          <p:cNvPr id="27" name="Shape 24"/>
+          <p:cNvPr id="28" name="Shape 24"/>
           <p:cNvSpPr/>
           <p:nvPr/>
         </p:nvSpPr>
@@ -15301,7 +15309,7 @@
       </p:sp>
       <p:sp>
         <p:nvSpPr>
-          <p:cNvPr id="28" name="Text 25"/>
+          <p:cNvPr id="29" name="Text 25"/>
           <p:cNvSpPr/>
           <p:nvPr/>
         </p:nvSpPr>
@@ -15340,7 +15348,7 @@
       </p:sp>
       <p:sp>
         <p:nvSpPr>
-          <p:cNvPr id="29" name="Text 26"/>
+          <p:cNvPr id="30" name="Text 26"/>
           <p:cNvSpPr/>
           <p:nvPr/>
         </p:nvSpPr>
@@ -15379,7 +15387,7 @@
       </p:sp>
       <p:sp>
         <p:nvSpPr>
-          <p:cNvPr id="30" name="Shape 27"/>
+          <p:cNvPr id="31" name="Shape 27"/>
           <p:cNvSpPr/>
           <p:nvPr/>
         </p:nvSpPr>
@@ -15406,7 +15414,7 @@
       </p:sp>
       <p:sp>
         <p:nvSpPr>
-          <p:cNvPr id="31" name="Shape 28"/>
+          <p:cNvPr id="32" name="Shape 28"/>
           <p:cNvSpPr/>
           <p:nvPr/>
         </p:nvSpPr>
@@ -15426,7 +15434,7 @@
       </p:sp>
       <p:sp>
         <p:nvSpPr>
-          <p:cNvPr id="32" name="Text 29"/>
+          <p:cNvPr id="33" name="Text 29"/>
           <p:cNvSpPr/>
           <p:nvPr/>
         </p:nvSpPr>
@@ -15465,7 +15473,7 @@
       </p:sp>
       <p:sp>
         <p:nvSpPr>
-          <p:cNvPr id="33" name="Text 30"/>
+          <p:cNvPr id="34" name="Text 30"/>
           <p:cNvSpPr/>
           <p:nvPr/>
         </p:nvSpPr>
@@ -15504,7 +15512,7 @@
       </p:sp>
       <p:sp>
         <p:nvSpPr>
-          <p:cNvPr id="34" name="Shape 31"/>
+          <p:cNvPr id="35" name="Shape 31"/>
           <p:cNvSpPr/>
           <p:nvPr/>
         </p:nvSpPr>
@@ -15531,7 +15539,7 @@
       </p:sp>
       <p:sp>
         <p:nvSpPr>
-          <p:cNvPr id="35" name="Shape 32"/>
+          <p:cNvPr id="36" name="Shape 32"/>
           <p:cNvSpPr/>
           <p:nvPr/>
         </p:nvSpPr>
@@ -15551,7 +15559,7 @@
       </p:sp>
       <p:sp>
         <p:nvSpPr>
-          <p:cNvPr id="36" name="Text 33"/>
+          <p:cNvPr id="37" name="Text 33"/>
           <p:cNvSpPr/>
           <p:nvPr/>
         </p:nvSpPr>
@@ -15590,7 +15598,7 @@
       </p:sp>
       <p:sp>
         <p:nvSpPr>
-          <p:cNvPr id="37" name="Text 34"/>
+          <p:cNvPr id="38" name="Text 34"/>
           <p:cNvSpPr/>
           <p:nvPr/>
         </p:nvSpPr>
@@ -15629,7 +15637,7 @@
       </p:sp>
       <p:sp>
         <p:nvSpPr>
-          <p:cNvPr id="38" name="Shape 35"/>
+          <p:cNvPr id="39" name="Shape 35"/>
           <p:cNvSpPr/>
           <p:nvPr/>
         </p:nvSpPr>
@@ -15651,7 +15659,7 @@
       </p:sp>
       <p:sp>
         <p:nvSpPr>
-          <p:cNvPr id="39" name="Shape 36"/>
+          <p:cNvPr id="40" name="Shape 36"/>
           <p:cNvSpPr/>
           <p:nvPr/>
         </p:nvSpPr>
@@ -15671,7 +15679,7 @@
       </p:sp>
       <p:sp>
         <p:nvSpPr>
-          <p:cNvPr id="40" name="Text 37"/>
+          <p:cNvPr id="41" name="Text 37"/>
           <p:cNvSpPr/>
           <p:nvPr/>
         </p:nvSpPr>
@@ -15710,7 +15718,7 @@
       </p:sp>
       <p:sp>
         <p:nvSpPr>
-          <p:cNvPr id="41" name="Text 38"/>
+          <p:cNvPr id="42" name="Text 38"/>
           <p:cNvSpPr/>
           <p:nvPr/>
         </p:nvSpPr>
@@ -15749,7 +15757,7 @@
       </p:sp>
       <p:sp>
         <p:nvSpPr>
-          <p:cNvPr id="42" name="Shape 39"/>
+          <p:cNvPr id="43" name="Shape 39"/>
           <p:cNvSpPr/>
           <p:nvPr/>
         </p:nvSpPr>
@@ -15776,7 +15784,7 @@
       </p:sp>
       <p:sp>
         <p:nvSpPr>
-          <p:cNvPr id="43" name="Shape 40"/>
+          <p:cNvPr id="44" name="Shape 40"/>
           <p:cNvSpPr/>
           <p:nvPr/>
         </p:nvSpPr>
@@ -15796,7 +15804,7 @@
       </p:sp>
       <p:sp>
         <p:nvSpPr>
-          <p:cNvPr id="44" name="Text 41"/>
+          <p:cNvPr id="45" name="Text 41"/>
           <p:cNvSpPr/>
           <p:nvPr/>
         </p:nvSpPr>
@@ -15835,7 +15843,7 @@
       </p:sp>
       <p:sp>
         <p:nvSpPr>
-          <p:cNvPr id="45" name="Text 42"/>
+          <p:cNvPr id="46" name="Text 42"/>
           <p:cNvSpPr/>
           <p:nvPr/>
         </p:nvSpPr>
@@ -15874,7 +15882,7 @@
       </p:sp>
       <p:sp>
         <p:nvSpPr>
-          <p:cNvPr id="46" name="Shape 43"/>
+          <p:cNvPr id="47" name="Shape 43"/>
           <p:cNvSpPr/>
           <p:nvPr/>
         </p:nvSpPr>
@@ -15901,7 +15909,7 @@
       </p:sp>
       <p:sp>
         <p:nvSpPr>
-          <p:cNvPr id="47" name="Shape 44"/>
+          <p:cNvPr id="48" name="Shape 44"/>
           <p:cNvSpPr/>
           <p:nvPr/>
         </p:nvSpPr>
@@ -15921,7 +15929,7 @@
       </p:sp>
       <p:sp>
         <p:nvSpPr>
-          <p:cNvPr id="48" name="Text 45"/>
+          <p:cNvPr id="49" name="Text 45"/>
           <p:cNvSpPr/>
           <p:nvPr/>
         </p:nvSpPr>
@@ -15960,7 +15968,7 @@
       </p:sp>
       <p:sp>
         <p:nvSpPr>
-          <p:cNvPr id="49" name="Text 46"/>
+          <p:cNvPr id="50" name="Text 46"/>
           <p:cNvSpPr/>
           <p:nvPr/>
         </p:nvSpPr>
@@ -15999,7 +16007,7 @@
       </p:sp>
       <p:sp>
         <p:nvSpPr>
-          <p:cNvPr id="50" name="Shape 47"/>
+          <p:cNvPr id="51" name="Shape 47"/>
           <p:cNvSpPr/>
           <p:nvPr/>
         </p:nvSpPr>
@@ -16026,7 +16034,7 @@
       </p:sp>
       <p:sp>
         <p:nvSpPr>
-          <p:cNvPr id="51" name="Text 48"/>
+          <p:cNvPr id="52" name="Text 48"/>
           <p:cNvSpPr/>
           <p:nvPr/>
         </p:nvSpPr>
@@ -16314,7 +16322,7 @@
       </p:pic>
       <p:sp>
         <p:nvSpPr>
-          <p:cNvPr id="7" name="Shape 4"/>
+          <p:cNvPr id="8" name="Shape 4"/>
           <p:cNvSpPr/>
           <p:nvPr/>
         </p:nvSpPr>
@@ -16341,7 +16349,7 @@
       </p:sp>
       <p:sp>
         <p:nvSpPr>
-          <p:cNvPr id="8" name="Text 5"/>
+          <p:cNvPr id="9" name="Text 5"/>
           <p:cNvSpPr/>
           <p:nvPr/>
         </p:nvSpPr>
@@ -16380,7 +16388,7 @@
       </p:sp>
       <p:sp>
         <p:nvSpPr>
-          <p:cNvPr id="9" name="Text 6"/>
+          <p:cNvPr id="10" name="Text 6"/>
           <p:cNvSpPr/>
           <p:nvPr/>
         </p:nvSpPr>
@@ -16422,7 +16430,7 @@
       </p:sp>
       <p:sp>
         <p:nvSpPr>
-          <p:cNvPr id="10" name="Shape 7"/>
+          <p:cNvPr id="11" name="Shape 7"/>
           <p:cNvSpPr/>
           <p:nvPr/>
         </p:nvSpPr>
@@ -16449,7 +16457,7 @@
       </p:sp>
       <p:sp>
         <p:nvSpPr>
-          <p:cNvPr id="11" name="Text 8"/>
+          <p:cNvPr id="12" name="Text 8"/>
           <p:cNvSpPr/>
           <p:nvPr/>
         </p:nvSpPr>
@@ -16488,7 +16496,7 @@
       </p:sp>
       <p:sp>
         <p:nvSpPr>
-          <p:cNvPr id="12" name="Text 9"/>
+          <p:cNvPr id="13" name="Text 9"/>
           <p:cNvSpPr/>
           <p:nvPr/>
         </p:nvSpPr>
@@ -16530,7 +16538,7 @@
       </p:sp>
       <p:sp>
         <p:nvSpPr>
-          <p:cNvPr id="13" name="Shape 10"/>
+          <p:cNvPr id="14" name="Shape 10"/>
           <p:cNvSpPr/>
           <p:nvPr/>
         </p:nvSpPr>
@@ -16557,7 +16565,7 @@
       </p:sp>
       <p:sp>
         <p:nvSpPr>
-          <p:cNvPr id="14" name="Text 11"/>
+          <p:cNvPr id="15" name="Text 11"/>
           <p:cNvSpPr/>
           <p:nvPr/>
         </p:nvSpPr>
@@ -16596,7 +16604,7 @@
       </p:sp>
       <p:sp>
         <p:nvSpPr>
-          <p:cNvPr id="15" name="Text 12"/>
+          <p:cNvPr id="16" name="Text 12"/>
           <p:cNvSpPr/>
           <p:nvPr/>
         </p:nvSpPr>
@@ -16638,7 +16646,7 @@
       </p:sp>
       <p:sp>
         <p:nvSpPr>
-          <p:cNvPr id="16" name="Shape 13"/>
+          <p:cNvPr id="17" name="Shape 13"/>
           <p:cNvSpPr/>
           <p:nvPr/>
         </p:nvSpPr>
@@ -16665,7 +16673,7 @@
       </p:sp>
       <p:sp>
         <p:nvSpPr>
-          <p:cNvPr id="17" name="Text 14"/>
+          <p:cNvPr id="18" name="Text 14"/>
           <p:cNvSpPr/>
           <p:nvPr/>
         </p:nvSpPr>
@@ -16704,7 +16712,7 @@
       </p:sp>
       <p:sp>
         <p:nvSpPr>
-          <p:cNvPr id="18" name="Text 15"/>
+          <p:cNvPr id="19" name="Text 15"/>
           <p:cNvSpPr/>
           <p:nvPr/>
         </p:nvSpPr>
@@ -16746,7 +16754,7 @@
       </p:sp>
       <p:sp>
         <p:nvSpPr>
-          <p:cNvPr id="19" name="Shape 16"/>
+          <p:cNvPr id="20" name="Shape 16"/>
           <p:cNvSpPr/>
           <p:nvPr/>
         </p:nvSpPr>
@@ -16773,7 +16781,7 @@
       </p:sp>
       <p:sp>
         <p:nvSpPr>
-          <p:cNvPr id="20" name="Text 17"/>
+          <p:cNvPr id="21" name="Text 17"/>
           <p:cNvSpPr/>
           <p:nvPr/>
         </p:nvSpPr>
@@ -16812,7 +16820,7 @@
       </p:sp>
       <p:sp>
         <p:nvSpPr>
-          <p:cNvPr id="21" name="Text 18"/>
+          <p:cNvPr id="22" name="Text 18"/>
           <p:cNvSpPr/>
           <p:nvPr/>
         </p:nvSpPr>
@@ -16854,7 +16862,7 @@
       </p:sp>
       <p:sp>
         <p:nvSpPr>
-          <p:cNvPr id="22" name="Shape 19"/>
+          <p:cNvPr id="23" name="Shape 19"/>
           <p:cNvSpPr/>
           <p:nvPr/>
         </p:nvSpPr>
@@ -16881,7 +16889,7 @@
       </p:sp>
       <p:sp>
         <p:nvSpPr>
-          <p:cNvPr id="23" name="Text 20"/>
+          <p:cNvPr id="24" name="Text 20"/>
           <p:cNvSpPr/>
           <p:nvPr/>
         </p:nvSpPr>
@@ -16920,7 +16928,7 @@
       </p:sp>
       <p:sp>
         <p:nvSpPr>
-          <p:cNvPr id="24" name="Text 21"/>
+          <p:cNvPr id="25" name="Text 21"/>
           <p:cNvSpPr/>
           <p:nvPr/>
         </p:nvSpPr>
@@ -16962,7 +16970,7 @@
       </p:sp>
       <p:sp>
         <p:nvSpPr>
-          <p:cNvPr id="25" name="Shape 22"/>
+          <p:cNvPr id="26" name="Shape 22"/>
           <p:cNvSpPr/>
           <p:nvPr/>
         </p:nvSpPr>
@@ -16989,7 +16997,7 @@
       </p:sp>
       <p:sp>
         <p:nvSpPr>
-          <p:cNvPr id="26" name="Text 23"/>
+          <p:cNvPr id="27" name="Text 23"/>
           <p:cNvSpPr/>
           <p:nvPr/>
         </p:nvSpPr>
@@ -17195,7 +17203,7 @@
         </p:nvSpPr>
         <p:spPr>
           <a:xfrm>
-            <a:off x="1280160" y="1024128"/>
+            <a:off x="1280160" y="1193140"/>
             <a:ext cx="777240" cy="256032"/>
           </a:xfrm>
           <a:prstGeom prst="roundRect">
@@ -17217,7 +17225,7 @@
         </p:nvSpPr>
         <p:spPr>
           <a:xfrm>
-            <a:off x="1280160" y="1024128"/>
+            <a:off x="1280160" y="1193140"/>
             <a:ext cx="777240" cy="256032"/>
           </a:xfrm>
           <a:prstGeom prst="rect">
@@ -17274,7 +17282,7 @@
       </p:pic>
       <p:sp>
         <p:nvSpPr>
-          <p:cNvPr id="7" name="Shape 4"/>
+          <p:cNvPr id="8" name="Shape 4"/>
           <p:cNvSpPr/>
           <p:nvPr/>
         </p:nvSpPr>
@@ -17296,7 +17304,7 @@
       </p:sp>
       <p:sp>
         <p:nvSpPr>
-          <p:cNvPr id="8" name="Text 5"/>
+          <p:cNvPr id="9" name="Text 5"/>
           <p:cNvSpPr/>
           <p:nvPr/>
         </p:nvSpPr>
@@ -17335,7 +17343,7 @@
       </p:sp>
       <p:sp>
         <p:nvSpPr>
-          <p:cNvPr id="9" name="Shape 6"/>
+          <p:cNvPr id="10" name="Shape 6"/>
           <p:cNvSpPr/>
           <p:nvPr/>
         </p:nvSpPr>
@@ -17358,7 +17366,7 @@
       </p:sp>
       <p:sp>
         <p:nvSpPr>
-          <p:cNvPr id="10" name="Shape 7"/>
+          <p:cNvPr id="11" name="Shape 7"/>
           <p:cNvSpPr/>
           <p:nvPr/>
         </p:nvSpPr>
@@ -17378,7 +17386,7 @@
       </p:sp>
       <p:sp>
         <p:nvSpPr>
-          <p:cNvPr id="11" name="Shape 8"/>
+          <p:cNvPr id="12" name="Shape 8"/>
           <p:cNvSpPr/>
           <p:nvPr/>
         </p:nvSpPr>
@@ -17400,7 +17408,7 @@
       </p:sp>
       <p:sp>
         <p:nvSpPr>
-          <p:cNvPr id="12" name="Text 9"/>
+          <p:cNvPr id="13" name="Text 9"/>
           <p:cNvSpPr/>
           <p:nvPr/>
         </p:nvSpPr>
@@ -17439,7 +17447,7 @@
       </p:sp>
       <p:sp>
         <p:nvSpPr>
-          <p:cNvPr id="13" name="Shape 10"/>
+          <p:cNvPr id="14" name="Shape 10"/>
           <p:cNvSpPr/>
           <p:nvPr/>
         </p:nvSpPr>
@@ -17462,7 +17470,7 @@
       </p:sp>
       <p:sp>
         <p:nvSpPr>
-          <p:cNvPr id="14" name="Shape 11"/>
+          <p:cNvPr id="15" name="Shape 11"/>
           <p:cNvSpPr/>
           <p:nvPr/>
         </p:nvSpPr>
@@ -17482,7 +17490,7 @@
       </p:sp>
       <p:sp>
         <p:nvSpPr>
-          <p:cNvPr id="15" name="Shape 12"/>
+          <p:cNvPr id="16" name="Shape 12"/>
           <p:cNvSpPr/>
           <p:nvPr/>
         </p:nvSpPr>
@@ -17504,7 +17512,7 @@
       </p:sp>
       <p:sp>
         <p:nvSpPr>
-          <p:cNvPr id="16" name="Text 13"/>
+          <p:cNvPr id="17" name="Text 13"/>
           <p:cNvSpPr/>
           <p:nvPr/>
         </p:nvSpPr>
@@ -17543,7 +17551,7 @@
       </p:sp>
       <p:sp>
         <p:nvSpPr>
-          <p:cNvPr id="17" name="Shape 14"/>
+          <p:cNvPr id="18" name="Shape 14"/>
           <p:cNvSpPr/>
           <p:nvPr/>
         </p:nvSpPr>
@@ -17566,7 +17574,7 @@
       </p:sp>
       <p:sp>
         <p:nvSpPr>
-          <p:cNvPr id="18" name="Shape 15"/>
+          <p:cNvPr id="19" name="Shape 15"/>
           <p:cNvSpPr/>
           <p:nvPr/>
         </p:nvSpPr>
@@ -17586,7 +17594,7 @@
       </p:sp>
       <p:sp>
         <p:nvSpPr>
-          <p:cNvPr id="19" name="Shape 16"/>
+          <p:cNvPr id="20" name="Shape 16"/>
           <p:cNvSpPr/>
           <p:nvPr/>
         </p:nvSpPr>
@@ -17608,7 +17616,7 @@
       </p:sp>
       <p:sp>
         <p:nvSpPr>
-          <p:cNvPr id="20" name="Text 17"/>
+          <p:cNvPr id="21" name="Text 17"/>
           <p:cNvSpPr/>
           <p:nvPr/>
         </p:nvSpPr>
@@ -17647,7 +17655,7 @@
       </p:sp>
       <p:sp>
         <p:nvSpPr>
-          <p:cNvPr id="21" name="Shape 18"/>
+          <p:cNvPr id="22" name="Shape 18"/>
           <p:cNvSpPr/>
           <p:nvPr/>
         </p:nvSpPr>
@@ -17674,7 +17682,7 @@
       </p:sp>
       <p:sp>
         <p:nvSpPr>
-          <p:cNvPr id="22" name="Text 19"/>
+          <p:cNvPr id="23" name="Text 19"/>
           <p:cNvSpPr/>
           <p:nvPr/>
         </p:nvSpPr>
@@ -17713,7 +17721,7 @@
       </p:sp>
       <p:sp>
         <p:nvSpPr>
-          <p:cNvPr id="23" name="Text 20"/>
+          <p:cNvPr id="24" name="Text 20"/>
           <p:cNvSpPr/>
           <p:nvPr/>
         </p:nvSpPr>
@@ -17747,7 +17755,7 @@
                 <a:ea typeface="Montserrat" pitchFamily="34" charset="-122"/>
                 <a:cs typeface="Montserrat" pitchFamily="34" charset="-120"/>
               </a:rPr>
-              <a:t>залежить від моделі, довжини контексту, поведінки користувачів і навіть від того, як ви склеюєте промпт</a:t>
+              <a:t>залежить від моделі, контексту, поведінки користувачів і склейки промпта</a:t>
             </a:r>
             <a:endParaRPr lang="en-US" sz="1200" dirty="0"/>
           </a:p>
@@ -17755,7 +17763,7 @@
       </p:sp>
       <p:sp>
         <p:nvSpPr>
-          <p:cNvPr id="24" name="Shape 21"/>
+          <p:cNvPr id="25" name="Shape 21"/>
           <p:cNvSpPr/>
           <p:nvPr/>
         </p:nvSpPr>
@@ -17777,7 +17785,7 @@
       </p:sp>
       <p:sp>
         <p:nvSpPr>
-          <p:cNvPr id="25" name="Text 22"/>
+          <p:cNvPr id="26" name="Text 22"/>
           <p:cNvSpPr/>
           <p:nvPr/>
         </p:nvSpPr>
@@ -17816,7 +17824,7 @@
       </p:sp>
       <p:sp>
         <p:nvSpPr>
-          <p:cNvPr id="26" name="Text 23"/>
+          <p:cNvPr id="27" name="Text 23"/>
           <p:cNvSpPr/>
           <p:nvPr/>
         </p:nvSpPr>
@@ -17850,7 +17858,7 @@
                 <a:ea typeface="Montserrat" pitchFamily="34" charset="-122"/>
                 <a:cs typeface="Montserrat" pitchFamily="34" charset="-120"/>
               </a:rPr>
-              <a:t>перевірки на кшталт LLM-as-judge — такі самі токени; не рахувати їх означає недооцінити рахунок</a:t>
+              <a:t>LLM-as-judge — такі самі токени; не рахувати = недооцінити рахунок</a:t>
             </a:r>
             <a:endParaRPr lang="en-US" sz="1200" dirty="0"/>
           </a:p>
@@ -17858,7 +17866,7 @@
       </p:sp>
       <p:sp>
         <p:nvSpPr>
-          <p:cNvPr id="27" name="Shape 24"/>
+          <p:cNvPr id="28" name="Shape 24"/>
           <p:cNvSpPr/>
           <p:nvPr/>
         </p:nvSpPr>
@@ -17880,7 +17888,7 @@
       </p:sp>
       <p:sp>
         <p:nvSpPr>
-          <p:cNvPr id="28" name="Text 25"/>
+          <p:cNvPr id="29" name="Text 25"/>
           <p:cNvSpPr/>
           <p:nvPr/>
         </p:nvSpPr>
@@ -17919,7 +17927,7 @@
       </p:sp>
       <p:sp>
         <p:nvSpPr>
-          <p:cNvPr id="29" name="Text 26"/>
+          <p:cNvPr id="30" name="Text 26"/>
           <p:cNvSpPr/>
           <p:nvPr/>
         </p:nvSpPr>
@@ -17953,7 +17961,7 @@
                 <a:ea typeface="Montserrat" pitchFamily="34" charset="-122"/>
                 <a:cs typeface="Montserrat" pitchFamily="34" charset="-120"/>
               </a:rPr>
-              <a:t>Рахується все, що ходить у модель: бойові запити, ретраї, класифікатори і власні перевірки якості.</a:t>
+              <a:t>Рахується все, що ходить у модель: запити, ретраї, класифікатори, evals.</a:t>
             </a:r>
             <a:endParaRPr lang="en-US" sz="1300" dirty="0"/>
           </a:p>
@@ -18204,7 +18212,7 @@
       </p:pic>
       <p:sp>
         <p:nvSpPr>
-          <p:cNvPr id="7" name="Shape 4"/>
+          <p:cNvPr id="8" name="Shape 4"/>
           <p:cNvSpPr/>
           <p:nvPr/>
         </p:nvSpPr>
@@ -18231,7 +18239,7 @@
       </p:sp>
       <p:sp>
         <p:nvSpPr>
-          <p:cNvPr id="8" name="Text 5"/>
+          <p:cNvPr id="9" name="Text 5"/>
           <p:cNvSpPr/>
           <p:nvPr/>
         </p:nvSpPr>
@@ -18378,7 +18386,7 @@
       </p:sp>
       <p:sp>
         <p:nvSpPr>
-          <p:cNvPr id="9" name="Shape 6"/>
+          <p:cNvPr id="10" name="Shape 6"/>
           <p:cNvSpPr/>
           <p:nvPr/>
         </p:nvSpPr>
@@ -18400,7 +18408,7 @@
       </p:sp>
       <p:sp>
         <p:nvSpPr>
-          <p:cNvPr id="10" name="Text 7"/>
+          <p:cNvPr id="11" name="Text 7"/>
           <p:cNvSpPr/>
           <p:nvPr/>
         </p:nvSpPr>
@@ -18442,7 +18450,7 @@
       </p:sp>
       <p:sp>
         <p:nvSpPr>
-          <p:cNvPr id="11" name="Shape 8"/>
+          <p:cNvPr id="12" name="Shape 8"/>
           <p:cNvSpPr/>
           <p:nvPr/>
         </p:nvSpPr>
@@ -18464,7 +18472,7 @@
       </p:sp>
       <p:sp>
         <p:nvSpPr>
-          <p:cNvPr id="12" name="Text 9"/>
+          <p:cNvPr id="13" name="Text 9"/>
           <p:cNvSpPr/>
           <p:nvPr/>
         </p:nvSpPr>
@@ -18503,7 +18511,7 @@
       </p:sp>
       <p:sp>
         <p:nvSpPr>
-          <p:cNvPr id="13" name="Text 10"/>
+          <p:cNvPr id="14" name="Text 10"/>
           <p:cNvSpPr/>
           <p:nvPr/>
         </p:nvSpPr>
@@ -18545,7 +18553,7 @@
       </p:sp>
       <p:sp>
         <p:nvSpPr>
-          <p:cNvPr id="14" name="Shape 11"/>
+          <p:cNvPr id="15" name="Shape 11"/>
           <p:cNvSpPr/>
           <p:nvPr/>
         </p:nvSpPr>
@@ -18572,7 +18580,7 @@
       </p:sp>
       <p:sp>
         <p:nvSpPr>
-          <p:cNvPr id="15" name="Text 12"/>
+          <p:cNvPr id="16" name="Text 12"/>
           <p:cNvSpPr/>
           <p:nvPr/>
         </p:nvSpPr>
@@ -18611,7 +18619,7 @@
       </p:sp>
       <p:sp>
         <p:nvSpPr>
-          <p:cNvPr id="16" name="Text 13"/>
+          <p:cNvPr id="17" name="Text 13"/>
           <p:cNvSpPr/>
           <p:nvPr/>
         </p:nvSpPr>
@@ -18653,7 +18661,7 @@
       </p:sp>
       <p:sp>
         <p:nvSpPr>
-          <p:cNvPr id="17" name="Shape 14"/>
+          <p:cNvPr id="18" name="Shape 14"/>
           <p:cNvSpPr/>
           <p:nvPr/>
         </p:nvSpPr>
@@ -18680,7 +18688,7 @@
       </p:sp>
       <p:sp>
         <p:nvSpPr>
-          <p:cNvPr id="18" name="Text 15"/>
+          <p:cNvPr id="19" name="Text 15"/>
           <p:cNvSpPr/>
           <p:nvPr/>
         </p:nvSpPr>
@@ -18719,7 +18727,7 @@
       </p:sp>
       <p:sp>
         <p:nvSpPr>
-          <p:cNvPr id="19" name="Text 16"/>
+          <p:cNvPr id="20" name="Text 16"/>
           <p:cNvSpPr/>
           <p:nvPr/>
         </p:nvSpPr>
@@ -18953,7 +18961,7 @@
                 <a:ea typeface="Montserrat" pitchFamily="34" charset="-122"/>
                 <a:cs typeface="Montserrat" pitchFamily="34" charset="-120"/>
               </a:rPr>
-              <a:t>Українською той самий зміст обходиться дорожче — кирилиця скромніше представлена у словниках токенізаторів</a:t>
+              <a:t>Українською той самий зміст дорожчий: кирилиця гірше представлена в токенізаторах</a:t>
             </a:r>
             <a:endParaRPr lang="en-US" sz="1300" dirty="0"/>
           </a:p>
@@ -19046,7 +19054,7 @@
       </p:pic>
       <p:sp>
         <p:nvSpPr>
-          <p:cNvPr id="8" name="Shape 5"/>
+          <p:cNvPr id="9" name="Shape 5"/>
           <p:cNvSpPr/>
           <p:nvPr/>
         </p:nvSpPr>
@@ -19068,7 +19076,7 @@
       </p:sp>
       <p:sp>
         <p:nvSpPr>
-          <p:cNvPr id="9" name="Shape 6"/>
+          <p:cNvPr id="10" name="Shape 6"/>
           <p:cNvSpPr/>
           <p:nvPr/>
         </p:nvSpPr>
@@ -19088,7 +19096,7 @@
       </p:sp>
       <p:sp>
         <p:nvSpPr>
-          <p:cNvPr id="10" name="Text 7"/>
+          <p:cNvPr id="11" name="Text 7"/>
           <p:cNvSpPr/>
           <p:nvPr/>
         </p:nvSpPr>
@@ -19127,7 +19135,7 @@
       </p:sp>
       <p:sp>
         <p:nvSpPr>
-          <p:cNvPr id="11" name="Text 8"/>
+          <p:cNvPr id="12" name="Text 8"/>
           <p:cNvSpPr/>
           <p:nvPr/>
         </p:nvSpPr>
@@ -19166,7 +19174,7 @@
       </p:sp>
       <p:sp>
         <p:nvSpPr>
-          <p:cNvPr id="12" name="Text 9"/>
+          <p:cNvPr id="13" name="Text 9"/>
           <p:cNvSpPr/>
           <p:nvPr/>
         </p:nvSpPr>
@@ -19208,7 +19216,7 @@
       </p:sp>
       <p:sp>
         <p:nvSpPr>
-          <p:cNvPr id="13" name="Shape 10"/>
+          <p:cNvPr id="14" name="Shape 10"/>
           <p:cNvSpPr/>
           <p:nvPr/>
         </p:nvSpPr>
@@ -19230,7 +19238,7 @@
       </p:sp>
       <p:sp>
         <p:nvSpPr>
-          <p:cNvPr id="14" name="Shape 11"/>
+          <p:cNvPr id="15" name="Shape 11"/>
           <p:cNvSpPr/>
           <p:nvPr/>
         </p:nvSpPr>
@@ -19250,7 +19258,7 @@
       </p:sp>
       <p:sp>
         <p:nvSpPr>
-          <p:cNvPr id="15" name="Text 12"/>
+          <p:cNvPr id="16" name="Text 12"/>
           <p:cNvSpPr/>
           <p:nvPr/>
         </p:nvSpPr>
@@ -19289,7 +19297,7 @@
       </p:sp>
       <p:sp>
         <p:nvSpPr>
-          <p:cNvPr id="16" name="Text 13"/>
+          <p:cNvPr id="17" name="Text 13"/>
           <p:cNvSpPr/>
           <p:nvPr/>
         </p:nvSpPr>
@@ -19328,7 +19336,7 @@
       </p:sp>
       <p:sp>
         <p:nvSpPr>
-          <p:cNvPr id="17" name="Text 14"/>
+          <p:cNvPr id="18" name="Text 14"/>
           <p:cNvSpPr/>
           <p:nvPr/>
         </p:nvSpPr>
@@ -19370,7 +19378,7 @@
       </p:sp>
       <p:sp>
         <p:nvSpPr>
-          <p:cNvPr id="18" name="Shape 15"/>
+          <p:cNvPr id="19" name="Shape 15"/>
           <p:cNvSpPr/>
           <p:nvPr/>
         </p:nvSpPr>
@@ -19392,7 +19400,7 @@
       </p:sp>
       <p:sp>
         <p:nvSpPr>
-          <p:cNvPr id="19" name="Shape 16"/>
+          <p:cNvPr id="20" name="Shape 16"/>
           <p:cNvSpPr/>
           <p:nvPr/>
         </p:nvSpPr>
@@ -19412,7 +19420,7 @@
       </p:sp>
       <p:sp>
         <p:nvSpPr>
-          <p:cNvPr id="20" name="Text 17"/>
+          <p:cNvPr id="21" name="Text 17"/>
           <p:cNvSpPr/>
           <p:nvPr/>
         </p:nvSpPr>
@@ -19451,7 +19459,7 @@
       </p:sp>
       <p:sp>
         <p:nvSpPr>
-          <p:cNvPr id="21" name="Text 18"/>
+          <p:cNvPr id="22" name="Text 18"/>
           <p:cNvSpPr/>
           <p:nvPr/>
         </p:nvSpPr>
@@ -19490,7 +19498,7 @@
       </p:sp>
       <p:sp>
         <p:nvSpPr>
-          <p:cNvPr id="22" name="Text 19"/>
+          <p:cNvPr id="23" name="Text 19"/>
           <p:cNvSpPr/>
           <p:nvPr/>
         </p:nvSpPr>
@@ -19532,7 +19540,7 @@
       </p:sp>
       <p:sp>
         <p:nvSpPr>
-          <p:cNvPr id="23" name="Shape 20"/>
+          <p:cNvPr id="24" name="Shape 20"/>
           <p:cNvSpPr/>
           <p:nvPr/>
         </p:nvSpPr>
@@ -19554,7 +19562,7 @@
       </p:sp>
       <p:sp>
         <p:nvSpPr>
-          <p:cNvPr id="24" name="Text 21"/>
+          <p:cNvPr id="25" name="Text 21"/>
           <p:cNvSpPr/>
           <p:nvPr/>
         </p:nvSpPr>
@@ -19593,7 +19601,7 @@
       </p:sp>
       <p:sp>
         <p:nvSpPr>
-          <p:cNvPr id="25" name="Text 22"/>
+          <p:cNvPr id="26" name="Text 22"/>
           <p:cNvSpPr/>
           <p:nvPr/>
         </p:nvSpPr>
@@ -19627,7 +19635,7 @@
                 <a:ea typeface="Montserrat" pitchFamily="34" charset="-122"/>
                 <a:cs typeface="Montserrat" pitchFamily="34" charset="-120"/>
               </a:rPr>
-              <a:t>Економити на промпті замість економити на моделі й повторах. «Скоротимо промпт на 30%» — економія в межах найдешевшої ставки; перевести просте питання на дешеву модель — різниця в разах.</a:t>
+              <a:t>Економія на промпті — у межах найдешевшої ставки; зміна моделі — різниця в разах.</a:t>
             </a:r>
             <a:endParaRPr lang="en-US" sz="1300" dirty="0"/>
           </a:p>
@@ -19878,7 +19886,7 @@
       </p:pic>
       <p:sp>
         <p:nvSpPr>
-          <p:cNvPr id="7" name="Shape 4"/>
+          <p:cNvPr id="8" name="Shape 4"/>
           <p:cNvSpPr/>
           <p:nvPr/>
         </p:nvSpPr>
@@ -19905,7 +19913,7 @@
       </p:sp>
       <p:sp>
         <p:nvSpPr>
-          <p:cNvPr id="8" name="Text 5"/>
+          <p:cNvPr id="9" name="Text 5"/>
           <p:cNvSpPr/>
           <p:nvPr/>
         </p:nvSpPr>
@@ -20047,7 +20055,7 @@
       </p:sp>
       <p:sp>
         <p:nvSpPr>
-          <p:cNvPr id="9" name="Shape 6"/>
+          <p:cNvPr id="10" name="Shape 6"/>
           <p:cNvSpPr/>
           <p:nvPr/>
         </p:nvSpPr>
@@ -20069,7 +20077,7 @@
       </p:sp>
       <p:sp>
         <p:nvSpPr>
-          <p:cNvPr id="10" name="Text 7"/>
+          <p:cNvPr id="11" name="Text 7"/>
           <p:cNvSpPr/>
           <p:nvPr/>
         </p:nvSpPr>
@@ -20108,7 +20116,7 @@
       </p:sp>
       <p:sp>
         <p:nvSpPr>
-          <p:cNvPr id="11" name="Text 8"/>
+          <p:cNvPr id="12" name="Text 8"/>
           <p:cNvSpPr/>
           <p:nvPr/>
         </p:nvSpPr>
@@ -20147,7 +20155,7 @@
       </p:sp>
       <p:sp>
         <p:nvSpPr>
-          <p:cNvPr id="12" name="Shape 9"/>
+          <p:cNvPr id="13" name="Shape 9"/>
           <p:cNvSpPr/>
           <p:nvPr/>
         </p:nvSpPr>
@@ -20169,7 +20177,7 @@
       </p:sp>
       <p:sp>
         <p:nvSpPr>
-          <p:cNvPr id="13" name="Text 10"/>
+          <p:cNvPr id="14" name="Text 10"/>
           <p:cNvSpPr/>
           <p:nvPr/>
         </p:nvSpPr>
@@ -20208,7 +20216,7 @@
       </p:sp>
       <p:sp>
         <p:nvSpPr>
-          <p:cNvPr id="14" name="Text 11"/>
+          <p:cNvPr id="15" name="Text 11"/>
           <p:cNvSpPr/>
           <p:nvPr/>
         </p:nvSpPr>
@@ -20247,7 +20255,7 @@
       </p:sp>
       <p:sp>
         <p:nvSpPr>
-          <p:cNvPr id="15" name="Shape 12"/>
+          <p:cNvPr id="16" name="Shape 12"/>
           <p:cNvSpPr/>
           <p:nvPr/>
         </p:nvSpPr>
@@ -20269,7 +20277,7 @@
       </p:sp>
       <p:sp>
         <p:nvSpPr>
-          <p:cNvPr id="16" name="Text 13"/>
+          <p:cNvPr id="17" name="Text 13"/>
           <p:cNvSpPr/>
           <p:nvPr/>
         </p:nvSpPr>
@@ -20303,7 +20311,7 @@
                 <a:ea typeface="Montserrat" pitchFamily="34" charset="-122"/>
                 <a:cs typeface="Montserrat" pitchFamily="34" charset="-120"/>
               </a:rPr>
-              <a:t>Пропорції, а не абсолютні цифри, визначають рішення — тому routing з уроку 3 і є головним важелем економії.</a:t>
+              <a:t>Рішення визначають пропорції, не абсолютні цифри — тому routing і є важелем.</a:t>
             </a:r>
             <a:endParaRPr lang="en-US" sz="1300" dirty="0"/>
           </a:p>
@@ -20311,7 +20319,7 @@
       </p:sp>
       <p:sp>
         <p:nvSpPr>
-          <p:cNvPr id="17" name="Shape 14"/>
+          <p:cNvPr id="18" name="Shape 14"/>
           <p:cNvSpPr/>
           <p:nvPr/>
         </p:nvSpPr>
@@ -20338,7 +20346,7 @@
       </p:sp>
       <p:sp>
         <p:nvSpPr>
-          <p:cNvPr id="18" name="Text 15"/>
+          <p:cNvPr id="19" name="Text 15"/>
           <p:cNvSpPr/>
           <p:nvPr/>
         </p:nvSpPr>
@@ -20377,7 +20385,7 @@
       </p:sp>
       <p:sp>
         <p:nvSpPr>
-          <p:cNvPr id="19" name="Text 16"/>
+          <p:cNvPr id="20" name="Text 16"/>
           <p:cNvSpPr/>
           <p:nvPr/>
         </p:nvSpPr>
@@ -20411,7 +20419,7 @@
                 <a:ea typeface="Montserrat" pitchFamily="34" charset="-122"/>
                 <a:cs typeface="Montserrat" pitchFamily="34" charset="-120"/>
               </a:rPr>
-              <a:t>Прайс лежить біля точки рішення: ціна моделі — вхідний параметр вибору, а не бухгалтерська довідка.</a:t>
+              <a:t>Прайс біля точки рішення: ціна — параметр вибору, не бухгалтерська довідка.</a:t>
             </a:r>
             <a:endParaRPr lang="en-US" sz="1300" dirty="0"/>
           </a:p>
@@ -20583,7 +20591,7 @@
         </p:nvSpPr>
         <p:spPr>
           <a:xfrm>
-            <a:off x="1280160" y="1024128"/>
+            <a:off x="1280160" y="1193140"/>
             <a:ext cx="777240" cy="256032"/>
           </a:xfrm>
           <a:prstGeom prst="roundRect">
@@ -20605,7 +20613,7 @@
         </p:nvSpPr>
         <p:spPr>
           <a:xfrm>
-            <a:off x="1280160" y="1024128"/>
+            <a:off x="1280160" y="1193140"/>
             <a:ext cx="777240" cy="256032"/>
           </a:xfrm>
           <a:prstGeom prst="rect">
@@ -20662,7 +20670,7 @@
       </p:pic>
       <p:sp>
         <p:nvSpPr>
-          <p:cNvPr id="7" name="Shape 4"/>
+          <p:cNvPr id="8" name="Shape 4"/>
           <p:cNvSpPr/>
           <p:nvPr/>
         </p:nvSpPr>
@@ -20684,7 +20692,7 @@
       </p:sp>
       <p:sp>
         <p:nvSpPr>
-          <p:cNvPr id="8" name="Text 5"/>
+          <p:cNvPr id="9" name="Text 5"/>
           <p:cNvSpPr/>
           <p:nvPr/>
         </p:nvSpPr>
@@ -20723,7 +20731,7 @@
       </p:sp>
       <p:sp>
         <p:nvSpPr>
-          <p:cNvPr id="9" name="Text 6"/>
+          <p:cNvPr id="10" name="Text 6"/>
           <p:cNvSpPr/>
           <p:nvPr/>
         </p:nvSpPr>
@@ -20765,7 +20773,7 @@
       </p:sp>
       <p:sp>
         <p:nvSpPr>
-          <p:cNvPr id="10" name="Shape 7"/>
+          <p:cNvPr id="11" name="Shape 7"/>
           <p:cNvSpPr/>
           <p:nvPr/>
         </p:nvSpPr>
@@ -20787,7 +20795,7 @@
       </p:sp>
       <p:sp>
         <p:nvSpPr>
-          <p:cNvPr id="11" name="Text 8"/>
+          <p:cNvPr id="12" name="Text 8"/>
           <p:cNvSpPr/>
           <p:nvPr/>
         </p:nvSpPr>
@@ -20826,7 +20834,7 @@
       </p:sp>
       <p:sp>
         <p:nvSpPr>
-          <p:cNvPr id="12" name="Text 9"/>
+          <p:cNvPr id="13" name="Text 9"/>
           <p:cNvSpPr/>
           <p:nvPr/>
         </p:nvSpPr>
@@ -20868,7 +20876,7 @@
       </p:sp>
       <p:sp>
         <p:nvSpPr>
-          <p:cNvPr id="13" name="Text 10"/>
+          <p:cNvPr id="14" name="Text 10"/>
           <p:cNvSpPr/>
           <p:nvPr/>
         </p:nvSpPr>
@@ -20907,7 +20915,7 @@
       </p:sp>
       <p:sp>
         <p:nvSpPr>
-          <p:cNvPr id="14" name="Shape 11"/>
+          <p:cNvPr id="15" name="Shape 11"/>
           <p:cNvSpPr/>
           <p:nvPr/>
         </p:nvSpPr>
@@ -20929,7 +20937,7 @@
       </p:sp>
       <p:sp>
         <p:nvSpPr>
-          <p:cNvPr id="15" name="Text 12"/>
+          <p:cNvPr id="16" name="Text 12"/>
           <p:cNvSpPr/>
           <p:nvPr/>
         </p:nvSpPr>
@@ -20968,7 +20976,7 @@
       </p:sp>
       <p:sp>
         <p:nvSpPr>
-          <p:cNvPr id="16" name="Text 13"/>
+          <p:cNvPr id="17" name="Text 13"/>
           <p:cNvSpPr/>
           <p:nvPr/>
         </p:nvSpPr>
@@ -21007,7 +21015,7 @@
       </p:sp>
       <p:sp>
         <p:nvSpPr>
-          <p:cNvPr id="17" name="Shape 14"/>
+          <p:cNvPr id="18" name="Shape 14"/>
           <p:cNvSpPr/>
           <p:nvPr/>
         </p:nvSpPr>
@@ -21029,7 +21037,7 @@
       </p:sp>
       <p:sp>
         <p:nvSpPr>
-          <p:cNvPr id="18" name="Text 15"/>
+          <p:cNvPr id="19" name="Text 15"/>
           <p:cNvSpPr/>
           <p:nvPr/>
         </p:nvSpPr>
@@ -21068,7 +21076,7 @@
       </p:sp>
       <p:sp>
         <p:nvSpPr>
-          <p:cNvPr id="19" name="Text 16"/>
+          <p:cNvPr id="20" name="Text 16"/>
           <p:cNvSpPr/>
           <p:nvPr/>
         </p:nvSpPr>
@@ -21107,7 +21115,7 @@
       </p:sp>
       <p:sp>
         <p:nvSpPr>
-          <p:cNvPr id="20" name="Shape 17"/>
+          <p:cNvPr id="21" name="Shape 17"/>
           <p:cNvSpPr/>
           <p:nvPr/>
         </p:nvSpPr>
@@ -21129,7 +21137,7 @@
       </p:sp>
       <p:sp>
         <p:nvSpPr>
-          <p:cNvPr id="21" name="Text 18"/>
+          <p:cNvPr id="22" name="Text 18"/>
           <p:cNvSpPr/>
           <p:nvPr/>
         </p:nvSpPr>
@@ -21168,7 +21176,7 @@
       </p:sp>
       <p:sp>
         <p:nvSpPr>
-          <p:cNvPr id="22" name="Shape 19"/>
+          <p:cNvPr id="23" name="Shape 19"/>
           <p:cNvSpPr/>
           <p:nvPr/>
         </p:nvSpPr>
@@ -21190,7 +21198,7 @@
       </p:sp>
       <p:sp>
         <p:nvSpPr>
-          <p:cNvPr id="23" name="Text 20"/>
+          <p:cNvPr id="24" name="Text 20"/>
           <p:cNvSpPr/>
           <p:nvPr/>
         </p:nvSpPr>
@@ -21229,7 +21237,7 @@
       </p:sp>
       <p:sp>
         <p:nvSpPr>
-          <p:cNvPr id="24" name="Text 21"/>
+          <p:cNvPr id="25" name="Text 21"/>
           <p:cNvSpPr/>
           <p:nvPr/>
         </p:nvSpPr>

--- a/docs/decks/L04.pptx
+++ b/docs/decks/L04.pptx
@@ -524,7 +524,7 @@
           <a:p>
             <a:r>
               <a:rPr lang="en-US" dirty="0"/>
-              <a:t>Вітаю на четвертому уроці. «Скільки коштує наш AI?» — питання, на яке більшість команд відповідає рахунком провайдера наприкінці місяця. І це запізно: вартість LLM-фічі — не константа, вона залежить від моделі, довжини контексту, поведінки користувачів і навіть від того, як ви склеюєте промпт. Сьогодні наша система навчиться знати вартість кожного запиту в момент відповіді. Заведемо прайс моделей у сервісі, порахуємо просту формулу поверх usage, заповнимо поле cost_usd, яке стояло порожнім із першого уроку, і оживимо плитку «Вартість сьогодні» з бюджетом поруч. Це другий урок тижня «Routing + cost» — і саме сьогодні минулий урок окупиться на очах: ви побачите в базі, що ескалація на сильну модель коштує в рази більше за звичайне питання, і вперше порахуєте важіль роутингу в доларах, а не у відчуттях.</a:t>
+              <a:t/>
             </a:r>
             <a:endParaRPr lang="en-US" dirty="0"/>
           </a:p>
@@ -612,7 +612,7 @@
           <a:p>
             <a:r>
               <a:rPr lang="en-US" dirty="0"/>
-              <a:t>Другий шматок — сама вартість. Після парсингу відповіді, поруч із latency_ms: беремо usage, дістаємо ціну моделі з прайсу і рахуємо — вхідні токени на ставку вхідних плюс вихідні на ставку вихідних, поділені на тисячу. Дві операційні дрібниці, які виглядають дріб'язком, а насправді ні. Перша: якщо моделі немає у прайсі — пишемо null, а не нуль. Нуль — це брехня: «запит був безкоштовний». Null — чесне «не знаємо», яке легко знайти запитом і полагодити прайс. Єдиний випадок, де нуль у cost_usd чесний, — кеш-хіт, коли запит справді нічого не коштував; він з'явиться на уроці 5. Друга дрібниця: округлення до шести знаків збігається з типом колонки NUMERIC(10,6). На копійчаних цифрах mock це неважливо — на мільйонах реальних запитів неузгоджене округлення дає розбіжності, які потім шукають тижнями. І все — costUsd їде в LogRequest, у поле, що стояло порожнім із уроку 1. Кожен рядок лога тепер відповідає на питання «скільки коштував цей конкретний запит».</a:t>
+              <a:t/>
             </a:r>
             <a:endParaRPr lang="en-US" dirty="0"/>
           </a:p>
@@ -700,7 +700,7 @@
           <a:p>
             <a:r>
               <a:rPr lang="en-US" dirty="0"/>
-              <a:t>Найпідступніша помилка в обліку вартості робиться не в арифметиці, а в одиниці вимірювання. Ви порахували ціну виклику — і вважаєте, що знаєте ціну запиту. Це правда рівно доти, доки в системі немає нічого з того, що ми будуємо далі. Подивіться, що станеться з одним питанням користувача, коли контур доросте. Ретрай після 429 або таймаута — виклик другий, і токени за перший, невдалий, вам теж порахують, якщо модель уже почала відповідати. Fallback на іншу модель — виклик третій, причому за іншим прайсом: резерв часто дорожчий, бо береться сильніша модель. Tool-цикл з уроку 6 — це два виклики на одне питання, і другий несе в собі і промпт, і результат інструмента. Guardrail-класифікатор чи класифікатор маршруту — ще один виклик, якщо він модельний. Тобто одне питання цілком реально коштує чотирьох викликів — і в лозі це чотири рядки. Якщо рахувати «середню вартість запиту» як середнє по рядках, ви рахуєте середню вартість виклику — зовсім іншу, значно меншу й приємнішу цифру. Помилка в рази, у бік «у нас усе дешево». У нашому контурі поки рівно один виклик на звернення, тому request_id як первинного ключа достатньо. Коли викликів стане більше, схема зміниться: окремий id стає первинним ключем, request_id — колонкою з індексом, спільною для всіх викликів звернення, — і вартість звернення це SUM із GROUP BY, а не AVG. Принцип «ключ звернення не дорівнює ключу виклику» запам'ятайте зараз — застосуєте при першій появі другого виклику. І практична деталь: ретрай і fallback — виклики, які не дійшли до користувача, але гроші за них списані. Розрізняйте в лозі виклик успішний і виклик-спробу — інакше одного дня вартість зросте на 40% при незмінній кількості відповідей, і ви півдня шукатимете «звідки», поки не згадаєте про інцидент у провайдера й лавину ретраїв.</a:t>
+              <a:t/>
             </a:r>
             <a:endParaRPr lang="en-US" dirty="0"/>
           </a:p>
@@ -788,7 +788,7 @@
           <a:p>
             <a:r>
               <a:rPr lang="en-US" dirty="0"/>
-              <a:t>Остання одиниця, до якої варто дійти, — не технічна. Керівництву й фінансам байдужа ціна токена; їм зрозуміла ціна вирішеного звернення: скільки коштує закрити один запит користувача без людини. Ця цифра рахується елементарно, коли є облік по request_id і будь-яка ознака результату — ескалація сталася чи ні. І саме вона перетворює вашу роботу на аргумент: «фіча обробляє N звернень на тиждень по X центів за звернення проти Y хвилин оператора». Та сама цифра — єдиний спосіб чесно порівняти дешеву модель із сильною. Дешева модель, яка вдвічі частіше ескалює на людину, не економить нічого: ви зменшили ціну виклику і збільшили ціну результату. Порівнювати прайси в такій ситуації безглуздо — порівнювати треба вартість вирішеного звернення. До KPI-мови ми повернемося на останньому уроці, але лічильники для неї закладаються тут: cost_usd у кожному рядку плюс ознака результату — і бізнес-цифра готова.</a:t>
+              <a:t/>
             </a:r>
             <a:endParaRPr lang="en-US" dirty="0"/>
           </a:p>
@@ -876,7 +876,7 @@
           <a:p>
             <a:r>
               <a:rPr lang="en-US" dirty="0"/>
-              <a:t>«Ми витратили 400 доларів цього місяця» — марна цифра: з неї не випливає жодної дії. «310 з них — ескалації на strong-моделі, з яких третина за ключовими словами могла піти на mini» — це вже рішення з порахованим ефектом. Різниця між першим і другим — атрибуція: вміння розкласти суму за осями. Мінімальний набір розрізів у нас уже є, бо все лежить в одному лог-рядку: за моделлю — чи справді дороге дістається тільки складному; за днем — тренд і сплески. Дорослі розрізи — per-team, per-feature, per-tenant — це не нова система, а додаткові колонки в тому самому рядку: хто спитав, з якої фічі, для якого клієнта. Записали в момент запиту — і будь-який зріз коштує один GROUP BY. Не записали — і реконструювати заднім числом уже неможливо. Як це працює в бою — розслідування сплеску вартості за три запити. Крок перший: групування за днем — коли почалося; у вівторок. Крок другий: той самий день, групування за моделлю — розподіл трафіку не змінився, отже справа не в роутері. Крок третій: групування за версією промпта з середніми prompt_tokens — а у вівторок якраз активували нову версію, вдвічі довшу, і кожен запит повіз зайві токени. П'ять хвилин від «чому дорого» до конкретної активації — проти археології з блока 01, яка займала тижні. Уся різниця — в тому, що поля були записані в момент запиту. І типова помилка: оптимізувати вартість зміною промпта наосліп. Без цифри до/після ви не знаєте ні ефекту, ні побічної шкоди якості. Спершу зріз по лозі, потім зміна, потім той самий зріз — інакше це не оптимізація, а ритуал.</a:t>
+              <a:t/>
             </a:r>
             <a:endParaRPr lang="en-US" dirty="0"/>
           </a:p>
@@ -964,7 +964,7 @@
           <a:p>
             <a:r>
               <a:rPr lang="en-US" dirty="0"/>
-              <a:t>Третій шматок оживляє консоль. Ендпоінт /cost: сума за сьогодні — прямо з лога, одним запитом. Поруч — budget_usd: у нас це поки константа, і це свідомо. Головна дія відбувається в консолі: плитка «Вартість сьогодні» замість «—» оживає. Одна чесна дрібниця: ендпоінт віддає точне значення — наприклад, нуль цілих дві десятитисячні долара, — а готова консоль округлює до центів. Тож на mock плитка показує нуль доларів нуль центів проти п'яти доларів бюджету, і це очікувано; точне значення перевіряйте через GET /cost. Цифри на mock смішні — механіка бойова: та сама плитка з реальним ключем показуватиме реальні долари, не змінивши жодного рядка. Навіщо бюджет у відповіді, якщо він константа? Бо бюджет — це поріг дії, а не звіт. Цифра витрати без порогу поруч — просто число: незрозуміло, радіти йому чи бити на сполох. Пара «витрачено / ліміт» — це вже стан системи, на який можна вішати реакції — і саме це опційна частина сьогоднішнього уроку.</a:t>
+              <a:t/>
             </a:r>
             <a:endParaRPr lang="en-US" dirty="0"/>
           </a:p>
@@ -1052,7 +1052,7 @@
           <a:p>
             <a:r>
               <a:rPr lang="en-US" dirty="0"/>
-              <a:t>Сьогоднішній облік — це ще й момент, коли минулий урок окупається на очах. Напишіть боту звичайне питання і ескалацію, потім один SELECT по двох останніх рядках лога: ескалація на mock-strong коштує в рази більше за FAQ на mock-mini — при однаковій довжині розмови. Тепер уявіть, що роутера немає і весь трафік іде на strong: помножте різницю на добовий обсяг — це і є ціна рішення «одна модель на все», тільки тепер вона порахована, а не відчута. Звідси головний висновок тижня: маршрутизація — не «оптимізація потім», а найбільший важіль вартості, який у вас є. Промпт-дієти і кеш — наступний тиждень — економлять відсотки; правильний розподіл трафіку між моделями — рази. І ще один наслідок, вартий фіксації: тепер будь-яку зміну в системі можна оцінювати в грошах. Нова версія промпта стала довшою — зріз по prompt_version покаже, наскільки подорожчав середній запит. Змінили правила роутера — розподіл по моделях і сума за день скажуть, чи виправдано. Облік перетворює суперечки «здається, стало дорого» на порівняння двох SQL-запитів.</a:t>
+              <a:t/>
             </a:r>
             <a:endParaRPr lang="en-US" dirty="0"/>
           </a:p>
@@ -1140,7 +1140,7 @@
           <a:p>
             <a:r>
               <a:rPr lang="en-US" dirty="0"/>
-              <a:t>Це опційний блок — і опційна частина ДЗ тижня 2. Цифра і поріг є — можна вішати політику: реакцію на наближення до бюджету. Три робочі варіанти, за зростанням рішучості. Алерт: при вісімдесяти відсотках бюджету писати подію в лог, а на проді — в канал чергового. Це мінімум, який мусить бути завжди: перевитрата не має бути сюрпризом. Деградація: вище порогу routing примусово переводить неескалаційний трафік на дешевшу модель. Якість трохи просідає, сервіс живе, бюджет цілий. Відсікання: не-критичні запити отримують заготовлену відповідь без походу в модель. Найжорсткіший варіант — але чесніший за мовчазне падіння, коли бюджет реально твердий. Зверніть увагу на форму всіх трьох: умова на цифрі з лога — зміна поведінки control plane. Це шаблон, у який далі ляжуть і fallback на тижні 4, і гейт якості на тижні 6. Механізм щоразу новий — форма рішення та сама. Практична дрібниця для реалізації: перевірка порогу — це той самий запит, що і в /cost, тож найпростіше місце для неї — початок /chat, до вибору моделі. Дорого на кожен запит? Тоді фонова перевірка раз на хвилину, яка виставляє прапорець «економний режим», — а роутер лише читає прапорець. Обидва варіанти робочі; головне, щоб рішення про режим і його причина потрапляли в лог.</a:t>
+              <a:t/>
             </a:r>
             <a:endParaRPr lang="en-US" dirty="0"/>
           </a:p>
@@ -1228,7 +1228,7 @@
           <a:p>
             <a:r>
               <a:rPr lang="en-US" dirty="0"/>
-              <a:t>Перш ніж перейти до екрана — що саме ви зараз побачите і навіщо. Послідовність така: прайс у коді сервісу — дві моделі, чотири числа; звичайне питання і ескалація в чаті — роутер з минулого уроку розводить їх по різних моделях; SELECT по свіжих рядках лога — cost_usd заповнений, і в ескалації цифра помітно більша; і нарешті плитка «Вартість сьогодні» в консолі — жива, з бюджетом поруч. Навіщо це все: побачити гроші в момент відповіді, а не в рахунку наприкінці місяця, — і вперше побачити важіль роутингу порахованим, а не відчутим. [Ведучому: демо йде на бранчі w2 еталона; перед записом docker compose down -v і up. Після up дочекайтеся готовності gateway — health-ендпоінт або ~30 секунд: до готовності запити падають тихо, status=0 і нульові токени в лозі. Кирилиця інлайном у curl на Git Bash манглиться навіть після chcp 65001 — питання й ескалацію робіть через чат в UI або тілом з файлу; ASCII-маркери стійкі. Плитка консолі округлює до центів, тож на mock показує $0.00 / $5.00 — точне значення показуйте через GET /cost. Порти 4200/8080/4000/5432 мають бути вільні; шрифт термінала і psql — 14–16pt мінімум.]</a:t>
+              <a:t/>
             </a:r>
             <a:endParaRPr lang="en-US" dirty="0"/>
           </a:p>
@@ -1316,7 +1316,7 @@
           <a:p>
             <a:r>
               <a:rPr lang="en-US" dirty="0"/>
-              <a:t>Частина перша: завести прайс. Словник цін за тисячу токенів для mock-mini і mock-strong — пропорції як у реальних прайсів: strong помітно дорожча, вихідні дорожчі за вхідні. Частина друга: порахувати і записати. Після відповіді моделі: usage, формула, cost_usd, лог. Перевірити запитом SELECT model, cost_usd FROM requests ORDER BY created_at DESC — у ескалацій цифра помітно більша. Частина третя: оживити GET /cost. Сума за сьогодні з бази плюс бюджет; плитка в консолі показує суму і п'ять доларів бюджету замість «—». Пам'ятайте про округлення: плитка покаже нуль центів, точне значення — через GET /cost. Частина четверта, без коду: проговорити пороги. Що робити при вісімдесяти відсотках бюджету — алерт, деградація чи відсікання? Сформулюйте свій вибір одним реченням і запишіть поруч із fallback-порядком з минулого уроку. І опційна п'ята: реалізувати обрану політику в коді — умова на цифрі з /cost, зміна поведінки роутера або заглушка. Це опційна частина ДЗ тижня 2.</a:t>
+              <a:t/>
             </a:r>
             <a:endParaRPr lang="en-US" dirty="0"/>
           </a:p>
@@ -1404,7 +1404,7 @@
           <a:p>
             <a:r>
               <a:rPr lang="en-US" dirty="0"/>
-              <a:t>Зафіксуємо, що ми щойно побачили — і що це доводить. Перше: вартість тепер відома в момент відповіді. У кожному новому рядку лога заповнений cost_usd — рахунок провайдера перестав бути єдиним джерелом правди про гроші, і археологія з блока 01 нам більше не загрожує. Друге: важіль роутингу порахований. Ескалація на strong-моделі коштує в рази більше за FAQ на mini — це видно простим SELECT у базі. Минулий урок окупився на очах: розподіл трафіку між моделями — це рази, а не відсотки. Третє: пара «витрачено / ліміт» на плитці — це вже стан системи, а не просто число. На цей стан можна вішати реакції — алерт, деградацію, відсікання, — і саме це опційна частина ДЗ тижня. Разом ці три картинки закривають тиждень «Routing + cost»: система вміє обирати модель за задачею і знає, скільки коштує кожне її рішення.</a:t>
+              <a:t/>
             </a:r>
             <a:endParaRPr lang="en-US" dirty="0"/>
           </a:p>
@@ -1492,7 +1492,7 @@
           <a:p>
             <a:r>
               <a:rPr lang="en-US" dirty="0"/>
-              <a:t>Домовимось про результат уроку — конкретними діями. Після сьогоднішнього заняття ви зможете: завести прайс моделей у сервісі — поруч із Route(), там, де ухвалюється рішення про модель; порахувати вартість кожного запиту з блока usage і записати cost_usd у лог; показати одним SELECT, що ескалація коштує дорожче за FAQ — і це видно в базі; оживити GET /cost і плитку «Вартість сьогодні», щоб поруч із витратою стояв бюджет; розкласти витрати за моделлю, днем і версією промпта одним GROUP BY; і пояснити, чому перевірки якості та ретраї рахуються так само, як бойовий трафік, — і чому одне звернення користувача не дорівнює одному виклику моделі. Кожен пункт ви перевірите руками ще сьогодні — у лабораторній.</a:t>
+              <a:t/>
             </a:r>
             <a:endParaRPr lang="en-US" dirty="0"/>
           </a:p>
@@ -1580,7 +1580,7 @@
           <a:p>
             <a:r>
               <a:rPr lang="en-US" dirty="0"/>
-              <a:t>Перш ніж розійтися — чесна перевірка обов'язкової доріжки, без оцінок. Чотири пункти. Перший: у кожного нового запиту заповнений cost_usd — не null і не прочерк. Другий: ескалація коштує дорожче за FAQ, і це видно в базі простим SELECT — якщо цифри однакові, подивіться, чи роутер справді розводить питання по різних моделях. Третій: плитка вартості в консолі показує число і бюджет, а не «—»; пам'ятайте, що на mock вона покаже нуль центів через округлення — точне значення дає GET /cost. І четвертий, концептуальний: можу пояснити, чому evals треба рахувати теж. Підказка — принцип із блока 01: рахується все, що ходить у модель; judge-виклики — такі самі токени, як бойові. Якщо всі чотири пункти — «так», ДЗ тижня 2 у вас практично готове. Питання, які лишилися, — несіть у канал потоку або на Q&amp;A.</a:t>
+              <a:t/>
             </a:r>
             <a:endParaRPr lang="en-US" dirty="0"/>
           </a:p>
@@ -1668,7 +1668,7 @@
           <a:p>
             <a:r>
               <a:rPr lang="en-US" dirty="0"/>
-              <a:t>Чотири способи зіпсувати собі облік вартості — всі перевірені чужими граблями. Дізнаватися вартість із рахунку наприкінці місяця: це не облік, це розтин — діагноз точний, але пацієнта вже не врятувати. Рахувати «в середньому по лікарні»: сума без атрибуції за моделлю і задачею не дає жодного рішення — тільки тривогу. Різниця між «$400 за місяць» і «$310 — ескалації на strong» — це різниця між панікою і планом. Не рахувати judge- і eval-виклики, бо «це ж службове»: службові токени коштують стільки ж, скільки бойові. Виняток з обліку — майбутня стаття витрат, про яку ви дізнаєтесь останнім. І оптимізувати вартість без цифри до/після: скорочення промпта наосліп — це ритуал, а не інженерія. Спершу зріз по лозі, потім зміна, потім той самий зріз.</a:t>
+              <a:t/>
             </a:r>
             <a:endParaRPr lang="en-US" dirty="0"/>
           </a:p>
@@ -1756,7 +1756,7 @@
           <a:p>
             <a:r>
               <a:rPr lang="en-US" dirty="0"/>
-              <a:t>Сьогодні другий урок тижня — отже, ДЗ тижня 2 здається. Обидва уроки тижня здаються одним PR: маршрутизація з уроку 3 плюс сьогоднішній облік вартості. Критерії приймання коротко: звичайне питання і ескалація дають різні моделі в requests; cost_usd заповнюється ненульовими значеннями; GET /cost повертає today_usd і budget_usd, і плитка в консолі жива. Повні критерії — у файлі ДЗ тижня. Опційно, без оцінювання: budget-політика — при вісімдесяти відсотках бюджету алерт у лог або деградація на дешевшу модель; і третій маршрут — окремий tier для FAQ, ескалацій і «всього іншого». Нагадаю: опційна частина не впливає на прийняття PR — але обидві теми ми сьогодні розібрали настільки, що реалізація займе вечір.</a:t>
+              <a:t/>
             </a:r>
             <a:endParaRPr lang="en-US" dirty="0"/>
           </a:p>
@@ -1844,7 +1844,7 @@
           <a:p>
             <a:r>
               <a:rPr lang="en-US" dirty="0"/>
-              <a:t>Підсумуємо. Рахується все, що ходить у модель: бойовий трафік, ретраї, перевірки якості, службові виклики — будь-який виняток з обліку стане статтею витрат, про яку ви дізнаєтесь останнім. Вартість кожного запиту тепер відома в момент відповіді: usage, формула, cost_usd у лозі — і null замість нуля там, де ми чесно не знаємо. Звернення не дорівнює виклику: вартість міряється в одиницях, якими користується бізнес, — аж до ціни вирішеного звернення, яка і є чесним способом порівнювати моделі. Атрибуція важливіша за суму: поля, записані в момент запиту, перетворюють розслідування сплеску на три GROUP BY. І головний висновок тижня: маршрутизація — найбільший важіль вартості, рази проти відсотків, а бюджет поруч із витратою — це поріг дії, на який можна вішати політики. Наступний урок відкриває тиждень 3. Ми навчилися платити менше за той самий трафік — наступний крок радикальніший: найдешевший запит той, якого не було. Кеш: коли можна не ходити в модель узагалі, як міряти ефект через cache-hit ratio і чому кеш без метрики — це віра, а не інженерія. До зустрічі.</a:t>
+              <a:t/>
             </a:r>
             <a:endParaRPr lang="en-US" dirty="0"/>
           </a:p>
@@ -1932,7 +1932,7 @@
           <a:p>
             <a:r>
               <a:rPr lang="en-US" dirty="0"/>
-              <a:t>Маршрут такий. Спершу проблема: чому рахунок наприкінці місяця — це не облік, а розтин. Потім механіка: блок usage як єдине джерело правди, і чому українською той самий зміст обходиться дорожче. Далі три шматки сьогоднішньої роботи: прайс у сервісі, формула вартості на три рядки і ендпоінт GET /cost, що оживляє плитку консолі. Між ними — дві концептуальні речі, які коштують дорожче за код: чому одне звернення користувача не дорівнює одному виклику моделі, і чому атрибуція важливіша за загальну суму. Блок 08 з'єднає цей урок із минулим: важіль роутингу стане видимим у грошах. Опційний блок 09 — budget-політика: що робити, коли витрати наближаються до порогу. Потім лабораторна на чотири обов'язкові частини плюс опційна, антипатерни тижня і домашнє завдання — сьогодні воно вже зі здачею, бо тиждень 2 закривається.</a:t>
+              <a:t/>
             </a:r>
             <a:endParaRPr lang="en-US" dirty="0"/>
           </a:p>
@@ -2020,7 +2020,7 @@
           <a:p>
             <a:r>
               <a:rPr lang="en-US" dirty="0"/>
-              <a:t>Домовимось про шість слів. Usage — блок у відповіді провайдера з кількістю токенів: prompt_tokens це вхід, completion_tokens це вихід. Прайс — таблиця цін за тисячу токенів, окремо вхідних і вихідних; у нас вона живе в коді сервісу поруч із роутером. cost_usd — поле лога, куди ми запишемо пораховану вартість запиту; з уроку 1 воно стояло порожнім. Атрибуція — розклад витрат за розрізами: за моделлю, за днем, за версією промпта; саме вона перетворює тривогу на дію. Звернення — це питання користувача, а виклик — це похід у модель; одне звернення легко дає чотири виклики, і плутати їх дорого. І бюджет — цифра, з якою порівнюється сьогоднішня витрата: без неї сума нічого не означає. Далі кожне слово побачимо в коді.</a:t>
+              <a:t/>
             </a:r>
             <a:endParaRPr lang="en-US" dirty="0"/>
           </a:p>
@@ -2108,7 +2108,7 @@
           <a:p>
             <a:r>
               <a:rPr lang="en-US" dirty="0"/>
-              <a:t>Вартість LLM-фічі — не константа. Вона залежить від моделі, довжини контексту, поведінки користувачів і навіть від того, як ви склеюєте промпт. Поки обліку немає, сценарій завжди однаковий: фіча злітає, всі радіють, наприкінці місяця приходить рахунок удесятеро більший за очікуваний — і починається археологія. Хто витратив? На чому? Коли почалося? Лог мовчить, бо ніхто не писав туди грошей. Є і підступніший бік: оцінювання якості теж коштує. Перевірки на кшталт LLM-as-judge — це такі самі токени, як бойові запити. З практики: я бачив, як пайплайн оцінки з'їдав відчутну частку бюджету просто тому, що його ніхто не рахував окремо — у звіті були лише «бойові» виклики, а judge-виклики летіли повз облік. Звіт сходився, гроші — ні. З уроку 1 це властивість номер два LLM-систем: оплата за токен означає, що вартість визначається поведінкою, а не кількістю запитів. Тому й керувати нею треба на рівні запиту — там, де поведінка видима. Звідси принцип: рахується все, що ходить у модель — бойовий трафік, ретраї, перевірки якості, службові виклики. Будь-який виняток з обліку — це майбутня стаття витрат, про яку ви дізнаєтесь останнім.</a:t>
+              <a:t/>
             </a:r>
             <a:endParaRPr lang="en-US" dirty="0"/>
           </a:p>
@@ -2196,7 +2196,7 @@
           <a:p>
             <a:r>
               <a:rPr lang="en-US" dirty="0"/>
-              <a:t>Добра новина: все необхідне для обліку вже приходить із кожною відповіддю. Блок usage — стандартна частина відповіді моделі: prompt_tokens і completion_tokens. Наш сервіс парсить ці два числа з першого дня — подивіться в /chat, вони вже їдуть у лог. Вартість — проста формула поверх них: токени, помножені на ціну конкретної моделі, окремо для вхідних і вихідних, бо провайдери тарифікують їх по-різному — вихідні зазвичай у кілька разів дорожчі. Mock повертає реалістичний usage — оцінює токени за довжиною тексту, приблизно чотири символи на токен, — тому вся механіка сьогоднішнього уроку тренується без ключа і без витрат. З реальним провайдером зміняться лише цифри у прайсі: формула, лог і консоль не дізнаються про різницю. Окрема згадка про prompt_tokens: у реальних системах саме вони зазвичай домінують у рахунку, і це неочевидно, поки не подивишся в usage. Системний промпт їде в модель із кожним запитом. А в багатоходовому діалозі з кожним ходом їде і вся попередня історія: десятий хід може коштувати вдесятеро дорожче за перший при тій самій довжині відповіді. Наш SupportGW поки одноходовий, але коли додаватимете історію діалогу — пам'ятайте: розмір вікна контексту — це стаття витрат, якою треба керувати. І чому облік саме в момент запиту, а не з рахунку: рахунок провайдера — агрегат, сума за місяць по ключу. З нього неможливо відповісти на жодне операційне питання. Облік на рівні запиту дає ті самі гроші, але з роздільною здатністю, на якій можливі рішення.</a:t>
+              <a:t/>
             </a:r>
             <a:endParaRPr lang="en-US" dirty="0"/>
           </a:p>
@@ -2284,7 +2284,7 @@
           <a:p>
             <a:r>
               <a:rPr lang="en-US" dirty="0"/>
-              <a:t>Одиниця обліку — токен, і кількість токенів у тому самому змісті залежить від мови. Англійський текст ділиться приблизно по чотири символи на токен; український — гірше, бо кирилиця скромніше представлена у словниках токенізаторів, і слово часто розпадається на кілька частин. Порядок різниці варто виміряти самому на власних текстах — найпростіше прогнати десяток типових запитів і подивитися prompt_tokens у лозі. Але напрям стабільний: українською той самий зміст обходиться дорожче. З цього ростуть три рішення, які ухвалюють один раз і живуть з ними роками. Перше: мова системного промпта — він їде в кожному запиті, тож його довжина множиться на весь трафік. Друге: скільки історії діалогу тягнути — контекст оплачується повторно на кожному кроці, і українською вікно закінчується швидше. Третє: де тримати довгі інструкції та приклади — якщо вони стабільні, їхнє місце на початку промпта, щоб їх підхопив кеш префікса. І типова помилка: економити на промпті замість економити на моделі й повторах. «Скоротимо системний промпт на 30%» дає економію в межах вхідних токенів — найдешевшої з трьох ставок. Перевести просте питання з сильної моделі на дешеву — це минулий урок — або взагалі не питати вдруге те, що вже спитали — це урок 5 — дає різницю в разах, а не у відсотках. Оптимізуйте в порядку зменшення важеля, а не в порядку простоти.</a:t>
+              <a:t/>
             </a:r>
             <a:endParaRPr lang="en-US" dirty="0"/>
           </a:p>
@@ -2372,7 +2372,7 @@
           <a:p>
             <a:r>
               <a:rPr lang="en-US" dirty="0"/>
-              <a:t>Перший шматок сьогоднішньої роботи — табличка цін за тисячу токенів: словник із двох пар чисел, для mock-mini і mock-strong, окремо вхідні й вихідні. Числа навчальні, але пропорції списані з реальних прайсів: сильна модель дорожча за дешеву приблизно в шістнадцять разів, вихідні токени дорожчі за вхідні в чотири. Саме ці пропорції, а не абсолютні цифри, визначають операційні рішення — і саме тому routing з минулого уроку є головним важелем економії. Чому словник у коді, а не таблиця в базі чи конфіг адаптера? Для двох моделей — бо це найпростіше місце, яке видно в діфі. Принципово інше: прайс лежить поруч із точкою рішення — там же, де Route(). Ціна моделі — вхідний параметр маршрутизації, а не бухгалтерська довідка: змінюється прайс — переглядається політика. І суміжне питання, яке варто закрити явно: чому вартість рахує сервіс, а не адаптер, який теж бачить usage? З тієї ж причини, що й routing: вартість — це частина вашого лог-рядка, і рахувати її треба там, де відомий увесь контекст запиту — версія промпта, майбутні тенант і фіча. Адаптер знає ціну виклику, але не знає, чий це виклик; облік у чужому шарі означає вічний join двох систем із двома правдами. Джерело правди про гроші має жити поруч із рештою правди — у вашому лозі.</a:t>
+              <a:t/>
             </a:r>
             <a:endParaRPr lang="en-US" dirty="0"/>
           </a:p>
@@ -2460,7 +2460,7 @@
           <a:p>
             <a:r>
               <a:rPr lang="en-US" dirty="0"/>
-              <a:t>Тримайте прайс живим: застарілі ціни — це не разова помилка, а систематичне викривлення всіх звітів одразу. З практики платформи, де я веду облік вартості для голосових і чатових агентів: у каталозі моделей ми ловили застарілі ціни, які вже розійшлися з тарифами постачальника, — і виправляли їх окремими комітами, як баги. А ще тарифікація ускладнюється швидше, ніж здається: у реальних прайсів окрема ціна на кешовані токени, а в cost-записі довелося зробити обов'язковим поле регіону — та сама модель у різних регіонах коштує по-різному. Словник із двох пар чисел — правильний старт, але закладайте в голову: прайс — це живі дані з власником і датою, а не константа. Про кешовані токени варто сказати два речення, бо це вже мейнстрім тарифікації. Сучасні провайдери вміють кешувати префікс промпта на своєму боці: незмінна частина — системний промпт, схеми інструментів — на повторних викликах тарифікується в рази дешевше, ніж «свіжі» вхідні токени. Для систем із довгим системним промптом це помітна стаття економії, і в чесному прайсі тоді вже не дві ціни на модель, а три: вхідні, кешовані вхідні, вихідні. Не плутайте з кешем відповідей, який ми збудуємо наступного тижня: той прибирає виклик моделі цілком, цей — здешевлює виклик зсередини; вони не конкурують, а складаються. І лайфхак: раз на місяць звіряйте суму зі свого лога з рахунком провайдера. Розбіжність понад кілька відсотків — це діра в обліку: неврахований сервіс, службові виклики повз лог або застарілий прайс. Дешева звичка, яка ловить дорогі сюрпризи.</a:t>
+              <a:t/>
             </a:r>
             <a:endParaRPr lang="en-US" dirty="0"/>
           </a:p>
@@ -3772,7 +3772,7 @@
       </p:pic>
       <p:sp>
         <p:nvSpPr>
-          <p:cNvPr id="8" name="Shape 4"/>
+          <p:cNvPr id="7" name="Shape 4"/>
           <p:cNvSpPr/>
           <p:nvPr/>
         </p:nvSpPr>
@@ -3799,7 +3799,7 @@
       </p:sp>
       <p:sp>
         <p:nvSpPr>
-          <p:cNvPr id="9" name="Text 5"/>
+          <p:cNvPr id="8" name="Text 5"/>
           <p:cNvSpPr/>
           <p:nvPr/>
         </p:nvSpPr>
@@ -3921,7 +3921,7 @@
       </p:sp>
       <p:sp>
         <p:nvSpPr>
-          <p:cNvPr id="10" name="Shape 6"/>
+          <p:cNvPr id="9" name="Shape 6"/>
           <p:cNvSpPr/>
           <p:nvPr/>
         </p:nvSpPr>
@@ -3943,7 +3943,7 @@
       </p:sp>
       <p:sp>
         <p:nvSpPr>
-          <p:cNvPr id="11" name="Text 7"/>
+          <p:cNvPr id="10" name="Text 7"/>
           <p:cNvSpPr/>
           <p:nvPr/>
         </p:nvSpPr>
@@ -3982,7 +3982,7 @@
       </p:sp>
       <p:sp>
         <p:nvSpPr>
-          <p:cNvPr id="12" name="Text 8"/>
+          <p:cNvPr id="11" name="Text 8"/>
           <p:cNvSpPr/>
           <p:nvPr/>
         </p:nvSpPr>
@@ -4024,7 +4024,7 @@
       </p:sp>
       <p:sp>
         <p:nvSpPr>
-          <p:cNvPr id="13" name="Shape 9"/>
+          <p:cNvPr id="12" name="Shape 9"/>
           <p:cNvSpPr/>
           <p:nvPr/>
         </p:nvSpPr>
@@ -4046,7 +4046,7 @@
       </p:sp>
       <p:sp>
         <p:nvSpPr>
-          <p:cNvPr id="14" name="Text 10"/>
+          <p:cNvPr id="13" name="Text 10"/>
           <p:cNvSpPr/>
           <p:nvPr/>
         </p:nvSpPr>
@@ -4085,7 +4085,7 @@
       </p:sp>
       <p:sp>
         <p:nvSpPr>
-          <p:cNvPr id="15" name="Text 11"/>
+          <p:cNvPr id="14" name="Text 11"/>
           <p:cNvSpPr/>
           <p:nvPr/>
         </p:nvSpPr>
@@ -4370,7 +4370,7 @@
       </p:pic>
       <p:sp>
         <p:nvSpPr>
-          <p:cNvPr id="8" name="Shape 4"/>
+          <p:cNvPr id="7" name="Shape 4"/>
           <p:cNvSpPr/>
           <p:nvPr/>
         </p:nvSpPr>
@@ -4397,7 +4397,7 @@
       </p:sp>
       <p:sp>
         <p:nvSpPr>
-          <p:cNvPr id="9" name="Text 5"/>
+          <p:cNvPr id="8" name="Text 5"/>
           <p:cNvSpPr/>
           <p:nvPr/>
         </p:nvSpPr>
@@ -4436,7 +4436,7 @@
       </p:sp>
       <p:sp>
         <p:nvSpPr>
-          <p:cNvPr id="10" name="Shape 6"/>
+          <p:cNvPr id="9" name="Shape 6"/>
           <p:cNvSpPr/>
           <p:nvPr/>
         </p:nvSpPr>
@@ -4459,7 +4459,7 @@
       </p:sp>
       <p:sp>
         <p:nvSpPr>
-          <p:cNvPr id="11" name="Shape 7"/>
+          <p:cNvPr id="10" name="Shape 7"/>
           <p:cNvSpPr/>
           <p:nvPr/>
         </p:nvSpPr>
@@ -4479,7 +4479,7 @@
       </p:sp>
       <p:sp>
         <p:nvSpPr>
-          <p:cNvPr id="12" name="Shape 8"/>
+          <p:cNvPr id="11" name="Shape 8"/>
           <p:cNvSpPr/>
           <p:nvPr/>
         </p:nvSpPr>
@@ -4501,7 +4501,7 @@
       </p:sp>
       <p:sp>
         <p:nvSpPr>
-          <p:cNvPr id="13" name="Text 9"/>
+          <p:cNvPr id="12" name="Text 9"/>
           <p:cNvSpPr/>
           <p:nvPr/>
         </p:nvSpPr>
@@ -4540,7 +4540,7 @@
       </p:sp>
       <p:sp>
         <p:nvSpPr>
-          <p:cNvPr id="14" name="Shape 10"/>
+          <p:cNvPr id="13" name="Shape 10"/>
           <p:cNvSpPr/>
           <p:nvPr/>
         </p:nvSpPr>
@@ -4563,7 +4563,7 @@
       </p:sp>
       <p:sp>
         <p:nvSpPr>
-          <p:cNvPr id="15" name="Shape 11"/>
+          <p:cNvPr id="14" name="Shape 11"/>
           <p:cNvSpPr/>
           <p:nvPr/>
         </p:nvSpPr>
@@ -4583,7 +4583,7 @@
       </p:sp>
       <p:sp>
         <p:nvSpPr>
-          <p:cNvPr id="16" name="Shape 12"/>
+          <p:cNvPr id="15" name="Shape 12"/>
           <p:cNvSpPr/>
           <p:nvPr/>
         </p:nvSpPr>
@@ -4610,7 +4610,7 @@
       </p:sp>
       <p:sp>
         <p:nvSpPr>
-          <p:cNvPr id="17" name="Text 13"/>
+          <p:cNvPr id="16" name="Text 13"/>
           <p:cNvSpPr/>
           <p:nvPr/>
         </p:nvSpPr>
@@ -4649,7 +4649,7 @@
       </p:sp>
       <p:sp>
         <p:nvSpPr>
-          <p:cNvPr id="18" name="Shape 14"/>
+          <p:cNvPr id="17" name="Shape 14"/>
           <p:cNvSpPr/>
           <p:nvPr/>
         </p:nvSpPr>
@@ -4672,7 +4672,7 @@
       </p:sp>
       <p:sp>
         <p:nvSpPr>
-          <p:cNvPr id="19" name="Shape 15"/>
+          <p:cNvPr id="18" name="Shape 15"/>
           <p:cNvSpPr/>
           <p:nvPr/>
         </p:nvSpPr>
@@ -4692,7 +4692,7 @@
       </p:sp>
       <p:sp>
         <p:nvSpPr>
-          <p:cNvPr id="20" name="Shape 16"/>
+          <p:cNvPr id="19" name="Shape 16"/>
           <p:cNvSpPr/>
           <p:nvPr/>
         </p:nvSpPr>
@@ -4719,7 +4719,7 @@
       </p:sp>
       <p:sp>
         <p:nvSpPr>
-          <p:cNvPr id="21" name="Text 17"/>
+          <p:cNvPr id="20" name="Text 17"/>
           <p:cNvSpPr/>
           <p:nvPr/>
         </p:nvSpPr>
@@ -4758,7 +4758,7 @@
       </p:sp>
       <p:sp>
         <p:nvSpPr>
-          <p:cNvPr id="22" name="Shape 18"/>
+          <p:cNvPr id="21" name="Shape 18"/>
           <p:cNvSpPr/>
           <p:nvPr/>
         </p:nvSpPr>
@@ -4780,7 +4780,7 @@
       </p:sp>
       <p:sp>
         <p:nvSpPr>
-          <p:cNvPr id="23" name="Text 19"/>
+          <p:cNvPr id="22" name="Text 19"/>
           <p:cNvSpPr/>
           <p:nvPr/>
         </p:nvSpPr>
@@ -4819,7 +4819,7 @@
       </p:sp>
       <p:sp>
         <p:nvSpPr>
-          <p:cNvPr id="24" name="Text 20"/>
+          <p:cNvPr id="23" name="Text 20"/>
           <p:cNvSpPr/>
           <p:nvPr/>
         </p:nvSpPr>
@@ -4858,7 +4858,7 @@
       </p:sp>
       <p:sp>
         <p:nvSpPr>
-          <p:cNvPr id="25" name="Shape 21"/>
+          <p:cNvPr id="24" name="Shape 21"/>
           <p:cNvSpPr/>
           <p:nvPr/>
         </p:nvSpPr>
@@ -4880,7 +4880,7 @@
       </p:sp>
       <p:sp>
         <p:nvSpPr>
-          <p:cNvPr id="26" name="Text 22"/>
+          <p:cNvPr id="25" name="Text 22"/>
           <p:cNvSpPr/>
           <p:nvPr/>
         </p:nvSpPr>
@@ -4922,7 +4922,7 @@
       </p:sp>
       <p:sp>
         <p:nvSpPr>
-          <p:cNvPr id="27" name="Shape 23"/>
+          <p:cNvPr id="26" name="Shape 23"/>
           <p:cNvSpPr/>
           <p:nvPr/>
         </p:nvSpPr>
@@ -4944,7 +4944,7 @@
       </p:sp>
       <p:sp>
         <p:nvSpPr>
-          <p:cNvPr id="28" name="Text 24"/>
+          <p:cNvPr id="27" name="Text 24"/>
           <p:cNvSpPr/>
           <p:nvPr/>
         </p:nvSpPr>
@@ -4983,7 +4983,7 @@
       </p:sp>
       <p:sp>
         <p:nvSpPr>
-          <p:cNvPr id="29" name="Text 25"/>
+          <p:cNvPr id="28" name="Text 25"/>
           <p:cNvSpPr/>
           <p:nvPr/>
         </p:nvSpPr>
@@ -5268,7 +5268,7 @@
       </p:pic>
       <p:sp>
         <p:nvSpPr>
-          <p:cNvPr id="8" name="Shape 4"/>
+          <p:cNvPr id="7" name="Shape 4"/>
           <p:cNvSpPr/>
           <p:nvPr/>
         </p:nvSpPr>
@@ -5290,7 +5290,7 @@
       </p:sp>
       <p:sp>
         <p:nvSpPr>
-          <p:cNvPr id="9" name="Text 5"/>
+          <p:cNvPr id="8" name="Text 5"/>
           <p:cNvSpPr/>
           <p:nvPr/>
         </p:nvSpPr>
@@ -5329,7 +5329,7 @@
       </p:sp>
       <p:sp>
         <p:nvSpPr>
-          <p:cNvPr id="10" name="Text 6"/>
+          <p:cNvPr id="9" name="Text 6"/>
           <p:cNvSpPr/>
           <p:nvPr/>
         </p:nvSpPr>
@@ -5371,7 +5371,7 @@
       </p:sp>
       <p:sp>
         <p:nvSpPr>
-          <p:cNvPr id="11" name="Shape 7"/>
+          <p:cNvPr id="10" name="Shape 7"/>
           <p:cNvSpPr/>
           <p:nvPr/>
         </p:nvSpPr>
@@ -5398,7 +5398,7 @@
       </p:sp>
       <p:sp>
         <p:nvSpPr>
-          <p:cNvPr id="12" name="Text 8"/>
+          <p:cNvPr id="11" name="Text 8"/>
           <p:cNvSpPr/>
           <p:nvPr/>
         </p:nvSpPr>
@@ -5437,7 +5437,7 @@
       </p:sp>
       <p:sp>
         <p:nvSpPr>
-          <p:cNvPr id="13" name="Text 9"/>
+          <p:cNvPr id="12" name="Text 9"/>
           <p:cNvSpPr/>
           <p:nvPr/>
         </p:nvSpPr>
@@ -5479,7 +5479,7 @@
       </p:sp>
       <p:sp>
         <p:nvSpPr>
-          <p:cNvPr id="14" name="Shape 10"/>
+          <p:cNvPr id="13" name="Shape 10"/>
           <p:cNvSpPr/>
           <p:nvPr/>
         </p:nvSpPr>
@@ -5501,7 +5501,7 @@
       </p:sp>
       <p:sp>
         <p:nvSpPr>
-          <p:cNvPr id="15" name="Text 11"/>
+          <p:cNvPr id="14" name="Text 11"/>
           <p:cNvSpPr/>
           <p:nvPr/>
         </p:nvSpPr>
@@ -5540,7 +5540,7 @@
       </p:sp>
       <p:sp>
         <p:nvSpPr>
-          <p:cNvPr id="16" name="Text 12"/>
+          <p:cNvPr id="15" name="Text 12"/>
           <p:cNvSpPr/>
           <p:nvPr/>
         </p:nvSpPr>
@@ -5825,7 +5825,7 @@
       </p:pic>
       <p:sp>
         <p:nvSpPr>
-          <p:cNvPr id="8" name="Shape 4"/>
+          <p:cNvPr id="7" name="Shape 4"/>
           <p:cNvSpPr/>
           <p:nvPr/>
         </p:nvSpPr>
@@ -5847,7 +5847,7 @@
       </p:sp>
       <p:sp>
         <p:nvSpPr>
-          <p:cNvPr id="9" name="Text 5"/>
+          <p:cNvPr id="8" name="Text 5"/>
           <p:cNvSpPr/>
           <p:nvPr/>
         </p:nvSpPr>
@@ -5886,7 +5886,7 @@
       </p:sp>
       <p:sp>
         <p:nvSpPr>
-          <p:cNvPr id="10" name="Text 6"/>
+          <p:cNvPr id="9" name="Text 6"/>
           <p:cNvSpPr/>
           <p:nvPr/>
         </p:nvSpPr>
@@ -5925,7 +5925,7 @@
       </p:sp>
       <p:sp>
         <p:nvSpPr>
-          <p:cNvPr id="11" name="Shape 7"/>
+          <p:cNvPr id="10" name="Shape 7"/>
           <p:cNvSpPr/>
           <p:nvPr/>
         </p:nvSpPr>
@@ -5947,7 +5947,7 @@
       </p:sp>
       <p:sp>
         <p:nvSpPr>
-          <p:cNvPr id="12" name="Text 8"/>
+          <p:cNvPr id="11" name="Text 8"/>
           <p:cNvSpPr/>
           <p:nvPr/>
         </p:nvSpPr>
@@ -5986,7 +5986,7 @@
       </p:sp>
       <p:sp>
         <p:nvSpPr>
-          <p:cNvPr id="13" name="Text 9"/>
+          <p:cNvPr id="12" name="Text 9"/>
           <p:cNvSpPr/>
           <p:nvPr/>
         </p:nvSpPr>
@@ -6025,7 +6025,7 @@
       </p:sp>
       <p:sp>
         <p:nvSpPr>
-          <p:cNvPr id="14" name="Shape 10"/>
+          <p:cNvPr id="13" name="Shape 10"/>
           <p:cNvSpPr/>
           <p:nvPr/>
         </p:nvSpPr>
@@ -6052,7 +6052,7 @@
       </p:sp>
       <p:sp>
         <p:nvSpPr>
-          <p:cNvPr id="15" name="Text 11"/>
+          <p:cNvPr id="14" name="Text 11"/>
           <p:cNvSpPr/>
           <p:nvPr/>
         </p:nvSpPr>
@@ -6174,7 +6174,7 @@
       </p:sp>
       <p:sp>
         <p:nvSpPr>
-          <p:cNvPr id="16" name="Shape 12"/>
+          <p:cNvPr id="15" name="Shape 12"/>
           <p:cNvSpPr/>
           <p:nvPr/>
         </p:nvSpPr>
@@ -6196,7 +6196,7 @@
       </p:sp>
       <p:sp>
         <p:nvSpPr>
-          <p:cNvPr id="17" name="Text 13"/>
+          <p:cNvPr id="16" name="Text 13"/>
           <p:cNvSpPr/>
           <p:nvPr/>
         </p:nvSpPr>
@@ -6238,7 +6238,7 @@
       </p:sp>
       <p:sp>
         <p:nvSpPr>
-          <p:cNvPr id="18" name="Shape 14"/>
+          <p:cNvPr id="17" name="Shape 14"/>
           <p:cNvSpPr/>
           <p:nvPr/>
         </p:nvSpPr>
@@ -6260,7 +6260,7 @@
       </p:sp>
       <p:sp>
         <p:nvSpPr>
-          <p:cNvPr id="19" name="Text 15"/>
+          <p:cNvPr id="18" name="Text 15"/>
           <p:cNvSpPr/>
           <p:nvPr/>
         </p:nvSpPr>
@@ -6299,7 +6299,7 @@
       </p:sp>
       <p:sp>
         <p:nvSpPr>
-          <p:cNvPr id="20" name="Text 16"/>
+          <p:cNvPr id="19" name="Text 16"/>
           <p:cNvSpPr/>
           <p:nvPr/>
         </p:nvSpPr>
@@ -6584,7 +6584,7 @@
       </p:pic>
       <p:sp>
         <p:nvSpPr>
-          <p:cNvPr id="8" name="Shape 4"/>
+          <p:cNvPr id="7" name="Shape 4"/>
           <p:cNvSpPr/>
           <p:nvPr/>
         </p:nvSpPr>
@@ -6611,7 +6611,7 @@
       </p:sp>
       <p:sp>
         <p:nvSpPr>
-          <p:cNvPr id="9" name="Text 5"/>
+          <p:cNvPr id="8" name="Text 5"/>
           <p:cNvSpPr/>
           <p:nvPr/>
         </p:nvSpPr>
@@ -6733,7 +6733,7 @@
       </p:sp>
       <p:sp>
         <p:nvSpPr>
-          <p:cNvPr id="10" name="Shape 6"/>
+          <p:cNvPr id="9" name="Shape 6"/>
           <p:cNvSpPr/>
           <p:nvPr/>
         </p:nvSpPr>
@@ -6760,7 +6760,7 @@
       </p:sp>
       <p:sp>
         <p:nvSpPr>
-          <p:cNvPr id="11" name="Text 7"/>
+          <p:cNvPr id="10" name="Text 7"/>
           <p:cNvSpPr/>
           <p:nvPr/>
         </p:nvSpPr>
@@ -6799,7 +6799,7 @@
       </p:sp>
       <p:sp>
         <p:nvSpPr>
-          <p:cNvPr id="12" name="Text 8"/>
+          <p:cNvPr id="11" name="Text 8"/>
           <p:cNvSpPr/>
           <p:nvPr/>
         </p:nvSpPr>
@@ -6838,7 +6838,7 @@
       </p:sp>
       <p:sp>
         <p:nvSpPr>
-          <p:cNvPr id="13" name="Text 9"/>
+          <p:cNvPr id="12" name="Text 9"/>
           <p:cNvSpPr/>
           <p:nvPr/>
         </p:nvSpPr>
@@ -6877,7 +6877,7 @@
       </p:sp>
       <p:sp>
         <p:nvSpPr>
-          <p:cNvPr id="14" name="Shape 10"/>
+          <p:cNvPr id="13" name="Shape 10"/>
           <p:cNvSpPr/>
           <p:nvPr/>
         </p:nvSpPr>
@@ -6899,7 +6899,7 @@
       </p:sp>
       <p:sp>
         <p:nvSpPr>
-          <p:cNvPr id="15" name="Text 11"/>
+          <p:cNvPr id="14" name="Text 11"/>
           <p:cNvSpPr/>
           <p:nvPr/>
         </p:nvSpPr>
@@ -6938,7 +6938,7 @@
       </p:sp>
       <p:sp>
         <p:nvSpPr>
-          <p:cNvPr id="16" name="Text 12"/>
+          <p:cNvPr id="15" name="Text 12"/>
           <p:cNvSpPr/>
           <p:nvPr/>
         </p:nvSpPr>
@@ -6980,7 +6980,7 @@
       </p:sp>
       <p:sp>
         <p:nvSpPr>
-          <p:cNvPr id="17" name="Shape 13"/>
+          <p:cNvPr id="16" name="Shape 13"/>
           <p:cNvSpPr/>
           <p:nvPr/>
         </p:nvSpPr>
@@ -7002,7 +7002,7 @@
       </p:sp>
       <p:sp>
         <p:nvSpPr>
-          <p:cNvPr id="18" name="Text 14"/>
+          <p:cNvPr id="17" name="Text 14"/>
           <p:cNvSpPr/>
           <p:nvPr/>
         </p:nvSpPr>
@@ -7287,7 +7287,7 @@
       </p:pic>
       <p:sp>
         <p:nvSpPr>
-          <p:cNvPr id="8" name="Shape 4"/>
+          <p:cNvPr id="7" name="Shape 4"/>
           <p:cNvSpPr/>
           <p:nvPr/>
         </p:nvSpPr>
@@ -7314,7 +7314,7 @@
       </p:sp>
       <p:sp>
         <p:nvSpPr>
-          <p:cNvPr id="9" name="Text 5"/>
+          <p:cNvPr id="8" name="Text 5"/>
           <p:cNvSpPr/>
           <p:nvPr/>
         </p:nvSpPr>
@@ -7356,7 +7356,7 @@
       </p:sp>
       <p:sp>
         <p:nvSpPr>
-          <p:cNvPr id="10" name="Text 6"/>
+          <p:cNvPr id="9" name="Text 6"/>
           <p:cNvSpPr/>
           <p:nvPr/>
         </p:nvSpPr>
@@ -7395,7 +7395,7 @@
       </p:sp>
       <p:sp>
         <p:nvSpPr>
-          <p:cNvPr id="11" name="Shape 7"/>
+          <p:cNvPr id="10" name="Shape 7"/>
           <p:cNvSpPr/>
           <p:nvPr/>
         </p:nvSpPr>
@@ -7417,7 +7417,7 @@
       </p:sp>
       <p:sp>
         <p:nvSpPr>
-          <p:cNvPr id="12" name="Text 8"/>
+          <p:cNvPr id="11" name="Text 8"/>
           <p:cNvSpPr/>
           <p:nvPr/>
         </p:nvSpPr>
@@ -7456,7 +7456,7 @@
       </p:sp>
       <p:sp>
         <p:nvSpPr>
-          <p:cNvPr id="13" name="Text 9"/>
+          <p:cNvPr id="12" name="Text 9"/>
           <p:cNvSpPr/>
           <p:nvPr/>
         </p:nvSpPr>
@@ -7495,7 +7495,7 @@
       </p:sp>
       <p:sp>
         <p:nvSpPr>
-          <p:cNvPr id="14" name="Shape 10"/>
+          <p:cNvPr id="13" name="Shape 10"/>
           <p:cNvSpPr/>
           <p:nvPr/>
         </p:nvSpPr>
@@ -7517,7 +7517,7 @@
       </p:sp>
       <p:sp>
         <p:nvSpPr>
-          <p:cNvPr id="15" name="Text 11"/>
+          <p:cNvPr id="14" name="Text 11"/>
           <p:cNvSpPr/>
           <p:nvPr/>
         </p:nvSpPr>
@@ -7556,7 +7556,7 @@
       </p:sp>
       <p:sp>
         <p:nvSpPr>
-          <p:cNvPr id="16" name="Shape 12"/>
+          <p:cNvPr id="15" name="Shape 12"/>
           <p:cNvSpPr/>
           <p:nvPr/>
         </p:nvSpPr>
@@ -7578,7 +7578,7 @@
       </p:sp>
       <p:sp>
         <p:nvSpPr>
-          <p:cNvPr id="17" name="Text 13"/>
+          <p:cNvPr id="16" name="Text 13"/>
           <p:cNvSpPr/>
           <p:nvPr/>
         </p:nvSpPr>
@@ -7620,7 +7620,7 @@
       </p:sp>
       <p:sp>
         <p:nvSpPr>
-          <p:cNvPr id="18" name="Shape 14"/>
+          <p:cNvPr id="17" name="Shape 14"/>
           <p:cNvSpPr/>
           <p:nvPr/>
         </p:nvSpPr>
@@ -7642,7 +7642,7 @@
       </p:sp>
       <p:sp>
         <p:nvSpPr>
-          <p:cNvPr id="19" name="Text 15"/>
+          <p:cNvPr id="18" name="Text 15"/>
           <p:cNvSpPr/>
           <p:nvPr/>
         </p:nvSpPr>
@@ -7681,7 +7681,7 @@
       </p:sp>
       <p:sp>
         <p:nvSpPr>
-          <p:cNvPr id="20" name="Text 16"/>
+          <p:cNvPr id="19" name="Text 16"/>
           <p:cNvSpPr/>
           <p:nvPr/>
         </p:nvSpPr>
@@ -8027,7 +8027,7 @@
       </p:pic>
       <p:sp>
         <p:nvSpPr>
-          <p:cNvPr id="10" name="Shape 6"/>
+          <p:cNvPr id="9" name="Shape 6"/>
           <p:cNvSpPr/>
           <p:nvPr/>
         </p:nvSpPr>
@@ -8054,7 +8054,7 @@
       </p:sp>
       <p:sp>
         <p:nvSpPr>
-          <p:cNvPr id="11" name="Text 7"/>
+          <p:cNvPr id="10" name="Text 7"/>
           <p:cNvSpPr/>
           <p:nvPr/>
         </p:nvSpPr>
@@ -8093,7 +8093,7 @@
       </p:sp>
       <p:sp>
         <p:nvSpPr>
-          <p:cNvPr id="12" name="Text 8"/>
+          <p:cNvPr id="11" name="Text 8"/>
           <p:cNvSpPr/>
           <p:nvPr/>
         </p:nvSpPr>
@@ -8132,7 +8132,7 @@
       </p:sp>
       <p:sp>
         <p:nvSpPr>
-          <p:cNvPr id="13" name="Shape 9"/>
+          <p:cNvPr id="12" name="Shape 9"/>
           <p:cNvSpPr/>
           <p:nvPr/>
         </p:nvSpPr>
@@ -8154,7 +8154,7 @@
       </p:sp>
       <p:sp>
         <p:nvSpPr>
-          <p:cNvPr id="14" name="Text 10"/>
+          <p:cNvPr id="13" name="Text 10"/>
           <p:cNvSpPr/>
           <p:nvPr/>
         </p:nvSpPr>
@@ -8193,7 +8193,7 @@
       </p:sp>
       <p:sp>
         <p:nvSpPr>
-          <p:cNvPr id="15" name="Text 11"/>
+          <p:cNvPr id="14" name="Text 11"/>
           <p:cNvSpPr/>
           <p:nvPr/>
         </p:nvSpPr>
@@ -8232,7 +8232,7 @@
       </p:sp>
       <p:sp>
         <p:nvSpPr>
-          <p:cNvPr id="16" name="Shape 12"/>
+          <p:cNvPr id="15" name="Shape 12"/>
           <p:cNvSpPr/>
           <p:nvPr/>
         </p:nvSpPr>
@@ -8254,7 +8254,7 @@
       </p:sp>
       <p:sp>
         <p:nvSpPr>
-          <p:cNvPr id="17" name="Text 13"/>
+          <p:cNvPr id="16" name="Text 13"/>
           <p:cNvSpPr/>
           <p:nvPr/>
         </p:nvSpPr>
@@ -8293,7 +8293,7 @@
       </p:sp>
       <p:sp>
         <p:nvSpPr>
-          <p:cNvPr id="18" name="Text 14"/>
+          <p:cNvPr id="17" name="Text 14"/>
           <p:cNvSpPr/>
           <p:nvPr/>
         </p:nvSpPr>
@@ -8332,7 +8332,7 @@
       </p:sp>
       <p:sp>
         <p:nvSpPr>
-          <p:cNvPr id="19" name="Shape 15"/>
+          <p:cNvPr id="18" name="Shape 15"/>
           <p:cNvSpPr/>
           <p:nvPr/>
         </p:nvSpPr>
@@ -8354,7 +8354,7 @@
       </p:sp>
       <p:sp>
         <p:nvSpPr>
-          <p:cNvPr id="20" name="Text 16"/>
+          <p:cNvPr id="19" name="Text 16"/>
           <p:cNvSpPr/>
           <p:nvPr/>
         </p:nvSpPr>
@@ -8393,7 +8393,7 @@
       </p:sp>
       <p:sp>
         <p:nvSpPr>
-          <p:cNvPr id="21" name="Text 17"/>
+          <p:cNvPr id="20" name="Text 17"/>
           <p:cNvSpPr/>
           <p:nvPr/>
         </p:nvSpPr>
@@ -8639,7 +8639,7 @@
       </p:pic>
       <p:sp>
         <p:nvSpPr>
-          <p:cNvPr id="7" name="Shape 3"/>
+          <p:cNvPr id="6" name="Shape 3"/>
           <p:cNvSpPr/>
           <p:nvPr/>
         </p:nvSpPr>
@@ -8661,7 +8661,7 @@
       </p:sp>
       <p:sp>
         <p:nvSpPr>
-          <p:cNvPr id="8" name="Shape 4"/>
+          <p:cNvPr id="7" name="Shape 4"/>
           <p:cNvSpPr/>
           <p:nvPr/>
         </p:nvSpPr>
@@ -8681,7 +8681,7 @@
       </p:sp>
       <p:sp>
         <p:nvSpPr>
-          <p:cNvPr id="9" name="Text 5"/>
+          <p:cNvPr id="8" name="Text 5"/>
           <p:cNvSpPr/>
           <p:nvPr/>
         </p:nvSpPr>
@@ -8720,7 +8720,7 @@
       </p:sp>
       <p:sp>
         <p:nvSpPr>
-          <p:cNvPr id="10" name="Text 6"/>
+          <p:cNvPr id="9" name="Text 6"/>
           <p:cNvSpPr/>
           <p:nvPr/>
         </p:nvSpPr>
@@ -8759,7 +8759,7 @@
       </p:sp>
       <p:sp>
         <p:nvSpPr>
-          <p:cNvPr id="11" name="Text 7"/>
+          <p:cNvPr id="10" name="Text 7"/>
           <p:cNvSpPr/>
           <p:nvPr/>
         </p:nvSpPr>
@@ -8801,7 +8801,7 @@
       </p:sp>
       <p:sp>
         <p:nvSpPr>
-          <p:cNvPr id="12" name="Shape 8"/>
+          <p:cNvPr id="11" name="Shape 8"/>
           <p:cNvSpPr/>
           <p:nvPr/>
         </p:nvSpPr>
@@ -8823,7 +8823,7 @@
       </p:sp>
       <p:sp>
         <p:nvSpPr>
-          <p:cNvPr id="13" name="Shape 9"/>
+          <p:cNvPr id="12" name="Shape 9"/>
           <p:cNvSpPr/>
           <p:nvPr/>
         </p:nvSpPr>
@@ -8843,7 +8843,7 @@
       </p:sp>
       <p:sp>
         <p:nvSpPr>
-          <p:cNvPr id="14" name="Text 10"/>
+          <p:cNvPr id="13" name="Text 10"/>
           <p:cNvSpPr/>
           <p:nvPr/>
         </p:nvSpPr>
@@ -8882,7 +8882,7 @@
       </p:sp>
       <p:sp>
         <p:nvSpPr>
-          <p:cNvPr id="15" name="Text 11"/>
+          <p:cNvPr id="14" name="Text 11"/>
           <p:cNvSpPr/>
           <p:nvPr/>
         </p:nvSpPr>
@@ -8921,7 +8921,7 @@
       </p:sp>
       <p:sp>
         <p:nvSpPr>
-          <p:cNvPr id="16" name="Text 12"/>
+          <p:cNvPr id="15" name="Text 12"/>
           <p:cNvSpPr/>
           <p:nvPr/>
         </p:nvSpPr>
@@ -8963,7 +8963,7 @@
       </p:sp>
       <p:sp>
         <p:nvSpPr>
-          <p:cNvPr id="17" name="Shape 13"/>
+          <p:cNvPr id="16" name="Shape 13"/>
           <p:cNvSpPr/>
           <p:nvPr/>
         </p:nvSpPr>
@@ -8985,7 +8985,7 @@
       </p:sp>
       <p:sp>
         <p:nvSpPr>
-          <p:cNvPr id="18" name="Shape 14"/>
+          <p:cNvPr id="17" name="Shape 14"/>
           <p:cNvSpPr/>
           <p:nvPr/>
         </p:nvSpPr>
@@ -9005,7 +9005,7 @@
       </p:sp>
       <p:sp>
         <p:nvSpPr>
-          <p:cNvPr id="19" name="Text 15"/>
+          <p:cNvPr id="18" name="Text 15"/>
           <p:cNvSpPr/>
           <p:nvPr/>
         </p:nvSpPr>
@@ -9044,7 +9044,7 @@
       </p:sp>
       <p:sp>
         <p:nvSpPr>
-          <p:cNvPr id="20" name="Text 16"/>
+          <p:cNvPr id="19" name="Text 16"/>
           <p:cNvSpPr/>
           <p:nvPr/>
         </p:nvSpPr>
@@ -9083,7 +9083,7 @@
       </p:sp>
       <p:sp>
         <p:nvSpPr>
-          <p:cNvPr id="21" name="Text 17"/>
+          <p:cNvPr id="20" name="Text 17"/>
           <p:cNvSpPr/>
           <p:nvPr/>
         </p:nvSpPr>
@@ -9125,7 +9125,7 @@
       </p:sp>
       <p:sp>
         <p:nvSpPr>
-          <p:cNvPr id="22" name="Shape 18"/>
+          <p:cNvPr id="21" name="Shape 18"/>
           <p:cNvSpPr/>
           <p:nvPr/>
         </p:nvSpPr>
@@ -9147,7 +9147,7 @@
       </p:sp>
       <p:sp>
         <p:nvSpPr>
-          <p:cNvPr id="23" name="Shape 19"/>
+          <p:cNvPr id="22" name="Shape 19"/>
           <p:cNvSpPr/>
           <p:nvPr/>
         </p:nvSpPr>
@@ -9167,7 +9167,7 @@
       </p:sp>
       <p:sp>
         <p:nvSpPr>
-          <p:cNvPr id="24" name="Text 20"/>
+          <p:cNvPr id="23" name="Text 20"/>
           <p:cNvSpPr/>
           <p:nvPr/>
         </p:nvSpPr>
@@ -9206,7 +9206,7 @@
       </p:sp>
       <p:sp>
         <p:nvSpPr>
-          <p:cNvPr id="25" name="Text 21"/>
+          <p:cNvPr id="24" name="Text 21"/>
           <p:cNvSpPr/>
           <p:nvPr/>
         </p:nvSpPr>
@@ -9245,7 +9245,7 @@
       </p:sp>
       <p:sp>
         <p:nvSpPr>
-          <p:cNvPr id="26" name="Text 22"/>
+          <p:cNvPr id="25" name="Text 22"/>
           <p:cNvSpPr/>
           <p:nvPr/>
         </p:nvSpPr>
@@ -9287,7 +9287,7 @@
       </p:sp>
       <p:sp>
         <p:nvSpPr>
-          <p:cNvPr id="27" name="Shape 23"/>
+          <p:cNvPr id="26" name="Shape 23"/>
           <p:cNvSpPr/>
           <p:nvPr/>
         </p:nvSpPr>
@@ -9309,7 +9309,7 @@
       </p:sp>
       <p:sp>
         <p:nvSpPr>
-          <p:cNvPr id="28" name="Text 24"/>
+          <p:cNvPr id="27" name="Text 24"/>
           <p:cNvSpPr/>
           <p:nvPr/>
         </p:nvSpPr>
@@ -9348,7 +9348,7 @@
       </p:sp>
       <p:sp>
         <p:nvSpPr>
-          <p:cNvPr id="29" name="Text 25"/>
+          <p:cNvPr id="28" name="Text 25"/>
           <p:cNvSpPr/>
           <p:nvPr/>
         </p:nvSpPr>
@@ -9594,7 +9594,7 @@
       </p:pic>
       <p:sp>
         <p:nvSpPr>
-          <p:cNvPr id="7" name="Shape 3"/>
+          <p:cNvPr id="6" name="Shape 3"/>
           <p:cNvSpPr/>
           <p:nvPr/>
         </p:nvSpPr>
@@ -9614,7 +9614,7 @@
       </p:sp>
       <p:sp>
         <p:nvSpPr>
-          <p:cNvPr id="8" name="Text 4"/>
+          <p:cNvPr id="7" name="Text 4"/>
           <p:cNvSpPr/>
           <p:nvPr/>
         </p:nvSpPr>
@@ -9653,7 +9653,7 @@
       </p:sp>
       <p:sp>
         <p:nvSpPr>
-          <p:cNvPr id="9" name="Text 5"/>
+          <p:cNvPr id="8" name="Text 5"/>
           <p:cNvSpPr/>
           <p:nvPr/>
         </p:nvSpPr>
@@ -9706,7 +9706,7 @@
       </p:sp>
       <p:sp>
         <p:nvSpPr>
-          <p:cNvPr id="10" name="Shape 6"/>
+          <p:cNvPr id="9" name="Shape 6"/>
           <p:cNvSpPr/>
           <p:nvPr/>
         </p:nvSpPr>
@@ -9726,7 +9726,7 @@
       </p:sp>
       <p:sp>
         <p:nvSpPr>
-          <p:cNvPr id="11" name="Text 7"/>
+          <p:cNvPr id="10" name="Text 7"/>
           <p:cNvSpPr/>
           <p:nvPr/>
         </p:nvSpPr>
@@ -9765,7 +9765,7 @@
       </p:sp>
       <p:sp>
         <p:nvSpPr>
-          <p:cNvPr id="12" name="Text 8"/>
+          <p:cNvPr id="11" name="Text 8"/>
           <p:cNvSpPr/>
           <p:nvPr/>
         </p:nvSpPr>
@@ -9818,7 +9818,7 @@
       </p:sp>
       <p:sp>
         <p:nvSpPr>
-          <p:cNvPr id="13" name="Shape 9"/>
+          <p:cNvPr id="12" name="Shape 9"/>
           <p:cNvSpPr/>
           <p:nvPr/>
         </p:nvSpPr>
@@ -9838,7 +9838,7 @@
       </p:sp>
       <p:sp>
         <p:nvSpPr>
-          <p:cNvPr id="14" name="Text 10"/>
+          <p:cNvPr id="13" name="Text 10"/>
           <p:cNvSpPr/>
           <p:nvPr/>
         </p:nvSpPr>
@@ -9877,7 +9877,7 @@
       </p:sp>
       <p:sp>
         <p:nvSpPr>
-          <p:cNvPr id="15" name="Text 11"/>
+          <p:cNvPr id="14" name="Text 11"/>
           <p:cNvSpPr/>
           <p:nvPr/>
         </p:nvSpPr>
@@ -9930,7 +9930,7 @@
       </p:sp>
       <p:sp>
         <p:nvSpPr>
-          <p:cNvPr id="16" name="Shape 12"/>
+          <p:cNvPr id="15" name="Shape 12"/>
           <p:cNvSpPr/>
           <p:nvPr/>
         </p:nvSpPr>
@@ -9950,7 +9950,7 @@
       </p:sp>
       <p:sp>
         <p:nvSpPr>
-          <p:cNvPr id="17" name="Text 13"/>
+          <p:cNvPr id="16" name="Text 13"/>
           <p:cNvSpPr/>
           <p:nvPr/>
         </p:nvSpPr>
@@ -9989,7 +9989,7 @@
       </p:sp>
       <p:sp>
         <p:nvSpPr>
-          <p:cNvPr id="18" name="Text 14"/>
+          <p:cNvPr id="17" name="Text 14"/>
           <p:cNvSpPr/>
           <p:nvPr/>
         </p:nvSpPr>
@@ -10042,7 +10042,7 @@
       </p:sp>
       <p:sp>
         <p:nvSpPr>
-          <p:cNvPr id="19" name="Shape 15"/>
+          <p:cNvPr id="18" name="Shape 15"/>
           <p:cNvSpPr/>
           <p:nvPr/>
         </p:nvSpPr>
@@ -10062,7 +10062,7 @@
       </p:sp>
       <p:sp>
         <p:nvSpPr>
-          <p:cNvPr id="20" name="Text 16"/>
+          <p:cNvPr id="19" name="Text 16"/>
           <p:cNvSpPr/>
           <p:nvPr/>
         </p:nvSpPr>
@@ -10101,7 +10101,7 @@
       </p:sp>
       <p:sp>
         <p:nvSpPr>
-          <p:cNvPr id="21" name="Text 17"/>
+          <p:cNvPr id="20" name="Text 17"/>
           <p:cNvSpPr/>
           <p:nvPr/>
         </p:nvSpPr>
@@ -10358,7 +10358,7 @@
       </p:pic>
       <p:sp>
         <p:nvSpPr>
-          <p:cNvPr id="7" name="Shape 3"/>
+          <p:cNvPr id="6" name="Shape 3"/>
           <p:cNvSpPr/>
           <p:nvPr/>
         </p:nvSpPr>
@@ -10380,7 +10380,7 @@
       </p:sp>
       <p:sp>
         <p:nvSpPr>
-          <p:cNvPr id="8" name="Text 4"/>
+          <p:cNvPr id="7" name="Text 4"/>
           <p:cNvSpPr/>
           <p:nvPr/>
         </p:nvSpPr>
@@ -10419,7 +10419,7 @@
       </p:sp>
       <p:sp>
         <p:nvSpPr>
-          <p:cNvPr id="9" name="Text 5"/>
+          <p:cNvPr id="8" name="Text 5"/>
           <p:cNvSpPr/>
           <p:nvPr/>
         </p:nvSpPr>
@@ -10461,7 +10461,7 @@
       </p:sp>
       <p:sp>
         <p:nvSpPr>
-          <p:cNvPr id="10" name="Shape 6"/>
+          <p:cNvPr id="9" name="Shape 6"/>
           <p:cNvSpPr/>
           <p:nvPr/>
         </p:nvSpPr>
@@ -10483,7 +10483,7 @@
       </p:sp>
       <p:sp>
         <p:nvSpPr>
-          <p:cNvPr id="11" name="Text 7"/>
+          <p:cNvPr id="10" name="Text 7"/>
           <p:cNvSpPr/>
           <p:nvPr/>
         </p:nvSpPr>
@@ -10522,7 +10522,7 @@
       </p:sp>
       <p:sp>
         <p:nvSpPr>
-          <p:cNvPr id="12" name="Text 8"/>
+          <p:cNvPr id="11" name="Text 8"/>
           <p:cNvSpPr/>
           <p:nvPr/>
         </p:nvSpPr>
@@ -10564,7 +10564,7 @@
       </p:sp>
       <p:sp>
         <p:nvSpPr>
-          <p:cNvPr id="13" name="Shape 9"/>
+          <p:cNvPr id="12" name="Shape 9"/>
           <p:cNvSpPr/>
           <p:nvPr/>
         </p:nvSpPr>
@@ -10591,7 +10591,7 @@
       </p:sp>
       <p:sp>
         <p:nvSpPr>
-          <p:cNvPr id="14" name="Text 10"/>
+          <p:cNvPr id="13" name="Text 10"/>
           <p:cNvSpPr/>
           <p:nvPr/>
         </p:nvSpPr>
@@ -10630,7 +10630,7 @@
       </p:sp>
       <p:sp>
         <p:nvSpPr>
-          <p:cNvPr id="15" name="Text 11"/>
+          <p:cNvPr id="14" name="Text 11"/>
           <p:cNvSpPr/>
           <p:nvPr/>
         </p:nvSpPr>
@@ -10672,7 +10672,7 @@
       </p:sp>
       <p:sp>
         <p:nvSpPr>
-          <p:cNvPr id="16" name="Shape 12"/>
+          <p:cNvPr id="15" name="Shape 12"/>
           <p:cNvSpPr/>
           <p:nvPr/>
         </p:nvSpPr>
@@ -10699,7 +10699,7 @@
       </p:sp>
       <p:sp>
         <p:nvSpPr>
-          <p:cNvPr id="17" name="Text 13"/>
+          <p:cNvPr id="16" name="Text 13"/>
           <p:cNvSpPr/>
           <p:nvPr/>
         </p:nvSpPr>
@@ -10987,7 +10987,7 @@
       </p:pic>
       <p:sp>
         <p:nvSpPr>
-          <p:cNvPr id="8" name="Shape 4"/>
+          <p:cNvPr id="7" name="Shape 4"/>
           <p:cNvSpPr/>
           <p:nvPr/>
         </p:nvSpPr>
@@ -11014,7 +11014,7 @@
       </p:sp>
       <p:sp>
         <p:nvSpPr>
-          <p:cNvPr id="9" name="Shape 5"/>
+          <p:cNvPr id="8" name="Shape 5"/>
           <p:cNvSpPr/>
           <p:nvPr/>
         </p:nvSpPr>
@@ -11034,7 +11034,7 @@
       </p:sp>
       <p:sp>
         <p:nvSpPr>
-          <p:cNvPr id="10" name="Text 6"/>
+          <p:cNvPr id="9" name="Text 6"/>
           <p:cNvSpPr/>
           <p:nvPr/>
         </p:nvSpPr>
@@ -11073,7 +11073,7 @@
       </p:sp>
       <p:sp>
         <p:nvSpPr>
-          <p:cNvPr id="11" name="Text 7"/>
+          <p:cNvPr id="10" name="Text 7"/>
           <p:cNvSpPr/>
           <p:nvPr/>
         </p:nvSpPr>
@@ -11112,7 +11112,7 @@
       </p:sp>
       <p:sp>
         <p:nvSpPr>
-          <p:cNvPr id="12" name="Text 8"/>
+          <p:cNvPr id="11" name="Text 8"/>
           <p:cNvSpPr/>
           <p:nvPr/>
         </p:nvSpPr>
@@ -11154,7 +11154,7 @@
       </p:sp>
       <p:sp>
         <p:nvSpPr>
-          <p:cNvPr id="13" name="Shape 9"/>
+          <p:cNvPr id="12" name="Shape 9"/>
           <p:cNvSpPr/>
           <p:nvPr/>
         </p:nvSpPr>
@@ -11181,7 +11181,7 @@
       </p:sp>
       <p:sp>
         <p:nvSpPr>
-          <p:cNvPr id="14" name="Shape 10"/>
+          <p:cNvPr id="13" name="Shape 10"/>
           <p:cNvSpPr/>
           <p:nvPr/>
         </p:nvSpPr>
@@ -11201,7 +11201,7 @@
       </p:sp>
       <p:sp>
         <p:nvSpPr>
-          <p:cNvPr id="15" name="Text 11"/>
+          <p:cNvPr id="14" name="Text 11"/>
           <p:cNvSpPr/>
           <p:nvPr/>
         </p:nvSpPr>
@@ -11240,7 +11240,7 @@
       </p:sp>
       <p:sp>
         <p:nvSpPr>
-          <p:cNvPr id="16" name="Text 12"/>
+          <p:cNvPr id="15" name="Text 12"/>
           <p:cNvSpPr/>
           <p:nvPr/>
         </p:nvSpPr>
@@ -11279,7 +11279,7 @@
       </p:sp>
       <p:sp>
         <p:nvSpPr>
-          <p:cNvPr id="17" name="Text 13"/>
+          <p:cNvPr id="16" name="Text 13"/>
           <p:cNvSpPr/>
           <p:nvPr/>
         </p:nvSpPr>
@@ -11321,7 +11321,7 @@
       </p:sp>
       <p:sp>
         <p:nvSpPr>
-          <p:cNvPr id="18" name="Shape 14"/>
+          <p:cNvPr id="17" name="Shape 14"/>
           <p:cNvSpPr/>
           <p:nvPr/>
         </p:nvSpPr>
@@ -11348,7 +11348,7 @@
       </p:sp>
       <p:sp>
         <p:nvSpPr>
-          <p:cNvPr id="19" name="Shape 15"/>
+          <p:cNvPr id="18" name="Shape 15"/>
           <p:cNvSpPr/>
           <p:nvPr/>
         </p:nvSpPr>
@@ -11368,7 +11368,7 @@
       </p:sp>
       <p:sp>
         <p:nvSpPr>
-          <p:cNvPr id="20" name="Text 16"/>
+          <p:cNvPr id="19" name="Text 16"/>
           <p:cNvSpPr/>
           <p:nvPr/>
         </p:nvSpPr>
@@ -11407,7 +11407,7 @@
       </p:sp>
       <p:sp>
         <p:nvSpPr>
-          <p:cNvPr id="21" name="Text 17"/>
+          <p:cNvPr id="20" name="Text 17"/>
           <p:cNvSpPr/>
           <p:nvPr/>
         </p:nvSpPr>
@@ -11446,7 +11446,7 @@
       </p:sp>
       <p:sp>
         <p:nvSpPr>
-          <p:cNvPr id="22" name="Text 18"/>
+          <p:cNvPr id="21" name="Text 18"/>
           <p:cNvSpPr/>
           <p:nvPr/>
         </p:nvSpPr>
@@ -11488,7 +11488,7 @@
       </p:sp>
       <p:sp>
         <p:nvSpPr>
-          <p:cNvPr id="23" name="Shape 19"/>
+          <p:cNvPr id="22" name="Shape 19"/>
           <p:cNvSpPr/>
           <p:nvPr/>
         </p:nvSpPr>
@@ -11515,7 +11515,7 @@
       </p:sp>
       <p:sp>
         <p:nvSpPr>
-          <p:cNvPr id="24" name="Shape 20"/>
+          <p:cNvPr id="23" name="Shape 20"/>
           <p:cNvSpPr/>
           <p:nvPr/>
         </p:nvSpPr>
@@ -11535,7 +11535,7 @@
       </p:sp>
       <p:sp>
         <p:nvSpPr>
-          <p:cNvPr id="25" name="Text 21"/>
+          <p:cNvPr id="24" name="Text 21"/>
           <p:cNvSpPr/>
           <p:nvPr/>
         </p:nvSpPr>
@@ -11574,7 +11574,7 @@
       </p:sp>
       <p:sp>
         <p:nvSpPr>
-          <p:cNvPr id="26" name="Text 22"/>
+          <p:cNvPr id="25" name="Text 22"/>
           <p:cNvSpPr/>
           <p:nvPr/>
         </p:nvSpPr>
@@ -11613,7 +11613,7 @@
       </p:sp>
       <p:sp>
         <p:nvSpPr>
-          <p:cNvPr id="27" name="Text 23"/>
+          <p:cNvPr id="26" name="Text 23"/>
           <p:cNvSpPr/>
           <p:nvPr/>
         </p:nvSpPr>
@@ -11655,7 +11655,7 @@
       </p:sp>
       <p:sp>
         <p:nvSpPr>
-          <p:cNvPr id="28" name="Shape 24"/>
+          <p:cNvPr id="27" name="Shape 24"/>
           <p:cNvSpPr/>
           <p:nvPr/>
         </p:nvSpPr>
@@ -11682,7 +11682,7 @@
       </p:sp>
       <p:sp>
         <p:nvSpPr>
-          <p:cNvPr id="29" name="Shape 25"/>
+          <p:cNvPr id="28" name="Shape 25"/>
           <p:cNvSpPr/>
           <p:nvPr/>
         </p:nvSpPr>
@@ -11702,7 +11702,7 @@
       </p:sp>
       <p:sp>
         <p:nvSpPr>
-          <p:cNvPr id="30" name="Text 26"/>
+          <p:cNvPr id="29" name="Text 26"/>
           <p:cNvSpPr/>
           <p:nvPr/>
         </p:nvSpPr>
@@ -11741,7 +11741,7 @@
       </p:sp>
       <p:sp>
         <p:nvSpPr>
-          <p:cNvPr id="31" name="Text 27"/>
+          <p:cNvPr id="30" name="Text 27"/>
           <p:cNvSpPr/>
           <p:nvPr/>
         </p:nvSpPr>
@@ -11780,7 +11780,7 @@
       </p:sp>
       <p:sp>
         <p:nvSpPr>
-          <p:cNvPr id="32" name="Text 28"/>
+          <p:cNvPr id="31" name="Text 28"/>
           <p:cNvSpPr/>
           <p:nvPr/>
         </p:nvSpPr>
@@ -12026,7 +12026,7 @@
       </p:pic>
       <p:sp>
         <p:nvSpPr>
-          <p:cNvPr id="7" name="Shape 3"/>
+          <p:cNvPr id="6" name="Shape 3"/>
           <p:cNvSpPr/>
           <p:nvPr/>
         </p:nvSpPr>
@@ -12053,7 +12053,7 @@
       </p:sp>
       <p:sp>
         <p:nvSpPr>
-          <p:cNvPr id="8" name="Shape 4"/>
+          <p:cNvPr id="7" name="Shape 4"/>
           <p:cNvSpPr/>
           <p:nvPr/>
         </p:nvSpPr>
@@ -12080,7 +12080,7 @@
       </p:sp>
       <p:sp>
         <p:nvSpPr>
-          <p:cNvPr id="9" name="Shape 5"/>
+          <p:cNvPr id="8" name="Shape 5"/>
           <p:cNvSpPr/>
           <p:nvPr/>
         </p:nvSpPr>
@@ -12100,7 +12100,7 @@
       </p:sp>
       <p:sp>
         <p:nvSpPr>
-          <p:cNvPr id="10" name="Shape 6"/>
+          <p:cNvPr id="9" name="Shape 6"/>
           <p:cNvSpPr/>
           <p:nvPr/>
         </p:nvSpPr>
@@ -12120,7 +12120,7 @@
       </p:sp>
       <p:sp>
         <p:nvSpPr>
-          <p:cNvPr id="11" name="Text 7"/>
+          <p:cNvPr id="10" name="Text 7"/>
           <p:cNvSpPr/>
           <p:nvPr/>
         </p:nvSpPr>
@@ -12159,7 +12159,7 @@
       </p:sp>
       <p:sp>
         <p:nvSpPr>
-          <p:cNvPr id="12" name="Shape 8"/>
+          <p:cNvPr id="11" name="Shape 8"/>
           <p:cNvSpPr/>
           <p:nvPr/>
         </p:nvSpPr>
@@ -12186,7 +12186,7 @@
       </p:sp>
       <p:sp>
         <p:nvSpPr>
-          <p:cNvPr id="13" name="Shape 9"/>
+          <p:cNvPr id="12" name="Shape 9"/>
           <p:cNvSpPr/>
           <p:nvPr/>
         </p:nvSpPr>
@@ -12206,7 +12206,7 @@
       </p:sp>
       <p:sp>
         <p:nvSpPr>
-          <p:cNvPr id="14" name="Shape 10"/>
+          <p:cNvPr id="13" name="Shape 10"/>
           <p:cNvSpPr/>
           <p:nvPr/>
         </p:nvSpPr>
@@ -12226,7 +12226,7 @@
       </p:sp>
       <p:sp>
         <p:nvSpPr>
-          <p:cNvPr id="15" name="Text 11"/>
+          <p:cNvPr id="14" name="Text 11"/>
           <p:cNvSpPr/>
           <p:nvPr/>
         </p:nvSpPr>
@@ -12265,7 +12265,7 @@
       </p:sp>
       <p:sp>
         <p:nvSpPr>
-          <p:cNvPr id="16" name="Shape 12"/>
+          <p:cNvPr id="15" name="Shape 12"/>
           <p:cNvSpPr/>
           <p:nvPr/>
         </p:nvSpPr>
@@ -12292,7 +12292,7 @@
       </p:sp>
       <p:sp>
         <p:nvSpPr>
-          <p:cNvPr id="17" name="Shape 13"/>
+          <p:cNvPr id="16" name="Shape 13"/>
           <p:cNvSpPr/>
           <p:nvPr/>
         </p:nvSpPr>
@@ -12312,7 +12312,7 @@
       </p:sp>
       <p:sp>
         <p:nvSpPr>
-          <p:cNvPr id="18" name="Shape 14"/>
+          <p:cNvPr id="17" name="Shape 14"/>
           <p:cNvSpPr/>
           <p:nvPr/>
         </p:nvSpPr>
@@ -12332,7 +12332,7 @@
       </p:sp>
       <p:sp>
         <p:nvSpPr>
-          <p:cNvPr id="19" name="Text 15"/>
+          <p:cNvPr id="18" name="Text 15"/>
           <p:cNvSpPr/>
           <p:nvPr/>
         </p:nvSpPr>
@@ -12371,7 +12371,7 @@
       </p:sp>
       <p:sp>
         <p:nvSpPr>
-          <p:cNvPr id="20" name="Shape 16"/>
+          <p:cNvPr id="19" name="Shape 16"/>
           <p:cNvSpPr/>
           <p:nvPr/>
         </p:nvSpPr>
@@ -12398,7 +12398,7 @@
       </p:sp>
       <p:sp>
         <p:nvSpPr>
-          <p:cNvPr id="21" name="Shape 17"/>
+          <p:cNvPr id="20" name="Shape 17"/>
           <p:cNvSpPr/>
           <p:nvPr/>
         </p:nvSpPr>
@@ -12418,7 +12418,7 @@
       </p:sp>
       <p:sp>
         <p:nvSpPr>
-          <p:cNvPr id="22" name="Shape 18"/>
+          <p:cNvPr id="21" name="Shape 18"/>
           <p:cNvSpPr/>
           <p:nvPr/>
         </p:nvSpPr>
@@ -12438,7 +12438,7 @@
       </p:sp>
       <p:sp>
         <p:nvSpPr>
-          <p:cNvPr id="23" name="Text 19"/>
+          <p:cNvPr id="22" name="Text 19"/>
           <p:cNvSpPr/>
           <p:nvPr/>
         </p:nvSpPr>
@@ -12477,7 +12477,7 @@
       </p:sp>
       <p:sp>
         <p:nvSpPr>
-          <p:cNvPr id="24" name="Text 20"/>
+          <p:cNvPr id="23" name="Text 20"/>
           <p:cNvSpPr/>
           <p:nvPr/>
         </p:nvSpPr>
@@ -12720,7 +12720,7 @@
       </p:pic>
       <p:sp>
         <p:nvSpPr>
-          <p:cNvPr id="7" name="Shape 3"/>
+          <p:cNvPr id="6" name="Shape 3"/>
           <p:cNvSpPr/>
           <p:nvPr/>
         </p:nvSpPr>
@@ -12747,7 +12747,7 @@
       </p:sp>
       <p:sp>
         <p:nvSpPr>
-          <p:cNvPr id="8" name="Shape 4"/>
+          <p:cNvPr id="7" name="Shape 4"/>
           <p:cNvSpPr/>
           <p:nvPr/>
         </p:nvSpPr>
@@ -12767,7 +12767,7 @@
       </p:sp>
       <p:sp>
         <p:nvSpPr>
-          <p:cNvPr id="9" name="Shape 5"/>
+          <p:cNvPr id="8" name="Shape 5"/>
           <p:cNvSpPr/>
           <p:nvPr/>
         </p:nvSpPr>
@@ -12787,7 +12787,7 @@
       </p:sp>
       <p:sp>
         <p:nvSpPr>
-          <p:cNvPr id="10" name="Shape 6"/>
+          <p:cNvPr id="9" name="Shape 6"/>
           <p:cNvSpPr/>
           <p:nvPr/>
         </p:nvSpPr>
@@ -12807,7 +12807,7 @@
       </p:sp>
       <p:sp>
         <p:nvSpPr>
-          <p:cNvPr id="11" name="Text 7"/>
+          <p:cNvPr id="10" name="Text 7"/>
           <p:cNvSpPr/>
           <p:nvPr/>
         </p:nvSpPr>
@@ -12860,7 +12860,7 @@
       </p:sp>
       <p:sp>
         <p:nvSpPr>
-          <p:cNvPr id="12" name="Shape 8"/>
+          <p:cNvPr id="11" name="Shape 8"/>
           <p:cNvSpPr/>
           <p:nvPr/>
         </p:nvSpPr>
@@ -12887,7 +12887,7 @@
       </p:sp>
       <p:sp>
         <p:nvSpPr>
-          <p:cNvPr id="13" name="Shape 9"/>
+          <p:cNvPr id="12" name="Shape 9"/>
           <p:cNvSpPr/>
           <p:nvPr/>
         </p:nvSpPr>
@@ -12907,7 +12907,7 @@
       </p:sp>
       <p:sp>
         <p:nvSpPr>
-          <p:cNvPr id="14" name="Shape 10"/>
+          <p:cNvPr id="13" name="Shape 10"/>
           <p:cNvSpPr/>
           <p:nvPr/>
         </p:nvSpPr>
@@ -12927,7 +12927,7 @@
       </p:sp>
       <p:sp>
         <p:nvSpPr>
-          <p:cNvPr id="15" name="Shape 11"/>
+          <p:cNvPr id="14" name="Shape 11"/>
           <p:cNvSpPr/>
           <p:nvPr/>
         </p:nvSpPr>
@@ -12947,7 +12947,7 @@
       </p:sp>
       <p:sp>
         <p:nvSpPr>
-          <p:cNvPr id="16" name="Text 12"/>
+          <p:cNvPr id="15" name="Text 12"/>
           <p:cNvSpPr/>
           <p:nvPr/>
         </p:nvSpPr>
@@ -13000,7 +13000,7 @@
       </p:sp>
       <p:sp>
         <p:nvSpPr>
-          <p:cNvPr id="17" name="Shape 13"/>
+          <p:cNvPr id="16" name="Shape 13"/>
           <p:cNvSpPr/>
           <p:nvPr/>
         </p:nvSpPr>
@@ -13027,7 +13027,7 @@
       </p:sp>
       <p:sp>
         <p:nvSpPr>
-          <p:cNvPr id="18" name="Shape 14"/>
+          <p:cNvPr id="17" name="Shape 14"/>
           <p:cNvSpPr/>
           <p:nvPr/>
         </p:nvSpPr>
@@ -13047,7 +13047,7 @@
       </p:sp>
       <p:sp>
         <p:nvSpPr>
-          <p:cNvPr id="19" name="Shape 15"/>
+          <p:cNvPr id="18" name="Shape 15"/>
           <p:cNvSpPr/>
           <p:nvPr/>
         </p:nvSpPr>
@@ -13067,7 +13067,7 @@
       </p:sp>
       <p:sp>
         <p:nvSpPr>
-          <p:cNvPr id="20" name="Shape 16"/>
+          <p:cNvPr id="19" name="Shape 16"/>
           <p:cNvSpPr/>
           <p:nvPr/>
         </p:nvSpPr>
@@ -13087,7 +13087,7 @@
       </p:sp>
       <p:sp>
         <p:nvSpPr>
-          <p:cNvPr id="21" name="Text 17"/>
+          <p:cNvPr id="20" name="Text 17"/>
           <p:cNvSpPr/>
           <p:nvPr/>
         </p:nvSpPr>
@@ -13140,7 +13140,7 @@
       </p:sp>
       <p:sp>
         <p:nvSpPr>
-          <p:cNvPr id="22" name="Shape 18"/>
+          <p:cNvPr id="21" name="Shape 18"/>
           <p:cNvSpPr/>
           <p:nvPr/>
         </p:nvSpPr>
@@ -13167,7 +13167,7 @@
       </p:sp>
       <p:sp>
         <p:nvSpPr>
-          <p:cNvPr id="23" name="Shape 19"/>
+          <p:cNvPr id="22" name="Shape 19"/>
           <p:cNvSpPr/>
           <p:nvPr/>
         </p:nvSpPr>
@@ -13187,7 +13187,7 @@
       </p:sp>
       <p:sp>
         <p:nvSpPr>
-          <p:cNvPr id="24" name="Shape 20"/>
+          <p:cNvPr id="23" name="Shape 20"/>
           <p:cNvSpPr/>
           <p:nvPr/>
         </p:nvSpPr>
@@ -13207,7 +13207,7 @@
       </p:sp>
       <p:sp>
         <p:nvSpPr>
-          <p:cNvPr id="25" name="Shape 21"/>
+          <p:cNvPr id="24" name="Shape 21"/>
           <p:cNvSpPr/>
           <p:nvPr/>
         </p:nvSpPr>
@@ -13227,7 +13227,7 @@
       </p:sp>
       <p:sp>
         <p:nvSpPr>
-          <p:cNvPr id="26" name="Text 22"/>
+          <p:cNvPr id="25" name="Text 22"/>
           <p:cNvSpPr/>
           <p:nvPr/>
         </p:nvSpPr>
@@ -13484,7 +13484,7 @@
       </p:pic>
       <p:sp>
         <p:nvSpPr>
-          <p:cNvPr id="7" name="Shape 3"/>
+          <p:cNvPr id="6" name="Shape 3"/>
           <p:cNvSpPr/>
           <p:nvPr/>
         </p:nvSpPr>
@@ -13511,7 +13511,7 @@
       </p:sp>
       <p:sp>
         <p:nvSpPr>
-          <p:cNvPr id="8" name="Text 4"/>
+          <p:cNvPr id="7" name="Text 4"/>
           <p:cNvSpPr/>
           <p:nvPr/>
         </p:nvSpPr>
@@ -13550,7 +13550,7 @@
       </p:sp>
       <p:sp>
         <p:nvSpPr>
-          <p:cNvPr id="9" name="Text 5"/>
+          <p:cNvPr id="8" name="Text 5"/>
           <p:cNvSpPr/>
           <p:nvPr/>
         </p:nvSpPr>
@@ -13589,7 +13589,7 @@
       </p:sp>
       <p:sp>
         <p:nvSpPr>
-          <p:cNvPr id="10" name="Text 6"/>
+          <p:cNvPr id="9" name="Text 6"/>
           <p:cNvSpPr/>
           <p:nvPr/>
         </p:nvSpPr>
@@ -13628,7 +13628,7 @@
       </p:sp>
       <p:sp>
         <p:nvSpPr>
-          <p:cNvPr id="11" name="Text 7"/>
+          <p:cNvPr id="10" name="Text 7"/>
           <p:cNvSpPr/>
           <p:nvPr/>
         </p:nvSpPr>
@@ -13681,7 +13681,7 @@
       </p:sp>
       <p:sp>
         <p:nvSpPr>
-          <p:cNvPr id="12" name="Text 8"/>
+          <p:cNvPr id="11" name="Text 8"/>
           <p:cNvSpPr/>
           <p:nvPr/>
         </p:nvSpPr>
@@ -13734,7 +13734,7 @@
       </p:sp>
       <p:sp>
         <p:nvSpPr>
-          <p:cNvPr id="13" name="Text 9"/>
+          <p:cNvPr id="12" name="Text 9"/>
           <p:cNvSpPr/>
           <p:nvPr/>
         </p:nvSpPr>
@@ -13787,7 +13787,7 @@
       </p:sp>
       <p:sp>
         <p:nvSpPr>
-          <p:cNvPr id="14" name="Shape 10"/>
+          <p:cNvPr id="13" name="Shape 10"/>
           <p:cNvSpPr/>
           <p:nvPr/>
         </p:nvSpPr>
@@ -13809,7 +13809,7 @@
       </p:sp>
       <p:sp>
         <p:nvSpPr>
-          <p:cNvPr id="15" name="Text 11"/>
+          <p:cNvPr id="14" name="Text 11"/>
           <p:cNvSpPr/>
           <p:nvPr/>
         </p:nvSpPr>
@@ -13848,7 +13848,7 @@
       </p:sp>
       <p:sp>
         <p:nvSpPr>
-          <p:cNvPr id="16" name="Text 12"/>
+          <p:cNvPr id="15" name="Text 12"/>
           <p:cNvSpPr/>
           <p:nvPr/>
         </p:nvSpPr>
@@ -14637,7 +14637,7 @@
       </p:pic>
       <p:sp>
         <p:nvSpPr>
-          <p:cNvPr id="7" name="Shape 3"/>
+          <p:cNvPr id="6" name="Shape 3"/>
           <p:cNvSpPr/>
           <p:nvPr/>
         </p:nvSpPr>
@@ -14664,7 +14664,7 @@
       </p:sp>
       <p:sp>
         <p:nvSpPr>
-          <p:cNvPr id="8" name="Shape 4"/>
+          <p:cNvPr id="7" name="Shape 4"/>
           <p:cNvSpPr/>
           <p:nvPr/>
         </p:nvSpPr>
@@ -14684,7 +14684,7 @@
       </p:sp>
       <p:sp>
         <p:nvSpPr>
-          <p:cNvPr id="9" name="Text 5"/>
+          <p:cNvPr id="8" name="Text 5"/>
           <p:cNvSpPr/>
           <p:nvPr/>
         </p:nvSpPr>
@@ -14723,7 +14723,7 @@
       </p:sp>
       <p:sp>
         <p:nvSpPr>
-          <p:cNvPr id="10" name="Text 6"/>
+          <p:cNvPr id="9" name="Text 6"/>
           <p:cNvSpPr/>
           <p:nvPr/>
         </p:nvSpPr>
@@ -14762,7 +14762,7 @@
       </p:sp>
       <p:sp>
         <p:nvSpPr>
-          <p:cNvPr id="11" name="Shape 7"/>
+          <p:cNvPr id="10" name="Shape 7"/>
           <p:cNvSpPr/>
           <p:nvPr/>
         </p:nvSpPr>
@@ -14789,7 +14789,7 @@
       </p:sp>
       <p:sp>
         <p:nvSpPr>
-          <p:cNvPr id="12" name="Shape 8"/>
+          <p:cNvPr id="11" name="Shape 8"/>
           <p:cNvSpPr/>
           <p:nvPr/>
         </p:nvSpPr>
@@ -14809,7 +14809,7 @@
       </p:sp>
       <p:sp>
         <p:nvSpPr>
-          <p:cNvPr id="13" name="Text 9"/>
+          <p:cNvPr id="12" name="Text 9"/>
           <p:cNvSpPr/>
           <p:nvPr/>
         </p:nvSpPr>
@@ -14848,7 +14848,7 @@
       </p:sp>
       <p:sp>
         <p:nvSpPr>
-          <p:cNvPr id="14" name="Text 10"/>
+          <p:cNvPr id="13" name="Text 10"/>
           <p:cNvSpPr/>
           <p:nvPr/>
         </p:nvSpPr>
@@ -14887,7 +14887,7 @@
       </p:sp>
       <p:sp>
         <p:nvSpPr>
-          <p:cNvPr id="15" name="Shape 11"/>
+          <p:cNvPr id="14" name="Shape 11"/>
           <p:cNvSpPr/>
           <p:nvPr/>
         </p:nvSpPr>
@@ -14914,7 +14914,7 @@
       </p:sp>
       <p:sp>
         <p:nvSpPr>
-          <p:cNvPr id="16" name="Shape 12"/>
+          <p:cNvPr id="15" name="Shape 12"/>
           <p:cNvSpPr/>
           <p:nvPr/>
         </p:nvSpPr>
@@ -14934,7 +14934,7 @@
       </p:sp>
       <p:sp>
         <p:nvSpPr>
-          <p:cNvPr id="17" name="Text 13"/>
+          <p:cNvPr id="16" name="Text 13"/>
           <p:cNvSpPr/>
           <p:nvPr/>
         </p:nvSpPr>
@@ -14973,7 +14973,7 @@
       </p:sp>
       <p:sp>
         <p:nvSpPr>
-          <p:cNvPr id="18" name="Text 14"/>
+          <p:cNvPr id="17" name="Text 14"/>
           <p:cNvSpPr/>
           <p:nvPr/>
         </p:nvSpPr>
@@ -15012,7 +15012,7 @@
       </p:sp>
       <p:sp>
         <p:nvSpPr>
-          <p:cNvPr id="19" name="Shape 15"/>
+          <p:cNvPr id="18" name="Shape 15"/>
           <p:cNvSpPr/>
           <p:nvPr/>
         </p:nvSpPr>
@@ -15039,7 +15039,7 @@
       </p:sp>
       <p:sp>
         <p:nvSpPr>
-          <p:cNvPr id="20" name="Shape 16"/>
+          <p:cNvPr id="19" name="Shape 16"/>
           <p:cNvSpPr/>
           <p:nvPr/>
         </p:nvSpPr>
@@ -15059,7 +15059,7 @@
       </p:sp>
       <p:sp>
         <p:nvSpPr>
-          <p:cNvPr id="21" name="Text 17"/>
+          <p:cNvPr id="20" name="Text 17"/>
           <p:cNvSpPr/>
           <p:nvPr/>
         </p:nvSpPr>
@@ -15098,7 +15098,7 @@
       </p:sp>
       <p:sp>
         <p:nvSpPr>
-          <p:cNvPr id="22" name="Text 18"/>
+          <p:cNvPr id="21" name="Text 18"/>
           <p:cNvSpPr/>
           <p:nvPr/>
         </p:nvSpPr>
@@ -15137,7 +15137,7 @@
       </p:sp>
       <p:sp>
         <p:nvSpPr>
-          <p:cNvPr id="23" name="Shape 19"/>
+          <p:cNvPr id="22" name="Shape 19"/>
           <p:cNvSpPr/>
           <p:nvPr/>
         </p:nvSpPr>
@@ -15164,7 +15164,7 @@
       </p:sp>
       <p:sp>
         <p:nvSpPr>
-          <p:cNvPr id="24" name="Shape 20"/>
+          <p:cNvPr id="23" name="Shape 20"/>
           <p:cNvSpPr/>
           <p:nvPr/>
         </p:nvSpPr>
@@ -15184,7 +15184,7 @@
       </p:sp>
       <p:sp>
         <p:nvSpPr>
-          <p:cNvPr id="25" name="Text 21"/>
+          <p:cNvPr id="24" name="Text 21"/>
           <p:cNvSpPr/>
           <p:nvPr/>
         </p:nvSpPr>
@@ -15223,7 +15223,7 @@
       </p:sp>
       <p:sp>
         <p:nvSpPr>
-          <p:cNvPr id="26" name="Text 22"/>
+          <p:cNvPr id="25" name="Text 22"/>
           <p:cNvSpPr/>
           <p:nvPr/>
         </p:nvSpPr>
@@ -15262,7 +15262,7 @@
       </p:sp>
       <p:sp>
         <p:nvSpPr>
-          <p:cNvPr id="27" name="Shape 23"/>
+          <p:cNvPr id="26" name="Shape 23"/>
           <p:cNvSpPr/>
           <p:nvPr/>
         </p:nvSpPr>
@@ -15289,7 +15289,7 @@
       </p:sp>
       <p:sp>
         <p:nvSpPr>
-          <p:cNvPr id="28" name="Shape 24"/>
+          <p:cNvPr id="27" name="Shape 24"/>
           <p:cNvSpPr/>
           <p:nvPr/>
         </p:nvSpPr>
@@ -15309,7 +15309,7 @@
       </p:sp>
       <p:sp>
         <p:nvSpPr>
-          <p:cNvPr id="29" name="Text 25"/>
+          <p:cNvPr id="28" name="Text 25"/>
           <p:cNvSpPr/>
           <p:nvPr/>
         </p:nvSpPr>
@@ -15348,7 +15348,7 @@
       </p:sp>
       <p:sp>
         <p:nvSpPr>
-          <p:cNvPr id="30" name="Text 26"/>
+          <p:cNvPr id="29" name="Text 26"/>
           <p:cNvSpPr/>
           <p:nvPr/>
         </p:nvSpPr>
@@ -15387,7 +15387,7 @@
       </p:sp>
       <p:sp>
         <p:nvSpPr>
-          <p:cNvPr id="31" name="Shape 27"/>
+          <p:cNvPr id="30" name="Shape 27"/>
           <p:cNvSpPr/>
           <p:nvPr/>
         </p:nvSpPr>
@@ -15414,7 +15414,7 @@
       </p:sp>
       <p:sp>
         <p:nvSpPr>
-          <p:cNvPr id="32" name="Shape 28"/>
+          <p:cNvPr id="31" name="Shape 28"/>
           <p:cNvSpPr/>
           <p:nvPr/>
         </p:nvSpPr>
@@ -15434,7 +15434,7 @@
       </p:sp>
       <p:sp>
         <p:nvSpPr>
-          <p:cNvPr id="33" name="Text 29"/>
+          <p:cNvPr id="32" name="Text 29"/>
           <p:cNvSpPr/>
           <p:nvPr/>
         </p:nvSpPr>
@@ -15473,7 +15473,7 @@
       </p:sp>
       <p:sp>
         <p:nvSpPr>
-          <p:cNvPr id="34" name="Text 30"/>
+          <p:cNvPr id="33" name="Text 30"/>
           <p:cNvSpPr/>
           <p:nvPr/>
         </p:nvSpPr>
@@ -15512,7 +15512,7 @@
       </p:sp>
       <p:sp>
         <p:nvSpPr>
-          <p:cNvPr id="35" name="Shape 31"/>
+          <p:cNvPr id="34" name="Shape 31"/>
           <p:cNvSpPr/>
           <p:nvPr/>
         </p:nvSpPr>
@@ -15539,7 +15539,7 @@
       </p:sp>
       <p:sp>
         <p:nvSpPr>
-          <p:cNvPr id="36" name="Shape 32"/>
+          <p:cNvPr id="35" name="Shape 32"/>
           <p:cNvSpPr/>
           <p:nvPr/>
         </p:nvSpPr>
@@ -15559,7 +15559,7 @@
       </p:sp>
       <p:sp>
         <p:nvSpPr>
-          <p:cNvPr id="37" name="Text 33"/>
+          <p:cNvPr id="36" name="Text 33"/>
           <p:cNvSpPr/>
           <p:nvPr/>
         </p:nvSpPr>
@@ -15598,7 +15598,7 @@
       </p:sp>
       <p:sp>
         <p:nvSpPr>
-          <p:cNvPr id="38" name="Text 34"/>
+          <p:cNvPr id="37" name="Text 34"/>
           <p:cNvSpPr/>
           <p:nvPr/>
         </p:nvSpPr>
@@ -15637,7 +15637,7 @@
       </p:sp>
       <p:sp>
         <p:nvSpPr>
-          <p:cNvPr id="39" name="Shape 35"/>
+          <p:cNvPr id="38" name="Shape 35"/>
           <p:cNvSpPr/>
           <p:nvPr/>
         </p:nvSpPr>
@@ -15659,7 +15659,7 @@
       </p:sp>
       <p:sp>
         <p:nvSpPr>
-          <p:cNvPr id="40" name="Shape 36"/>
+          <p:cNvPr id="39" name="Shape 36"/>
           <p:cNvSpPr/>
           <p:nvPr/>
         </p:nvSpPr>
@@ -15679,7 +15679,7 @@
       </p:sp>
       <p:sp>
         <p:nvSpPr>
-          <p:cNvPr id="41" name="Text 37"/>
+          <p:cNvPr id="40" name="Text 37"/>
           <p:cNvSpPr/>
           <p:nvPr/>
         </p:nvSpPr>
@@ -15718,7 +15718,7 @@
       </p:sp>
       <p:sp>
         <p:nvSpPr>
-          <p:cNvPr id="42" name="Text 38"/>
+          <p:cNvPr id="41" name="Text 38"/>
           <p:cNvSpPr/>
           <p:nvPr/>
         </p:nvSpPr>
@@ -15757,7 +15757,7 @@
       </p:sp>
       <p:sp>
         <p:nvSpPr>
-          <p:cNvPr id="43" name="Shape 39"/>
+          <p:cNvPr id="42" name="Shape 39"/>
           <p:cNvSpPr/>
           <p:nvPr/>
         </p:nvSpPr>
@@ -15784,7 +15784,7 @@
       </p:sp>
       <p:sp>
         <p:nvSpPr>
-          <p:cNvPr id="44" name="Shape 40"/>
+          <p:cNvPr id="43" name="Shape 40"/>
           <p:cNvSpPr/>
           <p:nvPr/>
         </p:nvSpPr>
@@ -15804,7 +15804,7 @@
       </p:sp>
       <p:sp>
         <p:nvSpPr>
-          <p:cNvPr id="45" name="Text 41"/>
+          <p:cNvPr id="44" name="Text 41"/>
           <p:cNvSpPr/>
           <p:nvPr/>
         </p:nvSpPr>
@@ -15843,7 +15843,7 @@
       </p:sp>
       <p:sp>
         <p:nvSpPr>
-          <p:cNvPr id="46" name="Text 42"/>
+          <p:cNvPr id="45" name="Text 42"/>
           <p:cNvSpPr/>
           <p:nvPr/>
         </p:nvSpPr>
@@ -15882,7 +15882,7 @@
       </p:sp>
       <p:sp>
         <p:nvSpPr>
-          <p:cNvPr id="47" name="Shape 43"/>
+          <p:cNvPr id="46" name="Shape 43"/>
           <p:cNvSpPr/>
           <p:nvPr/>
         </p:nvSpPr>
@@ -15909,7 +15909,7 @@
       </p:sp>
       <p:sp>
         <p:nvSpPr>
-          <p:cNvPr id="48" name="Shape 44"/>
+          <p:cNvPr id="47" name="Shape 44"/>
           <p:cNvSpPr/>
           <p:nvPr/>
         </p:nvSpPr>
@@ -15929,7 +15929,7 @@
       </p:sp>
       <p:sp>
         <p:nvSpPr>
-          <p:cNvPr id="49" name="Text 45"/>
+          <p:cNvPr id="48" name="Text 45"/>
           <p:cNvSpPr/>
           <p:nvPr/>
         </p:nvSpPr>
@@ -15968,7 +15968,7 @@
       </p:sp>
       <p:sp>
         <p:nvSpPr>
-          <p:cNvPr id="50" name="Text 46"/>
+          <p:cNvPr id="49" name="Text 46"/>
           <p:cNvSpPr/>
           <p:nvPr/>
         </p:nvSpPr>
@@ -16007,7 +16007,7 @@
       </p:sp>
       <p:sp>
         <p:nvSpPr>
-          <p:cNvPr id="51" name="Shape 47"/>
+          <p:cNvPr id="50" name="Shape 47"/>
           <p:cNvSpPr/>
           <p:nvPr/>
         </p:nvSpPr>
@@ -16034,7 +16034,7 @@
       </p:sp>
       <p:sp>
         <p:nvSpPr>
-          <p:cNvPr id="52" name="Text 48"/>
+          <p:cNvPr id="51" name="Text 48"/>
           <p:cNvSpPr/>
           <p:nvPr/>
         </p:nvSpPr>
@@ -16322,7 +16322,7 @@
       </p:pic>
       <p:sp>
         <p:nvSpPr>
-          <p:cNvPr id="8" name="Shape 4"/>
+          <p:cNvPr id="7" name="Shape 4"/>
           <p:cNvSpPr/>
           <p:nvPr/>
         </p:nvSpPr>
@@ -16349,7 +16349,7 @@
       </p:sp>
       <p:sp>
         <p:nvSpPr>
-          <p:cNvPr id="9" name="Text 5"/>
+          <p:cNvPr id="8" name="Text 5"/>
           <p:cNvSpPr/>
           <p:nvPr/>
         </p:nvSpPr>
@@ -16388,7 +16388,7 @@
       </p:sp>
       <p:sp>
         <p:nvSpPr>
-          <p:cNvPr id="10" name="Text 6"/>
+          <p:cNvPr id="9" name="Text 6"/>
           <p:cNvSpPr/>
           <p:nvPr/>
         </p:nvSpPr>
@@ -16430,7 +16430,7 @@
       </p:sp>
       <p:sp>
         <p:nvSpPr>
-          <p:cNvPr id="11" name="Shape 7"/>
+          <p:cNvPr id="10" name="Shape 7"/>
           <p:cNvSpPr/>
           <p:nvPr/>
         </p:nvSpPr>
@@ -16457,7 +16457,7 @@
       </p:sp>
       <p:sp>
         <p:nvSpPr>
-          <p:cNvPr id="12" name="Text 8"/>
+          <p:cNvPr id="11" name="Text 8"/>
           <p:cNvSpPr/>
           <p:nvPr/>
         </p:nvSpPr>
@@ -16496,7 +16496,7 @@
       </p:sp>
       <p:sp>
         <p:nvSpPr>
-          <p:cNvPr id="13" name="Text 9"/>
+          <p:cNvPr id="12" name="Text 9"/>
           <p:cNvSpPr/>
           <p:nvPr/>
         </p:nvSpPr>
@@ -16538,7 +16538,7 @@
       </p:sp>
       <p:sp>
         <p:nvSpPr>
-          <p:cNvPr id="14" name="Shape 10"/>
+          <p:cNvPr id="13" name="Shape 10"/>
           <p:cNvSpPr/>
           <p:nvPr/>
         </p:nvSpPr>
@@ -16565,7 +16565,7 @@
       </p:sp>
       <p:sp>
         <p:nvSpPr>
-          <p:cNvPr id="15" name="Text 11"/>
+          <p:cNvPr id="14" name="Text 11"/>
           <p:cNvSpPr/>
           <p:nvPr/>
         </p:nvSpPr>
@@ -16604,7 +16604,7 @@
       </p:sp>
       <p:sp>
         <p:nvSpPr>
-          <p:cNvPr id="16" name="Text 12"/>
+          <p:cNvPr id="15" name="Text 12"/>
           <p:cNvSpPr/>
           <p:nvPr/>
         </p:nvSpPr>
@@ -16646,7 +16646,7 @@
       </p:sp>
       <p:sp>
         <p:nvSpPr>
-          <p:cNvPr id="17" name="Shape 13"/>
+          <p:cNvPr id="16" name="Shape 13"/>
           <p:cNvSpPr/>
           <p:nvPr/>
         </p:nvSpPr>
@@ -16673,7 +16673,7 @@
       </p:sp>
       <p:sp>
         <p:nvSpPr>
-          <p:cNvPr id="18" name="Text 14"/>
+          <p:cNvPr id="17" name="Text 14"/>
           <p:cNvSpPr/>
           <p:nvPr/>
         </p:nvSpPr>
@@ -16712,7 +16712,7 @@
       </p:sp>
       <p:sp>
         <p:nvSpPr>
-          <p:cNvPr id="19" name="Text 15"/>
+          <p:cNvPr id="18" name="Text 15"/>
           <p:cNvSpPr/>
           <p:nvPr/>
         </p:nvSpPr>
@@ -16754,7 +16754,7 @@
       </p:sp>
       <p:sp>
         <p:nvSpPr>
-          <p:cNvPr id="20" name="Shape 16"/>
+          <p:cNvPr id="19" name="Shape 16"/>
           <p:cNvSpPr/>
           <p:nvPr/>
         </p:nvSpPr>
@@ -16781,7 +16781,7 @@
       </p:sp>
       <p:sp>
         <p:nvSpPr>
-          <p:cNvPr id="21" name="Text 17"/>
+          <p:cNvPr id="20" name="Text 17"/>
           <p:cNvSpPr/>
           <p:nvPr/>
         </p:nvSpPr>
@@ -16820,7 +16820,7 @@
       </p:sp>
       <p:sp>
         <p:nvSpPr>
-          <p:cNvPr id="22" name="Text 18"/>
+          <p:cNvPr id="21" name="Text 18"/>
           <p:cNvSpPr/>
           <p:nvPr/>
         </p:nvSpPr>
@@ -16862,7 +16862,7 @@
       </p:sp>
       <p:sp>
         <p:nvSpPr>
-          <p:cNvPr id="23" name="Shape 19"/>
+          <p:cNvPr id="22" name="Shape 19"/>
           <p:cNvSpPr/>
           <p:nvPr/>
         </p:nvSpPr>
@@ -16889,7 +16889,7 @@
       </p:sp>
       <p:sp>
         <p:nvSpPr>
-          <p:cNvPr id="24" name="Text 20"/>
+          <p:cNvPr id="23" name="Text 20"/>
           <p:cNvSpPr/>
           <p:nvPr/>
         </p:nvSpPr>
@@ -16928,7 +16928,7 @@
       </p:sp>
       <p:sp>
         <p:nvSpPr>
-          <p:cNvPr id="25" name="Text 21"/>
+          <p:cNvPr id="24" name="Text 21"/>
           <p:cNvSpPr/>
           <p:nvPr/>
         </p:nvSpPr>
@@ -16970,7 +16970,7 @@
       </p:sp>
       <p:sp>
         <p:nvSpPr>
-          <p:cNvPr id="26" name="Shape 22"/>
+          <p:cNvPr id="25" name="Shape 22"/>
           <p:cNvSpPr/>
           <p:nvPr/>
         </p:nvSpPr>
@@ -16997,7 +16997,7 @@
       </p:sp>
       <p:sp>
         <p:nvSpPr>
-          <p:cNvPr id="27" name="Text 23"/>
+          <p:cNvPr id="26" name="Text 23"/>
           <p:cNvSpPr/>
           <p:nvPr/>
         </p:nvSpPr>
@@ -17282,7 +17282,7 @@
       </p:pic>
       <p:sp>
         <p:nvSpPr>
-          <p:cNvPr id="8" name="Shape 4"/>
+          <p:cNvPr id="7" name="Shape 4"/>
           <p:cNvSpPr/>
           <p:nvPr/>
         </p:nvSpPr>
@@ -17304,7 +17304,7 @@
       </p:sp>
       <p:sp>
         <p:nvSpPr>
-          <p:cNvPr id="9" name="Text 5"/>
+          <p:cNvPr id="8" name="Text 5"/>
           <p:cNvSpPr/>
           <p:nvPr/>
         </p:nvSpPr>
@@ -17343,7 +17343,7 @@
       </p:sp>
       <p:sp>
         <p:nvSpPr>
-          <p:cNvPr id="10" name="Shape 6"/>
+          <p:cNvPr id="9" name="Shape 6"/>
           <p:cNvSpPr/>
           <p:nvPr/>
         </p:nvSpPr>
@@ -17366,7 +17366,7 @@
       </p:sp>
       <p:sp>
         <p:nvSpPr>
-          <p:cNvPr id="11" name="Shape 7"/>
+          <p:cNvPr id="10" name="Shape 7"/>
           <p:cNvSpPr/>
           <p:nvPr/>
         </p:nvSpPr>
@@ -17386,7 +17386,7 @@
       </p:sp>
       <p:sp>
         <p:nvSpPr>
-          <p:cNvPr id="12" name="Shape 8"/>
+          <p:cNvPr id="11" name="Shape 8"/>
           <p:cNvSpPr/>
           <p:nvPr/>
         </p:nvSpPr>
@@ -17408,7 +17408,7 @@
       </p:sp>
       <p:sp>
         <p:nvSpPr>
-          <p:cNvPr id="13" name="Text 9"/>
+          <p:cNvPr id="12" name="Text 9"/>
           <p:cNvSpPr/>
           <p:nvPr/>
         </p:nvSpPr>
@@ -17447,7 +17447,7 @@
       </p:sp>
       <p:sp>
         <p:nvSpPr>
-          <p:cNvPr id="14" name="Shape 10"/>
+          <p:cNvPr id="13" name="Shape 10"/>
           <p:cNvSpPr/>
           <p:nvPr/>
         </p:nvSpPr>
@@ -17470,7 +17470,7 @@
       </p:sp>
       <p:sp>
         <p:nvSpPr>
-          <p:cNvPr id="15" name="Shape 11"/>
+          <p:cNvPr id="14" name="Shape 11"/>
           <p:cNvSpPr/>
           <p:nvPr/>
         </p:nvSpPr>
@@ -17490,7 +17490,7 @@
       </p:sp>
       <p:sp>
         <p:nvSpPr>
-          <p:cNvPr id="16" name="Shape 12"/>
+          <p:cNvPr id="15" name="Shape 12"/>
           <p:cNvSpPr/>
           <p:nvPr/>
         </p:nvSpPr>
@@ -17512,7 +17512,7 @@
       </p:sp>
       <p:sp>
         <p:nvSpPr>
-          <p:cNvPr id="17" name="Text 13"/>
+          <p:cNvPr id="16" name="Text 13"/>
           <p:cNvSpPr/>
           <p:nvPr/>
         </p:nvSpPr>
@@ -17551,7 +17551,7 @@
       </p:sp>
       <p:sp>
         <p:nvSpPr>
-          <p:cNvPr id="18" name="Shape 14"/>
+          <p:cNvPr id="17" name="Shape 14"/>
           <p:cNvSpPr/>
           <p:nvPr/>
         </p:nvSpPr>
@@ -17574,7 +17574,7 @@
       </p:sp>
       <p:sp>
         <p:nvSpPr>
-          <p:cNvPr id="19" name="Shape 15"/>
+          <p:cNvPr id="18" name="Shape 15"/>
           <p:cNvSpPr/>
           <p:nvPr/>
         </p:nvSpPr>
@@ -17594,7 +17594,7 @@
       </p:sp>
       <p:sp>
         <p:nvSpPr>
-          <p:cNvPr id="20" name="Shape 16"/>
+          <p:cNvPr id="19" name="Shape 16"/>
           <p:cNvSpPr/>
           <p:nvPr/>
         </p:nvSpPr>
@@ -17616,7 +17616,7 @@
       </p:sp>
       <p:sp>
         <p:nvSpPr>
-          <p:cNvPr id="21" name="Text 17"/>
+          <p:cNvPr id="20" name="Text 17"/>
           <p:cNvSpPr/>
           <p:nvPr/>
         </p:nvSpPr>
@@ -17655,7 +17655,7 @@
       </p:sp>
       <p:sp>
         <p:nvSpPr>
-          <p:cNvPr id="22" name="Shape 18"/>
+          <p:cNvPr id="21" name="Shape 18"/>
           <p:cNvSpPr/>
           <p:nvPr/>
         </p:nvSpPr>
@@ -17682,7 +17682,7 @@
       </p:sp>
       <p:sp>
         <p:nvSpPr>
-          <p:cNvPr id="23" name="Text 19"/>
+          <p:cNvPr id="22" name="Text 19"/>
           <p:cNvSpPr/>
           <p:nvPr/>
         </p:nvSpPr>
@@ -17721,7 +17721,7 @@
       </p:sp>
       <p:sp>
         <p:nvSpPr>
-          <p:cNvPr id="24" name="Text 20"/>
+          <p:cNvPr id="23" name="Text 20"/>
           <p:cNvSpPr/>
           <p:nvPr/>
         </p:nvSpPr>
@@ -17763,7 +17763,7 @@
       </p:sp>
       <p:sp>
         <p:nvSpPr>
-          <p:cNvPr id="25" name="Shape 21"/>
+          <p:cNvPr id="24" name="Shape 21"/>
           <p:cNvSpPr/>
           <p:nvPr/>
         </p:nvSpPr>
@@ -17785,7 +17785,7 @@
       </p:sp>
       <p:sp>
         <p:nvSpPr>
-          <p:cNvPr id="26" name="Text 22"/>
+          <p:cNvPr id="25" name="Text 22"/>
           <p:cNvSpPr/>
           <p:nvPr/>
         </p:nvSpPr>
@@ -17824,7 +17824,7 @@
       </p:sp>
       <p:sp>
         <p:nvSpPr>
-          <p:cNvPr id="27" name="Text 23"/>
+          <p:cNvPr id="26" name="Text 23"/>
           <p:cNvSpPr/>
           <p:nvPr/>
         </p:nvSpPr>
@@ -17866,7 +17866,7 @@
       </p:sp>
       <p:sp>
         <p:nvSpPr>
-          <p:cNvPr id="28" name="Shape 24"/>
+          <p:cNvPr id="27" name="Shape 24"/>
           <p:cNvSpPr/>
           <p:nvPr/>
         </p:nvSpPr>
@@ -17888,7 +17888,7 @@
       </p:sp>
       <p:sp>
         <p:nvSpPr>
-          <p:cNvPr id="29" name="Text 25"/>
+          <p:cNvPr id="28" name="Text 25"/>
           <p:cNvSpPr/>
           <p:nvPr/>
         </p:nvSpPr>
@@ -17927,7 +17927,7 @@
       </p:sp>
       <p:sp>
         <p:nvSpPr>
-          <p:cNvPr id="30" name="Text 26"/>
+          <p:cNvPr id="29" name="Text 26"/>
           <p:cNvSpPr/>
           <p:nvPr/>
         </p:nvSpPr>
@@ -18212,7 +18212,7 @@
       </p:pic>
       <p:sp>
         <p:nvSpPr>
-          <p:cNvPr id="8" name="Shape 4"/>
+          <p:cNvPr id="7" name="Shape 4"/>
           <p:cNvSpPr/>
           <p:nvPr/>
         </p:nvSpPr>
@@ -18239,7 +18239,7 @@
       </p:sp>
       <p:sp>
         <p:nvSpPr>
-          <p:cNvPr id="9" name="Text 5"/>
+          <p:cNvPr id="8" name="Text 5"/>
           <p:cNvSpPr/>
           <p:nvPr/>
         </p:nvSpPr>
@@ -18386,7 +18386,7 @@
       </p:sp>
       <p:sp>
         <p:nvSpPr>
-          <p:cNvPr id="10" name="Shape 6"/>
+          <p:cNvPr id="9" name="Shape 6"/>
           <p:cNvSpPr/>
           <p:nvPr/>
         </p:nvSpPr>
@@ -18408,7 +18408,7 @@
       </p:sp>
       <p:sp>
         <p:nvSpPr>
-          <p:cNvPr id="11" name="Text 7"/>
+          <p:cNvPr id="10" name="Text 7"/>
           <p:cNvSpPr/>
           <p:nvPr/>
         </p:nvSpPr>
@@ -18450,7 +18450,7 @@
       </p:sp>
       <p:sp>
         <p:nvSpPr>
-          <p:cNvPr id="12" name="Shape 8"/>
+          <p:cNvPr id="11" name="Shape 8"/>
           <p:cNvSpPr/>
           <p:nvPr/>
         </p:nvSpPr>
@@ -18472,7 +18472,7 @@
       </p:sp>
       <p:sp>
         <p:nvSpPr>
-          <p:cNvPr id="13" name="Text 9"/>
+          <p:cNvPr id="12" name="Text 9"/>
           <p:cNvSpPr/>
           <p:nvPr/>
         </p:nvSpPr>
@@ -18511,7 +18511,7 @@
       </p:sp>
       <p:sp>
         <p:nvSpPr>
-          <p:cNvPr id="14" name="Text 10"/>
+          <p:cNvPr id="13" name="Text 10"/>
           <p:cNvSpPr/>
           <p:nvPr/>
         </p:nvSpPr>
@@ -18553,7 +18553,7 @@
       </p:sp>
       <p:sp>
         <p:nvSpPr>
-          <p:cNvPr id="15" name="Shape 11"/>
+          <p:cNvPr id="14" name="Shape 11"/>
           <p:cNvSpPr/>
           <p:nvPr/>
         </p:nvSpPr>
@@ -18580,7 +18580,7 @@
       </p:sp>
       <p:sp>
         <p:nvSpPr>
-          <p:cNvPr id="16" name="Text 12"/>
+          <p:cNvPr id="15" name="Text 12"/>
           <p:cNvSpPr/>
           <p:nvPr/>
         </p:nvSpPr>
@@ -18619,7 +18619,7 @@
       </p:sp>
       <p:sp>
         <p:nvSpPr>
-          <p:cNvPr id="17" name="Text 13"/>
+          <p:cNvPr id="16" name="Text 13"/>
           <p:cNvSpPr/>
           <p:nvPr/>
         </p:nvSpPr>
@@ -18661,7 +18661,7 @@
       </p:sp>
       <p:sp>
         <p:nvSpPr>
-          <p:cNvPr id="18" name="Shape 14"/>
+          <p:cNvPr id="17" name="Shape 14"/>
           <p:cNvSpPr/>
           <p:nvPr/>
         </p:nvSpPr>
@@ -18688,7 +18688,7 @@
       </p:sp>
       <p:sp>
         <p:nvSpPr>
-          <p:cNvPr id="19" name="Text 15"/>
+          <p:cNvPr id="18" name="Text 15"/>
           <p:cNvSpPr/>
           <p:nvPr/>
         </p:nvSpPr>
@@ -18727,7 +18727,7 @@
       </p:sp>
       <p:sp>
         <p:nvSpPr>
-          <p:cNvPr id="20" name="Text 16"/>
+          <p:cNvPr id="19" name="Text 16"/>
           <p:cNvSpPr/>
           <p:nvPr/>
         </p:nvSpPr>
@@ -19054,7 +19054,7 @@
       </p:pic>
       <p:sp>
         <p:nvSpPr>
-          <p:cNvPr id="9" name="Shape 5"/>
+          <p:cNvPr id="8" name="Shape 5"/>
           <p:cNvSpPr/>
           <p:nvPr/>
         </p:nvSpPr>
@@ -19076,7 +19076,7 @@
       </p:sp>
       <p:sp>
         <p:nvSpPr>
-          <p:cNvPr id="10" name="Shape 6"/>
+          <p:cNvPr id="9" name="Shape 6"/>
           <p:cNvSpPr/>
           <p:nvPr/>
         </p:nvSpPr>
@@ -19096,7 +19096,7 @@
       </p:sp>
       <p:sp>
         <p:nvSpPr>
-          <p:cNvPr id="11" name="Text 7"/>
+          <p:cNvPr id="10" name="Text 7"/>
           <p:cNvSpPr/>
           <p:nvPr/>
         </p:nvSpPr>
@@ -19135,7 +19135,7 @@
       </p:sp>
       <p:sp>
         <p:nvSpPr>
-          <p:cNvPr id="12" name="Text 8"/>
+          <p:cNvPr id="11" name="Text 8"/>
           <p:cNvSpPr/>
           <p:nvPr/>
         </p:nvSpPr>
@@ -19174,7 +19174,7 @@
       </p:sp>
       <p:sp>
         <p:nvSpPr>
-          <p:cNvPr id="13" name="Text 9"/>
+          <p:cNvPr id="12" name="Text 9"/>
           <p:cNvSpPr/>
           <p:nvPr/>
         </p:nvSpPr>
@@ -19216,7 +19216,7 @@
       </p:sp>
       <p:sp>
         <p:nvSpPr>
-          <p:cNvPr id="14" name="Shape 10"/>
+          <p:cNvPr id="13" name="Shape 10"/>
           <p:cNvSpPr/>
           <p:nvPr/>
         </p:nvSpPr>
@@ -19238,7 +19238,7 @@
       </p:sp>
       <p:sp>
         <p:nvSpPr>
-          <p:cNvPr id="15" name="Shape 11"/>
+          <p:cNvPr id="14" name="Shape 11"/>
           <p:cNvSpPr/>
           <p:nvPr/>
         </p:nvSpPr>
@@ -19258,7 +19258,7 @@
       </p:sp>
       <p:sp>
         <p:nvSpPr>
-          <p:cNvPr id="16" name="Text 12"/>
+          <p:cNvPr id="15" name="Text 12"/>
           <p:cNvSpPr/>
           <p:nvPr/>
         </p:nvSpPr>
@@ -19297,7 +19297,7 @@
       </p:sp>
       <p:sp>
         <p:nvSpPr>
-          <p:cNvPr id="17" name="Text 13"/>
+          <p:cNvPr id="16" name="Text 13"/>
           <p:cNvSpPr/>
           <p:nvPr/>
         </p:nvSpPr>
@@ -19336,7 +19336,7 @@
       </p:sp>
       <p:sp>
         <p:nvSpPr>
-          <p:cNvPr id="18" name="Text 14"/>
+          <p:cNvPr id="17" name="Text 14"/>
           <p:cNvSpPr/>
           <p:nvPr/>
         </p:nvSpPr>
@@ -19378,7 +19378,7 @@
       </p:sp>
       <p:sp>
         <p:nvSpPr>
-          <p:cNvPr id="19" name="Shape 15"/>
+          <p:cNvPr id="18" name="Shape 15"/>
           <p:cNvSpPr/>
           <p:nvPr/>
         </p:nvSpPr>
@@ -19400,7 +19400,7 @@
       </p:sp>
       <p:sp>
         <p:nvSpPr>
-          <p:cNvPr id="20" name="Shape 16"/>
+          <p:cNvPr id="19" name="Shape 16"/>
           <p:cNvSpPr/>
           <p:nvPr/>
         </p:nvSpPr>
@@ -19420,7 +19420,7 @@
       </p:sp>
       <p:sp>
         <p:nvSpPr>
-          <p:cNvPr id="21" name="Text 17"/>
+          <p:cNvPr id="20" name="Text 17"/>
           <p:cNvSpPr/>
           <p:nvPr/>
         </p:nvSpPr>
@@ -19459,7 +19459,7 @@
       </p:sp>
       <p:sp>
         <p:nvSpPr>
-          <p:cNvPr id="22" name="Text 18"/>
+          <p:cNvPr id="21" name="Text 18"/>
           <p:cNvSpPr/>
           <p:nvPr/>
         </p:nvSpPr>
@@ -19498,7 +19498,7 @@
       </p:sp>
       <p:sp>
         <p:nvSpPr>
-          <p:cNvPr id="23" name="Text 19"/>
+          <p:cNvPr id="22" name="Text 19"/>
           <p:cNvSpPr/>
           <p:nvPr/>
         </p:nvSpPr>
@@ -19540,7 +19540,7 @@
       </p:sp>
       <p:sp>
         <p:nvSpPr>
-          <p:cNvPr id="24" name="Shape 20"/>
+          <p:cNvPr id="23" name="Shape 20"/>
           <p:cNvSpPr/>
           <p:nvPr/>
         </p:nvSpPr>
@@ -19562,7 +19562,7 @@
       </p:sp>
       <p:sp>
         <p:nvSpPr>
-          <p:cNvPr id="25" name="Text 21"/>
+          <p:cNvPr id="24" name="Text 21"/>
           <p:cNvSpPr/>
           <p:nvPr/>
         </p:nvSpPr>
@@ -19601,7 +19601,7 @@
       </p:sp>
       <p:sp>
         <p:nvSpPr>
-          <p:cNvPr id="26" name="Text 22"/>
+          <p:cNvPr id="25" name="Text 22"/>
           <p:cNvSpPr/>
           <p:nvPr/>
         </p:nvSpPr>
@@ -19886,7 +19886,7 @@
       </p:pic>
       <p:sp>
         <p:nvSpPr>
-          <p:cNvPr id="8" name="Shape 4"/>
+          <p:cNvPr id="7" name="Shape 4"/>
           <p:cNvSpPr/>
           <p:nvPr/>
         </p:nvSpPr>
@@ -19913,7 +19913,7 @@
       </p:sp>
       <p:sp>
         <p:nvSpPr>
-          <p:cNvPr id="9" name="Text 5"/>
+          <p:cNvPr id="8" name="Text 5"/>
           <p:cNvSpPr/>
           <p:nvPr/>
         </p:nvSpPr>
@@ -20055,7 +20055,7 @@
       </p:sp>
       <p:sp>
         <p:nvSpPr>
-          <p:cNvPr id="10" name="Shape 6"/>
+          <p:cNvPr id="9" name="Shape 6"/>
           <p:cNvSpPr/>
           <p:nvPr/>
         </p:nvSpPr>
@@ -20077,7 +20077,7 @@
       </p:sp>
       <p:sp>
         <p:nvSpPr>
-          <p:cNvPr id="11" name="Text 7"/>
+          <p:cNvPr id="10" name="Text 7"/>
           <p:cNvSpPr/>
           <p:nvPr/>
         </p:nvSpPr>
@@ -20116,7 +20116,7 @@
       </p:sp>
       <p:sp>
         <p:nvSpPr>
-          <p:cNvPr id="12" name="Text 8"/>
+          <p:cNvPr id="11" name="Text 8"/>
           <p:cNvSpPr/>
           <p:nvPr/>
         </p:nvSpPr>
@@ -20155,7 +20155,7 @@
       </p:sp>
       <p:sp>
         <p:nvSpPr>
-          <p:cNvPr id="13" name="Shape 9"/>
+          <p:cNvPr id="12" name="Shape 9"/>
           <p:cNvSpPr/>
           <p:nvPr/>
         </p:nvSpPr>
@@ -20177,7 +20177,7 @@
       </p:sp>
       <p:sp>
         <p:nvSpPr>
-          <p:cNvPr id="14" name="Text 10"/>
+          <p:cNvPr id="13" name="Text 10"/>
           <p:cNvSpPr/>
           <p:nvPr/>
         </p:nvSpPr>
@@ -20216,7 +20216,7 @@
       </p:sp>
       <p:sp>
         <p:nvSpPr>
-          <p:cNvPr id="15" name="Text 11"/>
+          <p:cNvPr id="14" name="Text 11"/>
           <p:cNvSpPr/>
           <p:nvPr/>
         </p:nvSpPr>
@@ -20255,7 +20255,7 @@
       </p:sp>
       <p:sp>
         <p:nvSpPr>
-          <p:cNvPr id="16" name="Shape 12"/>
+          <p:cNvPr id="15" name="Shape 12"/>
           <p:cNvSpPr/>
           <p:nvPr/>
         </p:nvSpPr>
@@ -20277,7 +20277,7 @@
       </p:sp>
       <p:sp>
         <p:nvSpPr>
-          <p:cNvPr id="17" name="Text 13"/>
+          <p:cNvPr id="16" name="Text 13"/>
           <p:cNvSpPr/>
           <p:nvPr/>
         </p:nvSpPr>
@@ -20319,7 +20319,7 @@
       </p:sp>
       <p:sp>
         <p:nvSpPr>
-          <p:cNvPr id="18" name="Shape 14"/>
+          <p:cNvPr id="17" name="Shape 14"/>
           <p:cNvSpPr/>
           <p:nvPr/>
         </p:nvSpPr>
@@ -20346,7 +20346,7 @@
       </p:sp>
       <p:sp>
         <p:nvSpPr>
-          <p:cNvPr id="19" name="Text 15"/>
+          <p:cNvPr id="18" name="Text 15"/>
           <p:cNvSpPr/>
           <p:nvPr/>
         </p:nvSpPr>
@@ -20385,7 +20385,7 @@
       </p:sp>
       <p:sp>
         <p:nvSpPr>
-          <p:cNvPr id="20" name="Text 16"/>
+          <p:cNvPr id="19" name="Text 16"/>
           <p:cNvSpPr/>
           <p:nvPr/>
         </p:nvSpPr>
@@ -20670,7 +20670,7 @@
       </p:pic>
       <p:sp>
         <p:nvSpPr>
-          <p:cNvPr id="8" name="Shape 4"/>
+          <p:cNvPr id="7" name="Shape 4"/>
           <p:cNvSpPr/>
           <p:nvPr/>
         </p:nvSpPr>
@@ -20692,7 +20692,7 @@
       </p:sp>
       <p:sp>
         <p:nvSpPr>
-          <p:cNvPr id="9" name="Text 5"/>
+          <p:cNvPr id="8" name="Text 5"/>
           <p:cNvSpPr/>
           <p:nvPr/>
         </p:nvSpPr>
@@ -20731,7 +20731,7 @@
       </p:sp>
       <p:sp>
         <p:nvSpPr>
-          <p:cNvPr id="10" name="Text 6"/>
+          <p:cNvPr id="9" name="Text 6"/>
           <p:cNvSpPr/>
           <p:nvPr/>
         </p:nvSpPr>
@@ -20773,7 +20773,7 @@
       </p:sp>
       <p:sp>
         <p:nvSpPr>
-          <p:cNvPr id="11" name="Shape 7"/>
+          <p:cNvPr id="10" name="Shape 7"/>
           <p:cNvSpPr/>
           <p:nvPr/>
         </p:nvSpPr>
@@ -20795,7 +20795,7 @@
       </p:sp>
       <p:sp>
         <p:nvSpPr>
-          <p:cNvPr id="12" name="Text 8"/>
+          <p:cNvPr id="11" name="Text 8"/>
           <p:cNvSpPr/>
           <p:nvPr/>
         </p:nvSpPr>
@@ -20834,7 +20834,7 @@
       </p:sp>
       <p:sp>
         <p:nvSpPr>
-          <p:cNvPr id="13" name="Text 9"/>
+          <p:cNvPr id="12" name="Text 9"/>
           <p:cNvSpPr/>
           <p:nvPr/>
         </p:nvSpPr>
@@ -20876,7 +20876,7 @@
       </p:sp>
       <p:sp>
         <p:nvSpPr>
-          <p:cNvPr id="14" name="Text 10"/>
+          <p:cNvPr id="13" name="Text 10"/>
           <p:cNvSpPr/>
           <p:nvPr/>
         </p:nvSpPr>
@@ -20915,7 +20915,7 @@
       </p:sp>
       <p:sp>
         <p:nvSpPr>
-          <p:cNvPr id="15" name="Shape 11"/>
+          <p:cNvPr id="14" name="Shape 11"/>
           <p:cNvSpPr/>
           <p:nvPr/>
         </p:nvSpPr>
@@ -20937,7 +20937,7 @@
       </p:sp>
       <p:sp>
         <p:nvSpPr>
-          <p:cNvPr id="16" name="Text 12"/>
+          <p:cNvPr id="15" name="Text 12"/>
           <p:cNvSpPr/>
           <p:nvPr/>
         </p:nvSpPr>
@@ -20976,7 +20976,7 @@
       </p:sp>
       <p:sp>
         <p:nvSpPr>
-          <p:cNvPr id="17" name="Text 13"/>
+          <p:cNvPr id="16" name="Text 13"/>
           <p:cNvSpPr/>
           <p:nvPr/>
         </p:nvSpPr>
@@ -21015,7 +21015,7 @@
       </p:sp>
       <p:sp>
         <p:nvSpPr>
-          <p:cNvPr id="18" name="Shape 14"/>
+          <p:cNvPr id="17" name="Shape 14"/>
           <p:cNvSpPr/>
           <p:nvPr/>
         </p:nvSpPr>
@@ -21037,7 +21037,7 @@
       </p:sp>
       <p:sp>
         <p:nvSpPr>
-          <p:cNvPr id="19" name="Text 15"/>
+          <p:cNvPr id="18" name="Text 15"/>
           <p:cNvSpPr/>
           <p:nvPr/>
         </p:nvSpPr>
@@ -21076,7 +21076,7 @@
       </p:sp>
       <p:sp>
         <p:nvSpPr>
-          <p:cNvPr id="20" name="Text 16"/>
+          <p:cNvPr id="19" name="Text 16"/>
           <p:cNvSpPr/>
           <p:nvPr/>
         </p:nvSpPr>
@@ -21115,7 +21115,7 @@
       </p:sp>
       <p:sp>
         <p:nvSpPr>
-          <p:cNvPr id="21" name="Shape 17"/>
+          <p:cNvPr id="20" name="Shape 17"/>
           <p:cNvSpPr/>
           <p:nvPr/>
         </p:nvSpPr>
@@ -21137,7 +21137,7 @@
       </p:sp>
       <p:sp>
         <p:nvSpPr>
-          <p:cNvPr id="22" name="Text 18"/>
+          <p:cNvPr id="21" name="Text 18"/>
           <p:cNvSpPr/>
           <p:nvPr/>
         </p:nvSpPr>
@@ -21176,7 +21176,7 @@
       </p:sp>
       <p:sp>
         <p:nvSpPr>
-          <p:cNvPr id="23" name="Shape 19"/>
+          <p:cNvPr id="22" name="Shape 19"/>
           <p:cNvSpPr/>
           <p:nvPr/>
         </p:nvSpPr>
@@ -21198,7 +21198,7 @@
       </p:sp>
       <p:sp>
         <p:nvSpPr>
-          <p:cNvPr id="24" name="Text 20"/>
+          <p:cNvPr id="23" name="Text 20"/>
           <p:cNvSpPr/>
           <p:nvPr/>
         </p:nvSpPr>
@@ -21237,7 +21237,7 @@
       </p:sp>
       <p:sp>
         <p:nvSpPr>
-          <p:cNvPr id="25" name="Text 21"/>
+          <p:cNvPr id="24" name="Text 21"/>
           <p:cNvSpPr/>
           <p:nvPr/>
         </p:nvSpPr>

--- a/docs/decks/L04.pptx
+++ b/docs/decks/L04.pptx
@@ -19061,11 +19061,11 @@
         <p:spPr>
           <a:xfrm>
             <a:off x="566928" y="1874520"/>
-            <a:ext cx="3520440" cy="1737360"/>
+            <a:ext cx="3520440" cy="1463040"/>
           </a:xfrm>
           <a:prstGeom prst="roundRect">
             <a:avLst>
-              <a:gd name="adj" fmla="val 6316"/>
+              <a:gd name="adj" fmla="val 7500"/>
             </a:avLst>
           </a:prstGeom>
           <a:solidFill>
@@ -19181,7 +19181,7 @@
         <p:spPr>
           <a:xfrm>
             <a:off x="768096" y="2560320"/>
-            <a:ext cx="3118104" cy="896112"/>
+            <a:ext cx="3118104" cy="621792"/>
           </a:xfrm>
           <a:prstGeom prst="rect">
             <a:avLst/>
@@ -19223,11 +19223,11 @@
         <p:spPr>
           <a:xfrm>
             <a:off x="4270248" y="1874520"/>
-            <a:ext cx="3520440" cy="1737360"/>
+            <a:ext cx="3520440" cy="1463040"/>
           </a:xfrm>
           <a:prstGeom prst="roundRect">
             <a:avLst>
-              <a:gd name="adj" fmla="val 6316"/>
+              <a:gd name="adj" fmla="val 7500"/>
             </a:avLst>
           </a:prstGeom>
           <a:solidFill>
@@ -19343,7 +19343,7 @@
         <p:spPr>
           <a:xfrm>
             <a:off x="4471416" y="2560320"/>
-            <a:ext cx="3118104" cy="896112"/>
+            <a:ext cx="3118104" cy="621792"/>
           </a:xfrm>
           <a:prstGeom prst="rect">
             <a:avLst/>
@@ -19385,11 +19385,11 @@
         <p:spPr>
           <a:xfrm>
             <a:off x="7973568" y="1874520"/>
-            <a:ext cx="3520440" cy="1737360"/>
+            <a:ext cx="3520440" cy="1463040"/>
           </a:xfrm>
           <a:prstGeom prst="roundRect">
             <a:avLst>
-              <a:gd name="adj" fmla="val 6316"/>
+              <a:gd name="adj" fmla="val 7500"/>
             </a:avLst>
           </a:prstGeom>
           <a:solidFill>
@@ -19505,7 +19505,7 @@
         <p:spPr>
           <a:xfrm>
             <a:off x="8174736" y="2560320"/>
-            <a:ext cx="3118104" cy="896112"/>
+            <a:ext cx="3118104" cy="621792"/>
           </a:xfrm>
           <a:prstGeom prst="rect">
             <a:avLst/>
@@ -19540,18 +19540,257 @@
       </p:sp>
       <p:sp>
         <p:nvSpPr>
-          <p:cNvPr id="23" name="Shape 20"/>
-          <p:cNvSpPr/>
-          <p:nvPr/>
-        </p:nvSpPr>
-        <p:spPr>
-          <a:xfrm>
-            <a:off x="566928" y="3977640"/>
-            <a:ext cx="11064240" cy="1417320"/>
+          <p:cNvPr id="23" name="Text 20"/>
+          <p:cNvSpPr/>
+          <p:nvPr/>
+        </p:nvSpPr>
+        <p:spPr>
+          <a:xfrm>
+            <a:off x="566928" y="3456432"/>
+            <a:ext cx="11064240" cy="219456"/>
+          </a:xfrm>
+          <a:prstGeom prst="rect">
+            <a:avLst/>
+          </a:prstGeom>
+          <a:noFill/>
+          <a:ln/>
+        </p:spPr>
+        <p:txBody>
+          <a:bodyPr wrap="square" lIns="0" tIns="0" rIns="0" bIns="0" rtlCol="0" anchor="ctr"/>
+          <a:lstStyle/>
+          <a:p>
+            <a:pPr indent="0" marL="0">
+              <a:buNone/>
+            </a:pPr>
+            <a:r>
+              <a:rPr lang="en-US" sz="900" b="1" spc="150" kern="0" dirty="0">
+                <a:solidFill>
+                  <a:srgbClr val="9AA1AD"/>
+                </a:solidFill>
+                <a:latin typeface="Courier New" pitchFamily="34" charset="0"/>
+                <a:ea typeface="Courier New" pitchFamily="34" charset="-122"/>
+                <a:cs typeface="Courier New" pitchFamily="34" charset="-120"/>
+              </a:rPr>
+              <a:t>той самий зміст, дві мови — у токенах</a:t>
+            </a:r>
+            <a:endParaRPr lang="en-US" sz="900" dirty="0"/>
+          </a:p>
+        </p:txBody>
+      </p:sp>
+      <p:sp>
+        <p:nvSpPr>
+          <p:cNvPr id="24" name="Text 21"/>
+          <p:cNvSpPr/>
+          <p:nvPr/>
+        </p:nvSpPr>
+        <p:spPr>
+          <a:xfrm>
+            <a:off x="566928" y="3712464"/>
+            <a:ext cx="2121408" cy="420624"/>
+          </a:xfrm>
+          <a:prstGeom prst="rect">
+            <a:avLst/>
+          </a:prstGeom>
+          <a:noFill/>
+          <a:ln/>
+        </p:spPr>
+        <p:txBody>
+          <a:bodyPr wrap="square" lIns="0" tIns="0" rIns="0" bIns="0" rtlCol="0" anchor="ctr"/>
+          <a:lstStyle/>
+          <a:p>
+            <a:pPr algn="r" indent="0" marL="0">
+              <a:buNone/>
+            </a:pPr>
+            <a:r>
+              <a:rPr lang="en-US" sz="1250" dirty="0">
+                <a:solidFill>
+                  <a:srgbClr val="111318"/>
+                </a:solidFill>
+                <a:latin typeface="Montserrat" pitchFamily="34" charset="0"/>
+                <a:ea typeface="Montserrat" pitchFamily="34" charset="-122"/>
+                <a:cs typeface="Montserrat" pitchFamily="34" charset="-120"/>
+              </a:rPr>
+              <a:t>English</a:t>
+            </a:r>
+            <a:endParaRPr lang="en-US" sz="1250" dirty="0"/>
+          </a:p>
+        </p:txBody>
+      </p:sp>
+      <p:sp>
+        <p:nvSpPr>
+          <p:cNvPr id="25" name="Shape 22"/>
+          <p:cNvSpPr/>
+          <p:nvPr/>
+        </p:nvSpPr>
+        <p:spPr>
+          <a:xfrm>
+            <a:off x="2852928" y="3788176"/>
+            <a:ext cx="1732547" cy="269199"/>
           </a:xfrm>
           <a:prstGeom prst="roundRect">
             <a:avLst>
-              <a:gd name="adj" fmla="val 7742"/>
+              <a:gd name="adj" fmla="val 16984"/>
+            </a:avLst>
+          </a:prstGeom>
+          <a:solidFill>
+            <a:srgbClr val="1B8A5A"/>
+          </a:solidFill>
+          <a:ln/>
+        </p:spPr>
+      </p:sp>
+      <p:sp>
+        <p:nvSpPr>
+          <p:cNvPr id="26" name="Text 23"/>
+          <p:cNvSpPr/>
+          <p:nvPr/>
+        </p:nvSpPr>
+        <p:spPr>
+          <a:xfrm>
+            <a:off x="7196328" y="3712464"/>
+            <a:ext cx="4206240" cy="420624"/>
+          </a:xfrm>
+          <a:prstGeom prst="rect">
+            <a:avLst/>
+          </a:prstGeom>
+          <a:noFill/>
+          <a:ln/>
+        </p:spPr>
+        <p:txBody>
+          <a:bodyPr wrap="square" lIns="0" tIns="0" rIns="0" bIns="0" rtlCol="0" anchor="ctr"/>
+          <a:lstStyle/>
+          <a:p>
+            <a:pPr indent="0" marL="0">
+              <a:buNone/>
+            </a:pPr>
+            <a:r>
+              <a:rPr lang="en-US" sz="1150" b="1" dirty="0">
+                <a:solidFill>
+                  <a:srgbClr val="1B8A5A"/>
+                </a:solidFill>
+                <a:latin typeface="Montserrat" pitchFamily="34" charset="0"/>
+                <a:ea typeface="Montserrat" pitchFamily="34" charset="-122"/>
+                <a:cs typeface="Montserrat" pitchFamily="34" charset="-120"/>
+              </a:rPr>
+              <a:t>8 токенів</a:t>
+            </a:r>
+            <a:endParaRPr lang="en-US" sz="1150" dirty="0"/>
+          </a:p>
+        </p:txBody>
+      </p:sp>
+      <p:sp>
+        <p:nvSpPr>
+          <p:cNvPr id="27" name="Text 24"/>
+          <p:cNvSpPr/>
+          <p:nvPr/>
+        </p:nvSpPr>
+        <p:spPr>
+          <a:xfrm>
+            <a:off x="566928" y="4315968"/>
+            <a:ext cx="2121408" cy="420624"/>
+          </a:xfrm>
+          <a:prstGeom prst="rect">
+            <a:avLst/>
+          </a:prstGeom>
+          <a:noFill/>
+          <a:ln/>
+        </p:spPr>
+        <p:txBody>
+          <a:bodyPr wrap="square" lIns="0" tIns="0" rIns="0" bIns="0" rtlCol="0" anchor="ctr"/>
+          <a:lstStyle/>
+          <a:p>
+            <a:pPr algn="r" indent="0" marL="0">
+              <a:buNone/>
+            </a:pPr>
+            <a:r>
+              <a:rPr lang="en-US" sz="1250" dirty="0">
+                <a:solidFill>
+                  <a:srgbClr val="111318"/>
+                </a:solidFill>
+                <a:latin typeface="Montserrat" pitchFamily="34" charset="0"/>
+                <a:ea typeface="Montserrat" pitchFamily="34" charset="-122"/>
+                <a:cs typeface="Montserrat" pitchFamily="34" charset="-120"/>
+              </a:rPr>
+              <a:t>Українською</a:t>
+            </a:r>
+            <a:endParaRPr lang="en-US" sz="1250" dirty="0"/>
+          </a:p>
+        </p:txBody>
+      </p:sp>
+      <p:sp>
+        <p:nvSpPr>
+          <p:cNvPr id="28" name="Shape 25"/>
+          <p:cNvSpPr/>
+          <p:nvPr/>
+        </p:nvSpPr>
+        <p:spPr>
+          <a:xfrm>
+            <a:off x="2852928" y="4391680"/>
+            <a:ext cx="4114800" cy="269199"/>
+          </a:xfrm>
+          <a:prstGeom prst="roundRect">
+            <a:avLst>
+              <a:gd name="adj" fmla="val 16984"/>
+            </a:avLst>
+          </a:prstGeom>
+          <a:solidFill>
+            <a:srgbClr val="C62A2A"/>
+          </a:solidFill>
+          <a:ln/>
+        </p:spPr>
+      </p:sp>
+      <p:sp>
+        <p:nvSpPr>
+          <p:cNvPr id="29" name="Text 26"/>
+          <p:cNvSpPr/>
+          <p:nvPr/>
+        </p:nvSpPr>
+        <p:spPr>
+          <a:xfrm>
+            <a:off x="7196328" y="4315968"/>
+            <a:ext cx="4206240" cy="420624"/>
+          </a:xfrm>
+          <a:prstGeom prst="rect">
+            <a:avLst/>
+          </a:prstGeom>
+          <a:noFill/>
+          <a:ln/>
+        </p:spPr>
+        <p:txBody>
+          <a:bodyPr wrap="square" lIns="0" tIns="0" rIns="0" bIns="0" rtlCol="0" anchor="ctr"/>
+          <a:lstStyle/>
+          <a:p>
+            <a:pPr indent="0" marL="0">
+              <a:buNone/>
+            </a:pPr>
+            <a:r>
+              <a:rPr lang="en-US" sz="1150" b="1" dirty="0">
+                <a:solidFill>
+                  <a:srgbClr val="C62A2A"/>
+                </a:solidFill>
+                <a:latin typeface="Montserrat" pitchFamily="34" charset="0"/>
+                <a:ea typeface="Montserrat" pitchFamily="34" charset="-122"/>
+                <a:cs typeface="Montserrat" pitchFamily="34" charset="-120"/>
+              </a:rPr>
+              <a:t>19 токенів — та сама фраза</a:t>
+            </a:r>
+            <a:endParaRPr lang="en-US" sz="1150" dirty="0"/>
+          </a:p>
+        </p:txBody>
+      </p:sp>
+      <p:sp>
+        <p:nvSpPr>
+          <p:cNvPr id="30" name="Shape 27"/>
+          <p:cNvSpPr/>
+          <p:nvPr/>
+        </p:nvSpPr>
+        <p:spPr>
+          <a:xfrm>
+            <a:off x="566928" y="4846320"/>
+            <a:ext cx="11064240" cy="1097280"/>
+          </a:xfrm>
+          <a:prstGeom prst="roundRect">
+            <a:avLst>
+              <a:gd name="adj" fmla="val 10000"/>
             </a:avLst>
           </a:prstGeom>
           <a:solidFill>
@@ -19562,13 +19801,13 @@
       </p:sp>
       <p:sp>
         <p:nvSpPr>
-          <p:cNvPr id="24" name="Text 21"/>
-          <p:cNvSpPr/>
-          <p:nvPr/>
-        </p:nvSpPr>
-        <p:spPr>
-          <a:xfrm>
-            <a:off x="786384" y="4105656"/>
+          <p:cNvPr id="31" name="Text 28"/>
+          <p:cNvSpPr/>
+          <p:nvPr/>
+        </p:nvSpPr>
+        <p:spPr>
+          <a:xfrm>
+            <a:off x="786384" y="4974336"/>
             <a:ext cx="10625328" cy="219456"/>
           </a:xfrm>
           <a:prstGeom prst="rect">
@@ -19601,14 +19840,14 @@
       </p:sp>
       <p:sp>
         <p:nvSpPr>
-          <p:cNvPr id="25" name="Text 22"/>
-          <p:cNvSpPr/>
-          <p:nvPr/>
-        </p:nvSpPr>
-        <p:spPr>
-          <a:xfrm>
-            <a:off x="786384" y="4361688"/>
-            <a:ext cx="10625328" cy="905256"/>
+          <p:cNvPr id="32" name="Text 29"/>
+          <p:cNvSpPr/>
+          <p:nvPr/>
+        </p:nvSpPr>
+        <p:spPr>
+          <a:xfrm>
+            <a:off x="786384" y="5230368"/>
+            <a:ext cx="10625328" cy="585216"/>
           </a:xfrm>
           <a:prstGeom prst="rect">
             <a:avLst/>

--- a/docs/decks/L04.pptx
+++ b/docs/decks/L04.pptx
@@ -8034,11 +8034,11 @@
         <p:spPr>
           <a:xfrm>
             <a:off x="566928" y="1828800"/>
-            <a:ext cx="11064240" cy="868680"/>
+            <a:ext cx="11064240" cy="713232"/>
           </a:xfrm>
           <a:prstGeom prst="roundRect">
             <a:avLst>
-              <a:gd name="adj" fmla="val 10526"/>
+              <a:gd name="adj" fmla="val 12821"/>
             </a:avLst>
           </a:prstGeom>
           <a:solidFill>
@@ -8061,7 +8061,7 @@
         <p:spPr>
           <a:xfrm>
             <a:off x="786384" y="1828800"/>
-            <a:ext cx="3761842" cy="868680"/>
+            <a:ext cx="3761842" cy="713232"/>
           </a:xfrm>
           <a:prstGeom prst="rect">
             <a:avLst/>
@@ -8100,7 +8100,7 @@
         <p:spPr>
           <a:xfrm>
             <a:off x="4548226" y="1828800"/>
-            <a:ext cx="6640373" cy="868680"/>
+            <a:ext cx="6640373" cy="713232"/>
           </a:xfrm>
           <a:prstGeom prst="rect">
             <a:avLst/>
@@ -8138,12 +8138,12 @@
         </p:nvSpPr>
         <p:spPr>
           <a:xfrm>
-            <a:off x="566928" y="2862072"/>
-            <a:ext cx="11064240" cy="868680"/>
+            <a:off x="566928" y="2688336"/>
+            <a:ext cx="11064240" cy="713232"/>
           </a:xfrm>
           <a:prstGeom prst="roundRect">
             <a:avLst>
-              <a:gd name="adj" fmla="val 10526"/>
+              <a:gd name="adj" fmla="val 12821"/>
             </a:avLst>
           </a:prstGeom>
           <a:solidFill>
@@ -8160,8 +8160,8 @@
         </p:nvSpPr>
         <p:spPr>
           <a:xfrm>
-            <a:off x="786384" y="2862072"/>
-            <a:ext cx="3761842" cy="868680"/>
+            <a:off x="786384" y="2688336"/>
+            <a:ext cx="3761842" cy="713232"/>
           </a:xfrm>
           <a:prstGeom prst="rect">
             <a:avLst/>
@@ -8199,8 +8199,8 @@
         </p:nvSpPr>
         <p:spPr>
           <a:xfrm>
-            <a:off x="4548226" y="2862072"/>
-            <a:ext cx="6640373" cy="868680"/>
+            <a:off x="4548226" y="2688336"/>
+            <a:ext cx="6640373" cy="713232"/>
           </a:xfrm>
           <a:prstGeom prst="rect">
             <a:avLst/>
@@ -8238,12 +8238,12 @@
         </p:nvSpPr>
         <p:spPr>
           <a:xfrm>
-            <a:off x="566928" y="3895344"/>
-            <a:ext cx="11064240" cy="868680"/>
+            <a:off x="566928" y="3547872"/>
+            <a:ext cx="11064240" cy="713232"/>
           </a:xfrm>
           <a:prstGeom prst="roundRect">
             <a:avLst>
-              <a:gd name="adj" fmla="val 10526"/>
+              <a:gd name="adj" fmla="val 12821"/>
             </a:avLst>
           </a:prstGeom>
           <a:solidFill>
@@ -8260,8 +8260,8 @@
         </p:nvSpPr>
         <p:spPr>
           <a:xfrm>
-            <a:off x="786384" y="3895344"/>
-            <a:ext cx="3761842" cy="868680"/>
+            <a:off x="786384" y="3547872"/>
+            <a:ext cx="3761842" cy="713232"/>
           </a:xfrm>
           <a:prstGeom prst="rect">
             <a:avLst/>
@@ -8299,8 +8299,8 @@
         </p:nvSpPr>
         <p:spPr>
           <a:xfrm>
-            <a:off x="4548226" y="3895344"/>
-            <a:ext cx="6640373" cy="868680"/>
+            <a:off x="4548226" y="3547872"/>
+            <a:ext cx="6640373" cy="713232"/>
           </a:xfrm>
           <a:prstGeom prst="rect">
             <a:avLst/>
@@ -8338,12 +8338,270 @@
         </p:nvSpPr>
         <p:spPr>
           <a:xfrm>
-            <a:off x="566928" y="4937760"/>
-            <a:ext cx="11064240" cy="1097280"/>
+            <a:off x="566928" y="4462272"/>
+            <a:ext cx="8851392" cy="402336"/>
+          </a:xfrm>
+          <a:prstGeom prst="rect">
+            <a:avLst/>
+          </a:prstGeom>
+          <a:solidFill>
+            <a:srgbClr val="E9F4EF"/>
+          </a:solidFill>
+          <a:ln w="12700">
+            <a:solidFill>
+              <a:srgbClr val="1B8A5A"/>
+            </a:solidFill>
+            <a:prstDash val="solid"/>
+          </a:ln>
+        </p:spPr>
+      </p:sp>
+      <p:sp>
+        <p:nvSpPr>
+          <p:cNvPr id="19" name="Shape 16"/>
+          <p:cNvSpPr/>
+          <p:nvPr/>
+        </p:nvSpPr>
+        <p:spPr>
+          <a:xfrm>
+            <a:off x="9418320" y="4462272"/>
+            <a:ext cx="1327709" cy="402336"/>
+          </a:xfrm>
+          <a:prstGeom prst="rect">
+            <a:avLst/>
+          </a:prstGeom>
+          <a:solidFill>
+            <a:srgbClr val="F8F0E2"/>
+          </a:solidFill>
+          <a:ln w="12700">
+            <a:solidFill>
+              <a:srgbClr val="9A5B12"/>
+            </a:solidFill>
+            <a:prstDash val="solid"/>
+          </a:ln>
+        </p:spPr>
+      </p:sp>
+      <p:sp>
+        <p:nvSpPr>
+          <p:cNvPr id="20" name="Shape 17"/>
+          <p:cNvSpPr/>
+          <p:nvPr/>
+        </p:nvSpPr>
+        <p:spPr>
+          <a:xfrm>
+            <a:off x="10746029" y="4462272"/>
+            <a:ext cx="885139" cy="402336"/>
+          </a:xfrm>
+          <a:prstGeom prst="rect">
+            <a:avLst/>
+          </a:prstGeom>
+          <a:solidFill>
+            <a:srgbClr val="FBE9E9"/>
+          </a:solidFill>
+          <a:ln w="12700">
+            <a:solidFill>
+              <a:srgbClr val="C62A2A"/>
+            </a:solidFill>
+            <a:prstDash val="solid"/>
+          </a:ln>
+        </p:spPr>
+      </p:sp>
+      <p:sp>
+        <p:nvSpPr>
+          <p:cNvPr id="21" name="Shape 18"/>
+          <p:cNvSpPr/>
+          <p:nvPr/>
+        </p:nvSpPr>
+        <p:spPr>
+          <a:xfrm>
+            <a:off x="9418320" y="4389120"/>
+            <a:ext cx="0" cy="548640"/>
+          </a:xfrm>
+          <a:prstGeom prst="line">
+            <a:avLst/>
+          </a:prstGeom>
+          <a:noFill/>
+          <a:ln w="19050">
+            <a:solidFill>
+              <a:srgbClr val="9A5B12"/>
+            </a:solidFill>
+            <a:prstDash val="solid"/>
+          </a:ln>
+        </p:spPr>
+      </p:sp>
+      <p:sp>
+        <p:nvSpPr>
+          <p:cNvPr id="22" name="Shape 19"/>
+          <p:cNvSpPr/>
+          <p:nvPr/>
+        </p:nvSpPr>
+        <p:spPr>
+          <a:xfrm>
+            <a:off x="10746029" y="4389120"/>
+            <a:ext cx="0" cy="548640"/>
+          </a:xfrm>
+          <a:prstGeom prst="line">
+            <a:avLst/>
+          </a:prstGeom>
+          <a:noFill/>
+          <a:ln w="19050">
+            <a:solidFill>
+              <a:srgbClr val="C62A2A"/>
+            </a:solidFill>
+            <a:prstDash val="solid"/>
+          </a:ln>
+        </p:spPr>
+      </p:sp>
+      <p:sp>
+        <p:nvSpPr>
+          <p:cNvPr id="23" name="Text 20"/>
+          <p:cNvSpPr/>
+          <p:nvPr/>
+        </p:nvSpPr>
+        <p:spPr>
+          <a:xfrm>
+            <a:off x="566928" y="4956048"/>
+            <a:ext cx="11064240" cy="237744"/>
+          </a:xfrm>
+          <a:prstGeom prst="rect">
+            <a:avLst/>
+          </a:prstGeom>
+          <a:noFill/>
+          <a:ln/>
+        </p:spPr>
+        <p:txBody>
+          <a:bodyPr wrap="square" lIns="0" tIns="0" rIns="0" bIns="0" rtlCol="0" anchor="ctr"/>
+          <a:lstStyle/>
+          <a:p>
+            <a:pPr indent="0" marL="0">
+              <a:buNone/>
+            </a:pPr>
+            <a:r>
+              <a:rPr lang="en-US" sz="900" dirty="0">
+                <a:solidFill>
+                  <a:srgbClr val="9AA1AD"/>
+                </a:solidFill>
+                <a:latin typeface="Courier New" pitchFamily="34" charset="0"/>
+                <a:ea typeface="Courier New" pitchFamily="34" charset="-122"/>
+                <a:cs typeface="Courier New" pitchFamily="34" charset="-120"/>
+              </a:rPr>
+              <a:t>витрачений бюджет місяця:  </a:t>
+            </a:r>
+            <a:pPr indent="0" marL="0">
+              <a:buNone/>
+            </a:pPr>
+            <a:r>
+              <a:rPr lang="en-US" sz="900" b="1" dirty="0">
+                <a:solidFill>
+                  <a:srgbClr val="1B8A5A"/>
+                </a:solidFill>
+                <a:latin typeface="Courier New" pitchFamily="34" charset="0"/>
+                <a:ea typeface="Courier New" pitchFamily="34" charset="-122"/>
+                <a:cs typeface="Courier New" pitchFamily="34" charset="-120"/>
+              </a:rPr>
+              <a:t>до 80% — норма</a:t>
+            </a:r>
+            <a:pPr indent="0" marL="0">
+              <a:buNone/>
+            </a:pPr>
+            <a:r>
+              <a:rPr lang="en-US" sz="900" dirty="0">
+                <a:solidFill>
+                  <a:srgbClr val="9AA1AD"/>
+                </a:solidFill>
+                <a:latin typeface="Courier New" pitchFamily="34" charset="0"/>
+                <a:ea typeface="Courier New" pitchFamily="34" charset="-122"/>
+                <a:cs typeface="Courier New" pitchFamily="34" charset="-120"/>
+              </a:rPr>
+              <a:t>   ·   </a:t>
+            </a:r>
+            <a:pPr indent="0" marL="0">
+              <a:buNone/>
+            </a:pPr>
+            <a:r>
+              <a:rPr lang="en-US" sz="900" b="1" dirty="0">
+                <a:solidFill>
+                  <a:srgbClr val="9A5B12"/>
+                </a:solidFill>
+                <a:latin typeface="Courier New" pitchFamily="34" charset="0"/>
+                <a:ea typeface="Courier New" pitchFamily="34" charset="-122"/>
+                <a:cs typeface="Courier New" pitchFamily="34" charset="-120"/>
+              </a:rPr>
+              <a:t>80% — алерт</a:t>
+            </a:r>
+            <a:pPr indent="0" marL="0">
+              <a:buNone/>
+            </a:pPr>
+            <a:r>
+              <a:rPr lang="en-US" sz="900" dirty="0">
+                <a:solidFill>
+                  <a:srgbClr val="9AA1AD"/>
+                </a:solidFill>
+                <a:latin typeface="Courier New" pitchFamily="34" charset="0"/>
+                <a:ea typeface="Courier New" pitchFamily="34" charset="-122"/>
+                <a:cs typeface="Courier New" pitchFamily="34" charset="-120"/>
+              </a:rPr>
+              <a:t>   ·   </a:t>
+            </a:r>
+            <a:pPr indent="0" marL="0">
+              <a:buNone/>
+            </a:pPr>
+            <a:r>
+              <a:rPr lang="en-US" sz="900" b="1" dirty="0">
+                <a:solidFill>
+                  <a:srgbClr val="C62A2A"/>
+                </a:solidFill>
+                <a:latin typeface="Courier New" pitchFamily="34" charset="0"/>
+                <a:ea typeface="Courier New" pitchFamily="34" charset="-122"/>
+                <a:cs typeface="Courier New" pitchFamily="34" charset="-120"/>
+              </a:rPr>
+              <a:t>92% — деградація</a:t>
+            </a:r>
+            <a:pPr indent="0" marL="0">
+              <a:buNone/>
+            </a:pPr>
+            <a:r>
+              <a:rPr lang="en-US" sz="900" dirty="0">
+                <a:solidFill>
+                  <a:srgbClr val="9AA1AD"/>
+                </a:solidFill>
+                <a:latin typeface="Courier New" pitchFamily="34" charset="0"/>
+                <a:ea typeface="Courier New" pitchFamily="34" charset="-122"/>
+                <a:cs typeface="Courier New" pitchFamily="34" charset="-120"/>
+              </a:rPr>
+              <a:t>   ·   </a:t>
+            </a:r>
+            <a:pPr indent="0" marL="0">
+              <a:buNone/>
+            </a:pPr>
+            <a:r>
+              <a:rPr lang="en-US" sz="900" b="1" dirty="0">
+                <a:solidFill>
+                  <a:srgbClr val="C62A2A"/>
+                </a:solidFill>
+                <a:latin typeface="Courier New" pitchFamily="34" charset="0"/>
+                <a:ea typeface="Courier New" pitchFamily="34" charset="-122"/>
+                <a:cs typeface="Courier New" pitchFamily="34" charset="-120"/>
+              </a:rPr>
+              <a:t>100% — відсікання</a:t>
+            </a:r>
+            <a:endParaRPr lang="en-US" sz="900" dirty="0"/>
+          </a:p>
+        </p:txBody>
+      </p:sp>
+      <p:sp>
+        <p:nvSpPr>
+          <p:cNvPr id="24" name="Shape 21"/>
+          <p:cNvSpPr/>
+          <p:nvPr/>
+        </p:nvSpPr>
+        <p:spPr>
+          <a:xfrm>
+            <a:off x="566928" y="5230368"/>
+            <a:ext cx="11064240" cy="868680"/>
           </a:xfrm>
           <a:prstGeom prst="roundRect">
             <a:avLst>
-              <a:gd name="adj" fmla="val 10000"/>
+              <a:gd name="adj" fmla="val 12632"/>
             </a:avLst>
           </a:prstGeom>
           <a:solidFill>
@@ -8354,13 +8612,13 @@
       </p:sp>
       <p:sp>
         <p:nvSpPr>
-          <p:cNvPr id="19" name="Text 16"/>
-          <p:cNvSpPr/>
-          <p:nvPr/>
-        </p:nvSpPr>
-        <p:spPr>
-          <a:xfrm>
-            <a:off x="786384" y="5065776"/>
+          <p:cNvPr id="25" name="Text 22"/>
+          <p:cNvSpPr/>
+          <p:nvPr/>
+        </p:nvSpPr>
+        <p:spPr>
+          <a:xfrm>
+            <a:off x="786384" y="5358384"/>
             <a:ext cx="10625328" cy="219456"/>
           </a:xfrm>
           <a:prstGeom prst="rect">
@@ -8393,14 +8651,14 @@
       </p:sp>
       <p:sp>
         <p:nvSpPr>
-          <p:cNvPr id="20" name="Text 17"/>
-          <p:cNvSpPr/>
-          <p:nvPr/>
-        </p:nvSpPr>
-        <p:spPr>
-          <a:xfrm>
-            <a:off x="786384" y="5321808"/>
-            <a:ext cx="10625328" cy="585216"/>
+          <p:cNvPr id="26" name="Text 23"/>
+          <p:cNvSpPr/>
+          <p:nvPr/>
+        </p:nvSpPr>
+        <p:spPr>
+          <a:xfrm>
+            <a:off x="786384" y="5614416"/>
+            <a:ext cx="10625328" cy="356616"/>
           </a:xfrm>
           <a:prstGeom prst="rect">
             <a:avLst/>

--- a/docs/decks/L04.pptx
+++ b/docs/decks/L04.pptx
@@ -5275,11 +5275,11 @@
         <p:spPr>
           <a:xfrm>
             <a:off x="566928" y="1783080"/>
-            <a:ext cx="5349240" cy="1737360"/>
+            <a:ext cx="5349240" cy="1463040"/>
           </a:xfrm>
           <a:prstGeom prst="roundRect">
             <a:avLst>
-              <a:gd name="adj" fmla="val 6316"/>
+              <a:gd name="adj" fmla="val 7500"/>
             </a:avLst>
           </a:prstGeom>
           <a:solidFill>
@@ -5336,7 +5336,7 @@
         <p:spPr>
           <a:xfrm>
             <a:off x="768096" y="2468880"/>
-            <a:ext cx="4946904" cy="896112"/>
+            <a:ext cx="4946904" cy="621792"/>
           </a:xfrm>
           <a:prstGeom prst="rect">
             <a:avLst/>
@@ -5378,11 +5378,11 @@
         <p:spPr>
           <a:xfrm>
             <a:off x="6281928" y="1783080"/>
-            <a:ext cx="5349240" cy="1737360"/>
+            <a:ext cx="5349240" cy="1463040"/>
           </a:xfrm>
           <a:prstGeom prst="roundRect">
             <a:avLst>
-              <a:gd name="adj" fmla="val 6316"/>
+              <a:gd name="adj" fmla="val 7500"/>
             </a:avLst>
           </a:prstGeom>
           <a:solidFill>
@@ -5444,7 +5444,7 @@
         <p:spPr>
           <a:xfrm>
             <a:off x="6483096" y="2468880"/>
-            <a:ext cx="4946904" cy="896112"/>
+            <a:ext cx="4946904" cy="621792"/>
           </a:xfrm>
           <a:prstGeom prst="rect">
             <a:avLst/>
@@ -5485,46 +5485,113 @@
         </p:nvSpPr>
         <p:spPr>
           <a:xfrm>
-            <a:off x="566928" y="3749040"/>
-            <a:ext cx="11064240" cy="1600200"/>
-          </a:xfrm>
-          <a:prstGeom prst="roundRect">
-            <a:avLst>
-              <a:gd name="adj" fmla="val 6857"/>
-            </a:avLst>
+            <a:off x="566928" y="3529584"/>
+            <a:ext cx="7966253" cy="457200"/>
+          </a:xfrm>
+          <a:prstGeom prst="rect">
+            <a:avLst/>
+          </a:prstGeom>
+          <a:solidFill>
+            <a:srgbClr val="E9F4EF"/>
+          </a:solidFill>
+          <a:ln w="12700">
+            <a:solidFill>
+              <a:srgbClr val="1B8A5A"/>
+            </a:solidFill>
+            <a:prstDash val="solid"/>
+          </a:ln>
+        </p:spPr>
+      </p:sp>
+      <p:sp>
+        <p:nvSpPr>
+          <p:cNvPr id="14" name="Text 11"/>
+          <p:cNvSpPr/>
+          <p:nvPr/>
+        </p:nvSpPr>
+        <p:spPr>
+          <a:xfrm>
+            <a:off x="566928" y="3529584"/>
+            <a:ext cx="7966253" cy="457200"/>
+          </a:xfrm>
+          <a:prstGeom prst="rect">
+            <a:avLst/>
+          </a:prstGeom>
+          <a:noFill/>
+          <a:ln/>
+        </p:spPr>
+        <p:txBody>
+          <a:bodyPr wrap="square" lIns="0" tIns="0" rIns="0" bIns="0" rtlCol="0" anchor="ctr"/>
+          <a:lstStyle/>
+          <a:p>
+            <a:pPr algn="ctr" indent="0" marL="0">
+              <a:buNone/>
+            </a:pPr>
+            <a:r>
+              <a:rPr lang="en-US" sz="950" b="1" dirty="0">
+                <a:solidFill>
+                  <a:srgbClr val="1B8A5A"/>
+                </a:solidFill>
+                <a:latin typeface="Courier New" pitchFamily="34" charset="0"/>
+                <a:ea typeface="Courier New" pitchFamily="34" charset="-122"/>
+                <a:cs typeface="Courier New" pitchFamily="34" charset="-120"/>
+              </a:rPr>
+              <a:t>72 вирішено ботом  ·  $0.90</a:t>
+            </a:r>
+            <a:endParaRPr lang="en-US" sz="950" dirty="0"/>
+          </a:p>
+        </p:txBody>
+      </p:sp>
+      <p:sp>
+        <p:nvSpPr>
+          <p:cNvPr id="15" name="Shape 12"/>
+          <p:cNvSpPr/>
+          <p:nvPr/>
+        </p:nvSpPr>
+        <p:spPr>
+          <a:xfrm>
+            <a:off x="8533181" y="3529584"/>
+            <a:ext cx="3097987" cy="457200"/>
+          </a:xfrm>
+          <a:prstGeom prst="rect">
+            <a:avLst/>
           </a:prstGeom>
           <a:solidFill>
             <a:srgbClr val="FBE9E9"/>
           </a:solidFill>
-          <a:ln/>
-        </p:spPr>
-      </p:sp>
-      <p:sp>
-        <p:nvSpPr>
-          <p:cNvPr id="14" name="Text 11"/>
-          <p:cNvSpPr/>
-          <p:nvPr/>
-        </p:nvSpPr>
-        <p:spPr>
-          <a:xfrm>
-            <a:off x="786384" y="3877056"/>
-            <a:ext cx="10625328" cy="219456"/>
-          </a:xfrm>
-          <a:prstGeom prst="rect">
-            <a:avLst/>
-          </a:prstGeom>
-          <a:noFill/>
-          <a:ln/>
-        </p:spPr>
-        <p:txBody>
-          <a:bodyPr wrap="square" lIns="0" tIns="0" rIns="0" bIns="0" rtlCol="0" anchor="ctr"/>
-          <a:lstStyle/>
-          <a:p>
-            <a:pPr indent="0" marL="0">
-              <a:buNone/>
-            </a:pPr>
-            <a:r>
-              <a:rPr lang="en-US" sz="950" b="1" spc="150" kern="0" dirty="0">
+          <a:ln w="12700">
+            <a:solidFill>
+              <a:srgbClr val="C62A2A"/>
+            </a:solidFill>
+            <a:prstDash val="solid"/>
+          </a:ln>
+        </p:spPr>
+      </p:sp>
+      <p:sp>
+        <p:nvSpPr>
+          <p:cNvPr id="16" name="Text 13"/>
+          <p:cNvSpPr/>
+          <p:nvPr/>
+        </p:nvSpPr>
+        <p:spPr>
+          <a:xfrm>
+            <a:off x="8533181" y="3529584"/>
+            <a:ext cx="3097987" cy="457200"/>
+          </a:xfrm>
+          <a:prstGeom prst="rect">
+            <a:avLst/>
+          </a:prstGeom>
+          <a:noFill/>
+          <a:ln/>
+        </p:spPr>
+        <p:txBody>
+          <a:bodyPr wrap="square" lIns="0" tIns="0" rIns="0" bIns="0" rtlCol="0" anchor="ctr"/>
+          <a:lstStyle/>
+          <a:p>
+            <a:pPr algn="ctr" indent="0" marL="0">
+              <a:buNone/>
+            </a:pPr>
+            <a:r>
+              <a:rPr lang="en-US" sz="950" b="1" dirty="0">
                 <a:solidFill>
                   <a:srgbClr val="C62A2A"/>
                 </a:solidFill>
@@ -5532,6 +5599,106 @@
                 <a:ea typeface="Courier New" pitchFamily="34" charset="-122"/>
                 <a:cs typeface="Courier New" pitchFamily="34" charset="-120"/>
               </a:rPr>
+              <a:t>28 на оператора  ·  $46</a:t>
+            </a:r>
+            <a:endParaRPr lang="en-US" sz="950" dirty="0"/>
+          </a:p>
+        </p:txBody>
+      </p:sp>
+      <p:sp>
+        <p:nvSpPr>
+          <p:cNvPr id="17" name="Text 14"/>
+          <p:cNvSpPr/>
+          <p:nvPr/>
+        </p:nvSpPr>
+        <p:spPr>
+          <a:xfrm>
+            <a:off x="566928" y="3273552"/>
+            <a:ext cx="4572000" cy="201168"/>
+          </a:xfrm>
+          <a:prstGeom prst="rect">
+            <a:avLst/>
+          </a:prstGeom>
+          <a:noFill/>
+          <a:ln/>
+        </p:spPr>
+        <p:txBody>
+          <a:bodyPr wrap="square" lIns="0" tIns="0" rIns="0" bIns="0" rtlCol="0" anchor="ctr"/>
+          <a:lstStyle/>
+          <a:p>
+            <a:pPr indent="0" marL="0">
+              <a:buNone/>
+            </a:pPr>
+            <a:r>
+              <a:rPr lang="en-US" sz="850" spc="100" kern="0" dirty="0">
+                <a:solidFill>
+                  <a:srgbClr val="9AA1AD"/>
+                </a:solidFill>
+                <a:latin typeface="Courier New" pitchFamily="34" charset="0"/>
+                <a:ea typeface="Courier New" pitchFamily="34" charset="-122"/>
+                <a:cs typeface="Courier New" pitchFamily="34" charset="-120"/>
+              </a:rPr>
+              <a:t>сто звернень за день</a:t>
+            </a:r>
+            <a:endParaRPr lang="en-US" sz="850" dirty="0"/>
+          </a:p>
+        </p:txBody>
+      </p:sp>
+      <p:sp>
+        <p:nvSpPr>
+          <p:cNvPr id="18" name="Shape 15"/>
+          <p:cNvSpPr/>
+          <p:nvPr/>
+        </p:nvSpPr>
+        <p:spPr>
+          <a:xfrm>
+            <a:off x="566928" y="4261104"/>
+            <a:ext cx="11064240" cy="1371600"/>
+          </a:xfrm>
+          <a:prstGeom prst="roundRect">
+            <a:avLst>
+              <a:gd name="adj" fmla="val 8000"/>
+            </a:avLst>
+          </a:prstGeom>
+          <a:solidFill>
+            <a:srgbClr val="FBE9E9"/>
+          </a:solidFill>
+          <a:ln/>
+        </p:spPr>
+      </p:sp>
+      <p:sp>
+        <p:nvSpPr>
+          <p:cNvPr id="19" name="Text 16"/>
+          <p:cNvSpPr/>
+          <p:nvPr/>
+        </p:nvSpPr>
+        <p:spPr>
+          <a:xfrm>
+            <a:off x="786384" y="4389120"/>
+            <a:ext cx="10625328" cy="219456"/>
+          </a:xfrm>
+          <a:prstGeom prst="rect">
+            <a:avLst/>
+          </a:prstGeom>
+          <a:noFill/>
+          <a:ln/>
+        </p:spPr>
+        <p:txBody>
+          <a:bodyPr wrap="square" lIns="0" tIns="0" rIns="0" bIns="0" rtlCol="0" anchor="ctr"/>
+          <a:lstStyle/>
+          <a:p>
+            <a:pPr indent="0" marL="0">
+              <a:buNone/>
+            </a:pPr>
+            <a:r>
+              <a:rPr lang="en-US" sz="950" b="1" spc="150" kern="0" dirty="0">
+                <a:solidFill>
+                  <a:srgbClr val="C62A2A"/>
+                </a:solidFill>
+                <a:latin typeface="Courier New" pitchFamily="34" charset="0"/>
+                <a:ea typeface="Courier New" pitchFamily="34" charset="-122"/>
+                <a:cs typeface="Courier New" pitchFamily="34" charset="-120"/>
+              </a:rPr>
               <a:t>ЯК ЧЕСНО ПОРІВНЯТИ ДЕШЕВУ МОДЕЛЬ ІЗ СИЛЬНОЮ</a:t>
             </a:r>
             <a:endParaRPr lang="en-US" sz="950" dirty="0"/>
@@ -5540,14 +5707,14 @@
       </p:sp>
       <p:sp>
         <p:nvSpPr>
-          <p:cNvPr id="15" name="Text 12"/>
-          <p:cNvSpPr/>
-          <p:nvPr/>
-        </p:nvSpPr>
-        <p:spPr>
-          <a:xfrm>
-            <a:off x="786384" y="4133088"/>
-            <a:ext cx="10625328" cy="1088136"/>
+          <p:cNvPr id="20" name="Text 17"/>
+          <p:cNvSpPr/>
+          <p:nvPr/>
+        </p:nvSpPr>
+        <p:spPr>
+          <a:xfrm>
+            <a:off x="786384" y="4645152"/>
+            <a:ext cx="10625328" cy="859536"/>
           </a:xfrm>
           <a:prstGeom prst="rect">
             <a:avLst/>

--- a/docs/decks/L04.pptx
+++ b/docs/decks/L04.pptx
@@ -2536,7 +2536,7 @@
         </p:nvSpPr>
         <p:spPr>
           <a:xfrm>
-            <a:off x="11368735" y="6437376"/>
+            <a:off x="11368735" y="6327648"/>
             <a:ext cx="365760" cy="274320"/>
           </a:xfrm>
           <a:prstGeom prst="rect">
@@ -2572,6 +2572,62 @@
           </a:p>
         </p:txBody>
       </p:sp>
+    </p:spTree>
+  </p:cSld>
+  <p:clrMapOvr>
+    <a:masterClrMapping/>
+  </p:clrMapOvr>
+</p:sldLayout>
+</file>
+
+<file path=ppt/slideLayouts/slideLayout2.xml><?xml version="1.0" encoding="utf-8"?>
+<p:sldLayout xmlns:a="http://schemas.openxmlformats.org/drawingml/2006/main" xmlns:r="http://schemas.openxmlformats.org/officeDocument/2006/relationships" xmlns:p="http://schemas.openxmlformats.org/presentationml/2006/main" preserve="1">
+  <p:cSld name="NEO">
+    <p:bg>
+      <p:bgPr>
+        <a:solidFill>
+          <a:srgbClr val="000000"/>
+        </a:solidFill>
+      </p:bgPr>
+    </p:bg>
+    <p:spTree>
+      <p:nvGrpSpPr>
+        <p:cNvPr id="1" name=""/>
+        <p:cNvGrpSpPr/>
+        <p:nvPr/>
+      </p:nvGrpSpPr>
+      <p:grpSpPr>
+        <a:xfrm>
+          <a:off x="0" y="0"/>
+          <a:ext cx="0" cy="0"/>
+          <a:chOff x="0" y="0"/>
+          <a:chExt cx="0" cy="0"/>
+        </a:xfrm>
+      </p:grpSpPr>
+      <p:pic>
+        <p:nvPicPr>
+          <p:cNvPr id="2" name="Image 0" descr="preencoded.png">    </p:cNvPr>
+          <p:cNvPicPr>
+            <a:picLocks noChangeAspect="1"/>
+          </p:cNvPicPr>
+          <p:nvPr/>
+        </p:nvPicPr>
+        <p:blipFill>
+          <a:blip r:embed="rId1"/>
+          <a:stretch>
+            <a:fillRect/>
+          </a:stretch>
+        </p:blipFill>
+        <p:spPr>
+          <a:xfrm>
+            <a:off x="0" y="0"/>
+            <a:ext cx="12191695" cy="6858000"/>
+          </a:xfrm>
+          <a:prstGeom prst="rect">
+            <a:avLst/>
+          </a:prstGeom>
+        </p:spPr>
+      </p:pic>
     </p:spTree>
   </p:cSld>
   <p:clrMapOvr>
@@ -2609,7 +2665,7 @@
         </p:nvSpPr>
         <p:spPr>
           <a:xfrm>
-            <a:off x="11368735" y="6437376"/>
+            <a:off x="11368735" y="6327648"/>
             <a:ext cx="365760" cy="274320"/>
           </a:xfrm>
           <a:prstGeom prst="rect">
@@ -2650,6 +2706,7 @@
   <p:clrMap bg1="lt1" tx1="dk1" bg2="lt2" tx2="dk2" accent1="accent1" accent2="accent2" accent3="accent3" accent4="accent4" accent5="accent5" accent6="accent6" hlink="hlink" folHlink="folHlink"/>
   <p:sldLayoutIdLst>
     <p:sldLayoutId id="2147483649" r:id="rId1"/>
+    <p:sldLayoutId id="2147483650" r:id="rId2"/>
   </p:sldLayoutIdLst>
   <p:hf sldNum="0" hdr="0" ftr="0" dt="0"/>
   <p:txStyles>
@@ -2908,13 +2965,6 @@
 <file path=ppt/slides/slide1.xml><?xml version="1.0" encoding="utf-8"?>
 <p:sld xmlns:a="http://schemas.openxmlformats.org/drawingml/2006/main" xmlns:r="http://schemas.openxmlformats.org/officeDocument/2006/relationships" xmlns:p="http://schemas.openxmlformats.org/presentationml/2006/main">
   <p:cSld name="Slide 1">
-    <p:bg>
-      <p:bgPr>
-        <a:solidFill>
-          <a:srgbClr val="1B0942"/>
-        </a:solidFill>
-      </p:bgPr>
-    </p:bg>
     <p:spTree>
       <p:nvGrpSpPr>
         <p:cNvPr id="1" name=""/>
@@ -3586,13 +3636,6 @@
 <file path=ppt/slides/slide10.xml><?xml version="1.0" encoding="utf-8"?>
 <p:sld xmlns:a="http://schemas.openxmlformats.org/drawingml/2006/main" xmlns:r="http://schemas.openxmlformats.org/officeDocument/2006/relationships" xmlns:p="http://schemas.openxmlformats.org/presentationml/2006/main">
   <p:cSld name="Slide 10">
-    <p:bg>
-      <p:bgPr>
-        <a:solidFill>
-          <a:srgbClr val="FFFFFF"/>
-        </a:solidFill>
-      </p:bgPr>
-    </p:bg>
     <p:spTree>
       <p:nvGrpSpPr>
         <p:cNvPr id="1" name=""/>
@@ -3609,7 +3652,29 @@
       </p:grpSpPr>
       <p:sp>
         <p:nvSpPr>
-          <p:cNvPr id="2" name="Text 0"/>
+          <p:cNvPr id="2" name="Shape 0"/>
+          <p:cNvSpPr/>
+          <p:nvPr/>
+        </p:nvSpPr>
+        <p:spPr>
+          <a:xfrm>
+            <a:off x="231343" y="194767"/>
+            <a:ext cx="11716207" cy="6473952"/>
+          </a:xfrm>
+          <a:prstGeom prst="roundRect">
+            <a:avLst>
+              <a:gd name="adj" fmla="val 3107"/>
+            </a:avLst>
+          </a:prstGeom>
+          <a:solidFill>
+            <a:srgbClr val="FFFFFF"/>
+          </a:solidFill>
+          <a:ln/>
+        </p:spPr>
+      </p:sp>
+      <p:sp>
+        <p:nvSpPr>
+          <p:cNvPr id="3" name="Text 1"/>
           <p:cNvSpPr/>
           <p:nvPr/>
         </p:nvSpPr>
@@ -3648,7 +3713,7 @@
       </p:sp>
       <p:sp>
         <p:nvSpPr>
-          <p:cNvPr id="3" name="Text 1"/>
+          <p:cNvPr id="4" name="Text 2"/>
           <p:cNvSpPr/>
           <p:nvPr/>
         </p:nvSpPr>
@@ -3687,7 +3752,7 @@
       </p:sp>
       <p:sp>
         <p:nvSpPr>
-          <p:cNvPr id="4" name="Shape 2"/>
+          <p:cNvPr id="5" name="Shape 3"/>
           <p:cNvSpPr/>
           <p:nvPr/>
         </p:nvSpPr>
@@ -3709,7 +3774,7 @@
       </p:sp>
       <p:sp>
         <p:nvSpPr>
-          <p:cNvPr id="5" name="Text 3"/>
+          <p:cNvPr id="6" name="Text 4"/>
           <p:cNvSpPr/>
           <p:nvPr/>
         </p:nvSpPr>
@@ -3748,7 +3813,7 @@
       </p:sp>
       <p:pic>
         <p:nvPicPr>
-          <p:cNvPr id="6" name="Image 0" descr="preencoded.png">    </p:cNvPr>
+          <p:cNvPr id="7" name="Image 0" descr="preencoded.png">    </p:cNvPr>
           <p:cNvPicPr>
             <a:picLocks noChangeAspect="1"/>
           </p:cNvPicPr>
@@ -3762,7 +3827,7 @@
         </p:blipFill>
         <p:spPr>
           <a:xfrm>
-            <a:off x="566928" y="6254496"/>
+            <a:off x="566928" y="6126480"/>
             <a:ext cx="1481328" cy="457200"/>
           </a:xfrm>
           <a:prstGeom prst="rect">
@@ -3772,7 +3837,7 @@
       </p:pic>
       <p:sp>
         <p:nvSpPr>
-          <p:cNvPr id="7" name="Shape 4"/>
+          <p:cNvPr id="8" name="Shape 5"/>
           <p:cNvSpPr/>
           <p:nvPr/>
         </p:nvSpPr>
@@ -3799,7 +3864,7 @@
       </p:sp>
       <p:sp>
         <p:nvSpPr>
-          <p:cNvPr id="8" name="Text 5"/>
+          <p:cNvPr id="9" name="Text 6"/>
           <p:cNvSpPr/>
           <p:nvPr/>
         </p:nvSpPr>
@@ -3921,7 +3986,7 @@
       </p:sp>
       <p:sp>
         <p:nvSpPr>
-          <p:cNvPr id="9" name="Shape 6"/>
+          <p:cNvPr id="10" name="Shape 7"/>
           <p:cNvSpPr/>
           <p:nvPr/>
         </p:nvSpPr>
@@ -3943,7 +4008,7 @@
       </p:sp>
       <p:sp>
         <p:nvSpPr>
-          <p:cNvPr id="10" name="Text 7"/>
+          <p:cNvPr id="11" name="Text 8"/>
           <p:cNvSpPr/>
           <p:nvPr/>
         </p:nvSpPr>
@@ -3982,7 +4047,7 @@
       </p:sp>
       <p:sp>
         <p:nvSpPr>
-          <p:cNvPr id="11" name="Text 8"/>
+          <p:cNvPr id="12" name="Text 9"/>
           <p:cNvSpPr/>
           <p:nvPr/>
         </p:nvSpPr>
@@ -4024,7 +4089,7 @@
       </p:sp>
       <p:sp>
         <p:nvSpPr>
-          <p:cNvPr id="12" name="Shape 9"/>
+          <p:cNvPr id="13" name="Shape 10"/>
           <p:cNvSpPr/>
           <p:nvPr/>
         </p:nvSpPr>
@@ -4046,7 +4111,7 @@
       </p:sp>
       <p:sp>
         <p:nvSpPr>
-          <p:cNvPr id="13" name="Text 10"/>
+          <p:cNvPr id="14" name="Text 11"/>
           <p:cNvSpPr/>
           <p:nvPr/>
         </p:nvSpPr>
@@ -4085,7 +4150,7 @@
       </p:sp>
       <p:sp>
         <p:nvSpPr>
-          <p:cNvPr id="14" name="Text 11"/>
+          <p:cNvPr id="15" name="Text 12"/>
           <p:cNvSpPr/>
           <p:nvPr/>
         </p:nvSpPr>
@@ -4137,7 +4202,7 @@
         </p:nvSpPr>
         <p:spPr>
           <a:xfrm>
-            <a:off x="11368735" y="6437376"/>
+            <a:off x="11368735" y="6327648"/>
             <a:ext cx="365760" cy="274320"/>
           </a:xfrm>
           <a:prstGeom prst="rect">
@@ -4184,13 +4249,6 @@
 <file path=ppt/slides/slide11.xml><?xml version="1.0" encoding="utf-8"?>
 <p:sld xmlns:a="http://schemas.openxmlformats.org/drawingml/2006/main" xmlns:r="http://schemas.openxmlformats.org/officeDocument/2006/relationships" xmlns:p="http://schemas.openxmlformats.org/presentationml/2006/main">
   <p:cSld name="Slide 11">
-    <p:bg>
-      <p:bgPr>
-        <a:solidFill>
-          <a:srgbClr val="FFFFFF"/>
-        </a:solidFill>
-      </p:bgPr>
-    </p:bg>
     <p:spTree>
       <p:nvGrpSpPr>
         <p:cNvPr id="1" name=""/>
@@ -4207,7 +4265,29 @@
       </p:grpSpPr>
       <p:sp>
         <p:nvSpPr>
-          <p:cNvPr id="2" name="Text 0"/>
+          <p:cNvPr id="2" name="Shape 0"/>
+          <p:cNvSpPr/>
+          <p:nvPr/>
+        </p:nvSpPr>
+        <p:spPr>
+          <a:xfrm>
+            <a:off x="231343" y="194767"/>
+            <a:ext cx="11716207" cy="6473952"/>
+          </a:xfrm>
+          <a:prstGeom prst="roundRect">
+            <a:avLst>
+              <a:gd name="adj" fmla="val 3107"/>
+            </a:avLst>
+          </a:prstGeom>
+          <a:solidFill>
+            <a:srgbClr val="FFFFFF"/>
+          </a:solidFill>
+          <a:ln/>
+        </p:spPr>
+      </p:sp>
+      <p:sp>
+        <p:nvSpPr>
+          <p:cNvPr id="3" name="Text 1"/>
           <p:cNvSpPr/>
           <p:nvPr/>
         </p:nvSpPr>
@@ -4246,7 +4326,7 @@
       </p:sp>
       <p:sp>
         <p:nvSpPr>
-          <p:cNvPr id="3" name="Text 1"/>
+          <p:cNvPr id="4" name="Text 2"/>
           <p:cNvSpPr/>
           <p:nvPr/>
         </p:nvSpPr>
@@ -4285,7 +4365,7 @@
       </p:sp>
       <p:sp>
         <p:nvSpPr>
-          <p:cNvPr id="4" name="Shape 2"/>
+          <p:cNvPr id="5" name="Shape 3"/>
           <p:cNvSpPr/>
           <p:nvPr/>
         </p:nvSpPr>
@@ -4307,7 +4387,7 @@
       </p:sp>
       <p:sp>
         <p:nvSpPr>
-          <p:cNvPr id="5" name="Text 3"/>
+          <p:cNvPr id="6" name="Text 4"/>
           <p:cNvSpPr/>
           <p:nvPr/>
         </p:nvSpPr>
@@ -4346,7 +4426,7 @@
       </p:sp>
       <p:pic>
         <p:nvPicPr>
-          <p:cNvPr id="6" name="Image 0" descr="preencoded.png">    </p:cNvPr>
+          <p:cNvPr id="7" name="Image 0" descr="preencoded.png">    </p:cNvPr>
           <p:cNvPicPr>
             <a:picLocks noChangeAspect="1"/>
           </p:cNvPicPr>
@@ -4360,7 +4440,7 @@
         </p:blipFill>
         <p:spPr>
           <a:xfrm>
-            <a:off x="566928" y="6254496"/>
+            <a:off x="566928" y="6126480"/>
             <a:ext cx="1481328" cy="457200"/>
           </a:xfrm>
           <a:prstGeom prst="rect">
@@ -4370,7 +4450,7 @@
       </p:pic>
       <p:sp>
         <p:nvSpPr>
-          <p:cNvPr id="7" name="Shape 4"/>
+          <p:cNvPr id="8" name="Shape 5"/>
           <p:cNvSpPr/>
           <p:nvPr/>
         </p:nvSpPr>
@@ -4397,7 +4477,7 @@
       </p:sp>
       <p:sp>
         <p:nvSpPr>
-          <p:cNvPr id="8" name="Text 5"/>
+          <p:cNvPr id="9" name="Text 6"/>
           <p:cNvSpPr/>
           <p:nvPr/>
         </p:nvSpPr>
@@ -4436,7 +4516,7 @@
       </p:sp>
       <p:sp>
         <p:nvSpPr>
-          <p:cNvPr id="9" name="Shape 6"/>
+          <p:cNvPr id="10" name="Shape 7"/>
           <p:cNvSpPr/>
           <p:nvPr/>
         </p:nvSpPr>
@@ -4459,7 +4539,7 @@
       </p:sp>
       <p:sp>
         <p:nvSpPr>
-          <p:cNvPr id="10" name="Shape 7"/>
+          <p:cNvPr id="11" name="Shape 8"/>
           <p:cNvSpPr/>
           <p:nvPr/>
         </p:nvSpPr>
@@ -4479,7 +4559,7 @@
       </p:sp>
       <p:sp>
         <p:nvSpPr>
-          <p:cNvPr id="11" name="Shape 8"/>
+          <p:cNvPr id="12" name="Shape 9"/>
           <p:cNvSpPr/>
           <p:nvPr/>
         </p:nvSpPr>
@@ -4501,7 +4581,7 @@
       </p:sp>
       <p:sp>
         <p:nvSpPr>
-          <p:cNvPr id="12" name="Text 9"/>
+          <p:cNvPr id="13" name="Text 10"/>
           <p:cNvSpPr/>
           <p:nvPr/>
         </p:nvSpPr>
@@ -4540,7 +4620,7 @@
       </p:sp>
       <p:sp>
         <p:nvSpPr>
-          <p:cNvPr id="13" name="Shape 10"/>
+          <p:cNvPr id="14" name="Shape 11"/>
           <p:cNvSpPr/>
           <p:nvPr/>
         </p:nvSpPr>
@@ -4563,7 +4643,7 @@
       </p:sp>
       <p:sp>
         <p:nvSpPr>
-          <p:cNvPr id="14" name="Shape 11"/>
+          <p:cNvPr id="15" name="Shape 12"/>
           <p:cNvSpPr/>
           <p:nvPr/>
         </p:nvSpPr>
@@ -4583,7 +4663,7 @@
       </p:sp>
       <p:sp>
         <p:nvSpPr>
-          <p:cNvPr id="15" name="Shape 12"/>
+          <p:cNvPr id="16" name="Shape 13"/>
           <p:cNvSpPr/>
           <p:nvPr/>
         </p:nvSpPr>
@@ -4610,7 +4690,7 @@
       </p:sp>
       <p:sp>
         <p:nvSpPr>
-          <p:cNvPr id="16" name="Text 13"/>
+          <p:cNvPr id="17" name="Text 14"/>
           <p:cNvSpPr/>
           <p:nvPr/>
         </p:nvSpPr>
@@ -4649,7 +4729,7 @@
       </p:sp>
       <p:sp>
         <p:nvSpPr>
-          <p:cNvPr id="17" name="Shape 14"/>
+          <p:cNvPr id="18" name="Shape 15"/>
           <p:cNvSpPr/>
           <p:nvPr/>
         </p:nvSpPr>
@@ -4672,7 +4752,7 @@
       </p:sp>
       <p:sp>
         <p:nvSpPr>
-          <p:cNvPr id="18" name="Shape 15"/>
+          <p:cNvPr id="19" name="Shape 16"/>
           <p:cNvSpPr/>
           <p:nvPr/>
         </p:nvSpPr>
@@ -4692,7 +4772,7 @@
       </p:sp>
       <p:sp>
         <p:nvSpPr>
-          <p:cNvPr id="19" name="Shape 16"/>
+          <p:cNvPr id="20" name="Shape 17"/>
           <p:cNvSpPr/>
           <p:nvPr/>
         </p:nvSpPr>
@@ -4719,7 +4799,7 @@
       </p:sp>
       <p:sp>
         <p:nvSpPr>
-          <p:cNvPr id="20" name="Text 17"/>
+          <p:cNvPr id="21" name="Text 18"/>
           <p:cNvSpPr/>
           <p:nvPr/>
         </p:nvSpPr>
@@ -4758,7 +4838,7 @@
       </p:sp>
       <p:sp>
         <p:nvSpPr>
-          <p:cNvPr id="21" name="Shape 18"/>
+          <p:cNvPr id="22" name="Shape 19"/>
           <p:cNvSpPr/>
           <p:nvPr/>
         </p:nvSpPr>
@@ -4780,7 +4860,7 @@
       </p:sp>
       <p:sp>
         <p:nvSpPr>
-          <p:cNvPr id="22" name="Text 19"/>
+          <p:cNvPr id="23" name="Text 20"/>
           <p:cNvSpPr/>
           <p:nvPr/>
         </p:nvSpPr>
@@ -4819,7 +4899,7 @@
       </p:sp>
       <p:sp>
         <p:nvSpPr>
-          <p:cNvPr id="23" name="Text 20"/>
+          <p:cNvPr id="24" name="Text 21"/>
           <p:cNvSpPr/>
           <p:nvPr/>
         </p:nvSpPr>
@@ -4858,7 +4938,7 @@
       </p:sp>
       <p:sp>
         <p:nvSpPr>
-          <p:cNvPr id="24" name="Shape 21"/>
+          <p:cNvPr id="25" name="Shape 22"/>
           <p:cNvSpPr/>
           <p:nvPr/>
         </p:nvSpPr>
@@ -4880,7 +4960,7 @@
       </p:sp>
       <p:sp>
         <p:nvSpPr>
-          <p:cNvPr id="25" name="Text 22"/>
+          <p:cNvPr id="26" name="Text 23"/>
           <p:cNvSpPr/>
           <p:nvPr/>
         </p:nvSpPr>
@@ -4922,7 +5002,7 @@
       </p:sp>
       <p:sp>
         <p:nvSpPr>
-          <p:cNvPr id="26" name="Shape 23"/>
+          <p:cNvPr id="27" name="Shape 24"/>
           <p:cNvSpPr/>
           <p:nvPr/>
         </p:nvSpPr>
@@ -4944,7 +5024,7 @@
       </p:sp>
       <p:sp>
         <p:nvSpPr>
-          <p:cNvPr id="27" name="Text 24"/>
+          <p:cNvPr id="28" name="Text 25"/>
           <p:cNvSpPr/>
           <p:nvPr/>
         </p:nvSpPr>
@@ -4983,7 +5063,7 @@
       </p:sp>
       <p:sp>
         <p:nvSpPr>
-          <p:cNvPr id="28" name="Text 25"/>
+          <p:cNvPr id="29" name="Text 26"/>
           <p:cNvSpPr/>
           <p:nvPr/>
         </p:nvSpPr>
@@ -5035,7 +5115,7 @@
         </p:nvSpPr>
         <p:spPr>
           <a:xfrm>
-            <a:off x="11368735" y="6437376"/>
+            <a:off x="11368735" y="6327648"/>
             <a:ext cx="365760" cy="274320"/>
           </a:xfrm>
           <a:prstGeom prst="rect">
@@ -5082,13 +5162,6 @@
 <file path=ppt/slides/slide12.xml><?xml version="1.0" encoding="utf-8"?>
 <p:sld xmlns:a="http://schemas.openxmlformats.org/drawingml/2006/main" xmlns:r="http://schemas.openxmlformats.org/officeDocument/2006/relationships" xmlns:p="http://schemas.openxmlformats.org/presentationml/2006/main">
   <p:cSld name="Slide 12">
-    <p:bg>
-      <p:bgPr>
-        <a:solidFill>
-          <a:srgbClr val="FFFFFF"/>
-        </a:solidFill>
-      </p:bgPr>
-    </p:bg>
     <p:spTree>
       <p:nvGrpSpPr>
         <p:cNvPr id="1" name=""/>
@@ -5105,7 +5178,29 @@
       </p:grpSpPr>
       <p:sp>
         <p:nvSpPr>
-          <p:cNvPr id="2" name="Text 0"/>
+          <p:cNvPr id="2" name="Shape 0"/>
+          <p:cNvSpPr/>
+          <p:nvPr/>
+        </p:nvSpPr>
+        <p:spPr>
+          <a:xfrm>
+            <a:off x="231343" y="194767"/>
+            <a:ext cx="11716207" cy="6473952"/>
+          </a:xfrm>
+          <a:prstGeom prst="roundRect">
+            <a:avLst>
+              <a:gd name="adj" fmla="val 3107"/>
+            </a:avLst>
+          </a:prstGeom>
+          <a:solidFill>
+            <a:srgbClr val="FFFFFF"/>
+          </a:solidFill>
+          <a:ln/>
+        </p:spPr>
+      </p:sp>
+      <p:sp>
+        <p:nvSpPr>
+          <p:cNvPr id="3" name="Text 1"/>
           <p:cNvSpPr/>
           <p:nvPr/>
         </p:nvSpPr>
@@ -5144,7 +5239,7 @@
       </p:sp>
       <p:sp>
         <p:nvSpPr>
-          <p:cNvPr id="3" name="Text 1"/>
+          <p:cNvPr id="4" name="Text 2"/>
           <p:cNvSpPr/>
           <p:nvPr/>
         </p:nvSpPr>
@@ -5183,7 +5278,7 @@
       </p:sp>
       <p:sp>
         <p:nvSpPr>
-          <p:cNvPr id="4" name="Shape 2"/>
+          <p:cNvPr id="5" name="Shape 3"/>
           <p:cNvSpPr/>
           <p:nvPr/>
         </p:nvSpPr>
@@ -5205,7 +5300,7 @@
       </p:sp>
       <p:sp>
         <p:nvSpPr>
-          <p:cNvPr id="5" name="Text 3"/>
+          <p:cNvPr id="6" name="Text 4"/>
           <p:cNvSpPr/>
           <p:nvPr/>
         </p:nvSpPr>
@@ -5244,7 +5339,7 @@
       </p:sp>
       <p:pic>
         <p:nvPicPr>
-          <p:cNvPr id="6" name="Image 0" descr="preencoded.png">    </p:cNvPr>
+          <p:cNvPr id="7" name="Image 0" descr="preencoded.png">    </p:cNvPr>
           <p:cNvPicPr>
             <a:picLocks noChangeAspect="1"/>
           </p:cNvPicPr>
@@ -5258,7 +5353,7 @@
         </p:blipFill>
         <p:spPr>
           <a:xfrm>
-            <a:off x="566928" y="6254496"/>
+            <a:off x="566928" y="6126480"/>
             <a:ext cx="1481328" cy="457200"/>
           </a:xfrm>
           <a:prstGeom prst="rect">
@@ -5268,7 +5363,7 @@
       </p:pic>
       <p:sp>
         <p:nvSpPr>
-          <p:cNvPr id="7" name="Shape 4"/>
+          <p:cNvPr id="8" name="Shape 5"/>
           <p:cNvSpPr/>
           <p:nvPr/>
         </p:nvSpPr>
@@ -5290,7 +5385,7 @@
       </p:sp>
       <p:sp>
         <p:nvSpPr>
-          <p:cNvPr id="8" name="Text 5"/>
+          <p:cNvPr id="9" name="Text 6"/>
           <p:cNvSpPr/>
           <p:nvPr/>
         </p:nvSpPr>
@@ -5329,7 +5424,7 @@
       </p:sp>
       <p:sp>
         <p:nvSpPr>
-          <p:cNvPr id="9" name="Text 6"/>
+          <p:cNvPr id="10" name="Text 7"/>
           <p:cNvSpPr/>
           <p:nvPr/>
         </p:nvSpPr>
@@ -5371,7 +5466,7 @@
       </p:sp>
       <p:sp>
         <p:nvSpPr>
-          <p:cNvPr id="10" name="Shape 7"/>
+          <p:cNvPr id="11" name="Shape 8"/>
           <p:cNvSpPr/>
           <p:nvPr/>
         </p:nvSpPr>
@@ -5398,7 +5493,7 @@
       </p:sp>
       <p:sp>
         <p:nvSpPr>
-          <p:cNvPr id="11" name="Text 8"/>
+          <p:cNvPr id="12" name="Text 9"/>
           <p:cNvSpPr/>
           <p:nvPr/>
         </p:nvSpPr>
@@ -5437,7 +5532,7 @@
       </p:sp>
       <p:sp>
         <p:nvSpPr>
-          <p:cNvPr id="12" name="Text 9"/>
+          <p:cNvPr id="13" name="Text 10"/>
           <p:cNvSpPr/>
           <p:nvPr/>
         </p:nvSpPr>
@@ -5479,7 +5574,7 @@
       </p:sp>
       <p:sp>
         <p:nvSpPr>
-          <p:cNvPr id="13" name="Shape 10"/>
+          <p:cNvPr id="14" name="Shape 11"/>
           <p:cNvSpPr/>
           <p:nvPr/>
         </p:nvSpPr>
@@ -5504,7 +5599,7 @@
       </p:sp>
       <p:sp>
         <p:nvSpPr>
-          <p:cNvPr id="14" name="Text 11"/>
+          <p:cNvPr id="15" name="Text 12"/>
           <p:cNvSpPr/>
           <p:nvPr/>
         </p:nvSpPr>
@@ -5543,7 +5638,7 @@
       </p:sp>
       <p:sp>
         <p:nvSpPr>
-          <p:cNvPr id="15" name="Shape 12"/>
+          <p:cNvPr id="16" name="Shape 13"/>
           <p:cNvSpPr/>
           <p:nvPr/>
         </p:nvSpPr>
@@ -5568,7 +5663,7 @@
       </p:sp>
       <p:sp>
         <p:nvSpPr>
-          <p:cNvPr id="16" name="Text 13"/>
+          <p:cNvPr id="17" name="Text 14"/>
           <p:cNvSpPr/>
           <p:nvPr/>
         </p:nvSpPr>
@@ -5607,7 +5702,7 @@
       </p:sp>
       <p:sp>
         <p:nvSpPr>
-          <p:cNvPr id="17" name="Text 14"/>
+          <p:cNvPr id="18" name="Text 15"/>
           <p:cNvSpPr/>
           <p:nvPr/>
         </p:nvSpPr>
@@ -5646,7 +5741,7 @@
       </p:sp>
       <p:sp>
         <p:nvSpPr>
-          <p:cNvPr id="18" name="Shape 15"/>
+          <p:cNvPr id="19" name="Shape 16"/>
           <p:cNvSpPr/>
           <p:nvPr/>
         </p:nvSpPr>
@@ -5668,7 +5763,7 @@
       </p:sp>
       <p:sp>
         <p:nvSpPr>
-          <p:cNvPr id="19" name="Text 16"/>
+          <p:cNvPr id="20" name="Text 17"/>
           <p:cNvSpPr/>
           <p:nvPr/>
         </p:nvSpPr>
@@ -5707,7 +5802,7 @@
       </p:sp>
       <p:sp>
         <p:nvSpPr>
-          <p:cNvPr id="20" name="Text 17"/>
+          <p:cNvPr id="21" name="Text 18"/>
           <p:cNvSpPr/>
           <p:nvPr/>
         </p:nvSpPr>
@@ -5759,7 +5854,7 @@
         </p:nvSpPr>
         <p:spPr>
           <a:xfrm>
-            <a:off x="11368735" y="6437376"/>
+            <a:off x="11368735" y="6327648"/>
             <a:ext cx="365760" cy="274320"/>
           </a:xfrm>
           <a:prstGeom prst="rect">
@@ -5806,13 +5901,6 @@
 <file path=ppt/slides/slide13.xml><?xml version="1.0" encoding="utf-8"?>
 <p:sld xmlns:a="http://schemas.openxmlformats.org/drawingml/2006/main" xmlns:r="http://schemas.openxmlformats.org/officeDocument/2006/relationships" xmlns:p="http://schemas.openxmlformats.org/presentationml/2006/main">
   <p:cSld name="Slide 13">
-    <p:bg>
-      <p:bgPr>
-        <a:solidFill>
-          <a:srgbClr val="FFFFFF"/>
-        </a:solidFill>
-      </p:bgPr>
-    </p:bg>
     <p:spTree>
       <p:nvGrpSpPr>
         <p:cNvPr id="1" name=""/>
@@ -5829,7 +5917,29 @@
       </p:grpSpPr>
       <p:sp>
         <p:nvSpPr>
-          <p:cNvPr id="2" name="Text 0"/>
+          <p:cNvPr id="2" name="Shape 0"/>
+          <p:cNvSpPr/>
+          <p:nvPr/>
+        </p:nvSpPr>
+        <p:spPr>
+          <a:xfrm>
+            <a:off x="231343" y="194767"/>
+            <a:ext cx="11716207" cy="6473952"/>
+          </a:xfrm>
+          <a:prstGeom prst="roundRect">
+            <a:avLst>
+              <a:gd name="adj" fmla="val 3107"/>
+            </a:avLst>
+          </a:prstGeom>
+          <a:solidFill>
+            <a:srgbClr val="FFFFFF"/>
+          </a:solidFill>
+          <a:ln/>
+        </p:spPr>
+      </p:sp>
+      <p:sp>
+        <p:nvSpPr>
+          <p:cNvPr id="3" name="Text 1"/>
           <p:cNvSpPr/>
           <p:nvPr/>
         </p:nvSpPr>
@@ -5868,7 +5978,7 @@
       </p:sp>
       <p:sp>
         <p:nvSpPr>
-          <p:cNvPr id="3" name="Text 1"/>
+          <p:cNvPr id="4" name="Text 2"/>
           <p:cNvSpPr/>
           <p:nvPr/>
         </p:nvSpPr>
@@ -5907,7 +6017,7 @@
       </p:sp>
       <p:sp>
         <p:nvSpPr>
-          <p:cNvPr id="4" name="Shape 2"/>
+          <p:cNvPr id="5" name="Shape 3"/>
           <p:cNvSpPr/>
           <p:nvPr/>
         </p:nvSpPr>
@@ -5929,7 +6039,7 @@
       </p:sp>
       <p:sp>
         <p:nvSpPr>
-          <p:cNvPr id="5" name="Text 3"/>
+          <p:cNvPr id="6" name="Text 4"/>
           <p:cNvSpPr/>
           <p:nvPr/>
         </p:nvSpPr>
@@ -5968,7 +6078,7 @@
       </p:sp>
       <p:pic>
         <p:nvPicPr>
-          <p:cNvPr id="6" name="Image 0" descr="preencoded.png">    </p:cNvPr>
+          <p:cNvPr id="7" name="Image 0" descr="preencoded.png">    </p:cNvPr>
           <p:cNvPicPr>
             <a:picLocks noChangeAspect="1"/>
           </p:cNvPicPr>
@@ -5982,7 +6092,7 @@
         </p:blipFill>
         <p:spPr>
           <a:xfrm>
-            <a:off x="566928" y="6254496"/>
+            <a:off x="566928" y="6126480"/>
             <a:ext cx="1481328" cy="457200"/>
           </a:xfrm>
           <a:prstGeom prst="rect">
@@ -5992,7 +6102,7 @@
       </p:pic>
       <p:sp>
         <p:nvSpPr>
-          <p:cNvPr id="7" name="Shape 4"/>
+          <p:cNvPr id="8" name="Shape 5"/>
           <p:cNvSpPr/>
           <p:nvPr/>
         </p:nvSpPr>
@@ -6014,7 +6124,7 @@
       </p:sp>
       <p:sp>
         <p:nvSpPr>
-          <p:cNvPr id="8" name="Text 5"/>
+          <p:cNvPr id="9" name="Text 6"/>
           <p:cNvSpPr/>
           <p:nvPr/>
         </p:nvSpPr>
@@ -6053,7 +6163,7 @@
       </p:sp>
       <p:sp>
         <p:nvSpPr>
-          <p:cNvPr id="9" name="Text 6"/>
+          <p:cNvPr id="10" name="Text 7"/>
           <p:cNvSpPr/>
           <p:nvPr/>
         </p:nvSpPr>
@@ -6092,7 +6202,7 @@
       </p:sp>
       <p:sp>
         <p:nvSpPr>
-          <p:cNvPr id="10" name="Shape 7"/>
+          <p:cNvPr id="11" name="Shape 8"/>
           <p:cNvSpPr/>
           <p:nvPr/>
         </p:nvSpPr>
@@ -6114,7 +6224,7 @@
       </p:sp>
       <p:sp>
         <p:nvSpPr>
-          <p:cNvPr id="11" name="Text 8"/>
+          <p:cNvPr id="12" name="Text 9"/>
           <p:cNvSpPr/>
           <p:nvPr/>
         </p:nvSpPr>
@@ -6153,7 +6263,7 @@
       </p:sp>
       <p:sp>
         <p:nvSpPr>
-          <p:cNvPr id="12" name="Text 9"/>
+          <p:cNvPr id="13" name="Text 10"/>
           <p:cNvSpPr/>
           <p:nvPr/>
         </p:nvSpPr>
@@ -6192,7 +6302,7 @@
       </p:sp>
       <p:sp>
         <p:nvSpPr>
-          <p:cNvPr id="13" name="Shape 10"/>
+          <p:cNvPr id="14" name="Shape 11"/>
           <p:cNvSpPr/>
           <p:nvPr/>
         </p:nvSpPr>
@@ -6219,7 +6329,7 @@
       </p:sp>
       <p:sp>
         <p:nvSpPr>
-          <p:cNvPr id="14" name="Text 11"/>
+          <p:cNvPr id="15" name="Text 12"/>
           <p:cNvSpPr/>
           <p:nvPr/>
         </p:nvSpPr>
@@ -6341,7 +6451,7 @@
       </p:sp>
       <p:sp>
         <p:nvSpPr>
-          <p:cNvPr id="15" name="Shape 12"/>
+          <p:cNvPr id="16" name="Shape 13"/>
           <p:cNvSpPr/>
           <p:nvPr/>
         </p:nvSpPr>
@@ -6363,7 +6473,7 @@
       </p:sp>
       <p:sp>
         <p:nvSpPr>
-          <p:cNvPr id="16" name="Text 13"/>
+          <p:cNvPr id="17" name="Text 14"/>
           <p:cNvSpPr/>
           <p:nvPr/>
         </p:nvSpPr>
@@ -6405,7 +6515,7 @@
       </p:sp>
       <p:sp>
         <p:nvSpPr>
-          <p:cNvPr id="17" name="Shape 14"/>
+          <p:cNvPr id="18" name="Shape 15"/>
           <p:cNvSpPr/>
           <p:nvPr/>
         </p:nvSpPr>
@@ -6427,7 +6537,7 @@
       </p:sp>
       <p:sp>
         <p:nvSpPr>
-          <p:cNvPr id="18" name="Text 15"/>
+          <p:cNvPr id="19" name="Text 16"/>
           <p:cNvSpPr/>
           <p:nvPr/>
         </p:nvSpPr>
@@ -6466,7 +6576,7 @@
       </p:sp>
       <p:sp>
         <p:nvSpPr>
-          <p:cNvPr id="19" name="Text 16"/>
+          <p:cNvPr id="20" name="Text 17"/>
           <p:cNvSpPr/>
           <p:nvPr/>
         </p:nvSpPr>
@@ -6518,7 +6628,7 @@
         </p:nvSpPr>
         <p:spPr>
           <a:xfrm>
-            <a:off x="11368735" y="6437376"/>
+            <a:off x="11368735" y="6327648"/>
             <a:ext cx="365760" cy="274320"/>
           </a:xfrm>
           <a:prstGeom prst="rect">
@@ -6565,13 +6675,6 @@
 <file path=ppt/slides/slide14.xml><?xml version="1.0" encoding="utf-8"?>
 <p:sld xmlns:a="http://schemas.openxmlformats.org/drawingml/2006/main" xmlns:r="http://schemas.openxmlformats.org/officeDocument/2006/relationships" xmlns:p="http://schemas.openxmlformats.org/presentationml/2006/main">
   <p:cSld name="Slide 14">
-    <p:bg>
-      <p:bgPr>
-        <a:solidFill>
-          <a:srgbClr val="FFFFFF"/>
-        </a:solidFill>
-      </p:bgPr>
-    </p:bg>
     <p:spTree>
       <p:nvGrpSpPr>
         <p:cNvPr id="1" name=""/>
@@ -6588,7 +6691,29 @@
       </p:grpSpPr>
       <p:sp>
         <p:nvSpPr>
-          <p:cNvPr id="2" name="Text 0"/>
+          <p:cNvPr id="2" name="Shape 0"/>
+          <p:cNvSpPr/>
+          <p:nvPr/>
+        </p:nvSpPr>
+        <p:spPr>
+          <a:xfrm>
+            <a:off x="231343" y="194767"/>
+            <a:ext cx="11716207" cy="6473952"/>
+          </a:xfrm>
+          <a:prstGeom prst="roundRect">
+            <a:avLst>
+              <a:gd name="adj" fmla="val 3107"/>
+            </a:avLst>
+          </a:prstGeom>
+          <a:solidFill>
+            <a:srgbClr val="FFFFFF"/>
+          </a:solidFill>
+          <a:ln/>
+        </p:spPr>
+      </p:sp>
+      <p:sp>
+        <p:nvSpPr>
+          <p:cNvPr id="3" name="Text 1"/>
           <p:cNvSpPr/>
           <p:nvPr/>
         </p:nvSpPr>
@@ -6627,7 +6752,7 @@
       </p:sp>
       <p:sp>
         <p:nvSpPr>
-          <p:cNvPr id="3" name="Text 1"/>
+          <p:cNvPr id="4" name="Text 2"/>
           <p:cNvSpPr/>
           <p:nvPr/>
         </p:nvSpPr>
@@ -6666,7 +6791,7 @@
       </p:sp>
       <p:sp>
         <p:nvSpPr>
-          <p:cNvPr id="4" name="Shape 2"/>
+          <p:cNvPr id="5" name="Shape 3"/>
           <p:cNvSpPr/>
           <p:nvPr/>
         </p:nvSpPr>
@@ -6688,7 +6813,7 @@
       </p:sp>
       <p:sp>
         <p:nvSpPr>
-          <p:cNvPr id="5" name="Text 3"/>
+          <p:cNvPr id="6" name="Text 4"/>
           <p:cNvSpPr/>
           <p:nvPr/>
         </p:nvSpPr>
@@ -6727,7 +6852,7 @@
       </p:sp>
       <p:pic>
         <p:nvPicPr>
-          <p:cNvPr id="6" name="Image 0" descr="preencoded.png">    </p:cNvPr>
+          <p:cNvPr id="7" name="Image 0" descr="preencoded.png">    </p:cNvPr>
           <p:cNvPicPr>
             <a:picLocks noChangeAspect="1"/>
           </p:cNvPicPr>
@@ -6741,7 +6866,7 @@
         </p:blipFill>
         <p:spPr>
           <a:xfrm>
-            <a:off x="566928" y="6254496"/>
+            <a:off x="566928" y="6126480"/>
             <a:ext cx="1481328" cy="457200"/>
           </a:xfrm>
           <a:prstGeom prst="rect">
@@ -6751,7 +6876,7 @@
       </p:pic>
       <p:sp>
         <p:nvSpPr>
-          <p:cNvPr id="7" name="Shape 4"/>
+          <p:cNvPr id="8" name="Shape 5"/>
           <p:cNvSpPr/>
           <p:nvPr/>
         </p:nvSpPr>
@@ -6778,7 +6903,7 @@
       </p:sp>
       <p:sp>
         <p:nvSpPr>
-          <p:cNvPr id="8" name="Text 5"/>
+          <p:cNvPr id="9" name="Text 6"/>
           <p:cNvSpPr/>
           <p:nvPr/>
         </p:nvSpPr>
@@ -6900,7 +7025,7 @@
       </p:sp>
       <p:sp>
         <p:nvSpPr>
-          <p:cNvPr id="9" name="Shape 6"/>
+          <p:cNvPr id="10" name="Shape 7"/>
           <p:cNvSpPr/>
           <p:nvPr/>
         </p:nvSpPr>
@@ -6927,7 +7052,7 @@
       </p:sp>
       <p:sp>
         <p:nvSpPr>
-          <p:cNvPr id="10" name="Text 7"/>
+          <p:cNvPr id="11" name="Text 8"/>
           <p:cNvSpPr/>
           <p:nvPr/>
         </p:nvSpPr>
@@ -6966,7 +7091,7 @@
       </p:sp>
       <p:sp>
         <p:nvSpPr>
-          <p:cNvPr id="11" name="Text 8"/>
+          <p:cNvPr id="12" name="Text 9"/>
           <p:cNvSpPr/>
           <p:nvPr/>
         </p:nvSpPr>
@@ -7005,7 +7130,7 @@
       </p:sp>
       <p:sp>
         <p:nvSpPr>
-          <p:cNvPr id="12" name="Text 9"/>
+          <p:cNvPr id="13" name="Text 10"/>
           <p:cNvSpPr/>
           <p:nvPr/>
         </p:nvSpPr>
@@ -7044,7 +7169,7 @@
       </p:sp>
       <p:sp>
         <p:nvSpPr>
-          <p:cNvPr id="13" name="Shape 10"/>
+          <p:cNvPr id="14" name="Shape 11"/>
           <p:cNvSpPr/>
           <p:nvPr/>
         </p:nvSpPr>
@@ -7066,7 +7191,7 @@
       </p:sp>
       <p:sp>
         <p:nvSpPr>
-          <p:cNvPr id="14" name="Text 11"/>
+          <p:cNvPr id="15" name="Text 12"/>
           <p:cNvSpPr/>
           <p:nvPr/>
         </p:nvSpPr>
@@ -7105,7 +7230,7 @@
       </p:sp>
       <p:sp>
         <p:nvSpPr>
-          <p:cNvPr id="15" name="Text 12"/>
+          <p:cNvPr id="16" name="Text 13"/>
           <p:cNvSpPr/>
           <p:nvPr/>
         </p:nvSpPr>
@@ -7147,7 +7272,7 @@
       </p:sp>
       <p:sp>
         <p:nvSpPr>
-          <p:cNvPr id="16" name="Shape 13"/>
+          <p:cNvPr id="17" name="Shape 14"/>
           <p:cNvSpPr/>
           <p:nvPr/>
         </p:nvSpPr>
@@ -7169,7 +7294,7 @@
       </p:sp>
       <p:sp>
         <p:nvSpPr>
-          <p:cNvPr id="17" name="Text 14"/>
+          <p:cNvPr id="18" name="Text 15"/>
           <p:cNvSpPr/>
           <p:nvPr/>
         </p:nvSpPr>
@@ -7221,7 +7346,7 @@
         </p:nvSpPr>
         <p:spPr>
           <a:xfrm>
-            <a:off x="11368735" y="6437376"/>
+            <a:off x="11368735" y="6327648"/>
             <a:ext cx="365760" cy="274320"/>
           </a:xfrm>
           <a:prstGeom prst="rect">
@@ -7268,13 +7393,6 @@
 <file path=ppt/slides/slide15.xml><?xml version="1.0" encoding="utf-8"?>
 <p:sld xmlns:a="http://schemas.openxmlformats.org/drawingml/2006/main" xmlns:r="http://schemas.openxmlformats.org/officeDocument/2006/relationships" xmlns:p="http://schemas.openxmlformats.org/presentationml/2006/main">
   <p:cSld name="Slide 15">
-    <p:bg>
-      <p:bgPr>
-        <a:solidFill>
-          <a:srgbClr val="FFFFFF"/>
-        </a:solidFill>
-      </p:bgPr>
-    </p:bg>
     <p:spTree>
       <p:nvGrpSpPr>
         <p:cNvPr id="1" name=""/>
@@ -7291,7 +7409,29 @@
       </p:grpSpPr>
       <p:sp>
         <p:nvSpPr>
-          <p:cNvPr id="2" name="Text 0"/>
+          <p:cNvPr id="2" name="Shape 0"/>
+          <p:cNvSpPr/>
+          <p:nvPr/>
+        </p:nvSpPr>
+        <p:spPr>
+          <a:xfrm>
+            <a:off x="231343" y="194767"/>
+            <a:ext cx="11716207" cy="6473952"/>
+          </a:xfrm>
+          <a:prstGeom prst="roundRect">
+            <a:avLst>
+              <a:gd name="adj" fmla="val 3107"/>
+            </a:avLst>
+          </a:prstGeom>
+          <a:solidFill>
+            <a:srgbClr val="FFFFFF"/>
+          </a:solidFill>
+          <a:ln/>
+        </p:spPr>
+      </p:sp>
+      <p:sp>
+        <p:nvSpPr>
+          <p:cNvPr id="3" name="Text 1"/>
           <p:cNvSpPr/>
           <p:nvPr/>
         </p:nvSpPr>
@@ -7330,7 +7470,7 @@
       </p:sp>
       <p:sp>
         <p:nvSpPr>
-          <p:cNvPr id="3" name="Text 1"/>
+          <p:cNvPr id="4" name="Text 2"/>
           <p:cNvSpPr/>
           <p:nvPr/>
         </p:nvSpPr>
@@ -7369,7 +7509,7 @@
       </p:sp>
       <p:sp>
         <p:nvSpPr>
-          <p:cNvPr id="4" name="Shape 2"/>
+          <p:cNvPr id="5" name="Shape 3"/>
           <p:cNvSpPr/>
           <p:nvPr/>
         </p:nvSpPr>
@@ -7391,7 +7531,7 @@
       </p:sp>
       <p:sp>
         <p:nvSpPr>
-          <p:cNvPr id="5" name="Text 3"/>
+          <p:cNvPr id="6" name="Text 4"/>
           <p:cNvSpPr/>
           <p:nvPr/>
         </p:nvSpPr>
@@ -7430,7 +7570,7 @@
       </p:sp>
       <p:pic>
         <p:nvPicPr>
-          <p:cNvPr id="6" name="Image 0" descr="preencoded.png">    </p:cNvPr>
+          <p:cNvPr id="7" name="Image 0" descr="preencoded.png">    </p:cNvPr>
           <p:cNvPicPr>
             <a:picLocks noChangeAspect="1"/>
           </p:cNvPicPr>
@@ -7444,7 +7584,7 @@
         </p:blipFill>
         <p:spPr>
           <a:xfrm>
-            <a:off x="566928" y="6254496"/>
+            <a:off x="566928" y="6126480"/>
             <a:ext cx="1481328" cy="457200"/>
           </a:xfrm>
           <a:prstGeom prst="rect">
@@ -7454,7 +7594,7 @@
       </p:pic>
       <p:sp>
         <p:nvSpPr>
-          <p:cNvPr id="7" name="Shape 4"/>
+          <p:cNvPr id="8" name="Shape 5"/>
           <p:cNvSpPr/>
           <p:nvPr/>
         </p:nvSpPr>
@@ -7481,7 +7621,7 @@
       </p:sp>
       <p:sp>
         <p:nvSpPr>
-          <p:cNvPr id="8" name="Text 5"/>
+          <p:cNvPr id="9" name="Text 6"/>
           <p:cNvSpPr/>
           <p:nvPr/>
         </p:nvSpPr>
@@ -7523,7 +7663,7 @@
       </p:sp>
       <p:sp>
         <p:nvSpPr>
-          <p:cNvPr id="9" name="Text 6"/>
+          <p:cNvPr id="10" name="Text 7"/>
           <p:cNvSpPr/>
           <p:nvPr/>
         </p:nvSpPr>
@@ -7562,7 +7702,7 @@
       </p:sp>
       <p:sp>
         <p:nvSpPr>
-          <p:cNvPr id="10" name="Shape 7"/>
+          <p:cNvPr id="11" name="Shape 8"/>
           <p:cNvSpPr/>
           <p:nvPr/>
         </p:nvSpPr>
@@ -7584,7 +7724,7 @@
       </p:sp>
       <p:sp>
         <p:nvSpPr>
-          <p:cNvPr id="11" name="Text 8"/>
+          <p:cNvPr id="12" name="Text 9"/>
           <p:cNvSpPr/>
           <p:nvPr/>
         </p:nvSpPr>
@@ -7623,7 +7763,7 @@
       </p:sp>
       <p:sp>
         <p:nvSpPr>
-          <p:cNvPr id="12" name="Text 9"/>
+          <p:cNvPr id="13" name="Text 10"/>
           <p:cNvSpPr/>
           <p:nvPr/>
         </p:nvSpPr>
@@ -7662,7 +7802,7 @@
       </p:sp>
       <p:sp>
         <p:nvSpPr>
-          <p:cNvPr id="13" name="Shape 10"/>
+          <p:cNvPr id="14" name="Shape 11"/>
           <p:cNvSpPr/>
           <p:nvPr/>
         </p:nvSpPr>
@@ -7684,7 +7824,7 @@
       </p:sp>
       <p:sp>
         <p:nvSpPr>
-          <p:cNvPr id="14" name="Text 11"/>
+          <p:cNvPr id="15" name="Text 12"/>
           <p:cNvSpPr/>
           <p:nvPr/>
         </p:nvSpPr>
@@ -7723,7 +7863,7 @@
       </p:sp>
       <p:sp>
         <p:nvSpPr>
-          <p:cNvPr id="15" name="Shape 12"/>
+          <p:cNvPr id="16" name="Shape 13"/>
           <p:cNvSpPr/>
           <p:nvPr/>
         </p:nvSpPr>
@@ -7745,7 +7885,7 @@
       </p:sp>
       <p:sp>
         <p:nvSpPr>
-          <p:cNvPr id="16" name="Text 13"/>
+          <p:cNvPr id="17" name="Text 14"/>
           <p:cNvSpPr/>
           <p:nvPr/>
         </p:nvSpPr>
@@ -7787,7 +7927,7 @@
       </p:sp>
       <p:sp>
         <p:nvSpPr>
-          <p:cNvPr id="17" name="Shape 14"/>
+          <p:cNvPr id="18" name="Shape 15"/>
           <p:cNvSpPr/>
           <p:nvPr/>
         </p:nvSpPr>
@@ -7809,7 +7949,7 @@
       </p:sp>
       <p:sp>
         <p:nvSpPr>
-          <p:cNvPr id="18" name="Text 15"/>
+          <p:cNvPr id="19" name="Text 16"/>
           <p:cNvSpPr/>
           <p:nvPr/>
         </p:nvSpPr>
@@ -7848,7 +7988,7 @@
       </p:sp>
       <p:sp>
         <p:nvSpPr>
-          <p:cNvPr id="19" name="Text 16"/>
+          <p:cNvPr id="20" name="Text 17"/>
           <p:cNvSpPr/>
           <p:nvPr/>
         </p:nvSpPr>
@@ -7900,7 +8040,7 @@
         </p:nvSpPr>
         <p:spPr>
           <a:xfrm>
-            <a:off x="11368735" y="6437376"/>
+            <a:off x="11368735" y="6327648"/>
             <a:ext cx="365760" cy="274320"/>
           </a:xfrm>
           <a:prstGeom prst="rect">
@@ -7947,13 +8087,6 @@
 <file path=ppt/slides/slide16.xml><?xml version="1.0" encoding="utf-8"?>
 <p:sld xmlns:a="http://schemas.openxmlformats.org/drawingml/2006/main" xmlns:r="http://schemas.openxmlformats.org/officeDocument/2006/relationships" xmlns:p="http://schemas.openxmlformats.org/presentationml/2006/main">
   <p:cSld name="Slide 16">
-    <p:bg>
-      <p:bgPr>
-        <a:solidFill>
-          <a:srgbClr val="FFFFFF"/>
-        </a:solidFill>
-      </p:bgPr>
-    </p:bg>
     <p:spTree>
       <p:nvGrpSpPr>
         <p:cNvPr id="1" name=""/>
@@ -7970,7 +8103,29 @@
       </p:grpSpPr>
       <p:sp>
         <p:nvSpPr>
-          <p:cNvPr id="2" name="Text 0"/>
+          <p:cNvPr id="2" name="Shape 0"/>
+          <p:cNvSpPr/>
+          <p:nvPr/>
+        </p:nvSpPr>
+        <p:spPr>
+          <a:xfrm>
+            <a:off x="231343" y="194767"/>
+            <a:ext cx="11716207" cy="6473952"/>
+          </a:xfrm>
+          <a:prstGeom prst="roundRect">
+            <a:avLst>
+              <a:gd name="adj" fmla="val 3107"/>
+            </a:avLst>
+          </a:prstGeom>
+          <a:solidFill>
+            <a:srgbClr val="FFFFFF"/>
+          </a:solidFill>
+          <a:ln/>
+        </p:spPr>
+      </p:sp>
+      <p:sp>
+        <p:nvSpPr>
+          <p:cNvPr id="3" name="Text 1"/>
           <p:cNvSpPr/>
           <p:nvPr/>
         </p:nvSpPr>
@@ -8009,7 +8164,7 @@
       </p:sp>
       <p:sp>
         <p:nvSpPr>
-          <p:cNvPr id="3" name="Text 1"/>
+          <p:cNvPr id="4" name="Text 2"/>
           <p:cNvSpPr/>
           <p:nvPr/>
         </p:nvSpPr>
@@ -8048,7 +8203,7 @@
       </p:sp>
       <p:sp>
         <p:nvSpPr>
-          <p:cNvPr id="4" name="Shape 2"/>
+          <p:cNvPr id="5" name="Shape 3"/>
           <p:cNvSpPr/>
           <p:nvPr/>
         </p:nvSpPr>
@@ -8070,7 +8225,7 @@
       </p:sp>
       <p:sp>
         <p:nvSpPr>
-          <p:cNvPr id="5" name="Text 3"/>
+          <p:cNvPr id="6" name="Text 4"/>
           <p:cNvSpPr/>
           <p:nvPr/>
         </p:nvSpPr>
@@ -8109,7 +8264,7 @@
       </p:sp>
       <p:sp>
         <p:nvSpPr>
-          <p:cNvPr id="6" name="Shape 4"/>
+          <p:cNvPr id="7" name="Shape 5"/>
           <p:cNvSpPr/>
           <p:nvPr/>
         </p:nvSpPr>
@@ -8131,7 +8286,7 @@
       </p:sp>
       <p:sp>
         <p:nvSpPr>
-          <p:cNvPr id="7" name="Text 5"/>
+          <p:cNvPr id="8" name="Text 6"/>
           <p:cNvSpPr/>
           <p:nvPr/>
         </p:nvSpPr>
@@ -8170,7 +8325,7 @@
       </p:sp>
       <p:pic>
         <p:nvPicPr>
-          <p:cNvPr id="8" name="Image 0" descr="preencoded.png">    </p:cNvPr>
+          <p:cNvPr id="9" name="Image 0" descr="preencoded.png">    </p:cNvPr>
           <p:cNvPicPr>
             <a:picLocks noChangeAspect="1"/>
           </p:cNvPicPr>
@@ -8184,7 +8339,7 @@
         </p:blipFill>
         <p:spPr>
           <a:xfrm>
-            <a:off x="566928" y="6254496"/>
+            <a:off x="566928" y="6126480"/>
             <a:ext cx="1481328" cy="457200"/>
           </a:xfrm>
           <a:prstGeom prst="rect">
@@ -8194,7 +8349,7 @@
       </p:pic>
       <p:sp>
         <p:nvSpPr>
-          <p:cNvPr id="9" name="Shape 6"/>
+          <p:cNvPr id="10" name="Shape 7"/>
           <p:cNvSpPr/>
           <p:nvPr/>
         </p:nvSpPr>
@@ -8221,7 +8376,7 @@
       </p:sp>
       <p:sp>
         <p:nvSpPr>
-          <p:cNvPr id="10" name="Text 7"/>
+          <p:cNvPr id="11" name="Text 8"/>
           <p:cNvSpPr/>
           <p:nvPr/>
         </p:nvSpPr>
@@ -8260,7 +8415,7 @@
       </p:sp>
       <p:sp>
         <p:nvSpPr>
-          <p:cNvPr id="11" name="Text 8"/>
+          <p:cNvPr id="12" name="Text 9"/>
           <p:cNvSpPr/>
           <p:nvPr/>
         </p:nvSpPr>
@@ -8299,7 +8454,7 @@
       </p:sp>
       <p:sp>
         <p:nvSpPr>
-          <p:cNvPr id="12" name="Shape 9"/>
+          <p:cNvPr id="13" name="Shape 10"/>
           <p:cNvSpPr/>
           <p:nvPr/>
         </p:nvSpPr>
@@ -8321,7 +8476,7 @@
       </p:sp>
       <p:sp>
         <p:nvSpPr>
-          <p:cNvPr id="13" name="Text 10"/>
+          <p:cNvPr id="14" name="Text 11"/>
           <p:cNvSpPr/>
           <p:nvPr/>
         </p:nvSpPr>
@@ -8360,7 +8515,7 @@
       </p:sp>
       <p:sp>
         <p:nvSpPr>
-          <p:cNvPr id="14" name="Text 11"/>
+          <p:cNvPr id="15" name="Text 12"/>
           <p:cNvSpPr/>
           <p:nvPr/>
         </p:nvSpPr>
@@ -8399,7 +8554,7 @@
       </p:sp>
       <p:sp>
         <p:nvSpPr>
-          <p:cNvPr id="15" name="Shape 12"/>
+          <p:cNvPr id="16" name="Shape 13"/>
           <p:cNvSpPr/>
           <p:nvPr/>
         </p:nvSpPr>
@@ -8421,7 +8576,7 @@
       </p:sp>
       <p:sp>
         <p:nvSpPr>
-          <p:cNvPr id="16" name="Text 13"/>
+          <p:cNvPr id="17" name="Text 14"/>
           <p:cNvSpPr/>
           <p:nvPr/>
         </p:nvSpPr>
@@ -8460,7 +8615,7 @@
       </p:sp>
       <p:sp>
         <p:nvSpPr>
-          <p:cNvPr id="17" name="Text 14"/>
+          <p:cNvPr id="18" name="Text 15"/>
           <p:cNvSpPr/>
           <p:nvPr/>
         </p:nvSpPr>
@@ -8499,7 +8654,7 @@
       </p:sp>
       <p:sp>
         <p:nvSpPr>
-          <p:cNvPr id="18" name="Shape 15"/>
+          <p:cNvPr id="19" name="Shape 16"/>
           <p:cNvSpPr/>
           <p:nvPr/>
         </p:nvSpPr>
@@ -8524,7 +8679,7 @@
       </p:sp>
       <p:sp>
         <p:nvSpPr>
-          <p:cNvPr id="19" name="Shape 16"/>
+          <p:cNvPr id="20" name="Shape 17"/>
           <p:cNvSpPr/>
           <p:nvPr/>
         </p:nvSpPr>
@@ -8549,7 +8704,7 @@
       </p:sp>
       <p:sp>
         <p:nvSpPr>
-          <p:cNvPr id="20" name="Shape 17"/>
+          <p:cNvPr id="21" name="Shape 18"/>
           <p:cNvSpPr/>
           <p:nvPr/>
         </p:nvSpPr>
@@ -8574,7 +8729,7 @@
       </p:sp>
       <p:sp>
         <p:nvSpPr>
-          <p:cNvPr id="21" name="Shape 18"/>
+          <p:cNvPr id="22" name="Shape 19"/>
           <p:cNvSpPr/>
           <p:nvPr/>
         </p:nvSpPr>
@@ -8597,7 +8752,7 @@
       </p:sp>
       <p:sp>
         <p:nvSpPr>
-          <p:cNvPr id="22" name="Shape 19"/>
+          <p:cNvPr id="23" name="Shape 20"/>
           <p:cNvSpPr/>
           <p:nvPr/>
         </p:nvSpPr>
@@ -8620,7 +8775,7 @@
       </p:sp>
       <p:sp>
         <p:nvSpPr>
-          <p:cNvPr id="23" name="Text 20"/>
+          <p:cNvPr id="24" name="Text 21"/>
           <p:cNvSpPr/>
           <p:nvPr/>
         </p:nvSpPr>
@@ -8757,7 +8912,7 @@
       </p:sp>
       <p:sp>
         <p:nvSpPr>
-          <p:cNvPr id="24" name="Shape 21"/>
+          <p:cNvPr id="25" name="Shape 22"/>
           <p:cNvSpPr/>
           <p:nvPr/>
         </p:nvSpPr>
@@ -8779,7 +8934,7 @@
       </p:sp>
       <p:sp>
         <p:nvSpPr>
-          <p:cNvPr id="25" name="Text 22"/>
+          <p:cNvPr id="26" name="Text 23"/>
           <p:cNvSpPr/>
           <p:nvPr/>
         </p:nvSpPr>
@@ -8818,7 +8973,7 @@
       </p:sp>
       <p:sp>
         <p:nvSpPr>
-          <p:cNvPr id="26" name="Text 23"/>
+          <p:cNvPr id="27" name="Text 24"/>
           <p:cNvSpPr/>
           <p:nvPr/>
         </p:nvSpPr>
@@ -8870,7 +9025,7 @@
         </p:nvSpPr>
         <p:spPr>
           <a:xfrm>
-            <a:off x="11368735" y="6437376"/>
+            <a:off x="11368735" y="6327648"/>
             <a:ext cx="365760" cy="274320"/>
           </a:xfrm>
           <a:prstGeom prst="rect">
@@ -8917,13 +9072,6 @@
 <file path=ppt/slides/slide17.xml><?xml version="1.0" encoding="utf-8"?>
 <p:sld xmlns:a="http://schemas.openxmlformats.org/drawingml/2006/main" xmlns:r="http://schemas.openxmlformats.org/officeDocument/2006/relationships" xmlns:p="http://schemas.openxmlformats.org/presentationml/2006/main">
   <p:cSld name="Slide 17">
-    <p:bg>
-      <p:bgPr>
-        <a:solidFill>
-          <a:srgbClr val="FFFFFF"/>
-        </a:solidFill>
-      </p:bgPr>
-    </p:bg>
     <p:spTree>
       <p:nvGrpSpPr>
         <p:cNvPr id="1" name=""/>
@@ -8940,7 +9088,29 @@
       </p:grpSpPr>
       <p:sp>
         <p:nvSpPr>
-          <p:cNvPr id="2" name="Text 0"/>
+          <p:cNvPr id="2" name="Shape 0"/>
+          <p:cNvSpPr/>
+          <p:nvPr/>
+        </p:nvSpPr>
+        <p:spPr>
+          <a:xfrm>
+            <a:off x="231343" y="194767"/>
+            <a:ext cx="11716207" cy="6473952"/>
+          </a:xfrm>
+          <a:prstGeom prst="roundRect">
+            <a:avLst>
+              <a:gd name="adj" fmla="val 3107"/>
+            </a:avLst>
+          </a:prstGeom>
+          <a:solidFill>
+            <a:srgbClr val="FFFFFF"/>
+          </a:solidFill>
+          <a:ln/>
+        </p:spPr>
+      </p:sp>
+      <p:sp>
+        <p:nvSpPr>
+          <p:cNvPr id="3" name="Text 1"/>
           <p:cNvSpPr/>
           <p:nvPr/>
         </p:nvSpPr>
@@ -8979,7 +9149,7 @@
       </p:sp>
       <p:sp>
         <p:nvSpPr>
-          <p:cNvPr id="3" name="Shape 1"/>
+          <p:cNvPr id="4" name="Shape 2"/>
           <p:cNvSpPr/>
           <p:nvPr/>
         </p:nvSpPr>
@@ -9001,7 +9171,7 @@
       </p:sp>
       <p:sp>
         <p:nvSpPr>
-          <p:cNvPr id="4" name="Text 2"/>
+          <p:cNvPr id="5" name="Text 3"/>
           <p:cNvSpPr/>
           <p:nvPr/>
         </p:nvSpPr>
@@ -9040,7 +9210,7 @@
       </p:sp>
       <p:pic>
         <p:nvPicPr>
-          <p:cNvPr id="5" name="Image 0" descr="preencoded.png">    </p:cNvPr>
+          <p:cNvPr id="6" name="Image 0" descr="preencoded.png">    </p:cNvPr>
           <p:cNvPicPr>
             <a:picLocks noChangeAspect="1"/>
           </p:cNvPicPr>
@@ -9054,7 +9224,7 @@
         </p:blipFill>
         <p:spPr>
           <a:xfrm>
-            <a:off x="566928" y="6254496"/>
+            <a:off x="566928" y="6126480"/>
             <a:ext cx="1481328" cy="457200"/>
           </a:xfrm>
           <a:prstGeom prst="rect">
@@ -9064,7 +9234,7 @@
       </p:pic>
       <p:sp>
         <p:nvSpPr>
-          <p:cNvPr id="6" name="Shape 3"/>
+          <p:cNvPr id="7" name="Shape 4"/>
           <p:cNvSpPr/>
           <p:nvPr/>
         </p:nvSpPr>
@@ -9086,7 +9256,7 @@
       </p:sp>
       <p:sp>
         <p:nvSpPr>
-          <p:cNvPr id="7" name="Shape 4"/>
+          <p:cNvPr id="8" name="Shape 5"/>
           <p:cNvSpPr/>
           <p:nvPr/>
         </p:nvSpPr>
@@ -9106,7 +9276,7 @@
       </p:sp>
       <p:sp>
         <p:nvSpPr>
-          <p:cNvPr id="8" name="Text 5"/>
+          <p:cNvPr id="9" name="Text 6"/>
           <p:cNvSpPr/>
           <p:nvPr/>
         </p:nvSpPr>
@@ -9145,7 +9315,7 @@
       </p:sp>
       <p:sp>
         <p:nvSpPr>
-          <p:cNvPr id="9" name="Text 6"/>
+          <p:cNvPr id="10" name="Text 7"/>
           <p:cNvSpPr/>
           <p:nvPr/>
         </p:nvSpPr>
@@ -9184,7 +9354,7 @@
       </p:sp>
       <p:sp>
         <p:nvSpPr>
-          <p:cNvPr id="10" name="Text 7"/>
+          <p:cNvPr id="11" name="Text 8"/>
           <p:cNvSpPr/>
           <p:nvPr/>
         </p:nvSpPr>
@@ -9226,7 +9396,7 @@
       </p:sp>
       <p:sp>
         <p:nvSpPr>
-          <p:cNvPr id="11" name="Shape 8"/>
+          <p:cNvPr id="12" name="Shape 9"/>
           <p:cNvSpPr/>
           <p:nvPr/>
         </p:nvSpPr>
@@ -9248,7 +9418,7 @@
       </p:sp>
       <p:sp>
         <p:nvSpPr>
-          <p:cNvPr id="12" name="Shape 9"/>
+          <p:cNvPr id="13" name="Shape 10"/>
           <p:cNvSpPr/>
           <p:nvPr/>
         </p:nvSpPr>
@@ -9268,7 +9438,7 @@
       </p:sp>
       <p:sp>
         <p:nvSpPr>
-          <p:cNvPr id="13" name="Text 10"/>
+          <p:cNvPr id="14" name="Text 11"/>
           <p:cNvSpPr/>
           <p:nvPr/>
         </p:nvSpPr>
@@ -9307,7 +9477,7 @@
       </p:sp>
       <p:sp>
         <p:nvSpPr>
-          <p:cNvPr id="14" name="Text 11"/>
+          <p:cNvPr id="15" name="Text 12"/>
           <p:cNvSpPr/>
           <p:nvPr/>
         </p:nvSpPr>
@@ -9346,7 +9516,7 @@
       </p:sp>
       <p:sp>
         <p:nvSpPr>
-          <p:cNvPr id="15" name="Text 12"/>
+          <p:cNvPr id="16" name="Text 13"/>
           <p:cNvSpPr/>
           <p:nvPr/>
         </p:nvSpPr>
@@ -9388,7 +9558,7 @@
       </p:sp>
       <p:sp>
         <p:nvSpPr>
-          <p:cNvPr id="16" name="Shape 13"/>
+          <p:cNvPr id="17" name="Shape 14"/>
           <p:cNvSpPr/>
           <p:nvPr/>
         </p:nvSpPr>
@@ -9410,7 +9580,7 @@
       </p:sp>
       <p:sp>
         <p:nvSpPr>
-          <p:cNvPr id="17" name="Shape 14"/>
+          <p:cNvPr id="18" name="Shape 15"/>
           <p:cNvSpPr/>
           <p:nvPr/>
         </p:nvSpPr>
@@ -9430,7 +9600,7 @@
       </p:sp>
       <p:sp>
         <p:nvSpPr>
-          <p:cNvPr id="18" name="Text 15"/>
+          <p:cNvPr id="19" name="Text 16"/>
           <p:cNvSpPr/>
           <p:nvPr/>
         </p:nvSpPr>
@@ -9469,7 +9639,7 @@
       </p:sp>
       <p:sp>
         <p:nvSpPr>
-          <p:cNvPr id="19" name="Text 16"/>
+          <p:cNvPr id="20" name="Text 17"/>
           <p:cNvSpPr/>
           <p:nvPr/>
         </p:nvSpPr>
@@ -9508,7 +9678,7 @@
       </p:sp>
       <p:sp>
         <p:nvSpPr>
-          <p:cNvPr id="20" name="Text 17"/>
+          <p:cNvPr id="21" name="Text 18"/>
           <p:cNvSpPr/>
           <p:nvPr/>
         </p:nvSpPr>
@@ -9550,7 +9720,7 @@
       </p:sp>
       <p:sp>
         <p:nvSpPr>
-          <p:cNvPr id="21" name="Shape 18"/>
+          <p:cNvPr id="22" name="Shape 19"/>
           <p:cNvSpPr/>
           <p:nvPr/>
         </p:nvSpPr>
@@ -9572,7 +9742,7 @@
       </p:sp>
       <p:sp>
         <p:nvSpPr>
-          <p:cNvPr id="22" name="Shape 19"/>
+          <p:cNvPr id="23" name="Shape 20"/>
           <p:cNvSpPr/>
           <p:nvPr/>
         </p:nvSpPr>
@@ -9592,7 +9762,7 @@
       </p:sp>
       <p:sp>
         <p:nvSpPr>
-          <p:cNvPr id="23" name="Text 20"/>
+          <p:cNvPr id="24" name="Text 21"/>
           <p:cNvSpPr/>
           <p:nvPr/>
         </p:nvSpPr>
@@ -9631,7 +9801,7 @@
       </p:sp>
       <p:sp>
         <p:nvSpPr>
-          <p:cNvPr id="24" name="Text 21"/>
+          <p:cNvPr id="25" name="Text 22"/>
           <p:cNvSpPr/>
           <p:nvPr/>
         </p:nvSpPr>
@@ -9670,7 +9840,7 @@
       </p:sp>
       <p:sp>
         <p:nvSpPr>
-          <p:cNvPr id="25" name="Text 22"/>
+          <p:cNvPr id="26" name="Text 23"/>
           <p:cNvSpPr/>
           <p:nvPr/>
         </p:nvSpPr>
@@ -9712,7 +9882,7 @@
       </p:sp>
       <p:sp>
         <p:nvSpPr>
-          <p:cNvPr id="26" name="Shape 23"/>
+          <p:cNvPr id="27" name="Shape 24"/>
           <p:cNvSpPr/>
           <p:nvPr/>
         </p:nvSpPr>
@@ -9734,7 +9904,7 @@
       </p:sp>
       <p:sp>
         <p:nvSpPr>
-          <p:cNvPr id="27" name="Text 24"/>
+          <p:cNvPr id="28" name="Text 25"/>
           <p:cNvSpPr/>
           <p:nvPr/>
         </p:nvSpPr>
@@ -9773,7 +9943,7 @@
       </p:sp>
       <p:sp>
         <p:nvSpPr>
-          <p:cNvPr id="28" name="Text 25"/>
+          <p:cNvPr id="29" name="Text 26"/>
           <p:cNvSpPr/>
           <p:nvPr/>
         </p:nvSpPr>
@@ -9825,7 +9995,7 @@
         </p:nvSpPr>
         <p:spPr>
           <a:xfrm>
-            <a:off x="11368735" y="6437376"/>
+            <a:off x="11368735" y="6327648"/>
             <a:ext cx="365760" cy="274320"/>
           </a:xfrm>
           <a:prstGeom prst="rect">
@@ -9872,13 +10042,6 @@
 <file path=ppt/slides/slide18.xml><?xml version="1.0" encoding="utf-8"?>
 <p:sld xmlns:a="http://schemas.openxmlformats.org/drawingml/2006/main" xmlns:r="http://schemas.openxmlformats.org/officeDocument/2006/relationships" xmlns:p="http://schemas.openxmlformats.org/presentationml/2006/main">
   <p:cSld name="Slide 18">
-    <p:bg>
-      <p:bgPr>
-        <a:solidFill>
-          <a:srgbClr val="FFFFFF"/>
-        </a:solidFill>
-      </p:bgPr>
-    </p:bg>
     <p:spTree>
       <p:nvGrpSpPr>
         <p:cNvPr id="1" name=""/>
@@ -9895,7 +10058,29 @@
       </p:grpSpPr>
       <p:sp>
         <p:nvSpPr>
-          <p:cNvPr id="2" name="Text 0"/>
+          <p:cNvPr id="2" name="Shape 0"/>
+          <p:cNvSpPr/>
+          <p:nvPr/>
+        </p:nvSpPr>
+        <p:spPr>
+          <a:xfrm>
+            <a:off x="231343" y="194767"/>
+            <a:ext cx="11716207" cy="6473952"/>
+          </a:xfrm>
+          <a:prstGeom prst="roundRect">
+            <a:avLst>
+              <a:gd name="adj" fmla="val 3107"/>
+            </a:avLst>
+          </a:prstGeom>
+          <a:solidFill>
+            <a:srgbClr val="FFFFFF"/>
+          </a:solidFill>
+          <a:ln/>
+        </p:spPr>
+      </p:sp>
+      <p:sp>
+        <p:nvSpPr>
+          <p:cNvPr id="3" name="Text 1"/>
           <p:cNvSpPr/>
           <p:nvPr/>
         </p:nvSpPr>
@@ -9934,7 +10119,7 @@
       </p:sp>
       <p:sp>
         <p:nvSpPr>
-          <p:cNvPr id="3" name="Shape 1"/>
+          <p:cNvPr id="4" name="Shape 2"/>
           <p:cNvSpPr/>
           <p:nvPr/>
         </p:nvSpPr>
@@ -9956,7 +10141,7 @@
       </p:sp>
       <p:sp>
         <p:nvSpPr>
-          <p:cNvPr id="4" name="Text 2"/>
+          <p:cNvPr id="5" name="Text 3"/>
           <p:cNvSpPr/>
           <p:nvPr/>
         </p:nvSpPr>
@@ -9995,7 +10180,7 @@
       </p:sp>
       <p:pic>
         <p:nvPicPr>
-          <p:cNvPr id="5" name="Image 0" descr="preencoded.png">    </p:cNvPr>
+          <p:cNvPr id="6" name="Image 0" descr="preencoded.png">    </p:cNvPr>
           <p:cNvPicPr>
             <a:picLocks noChangeAspect="1"/>
           </p:cNvPicPr>
@@ -10009,7 +10194,7 @@
         </p:blipFill>
         <p:spPr>
           <a:xfrm>
-            <a:off x="566928" y="6254496"/>
+            <a:off x="566928" y="6126480"/>
             <a:ext cx="1481328" cy="457200"/>
           </a:xfrm>
           <a:prstGeom prst="rect">
@@ -10019,7 +10204,7 @@
       </p:pic>
       <p:sp>
         <p:nvSpPr>
-          <p:cNvPr id="6" name="Shape 3"/>
+          <p:cNvPr id="7" name="Shape 4"/>
           <p:cNvSpPr/>
           <p:nvPr/>
         </p:nvSpPr>
@@ -10039,7 +10224,7 @@
       </p:sp>
       <p:sp>
         <p:nvSpPr>
-          <p:cNvPr id="7" name="Text 4"/>
+          <p:cNvPr id="8" name="Text 5"/>
           <p:cNvSpPr/>
           <p:nvPr/>
         </p:nvSpPr>
@@ -10078,7 +10263,7 @@
       </p:sp>
       <p:sp>
         <p:nvSpPr>
-          <p:cNvPr id="8" name="Text 5"/>
+          <p:cNvPr id="9" name="Text 6"/>
           <p:cNvSpPr/>
           <p:nvPr/>
         </p:nvSpPr>
@@ -10131,7 +10316,7 @@
       </p:sp>
       <p:sp>
         <p:nvSpPr>
-          <p:cNvPr id="9" name="Shape 6"/>
+          <p:cNvPr id="10" name="Shape 7"/>
           <p:cNvSpPr/>
           <p:nvPr/>
         </p:nvSpPr>
@@ -10151,7 +10336,7 @@
       </p:sp>
       <p:sp>
         <p:nvSpPr>
-          <p:cNvPr id="10" name="Text 7"/>
+          <p:cNvPr id="11" name="Text 8"/>
           <p:cNvSpPr/>
           <p:nvPr/>
         </p:nvSpPr>
@@ -10190,7 +10375,7 @@
       </p:sp>
       <p:sp>
         <p:nvSpPr>
-          <p:cNvPr id="11" name="Text 8"/>
+          <p:cNvPr id="12" name="Text 9"/>
           <p:cNvSpPr/>
           <p:nvPr/>
         </p:nvSpPr>
@@ -10243,7 +10428,7 @@
       </p:sp>
       <p:sp>
         <p:nvSpPr>
-          <p:cNvPr id="12" name="Shape 9"/>
+          <p:cNvPr id="13" name="Shape 10"/>
           <p:cNvSpPr/>
           <p:nvPr/>
         </p:nvSpPr>
@@ -10263,7 +10448,7 @@
       </p:sp>
       <p:sp>
         <p:nvSpPr>
-          <p:cNvPr id="13" name="Text 10"/>
+          <p:cNvPr id="14" name="Text 11"/>
           <p:cNvSpPr/>
           <p:nvPr/>
         </p:nvSpPr>
@@ -10302,7 +10487,7 @@
       </p:sp>
       <p:sp>
         <p:nvSpPr>
-          <p:cNvPr id="14" name="Text 11"/>
+          <p:cNvPr id="15" name="Text 12"/>
           <p:cNvSpPr/>
           <p:nvPr/>
         </p:nvSpPr>
@@ -10355,7 +10540,7 @@
       </p:sp>
       <p:sp>
         <p:nvSpPr>
-          <p:cNvPr id="15" name="Shape 12"/>
+          <p:cNvPr id="16" name="Shape 13"/>
           <p:cNvSpPr/>
           <p:nvPr/>
         </p:nvSpPr>
@@ -10375,7 +10560,7 @@
       </p:sp>
       <p:sp>
         <p:nvSpPr>
-          <p:cNvPr id="16" name="Text 13"/>
+          <p:cNvPr id="17" name="Text 14"/>
           <p:cNvSpPr/>
           <p:nvPr/>
         </p:nvSpPr>
@@ -10414,7 +10599,7 @@
       </p:sp>
       <p:sp>
         <p:nvSpPr>
-          <p:cNvPr id="17" name="Text 14"/>
+          <p:cNvPr id="18" name="Text 15"/>
           <p:cNvSpPr/>
           <p:nvPr/>
         </p:nvSpPr>
@@ -10467,7 +10652,7 @@
       </p:sp>
       <p:sp>
         <p:nvSpPr>
-          <p:cNvPr id="18" name="Shape 15"/>
+          <p:cNvPr id="19" name="Shape 16"/>
           <p:cNvSpPr/>
           <p:nvPr/>
         </p:nvSpPr>
@@ -10487,7 +10672,7 @@
       </p:sp>
       <p:sp>
         <p:nvSpPr>
-          <p:cNvPr id="19" name="Text 16"/>
+          <p:cNvPr id="20" name="Text 17"/>
           <p:cNvSpPr/>
           <p:nvPr/>
         </p:nvSpPr>
@@ -10526,7 +10711,7 @@
       </p:sp>
       <p:sp>
         <p:nvSpPr>
-          <p:cNvPr id="20" name="Text 17"/>
+          <p:cNvPr id="21" name="Text 18"/>
           <p:cNvSpPr/>
           <p:nvPr/>
         </p:nvSpPr>
@@ -10589,7 +10774,7 @@
         </p:nvSpPr>
         <p:spPr>
           <a:xfrm>
-            <a:off x="11368735" y="6437376"/>
+            <a:off x="11368735" y="6327648"/>
             <a:ext cx="365760" cy="274320"/>
           </a:xfrm>
           <a:prstGeom prst="rect">
@@ -10636,13 +10821,6 @@
 <file path=ppt/slides/slide19.xml><?xml version="1.0" encoding="utf-8"?>
 <p:sld xmlns:a="http://schemas.openxmlformats.org/drawingml/2006/main" xmlns:r="http://schemas.openxmlformats.org/officeDocument/2006/relationships" xmlns:p="http://schemas.openxmlformats.org/presentationml/2006/main">
   <p:cSld name="Slide 19">
-    <p:bg>
-      <p:bgPr>
-        <a:solidFill>
-          <a:srgbClr val="FFFFFF"/>
-        </a:solidFill>
-      </p:bgPr>
-    </p:bg>
     <p:spTree>
       <p:nvGrpSpPr>
         <p:cNvPr id="1" name=""/>
@@ -10659,7 +10837,29 @@
       </p:grpSpPr>
       <p:sp>
         <p:nvSpPr>
-          <p:cNvPr id="2" name="Text 0"/>
+          <p:cNvPr id="2" name="Shape 0"/>
+          <p:cNvSpPr/>
+          <p:nvPr/>
+        </p:nvSpPr>
+        <p:spPr>
+          <a:xfrm>
+            <a:off x="231343" y="194767"/>
+            <a:ext cx="11716207" cy="6473952"/>
+          </a:xfrm>
+          <a:prstGeom prst="roundRect">
+            <a:avLst>
+              <a:gd name="adj" fmla="val 3107"/>
+            </a:avLst>
+          </a:prstGeom>
+          <a:solidFill>
+            <a:srgbClr val="FFFFFF"/>
+          </a:solidFill>
+          <a:ln/>
+        </p:spPr>
+      </p:sp>
+      <p:sp>
+        <p:nvSpPr>
+          <p:cNvPr id="3" name="Text 1"/>
           <p:cNvSpPr/>
           <p:nvPr/>
         </p:nvSpPr>
@@ -10698,7 +10898,7 @@
       </p:sp>
       <p:sp>
         <p:nvSpPr>
-          <p:cNvPr id="3" name="Shape 1"/>
+          <p:cNvPr id="4" name="Shape 2"/>
           <p:cNvSpPr/>
           <p:nvPr/>
         </p:nvSpPr>
@@ -10720,7 +10920,7 @@
       </p:sp>
       <p:sp>
         <p:nvSpPr>
-          <p:cNvPr id="4" name="Text 2"/>
+          <p:cNvPr id="5" name="Text 3"/>
           <p:cNvSpPr/>
           <p:nvPr/>
         </p:nvSpPr>
@@ -10759,7 +10959,7 @@
       </p:sp>
       <p:pic>
         <p:nvPicPr>
-          <p:cNvPr id="5" name="Image 0" descr="preencoded.png">    </p:cNvPr>
+          <p:cNvPr id="6" name="Image 0" descr="preencoded.png">    </p:cNvPr>
           <p:cNvPicPr>
             <a:picLocks noChangeAspect="1"/>
           </p:cNvPicPr>
@@ -10773,7 +10973,7 @@
         </p:blipFill>
         <p:spPr>
           <a:xfrm>
-            <a:off x="566928" y="6254496"/>
+            <a:off x="566928" y="6126480"/>
             <a:ext cx="1481328" cy="457200"/>
           </a:xfrm>
           <a:prstGeom prst="rect">
@@ -10783,7 +10983,7 @@
       </p:pic>
       <p:sp>
         <p:nvSpPr>
-          <p:cNvPr id="6" name="Shape 3"/>
+          <p:cNvPr id="7" name="Shape 4"/>
           <p:cNvSpPr/>
           <p:nvPr/>
         </p:nvSpPr>
@@ -10805,7 +11005,7 @@
       </p:sp>
       <p:sp>
         <p:nvSpPr>
-          <p:cNvPr id="7" name="Text 4"/>
+          <p:cNvPr id="8" name="Text 5"/>
           <p:cNvSpPr/>
           <p:nvPr/>
         </p:nvSpPr>
@@ -10844,7 +11044,7 @@
       </p:sp>
       <p:sp>
         <p:nvSpPr>
-          <p:cNvPr id="8" name="Text 5"/>
+          <p:cNvPr id="9" name="Text 6"/>
           <p:cNvSpPr/>
           <p:nvPr/>
         </p:nvSpPr>
@@ -10886,7 +11086,7 @@
       </p:sp>
       <p:sp>
         <p:nvSpPr>
-          <p:cNvPr id="9" name="Shape 6"/>
+          <p:cNvPr id="10" name="Shape 7"/>
           <p:cNvSpPr/>
           <p:nvPr/>
         </p:nvSpPr>
@@ -10908,7 +11108,7 @@
       </p:sp>
       <p:sp>
         <p:nvSpPr>
-          <p:cNvPr id="10" name="Text 7"/>
+          <p:cNvPr id="11" name="Text 8"/>
           <p:cNvSpPr/>
           <p:nvPr/>
         </p:nvSpPr>
@@ -10947,7 +11147,7 @@
       </p:sp>
       <p:sp>
         <p:nvSpPr>
-          <p:cNvPr id="11" name="Text 8"/>
+          <p:cNvPr id="12" name="Text 9"/>
           <p:cNvSpPr/>
           <p:nvPr/>
         </p:nvSpPr>
@@ -10989,7 +11189,7 @@
       </p:sp>
       <p:sp>
         <p:nvSpPr>
-          <p:cNvPr id="12" name="Shape 9"/>
+          <p:cNvPr id="13" name="Shape 10"/>
           <p:cNvSpPr/>
           <p:nvPr/>
         </p:nvSpPr>
@@ -11016,7 +11216,7 @@
       </p:sp>
       <p:sp>
         <p:nvSpPr>
-          <p:cNvPr id="13" name="Text 10"/>
+          <p:cNvPr id="14" name="Text 11"/>
           <p:cNvSpPr/>
           <p:nvPr/>
         </p:nvSpPr>
@@ -11055,7 +11255,7 @@
       </p:sp>
       <p:sp>
         <p:nvSpPr>
-          <p:cNvPr id="14" name="Text 11"/>
+          <p:cNvPr id="15" name="Text 12"/>
           <p:cNvSpPr/>
           <p:nvPr/>
         </p:nvSpPr>
@@ -11097,7 +11297,7 @@
       </p:sp>
       <p:sp>
         <p:nvSpPr>
-          <p:cNvPr id="15" name="Shape 12"/>
+          <p:cNvPr id="16" name="Shape 13"/>
           <p:cNvSpPr/>
           <p:nvPr/>
         </p:nvSpPr>
@@ -11124,7 +11324,7 @@
       </p:sp>
       <p:sp>
         <p:nvSpPr>
-          <p:cNvPr id="16" name="Text 13"/>
+          <p:cNvPr id="17" name="Text 14"/>
           <p:cNvSpPr/>
           <p:nvPr/>
         </p:nvSpPr>
@@ -11176,7 +11376,7 @@
         </p:nvSpPr>
         <p:spPr>
           <a:xfrm>
-            <a:off x="11368735" y="6437376"/>
+            <a:off x="11368735" y="6327648"/>
             <a:ext cx="365760" cy="274320"/>
           </a:xfrm>
           <a:prstGeom prst="rect">
@@ -11223,13 +11423,6 @@
 <file path=ppt/slides/slide2.xml><?xml version="1.0" encoding="utf-8"?>
 <p:sld xmlns:a="http://schemas.openxmlformats.org/drawingml/2006/main" xmlns:r="http://schemas.openxmlformats.org/officeDocument/2006/relationships" xmlns:p="http://schemas.openxmlformats.org/presentationml/2006/main">
   <p:cSld name="Slide 2">
-    <p:bg>
-      <p:bgPr>
-        <a:solidFill>
-          <a:srgbClr val="FFFFFF"/>
-        </a:solidFill>
-      </p:bgPr>
-    </p:bg>
     <p:spTree>
       <p:nvGrpSpPr>
         <p:cNvPr id="1" name=""/>
@@ -11246,7 +11439,29 @@
       </p:grpSpPr>
       <p:sp>
         <p:nvSpPr>
-          <p:cNvPr id="2" name="Text 0"/>
+          <p:cNvPr id="2" name="Shape 0"/>
+          <p:cNvSpPr/>
+          <p:nvPr/>
+        </p:nvSpPr>
+        <p:spPr>
+          <a:xfrm>
+            <a:off x="231343" y="194767"/>
+            <a:ext cx="11716207" cy="6473952"/>
+          </a:xfrm>
+          <a:prstGeom prst="roundRect">
+            <a:avLst>
+              <a:gd name="adj" fmla="val 3107"/>
+            </a:avLst>
+          </a:prstGeom>
+          <a:solidFill>
+            <a:srgbClr val="FFFFFF"/>
+          </a:solidFill>
+          <a:ln/>
+        </p:spPr>
+      </p:sp>
+      <p:sp>
+        <p:nvSpPr>
+          <p:cNvPr id="3" name="Text 1"/>
           <p:cNvSpPr/>
           <p:nvPr/>
         </p:nvSpPr>
@@ -11285,7 +11500,7 @@
       </p:sp>
       <p:sp>
         <p:nvSpPr>
-          <p:cNvPr id="3" name="Text 1"/>
+          <p:cNvPr id="4" name="Text 2"/>
           <p:cNvSpPr/>
           <p:nvPr/>
         </p:nvSpPr>
@@ -11327,7 +11542,7 @@
       </p:sp>
       <p:sp>
         <p:nvSpPr>
-          <p:cNvPr id="4" name="Shape 2"/>
+          <p:cNvPr id="5" name="Shape 3"/>
           <p:cNvSpPr/>
           <p:nvPr/>
         </p:nvSpPr>
@@ -11349,7 +11564,7 @@
       </p:sp>
       <p:sp>
         <p:nvSpPr>
-          <p:cNvPr id="5" name="Text 3"/>
+          <p:cNvPr id="6" name="Text 4"/>
           <p:cNvSpPr/>
           <p:nvPr/>
         </p:nvSpPr>
@@ -11388,7 +11603,7 @@
       </p:sp>
       <p:pic>
         <p:nvPicPr>
-          <p:cNvPr id="6" name="Image 0" descr="preencoded.png">    </p:cNvPr>
+          <p:cNvPr id="7" name="Image 0" descr="preencoded.png">    </p:cNvPr>
           <p:cNvPicPr>
             <a:picLocks noChangeAspect="1"/>
           </p:cNvPicPr>
@@ -11402,7 +11617,7 @@
         </p:blipFill>
         <p:spPr>
           <a:xfrm>
-            <a:off x="566928" y="6254496"/>
+            <a:off x="566928" y="6126480"/>
             <a:ext cx="1481328" cy="457200"/>
           </a:xfrm>
           <a:prstGeom prst="rect">
@@ -11412,7 +11627,7 @@
       </p:pic>
       <p:sp>
         <p:nvSpPr>
-          <p:cNvPr id="7" name="Shape 4"/>
+          <p:cNvPr id="8" name="Shape 5"/>
           <p:cNvSpPr/>
           <p:nvPr/>
         </p:nvSpPr>
@@ -11439,7 +11654,7 @@
       </p:sp>
       <p:sp>
         <p:nvSpPr>
-          <p:cNvPr id="8" name="Shape 5"/>
+          <p:cNvPr id="9" name="Shape 6"/>
           <p:cNvSpPr/>
           <p:nvPr/>
         </p:nvSpPr>
@@ -11459,7 +11674,7 @@
       </p:sp>
       <p:sp>
         <p:nvSpPr>
-          <p:cNvPr id="9" name="Text 6"/>
+          <p:cNvPr id="10" name="Text 7"/>
           <p:cNvSpPr/>
           <p:nvPr/>
         </p:nvSpPr>
@@ -11498,7 +11713,7 @@
       </p:sp>
       <p:sp>
         <p:nvSpPr>
-          <p:cNvPr id="10" name="Text 7"/>
+          <p:cNvPr id="11" name="Text 8"/>
           <p:cNvSpPr/>
           <p:nvPr/>
         </p:nvSpPr>
@@ -11537,7 +11752,7 @@
       </p:sp>
       <p:sp>
         <p:nvSpPr>
-          <p:cNvPr id="11" name="Text 8"/>
+          <p:cNvPr id="12" name="Text 9"/>
           <p:cNvSpPr/>
           <p:nvPr/>
         </p:nvSpPr>
@@ -11579,7 +11794,7 @@
       </p:sp>
       <p:sp>
         <p:nvSpPr>
-          <p:cNvPr id="12" name="Shape 9"/>
+          <p:cNvPr id="13" name="Shape 10"/>
           <p:cNvSpPr/>
           <p:nvPr/>
         </p:nvSpPr>
@@ -11606,7 +11821,7 @@
       </p:sp>
       <p:sp>
         <p:nvSpPr>
-          <p:cNvPr id="13" name="Shape 10"/>
+          <p:cNvPr id="14" name="Shape 11"/>
           <p:cNvSpPr/>
           <p:nvPr/>
         </p:nvSpPr>
@@ -11626,7 +11841,7 @@
       </p:sp>
       <p:sp>
         <p:nvSpPr>
-          <p:cNvPr id="14" name="Text 11"/>
+          <p:cNvPr id="15" name="Text 12"/>
           <p:cNvSpPr/>
           <p:nvPr/>
         </p:nvSpPr>
@@ -11665,7 +11880,7 @@
       </p:sp>
       <p:sp>
         <p:nvSpPr>
-          <p:cNvPr id="15" name="Text 12"/>
+          <p:cNvPr id="16" name="Text 13"/>
           <p:cNvSpPr/>
           <p:nvPr/>
         </p:nvSpPr>
@@ -11704,7 +11919,7 @@
       </p:sp>
       <p:sp>
         <p:nvSpPr>
-          <p:cNvPr id="16" name="Text 13"/>
+          <p:cNvPr id="17" name="Text 14"/>
           <p:cNvSpPr/>
           <p:nvPr/>
         </p:nvSpPr>
@@ -11746,7 +11961,7 @@
       </p:sp>
       <p:sp>
         <p:nvSpPr>
-          <p:cNvPr id="17" name="Shape 14"/>
+          <p:cNvPr id="18" name="Shape 15"/>
           <p:cNvSpPr/>
           <p:nvPr/>
         </p:nvSpPr>
@@ -11773,7 +11988,7 @@
       </p:sp>
       <p:sp>
         <p:nvSpPr>
-          <p:cNvPr id="18" name="Shape 15"/>
+          <p:cNvPr id="19" name="Shape 16"/>
           <p:cNvSpPr/>
           <p:nvPr/>
         </p:nvSpPr>
@@ -11793,7 +12008,7 @@
       </p:sp>
       <p:sp>
         <p:nvSpPr>
-          <p:cNvPr id="19" name="Text 16"/>
+          <p:cNvPr id="20" name="Text 17"/>
           <p:cNvSpPr/>
           <p:nvPr/>
         </p:nvSpPr>
@@ -11832,7 +12047,7 @@
       </p:sp>
       <p:sp>
         <p:nvSpPr>
-          <p:cNvPr id="20" name="Text 17"/>
+          <p:cNvPr id="21" name="Text 18"/>
           <p:cNvSpPr/>
           <p:nvPr/>
         </p:nvSpPr>
@@ -11871,7 +12086,7 @@
       </p:sp>
       <p:sp>
         <p:nvSpPr>
-          <p:cNvPr id="21" name="Text 18"/>
+          <p:cNvPr id="22" name="Text 19"/>
           <p:cNvSpPr/>
           <p:nvPr/>
         </p:nvSpPr>
@@ -11913,7 +12128,7 @@
       </p:sp>
       <p:sp>
         <p:nvSpPr>
-          <p:cNvPr id="22" name="Shape 19"/>
+          <p:cNvPr id="23" name="Shape 20"/>
           <p:cNvSpPr/>
           <p:nvPr/>
         </p:nvSpPr>
@@ -11940,7 +12155,7 @@
       </p:sp>
       <p:sp>
         <p:nvSpPr>
-          <p:cNvPr id="23" name="Shape 20"/>
+          <p:cNvPr id="24" name="Shape 21"/>
           <p:cNvSpPr/>
           <p:nvPr/>
         </p:nvSpPr>
@@ -11960,7 +12175,7 @@
       </p:sp>
       <p:sp>
         <p:nvSpPr>
-          <p:cNvPr id="24" name="Text 21"/>
+          <p:cNvPr id="25" name="Text 22"/>
           <p:cNvSpPr/>
           <p:nvPr/>
         </p:nvSpPr>
@@ -11999,7 +12214,7 @@
       </p:sp>
       <p:sp>
         <p:nvSpPr>
-          <p:cNvPr id="25" name="Text 22"/>
+          <p:cNvPr id="26" name="Text 23"/>
           <p:cNvSpPr/>
           <p:nvPr/>
         </p:nvSpPr>
@@ -12038,7 +12253,7 @@
       </p:sp>
       <p:sp>
         <p:nvSpPr>
-          <p:cNvPr id="26" name="Text 23"/>
+          <p:cNvPr id="27" name="Text 24"/>
           <p:cNvSpPr/>
           <p:nvPr/>
         </p:nvSpPr>
@@ -12080,7 +12295,7 @@
       </p:sp>
       <p:sp>
         <p:nvSpPr>
-          <p:cNvPr id="27" name="Shape 24"/>
+          <p:cNvPr id="28" name="Shape 25"/>
           <p:cNvSpPr/>
           <p:nvPr/>
         </p:nvSpPr>
@@ -12107,7 +12322,7 @@
       </p:sp>
       <p:sp>
         <p:nvSpPr>
-          <p:cNvPr id="28" name="Shape 25"/>
+          <p:cNvPr id="29" name="Shape 26"/>
           <p:cNvSpPr/>
           <p:nvPr/>
         </p:nvSpPr>
@@ -12127,7 +12342,7 @@
       </p:sp>
       <p:sp>
         <p:nvSpPr>
-          <p:cNvPr id="29" name="Text 26"/>
+          <p:cNvPr id="30" name="Text 27"/>
           <p:cNvSpPr/>
           <p:nvPr/>
         </p:nvSpPr>
@@ -12166,7 +12381,7 @@
       </p:sp>
       <p:sp>
         <p:nvSpPr>
-          <p:cNvPr id="30" name="Text 27"/>
+          <p:cNvPr id="31" name="Text 28"/>
           <p:cNvSpPr/>
           <p:nvPr/>
         </p:nvSpPr>
@@ -12205,7 +12420,7 @@
       </p:sp>
       <p:sp>
         <p:nvSpPr>
-          <p:cNvPr id="31" name="Text 28"/>
+          <p:cNvPr id="32" name="Text 29"/>
           <p:cNvSpPr/>
           <p:nvPr/>
         </p:nvSpPr>
@@ -12257,7 +12472,7 @@
         </p:nvSpPr>
         <p:spPr>
           <a:xfrm>
-            <a:off x="11368735" y="6437376"/>
+            <a:off x="11368735" y="6327648"/>
             <a:ext cx="365760" cy="274320"/>
           </a:xfrm>
           <a:prstGeom prst="rect">
@@ -12304,13 +12519,6 @@
 <file path=ppt/slides/slide20.xml><?xml version="1.0" encoding="utf-8"?>
 <p:sld xmlns:a="http://schemas.openxmlformats.org/drawingml/2006/main" xmlns:r="http://schemas.openxmlformats.org/officeDocument/2006/relationships" xmlns:p="http://schemas.openxmlformats.org/presentationml/2006/main">
   <p:cSld name="Slide 20">
-    <p:bg>
-      <p:bgPr>
-        <a:solidFill>
-          <a:srgbClr val="FFFFFF"/>
-        </a:solidFill>
-      </p:bgPr>
-    </p:bg>
     <p:spTree>
       <p:nvGrpSpPr>
         <p:cNvPr id="1" name=""/>
@@ -12327,7 +12535,29 @@
       </p:grpSpPr>
       <p:sp>
         <p:nvSpPr>
-          <p:cNvPr id="2" name="Text 0"/>
+          <p:cNvPr id="2" name="Shape 0"/>
+          <p:cNvSpPr/>
+          <p:nvPr/>
+        </p:nvSpPr>
+        <p:spPr>
+          <a:xfrm>
+            <a:off x="231343" y="194767"/>
+            <a:ext cx="11716207" cy="6473952"/>
+          </a:xfrm>
+          <a:prstGeom prst="roundRect">
+            <a:avLst>
+              <a:gd name="adj" fmla="val 3107"/>
+            </a:avLst>
+          </a:prstGeom>
+          <a:solidFill>
+            <a:srgbClr val="FFFFFF"/>
+          </a:solidFill>
+          <a:ln/>
+        </p:spPr>
+      </p:sp>
+      <p:sp>
+        <p:nvSpPr>
+          <p:cNvPr id="3" name="Text 1"/>
           <p:cNvSpPr/>
           <p:nvPr/>
         </p:nvSpPr>
@@ -12366,7 +12596,7 @@
       </p:sp>
       <p:sp>
         <p:nvSpPr>
-          <p:cNvPr id="3" name="Shape 1"/>
+          <p:cNvPr id="4" name="Shape 2"/>
           <p:cNvSpPr/>
           <p:nvPr/>
         </p:nvSpPr>
@@ -12388,7 +12618,7 @@
       </p:sp>
       <p:sp>
         <p:nvSpPr>
-          <p:cNvPr id="4" name="Text 2"/>
+          <p:cNvPr id="5" name="Text 3"/>
           <p:cNvSpPr/>
           <p:nvPr/>
         </p:nvSpPr>
@@ -12427,7 +12657,7 @@
       </p:sp>
       <p:pic>
         <p:nvPicPr>
-          <p:cNvPr id="5" name="Image 0" descr="preencoded.png">    </p:cNvPr>
+          <p:cNvPr id="6" name="Image 0" descr="preencoded.png">    </p:cNvPr>
           <p:cNvPicPr>
             <a:picLocks noChangeAspect="1"/>
           </p:cNvPicPr>
@@ -12441,7 +12671,7 @@
         </p:blipFill>
         <p:spPr>
           <a:xfrm>
-            <a:off x="566928" y="6254496"/>
+            <a:off x="566928" y="6126480"/>
             <a:ext cx="1481328" cy="457200"/>
           </a:xfrm>
           <a:prstGeom prst="rect">
@@ -12451,7 +12681,7 @@
       </p:pic>
       <p:sp>
         <p:nvSpPr>
-          <p:cNvPr id="6" name="Shape 3"/>
+          <p:cNvPr id="7" name="Shape 4"/>
           <p:cNvSpPr/>
           <p:nvPr/>
         </p:nvSpPr>
@@ -12478,7 +12708,7 @@
       </p:sp>
       <p:sp>
         <p:nvSpPr>
-          <p:cNvPr id="7" name="Shape 4"/>
+          <p:cNvPr id="8" name="Shape 5"/>
           <p:cNvSpPr/>
           <p:nvPr/>
         </p:nvSpPr>
@@ -12505,7 +12735,7 @@
       </p:sp>
       <p:sp>
         <p:nvSpPr>
-          <p:cNvPr id="8" name="Shape 5"/>
+          <p:cNvPr id="9" name="Shape 6"/>
           <p:cNvSpPr/>
           <p:nvPr/>
         </p:nvSpPr>
@@ -12525,7 +12755,7 @@
       </p:sp>
       <p:sp>
         <p:nvSpPr>
-          <p:cNvPr id="9" name="Shape 6"/>
+          <p:cNvPr id="10" name="Shape 7"/>
           <p:cNvSpPr/>
           <p:nvPr/>
         </p:nvSpPr>
@@ -12545,7 +12775,7 @@
       </p:sp>
       <p:sp>
         <p:nvSpPr>
-          <p:cNvPr id="10" name="Text 7"/>
+          <p:cNvPr id="11" name="Text 8"/>
           <p:cNvSpPr/>
           <p:nvPr/>
         </p:nvSpPr>
@@ -12584,7 +12814,7 @@
       </p:sp>
       <p:sp>
         <p:nvSpPr>
-          <p:cNvPr id="11" name="Shape 8"/>
+          <p:cNvPr id="12" name="Shape 9"/>
           <p:cNvSpPr/>
           <p:nvPr/>
         </p:nvSpPr>
@@ -12611,7 +12841,7 @@
       </p:sp>
       <p:sp>
         <p:nvSpPr>
-          <p:cNvPr id="12" name="Shape 9"/>
+          <p:cNvPr id="13" name="Shape 10"/>
           <p:cNvSpPr/>
           <p:nvPr/>
         </p:nvSpPr>
@@ -12631,7 +12861,7 @@
       </p:sp>
       <p:sp>
         <p:nvSpPr>
-          <p:cNvPr id="13" name="Shape 10"/>
+          <p:cNvPr id="14" name="Shape 11"/>
           <p:cNvSpPr/>
           <p:nvPr/>
         </p:nvSpPr>
@@ -12651,7 +12881,7 @@
       </p:sp>
       <p:sp>
         <p:nvSpPr>
-          <p:cNvPr id="14" name="Text 11"/>
+          <p:cNvPr id="15" name="Text 12"/>
           <p:cNvSpPr/>
           <p:nvPr/>
         </p:nvSpPr>
@@ -12690,7 +12920,7 @@
       </p:sp>
       <p:sp>
         <p:nvSpPr>
-          <p:cNvPr id="15" name="Shape 12"/>
+          <p:cNvPr id="16" name="Shape 13"/>
           <p:cNvSpPr/>
           <p:nvPr/>
         </p:nvSpPr>
@@ -12717,7 +12947,7 @@
       </p:sp>
       <p:sp>
         <p:nvSpPr>
-          <p:cNvPr id="16" name="Shape 13"/>
+          <p:cNvPr id="17" name="Shape 14"/>
           <p:cNvSpPr/>
           <p:nvPr/>
         </p:nvSpPr>
@@ -12737,7 +12967,7 @@
       </p:sp>
       <p:sp>
         <p:nvSpPr>
-          <p:cNvPr id="17" name="Shape 14"/>
+          <p:cNvPr id="18" name="Shape 15"/>
           <p:cNvSpPr/>
           <p:nvPr/>
         </p:nvSpPr>
@@ -12757,7 +12987,7 @@
       </p:sp>
       <p:sp>
         <p:nvSpPr>
-          <p:cNvPr id="18" name="Text 15"/>
+          <p:cNvPr id="19" name="Text 16"/>
           <p:cNvSpPr/>
           <p:nvPr/>
         </p:nvSpPr>
@@ -12796,7 +13026,7 @@
       </p:sp>
       <p:sp>
         <p:nvSpPr>
-          <p:cNvPr id="19" name="Shape 16"/>
+          <p:cNvPr id="20" name="Shape 17"/>
           <p:cNvSpPr/>
           <p:nvPr/>
         </p:nvSpPr>
@@ -12823,7 +13053,7 @@
       </p:sp>
       <p:sp>
         <p:nvSpPr>
-          <p:cNvPr id="20" name="Shape 17"/>
+          <p:cNvPr id="21" name="Shape 18"/>
           <p:cNvSpPr/>
           <p:nvPr/>
         </p:nvSpPr>
@@ -12843,7 +13073,7 @@
       </p:sp>
       <p:sp>
         <p:nvSpPr>
-          <p:cNvPr id="21" name="Shape 18"/>
+          <p:cNvPr id="22" name="Shape 19"/>
           <p:cNvSpPr/>
           <p:nvPr/>
         </p:nvSpPr>
@@ -12863,7 +13093,7 @@
       </p:sp>
       <p:sp>
         <p:nvSpPr>
-          <p:cNvPr id="22" name="Text 19"/>
+          <p:cNvPr id="23" name="Text 20"/>
           <p:cNvSpPr/>
           <p:nvPr/>
         </p:nvSpPr>
@@ -12902,7 +13132,7 @@
       </p:sp>
       <p:sp>
         <p:nvSpPr>
-          <p:cNvPr id="23" name="Text 20"/>
+          <p:cNvPr id="24" name="Text 21"/>
           <p:cNvSpPr/>
           <p:nvPr/>
         </p:nvSpPr>
@@ -12951,7 +13181,7 @@
         </p:nvSpPr>
         <p:spPr>
           <a:xfrm>
-            <a:off x="11368735" y="6437376"/>
+            <a:off x="11368735" y="6327648"/>
             <a:ext cx="365760" cy="274320"/>
           </a:xfrm>
           <a:prstGeom prst="rect">
@@ -12998,13 +13228,6 @@
 <file path=ppt/slides/slide21.xml><?xml version="1.0" encoding="utf-8"?>
 <p:sld xmlns:a="http://schemas.openxmlformats.org/drawingml/2006/main" xmlns:r="http://schemas.openxmlformats.org/officeDocument/2006/relationships" xmlns:p="http://schemas.openxmlformats.org/presentationml/2006/main">
   <p:cSld name="Slide 21">
-    <p:bg>
-      <p:bgPr>
-        <a:solidFill>
-          <a:srgbClr val="FFFFFF"/>
-        </a:solidFill>
-      </p:bgPr>
-    </p:bg>
     <p:spTree>
       <p:nvGrpSpPr>
         <p:cNvPr id="1" name=""/>
@@ -13021,7 +13244,29 @@
       </p:grpSpPr>
       <p:sp>
         <p:nvSpPr>
-          <p:cNvPr id="2" name="Text 0"/>
+          <p:cNvPr id="2" name="Shape 0"/>
+          <p:cNvSpPr/>
+          <p:nvPr/>
+        </p:nvSpPr>
+        <p:spPr>
+          <a:xfrm>
+            <a:off x="231343" y="194767"/>
+            <a:ext cx="11716207" cy="6473952"/>
+          </a:xfrm>
+          <a:prstGeom prst="roundRect">
+            <a:avLst>
+              <a:gd name="adj" fmla="val 3107"/>
+            </a:avLst>
+          </a:prstGeom>
+          <a:solidFill>
+            <a:srgbClr val="FFFFFF"/>
+          </a:solidFill>
+          <a:ln/>
+        </p:spPr>
+      </p:sp>
+      <p:sp>
+        <p:nvSpPr>
+          <p:cNvPr id="3" name="Text 1"/>
           <p:cNvSpPr/>
           <p:nvPr/>
         </p:nvSpPr>
@@ -13060,7 +13305,7 @@
       </p:sp>
       <p:sp>
         <p:nvSpPr>
-          <p:cNvPr id="3" name="Shape 1"/>
+          <p:cNvPr id="4" name="Shape 2"/>
           <p:cNvSpPr/>
           <p:nvPr/>
         </p:nvSpPr>
@@ -13082,7 +13327,7 @@
       </p:sp>
       <p:sp>
         <p:nvSpPr>
-          <p:cNvPr id="4" name="Text 2"/>
+          <p:cNvPr id="5" name="Text 3"/>
           <p:cNvSpPr/>
           <p:nvPr/>
         </p:nvSpPr>
@@ -13121,7 +13366,7 @@
       </p:sp>
       <p:pic>
         <p:nvPicPr>
-          <p:cNvPr id="5" name="Image 0" descr="preencoded.png">    </p:cNvPr>
+          <p:cNvPr id="6" name="Image 0" descr="preencoded.png">    </p:cNvPr>
           <p:cNvPicPr>
             <a:picLocks noChangeAspect="1"/>
           </p:cNvPicPr>
@@ -13135,7 +13380,7 @@
         </p:blipFill>
         <p:spPr>
           <a:xfrm>
-            <a:off x="566928" y="6254496"/>
+            <a:off x="566928" y="6126480"/>
             <a:ext cx="1481328" cy="457200"/>
           </a:xfrm>
           <a:prstGeom prst="rect">
@@ -13145,7 +13390,7 @@
       </p:pic>
       <p:sp>
         <p:nvSpPr>
-          <p:cNvPr id="6" name="Shape 3"/>
+          <p:cNvPr id="7" name="Shape 4"/>
           <p:cNvSpPr/>
           <p:nvPr/>
         </p:nvSpPr>
@@ -13172,7 +13417,7 @@
       </p:sp>
       <p:sp>
         <p:nvSpPr>
-          <p:cNvPr id="7" name="Shape 4"/>
+          <p:cNvPr id="8" name="Shape 5"/>
           <p:cNvSpPr/>
           <p:nvPr/>
         </p:nvSpPr>
@@ -13192,7 +13437,7 @@
       </p:sp>
       <p:sp>
         <p:nvSpPr>
-          <p:cNvPr id="8" name="Shape 5"/>
+          <p:cNvPr id="9" name="Shape 6"/>
           <p:cNvSpPr/>
           <p:nvPr/>
         </p:nvSpPr>
@@ -13212,7 +13457,7 @@
       </p:sp>
       <p:sp>
         <p:nvSpPr>
-          <p:cNvPr id="9" name="Shape 6"/>
+          <p:cNvPr id="10" name="Shape 7"/>
           <p:cNvSpPr/>
           <p:nvPr/>
         </p:nvSpPr>
@@ -13232,7 +13477,7 @@
       </p:sp>
       <p:sp>
         <p:nvSpPr>
-          <p:cNvPr id="10" name="Text 7"/>
+          <p:cNvPr id="11" name="Text 8"/>
           <p:cNvSpPr/>
           <p:nvPr/>
         </p:nvSpPr>
@@ -13285,7 +13530,7 @@
       </p:sp>
       <p:sp>
         <p:nvSpPr>
-          <p:cNvPr id="11" name="Shape 8"/>
+          <p:cNvPr id="12" name="Shape 9"/>
           <p:cNvSpPr/>
           <p:nvPr/>
         </p:nvSpPr>
@@ -13312,7 +13557,7 @@
       </p:sp>
       <p:sp>
         <p:nvSpPr>
-          <p:cNvPr id="12" name="Shape 9"/>
+          <p:cNvPr id="13" name="Shape 10"/>
           <p:cNvSpPr/>
           <p:nvPr/>
         </p:nvSpPr>
@@ -13332,7 +13577,7 @@
       </p:sp>
       <p:sp>
         <p:nvSpPr>
-          <p:cNvPr id="13" name="Shape 10"/>
+          <p:cNvPr id="14" name="Shape 11"/>
           <p:cNvSpPr/>
           <p:nvPr/>
         </p:nvSpPr>
@@ -13352,7 +13597,7 @@
       </p:sp>
       <p:sp>
         <p:nvSpPr>
-          <p:cNvPr id="14" name="Shape 11"/>
+          <p:cNvPr id="15" name="Shape 12"/>
           <p:cNvSpPr/>
           <p:nvPr/>
         </p:nvSpPr>
@@ -13372,7 +13617,7 @@
       </p:sp>
       <p:sp>
         <p:nvSpPr>
-          <p:cNvPr id="15" name="Text 12"/>
+          <p:cNvPr id="16" name="Text 13"/>
           <p:cNvSpPr/>
           <p:nvPr/>
         </p:nvSpPr>
@@ -13425,7 +13670,7 @@
       </p:sp>
       <p:sp>
         <p:nvSpPr>
-          <p:cNvPr id="16" name="Shape 13"/>
+          <p:cNvPr id="17" name="Shape 14"/>
           <p:cNvSpPr/>
           <p:nvPr/>
         </p:nvSpPr>
@@ -13452,7 +13697,7 @@
       </p:sp>
       <p:sp>
         <p:nvSpPr>
-          <p:cNvPr id="17" name="Shape 14"/>
+          <p:cNvPr id="18" name="Shape 15"/>
           <p:cNvSpPr/>
           <p:nvPr/>
         </p:nvSpPr>
@@ -13472,7 +13717,7 @@
       </p:sp>
       <p:sp>
         <p:nvSpPr>
-          <p:cNvPr id="18" name="Shape 15"/>
+          <p:cNvPr id="19" name="Shape 16"/>
           <p:cNvSpPr/>
           <p:nvPr/>
         </p:nvSpPr>
@@ -13492,7 +13737,7 @@
       </p:sp>
       <p:sp>
         <p:nvSpPr>
-          <p:cNvPr id="19" name="Shape 16"/>
+          <p:cNvPr id="20" name="Shape 17"/>
           <p:cNvSpPr/>
           <p:nvPr/>
         </p:nvSpPr>
@@ -13512,7 +13757,7 @@
       </p:sp>
       <p:sp>
         <p:nvSpPr>
-          <p:cNvPr id="20" name="Text 17"/>
+          <p:cNvPr id="21" name="Text 18"/>
           <p:cNvSpPr/>
           <p:nvPr/>
         </p:nvSpPr>
@@ -13565,7 +13810,7 @@
       </p:sp>
       <p:sp>
         <p:nvSpPr>
-          <p:cNvPr id="21" name="Shape 18"/>
+          <p:cNvPr id="22" name="Shape 19"/>
           <p:cNvSpPr/>
           <p:nvPr/>
         </p:nvSpPr>
@@ -13592,7 +13837,7 @@
       </p:sp>
       <p:sp>
         <p:nvSpPr>
-          <p:cNvPr id="22" name="Shape 19"/>
+          <p:cNvPr id="23" name="Shape 20"/>
           <p:cNvSpPr/>
           <p:nvPr/>
         </p:nvSpPr>
@@ -13612,7 +13857,7 @@
       </p:sp>
       <p:sp>
         <p:nvSpPr>
-          <p:cNvPr id="23" name="Shape 20"/>
+          <p:cNvPr id="24" name="Shape 21"/>
           <p:cNvSpPr/>
           <p:nvPr/>
         </p:nvSpPr>
@@ -13632,7 +13877,7 @@
       </p:sp>
       <p:sp>
         <p:nvSpPr>
-          <p:cNvPr id="24" name="Shape 21"/>
+          <p:cNvPr id="25" name="Shape 22"/>
           <p:cNvSpPr/>
           <p:nvPr/>
         </p:nvSpPr>
@@ -13652,7 +13897,7 @@
       </p:sp>
       <p:sp>
         <p:nvSpPr>
-          <p:cNvPr id="25" name="Text 22"/>
+          <p:cNvPr id="26" name="Text 23"/>
           <p:cNvSpPr/>
           <p:nvPr/>
         </p:nvSpPr>
@@ -13715,7 +13960,7 @@
         </p:nvSpPr>
         <p:spPr>
           <a:xfrm>
-            <a:off x="11368735" y="6437376"/>
+            <a:off x="11368735" y="6327648"/>
             <a:ext cx="365760" cy="274320"/>
           </a:xfrm>
           <a:prstGeom prst="rect">
@@ -13762,13 +14007,6 @@
 <file path=ppt/slides/slide22.xml><?xml version="1.0" encoding="utf-8"?>
 <p:sld xmlns:a="http://schemas.openxmlformats.org/drawingml/2006/main" xmlns:r="http://schemas.openxmlformats.org/officeDocument/2006/relationships" xmlns:p="http://schemas.openxmlformats.org/presentationml/2006/main">
   <p:cSld name="Slide 22">
-    <p:bg>
-      <p:bgPr>
-        <a:solidFill>
-          <a:srgbClr val="FFFFFF"/>
-        </a:solidFill>
-      </p:bgPr>
-    </p:bg>
     <p:spTree>
       <p:nvGrpSpPr>
         <p:cNvPr id="1" name=""/>
@@ -13785,7 +14023,29 @@
       </p:grpSpPr>
       <p:sp>
         <p:nvSpPr>
-          <p:cNvPr id="2" name="Text 0"/>
+          <p:cNvPr id="2" name="Shape 0"/>
+          <p:cNvSpPr/>
+          <p:nvPr/>
+        </p:nvSpPr>
+        <p:spPr>
+          <a:xfrm>
+            <a:off x="231343" y="194767"/>
+            <a:ext cx="11716207" cy="6473952"/>
+          </a:xfrm>
+          <a:prstGeom prst="roundRect">
+            <a:avLst>
+              <a:gd name="adj" fmla="val 3107"/>
+            </a:avLst>
+          </a:prstGeom>
+          <a:solidFill>
+            <a:srgbClr val="FFFFFF"/>
+          </a:solidFill>
+          <a:ln/>
+        </p:spPr>
+      </p:sp>
+      <p:sp>
+        <p:nvSpPr>
+          <p:cNvPr id="3" name="Text 1"/>
           <p:cNvSpPr/>
           <p:nvPr/>
         </p:nvSpPr>
@@ -13824,7 +14084,7 @@
       </p:sp>
       <p:sp>
         <p:nvSpPr>
-          <p:cNvPr id="3" name="Shape 1"/>
+          <p:cNvPr id="4" name="Shape 2"/>
           <p:cNvSpPr/>
           <p:nvPr/>
         </p:nvSpPr>
@@ -13846,7 +14106,7 @@
       </p:sp>
       <p:sp>
         <p:nvSpPr>
-          <p:cNvPr id="4" name="Text 2"/>
+          <p:cNvPr id="5" name="Text 3"/>
           <p:cNvSpPr/>
           <p:nvPr/>
         </p:nvSpPr>
@@ -13885,7 +14145,7 @@
       </p:sp>
       <p:pic>
         <p:nvPicPr>
-          <p:cNvPr id="5" name="Image 0" descr="preencoded.png">    </p:cNvPr>
+          <p:cNvPr id="6" name="Image 0" descr="preencoded.png">    </p:cNvPr>
           <p:cNvPicPr>
             <a:picLocks noChangeAspect="1"/>
           </p:cNvPicPr>
@@ -13899,7 +14159,7 @@
         </p:blipFill>
         <p:spPr>
           <a:xfrm>
-            <a:off x="566928" y="6254496"/>
+            <a:off x="566928" y="6126480"/>
             <a:ext cx="1481328" cy="457200"/>
           </a:xfrm>
           <a:prstGeom prst="rect">
@@ -13909,7 +14169,7 @@
       </p:pic>
       <p:sp>
         <p:nvSpPr>
-          <p:cNvPr id="6" name="Shape 3"/>
+          <p:cNvPr id="7" name="Shape 4"/>
           <p:cNvSpPr/>
           <p:nvPr/>
         </p:nvSpPr>
@@ -13936,7 +14196,7 @@
       </p:sp>
       <p:sp>
         <p:nvSpPr>
-          <p:cNvPr id="7" name="Text 4"/>
+          <p:cNvPr id="8" name="Text 5"/>
           <p:cNvSpPr/>
           <p:nvPr/>
         </p:nvSpPr>
@@ -13975,7 +14235,7 @@
       </p:sp>
       <p:sp>
         <p:nvSpPr>
-          <p:cNvPr id="8" name="Text 5"/>
+          <p:cNvPr id="9" name="Text 6"/>
           <p:cNvSpPr/>
           <p:nvPr/>
         </p:nvSpPr>
@@ -14014,7 +14274,7 @@
       </p:sp>
       <p:sp>
         <p:nvSpPr>
-          <p:cNvPr id="9" name="Text 6"/>
+          <p:cNvPr id="10" name="Text 7"/>
           <p:cNvSpPr/>
           <p:nvPr/>
         </p:nvSpPr>
@@ -14053,7 +14313,7 @@
       </p:sp>
       <p:sp>
         <p:nvSpPr>
-          <p:cNvPr id="10" name="Text 7"/>
+          <p:cNvPr id="11" name="Text 8"/>
           <p:cNvSpPr/>
           <p:nvPr/>
         </p:nvSpPr>
@@ -14106,7 +14366,7 @@
       </p:sp>
       <p:sp>
         <p:nvSpPr>
-          <p:cNvPr id="11" name="Text 8"/>
+          <p:cNvPr id="12" name="Text 9"/>
           <p:cNvSpPr/>
           <p:nvPr/>
         </p:nvSpPr>
@@ -14159,7 +14419,7 @@
       </p:sp>
       <p:sp>
         <p:nvSpPr>
-          <p:cNvPr id="12" name="Text 9"/>
+          <p:cNvPr id="13" name="Text 10"/>
           <p:cNvSpPr/>
           <p:nvPr/>
         </p:nvSpPr>
@@ -14212,7 +14472,7 @@
       </p:sp>
       <p:sp>
         <p:nvSpPr>
-          <p:cNvPr id="13" name="Shape 10"/>
+          <p:cNvPr id="14" name="Shape 11"/>
           <p:cNvSpPr/>
           <p:nvPr/>
         </p:nvSpPr>
@@ -14234,7 +14494,7 @@
       </p:sp>
       <p:sp>
         <p:nvSpPr>
-          <p:cNvPr id="14" name="Text 11"/>
+          <p:cNvPr id="15" name="Text 12"/>
           <p:cNvSpPr/>
           <p:nvPr/>
         </p:nvSpPr>
@@ -14273,7 +14533,7 @@
       </p:sp>
       <p:sp>
         <p:nvSpPr>
-          <p:cNvPr id="15" name="Text 12"/>
+          <p:cNvPr id="16" name="Text 13"/>
           <p:cNvSpPr/>
           <p:nvPr/>
         </p:nvSpPr>
@@ -14345,7 +14605,7 @@
         </p:nvSpPr>
         <p:spPr>
           <a:xfrm>
-            <a:off x="11368735" y="6437376"/>
+            <a:off x="11368735" y="6327648"/>
             <a:ext cx="365760" cy="274320"/>
           </a:xfrm>
           <a:prstGeom prst="rect">
@@ -14392,13 +14652,6 @@
 <file path=ppt/slides/slide23.xml><?xml version="1.0" encoding="utf-8"?>
 <p:sld xmlns:a="http://schemas.openxmlformats.org/drawingml/2006/main" xmlns:r="http://schemas.openxmlformats.org/officeDocument/2006/relationships" xmlns:p="http://schemas.openxmlformats.org/presentationml/2006/main">
   <p:cSld name="Slide 23">
-    <p:bg>
-      <p:bgPr>
-        <a:solidFill>
-          <a:srgbClr val="1B0942"/>
-        </a:solidFill>
-      </p:bgPr>
-    </p:bg>
     <p:spTree>
       <p:nvGrpSpPr>
         <p:cNvPr id="1" name=""/>
@@ -14915,13 +15168,6 @@
 <file path=ppt/slides/slide3.xml><?xml version="1.0" encoding="utf-8"?>
 <p:sld xmlns:a="http://schemas.openxmlformats.org/drawingml/2006/main" xmlns:r="http://schemas.openxmlformats.org/officeDocument/2006/relationships" xmlns:p="http://schemas.openxmlformats.org/presentationml/2006/main">
   <p:cSld name="Slide 3">
-    <p:bg>
-      <p:bgPr>
-        <a:solidFill>
-          <a:srgbClr val="FFFFFF"/>
-        </a:solidFill>
-      </p:bgPr>
-    </p:bg>
     <p:spTree>
       <p:nvGrpSpPr>
         <p:cNvPr id="1" name=""/>
@@ -14938,7 +15184,29 @@
       </p:grpSpPr>
       <p:sp>
         <p:nvSpPr>
-          <p:cNvPr id="2" name="Text 0"/>
+          <p:cNvPr id="2" name="Shape 0"/>
+          <p:cNvSpPr/>
+          <p:nvPr/>
+        </p:nvSpPr>
+        <p:spPr>
+          <a:xfrm>
+            <a:off x="231343" y="194767"/>
+            <a:ext cx="11716207" cy="6473952"/>
+          </a:xfrm>
+          <a:prstGeom prst="roundRect">
+            <a:avLst>
+              <a:gd name="adj" fmla="val 3107"/>
+            </a:avLst>
+          </a:prstGeom>
+          <a:solidFill>
+            <a:srgbClr val="FFFFFF"/>
+          </a:solidFill>
+          <a:ln/>
+        </p:spPr>
+      </p:sp>
+      <p:sp>
+        <p:nvSpPr>
+          <p:cNvPr id="3" name="Text 1"/>
           <p:cNvSpPr/>
           <p:nvPr/>
         </p:nvSpPr>
@@ -14977,7 +15245,7 @@
       </p:sp>
       <p:sp>
         <p:nvSpPr>
-          <p:cNvPr id="3" name="Shape 1"/>
+          <p:cNvPr id="4" name="Shape 2"/>
           <p:cNvSpPr/>
           <p:nvPr/>
         </p:nvSpPr>
@@ -14999,7 +15267,7 @@
       </p:sp>
       <p:sp>
         <p:nvSpPr>
-          <p:cNvPr id="4" name="Text 2"/>
+          <p:cNvPr id="5" name="Text 3"/>
           <p:cNvSpPr/>
           <p:nvPr/>
         </p:nvSpPr>
@@ -15038,7 +15306,7 @@
       </p:sp>
       <p:pic>
         <p:nvPicPr>
-          <p:cNvPr id="5" name="Image 0" descr="preencoded.png">    </p:cNvPr>
+          <p:cNvPr id="6" name="Image 0" descr="preencoded.png">    </p:cNvPr>
           <p:cNvPicPr>
             <a:picLocks noChangeAspect="1"/>
           </p:cNvPicPr>
@@ -15052,7 +15320,7 @@
         </p:blipFill>
         <p:spPr>
           <a:xfrm>
-            <a:off x="566928" y="6254496"/>
+            <a:off x="566928" y="6126480"/>
             <a:ext cx="1481328" cy="457200"/>
           </a:xfrm>
           <a:prstGeom prst="rect">
@@ -15062,7 +15330,7 @@
       </p:pic>
       <p:sp>
         <p:nvSpPr>
-          <p:cNvPr id="6" name="Shape 3"/>
+          <p:cNvPr id="7" name="Shape 4"/>
           <p:cNvSpPr/>
           <p:nvPr/>
         </p:nvSpPr>
@@ -15089,7 +15357,7 @@
       </p:sp>
       <p:sp>
         <p:nvSpPr>
-          <p:cNvPr id="7" name="Shape 4"/>
+          <p:cNvPr id="8" name="Shape 5"/>
           <p:cNvSpPr/>
           <p:nvPr/>
         </p:nvSpPr>
@@ -15109,7 +15377,7 @@
       </p:sp>
       <p:sp>
         <p:nvSpPr>
-          <p:cNvPr id="8" name="Text 5"/>
+          <p:cNvPr id="9" name="Text 6"/>
           <p:cNvSpPr/>
           <p:nvPr/>
         </p:nvSpPr>
@@ -15148,7 +15416,7 @@
       </p:sp>
       <p:sp>
         <p:nvSpPr>
-          <p:cNvPr id="9" name="Text 6"/>
+          <p:cNvPr id="10" name="Text 7"/>
           <p:cNvSpPr/>
           <p:nvPr/>
         </p:nvSpPr>
@@ -15187,7 +15455,7 @@
       </p:sp>
       <p:sp>
         <p:nvSpPr>
-          <p:cNvPr id="10" name="Shape 7"/>
+          <p:cNvPr id="11" name="Shape 8"/>
           <p:cNvSpPr/>
           <p:nvPr/>
         </p:nvSpPr>
@@ -15214,7 +15482,7 @@
       </p:sp>
       <p:sp>
         <p:nvSpPr>
-          <p:cNvPr id="11" name="Shape 8"/>
+          <p:cNvPr id="12" name="Shape 9"/>
           <p:cNvSpPr/>
           <p:nvPr/>
         </p:nvSpPr>
@@ -15234,7 +15502,7 @@
       </p:sp>
       <p:sp>
         <p:nvSpPr>
-          <p:cNvPr id="12" name="Text 9"/>
+          <p:cNvPr id="13" name="Text 10"/>
           <p:cNvSpPr/>
           <p:nvPr/>
         </p:nvSpPr>
@@ -15273,7 +15541,7 @@
       </p:sp>
       <p:sp>
         <p:nvSpPr>
-          <p:cNvPr id="13" name="Text 10"/>
+          <p:cNvPr id="14" name="Text 11"/>
           <p:cNvSpPr/>
           <p:nvPr/>
         </p:nvSpPr>
@@ -15312,7 +15580,7 @@
       </p:sp>
       <p:sp>
         <p:nvSpPr>
-          <p:cNvPr id="14" name="Shape 11"/>
+          <p:cNvPr id="15" name="Shape 12"/>
           <p:cNvSpPr/>
           <p:nvPr/>
         </p:nvSpPr>
@@ -15339,7 +15607,7 @@
       </p:sp>
       <p:sp>
         <p:nvSpPr>
-          <p:cNvPr id="15" name="Shape 12"/>
+          <p:cNvPr id="16" name="Shape 13"/>
           <p:cNvSpPr/>
           <p:nvPr/>
         </p:nvSpPr>
@@ -15359,7 +15627,7 @@
       </p:sp>
       <p:sp>
         <p:nvSpPr>
-          <p:cNvPr id="16" name="Text 13"/>
+          <p:cNvPr id="17" name="Text 14"/>
           <p:cNvSpPr/>
           <p:nvPr/>
         </p:nvSpPr>
@@ -15398,7 +15666,7 @@
       </p:sp>
       <p:sp>
         <p:nvSpPr>
-          <p:cNvPr id="17" name="Text 14"/>
+          <p:cNvPr id="18" name="Text 15"/>
           <p:cNvSpPr/>
           <p:nvPr/>
         </p:nvSpPr>
@@ -15437,7 +15705,7 @@
       </p:sp>
       <p:sp>
         <p:nvSpPr>
-          <p:cNvPr id="18" name="Shape 15"/>
+          <p:cNvPr id="19" name="Shape 16"/>
           <p:cNvSpPr/>
           <p:nvPr/>
         </p:nvSpPr>
@@ -15464,7 +15732,7 @@
       </p:sp>
       <p:sp>
         <p:nvSpPr>
-          <p:cNvPr id="19" name="Shape 16"/>
+          <p:cNvPr id="20" name="Shape 17"/>
           <p:cNvSpPr/>
           <p:nvPr/>
         </p:nvSpPr>
@@ -15484,7 +15752,7 @@
       </p:sp>
       <p:sp>
         <p:nvSpPr>
-          <p:cNvPr id="20" name="Text 17"/>
+          <p:cNvPr id="21" name="Text 18"/>
           <p:cNvSpPr/>
           <p:nvPr/>
         </p:nvSpPr>
@@ -15523,7 +15791,7 @@
       </p:sp>
       <p:sp>
         <p:nvSpPr>
-          <p:cNvPr id="21" name="Text 18"/>
+          <p:cNvPr id="22" name="Text 19"/>
           <p:cNvSpPr/>
           <p:nvPr/>
         </p:nvSpPr>
@@ -15562,7 +15830,7 @@
       </p:sp>
       <p:sp>
         <p:nvSpPr>
-          <p:cNvPr id="22" name="Shape 19"/>
+          <p:cNvPr id="23" name="Shape 20"/>
           <p:cNvSpPr/>
           <p:nvPr/>
         </p:nvSpPr>
@@ -15589,7 +15857,7 @@
       </p:sp>
       <p:sp>
         <p:nvSpPr>
-          <p:cNvPr id="23" name="Shape 20"/>
+          <p:cNvPr id="24" name="Shape 21"/>
           <p:cNvSpPr/>
           <p:nvPr/>
         </p:nvSpPr>
@@ -15609,7 +15877,7 @@
       </p:sp>
       <p:sp>
         <p:nvSpPr>
-          <p:cNvPr id="24" name="Text 21"/>
+          <p:cNvPr id="25" name="Text 22"/>
           <p:cNvSpPr/>
           <p:nvPr/>
         </p:nvSpPr>
@@ -15648,7 +15916,7 @@
       </p:sp>
       <p:sp>
         <p:nvSpPr>
-          <p:cNvPr id="25" name="Text 22"/>
+          <p:cNvPr id="26" name="Text 23"/>
           <p:cNvSpPr/>
           <p:nvPr/>
         </p:nvSpPr>
@@ -15687,7 +15955,7 @@
       </p:sp>
       <p:sp>
         <p:nvSpPr>
-          <p:cNvPr id="26" name="Shape 23"/>
+          <p:cNvPr id="27" name="Shape 24"/>
           <p:cNvSpPr/>
           <p:nvPr/>
         </p:nvSpPr>
@@ -15714,7 +15982,7 @@
       </p:sp>
       <p:sp>
         <p:nvSpPr>
-          <p:cNvPr id="27" name="Shape 24"/>
+          <p:cNvPr id="28" name="Shape 25"/>
           <p:cNvSpPr/>
           <p:nvPr/>
         </p:nvSpPr>
@@ -15734,7 +16002,7 @@
       </p:sp>
       <p:sp>
         <p:nvSpPr>
-          <p:cNvPr id="28" name="Text 25"/>
+          <p:cNvPr id="29" name="Text 26"/>
           <p:cNvSpPr/>
           <p:nvPr/>
         </p:nvSpPr>
@@ -15773,7 +16041,7 @@
       </p:sp>
       <p:sp>
         <p:nvSpPr>
-          <p:cNvPr id="29" name="Text 26"/>
+          <p:cNvPr id="30" name="Text 27"/>
           <p:cNvSpPr/>
           <p:nvPr/>
         </p:nvSpPr>
@@ -15812,7 +16080,7 @@
       </p:sp>
       <p:sp>
         <p:nvSpPr>
-          <p:cNvPr id="30" name="Shape 27"/>
+          <p:cNvPr id="31" name="Shape 28"/>
           <p:cNvSpPr/>
           <p:nvPr/>
         </p:nvSpPr>
@@ -15839,7 +16107,7 @@
       </p:sp>
       <p:sp>
         <p:nvSpPr>
-          <p:cNvPr id="31" name="Shape 28"/>
+          <p:cNvPr id="32" name="Shape 29"/>
           <p:cNvSpPr/>
           <p:nvPr/>
         </p:nvSpPr>
@@ -15859,7 +16127,7 @@
       </p:sp>
       <p:sp>
         <p:nvSpPr>
-          <p:cNvPr id="32" name="Text 29"/>
+          <p:cNvPr id="33" name="Text 30"/>
           <p:cNvSpPr/>
           <p:nvPr/>
         </p:nvSpPr>
@@ -15898,7 +16166,7 @@
       </p:sp>
       <p:sp>
         <p:nvSpPr>
-          <p:cNvPr id="33" name="Text 30"/>
+          <p:cNvPr id="34" name="Text 31"/>
           <p:cNvSpPr/>
           <p:nvPr/>
         </p:nvSpPr>
@@ -15937,7 +16205,7 @@
       </p:sp>
       <p:sp>
         <p:nvSpPr>
-          <p:cNvPr id="34" name="Shape 31"/>
+          <p:cNvPr id="35" name="Shape 32"/>
           <p:cNvSpPr/>
           <p:nvPr/>
         </p:nvSpPr>
@@ -15964,7 +16232,7 @@
       </p:sp>
       <p:sp>
         <p:nvSpPr>
-          <p:cNvPr id="35" name="Shape 32"/>
+          <p:cNvPr id="36" name="Shape 33"/>
           <p:cNvSpPr/>
           <p:nvPr/>
         </p:nvSpPr>
@@ -15984,7 +16252,7 @@
       </p:sp>
       <p:sp>
         <p:nvSpPr>
-          <p:cNvPr id="36" name="Text 33"/>
+          <p:cNvPr id="37" name="Text 34"/>
           <p:cNvSpPr/>
           <p:nvPr/>
         </p:nvSpPr>
@@ -16023,7 +16291,7 @@
       </p:sp>
       <p:sp>
         <p:nvSpPr>
-          <p:cNvPr id="37" name="Text 34"/>
+          <p:cNvPr id="38" name="Text 35"/>
           <p:cNvSpPr/>
           <p:nvPr/>
         </p:nvSpPr>
@@ -16062,7 +16330,7 @@
       </p:sp>
       <p:sp>
         <p:nvSpPr>
-          <p:cNvPr id="38" name="Shape 35"/>
+          <p:cNvPr id="39" name="Shape 36"/>
           <p:cNvSpPr/>
           <p:nvPr/>
         </p:nvSpPr>
@@ -16084,7 +16352,7 @@
       </p:sp>
       <p:sp>
         <p:nvSpPr>
-          <p:cNvPr id="39" name="Shape 36"/>
+          <p:cNvPr id="40" name="Shape 37"/>
           <p:cNvSpPr/>
           <p:nvPr/>
         </p:nvSpPr>
@@ -16104,7 +16372,7 @@
       </p:sp>
       <p:sp>
         <p:nvSpPr>
-          <p:cNvPr id="40" name="Text 37"/>
+          <p:cNvPr id="41" name="Text 38"/>
           <p:cNvSpPr/>
           <p:nvPr/>
         </p:nvSpPr>
@@ -16143,7 +16411,7 @@
       </p:sp>
       <p:sp>
         <p:nvSpPr>
-          <p:cNvPr id="41" name="Text 38"/>
+          <p:cNvPr id="42" name="Text 39"/>
           <p:cNvSpPr/>
           <p:nvPr/>
         </p:nvSpPr>
@@ -16182,7 +16450,7 @@
       </p:sp>
       <p:sp>
         <p:nvSpPr>
-          <p:cNvPr id="42" name="Shape 39"/>
+          <p:cNvPr id="43" name="Shape 40"/>
           <p:cNvSpPr/>
           <p:nvPr/>
         </p:nvSpPr>
@@ -16209,7 +16477,7 @@
       </p:sp>
       <p:sp>
         <p:nvSpPr>
-          <p:cNvPr id="43" name="Shape 40"/>
+          <p:cNvPr id="44" name="Shape 41"/>
           <p:cNvSpPr/>
           <p:nvPr/>
         </p:nvSpPr>
@@ -16229,7 +16497,7 @@
       </p:sp>
       <p:sp>
         <p:nvSpPr>
-          <p:cNvPr id="44" name="Text 41"/>
+          <p:cNvPr id="45" name="Text 42"/>
           <p:cNvSpPr/>
           <p:nvPr/>
         </p:nvSpPr>
@@ -16268,7 +16536,7 @@
       </p:sp>
       <p:sp>
         <p:nvSpPr>
-          <p:cNvPr id="45" name="Text 42"/>
+          <p:cNvPr id="46" name="Text 43"/>
           <p:cNvSpPr/>
           <p:nvPr/>
         </p:nvSpPr>
@@ -16307,7 +16575,7 @@
       </p:sp>
       <p:sp>
         <p:nvSpPr>
-          <p:cNvPr id="46" name="Shape 43"/>
+          <p:cNvPr id="47" name="Shape 44"/>
           <p:cNvSpPr/>
           <p:nvPr/>
         </p:nvSpPr>
@@ -16334,7 +16602,7 @@
       </p:sp>
       <p:sp>
         <p:nvSpPr>
-          <p:cNvPr id="47" name="Shape 44"/>
+          <p:cNvPr id="48" name="Shape 45"/>
           <p:cNvSpPr/>
           <p:nvPr/>
         </p:nvSpPr>
@@ -16354,7 +16622,7 @@
       </p:sp>
       <p:sp>
         <p:nvSpPr>
-          <p:cNvPr id="48" name="Text 45"/>
+          <p:cNvPr id="49" name="Text 46"/>
           <p:cNvSpPr/>
           <p:nvPr/>
         </p:nvSpPr>
@@ -16393,7 +16661,7 @@
       </p:sp>
       <p:sp>
         <p:nvSpPr>
-          <p:cNvPr id="49" name="Text 46"/>
+          <p:cNvPr id="50" name="Text 47"/>
           <p:cNvSpPr/>
           <p:nvPr/>
         </p:nvSpPr>
@@ -16432,7 +16700,7 @@
       </p:sp>
       <p:sp>
         <p:nvSpPr>
-          <p:cNvPr id="50" name="Shape 47"/>
+          <p:cNvPr id="51" name="Shape 48"/>
           <p:cNvSpPr/>
           <p:nvPr/>
         </p:nvSpPr>
@@ -16459,7 +16727,7 @@
       </p:sp>
       <p:sp>
         <p:nvSpPr>
-          <p:cNvPr id="51" name="Text 48"/>
+          <p:cNvPr id="52" name="Text 49"/>
           <p:cNvSpPr/>
           <p:nvPr/>
         </p:nvSpPr>
@@ -16511,7 +16779,7 @@
         </p:nvSpPr>
         <p:spPr>
           <a:xfrm>
-            <a:off x="11368735" y="6437376"/>
+            <a:off x="11368735" y="6327648"/>
             <a:ext cx="365760" cy="274320"/>
           </a:xfrm>
           <a:prstGeom prst="rect">
@@ -16558,13 +16826,6 @@
 <file path=ppt/slides/slide4.xml><?xml version="1.0" encoding="utf-8"?>
 <p:sld xmlns:a="http://schemas.openxmlformats.org/drawingml/2006/main" xmlns:r="http://schemas.openxmlformats.org/officeDocument/2006/relationships" xmlns:p="http://schemas.openxmlformats.org/presentationml/2006/main">
   <p:cSld name="Slide 4">
-    <p:bg>
-      <p:bgPr>
-        <a:solidFill>
-          <a:srgbClr val="FFFFFF"/>
-        </a:solidFill>
-      </p:bgPr>
-    </p:bg>
     <p:spTree>
       <p:nvGrpSpPr>
         <p:cNvPr id="1" name=""/>
@@ -16581,7 +16842,29 @@
       </p:grpSpPr>
       <p:sp>
         <p:nvSpPr>
-          <p:cNvPr id="2" name="Text 0"/>
+          <p:cNvPr id="2" name="Shape 0"/>
+          <p:cNvSpPr/>
+          <p:nvPr/>
+        </p:nvSpPr>
+        <p:spPr>
+          <a:xfrm>
+            <a:off x="231343" y="194767"/>
+            <a:ext cx="11716207" cy="6473952"/>
+          </a:xfrm>
+          <a:prstGeom prst="roundRect">
+            <a:avLst>
+              <a:gd name="adj" fmla="val 3107"/>
+            </a:avLst>
+          </a:prstGeom>
+          <a:solidFill>
+            <a:srgbClr val="FFFFFF"/>
+          </a:solidFill>
+          <a:ln/>
+        </p:spPr>
+      </p:sp>
+      <p:sp>
+        <p:nvSpPr>
+          <p:cNvPr id="3" name="Text 1"/>
           <p:cNvSpPr/>
           <p:nvPr/>
         </p:nvSpPr>
@@ -16620,7 +16903,7 @@
       </p:sp>
       <p:sp>
         <p:nvSpPr>
-          <p:cNvPr id="3" name="Text 1"/>
+          <p:cNvPr id="4" name="Text 2"/>
           <p:cNvSpPr/>
           <p:nvPr/>
         </p:nvSpPr>
@@ -16662,7 +16945,7 @@
       </p:sp>
       <p:sp>
         <p:nvSpPr>
-          <p:cNvPr id="4" name="Shape 2"/>
+          <p:cNvPr id="5" name="Shape 3"/>
           <p:cNvSpPr/>
           <p:nvPr/>
         </p:nvSpPr>
@@ -16684,7 +16967,7 @@
       </p:sp>
       <p:sp>
         <p:nvSpPr>
-          <p:cNvPr id="5" name="Text 3"/>
+          <p:cNvPr id="6" name="Text 4"/>
           <p:cNvSpPr/>
           <p:nvPr/>
         </p:nvSpPr>
@@ -16723,7 +17006,7 @@
       </p:sp>
       <p:pic>
         <p:nvPicPr>
-          <p:cNvPr id="6" name="Image 0" descr="preencoded.png">    </p:cNvPr>
+          <p:cNvPr id="7" name="Image 0" descr="preencoded.png">    </p:cNvPr>
           <p:cNvPicPr>
             <a:picLocks noChangeAspect="1"/>
           </p:cNvPicPr>
@@ -16737,7 +17020,7 @@
         </p:blipFill>
         <p:spPr>
           <a:xfrm>
-            <a:off x="566928" y="6254496"/>
+            <a:off x="566928" y="6126480"/>
             <a:ext cx="1481328" cy="457200"/>
           </a:xfrm>
           <a:prstGeom prst="rect">
@@ -16747,7 +17030,7 @@
       </p:pic>
       <p:sp>
         <p:nvSpPr>
-          <p:cNvPr id="7" name="Shape 4"/>
+          <p:cNvPr id="8" name="Shape 5"/>
           <p:cNvSpPr/>
           <p:nvPr/>
         </p:nvSpPr>
@@ -16774,7 +17057,7 @@
       </p:sp>
       <p:sp>
         <p:nvSpPr>
-          <p:cNvPr id="8" name="Text 5"/>
+          <p:cNvPr id="9" name="Text 6"/>
           <p:cNvSpPr/>
           <p:nvPr/>
         </p:nvSpPr>
@@ -16813,7 +17096,7 @@
       </p:sp>
       <p:sp>
         <p:nvSpPr>
-          <p:cNvPr id="9" name="Text 6"/>
+          <p:cNvPr id="10" name="Text 7"/>
           <p:cNvSpPr/>
           <p:nvPr/>
         </p:nvSpPr>
@@ -16855,7 +17138,7 @@
       </p:sp>
       <p:sp>
         <p:nvSpPr>
-          <p:cNvPr id="10" name="Shape 7"/>
+          <p:cNvPr id="11" name="Shape 8"/>
           <p:cNvSpPr/>
           <p:nvPr/>
         </p:nvSpPr>
@@ -16882,7 +17165,7 @@
       </p:sp>
       <p:sp>
         <p:nvSpPr>
-          <p:cNvPr id="11" name="Text 8"/>
+          <p:cNvPr id="12" name="Text 9"/>
           <p:cNvSpPr/>
           <p:nvPr/>
         </p:nvSpPr>
@@ -16921,7 +17204,7 @@
       </p:sp>
       <p:sp>
         <p:nvSpPr>
-          <p:cNvPr id="12" name="Text 9"/>
+          <p:cNvPr id="13" name="Text 10"/>
           <p:cNvSpPr/>
           <p:nvPr/>
         </p:nvSpPr>
@@ -16963,7 +17246,7 @@
       </p:sp>
       <p:sp>
         <p:nvSpPr>
-          <p:cNvPr id="13" name="Shape 10"/>
+          <p:cNvPr id="14" name="Shape 11"/>
           <p:cNvSpPr/>
           <p:nvPr/>
         </p:nvSpPr>
@@ -16990,7 +17273,7 @@
       </p:sp>
       <p:sp>
         <p:nvSpPr>
-          <p:cNvPr id="14" name="Text 11"/>
+          <p:cNvPr id="15" name="Text 12"/>
           <p:cNvSpPr/>
           <p:nvPr/>
         </p:nvSpPr>
@@ -17029,7 +17312,7 @@
       </p:sp>
       <p:sp>
         <p:nvSpPr>
-          <p:cNvPr id="15" name="Text 12"/>
+          <p:cNvPr id="16" name="Text 13"/>
           <p:cNvSpPr/>
           <p:nvPr/>
         </p:nvSpPr>
@@ -17071,7 +17354,7 @@
       </p:sp>
       <p:sp>
         <p:nvSpPr>
-          <p:cNvPr id="16" name="Shape 13"/>
+          <p:cNvPr id="17" name="Shape 14"/>
           <p:cNvSpPr/>
           <p:nvPr/>
         </p:nvSpPr>
@@ -17098,7 +17381,7 @@
       </p:sp>
       <p:sp>
         <p:nvSpPr>
-          <p:cNvPr id="17" name="Text 14"/>
+          <p:cNvPr id="18" name="Text 15"/>
           <p:cNvSpPr/>
           <p:nvPr/>
         </p:nvSpPr>
@@ -17137,7 +17420,7 @@
       </p:sp>
       <p:sp>
         <p:nvSpPr>
-          <p:cNvPr id="18" name="Text 15"/>
+          <p:cNvPr id="19" name="Text 16"/>
           <p:cNvSpPr/>
           <p:nvPr/>
         </p:nvSpPr>
@@ -17179,7 +17462,7 @@
       </p:sp>
       <p:sp>
         <p:nvSpPr>
-          <p:cNvPr id="19" name="Shape 16"/>
+          <p:cNvPr id="20" name="Shape 17"/>
           <p:cNvSpPr/>
           <p:nvPr/>
         </p:nvSpPr>
@@ -17206,7 +17489,7 @@
       </p:sp>
       <p:sp>
         <p:nvSpPr>
-          <p:cNvPr id="20" name="Text 17"/>
+          <p:cNvPr id="21" name="Text 18"/>
           <p:cNvSpPr/>
           <p:nvPr/>
         </p:nvSpPr>
@@ -17245,7 +17528,7 @@
       </p:sp>
       <p:sp>
         <p:nvSpPr>
-          <p:cNvPr id="21" name="Text 18"/>
+          <p:cNvPr id="22" name="Text 19"/>
           <p:cNvSpPr/>
           <p:nvPr/>
         </p:nvSpPr>
@@ -17287,7 +17570,7 @@
       </p:sp>
       <p:sp>
         <p:nvSpPr>
-          <p:cNvPr id="22" name="Shape 19"/>
+          <p:cNvPr id="23" name="Shape 20"/>
           <p:cNvSpPr/>
           <p:nvPr/>
         </p:nvSpPr>
@@ -17314,7 +17597,7 @@
       </p:sp>
       <p:sp>
         <p:nvSpPr>
-          <p:cNvPr id="23" name="Text 20"/>
+          <p:cNvPr id="24" name="Text 21"/>
           <p:cNvSpPr/>
           <p:nvPr/>
         </p:nvSpPr>
@@ -17353,7 +17636,7 @@
       </p:sp>
       <p:sp>
         <p:nvSpPr>
-          <p:cNvPr id="24" name="Text 21"/>
+          <p:cNvPr id="25" name="Text 22"/>
           <p:cNvSpPr/>
           <p:nvPr/>
         </p:nvSpPr>
@@ -17395,7 +17678,7 @@
       </p:sp>
       <p:sp>
         <p:nvSpPr>
-          <p:cNvPr id="25" name="Shape 22"/>
+          <p:cNvPr id="26" name="Shape 23"/>
           <p:cNvSpPr/>
           <p:nvPr/>
         </p:nvSpPr>
@@ -17422,7 +17705,7 @@
       </p:sp>
       <p:sp>
         <p:nvSpPr>
-          <p:cNvPr id="26" name="Text 23"/>
+          <p:cNvPr id="27" name="Text 24"/>
           <p:cNvSpPr/>
           <p:nvPr/>
         </p:nvSpPr>
@@ -17474,7 +17757,7 @@
         </p:nvSpPr>
         <p:spPr>
           <a:xfrm>
-            <a:off x="11368735" y="6437376"/>
+            <a:off x="11368735" y="6327648"/>
             <a:ext cx="365760" cy="274320"/>
           </a:xfrm>
           <a:prstGeom prst="rect">
@@ -17521,13 +17804,6 @@
 <file path=ppt/slides/slide5.xml><?xml version="1.0" encoding="utf-8"?>
 <p:sld xmlns:a="http://schemas.openxmlformats.org/drawingml/2006/main" xmlns:r="http://schemas.openxmlformats.org/officeDocument/2006/relationships" xmlns:p="http://schemas.openxmlformats.org/presentationml/2006/main">
   <p:cSld name="Slide 5">
-    <p:bg>
-      <p:bgPr>
-        <a:solidFill>
-          <a:srgbClr val="FFFFFF"/>
-        </a:solidFill>
-      </p:bgPr>
-    </p:bg>
     <p:spTree>
       <p:nvGrpSpPr>
         <p:cNvPr id="1" name=""/>
@@ -17544,7 +17820,29 @@
       </p:grpSpPr>
       <p:sp>
         <p:nvSpPr>
-          <p:cNvPr id="2" name="Text 0"/>
+          <p:cNvPr id="2" name="Shape 0"/>
+          <p:cNvSpPr/>
+          <p:nvPr/>
+        </p:nvSpPr>
+        <p:spPr>
+          <a:xfrm>
+            <a:off x="231343" y="194767"/>
+            <a:ext cx="11716207" cy="6473952"/>
+          </a:xfrm>
+          <a:prstGeom prst="roundRect">
+            <a:avLst>
+              <a:gd name="adj" fmla="val 3107"/>
+            </a:avLst>
+          </a:prstGeom>
+          <a:solidFill>
+            <a:srgbClr val="FFFFFF"/>
+          </a:solidFill>
+          <a:ln/>
+        </p:spPr>
+      </p:sp>
+      <p:sp>
+        <p:nvSpPr>
+          <p:cNvPr id="3" name="Text 1"/>
           <p:cNvSpPr/>
           <p:nvPr/>
         </p:nvSpPr>
@@ -17583,7 +17881,7 @@
       </p:sp>
       <p:sp>
         <p:nvSpPr>
-          <p:cNvPr id="3" name="Text 1"/>
+          <p:cNvPr id="4" name="Text 2"/>
           <p:cNvSpPr/>
           <p:nvPr/>
         </p:nvSpPr>
@@ -17622,7 +17920,7 @@
       </p:sp>
       <p:sp>
         <p:nvSpPr>
-          <p:cNvPr id="4" name="Shape 2"/>
+          <p:cNvPr id="5" name="Shape 3"/>
           <p:cNvSpPr/>
           <p:nvPr/>
         </p:nvSpPr>
@@ -17644,7 +17942,7 @@
       </p:sp>
       <p:sp>
         <p:nvSpPr>
-          <p:cNvPr id="5" name="Text 3"/>
+          <p:cNvPr id="6" name="Text 4"/>
           <p:cNvSpPr/>
           <p:nvPr/>
         </p:nvSpPr>
@@ -17683,7 +17981,7 @@
       </p:sp>
       <p:pic>
         <p:nvPicPr>
-          <p:cNvPr id="6" name="Image 0" descr="preencoded.png">    </p:cNvPr>
+          <p:cNvPr id="7" name="Image 0" descr="preencoded.png">    </p:cNvPr>
           <p:cNvPicPr>
             <a:picLocks noChangeAspect="1"/>
           </p:cNvPicPr>
@@ -17697,7 +17995,7 @@
         </p:blipFill>
         <p:spPr>
           <a:xfrm>
-            <a:off x="566928" y="6254496"/>
+            <a:off x="566928" y="6126480"/>
             <a:ext cx="1481328" cy="457200"/>
           </a:xfrm>
           <a:prstGeom prst="rect">
@@ -17707,7 +18005,7 @@
       </p:pic>
       <p:sp>
         <p:nvSpPr>
-          <p:cNvPr id="7" name="Shape 4"/>
+          <p:cNvPr id="8" name="Shape 5"/>
           <p:cNvSpPr/>
           <p:nvPr/>
         </p:nvSpPr>
@@ -17729,7 +18027,7 @@
       </p:sp>
       <p:sp>
         <p:nvSpPr>
-          <p:cNvPr id="8" name="Text 5"/>
+          <p:cNvPr id="9" name="Text 6"/>
           <p:cNvSpPr/>
           <p:nvPr/>
         </p:nvSpPr>
@@ -17768,7 +18066,7 @@
       </p:sp>
       <p:sp>
         <p:nvSpPr>
-          <p:cNvPr id="9" name="Shape 6"/>
+          <p:cNvPr id="10" name="Shape 7"/>
           <p:cNvSpPr/>
           <p:nvPr/>
         </p:nvSpPr>
@@ -17791,7 +18089,7 @@
       </p:sp>
       <p:sp>
         <p:nvSpPr>
-          <p:cNvPr id="10" name="Shape 7"/>
+          <p:cNvPr id="11" name="Shape 8"/>
           <p:cNvSpPr/>
           <p:nvPr/>
         </p:nvSpPr>
@@ -17811,7 +18109,7 @@
       </p:sp>
       <p:sp>
         <p:nvSpPr>
-          <p:cNvPr id="11" name="Shape 8"/>
+          <p:cNvPr id="12" name="Shape 9"/>
           <p:cNvSpPr/>
           <p:nvPr/>
         </p:nvSpPr>
@@ -17833,7 +18131,7 @@
       </p:sp>
       <p:sp>
         <p:nvSpPr>
-          <p:cNvPr id="12" name="Text 9"/>
+          <p:cNvPr id="13" name="Text 10"/>
           <p:cNvSpPr/>
           <p:nvPr/>
         </p:nvSpPr>
@@ -17872,7 +18170,7 @@
       </p:sp>
       <p:sp>
         <p:nvSpPr>
-          <p:cNvPr id="13" name="Shape 10"/>
+          <p:cNvPr id="14" name="Shape 11"/>
           <p:cNvSpPr/>
           <p:nvPr/>
         </p:nvSpPr>
@@ -17895,7 +18193,7 @@
       </p:sp>
       <p:sp>
         <p:nvSpPr>
-          <p:cNvPr id="14" name="Shape 11"/>
+          <p:cNvPr id="15" name="Shape 12"/>
           <p:cNvSpPr/>
           <p:nvPr/>
         </p:nvSpPr>
@@ -17915,7 +18213,7 @@
       </p:sp>
       <p:sp>
         <p:nvSpPr>
-          <p:cNvPr id="15" name="Shape 12"/>
+          <p:cNvPr id="16" name="Shape 13"/>
           <p:cNvSpPr/>
           <p:nvPr/>
         </p:nvSpPr>
@@ -17937,7 +18235,7 @@
       </p:sp>
       <p:sp>
         <p:nvSpPr>
-          <p:cNvPr id="16" name="Text 13"/>
+          <p:cNvPr id="17" name="Text 14"/>
           <p:cNvSpPr/>
           <p:nvPr/>
         </p:nvSpPr>
@@ -17976,7 +18274,7 @@
       </p:sp>
       <p:sp>
         <p:nvSpPr>
-          <p:cNvPr id="17" name="Shape 14"/>
+          <p:cNvPr id="18" name="Shape 15"/>
           <p:cNvSpPr/>
           <p:nvPr/>
         </p:nvSpPr>
@@ -17999,7 +18297,7 @@
       </p:sp>
       <p:sp>
         <p:nvSpPr>
-          <p:cNvPr id="18" name="Shape 15"/>
+          <p:cNvPr id="19" name="Shape 16"/>
           <p:cNvSpPr/>
           <p:nvPr/>
         </p:nvSpPr>
@@ -18019,7 +18317,7 @@
       </p:sp>
       <p:sp>
         <p:nvSpPr>
-          <p:cNvPr id="19" name="Shape 16"/>
+          <p:cNvPr id="20" name="Shape 17"/>
           <p:cNvSpPr/>
           <p:nvPr/>
         </p:nvSpPr>
@@ -18041,7 +18339,7 @@
       </p:sp>
       <p:sp>
         <p:nvSpPr>
-          <p:cNvPr id="20" name="Text 17"/>
+          <p:cNvPr id="21" name="Text 18"/>
           <p:cNvSpPr/>
           <p:nvPr/>
         </p:nvSpPr>
@@ -18080,7 +18378,7 @@
       </p:sp>
       <p:sp>
         <p:nvSpPr>
-          <p:cNvPr id="21" name="Shape 18"/>
+          <p:cNvPr id="22" name="Shape 19"/>
           <p:cNvSpPr/>
           <p:nvPr/>
         </p:nvSpPr>
@@ -18107,7 +18405,7 @@
       </p:sp>
       <p:sp>
         <p:nvSpPr>
-          <p:cNvPr id="22" name="Text 19"/>
+          <p:cNvPr id="23" name="Text 20"/>
           <p:cNvSpPr/>
           <p:nvPr/>
         </p:nvSpPr>
@@ -18146,7 +18444,7 @@
       </p:sp>
       <p:sp>
         <p:nvSpPr>
-          <p:cNvPr id="23" name="Text 20"/>
+          <p:cNvPr id="24" name="Text 21"/>
           <p:cNvSpPr/>
           <p:nvPr/>
         </p:nvSpPr>
@@ -18188,7 +18486,7 @@
       </p:sp>
       <p:sp>
         <p:nvSpPr>
-          <p:cNvPr id="24" name="Shape 21"/>
+          <p:cNvPr id="25" name="Shape 22"/>
           <p:cNvSpPr/>
           <p:nvPr/>
         </p:nvSpPr>
@@ -18210,7 +18508,7 @@
       </p:sp>
       <p:sp>
         <p:nvSpPr>
-          <p:cNvPr id="25" name="Text 22"/>
+          <p:cNvPr id="26" name="Text 23"/>
           <p:cNvSpPr/>
           <p:nvPr/>
         </p:nvSpPr>
@@ -18249,7 +18547,7 @@
       </p:sp>
       <p:sp>
         <p:nvSpPr>
-          <p:cNvPr id="26" name="Text 23"/>
+          <p:cNvPr id="27" name="Text 24"/>
           <p:cNvSpPr/>
           <p:nvPr/>
         </p:nvSpPr>
@@ -18291,7 +18589,7 @@
       </p:sp>
       <p:sp>
         <p:nvSpPr>
-          <p:cNvPr id="27" name="Shape 24"/>
+          <p:cNvPr id="28" name="Shape 25"/>
           <p:cNvSpPr/>
           <p:nvPr/>
         </p:nvSpPr>
@@ -18313,7 +18611,7 @@
       </p:sp>
       <p:sp>
         <p:nvSpPr>
-          <p:cNvPr id="28" name="Text 25"/>
+          <p:cNvPr id="29" name="Text 26"/>
           <p:cNvSpPr/>
           <p:nvPr/>
         </p:nvSpPr>
@@ -18352,7 +18650,7 @@
       </p:sp>
       <p:sp>
         <p:nvSpPr>
-          <p:cNvPr id="29" name="Text 26"/>
+          <p:cNvPr id="30" name="Text 27"/>
           <p:cNvSpPr/>
           <p:nvPr/>
         </p:nvSpPr>
@@ -18404,7 +18702,7 @@
         </p:nvSpPr>
         <p:spPr>
           <a:xfrm>
-            <a:off x="11368735" y="6437376"/>
+            <a:off x="11368735" y="6327648"/>
             <a:ext cx="365760" cy="274320"/>
           </a:xfrm>
           <a:prstGeom prst="rect">
@@ -18451,13 +18749,6 @@
 <file path=ppt/slides/slide6.xml><?xml version="1.0" encoding="utf-8"?>
 <p:sld xmlns:a="http://schemas.openxmlformats.org/drawingml/2006/main" xmlns:r="http://schemas.openxmlformats.org/officeDocument/2006/relationships" xmlns:p="http://schemas.openxmlformats.org/presentationml/2006/main">
   <p:cSld name="Slide 6">
-    <p:bg>
-      <p:bgPr>
-        <a:solidFill>
-          <a:srgbClr val="FFFFFF"/>
-        </a:solidFill>
-      </p:bgPr>
-    </p:bg>
     <p:spTree>
       <p:nvGrpSpPr>
         <p:cNvPr id="1" name=""/>
@@ -18474,7 +18765,29 @@
       </p:grpSpPr>
       <p:sp>
         <p:nvSpPr>
-          <p:cNvPr id="2" name="Text 0"/>
+          <p:cNvPr id="2" name="Shape 0"/>
+          <p:cNvSpPr/>
+          <p:nvPr/>
+        </p:nvSpPr>
+        <p:spPr>
+          <a:xfrm>
+            <a:off x="231343" y="194767"/>
+            <a:ext cx="11716207" cy="6473952"/>
+          </a:xfrm>
+          <a:prstGeom prst="roundRect">
+            <a:avLst>
+              <a:gd name="adj" fmla="val 3107"/>
+            </a:avLst>
+          </a:prstGeom>
+          <a:solidFill>
+            <a:srgbClr val="FFFFFF"/>
+          </a:solidFill>
+          <a:ln/>
+        </p:spPr>
+      </p:sp>
+      <p:sp>
+        <p:nvSpPr>
+          <p:cNvPr id="3" name="Text 1"/>
           <p:cNvSpPr/>
           <p:nvPr/>
         </p:nvSpPr>
@@ -18513,7 +18826,7 @@
       </p:sp>
       <p:sp>
         <p:nvSpPr>
-          <p:cNvPr id="3" name="Text 1"/>
+          <p:cNvPr id="4" name="Text 2"/>
           <p:cNvSpPr/>
           <p:nvPr/>
         </p:nvSpPr>
@@ -18552,7 +18865,7 @@
       </p:sp>
       <p:sp>
         <p:nvSpPr>
-          <p:cNvPr id="4" name="Shape 2"/>
+          <p:cNvPr id="5" name="Shape 3"/>
           <p:cNvSpPr/>
           <p:nvPr/>
         </p:nvSpPr>
@@ -18574,7 +18887,7 @@
       </p:sp>
       <p:sp>
         <p:nvSpPr>
-          <p:cNvPr id="5" name="Text 3"/>
+          <p:cNvPr id="6" name="Text 4"/>
           <p:cNvSpPr/>
           <p:nvPr/>
         </p:nvSpPr>
@@ -18613,7 +18926,7 @@
       </p:sp>
       <p:pic>
         <p:nvPicPr>
-          <p:cNvPr id="6" name="Image 0" descr="preencoded.png">    </p:cNvPr>
+          <p:cNvPr id="7" name="Image 0" descr="preencoded.png">    </p:cNvPr>
           <p:cNvPicPr>
             <a:picLocks noChangeAspect="1"/>
           </p:cNvPicPr>
@@ -18627,7 +18940,7 @@
         </p:blipFill>
         <p:spPr>
           <a:xfrm>
-            <a:off x="566928" y="6254496"/>
+            <a:off x="566928" y="6126480"/>
             <a:ext cx="1481328" cy="457200"/>
           </a:xfrm>
           <a:prstGeom prst="rect">
@@ -18637,7 +18950,7 @@
       </p:pic>
       <p:sp>
         <p:nvSpPr>
-          <p:cNvPr id="7" name="Shape 4"/>
+          <p:cNvPr id="8" name="Shape 5"/>
           <p:cNvSpPr/>
           <p:nvPr/>
         </p:nvSpPr>
@@ -18664,7 +18977,7 @@
       </p:sp>
       <p:sp>
         <p:nvSpPr>
-          <p:cNvPr id="8" name="Text 5"/>
+          <p:cNvPr id="9" name="Text 6"/>
           <p:cNvSpPr/>
           <p:nvPr/>
         </p:nvSpPr>
@@ -18811,7 +19124,7 @@
       </p:sp>
       <p:sp>
         <p:nvSpPr>
-          <p:cNvPr id="9" name="Shape 6"/>
+          <p:cNvPr id="10" name="Shape 7"/>
           <p:cNvSpPr/>
           <p:nvPr/>
         </p:nvSpPr>
@@ -18833,7 +19146,7 @@
       </p:sp>
       <p:sp>
         <p:nvSpPr>
-          <p:cNvPr id="10" name="Text 7"/>
+          <p:cNvPr id="11" name="Text 8"/>
           <p:cNvSpPr/>
           <p:nvPr/>
         </p:nvSpPr>
@@ -18875,7 +19188,7 @@
       </p:sp>
       <p:sp>
         <p:nvSpPr>
-          <p:cNvPr id="11" name="Shape 8"/>
+          <p:cNvPr id="12" name="Shape 9"/>
           <p:cNvSpPr/>
           <p:nvPr/>
         </p:nvSpPr>
@@ -18897,7 +19210,7 @@
       </p:sp>
       <p:sp>
         <p:nvSpPr>
-          <p:cNvPr id="12" name="Text 9"/>
+          <p:cNvPr id="13" name="Text 10"/>
           <p:cNvSpPr/>
           <p:nvPr/>
         </p:nvSpPr>
@@ -18936,7 +19249,7 @@
       </p:sp>
       <p:sp>
         <p:nvSpPr>
-          <p:cNvPr id="13" name="Text 10"/>
+          <p:cNvPr id="14" name="Text 11"/>
           <p:cNvSpPr/>
           <p:nvPr/>
         </p:nvSpPr>
@@ -18978,7 +19291,7 @@
       </p:sp>
       <p:sp>
         <p:nvSpPr>
-          <p:cNvPr id="14" name="Shape 11"/>
+          <p:cNvPr id="15" name="Shape 12"/>
           <p:cNvSpPr/>
           <p:nvPr/>
         </p:nvSpPr>
@@ -19005,7 +19318,7 @@
       </p:sp>
       <p:sp>
         <p:nvSpPr>
-          <p:cNvPr id="15" name="Text 12"/>
+          <p:cNvPr id="16" name="Text 13"/>
           <p:cNvSpPr/>
           <p:nvPr/>
         </p:nvSpPr>
@@ -19044,7 +19357,7 @@
       </p:sp>
       <p:sp>
         <p:nvSpPr>
-          <p:cNvPr id="16" name="Text 13"/>
+          <p:cNvPr id="17" name="Text 14"/>
           <p:cNvSpPr/>
           <p:nvPr/>
         </p:nvSpPr>
@@ -19086,7 +19399,7 @@
       </p:sp>
       <p:sp>
         <p:nvSpPr>
-          <p:cNvPr id="17" name="Shape 14"/>
+          <p:cNvPr id="18" name="Shape 15"/>
           <p:cNvSpPr/>
           <p:nvPr/>
         </p:nvSpPr>
@@ -19113,7 +19426,7 @@
       </p:sp>
       <p:sp>
         <p:nvSpPr>
-          <p:cNvPr id="18" name="Text 15"/>
+          <p:cNvPr id="19" name="Text 16"/>
           <p:cNvSpPr/>
           <p:nvPr/>
         </p:nvSpPr>
@@ -19152,7 +19465,7 @@
       </p:sp>
       <p:sp>
         <p:nvSpPr>
-          <p:cNvPr id="19" name="Text 16"/>
+          <p:cNvPr id="20" name="Text 17"/>
           <p:cNvSpPr/>
           <p:nvPr/>
         </p:nvSpPr>
@@ -19204,7 +19517,7 @@
         </p:nvSpPr>
         <p:spPr>
           <a:xfrm>
-            <a:off x="11368735" y="6437376"/>
+            <a:off x="11368735" y="6327648"/>
             <a:ext cx="365760" cy="274320"/>
           </a:xfrm>
           <a:prstGeom prst="rect">
@@ -19251,13 +19564,6 @@
 <file path=ppt/slides/slide7.xml><?xml version="1.0" encoding="utf-8"?>
 <p:sld xmlns:a="http://schemas.openxmlformats.org/drawingml/2006/main" xmlns:r="http://schemas.openxmlformats.org/officeDocument/2006/relationships" xmlns:p="http://schemas.openxmlformats.org/presentationml/2006/main">
   <p:cSld name="Slide 7">
-    <p:bg>
-      <p:bgPr>
-        <a:solidFill>
-          <a:srgbClr val="FFFFFF"/>
-        </a:solidFill>
-      </p:bgPr>
-    </p:bg>
     <p:spTree>
       <p:nvGrpSpPr>
         <p:cNvPr id="1" name=""/>
@@ -19274,7 +19580,29 @@
       </p:grpSpPr>
       <p:sp>
         <p:nvSpPr>
-          <p:cNvPr id="2" name="Text 0"/>
+          <p:cNvPr id="2" name="Shape 0"/>
+          <p:cNvSpPr/>
+          <p:nvPr/>
+        </p:nvSpPr>
+        <p:spPr>
+          <a:xfrm>
+            <a:off x="231343" y="194767"/>
+            <a:ext cx="11716207" cy="6473952"/>
+          </a:xfrm>
+          <a:prstGeom prst="roundRect">
+            <a:avLst>
+              <a:gd name="adj" fmla="val 3107"/>
+            </a:avLst>
+          </a:prstGeom>
+          <a:solidFill>
+            <a:srgbClr val="FFFFFF"/>
+          </a:solidFill>
+          <a:ln/>
+        </p:spPr>
+      </p:sp>
+      <p:sp>
+        <p:nvSpPr>
+          <p:cNvPr id="3" name="Text 1"/>
           <p:cNvSpPr/>
           <p:nvPr/>
         </p:nvSpPr>
@@ -19313,7 +19641,7 @@
       </p:sp>
       <p:sp>
         <p:nvSpPr>
-          <p:cNvPr id="3" name="Text 1"/>
+          <p:cNvPr id="4" name="Text 2"/>
           <p:cNvSpPr/>
           <p:nvPr/>
         </p:nvSpPr>
@@ -19352,7 +19680,7 @@
       </p:sp>
       <p:sp>
         <p:nvSpPr>
-          <p:cNvPr id="4" name="Text 2"/>
+          <p:cNvPr id="5" name="Text 3"/>
           <p:cNvSpPr/>
           <p:nvPr/>
         </p:nvSpPr>
@@ -19394,7 +19722,7 @@
       </p:sp>
       <p:sp>
         <p:nvSpPr>
-          <p:cNvPr id="5" name="Shape 3"/>
+          <p:cNvPr id="6" name="Shape 4"/>
           <p:cNvSpPr/>
           <p:nvPr/>
         </p:nvSpPr>
@@ -19416,7 +19744,7 @@
       </p:sp>
       <p:sp>
         <p:nvSpPr>
-          <p:cNvPr id="6" name="Text 4"/>
+          <p:cNvPr id="7" name="Text 5"/>
           <p:cNvSpPr/>
           <p:nvPr/>
         </p:nvSpPr>
@@ -19455,7 +19783,7 @@
       </p:sp>
       <p:pic>
         <p:nvPicPr>
-          <p:cNvPr id="7" name="Image 0" descr="preencoded.png">    </p:cNvPr>
+          <p:cNvPr id="8" name="Image 0" descr="preencoded.png">    </p:cNvPr>
           <p:cNvPicPr>
             <a:picLocks noChangeAspect="1"/>
           </p:cNvPicPr>
@@ -19469,7 +19797,7 @@
         </p:blipFill>
         <p:spPr>
           <a:xfrm>
-            <a:off x="566928" y="6254496"/>
+            <a:off x="566928" y="6126480"/>
             <a:ext cx="1481328" cy="457200"/>
           </a:xfrm>
           <a:prstGeom prst="rect">
@@ -19479,7 +19807,7 @@
       </p:pic>
       <p:sp>
         <p:nvSpPr>
-          <p:cNvPr id="8" name="Shape 5"/>
+          <p:cNvPr id="9" name="Shape 6"/>
           <p:cNvSpPr/>
           <p:nvPr/>
         </p:nvSpPr>
@@ -19501,7 +19829,7 @@
       </p:sp>
       <p:sp>
         <p:nvSpPr>
-          <p:cNvPr id="9" name="Shape 6"/>
+          <p:cNvPr id="10" name="Shape 7"/>
           <p:cNvSpPr/>
           <p:nvPr/>
         </p:nvSpPr>
@@ -19521,7 +19849,7 @@
       </p:sp>
       <p:sp>
         <p:nvSpPr>
-          <p:cNvPr id="10" name="Text 7"/>
+          <p:cNvPr id="11" name="Text 8"/>
           <p:cNvSpPr/>
           <p:nvPr/>
         </p:nvSpPr>
@@ -19560,7 +19888,7 @@
       </p:sp>
       <p:sp>
         <p:nvSpPr>
-          <p:cNvPr id="11" name="Text 8"/>
+          <p:cNvPr id="12" name="Text 9"/>
           <p:cNvSpPr/>
           <p:nvPr/>
         </p:nvSpPr>
@@ -19599,7 +19927,7 @@
       </p:sp>
       <p:sp>
         <p:nvSpPr>
-          <p:cNvPr id="12" name="Text 9"/>
+          <p:cNvPr id="13" name="Text 10"/>
           <p:cNvSpPr/>
           <p:nvPr/>
         </p:nvSpPr>
@@ -19641,7 +19969,7 @@
       </p:sp>
       <p:sp>
         <p:nvSpPr>
-          <p:cNvPr id="13" name="Shape 10"/>
+          <p:cNvPr id="14" name="Shape 11"/>
           <p:cNvSpPr/>
           <p:nvPr/>
         </p:nvSpPr>
@@ -19663,7 +19991,7 @@
       </p:sp>
       <p:sp>
         <p:nvSpPr>
-          <p:cNvPr id="14" name="Shape 11"/>
+          <p:cNvPr id="15" name="Shape 12"/>
           <p:cNvSpPr/>
           <p:nvPr/>
         </p:nvSpPr>
@@ -19683,7 +20011,7 @@
       </p:sp>
       <p:sp>
         <p:nvSpPr>
-          <p:cNvPr id="15" name="Text 12"/>
+          <p:cNvPr id="16" name="Text 13"/>
           <p:cNvSpPr/>
           <p:nvPr/>
         </p:nvSpPr>
@@ -19722,7 +20050,7 @@
       </p:sp>
       <p:sp>
         <p:nvSpPr>
-          <p:cNvPr id="16" name="Text 13"/>
+          <p:cNvPr id="17" name="Text 14"/>
           <p:cNvSpPr/>
           <p:nvPr/>
         </p:nvSpPr>
@@ -19761,7 +20089,7 @@
       </p:sp>
       <p:sp>
         <p:nvSpPr>
-          <p:cNvPr id="17" name="Text 14"/>
+          <p:cNvPr id="18" name="Text 15"/>
           <p:cNvSpPr/>
           <p:nvPr/>
         </p:nvSpPr>
@@ -19803,7 +20131,7 @@
       </p:sp>
       <p:sp>
         <p:nvSpPr>
-          <p:cNvPr id="18" name="Shape 15"/>
+          <p:cNvPr id="19" name="Shape 16"/>
           <p:cNvSpPr/>
           <p:nvPr/>
         </p:nvSpPr>
@@ -19825,7 +20153,7 @@
       </p:sp>
       <p:sp>
         <p:nvSpPr>
-          <p:cNvPr id="19" name="Shape 16"/>
+          <p:cNvPr id="20" name="Shape 17"/>
           <p:cNvSpPr/>
           <p:nvPr/>
         </p:nvSpPr>
@@ -19845,7 +20173,7 @@
       </p:sp>
       <p:sp>
         <p:nvSpPr>
-          <p:cNvPr id="20" name="Text 17"/>
+          <p:cNvPr id="21" name="Text 18"/>
           <p:cNvSpPr/>
           <p:nvPr/>
         </p:nvSpPr>
@@ -19884,7 +20212,7 @@
       </p:sp>
       <p:sp>
         <p:nvSpPr>
-          <p:cNvPr id="21" name="Text 18"/>
+          <p:cNvPr id="22" name="Text 19"/>
           <p:cNvSpPr/>
           <p:nvPr/>
         </p:nvSpPr>
@@ -19923,7 +20251,7 @@
       </p:sp>
       <p:sp>
         <p:nvSpPr>
-          <p:cNvPr id="22" name="Text 19"/>
+          <p:cNvPr id="23" name="Text 20"/>
           <p:cNvSpPr/>
           <p:nvPr/>
         </p:nvSpPr>
@@ -19965,7 +20293,7 @@
       </p:sp>
       <p:sp>
         <p:nvSpPr>
-          <p:cNvPr id="23" name="Text 20"/>
+          <p:cNvPr id="24" name="Text 21"/>
           <p:cNvSpPr/>
           <p:nvPr/>
         </p:nvSpPr>
@@ -20004,7 +20332,7 @@
       </p:sp>
       <p:sp>
         <p:nvSpPr>
-          <p:cNvPr id="24" name="Text 21"/>
+          <p:cNvPr id="25" name="Text 22"/>
           <p:cNvSpPr/>
           <p:nvPr/>
         </p:nvSpPr>
@@ -20043,7 +20371,7 @@
       </p:sp>
       <p:sp>
         <p:nvSpPr>
-          <p:cNvPr id="25" name="Shape 22"/>
+          <p:cNvPr id="26" name="Shape 23"/>
           <p:cNvSpPr/>
           <p:nvPr/>
         </p:nvSpPr>
@@ -20065,7 +20393,7 @@
       </p:sp>
       <p:sp>
         <p:nvSpPr>
-          <p:cNvPr id="26" name="Text 23"/>
+          <p:cNvPr id="27" name="Text 24"/>
           <p:cNvSpPr/>
           <p:nvPr/>
         </p:nvSpPr>
@@ -20104,7 +20432,7 @@
       </p:sp>
       <p:sp>
         <p:nvSpPr>
-          <p:cNvPr id="27" name="Text 24"/>
+          <p:cNvPr id="28" name="Text 25"/>
           <p:cNvSpPr/>
           <p:nvPr/>
         </p:nvSpPr>
@@ -20143,7 +20471,7 @@
       </p:sp>
       <p:sp>
         <p:nvSpPr>
-          <p:cNvPr id="28" name="Shape 25"/>
+          <p:cNvPr id="29" name="Shape 26"/>
           <p:cNvSpPr/>
           <p:nvPr/>
         </p:nvSpPr>
@@ -20165,7 +20493,7 @@
       </p:sp>
       <p:sp>
         <p:nvSpPr>
-          <p:cNvPr id="29" name="Text 26"/>
+          <p:cNvPr id="30" name="Text 27"/>
           <p:cNvSpPr/>
           <p:nvPr/>
         </p:nvSpPr>
@@ -20204,7 +20532,7 @@
       </p:sp>
       <p:sp>
         <p:nvSpPr>
-          <p:cNvPr id="30" name="Shape 27"/>
+          <p:cNvPr id="31" name="Shape 28"/>
           <p:cNvSpPr/>
           <p:nvPr/>
         </p:nvSpPr>
@@ -20226,7 +20554,7 @@
       </p:sp>
       <p:sp>
         <p:nvSpPr>
-          <p:cNvPr id="31" name="Text 28"/>
+          <p:cNvPr id="32" name="Text 29"/>
           <p:cNvSpPr/>
           <p:nvPr/>
         </p:nvSpPr>
@@ -20265,7 +20593,7 @@
       </p:sp>
       <p:sp>
         <p:nvSpPr>
-          <p:cNvPr id="32" name="Text 29"/>
+          <p:cNvPr id="33" name="Text 30"/>
           <p:cNvSpPr/>
           <p:nvPr/>
         </p:nvSpPr>
@@ -20317,7 +20645,7 @@
         </p:nvSpPr>
         <p:spPr>
           <a:xfrm>
-            <a:off x="11368735" y="6437376"/>
+            <a:off x="11368735" y="6327648"/>
             <a:ext cx="365760" cy="274320"/>
           </a:xfrm>
           <a:prstGeom prst="rect">
@@ -20364,13 +20692,6 @@
 <file path=ppt/slides/slide8.xml><?xml version="1.0" encoding="utf-8"?>
 <p:sld xmlns:a="http://schemas.openxmlformats.org/drawingml/2006/main" xmlns:r="http://schemas.openxmlformats.org/officeDocument/2006/relationships" xmlns:p="http://schemas.openxmlformats.org/presentationml/2006/main">
   <p:cSld name="Slide 8">
-    <p:bg>
-      <p:bgPr>
-        <a:solidFill>
-          <a:srgbClr val="FFFFFF"/>
-        </a:solidFill>
-      </p:bgPr>
-    </p:bg>
     <p:spTree>
       <p:nvGrpSpPr>
         <p:cNvPr id="1" name=""/>
@@ -20387,7 +20708,29 @@
       </p:grpSpPr>
       <p:sp>
         <p:nvSpPr>
-          <p:cNvPr id="2" name="Text 0"/>
+          <p:cNvPr id="2" name="Shape 0"/>
+          <p:cNvSpPr/>
+          <p:nvPr/>
+        </p:nvSpPr>
+        <p:spPr>
+          <a:xfrm>
+            <a:off x="231343" y="194767"/>
+            <a:ext cx="11716207" cy="6473952"/>
+          </a:xfrm>
+          <a:prstGeom prst="roundRect">
+            <a:avLst>
+              <a:gd name="adj" fmla="val 3107"/>
+            </a:avLst>
+          </a:prstGeom>
+          <a:solidFill>
+            <a:srgbClr val="FFFFFF"/>
+          </a:solidFill>
+          <a:ln/>
+        </p:spPr>
+      </p:sp>
+      <p:sp>
+        <p:nvSpPr>
+          <p:cNvPr id="3" name="Text 1"/>
           <p:cNvSpPr/>
           <p:nvPr/>
         </p:nvSpPr>
@@ -20426,7 +20769,7 @@
       </p:sp>
       <p:sp>
         <p:nvSpPr>
-          <p:cNvPr id="3" name="Text 1"/>
+          <p:cNvPr id="4" name="Text 2"/>
           <p:cNvSpPr/>
           <p:nvPr/>
         </p:nvSpPr>
@@ -20465,7 +20808,7 @@
       </p:sp>
       <p:sp>
         <p:nvSpPr>
-          <p:cNvPr id="4" name="Shape 2"/>
+          <p:cNvPr id="5" name="Shape 3"/>
           <p:cNvSpPr/>
           <p:nvPr/>
         </p:nvSpPr>
@@ -20487,7 +20830,7 @@
       </p:sp>
       <p:sp>
         <p:nvSpPr>
-          <p:cNvPr id="5" name="Text 3"/>
+          <p:cNvPr id="6" name="Text 4"/>
           <p:cNvSpPr/>
           <p:nvPr/>
         </p:nvSpPr>
@@ -20526,7 +20869,7 @@
       </p:sp>
       <p:pic>
         <p:nvPicPr>
-          <p:cNvPr id="6" name="Image 0" descr="preencoded.png">    </p:cNvPr>
+          <p:cNvPr id="7" name="Image 0" descr="preencoded.png">    </p:cNvPr>
           <p:cNvPicPr>
             <a:picLocks noChangeAspect="1"/>
           </p:cNvPicPr>
@@ -20540,7 +20883,7 @@
         </p:blipFill>
         <p:spPr>
           <a:xfrm>
-            <a:off x="566928" y="6254496"/>
+            <a:off x="566928" y="6126480"/>
             <a:ext cx="1481328" cy="457200"/>
           </a:xfrm>
           <a:prstGeom prst="rect">
@@ -20550,7 +20893,7 @@
       </p:pic>
       <p:sp>
         <p:nvSpPr>
-          <p:cNvPr id="7" name="Shape 4"/>
+          <p:cNvPr id="8" name="Shape 5"/>
           <p:cNvSpPr/>
           <p:nvPr/>
         </p:nvSpPr>
@@ -20577,7 +20920,7 @@
       </p:sp>
       <p:sp>
         <p:nvSpPr>
-          <p:cNvPr id="8" name="Text 5"/>
+          <p:cNvPr id="9" name="Text 6"/>
           <p:cNvSpPr/>
           <p:nvPr/>
         </p:nvSpPr>
@@ -20719,7 +21062,7 @@
       </p:sp>
       <p:sp>
         <p:nvSpPr>
-          <p:cNvPr id="9" name="Shape 6"/>
+          <p:cNvPr id="10" name="Shape 7"/>
           <p:cNvSpPr/>
           <p:nvPr/>
         </p:nvSpPr>
@@ -20741,7 +21084,7 @@
       </p:sp>
       <p:sp>
         <p:nvSpPr>
-          <p:cNvPr id="10" name="Text 7"/>
+          <p:cNvPr id="11" name="Text 8"/>
           <p:cNvSpPr/>
           <p:nvPr/>
         </p:nvSpPr>
@@ -20780,7 +21123,7 @@
       </p:sp>
       <p:sp>
         <p:nvSpPr>
-          <p:cNvPr id="11" name="Text 8"/>
+          <p:cNvPr id="12" name="Text 9"/>
           <p:cNvSpPr/>
           <p:nvPr/>
         </p:nvSpPr>
@@ -20819,7 +21162,7 @@
       </p:sp>
       <p:sp>
         <p:nvSpPr>
-          <p:cNvPr id="12" name="Shape 9"/>
+          <p:cNvPr id="13" name="Shape 10"/>
           <p:cNvSpPr/>
           <p:nvPr/>
         </p:nvSpPr>
@@ -20841,7 +21184,7 @@
       </p:sp>
       <p:sp>
         <p:nvSpPr>
-          <p:cNvPr id="13" name="Text 10"/>
+          <p:cNvPr id="14" name="Text 11"/>
           <p:cNvSpPr/>
           <p:nvPr/>
         </p:nvSpPr>
@@ -20880,7 +21223,7 @@
       </p:sp>
       <p:sp>
         <p:nvSpPr>
-          <p:cNvPr id="14" name="Text 11"/>
+          <p:cNvPr id="15" name="Text 12"/>
           <p:cNvSpPr/>
           <p:nvPr/>
         </p:nvSpPr>
@@ -20919,7 +21262,7 @@
       </p:sp>
       <p:sp>
         <p:nvSpPr>
-          <p:cNvPr id="15" name="Shape 12"/>
+          <p:cNvPr id="16" name="Shape 13"/>
           <p:cNvSpPr/>
           <p:nvPr/>
         </p:nvSpPr>
@@ -20941,7 +21284,7 @@
       </p:sp>
       <p:sp>
         <p:nvSpPr>
-          <p:cNvPr id="16" name="Text 13"/>
+          <p:cNvPr id="17" name="Text 14"/>
           <p:cNvSpPr/>
           <p:nvPr/>
         </p:nvSpPr>
@@ -20983,7 +21326,7 @@
       </p:sp>
       <p:sp>
         <p:nvSpPr>
-          <p:cNvPr id="17" name="Shape 14"/>
+          <p:cNvPr id="18" name="Shape 15"/>
           <p:cNvSpPr/>
           <p:nvPr/>
         </p:nvSpPr>
@@ -21010,7 +21353,7 @@
       </p:sp>
       <p:sp>
         <p:nvSpPr>
-          <p:cNvPr id="18" name="Text 15"/>
+          <p:cNvPr id="19" name="Text 16"/>
           <p:cNvSpPr/>
           <p:nvPr/>
         </p:nvSpPr>
@@ -21049,7 +21392,7 @@
       </p:sp>
       <p:sp>
         <p:nvSpPr>
-          <p:cNvPr id="19" name="Text 16"/>
+          <p:cNvPr id="20" name="Text 17"/>
           <p:cNvSpPr/>
           <p:nvPr/>
         </p:nvSpPr>
@@ -21101,7 +21444,7 @@
         </p:nvSpPr>
         <p:spPr>
           <a:xfrm>
-            <a:off x="11368735" y="6437376"/>
+            <a:off x="11368735" y="6327648"/>
             <a:ext cx="365760" cy="274320"/>
           </a:xfrm>
           <a:prstGeom prst="rect">
@@ -21148,13 +21491,6 @@
 <file path=ppt/slides/slide9.xml><?xml version="1.0" encoding="utf-8"?>
 <p:sld xmlns:a="http://schemas.openxmlformats.org/drawingml/2006/main" xmlns:r="http://schemas.openxmlformats.org/officeDocument/2006/relationships" xmlns:p="http://schemas.openxmlformats.org/presentationml/2006/main">
   <p:cSld name="Slide 9">
-    <p:bg>
-      <p:bgPr>
-        <a:solidFill>
-          <a:srgbClr val="FFFFFF"/>
-        </a:solidFill>
-      </p:bgPr>
-    </p:bg>
     <p:spTree>
       <p:nvGrpSpPr>
         <p:cNvPr id="1" name=""/>
@@ -21171,7 +21507,29 @@
       </p:grpSpPr>
       <p:sp>
         <p:nvSpPr>
-          <p:cNvPr id="2" name="Text 0"/>
+          <p:cNvPr id="2" name="Shape 0"/>
+          <p:cNvSpPr/>
+          <p:nvPr/>
+        </p:nvSpPr>
+        <p:spPr>
+          <a:xfrm>
+            <a:off x="231343" y="194767"/>
+            <a:ext cx="11716207" cy="6473952"/>
+          </a:xfrm>
+          <a:prstGeom prst="roundRect">
+            <a:avLst>
+              <a:gd name="adj" fmla="val 3107"/>
+            </a:avLst>
+          </a:prstGeom>
+          <a:solidFill>
+            <a:srgbClr val="FFFFFF"/>
+          </a:solidFill>
+          <a:ln/>
+        </p:spPr>
+      </p:sp>
+      <p:sp>
+        <p:nvSpPr>
+          <p:cNvPr id="3" name="Text 1"/>
           <p:cNvSpPr/>
           <p:nvPr/>
         </p:nvSpPr>
@@ -21210,7 +21568,7 @@
       </p:sp>
       <p:sp>
         <p:nvSpPr>
-          <p:cNvPr id="3" name="Text 1"/>
+          <p:cNvPr id="4" name="Text 2"/>
           <p:cNvSpPr/>
           <p:nvPr/>
         </p:nvSpPr>
@@ -21249,7 +21607,7 @@
       </p:sp>
       <p:sp>
         <p:nvSpPr>
-          <p:cNvPr id="4" name="Shape 2"/>
+          <p:cNvPr id="5" name="Shape 3"/>
           <p:cNvSpPr/>
           <p:nvPr/>
         </p:nvSpPr>
@@ -21271,7 +21629,7 @@
       </p:sp>
       <p:sp>
         <p:nvSpPr>
-          <p:cNvPr id="5" name="Text 3"/>
+          <p:cNvPr id="6" name="Text 4"/>
           <p:cNvSpPr/>
           <p:nvPr/>
         </p:nvSpPr>
@@ -21310,7 +21668,7 @@
       </p:sp>
       <p:pic>
         <p:nvPicPr>
-          <p:cNvPr id="6" name="Image 0" descr="preencoded.png">    </p:cNvPr>
+          <p:cNvPr id="7" name="Image 0" descr="preencoded.png">    </p:cNvPr>
           <p:cNvPicPr>
             <a:picLocks noChangeAspect="1"/>
           </p:cNvPicPr>
@@ -21324,7 +21682,7 @@
         </p:blipFill>
         <p:spPr>
           <a:xfrm>
-            <a:off x="566928" y="6254496"/>
+            <a:off x="566928" y="6126480"/>
             <a:ext cx="1481328" cy="457200"/>
           </a:xfrm>
           <a:prstGeom prst="rect">
@@ -21334,7 +21692,7 @@
       </p:pic>
       <p:sp>
         <p:nvSpPr>
-          <p:cNvPr id="7" name="Shape 4"/>
+          <p:cNvPr id="8" name="Shape 5"/>
           <p:cNvSpPr/>
           <p:nvPr/>
         </p:nvSpPr>
@@ -21356,7 +21714,7 @@
       </p:sp>
       <p:sp>
         <p:nvSpPr>
-          <p:cNvPr id="8" name="Text 5"/>
+          <p:cNvPr id="9" name="Text 6"/>
           <p:cNvSpPr/>
           <p:nvPr/>
         </p:nvSpPr>
@@ -21395,7 +21753,7 @@
       </p:sp>
       <p:sp>
         <p:nvSpPr>
-          <p:cNvPr id="9" name="Text 6"/>
+          <p:cNvPr id="10" name="Text 7"/>
           <p:cNvSpPr/>
           <p:nvPr/>
         </p:nvSpPr>
@@ -21437,7 +21795,7 @@
       </p:sp>
       <p:sp>
         <p:nvSpPr>
-          <p:cNvPr id="10" name="Shape 7"/>
+          <p:cNvPr id="11" name="Shape 8"/>
           <p:cNvSpPr/>
           <p:nvPr/>
         </p:nvSpPr>
@@ -21459,7 +21817,7 @@
       </p:sp>
       <p:sp>
         <p:nvSpPr>
-          <p:cNvPr id="11" name="Text 8"/>
+          <p:cNvPr id="12" name="Text 9"/>
           <p:cNvSpPr/>
           <p:nvPr/>
         </p:nvSpPr>
@@ -21498,7 +21856,7 @@
       </p:sp>
       <p:sp>
         <p:nvSpPr>
-          <p:cNvPr id="12" name="Text 9"/>
+          <p:cNvPr id="13" name="Text 10"/>
           <p:cNvSpPr/>
           <p:nvPr/>
         </p:nvSpPr>
@@ -21540,7 +21898,7 @@
       </p:sp>
       <p:sp>
         <p:nvSpPr>
-          <p:cNvPr id="13" name="Text 10"/>
+          <p:cNvPr id="14" name="Text 11"/>
           <p:cNvSpPr/>
           <p:nvPr/>
         </p:nvSpPr>
@@ -21579,7 +21937,7 @@
       </p:sp>
       <p:sp>
         <p:nvSpPr>
-          <p:cNvPr id="14" name="Shape 11"/>
+          <p:cNvPr id="15" name="Shape 12"/>
           <p:cNvSpPr/>
           <p:nvPr/>
         </p:nvSpPr>
@@ -21601,7 +21959,7 @@
       </p:sp>
       <p:sp>
         <p:nvSpPr>
-          <p:cNvPr id="15" name="Text 12"/>
+          <p:cNvPr id="16" name="Text 13"/>
           <p:cNvSpPr/>
           <p:nvPr/>
         </p:nvSpPr>
@@ -21640,7 +21998,7 @@
       </p:sp>
       <p:sp>
         <p:nvSpPr>
-          <p:cNvPr id="16" name="Text 13"/>
+          <p:cNvPr id="17" name="Text 14"/>
           <p:cNvSpPr/>
           <p:nvPr/>
         </p:nvSpPr>
@@ -21679,7 +22037,7 @@
       </p:sp>
       <p:sp>
         <p:nvSpPr>
-          <p:cNvPr id="17" name="Shape 14"/>
+          <p:cNvPr id="18" name="Shape 15"/>
           <p:cNvSpPr/>
           <p:nvPr/>
         </p:nvSpPr>
@@ -21701,7 +22059,7 @@
       </p:sp>
       <p:sp>
         <p:nvSpPr>
-          <p:cNvPr id="18" name="Text 15"/>
+          <p:cNvPr id="19" name="Text 16"/>
           <p:cNvSpPr/>
           <p:nvPr/>
         </p:nvSpPr>
@@ -21740,7 +22098,7 @@
       </p:sp>
       <p:sp>
         <p:nvSpPr>
-          <p:cNvPr id="19" name="Text 16"/>
+          <p:cNvPr id="20" name="Text 17"/>
           <p:cNvSpPr/>
           <p:nvPr/>
         </p:nvSpPr>
@@ -21779,7 +22137,7 @@
       </p:sp>
       <p:sp>
         <p:nvSpPr>
-          <p:cNvPr id="20" name="Shape 17"/>
+          <p:cNvPr id="21" name="Shape 18"/>
           <p:cNvSpPr/>
           <p:nvPr/>
         </p:nvSpPr>
@@ -21801,7 +22159,7 @@
       </p:sp>
       <p:sp>
         <p:nvSpPr>
-          <p:cNvPr id="21" name="Text 18"/>
+          <p:cNvPr id="22" name="Text 19"/>
           <p:cNvSpPr/>
           <p:nvPr/>
         </p:nvSpPr>
@@ -21840,7 +22198,7 @@
       </p:sp>
       <p:sp>
         <p:nvSpPr>
-          <p:cNvPr id="22" name="Shape 19"/>
+          <p:cNvPr id="23" name="Shape 20"/>
           <p:cNvSpPr/>
           <p:nvPr/>
         </p:nvSpPr>
@@ -21862,7 +22220,7 @@
       </p:sp>
       <p:sp>
         <p:nvSpPr>
-          <p:cNvPr id="23" name="Text 20"/>
+          <p:cNvPr id="24" name="Text 21"/>
           <p:cNvSpPr/>
           <p:nvPr/>
         </p:nvSpPr>
@@ -21901,7 +22259,7 @@
       </p:sp>
       <p:sp>
         <p:nvSpPr>
-          <p:cNvPr id="24" name="Text 21"/>
+          <p:cNvPr id="25" name="Text 22"/>
           <p:cNvSpPr/>
           <p:nvPr/>
         </p:nvSpPr>
@@ -21953,7 +22311,7 @@
         </p:nvSpPr>
         <p:spPr>
           <a:xfrm>
-            <a:off x="11368735" y="6437376"/>
+            <a:off x="11368735" y="6327648"/>
             <a:ext cx="365760" cy="274320"/>
           </a:xfrm>
           <a:prstGeom prst="rect">

--- a/docs/decks/L04.pptx
+++ b/docs/decks/L04.pptx
@@ -2554,7 +2554,7 @@
             <a:lvl1pPr>
               <a:defRPr sz="850">
                 <a:solidFill>
-                  <a:srgbClr val="9AA1AD"/>
+                  <a:srgbClr val="8A82A0"/>
                 </a:solidFill>
                 <a:latin typeface="Courier New"/>
                 <a:ea typeface="Courier New"/>
@@ -2683,7 +2683,7 @@
             <a:lvl1pPr>
               <a:defRPr sz="850">
                 <a:solidFill>
-                  <a:srgbClr val="9AA1AD"/>
+                  <a:srgbClr val="8A82A0"/>
                 </a:solidFill>
                 <a:latin typeface="Courier New"/>
                 <a:ea typeface="Courier New"/>
@@ -3036,7 +3036,7 @@
           </a:prstGeom>
           <a:ln w="12700">
             <a:solidFill>
-              <a:srgbClr val="C9B8FB">
+              <a:srgbClr val="9B7BE8">
                 <a:alpha val="24000"/>
               </a:srgbClr>
             </a:solidFill>
@@ -3062,7 +3062,7 @@
           </a:prstGeom>
           <a:ln w="12700">
             <a:solidFill>
-              <a:srgbClr val="C9B8FB">
+              <a:srgbClr val="9B7BE8">
                 <a:alpha val="42000"/>
               </a:srgbClr>
             </a:solidFill>
@@ -3088,7 +3088,7 @@
           </a:prstGeom>
           <a:ln w="12700">
             <a:solidFill>
-              <a:srgbClr val="C9B8FB">
+              <a:srgbClr val="9B7BE8">
                 <a:alpha val="66000"/>
               </a:srgbClr>
             </a:solidFill>
@@ -3257,7 +3257,7 @@
           </a:prstGeom>
           <a:ln w="12700">
             <a:solidFill>
-              <a:srgbClr val="C9B8FB">
+              <a:srgbClr val="9B7BE8">
                 <a:alpha val="60000"/>
               </a:srgbClr>
             </a:solidFill>
@@ -3383,7 +3383,7 @@
           </a:prstGeom>
           <a:ln w="12700">
             <a:solidFill>
-              <a:srgbClr val="C9B8FB">
+              <a:srgbClr val="9B7BE8">
                 <a:alpha val="60000"/>
               </a:srgbClr>
             </a:solidFill>
@@ -3448,7 +3448,7 @@
           </a:prstGeom>
           <a:ln w="12700">
             <a:solidFill>
-              <a:srgbClr val="C9B8FB">
+              <a:srgbClr val="9B7BE8">
                 <a:alpha val="60000"/>
               </a:srgbClr>
             </a:solidFill>
@@ -3513,7 +3513,7 @@
           </a:prstGeom>
           <a:ln w="12700">
             <a:solidFill>
-              <a:srgbClr val="C9B8FB">
+              <a:srgbClr val="9B7BE8">
                 <a:alpha val="60000"/>
               </a:srgbClr>
             </a:solidFill>
@@ -3578,7 +3578,7 @@
           </a:prstGeom>
           <a:ln w="12700">
             <a:solidFill>
-              <a:srgbClr val="C9B8FB">
+              <a:srgbClr val="9B7BE8">
                 <a:alpha val="60000"/>
               </a:srgbClr>
             </a:solidFill>
@@ -3652,29 +3652,7 @@
       </p:grpSpPr>
       <p:sp>
         <p:nvSpPr>
-          <p:cNvPr id="2" name="Shape 0"/>
-          <p:cNvSpPr/>
-          <p:nvPr/>
-        </p:nvSpPr>
-        <p:spPr>
-          <a:xfrm>
-            <a:off x="231343" y="194767"/>
-            <a:ext cx="11716207" cy="6473952"/>
-          </a:xfrm>
-          <a:prstGeom prst="roundRect">
-            <a:avLst>
-              <a:gd name="adj" fmla="val 3107"/>
-            </a:avLst>
-          </a:prstGeom>
-          <a:solidFill>
-            <a:srgbClr val="FFFFFF"/>
-          </a:solidFill>
-          <a:ln/>
-        </p:spPr>
-      </p:sp>
-      <p:sp>
-        <p:nvSpPr>
-          <p:cNvPr id="3" name="Text 1"/>
+          <p:cNvPr id="2" name="Text 0"/>
           <p:cNvSpPr/>
           <p:nvPr/>
         </p:nvSpPr>
@@ -3699,7 +3677,7 @@
             <a:r>
               <a:rPr lang="en-US" sz="2600" b="1" dirty="0">
                 <a:solidFill>
-                  <a:srgbClr val="5A05F4"/>
+                  <a:srgbClr val="C9A6FF"/>
                 </a:solidFill>
                 <a:latin typeface="Courier New" pitchFamily="34" charset="0"/>
                 <a:ea typeface="Courier New" pitchFamily="34" charset="-122"/>
@@ -3713,7 +3691,7 @@
       </p:sp>
       <p:sp>
         <p:nvSpPr>
-          <p:cNvPr id="4" name="Text 2"/>
+          <p:cNvPr id="3" name="Text 1"/>
           <p:cNvSpPr/>
           <p:nvPr/>
         </p:nvSpPr>
@@ -3738,7 +3716,7 @@
             <a:r>
               <a:rPr lang="en-US" sz="2400" b="1" dirty="0">
                 <a:solidFill>
-                  <a:srgbClr val="111318"/>
+                  <a:srgbClr val="FFFFFF"/>
                 </a:solidFill>
                 <a:latin typeface="Montserrat" pitchFamily="34" charset="0"/>
                 <a:ea typeface="Montserrat" pitchFamily="34" charset="-122"/>
@@ -3752,7 +3730,7 @@
       </p:sp>
       <p:sp>
         <p:nvSpPr>
-          <p:cNvPr id="5" name="Shape 3"/>
+          <p:cNvPr id="4" name="Shape 2"/>
           <p:cNvSpPr/>
           <p:nvPr/>
         </p:nvSpPr>
@@ -3767,14 +3745,14 @@
             </a:avLst>
           </a:prstGeom>
           <a:solidFill>
-            <a:srgbClr val="5A05F4"/>
+            <a:srgbClr val="C9A6FF"/>
           </a:solidFill>
           <a:ln/>
         </p:spPr>
       </p:sp>
       <p:sp>
         <p:nvSpPr>
-          <p:cNvPr id="6" name="Text 4"/>
+          <p:cNvPr id="5" name="Text 3"/>
           <p:cNvSpPr/>
           <p:nvPr/>
         </p:nvSpPr>
@@ -3799,7 +3777,7 @@
             <a:r>
               <a:rPr lang="en-US" sz="900" b="1" spc="100" kern="0" dirty="0">
                 <a:solidFill>
-                  <a:srgbClr val="FFFFFF"/>
+                  <a:srgbClr val="1C1140"/>
                 </a:solidFill>
                 <a:latin typeface="Courier New" pitchFamily="34" charset="0"/>
                 <a:ea typeface="Courier New" pitchFamily="34" charset="-122"/>
@@ -3813,7 +3791,7 @@
       </p:sp>
       <p:pic>
         <p:nvPicPr>
-          <p:cNvPr id="7" name="Image 0" descr="preencoded.png">    </p:cNvPr>
+          <p:cNvPr id="6" name="Image 0" descr="preencoded.png">    </p:cNvPr>
           <p:cNvPicPr>
             <a:picLocks noChangeAspect="1"/>
           </p:cNvPicPr>
@@ -3837,7 +3815,7 @@
       </p:pic>
       <p:sp>
         <p:nvSpPr>
-          <p:cNvPr id="8" name="Shape 5"/>
+          <p:cNvPr id="7" name="Shape 4"/>
           <p:cNvSpPr/>
           <p:nvPr/>
         </p:nvSpPr>
@@ -3852,11 +3830,11 @@
             </a:avLst>
           </a:prstGeom>
           <a:solidFill>
-            <a:srgbClr val="F5F4FA"/>
+            <a:srgbClr val="12101A"/>
           </a:solidFill>
           <a:ln w="12700">
             <a:solidFill>
-              <a:srgbClr val="E6E7EC"/>
+              <a:srgbClr val="2E2A3A"/>
             </a:solidFill>
             <a:prstDash val="solid"/>
           </a:ln>
@@ -3864,7 +3842,7 @@
       </p:sp>
       <p:sp>
         <p:nvSpPr>
-          <p:cNvPr id="9" name="Text 6"/>
+          <p:cNvPr id="8" name="Text 5"/>
           <p:cNvSpPr/>
           <p:nvPr/>
         </p:nvSpPr>
@@ -3892,7 +3870,7 @@
             <a:r>
               <a:rPr lang="en-US" sz="1200" dirty="0">
                 <a:solidFill>
-                  <a:srgbClr val="8A7FA6"/>
+                  <a:srgbClr val="8A82A0"/>
                 </a:solidFill>
                 <a:latin typeface="Courier New" pitchFamily="34" charset="0"/>
                 <a:ea typeface="Courier New" pitchFamily="34" charset="-122"/>
@@ -3912,7 +3890,7 @@
             <a:r>
               <a:rPr lang="en-US" sz="1200" dirty="0">
                 <a:solidFill>
-                  <a:srgbClr val="5A05F4"/>
+                  <a:srgbClr val="C9A6FF"/>
                 </a:solidFill>
                 <a:latin typeface="Courier New" pitchFamily="34" charset="0"/>
                 <a:ea typeface="Courier New" pitchFamily="34" charset="-122"/>
@@ -3932,7 +3910,7 @@
             <a:r>
               <a:rPr lang="en-US" sz="1200" dirty="0">
                 <a:solidFill>
-                  <a:srgbClr val="23262F"/>
+                  <a:srgbClr val="D8D4E4"/>
                 </a:solidFill>
                 <a:latin typeface="Courier New" pitchFamily="34" charset="0"/>
                 <a:ea typeface="Courier New" pitchFamily="34" charset="-122"/>
@@ -3952,7 +3930,7 @@
             <a:r>
               <a:rPr lang="en-US" sz="1200" dirty="0">
                 <a:solidFill>
-                  <a:srgbClr val="23262F"/>
+                  <a:srgbClr val="D8D4E4"/>
                 </a:solidFill>
                 <a:latin typeface="Courier New" pitchFamily="34" charset="0"/>
                 <a:ea typeface="Courier New" pitchFamily="34" charset="-122"/>
@@ -3972,7 +3950,7 @@
             <a:r>
               <a:rPr lang="en-US" sz="1200" dirty="0">
                 <a:solidFill>
-                  <a:srgbClr val="B45309"/>
+                  <a:srgbClr val="F0B36B"/>
                 </a:solidFill>
                 <a:latin typeface="Courier New" pitchFamily="34" charset="0"/>
                 <a:ea typeface="Courier New" pitchFamily="34" charset="-122"/>
@@ -3986,7 +3964,7 @@
       </p:sp>
       <p:sp>
         <p:nvSpPr>
-          <p:cNvPr id="10" name="Shape 7"/>
+          <p:cNvPr id="9" name="Shape 6"/>
           <p:cNvSpPr/>
           <p:nvPr/>
         </p:nvSpPr>
@@ -4001,14 +3979,14 @@
             </a:avLst>
           </a:prstGeom>
           <a:solidFill>
-            <a:srgbClr val="FBE9E9"/>
+            <a:srgbClr val="2E1418"/>
           </a:solidFill>
           <a:ln/>
         </p:spPr>
       </p:sp>
       <p:sp>
         <p:nvSpPr>
-          <p:cNvPr id="11" name="Text 8"/>
+          <p:cNvPr id="10" name="Text 7"/>
           <p:cNvSpPr/>
           <p:nvPr/>
         </p:nvSpPr>
@@ -4033,7 +4011,7 @@
             <a:r>
               <a:rPr lang="en-US" sz="1450" b="1" dirty="0">
                 <a:solidFill>
-                  <a:srgbClr val="C62A2A"/>
+                  <a:srgbClr val="FF7B7B"/>
                 </a:solidFill>
                 <a:latin typeface="Montserrat" pitchFamily="34" charset="0"/>
                 <a:ea typeface="Montserrat" pitchFamily="34" charset="-122"/>
@@ -4047,7 +4025,7 @@
       </p:sp>
       <p:sp>
         <p:nvSpPr>
-          <p:cNvPr id="12" name="Text 9"/>
+          <p:cNvPr id="11" name="Text 8"/>
           <p:cNvSpPr/>
           <p:nvPr/>
         </p:nvSpPr>
@@ -4075,7 +4053,7 @@
             <a:r>
               <a:rPr lang="en-US" sz="1200" dirty="0">
                 <a:solidFill>
-                  <a:srgbClr val="111318"/>
+                  <a:srgbClr val="FFFFFF"/>
                 </a:solidFill>
                 <a:latin typeface="Montserrat" pitchFamily="34" charset="0"/>
                 <a:ea typeface="Montserrat" pitchFamily="34" charset="-122"/>
@@ -4089,7 +4067,7 @@
       </p:sp>
       <p:sp>
         <p:nvSpPr>
-          <p:cNvPr id="13" name="Shape 10"/>
+          <p:cNvPr id="12" name="Shape 9"/>
           <p:cNvSpPr/>
           <p:nvPr/>
         </p:nvSpPr>
@@ -4104,14 +4082,14 @@
             </a:avLst>
           </a:prstGeom>
           <a:solidFill>
-            <a:srgbClr val="E9F4EF"/>
+            <a:srgbClr val="102A20"/>
           </a:solidFill>
           <a:ln/>
         </p:spPr>
       </p:sp>
       <p:sp>
         <p:nvSpPr>
-          <p:cNvPr id="14" name="Text 11"/>
+          <p:cNvPr id="13" name="Text 10"/>
           <p:cNvSpPr/>
           <p:nvPr/>
         </p:nvSpPr>
@@ -4136,7 +4114,7 @@
             <a:r>
               <a:rPr lang="en-US" sz="1450" b="1" dirty="0">
                 <a:solidFill>
-                  <a:srgbClr val="1B8A5A"/>
+                  <a:srgbClr val="5FD6A0"/>
                 </a:solidFill>
                 <a:latin typeface="Montserrat" pitchFamily="34" charset="0"/>
                 <a:ea typeface="Montserrat" pitchFamily="34" charset="-122"/>
@@ -4150,7 +4128,7 @@
       </p:sp>
       <p:sp>
         <p:nvSpPr>
-          <p:cNvPr id="15" name="Text 12"/>
+          <p:cNvPr id="14" name="Text 11"/>
           <p:cNvSpPr/>
           <p:nvPr/>
         </p:nvSpPr>
@@ -4178,7 +4156,7 @@
             <a:r>
               <a:rPr lang="en-US" sz="1200" dirty="0">
                 <a:solidFill>
-                  <a:srgbClr val="111318"/>
+                  <a:srgbClr val="FFFFFF"/>
                 </a:solidFill>
                 <a:latin typeface="Montserrat" pitchFamily="34" charset="0"/>
                 <a:ea typeface="Montserrat" pitchFamily="34" charset="-122"/>
@@ -4220,7 +4198,7 @@
             <a:lvl1pPr>
               <a:defRPr sz="850">
                 <a:solidFill>
-                  <a:srgbClr val="9AA1AD"/>
+                  <a:srgbClr val="8A82A0"/>
                 </a:solidFill>
                 <a:latin typeface="Courier New"/>
                 <a:ea typeface="Courier New"/>
@@ -4265,29 +4243,7 @@
       </p:grpSpPr>
       <p:sp>
         <p:nvSpPr>
-          <p:cNvPr id="2" name="Shape 0"/>
-          <p:cNvSpPr/>
-          <p:nvPr/>
-        </p:nvSpPr>
-        <p:spPr>
-          <a:xfrm>
-            <a:off x="231343" y="194767"/>
-            <a:ext cx="11716207" cy="6473952"/>
-          </a:xfrm>
-          <a:prstGeom prst="roundRect">
-            <a:avLst>
-              <a:gd name="adj" fmla="val 3107"/>
-            </a:avLst>
-          </a:prstGeom>
-          <a:solidFill>
-            <a:srgbClr val="FFFFFF"/>
-          </a:solidFill>
-          <a:ln/>
-        </p:spPr>
-      </p:sp>
-      <p:sp>
-        <p:nvSpPr>
-          <p:cNvPr id="3" name="Text 1"/>
+          <p:cNvPr id="2" name="Text 0"/>
           <p:cNvSpPr/>
           <p:nvPr/>
         </p:nvSpPr>
@@ -4312,7 +4268,7 @@
             <a:r>
               <a:rPr lang="en-US" sz="2600" b="1" dirty="0">
                 <a:solidFill>
-                  <a:srgbClr val="5A05F4"/>
+                  <a:srgbClr val="C9A6FF"/>
                 </a:solidFill>
                 <a:latin typeface="Courier New" pitchFamily="34" charset="0"/>
                 <a:ea typeface="Courier New" pitchFamily="34" charset="-122"/>
@@ -4326,7 +4282,7 @@
       </p:sp>
       <p:sp>
         <p:nvSpPr>
-          <p:cNvPr id="4" name="Text 2"/>
+          <p:cNvPr id="3" name="Text 1"/>
           <p:cNvSpPr/>
           <p:nvPr/>
         </p:nvSpPr>
@@ -4351,7 +4307,7 @@
             <a:r>
               <a:rPr lang="en-US" sz="2400" b="1" dirty="0">
                 <a:solidFill>
-                  <a:srgbClr val="111318"/>
+                  <a:srgbClr val="FFFFFF"/>
                 </a:solidFill>
                 <a:latin typeface="Montserrat" pitchFamily="34" charset="0"/>
                 <a:ea typeface="Montserrat" pitchFamily="34" charset="-122"/>
@@ -4365,7 +4321,7 @@
       </p:sp>
       <p:sp>
         <p:nvSpPr>
-          <p:cNvPr id="5" name="Shape 3"/>
+          <p:cNvPr id="4" name="Shape 2"/>
           <p:cNvSpPr/>
           <p:nvPr/>
         </p:nvSpPr>
@@ -4380,14 +4336,14 @@
             </a:avLst>
           </a:prstGeom>
           <a:solidFill>
-            <a:srgbClr val="5A05F4"/>
+            <a:srgbClr val="C9A6FF"/>
           </a:solidFill>
           <a:ln/>
         </p:spPr>
       </p:sp>
       <p:sp>
         <p:nvSpPr>
-          <p:cNvPr id="6" name="Text 4"/>
+          <p:cNvPr id="5" name="Text 3"/>
           <p:cNvSpPr/>
           <p:nvPr/>
         </p:nvSpPr>
@@ -4412,7 +4368,7 @@
             <a:r>
               <a:rPr lang="en-US" sz="900" b="1" spc="100" kern="0" dirty="0">
                 <a:solidFill>
-                  <a:srgbClr val="FFFFFF"/>
+                  <a:srgbClr val="1C1140"/>
                 </a:solidFill>
                 <a:latin typeface="Courier New" pitchFamily="34" charset="0"/>
                 <a:ea typeface="Courier New" pitchFamily="34" charset="-122"/>
@@ -4426,7 +4382,7 @@
       </p:sp>
       <p:pic>
         <p:nvPicPr>
-          <p:cNvPr id="7" name="Image 0" descr="preencoded.png">    </p:cNvPr>
+          <p:cNvPr id="6" name="Image 0" descr="preencoded.png">    </p:cNvPr>
           <p:cNvPicPr>
             <a:picLocks noChangeAspect="1"/>
           </p:cNvPicPr>
@@ -4450,7 +4406,7 @@
       </p:pic>
       <p:sp>
         <p:nvSpPr>
-          <p:cNvPr id="8" name="Shape 5"/>
+          <p:cNvPr id="7" name="Shape 4"/>
           <p:cNvSpPr/>
           <p:nvPr/>
         </p:nvSpPr>
@@ -4465,11 +4421,11 @@
             </a:avLst>
           </a:prstGeom>
           <a:solidFill>
-            <a:srgbClr val="FFFFFF"/>
+            <a:srgbClr val="17141F"/>
           </a:solidFill>
           <a:ln w="12700">
             <a:solidFill>
-              <a:srgbClr val="E6E7EC"/>
+              <a:srgbClr val="2E2A3A"/>
             </a:solidFill>
             <a:prstDash val="solid"/>
           </a:ln>
@@ -4477,7 +4433,7 @@
       </p:sp>
       <p:sp>
         <p:nvSpPr>
-          <p:cNvPr id="9" name="Text 6"/>
+          <p:cNvPr id="8" name="Text 5"/>
           <p:cNvSpPr/>
           <p:nvPr/>
         </p:nvSpPr>
@@ -4502,7 +4458,7 @@
             <a:r>
               <a:rPr lang="en-US" sz="1100" dirty="0">
                 <a:solidFill>
-                  <a:srgbClr val="111318"/>
+                  <a:srgbClr val="FFFFFF"/>
                 </a:solidFill>
                 <a:latin typeface="Courier New" pitchFamily="34" charset="0"/>
                 <a:ea typeface="Courier New" pitchFamily="34" charset="-122"/>
@@ -4516,7 +4472,7 @@
       </p:sp>
       <p:sp>
         <p:nvSpPr>
-          <p:cNvPr id="10" name="Shape 7"/>
+          <p:cNvPr id="9" name="Shape 6"/>
           <p:cNvSpPr/>
           <p:nvPr/>
         </p:nvSpPr>
@@ -4531,7 +4487,7 @@
           <a:noFill/>
           <a:ln w="15875">
             <a:solidFill>
-              <a:srgbClr val="C9B8FB"/>
+              <a:srgbClr val="9B7BE8"/>
             </a:solidFill>
             <a:prstDash val="solid"/>
           </a:ln>
@@ -4539,7 +4495,7 @@
       </p:sp>
       <p:sp>
         <p:nvSpPr>
-          <p:cNvPr id="11" name="Shape 8"/>
+          <p:cNvPr id="10" name="Shape 7"/>
           <p:cNvSpPr/>
           <p:nvPr/>
         </p:nvSpPr>
@@ -4552,14 +4508,14 @@
             <a:avLst/>
           </a:prstGeom>
           <a:solidFill>
-            <a:srgbClr val="C9B8FB"/>
+            <a:srgbClr val="9B7BE8"/>
           </a:solidFill>
           <a:ln/>
         </p:spPr>
       </p:sp>
       <p:sp>
         <p:nvSpPr>
-          <p:cNvPr id="12" name="Shape 9"/>
+          <p:cNvPr id="11" name="Shape 8"/>
           <p:cNvSpPr/>
           <p:nvPr/>
         </p:nvSpPr>
@@ -4574,14 +4530,14 @@
             </a:avLst>
           </a:prstGeom>
           <a:solidFill>
-            <a:srgbClr val="F8F0E2"/>
+            <a:srgbClr val="2A2010"/>
           </a:solidFill>
           <a:ln/>
         </p:spPr>
       </p:sp>
       <p:sp>
         <p:nvSpPr>
-          <p:cNvPr id="13" name="Text 10"/>
+          <p:cNvPr id="12" name="Text 9"/>
           <p:cNvSpPr/>
           <p:nvPr/>
         </p:nvSpPr>
@@ -4606,7 +4562,7 @@
             <a:r>
               <a:rPr lang="en-US" sz="1100" b="1" dirty="0">
                 <a:solidFill>
-                  <a:srgbClr val="9A5B12"/>
+                  <a:srgbClr val="E8A857"/>
                 </a:solidFill>
                 <a:latin typeface="Courier New" pitchFamily="34" charset="0"/>
                 <a:ea typeface="Courier New" pitchFamily="34" charset="-122"/>
@@ -4620,7 +4576,7 @@
       </p:sp>
       <p:sp>
         <p:nvSpPr>
-          <p:cNvPr id="14" name="Shape 11"/>
+          <p:cNvPr id="13" name="Shape 10"/>
           <p:cNvSpPr/>
           <p:nvPr/>
         </p:nvSpPr>
@@ -4635,7 +4591,7 @@
           <a:noFill/>
           <a:ln w="15875">
             <a:solidFill>
-              <a:srgbClr val="C9B8FB"/>
+              <a:srgbClr val="9B7BE8"/>
             </a:solidFill>
             <a:prstDash val="solid"/>
           </a:ln>
@@ -4643,7 +4599,7 @@
       </p:sp>
       <p:sp>
         <p:nvSpPr>
-          <p:cNvPr id="15" name="Shape 12"/>
+          <p:cNvPr id="14" name="Shape 11"/>
           <p:cNvSpPr/>
           <p:nvPr/>
         </p:nvSpPr>
@@ -4656,14 +4612,14 @@
             <a:avLst/>
           </a:prstGeom>
           <a:solidFill>
-            <a:srgbClr val="C9B8FB"/>
+            <a:srgbClr val="9B7BE8"/>
           </a:solidFill>
           <a:ln/>
         </p:spPr>
       </p:sp>
       <p:sp>
         <p:nvSpPr>
-          <p:cNvPr id="16" name="Shape 13"/>
+          <p:cNvPr id="15" name="Shape 12"/>
           <p:cNvSpPr/>
           <p:nvPr/>
         </p:nvSpPr>
@@ -4678,11 +4634,11 @@
             </a:avLst>
           </a:prstGeom>
           <a:solidFill>
-            <a:srgbClr val="FFFFFF"/>
+            <a:srgbClr val="17141F"/>
           </a:solidFill>
           <a:ln w="12700">
             <a:solidFill>
-              <a:srgbClr val="E6E7EC"/>
+              <a:srgbClr val="2E2A3A"/>
             </a:solidFill>
             <a:prstDash val="solid"/>
           </a:ln>
@@ -4690,7 +4646,7 @@
       </p:sp>
       <p:sp>
         <p:nvSpPr>
-          <p:cNvPr id="17" name="Text 14"/>
+          <p:cNvPr id="16" name="Text 13"/>
           <p:cNvSpPr/>
           <p:nvPr/>
         </p:nvSpPr>
@@ -4715,7 +4671,7 @@
             <a:r>
               <a:rPr lang="en-US" sz="1100" dirty="0">
                 <a:solidFill>
-                  <a:srgbClr val="111318"/>
+                  <a:srgbClr val="FFFFFF"/>
                 </a:solidFill>
                 <a:latin typeface="Courier New" pitchFamily="34" charset="0"/>
                 <a:ea typeface="Courier New" pitchFamily="34" charset="-122"/>
@@ -4729,7 +4685,7 @@
       </p:sp>
       <p:sp>
         <p:nvSpPr>
-          <p:cNvPr id="18" name="Shape 15"/>
+          <p:cNvPr id="17" name="Shape 14"/>
           <p:cNvSpPr/>
           <p:nvPr/>
         </p:nvSpPr>
@@ -4744,7 +4700,7 @@
           <a:noFill/>
           <a:ln w="15875">
             <a:solidFill>
-              <a:srgbClr val="C9B8FB"/>
+              <a:srgbClr val="9B7BE8"/>
             </a:solidFill>
             <a:prstDash val="solid"/>
           </a:ln>
@@ -4752,7 +4708,7 @@
       </p:sp>
       <p:sp>
         <p:nvSpPr>
-          <p:cNvPr id="19" name="Shape 16"/>
+          <p:cNvPr id="18" name="Shape 15"/>
           <p:cNvSpPr/>
           <p:nvPr/>
         </p:nvSpPr>
@@ -4765,14 +4721,14 @@
             <a:avLst/>
           </a:prstGeom>
           <a:solidFill>
-            <a:srgbClr val="C9B8FB"/>
+            <a:srgbClr val="9B7BE8"/>
           </a:solidFill>
           <a:ln/>
         </p:spPr>
       </p:sp>
       <p:sp>
         <p:nvSpPr>
-          <p:cNvPr id="20" name="Shape 17"/>
+          <p:cNvPr id="19" name="Shape 16"/>
           <p:cNvSpPr/>
           <p:nvPr/>
         </p:nvSpPr>
@@ -4787,11 +4743,11 @@
             </a:avLst>
           </a:prstGeom>
           <a:solidFill>
-            <a:srgbClr val="FFFFFF"/>
+            <a:srgbClr val="17141F"/>
           </a:solidFill>
           <a:ln w="12700">
             <a:solidFill>
-              <a:srgbClr val="E6E7EC"/>
+              <a:srgbClr val="2E2A3A"/>
             </a:solidFill>
             <a:prstDash val="solid"/>
           </a:ln>
@@ -4799,7 +4755,7 @@
       </p:sp>
       <p:sp>
         <p:nvSpPr>
-          <p:cNvPr id="21" name="Text 18"/>
+          <p:cNvPr id="20" name="Text 17"/>
           <p:cNvSpPr/>
           <p:nvPr/>
         </p:nvSpPr>
@@ -4824,7 +4780,7 @@
             <a:r>
               <a:rPr lang="en-US" sz="1100" dirty="0">
                 <a:solidFill>
-                  <a:srgbClr val="111318"/>
+                  <a:srgbClr val="FFFFFF"/>
                 </a:solidFill>
                 <a:latin typeface="Courier New" pitchFamily="34" charset="0"/>
                 <a:ea typeface="Courier New" pitchFamily="34" charset="-122"/>
@@ -4838,7 +4794,7 @@
       </p:sp>
       <p:sp>
         <p:nvSpPr>
-          <p:cNvPr id="22" name="Shape 19"/>
+          <p:cNvPr id="21" name="Shape 18"/>
           <p:cNvSpPr/>
           <p:nvPr/>
         </p:nvSpPr>
@@ -4853,14 +4809,14 @@
             </a:avLst>
           </a:prstGeom>
           <a:solidFill>
-            <a:srgbClr val="FBE9E9"/>
+            <a:srgbClr val="2E1418"/>
           </a:solidFill>
           <a:ln/>
         </p:spPr>
       </p:sp>
       <p:sp>
         <p:nvSpPr>
-          <p:cNvPr id="23" name="Text 20"/>
+          <p:cNvPr id="22" name="Text 19"/>
           <p:cNvSpPr/>
           <p:nvPr/>
         </p:nvSpPr>
@@ -4885,7 +4841,7 @@
             <a:r>
               <a:rPr lang="en-US" sz="3400" b="1" dirty="0">
                 <a:solidFill>
-                  <a:srgbClr val="C62A2A"/>
+                  <a:srgbClr val="FF7B7B"/>
                 </a:solidFill>
                 <a:latin typeface="Montserrat" pitchFamily="34" charset="0"/>
                 <a:ea typeface="Montserrat" pitchFamily="34" charset="-122"/>
@@ -4899,7 +4855,7 @@
       </p:sp>
       <p:sp>
         <p:nvSpPr>
-          <p:cNvPr id="24" name="Text 21"/>
+          <p:cNvPr id="23" name="Text 20"/>
           <p:cNvSpPr/>
           <p:nvPr/>
         </p:nvSpPr>
@@ -4924,7 +4880,7 @@
             <a:r>
               <a:rPr lang="en-US" sz="1150" dirty="0">
                 <a:solidFill>
-                  <a:srgbClr val="C62A2A"/>
+                  <a:srgbClr val="FF7B7B"/>
                 </a:solidFill>
                 <a:latin typeface="Montserrat" pitchFamily="34" charset="0"/>
                 <a:ea typeface="Montserrat" pitchFamily="34" charset="-122"/>
@@ -4938,7 +4894,7 @@
       </p:sp>
       <p:sp>
         <p:nvSpPr>
-          <p:cNvPr id="25" name="Shape 22"/>
+          <p:cNvPr id="24" name="Shape 21"/>
           <p:cNvSpPr/>
           <p:nvPr/>
         </p:nvSpPr>
@@ -4953,14 +4909,14 @@
             </a:avLst>
           </a:prstGeom>
           <a:solidFill>
-            <a:srgbClr val="F8F0E2"/>
+            <a:srgbClr val="2A2010"/>
           </a:solidFill>
           <a:ln/>
         </p:spPr>
       </p:sp>
       <p:sp>
         <p:nvSpPr>
-          <p:cNvPr id="26" name="Text 23"/>
+          <p:cNvPr id="25" name="Text 22"/>
           <p:cNvSpPr/>
           <p:nvPr/>
         </p:nvSpPr>
@@ -4988,7 +4944,7 @@
             <a:r>
               <a:rPr lang="en-US" sz="1300" dirty="0">
                 <a:solidFill>
-                  <a:srgbClr val="111318"/>
+                  <a:srgbClr val="FFFFFF"/>
                 </a:solidFill>
                 <a:latin typeface="Montserrat" pitchFamily="34" charset="0"/>
                 <a:ea typeface="Montserrat" pitchFamily="34" charset="-122"/>
@@ -5002,7 +4958,7 @@
       </p:sp>
       <p:sp>
         <p:nvSpPr>
-          <p:cNvPr id="27" name="Shape 24"/>
+          <p:cNvPr id="26" name="Shape 23"/>
           <p:cNvSpPr/>
           <p:nvPr/>
         </p:nvSpPr>
@@ -5017,14 +4973,14 @@
             </a:avLst>
           </a:prstGeom>
           <a:solidFill>
-            <a:srgbClr val="E9F4EF"/>
+            <a:srgbClr val="102A20"/>
           </a:solidFill>
           <a:ln/>
         </p:spPr>
       </p:sp>
       <p:sp>
         <p:nvSpPr>
-          <p:cNvPr id="28" name="Text 25"/>
+          <p:cNvPr id="27" name="Text 24"/>
           <p:cNvSpPr/>
           <p:nvPr/>
         </p:nvSpPr>
@@ -5049,7 +5005,7 @@
             <a:r>
               <a:rPr lang="en-US" sz="950" b="1" spc="150" kern="0" dirty="0">
                 <a:solidFill>
-                  <a:srgbClr val="1B8A5A"/>
+                  <a:srgbClr val="5FD6A0"/>
                 </a:solidFill>
                 <a:latin typeface="Courier New" pitchFamily="34" charset="0"/>
                 <a:ea typeface="Courier New" pitchFamily="34" charset="-122"/>
@@ -5063,7 +5019,7 @@
       </p:sp>
       <p:sp>
         <p:nvSpPr>
-          <p:cNvPr id="29" name="Text 26"/>
+          <p:cNvPr id="28" name="Text 25"/>
           <p:cNvSpPr/>
           <p:nvPr/>
         </p:nvSpPr>
@@ -5091,7 +5047,7 @@
             <a:r>
               <a:rPr lang="en-US" sz="1300" dirty="0">
                 <a:solidFill>
-                  <a:srgbClr val="111318"/>
+                  <a:srgbClr val="FFFFFF"/>
                 </a:solidFill>
                 <a:latin typeface="Montserrat" pitchFamily="34" charset="0"/>
                 <a:ea typeface="Montserrat" pitchFamily="34" charset="-122"/>
@@ -5133,7 +5089,7 @@
             <a:lvl1pPr>
               <a:defRPr sz="850">
                 <a:solidFill>
-                  <a:srgbClr val="9AA1AD"/>
+                  <a:srgbClr val="8A82A0"/>
                 </a:solidFill>
                 <a:latin typeface="Courier New"/>
                 <a:ea typeface="Courier New"/>
@@ -5178,29 +5134,7 @@
       </p:grpSpPr>
       <p:sp>
         <p:nvSpPr>
-          <p:cNvPr id="2" name="Shape 0"/>
-          <p:cNvSpPr/>
-          <p:nvPr/>
-        </p:nvSpPr>
-        <p:spPr>
-          <a:xfrm>
-            <a:off x="231343" y="194767"/>
-            <a:ext cx="11716207" cy="6473952"/>
-          </a:xfrm>
-          <a:prstGeom prst="roundRect">
-            <a:avLst>
-              <a:gd name="adj" fmla="val 3107"/>
-            </a:avLst>
-          </a:prstGeom>
-          <a:solidFill>
-            <a:srgbClr val="FFFFFF"/>
-          </a:solidFill>
-          <a:ln/>
-        </p:spPr>
-      </p:sp>
-      <p:sp>
-        <p:nvSpPr>
-          <p:cNvPr id="3" name="Text 1"/>
+          <p:cNvPr id="2" name="Text 0"/>
           <p:cNvSpPr/>
           <p:nvPr/>
         </p:nvSpPr>
@@ -5225,7 +5159,7 @@
             <a:r>
               <a:rPr lang="en-US" sz="2600" b="1" dirty="0">
                 <a:solidFill>
-                  <a:srgbClr val="5A05F4"/>
+                  <a:srgbClr val="C9A6FF"/>
                 </a:solidFill>
                 <a:latin typeface="Courier New" pitchFamily="34" charset="0"/>
                 <a:ea typeface="Courier New" pitchFamily="34" charset="-122"/>
@@ -5239,7 +5173,7 @@
       </p:sp>
       <p:sp>
         <p:nvSpPr>
-          <p:cNvPr id="4" name="Text 2"/>
+          <p:cNvPr id="3" name="Text 1"/>
           <p:cNvSpPr/>
           <p:nvPr/>
         </p:nvSpPr>
@@ -5264,7 +5198,7 @@
             <a:r>
               <a:rPr lang="en-US" sz="2400" b="1" dirty="0">
                 <a:solidFill>
-                  <a:srgbClr val="111318"/>
+                  <a:srgbClr val="FFFFFF"/>
                 </a:solidFill>
                 <a:latin typeface="Montserrat" pitchFamily="34" charset="0"/>
                 <a:ea typeface="Montserrat" pitchFamily="34" charset="-122"/>
@@ -5278,7 +5212,7 @@
       </p:sp>
       <p:sp>
         <p:nvSpPr>
-          <p:cNvPr id="5" name="Shape 3"/>
+          <p:cNvPr id="4" name="Shape 2"/>
           <p:cNvSpPr/>
           <p:nvPr/>
         </p:nvSpPr>
@@ -5293,14 +5227,14 @@
             </a:avLst>
           </a:prstGeom>
           <a:solidFill>
-            <a:srgbClr val="5A05F4"/>
+            <a:srgbClr val="C9A6FF"/>
           </a:solidFill>
           <a:ln/>
         </p:spPr>
       </p:sp>
       <p:sp>
         <p:nvSpPr>
-          <p:cNvPr id="6" name="Text 4"/>
+          <p:cNvPr id="5" name="Text 3"/>
           <p:cNvSpPr/>
           <p:nvPr/>
         </p:nvSpPr>
@@ -5325,7 +5259,7 @@
             <a:r>
               <a:rPr lang="en-US" sz="900" b="1" spc="100" kern="0" dirty="0">
                 <a:solidFill>
-                  <a:srgbClr val="FFFFFF"/>
+                  <a:srgbClr val="1C1140"/>
                 </a:solidFill>
                 <a:latin typeface="Courier New" pitchFamily="34" charset="0"/>
                 <a:ea typeface="Courier New" pitchFamily="34" charset="-122"/>
@@ -5339,7 +5273,7 @@
       </p:sp>
       <p:pic>
         <p:nvPicPr>
-          <p:cNvPr id="7" name="Image 0" descr="preencoded.png">    </p:cNvPr>
+          <p:cNvPr id="6" name="Image 0" descr="preencoded.png">    </p:cNvPr>
           <p:cNvPicPr>
             <a:picLocks noChangeAspect="1"/>
           </p:cNvPicPr>
@@ -5363,7 +5297,7 @@
       </p:pic>
       <p:sp>
         <p:nvSpPr>
-          <p:cNvPr id="8" name="Shape 5"/>
+          <p:cNvPr id="7" name="Shape 4"/>
           <p:cNvSpPr/>
           <p:nvPr/>
         </p:nvSpPr>
@@ -5378,14 +5312,14 @@
             </a:avLst>
           </a:prstGeom>
           <a:solidFill>
-            <a:srgbClr val="EFEAFE"/>
+            <a:srgbClr val="1C1140"/>
           </a:solidFill>
           <a:ln/>
         </p:spPr>
       </p:sp>
       <p:sp>
         <p:nvSpPr>
-          <p:cNvPr id="9" name="Text 6"/>
+          <p:cNvPr id="8" name="Text 5"/>
           <p:cNvSpPr/>
           <p:nvPr/>
         </p:nvSpPr>
@@ -5410,7 +5344,7 @@
             <a:r>
               <a:rPr lang="en-US" sz="1450" b="1" dirty="0">
                 <a:solidFill>
-                  <a:srgbClr val="5A05F4"/>
+                  <a:srgbClr val="C9A6FF"/>
                 </a:solidFill>
                 <a:latin typeface="Montserrat" pitchFamily="34" charset="0"/>
                 <a:ea typeface="Montserrat" pitchFamily="34" charset="-122"/>
@@ -5424,7 +5358,7 @@
       </p:sp>
       <p:sp>
         <p:nvSpPr>
-          <p:cNvPr id="10" name="Text 7"/>
+          <p:cNvPr id="9" name="Text 6"/>
           <p:cNvSpPr/>
           <p:nvPr/>
         </p:nvSpPr>
@@ -5452,7 +5386,7 @@
             <a:r>
               <a:rPr lang="en-US" sz="1200" dirty="0">
                 <a:solidFill>
-                  <a:srgbClr val="111318"/>
+                  <a:srgbClr val="FFFFFF"/>
                 </a:solidFill>
                 <a:latin typeface="Montserrat" pitchFamily="34" charset="0"/>
                 <a:ea typeface="Montserrat" pitchFamily="34" charset="-122"/>
@@ -5466,7 +5400,7 @@
       </p:sp>
       <p:sp>
         <p:nvSpPr>
-          <p:cNvPr id="11" name="Shape 8"/>
+          <p:cNvPr id="10" name="Shape 7"/>
           <p:cNvSpPr/>
           <p:nvPr/>
         </p:nvSpPr>
@@ -5481,11 +5415,11 @@
             </a:avLst>
           </a:prstGeom>
           <a:solidFill>
-            <a:srgbClr val="FFFFFF"/>
+            <a:srgbClr val="17141F"/>
           </a:solidFill>
           <a:ln w="12700">
             <a:solidFill>
-              <a:srgbClr val="E6E7EC"/>
+              <a:srgbClr val="2E2A3A"/>
             </a:solidFill>
             <a:prstDash val="solid"/>
           </a:ln>
@@ -5493,7 +5427,7 @@
       </p:sp>
       <p:sp>
         <p:nvSpPr>
-          <p:cNvPr id="12" name="Text 9"/>
+          <p:cNvPr id="11" name="Text 8"/>
           <p:cNvSpPr/>
           <p:nvPr/>
         </p:nvSpPr>
@@ -5518,7 +5452,7 @@
             <a:r>
               <a:rPr lang="en-US" sz="1450" b="1" dirty="0">
                 <a:solidFill>
-                  <a:srgbClr val="111318"/>
+                  <a:srgbClr val="FFFFFF"/>
                 </a:solidFill>
                 <a:latin typeface="Montserrat" pitchFamily="34" charset="0"/>
                 <a:ea typeface="Montserrat" pitchFamily="34" charset="-122"/>
@@ -5532,7 +5466,7 @@
       </p:sp>
       <p:sp>
         <p:nvSpPr>
-          <p:cNvPr id="13" name="Text 10"/>
+          <p:cNvPr id="12" name="Text 9"/>
           <p:cNvSpPr/>
           <p:nvPr/>
         </p:nvSpPr>
@@ -5560,7 +5494,7 @@
             <a:r>
               <a:rPr lang="en-US" sz="1200" dirty="0">
                 <a:solidFill>
-                  <a:srgbClr val="555B66"/>
+                  <a:srgbClr val="AFA9BE"/>
                 </a:solidFill>
                 <a:latin typeface="Montserrat" pitchFamily="34" charset="0"/>
                 <a:ea typeface="Montserrat" pitchFamily="34" charset="-122"/>
@@ -5574,7 +5508,7 @@
       </p:sp>
       <p:sp>
         <p:nvSpPr>
-          <p:cNvPr id="14" name="Shape 11"/>
+          <p:cNvPr id="13" name="Shape 10"/>
           <p:cNvSpPr/>
           <p:nvPr/>
         </p:nvSpPr>
@@ -5587,11 +5521,11 @@
             <a:avLst/>
           </a:prstGeom>
           <a:solidFill>
-            <a:srgbClr val="E9F4EF"/>
+            <a:srgbClr val="102A20"/>
           </a:solidFill>
           <a:ln w="12700">
             <a:solidFill>
-              <a:srgbClr val="1B8A5A"/>
+              <a:srgbClr val="5FD6A0"/>
             </a:solidFill>
             <a:prstDash val="solid"/>
           </a:ln>
@@ -5599,7 +5533,7 @@
       </p:sp>
       <p:sp>
         <p:nvSpPr>
-          <p:cNvPr id="15" name="Text 12"/>
+          <p:cNvPr id="14" name="Text 11"/>
           <p:cNvSpPr/>
           <p:nvPr/>
         </p:nvSpPr>
@@ -5624,7 +5558,7 @@
             <a:r>
               <a:rPr lang="en-US" sz="950" b="1" dirty="0">
                 <a:solidFill>
-                  <a:srgbClr val="1B8A5A"/>
+                  <a:srgbClr val="5FD6A0"/>
                 </a:solidFill>
                 <a:latin typeface="Courier New" pitchFamily="34" charset="0"/>
                 <a:ea typeface="Courier New" pitchFamily="34" charset="-122"/>
@@ -5638,7 +5572,7 @@
       </p:sp>
       <p:sp>
         <p:nvSpPr>
-          <p:cNvPr id="16" name="Shape 13"/>
+          <p:cNvPr id="15" name="Shape 12"/>
           <p:cNvSpPr/>
           <p:nvPr/>
         </p:nvSpPr>
@@ -5651,11 +5585,11 @@
             <a:avLst/>
           </a:prstGeom>
           <a:solidFill>
-            <a:srgbClr val="FBE9E9"/>
+            <a:srgbClr val="2E1418"/>
           </a:solidFill>
           <a:ln w="12700">
             <a:solidFill>
-              <a:srgbClr val="C62A2A"/>
+              <a:srgbClr val="FF7B7B"/>
             </a:solidFill>
             <a:prstDash val="solid"/>
           </a:ln>
@@ -5663,7 +5597,7 @@
       </p:sp>
       <p:sp>
         <p:nvSpPr>
-          <p:cNvPr id="17" name="Text 14"/>
+          <p:cNvPr id="16" name="Text 13"/>
           <p:cNvSpPr/>
           <p:nvPr/>
         </p:nvSpPr>
@@ -5688,7 +5622,7 @@
             <a:r>
               <a:rPr lang="en-US" sz="950" b="1" dirty="0">
                 <a:solidFill>
-                  <a:srgbClr val="C62A2A"/>
+                  <a:srgbClr val="FF7B7B"/>
                 </a:solidFill>
                 <a:latin typeface="Courier New" pitchFamily="34" charset="0"/>
                 <a:ea typeface="Courier New" pitchFamily="34" charset="-122"/>
@@ -5702,7 +5636,7 @@
       </p:sp>
       <p:sp>
         <p:nvSpPr>
-          <p:cNvPr id="18" name="Text 15"/>
+          <p:cNvPr id="17" name="Text 14"/>
           <p:cNvSpPr/>
           <p:nvPr/>
         </p:nvSpPr>
@@ -5727,7 +5661,7 @@
             <a:r>
               <a:rPr lang="en-US" sz="850" spc="100" kern="0" dirty="0">
                 <a:solidFill>
-                  <a:srgbClr val="9AA1AD"/>
+                  <a:srgbClr val="8A82A0"/>
                 </a:solidFill>
                 <a:latin typeface="Courier New" pitchFamily="34" charset="0"/>
                 <a:ea typeface="Courier New" pitchFamily="34" charset="-122"/>
@@ -5741,7 +5675,7 @@
       </p:sp>
       <p:sp>
         <p:nvSpPr>
-          <p:cNvPr id="19" name="Shape 16"/>
+          <p:cNvPr id="18" name="Shape 15"/>
           <p:cNvSpPr/>
           <p:nvPr/>
         </p:nvSpPr>
@@ -5756,14 +5690,14 @@
             </a:avLst>
           </a:prstGeom>
           <a:solidFill>
-            <a:srgbClr val="FBE9E9"/>
+            <a:srgbClr val="2E1418"/>
           </a:solidFill>
           <a:ln/>
         </p:spPr>
       </p:sp>
       <p:sp>
         <p:nvSpPr>
-          <p:cNvPr id="20" name="Text 17"/>
+          <p:cNvPr id="19" name="Text 16"/>
           <p:cNvSpPr/>
           <p:nvPr/>
         </p:nvSpPr>
@@ -5788,7 +5722,7 @@
             <a:r>
               <a:rPr lang="en-US" sz="950" b="1" spc="150" kern="0" dirty="0">
                 <a:solidFill>
-                  <a:srgbClr val="C62A2A"/>
+                  <a:srgbClr val="FF7B7B"/>
                 </a:solidFill>
                 <a:latin typeface="Courier New" pitchFamily="34" charset="0"/>
                 <a:ea typeface="Courier New" pitchFamily="34" charset="-122"/>
@@ -5802,7 +5736,7 @@
       </p:sp>
       <p:sp>
         <p:nvSpPr>
-          <p:cNvPr id="21" name="Text 18"/>
+          <p:cNvPr id="20" name="Text 17"/>
           <p:cNvSpPr/>
           <p:nvPr/>
         </p:nvSpPr>
@@ -5830,7 +5764,7 @@
             <a:r>
               <a:rPr lang="en-US" sz="1300" dirty="0">
                 <a:solidFill>
-                  <a:srgbClr val="111318"/>
+                  <a:srgbClr val="FFFFFF"/>
                 </a:solidFill>
                 <a:latin typeface="Montserrat" pitchFamily="34" charset="0"/>
                 <a:ea typeface="Montserrat" pitchFamily="34" charset="-122"/>
@@ -5872,7 +5806,7 @@
             <a:lvl1pPr>
               <a:defRPr sz="850">
                 <a:solidFill>
-                  <a:srgbClr val="9AA1AD"/>
+                  <a:srgbClr val="8A82A0"/>
                 </a:solidFill>
                 <a:latin typeface="Courier New"/>
                 <a:ea typeface="Courier New"/>
@@ -5917,29 +5851,7 @@
       </p:grpSpPr>
       <p:sp>
         <p:nvSpPr>
-          <p:cNvPr id="2" name="Shape 0"/>
-          <p:cNvSpPr/>
-          <p:nvPr/>
-        </p:nvSpPr>
-        <p:spPr>
-          <a:xfrm>
-            <a:off x="231343" y="194767"/>
-            <a:ext cx="11716207" cy="6473952"/>
-          </a:xfrm>
-          <a:prstGeom prst="roundRect">
-            <a:avLst>
-              <a:gd name="adj" fmla="val 3107"/>
-            </a:avLst>
-          </a:prstGeom>
-          <a:solidFill>
-            <a:srgbClr val="FFFFFF"/>
-          </a:solidFill>
-          <a:ln/>
-        </p:spPr>
-      </p:sp>
-      <p:sp>
-        <p:nvSpPr>
-          <p:cNvPr id="3" name="Text 1"/>
+          <p:cNvPr id="2" name="Text 0"/>
           <p:cNvSpPr/>
           <p:nvPr/>
         </p:nvSpPr>
@@ -5964,7 +5876,7 @@
             <a:r>
               <a:rPr lang="en-US" sz="2600" b="1" dirty="0">
                 <a:solidFill>
-                  <a:srgbClr val="5A05F4"/>
+                  <a:srgbClr val="C9A6FF"/>
                 </a:solidFill>
                 <a:latin typeface="Courier New" pitchFamily="34" charset="0"/>
                 <a:ea typeface="Courier New" pitchFamily="34" charset="-122"/>
@@ -5978,7 +5890,7 @@
       </p:sp>
       <p:sp>
         <p:nvSpPr>
-          <p:cNvPr id="4" name="Text 2"/>
+          <p:cNvPr id="3" name="Text 1"/>
           <p:cNvSpPr/>
           <p:nvPr/>
         </p:nvSpPr>
@@ -6003,7 +5915,7 @@
             <a:r>
               <a:rPr lang="en-US" sz="2400" b="1" dirty="0">
                 <a:solidFill>
-                  <a:srgbClr val="111318"/>
+                  <a:srgbClr val="FFFFFF"/>
                 </a:solidFill>
                 <a:latin typeface="Montserrat" pitchFamily="34" charset="0"/>
                 <a:ea typeface="Montserrat" pitchFamily="34" charset="-122"/>
@@ -6017,7 +5929,7 @@
       </p:sp>
       <p:sp>
         <p:nvSpPr>
-          <p:cNvPr id="5" name="Shape 3"/>
+          <p:cNvPr id="4" name="Shape 2"/>
           <p:cNvSpPr/>
           <p:nvPr/>
         </p:nvSpPr>
@@ -6032,14 +5944,14 @@
             </a:avLst>
           </a:prstGeom>
           <a:solidFill>
-            <a:srgbClr val="5A05F4"/>
+            <a:srgbClr val="C9A6FF"/>
           </a:solidFill>
           <a:ln/>
         </p:spPr>
       </p:sp>
       <p:sp>
         <p:nvSpPr>
-          <p:cNvPr id="6" name="Text 4"/>
+          <p:cNvPr id="5" name="Text 3"/>
           <p:cNvSpPr/>
           <p:nvPr/>
         </p:nvSpPr>
@@ -6064,7 +5976,7 @@
             <a:r>
               <a:rPr lang="en-US" sz="900" b="1" spc="100" kern="0" dirty="0">
                 <a:solidFill>
-                  <a:srgbClr val="FFFFFF"/>
+                  <a:srgbClr val="1C1140"/>
                 </a:solidFill>
                 <a:latin typeface="Courier New" pitchFamily="34" charset="0"/>
                 <a:ea typeface="Courier New" pitchFamily="34" charset="-122"/>
@@ -6078,7 +5990,7 @@
       </p:sp>
       <p:pic>
         <p:nvPicPr>
-          <p:cNvPr id="7" name="Image 0" descr="preencoded.png">    </p:cNvPr>
+          <p:cNvPr id="6" name="Image 0" descr="preencoded.png">    </p:cNvPr>
           <p:cNvPicPr>
             <a:picLocks noChangeAspect="1"/>
           </p:cNvPicPr>
@@ -6102,7 +6014,7 @@
       </p:pic>
       <p:sp>
         <p:nvSpPr>
-          <p:cNvPr id="8" name="Shape 5"/>
+          <p:cNvPr id="7" name="Shape 4"/>
           <p:cNvSpPr/>
           <p:nvPr/>
         </p:nvSpPr>
@@ -6117,14 +6029,14 @@
             </a:avLst>
           </a:prstGeom>
           <a:solidFill>
-            <a:srgbClr val="FBE9E9"/>
+            <a:srgbClr val="2E1418"/>
           </a:solidFill>
           <a:ln/>
         </p:spPr>
       </p:sp>
       <p:sp>
         <p:nvSpPr>
-          <p:cNvPr id="9" name="Text 6"/>
+          <p:cNvPr id="8" name="Text 5"/>
           <p:cNvSpPr/>
           <p:nvPr/>
         </p:nvSpPr>
@@ -6149,7 +6061,7 @@
             <a:r>
               <a:rPr lang="en-US" sz="3600" b="1" dirty="0">
                 <a:solidFill>
-                  <a:srgbClr val="C62A2A"/>
+                  <a:srgbClr val="FF7B7B"/>
                 </a:solidFill>
                 <a:latin typeface="Montserrat" pitchFamily="34" charset="0"/>
                 <a:ea typeface="Montserrat" pitchFamily="34" charset="-122"/>
@@ -6163,7 +6075,7 @@
       </p:sp>
       <p:sp>
         <p:nvSpPr>
-          <p:cNvPr id="10" name="Text 7"/>
+          <p:cNvPr id="9" name="Text 6"/>
           <p:cNvSpPr/>
           <p:nvPr/>
         </p:nvSpPr>
@@ -6188,7 +6100,7 @@
             <a:r>
               <a:rPr lang="en-US" sz="1150" dirty="0">
                 <a:solidFill>
-                  <a:srgbClr val="C62A2A"/>
+                  <a:srgbClr val="FF7B7B"/>
                 </a:solidFill>
                 <a:latin typeface="Montserrat" pitchFamily="34" charset="0"/>
                 <a:ea typeface="Montserrat" pitchFamily="34" charset="-122"/>
@@ -6202,7 +6114,7 @@
       </p:sp>
       <p:sp>
         <p:nvSpPr>
-          <p:cNvPr id="11" name="Shape 8"/>
+          <p:cNvPr id="10" name="Shape 7"/>
           <p:cNvSpPr/>
           <p:nvPr/>
         </p:nvSpPr>
@@ -6217,14 +6129,14 @@
             </a:avLst>
           </a:prstGeom>
           <a:solidFill>
-            <a:srgbClr val="E9F4EF"/>
+            <a:srgbClr val="102A20"/>
           </a:solidFill>
           <a:ln/>
         </p:spPr>
       </p:sp>
       <p:sp>
         <p:nvSpPr>
-          <p:cNvPr id="12" name="Text 9"/>
+          <p:cNvPr id="11" name="Text 8"/>
           <p:cNvSpPr/>
           <p:nvPr/>
         </p:nvSpPr>
@@ -6249,7 +6161,7 @@
             <a:r>
               <a:rPr lang="en-US" sz="2800" b="1" dirty="0">
                 <a:solidFill>
-                  <a:srgbClr val="1B8A5A"/>
+                  <a:srgbClr val="5FD6A0"/>
                 </a:solidFill>
                 <a:latin typeface="Montserrat" pitchFamily="34" charset="0"/>
                 <a:ea typeface="Montserrat" pitchFamily="34" charset="-122"/>
@@ -6263,7 +6175,7 @@
       </p:sp>
       <p:sp>
         <p:nvSpPr>
-          <p:cNvPr id="13" name="Text 10"/>
+          <p:cNvPr id="12" name="Text 9"/>
           <p:cNvSpPr/>
           <p:nvPr/>
         </p:nvSpPr>
@@ -6288,7 +6200,7 @@
             <a:r>
               <a:rPr lang="en-US" sz="1150" dirty="0">
                 <a:solidFill>
-                  <a:srgbClr val="1B8A5A"/>
+                  <a:srgbClr val="5FD6A0"/>
                 </a:solidFill>
                 <a:latin typeface="Montserrat" pitchFamily="34" charset="0"/>
                 <a:ea typeface="Montserrat" pitchFamily="34" charset="-122"/>
@@ -6302,7 +6214,7 @@
       </p:sp>
       <p:sp>
         <p:nvSpPr>
-          <p:cNvPr id="14" name="Shape 11"/>
+          <p:cNvPr id="13" name="Shape 10"/>
           <p:cNvSpPr/>
           <p:nvPr/>
         </p:nvSpPr>
@@ -6317,11 +6229,11 @@
             </a:avLst>
           </a:prstGeom>
           <a:solidFill>
-            <a:srgbClr val="F5F4FA"/>
+            <a:srgbClr val="12101A"/>
           </a:solidFill>
           <a:ln w="12700">
             <a:solidFill>
-              <a:srgbClr val="E6E7EC"/>
+              <a:srgbClr val="2E2A3A"/>
             </a:solidFill>
             <a:prstDash val="solid"/>
           </a:ln>
@@ -6329,7 +6241,7 @@
       </p:sp>
       <p:sp>
         <p:nvSpPr>
-          <p:cNvPr id="15" name="Text 12"/>
+          <p:cNvPr id="14" name="Text 11"/>
           <p:cNvSpPr/>
           <p:nvPr/>
         </p:nvSpPr>
@@ -6357,7 +6269,7 @@
             <a:r>
               <a:rPr lang="en-US" sz="1100" dirty="0">
                 <a:solidFill>
-                  <a:srgbClr val="8A7FA6"/>
+                  <a:srgbClr val="8A82A0"/>
                 </a:solidFill>
                 <a:latin typeface="Courier New" pitchFamily="34" charset="0"/>
                 <a:ea typeface="Courier New" pitchFamily="34" charset="-122"/>
@@ -6377,7 +6289,7 @@
             <a:r>
               <a:rPr lang="en-US" sz="1100" dirty="0">
                 <a:solidFill>
-                  <a:srgbClr val="5A05F4"/>
+                  <a:srgbClr val="C9A6FF"/>
                 </a:solidFill>
                 <a:latin typeface="Courier New" pitchFamily="34" charset="0"/>
                 <a:ea typeface="Courier New" pitchFamily="34" charset="-122"/>
@@ -6397,7 +6309,7 @@
             <a:r>
               <a:rPr lang="en-US" sz="1100" dirty="0">
                 <a:solidFill>
-                  <a:srgbClr val="23262F"/>
+                  <a:srgbClr val="D8D4E4"/>
                 </a:solidFill>
                 <a:latin typeface="Courier New" pitchFamily="34" charset="0"/>
                 <a:ea typeface="Courier New" pitchFamily="34" charset="-122"/>
@@ -6417,7 +6329,7 @@
             <a:r>
               <a:rPr lang="en-US" sz="1100" dirty="0">
                 <a:solidFill>
-                  <a:srgbClr val="8A7FA6"/>
+                  <a:srgbClr val="8A82A0"/>
                 </a:solidFill>
                 <a:latin typeface="Courier New" pitchFamily="34" charset="0"/>
                 <a:ea typeface="Courier New" pitchFamily="34" charset="-122"/>
@@ -6437,7 +6349,7 @@
             <a:r>
               <a:rPr lang="en-US" sz="1100" dirty="0">
                 <a:solidFill>
-                  <a:srgbClr val="5A05F4"/>
+                  <a:srgbClr val="C9A6FF"/>
                 </a:solidFill>
                 <a:latin typeface="Courier New" pitchFamily="34" charset="0"/>
                 <a:ea typeface="Courier New" pitchFamily="34" charset="-122"/>
@@ -6451,7 +6363,7 @@
       </p:sp>
       <p:sp>
         <p:nvSpPr>
-          <p:cNvPr id="16" name="Shape 13"/>
+          <p:cNvPr id="15" name="Shape 12"/>
           <p:cNvSpPr/>
           <p:nvPr/>
         </p:nvSpPr>
@@ -6473,7 +6385,7 @@
       </p:sp>
       <p:sp>
         <p:nvSpPr>
-          <p:cNvPr id="17" name="Text 14"/>
+          <p:cNvPr id="16" name="Text 13"/>
           <p:cNvSpPr/>
           <p:nvPr/>
         </p:nvSpPr>
@@ -6515,7 +6427,7 @@
       </p:sp>
       <p:sp>
         <p:nvSpPr>
-          <p:cNvPr id="18" name="Shape 15"/>
+          <p:cNvPr id="17" name="Shape 14"/>
           <p:cNvSpPr/>
           <p:nvPr/>
         </p:nvSpPr>
@@ -6530,14 +6442,14 @@
             </a:avLst>
           </a:prstGeom>
           <a:solidFill>
-            <a:srgbClr val="FBE9E9"/>
+            <a:srgbClr val="2E1418"/>
           </a:solidFill>
           <a:ln/>
         </p:spPr>
       </p:sp>
       <p:sp>
         <p:nvSpPr>
-          <p:cNvPr id="19" name="Text 16"/>
+          <p:cNvPr id="18" name="Text 15"/>
           <p:cNvSpPr/>
           <p:nvPr/>
         </p:nvSpPr>
@@ -6562,7 +6474,7 @@
             <a:r>
               <a:rPr lang="en-US" sz="950" b="1" spc="150" kern="0" dirty="0">
                 <a:solidFill>
-                  <a:srgbClr val="C62A2A"/>
+                  <a:srgbClr val="FF7B7B"/>
                 </a:solidFill>
                 <a:latin typeface="Courier New" pitchFamily="34" charset="0"/>
                 <a:ea typeface="Courier New" pitchFamily="34" charset="-122"/>
@@ -6576,7 +6488,7 @@
       </p:sp>
       <p:sp>
         <p:nvSpPr>
-          <p:cNvPr id="20" name="Text 17"/>
+          <p:cNvPr id="19" name="Text 16"/>
           <p:cNvSpPr/>
           <p:nvPr/>
         </p:nvSpPr>
@@ -6604,7 +6516,7 @@
             <a:r>
               <a:rPr lang="en-US" sz="1300" dirty="0">
                 <a:solidFill>
-                  <a:srgbClr val="111318"/>
+                  <a:srgbClr val="FFFFFF"/>
                 </a:solidFill>
                 <a:latin typeface="Montserrat" pitchFamily="34" charset="0"/>
                 <a:ea typeface="Montserrat" pitchFamily="34" charset="-122"/>
@@ -6646,7 +6558,7 @@
             <a:lvl1pPr>
               <a:defRPr sz="850">
                 <a:solidFill>
-                  <a:srgbClr val="9AA1AD"/>
+                  <a:srgbClr val="8A82A0"/>
                 </a:solidFill>
                 <a:latin typeface="Courier New"/>
                 <a:ea typeface="Courier New"/>
@@ -6691,29 +6603,7 @@
       </p:grpSpPr>
       <p:sp>
         <p:nvSpPr>
-          <p:cNvPr id="2" name="Shape 0"/>
-          <p:cNvSpPr/>
-          <p:nvPr/>
-        </p:nvSpPr>
-        <p:spPr>
-          <a:xfrm>
-            <a:off x="231343" y="194767"/>
-            <a:ext cx="11716207" cy="6473952"/>
-          </a:xfrm>
-          <a:prstGeom prst="roundRect">
-            <a:avLst>
-              <a:gd name="adj" fmla="val 3107"/>
-            </a:avLst>
-          </a:prstGeom>
-          <a:solidFill>
-            <a:srgbClr val="FFFFFF"/>
-          </a:solidFill>
-          <a:ln/>
-        </p:spPr>
-      </p:sp>
-      <p:sp>
-        <p:nvSpPr>
-          <p:cNvPr id="3" name="Text 1"/>
+          <p:cNvPr id="2" name="Text 0"/>
           <p:cNvSpPr/>
           <p:nvPr/>
         </p:nvSpPr>
@@ -6738,7 +6628,7 @@
             <a:r>
               <a:rPr lang="en-US" sz="2600" b="1" dirty="0">
                 <a:solidFill>
-                  <a:srgbClr val="5A05F4"/>
+                  <a:srgbClr val="C9A6FF"/>
                 </a:solidFill>
                 <a:latin typeface="Courier New" pitchFamily="34" charset="0"/>
                 <a:ea typeface="Courier New" pitchFamily="34" charset="-122"/>
@@ -6752,7 +6642,7 @@
       </p:sp>
       <p:sp>
         <p:nvSpPr>
-          <p:cNvPr id="4" name="Text 2"/>
+          <p:cNvPr id="3" name="Text 1"/>
           <p:cNvSpPr/>
           <p:nvPr/>
         </p:nvSpPr>
@@ -6777,7 +6667,7 @@
             <a:r>
               <a:rPr lang="en-US" sz="2400" b="1" dirty="0">
                 <a:solidFill>
-                  <a:srgbClr val="111318"/>
+                  <a:srgbClr val="FFFFFF"/>
                 </a:solidFill>
                 <a:latin typeface="Montserrat" pitchFamily="34" charset="0"/>
                 <a:ea typeface="Montserrat" pitchFamily="34" charset="-122"/>
@@ -6791,7 +6681,7 @@
       </p:sp>
       <p:sp>
         <p:nvSpPr>
-          <p:cNvPr id="5" name="Shape 3"/>
+          <p:cNvPr id="4" name="Shape 2"/>
           <p:cNvSpPr/>
           <p:nvPr/>
         </p:nvSpPr>
@@ -6806,14 +6696,14 @@
             </a:avLst>
           </a:prstGeom>
           <a:solidFill>
-            <a:srgbClr val="5A05F4"/>
+            <a:srgbClr val="C9A6FF"/>
           </a:solidFill>
           <a:ln/>
         </p:spPr>
       </p:sp>
       <p:sp>
         <p:nvSpPr>
-          <p:cNvPr id="6" name="Text 4"/>
+          <p:cNvPr id="5" name="Text 3"/>
           <p:cNvSpPr/>
           <p:nvPr/>
         </p:nvSpPr>
@@ -6838,7 +6728,7 @@
             <a:r>
               <a:rPr lang="en-US" sz="900" b="1" spc="100" kern="0" dirty="0">
                 <a:solidFill>
-                  <a:srgbClr val="FFFFFF"/>
+                  <a:srgbClr val="1C1140"/>
                 </a:solidFill>
                 <a:latin typeface="Courier New" pitchFamily="34" charset="0"/>
                 <a:ea typeface="Courier New" pitchFamily="34" charset="-122"/>
@@ -6852,7 +6742,7 @@
       </p:sp>
       <p:pic>
         <p:nvPicPr>
-          <p:cNvPr id="7" name="Image 0" descr="preencoded.png">    </p:cNvPr>
+          <p:cNvPr id="6" name="Image 0" descr="preencoded.png">    </p:cNvPr>
           <p:cNvPicPr>
             <a:picLocks noChangeAspect="1"/>
           </p:cNvPicPr>
@@ -6876,7 +6766,7 @@
       </p:pic>
       <p:sp>
         <p:nvSpPr>
-          <p:cNvPr id="8" name="Shape 5"/>
+          <p:cNvPr id="7" name="Shape 4"/>
           <p:cNvSpPr/>
           <p:nvPr/>
         </p:nvSpPr>
@@ -6891,11 +6781,11 @@
             </a:avLst>
           </a:prstGeom>
           <a:solidFill>
-            <a:srgbClr val="F5F4FA"/>
+            <a:srgbClr val="12101A"/>
           </a:solidFill>
           <a:ln w="12700">
             <a:solidFill>
-              <a:srgbClr val="E6E7EC"/>
+              <a:srgbClr val="2E2A3A"/>
             </a:solidFill>
             <a:prstDash val="solid"/>
           </a:ln>
@@ -6903,7 +6793,7 @@
       </p:sp>
       <p:sp>
         <p:nvSpPr>
-          <p:cNvPr id="9" name="Text 6"/>
+          <p:cNvPr id="8" name="Text 5"/>
           <p:cNvSpPr/>
           <p:nvPr/>
         </p:nvSpPr>
@@ -6931,7 +6821,7 @@
             <a:r>
               <a:rPr lang="en-US" sz="1150" dirty="0">
                 <a:solidFill>
-                  <a:srgbClr val="8A7FA6"/>
+                  <a:srgbClr val="8A82A0"/>
                 </a:solidFill>
                 <a:latin typeface="Courier New" pitchFamily="34" charset="0"/>
                 <a:ea typeface="Courier New" pitchFamily="34" charset="-122"/>
@@ -6951,7 +6841,7 @@
             <a:r>
               <a:rPr lang="en-US" sz="1150" dirty="0">
                 <a:solidFill>
-                  <a:srgbClr val="8A7FA6"/>
+                  <a:srgbClr val="8A82A0"/>
                 </a:solidFill>
                 <a:latin typeface="Courier New" pitchFamily="34" charset="0"/>
                 <a:ea typeface="Courier New" pitchFamily="34" charset="-122"/>
@@ -6971,7 +6861,7 @@
             <a:r>
               <a:rPr lang="en-US" sz="1150" dirty="0">
                 <a:solidFill>
-                  <a:srgbClr val="5A05F4"/>
+                  <a:srgbClr val="C9A6FF"/>
                 </a:solidFill>
                 <a:latin typeface="Courier New" pitchFamily="34" charset="0"/>
                 <a:ea typeface="Courier New" pitchFamily="34" charset="-122"/>
@@ -6991,7 +6881,7 @@
             <a:r>
               <a:rPr lang="en-US" sz="1150" dirty="0">
                 <a:solidFill>
-                  <a:srgbClr val="23262F"/>
+                  <a:srgbClr val="D8D4E4"/>
                 </a:solidFill>
                 <a:latin typeface="Courier New" pitchFamily="34" charset="0"/>
                 <a:ea typeface="Courier New" pitchFamily="34" charset="-122"/>
@@ -7011,7 +6901,7 @@
             <a:r>
               <a:rPr lang="en-US" sz="1150" dirty="0">
                 <a:solidFill>
-                  <a:srgbClr val="23262F"/>
+                  <a:srgbClr val="D8D4E4"/>
                 </a:solidFill>
                 <a:latin typeface="Courier New" pitchFamily="34" charset="0"/>
                 <a:ea typeface="Courier New" pitchFamily="34" charset="-122"/>
@@ -7025,7 +6915,7 @@
       </p:sp>
       <p:sp>
         <p:nvSpPr>
-          <p:cNvPr id="10" name="Shape 7"/>
+          <p:cNvPr id="9" name="Shape 6"/>
           <p:cNvSpPr/>
           <p:nvPr/>
         </p:nvSpPr>
@@ -7040,11 +6930,11 @@
             </a:avLst>
           </a:prstGeom>
           <a:solidFill>
-            <a:srgbClr val="FFFFFF"/>
+            <a:srgbClr val="17141F"/>
           </a:solidFill>
           <a:ln w="12700">
             <a:solidFill>
-              <a:srgbClr val="E6E7EC"/>
+              <a:srgbClr val="2E2A3A"/>
             </a:solidFill>
             <a:prstDash val="solid"/>
           </a:ln>
@@ -7052,7 +6942,7 @@
       </p:sp>
       <p:sp>
         <p:nvSpPr>
-          <p:cNvPr id="11" name="Text 8"/>
+          <p:cNvPr id="10" name="Text 7"/>
           <p:cNvSpPr/>
           <p:nvPr/>
         </p:nvSpPr>
@@ -7077,7 +6967,7 @@
             <a:r>
               <a:rPr lang="en-US" sz="950" b="1" spc="100" kern="0" dirty="0">
                 <a:solidFill>
-                  <a:srgbClr val="9AA1AD"/>
+                  <a:srgbClr val="8A82A0"/>
                 </a:solidFill>
                 <a:latin typeface="Courier New" pitchFamily="34" charset="0"/>
                 <a:ea typeface="Courier New" pitchFamily="34" charset="-122"/>
@@ -7091,7 +6981,7 @@
       </p:sp>
       <p:sp>
         <p:nvSpPr>
-          <p:cNvPr id="12" name="Text 9"/>
+          <p:cNvPr id="11" name="Text 8"/>
           <p:cNvSpPr/>
           <p:nvPr/>
         </p:nvSpPr>
@@ -7116,7 +7006,7 @@
             <a:r>
               <a:rPr lang="en-US" sz="3000" b="1" dirty="0">
                 <a:solidFill>
-                  <a:srgbClr val="5A05F4"/>
+                  <a:srgbClr val="C9A6FF"/>
                 </a:solidFill>
                 <a:latin typeface="Montserrat" pitchFamily="34" charset="0"/>
                 <a:ea typeface="Montserrat" pitchFamily="34" charset="-122"/>
@@ -7130,7 +7020,7 @@
       </p:sp>
       <p:sp>
         <p:nvSpPr>
-          <p:cNvPr id="13" name="Text 10"/>
+          <p:cNvPr id="12" name="Text 9"/>
           <p:cNvSpPr/>
           <p:nvPr/>
         </p:nvSpPr>
@@ -7155,7 +7045,7 @@
             <a:r>
               <a:rPr lang="en-US" sz="1150" dirty="0">
                 <a:solidFill>
-                  <a:srgbClr val="555B66"/>
+                  <a:srgbClr val="AFA9BE"/>
                 </a:solidFill>
                 <a:latin typeface="Montserrat" pitchFamily="34" charset="0"/>
                 <a:ea typeface="Montserrat" pitchFamily="34" charset="-122"/>
@@ -7169,7 +7059,7 @@
       </p:sp>
       <p:sp>
         <p:nvSpPr>
-          <p:cNvPr id="14" name="Shape 11"/>
+          <p:cNvPr id="13" name="Shape 10"/>
           <p:cNvSpPr/>
           <p:nvPr/>
         </p:nvSpPr>
@@ -7184,14 +7074,14 @@
             </a:avLst>
           </a:prstGeom>
           <a:solidFill>
-            <a:srgbClr val="F8F0E2"/>
+            <a:srgbClr val="2A2010"/>
           </a:solidFill>
           <a:ln/>
         </p:spPr>
       </p:sp>
       <p:sp>
         <p:nvSpPr>
-          <p:cNvPr id="15" name="Text 12"/>
+          <p:cNvPr id="14" name="Text 11"/>
           <p:cNvSpPr/>
           <p:nvPr/>
         </p:nvSpPr>
@@ -7216,7 +7106,7 @@
             <a:r>
               <a:rPr lang="en-US" sz="950" b="1" spc="150" kern="0" dirty="0">
                 <a:solidFill>
-                  <a:srgbClr val="9A5B12"/>
+                  <a:srgbClr val="E8A857"/>
                 </a:solidFill>
                 <a:latin typeface="Courier New" pitchFamily="34" charset="0"/>
                 <a:ea typeface="Courier New" pitchFamily="34" charset="-122"/>
@@ -7230,7 +7120,7 @@
       </p:sp>
       <p:sp>
         <p:nvSpPr>
-          <p:cNvPr id="16" name="Text 13"/>
+          <p:cNvPr id="15" name="Text 12"/>
           <p:cNvSpPr/>
           <p:nvPr/>
         </p:nvSpPr>
@@ -7258,7 +7148,7 @@
             <a:r>
               <a:rPr lang="en-US" sz="1300" dirty="0">
                 <a:solidFill>
-                  <a:srgbClr val="111318"/>
+                  <a:srgbClr val="FFFFFF"/>
                 </a:solidFill>
                 <a:latin typeface="Montserrat" pitchFamily="34" charset="0"/>
                 <a:ea typeface="Montserrat" pitchFamily="34" charset="-122"/>
@@ -7272,7 +7162,7 @@
       </p:sp>
       <p:sp>
         <p:nvSpPr>
-          <p:cNvPr id="17" name="Shape 14"/>
+          <p:cNvPr id="16" name="Shape 13"/>
           <p:cNvSpPr/>
           <p:nvPr/>
         </p:nvSpPr>
@@ -7287,14 +7177,14 @@
             </a:avLst>
           </a:prstGeom>
           <a:solidFill>
-            <a:srgbClr val="E9F4EF"/>
+            <a:srgbClr val="102A20"/>
           </a:solidFill>
           <a:ln/>
         </p:spPr>
       </p:sp>
       <p:sp>
         <p:nvSpPr>
-          <p:cNvPr id="18" name="Text 15"/>
+          <p:cNvPr id="17" name="Text 14"/>
           <p:cNvSpPr/>
           <p:nvPr/>
         </p:nvSpPr>
@@ -7322,7 +7212,7 @@
             <a:r>
               <a:rPr lang="en-US" sz="1300" dirty="0">
                 <a:solidFill>
-                  <a:srgbClr val="111318"/>
+                  <a:srgbClr val="FFFFFF"/>
                 </a:solidFill>
                 <a:latin typeface="Montserrat" pitchFamily="34" charset="0"/>
                 <a:ea typeface="Montserrat" pitchFamily="34" charset="-122"/>
@@ -7364,7 +7254,7 @@
             <a:lvl1pPr>
               <a:defRPr sz="850">
                 <a:solidFill>
-                  <a:srgbClr val="9AA1AD"/>
+                  <a:srgbClr val="8A82A0"/>
                 </a:solidFill>
                 <a:latin typeface="Courier New"/>
                 <a:ea typeface="Courier New"/>
@@ -7409,29 +7299,7 @@
       </p:grpSpPr>
       <p:sp>
         <p:nvSpPr>
-          <p:cNvPr id="2" name="Shape 0"/>
-          <p:cNvSpPr/>
-          <p:nvPr/>
-        </p:nvSpPr>
-        <p:spPr>
-          <a:xfrm>
-            <a:off x="231343" y="194767"/>
-            <a:ext cx="11716207" cy="6473952"/>
-          </a:xfrm>
-          <a:prstGeom prst="roundRect">
-            <a:avLst>
-              <a:gd name="adj" fmla="val 3107"/>
-            </a:avLst>
-          </a:prstGeom>
-          <a:solidFill>
-            <a:srgbClr val="FFFFFF"/>
-          </a:solidFill>
-          <a:ln/>
-        </p:spPr>
-      </p:sp>
-      <p:sp>
-        <p:nvSpPr>
-          <p:cNvPr id="3" name="Text 1"/>
+          <p:cNvPr id="2" name="Text 0"/>
           <p:cNvSpPr/>
           <p:nvPr/>
         </p:nvSpPr>
@@ -7456,7 +7324,7 @@
             <a:r>
               <a:rPr lang="en-US" sz="2600" b="1" dirty="0">
                 <a:solidFill>
-                  <a:srgbClr val="5A05F4"/>
+                  <a:srgbClr val="C9A6FF"/>
                 </a:solidFill>
                 <a:latin typeface="Courier New" pitchFamily="34" charset="0"/>
                 <a:ea typeface="Courier New" pitchFamily="34" charset="-122"/>
@@ -7470,7 +7338,7 @@
       </p:sp>
       <p:sp>
         <p:nvSpPr>
-          <p:cNvPr id="4" name="Text 2"/>
+          <p:cNvPr id="3" name="Text 1"/>
           <p:cNvSpPr/>
           <p:nvPr/>
         </p:nvSpPr>
@@ -7495,7 +7363,7 @@
             <a:r>
               <a:rPr lang="en-US" sz="2400" b="1" dirty="0">
                 <a:solidFill>
-                  <a:srgbClr val="111318"/>
+                  <a:srgbClr val="FFFFFF"/>
                 </a:solidFill>
                 <a:latin typeface="Montserrat" pitchFamily="34" charset="0"/>
                 <a:ea typeface="Montserrat" pitchFamily="34" charset="-122"/>
@@ -7509,7 +7377,7 @@
       </p:sp>
       <p:sp>
         <p:nvSpPr>
-          <p:cNvPr id="5" name="Shape 3"/>
+          <p:cNvPr id="4" name="Shape 2"/>
           <p:cNvSpPr/>
           <p:nvPr/>
         </p:nvSpPr>
@@ -7524,14 +7392,14 @@
             </a:avLst>
           </a:prstGeom>
           <a:solidFill>
-            <a:srgbClr val="5A05F4"/>
+            <a:srgbClr val="C9A6FF"/>
           </a:solidFill>
           <a:ln/>
         </p:spPr>
       </p:sp>
       <p:sp>
         <p:nvSpPr>
-          <p:cNvPr id="6" name="Text 4"/>
+          <p:cNvPr id="5" name="Text 3"/>
           <p:cNvSpPr/>
           <p:nvPr/>
         </p:nvSpPr>
@@ -7556,7 +7424,7 @@
             <a:r>
               <a:rPr lang="en-US" sz="900" b="1" spc="100" kern="0" dirty="0">
                 <a:solidFill>
-                  <a:srgbClr val="FFFFFF"/>
+                  <a:srgbClr val="1C1140"/>
                 </a:solidFill>
                 <a:latin typeface="Courier New" pitchFamily="34" charset="0"/>
                 <a:ea typeface="Courier New" pitchFamily="34" charset="-122"/>
@@ -7570,7 +7438,7 @@
       </p:sp>
       <p:pic>
         <p:nvPicPr>
-          <p:cNvPr id="7" name="Image 0" descr="preencoded.png">    </p:cNvPr>
+          <p:cNvPr id="6" name="Image 0" descr="preencoded.png">    </p:cNvPr>
           <p:cNvPicPr>
             <a:picLocks noChangeAspect="1"/>
           </p:cNvPicPr>
@@ -7594,7 +7462,7 @@
       </p:pic>
       <p:sp>
         <p:nvSpPr>
-          <p:cNvPr id="8" name="Shape 5"/>
+          <p:cNvPr id="7" name="Shape 4"/>
           <p:cNvSpPr/>
           <p:nvPr/>
         </p:nvSpPr>
@@ -7609,11 +7477,11 @@
             </a:avLst>
           </a:prstGeom>
           <a:solidFill>
-            <a:srgbClr val="F5F4FA"/>
+            <a:srgbClr val="12101A"/>
           </a:solidFill>
           <a:ln w="12700">
             <a:solidFill>
-              <a:srgbClr val="E6E7EC"/>
+              <a:srgbClr val="2E2A3A"/>
             </a:solidFill>
             <a:prstDash val="solid"/>
           </a:ln>
@@ -7621,7 +7489,7 @@
       </p:sp>
       <p:sp>
         <p:nvSpPr>
-          <p:cNvPr id="9" name="Text 6"/>
+          <p:cNvPr id="8" name="Text 5"/>
           <p:cNvSpPr/>
           <p:nvPr/>
         </p:nvSpPr>
@@ -7649,7 +7517,7 @@
             <a:r>
               <a:rPr lang="en-US" sz="1250" dirty="0">
                 <a:solidFill>
-                  <a:srgbClr val="5A05F4"/>
+                  <a:srgbClr val="C9A6FF"/>
                 </a:solidFill>
                 <a:latin typeface="Courier New" pitchFamily="34" charset="0"/>
                 <a:ea typeface="Courier New" pitchFamily="34" charset="-122"/>
@@ -7663,7 +7531,7 @@
       </p:sp>
       <p:sp>
         <p:nvSpPr>
-          <p:cNvPr id="10" name="Text 7"/>
+          <p:cNvPr id="9" name="Text 6"/>
           <p:cNvSpPr/>
           <p:nvPr/>
         </p:nvSpPr>
@@ -7688,7 +7556,7 @@
             <a:r>
               <a:rPr lang="en-US" sz="1250" dirty="0">
                 <a:solidFill>
-                  <a:srgbClr val="111318"/>
+                  <a:srgbClr val="FFFFFF"/>
                 </a:solidFill>
                 <a:latin typeface="Montserrat" pitchFamily="34" charset="0"/>
                 <a:ea typeface="Montserrat" pitchFamily="34" charset="-122"/>
@@ -7702,7 +7570,7 @@
       </p:sp>
       <p:sp>
         <p:nvSpPr>
-          <p:cNvPr id="11" name="Shape 8"/>
+          <p:cNvPr id="10" name="Shape 7"/>
           <p:cNvSpPr/>
           <p:nvPr/>
         </p:nvSpPr>
@@ -7717,14 +7585,14 @@
             </a:avLst>
           </a:prstGeom>
           <a:solidFill>
-            <a:srgbClr val="1B8A5A"/>
+            <a:srgbClr val="5FD6A0"/>
           </a:solidFill>
           <a:ln/>
         </p:spPr>
       </p:sp>
       <p:sp>
         <p:nvSpPr>
-          <p:cNvPr id="12" name="Text 9"/>
+          <p:cNvPr id="11" name="Text 8"/>
           <p:cNvSpPr/>
           <p:nvPr/>
         </p:nvSpPr>
@@ -7749,7 +7617,7 @@
             <a:r>
               <a:rPr lang="en-US" sz="1150" b="1" dirty="0">
                 <a:solidFill>
-                  <a:srgbClr val="1B8A5A"/>
+                  <a:srgbClr val="5FD6A0"/>
                 </a:solidFill>
                 <a:latin typeface="Montserrat" pitchFamily="34" charset="0"/>
                 <a:ea typeface="Montserrat" pitchFamily="34" charset="-122"/>
@@ -7763,7 +7631,7 @@
       </p:sp>
       <p:sp>
         <p:nvSpPr>
-          <p:cNvPr id="13" name="Text 10"/>
+          <p:cNvPr id="12" name="Text 9"/>
           <p:cNvSpPr/>
           <p:nvPr/>
         </p:nvSpPr>
@@ -7788,7 +7656,7 @@
             <a:r>
               <a:rPr lang="en-US" sz="1250" dirty="0">
                 <a:solidFill>
-                  <a:srgbClr val="111318"/>
+                  <a:srgbClr val="FFFFFF"/>
                 </a:solidFill>
                 <a:latin typeface="Montserrat" pitchFamily="34" charset="0"/>
                 <a:ea typeface="Montserrat" pitchFamily="34" charset="-122"/>
@@ -7802,7 +7670,7 @@
       </p:sp>
       <p:sp>
         <p:nvSpPr>
-          <p:cNvPr id="14" name="Shape 11"/>
+          <p:cNvPr id="13" name="Shape 10"/>
           <p:cNvSpPr/>
           <p:nvPr/>
         </p:nvSpPr>
@@ -7817,14 +7685,14 @@
             </a:avLst>
           </a:prstGeom>
           <a:solidFill>
-            <a:srgbClr val="C62A2A"/>
+            <a:srgbClr val="FF7B7B"/>
           </a:solidFill>
           <a:ln/>
         </p:spPr>
       </p:sp>
       <p:sp>
         <p:nvSpPr>
-          <p:cNvPr id="15" name="Text 12"/>
+          <p:cNvPr id="14" name="Text 11"/>
           <p:cNvSpPr/>
           <p:nvPr/>
         </p:nvSpPr>
@@ -7849,7 +7717,7 @@
             <a:r>
               <a:rPr lang="en-US" sz="1150" b="1" dirty="0">
                 <a:solidFill>
-                  <a:srgbClr val="C62A2A"/>
+                  <a:srgbClr val="FF7B7B"/>
                 </a:solidFill>
                 <a:latin typeface="Montserrat" pitchFamily="34" charset="0"/>
                 <a:ea typeface="Montserrat" pitchFamily="34" charset="-122"/>
@@ -7863,7 +7731,7 @@
       </p:sp>
       <p:sp>
         <p:nvSpPr>
-          <p:cNvPr id="16" name="Shape 13"/>
+          <p:cNvPr id="15" name="Shape 12"/>
           <p:cNvSpPr/>
           <p:nvPr/>
         </p:nvSpPr>
@@ -7885,7 +7753,7 @@
       </p:sp>
       <p:sp>
         <p:nvSpPr>
-          <p:cNvPr id="17" name="Text 14"/>
+          <p:cNvPr id="16" name="Text 13"/>
           <p:cNvSpPr/>
           <p:nvPr/>
         </p:nvSpPr>
@@ -7927,7 +7795,7 @@
       </p:sp>
       <p:sp>
         <p:nvSpPr>
-          <p:cNvPr id="18" name="Shape 15"/>
+          <p:cNvPr id="17" name="Shape 14"/>
           <p:cNvSpPr/>
           <p:nvPr/>
         </p:nvSpPr>
@@ -7942,14 +7810,14 @@
             </a:avLst>
           </a:prstGeom>
           <a:solidFill>
-            <a:srgbClr val="E9F4EF"/>
+            <a:srgbClr val="102A20"/>
           </a:solidFill>
           <a:ln/>
         </p:spPr>
       </p:sp>
       <p:sp>
         <p:nvSpPr>
-          <p:cNvPr id="19" name="Text 16"/>
+          <p:cNvPr id="18" name="Text 15"/>
           <p:cNvSpPr/>
           <p:nvPr/>
         </p:nvSpPr>
@@ -7974,7 +7842,7 @@
             <a:r>
               <a:rPr lang="en-US" sz="950" b="1" spc="150" kern="0" dirty="0">
                 <a:solidFill>
-                  <a:srgbClr val="1B8A5A"/>
+                  <a:srgbClr val="5FD6A0"/>
                 </a:solidFill>
                 <a:latin typeface="Courier New" pitchFamily="34" charset="0"/>
                 <a:ea typeface="Courier New" pitchFamily="34" charset="-122"/>
@@ -7988,7 +7856,7 @@
       </p:sp>
       <p:sp>
         <p:nvSpPr>
-          <p:cNvPr id="20" name="Text 17"/>
+          <p:cNvPr id="19" name="Text 16"/>
           <p:cNvSpPr/>
           <p:nvPr/>
         </p:nvSpPr>
@@ -8016,7 +7884,7 @@
             <a:r>
               <a:rPr lang="en-US" sz="1300" dirty="0">
                 <a:solidFill>
-                  <a:srgbClr val="111318"/>
+                  <a:srgbClr val="FFFFFF"/>
                 </a:solidFill>
                 <a:latin typeface="Montserrat" pitchFamily="34" charset="0"/>
                 <a:ea typeface="Montserrat" pitchFamily="34" charset="-122"/>
@@ -8058,7 +7926,7 @@
             <a:lvl1pPr>
               <a:defRPr sz="850">
                 <a:solidFill>
-                  <a:srgbClr val="9AA1AD"/>
+                  <a:srgbClr val="8A82A0"/>
                 </a:solidFill>
                 <a:latin typeface="Courier New"/>
                 <a:ea typeface="Courier New"/>
@@ -8103,29 +7971,7 @@
       </p:grpSpPr>
       <p:sp>
         <p:nvSpPr>
-          <p:cNvPr id="2" name="Shape 0"/>
-          <p:cNvSpPr/>
-          <p:nvPr/>
-        </p:nvSpPr>
-        <p:spPr>
-          <a:xfrm>
-            <a:off x="231343" y="194767"/>
-            <a:ext cx="11716207" cy="6473952"/>
-          </a:xfrm>
-          <a:prstGeom prst="roundRect">
-            <a:avLst>
-              <a:gd name="adj" fmla="val 3107"/>
-            </a:avLst>
-          </a:prstGeom>
-          <a:solidFill>
-            <a:srgbClr val="FFFFFF"/>
-          </a:solidFill>
-          <a:ln/>
-        </p:spPr>
-      </p:sp>
-      <p:sp>
-        <p:nvSpPr>
-          <p:cNvPr id="3" name="Text 1"/>
+          <p:cNvPr id="2" name="Text 0"/>
           <p:cNvSpPr/>
           <p:nvPr/>
         </p:nvSpPr>
@@ -8150,7 +7996,7 @@
             <a:r>
               <a:rPr lang="en-US" sz="2600" b="1" dirty="0">
                 <a:solidFill>
-                  <a:srgbClr val="5A05F4"/>
+                  <a:srgbClr val="C9A6FF"/>
                 </a:solidFill>
                 <a:latin typeface="Courier New" pitchFamily="34" charset="0"/>
                 <a:ea typeface="Courier New" pitchFamily="34" charset="-122"/>
@@ -8164,7 +8010,7 @@
       </p:sp>
       <p:sp>
         <p:nvSpPr>
-          <p:cNvPr id="4" name="Text 2"/>
+          <p:cNvPr id="3" name="Text 1"/>
           <p:cNvSpPr/>
           <p:nvPr/>
         </p:nvSpPr>
@@ -8189,7 +8035,7 @@
             <a:r>
               <a:rPr lang="en-US" sz="2400" b="1" dirty="0">
                 <a:solidFill>
-                  <a:srgbClr val="111318"/>
+                  <a:srgbClr val="FFFFFF"/>
                 </a:solidFill>
                 <a:latin typeface="Montserrat" pitchFamily="34" charset="0"/>
                 <a:ea typeface="Montserrat" pitchFamily="34" charset="-122"/>
@@ -8203,7 +8049,7 @@
       </p:sp>
       <p:sp>
         <p:nvSpPr>
-          <p:cNvPr id="5" name="Shape 3"/>
+          <p:cNvPr id="4" name="Shape 2"/>
           <p:cNvSpPr/>
           <p:nvPr/>
         </p:nvSpPr>
@@ -8218,14 +8064,14 @@
             </a:avLst>
           </a:prstGeom>
           <a:solidFill>
-            <a:srgbClr val="5A05F4"/>
+            <a:srgbClr val="C9A6FF"/>
           </a:solidFill>
           <a:ln/>
         </p:spPr>
       </p:sp>
       <p:sp>
         <p:nvSpPr>
-          <p:cNvPr id="6" name="Text 4"/>
+          <p:cNvPr id="5" name="Text 3"/>
           <p:cNvSpPr/>
           <p:nvPr/>
         </p:nvSpPr>
@@ -8250,7 +8096,7 @@
             <a:r>
               <a:rPr lang="en-US" sz="900" b="1" spc="100" kern="0" dirty="0">
                 <a:solidFill>
-                  <a:srgbClr val="FFFFFF"/>
+                  <a:srgbClr val="1C1140"/>
                 </a:solidFill>
                 <a:latin typeface="Courier New" pitchFamily="34" charset="0"/>
                 <a:ea typeface="Courier New" pitchFamily="34" charset="-122"/>
@@ -8264,7 +8110,7 @@
       </p:sp>
       <p:sp>
         <p:nvSpPr>
-          <p:cNvPr id="7" name="Shape 5"/>
+          <p:cNvPr id="6" name="Shape 4"/>
           <p:cNvSpPr/>
           <p:nvPr/>
         </p:nvSpPr>
@@ -8279,14 +8125,14 @@
             </a:avLst>
           </a:prstGeom>
           <a:solidFill>
-            <a:srgbClr val="F8F0E2"/>
+            <a:srgbClr val="2A2010"/>
           </a:solidFill>
           <a:ln/>
         </p:spPr>
       </p:sp>
       <p:sp>
         <p:nvSpPr>
-          <p:cNvPr id="8" name="Text 6"/>
+          <p:cNvPr id="7" name="Text 5"/>
           <p:cNvSpPr/>
           <p:nvPr/>
         </p:nvSpPr>
@@ -8311,7 +8157,7 @@
             <a:r>
               <a:rPr lang="en-US" sz="900" b="1" spc="100" kern="0" dirty="0">
                 <a:solidFill>
-                  <a:srgbClr val="9A5B12"/>
+                  <a:srgbClr val="E8A857"/>
                 </a:solidFill>
                 <a:latin typeface="Courier New" pitchFamily="34" charset="0"/>
                 <a:ea typeface="Courier New" pitchFamily="34" charset="-122"/>
@@ -8325,7 +8171,7 @@
       </p:sp>
       <p:pic>
         <p:nvPicPr>
-          <p:cNvPr id="9" name="Image 0" descr="preencoded.png">    </p:cNvPr>
+          <p:cNvPr id="8" name="Image 0" descr="preencoded.png">    </p:cNvPr>
           <p:cNvPicPr>
             <a:picLocks noChangeAspect="1"/>
           </p:cNvPicPr>
@@ -8349,7 +8195,7 @@
       </p:pic>
       <p:sp>
         <p:nvSpPr>
-          <p:cNvPr id="10" name="Shape 7"/>
+          <p:cNvPr id="9" name="Shape 6"/>
           <p:cNvSpPr/>
           <p:nvPr/>
         </p:nvSpPr>
@@ -8364,11 +8210,11 @@
             </a:avLst>
           </a:prstGeom>
           <a:solidFill>
-            <a:srgbClr val="FFFFFF"/>
+            <a:srgbClr val="17141F"/>
           </a:solidFill>
           <a:ln w="12700">
             <a:solidFill>
-              <a:srgbClr val="E6E7EC"/>
+              <a:srgbClr val="2E2A3A"/>
             </a:solidFill>
             <a:prstDash val="solid"/>
           </a:ln>
@@ -8376,7 +8222,7 @@
       </p:sp>
       <p:sp>
         <p:nvSpPr>
-          <p:cNvPr id="11" name="Text 8"/>
+          <p:cNvPr id="10" name="Text 7"/>
           <p:cNvSpPr/>
           <p:nvPr/>
         </p:nvSpPr>
@@ -8401,7 +8247,7 @@
             <a:r>
               <a:rPr lang="en-US" sz="1350" b="1" dirty="0">
                 <a:solidFill>
-                  <a:srgbClr val="111318"/>
+                  <a:srgbClr val="FFFFFF"/>
                 </a:solidFill>
                 <a:latin typeface="Montserrat" pitchFamily="34" charset="0"/>
                 <a:ea typeface="Montserrat" pitchFamily="34" charset="-122"/>
@@ -8415,7 +8261,7 @@
       </p:sp>
       <p:sp>
         <p:nvSpPr>
-          <p:cNvPr id="12" name="Text 9"/>
+          <p:cNvPr id="11" name="Text 8"/>
           <p:cNvSpPr/>
           <p:nvPr/>
         </p:nvSpPr>
@@ -8440,7 +8286,7 @@
             <a:r>
               <a:rPr lang="en-US" sz="1150" dirty="0">
                 <a:solidFill>
-                  <a:srgbClr val="555B66"/>
+                  <a:srgbClr val="AFA9BE"/>
                 </a:solidFill>
                 <a:latin typeface="Montserrat" pitchFamily="34" charset="0"/>
                 <a:ea typeface="Montserrat" pitchFamily="34" charset="-122"/>
@@ -8454,7 +8300,7 @@
       </p:sp>
       <p:sp>
         <p:nvSpPr>
-          <p:cNvPr id="13" name="Shape 10"/>
+          <p:cNvPr id="12" name="Shape 9"/>
           <p:cNvSpPr/>
           <p:nvPr/>
         </p:nvSpPr>
@@ -8469,14 +8315,14 @@
             </a:avLst>
           </a:prstGeom>
           <a:solidFill>
-            <a:srgbClr val="F8F0E2"/>
+            <a:srgbClr val="2A2010"/>
           </a:solidFill>
           <a:ln/>
         </p:spPr>
       </p:sp>
       <p:sp>
         <p:nvSpPr>
-          <p:cNvPr id="14" name="Text 11"/>
+          <p:cNvPr id="13" name="Text 10"/>
           <p:cNvSpPr/>
           <p:nvPr/>
         </p:nvSpPr>
@@ -8501,7 +8347,7 @@
             <a:r>
               <a:rPr lang="en-US" sz="1350" b="1" dirty="0">
                 <a:solidFill>
-                  <a:srgbClr val="9A5B12"/>
+                  <a:srgbClr val="E8A857"/>
                 </a:solidFill>
                 <a:latin typeface="Montserrat" pitchFamily="34" charset="0"/>
                 <a:ea typeface="Montserrat" pitchFamily="34" charset="-122"/>
@@ -8515,7 +8361,7 @@
       </p:sp>
       <p:sp>
         <p:nvSpPr>
-          <p:cNvPr id="15" name="Text 12"/>
+          <p:cNvPr id="14" name="Text 11"/>
           <p:cNvSpPr/>
           <p:nvPr/>
         </p:nvSpPr>
@@ -8540,7 +8386,7 @@
             <a:r>
               <a:rPr lang="en-US" sz="1150" dirty="0">
                 <a:solidFill>
-                  <a:srgbClr val="111318"/>
+                  <a:srgbClr val="FFFFFF"/>
                 </a:solidFill>
                 <a:latin typeface="Montserrat" pitchFamily="34" charset="0"/>
                 <a:ea typeface="Montserrat" pitchFamily="34" charset="-122"/>
@@ -8554,7 +8400,7 @@
       </p:sp>
       <p:sp>
         <p:nvSpPr>
-          <p:cNvPr id="16" name="Shape 13"/>
+          <p:cNvPr id="15" name="Shape 12"/>
           <p:cNvSpPr/>
           <p:nvPr/>
         </p:nvSpPr>
@@ -8569,14 +8415,14 @@
             </a:avLst>
           </a:prstGeom>
           <a:solidFill>
-            <a:srgbClr val="FBE9E9"/>
+            <a:srgbClr val="2E1418"/>
           </a:solidFill>
           <a:ln/>
         </p:spPr>
       </p:sp>
       <p:sp>
         <p:nvSpPr>
-          <p:cNvPr id="17" name="Text 14"/>
+          <p:cNvPr id="16" name="Text 13"/>
           <p:cNvSpPr/>
           <p:nvPr/>
         </p:nvSpPr>
@@ -8601,7 +8447,7 @@
             <a:r>
               <a:rPr lang="en-US" sz="1350" b="1" dirty="0">
                 <a:solidFill>
-                  <a:srgbClr val="C62A2A"/>
+                  <a:srgbClr val="FF7B7B"/>
                 </a:solidFill>
                 <a:latin typeface="Montserrat" pitchFamily="34" charset="0"/>
                 <a:ea typeface="Montserrat" pitchFamily="34" charset="-122"/>
@@ -8615,7 +8461,7 @@
       </p:sp>
       <p:sp>
         <p:nvSpPr>
-          <p:cNvPr id="18" name="Text 15"/>
+          <p:cNvPr id="17" name="Text 14"/>
           <p:cNvSpPr/>
           <p:nvPr/>
         </p:nvSpPr>
@@ -8640,7 +8486,7 @@
             <a:r>
               <a:rPr lang="en-US" sz="1150" dirty="0">
                 <a:solidFill>
-                  <a:srgbClr val="111318"/>
+                  <a:srgbClr val="FFFFFF"/>
                 </a:solidFill>
                 <a:latin typeface="Montserrat" pitchFamily="34" charset="0"/>
                 <a:ea typeface="Montserrat" pitchFamily="34" charset="-122"/>
@@ -8654,7 +8500,7 @@
       </p:sp>
       <p:sp>
         <p:nvSpPr>
-          <p:cNvPr id="19" name="Shape 16"/>
+          <p:cNvPr id="18" name="Shape 15"/>
           <p:cNvSpPr/>
           <p:nvPr/>
         </p:nvSpPr>
@@ -8667,11 +8513,11 @@
             <a:avLst/>
           </a:prstGeom>
           <a:solidFill>
-            <a:srgbClr val="E9F4EF"/>
+            <a:srgbClr val="102A20"/>
           </a:solidFill>
           <a:ln w="12700">
             <a:solidFill>
-              <a:srgbClr val="1B8A5A"/>
+              <a:srgbClr val="5FD6A0"/>
             </a:solidFill>
             <a:prstDash val="solid"/>
           </a:ln>
@@ -8679,7 +8525,7 @@
       </p:sp>
       <p:sp>
         <p:nvSpPr>
-          <p:cNvPr id="20" name="Shape 17"/>
+          <p:cNvPr id="19" name="Shape 16"/>
           <p:cNvSpPr/>
           <p:nvPr/>
         </p:nvSpPr>
@@ -8692,11 +8538,11 @@
             <a:avLst/>
           </a:prstGeom>
           <a:solidFill>
-            <a:srgbClr val="F8F0E2"/>
+            <a:srgbClr val="2A2010"/>
           </a:solidFill>
           <a:ln w="12700">
             <a:solidFill>
-              <a:srgbClr val="9A5B12"/>
+              <a:srgbClr val="E8A857"/>
             </a:solidFill>
             <a:prstDash val="solid"/>
           </a:ln>
@@ -8704,7 +8550,7 @@
       </p:sp>
       <p:sp>
         <p:nvSpPr>
-          <p:cNvPr id="21" name="Shape 18"/>
+          <p:cNvPr id="20" name="Shape 17"/>
           <p:cNvSpPr/>
           <p:nvPr/>
         </p:nvSpPr>
@@ -8717,11 +8563,11 @@
             <a:avLst/>
           </a:prstGeom>
           <a:solidFill>
-            <a:srgbClr val="FBE9E9"/>
+            <a:srgbClr val="2E1418"/>
           </a:solidFill>
           <a:ln w="12700">
             <a:solidFill>
-              <a:srgbClr val="C62A2A"/>
+              <a:srgbClr val="FF7B7B"/>
             </a:solidFill>
             <a:prstDash val="solid"/>
           </a:ln>
@@ -8729,7 +8575,7 @@
       </p:sp>
       <p:sp>
         <p:nvSpPr>
-          <p:cNvPr id="22" name="Shape 19"/>
+          <p:cNvPr id="21" name="Shape 18"/>
           <p:cNvSpPr/>
           <p:nvPr/>
         </p:nvSpPr>
@@ -8744,7 +8590,7 @@
           <a:noFill/>
           <a:ln w="19050">
             <a:solidFill>
-              <a:srgbClr val="9A5B12"/>
+              <a:srgbClr val="E8A857"/>
             </a:solidFill>
             <a:prstDash val="solid"/>
           </a:ln>
@@ -8752,7 +8598,7 @@
       </p:sp>
       <p:sp>
         <p:nvSpPr>
-          <p:cNvPr id="23" name="Shape 20"/>
+          <p:cNvPr id="22" name="Shape 19"/>
           <p:cNvSpPr/>
           <p:nvPr/>
         </p:nvSpPr>
@@ -8767,7 +8613,7 @@
           <a:noFill/>
           <a:ln w="19050">
             <a:solidFill>
-              <a:srgbClr val="C62A2A"/>
+              <a:srgbClr val="FF7B7B"/>
             </a:solidFill>
             <a:prstDash val="solid"/>
           </a:ln>
@@ -8775,7 +8621,7 @@
       </p:sp>
       <p:sp>
         <p:nvSpPr>
-          <p:cNvPr id="24" name="Text 21"/>
+          <p:cNvPr id="23" name="Text 20"/>
           <p:cNvSpPr/>
           <p:nvPr/>
         </p:nvSpPr>
@@ -8800,7 +8646,7 @@
             <a:r>
               <a:rPr lang="en-US" sz="900" dirty="0">
                 <a:solidFill>
-                  <a:srgbClr val="9AA1AD"/>
+                  <a:srgbClr val="8A82A0"/>
                 </a:solidFill>
                 <a:latin typeface="Courier New" pitchFamily="34" charset="0"/>
                 <a:ea typeface="Courier New" pitchFamily="34" charset="-122"/>
@@ -8814,7 +8660,7 @@
             <a:r>
               <a:rPr lang="en-US" sz="900" b="1" dirty="0">
                 <a:solidFill>
-                  <a:srgbClr val="1B8A5A"/>
+                  <a:srgbClr val="5FD6A0"/>
                 </a:solidFill>
                 <a:latin typeface="Courier New" pitchFamily="34" charset="0"/>
                 <a:ea typeface="Courier New" pitchFamily="34" charset="-122"/>
@@ -8828,7 +8674,7 @@
             <a:r>
               <a:rPr lang="en-US" sz="900" dirty="0">
                 <a:solidFill>
-                  <a:srgbClr val="9AA1AD"/>
+                  <a:srgbClr val="8A82A0"/>
                 </a:solidFill>
                 <a:latin typeface="Courier New" pitchFamily="34" charset="0"/>
                 <a:ea typeface="Courier New" pitchFamily="34" charset="-122"/>
@@ -8842,7 +8688,7 @@
             <a:r>
               <a:rPr lang="en-US" sz="900" b="1" dirty="0">
                 <a:solidFill>
-                  <a:srgbClr val="9A5B12"/>
+                  <a:srgbClr val="E8A857"/>
                 </a:solidFill>
                 <a:latin typeface="Courier New" pitchFamily="34" charset="0"/>
                 <a:ea typeface="Courier New" pitchFamily="34" charset="-122"/>
@@ -8856,7 +8702,7 @@
             <a:r>
               <a:rPr lang="en-US" sz="900" dirty="0">
                 <a:solidFill>
-                  <a:srgbClr val="9AA1AD"/>
+                  <a:srgbClr val="8A82A0"/>
                 </a:solidFill>
                 <a:latin typeface="Courier New" pitchFamily="34" charset="0"/>
                 <a:ea typeface="Courier New" pitchFamily="34" charset="-122"/>
@@ -8870,7 +8716,7 @@
             <a:r>
               <a:rPr lang="en-US" sz="900" b="1" dirty="0">
                 <a:solidFill>
-                  <a:srgbClr val="C62A2A"/>
+                  <a:srgbClr val="FF7B7B"/>
                 </a:solidFill>
                 <a:latin typeface="Courier New" pitchFamily="34" charset="0"/>
                 <a:ea typeface="Courier New" pitchFamily="34" charset="-122"/>
@@ -8884,7 +8730,7 @@
             <a:r>
               <a:rPr lang="en-US" sz="900" dirty="0">
                 <a:solidFill>
-                  <a:srgbClr val="9AA1AD"/>
+                  <a:srgbClr val="8A82A0"/>
                 </a:solidFill>
                 <a:latin typeface="Courier New" pitchFamily="34" charset="0"/>
                 <a:ea typeface="Courier New" pitchFamily="34" charset="-122"/>
@@ -8898,7 +8744,7 @@
             <a:r>
               <a:rPr lang="en-US" sz="900" b="1" dirty="0">
                 <a:solidFill>
-                  <a:srgbClr val="C62A2A"/>
+                  <a:srgbClr val="FF7B7B"/>
                 </a:solidFill>
                 <a:latin typeface="Courier New" pitchFamily="34" charset="0"/>
                 <a:ea typeface="Courier New" pitchFamily="34" charset="-122"/>
@@ -8912,7 +8758,7 @@
       </p:sp>
       <p:sp>
         <p:nvSpPr>
-          <p:cNvPr id="25" name="Shape 22"/>
+          <p:cNvPr id="24" name="Shape 21"/>
           <p:cNvSpPr/>
           <p:nvPr/>
         </p:nvSpPr>
@@ -8934,7 +8780,7 @@
       </p:sp>
       <p:sp>
         <p:nvSpPr>
-          <p:cNvPr id="26" name="Text 23"/>
+          <p:cNvPr id="25" name="Text 22"/>
           <p:cNvSpPr/>
           <p:nvPr/>
         </p:nvSpPr>
@@ -8973,7 +8819,7 @@
       </p:sp>
       <p:sp>
         <p:nvSpPr>
-          <p:cNvPr id="27" name="Text 24"/>
+          <p:cNvPr id="26" name="Text 23"/>
           <p:cNvSpPr/>
           <p:nvPr/>
         </p:nvSpPr>
@@ -9043,7 +8889,7 @@
             <a:lvl1pPr>
               <a:defRPr sz="850">
                 <a:solidFill>
-                  <a:srgbClr val="9AA1AD"/>
+                  <a:srgbClr val="8A82A0"/>
                 </a:solidFill>
                 <a:latin typeface="Courier New"/>
                 <a:ea typeface="Courier New"/>
@@ -9088,29 +8934,7 @@
       </p:grpSpPr>
       <p:sp>
         <p:nvSpPr>
-          <p:cNvPr id="2" name="Shape 0"/>
-          <p:cNvSpPr/>
-          <p:nvPr/>
-        </p:nvSpPr>
-        <p:spPr>
-          <a:xfrm>
-            <a:off x="231343" y="194767"/>
-            <a:ext cx="11716207" cy="6473952"/>
-          </a:xfrm>
-          <a:prstGeom prst="roundRect">
-            <a:avLst>
-              <a:gd name="adj" fmla="val 3107"/>
-            </a:avLst>
-          </a:prstGeom>
-          <a:solidFill>
-            <a:srgbClr val="FFFFFF"/>
-          </a:solidFill>
-          <a:ln/>
-        </p:spPr>
-      </p:sp>
-      <p:sp>
-        <p:nvSpPr>
-          <p:cNvPr id="3" name="Text 1"/>
+          <p:cNvPr id="2" name="Text 0"/>
           <p:cNvSpPr/>
           <p:nvPr/>
         </p:nvSpPr>
@@ -9135,7 +8959,7 @@
             <a:r>
               <a:rPr lang="en-US" sz="2400" b="1" dirty="0">
                 <a:solidFill>
-                  <a:srgbClr val="111318"/>
+                  <a:srgbClr val="FFFFFF"/>
                 </a:solidFill>
                 <a:latin typeface="Montserrat" pitchFamily="34" charset="0"/>
                 <a:ea typeface="Montserrat" pitchFamily="34" charset="-122"/>
@@ -9149,7 +8973,7 @@
       </p:sp>
       <p:sp>
         <p:nvSpPr>
-          <p:cNvPr id="4" name="Shape 2"/>
+          <p:cNvPr id="3" name="Shape 1"/>
           <p:cNvSpPr/>
           <p:nvPr/>
         </p:nvSpPr>
@@ -9164,14 +8988,14 @@
             </a:avLst>
           </a:prstGeom>
           <a:solidFill>
-            <a:srgbClr val="1B8A5A"/>
+            <a:srgbClr val="5FD6A0"/>
           </a:solidFill>
           <a:ln/>
         </p:spPr>
       </p:sp>
       <p:sp>
         <p:nvSpPr>
-          <p:cNvPr id="5" name="Text 3"/>
+          <p:cNvPr id="4" name="Text 2"/>
           <p:cNvSpPr/>
           <p:nvPr/>
         </p:nvSpPr>
@@ -9196,7 +9020,7 @@
             <a:r>
               <a:rPr lang="en-US" sz="900" b="1" spc="100" kern="0" dirty="0">
                 <a:solidFill>
-                  <a:srgbClr val="FFFFFF"/>
+                  <a:srgbClr val="102A20"/>
                 </a:solidFill>
                 <a:latin typeface="Courier New" pitchFamily="34" charset="0"/>
                 <a:ea typeface="Courier New" pitchFamily="34" charset="-122"/>
@@ -9210,7 +9034,7 @@
       </p:sp>
       <p:pic>
         <p:nvPicPr>
-          <p:cNvPr id="6" name="Image 0" descr="preencoded.png">    </p:cNvPr>
+          <p:cNvPr id="5" name="Image 0" descr="preencoded.png">    </p:cNvPr>
           <p:cNvPicPr>
             <a:picLocks noChangeAspect="1"/>
           </p:cNvPicPr>
@@ -9234,7 +9058,7 @@
       </p:pic>
       <p:sp>
         <p:nvSpPr>
-          <p:cNvPr id="7" name="Shape 4"/>
+          <p:cNvPr id="6" name="Shape 3"/>
           <p:cNvSpPr/>
           <p:nvPr/>
         </p:nvSpPr>
@@ -9249,14 +9073,14 @@
             </a:avLst>
           </a:prstGeom>
           <a:solidFill>
-            <a:srgbClr val="E9F4EF"/>
+            <a:srgbClr val="102A20"/>
           </a:solidFill>
           <a:ln/>
         </p:spPr>
       </p:sp>
       <p:sp>
         <p:nvSpPr>
-          <p:cNvPr id="8" name="Shape 5"/>
+          <p:cNvPr id="7" name="Shape 4"/>
           <p:cNvSpPr/>
           <p:nvPr/>
         </p:nvSpPr>
@@ -9269,14 +9093,14 @@
             <a:avLst/>
           </a:prstGeom>
           <a:solidFill>
-            <a:srgbClr val="1B8A5A"/>
+            <a:srgbClr val="5FD6A0"/>
           </a:solidFill>
           <a:ln/>
         </p:spPr>
       </p:sp>
       <p:sp>
         <p:nvSpPr>
-          <p:cNvPr id="9" name="Text 6"/>
+          <p:cNvPr id="8" name="Text 5"/>
           <p:cNvSpPr/>
           <p:nvPr/>
         </p:nvSpPr>
@@ -9301,7 +9125,7 @@
             <a:r>
               <a:rPr lang="en-US" sz="1200" b="1" dirty="0">
                 <a:solidFill>
-                  <a:srgbClr val="E9F4EF"/>
+                  <a:srgbClr val="102A20"/>
                 </a:solidFill>
                 <a:latin typeface="Courier New" pitchFamily="34" charset="0"/>
                 <a:ea typeface="Courier New" pitchFamily="34" charset="-122"/>
@@ -9315,7 +9139,7 @@
       </p:sp>
       <p:sp>
         <p:nvSpPr>
-          <p:cNvPr id="10" name="Text 7"/>
+          <p:cNvPr id="9" name="Text 6"/>
           <p:cNvSpPr/>
           <p:nvPr/>
         </p:nvSpPr>
@@ -9340,7 +9164,7 @@
             <a:r>
               <a:rPr lang="en-US" sz="1450" b="1" dirty="0">
                 <a:solidFill>
-                  <a:srgbClr val="1B8A5A"/>
+                  <a:srgbClr val="5FD6A0"/>
                 </a:solidFill>
                 <a:latin typeface="Montserrat" pitchFamily="34" charset="0"/>
                 <a:ea typeface="Montserrat" pitchFamily="34" charset="-122"/>
@@ -9354,7 +9178,7 @@
       </p:sp>
       <p:sp>
         <p:nvSpPr>
-          <p:cNvPr id="11" name="Text 8"/>
+          <p:cNvPr id="10" name="Text 7"/>
           <p:cNvSpPr/>
           <p:nvPr/>
         </p:nvSpPr>
@@ -9382,7 +9206,7 @@
             <a:r>
               <a:rPr lang="en-US" sz="1200" dirty="0">
                 <a:solidFill>
-                  <a:srgbClr val="111318"/>
+                  <a:srgbClr val="FFFFFF"/>
                 </a:solidFill>
                 <a:latin typeface="Montserrat" pitchFamily="34" charset="0"/>
                 <a:ea typeface="Montserrat" pitchFamily="34" charset="-122"/>
@@ -9396,7 +9220,7 @@
       </p:sp>
       <p:sp>
         <p:nvSpPr>
-          <p:cNvPr id="12" name="Shape 9"/>
+          <p:cNvPr id="11" name="Shape 8"/>
           <p:cNvSpPr/>
           <p:nvPr/>
         </p:nvSpPr>
@@ -9411,14 +9235,14 @@
             </a:avLst>
           </a:prstGeom>
           <a:solidFill>
-            <a:srgbClr val="E9F4EF"/>
+            <a:srgbClr val="102A20"/>
           </a:solidFill>
           <a:ln/>
         </p:spPr>
       </p:sp>
       <p:sp>
         <p:nvSpPr>
-          <p:cNvPr id="13" name="Shape 10"/>
+          <p:cNvPr id="12" name="Shape 9"/>
           <p:cNvSpPr/>
           <p:nvPr/>
         </p:nvSpPr>
@@ -9431,14 +9255,14 @@
             <a:avLst/>
           </a:prstGeom>
           <a:solidFill>
-            <a:srgbClr val="1B8A5A"/>
+            <a:srgbClr val="5FD6A0"/>
           </a:solidFill>
           <a:ln/>
         </p:spPr>
       </p:sp>
       <p:sp>
         <p:nvSpPr>
-          <p:cNvPr id="14" name="Text 11"/>
+          <p:cNvPr id="13" name="Text 10"/>
           <p:cNvSpPr/>
           <p:nvPr/>
         </p:nvSpPr>
@@ -9463,7 +9287,7 @@
             <a:r>
               <a:rPr lang="en-US" sz="1200" b="1" dirty="0">
                 <a:solidFill>
-                  <a:srgbClr val="E9F4EF"/>
+                  <a:srgbClr val="102A20"/>
                 </a:solidFill>
                 <a:latin typeface="Courier New" pitchFamily="34" charset="0"/>
                 <a:ea typeface="Courier New" pitchFamily="34" charset="-122"/>
@@ -9477,7 +9301,7 @@
       </p:sp>
       <p:sp>
         <p:nvSpPr>
-          <p:cNvPr id="15" name="Text 12"/>
+          <p:cNvPr id="14" name="Text 11"/>
           <p:cNvSpPr/>
           <p:nvPr/>
         </p:nvSpPr>
@@ -9502,7 +9326,7 @@
             <a:r>
               <a:rPr lang="en-US" sz="1450" b="1" dirty="0">
                 <a:solidFill>
-                  <a:srgbClr val="1B8A5A"/>
+                  <a:srgbClr val="5FD6A0"/>
                 </a:solidFill>
                 <a:latin typeface="Montserrat" pitchFamily="34" charset="0"/>
                 <a:ea typeface="Montserrat" pitchFamily="34" charset="-122"/>
@@ -9516,7 +9340,7 @@
       </p:sp>
       <p:sp>
         <p:nvSpPr>
-          <p:cNvPr id="16" name="Text 13"/>
+          <p:cNvPr id="15" name="Text 12"/>
           <p:cNvSpPr/>
           <p:nvPr/>
         </p:nvSpPr>
@@ -9544,7 +9368,7 @@
             <a:r>
               <a:rPr lang="en-US" sz="1200" dirty="0">
                 <a:solidFill>
-                  <a:srgbClr val="111318"/>
+                  <a:srgbClr val="FFFFFF"/>
                 </a:solidFill>
                 <a:latin typeface="Montserrat" pitchFamily="34" charset="0"/>
                 <a:ea typeface="Montserrat" pitchFamily="34" charset="-122"/>
@@ -9558,7 +9382,7 @@
       </p:sp>
       <p:sp>
         <p:nvSpPr>
-          <p:cNvPr id="17" name="Shape 14"/>
+          <p:cNvPr id="16" name="Shape 13"/>
           <p:cNvSpPr/>
           <p:nvPr/>
         </p:nvSpPr>
@@ -9573,14 +9397,14 @@
             </a:avLst>
           </a:prstGeom>
           <a:solidFill>
-            <a:srgbClr val="E9F4EF"/>
+            <a:srgbClr val="102A20"/>
           </a:solidFill>
           <a:ln/>
         </p:spPr>
       </p:sp>
       <p:sp>
         <p:nvSpPr>
-          <p:cNvPr id="18" name="Shape 15"/>
+          <p:cNvPr id="17" name="Shape 14"/>
           <p:cNvSpPr/>
           <p:nvPr/>
         </p:nvSpPr>
@@ -9593,14 +9417,14 @@
             <a:avLst/>
           </a:prstGeom>
           <a:solidFill>
-            <a:srgbClr val="1B8A5A"/>
+            <a:srgbClr val="5FD6A0"/>
           </a:solidFill>
           <a:ln/>
         </p:spPr>
       </p:sp>
       <p:sp>
         <p:nvSpPr>
-          <p:cNvPr id="19" name="Text 16"/>
+          <p:cNvPr id="18" name="Text 15"/>
           <p:cNvSpPr/>
           <p:nvPr/>
         </p:nvSpPr>
@@ -9625,7 +9449,7 @@
             <a:r>
               <a:rPr lang="en-US" sz="1200" b="1" dirty="0">
                 <a:solidFill>
-                  <a:srgbClr val="E9F4EF"/>
+                  <a:srgbClr val="102A20"/>
                 </a:solidFill>
                 <a:latin typeface="Courier New" pitchFamily="34" charset="0"/>
                 <a:ea typeface="Courier New" pitchFamily="34" charset="-122"/>
@@ -9639,7 +9463,7 @@
       </p:sp>
       <p:sp>
         <p:nvSpPr>
-          <p:cNvPr id="20" name="Text 17"/>
+          <p:cNvPr id="19" name="Text 16"/>
           <p:cNvSpPr/>
           <p:nvPr/>
         </p:nvSpPr>
@@ -9664,7 +9488,7 @@
             <a:r>
               <a:rPr lang="en-US" sz="1450" b="1" dirty="0">
                 <a:solidFill>
-                  <a:srgbClr val="1B8A5A"/>
+                  <a:srgbClr val="5FD6A0"/>
                 </a:solidFill>
                 <a:latin typeface="Montserrat" pitchFamily="34" charset="0"/>
                 <a:ea typeface="Montserrat" pitchFamily="34" charset="-122"/>
@@ -9678,7 +9502,7 @@
       </p:sp>
       <p:sp>
         <p:nvSpPr>
-          <p:cNvPr id="21" name="Text 18"/>
+          <p:cNvPr id="20" name="Text 17"/>
           <p:cNvSpPr/>
           <p:nvPr/>
         </p:nvSpPr>
@@ -9706,7 +9530,7 @@
             <a:r>
               <a:rPr lang="en-US" sz="1200" dirty="0">
                 <a:solidFill>
-                  <a:srgbClr val="111318"/>
+                  <a:srgbClr val="FFFFFF"/>
                 </a:solidFill>
                 <a:latin typeface="Montserrat" pitchFamily="34" charset="0"/>
                 <a:ea typeface="Montserrat" pitchFamily="34" charset="-122"/>
@@ -9720,7 +9544,7 @@
       </p:sp>
       <p:sp>
         <p:nvSpPr>
-          <p:cNvPr id="22" name="Shape 19"/>
+          <p:cNvPr id="21" name="Shape 18"/>
           <p:cNvSpPr/>
           <p:nvPr/>
         </p:nvSpPr>
@@ -9735,14 +9559,14 @@
             </a:avLst>
           </a:prstGeom>
           <a:solidFill>
-            <a:srgbClr val="E9F4EF"/>
+            <a:srgbClr val="102A20"/>
           </a:solidFill>
           <a:ln/>
         </p:spPr>
       </p:sp>
       <p:sp>
         <p:nvSpPr>
-          <p:cNvPr id="23" name="Shape 20"/>
+          <p:cNvPr id="22" name="Shape 19"/>
           <p:cNvSpPr/>
           <p:nvPr/>
         </p:nvSpPr>
@@ -9755,14 +9579,14 @@
             <a:avLst/>
           </a:prstGeom>
           <a:solidFill>
-            <a:srgbClr val="1B8A5A"/>
+            <a:srgbClr val="5FD6A0"/>
           </a:solidFill>
           <a:ln/>
         </p:spPr>
       </p:sp>
       <p:sp>
         <p:nvSpPr>
-          <p:cNvPr id="24" name="Text 21"/>
+          <p:cNvPr id="23" name="Text 20"/>
           <p:cNvSpPr/>
           <p:nvPr/>
         </p:nvSpPr>
@@ -9787,7 +9611,7 @@
             <a:r>
               <a:rPr lang="en-US" sz="1200" b="1" dirty="0">
                 <a:solidFill>
-                  <a:srgbClr val="E9F4EF"/>
+                  <a:srgbClr val="102A20"/>
                 </a:solidFill>
                 <a:latin typeface="Courier New" pitchFamily="34" charset="0"/>
                 <a:ea typeface="Courier New" pitchFamily="34" charset="-122"/>
@@ -9801,7 +9625,7 @@
       </p:sp>
       <p:sp>
         <p:nvSpPr>
-          <p:cNvPr id="25" name="Text 22"/>
+          <p:cNvPr id="24" name="Text 21"/>
           <p:cNvSpPr/>
           <p:nvPr/>
         </p:nvSpPr>
@@ -9826,7 +9650,7 @@
             <a:r>
               <a:rPr lang="en-US" sz="1450" b="1" dirty="0">
                 <a:solidFill>
-                  <a:srgbClr val="1B8A5A"/>
+                  <a:srgbClr val="5FD6A0"/>
                 </a:solidFill>
                 <a:latin typeface="Montserrat" pitchFamily="34" charset="0"/>
                 <a:ea typeface="Montserrat" pitchFamily="34" charset="-122"/>
@@ -9840,7 +9664,7 @@
       </p:sp>
       <p:sp>
         <p:nvSpPr>
-          <p:cNvPr id="26" name="Text 23"/>
+          <p:cNvPr id="25" name="Text 22"/>
           <p:cNvSpPr/>
           <p:nvPr/>
         </p:nvSpPr>
@@ -9868,7 +9692,7 @@
             <a:r>
               <a:rPr lang="en-US" sz="1200" dirty="0">
                 <a:solidFill>
-                  <a:srgbClr val="111318"/>
+                  <a:srgbClr val="FFFFFF"/>
                 </a:solidFill>
                 <a:latin typeface="Montserrat" pitchFamily="34" charset="0"/>
                 <a:ea typeface="Montserrat" pitchFamily="34" charset="-122"/>
@@ -9882,7 +9706,7 @@
       </p:sp>
       <p:sp>
         <p:nvSpPr>
-          <p:cNvPr id="27" name="Shape 24"/>
+          <p:cNvPr id="26" name="Shape 23"/>
           <p:cNvSpPr/>
           <p:nvPr/>
         </p:nvSpPr>
@@ -9904,7 +9728,7 @@
       </p:sp>
       <p:sp>
         <p:nvSpPr>
-          <p:cNvPr id="28" name="Text 25"/>
+          <p:cNvPr id="27" name="Text 24"/>
           <p:cNvSpPr/>
           <p:nvPr/>
         </p:nvSpPr>
@@ -9943,7 +9767,7 @@
       </p:sp>
       <p:sp>
         <p:nvSpPr>
-          <p:cNvPr id="29" name="Text 26"/>
+          <p:cNvPr id="28" name="Text 25"/>
           <p:cNvSpPr/>
           <p:nvPr/>
         </p:nvSpPr>
@@ -10013,7 +9837,7 @@
             <a:lvl1pPr>
               <a:defRPr sz="850">
                 <a:solidFill>
-                  <a:srgbClr val="9AA1AD"/>
+                  <a:srgbClr val="8A82A0"/>
                 </a:solidFill>
                 <a:latin typeface="Courier New"/>
                 <a:ea typeface="Courier New"/>
@@ -10058,29 +9882,7 @@
       </p:grpSpPr>
       <p:sp>
         <p:nvSpPr>
-          <p:cNvPr id="2" name="Shape 0"/>
-          <p:cNvSpPr/>
-          <p:nvPr/>
-        </p:nvSpPr>
-        <p:spPr>
-          <a:xfrm>
-            <a:off x="231343" y="194767"/>
-            <a:ext cx="11716207" cy="6473952"/>
-          </a:xfrm>
-          <a:prstGeom prst="roundRect">
-            <a:avLst>
-              <a:gd name="adj" fmla="val 3107"/>
-            </a:avLst>
-          </a:prstGeom>
-          <a:solidFill>
-            <a:srgbClr val="FFFFFF"/>
-          </a:solidFill>
-          <a:ln/>
-        </p:spPr>
-      </p:sp>
-      <p:sp>
-        <p:nvSpPr>
-          <p:cNvPr id="3" name="Text 1"/>
+          <p:cNvPr id="2" name="Text 0"/>
           <p:cNvSpPr/>
           <p:nvPr/>
         </p:nvSpPr>
@@ -10105,7 +9907,7 @@
             <a:r>
               <a:rPr lang="en-US" sz="2400" b="1" dirty="0">
                 <a:solidFill>
-                  <a:srgbClr val="111318"/>
+                  <a:srgbClr val="FFFFFF"/>
                 </a:solidFill>
                 <a:latin typeface="Montserrat" pitchFamily="34" charset="0"/>
                 <a:ea typeface="Montserrat" pitchFamily="34" charset="-122"/>
@@ -10119,7 +9921,7 @@
       </p:sp>
       <p:sp>
         <p:nvSpPr>
-          <p:cNvPr id="4" name="Shape 2"/>
+          <p:cNvPr id="3" name="Shape 1"/>
           <p:cNvSpPr/>
           <p:nvPr/>
         </p:nvSpPr>
@@ -10134,14 +9936,14 @@
             </a:avLst>
           </a:prstGeom>
           <a:solidFill>
-            <a:srgbClr val="1B8A5A"/>
+            <a:srgbClr val="5FD6A0"/>
           </a:solidFill>
           <a:ln/>
         </p:spPr>
       </p:sp>
       <p:sp>
         <p:nvSpPr>
-          <p:cNvPr id="5" name="Text 3"/>
+          <p:cNvPr id="4" name="Text 2"/>
           <p:cNvSpPr/>
           <p:nvPr/>
         </p:nvSpPr>
@@ -10166,7 +9968,7 @@
             <a:r>
               <a:rPr lang="en-US" sz="900" b="1" spc="100" kern="0" dirty="0">
                 <a:solidFill>
-                  <a:srgbClr val="FFFFFF"/>
+                  <a:srgbClr val="102A20"/>
                 </a:solidFill>
                 <a:latin typeface="Courier New" pitchFamily="34" charset="0"/>
                 <a:ea typeface="Courier New" pitchFamily="34" charset="-122"/>
@@ -10180,7 +9982,7 @@
       </p:sp>
       <p:pic>
         <p:nvPicPr>
-          <p:cNvPr id="6" name="Image 0" descr="preencoded.png">    </p:cNvPr>
+          <p:cNvPr id="5" name="Image 0" descr="preencoded.png">    </p:cNvPr>
           <p:cNvPicPr>
             <a:picLocks noChangeAspect="1"/>
           </p:cNvPicPr>
@@ -10204,7 +10006,7 @@
       </p:pic>
       <p:sp>
         <p:nvSpPr>
-          <p:cNvPr id="7" name="Shape 4"/>
+          <p:cNvPr id="6" name="Shape 3"/>
           <p:cNvSpPr/>
           <p:nvPr/>
         </p:nvSpPr>
@@ -10217,14 +10019,14 @@
             <a:avLst/>
           </a:prstGeom>
           <a:solidFill>
-            <a:srgbClr val="5A05F4"/>
+            <a:srgbClr val="C9A6FF"/>
           </a:solidFill>
           <a:ln/>
         </p:spPr>
       </p:sp>
       <p:sp>
         <p:nvSpPr>
-          <p:cNvPr id="8" name="Text 5"/>
+          <p:cNvPr id="7" name="Text 4"/>
           <p:cNvSpPr/>
           <p:nvPr/>
         </p:nvSpPr>
@@ -10249,7 +10051,7 @@
             <a:r>
               <a:rPr lang="en-US" sz="1300" b="1" dirty="0">
                 <a:solidFill>
-                  <a:srgbClr val="FFFFFF"/>
+                  <a:srgbClr val="1C1140"/>
                 </a:solidFill>
                 <a:latin typeface="Courier New" pitchFamily="34" charset="0"/>
                 <a:ea typeface="Courier New" pitchFamily="34" charset="-122"/>
@@ -10263,7 +10065,7 @@
       </p:sp>
       <p:sp>
         <p:nvSpPr>
-          <p:cNvPr id="9" name="Text 6"/>
+          <p:cNvPr id="8" name="Text 5"/>
           <p:cNvSpPr/>
           <p:nvPr/>
         </p:nvSpPr>
@@ -10288,7 +10090,7 @@
             <a:r>
               <a:rPr lang="en-US" sz="1400" b="1" dirty="0">
                 <a:solidFill>
-                  <a:srgbClr val="111318"/>
+                  <a:srgbClr val="FFFFFF"/>
                 </a:solidFill>
                 <a:latin typeface="Montserrat" pitchFamily="34" charset="0"/>
                 <a:ea typeface="Montserrat" pitchFamily="34" charset="-122"/>
@@ -10302,7 +10104,7 @@
             <a:r>
               <a:rPr lang="en-US" sz="1200" dirty="0">
                 <a:solidFill>
-                  <a:srgbClr val="555B66"/>
+                  <a:srgbClr val="AFA9BE"/>
                 </a:solidFill>
                 <a:latin typeface="Montserrat" pitchFamily="34" charset="0"/>
                 <a:ea typeface="Montserrat" pitchFamily="34" charset="-122"/>
@@ -10316,7 +10118,7 @@
       </p:sp>
       <p:sp>
         <p:nvSpPr>
-          <p:cNvPr id="10" name="Shape 7"/>
+          <p:cNvPr id="9" name="Shape 6"/>
           <p:cNvSpPr/>
           <p:nvPr/>
         </p:nvSpPr>
@@ -10329,14 +10131,14 @@
             <a:avLst/>
           </a:prstGeom>
           <a:solidFill>
-            <a:srgbClr val="5A05F4"/>
+            <a:srgbClr val="C9A6FF"/>
           </a:solidFill>
           <a:ln/>
         </p:spPr>
       </p:sp>
       <p:sp>
         <p:nvSpPr>
-          <p:cNvPr id="11" name="Text 8"/>
+          <p:cNvPr id="10" name="Text 7"/>
           <p:cNvSpPr/>
           <p:nvPr/>
         </p:nvSpPr>
@@ -10361,7 +10163,7 @@
             <a:r>
               <a:rPr lang="en-US" sz="1300" b="1" dirty="0">
                 <a:solidFill>
-                  <a:srgbClr val="FFFFFF"/>
+                  <a:srgbClr val="1C1140"/>
                 </a:solidFill>
                 <a:latin typeface="Courier New" pitchFamily="34" charset="0"/>
                 <a:ea typeface="Courier New" pitchFamily="34" charset="-122"/>
@@ -10375,7 +10177,7 @@
       </p:sp>
       <p:sp>
         <p:nvSpPr>
-          <p:cNvPr id="12" name="Text 9"/>
+          <p:cNvPr id="11" name="Text 8"/>
           <p:cNvSpPr/>
           <p:nvPr/>
         </p:nvSpPr>
@@ -10400,7 +10202,7 @@
             <a:r>
               <a:rPr lang="en-US" sz="1400" b="1" dirty="0">
                 <a:solidFill>
-                  <a:srgbClr val="111318"/>
+                  <a:srgbClr val="FFFFFF"/>
                 </a:solidFill>
                 <a:latin typeface="Montserrat" pitchFamily="34" charset="0"/>
                 <a:ea typeface="Montserrat" pitchFamily="34" charset="-122"/>
@@ -10414,7 +10216,7 @@
             <a:r>
               <a:rPr lang="en-US" sz="1200" dirty="0">
                 <a:solidFill>
-                  <a:srgbClr val="555B66"/>
+                  <a:srgbClr val="AFA9BE"/>
                 </a:solidFill>
                 <a:latin typeface="Montserrat" pitchFamily="34" charset="0"/>
                 <a:ea typeface="Montserrat" pitchFamily="34" charset="-122"/>
@@ -10428,7 +10230,7 @@
       </p:sp>
       <p:sp>
         <p:nvSpPr>
-          <p:cNvPr id="13" name="Shape 10"/>
+          <p:cNvPr id="12" name="Shape 9"/>
           <p:cNvSpPr/>
           <p:nvPr/>
         </p:nvSpPr>
@@ -10441,14 +10243,14 @@
             <a:avLst/>
           </a:prstGeom>
           <a:solidFill>
-            <a:srgbClr val="5A05F4"/>
+            <a:srgbClr val="C9A6FF"/>
           </a:solidFill>
           <a:ln/>
         </p:spPr>
       </p:sp>
       <p:sp>
         <p:nvSpPr>
-          <p:cNvPr id="14" name="Text 11"/>
+          <p:cNvPr id="13" name="Text 10"/>
           <p:cNvSpPr/>
           <p:nvPr/>
         </p:nvSpPr>
@@ -10473,7 +10275,7 @@
             <a:r>
               <a:rPr lang="en-US" sz="1300" b="1" dirty="0">
                 <a:solidFill>
-                  <a:srgbClr val="FFFFFF"/>
+                  <a:srgbClr val="1C1140"/>
                 </a:solidFill>
                 <a:latin typeface="Courier New" pitchFamily="34" charset="0"/>
                 <a:ea typeface="Courier New" pitchFamily="34" charset="-122"/>
@@ -10487,7 +10289,7 @@
       </p:sp>
       <p:sp>
         <p:nvSpPr>
-          <p:cNvPr id="15" name="Text 12"/>
+          <p:cNvPr id="14" name="Text 11"/>
           <p:cNvSpPr/>
           <p:nvPr/>
         </p:nvSpPr>
@@ -10512,7 +10314,7 @@
             <a:r>
               <a:rPr lang="en-US" sz="1400" b="1" dirty="0">
                 <a:solidFill>
-                  <a:srgbClr val="111318"/>
+                  <a:srgbClr val="FFFFFF"/>
                 </a:solidFill>
                 <a:latin typeface="Montserrat" pitchFamily="34" charset="0"/>
                 <a:ea typeface="Montserrat" pitchFamily="34" charset="-122"/>
@@ -10526,7 +10328,7 @@
             <a:r>
               <a:rPr lang="en-US" sz="1200" dirty="0">
                 <a:solidFill>
-                  <a:srgbClr val="555B66"/>
+                  <a:srgbClr val="AFA9BE"/>
                 </a:solidFill>
                 <a:latin typeface="Montserrat" pitchFamily="34" charset="0"/>
                 <a:ea typeface="Montserrat" pitchFamily="34" charset="-122"/>
@@ -10540,7 +10342,7 @@
       </p:sp>
       <p:sp>
         <p:nvSpPr>
-          <p:cNvPr id="16" name="Shape 13"/>
+          <p:cNvPr id="15" name="Shape 12"/>
           <p:cNvSpPr/>
           <p:nvPr/>
         </p:nvSpPr>
@@ -10553,14 +10355,14 @@
             <a:avLst/>
           </a:prstGeom>
           <a:solidFill>
-            <a:srgbClr val="5A05F4"/>
+            <a:srgbClr val="C9A6FF"/>
           </a:solidFill>
           <a:ln/>
         </p:spPr>
       </p:sp>
       <p:sp>
         <p:nvSpPr>
-          <p:cNvPr id="17" name="Text 14"/>
+          <p:cNvPr id="16" name="Text 13"/>
           <p:cNvSpPr/>
           <p:nvPr/>
         </p:nvSpPr>
@@ -10585,7 +10387,7 @@
             <a:r>
               <a:rPr lang="en-US" sz="1300" b="1" dirty="0">
                 <a:solidFill>
-                  <a:srgbClr val="FFFFFF"/>
+                  <a:srgbClr val="1C1140"/>
                 </a:solidFill>
                 <a:latin typeface="Courier New" pitchFamily="34" charset="0"/>
                 <a:ea typeface="Courier New" pitchFamily="34" charset="-122"/>
@@ -10599,7 +10401,7 @@
       </p:sp>
       <p:sp>
         <p:nvSpPr>
-          <p:cNvPr id="18" name="Text 15"/>
+          <p:cNvPr id="17" name="Text 14"/>
           <p:cNvSpPr/>
           <p:nvPr/>
         </p:nvSpPr>
@@ -10624,7 +10426,7 @@
             <a:r>
               <a:rPr lang="en-US" sz="1400" b="1" dirty="0">
                 <a:solidFill>
-                  <a:srgbClr val="111318"/>
+                  <a:srgbClr val="FFFFFF"/>
                 </a:solidFill>
                 <a:latin typeface="Montserrat" pitchFamily="34" charset="0"/>
                 <a:ea typeface="Montserrat" pitchFamily="34" charset="-122"/>
@@ -10638,7 +10440,7 @@
             <a:r>
               <a:rPr lang="en-US" sz="1200" dirty="0">
                 <a:solidFill>
-                  <a:srgbClr val="555B66"/>
+                  <a:srgbClr val="AFA9BE"/>
                 </a:solidFill>
                 <a:latin typeface="Montserrat" pitchFamily="34" charset="0"/>
                 <a:ea typeface="Montserrat" pitchFamily="34" charset="-122"/>
@@ -10652,7 +10454,7 @@
       </p:sp>
       <p:sp>
         <p:nvSpPr>
-          <p:cNvPr id="19" name="Shape 16"/>
+          <p:cNvPr id="18" name="Shape 15"/>
           <p:cNvSpPr/>
           <p:nvPr/>
         </p:nvSpPr>
@@ -10665,14 +10467,14 @@
             <a:avLst/>
           </a:prstGeom>
           <a:solidFill>
-            <a:srgbClr val="9A5B12"/>
+            <a:srgbClr val="E8A857"/>
           </a:solidFill>
           <a:ln/>
         </p:spPr>
       </p:sp>
       <p:sp>
         <p:nvSpPr>
-          <p:cNvPr id="20" name="Text 17"/>
+          <p:cNvPr id="19" name="Text 16"/>
           <p:cNvSpPr/>
           <p:nvPr/>
         </p:nvSpPr>
@@ -10697,7 +10499,7 @@
             <a:r>
               <a:rPr lang="en-US" sz="1300" b="1" dirty="0">
                 <a:solidFill>
-                  <a:srgbClr val="FFFFFF"/>
+                  <a:srgbClr val="2A2010"/>
                 </a:solidFill>
                 <a:latin typeface="Courier New" pitchFamily="34" charset="0"/>
                 <a:ea typeface="Courier New" pitchFamily="34" charset="-122"/>
@@ -10711,7 +10513,7 @@
       </p:sp>
       <p:sp>
         <p:nvSpPr>
-          <p:cNvPr id="21" name="Text 18"/>
+          <p:cNvPr id="20" name="Text 17"/>
           <p:cNvSpPr/>
           <p:nvPr/>
         </p:nvSpPr>
@@ -10736,7 +10538,7 @@
             <a:r>
               <a:rPr lang="en-US" sz="1400" b="1" dirty="0">
                 <a:solidFill>
-                  <a:srgbClr val="9A5B12"/>
+                  <a:srgbClr val="E8A857"/>
                 </a:solidFill>
                 <a:latin typeface="Montserrat" pitchFamily="34" charset="0"/>
                 <a:ea typeface="Montserrat" pitchFamily="34" charset="-122"/>
@@ -10750,7 +10552,7 @@
             <a:r>
               <a:rPr lang="en-US" sz="1200" dirty="0">
                 <a:solidFill>
-                  <a:srgbClr val="555B66"/>
+                  <a:srgbClr val="AFA9BE"/>
                 </a:solidFill>
                 <a:latin typeface="Montserrat" pitchFamily="34" charset="0"/>
                 <a:ea typeface="Montserrat" pitchFamily="34" charset="-122"/>
@@ -10792,7 +10594,7 @@
             <a:lvl1pPr>
               <a:defRPr sz="850">
                 <a:solidFill>
-                  <a:srgbClr val="9AA1AD"/>
+                  <a:srgbClr val="8A82A0"/>
                 </a:solidFill>
                 <a:latin typeface="Courier New"/>
                 <a:ea typeface="Courier New"/>
@@ -10837,29 +10639,7 @@
       </p:grpSpPr>
       <p:sp>
         <p:nvSpPr>
-          <p:cNvPr id="2" name="Shape 0"/>
-          <p:cNvSpPr/>
-          <p:nvPr/>
-        </p:nvSpPr>
-        <p:spPr>
-          <a:xfrm>
-            <a:off x="231343" y="194767"/>
-            <a:ext cx="11716207" cy="6473952"/>
-          </a:xfrm>
-          <a:prstGeom prst="roundRect">
-            <a:avLst>
-              <a:gd name="adj" fmla="val 3107"/>
-            </a:avLst>
-          </a:prstGeom>
-          <a:solidFill>
-            <a:srgbClr val="FFFFFF"/>
-          </a:solidFill>
-          <a:ln/>
-        </p:spPr>
-      </p:sp>
-      <p:sp>
-        <p:nvSpPr>
-          <p:cNvPr id="3" name="Text 1"/>
+          <p:cNvPr id="2" name="Text 0"/>
           <p:cNvSpPr/>
           <p:nvPr/>
         </p:nvSpPr>
@@ -10884,7 +10664,7 @@
             <a:r>
               <a:rPr lang="en-US" sz="2400" b="1" dirty="0">
                 <a:solidFill>
-                  <a:srgbClr val="111318"/>
+                  <a:srgbClr val="FFFFFF"/>
                 </a:solidFill>
                 <a:latin typeface="Montserrat" pitchFamily="34" charset="0"/>
                 <a:ea typeface="Montserrat" pitchFamily="34" charset="-122"/>
@@ -10898,7 +10678,7 @@
       </p:sp>
       <p:sp>
         <p:nvSpPr>
-          <p:cNvPr id="4" name="Shape 2"/>
+          <p:cNvPr id="3" name="Shape 1"/>
           <p:cNvSpPr/>
           <p:nvPr/>
         </p:nvSpPr>
@@ -10913,14 +10693,14 @@
             </a:avLst>
           </a:prstGeom>
           <a:solidFill>
-            <a:srgbClr val="9A5B12"/>
+            <a:srgbClr val="E8A857"/>
           </a:solidFill>
           <a:ln/>
         </p:spPr>
       </p:sp>
       <p:sp>
         <p:nvSpPr>
-          <p:cNvPr id="5" name="Text 3"/>
+          <p:cNvPr id="4" name="Text 2"/>
           <p:cNvSpPr/>
           <p:nvPr/>
         </p:nvSpPr>
@@ -10945,7 +10725,7 @@
             <a:r>
               <a:rPr lang="en-US" sz="900" b="1" spc="100" kern="0" dirty="0">
                 <a:solidFill>
-                  <a:srgbClr val="FFFFFF"/>
+                  <a:srgbClr val="2A2010"/>
                 </a:solidFill>
                 <a:latin typeface="Courier New" pitchFamily="34" charset="0"/>
                 <a:ea typeface="Courier New" pitchFamily="34" charset="-122"/>
@@ -10959,7 +10739,7 @@
       </p:sp>
       <p:pic>
         <p:nvPicPr>
-          <p:cNvPr id="6" name="Image 0" descr="preencoded.png">    </p:cNvPr>
+          <p:cNvPr id="5" name="Image 0" descr="preencoded.png">    </p:cNvPr>
           <p:cNvPicPr>
             <a:picLocks noChangeAspect="1"/>
           </p:cNvPicPr>
@@ -10983,7 +10763,7 @@
       </p:pic>
       <p:sp>
         <p:nvSpPr>
-          <p:cNvPr id="7" name="Shape 4"/>
+          <p:cNvPr id="6" name="Shape 3"/>
           <p:cNvSpPr/>
           <p:nvPr/>
         </p:nvSpPr>
@@ -10998,14 +10778,14 @@
             </a:avLst>
           </a:prstGeom>
           <a:solidFill>
-            <a:srgbClr val="E9F4EF"/>
+            <a:srgbClr val="102A20"/>
           </a:solidFill>
           <a:ln/>
         </p:spPr>
       </p:sp>
       <p:sp>
         <p:nvSpPr>
-          <p:cNvPr id="8" name="Text 5"/>
+          <p:cNvPr id="7" name="Text 4"/>
           <p:cNvSpPr/>
           <p:nvPr/>
         </p:nvSpPr>
@@ -11030,7 +10810,7 @@
             <a:r>
               <a:rPr lang="en-US" sz="1450" b="1" dirty="0">
                 <a:solidFill>
-                  <a:srgbClr val="1B8A5A"/>
+                  <a:srgbClr val="5FD6A0"/>
                 </a:solidFill>
                 <a:latin typeface="Montserrat" pitchFamily="34" charset="0"/>
                 <a:ea typeface="Montserrat" pitchFamily="34" charset="-122"/>
@@ -11044,7 +10824,7 @@
       </p:sp>
       <p:sp>
         <p:nvSpPr>
-          <p:cNvPr id="9" name="Text 6"/>
+          <p:cNvPr id="8" name="Text 5"/>
           <p:cNvSpPr/>
           <p:nvPr/>
         </p:nvSpPr>
@@ -11072,7 +10852,7 @@
             <a:r>
               <a:rPr lang="en-US" sz="1200" dirty="0">
                 <a:solidFill>
-                  <a:srgbClr val="111318"/>
+                  <a:srgbClr val="FFFFFF"/>
                 </a:solidFill>
                 <a:latin typeface="Montserrat" pitchFamily="34" charset="0"/>
                 <a:ea typeface="Montserrat" pitchFamily="34" charset="-122"/>
@@ -11086,7 +10866,7 @@
       </p:sp>
       <p:sp>
         <p:nvSpPr>
-          <p:cNvPr id="10" name="Shape 7"/>
+          <p:cNvPr id="9" name="Shape 6"/>
           <p:cNvSpPr/>
           <p:nvPr/>
         </p:nvSpPr>
@@ -11101,14 +10881,14 @@
             </a:avLst>
           </a:prstGeom>
           <a:solidFill>
-            <a:srgbClr val="EFEAFE"/>
+            <a:srgbClr val="1C1140"/>
           </a:solidFill>
           <a:ln/>
         </p:spPr>
       </p:sp>
       <p:sp>
         <p:nvSpPr>
-          <p:cNvPr id="11" name="Text 8"/>
+          <p:cNvPr id="10" name="Text 7"/>
           <p:cNvSpPr/>
           <p:nvPr/>
         </p:nvSpPr>
@@ -11133,7 +10913,7 @@
             <a:r>
               <a:rPr lang="en-US" sz="1450" b="1" dirty="0">
                 <a:solidFill>
-                  <a:srgbClr val="5A05F4"/>
+                  <a:srgbClr val="C9A6FF"/>
                 </a:solidFill>
                 <a:latin typeface="Montserrat" pitchFamily="34" charset="0"/>
                 <a:ea typeface="Montserrat" pitchFamily="34" charset="-122"/>
@@ -11147,7 +10927,7 @@
       </p:sp>
       <p:sp>
         <p:nvSpPr>
-          <p:cNvPr id="12" name="Text 9"/>
+          <p:cNvPr id="11" name="Text 8"/>
           <p:cNvSpPr/>
           <p:nvPr/>
         </p:nvSpPr>
@@ -11175,7 +10955,7 @@
             <a:r>
               <a:rPr lang="en-US" sz="1200" dirty="0">
                 <a:solidFill>
-                  <a:srgbClr val="111318"/>
+                  <a:srgbClr val="FFFFFF"/>
                 </a:solidFill>
                 <a:latin typeface="Montserrat" pitchFamily="34" charset="0"/>
                 <a:ea typeface="Montserrat" pitchFamily="34" charset="-122"/>
@@ -11189,7 +10969,7 @@
       </p:sp>
       <p:sp>
         <p:nvSpPr>
-          <p:cNvPr id="13" name="Shape 10"/>
+          <p:cNvPr id="12" name="Shape 9"/>
           <p:cNvSpPr/>
           <p:nvPr/>
         </p:nvSpPr>
@@ -11204,11 +10984,11 @@
             </a:avLst>
           </a:prstGeom>
           <a:solidFill>
-            <a:srgbClr val="FFFFFF"/>
+            <a:srgbClr val="17141F"/>
           </a:solidFill>
           <a:ln w="12700">
             <a:solidFill>
-              <a:srgbClr val="E6E7EC"/>
+              <a:srgbClr val="2E2A3A"/>
             </a:solidFill>
             <a:prstDash val="solid"/>
           </a:ln>
@@ -11216,7 +10996,7 @@
       </p:sp>
       <p:sp>
         <p:nvSpPr>
-          <p:cNvPr id="14" name="Text 11"/>
+          <p:cNvPr id="13" name="Text 10"/>
           <p:cNvSpPr/>
           <p:nvPr/>
         </p:nvSpPr>
@@ -11241,7 +11021,7 @@
             <a:r>
               <a:rPr lang="en-US" sz="1450" b="1" dirty="0">
                 <a:solidFill>
-                  <a:srgbClr val="111318"/>
+                  <a:srgbClr val="FFFFFF"/>
                 </a:solidFill>
                 <a:latin typeface="Montserrat" pitchFamily="34" charset="0"/>
                 <a:ea typeface="Montserrat" pitchFamily="34" charset="-122"/>
@@ -11255,7 +11035,7 @@
       </p:sp>
       <p:sp>
         <p:nvSpPr>
-          <p:cNvPr id="15" name="Text 12"/>
+          <p:cNvPr id="14" name="Text 11"/>
           <p:cNvSpPr/>
           <p:nvPr/>
         </p:nvSpPr>
@@ -11283,7 +11063,7 @@
             <a:r>
               <a:rPr lang="en-US" sz="1200" dirty="0">
                 <a:solidFill>
-                  <a:srgbClr val="555B66"/>
+                  <a:srgbClr val="AFA9BE"/>
                 </a:solidFill>
                 <a:latin typeface="Montserrat" pitchFamily="34" charset="0"/>
                 <a:ea typeface="Montserrat" pitchFamily="34" charset="-122"/>
@@ -11297,7 +11077,7 @@
       </p:sp>
       <p:sp>
         <p:nvSpPr>
-          <p:cNvPr id="16" name="Shape 13"/>
+          <p:cNvPr id="15" name="Shape 12"/>
           <p:cNvSpPr/>
           <p:nvPr/>
         </p:nvSpPr>
@@ -11312,11 +11092,11 @@
             </a:avLst>
           </a:prstGeom>
           <a:solidFill>
-            <a:srgbClr val="FFFFFF"/>
+            <a:srgbClr val="17141F"/>
           </a:solidFill>
           <a:ln w="12700">
             <a:solidFill>
-              <a:srgbClr val="E6E7EC"/>
+              <a:srgbClr val="2E2A3A"/>
             </a:solidFill>
             <a:prstDash val="solid"/>
           </a:ln>
@@ -11324,7 +11104,7 @@
       </p:sp>
       <p:sp>
         <p:nvSpPr>
-          <p:cNvPr id="17" name="Text 14"/>
+          <p:cNvPr id="16" name="Text 13"/>
           <p:cNvSpPr/>
           <p:nvPr/>
         </p:nvSpPr>
@@ -11352,7 +11132,7 @@
             <a:r>
               <a:rPr lang="en-US" sz="1300" dirty="0">
                 <a:solidFill>
-                  <a:srgbClr val="111318"/>
+                  <a:srgbClr val="FFFFFF"/>
                 </a:solidFill>
                 <a:latin typeface="Montserrat" pitchFamily="34" charset="0"/>
                 <a:ea typeface="Montserrat" pitchFamily="34" charset="-122"/>
@@ -11394,7 +11174,7 @@
             <a:lvl1pPr>
               <a:defRPr sz="850">
                 <a:solidFill>
-                  <a:srgbClr val="9AA1AD"/>
+                  <a:srgbClr val="8A82A0"/>
                 </a:solidFill>
                 <a:latin typeface="Courier New"/>
                 <a:ea typeface="Courier New"/>
@@ -11439,29 +11219,7 @@
       </p:grpSpPr>
       <p:sp>
         <p:nvSpPr>
-          <p:cNvPr id="2" name="Shape 0"/>
-          <p:cNvSpPr/>
-          <p:nvPr/>
-        </p:nvSpPr>
-        <p:spPr>
-          <a:xfrm>
-            <a:off x="231343" y="194767"/>
-            <a:ext cx="11716207" cy="6473952"/>
-          </a:xfrm>
-          <a:prstGeom prst="roundRect">
-            <a:avLst>
-              <a:gd name="adj" fmla="val 3107"/>
-            </a:avLst>
-          </a:prstGeom>
-          <a:solidFill>
-            <a:srgbClr val="FFFFFF"/>
-          </a:solidFill>
-          <a:ln/>
-        </p:spPr>
-      </p:sp>
-      <p:sp>
-        <p:nvSpPr>
-          <p:cNvPr id="3" name="Text 1"/>
+          <p:cNvPr id="2" name="Text 0"/>
           <p:cNvSpPr/>
           <p:nvPr/>
         </p:nvSpPr>
@@ -11486,7 +11244,7 @@
             <a:r>
               <a:rPr lang="en-US" sz="2400" b="1" dirty="0">
                 <a:solidFill>
-                  <a:srgbClr val="111318"/>
+                  <a:srgbClr val="FFFFFF"/>
                 </a:solidFill>
                 <a:latin typeface="Montserrat" pitchFamily="34" charset="0"/>
                 <a:ea typeface="Montserrat" pitchFamily="34" charset="-122"/>
@@ -11500,7 +11258,7 @@
       </p:sp>
       <p:sp>
         <p:nvSpPr>
-          <p:cNvPr id="4" name="Text 2"/>
+          <p:cNvPr id="3" name="Text 1"/>
           <p:cNvSpPr/>
           <p:nvPr/>
         </p:nvSpPr>
@@ -11528,7 +11286,7 @@
             <a:r>
               <a:rPr lang="en-US" sz="1300" dirty="0">
                 <a:solidFill>
-                  <a:srgbClr val="555B66"/>
+                  <a:srgbClr val="AFA9BE"/>
                 </a:solidFill>
                 <a:latin typeface="Montserrat" pitchFamily="34" charset="0"/>
                 <a:ea typeface="Montserrat" pitchFamily="34" charset="-122"/>
@@ -11542,7 +11300,7 @@
       </p:sp>
       <p:sp>
         <p:nvSpPr>
-          <p:cNvPr id="5" name="Shape 3"/>
+          <p:cNvPr id="4" name="Shape 2"/>
           <p:cNvSpPr/>
           <p:nvPr/>
         </p:nvSpPr>
@@ -11557,14 +11315,14 @@
             </a:avLst>
           </a:prstGeom>
           <a:solidFill>
-            <a:srgbClr val="5A05F4"/>
+            <a:srgbClr val="C9A6FF"/>
           </a:solidFill>
           <a:ln/>
         </p:spPr>
       </p:sp>
       <p:sp>
         <p:nvSpPr>
-          <p:cNvPr id="6" name="Text 4"/>
+          <p:cNvPr id="5" name="Text 3"/>
           <p:cNvSpPr/>
           <p:nvPr/>
         </p:nvSpPr>
@@ -11589,7 +11347,7 @@
             <a:r>
               <a:rPr lang="en-US" sz="900" b="1" spc="100" kern="0" dirty="0">
                 <a:solidFill>
-                  <a:srgbClr val="FFFFFF"/>
+                  <a:srgbClr val="1C1140"/>
                 </a:solidFill>
                 <a:latin typeface="Courier New" pitchFamily="34" charset="0"/>
                 <a:ea typeface="Courier New" pitchFamily="34" charset="-122"/>
@@ -11603,7 +11361,7 @@
       </p:sp>
       <p:pic>
         <p:nvPicPr>
-          <p:cNvPr id="7" name="Image 0" descr="preencoded.png">    </p:cNvPr>
+          <p:cNvPr id="6" name="Image 0" descr="preencoded.png">    </p:cNvPr>
           <p:cNvPicPr>
             <a:picLocks noChangeAspect="1"/>
           </p:cNvPicPr>
@@ -11627,7 +11385,7 @@
       </p:pic>
       <p:sp>
         <p:nvSpPr>
-          <p:cNvPr id="8" name="Shape 5"/>
+          <p:cNvPr id="7" name="Shape 4"/>
           <p:cNvSpPr/>
           <p:nvPr/>
         </p:nvSpPr>
@@ -11642,11 +11400,11 @@
             </a:avLst>
           </a:prstGeom>
           <a:solidFill>
-            <a:srgbClr val="FFFFFF"/>
+            <a:srgbClr val="17141F"/>
           </a:solidFill>
           <a:ln w="12700">
             <a:solidFill>
-              <a:srgbClr val="E6E7EC"/>
+              <a:srgbClr val="2E2A3A"/>
             </a:solidFill>
             <a:prstDash val="solid"/>
           </a:ln>
@@ -11654,7 +11412,7 @@
       </p:sp>
       <p:sp>
         <p:nvSpPr>
-          <p:cNvPr id="9" name="Shape 6"/>
+          <p:cNvPr id="8" name="Shape 5"/>
           <p:cNvSpPr/>
           <p:nvPr/>
         </p:nvSpPr>
@@ -11674,7 +11432,7 @@
       </p:sp>
       <p:sp>
         <p:nvSpPr>
-          <p:cNvPr id="10" name="Text 7"/>
+          <p:cNvPr id="9" name="Text 6"/>
           <p:cNvSpPr/>
           <p:nvPr/>
         </p:nvSpPr>
@@ -11713,7 +11471,7 @@
       </p:sp>
       <p:sp>
         <p:nvSpPr>
-          <p:cNvPr id="11" name="Text 8"/>
+          <p:cNvPr id="10" name="Text 7"/>
           <p:cNvSpPr/>
           <p:nvPr/>
         </p:nvSpPr>
@@ -11738,7 +11496,7 @@
             <a:r>
               <a:rPr lang="en-US" sz="1450" b="1" dirty="0">
                 <a:solidFill>
-                  <a:srgbClr val="111318"/>
+                  <a:srgbClr val="FFFFFF"/>
                 </a:solidFill>
                 <a:latin typeface="Montserrat" pitchFamily="34" charset="0"/>
                 <a:ea typeface="Montserrat" pitchFamily="34" charset="-122"/>
@@ -11752,7 +11510,7 @@
       </p:sp>
       <p:sp>
         <p:nvSpPr>
-          <p:cNvPr id="12" name="Text 9"/>
+          <p:cNvPr id="11" name="Text 8"/>
           <p:cNvSpPr/>
           <p:nvPr/>
         </p:nvSpPr>
@@ -11780,7 +11538,7 @@
             <a:r>
               <a:rPr lang="en-US" sz="1200" dirty="0">
                 <a:solidFill>
-                  <a:srgbClr val="555B66"/>
+                  <a:srgbClr val="AFA9BE"/>
                 </a:solidFill>
                 <a:latin typeface="Montserrat" pitchFamily="34" charset="0"/>
                 <a:ea typeface="Montserrat" pitchFamily="34" charset="-122"/>
@@ -11794,7 +11552,7 @@
       </p:sp>
       <p:sp>
         <p:nvSpPr>
-          <p:cNvPr id="13" name="Shape 10"/>
+          <p:cNvPr id="12" name="Shape 9"/>
           <p:cNvSpPr/>
           <p:nvPr/>
         </p:nvSpPr>
@@ -11809,11 +11567,11 @@
             </a:avLst>
           </a:prstGeom>
           <a:solidFill>
-            <a:srgbClr val="FFFFFF"/>
+            <a:srgbClr val="17141F"/>
           </a:solidFill>
           <a:ln w="12700">
             <a:solidFill>
-              <a:srgbClr val="E6E7EC"/>
+              <a:srgbClr val="2E2A3A"/>
             </a:solidFill>
             <a:prstDash val="solid"/>
           </a:ln>
@@ -11821,7 +11579,7 @@
       </p:sp>
       <p:sp>
         <p:nvSpPr>
-          <p:cNvPr id="14" name="Shape 11"/>
+          <p:cNvPr id="13" name="Shape 10"/>
           <p:cNvSpPr/>
           <p:nvPr/>
         </p:nvSpPr>
@@ -11841,7 +11599,7 @@
       </p:sp>
       <p:sp>
         <p:nvSpPr>
-          <p:cNvPr id="15" name="Text 12"/>
+          <p:cNvPr id="14" name="Text 11"/>
           <p:cNvSpPr/>
           <p:nvPr/>
         </p:nvSpPr>
@@ -11880,7 +11638,7 @@
       </p:sp>
       <p:sp>
         <p:nvSpPr>
-          <p:cNvPr id="16" name="Text 13"/>
+          <p:cNvPr id="15" name="Text 12"/>
           <p:cNvSpPr/>
           <p:nvPr/>
         </p:nvSpPr>
@@ -11905,7 +11663,7 @@
             <a:r>
               <a:rPr lang="en-US" sz="1450" b="1" dirty="0">
                 <a:solidFill>
-                  <a:srgbClr val="111318"/>
+                  <a:srgbClr val="FFFFFF"/>
                 </a:solidFill>
                 <a:latin typeface="Montserrat" pitchFamily="34" charset="0"/>
                 <a:ea typeface="Montserrat" pitchFamily="34" charset="-122"/>
@@ -11919,7 +11677,7 @@
       </p:sp>
       <p:sp>
         <p:nvSpPr>
-          <p:cNvPr id="17" name="Text 14"/>
+          <p:cNvPr id="16" name="Text 13"/>
           <p:cNvSpPr/>
           <p:nvPr/>
         </p:nvSpPr>
@@ -11947,7 +11705,7 @@
             <a:r>
               <a:rPr lang="en-US" sz="1200" dirty="0">
                 <a:solidFill>
-                  <a:srgbClr val="555B66"/>
+                  <a:srgbClr val="AFA9BE"/>
                 </a:solidFill>
                 <a:latin typeface="Montserrat" pitchFamily="34" charset="0"/>
                 <a:ea typeface="Montserrat" pitchFamily="34" charset="-122"/>
@@ -11961,7 +11719,7 @@
       </p:sp>
       <p:sp>
         <p:nvSpPr>
-          <p:cNvPr id="18" name="Shape 15"/>
+          <p:cNvPr id="17" name="Shape 14"/>
           <p:cNvSpPr/>
           <p:nvPr/>
         </p:nvSpPr>
@@ -11976,11 +11734,11 @@
             </a:avLst>
           </a:prstGeom>
           <a:solidFill>
-            <a:srgbClr val="FFFFFF"/>
+            <a:srgbClr val="17141F"/>
           </a:solidFill>
           <a:ln w="12700">
             <a:solidFill>
-              <a:srgbClr val="E6E7EC"/>
+              <a:srgbClr val="2E2A3A"/>
             </a:solidFill>
             <a:prstDash val="solid"/>
           </a:ln>
@@ -11988,7 +11746,7 @@
       </p:sp>
       <p:sp>
         <p:nvSpPr>
-          <p:cNvPr id="19" name="Shape 16"/>
+          <p:cNvPr id="18" name="Shape 15"/>
           <p:cNvSpPr/>
           <p:nvPr/>
         </p:nvSpPr>
@@ -12008,7 +11766,7 @@
       </p:sp>
       <p:sp>
         <p:nvSpPr>
-          <p:cNvPr id="20" name="Text 17"/>
+          <p:cNvPr id="19" name="Text 16"/>
           <p:cNvSpPr/>
           <p:nvPr/>
         </p:nvSpPr>
@@ -12047,7 +11805,7 @@
       </p:sp>
       <p:sp>
         <p:nvSpPr>
-          <p:cNvPr id="21" name="Text 18"/>
+          <p:cNvPr id="20" name="Text 17"/>
           <p:cNvSpPr/>
           <p:nvPr/>
         </p:nvSpPr>
@@ -12072,7 +11830,7 @@
             <a:r>
               <a:rPr lang="en-US" sz="1450" b="1" dirty="0">
                 <a:solidFill>
-                  <a:srgbClr val="111318"/>
+                  <a:srgbClr val="FFFFFF"/>
                 </a:solidFill>
                 <a:latin typeface="Montserrat" pitchFamily="34" charset="0"/>
                 <a:ea typeface="Montserrat" pitchFamily="34" charset="-122"/>
@@ -12086,7 +11844,7 @@
       </p:sp>
       <p:sp>
         <p:nvSpPr>
-          <p:cNvPr id="22" name="Text 19"/>
+          <p:cNvPr id="21" name="Text 18"/>
           <p:cNvSpPr/>
           <p:nvPr/>
         </p:nvSpPr>
@@ -12114,7 +11872,7 @@
             <a:r>
               <a:rPr lang="en-US" sz="1200" dirty="0">
                 <a:solidFill>
-                  <a:srgbClr val="555B66"/>
+                  <a:srgbClr val="AFA9BE"/>
                 </a:solidFill>
                 <a:latin typeface="Montserrat" pitchFamily="34" charset="0"/>
                 <a:ea typeface="Montserrat" pitchFamily="34" charset="-122"/>
@@ -12128,7 +11886,7 @@
       </p:sp>
       <p:sp>
         <p:nvSpPr>
-          <p:cNvPr id="23" name="Shape 20"/>
+          <p:cNvPr id="22" name="Shape 19"/>
           <p:cNvSpPr/>
           <p:nvPr/>
         </p:nvSpPr>
@@ -12143,11 +11901,11 @@
             </a:avLst>
           </a:prstGeom>
           <a:solidFill>
-            <a:srgbClr val="FFFFFF"/>
+            <a:srgbClr val="17141F"/>
           </a:solidFill>
           <a:ln w="12700">
             <a:solidFill>
-              <a:srgbClr val="E6E7EC"/>
+              <a:srgbClr val="2E2A3A"/>
             </a:solidFill>
             <a:prstDash val="solid"/>
           </a:ln>
@@ -12155,7 +11913,7 @@
       </p:sp>
       <p:sp>
         <p:nvSpPr>
-          <p:cNvPr id="24" name="Shape 21"/>
+          <p:cNvPr id="23" name="Shape 20"/>
           <p:cNvSpPr/>
           <p:nvPr/>
         </p:nvSpPr>
@@ -12175,7 +11933,7 @@
       </p:sp>
       <p:sp>
         <p:nvSpPr>
-          <p:cNvPr id="25" name="Text 22"/>
+          <p:cNvPr id="24" name="Text 21"/>
           <p:cNvSpPr/>
           <p:nvPr/>
         </p:nvSpPr>
@@ -12214,7 +11972,7 @@
       </p:sp>
       <p:sp>
         <p:nvSpPr>
-          <p:cNvPr id="26" name="Text 23"/>
+          <p:cNvPr id="25" name="Text 22"/>
           <p:cNvSpPr/>
           <p:nvPr/>
         </p:nvSpPr>
@@ -12239,7 +11997,7 @@
             <a:r>
               <a:rPr lang="en-US" sz="1450" b="1" dirty="0">
                 <a:solidFill>
-                  <a:srgbClr val="111318"/>
+                  <a:srgbClr val="FFFFFF"/>
                 </a:solidFill>
                 <a:latin typeface="Montserrat" pitchFamily="34" charset="0"/>
                 <a:ea typeface="Montserrat" pitchFamily="34" charset="-122"/>
@@ -12253,7 +12011,7 @@
       </p:sp>
       <p:sp>
         <p:nvSpPr>
-          <p:cNvPr id="27" name="Text 24"/>
+          <p:cNvPr id="26" name="Text 23"/>
           <p:cNvSpPr/>
           <p:nvPr/>
         </p:nvSpPr>
@@ -12281,7 +12039,7 @@
             <a:r>
               <a:rPr lang="en-US" sz="1200" dirty="0">
                 <a:solidFill>
-                  <a:srgbClr val="555B66"/>
+                  <a:srgbClr val="AFA9BE"/>
                 </a:solidFill>
                 <a:latin typeface="Montserrat" pitchFamily="34" charset="0"/>
                 <a:ea typeface="Montserrat" pitchFamily="34" charset="-122"/>
@@ -12295,7 +12053,7 @@
       </p:sp>
       <p:sp>
         <p:nvSpPr>
-          <p:cNvPr id="28" name="Shape 25"/>
+          <p:cNvPr id="27" name="Shape 24"/>
           <p:cNvSpPr/>
           <p:nvPr/>
         </p:nvSpPr>
@@ -12310,11 +12068,11 @@
             </a:avLst>
           </a:prstGeom>
           <a:solidFill>
-            <a:srgbClr val="FFFFFF"/>
+            <a:srgbClr val="17141F"/>
           </a:solidFill>
           <a:ln w="12700">
             <a:solidFill>
-              <a:srgbClr val="E6E7EC"/>
+              <a:srgbClr val="2E2A3A"/>
             </a:solidFill>
             <a:prstDash val="solid"/>
           </a:ln>
@@ -12322,7 +12080,7 @@
       </p:sp>
       <p:sp>
         <p:nvSpPr>
-          <p:cNvPr id="29" name="Shape 26"/>
+          <p:cNvPr id="28" name="Shape 25"/>
           <p:cNvSpPr/>
           <p:nvPr/>
         </p:nvSpPr>
@@ -12342,7 +12100,7 @@
       </p:sp>
       <p:sp>
         <p:nvSpPr>
-          <p:cNvPr id="30" name="Text 27"/>
+          <p:cNvPr id="29" name="Text 26"/>
           <p:cNvSpPr/>
           <p:nvPr/>
         </p:nvSpPr>
@@ -12381,7 +12139,7 @@
       </p:sp>
       <p:sp>
         <p:nvSpPr>
-          <p:cNvPr id="31" name="Text 28"/>
+          <p:cNvPr id="30" name="Text 27"/>
           <p:cNvSpPr/>
           <p:nvPr/>
         </p:nvSpPr>
@@ -12406,7 +12164,7 @@
             <a:r>
               <a:rPr lang="en-US" sz="1450" b="1" dirty="0">
                 <a:solidFill>
-                  <a:srgbClr val="111318"/>
+                  <a:srgbClr val="FFFFFF"/>
                 </a:solidFill>
                 <a:latin typeface="Montserrat" pitchFamily="34" charset="0"/>
                 <a:ea typeface="Montserrat" pitchFamily="34" charset="-122"/>
@@ -12420,7 +12178,7 @@
       </p:sp>
       <p:sp>
         <p:nvSpPr>
-          <p:cNvPr id="32" name="Text 29"/>
+          <p:cNvPr id="31" name="Text 28"/>
           <p:cNvSpPr/>
           <p:nvPr/>
         </p:nvSpPr>
@@ -12448,7 +12206,7 @@
             <a:r>
               <a:rPr lang="en-US" sz="1200" dirty="0">
                 <a:solidFill>
-                  <a:srgbClr val="555B66"/>
+                  <a:srgbClr val="AFA9BE"/>
                 </a:solidFill>
                 <a:latin typeface="Montserrat" pitchFamily="34" charset="0"/>
                 <a:ea typeface="Montserrat" pitchFamily="34" charset="-122"/>
@@ -12490,7 +12248,7 @@
             <a:lvl1pPr>
               <a:defRPr sz="850">
                 <a:solidFill>
-                  <a:srgbClr val="9AA1AD"/>
+                  <a:srgbClr val="8A82A0"/>
                 </a:solidFill>
                 <a:latin typeface="Courier New"/>
                 <a:ea typeface="Courier New"/>
@@ -12535,29 +12293,7 @@
       </p:grpSpPr>
       <p:sp>
         <p:nvSpPr>
-          <p:cNvPr id="2" name="Shape 0"/>
-          <p:cNvSpPr/>
-          <p:nvPr/>
-        </p:nvSpPr>
-        <p:spPr>
-          <a:xfrm>
-            <a:off x="231343" y="194767"/>
-            <a:ext cx="11716207" cy="6473952"/>
-          </a:xfrm>
-          <a:prstGeom prst="roundRect">
-            <a:avLst>
-              <a:gd name="adj" fmla="val 3107"/>
-            </a:avLst>
-          </a:prstGeom>
-          <a:solidFill>
-            <a:srgbClr val="FFFFFF"/>
-          </a:solidFill>
-          <a:ln/>
-        </p:spPr>
-      </p:sp>
-      <p:sp>
-        <p:nvSpPr>
-          <p:cNvPr id="3" name="Text 1"/>
+          <p:cNvPr id="2" name="Text 0"/>
           <p:cNvSpPr/>
           <p:nvPr/>
         </p:nvSpPr>
@@ -12582,7 +12318,7 @@
             <a:r>
               <a:rPr lang="en-US" sz="2400" b="1" dirty="0">
                 <a:solidFill>
-                  <a:srgbClr val="111318"/>
+                  <a:srgbClr val="FFFFFF"/>
                 </a:solidFill>
                 <a:latin typeface="Montserrat" pitchFamily="34" charset="0"/>
                 <a:ea typeface="Montserrat" pitchFamily="34" charset="-122"/>
@@ -12596,7 +12332,7 @@
       </p:sp>
       <p:sp>
         <p:nvSpPr>
-          <p:cNvPr id="4" name="Shape 2"/>
+          <p:cNvPr id="3" name="Shape 1"/>
           <p:cNvSpPr/>
           <p:nvPr/>
         </p:nvSpPr>
@@ -12611,14 +12347,14 @@
             </a:avLst>
           </a:prstGeom>
           <a:solidFill>
-            <a:srgbClr val="9A5B12"/>
+            <a:srgbClr val="E8A857"/>
           </a:solidFill>
           <a:ln/>
         </p:spPr>
       </p:sp>
       <p:sp>
         <p:nvSpPr>
-          <p:cNvPr id="5" name="Text 3"/>
+          <p:cNvPr id="4" name="Text 2"/>
           <p:cNvSpPr/>
           <p:nvPr/>
         </p:nvSpPr>
@@ -12643,7 +12379,7 @@
             <a:r>
               <a:rPr lang="en-US" sz="900" b="1" spc="100" kern="0" dirty="0">
                 <a:solidFill>
-                  <a:srgbClr val="FFFFFF"/>
+                  <a:srgbClr val="2A2010"/>
                 </a:solidFill>
                 <a:latin typeface="Courier New" pitchFamily="34" charset="0"/>
                 <a:ea typeface="Courier New" pitchFamily="34" charset="-122"/>
@@ -12657,7 +12393,7 @@
       </p:sp>
       <p:pic>
         <p:nvPicPr>
-          <p:cNvPr id="6" name="Image 0" descr="preencoded.png">    </p:cNvPr>
+          <p:cNvPr id="5" name="Image 0" descr="preencoded.png">    </p:cNvPr>
           <p:cNvPicPr>
             <a:picLocks noChangeAspect="1"/>
           </p:cNvPicPr>
@@ -12681,7 +12417,7 @@
       </p:pic>
       <p:sp>
         <p:nvSpPr>
-          <p:cNvPr id="7" name="Shape 4"/>
+          <p:cNvPr id="6" name="Shape 3"/>
           <p:cNvSpPr/>
           <p:nvPr/>
         </p:nvSpPr>
@@ -12696,11 +12432,11 @@
             </a:avLst>
           </a:prstGeom>
           <a:solidFill>
-            <a:srgbClr val="FFFFFF"/>
+            <a:srgbClr val="17141F"/>
           </a:solidFill>
           <a:ln w="12700">
             <a:solidFill>
-              <a:srgbClr val="E6E7EC"/>
+              <a:srgbClr val="2E2A3A"/>
             </a:solidFill>
             <a:prstDash val="solid"/>
           </a:ln>
@@ -12708,7 +12444,7 @@
       </p:sp>
       <p:sp>
         <p:nvSpPr>
-          <p:cNvPr id="8" name="Shape 5"/>
+          <p:cNvPr id="7" name="Shape 4"/>
           <p:cNvSpPr/>
           <p:nvPr/>
         </p:nvSpPr>
@@ -12723,11 +12459,11 @@
             </a:avLst>
           </a:prstGeom>
           <a:solidFill>
-            <a:srgbClr val="EFEAFE"/>
+            <a:srgbClr val="1C1140"/>
           </a:solidFill>
           <a:ln w="12700">
             <a:solidFill>
-              <a:srgbClr val="5A05F4"/>
+              <a:srgbClr val="C9A6FF"/>
             </a:solidFill>
             <a:prstDash val="solid"/>
           </a:ln>
@@ -12735,7 +12471,7 @@
       </p:sp>
       <p:sp>
         <p:nvSpPr>
-          <p:cNvPr id="9" name="Shape 6"/>
+          <p:cNvPr id="8" name="Shape 5"/>
           <p:cNvSpPr/>
           <p:nvPr/>
         </p:nvSpPr>
@@ -12748,14 +12484,14 @@
             <a:avLst/>
           </a:prstGeom>
           <a:solidFill>
-            <a:srgbClr val="5A05F4"/>
+            <a:srgbClr val="C9A6FF"/>
           </a:solidFill>
           <a:ln/>
         </p:spPr>
       </p:sp>
       <p:sp>
         <p:nvSpPr>
-          <p:cNvPr id="10" name="Shape 7"/>
+          <p:cNvPr id="9" name="Shape 6"/>
           <p:cNvSpPr/>
           <p:nvPr/>
         </p:nvSpPr>
@@ -12768,14 +12504,14 @@
             <a:avLst/>
           </a:prstGeom>
           <a:solidFill>
-            <a:srgbClr val="5A05F4"/>
+            <a:srgbClr val="C9A6FF"/>
           </a:solidFill>
           <a:ln/>
         </p:spPr>
       </p:sp>
       <p:sp>
         <p:nvSpPr>
-          <p:cNvPr id="11" name="Text 8"/>
+          <p:cNvPr id="10" name="Text 7"/>
           <p:cNvSpPr/>
           <p:nvPr/>
         </p:nvSpPr>
@@ -12800,7 +12536,7 @@
             <a:r>
               <a:rPr lang="en-US" sz="1250" dirty="0">
                 <a:solidFill>
-                  <a:srgbClr val="111318"/>
+                  <a:srgbClr val="FFFFFF"/>
                 </a:solidFill>
                 <a:latin typeface="Montserrat" pitchFamily="34" charset="0"/>
                 <a:ea typeface="Montserrat" pitchFamily="34" charset="-122"/>
@@ -12814,7 +12550,7 @@
       </p:sp>
       <p:sp>
         <p:nvSpPr>
-          <p:cNvPr id="12" name="Shape 9"/>
+          <p:cNvPr id="11" name="Shape 8"/>
           <p:cNvSpPr/>
           <p:nvPr/>
         </p:nvSpPr>
@@ -12829,11 +12565,11 @@
             </a:avLst>
           </a:prstGeom>
           <a:solidFill>
-            <a:srgbClr val="EFEAFE"/>
+            <a:srgbClr val="1C1140"/>
           </a:solidFill>
           <a:ln w="12700">
             <a:solidFill>
-              <a:srgbClr val="5A05F4"/>
+              <a:srgbClr val="C9A6FF"/>
             </a:solidFill>
             <a:prstDash val="solid"/>
           </a:ln>
@@ -12841,7 +12577,7 @@
       </p:sp>
       <p:sp>
         <p:nvSpPr>
-          <p:cNvPr id="13" name="Shape 10"/>
+          <p:cNvPr id="12" name="Shape 9"/>
           <p:cNvSpPr/>
           <p:nvPr/>
         </p:nvSpPr>
@@ -12854,14 +12590,14 @@
             <a:avLst/>
           </a:prstGeom>
           <a:solidFill>
-            <a:srgbClr val="5A05F4"/>
+            <a:srgbClr val="C9A6FF"/>
           </a:solidFill>
           <a:ln/>
         </p:spPr>
       </p:sp>
       <p:sp>
         <p:nvSpPr>
-          <p:cNvPr id="14" name="Shape 11"/>
+          <p:cNvPr id="13" name="Shape 10"/>
           <p:cNvSpPr/>
           <p:nvPr/>
         </p:nvSpPr>
@@ -12874,14 +12610,14 @@
             <a:avLst/>
           </a:prstGeom>
           <a:solidFill>
-            <a:srgbClr val="5A05F4"/>
+            <a:srgbClr val="C9A6FF"/>
           </a:solidFill>
           <a:ln/>
         </p:spPr>
       </p:sp>
       <p:sp>
         <p:nvSpPr>
-          <p:cNvPr id="15" name="Text 12"/>
+          <p:cNvPr id="14" name="Text 11"/>
           <p:cNvSpPr/>
           <p:nvPr/>
         </p:nvSpPr>
@@ -12906,7 +12642,7 @@
             <a:r>
               <a:rPr lang="en-US" sz="1250" dirty="0">
                 <a:solidFill>
-                  <a:srgbClr val="111318"/>
+                  <a:srgbClr val="FFFFFF"/>
                 </a:solidFill>
                 <a:latin typeface="Montserrat" pitchFamily="34" charset="0"/>
                 <a:ea typeface="Montserrat" pitchFamily="34" charset="-122"/>
@@ -12920,7 +12656,7 @@
       </p:sp>
       <p:sp>
         <p:nvSpPr>
-          <p:cNvPr id="16" name="Shape 13"/>
+          <p:cNvPr id="15" name="Shape 12"/>
           <p:cNvSpPr/>
           <p:nvPr/>
         </p:nvSpPr>
@@ -12935,11 +12671,11 @@
             </a:avLst>
           </a:prstGeom>
           <a:solidFill>
-            <a:srgbClr val="EFEAFE"/>
+            <a:srgbClr val="1C1140"/>
           </a:solidFill>
           <a:ln w="12700">
             <a:solidFill>
-              <a:srgbClr val="5A05F4"/>
+              <a:srgbClr val="C9A6FF"/>
             </a:solidFill>
             <a:prstDash val="solid"/>
           </a:ln>
@@ -12947,7 +12683,7 @@
       </p:sp>
       <p:sp>
         <p:nvSpPr>
-          <p:cNvPr id="17" name="Shape 14"/>
+          <p:cNvPr id="16" name="Shape 13"/>
           <p:cNvSpPr/>
           <p:nvPr/>
         </p:nvSpPr>
@@ -12960,14 +12696,14 @@
             <a:avLst/>
           </a:prstGeom>
           <a:solidFill>
-            <a:srgbClr val="5A05F4"/>
+            <a:srgbClr val="C9A6FF"/>
           </a:solidFill>
           <a:ln/>
         </p:spPr>
       </p:sp>
       <p:sp>
         <p:nvSpPr>
-          <p:cNvPr id="18" name="Shape 15"/>
+          <p:cNvPr id="17" name="Shape 14"/>
           <p:cNvSpPr/>
           <p:nvPr/>
         </p:nvSpPr>
@@ -12980,14 +12716,14 @@
             <a:avLst/>
           </a:prstGeom>
           <a:solidFill>
-            <a:srgbClr val="5A05F4"/>
+            <a:srgbClr val="C9A6FF"/>
           </a:solidFill>
           <a:ln/>
         </p:spPr>
       </p:sp>
       <p:sp>
         <p:nvSpPr>
-          <p:cNvPr id="19" name="Text 16"/>
+          <p:cNvPr id="18" name="Text 15"/>
           <p:cNvSpPr/>
           <p:nvPr/>
         </p:nvSpPr>
@@ -13012,7 +12748,7 @@
             <a:r>
               <a:rPr lang="en-US" sz="1250" dirty="0">
                 <a:solidFill>
-                  <a:srgbClr val="111318"/>
+                  <a:srgbClr val="FFFFFF"/>
                 </a:solidFill>
                 <a:latin typeface="Montserrat" pitchFamily="34" charset="0"/>
                 <a:ea typeface="Montserrat" pitchFamily="34" charset="-122"/>
@@ -13026,7 +12762,7 @@
       </p:sp>
       <p:sp>
         <p:nvSpPr>
-          <p:cNvPr id="20" name="Shape 17"/>
+          <p:cNvPr id="19" name="Shape 16"/>
           <p:cNvSpPr/>
           <p:nvPr/>
         </p:nvSpPr>
@@ -13041,11 +12777,11 @@
             </a:avLst>
           </a:prstGeom>
           <a:solidFill>
-            <a:srgbClr val="EFEAFE"/>
+            <a:srgbClr val="1C1140"/>
           </a:solidFill>
           <a:ln w="12700">
             <a:solidFill>
-              <a:srgbClr val="5A05F4"/>
+              <a:srgbClr val="C9A6FF"/>
             </a:solidFill>
             <a:prstDash val="solid"/>
           </a:ln>
@@ -13053,7 +12789,7 @@
       </p:sp>
       <p:sp>
         <p:nvSpPr>
-          <p:cNvPr id="21" name="Shape 18"/>
+          <p:cNvPr id="20" name="Shape 17"/>
           <p:cNvSpPr/>
           <p:nvPr/>
         </p:nvSpPr>
@@ -13066,14 +12802,14 @@
             <a:avLst/>
           </a:prstGeom>
           <a:solidFill>
-            <a:srgbClr val="5A05F4"/>
+            <a:srgbClr val="C9A6FF"/>
           </a:solidFill>
           <a:ln/>
         </p:spPr>
       </p:sp>
       <p:sp>
         <p:nvSpPr>
-          <p:cNvPr id="22" name="Shape 19"/>
+          <p:cNvPr id="21" name="Shape 18"/>
           <p:cNvSpPr/>
           <p:nvPr/>
         </p:nvSpPr>
@@ -13086,14 +12822,14 @@
             <a:avLst/>
           </a:prstGeom>
           <a:solidFill>
-            <a:srgbClr val="5A05F4"/>
+            <a:srgbClr val="C9A6FF"/>
           </a:solidFill>
           <a:ln/>
         </p:spPr>
       </p:sp>
       <p:sp>
         <p:nvSpPr>
-          <p:cNvPr id="23" name="Text 20"/>
+          <p:cNvPr id="22" name="Text 19"/>
           <p:cNvSpPr/>
           <p:nvPr/>
         </p:nvSpPr>
@@ -13118,7 +12854,7 @@
             <a:r>
               <a:rPr lang="en-US" sz="1250" dirty="0">
                 <a:solidFill>
-                  <a:srgbClr val="111318"/>
+                  <a:srgbClr val="FFFFFF"/>
                 </a:solidFill>
                 <a:latin typeface="Montserrat" pitchFamily="34" charset="0"/>
                 <a:ea typeface="Montserrat" pitchFamily="34" charset="-122"/>
@@ -13132,7 +12868,7 @@
       </p:sp>
       <p:sp>
         <p:nvSpPr>
-          <p:cNvPr id="24" name="Text 21"/>
+          <p:cNvPr id="23" name="Text 20"/>
           <p:cNvSpPr/>
           <p:nvPr/>
         </p:nvSpPr>
@@ -13157,7 +12893,7 @@
             <a:r>
               <a:rPr lang="en-US" sz="1200" i="1" dirty="0">
                 <a:solidFill>
-                  <a:srgbClr val="9AA1AD"/>
+                  <a:srgbClr val="8A82A0"/>
                 </a:solidFill>
                 <a:latin typeface="Montserrat" pitchFamily="34" charset="0"/>
                 <a:ea typeface="Montserrat" pitchFamily="34" charset="-122"/>
@@ -13199,7 +12935,7 @@
             <a:lvl1pPr>
               <a:defRPr sz="850">
                 <a:solidFill>
-                  <a:srgbClr val="9AA1AD"/>
+                  <a:srgbClr val="8A82A0"/>
                 </a:solidFill>
                 <a:latin typeface="Courier New"/>
                 <a:ea typeface="Courier New"/>
@@ -13244,29 +12980,7 @@
       </p:grpSpPr>
       <p:sp>
         <p:nvSpPr>
-          <p:cNvPr id="2" name="Shape 0"/>
-          <p:cNvSpPr/>
-          <p:nvPr/>
-        </p:nvSpPr>
-        <p:spPr>
-          <a:xfrm>
-            <a:off x="231343" y="194767"/>
-            <a:ext cx="11716207" cy="6473952"/>
-          </a:xfrm>
-          <a:prstGeom prst="roundRect">
-            <a:avLst>
-              <a:gd name="adj" fmla="val 3107"/>
-            </a:avLst>
-          </a:prstGeom>
-          <a:solidFill>
-            <a:srgbClr val="FFFFFF"/>
-          </a:solidFill>
-          <a:ln/>
-        </p:spPr>
-      </p:sp>
-      <p:sp>
-        <p:nvSpPr>
-          <p:cNvPr id="3" name="Text 1"/>
+          <p:cNvPr id="2" name="Text 0"/>
           <p:cNvSpPr/>
           <p:nvPr/>
         </p:nvSpPr>
@@ -13291,7 +13005,7 @@
             <a:r>
               <a:rPr lang="en-US" sz="2400" b="1" dirty="0">
                 <a:solidFill>
-                  <a:srgbClr val="111318"/>
+                  <a:srgbClr val="FFFFFF"/>
                 </a:solidFill>
                 <a:latin typeface="Montserrat" pitchFamily="34" charset="0"/>
                 <a:ea typeface="Montserrat" pitchFamily="34" charset="-122"/>
@@ -13305,7 +13019,7 @@
       </p:sp>
       <p:sp>
         <p:nvSpPr>
-          <p:cNvPr id="4" name="Shape 2"/>
+          <p:cNvPr id="3" name="Shape 1"/>
           <p:cNvSpPr/>
           <p:nvPr/>
         </p:nvSpPr>
@@ -13320,14 +13034,14 @@
             </a:avLst>
           </a:prstGeom>
           <a:solidFill>
-            <a:srgbClr val="9A5B12"/>
+            <a:srgbClr val="E8A857"/>
           </a:solidFill>
           <a:ln/>
         </p:spPr>
       </p:sp>
       <p:sp>
         <p:nvSpPr>
-          <p:cNvPr id="5" name="Text 3"/>
+          <p:cNvPr id="4" name="Text 2"/>
           <p:cNvSpPr/>
           <p:nvPr/>
         </p:nvSpPr>
@@ -13352,7 +13066,7 @@
             <a:r>
               <a:rPr lang="en-US" sz="900" b="1" spc="100" kern="0" dirty="0">
                 <a:solidFill>
-                  <a:srgbClr val="FFFFFF"/>
+                  <a:srgbClr val="2A2010"/>
                 </a:solidFill>
                 <a:latin typeface="Courier New" pitchFamily="34" charset="0"/>
                 <a:ea typeface="Courier New" pitchFamily="34" charset="-122"/>
@@ -13366,7 +13080,7 @@
       </p:sp>
       <p:pic>
         <p:nvPicPr>
-          <p:cNvPr id="6" name="Image 0" descr="preencoded.png">    </p:cNvPr>
+          <p:cNvPr id="5" name="Image 0" descr="preencoded.png">    </p:cNvPr>
           <p:cNvPicPr>
             <a:picLocks noChangeAspect="1"/>
           </p:cNvPicPr>
@@ -13390,7 +13104,7 @@
       </p:pic>
       <p:sp>
         <p:nvSpPr>
-          <p:cNvPr id="7" name="Shape 4"/>
+          <p:cNvPr id="6" name="Shape 3"/>
           <p:cNvSpPr/>
           <p:nvPr/>
         </p:nvSpPr>
@@ -13405,11 +13119,11 @@
             </a:avLst>
           </a:prstGeom>
           <a:solidFill>
-            <a:srgbClr val="FFFFFF"/>
+            <a:srgbClr val="17141F"/>
           </a:solidFill>
           <a:ln w="12700">
             <a:solidFill>
-              <a:srgbClr val="E6E7EC"/>
+              <a:srgbClr val="2E2A3A"/>
             </a:solidFill>
             <a:prstDash val="solid"/>
           </a:ln>
@@ -13417,7 +13131,7 @@
       </p:sp>
       <p:sp>
         <p:nvSpPr>
-          <p:cNvPr id="8" name="Shape 5"/>
+          <p:cNvPr id="7" name="Shape 4"/>
           <p:cNvSpPr/>
           <p:nvPr/>
         </p:nvSpPr>
@@ -13430,14 +13144,14 @@
             <a:avLst/>
           </a:prstGeom>
           <a:solidFill>
-            <a:srgbClr val="FBE9E9"/>
+            <a:srgbClr val="2E1418"/>
           </a:solidFill>
           <a:ln/>
         </p:spPr>
       </p:sp>
       <p:sp>
         <p:nvSpPr>
-          <p:cNvPr id="9" name="Shape 6"/>
+          <p:cNvPr id="8" name="Shape 5"/>
           <p:cNvSpPr/>
           <p:nvPr/>
         </p:nvSpPr>
@@ -13450,14 +13164,14 @@
             <a:avLst/>
           </a:prstGeom>
           <a:solidFill>
-            <a:srgbClr val="C62A2A"/>
+            <a:srgbClr val="FF7B7B"/>
           </a:solidFill>
           <a:ln/>
         </p:spPr>
       </p:sp>
       <p:sp>
         <p:nvSpPr>
-          <p:cNvPr id="10" name="Shape 7"/>
+          <p:cNvPr id="9" name="Shape 6"/>
           <p:cNvSpPr/>
           <p:nvPr/>
         </p:nvSpPr>
@@ -13470,14 +13184,14 @@
             <a:avLst/>
           </a:prstGeom>
           <a:solidFill>
-            <a:srgbClr val="C62A2A"/>
+            <a:srgbClr val="FF7B7B"/>
           </a:solidFill>
           <a:ln/>
         </p:spPr>
       </p:sp>
       <p:sp>
         <p:nvSpPr>
-          <p:cNvPr id="11" name="Text 8"/>
+          <p:cNvPr id="10" name="Text 7"/>
           <p:cNvSpPr/>
           <p:nvPr/>
         </p:nvSpPr>
@@ -13502,7 +13216,7 @@
             <a:r>
               <a:rPr lang="en-US" sz="1350" b="1" dirty="0">
                 <a:solidFill>
-                  <a:srgbClr val="111318"/>
+                  <a:srgbClr val="FFFFFF"/>
                 </a:solidFill>
                 <a:latin typeface="Montserrat" pitchFamily="34" charset="0"/>
                 <a:ea typeface="Montserrat" pitchFamily="34" charset="-122"/>
@@ -13516,7 +13230,7 @@
             <a:r>
               <a:rPr lang="en-US" sz="1200" dirty="0">
                 <a:solidFill>
-                  <a:srgbClr val="555B66"/>
+                  <a:srgbClr val="AFA9BE"/>
                 </a:solidFill>
                 <a:latin typeface="Montserrat" pitchFamily="34" charset="0"/>
                 <a:ea typeface="Montserrat" pitchFamily="34" charset="-122"/>
@@ -13530,7 +13244,7 @@
       </p:sp>
       <p:sp>
         <p:nvSpPr>
-          <p:cNvPr id="12" name="Shape 9"/>
+          <p:cNvPr id="11" name="Shape 8"/>
           <p:cNvSpPr/>
           <p:nvPr/>
         </p:nvSpPr>
@@ -13545,11 +13259,11 @@
             </a:avLst>
           </a:prstGeom>
           <a:solidFill>
-            <a:srgbClr val="FFFFFF"/>
+            <a:srgbClr val="17141F"/>
           </a:solidFill>
           <a:ln w="12700">
             <a:solidFill>
-              <a:srgbClr val="E6E7EC"/>
+              <a:srgbClr val="2E2A3A"/>
             </a:solidFill>
             <a:prstDash val="solid"/>
           </a:ln>
@@ -13557,7 +13271,7 @@
       </p:sp>
       <p:sp>
         <p:nvSpPr>
-          <p:cNvPr id="13" name="Shape 10"/>
+          <p:cNvPr id="12" name="Shape 9"/>
           <p:cNvSpPr/>
           <p:nvPr/>
         </p:nvSpPr>
@@ -13570,14 +13284,14 @@
             <a:avLst/>
           </a:prstGeom>
           <a:solidFill>
-            <a:srgbClr val="FBE9E9"/>
+            <a:srgbClr val="2E1418"/>
           </a:solidFill>
           <a:ln/>
         </p:spPr>
       </p:sp>
       <p:sp>
         <p:nvSpPr>
-          <p:cNvPr id="14" name="Shape 11"/>
+          <p:cNvPr id="13" name="Shape 10"/>
           <p:cNvSpPr/>
           <p:nvPr/>
         </p:nvSpPr>
@@ -13590,14 +13304,14 @@
             <a:avLst/>
           </a:prstGeom>
           <a:solidFill>
-            <a:srgbClr val="C62A2A"/>
+            <a:srgbClr val="FF7B7B"/>
           </a:solidFill>
           <a:ln/>
         </p:spPr>
       </p:sp>
       <p:sp>
         <p:nvSpPr>
-          <p:cNvPr id="15" name="Shape 12"/>
+          <p:cNvPr id="14" name="Shape 11"/>
           <p:cNvSpPr/>
           <p:nvPr/>
         </p:nvSpPr>
@@ -13610,14 +13324,14 @@
             <a:avLst/>
           </a:prstGeom>
           <a:solidFill>
-            <a:srgbClr val="C62A2A"/>
+            <a:srgbClr val="FF7B7B"/>
           </a:solidFill>
           <a:ln/>
         </p:spPr>
       </p:sp>
       <p:sp>
         <p:nvSpPr>
-          <p:cNvPr id="16" name="Text 13"/>
+          <p:cNvPr id="15" name="Text 12"/>
           <p:cNvSpPr/>
           <p:nvPr/>
         </p:nvSpPr>
@@ -13642,7 +13356,7 @@
             <a:r>
               <a:rPr lang="en-US" sz="1350" b="1" dirty="0">
                 <a:solidFill>
-                  <a:srgbClr val="111318"/>
+                  <a:srgbClr val="FFFFFF"/>
                 </a:solidFill>
                 <a:latin typeface="Montserrat" pitchFamily="34" charset="0"/>
                 <a:ea typeface="Montserrat" pitchFamily="34" charset="-122"/>
@@ -13656,7 +13370,7 @@
             <a:r>
               <a:rPr lang="en-US" sz="1200" dirty="0">
                 <a:solidFill>
-                  <a:srgbClr val="555B66"/>
+                  <a:srgbClr val="AFA9BE"/>
                 </a:solidFill>
                 <a:latin typeface="Montserrat" pitchFamily="34" charset="0"/>
                 <a:ea typeface="Montserrat" pitchFamily="34" charset="-122"/>
@@ -13670,7 +13384,7 @@
       </p:sp>
       <p:sp>
         <p:nvSpPr>
-          <p:cNvPr id="17" name="Shape 14"/>
+          <p:cNvPr id="16" name="Shape 13"/>
           <p:cNvSpPr/>
           <p:nvPr/>
         </p:nvSpPr>
@@ -13685,11 +13399,11 @@
             </a:avLst>
           </a:prstGeom>
           <a:solidFill>
-            <a:srgbClr val="FFFFFF"/>
+            <a:srgbClr val="17141F"/>
           </a:solidFill>
           <a:ln w="12700">
             <a:solidFill>
-              <a:srgbClr val="E6E7EC"/>
+              <a:srgbClr val="2E2A3A"/>
             </a:solidFill>
             <a:prstDash val="solid"/>
           </a:ln>
@@ -13697,7 +13411,7 @@
       </p:sp>
       <p:sp>
         <p:nvSpPr>
-          <p:cNvPr id="18" name="Shape 15"/>
+          <p:cNvPr id="17" name="Shape 14"/>
           <p:cNvSpPr/>
           <p:nvPr/>
         </p:nvSpPr>
@@ -13710,14 +13424,14 @@
             <a:avLst/>
           </a:prstGeom>
           <a:solidFill>
-            <a:srgbClr val="FBE9E9"/>
+            <a:srgbClr val="2E1418"/>
           </a:solidFill>
           <a:ln/>
         </p:spPr>
       </p:sp>
       <p:sp>
         <p:nvSpPr>
-          <p:cNvPr id="19" name="Shape 16"/>
+          <p:cNvPr id="18" name="Shape 15"/>
           <p:cNvSpPr/>
           <p:nvPr/>
         </p:nvSpPr>
@@ -13730,14 +13444,14 @@
             <a:avLst/>
           </a:prstGeom>
           <a:solidFill>
-            <a:srgbClr val="C62A2A"/>
+            <a:srgbClr val="FF7B7B"/>
           </a:solidFill>
           <a:ln/>
         </p:spPr>
       </p:sp>
       <p:sp>
         <p:nvSpPr>
-          <p:cNvPr id="20" name="Shape 17"/>
+          <p:cNvPr id="19" name="Shape 16"/>
           <p:cNvSpPr/>
           <p:nvPr/>
         </p:nvSpPr>
@@ -13750,14 +13464,14 @@
             <a:avLst/>
           </a:prstGeom>
           <a:solidFill>
-            <a:srgbClr val="C62A2A"/>
+            <a:srgbClr val="FF7B7B"/>
           </a:solidFill>
           <a:ln/>
         </p:spPr>
       </p:sp>
       <p:sp>
         <p:nvSpPr>
-          <p:cNvPr id="21" name="Text 18"/>
+          <p:cNvPr id="20" name="Text 17"/>
           <p:cNvSpPr/>
           <p:nvPr/>
         </p:nvSpPr>
@@ -13782,7 +13496,7 @@
             <a:r>
               <a:rPr lang="en-US" sz="1350" b="1" dirty="0">
                 <a:solidFill>
-                  <a:srgbClr val="111318"/>
+                  <a:srgbClr val="FFFFFF"/>
                 </a:solidFill>
                 <a:latin typeface="Montserrat" pitchFamily="34" charset="0"/>
                 <a:ea typeface="Montserrat" pitchFamily="34" charset="-122"/>
@@ -13796,7 +13510,7 @@
             <a:r>
               <a:rPr lang="en-US" sz="1200" dirty="0">
                 <a:solidFill>
-                  <a:srgbClr val="555B66"/>
+                  <a:srgbClr val="AFA9BE"/>
                 </a:solidFill>
                 <a:latin typeface="Montserrat" pitchFamily="34" charset="0"/>
                 <a:ea typeface="Montserrat" pitchFamily="34" charset="-122"/>
@@ -13810,7 +13524,7 @@
       </p:sp>
       <p:sp>
         <p:nvSpPr>
-          <p:cNvPr id="22" name="Shape 19"/>
+          <p:cNvPr id="21" name="Shape 18"/>
           <p:cNvSpPr/>
           <p:nvPr/>
         </p:nvSpPr>
@@ -13825,11 +13539,11 @@
             </a:avLst>
           </a:prstGeom>
           <a:solidFill>
-            <a:srgbClr val="FFFFFF"/>
+            <a:srgbClr val="17141F"/>
           </a:solidFill>
           <a:ln w="12700">
             <a:solidFill>
-              <a:srgbClr val="E6E7EC"/>
+              <a:srgbClr val="2E2A3A"/>
             </a:solidFill>
             <a:prstDash val="solid"/>
           </a:ln>
@@ -13837,7 +13551,7 @@
       </p:sp>
       <p:sp>
         <p:nvSpPr>
-          <p:cNvPr id="23" name="Shape 20"/>
+          <p:cNvPr id="22" name="Shape 19"/>
           <p:cNvSpPr/>
           <p:nvPr/>
         </p:nvSpPr>
@@ -13850,14 +13564,14 @@
             <a:avLst/>
           </a:prstGeom>
           <a:solidFill>
-            <a:srgbClr val="FBE9E9"/>
+            <a:srgbClr val="2E1418"/>
           </a:solidFill>
           <a:ln/>
         </p:spPr>
       </p:sp>
       <p:sp>
         <p:nvSpPr>
-          <p:cNvPr id="24" name="Shape 21"/>
+          <p:cNvPr id="23" name="Shape 20"/>
           <p:cNvSpPr/>
           <p:nvPr/>
         </p:nvSpPr>
@@ -13870,14 +13584,14 @@
             <a:avLst/>
           </a:prstGeom>
           <a:solidFill>
-            <a:srgbClr val="C62A2A"/>
+            <a:srgbClr val="FF7B7B"/>
           </a:solidFill>
           <a:ln/>
         </p:spPr>
       </p:sp>
       <p:sp>
         <p:nvSpPr>
-          <p:cNvPr id="25" name="Shape 22"/>
+          <p:cNvPr id="24" name="Shape 21"/>
           <p:cNvSpPr/>
           <p:nvPr/>
         </p:nvSpPr>
@@ -13890,14 +13604,14 @@
             <a:avLst/>
           </a:prstGeom>
           <a:solidFill>
-            <a:srgbClr val="C62A2A"/>
+            <a:srgbClr val="FF7B7B"/>
           </a:solidFill>
           <a:ln/>
         </p:spPr>
       </p:sp>
       <p:sp>
         <p:nvSpPr>
-          <p:cNvPr id="26" name="Text 23"/>
+          <p:cNvPr id="25" name="Text 22"/>
           <p:cNvSpPr/>
           <p:nvPr/>
         </p:nvSpPr>
@@ -13922,7 +13636,7 @@
             <a:r>
               <a:rPr lang="en-US" sz="1350" b="1" dirty="0">
                 <a:solidFill>
-                  <a:srgbClr val="111318"/>
+                  <a:srgbClr val="FFFFFF"/>
                 </a:solidFill>
                 <a:latin typeface="Montserrat" pitchFamily="34" charset="0"/>
                 <a:ea typeface="Montserrat" pitchFamily="34" charset="-122"/>
@@ -13936,7 +13650,7 @@
             <a:r>
               <a:rPr lang="en-US" sz="1200" dirty="0">
                 <a:solidFill>
-                  <a:srgbClr val="555B66"/>
+                  <a:srgbClr val="AFA9BE"/>
                 </a:solidFill>
                 <a:latin typeface="Montserrat" pitchFamily="34" charset="0"/>
                 <a:ea typeface="Montserrat" pitchFamily="34" charset="-122"/>
@@ -13978,7 +13692,7 @@
             <a:lvl1pPr>
               <a:defRPr sz="850">
                 <a:solidFill>
-                  <a:srgbClr val="9AA1AD"/>
+                  <a:srgbClr val="8A82A0"/>
                 </a:solidFill>
                 <a:latin typeface="Courier New"/>
                 <a:ea typeface="Courier New"/>
@@ -14023,29 +13737,7 @@
       </p:grpSpPr>
       <p:sp>
         <p:nvSpPr>
-          <p:cNvPr id="2" name="Shape 0"/>
-          <p:cNvSpPr/>
-          <p:nvPr/>
-        </p:nvSpPr>
-        <p:spPr>
-          <a:xfrm>
-            <a:off x="231343" y="194767"/>
-            <a:ext cx="11716207" cy="6473952"/>
-          </a:xfrm>
-          <a:prstGeom prst="roundRect">
-            <a:avLst>
-              <a:gd name="adj" fmla="val 3107"/>
-            </a:avLst>
-          </a:prstGeom>
-          <a:solidFill>
-            <a:srgbClr val="FFFFFF"/>
-          </a:solidFill>
-          <a:ln/>
-        </p:spPr>
-      </p:sp>
-      <p:sp>
-        <p:nvSpPr>
-          <p:cNvPr id="3" name="Text 1"/>
+          <p:cNvPr id="2" name="Text 0"/>
           <p:cNvSpPr/>
           <p:nvPr/>
         </p:nvSpPr>
@@ -14070,7 +13762,7 @@
             <a:r>
               <a:rPr lang="en-US" sz="2400" b="1" dirty="0">
                 <a:solidFill>
-                  <a:srgbClr val="111318"/>
+                  <a:srgbClr val="FFFFFF"/>
                 </a:solidFill>
                 <a:latin typeface="Montserrat" pitchFamily="34" charset="0"/>
                 <a:ea typeface="Montserrat" pitchFamily="34" charset="-122"/>
@@ -14084,7 +13776,7 @@
       </p:sp>
       <p:sp>
         <p:nvSpPr>
-          <p:cNvPr id="4" name="Shape 2"/>
+          <p:cNvPr id="3" name="Shape 1"/>
           <p:cNvSpPr/>
           <p:nvPr/>
         </p:nvSpPr>
@@ -14099,14 +13791,14 @@
             </a:avLst>
           </a:prstGeom>
           <a:solidFill>
-            <a:srgbClr val="1B8A5A"/>
+            <a:srgbClr val="5FD6A0"/>
           </a:solidFill>
           <a:ln/>
         </p:spPr>
       </p:sp>
       <p:sp>
         <p:nvSpPr>
-          <p:cNvPr id="5" name="Text 3"/>
+          <p:cNvPr id="4" name="Text 2"/>
           <p:cNvSpPr/>
           <p:nvPr/>
         </p:nvSpPr>
@@ -14131,7 +13823,7 @@
             <a:r>
               <a:rPr lang="en-US" sz="900" b="1" spc="100" kern="0" dirty="0">
                 <a:solidFill>
-                  <a:srgbClr val="FFFFFF"/>
+                  <a:srgbClr val="102A20"/>
                 </a:solidFill>
                 <a:latin typeface="Courier New" pitchFamily="34" charset="0"/>
                 <a:ea typeface="Courier New" pitchFamily="34" charset="-122"/>
@@ -14145,7 +13837,7 @@
       </p:sp>
       <p:pic>
         <p:nvPicPr>
-          <p:cNvPr id="6" name="Image 0" descr="preencoded.png">    </p:cNvPr>
+          <p:cNvPr id="5" name="Image 0" descr="preencoded.png">    </p:cNvPr>
           <p:cNvPicPr>
             <a:picLocks noChangeAspect="1"/>
           </p:cNvPicPr>
@@ -14169,7 +13861,7 @@
       </p:pic>
       <p:sp>
         <p:nvSpPr>
-          <p:cNvPr id="7" name="Shape 4"/>
+          <p:cNvPr id="6" name="Shape 3"/>
           <p:cNvSpPr/>
           <p:nvPr/>
         </p:nvSpPr>
@@ -14184,11 +13876,11 @@
             </a:avLst>
           </a:prstGeom>
           <a:solidFill>
-            <a:srgbClr val="FFFFFF"/>
+            <a:srgbClr val="17141F"/>
           </a:solidFill>
           <a:ln w="19050">
             <a:solidFill>
-              <a:srgbClr val="5A05F4"/>
+              <a:srgbClr val="C9A6FF"/>
             </a:solidFill>
             <a:prstDash val="solid"/>
           </a:ln>
@@ -14196,7 +13888,7 @@
       </p:sp>
       <p:sp>
         <p:nvSpPr>
-          <p:cNvPr id="8" name="Text 5"/>
+          <p:cNvPr id="7" name="Text 4"/>
           <p:cNvSpPr/>
           <p:nvPr/>
         </p:nvSpPr>
@@ -14221,7 +13913,7 @@
             <a:r>
               <a:rPr lang="en-US" sz="1550" b="1" dirty="0">
                 <a:solidFill>
-                  <a:srgbClr val="5A05F4"/>
+                  <a:srgbClr val="C9A6FF"/>
                 </a:solidFill>
                 <a:latin typeface="Montserrat" pitchFamily="34" charset="0"/>
                 <a:ea typeface="Montserrat" pitchFamily="34" charset="-122"/>
@@ -14235,7 +13927,7 @@
       </p:sp>
       <p:sp>
         <p:nvSpPr>
-          <p:cNvPr id="9" name="Text 6"/>
+          <p:cNvPr id="8" name="Text 5"/>
           <p:cNvSpPr/>
           <p:nvPr/>
         </p:nvSpPr>
@@ -14260,7 +13952,7 @@
             <a:r>
               <a:rPr lang="en-US" sz="1250" dirty="0">
                 <a:solidFill>
-                  <a:srgbClr val="111318"/>
+                  <a:srgbClr val="FFFFFF"/>
                 </a:solidFill>
                 <a:latin typeface="Montserrat" pitchFamily="34" charset="0"/>
                 <a:ea typeface="Montserrat" pitchFamily="34" charset="-122"/>
@@ -14274,7 +13966,7 @@
       </p:sp>
       <p:sp>
         <p:nvSpPr>
-          <p:cNvPr id="10" name="Text 7"/>
+          <p:cNvPr id="9" name="Text 6"/>
           <p:cNvSpPr/>
           <p:nvPr/>
         </p:nvSpPr>
@@ -14299,7 +13991,7 @@
             <a:r>
               <a:rPr lang="en-US" sz="950" b="1" spc="100" kern="0" dirty="0">
                 <a:solidFill>
-                  <a:srgbClr val="9AA1AD"/>
+                  <a:srgbClr val="8A82A0"/>
                 </a:solidFill>
                 <a:latin typeface="Courier New" pitchFamily="34" charset="0"/>
                 <a:ea typeface="Courier New" pitchFamily="34" charset="-122"/>
@@ -14313,7 +14005,7 @@
       </p:sp>
       <p:sp>
         <p:nvSpPr>
-          <p:cNvPr id="11" name="Text 8"/>
+          <p:cNvPr id="10" name="Text 7"/>
           <p:cNvSpPr/>
           <p:nvPr/>
         </p:nvSpPr>
@@ -14338,7 +14030,7 @@
             <a:r>
               <a:rPr lang="en-US" sz="1250" b="1" dirty="0">
                 <a:solidFill>
-                  <a:srgbClr val="5A05F4"/>
+                  <a:srgbClr val="C9A6FF"/>
                 </a:solidFill>
                 <a:latin typeface="Montserrat" pitchFamily="34" charset="0"/>
                 <a:ea typeface="Montserrat" pitchFamily="34" charset="-122"/>
@@ -14352,7 +14044,7 @@
             <a:r>
               <a:rPr lang="en-US" sz="1250" dirty="0">
                 <a:solidFill>
-                  <a:srgbClr val="111318"/>
+                  <a:srgbClr val="FFFFFF"/>
                 </a:solidFill>
                 <a:latin typeface="Montserrat" pitchFamily="34" charset="0"/>
                 <a:ea typeface="Montserrat" pitchFamily="34" charset="-122"/>
@@ -14366,7 +14058,7 @@
       </p:sp>
       <p:sp>
         <p:nvSpPr>
-          <p:cNvPr id="12" name="Text 9"/>
+          <p:cNvPr id="11" name="Text 8"/>
           <p:cNvSpPr/>
           <p:nvPr/>
         </p:nvSpPr>
@@ -14391,7 +14083,7 @@
             <a:r>
               <a:rPr lang="en-US" sz="1250" b="1" dirty="0">
                 <a:solidFill>
-                  <a:srgbClr val="5A05F4"/>
+                  <a:srgbClr val="C9A6FF"/>
                 </a:solidFill>
                 <a:latin typeface="Montserrat" pitchFamily="34" charset="0"/>
                 <a:ea typeface="Montserrat" pitchFamily="34" charset="-122"/>
@@ -14405,7 +14097,7 @@
             <a:r>
               <a:rPr lang="en-US" sz="1250" dirty="0">
                 <a:solidFill>
-                  <a:srgbClr val="111318"/>
+                  <a:srgbClr val="FFFFFF"/>
                 </a:solidFill>
                 <a:latin typeface="Montserrat" pitchFamily="34" charset="0"/>
                 <a:ea typeface="Montserrat" pitchFamily="34" charset="-122"/>
@@ -14419,7 +14111,7 @@
       </p:sp>
       <p:sp>
         <p:nvSpPr>
-          <p:cNvPr id="13" name="Text 10"/>
+          <p:cNvPr id="12" name="Text 9"/>
           <p:cNvSpPr/>
           <p:nvPr/>
         </p:nvSpPr>
@@ -14444,7 +14136,7 @@
             <a:r>
               <a:rPr lang="en-US" sz="1250" b="1" dirty="0">
                 <a:solidFill>
-                  <a:srgbClr val="5A05F4"/>
+                  <a:srgbClr val="C9A6FF"/>
                 </a:solidFill>
                 <a:latin typeface="Montserrat" pitchFamily="34" charset="0"/>
                 <a:ea typeface="Montserrat" pitchFamily="34" charset="-122"/>
@@ -14458,7 +14150,7 @@
             <a:r>
               <a:rPr lang="en-US" sz="1250" dirty="0">
                 <a:solidFill>
-                  <a:srgbClr val="111318"/>
+                  <a:srgbClr val="FFFFFF"/>
                 </a:solidFill>
                 <a:latin typeface="Montserrat" pitchFamily="34" charset="0"/>
                 <a:ea typeface="Montserrat" pitchFamily="34" charset="-122"/>
@@ -14472,7 +14164,7 @@
       </p:sp>
       <p:sp>
         <p:nvSpPr>
-          <p:cNvPr id="14" name="Shape 11"/>
+          <p:cNvPr id="13" name="Shape 10"/>
           <p:cNvSpPr/>
           <p:nvPr/>
         </p:nvSpPr>
@@ -14487,14 +14179,14 @@
             </a:avLst>
           </a:prstGeom>
           <a:solidFill>
-            <a:srgbClr val="F8F0E2"/>
+            <a:srgbClr val="2A2010"/>
           </a:solidFill>
           <a:ln/>
         </p:spPr>
       </p:sp>
       <p:sp>
         <p:nvSpPr>
-          <p:cNvPr id="15" name="Text 12"/>
+          <p:cNvPr id="14" name="Text 11"/>
           <p:cNvSpPr/>
           <p:nvPr/>
         </p:nvSpPr>
@@ -14519,7 +14211,7 @@
             <a:r>
               <a:rPr lang="en-US" sz="1450" b="1" dirty="0">
                 <a:solidFill>
-                  <a:srgbClr val="9A5B12"/>
+                  <a:srgbClr val="E8A857"/>
                 </a:solidFill>
                 <a:latin typeface="Montserrat" pitchFamily="34" charset="0"/>
                 <a:ea typeface="Montserrat" pitchFamily="34" charset="-122"/>
@@ -14533,7 +14225,7 @@
       </p:sp>
       <p:sp>
         <p:nvSpPr>
-          <p:cNvPr id="16" name="Text 13"/>
+          <p:cNvPr id="15" name="Text 12"/>
           <p:cNvSpPr/>
           <p:nvPr/>
         </p:nvSpPr>
@@ -14561,7 +14253,7 @@
             <a:r>
               <a:rPr lang="en-US" sz="1200" dirty="0">
                 <a:solidFill>
-                  <a:srgbClr val="111318"/>
+                  <a:srgbClr val="FFFFFF"/>
                 </a:solidFill>
                 <a:latin typeface="Montserrat" pitchFamily="34" charset="0"/>
                 <a:ea typeface="Montserrat" pitchFamily="34" charset="-122"/>
@@ -14581,7 +14273,7 @@
             <a:r>
               <a:rPr lang="en-US" sz="1200" dirty="0">
                 <a:solidFill>
-                  <a:srgbClr val="111318"/>
+                  <a:srgbClr val="FFFFFF"/>
                 </a:solidFill>
                 <a:latin typeface="Montserrat" pitchFamily="34" charset="0"/>
                 <a:ea typeface="Montserrat" pitchFamily="34" charset="-122"/>
@@ -14623,7 +14315,7 @@
             <a:lvl1pPr>
               <a:defRPr sz="850">
                 <a:solidFill>
-                  <a:srgbClr val="9AA1AD"/>
+                  <a:srgbClr val="8A82A0"/>
                 </a:solidFill>
                 <a:latin typeface="Courier New"/>
                 <a:ea typeface="Courier New"/>
@@ -15071,9 +14763,14 @@
             </a:avLst>
           </a:prstGeom>
           <a:solidFill>
-            <a:srgbClr val="FFFFFF"/>
+            <a:srgbClr val="17141F"/>
           </a:solidFill>
-          <a:ln/>
+          <a:ln w="12700">
+            <a:solidFill>
+              <a:srgbClr val="2E2A3A"/>
+            </a:solidFill>
+            <a:prstDash val="solid"/>
+          </a:ln>
         </p:spPr>
       </p:sp>
       <p:sp>
@@ -15103,7 +14800,7 @@
             <a:r>
               <a:rPr lang="en-US" sz="1500" b="1" dirty="0">
                 <a:solidFill>
-                  <a:srgbClr val="5A05F4"/>
+                  <a:srgbClr val="C9A6FF"/>
                 </a:solidFill>
                 <a:latin typeface="Montserrat" pitchFamily="34" charset="0"/>
                 <a:ea typeface="Montserrat" pitchFamily="34" charset="-122"/>
@@ -15145,7 +14842,7 @@
             <a:r>
               <a:rPr lang="en-US" sz="1250" dirty="0">
                 <a:solidFill>
-                  <a:srgbClr val="111318"/>
+                  <a:srgbClr val="FFFFFF"/>
                 </a:solidFill>
                 <a:latin typeface="Montserrat" pitchFamily="34" charset="0"/>
                 <a:ea typeface="Montserrat" pitchFamily="34" charset="-122"/>
@@ -15184,29 +14881,7 @@
       </p:grpSpPr>
       <p:sp>
         <p:nvSpPr>
-          <p:cNvPr id="2" name="Shape 0"/>
-          <p:cNvSpPr/>
-          <p:nvPr/>
-        </p:nvSpPr>
-        <p:spPr>
-          <a:xfrm>
-            <a:off x="231343" y="194767"/>
-            <a:ext cx="11716207" cy="6473952"/>
-          </a:xfrm>
-          <a:prstGeom prst="roundRect">
-            <a:avLst>
-              <a:gd name="adj" fmla="val 3107"/>
-            </a:avLst>
-          </a:prstGeom>
-          <a:solidFill>
-            <a:srgbClr val="FFFFFF"/>
-          </a:solidFill>
-          <a:ln/>
-        </p:spPr>
-      </p:sp>
-      <p:sp>
-        <p:nvSpPr>
-          <p:cNvPr id="3" name="Text 1"/>
+          <p:cNvPr id="2" name="Text 0"/>
           <p:cNvSpPr/>
           <p:nvPr/>
         </p:nvSpPr>
@@ -15231,7 +14906,7 @@
             <a:r>
               <a:rPr lang="en-US" sz="2400" b="1" dirty="0">
                 <a:solidFill>
-                  <a:srgbClr val="111318"/>
+                  <a:srgbClr val="FFFFFF"/>
                 </a:solidFill>
                 <a:latin typeface="Montserrat" pitchFamily="34" charset="0"/>
                 <a:ea typeface="Montserrat" pitchFamily="34" charset="-122"/>
@@ -15245,7 +14920,7 @@
       </p:sp>
       <p:sp>
         <p:nvSpPr>
-          <p:cNvPr id="4" name="Shape 2"/>
+          <p:cNvPr id="3" name="Shape 1"/>
           <p:cNvSpPr/>
           <p:nvPr/>
         </p:nvSpPr>
@@ -15260,14 +14935,14 @@
             </a:avLst>
           </a:prstGeom>
           <a:solidFill>
-            <a:srgbClr val="5A05F4"/>
+            <a:srgbClr val="C9A6FF"/>
           </a:solidFill>
           <a:ln/>
         </p:spPr>
       </p:sp>
       <p:sp>
         <p:nvSpPr>
-          <p:cNvPr id="5" name="Text 3"/>
+          <p:cNvPr id="4" name="Text 2"/>
           <p:cNvSpPr/>
           <p:nvPr/>
         </p:nvSpPr>
@@ -15292,7 +14967,7 @@
             <a:r>
               <a:rPr lang="en-US" sz="900" b="1" spc="100" kern="0" dirty="0">
                 <a:solidFill>
-                  <a:srgbClr val="FFFFFF"/>
+                  <a:srgbClr val="1C1140"/>
                 </a:solidFill>
                 <a:latin typeface="Courier New" pitchFamily="34" charset="0"/>
                 <a:ea typeface="Courier New" pitchFamily="34" charset="-122"/>
@@ -15306,7 +14981,7 @@
       </p:sp>
       <p:pic>
         <p:nvPicPr>
-          <p:cNvPr id="6" name="Image 0" descr="preencoded.png">    </p:cNvPr>
+          <p:cNvPr id="5" name="Image 0" descr="preencoded.png">    </p:cNvPr>
           <p:cNvPicPr>
             <a:picLocks noChangeAspect="1"/>
           </p:cNvPicPr>
@@ -15330,7 +15005,7 @@
       </p:pic>
       <p:sp>
         <p:nvSpPr>
-          <p:cNvPr id="7" name="Shape 4"/>
+          <p:cNvPr id="6" name="Shape 3"/>
           <p:cNvSpPr/>
           <p:nvPr/>
         </p:nvSpPr>
@@ -15345,11 +15020,11 @@
             </a:avLst>
           </a:prstGeom>
           <a:solidFill>
-            <a:srgbClr val="FFFFFF"/>
+            <a:srgbClr val="17141F"/>
           </a:solidFill>
           <a:ln w="12700">
             <a:solidFill>
-              <a:srgbClr val="E6E7EC"/>
+              <a:srgbClr val="2E2A3A"/>
             </a:solidFill>
             <a:prstDash val="solid"/>
           </a:ln>
@@ -15357,7 +15032,7 @@
       </p:sp>
       <p:sp>
         <p:nvSpPr>
-          <p:cNvPr id="8" name="Shape 5"/>
+          <p:cNvPr id="7" name="Shape 4"/>
           <p:cNvSpPr/>
           <p:nvPr/>
         </p:nvSpPr>
@@ -15377,7 +15052,7 @@
       </p:sp>
       <p:sp>
         <p:nvSpPr>
-          <p:cNvPr id="9" name="Text 6"/>
+          <p:cNvPr id="8" name="Text 5"/>
           <p:cNvSpPr/>
           <p:nvPr/>
         </p:nvSpPr>
@@ -15416,7 +15091,7 @@
       </p:sp>
       <p:sp>
         <p:nvSpPr>
-          <p:cNvPr id="10" name="Text 7"/>
+          <p:cNvPr id="9" name="Text 6"/>
           <p:cNvSpPr/>
           <p:nvPr/>
         </p:nvSpPr>
@@ -15441,7 +15116,7 @@
             <a:r>
               <a:rPr lang="en-US" sz="1450" b="1" dirty="0">
                 <a:solidFill>
-                  <a:srgbClr val="111318"/>
+                  <a:srgbClr val="FFFFFF"/>
                 </a:solidFill>
                 <a:latin typeface="Montserrat" pitchFamily="34" charset="0"/>
                 <a:ea typeface="Montserrat" pitchFamily="34" charset="-122"/>
@@ -15455,7 +15130,7 @@
       </p:sp>
       <p:sp>
         <p:nvSpPr>
-          <p:cNvPr id="11" name="Shape 8"/>
+          <p:cNvPr id="10" name="Shape 7"/>
           <p:cNvSpPr/>
           <p:nvPr/>
         </p:nvSpPr>
@@ -15470,11 +15145,11 @@
             </a:avLst>
           </a:prstGeom>
           <a:solidFill>
-            <a:srgbClr val="FFFFFF"/>
+            <a:srgbClr val="17141F"/>
           </a:solidFill>
           <a:ln w="12700">
             <a:solidFill>
-              <a:srgbClr val="E6E7EC"/>
+              <a:srgbClr val="2E2A3A"/>
             </a:solidFill>
             <a:prstDash val="solid"/>
           </a:ln>
@@ -15482,7 +15157,7 @@
       </p:sp>
       <p:sp>
         <p:nvSpPr>
-          <p:cNvPr id="12" name="Shape 9"/>
+          <p:cNvPr id="11" name="Shape 8"/>
           <p:cNvSpPr/>
           <p:nvPr/>
         </p:nvSpPr>
@@ -15502,7 +15177,7 @@
       </p:sp>
       <p:sp>
         <p:nvSpPr>
-          <p:cNvPr id="13" name="Text 10"/>
+          <p:cNvPr id="12" name="Text 9"/>
           <p:cNvSpPr/>
           <p:nvPr/>
         </p:nvSpPr>
@@ -15541,7 +15216,7 @@
       </p:sp>
       <p:sp>
         <p:nvSpPr>
-          <p:cNvPr id="14" name="Text 11"/>
+          <p:cNvPr id="13" name="Text 10"/>
           <p:cNvSpPr/>
           <p:nvPr/>
         </p:nvSpPr>
@@ -15566,7 +15241,7 @@
             <a:r>
               <a:rPr lang="en-US" sz="1450" b="1" dirty="0">
                 <a:solidFill>
-                  <a:srgbClr val="111318"/>
+                  <a:srgbClr val="FFFFFF"/>
                 </a:solidFill>
                 <a:latin typeface="Montserrat" pitchFamily="34" charset="0"/>
                 <a:ea typeface="Montserrat" pitchFamily="34" charset="-122"/>
@@ -15580,7 +15255,7 @@
       </p:sp>
       <p:sp>
         <p:nvSpPr>
-          <p:cNvPr id="15" name="Shape 12"/>
+          <p:cNvPr id="14" name="Shape 11"/>
           <p:cNvSpPr/>
           <p:nvPr/>
         </p:nvSpPr>
@@ -15595,11 +15270,11 @@
             </a:avLst>
           </a:prstGeom>
           <a:solidFill>
-            <a:srgbClr val="FFFFFF"/>
+            <a:srgbClr val="17141F"/>
           </a:solidFill>
           <a:ln w="12700">
             <a:solidFill>
-              <a:srgbClr val="E6E7EC"/>
+              <a:srgbClr val="2E2A3A"/>
             </a:solidFill>
             <a:prstDash val="solid"/>
           </a:ln>
@@ -15607,7 +15282,7 @@
       </p:sp>
       <p:sp>
         <p:nvSpPr>
-          <p:cNvPr id="16" name="Shape 13"/>
+          <p:cNvPr id="15" name="Shape 12"/>
           <p:cNvSpPr/>
           <p:nvPr/>
         </p:nvSpPr>
@@ -15627,7 +15302,7 @@
       </p:sp>
       <p:sp>
         <p:nvSpPr>
-          <p:cNvPr id="17" name="Text 14"/>
+          <p:cNvPr id="16" name="Text 13"/>
           <p:cNvSpPr/>
           <p:nvPr/>
         </p:nvSpPr>
@@ -15666,7 +15341,7 @@
       </p:sp>
       <p:sp>
         <p:nvSpPr>
-          <p:cNvPr id="18" name="Text 15"/>
+          <p:cNvPr id="17" name="Text 14"/>
           <p:cNvSpPr/>
           <p:nvPr/>
         </p:nvSpPr>
@@ -15691,7 +15366,7 @@
             <a:r>
               <a:rPr lang="en-US" sz="1450" b="1" dirty="0">
                 <a:solidFill>
-                  <a:srgbClr val="111318"/>
+                  <a:srgbClr val="FFFFFF"/>
                 </a:solidFill>
                 <a:latin typeface="Montserrat" pitchFamily="34" charset="0"/>
                 <a:ea typeface="Montserrat" pitchFamily="34" charset="-122"/>
@@ -15705,7 +15380,7 @@
       </p:sp>
       <p:sp>
         <p:nvSpPr>
-          <p:cNvPr id="19" name="Shape 16"/>
+          <p:cNvPr id="18" name="Shape 15"/>
           <p:cNvSpPr/>
           <p:nvPr/>
         </p:nvSpPr>
@@ -15720,11 +15395,11 @@
             </a:avLst>
           </a:prstGeom>
           <a:solidFill>
-            <a:srgbClr val="FFFFFF"/>
+            <a:srgbClr val="17141F"/>
           </a:solidFill>
           <a:ln w="12700">
             <a:solidFill>
-              <a:srgbClr val="E6E7EC"/>
+              <a:srgbClr val="2E2A3A"/>
             </a:solidFill>
             <a:prstDash val="solid"/>
           </a:ln>
@@ -15732,7 +15407,7 @@
       </p:sp>
       <p:sp>
         <p:nvSpPr>
-          <p:cNvPr id="20" name="Shape 17"/>
+          <p:cNvPr id="19" name="Shape 16"/>
           <p:cNvSpPr/>
           <p:nvPr/>
         </p:nvSpPr>
@@ -15752,7 +15427,7 @@
       </p:sp>
       <p:sp>
         <p:nvSpPr>
-          <p:cNvPr id="21" name="Text 18"/>
+          <p:cNvPr id="20" name="Text 17"/>
           <p:cNvSpPr/>
           <p:nvPr/>
         </p:nvSpPr>
@@ -15791,7 +15466,7 @@
       </p:sp>
       <p:sp>
         <p:nvSpPr>
-          <p:cNvPr id="22" name="Text 19"/>
+          <p:cNvPr id="21" name="Text 18"/>
           <p:cNvSpPr/>
           <p:nvPr/>
         </p:nvSpPr>
@@ -15816,7 +15491,7 @@
             <a:r>
               <a:rPr lang="en-US" sz="1450" b="1" dirty="0">
                 <a:solidFill>
-                  <a:srgbClr val="111318"/>
+                  <a:srgbClr val="FFFFFF"/>
                 </a:solidFill>
                 <a:latin typeface="Montserrat" pitchFamily="34" charset="0"/>
                 <a:ea typeface="Montserrat" pitchFamily="34" charset="-122"/>
@@ -15830,7 +15505,7 @@
       </p:sp>
       <p:sp>
         <p:nvSpPr>
-          <p:cNvPr id="23" name="Shape 20"/>
+          <p:cNvPr id="22" name="Shape 19"/>
           <p:cNvSpPr/>
           <p:nvPr/>
         </p:nvSpPr>
@@ -15845,11 +15520,11 @@
             </a:avLst>
           </a:prstGeom>
           <a:solidFill>
-            <a:srgbClr val="FFFFFF"/>
+            <a:srgbClr val="17141F"/>
           </a:solidFill>
           <a:ln w="12700">
             <a:solidFill>
-              <a:srgbClr val="E6E7EC"/>
+              <a:srgbClr val="2E2A3A"/>
             </a:solidFill>
             <a:prstDash val="solid"/>
           </a:ln>
@@ -15857,7 +15532,7 @@
       </p:sp>
       <p:sp>
         <p:nvSpPr>
-          <p:cNvPr id="24" name="Shape 21"/>
+          <p:cNvPr id="23" name="Shape 20"/>
           <p:cNvSpPr/>
           <p:nvPr/>
         </p:nvSpPr>
@@ -15877,7 +15552,7 @@
       </p:sp>
       <p:sp>
         <p:nvSpPr>
-          <p:cNvPr id="25" name="Text 22"/>
+          <p:cNvPr id="24" name="Text 21"/>
           <p:cNvSpPr/>
           <p:nvPr/>
         </p:nvSpPr>
@@ -15916,7 +15591,7 @@
       </p:sp>
       <p:sp>
         <p:nvSpPr>
-          <p:cNvPr id="26" name="Text 23"/>
+          <p:cNvPr id="25" name="Text 22"/>
           <p:cNvSpPr/>
           <p:nvPr/>
         </p:nvSpPr>
@@ -15941,7 +15616,7 @@
             <a:r>
               <a:rPr lang="en-US" sz="1450" b="1" dirty="0">
                 <a:solidFill>
-                  <a:srgbClr val="111318"/>
+                  <a:srgbClr val="FFFFFF"/>
                 </a:solidFill>
                 <a:latin typeface="Montserrat" pitchFamily="34" charset="0"/>
                 <a:ea typeface="Montserrat" pitchFamily="34" charset="-122"/>
@@ -15955,7 +15630,7 @@
       </p:sp>
       <p:sp>
         <p:nvSpPr>
-          <p:cNvPr id="27" name="Shape 24"/>
+          <p:cNvPr id="26" name="Shape 23"/>
           <p:cNvSpPr/>
           <p:nvPr/>
         </p:nvSpPr>
@@ -15970,11 +15645,11 @@
             </a:avLst>
           </a:prstGeom>
           <a:solidFill>
-            <a:srgbClr val="FFFFFF"/>
+            <a:srgbClr val="17141F"/>
           </a:solidFill>
           <a:ln w="12700">
             <a:solidFill>
-              <a:srgbClr val="E6E7EC"/>
+              <a:srgbClr val="2E2A3A"/>
             </a:solidFill>
             <a:prstDash val="solid"/>
           </a:ln>
@@ -15982,7 +15657,7 @@
       </p:sp>
       <p:sp>
         <p:nvSpPr>
-          <p:cNvPr id="28" name="Shape 25"/>
+          <p:cNvPr id="27" name="Shape 24"/>
           <p:cNvSpPr/>
           <p:nvPr/>
         </p:nvSpPr>
@@ -16002,7 +15677,7 @@
       </p:sp>
       <p:sp>
         <p:nvSpPr>
-          <p:cNvPr id="29" name="Text 26"/>
+          <p:cNvPr id="28" name="Text 25"/>
           <p:cNvSpPr/>
           <p:nvPr/>
         </p:nvSpPr>
@@ -16041,7 +15716,7 @@
       </p:sp>
       <p:sp>
         <p:nvSpPr>
-          <p:cNvPr id="30" name="Text 27"/>
+          <p:cNvPr id="29" name="Text 26"/>
           <p:cNvSpPr/>
           <p:nvPr/>
         </p:nvSpPr>
@@ -16066,7 +15741,7 @@
             <a:r>
               <a:rPr lang="en-US" sz="1450" b="1" dirty="0">
                 <a:solidFill>
-                  <a:srgbClr val="111318"/>
+                  <a:srgbClr val="FFFFFF"/>
                 </a:solidFill>
                 <a:latin typeface="Montserrat" pitchFamily="34" charset="0"/>
                 <a:ea typeface="Montserrat" pitchFamily="34" charset="-122"/>
@@ -16080,7 +15755,7 @@
       </p:sp>
       <p:sp>
         <p:nvSpPr>
-          <p:cNvPr id="31" name="Shape 28"/>
+          <p:cNvPr id="30" name="Shape 27"/>
           <p:cNvSpPr/>
           <p:nvPr/>
         </p:nvSpPr>
@@ -16095,11 +15770,11 @@
             </a:avLst>
           </a:prstGeom>
           <a:solidFill>
-            <a:srgbClr val="FFFFFF"/>
+            <a:srgbClr val="17141F"/>
           </a:solidFill>
           <a:ln w="12700">
             <a:solidFill>
-              <a:srgbClr val="E6E7EC"/>
+              <a:srgbClr val="2E2A3A"/>
             </a:solidFill>
             <a:prstDash val="solid"/>
           </a:ln>
@@ -16107,7 +15782,7 @@
       </p:sp>
       <p:sp>
         <p:nvSpPr>
-          <p:cNvPr id="32" name="Shape 29"/>
+          <p:cNvPr id="31" name="Shape 28"/>
           <p:cNvSpPr/>
           <p:nvPr/>
         </p:nvSpPr>
@@ -16127,7 +15802,7 @@
       </p:sp>
       <p:sp>
         <p:nvSpPr>
-          <p:cNvPr id="33" name="Text 30"/>
+          <p:cNvPr id="32" name="Text 29"/>
           <p:cNvSpPr/>
           <p:nvPr/>
         </p:nvSpPr>
@@ -16166,7 +15841,7 @@
       </p:sp>
       <p:sp>
         <p:nvSpPr>
-          <p:cNvPr id="34" name="Text 31"/>
+          <p:cNvPr id="33" name="Text 30"/>
           <p:cNvSpPr/>
           <p:nvPr/>
         </p:nvSpPr>
@@ -16191,7 +15866,7 @@
             <a:r>
               <a:rPr lang="en-US" sz="1450" b="1" dirty="0">
                 <a:solidFill>
-                  <a:srgbClr val="111318"/>
+                  <a:srgbClr val="FFFFFF"/>
                 </a:solidFill>
                 <a:latin typeface="Montserrat" pitchFamily="34" charset="0"/>
                 <a:ea typeface="Montserrat" pitchFamily="34" charset="-122"/>
@@ -16205,7 +15880,7 @@
       </p:sp>
       <p:sp>
         <p:nvSpPr>
-          <p:cNvPr id="35" name="Shape 32"/>
+          <p:cNvPr id="34" name="Shape 31"/>
           <p:cNvSpPr/>
           <p:nvPr/>
         </p:nvSpPr>
@@ -16220,11 +15895,11 @@
             </a:avLst>
           </a:prstGeom>
           <a:solidFill>
-            <a:srgbClr val="FFFFFF"/>
+            <a:srgbClr val="17141F"/>
           </a:solidFill>
           <a:ln w="12700">
             <a:solidFill>
-              <a:srgbClr val="E6E7EC"/>
+              <a:srgbClr val="2E2A3A"/>
             </a:solidFill>
             <a:prstDash val="solid"/>
           </a:ln>
@@ -16232,7 +15907,7 @@
       </p:sp>
       <p:sp>
         <p:nvSpPr>
-          <p:cNvPr id="36" name="Shape 33"/>
+          <p:cNvPr id="35" name="Shape 32"/>
           <p:cNvSpPr/>
           <p:nvPr/>
         </p:nvSpPr>
@@ -16252,7 +15927,7 @@
       </p:sp>
       <p:sp>
         <p:nvSpPr>
-          <p:cNvPr id="37" name="Text 34"/>
+          <p:cNvPr id="36" name="Text 33"/>
           <p:cNvSpPr/>
           <p:nvPr/>
         </p:nvSpPr>
@@ -16291,7 +15966,7 @@
       </p:sp>
       <p:sp>
         <p:nvSpPr>
-          <p:cNvPr id="38" name="Text 35"/>
+          <p:cNvPr id="37" name="Text 34"/>
           <p:cNvSpPr/>
           <p:nvPr/>
         </p:nvSpPr>
@@ -16316,7 +15991,7 @@
             <a:r>
               <a:rPr lang="en-US" sz="1450" b="1" dirty="0">
                 <a:solidFill>
-                  <a:srgbClr val="111318"/>
+                  <a:srgbClr val="FFFFFF"/>
                 </a:solidFill>
                 <a:latin typeface="Montserrat" pitchFamily="34" charset="0"/>
                 <a:ea typeface="Montserrat" pitchFamily="34" charset="-122"/>
@@ -16330,7 +16005,7 @@
       </p:sp>
       <p:sp>
         <p:nvSpPr>
-          <p:cNvPr id="39" name="Shape 36"/>
+          <p:cNvPr id="38" name="Shape 35"/>
           <p:cNvSpPr/>
           <p:nvPr/>
         </p:nvSpPr>
@@ -16345,14 +16020,14 @@
             </a:avLst>
           </a:prstGeom>
           <a:solidFill>
-            <a:srgbClr val="F8F0E2"/>
+            <a:srgbClr val="2A2010"/>
           </a:solidFill>
           <a:ln/>
         </p:spPr>
       </p:sp>
       <p:sp>
         <p:nvSpPr>
-          <p:cNvPr id="40" name="Shape 37"/>
+          <p:cNvPr id="39" name="Shape 36"/>
           <p:cNvSpPr/>
           <p:nvPr/>
         </p:nvSpPr>
@@ -16365,14 +16040,14 @@
             <a:avLst/>
           </a:prstGeom>
           <a:solidFill>
-            <a:srgbClr val="9A5B12"/>
+            <a:srgbClr val="E8A857"/>
           </a:solidFill>
           <a:ln/>
         </p:spPr>
       </p:sp>
       <p:sp>
         <p:nvSpPr>
-          <p:cNvPr id="41" name="Text 38"/>
+          <p:cNvPr id="40" name="Text 37"/>
           <p:cNvSpPr/>
           <p:nvPr/>
         </p:nvSpPr>
@@ -16397,7 +16072,7 @@
             <a:r>
               <a:rPr lang="en-US" sz="1200" b="1" dirty="0">
                 <a:solidFill>
-                  <a:srgbClr val="F8F0E2"/>
+                  <a:srgbClr val="2A2010"/>
                 </a:solidFill>
                 <a:latin typeface="Courier New" pitchFamily="34" charset="0"/>
                 <a:ea typeface="Courier New" pitchFamily="34" charset="-122"/>
@@ -16411,7 +16086,7 @@
       </p:sp>
       <p:sp>
         <p:nvSpPr>
-          <p:cNvPr id="42" name="Text 39"/>
+          <p:cNvPr id="41" name="Text 38"/>
           <p:cNvSpPr/>
           <p:nvPr/>
         </p:nvSpPr>
@@ -16436,7 +16111,7 @@
             <a:r>
               <a:rPr lang="en-US" sz="1450" b="1" dirty="0">
                 <a:solidFill>
-                  <a:srgbClr val="9A5B12"/>
+                  <a:srgbClr val="E8A857"/>
                 </a:solidFill>
                 <a:latin typeface="Montserrat" pitchFamily="34" charset="0"/>
                 <a:ea typeface="Montserrat" pitchFamily="34" charset="-122"/>
@@ -16450,7 +16125,7 @@
       </p:sp>
       <p:sp>
         <p:nvSpPr>
-          <p:cNvPr id="43" name="Shape 40"/>
+          <p:cNvPr id="42" name="Shape 39"/>
           <p:cNvSpPr/>
           <p:nvPr/>
         </p:nvSpPr>
@@ -16465,11 +16140,11 @@
             </a:avLst>
           </a:prstGeom>
           <a:solidFill>
-            <a:srgbClr val="FFFFFF"/>
+            <a:srgbClr val="17141F"/>
           </a:solidFill>
           <a:ln w="12700">
             <a:solidFill>
-              <a:srgbClr val="E6E7EC"/>
+              <a:srgbClr val="2E2A3A"/>
             </a:solidFill>
             <a:prstDash val="solid"/>
           </a:ln>
@@ -16477,7 +16152,7 @@
       </p:sp>
       <p:sp>
         <p:nvSpPr>
-          <p:cNvPr id="44" name="Shape 41"/>
+          <p:cNvPr id="43" name="Shape 40"/>
           <p:cNvSpPr/>
           <p:nvPr/>
         </p:nvSpPr>
@@ -16497,7 +16172,7 @@
       </p:sp>
       <p:sp>
         <p:nvSpPr>
-          <p:cNvPr id="45" name="Text 42"/>
+          <p:cNvPr id="44" name="Text 41"/>
           <p:cNvSpPr/>
           <p:nvPr/>
         </p:nvSpPr>
@@ -16536,7 +16211,7 @@
       </p:sp>
       <p:sp>
         <p:nvSpPr>
-          <p:cNvPr id="46" name="Text 43"/>
+          <p:cNvPr id="45" name="Text 42"/>
           <p:cNvSpPr/>
           <p:nvPr/>
         </p:nvSpPr>
@@ -16561,7 +16236,7 @@
             <a:r>
               <a:rPr lang="en-US" sz="1450" b="1" dirty="0">
                 <a:solidFill>
-                  <a:srgbClr val="111318"/>
+                  <a:srgbClr val="FFFFFF"/>
                 </a:solidFill>
                 <a:latin typeface="Montserrat" pitchFamily="34" charset="0"/>
                 <a:ea typeface="Montserrat" pitchFamily="34" charset="-122"/>
@@ -16575,7 +16250,7 @@
       </p:sp>
       <p:sp>
         <p:nvSpPr>
-          <p:cNvPr id="47" name="Shape 44"/>
+          <p:cNvPr id="46" name="Shape 43"/>
           <p:cNvSpPr/>
           <p:nvPr/>
         </p:nvSpPr>
@@ -16590,11 +16265,11 @@
             </a:avLst>
           </a:prstGeom>
           <a:solidFill>
-            <a:srgbClr val="FFFFFF"/>
+            <a:srgbClr val="17141F"/>
           </a:solidFill>
           <a:ln w="12700">
             <a:solidFill>
-              <a:srgbClr val="E6E7EC"/>
+              <a:srgbClr val="2E2A3A"/>
             </a:solidFill>
             <a:prstDash val="solid"/>
           </a:ln>
@@ -16602,7 +16277,7 @@
       </p:sp>
       <p:sp>
         <p:nvSpPr>
-          <p:cNvPr id="48" name="Shape 45"/>
+          <p:cNvPr id="47" name="Shape 44"/>
           <p:cNvSpPr/>
           <p:nvPr/>
         </p:nvSpPr>
@@ -16622,7 +16297,7 @@
       </p:sp>
       <p:sp>
         <p:nvSpPr>
-          <p:cNvPr id="49" name="Text 46"/>
+          <p:cNvPr id="48" name="Text 45"/>
           <p:cNvSpPr/>
           <p:nvPr/>
         </p:nvSpPr>
@@ -16661,7 +16336,7 @@
       </p:sp>
       <p:sp>
         <p:nvSpPr>
-          <p:cNvPr id="50" name="Text 47"/>
+          <p:cNvPr id="49" name="Text 46"/>
           <p:cNvSpPr/>
           <p:nvPr/>
         </p:nvSpPr>
@@ -16686,7 +16361,7 @@
             <a:r>
               <a:rPr lang="en-US" sz="1450" b="1" dirty="0">
                 <a:solidFill>
-                  <a:srgbClr val="111318"/>
+                  <a:srgbClr val="FFFFFF"/>
                 </a:solidFill>
                 <a:latin typeface="Montserrat" pitchFamily="34" charset="0"/>
                 <a:ea typeface="Montserrat" pitchFamily="34" charset="-122"/>
@@ -16700,7 +16375,7 @@
       </p:sp>
       <p:sp>
         <p:nvSpPr>
-          <p:cNvPr id="51" name="Shape 48"/>
+          <p:cNvPr id="50" name="Shape 47"/>
           <p:cNvSpPr/>
           <p:nvPr/>
         </p:nvSpPr>
@@ -16715,11 +16390,11 @@
             </a:avLst>
           </a:prstGeom>
           <a:solidFill>
-            <a:srgbClr val="FFFFFF"/>
+            <a:srgbClr val="17141F"/>
           </a:solidFill>
           <a:ln w="12700">
             <a:solidFill>
-              <a:srgbClr val="E6E7EC"/>
+              <a:srgbClr val="2E2A3A"/>
             </a:solidFill>
             <a:prstDash val="solid"/>
           </a:ln>
@@ -16727,7 +16402,7 @@
       </p:sp>
       <p:sp>
         <p:nvSpPr>
-          <p:cNvPr id="52" name="Text 49"/>
+          <p:cNvPr id="51" name="Text 48"/>
           <p:cNvSpPr/>
           <p:nvPr/>
         </p:nvSpPr>
@@ -16755,7 +16430,7 @@
             <a:r>
               <a:rPr lang="en-US" sz="1300" dirty="0">
                 <a:solidFill>
-                  <a:srgbClr val="111318"/>
+                  <a:srgbClr val="FFFFFF"/>
                 </a:solidFill>
                 <a:latin typeface="Montserrat" pitchFamily="34" charset="0"/>
                 <a:ea typeface="Montserrat" pitchFamily="34" charset="-122"/>
@@ -16797,7 +16472,7 @@
             <a:lvl1pPr>
               <a:defRPr sz="850">
                 <a:solidFill>
-                  <a:srgbClr val="9AA1AD"/>
+                  <a:srgbClr val="8A82A0"/>
                 </a:solidFill>
                 <a:latin typeface="Courier New"/>
                 <a:ea typeface="Courier New"/>
@@ -16842,29 +16517,7 @@
       </p:grpSpPr>
       <p:sp>
         <p:nvSpPr>
-          <p:cNvPr id="2" name="Shape 0"/>
-          <p:cNvSpPr/>
-          <p:nvPr/>
-        </p:nvSpPr>
-        <p:spPr>
-          <a:xfrm>
-            <a:off x="231343" y="194767"/>
-            <a:ext cx="11716207" cy="6473952"/>
-          </a:xfrm>
-          <a:prstGeom prst="roundRect">
-            <a:avLst>
-              <a:gd name="adj" fmla="val 3107"/>
-            </a:avLst>
-          </a:prstGeom>
-          <a:solidFill>
-            <a:srgbClr val="FFFFFF"/>
-          </a:solidFill>
-          <a:ln/>
-        </p:spPr>
-      </p:sp>
-      <p:sp>
-        <p:nvSpPr>
-          <p:cNvPr id="3" name="Text 1"/>
+          <p:cNvPr id="2" name="Text 0"/>
           <p:cNvSpPr/>
           <p:nvPr/>
         </p:nvSpPr>
@@ -16889,7 +16542,7 @@
             <a:r>
               <a:rPr lang="en-US" sz="2400" b="1" dirty="0">
                 <a:solidFill>
-                  <a:srgbClr val="111318"/>
+                  <a:srgbClr val="FFFFFF"/>
                 </a:solidFill>
                 <a:latin typeface="Montserrat" pitchFamily="34" charset="0"/>
                 <a:ea typeface="Montserrat" pitchFamily="34" charset="-122"/>
@@ -16903,7 +16556,7 @@
       </p:sp>
       <p:sp>
         <p:nvSpPr>
-          <p:cNvPr id="4" name="Text 2"/>
+          <p:cNvPr id="3" name="Text 1"/>
           <p:cNvSpPr/>
           <p:nvPr/>
         </p:nvSpPr>
@@ -16931,7 +16584,7 @@
             <a:r>
               <a:rPr lang="en-US" sz="1300" dirty="0">
                 <a:solidFill>
-                  <a:srgbClr val="555B66"/>
+                  <a:srgbClr val="AFA9BE"/>
                 </a:solidFill>
                 <a:latin typeface="Montserrat" pitchFamily="34" charset="0"/>
                 <a:ea typeface="Montserrat" pitchFamily="34" charset="-122"/>
@@ -16945,7 +16598,7 @@
       </p:sp>
       <p:sp>
         <p:nvSpPr>
-          <p:cNvPr id="5" name="Shape 3"/>
+          <p:cNvPr id="4" name="Shape 2"/>
           <p:cNvSpPr/>
           <p:nvPr/>
         </p:nvSpPr>
@@ -16960,14 +16613,14 @@
             </a:avLst>
           </a:prstGeom>
           <a:solidFill>
-            <a:srgbClr val="5A05F4"/>
+            <a:srgbClr val="C9A6FF"/>
           </a:solidFill>
           <a:ln/>
         </p:spPr>
       </p:sp>
       <p:sp>
         <p:nvSpPr>
-          <p:cNvPr id="6" name="Text 4"/>
+          <p:cNvPr id="5" name="Text 3"/>
           <p:cNvSpPr/>
           <p:nvPr/>
         </p:nvSpPr>
@@ -16992,7 +16645,7 @@
             <a:r>
               <a:rPr lang="en-US" sz="900" b="1" spc="100" kern="0" dirty="0">
                 <a:solidFill>
-                  <a:srgbClr val="FFFFFF"/>
+                  <a:srgbClr val="1C1140"/>
                 </a:solidFill>
                 <a:latin typeface="Courier New" pitchFamily="34" charset="0"/>
                 <a:ea typeface="Courier New" pitchFamily="34" charset="-122"/>
@@ -17006,7 +16659,7 @@
       </p:sp>
       <p:pic>
         <p:nvPicPr>
-          <p:cNvPr id="7" name="Image 0" descr="preencoded.png">    </p:cNvPr>
+          <p:cNvPr id="6" name="Image 0" descr="preencoded.png">    </p:cNvPr>
           <p:cNvPicPr>
             <a:picLocks noChangeAspect="1"/>
           </p:cNvPicPr>
@@ -17030,7 +16683,7 @@
       </p:pic>
       <p:sp>
         <p:nvSpPr>
-          <p:cNvPr id="8" name="Shape 5"/>
+          <p:cNvPr id="7" name="Shape 4"/>
           <p:cNvSpPr/>
           <p:nvPr/>
         </p:nvSpPr>
@@ -17045,11 +16698,11 @@
             </a:avLst>
           </a:prstGeom>
           <a:solidFill>
-            <a:srgbClr val="FFFFFF"/>
+            <a:srgbClr val="17141F"/>
           </a:solidFill>
           <a:ln w="12700">
             <a:solidFill>
-              <a:srgbClr val="E6E7EC"/>
+              <a:srgbClr val="2E2A3A"/>
             </a:solidFill>
             <a:prstDash val="solid"/>
           </a:ln>
@@ -17057,7 +16710,7 @@
       </p:sp>
       <p:sp>
         <p:nvSpPr>
-          <p:cNvPr id="9" name="Text 6"/>
+          <p:cNvPr id="8" name="Text 5"/>
           <p:cNvSpPr/>
           <p:nvPr/>
         </p:nvSpPr>
@@ -17082,7 +16735,7 @@
             <a:r>
               <a:rPr lang="en-US" sz="1250" b="1" dirty="0">
                 <a:solidFill>
-                  <a:srgbClr val="5A05F4"/>
+                  <a:srgbClr val="C9A6FF"/>
                 </a:solidFill>
                 <a:latin typeface="Courier New" pitchFamily="34" charset="0"/>
                 <a:ea typeface="Courier New" pitchFamily="34" charset="-122"/>
@@ -17096,7 +16749,7 @@
       </p:sp>
       <p:sp>
         <p:nvSpPr>
-          <p:cNvPr id="10" name="Text 7"/>
+          <p:cNvPr id="9" name="Text 6"/>
           <p:cNvSpPr/>
           <p:nvPr/>
         </p:nvSpPr>
@@ -17124,7 +16777,7 @@
             <a:r>
               <a:rPr lang="en-US" sz="1150" dirty="0">
                 <a:solidFill>
-                  <a:srgbClr val="555B66"/>
+                  <a:srgbClr val="AFA9BE"/>
                 </a:solidFill>
                 <a:latin typeface="Montserrat" pitchFamily="34" charset="0"/>
                 <a:ea typeface="Montserrat" pitchFamily="34" charset="-122"/>
@@ -17138,7 +16791,7 @@
       </p:sp>
       <p:sp>
         <p:nvSpPr>
-          <p:cNvPr id="11" name="Shape 8"/>
+          <p:cNvPr id="10" name="Shape 7"/>
           <p:cNvSpPr/>
           <p:nvPr/>
         </p:nvSpPr>
@@ -17153,11 +16806,11 @@
             </a:avLst>
           </a:prstGeom>
           <a:solidFill>
-            <a:srgbClr val="FFFFFF"/>
+            <a:srgbClr val="17141F"/>
           </a:solidFill>
           <a:ln w="12700">
             <a:solidFill>
-              <a:srgbClr val="E6E7EC"/>
+              <a:srgbClr val="2E2A3A"/>
             </a:solidFill>
             <a:prstDash val="solid"/>
           </a:ln>
@@ -17165,7 +16818,7 @@
       </p:sp>
       <p:sp>
         <p:nvSpPr>
-          <p:cNvPr id="12" name="Text 9"/>
+          <p:cNvPr id="11" name="Text 8"/>
           <p:cNvSpPr/>
           <p:nvPr/>
         </p:nvSpPr>
@@ -17190,7 +16843,7 @@
             <a:r>
               <a:rPr lang="en-US" sz="1250" b="1" dirty="0">
                 <a:solidFill>
-                  <a:srgbClr val="5A05F4"/>
+                  <a:srgbClr val="C9A6FF"/>
                 </a:solidFill>
                 <a:latin typeface="Courier New" pitchFamily="34" charset="0"/>
                 <a:ea typeface="Courier New" pitchFamily="34" charset="-122"/>
@@ -17204,7 +16857,7 @@
       </p:sp>
       <p:sp>
         <p:nvSpPr>
-          <p:cNvPr id="13" name="Text 10"/>
+          <p:cNvPr id="12" name="Text 9"/>
           <p:cNvSpPr/>
           <p:nvPr/>
         </p:nvSpPr>
@@ -17232,7 +16885,7 @@
             <a:r>
               <a:rPr lang="en-US" sz="1150" dirty="0">
                 <a:solidFill>
-                  <a:srgbClr val="555B66"/>
+                  <a:srgbClr val="AFA9BE"/>
                 </a:solidFill>
                 <a:latin typeface="Montserrat" pitchFamily="34" charset="0"/>
                 <a:ea typeface="Montserrat" pitchFamily="34" charset="-122"/>
@@ -17246,7 +16899,7 @@
       </p:sp>
       <p:sp>
         <p:nvSpPr>
-          <p:cNvPr id="14" name="Shape 11"/>
+          <p:cNvPr id="13" name="Shape 10"/>
           <p:cNvSpPr/>
           <p:nvPr/>
         </p:nvSpPr>
@@ -17261,11 +16914,11 @@
             </a:avLst>
           </a:prstGeom>
           <a:solidFill>
-            <a:srgbClr val="FFFFFF"/>
+            <a:srgbClr val="17141F"/>
           </a:solidFill>
           <a:ln w="12700">
             <a:solidFill>
-              <a:srgbClr val="E6E7EC"/>
+              <a:srgbClr val="2E2A3A"/>
             </a:solidFill>
             <a:prstDash val="solid"/>
           </a:ln>
@@ -17273,7 +16926,7 @@
       </p:sp>
       <p:sp>
         <p:nvSpPr>
-          <p:cNvPr id="15" name="Text 12"/>
+          <p:cNvPr id="14" name="Text 11"/>
           <p:cNvSpPr/>
           <p:nvPr/>
         </p:nvSpPr>
@@ -17298,7 +16951,7 @@
             <a:r>
               <a:rPr lang="en-US" sz="1250" b="1" dirty="0">
                 <a:solidFill>
-                  <a:srgbClr val="5A05F4"/>
+                  <a:srgbClr val="C9A6FF"/>
                 </a:solidFill>
                 <a:latin typeface="Courier New" pitchFamily="34" charset="0"/>
                 <a:ea typeface="Courier New" pitchFamily="34" charset="-122"/>
@@ -17312,7 +16965,7 @@
       </p:sp>
       <p:sp>
         <p:nvSpPr>
-          <p:cNvPr id="16" name="Text 13"/>
+          <p:cNvPr id="15" name="Text 12"/>
           <p:cNvSpPr/>
           <p:nvPr/>
         </p:nvSpPr>
@@ -17340,7 +16993,7 @@
             <a:r>
               <a:rPr lang="en-US" sz="1150" dirty="0">
                 <a:solidFill>
-                  <a:srgbClr val="555B66"/>
+                  <a:srgbClr val="AFA9BE"/>
                 </a:solidFill>
                 <a:latin typeface="Montserrat" pitchFamily="34" charset="0"/>
                 <a:ea typeface="Montserrat" pitchFamily="34" charset="-122"/>
@@ -17354,7 +17007,7 @@
       </p:sp>
       <p:sp>
         <p:nvSpPr>
-          <p:cNvPr id="17" name="Shape 14"/>
+          <p:cNvPr id="16" name="Shape 13"/>
           <p:cNvSpPr/>
           <p:nvPr/>
         </p:nvSpPr>
@@ -17369,11 +17022,11 @@
             </a:avLst>
           </a:prstGeom>
           <a:solidFill>
-            <a:srgbClr val="FFFFFF"/>
+            <a:srgbClr val="17141F"/>
           </a:solidFill>
           <a:ln w="12700">
             <a:solidFill>
-              <a:srgbClr val="E6E7EC"/>
+              <a:srgbClr val="2E2A3A"/>
             </a:solidFill>
             <a:prstDash val="solid"/>
           </a:ln>
@@ -17381,7 +17034,7 @@
       </p:sp>
       <p:sp>
         <p:nvSpPr>
-          <p:cNvPr id="18" name="Text 15"/>
+          <p:cNvPr id="17" name="Text 14"/>
           <p:cNvSpPr/>
           <p:nvPr/>
         </p:nvSpPr>
@@ -17406,7 +17059,7 @@
             <a:r>
               <a:rPr lang="en-US" sz="1250" b="1" dirty="0">
                 <a:solidFill>
-                  <a:srgbClr val="5A05F4"/>
+                  <a:srgbClr val="C9A6FF"/>
                 </a:solidFill>
                 <a:latin typeface="Courier New" pitchFamily="34" charset="0"/>
                 <a:ea typeface="Courier New" pitchFamily="34" charset="-122"/>
@@ -17420,7 +17073,7 @@
       </p:sp>
       <p:sp>
         <p:nvSpPr>
-          <p:cNvPr id="19" name="Text 16"/>
+          <p:cNvPr id="18" name="Text 15"/>
           <p:cNvSpPr/>
           <p:nvPr/>
         </p:nvSpPr>
@@ -17448,7 +17101,7 @@
             <a:r>
               <a:rPr lang="en-US" sz="1150" dirty="0">
                 <a:solidFill>
-                  <a:srgbClr val="555B66"/>
+                  <a:srgbClr val="AFA9BE"/>
                 </a:solidFill>
                 <a:latin typeface="Montserrat" pitchFamily="34" charset="0"/>
                 <a:ea typeface="Montserrat" pitchFamily="34" charset="-122"/>
@@ -17462,7 +17115,7 @@
       </p:sp>
       <p:sp>
         <p:nvSpPr>
-          <p:cNvPr id="20" name="Shape 17"/>
+          <p:cNvPr id="19" name="Shape 16"/>
           <p:cNvSpPr/>
           <p:nvPr/>
         </p:nvSpPr>
@@ -17477,11 +17130,11 @@
             </a:avLst>
           </a:prstGeom>
           <a:solidFill>
-            <a:srgbClr val="FFFFFF"/>
+            <a:srgbClr val="17141F"/>
           </a:solidFill>
           <a:ln w="12700">
             <a:solidFill>
-              <a:srgbClr val="E6E7EC"/>
+              <a:srgbClr val="2E2A3A"/>
             </a:solidFill>
             <a:prstDash val="solid"/>
           </a:ln>
@@ -17489,7 +17142,7 @@
       </p:sp>
       <p:sp>
         <p:nvSpPr>
-          <p:cNvPr id="21" name="Text 18"/>
+          <p:cNvPr id="20" name="Text 17"/>
           <p:cNvSpPr/>
           <p:nvPr/>
         </p:nvSpPr>
@@ -17514,7 +17167,7 @@
             <a:r>
               <a:rPr lang="en-US" sz="1250" b="1" dirty="0">
                 <a:solidFill>
-                  <a:srgbClr val="5A05F4"/>
+                  <a:srgbClr val="C9A6FF"/>
                 </a:solidFill>
                 <a:latin typeface="Courier New" pitchFamily="34" charset="0"/>
                 <a:ea typeface="Courier New" pitchFamily="34" charset="-122"/>
@@ -17528,7 +17181,7 @@
       </p:sp>
       <p:sp>
         <p:nvSpPr>
-          <p:cNvPr id="22" name="Text 19"/>
+          <p:cNvPr id="21" name="Text 18"/>
           <p:cNvSpPr/>
           <p:nvPr/>
         </p:nvSpPr>
@@ -17556,7 +17209,7 @@
             <a:r>
               <a:rPr lang="en-US" sz="1150" dirty="0">
                 <a:solidFill>
-                  <a:srgbClr val="555B66"/>
+                  <a:srgbClr val="AFA9BE"/>
                 </a:solidFill>
                 <a:latin typeface="Montserrat" pitchFamily="34" charset="0"/>
                 <a:ea typeface="Montserrat" pitchFamily="34" charset="-122"/>
@@ -17570,7 +17223,7 @@
       </p:sp>
       <p:sp>
         <p:nvSpPr>
-          <p:cNvPr id="23" name="Shape 20"/>
+          <p:cNvPr id="22" name="Shape 19"/>
           <p:cNvSpPr/>
           <p:nvPr/>
         </p:nvSpPr>
@@ -17585,11 +17238,11 @@
             </a:avLst>
           </a:prstGeom>
           <a:solidFill>
-            <a:srgbClr val="FFFFFF"/>
+            <a:srgbClr val="17141F"/>
           </a:solidFill>
           <a:ln w="12700">
             <a:solidFill>
-              <a:srgbClr val="E6E7EC"/>
+              <a:srgbClr val="2E2A3A"/>
             </a:solidFill>
             <a:prstDash val="solid"/>
           </a:ln>
@@ -17597,7 +17250,7 @@
       </p:sp>
       <p:sp>
         <p:nvSpPr>
-          <p:cNvPr id="24" name="Text 21"/>
+          <p:cNvPr id="23" name="Text 20"/>
           <p:cNvSpPr/>
           <p:nvPr/>
         </p:nvSpPr>
@@ -17622,7 +17275,7 @@
             <a:r>
               <a:rPr lang="en-US" sz="1250" b="1" dirty="0">
                 <a:solidFill>
-                  <a:srgbClr val="5A05F4"/>
+                  <a:srgbClr val="C9A6FF"/>
                 </a:solidFill>
                 <a:latin typeface="Courier New" pitchFamily="34" charset="0"/>
                 <a:ea typeface="Courier New" pitchFamily="34" charset="-122"/>
@@ -17636,7 +17289,7 @@
       </p:sp>
       <p:sp>
         <p:nvSpPr>
-          <p:cNvPr id="25" name="Text 22"/>
+          <p:cNvPr id="24" name="Text 21"/>
           <p:cNvSpPr/>
           <p:nvPr/>
         </p:nvSpPr>
@@ -17664,7 +17317,7 @@
             <a:r>
               <a:rPr lang="en-US" sz="1150" dirty="0">
                 <a:solidFill>
-                  <a:srgbClr val="555B66"/>
+                  <a:srgbClr val="AFA9BE"/>
                 </a:solidFill>
                 <a:latin typeface="Montserrat" pitchFamily="34" charset="0"/>
                 <a:ea typeface="Montserrat" pitchFamily="34" charset="-122"/>
@@ -17678,7 +17331,7 @@
       </p:sp>
       <p:sp>
         <p:nvSpPr>
-          <p:cNvPr id="26" name="Shape 23"/>
+          <p:cNvPr id="25" name="Shape 22"/>
           <p:cNvSpPr/>
           <p:nvPr/>
         </p:nvSpPr>
@@ -17693,11 +17346,11 @@
             </a:avLst>
           </a:prstGeom>
           <a:solidFill>
-            <a:srgbClr val="FFFFFF"/>
+            <a:srgbClr val="17141F"/>
           </a:solidFill>
           <a:ln w="12700">
             <a:solidFill>
-              <a:srgbClr val="E6E7EC"/>
+              <a:srgbClr val="2E2A3A"/>
             </a:solidFill>
             <a:prstDash val="solid"/>
           </a:ln>
@@ -17705,7 +17358,7 @@
       </p:sp>
       <p:sp>
         <p:nvSpPr>
-          <p:cNvPr id="27" name="Text 24"/>
+          <p:cNvPr id="26" name="Text 23"/>
           <p:cNvSpPr/>
           <p:nvPr/>
         </p:nvSpPr>
@@ -17733,7 +17386,7 @@
             <a:r>
               <a:rPr lang="en-US" sz="1300" dirty="0">
                 <a:solidFill>
-                  <a:srgbClr val="111318"/>
+                  <a:srgbClr val="FFFFFF"/>
                 </a:solidFill>
                 <a:latin typeface="Montserrat" pitchFamily="34" charset="0"/>
                 <a:ea typeface="Montserrat" pitchFamily="34" charset="-122"/>
@@ -17775,7 +17428,7 @@
             <a:lvl1pPr>
               <a:defRPr sz="850">
                 <a:solidFill>
-                  <a:srgbClr val="9AA1AD"/>
+                  <a:srgbClr val="8A82A0"/>
                 </a:solidFill>
                 <a:latin typeface="Courier New"/>
                 <a:ea typeface="Courier New"/>
@@ -17820,29 +17473,7 @@
       </p:grpSpPr>
       <p:sp>
         <p:nvSpPr>
-          <p:cNvPr id="2" name="Shape 0"/>
-          <p:cNvSpPr/>
-          <p:nvPr/>
-        </p:nvSpPr>
-        <p:spPr>
-          <a:xfrm>
-            <a:off x="231343" y="194767"/>
-            <a:ext cx="11716207" cy="6473952"/>
-          </a:xfrm>
-          <a:prstGeom prst="roundRect">
-            <a:avLst>
-              <a:gd name="adj" fmla="val 3107"/>
-            </a:avLst>
-          </a:prstGeom>
-          <a:solidFill>
-            <a:srgbClr val="FFFFFF"/>
-          </a:solidFill>
-          <a:ln/>
-        </p:spPr>
-      </p:sp>
-      <p:sp>
-        <p:nvSpPr>
-          <p:cNvPr id="3" name="Text 1"/>
+          <p:cNvPr id="2" name="Text 0"/>
           <p:cNvSpPr/>
           <p:nvPr/>
         </p:nvSpPr>
@@ -17867,7 +17498,7 @@
             <a:r>
               <a:rPr lang="en-US" sz="2600" b="1" dirty="0">
                 <a:solidFill>
-                  <a:srgbClr val="5A05F4"/>
+                  <a:srgbClr val="C9A6FF"/>
                 </a:solidFill>
                 <a:latin typeface="Courier New" pitchFamily="34" charset="0"/>
                 <a:ea typeface="Courier New" pitchFamily="34" charset="-122"/>
@@ -17881,7 +17512,7 @@
       </p:sp>
       <p:sp>
         <p:nvSpPr>
-          <p:cNvPr id="4" name="Text 2"/>
+          <p:cNvPr id="3" name="Text 1"/>
           <p:cNvSpPr/>
           <p:nvPr/>
         </p:nvSpPr>
@@ -17906,7 +17537,7 @@
             <a:r>
               <a:rPr lang="en-US" sz="2400" b="1" dirty="0">
                 <a:solidFill>
-                  <a:srgbClr val="111318"/>
+                  <a:srgbClr val="FFFFFF"/>
                 </a:solidFill>
                 <a:latin typeface="Montserrat" pitchFamily="34" charset="0"/>
                 <a:ea typeface="Montserrat" pitchFamily="34" charset="-122"/>
@@ -17920,7 +17551,7 @@
       </p:sp>
       <p:sp>
         <p:nvSpPr>
-          <p:cNvPr id="5" name="Shape 3"/>
+          <p:cNvPr id="4" name="Shape 2"/>
           <p:cNvSpPr/>
           <p:nvPr/>
         </p:nvSpPr>
@@ -17935,14 +17566,14 @@
             </a:avLst>
           </a:prstGeom>
           <a:solidFill>
-            <a:srgbClr val="5A05F4"/>
+            <a:srgbClr val="C9A6FF"/>
           </a:solidFill>
           <a:ln/>
         </p:spPr>
       </p:sp>
       <p:sp>
         <p:nvSpPr>
-          <p:cNvPr id="6" name="Text 4"/>
+          <p:cNvPr id="5" name="Text 3"/>
           <p:cNvSpPr/>
           <p:nvPr/>
         </p:nvSpPr>
@@ -17967,7 +17598,7 @@
             <a:r>
               <a:rPr lang="en-US" sz="900" b="1" spc="100" kern="0" dirty="0">
                 <a:solidFill>
-                  <a:srgbClr val="FFFFFF"/>
+                  <a:srgbClr val="1C1140"/>
                 </a:solidFill>
                 <a:latin typeface="Courier New" pitchFamily="34" charset="0"/>
                 <a:ea typeface="Courier New" pitchFamily="34" charset="-122"/>
@@ -17981,7 +17612,7 @@
       </p:sp>
       <p:pic>
         <p:nvPicPr>
-          <p:cNvPr id="7" name="Image 0" descr="preencoded.png">    </p:cNvPr>
+          <p:cNvPr id="6" name="Image 0" descr="preencoded.png">    </p:cNvPr>
           <p:cNvPicPr>
             <a:picLocks noChangeAspect="1"/>
           </p:cNvPicPr>
@@ -18005,7 +17636,7 @@
       </p:pic>
       <p:sp>
         <p:nvSpPr>
-          <p:cNvPr id="8" name="Shape 5"/>
+          <p:cNvPr id="7" name="Shape 4"/>
           <p:cNvSpPr/>
           <p:nvPr/>
         </p:nvSpPr>
@@ -18020,14 +17651,14 @@
             </a:avLst>
           </a:prstGeom>
           <a:solidFill>
-            <a:srgbClr val="E9F4EF"/>
+            <a:srgbClr val="102A20"/>
           </a:solidFill>
           <a:ln/>
         </p:spPr>
       </p:sp>
       <p:sp>
         <p:nvSpPr>
-          <p:cNvPr id="9" name="Text 6"/>
+          <p:cNvPr id="8" name="Text 5"/>
           <p:cNvSpPr/>
           <p:nvPr/>
         </p:nvSpPr>
@@ -18052,7 +17683,7 @@
             <a:r>
               <a:rPr lang="en-US" sz="1100" b="1" dirty="0">
                 <a:solidFill>
-                  <a:srgbClr val="1B8A5A"/>
+                  <a:srgbClr val="5FD6A0"/>
                 </a:solidFill>
                 <a:latin typeface="Courier New" pitchFamily="34" charset="0"/>
                 <a:ea typeface="Courier New" pitchFamily="34" charset="-122"/>
@@ -18066,7 +17697,7 @@
       </p:sp>
       <p:sp>
         <p:nvSpPr>
-          <p:cNvPr id="10" name="Shape 7"/>
+          <p:cNvPr id="9" name="Shape 6"/>
           <p:cNvSpPr/>
           <p:nvPr/>
         </p:nvSpPr>
@@ -18081,7 +17712,7 @@
           <a:noFill/>
           <a:ln w="15875">
             <a:solidFill>
-              <a:srgbClr val="C9B8FB"/>
+              <a:srgbClr val="9B7BE8"/>
             </a:solidFill>
             <a:prstDash val="solid"/>
           </a:ln>
@@ -18089,7 +17720,7 @@
       </p:sp>
       <p:sp>
         <p:nvSpPr>
-          <p:cNvPr id="11" name="Shape 8"/>
+          <p:cNvPr id="10" name="Shape 7"/>
           <p:cNvSpPr/>
           <p:nvPr/>
         </p:nvSpPr>
@@ -18102,14 +17733,14 @@
             <a:avLst/>
           </a:prstGeom>
           <a:solidFill>
-            <a:srgbClr val="C9B8FB"/>
+            <a:srgbClr val="9B7BE8"/>
           </a:solidFill>
           <a:ln/>
         </p:spPr>
       </p:sp>
       <p:sp>
         <p:nvSpPr>
-          <p:cNvPr id="12" name="Shape 9"/>
+          <p:cNvPr id="11" name="Shape 8"/>
           <p:cNvSpPr/>
           <p:nvPr/>
         </p:nvSpPr>
@@ -18124,14 +17755,14 @@
             </a:avLst>
           </a:prstGeom>
           <a:solidFill>
-            <a:srgbClr val="FBE9E9"/>
+            <a:srgbClr val="2E1418"/>
           </a:solidFill>
           <a:ln/>
         </p:spPr>
       </p:sp>
       <p:sp>
         <p:nvSpPr>
-          <p:cNvPr id="13" name="Text 10"/>
+          <p:cNvPr id="12" name="Text 9"/>
           <p:cNvSpPr/>
           <p:nvPr/>
         </p:nvSpPr>
@@ -18156,7 +17787,7 @@
             <a:r>
               <a:rPr lang="en-US" sz="1100" b="1" dirty="0">
                 <a:solidFill>
-                  <a:srgbClr val="C62A2A"/>
+                  <a:srgbClr val="FF7B7B"/>
                 </a:solidFill>
                 <a:latin typeface="Courier New" pitchFamily="34" charset="0"/>
                 <a:ea typeface="Courier New" pitchFamily="34" charset="-122"/>
@@ -18170,7 +17801,7 @@
       </p:sp>
       <p:sp>
         <p:nvSpPr>
-          <p:cNvPr id="14" name="Shape 11"/>
+          <p:cNvPr id="13" name="Shape 10"/>
           <p:cNvSpPr/>
           <p:nvPr/>
         </p:nvSpPr>
@@ -18185,7 +17816,7 @@
           <a:noFill/>
           <a:ln w="15875">
             <a:solidFill>
-              <a:srgbClr val="C9B8FB"/>
+              <a:srgbClr val="9B7BE8"/>
             </a:solidFill>
             <a:prstDash val="solid"/>
           </a:ln>
@@ -18193,7 +17824,7 @@
       </p:sp>
       <p:sp>
         <p:nvSpPr>
-          <p:cNvPr id="15" name="Shape 12"/>
+          <p:cNvPr id="14" name="Shape 11"/>
           <p:cNvSpPr/>
           <p:nvPr/>
         </p:nvSpPr>
@@ -18206,14 +17837,14 @@
             <a:avLst/>
           </a:prstGeom>
           <a:solidFill>
-            <a:srgbClr val="C9B8FB"/>
+            <a:srgbClr val="9B7BE8"/>
           </a:solidFill>
           <a:ln/>
         </p:spPr>
       </p:sp>
       <p:sp>
         <p:nvSpPr>
-          <p:cNvPr id="16" name="Shape 13"/>
+          <p:cNvPr id="15" name="Shape 12"/>
           <p:cNvSpPr/>
           <p:nvPr/>
         </p:nvSpPr>
@@ -18228,14 +17859,14 @@
             </a:avLst>
           </a:prstGeom>
           <a:solidFill>
-            <a:srgbClr val="F8F0E2"/>
+            <a:srgbClr val="2A2010"/>
           </a:solidFill>
           <a:ln/>
         </p:spPr>
       </p:sp>
       <p:sp>
         <p:nvSpPr>
-          <p:cNvPr id="17" name="Text 14"/>
+          <p:cNvPr id="16" name="Text 13"/>
           <p:cNvSpPr/>
           <p:nvPr/>
         </p:nvSpPr>
@@ -18260,7 +17891,7 @@
             <a:r>
               <a:rPr lang="en-US" sz="1100" b="1" dirty="0">
                 <a:solidFill>
-                  <a:srgbClr val="9A5B12"/>
+                  <a:srgbClr val="E8A857"/>
                 </a:solidFill>
                 <a:latin typeface="Courier New" pitchFamily="34" charset="0"/>
                 <a:ea typeface="Courier New" pitchFamily="34" charset="-122"/>
@@ -18274,7 +17905,7 @@
       </p:sp>
       <p:sp>
         <p:nvSpPr>
-          <p:cNvPr id="18" name="Shape 15"/>
+          <p:cNvPr id="17" name="Shape 14"/>
           <p:cNvSpPr/>
           <p:nvPr/>
         </p:nvSpPr>
@@ -18289,7 +17920,7 @@
           <a:noFill/>
           <a:ln w="15875">
             <a:solidFill>
-              <a:srgbClr val="C9B8FB"/>
+              <a:srgbClr val="9B7BE8"/>
             </a:solidFill>
             <a:prstDash val="solid"/>
           </a:ln>
@@ -18297,7 +17928,7 @@
       </p:sp>
       <p:sp>
         <p:nvSpPr>
-          <p:cNvPr id="19" name="Shape 16"/>
+          <p:cNvPr id="18" name="Shape 15"/>
           <p:cNvSpPr/>
           <p:nvPr/>
         </p:nvSpPr>
@@ -18310,14 +17941,14 @@
             <a:avLst/>
           </a:prstGeom>
           <a:solidFill>
-            <a:srgbClr val="C9B8FB"/>
+            <a:srgbClr val="9B7BE8"/>
           </a:solidFill>
           <a:ln/>
         </p:spPr>
       </p:sp>
       <p:sp>
         <p:nvSpPr>
-          <p:cNvPr id="20" name="Shape 17"/>
+          <p:cNvPr id="19" name="Shape 16"/>
           <p:cNvSpPr/>
           <p:nvPr/>
         </p:nvSpPr>
@@ -18332,14 +17963,14 @@
             </a:avLst>
           </a:prstGeom>
           <a:solidFill>
-            <a:srgbClr val="FBE9E9"/>
+            <a:srgbClr val="2E1418"/>
           </a:solidFill>
           <a:ln/>
         </p:spPr>
       </p:sp>
       <p:sp>
         <p:nvSpPr>
-          <p:cNvPr id="21" name="Text 18"/>
+          <p:cNvPr id="20" name="Text 17"/>
           <p:cNvSpPr/>
           <p:nvPr/>
         </p:nvSpPr>
@@ -18364,7 +17995,7 @@
             <a:r>
               <a:rPr lang="en-US" sz="1100" b="1" dirty="0">
                 <a:solidFill>
-                  <a:srgbClr val="C62A2A"/>
+                  <a:srgbClr val="FF7B7B"/>
                 </a:solidFill>
                 <a:latin typeface="Courier New" pitchFamily="34" charset="0"/>
                 <a:ea typeface="Courier New" pitchFamily="34" charset="-122"/>
@@ -18378,7 +18009,7 @@
       </p:sp>
       <p:sp>
         <p:nvSpPr>
-          <p:cNvPr id="22" name="Shape 19"/>
+          <p:cNvPr id="21" name="Shape 18"/>
           <p:cNvSpPr/>
           <p:nvPr/>
         </p:nvSpPr>
@@ -18393,11 +18024,11 @@
             </a:avLst>
           </a:prstGeom>
           <a:solidFill>
-            <a:srgbClr val="FFFFFF"/>
+            <a:srgbClr val="17141F"/>
           </a:solidFill>
           <a:ln w="12700">
             <a:solidFill>
-              <a:srgbClr val="E6E7EC"/>
+              <a:srgbClr val="2E2A3A"/>
             </a:solidFill>
             <a:prstDash val="solid"/>
           </a:ln>
@@ -18405,7 +18036,7 @@
       </p:sp>
       <p:sp>
         <p:nvSpPr>
-          <p:cNvPr id="23" name="Text 20"/>
+          <p:cNvPr id="22" name="Text 19"/>
           <p:cNvSpPr/>
           <p:nvPr/>
         </p:nvSpPr>
@@ -18430,7 +18061,7 @@
             <a:r>
               <a:rPr lang="en-US" sz="1450" b="1" dirty="0">
                 <a:solidFill>
-                  <a:srgbClr val="111318"/>
+                  <a:srgbClr val="FFFFFF"/>
                 </a:solidFill>
                 <a:latin typeface="Montserrat" pitchFamily="34" charset="0"/>
                 <a:ea typeface="Montserrat" pitchFamily="34" charset="-122"/>
@@ -18444,7 +18075,7 @@
       </p:sp>
       <p:sp>
         <p:nvSpPr>
-          <p:cNvPr id="24" name="Text 21"/>
+          <p:cNvPr id="23" name="Text 20"/>
           <p:cNvSpPr/>
           <p:nvPr/>
         </p:nvSpPr>
@@ -18472,7 +18103,7 @@
             <a:r>
               <a:rPr lang="en-US" sz="1200" dirty="0">
                 <a:solidFill>
-                  <a:srgbClr val="555B66"/>
+                  <a:srgbClr val="AFA9BE"/>
                 </a:solidFill>
                 <a:latin typeface="Montserrat" pitchFamily="34" charset="0"/>
                 <a:ea typeface="Montserrat" pitchFamily="34" charset="-122"/>
@@ -18486,7 +18117,7 @@
       </p:sp>
       <p:sp>
         <p:nvSpPr>
-          <p:cNvPr id="25" name="Shape 22"/>
+          <p:cNvPr id="24" name="Shape 21"/>
           <p:cNvSpPr/>
           <p:nvPr/>
         </p:nvSpPr>
@@ -18501,14 +18132,14 @@
             </a:avLst>
           </a:prstGeom>
           <a:solidFill>
-            <a:srgbClr val="F8F0E2"/>
+            <a:srgbClr val="2A2010"/>
           </a:solidFill>
           <a:ln/>
         </p:spPr>
       </p:sp>
       <p:sp>
         <p:nvSpPr>
-          <p:cNvPr id="26" name="Text 23"/>
+          <p:cNvPr id="25" name="Text 22"/>
           <p:cNvSpPr/>
           <p:nvPr/>
         </p:nvSpPr>
@@ -18533,7 +18164,7 @@
             <a:r>
               <a:rPr lang="en-US" sz="1450" b="1" dirty="0">
                 <a:solidFill>
-                  <a:srgbClr val="9A5B12"/>
+                  <a:srgbClr val="E8A857"/>
                 </a:solidFill>
                 <a:latin typeface="Montserrat" pitchFamily="34" charset="0"/>
                 <a:ea typeface="Montserrat" pitchFamily="34" charset="-122"/>
@@ -18547,7 +18178,7 @@
       </p:sp>
       <p:sp>
         <p:nvSpPr>
-          <p:cNvPr id="27" name="Text 24"/>
+          <p:cNvPr id="26" name="Text 23"/>
           <p:cNvSpPr/>
           <p:nvPr/>
         </p:nvSpPr>
@@ -18575,7 +18206,7 @@
             <a:r>
               <a:rPr lang="en-US" sz="1200" dirty="0">
                 <a:solidFill>
-                  <a:srgbClr val="111318"/>
+                  <a:srgbClr val="FFFFFF"/>
                 </a:solidFill>
                 <a:latin typeface="Montserrat" pitchFamily="34" charset="0"/>
                 <a:ea typeface="Montserrat" pitchFamily="34" charset="-122"/>
@@ -18589,7 +18220,7 @@
       </p:sp>
       <p:sp>
         <p:nvSpPr>
-          <p:cNvPr id="28" name="Shape 25"/>
+          <p:cNvPr id="27" name="Shape 24"/>
           <p:cNvSpPr/>
           <p:nvPr/>
         </p:nvSpPr>
@@ -18604,14 +18235,14 @@
             </a:avLst>
           </a:prstGeom>
           <a:solidFill>
-            <a:srgbClr val="E9F4EF"/>
+            <a:srgbClr val="102A20"/>
           </a:solidFill>
           <a:ln/>
         </p:spPr>
       </p:sp>
       <p:sp>
         <p:nvSpPr>
-          <p:cNvPr id="29" name="Text 26"/>
+          <p:cNvPr id="28" name="Text 25"/>
           <p:cNvSpPr/>
           <p:nvPr/>
         </p:nvSpPr>
@@ -18636,7 +18267,7 @@
             <a:r>
               <a:rPr lang="en-US" sz="950" b="1" spc="150" kern="0" dirty="0">
                 <a:solidFill>
-                  <a:srgbClr val="1B8A5A"/>
+                  <a:srgbClr val="5FD6A0"/>
                 </a:solidFill>
                 <a:latin typeface="Courier New" pitchFamily="34" charset="0"/>
                 <a:ea typeface="Courier New" pitchFamily="34" charset="-122"/>
@@ -18650,7 +18281,7 @@
       </p:sp>
       <p:sp>
         <p:nvSpPr>
-          <p:cNvPr id="30" name="Text 27"/>
+          <p:cNvPr id="29" name="Text 26"/>
           <p:cNvSpPr/>
           <p:nvPr/>
         </p:nvSpPr>
@@ -18678,7 +18309,7 @@
             <a:r>
               <a:rPr lang="en-US" sz="1300" dirty="0">
                 <a:solidFill>
-                  <a:srgbClr val="111318"/>
+                  <a:srgbClr val="FFFFFF"/>
                 </a:solidFill>
                 <a:latin typeface="Montserrat" pitchFamily="34" charset="0"/>
                 <a:ea typeface="Montserrat" pitchFamily="34" charset="-122"/>
@@ -18720,7 +18351,7 @@
             <a:lvl1pPr>
               <a:defRPr sz="850">
                 <a:solidFill>
-                  <a:srgbClr val="9AA1AD"/>
+                  <a:srgbClr val="8A82A0"/>
                 </a:solidFill>
                 <a:latin typeface="Courier New"/>
                 <a:ea typeface="Courier New"/>
@@ -18765,29 +18396,7 @@
       </p:grpSpPr>
       <p:sp>
         <p:nvSpPr>
-          <p:cNvPr id="2" name="Shape 0"/>
-          <p:cNvSpPr/>
-          <p:nvPr/>
-        </p:nvSpPr>
-        <p:spPr>
-          <a:xfrm>
-            <a:off x="231343" y="194767"/>
-            <a:ext cx="11716207" cy="6473952"/>
-          </a:xfrm>
-          <a:prstGeom prst="roundRect">
-            <a:avLst>
-              <a:gd name="adj" fmla="val 3107"/>
-            </a:avLst>
-          </a:prstGeom>
-          <a:solidFill>
-            <a:srgbClr val="FFFFFF"/>
-          </a:solidFill>
-          <a:ln/>
-        </p:spPr>
-      </p:sp>
-      <p:sp>
-        <p:nvSpPr>
-          <p:cNvPr id="3" name="Text 1"/>
+          <p:cNvPr id="2" name="Text 0"/>
           <p:cNvSpPr/>
           <p:nvPr/>
         </p:nvSpPr>
@@ -18812,7 +18421,7 @@
             <a:r>
               <a:rPr lang="en-US" sz="2600" b="1" dirty="0">
                 <a:solidFill>
-                  <a:srgbClr val="5A05F4"/>
+                  <a:srgbClr val="C9A6FF"/>
                 </a:solidFill>
                 <a:latin typeface="Courier New" pitchFamily="34" charset="0"/>
                 <a:ea typeface="Courier New" pitchFamily="34" charset="-122"/>
@@ -18826,7 +18435,7 @@
       </p:sp>
       <p:sp>
         <p:nvSpPr>
-          <p:cNvPr id="4" name="Text 2"/>
+          <p:cNvPr id="3" name="Text 1"/>
           <p:cNvSpPr/>
           <p:nvPr/>
         </p:nvSpPr>
@@ -18851,7 +18460,7 @@
             <a:r>
               <a:rPr lang="en-US" sz="2400" b="1" dirty="0">
                 <a:solidFill>
-                  <a:srgbClr val="111318"/>
+                  <a:srgbClr val="FFFFFF"/>
                 </a:solidFill>
                 <a:latin typeface="Montserrat" pitchFamily="34" charset="0"/>
                 <a:ea typeface="Montserrat" pitchFamily="34" charset="-122"/>
@@ -18865,7 +18474,7 @@
       </p:sp>
       <p:sp>
         <p:nvSpPr>
-          <p:cNvPr id="5" name="Shape 3"/>
+          <p:cNvPr id="4" name="Shape 2"/>
           <p:cNvSpPr/>
           <p:nvPr/>
         </p:nvSpPr>
@@ -18880,14 +18489,14 @@
             </a:avLst>
           </a:prstGeom>
           <a:solidFill>
-            <a:srgbClr val="5A05F4"/>
+            <a:srgbClr val="C9A6FF"/>
           </a:solidFill>
           <a:ln/>
         </p:spPr>
       </p:sp>
       <p:sp>
         <p:nvSpPr>
-          <p:cNvPr id="6" name="Text 4"/>
+          <p:cNvPr id="5" name="Text 3"/>
           <p:cNvSpPr/>
           <p:nvPr/>
         </p:nvSpPr>
@@ -18912,7 +18521,7 @@
             <a:r>
               <a:rPr lang="en-US" sz="900" b="1" spc="100" kern="0" dirty="0">
                 <a:solidFill>
-                  <a:srgbClr val="FFFFFF"/>
+                  <a:srgbClr val="1C1140"/>
                 </a:solidFill>
                 <a:latin typeface="Courier New" pitchFamily="34" charset="0"/>
                 <a:ea typeface="Courier New" pitchFamily="34" charset="-122"/>
@@ -18926,7 +18535,7 @@
       </p:sp>
       <p:pic>
         <p:nvPicPr>
-          <p:cNvPr id="7" name="Image 0" descr="preencoded.png">    </p:cNvPr>
+          <p:cNvPr id="6" name="Image 0" descr="preencoded.png">    </p:cNvPr>
           <p:cNvPicPr>
             <a:picLocks noChangeAspect="1"/>
           </p:cNvPicPr>
@@ -18950,7 +18559,7 @@
       </p:pic>
       <p:sp>
         <p:nvSpPr>
-          <p:cNvPr id="8" name="Shape 5"/>
+          <p:cNvPr id="7" name="Shape 4"/>
           <p:cNvSpPr/>
           <p:nvPr/>
         </p:nvSpPr>
@@ -18965,11 +18574,11 @@
             </a:avLst>
           </a:prstGeom>
           <a:solidFill>
-            <a:srgbClr val="F5F4FA"/>
+            <a:srgbClr val="12101A"/>
           </a:solidFill>
           <a:ln w="12700">
             <a:solidFill>
-              <a:srgbClr val="E6E7EC"/>
+              <a:srgbClr val="2E2A3A"/>
             </a:solidFill>
             <a:prstDash val="solid"/>
           </a:ln>
@@ -18977,7 +18586,7 @@
       </p:sp>
       <p:sp>
         <p:nvSpPr>
-          <p:cNvPr id="9" name="Text 6"/>
+          <p:cNvPr id="8" name="Text 5"/>
           <p:cNvSpPr/>
           <p:nvPr/>
         </p:nvSpPr>
@@ -19005,7 +18614,7 @@
             <a:r>
               <a:rPr lang="en-US" sz="1300" dirty="0">
                 <a:solidFill>
-                  <a:srgbClr val="5A05F4"/>
+                  <a:srgbClr val="C9A6FF"/>
                 </a:solidFill>
                 <a:latin typeface="Courier New" pitchFamily="34" charset="0"/>
                 <a:ea typeface="Courier New" pitchFamily="34" charset="-122"/>
@@ -19022,7 +18631,7 @@
             <a:r>
               <a:rPr lang="en-US" sz="1300" dirty="0">
                 <a:solidFill>
-                  <a:srgbClr val="23262F"/>
+                  <a:srgbClr val="D8D4E4"/>
                 </a:solidFill>
                 <a:latin typeface="Courier New" pitchFamily="34" charset="0"/>
                 <a:ea typeface="Courier New" pitchFamily="34" charset="-122"/>
@@ -19039,7 +18648,7 @@
             <a:r>
               <a:rPr lang="en-US" sz="1300" dirty="0">
                 <a:solidFill>
-                  <a:srgbClr val="5A05F4"/>
+                  <a:srgbClr val="C9A6FF"/>
                 </a:solidFill>
                 <a:latin typeface="Courier New" pitchFamily="34" charset="0"/>
                 <a:ea typeface="Courier New" pitchFamily="34" charset="-122"/>
@@ -19056,7 +18665,7 @@
             <a:r>
               <a:rPr lang="en-US" sz="1300" dirty="0">
                 <a:solidFill>
-                  <a:srgbClr val="23262F"/>
+                  <a:srgbClr val="D8D4E4"/>
                 </a:solidFill>
                 <a:latin typeface="Courier New" pitchFamily="34" charset="0"/>
                 <a:ea typeface="Courier New" pitchFamily="34" charset="-122"/>
@@ -19076,7 +18685,7 @@
             <a:r>
               <a:rPr lang="en-US" sz="1300" dirty="0">
                 <a:solidFill>
-                  <a:srgbClr val="23262F"/>
+                  <a:srgbClr val="D8D4E4"/>
                 </a:solidFill>
                 <a:latin typeface="Courier New" pitchFamily="34" charset="0"/>
                 <a:ea typeface="Courier New" pitchFamily="34" charset="-122"/>
@@ -19093,7 +18702,7 @@
             <a:r>
               <a:rPr lang="en-US" sz="1300" dirty="0">
                 <a:solidFill>
-                  <a:srgbClr val="5A05F4"/>
+                  <a:srgbClr val="C9A6FF"/>
                 </a:solidFill>
                 <a:latin typeface="Courier New" pitchFamily="34" charset="0"/>
                 <a:ea typeface="Courier New" pitchFamily="34" charset="-122"/>
@@ -19110,7 +18719,7 @@
             <a:r>
               <a:rPr lang="en-US" sz="1300" dirty="0">
                 <a:solidFill>
-                  <a:srgbClr val="23262F"/>
+                  <a:srgbClr val="D8D4E4"/>
                 </a:solidFill>
                 <a:latin typeface="Courier New" pitchFamily="34" charset="0"/>
                 <a:ea typeface="Courier New" pitchFamily="34" charset="-122"/>
@@ -19124,7 +18733,7 @@
       </p:sp>
       <p:sp>
         <p:nvSpPr>
-          <p:cNvPr id="10" name="Shape 7"/>
+          <p:cNvPr id="9" name="Shape 6"/>
           <p:cNvSpPr/>
           <p:nvPr/>
         </p:nvSpPr>
@@ -19146,7 +18755,7 @@
       </p:sp>
       <p:sp>
         <p:nvSpPr>
-          <p:cNvPr id="11" name="Text 8"/>
+          <p:cNvPr id="10" name="Text 7"/>
           <p:cNvSpPr/>
           <p:nvPr/>
         </p:nvSpPr>
@@ -19188,7 +18797,7 @@
       </p:sp>
       <p:sp>
         <p:nvSpPr>
-          <p:cNvPr id="12" name="Shape 9"/>
+          <p:cNvPr id="11" name="Shape 8"/>
           <p:cNvSpPr/>
           <p:nvPr/>
         </p:nvSpPr>
@@ -19203,14 +18812,14 @@
             </a:avLst>
           </a:prstGeom>
           <a:solidFill>
-            <a:srgbClr val="F8F0E2"/>
+            <a:srgbClr val="2A2010"/>
           </a:solidFill>
           <a:ln/>
         </p:spPr>
       </p:sp>
       <p:sp>
         <p:nvSpPr>
-          <p:cNvPr id="13" name="Text 10"/>
+          <p:cNvPr id="12" name="Text 9"/>
           <p:cNvSpPr/>
           <p:nvPr/>
         </p:nvSpPr>
@@ -19235,7 +18844,7 @@
             <a:r>
               <a:rPr lang="en-US" sz="1450" b="1" dirty="0">
                 <a:solidFill>
-                  <a:srgbClr val="9A5B12"/>
+                  <a:srgbClr val="E8A857"/>
                 </a:solidFill>
                 <a:latin typeface="Montserrat" pitchFamily="34" charset="0"/>
                 <a:ea typeface="Montserrat" pitchFamily="34" charset="-122"/>
@@ -19249,7 +18858,7 @@
       </p:sp>
       <p:sp>
         <p:nvSpPr>
-          <p:cNvPr id="14" name="Text 11"/>
+          <p:cNvPr id="13" name="Text 10"/>
           <p:cNvSpPr/>
           <p:nvPr/>
         </p:nvSpPr>
@@ -19277,7 +18886,7 @@
             <a:r>
               <a:rPr lang="en-US" sz="1200" dirty="0">
                 <a:solidFill>
-                  <a:srgbClr val="111318"/>
+                  <a:srgbClr val="FFFFFF"/>
                 </a:solidFill>
                 <a:latin typeface="Montserrat" pitchFamily="34" charset="0"/>
                 <a:ea typeface="Montserrat" pitchFamily="34" charset="-122"/>
@@ -19291,7 +18900,7 @@
       </p:sp>
       <p:sp>
         <p:nvSpPr>
-          <p:cNvPr id="15" name="Shape 12"/>
+          <p:cNvPr id="14" name="Shape 11"/>
           <p:cNvSpPr/>
           <p:nvPr/>
         </p:nvSpPr>
@@ -19306,11 +18915,11 @@
             </a:avLst>
           </a:prstGeom>
           <a:solidFill>
-            <a:srgbClr val="FFFFFF"/>
+            <a:srgbClr val="17141F"/>
           </a:solidFill>
           <a:ln w="12700">
             <a:solidFill>
-              <a:srgbClr val="E6E7EC"/>
+              <a:srgbClr val="2E2A3A"/>
             </a:solidFill>
             <a:prstDash val="solid"/>
           </a:ln>
@@ -19318,7 +18927,7 @@
       </p:sp>
       <p:sp>
         <p:nvSpPr>
-          <p:cNvPr id="16" name="Text 13"/>
+          <p:cNvPr id="15" name="Text 12"/>
           <p:cNvSpPr/>
           <p:nvPr/>
         </p:nvSpPr>
@@ -19343,7 +18952,7 @@
             <a:r>
               <a:rPr lang="en-US" sz="1450" b="1" dirty="0">
                 <a:solidFill>
-                  <a:srgbClr val="111318"/>
+                  <a:srgbClr val="FFFFFF"/>
                 </a:solidFill>
                 <a:latin typeface="Montserrat" pitchFamily="34" charset="0"/>
                 <a:ea typeface="Montserrat" pitchFamily="34" charset="-122"/>
@@ -19357,7 +18966,7 @@
       </p:sp>
       <p:sp>
         <p:nvSpPr>
-          <p:cNvPr id="17" name="Text 14"/>
+          <p:cNvPr id="16" name="Text 13"/>
           <p:cNvSpPr/>
           <p:nvPr/>
         </p:nvSpPr>
@@ -19385,7 +18994,7 @@
             <a:r>
               <a:rPr lang="en-US" sz="1200" dirty="0">
                 <a:solidFill>
-                  <a:srgbClr val="555B66"/>
+                  <a:srgbClr val="AFA9BE"/>
                 </a:solidFill>
                 <a:latin typeface="Montserrat" pitchFamily="34" charset="0"/>
                 <a:ea typeface="Montserrat" pitchFamily="34" charset="-122"/>
@@ -19399,7 +19008,7 @@
       </p:sp>
       <p:sp>
         <p:nvSpPr>
-          <p:cNvPr id="18" name="Shape 15"/>
+          <p:cNvPr id="17" name="Shape 14"/>
           <p:cNvSpPr/>
           <p:nvPr/>
         </p:nvSpPr>
@@ -19414,11 +19023,11 @@
             </a:avLst>
           </a:prstGeom>
           <a:solidFill>
-            <a:srgbClr val="FFFFFF"/>
+            <a:srgbClr val="17141F"/>
           </a:solidFill>
           <a:ln w="12700">
             <a:solidFill>
-              <a:srgbClr val="E6E7EC"/>
+              <a:srgbClr val="2E2A3A"/>
             </a:solidFill>
             <a:prstDash val="solid"/>
           </a:ln>
@@ -19426,7 +19035,7 @@
       </p:sp>
       <p:sp>
         <p:nvSpPr>
-          <p:cNvPr id="19" name="Text 16"/>
+          <p:cNvPr id="18" name="Text 15"/>
           <p:cNvSpPr/>
           <p:nvPr/>
         </p:nvSpPr>
@@ -19451,7 +19060,7 @@
             <a:r>
               <a:rPr lang="en-US" sz="950" b="1" spc="150" kern="0" dirty="0">
                 <a:solidFill>
-                  <a:srgbClr val="111318"/>
+                  <a:srgbClr val="FFFFFF"/>
                 </a:solidFill>
                 <a:latin typeface="Courier New" pitchFamily="34" charset="0"/>
                 <a:ea typeface="Courier New" pitchFamily="34" charset="-122"/>
@@ -19465,7 +19074,7 @@
       </p:sp>
       <p:sp>
         <p:nvSpPr>
-          <p:cNvPr id="20" name="Text 17"/>
+          <p:cNvPr id="19" name="Text 16"/>
           <p:cNvSpPr/>
           <p:nvPr/>
         </p:nvSpPr>
@@ -19493,7 +19102,7 @@
             <a:r>
               <a:rPr lang="en-US" sz="1300" dirty="0">
                 <a:solidFill>
-                  <a:srgbClr val="111318"/>
+                  <a:srgbClr val="FFFFFF"/>
                 </a:solidFill>
                 <a:latin typeface="Montserrat" pitchFamily="34" charset="0"/>
                 <a:ea typeface="Montserrat" pitchFamily="34" charset="-122"/>
@@ -19535,7 +19144,7 @@
             <a:lvl1pPr>
               <a:defRPr sz="850">
                 <a:solidFill>
-                  <a:srgbClr val="9AA1AD"/>
+                  <a:srgbClr val="8A82A0"/>
                 </a:solidFill>
                 <a:latin typeface="Courier New"/>
                 <a:ea typeface="Courier New"/>
@@ -19580,29 +19189,7 @@
       </p:grpSpPr>
       <p:sp>
         <p:nvSpPr>
-          <p:cNvPr id="2" name="Shape 0"/>
-          <p:cNvSpPr/>
-          <p:nvPr/>
-        </p:nvSpPr>
-        <p:spPr>
-          <a:xfrm>
-            <a:off x="231343" y="194767"/>
-            <a:ext cx="11716207" cy="6473952"/>
-          </a:xfrm>
-          <a:prstGeom prst="roundRect">
-            <a:avLst>
-              <a:gd name="adj" fmla="val 3107"/>
-            </a:avLst>
-          </a:prstGeom>
-          <a:solidFill>
-            <a:srgbClr val="FFFFFF"/>
-          </a:solidFill>
-          <a:ln/>
-        </p:spPr>
-      </p:sp>
-      <p:sp>
-        <p:nvSpPr>
-          <p:cNvPr id="3" name="Text 1"/>
+          <p:cNvPr id="2" name="Text 0"/>
           <p:cNvSpPr/>
           <p:nvPr/>
         </p:nvSpPr>
@@ -19627,7 +19214,7 @@
             <a:r>
               <a:rPr lang="en-US" sz="2600" b="1" dirty="0">
                 <a:solidFill>
-                  <a:srgbClr val="5A05F4"/>
+                  <a:srgbClr val="C9A6FF"/>
                 </a:solidFill>
                 <a:latin typeface="Courier New" pitchFamily="34" charset="0"/>
                 <a:ea typeface="Courier New" pitchFamily="34" charset="-122"/>
@@ -19641,7 +19228,7 @@
       </p:sp>
       <p:sp>
         <p:nvSpPr>
-          <p:cNvPr id="4" name="Text 2"/>
+          <p:cNvPr id="3" name="Text 1"/>
           <p:cNvSpPr/>
           <p:nvPr/>
         </p:nvSpPr>
@@ -19666,7 +19253,7 @@
             <a:r>
               <a:rPr lang="en-US" sz="2400" b="1" dirty="0">
                 <a:solidFill>
-                  <a:srgbClr val="111318"/>
+                  <a:srgbClr val="FFFFFF"/>
                 </a:solidFill>
                 <a:latin typeface="Montserrat" pitchFamily="34" charset="0"/>
                 <a:ea typeface="Montserrat" pitchFamily="34" charset="-122"/>
@@ -19680,7 +19267,7 @@
       </p:sp>
       <p:sp>
         <p:nvSpPr>
-          <p:cNvPr id="5" name="Text 3"/>
+          <p:cNvPr id="4" name="Text 2"/>
           <p:cNvSpPr/>
           <p:nvPr/>
         </p:nvSpPr>
@@ -19708,7 +19295,7 @@
             <a:r>
               <a:rPr lang="en-US" sz="1300" dirty="0">
                 <a:solidFill>
-                  <a:srgbClr val="555B66"/>
+                  <a:srgbClr val="AFA9BE"/>
                 </a:solidFill>
                 <a:latin typeface="Montserrat" pitchFamily="34" charset="0"/>
                 <a:ea typeface="Montserrat" pitchFamily="34" charset="-122"/>
@@ -19722,7 +19309,7 @@
       </p:sp>
       <p:sp>
         <p:nvSpPr>
-          <p:cNvPr id="6" name="Shape 4"/>
+          <p:cNvPr id="5" name="Shape 3"/>
           <p:cNvSpPr/>
           <p:nvPr/>
         </p:nvSpPr>
@@ -19737,14 +19324,14 @@
             </a:avLst>
           </a:prstGeom>
           <a:solidFill>
-            <a:srgbClr val="5A05F4"/>
+            <a:srgbClr val="C9A6FF"/>
           </a:solidFill>
           <a:ln/>
         </p:spPr>
       </p:sp>
       <p:sp>
         <p:nvSpPr>
-          <p:cNvPr id="7" name="Text 5"/>
+          <p:cNvPr id="6" name="Text 4"/>
           <p:cNvSpPr/>
           <p:nvPr/>
         </p:nvSpPr>
@@ -19769,7 +19356,7 @@
             <a:r>
               <a:rPr lang="en-US" sz="900" b="1" spc="100" kern="0" dirty="0">
                 <a:solidFill>
-                  <a:srgbClr val="FFFFFF"/>
+                  <a:srgbClr val="1C1140"/>
                 </a:solidFill>
                 <a:latin typeface="Courier New" pitchFamily="34" charset="0"/>
                 <a:ea typeface="Courier New" pitchFamily="34" charset="-122"/>
@@ -19783,7 +19370,7 @@
       </p:sp>
       <p:pic>
         <p:nvPicPr>
-          <p:cNvPr id="8" name="Image 0" descr="preencoded.png">    </p:cNvPr>
+          <p:cNvPr id="7" name="Image 0" descr="preencoded.png">    </p:cNvPr>
           <p:cNvPicPr>
             <a:picLocks noChangeAspect="1"/>
           </p:cNvPicPr>
@@ -19807,7 +19394,7 @@
       </p:pic>
       <p:sp>
         <p:nvSpPr>
-          <p:cNvPr id="9" name="Shape 6"/>
+          <p:cNvPr id="8" name="Shape 5"/>
           <p:cNvSpPr/>
           <p:nvPr/>
         </p:nvSpPr>
@@ -19822,14 +19409,14 @@
             </a:avLst>
           </a:prstGeom>
           <a:solidFill>
-            <a:srgbClr val="EFEAFE"/>
+            <a:srgbClr val="1C1140"/>
           </a:solidFill>
           <a:ln/>
         </p:spPr>
       </p:sp>
       <p:sp>
         <p:nvSpPr>
-          <p:cNvPr id="10" name="Shape 7"/>
+          <p:cNvPr id="9" name="Shape 6"/>
           <p:cNvSpPr/>
           <p:nvPr/>
         </p:nvSpPr>
@@ -19842,14 +19429,14 @@
             <a:avLst/>
           </a:prstGeom>
           <a:solidFill>
-            <a:srgbClr val="5A05F4"/>
+            <a:srgbClr val="C9A6FF"/>
           </a:solidFill>
           <a:ln/>
         </p:spPr>
       </p:sp>
       <p:sp>
         <p:nvSpPr>
-          <p:cNvPr id="11" name="Text 8"/>
+          <p:cNvPr id="10" name="Text 7"/>
           <p:cNvSpPr/>
           <p:nvPr/>
         </p:nvSpPr>
@@ -19874,7 +19461,7 @@
             <a:r>
               <a:rPr lang="en-US" sz="1200" b="1" dirty="0">
                 <a:solidFill>
-                  <a:srgbClr val="EFEAFE"/>
+                  <a:srgbClr val="1C1140"/>
                 </a:solidFill>
                 <a:latin typeface="Courier New" pitchFamily="34" charset="0"/>
                 <a:ea typeface="Courier New" pitchFamily="34" charset="-122"/>
@@ -19888,7 +19475,7 @@
       </p:sp>
       <p:sp>
         <p:nvSpPr>
-          <p:cNvPr id="12" name="Text 9"/>
+          <p:cNvPr id="11" name="Text 8"/>
           <p:cNvSpPr/>
           <p:nvPr/>
         </p:nvSpPr>
@@ -19913,7 +19500,7 @@
             <a:r>
               <a:rPr lang="en-US" sz="1450" b="1" dirty="0">
                 <a:solidFill>
-                  <a:srgbClr val="5A05F4"/>
+                  <a:srgbClr val="C9A6FF"/>
                 </a:solidFill>
                 <a:latin typeface="Montserrat" pitchFamily="34" charset="0"/>
                 <a:ea typeface="Montserrat" pitchFamily="34" charset="-122"/>
@@ -19927,7 +19514,7 @@
       </p:sp>
       <p:sp>
         <p:nvSpPr>
-          <p:cNvPr id="13" name="Text 10"/>
+          <p:cNvPr id="12" name="Text 9"/>
           <p:cNvSpPr/>
           <p:nvPr/>
         </p:nvSpPr>
@@ -19955,7 +19542,7 @@
             <a:r>
               <a:rPr lang="en-US" sz="1200" dirty="0">
                 <a:solidFill>
-                  <a:srgbClr val="111318"/>
+                  <a:srgbClr val="FFFFFF"/>
                 </a:solidFill>
                 <a:latin typeface="Montserrat" pitchFamily="34" charset="0"/>
                 <a:ea typeface="Montserrat" pitchFamily="34" charset="-122"/>
@@ -19969,7 +19556,7 @@
       </p:sp>
       <p:sp>
         <p:nvSpPr>
-          <p:cNvPr id="14" name="Shape 11"/>
+          <p:cNvPr id="13" name="Shape 10"/>
           <p:cNvSpPr/>
           <p:nvPr/>
         </p:nvSpPr>
@@ -19984,14 +19571,14 @@
             </a:avLst>
           </a:prstGeom>
           <a:solidFill>
-            <a:srgbClr val="EFEAFE"/>
+            <a:srgbClr val="1C1140"/>
           </a:solidFill>
           <a:ln/>
         </p:spPr>
       </p:sp>
       <p:sp>
         <p:nvSpPr>
-          <p:cNvPr id="15" name="Shape 12"/>
+          <p:cNvPr id="14" name="Shape 11"/>
           <p:cNvSpPr/>
           <p:nvPr/>
         </p:nvSpPr>
@@ -20004,14 +19591,14 @@
             <a:avLst/>
           </a:prstGeom>
           <a:solidFill>
-            <a:srgbClr val="5A05F4"/>
+            <a:srgbClr val="C9A6FF"/>
           </a:solidFill>
           <a:ln/>
         </p:spPr>
       </p:sp>
       <p:sp>
         <p:nvSpPr>
-          <p:cNvPr id="16" name="Text 13"/>
+          <p:cNvPr id="15" name="Text 12"/>
           <p:cNvSpPr/>
           <p:nvPr/>
         </p:nvSpPr>
@@ -20036,7 +19623,7 @@
             <a:r>
               <a:rPr lang="en-US" sz="1200" b="1" dirty="0">
                 <a:solidFill>
-                  <a:srgbClr val="EFEAFE"/>
+                  <a:srgbClr val="1C1140"/>
                 </a:solidFill>
                 <a:latin typeface="Courier New" pitchFamily="34" charset="0"/>
                 <a:ea typeface="Courier New" pitchFamily="34" charset="-122"/>
@@ -20050,7 +19637,7 @@
       </p:sp>
       <p:sp>
         <p:nvSpPr>
-          <p:cNvPr id="17" name="Text 14"/>
+          <p:cNvPr id="16" name="Text 13"/>
           <p:cNvSpPr/>
           <p:nvPr/>
         </p:nvSpPr>
@@ -20075,7 +19662,7 @@
             <a:r>
               <a:rPr lang="en-US" sz="1450" b="1" dirty="0">
                 <a:solidFill>
-                  <a:srgbClr val="5A05F4"/>
+                  <a:srgbClr val="C9A6FF"/>
                 </a:solidFill>
                 <a:latin typeface="Montserrat" pitchFamily="34" charset="0"/>
                 <a:ea typeface="Montserrat" pitchFamily="34" charset="-122"/>
@@ -20089,7 +19676,7 @@
       </p:sp>
       <p:sp>
         <p:nvSpPr>
-          <p:cNvPr id="18" name="Text 15"/>
+          <p:cNvPr id="17" name="Text 14"/>
           <p:cNvSpPr/>
           <p:nvPr/>
         </p:nvSpPr>
@@ -20117,7 +19704,7 @@
             <a:r>
               <a:rPr lang="en-US" sz="1200" dirty="0">
                 <a:solidFill>
-                  <a:srgbClr val="111318"/>
+                  <a:srgbClr val="FFFFFF"/>
                 </a:solidFill>
                 <a:latin typeface="Montserrat" pitchFamily="34" charset="0"/>
                 <a:ea typeface="Montserrat" pitchFamily="34" charset="-122"/>
@@ -20131,7 +19718,7 @@
       </p:sp>
       <p:sp>
         <p:nvSpPr>
-          <p:cNvPr id="19" name="Shape 16"/>
+          <p:cNvPr id="18" name="Shape 15"/>
           <p:cNvSpPr/>
           <p:nvPr/>
         </p:nvSpPr>
@@ -20146,14 +19733,14 @@
             </a:avLst>
           </a:prstGeom>
           <a:solidFill>
-            <a:srgbClr val="EFEAFE"/>
+            <a:srgbClr val="1C1140"/>
           </a:solidFill>
           <a:ln/>
         </p:spPr>
       </p:sp>
       <p:sp>
         <p:nvSpPr>
-          <p:cNvPr id="20" name="Shape 17"/>
+          <p:cNvPr id="19" name="Shape 16"/>
           <p:cNvSpPr/>
           <p:nvPr/>
         </p:nvSpPr>
@@ -20166,14 +19753,14 @@
             <a:avLst/>
           </a:prstGeom>
           <a:solidFill>
-            <a:srgbClr val="5A05F4"/>
+            <a:srgbClr val="C9A6FF"/>
           </a:solidFill>
           <a:ln/>
         </p:spPr>
       </p:sp>
       <p:sp>
         <p:nvSpPr>
-          <p:cNvPr id="21" name="Text 18"/>
+          <p:cNvPr id="20" name="Text 17"/>
           <p:cNvSpPr/>
           <p:nvPr/>
         </p:nvSpPr>
@@ -20198,7 +19785,7 @@
             <a:r>
               <a:rPr lang="en-US" sz="1200" b="1" dirty="0">
                 <a:solidFill>
-                  <a:srgbClr val="EFEAFE"/>
+                  <a:srgbClr val="1C1140"/>
                 </a:solidFill>
                 <a:latin typeface="Courier New" pitchFamily="34" charset="0"/>
                 <a:ea typeface="Courier New" pitchFamily="34" charset="-122"/>
@@ -20212,7 +19799,7 @@
       </p:sp>
       <p:sp>
         <p:nvSpPr>
-          <p:cNvPr id="22" name="Text 19"/>
+          <p:cNvPr id="21" name="Text 18"/>
           <p:cNvSpPr/>
           <p:nvPr/>
         </p:nvSpPr>
@@ -20237,7 +19824,7 @@
             <a:r>
               <a:rPr lang="en-US" sz="1450" b="1" dirty="0">
                 <a:solidFill>
-                  <a:srgbClr val="5A05F4"/>
+                  <a:srgbClr val="C9A6FF"/>
                 </a:solidFill>
                 <a:latin typeface="Montserrat" pitchFamily="34" charset="0"/>
                 <a:ea typeface="Montserrat" pitchFamily="34" charset="-122"/>
@@ -20251,7 +19838,7 @@
       </p:sp>
       <p:sp>
         <p:nvSpPr>
-          <p:cNvPr id="23" name="Text 20"/>
+          <p:cNvPr id="22" name="Text 19"/>
           <p:cNvSpPr/>
           <p:nvPr/>
         </p:nvSpPr>
@@ -20279,7 +19866,7 @@
             <a:r>
               <a:rPr lang="en-US" sz="1200" dirty="0">
                 <a:solidFill>
-                  <a:srgbClr val="111318"/>
+                  <a:srgbClr val="FFFFFF"/>
                 </a:solidFill>
                 <a:latin typeface="Montserrat" pitchFamily="34" charset="0"/>
                 <a:ea typeface="Montserrat" pitchFamily="34" charset="-122"/>
@@ -20293,7 +19880,7 @@
       </p:sp>
       <p:sp>
         <p:nvSpPr>
-          <p:cNvPr id="24" name="Text 21"/>
+          <p:cNvPr id="23" name="Text 20"/>
           <p:cNvSpPr/>
           <p:nvPr/>
         </p:nvSpPr>
@@ -20318,7 +19905,7 @@
             <a:r>
               <a:rPr lang="en-US" sz="900" b="1" spc="150" kern="0" dirty="0">
                 <a:solidFill>
-                  <a:srgbClr val="9AA1AD"/>
+                  <a:srgbClr val="8A82A0"/>
                 </a:solidFill>
                 <a:latin typeface="Courier New" pitchFamily="34" charset="0"/>
                 <a:ea typeface="Courier New" pitchFamily="34" charset="-122"/>
@@ -20332,7 +19919,7 @@
       </p:sp>
       <p:sp>
         <p:nvSpPr>
-          <p:cNvPr id="25" name="Text 22"/>
+          <p:cNvPr id="24" name="Text 21"/>
           <p:cNvSpPr/>
           <p:nvPr/>
         </p:nvSpPr>
@@ -20357,7 +19944,7 @@
             <a:r>
               <a:rPr lang="en-US" sz="1250" dirty="0">
                 <a:solidFill>
-                  <a:srgbClr val="111318"/>
+                  <a:srgbClr val="FFFFFF"/>
                 </a:solidFill>
                 <a:latin typeface="Montserrat" pitchFamily="34" charset="0"/>
                 <a:ea typeface="Montserrat" pitchFamily="34" charset="-122"/>
@@ -20371,7 +19958,7 @@
       </p:sp>
       <p:sp>
         <p:nvSpPr>
-          <p:cNvPr id="26" name="Shape 23"/>
+          <p:cNvPr id="25" name="Shape 22"/>
           <p:cNvSpPr/>
           <p:nvPr/>
         </p:nvSpPr>
@@ -20386,14 +19973,14 @@
             </a:avLst>
           </a:prstGeom>
           <a:solidFill>
-            <a:srgbClr val="1B8A5A"/>
+            <a:srgbClr val="5FD6A0"/>
           </a:solidFill>
           <a:ln/>
         </p:spPr>
       </p:sp>
       <p:sp>
         <p:nvSpPr>
-          <p:cNvPr id="27" name="Text 24"/>
+          <p:cNvPr id="26" name="Text 23"/>
           <p:cNvSpPr/>
           <p:nvPr/>
         </p:nvSpPr>
@@ -20418,7 +20005,7 @@
             <a:r>
               <a:rPr lang="en-US" sz="1150" b="1" dirty="0">
                 <a:solidFill>
-                  <a:srgbClr val="1B8A5A"/>
+                  <a:srgbClr val="5FD6A0"/>
                 </a:solidFill>
                 <a:latin typeface="Montserrat" pitchFamily="34" charset="0"/>
                 <a:ea typeface="Montserrat" pitchFamily="34" charset="-122"/>
@@ -20432,7 +20019,7 @@
       </p:sp>
       <p:sp>
         <p:nvSpPr>
-          <p:cNvPr id="28" name="Text 25"/>
+          <p:cNvPr id="27" name="Text 24"/>
           <p:cNvSpPr/>
           <p:nvPr/>
         </p:nvSpPr>
@@ -20457,7 +20044,7 @@
             <a:r>
               <a:rPr lang="en-US" sz="1250" dirty="0">
                 <a:solidFill>
-                  <a:srgbClr val="111318"/>
+                  <a:srgbClr val="FFFFFF"/>
                 </a:solidFill>
                 <a:latin typeface="Montserrat" pitchFamily="34" charset="0"/>
                 <a:ea typeface="Montserrat" pitchFamily="34" charset="-122"/>
@@ -20471,7 +20058,7 @@
       </p:sp>
       <p:sp>
         <p:nvSpPr>
-          <p:cNvPr id="29" name="Shape 26"/>
+          <p:cNvPr id="28" name="Shape 25"/>
           <p:cNvSpPr/>
           <p:nvPr/>
         </p:nvSpPr>
@@ -20486,14 +20073,14 @@
             </a:avLst>
           </a:prstGeom>
           <a:solidFill>
-            <a:srgbClr val="C62A2A"/>
+            <a:srgbClr val="FF7B7B"/>
           </a:solidFill>
           <a:ln/>
         </p:spPr>
       </p:sp>
       <p:sp>
         <p:nvSpPr>
-          <p:cNvPr id="30" name="Text 27"/>
+          <p:cNvPr id="29" name="Text 26"/>
           <p:cNvSpPr/>
           <p:nvPr/>
         </p:nvSpPr>
@@ -20518,7 +20105,7 @@
             <a:r>
               <a:rPr lang="en-US" sz="1150" b="1" dirty="0">
                 <a:solidFill>
-                  <a:srgbClr val="C62A2A"/>
+                  <a:srgbClr val="FF7B7B"/>
                 </a:solidFill>
                 <a:latin typeface="Montserrat" pitchFamily="34" charset="0"/>
                 <a:ea typeface="Montserrat" pitchFamily="34" charset="-122"/>
@@ -20532,7 +20119,7 @@
       </p:sp>
       <p:sp>
         <p:nvSpPr>
-          <p:cNvPr id="31" name="Shape 28"/>
+          <p:cNvPr id="30" name="Shape 27"/>
           <p:cNvSpPr/>
           <p:nvPr/>
         </p:nvSpPr>
@@ -20547,14 +20134,14 @@
             </a:avLst>
           </a:prstGeom>
           <a:solidFill>
-            <a:srgbClr val="FBE9E9"/>
+            <a:srgbClr val="2E1418"/>
           </a:solidFill>
           <a:ln/>
         </p:spPr>
       </p:sp>
       <p:sp>
         <p:nvSpPr>
-          <p:cNvPr id="32" name="Text 29"/>
+          <p:cNvPr id="31" name="Text 28"/>
           <p:cNvSpPr/>
           <p:nvPr/>
         </p:nvSpPr>
@@ -20579,7 +20166,7 @@
             <a:r>
               <a:rPr lang="en-US" sz="950" b="1" spc="150" kern="0" dirty="0">
                 <a:solidFill>
-                  <a:srgbClr val="C62A2A"/>
+                  <a:srgbClr val="FF7B7B"/>
                 </a:solidFill>
                 <a:latin typeface="Courier New" pitchFamily="34" charset="0"/>
                 <a:ea typeface="Courier New" pitchFamily="34" charset="-122"/>
@@ -20593,7 +20180,7 @@
       </p:sp>
       <p:sp>
         <p:nvSpPr>
-          <p:cNvPr id="33" name="Text 30"/>
+          <p:cNvPr id="32" name="Text 29"/>
           <p:cNvSpPr/>
           <p:nvPr/>
         </p:nvSpPr>
@@ -20621,7 +20208,7 @@
             <a:r>
               <a:rPr lang="en-US" sz="1300" dirty="0">
                 <a:solidFill>
-                  <a:srgbClr val="111318"/>
+                  <a:srgbClr val="FFFFFF"/>
                 </a:solidFill>
                 <a:latin typeface="Montserrat" pitchFamily="34" charset="0"/>
                 <a:ea typeface="Montserrat" pitchFamily="34" charset="-122"/>
@@ -20663,7 +20250,7 @@
             <a:lvl1pPr>
               <a:defRPr sz="850">
                 <a:solidFill>
-                  <a:srgbClr val="9AA1AD"/>
+                  <a:srgbClr val="8A82A0"/>
                 </a:solidFill>
                 <a:latin typeface="Courier New"/>
                 <a:ea typeface="Courier New"/>
@@ -20708,29 +20295,7 @@
       </p:grpSpPr>
       <p:sp>
         <p:nvSpPr>
-          <p:cNvPr id="2" name="Shape 0"/>
-          <p:cNvSpPr/>
-          <p:nvPr/>
-        </p:nvSpPr>
-        <p:spPr>
-          <a:xfrm>
-            <a:off x="231343" y="194767"/>
-            <a:ext cx="11716207" cy="6473952"/>
-          </a:xfrm>
-          <a:prstGeom prst="roundRect">
-            <a:avLst>
-              <a:gd name="adj" fmla="val 3107"/>
-            </a:avLst>
-          </a:prstGeom>
-          <a:solidFill>
-            <a:srgbClr val="FFFFFF"/>
-          </a:solidFill>
-          <a:ln/>
-        </p:spPr>
-      </p:sp>
-      <p:sp>
-        <p:nvSpPr>
-          <p:cNvPr id="3" name="Text 1"/>
+          <p:cNvPr id="2" name="Text 0"/>
           <p:cNvSpPr/>
           <p:nvPr/>
         </p:nvSpPr>
@@ -20755,7 +20320,7 @@
             <a:r>
               <a:rPr lang="en-US" sz="2600" b="1" dirty="0">
                 <a:solidFill>
-                  <a:srgbClr val="5A05F4"/>
+                  <a:srgbClr val="C9A6FF"/>
                 </a:solidFill>
                 <a:latin typeface="Courier New" pitchFamily="34" charset="0"/>
                 <a:ea typeface="Courier New" pitchFamily="34" charset="-122"/>
@@ -20769,7 +20334,7 @@
       </p:sp>
       <p:sp>
         <p:nvSpPr>
-          <p:cNvPr id="4" name="Text 2"/>
+          <p:cNvPr id="3" name="Text 1"/>
           <p:cNvSpPr/>
           <p:nvPr/>
         </p:nvSpPr>
@@ -20794,7 +20359,7 @@
             <a:r>
               <a:rPr lang="en-US" sz="2400" b="1" dirty="0">
                 <a:solidFill>
-                  <a:srgbClr val="111318"/>
+                  <a:srgbClr val="FFFFFF"/>
                 </a:solidFill>
                 <a:latin typeface="Montserrat" pitchFamily="34" charset="0"/>
                 <a:ea typeface="Montserrat" pitchFamily="34" charset="-122"/>
@@ -20808,7 +20373,7 @@
       </p:sp>
       <p:sp>
         <p:nvSpPr>
-          <p:cNvPr id="5" name="Shape 3"/>
+          <p:cNvPr id="4" name="Shape 2"/>
           <p:cNvSpPr/>
           <p:nvPr/>
         </p:nvSpPr>
@@ -20823,14 +20388,14 @@
             </a:avLst>
           </a:prstGeom>
           <a:solidFill>
-            <a:srgbClr val="5A05F4"/>
+            <a:srgbClr val="C9A6FF"/>
           </a:solidFill>
           <a:ln/>
         </p:spPr>
       </p:sp>
       <p:sp>
         <p:nvSpPr>
-          <p:cNvPr id="6" name="Text 4"/>
+          <p:cNvPr id="5" name="Text 3"/>
           <p:cNvSpPr/>
           <p:nvPr/>
         </p:nvSpPr>
@@ -20855,7 +20420,7 @@
             <a:r>
               <a:rPr lang="en-US" sz="900" b="1" spc="100" kern="0" dirty="0">
                 <a:solidFill>
-                  <a:srgbClr val="FFFFFF"/>
+                  <a:srgbClr val="1C1140"/>
                 </a:solidFill>
                 <a:latin typeface="Courier New" pitchFamily="34" charset="0"/>
                 <a:ea typeface="Courier New" pitchFamily="34" charset="-122"/>
@@ -20869,7 +20434,7 @@
       </p:sp>
       <p:pic>
         <p:nvPicPr>
-          <p:cNvPr id="7" name="Image 0" descr="preencoded.png">    </p:cNvPr>
+          <p:cNvPr id="6" name="Image 0" descr="preencoded.png">    </p:cNvPr>
           <p:cNvPicPr>
             <a:picLocks noChangeAspect="1"/>
           </p:cNvPicPr>
@@ -20893,7 +20458,7 @@
       </p:pic>
       <p:sp>
         <p:nvSpPr>
-          <p:cNvPr id="8" name="Shape 5"/>
+          <p:cNvPr id="7" name="Shape 4"/>
           <p:cNvSpPr/>
           <p:nvPr/>
         </p:nvSpPr>
@@ -20908,11 +20473,11 @@
             </a:avLst>
           </a:prstGeom>
           <a:solidFill>
-            <a:srgbClr val="F5F4FA"/>
+            <a:srgbClr val="12101A"/>
           </a:solidFill>
           <a:ln w="12700">
             <a:solidFill>
-              <a:srgbClr val="E6E7EC"/>
+              <a:srgbClr val="2E2A3A"/>
             </a:solidFill>
             <a:prstDash val="solid"/>
           </a:ln>
@@ -20920,7 +20485,7 @@
       </p:sp>
       <p:sp>
         <p:nvSpPr>
-          <p:cNvPr id="9" name="Text 6"/>
+          <p:cNvPr id="8" name="Text 5"/>
           <p:cNvSpPr/>
           <p:nvPr/>
         </p:nvSpPr>
@@ -20948,7 +20513,7 @@
             <a:r>
               <a:rPr lang="en-US" sz="1150" dirty="0">
                 <a:solidFill>
-                  <a:srgbClr val="8A7FA6"/>
+                  <a:srgbClr val="8A82A0"/>
                 </a:solidFill>
                 <a:latin typeface="Courier New" pitchFamily="34" charset="0"/>
                 <a:ea typeface="Courier New" pitchFamily="34" charset="-122"/>
@@ -20968,7 +20533,7 @@
             <a:r>
               <a:rPr lang="en-US" sz="1150" dirty="0">
                 <a:solidFill>
-                  <a:srgbClr val="5A05F4"/>
+                  <a:srgbClr val="C9A6FF"/>
                 </a:solidFill>
                 <a:latin typeface="Courier New" pitchFamily="34" charset="0"/>
                 <a:ea typeface="Courier New" pitchFamily="34" charset="-122"/>
@@ -20988,7 +20553,7 @@
             <a:r>
               <a:rPr lang="en-US" sz="1150" dirty="0">
                 <a:solidFill>
-                  <a:srgbClr val="23262F"/>
+                  <a:srgbClr val="D8D4E4"/>
                 </a:solidFill>
                 <a:latin typeface="Courier New" pitchFamily="34" charset="0"/>
                 <a:ea typeface="Courier New" pitchFamily="34" charset="-122"/>
@@ -21008,7 +20573,7 @@
             <a:r>
               <a:rPr lang="en-US" sz="1150" dirty="0">
                 <a:solidFill>
-                  <a:srgbClr val="177245"/>
+                  <a:srgbClr val="7FD9A6"/>
                 </a:solidFill>
                 <a:latin typeface="Courier New" pitchFamily="34" charset="0"/>
                 <a:ea typeface="Courier New" pitchFamily="34" charset="-122"/>
@@ -21028,7 +20593,7 @@
             <a:r>
               <a:rPr lang="en-US" sz="1150" dirty="0">
                 <a:solidFill>
-                  <a:srgbClr val="177245"/>
+                  <a:srgbClr val="7FD9A6"/>
                 </a:solidFill>
                 <a:latin typeface="Courier New" pitchFamily="34" charset="0"/>
                 <a:ea typeface="Courier New" pitchFamily="34" charset="-122"/>
@@ -21048,7 +20613,7 @@
             <a:r>
               <a:rPr lang="en-US" sz="1150" dirty="0">
                 <a:solidFill>
-                  <a:srgbClr val="23262F"/>
+                  <a:srgbClr val="D8D4E4"/>
                 </a:solidFill>
                 <a:latin typeface="Courier New" pitchFamily="34" charset="0"/>
                 <a:ea typeface="Courier New" pitchFamily="34" charset="-122"/>
@@ -21062,7 +20627,7 @@
       </p:sp>
       <p:sp>
         <p:nvSpPr>
-          <p:cNvPr id="10" name="Shape 7"/>
+          <p:cNvPr id="9" name="Shape 6"/>
           <p:cNvSpPr/>
           <p:nvPr/>
         </p:nvSpPr>
@@ -21077,14 +20642,14 @@
             </a:avLst>
           </a:prstGeom>
           <a:solidFill>
-            <a:srgbClr val="FBE9E9"/>
+            <a:srgbClr val="2E1418"/>
           </a:solidFill>
           <a:ln/>
         </p:spPr>
       </p:sp>
       <p:sp>
         <p:nvSpPr>
-          <p:cNvPr id="11" name="Text 8"/>
+          <p:cNvPr id="10" name="Text 7"/>
           <p:cNvSpPr/>
           <p:nvPr/>
         </p:nvSpPr>
@@ -21109,7 +20674,7 @@
             <a:r>
               <a:rPr lang="en-US" sz="3400" b="1" dirty="0">
                 <a:solidFill>
-                  <a:srgbClr val="C62A2A"/>
+                  <a:srgbClr val="FF7B7B"/>
                 </a:solidFill>
                 <a:latin typeface="Montserrat" pitchFamily="34" charset="0"/>
                 <a:ea typeface="Montserrat" pitchFamily="34" charset="-122"/>
@@ -21123,7 +20688,7 @@
       </p:sp>
       <p:sp>
         <p:nvSpPr>
-          <p:cNvPr id="12" name="Text 9"/>
+          <p:cNvPr id="11" name="Text 8"/>
           <p:cNvSpPr/>
           <p:nvPr/>
         </p:nvSpPr>
@@ -21148,7 +20713,7 @@
             <a:r>
               <a:rPr lang="en-US" sz="1150" dirty="0">
                 <a:solidFill>
-                  <a:srgbClr val="C62A2A"/>
+                  <a:srgbClr val="FF7B7B"/>
                 </a:solidFill>
                 <a:latin typeface="Montserrat" pitchFamily="34" charset="0"/>
                 <a:ea typeface="Montserrat" pitchFamily="34" charset="-122"/>
@@ -21162,7 +20727,7 @@
       </p:sp>
       <p:sp>
         <p:nvSpPr>
-          <p:cNvPr id="13" name="Shape 10"/>
+          <p:cNvPr id="12" name="Shape 9"/>
           <p:cNvSpPr/>
           <p:nvPr/>
         </p:nvSpPr>
@@ -21177,14 +20742,14 @@
             </a:avLst>
           </a:prstGeom>
           <a:solidFill>
-            <a:srgbClr val="F8F0E2"/>
+            <a:srgbClr val="2A2010"/>
           </a:solidFill>
           <a:ln/>
         </p:spPr>
       </p:sp>
       <p:sp>
         <p:nvSpPr>
-          <p:cNvPr id="14" name="Text 11"/>
+          <p:cNvPr id="13" name="Text 10"/>
           <p:cNvSpPr/>
           <p:nvPr/>
         </p:nvSpPr>
@@ -21209,7 +20774,7 @@
             <a:r>
               <a:rPr lang="en-US" sz="3400" b="1" dirty="0">
                 <a:solidFill>
-                  <a:srgbClr val="9A5B12"/>
+                  <a:srgbClr val="E8A857"/>
                 </a:solidFill>
                 <a:latin typeface="Montserrat" pitchFamily="34" charset="0"/>
                 <a:ea typeface="Montserrat" pitchFamily="34" charset="-122"/>
@@ -21223,7 +20788,7 @@
       </p:sp>
       <p:sp>
         <p:nvSpPr>
-          <p:cNvPr id="15" name="Text 12"/>
+          <p:cNvPr id="14" name="Text 11"/>
           <p:cNvSpPr/>
           <p:nvPr/>
         </p:nvSpPr>
@@ -21248,7 +20813,7 @@
             <a:r>
               <a:rPr lang="en-US" sz="1150" dirty="0">
                 <a:solidFill>
-                  <a:srgbClr val="9A5B12"/>
+                  <a:srgbClr val="E8A857"/>
                 </a:solidFill>
                 <a:latin typeface="Montserrat" pitchFamily="34" charset="0"/>
                 <a:ea typeface="Montserrat" pitchFamily="34" charset="-122"/>
@@ -21262,7 +20827,7 @@
       </p:sp>
       <p:sp>
         <p:nvSpPr>
-          <p:cNvPr id="16" name="Shape 13"/>
+          <p:cNvPr id="15" name="Shape 12"/>
           <p:cNvSpPr/>
           <p:nvPr/>
         </p:nvSpPr>
@@ -21284,7 +20849,7 @@
       </p:sp>
       <p:sp>
         <p:nvSpPr>
-          <p:cNvPr id="17" name="Text 14"/>
+          <p:cNvPr id="16" name="Text 13"/>
           <p:cNvSpPr/>
           <p:nvPr/>
         </p:nvSpPr>
@@ -21326,7 +20891,7 @@
       </p:sp>
       <p:sp>
         <p:nvSpPr>
-          <p:cNvPr id="18" name="Shape 15"/>
+          <p:cNvPr id="17" name="Shape 14"/>
           <p:cNvSpPr/>
           <p:nvPr/>
         </p:nvSpPr>
@@ -21341,11 +20906,11 @@
             </a:avLst>
           </a:prstGeom>
           <a:solidFill>
-            <a:srgbClr val="FFFFFF"/>
+            <a:srgbClr val="17141F"/>
           </a:solidFill>
           <a:ln w="12700">
             <a:solidFill>
-              <a:srgbClr val="E6E7EC"/>
+              <a:srgbClr val="2E2A3A"/>
             </a:solidFill>
             <a:prstDash val="solid"/>
           </a:ln>
@@ -21353,7 +20918,7 @@
       </p:sp>
       <p:sp>
         <p:nvSpPr>
-          <p:cNvPr id="19" name="Text 16"/>
+          <p:cNvPr id="18" name="Text 15"/>
           <p:cNvSpPr/>
           <p:nvPr/>
         </p:nvSpPr>
@@ -21378,7 +20943,7 @@
             <a:r>
               <a:rPr lang="en-US" sz="950" b="1" spc="150" kern="0" dirty="0">
                 <a:solidFill>
-                  <a:srgbClr val="111318"/>
+                  <a:srgbClr val="FFFFFF"/>
                 </a:solidFill>
                 <a:latin typeface="Courier New" pitchFamily="34" charset="0"/>
                 <a:ea typeface="Courier New" pitchFamily="34" charset="-122"/>
@@ -21392,7 +20957,7 @@
       </p:sp>
       <p:sp>
         <p:nvSpPr>
-          <p:cNvPr id="20" name="Text 17"/>
+          <p:cNvPr id="19" name="Text 16"/>
           <p:cNvSpPr/>
           <p:nvPr/>
         </p:nvSpPr>
@@ -21420,7 +20985,7 @@
             <a:r>
               <a:rPr lang="en-US" sz="1300" dirty="0">
                 <a:solidFill>
-                  <a:srgbClr val="111318"/>
+                  <a:srgbClr val="FFFFFF"/>
                 </a:solidFill>
                 <a:latin typeface="Montserrat" pitchFamily="34" charset="0"/>
                 <a:ea typeface="Montserrat" pitchFamily="34" charset="-122"/>
@@ -21462,7 +21027,7 @@
             <a:lvl1pPr>
               <a:defRPr sz="850">
                 <a:solidFill>
-                  <a:srgbClr val="9AA1AD"/>
+                  <a:srgbClr val="8A82A0"/>
                 </a:solidFill>
                 <a:latin typeface="Courier New"/>
                 <a:ea typeface="Courier New"/>
@@ -21507,29 +21072,7 @@
       </p:grpSpPr>
       <p:sp>
         <p:nvSpPr>
-          <p:cNvPr id="2" name="Shape 0"/>
-          <p:cNvSpPr/>
-          <p:nvPr/>
-        </p:nvSpPr>
-        <p:spPr>
-          <a:xfrm>
-            <a:off x="231343" y="194767"/>
-            <a:ext cx="11716207" cy="6473952"/>
-          </a:xfrm>
-          <a:prstGeom prst="roundRect">
-            <a:avLst>
-              <a:gd name="adj" fmla="val 3107"/>
-            </a:avLst>
-          </a:prstGeom>
-          <a:solidFill>
-            <a:srgbClr val="FFFFFF"/>
-          </a:solidFill>
-          <a:ln/>
-        </p:spPr>
-      </p:sp>
-      <p:sp>
-        <p:nvSpPr>
-          <p:cNvPr id="3" name="Text 1"/>
+          <p:cNvPr id="2" name="Text 0"/>
           <p:cNvSpPr/>
           <p:nvPr/>
         </p:nvSpPr>
@@ -21554,7 +21097,7 @@
             <a:r>
               <a:rPr lang="en-US" sz="2600" b="1" dirty="0">
                 <a:solidFill>
-                  <a:srgbClr val="5A05F4"/>
+                  <a:srgbClr val="C9A6FF"/>
                 </a:solidFill>
                 <a:latin typeface="Courier New" pitchFamily="34" charset="0"/>
                 <a:ea typeface="Courier New" pitchFamily="34" charset="-122"/>
@@ -21568,7 +21111,7 @@
       </p:sp>
       <p:sp>
         <p:nvSpPr>
-          <p:cNvPr id="4" name="Text 2"/>
+          <p:cNvPr id="3" name="Text 1"/>
           <p:cNvSpPr/>
           <p:nvPr/>
         </p:nvSpPr>
@@ -21593,7 +21136,7 @@
             <a:r>
               <a:rPr lang="en-US" sz="2400" b="1" dirty="0">
                 <a:solidFill>
-                  <a:srgbClr val="111318"/>
+                  <a:srgbClr val="FFFFFF"/>
                 </a:solidFill>
                 <a:latin typeface="Montserrat" pitchFamily="34" charset="0"/>
                 <a:ea typeface="Montserrat" pitchFamily="34" charset="-122"/>
@@ -21607,7 +21150,7 @@
       </p:sp>
       <p:sp>
         <p:nvSpPr>
-          <p:cNvPr id="5" name="Shape 3"/>
+          <p:cNvPr id="4" name="Shape 2"/>
           <p:cNvSpPr/>
           <p:nvPr/>
         </p:nvSpPr>
@@ -21622,14 +21165,14 @@
             </a:avLst>
           </a:prstGeom>
           <a:solidFill>
-            <a:srgbClr val="5A05F4"/>
+            <a:srgbClr val="C9A6FF"/>
           </a:solidFill>
           <a:ln/>
         </p:spPr>
       </p:sp>
       <p:sp>
         <p:nvSpPr>
-          <p:cNvPr id="6" name="Text 4"/>
+          <p:cNvPr id="5" name="Text 3"/>
           <p:cNvSpPr/>
           <p:nvPr/>
         </p:nvSpPr>
@@ -21654,7 +21197,7 @@
             <a:r>
               <a:rPr lang="en-US" sz="900" b="1" spc="100" kern="0" dirty="0">
                 <a:solidFill>
-                  <a:srgbClr val="FFFFFF"/>
+                  <a:srgbClr val="1C1140"/>
                 </a:solidFill>
                 <a:latin typeface="Courier New" pitchFamily="34" charset="0"/>
                 <a:ea typeface="Courier New" pitchFamily="34" charset="-122"/>
@@ -21668,7 +21211,7 @@
       </p:sp>
       <p:pic>
         <p:nvPicPr>
-          <p:cNvPr id="7" name="Image 0" descr="preencoded.png">    </p:cNvPr>
+          <p:cNvPr id="6" name="Image 0" descr="preencoded.png">    </p:cNvPr>
           <p:cNvPicPr>
             <a:picLocks noChangeAspect="1"/>
           </p:cNvPicPr>
@@ -21692,7 +21235,7 @@
       </p:pic>
       <p:sp>
         <p:nvSpPr>
-          <p:cNvPr id="8" name="Shape 5"/>
+          <p:cNvPr id="7" name="Shape 4"/>
           <p:cNvSpPr/>
           <p:nvPr/>
         </p:nvSpPr>
@@ -21707,14 +21250,14 @@
             </a:avLst>
           </a:prstGeom>
           <a:solidFill>
-            <a:srgbClr val="FBE9E9"/>
+            <a:srgbClr val="2E1418"/>
           </a:solidFill>
           <a:ln/>
         </p:spPr>
       </p:sp>
       <p:sp>
         <p:nvSpPr>
-          <p:cNvPr id="9" name="Text 6"/>
+          <p:cNvPr id="8" name="Text 5"/>
           <p:cNvSpPr/>
           <p:nvPr/>
         </p:nvSpPr>
@@ -21739,7 +21282,7 @@
             <a:r>
               <a:rPr lang="en-US" sz="1450" b="1" dirty="0">
                 <a:solidFill>
-                  <a:srgbClr val="C62A2A"/>
+                  <a:srgbClr val="FF7B7B"/>
                 </a:solidFill>
                 <a:latin typeface="Montserrat" pitchFamily="34" charset="0"/>
                 <a:ea typeface="Montserrat" pitchFamily="34" charset="-122"/>
@@ -21753,7 +21296,7 @@
       </p:sp>
       <p:sp>
         <p:nvSpPr>
-          <p:cNvPr id="10" name="Text 7"/>
+          <p:cNvPr id="9" name="Text 6"/>
           <p:cNvSpPr/>
           <p:nvPr/>
         </p:nvSpPr>
@@ -21781,7 +21324,7 @@
             <a:r>
               <a:rPr lang="en-US" sz="1200" dirty="0">
                 <a:solidFill>
-                  <a:srgbClr val="111318"/>
+                  <a:srgbClr val="FFFFFF"/>
                 </a:solidFill>
                 <a:latin typeface="Montserrat" pitchFamily="34" charset="0"/>
                 <a:ea typeface="Montserrat" pitchFamily="34" charset="-122"/>
@@ -21795,7 +21338,7 @@
       </p:sp>
       <p:sp>
         <p:nvSpPr>
-          <p:cNvPr id="11" name="Shape 8"/>
+          <p:cNvPr id="10" name="Shape 7"/>
           <p:cNvSpPr/>
           <p:nvPr/>
         </p:nvSpPr>
@@ -21810,14 +21353,14 @@
             </a:avLst>
           </a:prstGeom>
           <a:solidFill>
-            <a:srgbClr val="E9F4EF"/>
+            <a:srgbClr val="102A20"/>
           </a:solidFill>
           <a:ln/>
         </p:spPr>
       </p:sp>
       <p:sp>
         <p:nvSpPr>
-          <p:cNvPr id="12" name="Text 9"/>
+          <p:cNvPr id="11" name="Text 8"/>
           <p:cNvSpPr/>
           <p:nvPr/>
         </p:nvSpPr>
@@ -21842,7 +21385,7 @@
             <a:r>
               <a:rPr lang="en-US" sz="1450" b="1" dirty="0">
                 <a:solidFill>
-                  <a:srgbClr val="1B8A5A"/>
+                  <a:srgbClr val="5FD6A0"/>
                 </a:solidFill>
                 <a:latin typeface="Montserrat" pitchFamily="34" charset="0"/>
                 <a:ea typeface="Montserrat" pitchFamily="34" charset="-122"/>
@@ -21856,7 +21399,7 @@
       </p:sp>
       <p:sp>
         <p:nvSpPr>
-          <p:cNvPr id="13" name="Text 10"/>
+          <p:cNvPr id="12" name="Text 9"/>
           <p:cNvSpPr/>
           <p:nvPr/>
         </p:nvSpPr>
@@ -21884,7 +21427,7 @@
             <a:r>
               <a:rPr lang="en-US" sz="1200" dirty="0">
                 <a:solidFill>
-                  <a:srgbClr val="111318"/>
+                  <a:srgbClr val="FFFFFF"/>
                 </a:solidFill>
                 <a:latin typeface="Montserrat" pitchFamily="34" charset="0"/>
                 <a:ea typeface="Montserrat" pitchFamily="34" charset="-122"/>
@@ -21898,7 +21441,7 @@
       </p:sp>
       <p:sp>
         <p:nvSpPr>
-          <p:cNvPr id="14" name="Text 11"/>
+          <p:cNvPr id="13" name="Text 10"/>
           <p:cNvSpPr/>
           <p:nvPr/>
         </p:nvSpPr>
@@ -21923,7 +21466,7 @@
             <a:r>
               <a:rPr lang="en-US" sz="1250" dirty="0">
                 <a:solidFill>
-                  <a:srgbClr val="111318"/>
+                  <a:srgbClr val="FFFFFF"/>
                 </a:solidFill>
                 <a:latin typeface="Montserrat" pitchFamily="34" charset="0"/>
                 <a:ea typeface="Montserrat" pitchFamily="34" charset="-122"/>
@@ -21937,7 +21480,7 @@
       </p:sp>
       <p:sp>
         <p:nvSpPr>
-          <p:cNvPr id="15" name="Shape 12"/>
+          <p:cNvPr id="14" name="Shape 11"/>
           <p:cNvSpPr/>
           <p:nvPr/>
         </p:nvSpPr>
@@ -21952,14 +21495,14 @@
             </a:avLst>
           </a:prstGeom>
           <a:solidFill>
-            <a:srgbClr val="1B8A5A"/>
+            <a:srgbClr val="5FD6A0"/>
           </a:solidFill>
           <a:ln/>
         </p:spPr>
       </p:sp>
       <p:sp>
         <p:nvSpPr>
-          <p:cNvPr id="16" name="Text 13"/>
+          <p:cNvPr id="15" name="Text 12"/>
           <p:cNvSpPr/>
           <p:nvPr/>
         </p:nvSpPr>
@@ -21984,7 +21527,7 @@
             <a:r>
               <a:rPr lang="en-US" sz="1150" b="1" dirty="0">
                 <a:solidFill>
-                  <a:srgbClr val="1B8A5A"/>
+                  <a:srgbClr val="5FD6A0"/>
                 </a:solidFill>
                 <a:latin typeface="Montserrat" pitchFamily="34" charset="0"/>
                 <a:ea typeface="Montserrat" pitchFamily="34" charset="-122"/>
@@ -21998,7 +21541,7 @@
       </p:sp>
       <p:sp>
         <p:nvSpPr>
-          <p:cNvPr id="17" name="Text 14"/>
+          <p:cNvPr id="16" name="Text 13"/>
           <p:cNvSpPr/>
           <p:nvPr/>
         </p:nvSpPr>
@@ -22023,7 +21566,7 @@
             <a:r>
               <a:rPr lang="en-US" sz="1250" dirty="0">
                 <a:solidFill>
-                  <a:srgbClr val="111318"/>
+                  <a:srgbClr val="FFFFFF"/>
                 </a:solidFill>
                 <a:latin typeface="Montserrat" pitchFamily="34" charset="0"/>
                 <a:ea typeface="Montserrat" pitchFamily="34" charset="-122"/>
@@ -22037,7 +21580,7 @@
       </p:sp>
       <p:sp>
         <p:nvSpPr>
-          <p:cNvPr id="18" name="Shape 15"/>
+          <p:cNvPr id="17" name="Shape 14"/>
           <p:cNvSpPr/>
           <p:nvPr/>
         </p:nvSpPr>
@@ -22052,14 +21595,14 @@
             </a:avLst>
           </a:prstGeom>
           <a:solidFill>
-            <a:srgbClr val="5A05F4"/>
+            <a:srgbClr val="C9A6FF"/>
           </a:solidFill>
           <a:ln/>
         </p:spPr>
       </p:sp>
       <p:sp>
         <p:nvSpPr>
-          <p:cNvPr id="19" name="Text 16"/>
+          <p:cNvPr id="18" name="Text 15"/>
           <p:cNvSpPr/>
           <p:nvPr/>
         </p:nvSpPr>
@@ -22084,7 +21627,7 @@
             <a:r>
               <a:rPr lang="en-US" sz="1150" b="1" dirty="0">
                 <a:solidFill>
-                  <a:srgbClr val="5A05F4"/>
+                  <a:srgbClr val="C9A6FF"/>
                 </a:solidFill>
                 <a:latin typeface="Montserrat" pitchFamily="34" charset="0"/>
                 <a:ea typeface="Montserrat" pitchFamily="34" charset="-122"/>
@@ -22098,7 +21641,7 @@
       </p:sp>
       <p:sp>
         <p:nvSpPr>
-          <p:cNvPr id="20" name="Text 17"/>
+          <p:cNvPr id="19" name="Text 16"/>
           <p:cNvSpPr/>
           <p:nvPr/>
         </p:nvSpPr>
@@ -22123,7 +21666,7 @@
             <a:r>
               <a:rPr lang="en-US" sz="1250" dirty="0">
                 <a:solidFill>
-                  <a:srgbClr val="111318"/>
+                  <a:srgbClr val="FFFFFF"/>
                 </a:solidFill>
                 <a:latin typeface="Montserrat" pitchFamily="34" charset="0"/>
                 <a:ea typeface="Montserrat" pitchFamily="34" charset="-122"/>
@@ -22137,7 +21680,7 @@
       </p:sp>
       <p:sp>
         <p:nvSpPr>
-          <p:cNvPr id="21" name="Shape 18"/>
+          <p:cNvPr id="20" name="Shape 17"/>
           <p:cNvSpPr/>
           <p:nvPr/>
         </p:nvSpPr>
@@ -22152,14 +21695,14 @@
             </a:avLst>
           </a:prstGeom>
           <a:solidFill>
-            <a:srgbClr val="C62A2A"/>
+            <a:srgbClr val="FF7B7B"/>
           </a:solidFill>
           <a:ln/>
         </p:spPr>
       </p:sp>
       <p:sp>
         <p:nvSpPr>
-          <p:cNvPr id="22" name="Text 19"/>
+          <p:cNvPr id="21" name="Text 18"/>
           <p:cNvSpPr/>
           <p:nvPr/>
         </p:nvSpPr>
@@ -22184,7 +21727,7 @@
             <a:r>
               <a:rPr lang="en-US" sz="1150" b="1" dirty="0">
                 <a:solidFill>
-                  <a:srgbClr val="C62A2A"/>
+                  <a:srgbClr val="FF7B7B"/>
                 </a:solidFill>
                 <a:latin typeface="Montserrat" pitchFamily="34" charset="0"/>
                 <a:ea typeface="Montserrat" pitchFamily="34" charset="-122"/>
@@ -22198,7 +21741,7 @@
       </p:sp>
       <p:sp>
         <p:nvSpPr>
-          <p:cNvPr id="23" name="Shape 20"/>
+          <p:cNvPr id="22" name="Shape 19"/>
           <p:cNvSpPr/>
           <p:nvPr/>
         </p:nvSpPr>
@@ -22213,14 +21756,14 @@
             </a:avLst>
           </a:prstGeom>
           <a:solidFill>
-            <a:srgbClr val="F8F0E2"/>
+            <a:srgbClr val="2A2010"/>
           </a:solidFill>
           <a:ln/>
         </p:spPr>
       </p:sp>
       <p:sp>
         <p:nvSpPr>
-          <p:cNvPr id="24" name="Text 21"/>
+          <p:cNvPr id="23" name="Text 20"/>
           <p:cNvSpPr/>
           <p:nvPr/>
         </p:nvSpPr>
@@ -22245,7 +21788,7 @@
             <a:r>
               <a:rPr lang="en-US" sz="950" b="1" spc="150" kern="0" dirty="0">
                 <a:solidFill>
-                  <a:srgbClr val="9A5B12"/>
+                  <a:srgbClr val="E8A857"/>
                 </a:solidFill>
                 <a:latin typeface="Courier New" pitchFamily="34" charset="0"/>
                 <a:ea typeface="Courier New" pitchFamily="34" charset="-122"/>
@@ -22259,7 +21802,7 @@
       </p:sp>
       <p:sp>
         <p:nvSpPr>
-          <p:cNvPr id="25" name="Text 22"/>
+          <p:cNvPr id="24" name="Text 21"/>
           <p:cNvSpPr/>
           <p:nvPr/>
         </p:nvSpPr>
@@ -22287,7 +21830,7 @@
             <a:r>
               <a:rPr lang="en-US" sz="1300" dirty="0">
                 <a:solidFill>
-                  <a:srgbClr val="111318"/>
+                  <a:srgbClr val="FFFFFF"/>
                 </a:solidFill>
                 <a:latin typeface="Montserrat" pitchFamily="34" charset="0"/>
                 <a:ea typeface="Montserrat" pitchFamily="34" charset="-122"/>
@@ -22329,7 +21872,7 @@
             <a:lvl1pPr>
               <a:defRPr sz="850">
                 <a:solidFill>
-                  <a:srgbClr val="9AA1AD"/>
+                  <a:srgbClr val="8A82A0"/>
                 </a:solidFill>
                 <a:latin typeface="Courier New"/>
                 <a:ea typeface="Courier New"/>

--- a/docs/decks/L04.pptx
+++ b/docs/decks/L04.pptx
@@ -2536,7 +2536,7 @@
         </p:nvSpPr>
         <p:spPr>
           <a:xfrm>
-            <a:off x="11368735" y="6327648"/>
+            <a:off x="11368735" y="6437376"/>
             <a:ext cx="365760" cy="274320"/>
           </a:xfrm>
           <a:prstGeom prst="rect">
@@ -2665,7 +2665,7 @@
         </p:nvSpPr>
         <p:spPr>
           <a:xfrm>
-            <a:off x="11368735" y="6327648"/>
+            <a:off x="11368735" y="6437376"/>
             <a:ext cx="365760" cy="274320"/>
           </a:xfrm>
           <a:prstGeom prst="rect">
@@ -3805,7 +3805,7 @@
         </p:blipFill>
         <p:spPr>
           <a:xfrm>
-            <a:off x="566928" y="6126480"/>
+            <a:off x="566928" y="6254496"/>
             <a:ext cx="1481328" cy="457200"/>
           </a:xfrm>
           <a:prstGeom prst="rect">
@@ -4180,7 +4180,7 @@
         </p:nvSpPr>
         <p:spPr>
           <a:xfrm>
-            <a:off x="11368735" y="6327648"/>
+            <a:off x="11368735" y="6437376"/>
             <a:ext cx="365760" cy="274320"/>
           </a:xfrm>
           <a:prstGeom prst="rect">
@@ -4396,7 +4396,7 @@
         </p:blipFill>
         <p:spPr>
           <a:xfrm>
-            <a:off x="566928" y="6126480"/>
+            <a:off x="566928" y="6254496"/>
             <a:ext cx="1481328" cy="457200"/>
           </a:xfrm>
           <a:prstGeom prst="rect">
@@ -5071,7 +5071,7 @@
         </p:nvSpPr>
         <p:spPr>
           <a:xfrm>
-            <a:off x="11368735" y="6327648"/>
+            <a:off x="11368735" y="6437376"/>
             <a:ext cx="365760" cy="274320"/>
           </a:xfrm>
           <a:prstGeom prst="rect">
@@ -5287,7 +5287,7 @@
         </p:blipFill>
         <p:spPr>
           <a:xfrm>
-            <a:off x="566928" y="6126480"/>
+            <a:off x="566928" y="6254496"/>
             <a:ext cx="1481328" cy="457200"/>
           </a:xfrm>
           <a:prstGeom prst="rect">
@@ -5788,7 +5788,7 @@
         </p:nvSpPr>
         <p:spPr>
           <a:xfrm>
-            <a:off x="11368735" y="6327648"/>
+            <a:off x="11368735" y="6437376"/>
             <a:ext cx="365760" cy="274320"/>
           </a:xfrm>
           <a:prstGeom prst="rect">
@@ -6004,7 +6004,7 @@
         </p:blipFill>
         <p:spPr>
           <a:xfrm>
-            <a:off x="566928" y="6126480"/>
+            <a:off x="566928" y="6254496"/>
             <a:ext cx="1481328" cy="457200"/>
           </a:xfrm>
           <a:prstGeom prst="rect">
@@ -6540,7 +6540,7 @@
         </p:nvSpPr>
         <p:spPr>
           <a:xfrm>
-            <a:off x="11368735" y="6327648"/>
+            <a:off x="11368735" y="6437376"/>
             <a:ext cx="365760" cy="274320"/>
           </a:xfrm>
           <a:prstGeom prst="rect">
@@ -6756,7 +6756,7 @@
         </p:blipFill>
         <p:spPr>
           <a:xfrm>
-            <a:off x="566928" y="6126480"/>
+            <a:off x="566928" y="6254496"/>
             <a:ext cx="1481328" cy="457200"/>
           </a:xfrm>
           <a:prstGeom prst="rect">
@@ -7236,7 +7236,7 @@
         </p:nvSpPr>
         <p:spPr>
           <a:xfrm>
-            <a:off x="11368735" y="6327648"/>
+            <a:off x="11368735" y="6437376"/>
             <a:ext cx="365760" cy="274320"/>
           </a:xfrm>
           <a:prstGeom prst="rect">
@@ -7452,7 +7452,7 @@
         </p:blipFill>
         <p:spPr>
           <a:xfrm>
-            <a:off x="566928" y="6126480"/>
+            <a:off x="566928" y="6254496"/>
             <a:ext cx="1481328" cy="457200"/>
           </a:xfrm>
           <a:prstGeom prst="rect">
@@ -7908,7 +7908,7 @@
         </p:nvSpPr>
         <p:spPr>
           <a:xfrm>
-            <a:off x="11368735" y="6327648"/>
+            <a:off x="11368735" y="6437376"/>
             <a:ext cx="365760" cy="274320"/>
           </a:xfrm>
           <a:prstGeom prst="rect">
@@ -8185,7 +8185,7 @@
         </p:blipFill>
         <p:spPr>
           <a:xfrm>
-            <a:off x="566928" y="6126480"/>
+            <a:off x="566928" y="6254496"/>
             <a:ext cx="1481328" cy="457200"/>
           </a:xfrm>
           <a:prstGeom prst="rect">
@@ -8871,7 +8871,7 @@
         </p:nvSpPr>
         <p:spPr>
           <a:xfrm>
-            <a:off x="11368735" y="6327648"/>
+            <a:off x="11368735" y="6437376"/>
             <a:ext cx="365760" cy="274320"/>
           </a:xfrm>
           <a:prstGeom prst="rect">
@@ -9048,7 +9048,7 @@
         </p:blipFill>
         <p:spPr>
           <a:xfrm>
-            <a:off x="566928" y="6126480"/>
+            <a:off x="566928" y="6254496"/>
             <a:ext cx="1481328" cy="457200"/>
           </a:xfrm>
           <a:prstGeom prst="rect">
@@ -9819,7 +9819,7 @@
         </p:nvSpPr>
         <p:spPr>
           <a:xfrm>
-            <a:off x="11368735" y="6327648"/>
+            <a:off x="11368735" y="6437376"/>
             <a:ext cx="365760" cy="274320"/>
           </a:xfrm>
           <a:prstGeom prst="rect">
@@ -9996,7 +9996,7 @@
         </p:blipFill>
         <p:spPr>
           <a:xfrm>
-            <a:off x="566928" y="6126480"/>
+            <a:off x="566928" y="6254496"/>
             <a:ext cx="1481328" cy="457200"/>
           </a:xfrm>
           <a:prstGeom prst="rect">
@@ -10576,7 +10576,7 @@
         </p:nvSpPr>
         <p:spPr>
           <a:xfrm>
-            <a:off x="11368735" y="6327648"/>
+            <a:off x="11368735" y="6437376"/>
             <a:ext cx="365760" cy="274320"/>
           </a:xfrm>
           <a:prstGeom prst="rect">
@@ -10753,7 +10753,7 @@
         </p:blipFill>
         <p:spPr>
           <a:xfrm>
-            <a:off x="566928" y="6126480"/>
+            <a:off x="566928" y="6254496"/>
             <a:ext cx="1481328" cy="457200"/>
           </a:xfrm>
           <a:prstGeom prst="rect">
@@ -11156,7 +11156,7 @@
         </p:nvSpPr>
         <p:spPr>
           <a:xfrm>
-            <a:off x="11368735" y="6327648"/>
+            <a:off x="11368735" y="6437376"/>
             <a:ext cx="365760" cy="274320"/>
           </a:xfrm>
           <a:prstGeom prst="rect">
@@ -11375,7 +11375,7 @@
         </p:blipFill>
         <p:spPr>
           <a:xfrm>
-            <a:off x="566928" y="6126480"/>
+            <a:off x="566928" y="6254496"/>
             <a:ext cx="1481328" cy="457200"/>
           </a:xfrm>
           <a:prstGeom prst="rect">
@@ -12230,7 +12230,7 @@
         </p:nvSpPr>
         <p:spPr>
           <a:xfrm>
-            <a:off x="11368735" y="6327648"/>
+            <a:off x="11368735" y="6437376"/>
             <a:ext cx="365760" cy="274320"/>
           </a:xfrm>
           <a:prstGeom prst="rect">
@@ -12407,7 +12407,7 @@
         </p:blipFill>
         <p:spPr>
           <a:xfrm>
-            <a:off x="566928" y="6126480"/>
+            <a:off x="566928" y="6254496"/>
             <a:ext cx="1481328" cy="457200"/>
           </a:xfrm>
           <a:prstGeom prst="rect">
@@ -12917,7 +12917,7 @@
         </p:nvSpPr>
         <p:spPr>
           <a:xfrm>
-            <a:off x="11368735" y="6327648"/>
+            <a:off x="11368735" y="6437376"/>
             <a:ext cx="365760" cy="274320"/>
           </a:xfrm>
           <a:prstGeom prst="rect">
@@ -13094,7 +13094,7 @@
         </p:blipFill>
         <p:spPr>
           <a:xfrm>
-            <a:off x="566928" y="6126480"/>
+            <a:off x="566928" y="6254496"/>
             <a:ext cx="1481328" cy="457200"/>
           </a:xfrm>
           <a:prstGeom prst="rect">
@@ -13674,7 +13674,7 @@
         </p:nvSpPr>
         <p:spPr>
           <a:xfrm>
-            <a:off x="11368735" y="6327648"/>
+            <a:off x="11368735" y="6437376"/>
             <a:ext cx="365760" cy="274320"/>
           </a:xfrm>
           <a:prstGeom prst="rect">
@@ -13851,7 +13851,7 @@
         </p:blipFill>
         <p:spPr>
           <a:xfrm>
-            <a:off x="566928" y="6126480"/>
+            <a:off x="566928" y="6254496"/>
             <a:ext cx="1481328" cy="457200"/>
           </a:xfrm>
           <a:prstGeom prst="rect">
@@ -14297,7 +14297,7 @@
         </p:nvSpPr>
         <p:spPr>
           <a:xfrm>
-            <a:off x="11368735" y="6327648"/>
+            <a:off x="11368735" y="6437376"/>
             <a:ext cx="365760" cy="274320"/>
           </a:xfrm>
           <a:prstGeom prst="rect">
@@ -14995,7 +14995,7 @@
         </p:blipFill>
         <p:spPr>
           <a:xfrm>
-            <a:off x="566928" y="6126480"/>
+            <a:off x="566928" y="6254496"/>
             <a:ext cx="1481328" cy="457200"/>
           </a:xfrm>
           <a:prstGeom prst="rect">
@@ -16454,7 +16454,7 @@
         </p:nvSpPr>
         <p:spPr>
           <a:xfrm>
-            <a:off x="11368735" y="6327648"/>
+            <a:off x="11368735" y="6437376"/>
             <a:ext cx="365760" cy="274320"/>
           </a:xfrm>
           <a:prstGeom prst="rect">
@@ -16673,7 +16673,7 @@
         </p:blipFill>
         <p:spPr>
           <a:xfrm>
-            <a:off x="566928" y="6126480"/>
+            <a:off x="566928" y="6254496"/>
             <a:ext cx="1481328" cy="457200"/>
           </a:xfrm>
           <a:prstGeom prst="rect">
@@ -17410,7 +17410,7 @@
         </p:nvSpPr>
         <p:spPr>
           <a:xfrm>
-            <a:off x="11368735" y="6327648"/>
+            <a:off x="11368735" y="6437376"/>
             <a:ext cx="365760" cy="274320"/>
           </a:xfrm>
           <a:prstGeom prst="rect">
@@ -17626,7 +17626,7 @@
         </p:blipFill>
         <p:spPr>
           <a:xfrm>
-            <a:off x="566928" y="6126480"/>
+            <a:off x="566928" y="6254496"/>
             <a:ext cx="1481328" cy="457200"/>
           </a:xfrm>
           <a:prstGeom prst="rect">
@@ -18333,7 +18333,7 @@
         </p:nvSpPr>
         <p:spPr>
           <a:xfrm>
-            <a:off x="11368735" y="6327648"/>
+            <a:off x="11368735" y="6437376"/>
             <a:ext cx="365760" cy="274320"/>
           </a:xfrm>
           <a:prstGeom prst="rect">
@@ -18549,7 +18549,7 @@
         </p:blipFill>
         <p:spPr>
           <a:xfrm>
-            <a:off x="566928" y="6126480"/>
+            <a:off x="566928" y="6254496"/>
             <a:ext cx="1481328" cy="457200"/>
           </a:xfrm>
           <a:prstGeom prst="rect">
@@ -19126,7 +19126,7 @@
         </p:nvSpPr>
         <p:spPr>
           <a:xfrm>
-            <a:off x="11368735" y="6327648"/>
+            <a:off x="11368735" y="6437376"/>
             <a:ext cx="365760" cy="274320"/>
           </a:xfrm>
           <a:prstGeom prst="rect">
@@ -19384,7 +19384,7 @@
         </p:blipFill>
         <p:spPr>
           <a:xfrm>
-            <a:off x="566928" y="6126480"/>
+            <a:off x="566928" y="6254496"/>
             <a:ext cx="1481328" cy="457200"/>
           </a:xfrm>
           <a:prstGeom prst="rect">
@@ -20232,7 +20232,7 @@
         </p:nvSpPr>
         <p:spPr>
           <a:xfrm>
-            <a:off x="11368735" y="6327648"/>
+            <a:off x="11368735" y="6437376"/>
             <a:ext cx="365760" cy="274320"/>
           </a:xfrm>
           <a:prstGeom prst="rect">
@@ -20448,7 +20448,7 @@
         </p:blipFill>
         <p:spPr>
           <a:xfrm>
-            <a:off x="566928" y="6126480"/>
+            <a:off x="566928" y="6254496"/>
             <a:ext cx="1481328" cy="457200"/>
           </a:xfrm>
           <a:prstGeom prst="rect">
@@ -21009,7 +21009,7 @@
         </p:nvSpPr>
         <p:spPr>
           <a:xfrm>
-            <a:off x="11368735" y="6327648"/>
+            <a:off x="11368735" y="6437376"/>
             <a:ext cx="365760" cy="274320"/>
           </a:xfrm>
           <a:prstGeom prst="rect">
@@ -21225,7 +21225,7 @@
         </p:blipFill>
         <p:spPr>
           <a:xfrm>
-            <a:off x="566928" y="6126480"/>
+            <a:off x="566928" y="6254496"/>
             <a:ext cx="1481328" cy="457200"/>
           </a:xfrm>
           <a:prstGeom prst="rect">
@@ -21854,7 +21854,7 @@
         </p:nvSpPr>
         <p:spPr>
           <a:xfrm>
-            <a:off x="11368735" y="6327648"/>
+            <a:off x="11368735" y="6437376"/>
             <a:ext cx="365760" cy="274320"/>
           </a:xfrm>
           <a:prstGeom prst="rect">

--- a/docs/decks/L04.pptx
+++ b/docs/decks/L04.pptx
@@ -7550,7 +7550,7 @@
           <a:bodyPr wrap="square" lIns="0" tIns="0" rIns="0" bIns="0" rtlCol="0" anchor="ctr"/>
           <a:lstStyle/>
           <a:p>
-            <a:pPr algn="r" indent="0" marL="0">
+            <a:pPr algn="l" indent="0" marL="0">
               <a:buNone/>
             </a:pPr>
             <a:r>
@@ -7650,7 +7650,7 @@
           <a:bodyPr wrap="square" lIns="0" tIns="0" rIns="0" bIns="0" rtlCol="0" anchor="ctr"/>
           <a:lstStyle/>
           <a:p>
-            <a:pPr algn="r" indent="0" marL="0">
+            <a:pPr algn="l" indent="0" marL="0">
               <a:buNone/>
             </a:pPr>
             <a:r>
@@ -19938,7 +19938,7 @@
           <a:bodyPr wrap="square" lIns="0" tIns="0" rIns="0" bIns="0" rtlCol="0" anchor="ctr"/>
           <a:lstStyle/>
           <a:p>
-            <a:pPr algn="r" indent="0" marL="0">
+            <a:pPr algn="l" indent="0" marL="0">
               <a:buNone/>
             </a:pPr>
             <a:r>
@@ -20038,7 +20038,7 @@
           <a:bodyPr wrap="square" lIns="0" tIns="0" rIns="0" bIns="0" rtlCol="0" anchor="ctr"/>
           <a:lstStyle/>
           <a:p>
-            <a:pPr algn="r" indent="0" marL="0">
+            <a:pPr algn="l" indent="0" marL="0">
               <a:buNone/>
             </a:pPr>
             <a:r>
@@ -21460,7 +21460,7 @@
           <a:bodyPr wrap="square" lIns="0" tIns="0" rIns="0" bIns="0" rtlCol="0" anchor="ctr"/>
           <a:lstStyle/>
           <a:p>
-            <a:pPr algn="r" indent="0" marL="0">
+            <a:pPr algn="l" indent="0" marL="0">
               <a:buNone/>
             </a:pPr>
             <a:r>
@@ -21560,7 +21560,7 @@
           <a:bodyPr wrap="square" lIns="0" tIns="0" rIns="0" bIns="0" rtlCol="0" anchor="ctr"/>
           <a:lstStyle/>
           <a:p>
-            <a:pPr algn="r" indent="0" marL="0">
+            <a:pPr algn="l" indent="0" marL="0">
               <a:buNone/>
             </a:pPr>
             <a:r>
@@ -21660,7 +21660,7 @@
           <a:bodyPr wrap="square" lIns="0" tIns="0" rIns="0" bIns="0" rtlCol="0" anchor="ctr"/>
           <a:lstStyle/>
           <a:p>
-            <a:pPr algn="r" indent="0" marL="0">
+            <a:pPr algn="l" indent="0" marL="0">
               <a:buNone/>
             </a:pPr>
             <a:r>

--- a/docs/decks/L04.pptx
+++ b/docs/decks/L04.pptx
@@ -3163,17 +3163,17 @@
               <a:buNone/>
             </a:pPr>
             <a:r>
-              <a:rPr lang="en-US" sz="4000" b="1" dirty="0">
+              <a:rPr lang="en-US" sz="3600" dirty="0">
                 <a:solidFill>
                   <a:srgbClr val="FFFFFF"/>
                 </a:solidFill>
-                <a:latin typeface="Montserrat" pitchFamily="34" charset="0"/>
-                <a:ea typeface="Montserrat" pitchFamily="34" charset="-122"/>
-                <a:cs typeface="Montserrat" pitchFamily="34" charset="-120"/>
+                <a:latin typeface="Unbounded" pitchFamily="34" charset="0"/>
+                <a:ea typeface="Unbounded" pitchFamily="34" charset="-122"/>
+                <a:cs typeface="Unbounded" pitchFamily="34" charset="-120"/>
               </a:rPr>
               <a:t>Токеноміка</a:t>
             </a:r>
-            <a:endParaRPr lang="en-US" sz="4000" dirty="0"/>
+            <a:endParaRPr lang="en-US" sz="3600" dirty="0"/>
           </a:p>
           <a:p>
             <a:pPr indent="0" marL="0">
@@ -3183,17 +3183,17 @@
               <a:buNone/>
             </a:pPr>
             <a:r>
-              <a:rPr lang="en-US" sz="4000" b="1" dirty="0">
+              <a:rPr lang="en-US" sz="3600" dirty="0">
                 <a:solidFill>
                   <a:srgbClr val="FFFFFF"/>
                 </a:solidFill>
-                <a:latin typeface="Montserrat" pitchFamily="34" charset="0"/>
-                <a:ea typeface="Montserrat" pitchFamily="34" charset="-122"/>
-                <a:cs typeface="Montserrat" pitchFamily="34" charset="-120"/>
+                <a:latin typeface="Unbounded" pitchFamily="34" charset="0"/>
+                <a:ea typeface="Unbounded" pitchFamily="34" charset="-122"/>
+                <a:cs typeface="Unbounded" pitchFamily="34" charset="-120"/>
               </a:rPr>
               <a:t>і cost attribution</a:t>
             </a:r>
-            <a:endParaRPr lang="en-US" sz="4000" dirty="0"/>
+            <a:endParaRPr lang="en-US" sz="3600" dirty="0"/>
           </a:p>
         </p:txBody>
       </p:sp>
@@ -3714,13 +3714,13 @@
               <a:buNone/>
             </a:pPr>
             <a:r>
-              <a:rPr lang="en-US" sz="2400" b="1" dirty="0">
+              <a:rPr lang="en-US" sz="2400" dirty="0">
                 <a:solidFill>
                   <a:srgbClr val="FFFFFF"/>
                 </a:solidFill>
-                <a:latin typeface="Montserrat" pitchFamily="34" charset="0"/>
-                <a:ea typeface="Montserrat" pitchFamily="34" charset="-122"/>
-                <a:cs typeface="Montserrat" pitchFamily="34" charset="-120"/>
+                <a:latin typeface="Unbounded" pitchFamily="34" charset="0"/>
+                <a:ea typeface="Unbounded" pitchFamily="34" charset="-122"/>
+                <a:cs typeface="Unbounded" pitchFamily="34" charset="-120"/>
               </a:rPr>
               <a:t>Розрахунок: три рядки після відповіді</a:t>
             </a:r>
@@ -3736,7 +3736,7 @@
         </p:nvSpPr>
         <p:spPr>
           <a:xfrm>
-            <a:off x="1280160" y="1193140"/>
+            <a:off x="1280160" y="1218895"/>
             <a:ext cx="777240" cy="256032"/>
           </a:xfrm>
           <a:prstGeom prst="roundRect">
@@ -3758,7 +3758,7 @@
         </p:nvSpPr>
         <p:spPr>
           <a:xfrm>
-            <a:off x="1280160" y="1193140"/>
+            <a:off x="1280160" y="1218895"/>
             <a:ext cx="777240" cy="256032"/>
           </a:xfrm>
           <a:prstGeom prst="rect">
@@ -4305,13 +4305,13 @@
               <a:buNone/>
             </a:pPr>
             <a:r>
-              <a:rPr lang="en-US" sz="2400" b="1" dirty="0">
+              <a:rPr lang="en-US" sz="2400" dirty="0">
                 <a:solidFill>
                   <a:srgbClr val="FFFFFF"/>
                 </a:solidFill>
-                <a:latin typeface="Montserrat" pitchFamily="34" charset="0"/>
-                <a:ea typeface="Montserrat" pitchFamily="34" charset="-122"/>
-                <a:cs typeface="Montserrat" pitchFamily="34" charset="-120"/>
+                <a:latin typeface="Unbounded" pitchFamily="34" charset="0"/>
+                <a:ea typeface="Unbounded" pitchFamily="34" charset="-122"/>
+                <a:cs typeface="Unbounded" pitchFamily="34" charset="-120"/>
               </a:rPr>
               <a:t>Один запит користувача — це не один виклик моделі</a:t>
             </a:r>
@@ -4327,7 +4327,7 @@
         </p:nvSpPr>
         <p:spPr>
           <a:xfrm>
-            <a:off x="1280160" y="1193140"/>
+            <a:off x="1280160" y="1218895"/>
             <a:ext cx="777240" cy="256032"/>
           </a:xfrm>
           <a:prstGeom prst="roundRect">
@@ -4349,7 +4349,7 @@
         </p:nvSpPr>
         <p:spPr>
           <a:xfrm>
-            <a:off x="1280160" y="1193140"/>
+            <a:off x="1280160" y="1218895"/>
             <a:ext cx="777240" cy="256032"/>
           </a:xfrm>
           <a:prstGeom prst="rect">
@@ -5196,13 +5196,13 @@
               <a:buNone/>
             </a:pPr>
             <a:r>
-              <a:rPr lang="en-US" sz="2400" b="1" dirty="0">
+              <a:rPr lang="en-US" sz="2400" dirty="0">
                 <a:solidFill>
                   <a:srgbClr val="FFFFFF"/>
                 </a:solidFill>
-                <a:latin typeface="Montserrat" pitchFamily="34" charset="0"/>
-                <a:ea typeface="Montserrat" pitchFamily="34" charset="-122"/>
-                <a:cs typeface="Montserrat" pitchFamily="34" charset="-120"/>
+                <a:latin typeface="Unbounded" pitchFamily="34" charset="0"/>
+                <a:ea typeface="Unbounded" pitchFamily="34" charset="-122"/>
+                <a:cs typeface="Unbounded" pitchFamily="34" charset="-120"/>
               </a:rPr>
               <a:t>Скільки коштує результат, а не токен</a:t>
             </a:r>
@@ -5218,7 +5218,7 @@
         </p:nvSpPr>
         <p:spPr>
           <a:xfrm>
-            <a:off x="1280160" y="1193140"/>
+            <a:off x="1280160" y="1218895"/>
             <a:ext cx="777240" cy="256032"/>
           </a:xfrm>
           <a:prstGeom prst="roundRect">
@@ -5240,7 +5240,7 @@
         </p:nvSpPr>
         <p:spPr>
           <a:xfrm>
-            <a:off x="1280160" y="1193140"/>
+            <a:off x="1280160" y="1218895"/>
             <a:ext cx="777240" cy="256032"/>
           </a:xfrm>
           <a:prstGeom prst="rect">
@@ -5913,13 +5913,13 @@
               <a:buNone/>
             </a:pPr>
             <a:r>
-              <a:rPr lang="en-US" sz="2400" b="1" dirty="0">
+              <a:rPr lang="en-US" sz="2400" dirty="0">
                 <a:solidFill>
                   <a:srgbClr val="FFFFFF"/>
                 </a:solidFill>
-                <a:latin typeface="Montserrat" pitchFamily="34" charset="0"/>
-                <a:ea typeface="Montserrat" pitchFamily="34" charset="-122"/>
-                <a:cs typeface="Montserrat" pitchFamily="34" charset="-120"/>
+                <a:latin typeface="Unbounded" pitchFamily="34" charset="0"/>
+                <a:ea typeface="Unbounded" pitchFamily="34" charset="-122"/>
+                <a:cs typeface="Unbounded" pitchFamily="34" charset="-120"/>
               </a:rPr>
               <a:t>Атрибуція важливіша за суму</a:t>
             </a:r>
@@ -6665,13 +6665,13 @@
               <a:buNone/>
             </a:pPr>
             <a:r>
-              <a:rPr lang="en-US" sz="2400" b="1" dirty="0">
+              <a:rPr lang="en-US" sz="2400" dirty="0">
                 <a:solidFill>
                   <a:srgbClr val="FFFFFF"/>
                 </a:solidFill>
-                <a:latin typeface="Montserrat" pitchFamily="34" charset="0"/>
-                <a:ea typeface="Montserrat" pitchFamily="34" charset="-122"/>
-                <a:cs typeface="Montserrat" pitchFamily="34" charset="-120"/>
+                <a:latin typeface="Unbounded" pitchFamily="34" charset="0"/>
+                <a:ea typeface="Unbounded" pitchFamily="34" charset="-122"/>
+                <a:cs typeface="Unbounded" pitchFamily="34" charset="-120"/>
               </a:rPr>
               <a:t>GET /cost: бюджет поруч із витратою</a:t>
             </a:r>
@@ -6687,7 +6687,7 @@
         </p:nvSpPr>
         <p:spPr>
           <a:xfrm>
-            <a:off x="1280160" y="1193140"/>
+            <a:off x="1280160" y="1218895"/>
             <a:ext cx="777240" cy="256032"/>
           </a:xfrm>
           <a:prstGeom prst="roundRect">
@@ -6709,7 +6709,7 @@
         </p:nvSpPr>
         <p:spPr>
           <a:xfrm>
-            <a:off x="1280160" y="1193140"/>
+            <a:off x="1280160" y="1218895"/>
             <a:ext cx="777240" cy="256032"/>
           </a:xfrm>
           <a:prstGeom prst="rect">
@@ -7361,13 +7361,13 @@
               <a:buNone/>
             </a:pPr>
             <a:r>
-              <a:rPr lang="en-US" sz="2400" b="1" dirty="0">
+              <a:rPr lang="en-US" sz="2400" dirty="0">
                 <a:solidFill>
                   <a:srgbClr val="FFFFFF"/>
                 </a:solidFill>
-                <a:latin typeface="Montserrat" pitchFamily="34" charset="0"/>
-                <a:ea typeface="Montserrat" pitchFamily="34" charset="-122"/>
-                <a:cs typeface="Montserrat" pitchFamily="34" charset="-120"/>
+                <a:latin typeface="Unbounded" pitchFamily="34" charset="0"/>
+                <a:ea typeface="Unbounded" pitchFamily="34" charset="-122"/>
+                <a:cs typeface="Unbounded" pitchFamily="34" charset="-120"/>
               </a:rPr>
               <a:t>Routing × cost: важіль стає видимим</a:t>
             </a:r>
@@ -7383,7 +7383,7 @@
         </p:nvSpPr>
         <p:spPr>
           <a:xfrm>
-            <a:off x="1280160" y="1024128"/>
+            <a:off x="1280160" y="1218895"/>
             <a:ext cx="777240" cy="256032"/>
           </a:xfrm>
           <a:prstGeom prst="roundRect">
@@ -7405,7 +7405,7 @@
         </p:nvSpPr>
         <p:spPr>
           <a:xfrm>
-            <a:off x="1280160" y="1024128"/>
+            <a:off x="1280160" y="1218895"/>
             <a:ext cx="777240" cy="256032"/>
           </a:xfrm>
           <a:prstGeom prst="rect">
@@ -8033,13 +8033,13 @@
               <a:buNone/>
             </a:pPr>
             <a:r>
-              <a:rPr lang="en-US" sz="2400" b="1" dirty="0">
+              <a:rPr lang="en-US" sz="2400" dirty="0">
                 <a:solidFill>
                   <a:srgbClr val="FFFFFF"/>
                 </a:solidFill>
-                <a:latin typeface="Montserrat" pitchFamily="34" charset="0"/>
-                <a:ea typeface="Montserrat" pitchFamily="34" charset="-122"/>
-                <a:cs typeface="Montserrat" pitchFamily="34" charset="-120"/>
+                <a:latin typeface="Unbounded" pitchFamily="34" charset="0"/>
+                <a:ea typeface="Unbounded" pitchFamily="34" charset="-122"/>
+                <a:cs typeface="Unbounded" pitchFamily="34" charset="-120"/>
               </a:rPr>
               <a:t>Budget-політика: що робити при 80%</a:t>
             </a:r>
@@ -8055,7 +8055,7 @@
         </p:nvSpPr>
         <p:spPr>
           <a:xfrm>
-            <a:off x="1280160" y="1193140"/>
+            <a:off x="1280160" y="1218895"/>
             <a:ext cx="777240" cy="256032"/>
           </a:xfrm>
           <a:prstGeom prst="roundRect">
@@ -8077,7 +8077,7 @@
         </p:nvSpPr>
         <p:spPr>
           <a:xfrm>
-            <a:off x="1280160" y="1193140"/>
+            <a:off x="1280160" y="1218895"/>
             <a:ext cx="777240" cy="256032"/>
           </a:xfrm>
           <a:prstGeom prst="rect">
@@ -8116,7 +8116,7 @@
         </p:nvSpPr>
         <p:spPr>
           <a:xfrm>
-            <a:off x="2167128" y="1193140"/>
+            <a:off x="2167128" y="1218895"/>
             <a:ext cx="864108" cy="256032"/>
           </a:xfrm>
           <a:prstGeom prst="roundRect">
@@ -8138,7 +8138,7 @@
         </p:nvSpPr>
         <p:spPr>
           <a:xfrm>
-            <a:off x="2167128" y="1193140"/>
+            <a:off x="2167128" y="1218895"/>
             <a:ext cx="864108" cy="256032"/>
           </a:xfrm>
           <a:prstGeom prst="rect">
@@ -8957,13 +8957,13 @@
               <a:buNone/>
             </a:pPr>
             <a:r>
-              <a:rPr lang="en-US" sz="2400" b="1" dirty="0">
+              <a:rPr lang="en-US" sz="2400" dirty="0">
                 <a:solidFill>
                   <a:srgbClr val="FFFFFF"/>
                 </a:solidFill>
-                <a:latin typeface="Montserrat" pitchFamily="34" charset="0"/>
-                <a:ea typeface="Montserrat" pitchFamily="34" charset="-122"/>
-                <a:cs typeface="Montserrat" pitchFamily="34" charset="-120"/>
+                <a:latin typeface="Unbounded" pitchFamily="34" charset="0"/>
+                <a:ea typeface="Unbounded" pitchFamily="34" charset="-122"/>
+                <a:cs typeface="Unbounded" pitchFamily="34" charset="-120"/>
               </a:rPr>
               <a:t>Зараз ви побачите — і навіщо</a:t>
             </a:r>
@@ -9905,13 +9905,13 @@
               <a:buNone/>
             </a:pPr>
             <a:r>
-              <a:rPr lang="en-US" sz="2400" b="1" dirty="0">
+              <a:rPr lang="en-US" sz="2400" dirty="0">
                 <a:solidFill>
                   <a:srgbClr val="FFFFFF"/>
                 </a:solidFill>
-                <a:latin typeface="Montserrat" pitchFamily="34" charset="0"/>
-                <a:ea typeface="Montserrat" pitchFamily="34" charset="-122"/>
-                <a:cs typeface="Montserrat" pitchFamily="34" charset="-120"/>
+                <a:latin typeface="Unbounded" pitchFamily="34" charset="0"/>
+                <a:ea typeface="Unbounded" pitchFamily="34" charset="-122"/>
+                <a:cs typeface="Unbounded" pitchFamily="34" charset="-120"/>
               </a:rPr>
               <a:t>Лабораторна: чотири частини + опційна</a:t>
             </a:r>
@@ -9927,7 +9927,7 @@
         </p:nvSpPr>
         <p:spPr>
           <a:xfrm>
-            <a:off x="566928" y="1024128"/>
+            <a:off x="566928" y="1218895"/>
             <a:ext cx="950976" cy="256032"/>
           </a:xfrm>
           <a:prstGeom prst="roundRect">
@@ -9949,7 +9949,7 @@
         </p:nvSpPr>
         <p:spPr>
           <a:xfrm>
-            <a:off x="566928" y="1024128"/>
+            <a:off x="566928" y="1218895"/>
             <a:ext cx="950976" cy="256032"/>
           </a:xfrm>
           <a:prstGeom prst="rect">
@@ -10662,13 +10662,13 @@
               <a:buNone/>
             </a:pPr>
             <a:r>
-              <a:rPr lang="en-US" sz="2400" b="1" dirty="0">
+              <a:rPr lang="en-US" sz="2400" dirty="0">
                 <a:solidFill>
                   <a:srgbClr val="FFFFFF"/>
                 </a:solidFill>
-                <a:latin typeface="Montserrat" pitchFamily="34" charset="0"/>
-                <a:ea typeface="Montserrat" pitchFamily="34" charset="-122"/>
-                <a:cs typeface="Montserrat" pitchFamily="34" charset="-120"/>
+                <a:latin typeface="Unbounded" pitchFamily="34" charset="0"/>
+                <a:ea typeface="Unbounded" pitchFamily="34" charset="-122"/>
+                <a:cs typeface="Unbounded" pitchFamily="34" charset="-120"/>
               </a:rPr>
               <a:t>Що це довело</a:t>
             </a:r>
@@ -11242,13 +11242,13 @@
               <a:buNone/>
             </a:pPr>
             <a:r>
-              <a:rPr lang="en-US" sz="2400" b="1" dirty="0">
+              <a:rPr lang="en-US" sz="2400" dirty="0">
                 <a:solidFill>
                   <a:srgbClr val="FFFFFF"/>
                 </a:solidFill>
-                <a:latin typeface="Montserrat" pitchFamily="34" charset="0"/>
-                <a:ea typeface="Montserrat" pitchFamily="34" charset="-122"/>
-                <a:cs typeface="Montserrat" pitchFamily="34" charset="-120"/>
+                <a:latin typeface="Unbounded" pitchFamily="34" charset="0"/>
+                <a:ea typeface="Unbounded" pitchFamily="34" charset="-122"/>
+                <a:cs typeface="Unbounded" pitchFamily="34" charset="-120"/>
               </a:rPr>
               <a:t>Що ви зможете після уроку</a:t>
             </a:r>
@@ -12316,13 +12316,13 @@
               <a:buNone/>
             </a:pPr>
             <a:r>
-              <a:rPr lang="en-US" sz="2400" b="1" dirty="0">
+              <a:rPr lang="en-US" sz="2400" dirty="0">
                 <a:solidFill>
                   <a:srgbClr val="FFFFFF"/>
                 </a:solidFill>
-                <a:latin typeface="Montserrat" pitchFamily="34" charset="0"/>
-                <a:ea typeface="Montserrat" pitchFamily="34" charset="-122"/>
-                <a:cs typeface="Montserrat" pitchFamily="34" charset="-120"/>
+                <a:latin typeface="Unbounded" pitchFamily="34" charset="0"/>
+                <a:ea typeface="Unbounded" pitchFamily="34" charset="-122"/>
+                <a:cs typeface="Unbounded" pitchFamily="34" charset="-120"/>
               </a:rPr>
               <a:t>Перевір себе</a:t>
             </a:r>
@@ -13003,13 +13003,13 @@
               <a:buNone/>
             </a:pPr>
             <a:r>
-              <a:rPr lang="en-US" sz="2400" b="1" dirty="0">
+              <a:rPr lang="en-US" sz="2400" dirty="0">
                 <a:solidFill>
                   <a:srgbClr val="FFFFFF"/>
                 </a:solidFill>
-                <a:latin typeface="Montserrat" pitchFamily="34" charset="0"/>
-                <a:ea typeface="Montserrat" pitchFamily="34" charset="-122"/>
-                <a:cs typeface="Montserrat" pitchFamily="34" charset="-120"/>
+                <a:latin typeface="Unbounded" pitchFamily="34" charset="0"/>
+                <a:ea typeface="Unbounded" pitchFamily="34" charset="-122"/>
+                <a:cs typeface="Unbounded" pitchFamily="34" charset="-120"/>
               </a:rPr>
               <a:t>Антипатерни тижня</a:t>
             </a:r>
@@ -13760,13 +13760,13 @@
               <a:buNone/>
             </a:pPr>
             <a:r>
-              <a:rPr lang="en-US" sz="2400" b="1" dirty="0">
+              <a:rPr lang="en-US" sz="2400" dirty="0">
                 <a:solidFill>
                   <a:srgbClr val="FFFFFF"/>
                 </a:solidFill>
-                <a:latin typeface="Montserrat" pitchFamily="34" charset="0"/>
-                <a:ea typeface="Montserrat" pitchFamily="34" charset="-122"/>
-                <a:cs typeface="Montserrat" pitchFamily="34" charset="-120"/>
+                <a:latin typeface="Unbounded" pitchFamily="34" charset="0"/>
+                <a:ea typeface="Unbounded" pitchFamily="34" charset="-122"/>
+                <a:cs typeface="Unbounded" pitchFamily="34" charset="-120"/>
               </a:rPr>
               <a:t>Домашнє завдання</a:t>
             </a:r>
@@ -14904,13 +14904,13 @@
               <a:buNone/>
             </a:pPr>
             <a:r>
-              <a:rPr lang="en-US" sz="2400" b="1" dirty="0">
+              <a:rPr lang="en-US" sz="2400" dirty="0">
                 <a:solidFill>
                   <a:srgbClr val="FFFFFF"/>
                 </a:solidFill>
-                <a:latin typeface="Montserrat" pitchFamily="34" charset="0"/>
-                <a:ea typeface="Montserrat" pitchFamily="34" charset="-122"/>
-                <a:cs typeface="Montserrat" pitchFamily="34" charset="-120"/>
+                <a:latin typeface="Unbounded" pitchFamily="34" charset="0"/>
+                <a:ea typeface="Unbounded" pitchFamily="34" charset="-122"/>
+                <a:cs typeface="Unbounded" pitchFamily="34" charset="-120"/>
               </a:rPr>
               <a:t>Маршрут на сьогодні</a:t>
             </a:r>
@@ -16540,56 +16540,56 @@
               <a:buNone/>
             </a:pPr>
             <a:r>
-              <a:rPr lang="en-US" sz="2400" b="1" dirty="0">
+              <a:rPr lang="en-US" sz="2400" dirty="0">
                 <a:solidFill>
                   <a:srgbClr val="FFFFFF"/>
+                </a:solidFill>
+                <a:latin typeface="Unbounded" pitchFamily="34" charset="0"/>
+                <a:ea typeface="Unbounded" pitchFamily="34" charset="-122"/>
+                <a:cs typeface="Unbounded" pitchFamily="34" charset="-120"/>
+              </a:rPr>
+              <a:t>Терміни, якими користуватимемось</a:t>
+            </a:r>
+            <a:endParaRPr lang="en-US" sz="2400" dirty="0"/>
+          </a:p>
+        </p:txBody>
+      </p:sp>
+      <p:sp>
+        <p:nvSpPr>
+          <p:cNvPr id="3" name="Text 1"/>
+          <p:cNvSpPr/>
+          <p:nvPr/>
+        </p:nvSpPr>
+        <p:spPr>
+          <a:xfrm>
+            <a:off x="566928" y="1200607"/>
+            <a:ext cx="6839712" cy="256032"/>
+          </a:xfrm>
+          <a:prstGeom prst="rect">
+            <a:avLst/>
+          </a:prstGeom>
+          <a:noFill/>
+          <a:ln/>
+        </p:spPr>
+        <p:txBody>
+          <a:bodyPr wrap="square" lIns="0" tIns="0" rIns="0" bIns="0" rtlCol="0" anchor="t"/>
+          <a:lstStyle/>
+          <a:p>
+            <a:pPr indent="0" marL="0">
+              <a:lnSpc>
+                <a:spcPct val="100000"/>
+              </a:lnSpc>
+              <a:buNone/>
+            </a:pPr>
+            <a:r>
+              <a:rPr lang="en-US" sz="1300" dirty="0">
+                <a:solidFill>
+                  <a:srgbClr val="AFA9BE"/>
                 </a:solidFill>
                 <a:latin typeface="Montserrat" pitchFamily="34" charset="0"/>
                 <a:ea typeface="Montserrat" pitchFamily="34" charset="-122"/>
                 <a:cs typeface="Montserrat" pitchFamily="34" charset="-120"/>
               </a:rPr>
-              <a:t>Терміни, якими користуватимемось</a:t>
-            </a:r>
-            <a:endParaRPr lang="en-US" sz="2400" dirty="0"/>
-          </a:p>
-        </p:txBody>
-      </p:sp>
-      <p:sp>
-        <p:nvSpPr>
-          <p:cNvPr id="3" name="Text 1"/>
-          <p:cNvSpPr/>
-          <p:nvPr/>
-        </p:nvSpPr>
-        <p:spPr>
-          <a:xfrm>
-            <a:off x="566928" y="1005840"/>
-            <a:ext cx="6839712" cy="256032"/>
-          </a:xfrm>
-          <a:prstGeom prst="rect">
-            <a:avLst/>
-          </a:prstGeom>
-          <a:noFill/>
-          <a:ln/>
-        </p:spPr>
-        <p:txBody>
-          <a:bodyPr wrap="square" lIns="0" tIns="0" rIns="0" bIns="0" rtlCol="0" anchor="t"/>
-          <a:lstStyle/>
-          <a:p>
-            <a:pPr indent="0" marL="0">
-              <a:lnSpc>
-                <a:spcPct val="100000"/>
-              </a:lnSpc>
-              <a:buNone/>
-            </a:pPr>
-            <a:r>
-              <a:rPr lang="en-US" sz="1300" dirty="0">
-                <a:solidFill>
-                  <a:srgbClr val="AFA9BE"/>
-                </a:solidFill>
-                <a:latin typeface="Montserrat" pitchFamily="34" charset="0"/>
-                <a:ea typeface="Montserrat" pitchFamily="34" charset="-122"/>
-                <a:cs typeface="Montserrat" pitchFamily="34" charset="-120"/>
-              </a:rPr>
               <a:t>Шість слів сьогоднішнього уроку</a:t>
             </a:r>
             <a:endParaRPr lang="en-US" sz="1300" dirty="0"/>
@@ -16604,7 +16604,7 @@
         </p:nvSpPr>
         <p:spPr>
           <a:xfrm>
-            <a:off x="566928" y="1271016"/>
+            <a:off x="566928" y="1465783"/>
             <a:ext cx="777240" cy="256032"/>
           </a:xfrm>
           <a:prstGeom prst="roundRect">
@@ -16626,7 +16626,7 @@
         </p:nvSpPr>
         <p:spPr>
           <a:xfrm>
-            <a:off x="566928" y="1271016"/>
+            <a:off x="566928" y="1465783"/>
             <a:ext cx="777240" cy="256032"/>
           </a:xfrm>
           <a:prstGeom prst="rect">
@@ -17535,13 +17535,13 @@
               <a:buNone/>
             </a:pPr>
             <a:r>
-              <a:rPr lang="en-US" sz="2400" b="1" dirty="0">
+              <a:rPr lang="en-US" sz="2400" dirty="0">
                 <a:solidFill>
                   <a:srgbClr val="FFFFFF"/>
                 </a:solidFill>
-                <a:latin typeface="Montserrat" pitchFamily="34" charset="0"/>
-                <a:ea typeface="Montserrat" pitchFamily="34" charset="-122"/>
-                <a:cs typeface="Montserrat" pitchFamily="34" charset="-120"/>
+                <a:latin typeface="Unbounded" pitchFamily="34" charset="0"/>
+                <a:ea typeface="Unbounded" pitchFamily="34" charset="-122"/>
+                <a:cs typeface="Unbounded" pitchFamily="34" charset="-120"/>
               </a:rPr>
               <a:t>Рахунок як спосіб дізнатися про катастрофу</a:t>
             </a:r>
@@ -17557,7 +17557,7 @@
         </p:nvSpPr>
         <p:spPr>
           <a:xfrm>
-            <a:off x="1280160" y="1193140"/>
+            <a:off x="1280160" y="1218895"/>
             <a:ext cx="777240" cy="256032"/>
           </a:xfrm>
           <a:prstGeom prst="roundRect">
@@ -17579,7 +17579,7 @@
         </p:nvSpPr>
         <p:spPr>
           <a:xfrm>
-            <a:off x="1280160" y="1193140"/>
+            <a:off x="1280160" y="1218895"/>
             <a:ext cx="777240" cy="256032"/>
           </a:xfrm>
           <a:prstGeom prst="rect">
@@ -18458,13 +18458,13 @@
               <a:buNone/>
             </a:pPr>
             <a:r>
-              <a:rPr lang="en-US" sz="2400" b="1" dirty="0">
+              <a:rPr lang="en-US" sz="2400" dirty="0">
                 <a:solidFill>
                   <a:srgbClr val="FFFFFF"/>
                 </a:solidFill>
-                <a:latin typeface="Montserrat" pitchFamily="34" charset="0"/>
-                <a:ea typeface="Montserrat" pitchFamily="34" charset="-122"/>
-                <a:cs typeface="Montserrat" pitchFamily="34" charset="-120"/>
+                <a:latin typeface="Unbounded" pitchFamily="34" charset="0"/>
+                <a:ea typeface="Unbounded" pitchFamily="34" charset="-122"/>
+                <a:cs typeface="Unbounded" pitchFamily="34" charset="-120"/>
               </a:rPr>
               <a:t>Usage — єдине джерело правди</a:t>
             </a:r>
@@ -18480,7 +18480,7 @@
         </p:nvSpPr>
         <p:spPr>
           <a:xfrm>
-            <a:off x="1280160" y="1024128"/>
+            <a:off x="1280160" y="1218895"/>
             <a:ext cx="777240" cy="256032"/>
           </a:xfrm>
           <a:prstGeom prst="roundRect">
@@ -18502,7 +18502,7 @@
         </p:nvSpPr>
         <p:spPr>
           <a:xfrm>
-            <a:off x="1280160" y="1024128"/>
+            <a:off x="1280160" y="1218895"/>
             <a:ext cx="777240" cy="256032"/>
           </a:xfrm>
           <a:prstGeom prst="rect">
@@ -19251,13 +19251,13 @@
               <a:buNone/>
             </a:pPr>
             <a:r>
-              <a:rPr lang="en-US" sz="2400" b="1" dirty="0">
+              <a:rPr lang="en-US" sz="2400" dirty="0">
                 <a:solidFill>
                   <a:srgbClr val="FFFFFF"/>
                 </a:solidFill>
-                <a:latin typeface="Montserrat" pitchFamily="34" charset="0"/>
-                <a:ea typeface="Montserrat" pitchFamily="34" charset="-122"/>
-                <a:cs typeface="Montserrat" pitchFamily="34" charset="-120"/>
+                <a:latin typeface="Unbounded" pitchFamily="34" charset="0"/>
+                <a:ea typeface="Unbounded" pitchFamily="34" charset="-122"/>
+                <a:cs typeface="Unbounded" pitchFamily="34" charset="-120"/>
               </a:rPr>
               <a:t>Скільки коштує ваша мова</a:t>
             </a:r>
@@ -20357,13 +20357,13 @@
               <a:buNone/>
             </a:pPr>
             <a:r>
-              <a:rPr lang="en-US" sz="2400" b="1" dirty="0">
+              <a:rPr lang="en-US" sz="2400" dirty="0">
                 <a:solidFill>
                   <a:srgbClr val="FFFFFF"/>
                 </a:solidFill>
-                <a:latin typeface="Montserrat" pitchFamily="34" charset="0"/>
-                <a:ea typeface="Montserrat" pitchFamily="34" charset="-122"/>
-                <a:cs typeface="Montserrat" pitchFamily="34" charset="-120"/>
+                <a:latin typeface="Unbounded" pitchFamily="34" charset="0"/>
+                <a:ea typeface="Unbounded" pitchFamily="34" charset="-122"/>
+                <a:cs typeface="Unbounded" pitchFamily="34" charset="-120"/>
               </a:rPr>
               <a:t>Прайс живе в control plane</a:t>
             </a:r>
@@ -21134,13 +21134,13 @@
               <a:buNone/>
             </a:pPr>
             <a:r>
-              <a:rPr lang="en-US" sz="2400" b="1" dirty="0">
+              <a:rPr lang="en-US" sz="2400" dirty="0">
                 <a:solidFill>
                   <a:srgbClr val="FFFFFF"/>
                 </a:solidFill>
-                <a:latin typeface="Montserrat" pitchFamily="34" charset="0"/>
-                <a:ea typeface="Montserrat" pitchFamily="34" charset="-122"/>
-                <a:cs typeface="Montserrat" pitchFamily="34" charset="-120"/>
+                <a:latin typeface="Unbounded" pitchFamily="34" charset="0"/>
+                <a:ea typeface="Unbounded" pitchFamily="34" charset="-122"/>
+                <a:cs typeface="Unbounded" pitchFamily="34" charset="-120"/>
               </a:rPr>
               <a:t>Прайс — живі дані, і цін уже не дві, а три</a:t>
             </a:r>
@@ -21156,7 +21156,7 @@
         </p:nvSpPr>
         <p:spPr>
           <a:xfrm>
-            <a:off x="1280160" y="1193140"/>
+            <a:off x="1280160" y="1218895"/>
             <a:ext cx="777240" cy="256032"/>
           </a:xfrm>
           <a:prstGeom prst="roundRect">
@@ -21178,7 +21178,7 @@
         </p:nvSpPr>
         <p:spPr>
           <a:xfrm>
-            <a:off x="1280160" y="1193140"/>
+            <a:off x="1280160" y="1218895"/>
             <a:ext cx="777240" cy="256032"/>
           </a:xfrm>
           <a:prstGeom prst="rect">

--- a/docs/decks/L04.pptx
+++ b/docs/decks/L04.pptx
@@ -2554,7 +2554,7 @@
             <a:lvl1pPr>
               <a:defRPr sz="850">
                 <a:solidFill>
-                  <a:srgbClr val="8A82A0"/>
+                  <a:srgbClr val="9A94AA"/>
                 </a:solidFill>
                 <a:latin typeface="Courier New"/>
                 <a:ea typeface="Courier New"/>
@@ -2636,6 +2636,62 @@
 </p:sldLayout>
 </file>
 
+<file path=ppt/slideLayouts/slideLayout3.xml><?xml version="1.0" encoding="utf-8"?>
+<p:sldLayout xmlns:a="http://schemas.openxmlformats.org/drawingml/2006/main" xmlns:r="http://schemas.openxmlformats.org/officeDocument/2006/relationships" xmlns:p="http://schemas.openxmlformats.org/presentationml/2006/main" preserve="1">
+  <p:cSld name="NEO_COVER">
+    <p:bg>
+      <p:bgPr>
+        <a:solidFill>
+          <a:srgbClr val="000000"/>
+        </a:solidFill>
+      </p:bgPr>
+    </p:bg>
+    <p:spTree>
+      <p:nvGrpSpPr>
+        <p:cNvPr id="1" name=""/>
+        <p:cNvGrpSpPr/>
+        <p:nvPr/>
+      </p:nvGrpSpPr>
+      <p:grpSpPr>
+        <a:xfrm>
+          <a:off x="0" y="0"/>
+          <a:ext cx="0" cy="0"/>
+          <a:chOff x="0" y="0"/>
+          <a:chExt cx="0" cy="0"/>
+        </a:xfrm>
+      </p:grpSpPr>
+      <p:pic>
+        <p:nvPicPr>
+          <p:cNvPr id="2" name="Image 0" descr="preencoded.png">    </p:cNvPr>
+          <p:cNvPicPr>
+            <a:picLocks noChangeAspect="1"/>
+          </p:cNvPicPr>
+          <p:nvPr/>
+        </p:nvPicPr>
+        <p:blipFill>
+          <a:blip r:embed="rId1"/>
+          <a:stretch>
+            <a:fillRect/>
+          </a:stretch>
+        </p:blipFill>
+        <p:spPr>
+          <a:xfrm>
+            <a:off x="0" y="0"/>
+            <a:ext cx="12191695" cy="6858000"/>
+          </a:xfrm>
+          <a:prstGeom prst="rect">
+            <a:avLst/>
+          </a:prstGeom>
+        </p:spPr>
+      </p:pic>
+    </p:spTree>
+  </p:cSld>
+  <p:clrMapOvr>
+    <a:masterClrMapping/>
+  </p:clrMapOvr>
+</p:sldLayout>
+</file>
+
 <file path=ppt/slideMasters/slideMaster1.xml><?xml version="1.0" encoding="utf-8"?>
 <p:sldMaster xmlns:a="http://schemas.openxmlformats.org/drawingml/2006/main" xmlns:r="http://schemas.openxmlformats.org/officeDocument/2006/relationships" xmlns:p="http://schemas.openxmlformats.org/presentationml/2006/main">
   <p:cSld>
@@ -2683,7 +2739,7 @@
             <a:lvl1pPr>
               <a:defRPr sz="850">
                 <a:solidFill>
-                  <a:srgbClr val="8A82A0"/>
+                  <a:srgbClr val="9A94AA"/>
                 </a:solidFill>
                 <a:latin typeface="Courier New"/>
                 <a:ea typeface="Courier New"/>
@@ -2707,6 +2763,7 @@
   <p:sldLayoutIdLst>
     <p:sldLayoutId id="2147483649" r:id="rId1"/>
     <p:sldLayoutId id="2147483650" r:id="rId2"/>
+    <p:sldLayoutId id="2147483651" r:id="rId3"/>
   </p:sldLayoutIdLst>
   <p:hf sldNum="0" hdr="0" ftr="0" dt="0"/>
   <p:txStyles>
@@ -3036,7 +3093,7 @@
           </a:prstGeom>
           <a:ln w="12700">
             <a:solidFill>
-              <a:srgbClr val="9B7BE8">
+              <a:srgbClr val="8F72E6">
                 <a:alpha val="24000"/>
               </a:srgbClr>
             </a:solidFill>
@@ -3062,7 +3119,7 @@
           </a:prstGeom>
           <a:ln w="12700">
             <a:solidFill>
-              <a:srgbClr val="9B7BE8">
+              <a:srgbClr val="8F72E6">
                 <a:alpha val="42000"/>
               </a:srgbClr>
             </a:solidFill>
@@ -3088,7 +3145,7 @@
           </a:prstGeom>
           <a:ln w="12700">
             <a:solidFill>
-              <a:srgbClr val="9B7BE8">
+              <a:srgbClr val="8F72E6">
                 <a:alpha val="66000"/>
               </a:srgbClr>
             </a:solidFill>
@@ -3123,7 +3180,7 @@
             <a:r>
               <a:rPr lang="en-US" sz="1200" b="1" spc="300" kern="0" dirty="0">
                 <a:solidFill>
-                  <a:srgbClr val="C9B8FB"/>
+                  <a:srgbClr val="C4B3F5"/>
                 </a:solidFill>
                 <a:latin typeface="Courier New" pitchFamily="34" charset="0"/>
                 <a:ea typeface="Courier New" pitchFamily="34" charset="-122"/>
@@ -3227,7 +3284,7 @@
             <a:r>
               <a:rPr lang="en-US" sz="1500" dirty="0">
                 <a:solidFill>
-                  <a:srgbClr val="C9B8FB"/>
+                  <a:srgbClr val="C4B3F5"/>
                 </a:solidFill>
                 <a:latin typeface="Montserrat" pitchFamily="34" charset="0"/>
                 <a:ea typeface="Montserrat" pitchFamily="34" charset="-122"/>
@@ -3257,7 +3314,7 @@
           </a:prstGeom>
           <a:ln w="12700">
             <a:solidFill>
-              <a:srgbClr val="9B7BE8">
+              <a:srgbClr val="8F72E6">
                 <a:alpha val="60000"/>
               </a:srgbClr>
             </a:solidFill>
@@ -3292,7 +3349,7 @@
             <a:r>
               <a:rPr lang="en-US" sz="900" dirty="0">
                 <a:solidFill>
-                  <a:srgbClr val="C9B8FB"/>
+                  <a:srgbClr val="C4B3F5"/>
                 </a:solidFill>
                 <a:latin typeface="Courier New" pitchFamily="34" charset="0"/>
                 <a:ea typeface="Courier New" pitchFamily="34" charset="-122"/>
@@ -3383,7 +3440,7 @@
           </a:prstGeom>
           <a:ln w="12700">
             <a:solidFill>
-              <a:srgbClr val="9B7BE8">
+              <a:srgbClr val="8F72E6">
                 <a:alpha val="60000"/>
               </a:srgbClr>
             </a:solidFill>
@@ -3418,7 +3475,7 @@
             <a:r>
               <a:rPr lang="en-US" sz="900" dirty="0">
                 <a:solidFill>
-                  <a:srgbClr val="C9B8FB"/>
+                  <a:srgbClr val="C4B3F5"/>
                 </a:solidFill>
                 <a:latin typeface="Courier New" pitchFamily="34" charset="0"/>
                 <a:ea typeface="Courier New" pitchFamily="34" charset="-122"/>
@@ -3448,7 +3505,7 @@
           </a:prstGeom>
           <a:ln w="12700">
             <a:solidFill>
-              <a:srgbClr val="9B7BE8">
+              <a:srgbClr val="8F72E6">
                 <a:alpha val="60000"/>
               </a:srgbClr>
             </a:solidFill>
@@ -3483,7 +3540,7 @@
             <a:r>
               <a:rPr lang="en-US" sz="900" dirty="0">
                 <a:solidFill>
-                  <a:srgbClr val="C9B8FB"/>
+                  <a:srgbClr val="C4B3F5"/>
                 </a:solidFill>
                 <a:latin typeface="Courier New" pitchFamily="34" charset="0"/>
                 <a:ea typeface="Courier New" pitchFamily="34" charset="-122"/>
@@ -3513,7 +3570,7 @@
           </a:prstGeom>
           <a:ln w="12700">
             <a:solidFill>
-              <a:srgbClr val="9B7BE8">
+              <a:srgbClr val="8F72E6">
                 <a:alpha val="60000"/>
               </a:srgbClr>
             </a:solidFill>
@@ -3548,7 +3605,7 @@
             <a:r>
               <a:rPr lang="en-US" sz="900" dirty="0">
                 <a:solidFill>
-                  <a:srgbClr val="C9B8FB"/>
+                  <a:srgbClr val="C4B3F5"/>
                 </a:solidFill>
                 <a:latin typeface="Courier New" pitchFamily="34" charset="0"/>
                 <a:ea typeface="Courier New" pitchFamily="34" charset="-122"/>
@@ -3578,7 +3635,7 @@
           </a:prstGeom>
           <a:ln w="12700">
             <a:solidFill>
-              <a:srgbClr val="9B7BE8">
+              <a:srgbClr val="8F72E6">
                 <a:alpha val="60000"/>
               </a:srgbClr>
             </a:solidFill>
@@ -3613,7 +3670,7 @@
             <a:r>
               <a:rPr lang="en-US" sz="900" dirty="0">
                 <a:solidFill>
-                  <a:srgbClr val="C9B8FB"/>
+                  <a:srgbClr val="C4B3F5"/>
                 </a:solidFill>
                 <a:latin typeface="Courier New" pitchFamily="34" charset="0"/>
                 <a:ea typeface="Courier New" pitchFamily="34" charset="-122"/>
@@ -3677,7 +3734,7 @@
             <a:r>
               <a:rPr lang="en-US" sz="2600" b="1" dirty="0">
                 <a:solidFill>
-                  <a:srgbClr val="C9A6FF"/>
+                  <a:srgbClr val="A98BFF"/>
                 </a:solidFill>
                 <a:latin typeface="Courier New" pitchFamily="34" charset="0"/>
                 <a:ea typeface="Courier New" pitchFamily="34" charset="-122"/>
@@ -3745,9 +3802,14 @@
             </a:avLst>
           </a:prstGeom>
           <a:solidFill>
-            <a:srgbClr val="C9A6FF"/>
+            <a:srgbClr val="1A0B3D"/>
           </a:solidFill>
-          <a:ln/>
+          <a:ln w="12700">
+            <a:solidFill>
+              <a:srgbClr val="5A05F4"/>
+            </a:solidFill>
+            <a:prstDash val="solid"/>
+          </a:ln>
         </p:spPr>
       </p:sp>
       <p:sp>
@@ -3777,7 +3839,7 @@
             <a:r>
               <a:rPr lang="en-US" sz="900" b="1" spc="100" kern="0" dirty="0">
                 <a:solidFill>
-                  <a:srgbClr val="1C1140"/>
+                  <a:srgbClr val="A98BFF"/>
                 </a:solidFill>
                 <a:latin typeface="Courier New" pitchFamily="34" charset="0"/>
                 <a:ea typeface="Courier New" pitchFamily="34" charset="-122"/>
@@ -3830,11 +3892,11 @@
             </a:avLst>
           </a:prstGeom>
           <a:solidFill>
-            <a:srgbClr val="12101A"/>
+            <a:srgbClr val="07060C"/>
           </a:solidFill>
           <a:ln w="12700">
             <a:solidFill>
-              <a:srgbClr val="2E2A3A"/>
+              <a:srgbClr val="5E4F85"/>
             </a:solidFill>
             <a:prstDash val="solid"/>
           </a:ln>
@@ -3870,7 +3932,7 @@
             <a:r>
               <a:rPr lang="en-US" sz="1200" dirty="0">
                 <a:solidFill>
-                  <a:srgbClr val="8A82A0"/>
+                  <a:srgbClr val="9A94AA"/>
                 </a:solidFill>
                 <a:latin typeface="Courier New" pitchFamily="34" charset="0"/>
                 <a:ea typeface="Courier New" pitchFamily="34" charset="-122"/>
@@ -3890,7 +3952,7 @@
             <a:r>
               <a:rPr lang="en-US" sz="1200" dirty="0">
                 <a:solidFill>
-                  <a:srgbClr val="C9A6FF"/>
+                  <a:srgbClr val="A98BFF"/>
                 </a:solidFill>
                 <a:latin typeface="Courier New" pitchFamily="34" charset="0"/>
                 <a:ea typeface="Courier New" pitchFamily="34" charset="-122"/>
@@ -3950,7 +4012,7 @@
             <a:r>
               <a:rPr lang="en-US" sz="1200" dirty="0">
                 <a:solidFill>
-                  <a:srgbClr val="F0B36B"/>
+                  <a:srgbClr val="C9C4D6"/>
                 </a:solidFill>
                 <a:latin typeface="Courier New" pitchFamily="34" charset="0"/>
                 <a:ea typeface="Courier New" pitchFamily="34" charset="-122"/>
@@ -3979,9 +4041,14 @@
             </a:avLst>
           </a:prstGeom>
           <a:solidFill>
-            <a:srgbClr val="2E1418"/>
+            <a:srgbClr val="1A0808"/>
           </a:solidFill>
-          <a:ln/>
+          <a:ln w="12700">
+            <a:solidFill>
+              <a:srgbClr val="FF6B6B"/>
+            </a:solidFill>
+            <a:prstDash val="solid"/>
+          </a:ln>
         </p:spPr>
       </p:sp>
       <p:sp>
@@ -4011,7 +4078,7 @@
             <a:r>
               <a:rPr lang="en-US" sz="1450" b="1" dirty="0">
                 <a:solidFill>
-                  <a:srgbClr val="FF7B7B"/>
+                  <a:srgbClr val="FF6B6B"/>
                 </a:solidFill>
                 <a:latin typeface="Montserrat" pitchFamily="34" charset="0"/>
                 <a:ea typeface="Montserrat" pitchFamily="34" charset="-122"/>
@@ -4053,7 +4120,7 @@
             <a:r>
               <a:rPr lang="en-US" sz="1200" dirty="0">
                 <a:solidFill>
-                  <a:srgbClr val="FFFFFF"/>
+                  <a:srgbClr val="C9C4D6"/>
                 </a:solidFill>
                 <a:latin typeface="Montserrat" pitchFamily="34" charset="0"/>
                 <a:ea typeface="Montserrat" pitchFamily="34" charset="-122"/>
@@ -4082,9 +4149,14 @@
             </a:avLst>
           </a:prstGeom>
           <a:solidFill>
-            <a:srgbClr val="102A20"/>
+            <a:srgbClr val="06180F"/>
           </a:solidFill>
-          <a:ln/>
+          <a:ln w="12700">
+            <a:solidFill>
+              <a:srgbClr val="3FCF8E"/>
+            </a:solidFill>
+            <a:prstDash val="solid"/>
+          </a:ln>
         </p:spPr>
       </p:sp>
       <p:sp>
@@ -4114,7 +4186,7 @@
             <a:r>
               <a:rPr lang="en-US" sz="1450" b="1" dirty="0">
                 <a:solidFill>
-                  <a:srgbClr val="5FD6A0"/>
+                  <a:srgbClr val="3FCF8E"/>
                 </a:solidFill>
                 <a:latin typeface="Montserrat" pitchFamily="34" charset="0"/>
                 <a:ea typeface="Montserrat" pitchFamily="34" charset="-122"/>
@@ -4156,7 +4228,7 @@
             <a:r>
               <a:rPr lang="en-US" sz="1200" dirty="0">
                 <a:solidFill>
-                  <a:srgbClr val="FFFFFF"/>
+                  <a:srgbClr val="C9C4D6"/>
                 </a:solidFill>
                 <a:latin typeface="Montserrat" pitchFamily="34" charset="0"/>
                 <a:ea typeface="Montserrat" pitchFamily="34" charset="-122"/>
@@ -4198,7 +4270,7 @@
             <a:lvl1pPr>
               <a:defRPr sz="850">
                 <a:solidFill>
-                  <a:srgbClr val="8A82A0"/>
+                  <a:srgbClr val="9A94AA"/>
                 </a:solidFill>
                 <a:latin typeface="Courier New"/>
                 <a:ea typeface="Courier New"/>
@@ -4268,7 +4340,7 @@
             <a:r>
               <a:rPr lang="en-US" sz="2600" b="1" dirty="0">
                 <a:solidFill>
-                  <a:srgbClr val="C9A6FF"/>
+                  <a:srgbClr val="A98BFF"/>
                 </a:solidFill>
                 <a:latin typeface="Courier New" pitchFamily="34" charset="0"/>
                 <a:ea typeface="Courier New" pitchFamily="34" charset="-122"/>
@@ -4336,9 +4408,14 @@
             </a:avLst>
           </a:prstGeom>
           <a:solidFill>
-            <a:srgbClr val="C9A6FF"/>
+            <a:srgbClr val="1A0B3D"/>
           </a:solidFill>
-          <a:ln/>
+          <a:ln w="12700">
+            <a:solidFill>
+              <a:srgbClr val="5A05F4"/>
+            </a:solidFill>
+            <a:prstDash val="solid"/>
+          </a:ln>
         </p:spPr>
       </p:sp>
       <p:sp>
@@ -4368,7 +4445,7 @@
             <a:r>
               <a:rPr lang="en-US" sz="900" b="1" spc="100" kern="0" dirty="0">
                 <a:solidFill>
-                  <a:srgbClr val="1C1140"/>
+                  <a:srgbClr val="A98BFF"/>
                 </a:solidFill>
                 <a:latin typeface="Courier New" pitchFamily="34" charset="0"/>
                 <a:ea typeface="Courier New" pitchFamily="34" charset="-122"/>
@@ -4421,11 +4498,11 @@
             </a:avLst>
           </a:prstGeom>
           <a:solidFill>
-            <a:srgbClr val="17141F"/>
+            <a:srgbClr val="000000"/>
           </a:solidFill>
           <a:ln w="12700">
             <a:solidFill>
-              <a:srgbClr val="2E2A3A"/>
+              <a:srgbClr val="5E4F85"/>
             </a:solidFill>
             <a:prstDash val="solid"/>
           </a:ln>
@@ -4487,7 +4564,7 @@
           <a:noFill/>
           <a:ln w="15875">
             <a:solidFill>
-              <a:srgbClr val="9B7BE8"/>
+              <a:srgbClr val="8F72E6"/>
             </a:solidFill>
             <a:prstDash val="solid"/>
           </a:ln>
@@ -4508,7 +4585,7 @@
             <a:avLst/>
           </a:prstGeom>
           <a:solidFill>
-            <a:srgbClr val="9B7BE8"/>
+            <a:srgbClr val="8F72E6"/>
           </a:solidFill>
           <a:ln/>
         </p:spPr>
@@ -4530,9 +4607,14 @@
             </a:avLst>
           </a:prstGeom>
           <a:solidFill>
-            <a:srgbClr val="2A2010"/>
+            <a:srgbClr val="0B1A38"/>
           </a:solidFill>
-          <a:ln/>
+          <a:ln w="12700">
+            <a:solidFill>
+              <a:srgbClr val="6BA0F8"/>
+            </a:solidFill>
+            <a:prstDash val="solid"/>
+          </a:ln>
         </p:spPr>
       </p:sp>
       <p:sp>
@@ -4562,7 +4644,7 @@
             <a:r>
               <a:rPr lang="en-US" sz="1100" b="1" dirty="0">
                 <a:solidFill>
-                  <a:srgbClr val="E8A857"/>
+                  <a:srgbClr val="6BA0F8"/>
                 </a:solidFill>
                 <a:latin typeface="Courier New" pitchFamily="34" charset="0"/>
                 <a:ea typeface="Courier New" pitchFamily="34" charset="-122"/>
@@ -4591,7 +4673,7 @@
           <a:noFill/>
           <a:ln w="15875">
             <a:solidFill>
-              <a:srgbClr val="9B7BE8"/>
+              <a:srgbClr val="8F72E6"/>
             </a:solidFill>
             <a:prstDash val="solid"/>
           </a:ln>
@@ -4612,7 +4694,7 @@
             <a:avLst/>
           </a:prstGeom>
           <a:solidFill>
-            <a:srgbClr val="9B7BE8"/>
+            <a:srgbClr val="8F72E6"/>
           </a:solidFill>
           <a:ln/>
         </p:spPr>
@@ -4634,11 +4716,11 @@
             </a:avLst>
           </a:prstGeom>
           <a:solidFill>
-            <a:srgbClr val="17141F"/>
+            <a:srgbClr val="000000"/>
           </a:solidFill>
           <a:ln w="12700">
             <a:solidFill>
-              <a:srgbClr val="2E2A3A"/>
+              <a:srgbClr val="5E4F85"/>
             </a:solidFill>
             <a:prstDash val="solid"/>
           </a:ln>
@@ -4700,7 +4782,7 @@
           <a:noFill/>
           <a:ln w="15875">
             <a:solidFill>
-              <a:srgbClr val="9B7BE8"/>
+              <a:srgbClr val="8F72E6"/>
             </a:solidFill>
             <a:prstDash val="solid"/>
           </a:ln>
@@ -4721,7 +4803,7 @@
             <a:avLst/>
           </a:prstGeom>
           <a:solidFill>
-            <a:srgbClr val="9B7BE8"/>
+            <a:srgbClr val="8F72E6"/>
           </a:solidFill>
           <a:ln/>
         </p:spPr>
@@ -4743,11 +4825,11 @@
             </a:avLst>
           </a:prstGeom>
           <a:solidFill>
-            <a:srgbClr val="17141F"/>
+            <a:srgbClr val="000000"/>
           </a:solidFill>
           <a:ln w="12700">
             <a:solidFill>
-              <a:srgbClr val="2E2A3A"/>
+              <a:srgbClr val="5E4F85"/>
             </a:solidFill>
             <a:prstDash val="solid"/>
           </a:ln>
@@ -4809,9 +4891,14 @@
             </a:avLst>
           </a:prstGeom>
           <a:solidFill>
-            <a:srgbClr val="2E1418"/>
+            <a:srgbClr val="1A0808"/>
           </a:solidFill>
-          <a:ln/>
+          <a:ln w="12700">
+            <a:solidFill>
+              <a:srgbClr val="FF6B6B"/>
+            </a:solidFill>
+            <a:prstDash val="solid"/>
+          </a:ln>
         </p:spPr>
       </p:sp>
       <p:sp>
@@ -4841,7 +4928,7 @@
             <a:r>
               <a:rPr lang="en-US" sz="3400" b="1" dirty="0">
                 <a:solidFill>
-                  <a:srgbClr val="FF7B7B"/>
+                  <a:srgbClr val="FF6B6B"/>
                 </a:solidFill>
                 <a:latin typeface="Montserrat" pitchFamily="34" charset="0"/>
                 <a:ea typeface="Montserrat" pitchFamily="34" charset="-122"/>
@@ -4880,7 +4967,7 @@
             <a:r>
               <a:rPr lang="en-US" sz="1150" dirty="0">
                 <a:solidFill>
-                  <a:srgbClr val="FF7B7B"/>
+                  <a:srgbClr val="C9C4D6"/>
                 </a:solidFill>
                 <a:latin typeface="Montserrat" pitchFamily="34" charset="0"/>
                 <a:ea typeface="Montserrat" pitchFamily="34" charset="-122"/>
@@ -4909,9 +4996,14 @@
             </a:avLst>
           </a:prstGeom>
           <a:solidFill>
-            <a:srgbClr val="2A2010"/>
+            <a:srgbClr val="0B1A38"/>
           </a:solidFill>
-          <a:ln/>
+          <a:ln w="12700">
+            <a:solidFill>
+              <a:srgbClr val="6BA0F8"/>
+            </a:solidFill>
+            <a:prstDash val="solid"/>
+          </a:ln>
         </p:spPr>
       </p:sp>
       <p:sp>
@@ -4973,9 +5065,14 @@
             </a:avLst>
           </a:prstGeom>
           <a:solidFill>
-            <a:srgbClr val="102A20"/>
+            <a:srgbClr val="06180F"/>
           </a:solidFill>
-          <a:ln/>
+          <a:ln w="12700">
+            <a:solidFill>
+              <a:srgbClr val="3FCF8E"/>
+            </a:solidFill>
+            <a:prstDash val="solid"/>
+          </a:ln>
         </p:spPr>
       </p:sp>
       <p:sp>
@@ -5005,7 +5102,7 @@
             <a:r>
               <a:rPr lang="en-US" sz="950" b="1" spc="150" kern="0" dirty="0">
                 <a:solidFill>
-                  <a:srgbClr val="5FD6A0"/>
+                  <a:srgbClr val="3FCF8E"/>
                 </a:solidFill>
                 <a:latin typeface="Courier New" pitchFamily="34" charset="0"/>
                 <a:ea typeface="Courier New" pitchFamily="34" charset="-122"/>
@@ -5089,7 +5186,7 @@
             <a:lvl1pPr>
               <a:defRPr sz="850">
                 <a:solidFill>
-                  <a:srgbClr val="8A82A0"/>
+                  <a:srgbClr val="9A94AA"/>
                 </a:solidFill>
                 <a:latin typeface="Courier New"/>
                 <a:ea typeface="Courier New"/>
@@ -5159,7 +5256,7 @@
             <a:r>
               <a:rPr lang="en-US" sz="2600" b="1" dirty="0">
                 <a:solidFill>
-                  <a:srgbClr val="C9A6FF"/>
+                  <a:srgbClr val="A98BFF"/>
                 </a:solidFill>
                 <a:latin typeface="Courier New" pitchFamily="34" charset="0"/>
                 <a:ea typeface="Courier New" pitchFamily="34" charset="-122"/>
@@ -5227,9 +5324,14 @@
             </a:avLst>
           </a:prstGeom>
           <a:solidFill>
-            <a:srgbClr val="C9A6FF"/>
+            <a:srgbClr val="1A0B3D"/>
           </a:solidFill>
-          <a:ln/>
+          <a:ln w="12700">
+            <a:solidFill>
+              <a:srgbClr val="5A05F4"/>
+            </a:solidFill>
+            <a:prstDash val="solid"/>
+          </a:ln>
         </p:spPr>
       </p:sp>
       <p:sp>
@@ -5259,7 +5361,7 @@
             <a:r>
               <a:rPr lang="en-US" sz="900" b="1" spc="100" kern="0" dirty="0">
                 <a:solidFill>
-                  <a:srgbClr val="1C1140"/>
+                  <a:srgbClr val="A98BFF"/>
                 </a:solidFill>
                 <a:latin typeface="Courier New" pitchFamily="34" charset="0"/>
                 <a:ea typeface="Courier New" pitchFamily="34" charset="-122"/>
@@ -5312,9 +5414,14 @@
             </a:avLst>
           </a:prstGeom>
           <a:solidFill>
-            <a:srgbClr val="1C1140"/>
+            <a:srgbClr val="1A0B3D"/>
           </a:solidFill>
-          <a:ln/>
+          <a:ln w="12700">
+            <a:solidFill>
+              <a:srgbClr val="5A05F4"/>
+            </a:solidFill>
+            <a:prstDash val="solid"/>
+          </a:ln>
         </p:spPr>
       </p:sp>
       <p:sp>
@@ -5344,7 +5451,7 @@
             <a:r>
               <a:rPr lang="en-US" sz="1450" b="1" dirty="0">
                 <a:solidFill>
-                  <a:srgbClr val="C9A6FF"/>
+                  <a:srgbClr val="A98BFF"/>
                 </a:solidFill>
                 <a:latin typeface="Montserrat" pitchFamily="34" charset="0"/>
                 <a:ea typeface="Montserrat" pitchFamily="34" charset="-122"/>
@@ -5386,7 +5493,7 @@
             <a:r>
               <a:rPr lang="en-US" sz="1200" dirty="0">
                 <a:solidFill>
-                  <a:srgbClr val="FFFFFF"/>
+                  <a:srgbClr val="C9C4D6"/>
                 </a:solidFill>
                 <a:latin typeface="Montserrat" pitchFamily="34" charset="0"/>
                 <a:ea typeface="Montserrat" pitchFamily="34" charset="-122"/>
@@ -5415,11 +5522,11 @@
             </a:avLst>
           </a:prstGeom>
           <a:solidFill>
-            <a:srgbClr val="17141F"/>
+            <a:srgbClr val="000000"/>
           </a:solidFill>
           <a:ln w="12700">
             <a:solidFill>
-              <a:srgbClr val="2E2A3A"/>
+              <a:srgbClr val="5E4F85"/>
             </a:solidFill>
             <a:prstDash val="solid"/>
           </a:ln>
@@ -5494,7 +5601,7 @@
             <a:r>
               <a:rPr lang="en-US" sz="1200" dirty="0">
                 <a:solidFill>
-                  <a:srgbClr val="AFA9BE"/>
+                  <a:srgbClr val="C9C4D6"/>
                 </a:solidFill>
                 <a:latin typeface="Montserrat" pitchFamily="34" charset="0"/>
                 <a:ea typeface="Montserrat" pitchFamily="34" charset="-122"/>
@@ -5521,11 +5628,11 @@
             <a:avLst/>
           </a:prstGeom>
           <a:solidFill>
-            <a:srgbClr val="102A20"/>
+            <a:srgbClr val="06180F"/>
           </a:solidFill>
           <a:ln w="12700">
             <a:solidFill>
-              <a:srgbClr val="5FD6A0"/>
+              <a:srgbClr val="3FCF8E"/>
             </a:solidFill>
             <a:prstDash val="solid"/>
           </a:ln>
@@ -5558,7 +5665,7 @@
             <a:r>
               <a:rPr lang="en-US" sz="950" b="1" dirty="0">
                 <a:solidFill>
-                  <a:srgbClr val="5FD6A0"/>
+                  <a:srgbClr val="3FCF8E"/>
                 </a:solidFill>
                 <a:latin typeface="Courier New" pitchFamily="34" charset="0"/>
                 <a:ea typeface="Courier New" pitchFamily="34" charset="-122"/>
@@ -5585,11 +5692,11 @@
             <a:avLst/>
           </a:prstGeom>
           <a:solidFill>
-            <a:srgbClr val="2E1418"/>
+            <a:srgbClr val="1A0808"/>
           </a:solidFill>
           <a:ln w="12700">
             <a:solidFill>
-              <a:srgbClr val="FF7B7B"/>
+              <a:srgbClr val="FF6B6B"/>
             </a:solidFill>
             <a:prstDash val="solid"/>
           </a:ln>
@@ -5622,7 +5729,7 @@
             <a:r>
               <a:rPr lang="en-US" sz="950" b="1" dirty="0">
                 <a:solidFill>
-                  <a:srgbClr val="FF7B7B"/>
+                  <a:srgbClr val="FF6B6B"/>
                 </a:solidFill>
                 <a:latin typeface="Courier New" pitchFamily="34" charset="0"/>
                 <a:ea typeface="Courier New" pitchFamily="34" charset="-122"/>
@@ -5661,7 +5768,7 @@
             <a:r>
               <a:rPr lang="en-US" sz="850" spc="100" kern="0" dirty="0">
                 <a:solidFill>
-                  <a:srgbClr val="8A82A0"/>
+                  <a:srgbClr val="9A94AA"/>
                 </a:solidFill>
                 <a:latin typeface="Courier New" pitchFamily="34" charset="0"/>
                 <a:ea typeface="Courier New" pitchFamily="34" charset="-122"/>
@@ -5690,9 +5797,14 @@
             </a:avLst>
           </a:prstGeom>
           <a:solidFill>
-            <a:srgbClr val="2E1418"/>
+            <a:srgbClr val="1A0808"/>
           </a:solidFill>
-          <a:ln/>
+          <a:ln w="12700">
+            <a:solidFill>
+              <a:srgbClr val="FF6B6B"/>
+            </a:solidFill>
+            <a:prstDash val="solid"/>
+          </a:ln>
         </p:spPr>
       </p:sp>
       <p:sp>
@@ -5722,7 +5834,7 @@
             <a:r>
               <a:rPr lang="en-US" sz="950" b="1" spc="150" kern="0" dirty="0">
                 <a:solidFill>
-                  <a:srgbClr val="FF7B7B"/>
+                  <a:srgbClr val="FF6B6B"/>
                 </a:solidFill>
                 <a:latin typeface="Courier New" pitchFamily="34" charset="0"/>
                 <a:ea typeface="Courier New" pitchFamily="34" charset="-122"/>
@@ -5806,7 +5918,7 @@
             <a:lvl1pPr>
               <a:defRPr sz="850">
                 <a:solidFill>
-                  <a:srgbClr val="8A82A0"/>
+                  <a:srgbClr val="9A94AA"/>
                 </a:solidFill>
                 <a:latin typeface="Courier New"/>
                 <a:ea typeface="Courier New"/>
@@ -5876,7 +5988,7 @@
             <a:r>
               <a:rPr lang="en-US" sz="2600" b="1" dirty="0">
                 <a:solidFill>
-                  <a:srgbClr val="C9A6FF"/>
+                  <a:srgbClr val="A98BFF"/>
                 </a:solidFill>
                 <a:latin typeface="Courier New" pitchFamily="34" charset="0"/>
                 <a:ea typeface="Courier New" pitchFamily="34" charset="-122"/>
@@ -5944,9 +6056,14 @@
             </a:avLst>
           </a:prstGeom>
           <a:solidFill>
-            <a:srgbClr val="C9A6FF"/>
+            <a:srgbClr val="1A0B3D"/>
           </a:solidFill>
-          <a:ln/>
+          <a:ln w="12700">
+            <a:solidFill>
+              <a:srgbClr val="5A05F4"/>
+            </a:solidFill>
+            <a:prstDash val="solid"/>
+          </a:ln>
         </p:spPr>
       </p:sp>
       <p:sp>
@@ -5976,7 +6093,7 @@
             <a:r>
               <a:rPr lang="en-US" sz="900" b="1" spc="100" kern="0" dirty="0">
                 <a:solidFill>
-                  <a:srgbClr val="1C1140"/>
+                  <a:srgbClr val="A98BFF"/>
                 </a:solidFill>
                 <a:latin typeface="Courier New" pitchFamily="34" charset="0"/>
                 <a:ea typeface="Courier New" pitchFamily="34" charset="-122"/>
@@ -6029,9 +6146,14 @@
             </a:avLst>
           </a:prstGeom>
           <a:solidFill>
-            <a:srgbClr val="2E1418"/>
+            <a:srgbClr val="1A0808"/>
           </a:solidFill>
-          <a:ln/>
+          <a:ln w="12700">
+            <a:solidFill>
+              <a:srgbClr val="FF6B6B"/>
+            </a:solidFill>
+            <a:prstDash val="solid"/>
+          </a:ln>
         </p:spPr>
       </p:sp>
       <p:sp>
@@ -6061,7 +6183,7 @@
             <a:r>
               <a:rPr lang="en-US" sz="3600" b="1" dirty="0">
                 <a:solidFill>
-                  <a:srgbClr val="FF7B7B"/>
+                  <a:srgbClr val="FF6B6B"/>
                 </a:solidFill>
                 <a:latin typeface="Montserrat" pitchFamily="34" charset="0"/>
                 <a:ea typeface="Montserrat" pitchFamily="34" charset="-122"/>
@@ -6100,7 +6222,7 @@
             <a:r>
               <a:rPr lang="en-US" sz="1150" dirty="0">
                 <a:solidFill>
-                  <a:srgbClr val="FF7B7B"/>
+                  <a:srgbClr val="C9C4D6"/>
                 </a:solidFill>
                 <a:latin typeface="Montserrat" pitchFamily="34" charset="0"/>
                 <a:ea typeface="Montserrat" pitchFamily="34" charset="-122"/>
@@ -6129,9 +6251,14 @@
             </a:avLst>
           </a:prstGeom>
           <a:solidFill>
-            <a:srgbClr val="102A20"/>
+            <a:srgbClr val="06180F"/>
           </a:solidFill>
-          <a:ln/>
+          <a:ln w="12700">
+            <a:solidFill>
+              <a:srgbClr val="3FCF8E"/>
+            </a:solidFill>
+            <a:prstDash val="solid"/>
+          </a:ln>
         </p:spPr>
       </p:sp>
       <p:sp>
@@ -6161,7 +6288,7 @@
             <a:r>
               <a:rPr lang="en-US" sz="2800" b="1" dirty="0">
                 <a:solidFill>
-                  <a:srgbClr val="5FD6A0"/>
+                  <a:srgbClr val="3FCF8E"/>
                 </a:solidFill>
                 <a:latin typeface="Montserrat" pitchFamily="34" charset="0"/>
                 <a:ea typeface="Montserrat" pitchFamily="34" charset="-122"/>
@@ -6200,7 +6327,7 @@
             <a:r>
               <a:rPr lang="en-US" sz="1150" dirty="0">
                 <a:solidFill>
-                  <a:srgbClr val="5FD6A0"/>
+                  <a:srgbClr val="C9C4D6"/>
                 </a:solidFill>
                 <a:latin typeface="Montserrat" pitchFamily="34" charset="0"/>
                 <a:ea typeface="Montserrat" pitchFamily="34" charset="-122"/>
@@ -6229,11 +6356,11 @@
             </a:avLst>
           </a:prstGeom>
           <a:solidFill>
-            <a:srgbClr val="12101A"/>
+            <a:srgbClr val="07060C"/>
           </a:solidFill>
           <a:ln w="12700">
             <a:solidFill>
-              <a:srgbClr val="2E2A3A"/>
+              <a:srgbClr val="5E4F85"/>
             </a:solidFill>
             <a:prstDash val="solid"/>
           </a:ln>
@@ -6269,7 +6396,7 @@
             <a:r>
               <a:rPr lang="en-US" sz="1100" dirty="0">
                 <a:solidFill>
-                  <a:srgbClr val="8A82A0"/>
+                  <a:srgbClr val="9A94AA"/>
                 </a:solidFill>
                 <a:latin typeface="Courier New" pitchFamily="34" charset="0"/>
                 <a:ea typeface="Courier New" pitchFamily="34" charset="-122"/>
@@ -6289,7 +6416,7 @@
             <a:r>
               <a:rPr lang="en-US" sz="1100" dirty="0">
                 <a:solidFill>
-                  <a:srgbClr val="C9A6FF"/>
+                  <a:srgbClr val="A98BFF"/>
                 </a:solidFill>
                 <a:latin typeface="Courier New" pitchFamily="34" charset="0"/>
                 <a:ea typeface="Courier New" pitchFamily="34" charset="-122"/>
@@ -6329,7 +6456,7 @@
             <a:r>
               <a:rPr lang="en-US" sz="1100" dirty="0">
                 <a:solidFill>
-                  <a:srgbClr val="8A82A0"/>
+                  <a:srgbClr val="9A94AA"/>
                 </a:solidFill>
                 <a:latin typeface="Courier New" pitchFamily="34" charset="0"/>
                 <a:ea typeface="Courier New" pitchFamily="34" charset="-122"/>
@@ -6349,7 +6476,7 @@
             <a:r>
               <a:rPr lang="en-US" sz="1100" dirty="0">
                 <a:solidFill>
-                  <a:srgbClr val="C9A6FF"/>
+                  <a:srgbClr val="A98BFF"/>
                 </a:solidFill>
                 <a:latin typeface="Courier New" pitchFamily="34" charset="0"/>
                 <a:ea typeface="Courier New" pitchFamily="34" charset="-122"/>
@@ -6442,9 +6569,14 @@
             </a:avLst>
           </a:prstGeom>
           <a:solidFill>
-            <a:srgbClr val="2E1418"/>
+            <a:srgbClr val="1A0808"/>
           </a:solidFill>
-          <a:ln/>
+          <a:ln w="12700">
+            <a:solidFill>
+              <a:srgbClr val="FF6B6B"/>
+            </a:solidFill>
+            <a:prstDash val="solid"/>
+          </a:ln>
         </p:spPr>
       </p:sp>
       <p:sp>
@@ -6474,7 +6606,7 @@
             <a:r>
               <a:rPr lang="en-US" sz="950" b="1" spc="150" kern="0" dirty="0">
                 <a:solidFill>
-                  <a:srgbClr val="FF7B7B"/>
+                  <a:srgbClr val="FF6B6B"/>
                 </a:solidFill>
                 <a:latin typeface="Courier New" pitchFamily="34" charset="0"/>
                 <a:ea typeface="Courier New" pitchFamily="34" charset="-122"/>
@@ -6558,7 +6690,7 @@
             <a:lvl1pPr>
               <a:defRPr sz="850">
                 <a:solidFill>
-                  <a:srgbClr val="8A82A0"/>
+                  <a:srgbClr val="9A94AA"/>
                 </a:solidFill>
                 <a:latin typeface="Courier New"/>
                 <a:ea typeface="Courier New"/>
@@ -6628,7 +6760,7 @@
             <a:r>
               <a:rPr lang="en-US" sz="2600" b="1" dirty="0">
                 <a:solidFill>
-                  <a:srgbClr val="C9A6FF"/>
+                  <a:srgbClr val="A98BFF"/>
                 </a:solidFill>
                 <a:latin typeface="Courier New" pitchFamily="34" charset="0"/>
                 <a:ea typeface="Courier New" pitchFamily="34" charset="-122"/>
@@ -6696,9 +6828,14 @@
             </a:avLst>
           </a:prstGeom>
           <a:solidFill>
-            <a:srgbClr val="C9A6FF"/>
+            <a:srgbClr val="1A0B3D"/>
           </a:solidFill>
-          <a:ln/>
+          <a:ln w="12700">
+            <a:solidFill>
+              <a:srgbClr val="5A05F4"/>
+            </a:solidFill>
+            <a:prstDash val="solid"/>
+          </a:ln>
         </p:spPr>
       </p:sp>
       <p:sp>
@@ -6728,7 +6865,7 @@
             <a:r>
               <a:rPr lang="en-US" sz="900" b="1" spc="100" kern="0" dirty="0">
                 <a:solidFill>
-                  <a:srgbClr val="1C1140"/>
+                  <a:srgbClr val="A98BFF"/>
                 </a:solidFill>
                 <a:latin typeface="Courier New" pitchFamily="34" charset="0"/>
                 <a:ea typeface="Courier New" pitchFamily="34" charset="-122"/>
@@ -6781,11 +6918,11 @@
             </a:avLst>
           </a:prstGeom>
           <a:solidFill>
-            <a:srgbClr val="12101A"/>
+            <a:srgbClr val="07060C"/>
           </a:solidFill>
           <a:ln w="12700">
             <a:solidFill>
-              <a:srgbClr val="2E2A3A"/>
+              <a:srgbClr val="5E4F85"/>
             </a:solidFill>
             <a:prstDash val="solid"/>
           </a:ln>
@@ -6821,7 +6958,7 @@
             <a:r>
               <a:rPr lang="en-US" sz="1150" dirty="0">
                 <a:solidFill>
-                  <a:srgbClr val="8A82A0"/>
+                  <a:srgbClr val="9A94AA"/>
                 </a:solidFill>
                 <a:latin typeface="Courier New" pitchFamily="34" charset="0"/>
                 <a:ea typeface="Courier New" pitchFamily="34" charset="-122"/>
@@ -6841,7 +6978,7 @@
             <a:r>
               <a:rPr lang="en-US" sz="1150" dirty="0">
                 <a:solidFill>
-                  <a:srgbClr val="8A82A0"/>
+                  <a:srgbClr val="9A94AA"/>
                 </a:solidFill>
                 <a:latin typeface="Courier New" pitchFamily="34" charset="0"/>
                 <a:ea typeface="Courier New" pitchFamily="34" charset="-122"/>
@@ -6861,7 +6998,7 @@
             <a:r>
               <a:rPr lang="en-US" sz="1150" dirty="0">
                 <a:solidFill>
-                  <a:srgbClr val="C9A6FF"/>
+                  <a:srgbClr val="A98BFF"/>
                 </a:solidFill>
                 <a:latin typeface="Courier New" pitchFamily="34" charset="0"/>
                 <a:ea typeface="Courier New" pitchFamily="34" charset="-122"/>
@@ -6930,11 +7067,11 @@
             </a:avLst>
           </a:prstGeom>
           <a:solidFill>
-            <a:srgbClr val="17141F"/>
+            <a:srgbClr val="000000"/>
           </a:solidFill>
           <a:ln w="12700">
             <a:solidFill>
-              <a:srgbClr val="2E2A3A"/>
+              <a:srgbClr val="5E4F85"/>
             </a:solidFill>
             <a:prstDash val="solid"/>
           </a:ln>
@@ -6967,7 +7104,7 @@
             <a:r>
               <a:rPr lang="en-US" sz="950" b="1" spc="100" kern="0" dirty="0">
                 <a:solidFill>
-                  <a:srgbClr val="8A82A0"/>
+                  <a:srgbClr val="9A94AA"/>
                 </a:solidFill>
                 <a:latin typeface="Courier New" pitchFamily="34" charset="0"/>
                 <a:ea typeface="Courier New" pitchFamily="34" charset="-122"/>
@@ -7006,7 +7143,7 @@
             <a:r>
               <a:rPr lang="en-US" sz="3000" b="1" dirty="0">
                 <a:solidFill>
-                  <a:srgbClr val="C9A6FF"/>
+                  <a:srgbClr val="A98BFF"/>
                 </a:solidFill>
                 <a:latin typeface="Montserrat" pitchFamily="34" charset="0"/>
                 <a:ea typeface="Montserrat" pitchFamily="34" charset="-122"/>
@@ -7045,7 +7182,7 @@
             <a:r>
               <a:rPr lang="en-US" sz="1150" dirty="0">
                 <a:solidFill>
-                  <a:srgbClr val="AFA9BE"/>
+                  <a:srgbClr val="C9C4D6"/>
                 </a:solidFill>
                 <a:latin typeface="Montserrat" pitchFamily="34" charset="0"/>
                 <a:ea typeface="Montserrat" pitchFamily="34" charset="-122"/>
@@ -7074,9 +7211,14 @@
             </a:avLst>
           </a:prstGeom>
           <a:solidFill>
-            <a:srgbClr val="2A2010"/>
+            <a:srgbClr val="0B1A38"/>
           </a:solidFill>
-          <a:ln/>
+          <a:ln w="12700">
+            <a:solidFill>
+              <a:srgbClr val="6BA0F8"/>
+            </a:solidFill>
+            <a:prstDash val="solid"/>
+          </a:ln>
         </p:spPr>
       </p:sp>
       <p:sp>
@@ -7106,7 +7248,7 @@
             <a:r>
               <a:rPr lang="en-US" sz="950" b="1" spc="150" kern="0" dirty="0">
                 <a:solidFill>
-                  <a:srgbClr val="E8A857"/>
+                  <a:srgbClr val="6BA0F8"/>
                 </a:solidFill>
                 <a:latin typeface="Courier New" pitchFamily="34" charset="0"/>
                 <a:ea typeface="Courier New" pitchFamily="34" charset="-122"/>
@@ -7177,9 +7319,14 @@
             </a:avLst>
           </a:prstGeom>
           <a:solidFill>
-            <a:srgbClr val="102A20"/>
+            <a:srgbClr val="06180F"/>
           </a:solidFill>
-          <a:ln/>
+          <a:ln w="12700">
+            <a:solidFill>
+              <a:srgbClr val="3FCF8E"/>
+            </a:solidFill>
+            <a:prstDash val="solid"/>
+          </a:ln>
         </p:spPr>
       </p:sp>
       <p:sp>
@@ -7254,7 +7401,7 @@
             <a:lvl1pPr>
               <a:defRPr sz="850">
                 <a:solidFill>
-                  <a:srgbClr val="8A82A0"/>
+                  <a:srgbClr val="9A94AA"/>
                 </a:solidFill>
                 <a:latin typeface="Courier New"/>
                 <a:ea typeface="Courier New"/>
@@ -7324,7 +7471,7 @@
             <a:r>
               <a:rPr lang="en-US" sz="2600" b="1" dirty="0">
                 <a:solidFill>
-                  <a:srgbClr val="C9A6FF"/>
+                  <a:srgbClr val="A98BFF"/>
                 </a:solidFill>
                 <a:latin typeface="Courier New" pitchFamily="34" charset="0"/>
                 <a:ea typeface="Courier New" pitchFamily="34" charset="-122"/>
@@ -7392,9 +7539,14 @@
             </a:avLst>
           </a:prstGeom>
           <a:solidFill>
-            <a:srgbClr val="C9A6FF"/>
+            <a:srgbClr val="1A0B3D"/>
           </a:solidFill>
-          <a:ln/>
+          <a:ln w="12700">
+            <a:solidFill>
+              <a:srgbClr val="5A05F4"/>
+            </a:solidFill>
+            <a:prstDash val="solid"/>
+          </a:ln>
         </p:spPr>
       </p:sp>
       <p:sp>
@@ -7424,7 +7576,7 @@
             <a:r>
               <a:rPr lang="en-US" sz="900" b="1" spc="100" kern="0" dirty="0">
                 <a:solidFill>
-                  <a:srgbClr val="1C1140"/>
+                  <a:srgbClr val="A98BFF"/>
                 </a:solidFill>
                 <a:latin typeface="Courier New" pitchFamily="34" charset="0"/>
                 <a:ea typeface="Courier New" pitchFamily="34" charset="-122"/>
@@ -7477,11 +7629,11 @@
             </a:avLst>
           </a:prstGeom>
           <a:solidFill>
-            <a:srgbClr val="12101A"/>
+            <a:srgbClr val="07060C"/>
           </a:solidFill>
           <a:ln w="12700">
             <a:solidFill>
-              <a:srgbClr val="2E2A3A"/>
+              <a:srgbClr val="5E4F85"/>
             </a:solidFill>
             <a:prstDash val="solid"/>
           </a:ln>
@@ -7517,7 +7669,7 @@
             <a:r>
               <a:rPr lang="en-US" sz="1250" dirty="0">
                 <a:solidFill>
-                  <a:srgbClr val="C9A6FF"/>
+                  <a:srgbClr val="A98BFF"/>
                 </a:solidFill>
                 <a:latin typeface="Courier New" pitchFamily="34" charset="0"/>
                 <a:ea typeface="Courier New" pitchFamily="34" charset="-122"/>
@@ -7585,7 +7737,7 @@
             </a:avLst>
           </a:prstGeom>
           <a:solidFill>
-            <a:srgbClr val="5FD6A0"/>
+            <a:srgbClr val="3FCF8E"/>
           </a:solidFill>
           <a:ln/>
         </p:spPr>
@@ -7617,7 +7769,7 @@
             <a:r>
               <a:rPr lang="en-US" sz="1150" b="1" dirty="0">
                 <a:solidFill>
-                  <a:srgbClr val="5FD6A0"/>
+                  <a:srgbClr val="3FCF8E"/>
                 </a:solidFill>
                 <a:latin typeface="Montserrat" pitchFamily="34" charset="0"/>
                 <a:ea typeface="Montserrat" pitchFamily="34" charset="-122"/>
@@ -7685,7 +7837,7 @@
             </a:avLst>
           </a:prstGeom>
           <a:solidFill>
-            <a:srgbClr val="FF7B7B"/>
+            <a:srgbClr val="FF6B6B"/>
           </a:solidFill>
           <a:ln/>
         </p:spPr>
@@ -7717,7 +7869,7 @@
             <a:r>
               <a:rPr lang="en-US" sz="1150" b="1" dirty="0">
                 <a:solidFill>
-                  <a:srgbClr val="FF7B7B"/>
+                  <a:srgbClr val="FF6B6B"/>
                 </a:solidFill>
                 <a:latin typeface="Montserrat" pitchFamily="34" charset="0"/>
                 <a:ea typeface="Montserrat" pitchFamily="34" charset="-122"/>
@@ -7810,9 +7962,14 @@
             </a:avLst>
           </a:prstGeom>
           <a:solidFill>
-            <a:srgbClr val="102A20"/>
+            <a:srgbClr val="06180F"/>
           </a:solidFill>
-          <a:ln/>
+          <a:ln w="12700">
+            <a:solidFill>
+              <a:srgbClr val="3FCF8E"/>
+            </a:solidFill>
+            <a:prstDash val="solid"/>
+          </a:ln>
         </p:spPr>
       </p:sp>
       <p:sp>
@@ -7842,7 +7999,7 @@
             <a:r>
               <a:rPr lang="en-US" sz="950" b="1" spc="150" kern="0" dirty="0">
                 <a:solidFill>
-                  <a:srgbClr val="5FD6A0"/>
+                  <a:srgbClr val="3FCF8E"/>
                 </a:solidFill>
                 <a:latin typeface="Courier New" pitchFamily="34" charset="0"/>
                 <a:ea typeface="Courier New" pitchFamily="34" charset="-122"/>
@@ -7926,7 +8083,7 @@
             <a:lvl1pPr>
               <a:defRPr sz="850">
                 <a:solidFill>
-                  <a:srgbClr val="8A82A0"/>
+                  <a:srgbClr val="9A94AA"/>
                 </a:solidFill>
                 <a:latin typeface="Courier New"/>
                 <a:ea typeface="Courier New"/>
@@ -7996,7 +8153,7 @@
             <a:r>
               <a:rPr lang="en-US" sz="2600" b="1" dirty="0">
                 <a:solidFill>
-                  <a:srgbClr val="C9A6FF"/>
+                  <a:srgbClr val="A98BFF"/>
                 </a:solidFill>
                 <a:latin typeface="Courier New" pitchFamily="34" charset="0"/>
                 <a:ea typeface="Courier New" pitchFamily="34" charset="-122"/>
@@ -8064,9 +8221,14 @@
             </a:avLst>
           </a:prstGeom>
           <a:solidFill>
-            <a:srgbClr val="C9A6FF"/>
+            <a:srgbClr val="1A0B3D"/>
           </a:solidFill>
-          <a:ln/>
+          <a:ln w="12700">
+            <a:solidFill>
+              <a:srgbClr val="5A05F4"/>
+            </a:solidFill>
+            <a:prstDash val="solid"/>
+          </a:ln>
         </p:spPr>
       </p:sp>
       <p:sp>
@@ -8096,7 +8258,7 @@
             <a:r>
               <a:rPr lang="en-US" sz="900" b="1" spc="100" kern="0" dirty="0">
                 <a:solidFill>
-                  <a:srgbClr val="1C1140"/>
+                  <a:srgbClr val="A98BFF"/>
                 </a:solidFill>
                 <a:latin typeface="Courier New" pitchFamily="34" charset="0"/>
                 <a:ea typeface="Courier New" pitchFamily="34" charset="-122"/>
@@ -8125,9 +8287,14 @@
             </a:avLst>
           </a:prstGeom>
           <a:solidFill>
-            <a:srgbClr val="2A2010"/>
+            <a:srgbClr val="000000"/>
           </a:solidFill>
-          <a:ln/>
+          <a:ln w="12700">
+            <a:solidFill>
+              <a:srgbClr val="5E4F85"/>
+            </a:solidFill>
+            <a:prstDash val="solid"/>
+          </a:ln>
         </p:spPr>
       </p:sp>
       <p:sp>
@@ -8157,7 +8324,7 @@
             <a:r>
               <a:rPr lang="en-US" sz="900" b="1" spc="100" kern="0" dirty="0">
                 <a:solidFill>
-                  <a:srgbClr val="E8A857"/>
+                  <a:srgbClr val="C9C4D6"/>
                 </a:solidFill>
                 <a:latin typeface="Courier New" pitchFamily="34" charset="0"/>
                 <a:ea typeface="Courier New" pitchFamily="34" charset="-122"/>
@@ -8210,11 +8377,11 @@
             </a:avLst>
           </a:prstGeom>
           <a:solidFill>
-            <a:srgbClr val="17141F"/>
+            <a:srgbClr val="000000"/>
           </a:solidFill>
           <a:ln w="12700">
             <a:solidFill>
-              <a:srgbClr val="2E2A3A"/>
+              <a:srgbClr val="5E4F85"/>
             </a:solidFill>
             <a:prstDash val="solid"/>
           </a:ln>
@@ -8286,7 +8453,7 @@
             <a:r>
               <a:rPr lang="en-US" sz="1150" dirty="0">
                 <a:solidFill>
-                  <a:srgbClr val="AFA9BE"/>
+                  <a:srgbClr val="C9C4D6"/>
                 </a:solidFill>
                 <a:latin typeface="Montserrat" pitchFamily="34" charset="0"/>
                 <a:ea typeface="Montserrat" pitchFamily="34" charset="-122"/>
@@ -8315,9 +8482,14 @@
             </a:avLst>
           </a:prstGeom>
           <a:solidFill>
-            <a:srgbClr val="2A2010"/>
+            <a:srgbClr val="0B1A38"/>
           </a:solidFill>
-          <a:ln/>
+          <a:ln w="12700">
+            <a:solidFill>
+              <a:srgbClr val="6BA0F8"/>
+            </a:solidFill>
+            <a:prstDash val="solid"/>
+          </a:ln>
         </p:spPr>
       </p:sp>
       <p:sp>
@@ -8347,7 +8519,7 @@
             <a:r>
               <a:rPr lang="en-US" sz="1350" b="1" dirty="0">
                 <a:solidFill>
-                  <a:srgbClr val="E8A857"/>
+                  <a:srgbClr val="6BA0F8"/>
                 </a:solidFill>
                 <a:latin typeface="Montserrat" pitchFamily="34" charset="0"/>
                 <a:ea typeface="Montserrat" pitchFamily="34" charset="-122"/>
@@ -8386,7 +8558,7 @@
             <a:r>
               <a:rPr lang="en-US" sz="1150" dirty="0">
                 <a:solidFill>
-                  <a:srgbClr val="FFFFFF"/>
+                  <a:srgbClr val="C9C4D6"/>
                 </a:solidFill>
                 <a:latin typeface="Montserrat" pitchFamily="34" charset="0"/>
                 <a:ea typeface="Montserrat" pitchFamily="34" charset="-122"/>
@@ -8415,9 +8587,14 @@
             </a:avLst>
           </a:prstGeom>
           <a:solidFill>
-            <a:srgbClr val="2E1418"/>
+            <a:srgbClr val="1A0808"/>
           </a:solidFill>
-          <a:ln/>
+          <a:ln w="12700">
+            <a:solidFill>
+              <a:srgbClr val="FF6B6B"/>
+            </a:solidFill>
+            <a:prstDash val="solid"/>
+          </a:ln>
         </p:spPr>
       </p:sp>
       <p:sp>
@@ -8447,7 +8624,7 @@
             <a:r>
               <a:rPr lang="en-US" sz="1350" b="1" dirty="0">
                 <a:solidFill>
-                  <a:srgbClr val="FF7B7B"/>
+                  <a:srgbClr val="FF6B6B"/>
                 </a:solidFill>
                 <a:latin typeface="Montserrat" pitchFamily="34" charset="0"/>
                 <a:ea typeface="Montserrat" pitchFamily="34" charset="-122"/>
@@ -8486,7 +8663,7 @@
             <a:r>
               <a:rPr lang="en-US" sz="1150" dirty="0">
                 <a:solidFill>
-                  <a:srgbClr val="FFFFFF"/>
+                  <a:srgbClr val="C9C4D6"/>
                 </a:solidFill>
                 <a:latin typeface="Montserrat" pitchFamily="34" charset="0"/>
                 <a:ea typeface="Montserrat" pitchFamily="34" charset="-122"/>
@@ -8513,11 +8690,11 @@
             <a:avLst/>
           </a:prstGeom>
           <a:solidFill>
-            <a:srgbClr val="102A20"/>
+            <a:srgbClr val="06180F"/>
           </a:solidFill>
           <a:ln w="12700">
             <a:solidFill>
-              <a:srgbClr val="5FD6A0"/>
+              <a:srgbClr val="3FCF8E"/>
             </a:solidFill>
             <a:prstDash val="solid"/>
           </a:ln>
@@ -8538,11 +8715,11 @@
             <a:avLst/>
           </a:prstGeom>
           <a:solidFill>
-            <a:srgbClr val="2A2010"/>
+            <a:srgbClr val="0B1A38"/>
           </a:solidFill>
           <a:ln w="12700">
             <a:solidFill>
-              <a:srgbClr val="E8A857"/>
+              <a:srgbClr val="6BA0F8"/>
             </a:solidFill>
             <a:prstDash val="solid"/>
           </a:ln>
@@ -8563,11 +8740,11 @@
             <a:avLst/>
           </a:prstGeom>
           <a:solidFill>
-            <a:srgbClr val="2E1418"/>
+            <a:srgbClr val="1A0808"/>
           </a:solidFill>
           <a:ln w="12700">
             <a:solidFill>
-              <a:srgbClr val="FF7B7B"/>
+              <a:srgbClr val="FF6B6B"/>
             </a:solidFill>
             <a:prstDash val="solid"/>
           </a:ln>
@@ -8590,7 +8767,7 @@
           <a:noFill/>
           <a:ln w="19050">
             <a:solidFill>
-              <a:srgbClr val="E8A857"/>
+              <a:srgbClr val="6BA0F8"/>
             </a:solidFill>
             <a:prstDash val="solid"/>
           </a:ln>
@@ -8613,7 +8790,7 @@
           <a:noFill/>
           <a:ln w="19050">
             <a:solidFill>
-              <a:srgbClr val="FF7B7B"/>
+              <a:srgbClr val="FF6B6B"/>
             </a:solidFill>
             <a:prstDash val="solid"/>
           </a:ln>
@@ -8646,7 +8823,7 @@
             <a:r>
               <a:rPr lang="en-US" sz="900" dirty="0">
                 <a:solidFill>
-                  <a:srgbClr val="8A82A0"/>
+                  <a:srgbClr val="9A94AA"/>
                 </a:solidFill>
                 <a:latin typeface="Courier New" pitchFamily="34" charset="0"/>
                 <a:ea typeface="Courier New" pitchFamily="34" charset="-122"/>
@@ -8660,7 +8837,7 @@
             <a:r>
               <a:rPr lang="en-US" sz="900" b="1" dirty="0">
                 <a:solidFill>
-                  <a:srgbClr val="5FD6A0"/>
+                  <a:srgbClr val="3FCF8E"/>
                 </a:solidFill>
                 <a:latin typeface="Courier New" pitchFamily="34" charset="0"/>
                 <a:ea typeface="Courier New" pitchFamily="34" charset="-122"/>
@@ -8674,7 +8851,7 @@
             <a:r>
               <a:rPr lang="en-US" sz="900" dirty="0">
                 <a:solidFill>
-                  <a:srgbClr val="8A82A0"/>
+                  <a:srgbClr val="9A94AA"/>
                 </a:solidFill>
                 <a:latin typeface="Courier New" pitchFamily="34" charset="0"/>
                 <a:ea typeface="Courier New" pitchFamily="34" charset="-122"/>
@@ -8688,7 +8865,7 @@
             <a:r>
               <a:rPr lang="en-US" sz="900" b="1" dirty="0">
                 <a:solidFill>
-                  <a:srgbClr val="E8A857"/>
+                  <a:srgbClr val="6BA0F8"/>
                 </a:solidFill>
                 <a:latin typeface="Courier New" pitchFamily="34" charset="0"/>
                 <a:ea typeface="Courier New" pitchFamily="34" charset="-122"/>
@@ -8702,7 +8879,7 @@
             <a:r>
               <a:rPr lang="en-US" sz="900" dirty="0">
                 <a:solidFill>
-                  <a:srgbClr val="8A82A0"/>
+                  <a:srgbClr val="9A94AA"/>
                 </a:solidFill>
                 <a:latin typeface="Courier New" pitchFamily="34" charset="0"/>
                 <a:ea typeface="Courier New" pitchFamily="34" charset="-122"/>
@@ -8716,7 +8893,7 @@
             <a:r>
               <a:rPr lang="en-US" sz="900" b="1" dirty="0">
                 <a:solidFill>
-                  <a:srgbClr val="FF7B7B"/>
+                  <a:srgbClr val="FF6B6B"/>
                 </a:solidFill>
                 <a:latin typeface="Courier New" pitchFamily="34" charset="0"/>
                 <a:ea typeface="Courier New" pitchFamily="34" charset="-122"/>
@@ -8730,7 +8907,7 @@
             <a:r>
               <a:rPr lang="en-US" sz="900" dirty="0">
                 <a:solidFill>
-                  <a:srgbClr val="8A82A0"/>
+                  <a:srgbClr val="9A94AA"/>
                 </a:solidFill>
                 <a:latin typeface="Courier New" pitchFamily="34" charset="0"/>
                 <a:ea typeface="Courier New" pitchFamily="34" charset="-122"/>
@@ -8744,7 +8921,7 @@
             <a:r>
               <a:rPr lang="en-US" sz="900" b="1" dirty="0">
                 <a:solidFill>
-                  <a:srgbClr val="FF7B7B"/>
+                  <a:srgbClr val="FF6B6B"/>
                 </a:solidFill>
                 <a:latin typeface="Courier New" pitchFamily="34" charset="0"/>
                 <a:ea typeface="Courier New" pitchFamily="34" charset="-122"/>
@@ -8889,7 +9066,7 @@
             <a:lvl1pPr>
               <a:defRPr sz="850">
                 <a:solidFill>
-                  <a:srgbClr val="8A82A0"/>
+                  <a:srgbClr val="9A94AA"/>
                 </a:solidFill>
                 <a:latin typeface="Courier New"/>
                 <a:ea typeface="Courier New"/>
@@ -8988,7 +9165,7 @@
             </a:avLst>
           </a:prstGeom>
           <a:solidFill>
-            <a:srgbClr val="5FD6A0"/>
+            <a:srgbClr val="5A05F4"/>
           </a:solidFill>
           <a:ln/>
         </p:spPr>
@@ -9020,7 +9197,7 @@
             <a:r>
               <a:rPr lang="en-US" sz="900" b="1" spc="100" kern="0" dirty="0">
                 <a:solidFill>
-                  <a:srgbClr val="102A20"/>
+                  <a:srgbClr val="FFFFFF"/>
                 </a:solidFill>
                 <a:latin typeface="Courier New" pitchFamily="34" charset="0"/>
                 <a:ea typeface="Courier New" pitchFamily="34" charset="-122"/>
@@ -9073,9 +9250,14 @@
             </a:avLst>
           </a:prstGeom>
           <a:solidFill>
-            <a:srgbClr val="102A20"/>
+            <a:srgbClr val="06180F"/>
           </a:solidFill>
-          <a:ln/>
+          <a:ln w="12700">
+            <a:solidFill>
+              <a:srgbClr val="3FCF8E"/>
+            </a:solidFill>
+            <a:prstDash val="solid"/>
+          </a:ln>
         </p:spPr>
       </p:sp>
       <p:sp>
@@ -9093,7 +9275,7 @@
             <a:avLst/>
           </a:prstGeom>
           <a:solidFill>
-            <a:srgbClr val="5FD6A0"/>
+            <a:srgbClr val="5A05F4"/>
           </a:solidFill>
           <a:ln/>
         </p:spPr>
@@ -9125,7 +9307,7 @@
             <a:r>
               <a:rPr lang="en-US" sz="1200" b="1" dirty="0">
                 <a:solidFill>
-                  <a:srgbClr val="102A20"/>
+                  <a:srgbClr val="FFFFFF"/>
                 </a:solidFill>
                 <a:latin typeface="Courier New" pitchFamily="34" charset="0"/>
                 <a:ea typeface="Courier New" pitchFamily="34" charset="-122"/>
@@ -9164,7 +9346,7 @@
             <a:r>
               <a:rPr lang="en-US" sz="1450" b="1" dirty="0">
                 <a:solidFill>
-                  <a:srgbClr val="5FD6A0"/>
+                  <a:srgbClr val="3FCF8E"/>
                 </a:solidFill>
                 <a:latin typeface="Montserrat" pitchFamily="34" charset="0"/>
                 <a:ea typeface="Montserrat" pitchFamily="34" charset="-122"/>
@@ -9206,7 +9388,7 @@
             <a:r>
               <a:rPr lang="en-US" sz="1200" dirty="0">
                 <a:solidFill>
-                  <a:srgbClr val="FFFFFF"/>
+                  <a:srgbClr val="C9C4D6"/>
                 </a:solidFill>
                 <a:latin typeface="Montserrat" pitchFamily="34" charset="0"/>
                 <a:ea typeface="Montserrat" pitchFamily="34" charset="-122"/>
@@ -9235,9 +9417,14 @@
             </a:avLst>
           </a:prstGeom>
           <a:solidFill>
-            <a:srgbClr val="102A20"/>
+            <a:srgbClr val="06180F"/>
           </a:solidFill>
-          <a:ln/>
+          <a:ln w="12700">
+            <a:solidFill>
+              <a:srgbClr val="3FCF8E"/>
+            </a:solidFill>
+            <a:prstDash val="solid"/>
+          </a:ln>
         </p:spPr>
       </p:sp>
       <p:sp>
@@ -9255,7 +9442,7 @@
             <a:avLst/>
           </a:prstGeom>
           <a:solidFill>
-            <a:srgbClr val="5FD6A0"/>
+            <a:srgbClr val="5A05F4"/>
           </a:solidFill>
           <a:ln/>
         </p:spPr>
@@ -9287,7 +9474,7 @@
             <a:r>
               <a:rPr lang="en-US" sz="1200" b="1" dirty="0">
                 <a:solidFill>
-                  <a:srgbClr val="102A20"/>
+                  <a:srgbClr val="FFFFFF"/>
                 </a:solidFill>
                 <a:latin typeface="Courier New" pitchFamily="34" charset="0"/>
                 <a:ea typeface="Courier New" pitchFamily="34" charset="-122"/>
@@ -9326,7 +9513,7 @@
             <a:r>
               <a:rPr lang="en-US" sz="1450" b="1" dirty="0">
                 <a:solidFill>
-                  <a:srgbClr val="5FD6A0"/>
+                  <a:srgbClr val="3FCF8E"/>
                 </a:solidFill>
                 <a:latin typeface="Montserrat" pitchFamily="34" charset="0"/>
                 <a:ea typeface="Montserrat" pitchFamily="34" charset="-122"/>
@@ -9368,7 +9555,7 @@
             <a:r>
               <a:rPr lang="en-US" sz="1200" dirty="0">
                 <a:solidFill>
-                  <a:srgbClr val="FFFFFF"/>
+                  <a:srgbClr val="C9C4D6"/>
                 </a:solidFill>
                 <a:latin typeface="Montserrat" pitchFamily="34" charset="0"/>
                 <a:ea typeface="Montserrat" pitchFamily="34" charset="-122"/>
@@ -9397,9 +9584,14 @@
             </a:avLst>
           </a:prstGeom>
           <a:solidFill>
-            <a:srgbClr val="102A20"/>
+            <a:srgbClr val="06180F"/>
           </a:solidFill>
-          <a:ln/>
+          <a:ln w="12700">
+            <a:solidFill>
+              <a:srgbClr val="3FCF8E"/>
+            </a:solidFill>
+            <a:prstDash val="solid"/>
+          </a:ln>
         </p:spPr>
       </p:sp>
       <p:sp>
@@ -9417,7 +9609,7 @@
             <a:avLst/>
           </a:prstGeom>
           <a:solidFill>
-            <a:srgbClr val="5FD6A0"/>
+            <a:srgbClr val="5A05F4"/>
           </a:solidFill>
           <a:ln/>
         </p:spPr>
@@ -9449,7 +9641,7 @@
             <a:r>
               <a:rPr lang="en-US" sz="1200" b="1" dirty="0">
                 <a:solidFill>
-                  <a:srgbClr val="102A20"/>
+                  <a:srgbClr val="FFFFFF"/>
                 </a:solidFill>
                 <a:latin typeface="Courier New" pitchFamily="34" charset="0"/>
                 <a:ea typeface="Courier New" pitchFamily="34" charset="-122"/>
@@ -9488,7 +9680,7 @@
             <a:r>
               <a:rPr lang="en-US" sz="1450" b="1" dirty="0">
                 <a:solidFill>
-                  <a:srgbClr val="5FD6A0"/>
+                  <a:srgbClr val="3FCF8E"/>
                 </a:solidFill>
                 <a:latin typeface="Montserrat" pitchFamily="34" charset="0"/>
                 <a:ea typeface="Montserrat" pitchFamily="34" charset="-122"/>
@@ -9530,7 +9722,7 @@
             <a:r>
               <a:rPr lang="en-US" sz="1200" dirty="0">
                 <a:solidFill>
-                  <a:srgbClr val="FFFFFF"/>
+                  <a:srgbClr val="C9C4D6"/>
                 </a:solidFill>
                 <a:latin typeface="Montserrat" pitchFamily="34" charset="0"/>
                 <a:ea typeface="Montserrat" pitchFamily="34" charset="-122"/>
@@ -9559,9 +9751,14 @@
             </a:avLst>
           </a:prstGeom>
           <a:solidFill>
-            <a:srgbClr val="102A20"/>
+            <a:srgbClr val="06180F"/>
           </a:solidFill>
-          <a:ln/>
+          <a:ln w="12700">
+            <a:solidFill>
+              <a:srgbClr val="3FCF8E"/>
+            </a:solidFill>
+            <a:prstDash val="solid"/>
+          </a:ln>
         </p:spPr>
       </p:sp>
       <p:sp>
@@ -9579,7 +9776,7 @@
             <a:avLst/>
           </a:prstGeom>
           <a:solidFill>
-            <a:srgbClr val="5FD6A0"/>
+            <a:srgbClr val="5A05F4"/>
           </a:solidFill>
           <a:ln/>
         </p:spPr>
@@ -9611,7 +9808,7 @@
             <a:r>
               <a:rPr lang="en-US" sz="1200" b="1" dirty="0">
                 <a:solidFill>
-                  <a:srgbClr val="102A20"/>
+                  <a:srgbClr val="FFFFFF"/>
                 </a:solidFill>
                 <a:latin typeface="Courier New" pitchFamily="34" charset="0"/>
                 <a:ea typeface="Courier New" pitchFamily="34" charset="-122"/>
@@ -9650,7 +9847,7 @@
             <a:r>
               <a:rPr lang="en-US" sz="1450" b="1" dirty="0">
                 <a:solidFill>
-                  <a:srgbClr val="5FD6A0"/>
+                  <a:srgbClr val="3FCF8E"/>
                 </a:solidFill>
                 <a:latin typeface="Montserrat" pitchFamily="34" charset="0"/>
                 <a:ea typeface="Montserrat" pitchFamily="34" charset="-122"/>
@@ -9692,7 +9889,7 @@
             <a:r>
               <a:rPr lang="en-US" sz="1200" dirty="0">
                 <a:solidFill>
-                  <a:srgbClr val="FFFFFF"/>
+                  <a:srgbClr val="C9C4D6"/>
                 </a:solidFill>
                 <a:latin typeface="Montserrat" pitchFamily="34" charset="0"/>
                 <a:ea typeface="Montserrat" pitchFamily="34" charset="-122"/>
@@ -9837,7 +10034,7 @@
             <a:lvl1pPr>
               <a:defRPr sz="850">
                 <a:solidFill>
-                  <a:srgbClr val="8A82A0"/>
+                  <a:srgbClr val="9A94AA"/>
                 </a:solidFill>
                 <a:latin typeface="Courier New"/>
                 <a:ea typeface="Courier New"/>
@@ -9936,7 +10133,7 @@
             </a:avLst>
           </a:prstGeom>
           <a:solidFill>
-            <a:srgbClr val="5FD6A0"/>
+            <a:srgbClr val="5A05F4"/>
           </a:solidFill>
           <a:ln/>
         </p:spPr>
@@ -9968,7 +10165,7 @@
             <a:r>
               <a:rPr lang="en-US" sz="900" b="1" spc="100" kern="0" dirty="0">
                 <a:solidFill>
-                  <a:srgbClr val="102A20"/>
+                  <a:srgbClr val="FFFFFF"/>
                 </a:solidFill>
                 <a:latin typeface="Courier New" pitchFamily="34" charset="0"/>
                 <a:ea typeface="Courier New" pitchFamily="34" charset="-122"/>
@@ -10019,7 +10216,7 @@
             <a:avLst/>
           </a:prstGeom>
           <a:solidFill>
-            <a:srgbClr val="C9A6FF"/>
+            <a:srgbClr val="A98BFF"/>
           </a:solidFill>
           <a:ln/>
         </p:spPr>
@@ -10051,7 +10248,7 @@
             <a:r>
               <a:rPr lang="en-US" sz="1300" b="1" dirty="0">
                 <a:solidFill>
-                  <a:srgbClr val="1C1140"/>
+                  <a:srgbClr val="1A0B3D"/>
                 </a:solidFill>
                 <a:latin typeface="Courier New" pitchFamily="34" charset="0"/>
                 <a:ea typeface="Courier New" pitchFamily="34" charset="-122"/>
@@ -10104,7 +10301,7 @@
             <a:r>
               <a:rPr lang="en-US" sz="1200" dirty="0">
                 <a:solidFill>
-                  <a:srgbClr val="AFA9BE"/>
+                  <a:srgbClr val="C9C4D6"/>
                 </a:solidFill>
                 <a:latin typeface="Montserrat" pitchFamily="34" charset="0"/>
                 <a:ea typeface="Montserrat" pitchFamily="34" charset="-122"/>
@@ -10131,7 +10328,7 @@
             <a:avLst/>
           </a:prstGeom>
           <a:solidFill>
-            <a:srgbClr val="C9A6FF"/>
+            <a:srgbClr val="A98BFF"/>
           </a:solidFill>
           <a:ln/>
         </p:spPr>
@@ -10163,7 +10360,7 @@
             <a:r>
               <a:rPr lang="en-US" sz="1300" b="1" dirty="0">
                 <a:solidFill>
-                  <a:srgbClr val="1C1140"/>
+                  <a:srgbClr val="1A0B3D"/>
                 </a:solidFill>
                 <a:latin typeface="Courier New" pitchFamily="34" charset="0"/>
                 <a:ea typeface="Courier New" pitchFamily="34" charset="-122"/>
@@ -10216,7 +10413,7 @@
             <a:r>
               <a:rPr lang="en-US" sz="1200" dirty="0">
                 <a:solidFill>
-                  <a:srgbClr val="AFA9BE"/>
+                  <a:srgbClr val="C9C4D6"/>
                 </a:solidFill>
                 <a:latin typeface="Montserrat" pitchFamily="34" charset="0"/>
                 <a:ea typeface="Montserrat" pitchFamily="34" charset="-122"/>
@@ -10243,7 +10440,7 @@
             <a:avLst/>
           </a:prstGeom>
           <a:solidFill>
-            <a:srgbClr val="C9A6FF"/>
+            <a:srgbClr val="A98BFF"/>
           </a:solidFill>
           <a:ln/>
         </p:spPr>
@@ -10275,7 +10472,7 @@
             <a:r>
               <a:rPr lang="en-US" sz="1300" b="1" dirty="0">
                 <a:solidFill>
-                  <a:srgbClr val="1C1140"/>
+                  <a:srgbClr val="1A0B3D"/>
                 </a:solidFill>
                 <a:latin typeface="Courier New" pitchFamily="34" charset="0"/>
                 <a:ea typeface="Courier New" pitchFamily="34" charset="-122"/>
@@ -10328,7 +10525,7 @@
             <a:r>
               <a:rPr lang="en-US" sz="1200" dirty="0">
                 <a:solidFill>
-                  <a:srgbClr val="AFA9BE"/>
+                  <a:srgbClr val="C9C4D6"/>
                 </a:solidFill>
                 <a:latin typeface="Montserrat" pitchFamily="34" charset="0"/>
                 <a:ea typeface="Montserrat" pitchFamily="34" charset="-122"/>
@@ -10355,7 +10552,7 @@
             <a:avLst/>
           </a:prstGeom>
           <a:solidFill>
-            <a:srgbClr val="C9A6FF"/>
+            <a:srgbClr val="A98BFF"/>
           </a:solidFill>
           <a:ln/>
         </p:spPr>
@@ -10387,7 +10584,7 @@
             <a:r>
               <a:rPr lang="en-US" sz="1300" b="1" dirty="0">
                 <a:solidFill>
-                  <a:srgbClr val="1C1140"/>
+                  <a:srgbClr val="1A0B3D"/>
                 </a:solidFill>
                 <a:latin typeface="Courier New" pitchFamily="34" charset="0"/>
                 <a:ea typeface="Courier New" pitchFamily="34" charset="-122"/>
@@ -10440,7 +10637,7 @@
             <a:r>
               <a:rPr lang="en-US" sz="1200" dirty="0">
                 <a:solidFill>
-                  <a:srgbClr val="AFA9BE"/>
+                  <a:srgbClr val="C9C4D6"/>
                 </a:solidFill>
                 <a:latin typeface="Montserrat" pitchFamily="34" charset="0"/>
                 <a:ea typeface="Montserrat" pitchFamily="34" charset="-122"/>
@@ -10467,7 +10664,7 @@
             <a:avLst/>
           </a:prstGeom>
           <a:solidFill>
-            <a:srgbClr val="E8A857"/>
+            <a:srgbClr val="6BA0F8"/>
           </a:solidFill>
           <a:ln/>
         </p:spPr>
@@ -10499,7 +10696,7 @@
             <a:r>
               <a:rPr lang="en-US" sz="1300" b="1" dirty="0">
                 <a:solidFill>
-                  <a:srgbClr val="2A2010"/>
+                  <a:srgbClr val="0B1A38"/>
                 </a:solidFill>
                 <a:latin typeface="Courier New" pitchFamily="34" charset="0"/>
                 <a:ea typeface="Courier New" pitchFamily="34" charset="-122"/>
@@ -10538,7 +10735,7 @@
             <a:r>
               <a:rPr lang="en-US" sz="1400" b="1" dirty="0">
                 <a:solidFill>
-                  <a:srgbClr val="E8A857"/>
+                  <a:srgbClr val="6BA0F8"/>
                 </a:solidFill>
                 <a:latin typeface="Montserrat" pitchFamily="34" charset="0"/>
                 <a:ea typeface="Montserrat" pitchFamily="34" charset="-122"/>
@@ -10552,7 +10749,7 @@
             <a:r>
               <a:rPr lang="en-US" sz="1200" dirty="0">
                 <a:solidFill>
-                  <a:srgbClr val="AFA9BE"/>
+                  <a:srgbClr val="C9C4D6"/>
                 </a:solidFill>
                 <a:latin typeface="Montserrat" pitchFamily="34" charset="0"/>
                 <a:ea typeface="Montserrat" pitchFamily="34" charset="-122"/>
@@ -10594,7 +10791,7 @@
             <a:lvl1pPr>
               <a:defRPr sz="850">
                 <a:solidFill>
-                  <a:srgbClr val="8A82A0"/>
+                  <a:srgbClr val="9A94AA"/>
                 </a:solidFill>
                 <a:latin typeface="Courier New"/>
                 <a:ea typeface="Courier New"/>
@@ -10693,9 +10890,14 @@
             </a:avLst>
           </a:prstGeom>
           <a:solidFill>
-            <a:srgbClr val="E8A857"/>
+            <a:srgbClr val="0B1A38"/>
           </a:solidFill>
-          <a:ln/>
+          <a:ln w="12700">
+            <a:solidFill>
+              <a:srgbClr val="6BA0F8"/>
+            </a:solidFill>
+            <a:prstDash val="solid"/>
+          </a:ln>
         </p:spPr>
       </p:sp>
       <p:sp>
@@ -10725,7 +10927,7 @@
             <a:r>
               <a:rPr lang="en-US" sz="900" b="1" spc="100" kern="0" dirty="0">
                 <a:solidFill>
-                  <a:srgbClr val="2A2010"/>
+                  <a:srgbClr val="6BA0F8"/>
                 </a:solidFill>
                 <a:latin typeface="Courier New" pitchFamily="34" charset="0"/>
                 <a:ea typeface="Courier New" pitchFamily="34" charset="-122"/>
@@ -10778,9 +10980,14 @@
             </a:avLst>
           </a:prstGeom>
           <a:solidFill>
-            <a:srgbClr val="102A20"/>
+            <a:srgbClr val="06180F"/>
           </a:solidFill>
-          <a:ln/>
+          <a:ln w="12700">
+            <a:solidFill>
+              <a:srgbClr val="3FCF8E"/>
+            </a:solidFill>
+            <a:prstDash val="solid"/>
+          </a:ln>
         </p:spPr>
       </p:sp>
       <p:sp>
@@ -10810,7 +11017,7 @@
             <a:r>
               <a:rPr lang="en-US" sz="1450" b="1" dirty="0">
                 <a:solidFill>
-                  <a:srgbClr val="5FD6A0"/>
+                  <a:srgbClr val="3FCF8E"/>
                 </a:solidFill>
                 <a:latin typeface="Montserrat" pitchFamily="34" charset="0"/>
                 <a:ea typeface="Montserrat" pitchFamily="34" charset="-122"/>
@@ -10852,7 +11059,7 @@
             <a:r>
               <a:rPr lang="en-US" sz="1200" dirty="0">
                 <a:solidFill>
-                  <a:srgbClr val="FFFFFF"/>
+                  <a:srgbClr val="C9C4D6"/>
                 </a:solidFill>
                 <a:latin typeface="Montserrat" pitchFamily="34" charset="0"/>
                 <a:ea typeface="Montserrat" pitchFamily="34" charset="-122"/>
@@ -10881,9 +11088,14 @@
             </a:avLst>
           </a:prstGeom>
           <a:solidFill>
-            <a:srgbClr val="1C1140"/>
+            <a:srgbClr val="1A0B3D"/>
           </a:solidFill>
-          <a:ln/>
+          <a:ln w="12700">
+            <a:solidFill>
+              <a:srgbClr val="5A05F4"/>
+            </a:solidFill>
+            <a:prstDash val="solid"/>
+          </a:ln>
         </p:spPr>
       </p:sp>
       <p:sp>
@@ -10913,7 +11125,7 @@
             <a:r>
               <a:rPr lang="en-US" sz="1450" b="1" dirty="0">
                 <a:solidFill>
-                  <a:srgbClr val="C9A6FF"/>
+                  <a:srgbClr val="A98BFF"/>
                 </a:solidFill>
                 <a:latin typeface="Montserrat" pitchFamily="34" charset="0"/>
                 <a:ea typeface="Montserrat" pitchFamily="34" charset="-122"/>
@@ -10955,7 +11167,7 @@
             <a:r>
               <a:rPr lang="en-US" sz="1200" dirty="0">
                 <a:solidFill>
-                  <a:srgbClr val="FFFFFF"/>
+                  <a:srgbClr val="C9C4D6"/>
                 </a:solidFill>
                 <a:latin typeface="Montserrat" pitchFamily="34" charset="0"/>
                 <a:ea typeface="Montserrat" pitchFamily="34" charset="-122"/>
@@ -10984,11 +11196,11 @@
             </a:avLst>
           </a:prstGeom>
           <a:solidFill>
-            <a:srgbClr val="17141F"/>
+            <a:srgbClr val="000000"/>
           </a:solidFill>
           <a:ln w="12700">
             <a:solidFill>
-              <a:srgbClr val="2E2A3A"/>
+              <a:srgbClr val="5E4F85"/>
             </a:solidFill>
             <a:prstDash val="solid"/>
           </a:ln>
@@ -11063,7 +11275,7 @@
             <a:r>
               <a:rPr lang="en-US" sz="1200" dirty="0">
                 <a:solidFill>
-                  <a:srgbClr val="AFA9BE"/>
+                  <a:srgbClr val="C9C4D6"/>
                 </a:solidFill>
                 <a:latin typeface="Montserrat" pitchFamily="34" charset="0"/>
                 <a:ea typeface="Montserrat" pitchFamily="34" charset="-122"/>
@@ -11092,11 +11304,11 @@
             </a:avLst>
           </a:prstGeom>
           <a:solidFill>
-            <a:srgbClr val="17141F"/>
+            <a:srgbClr val="000000"/>
           </a:solidFill>
           <a:ln w="12700">
             <a:solidFill>
-              <a:srgbClr val="2E2A3A"/>
+              <a:srgbClr val="5E4F85"/>
             </a:solidFill>
             <a:prstDash val="solid"/>
           </a:ln>
@@ -11174,7 +11386,7 @@
             <a:lvl1pPr>
               <a:defRPr sz="850">
                 <a:solidFill>
-                  <a:srgbClr val="8A82A0"/>
+                  <a:srgbClr val="9A94AA"/>
                 </a:solidFill>
                 <a:latin typeface="Courier New"/>
                 <a:ea typeface="Courier New"/>
@@ -11286,7 +11498,7 @@
             <a:r>
               <a:rPr lang="en-US" sz="1300" dirty="0">
                 <a:solidFill>
-                  <a:srgbClr val="AFA9BE"/>
+                  <a:srgbClr val="C9C4D6"/>
                 </a:solidFill>
                 <a:latin typeface="Montserrat" pitchFamily="34" charset="0"/>
                 <a:ea typeface="Montserrat" pitchFamily="34" charset="-122"/>
@@ -11315,9 +11527,14 @@
             </a:avLst>
           </a:prstGeom>
           <a:solidFill>
-            <a:srgbClr val="C9A6FF"/>
+            <a:srgbClr val="1A0B3D"/>
           </a:solidFill>
-          <a:ln/>
+          <a:ln w="12700">
+            <a:solidFill>
+              <a:srgbClr val="5A05F4"/>
+            </a:solidFill>
+            <a:prstDash val="solid"/>
+          </a:ln>
         </p:spPr>
       </p:sp>
       <p:sp>
@@ -11347,7 +11564,7 @@
             <a:r>
               <a:rPr lang="en-US" sz="900" b="1" spc="100" kern="0" dirty="0">
                 <a:solidFill>
-                  <a:srgbClr val="1C1140"/>
+                  <a:srgbClr val="A98BFF"/>
                 </a:solidFill>
                 <a:latin typeface="Courier New" pitchFamily="34" charset="0"/>
                 <a:ea typeface="Courier New" pitchFamily="34" charset="-122"/>
@@ -11400,11 +11617,11 @@
             </a:avLst>
           </a:prstGeom>
           <a:solidFill>
-            <a:srgbClr val="17141F"/>
+            <a:srgbClr val="000000"/>
           </a:solidFill>
           <a:ln w="12700">
             <a:solidFill>
-              <a:srgbClr val="2E2A3A"/>
+              <a:srgbClr val="5E4F85"/>
             </a:solidFill>
             <a:prstDash val="solid"/>
           </a:ln>
@@ -11538,7 +11755,7 @@
             <a:r>
               <a:rPr lang="en-US" sz="1200" dirty="0">
                 <a:solidFill>
-                  <a:srgbClr val="AFA9BE"/>
+                  <a:srgbClr val="C9C4D6"/>
                 </a:solidFill>
                 <a:latin typeface="Montserrat" pitchFamily="34" charset="0"/>
                 <a:ea typeface="Montserrat" pitchFamily="34" charset="-122"/>
@@ -11567,11 +11784,11 @@
             </a:avLst>
           </a:prstGeom>
           <a:solidFill>
-            <a:srgbClr val="17141F"/>
+            <a:srgbClr val="000000"/>
           </a:solidFill>
           <a:ln w="12700">
             <a:solidFill>
-              <a:srgbClr val="2E2A3A"/>
+              <a:srgbClr val="5E4F85"/>
             </a:solidFill>
             <a:prstDash val="solid"/>
           </a:ln>
@@ -11705,7 +11922,7 @@
             <a:r>
               <a:rPr lang="en-US" sz="1200" dirty="0">
                 <a:solidFill>
-                  <a:srgbClr val="AFA9BE"/>
+                  <a:srgbClr val="C9C4D6"/>
                 </a:solidFill>
                 <a:latin typeface="Montserrat" pitchFamily="34" charset="0"/>
                 <a:ea typeface="Montserrat" pitchFamily="34" charset="-122"/>
@@ -11734,11 +11951,11 @@
             </a:avLst>
           </a:prstGeom>
           <a:solidFill>
-            <a:srgbClr val="17141F"/>
+            <a:srgbClr val="000000"/>
           </a:solidFill>
           <a:ln w="12700">
             <a:solidFill>
-              <a:srgbClr val="2E2A3A"/>
+              <a:srgbClr val="5E4F85"/>
             </a:solidFill>
             <a:prstDash val="solid"/>
           </a:ln>
@@ -11872,7 +12089,7 @@
             <a:r>
               <a:rPr lang="en-US" sz="1200" dirty="0">
                 <a:solidFill>
-                  <a:srgbClr val="AFA9BE"/>
+                  <a:srgbClr val="C9C4D6"/>
                 </a:solidFill>
                 <a:latin typeface="Montserrat" pitchFamily="34" charset="0"/>
                 <a:ea typeface="Montserrat" pitchFamily="34" charset="-122"/>
@@ -11901,11 +12118,11 @@
             </a:avLst>
           </a:prstGeom>
           <a:solidFill>
-            <a:srgbClr val="17141F"/>
+            <a:srgbClr val="000000"/>
           </a:solidFill>
           <a:ln w="12700">
             <a:solidFill>
-              <a:srgbClr val="2E2A3A"/>
+              <a:srgbClr val="5E4F85"/>
             </a:solidFill>
             <a:prstDash val="solid"/>
           </a:ln>
@@ -12039,7 +12256,7 @@
             <a:r>
               <a:rPr lang="en-US" sz="1200" dirty="0">
                 <a:solidFill>
-                  <a:srgbClr val="AFA9BE"/>
+                  <a:srgbClr val="C9C4D6"/>
                 </a:solidFill>
                 <a:latin typeface="Montserrat" pitchFamily="34" charset="0"/>
                 <a:ea typeface="Montserrat" pitchFamily="34" charset="-122"/>
@@ -12068,11 +12285,11 @@
             </a:avLst>
           </a:prstGeom>
           <a:solidFill>
-            <a:srgbClr val="17141F"/>
+            <a:srgbClr val="000000"/>
           </a:solidFill>
           <a:ln w="12700">
             <a:solidFill>
-              <a:srgbClr val="2E2A3A"/>
+              <a:srgbClr val="5E4F85"/>
             </a:solidFill>
             <a:prstDash val="solid"/>
           </a:ln>
@@ -12206,7 +12423,7 @@
             <a:r>
               <a:rPr lang="en-US" sz="1200" dirty="0">
                 <a:solidFill>
-                  <a:srgbClr val="AFA9BE"/>
+                  <a:srgbClr val="C9C4D6"/>
                 </a:solidFill>
                 <a:latin typeface="Montserrat" pitchFamily="34" charset="0"/>
                 <a:ea typeface="Montserrat" pitchFamily="34" charset="-122"/>
@@ -12248,7 +12465,7 @@
             <a:lvl1pPr>
               <a:defRPr sz="850">
                 <a:solidFill>
-                  <a:srgbClr val="8A82A0"/>
+                  <a:srgbClr val="9A94AA"/>
                 </a:solidFill>
                 <a:latin typeface="Courier New"/>
                 <a:ea typeface="Courier New"/>
@@ -12347,9 +12564,14 @@
             </a:avLst>
           </a:prstGeom>
           <a:solidFill>
-            <a:srgbClr val="E8A857"/>
+            <a:srgbClr val="0B1A38"/>
           </a:solidFill>
-          <a:ln/>
+          <a:ln w="12700">
+            <a:solidFill>
+              <a:srgbClr val="6BA0F8"/>
+            </a:solidFill>
+            <a:prstDash val="solid"/>
+          </a:ln>
         </p:spPr>
       </p:sp>
       <p:sp>
@@ -12379,7 +12601,7 @@
             <a:r>
               <a:rPr lang="en-US" sz="900" b="1" spc="100" kern="0" dirty="0">
                 <a:solidFill>
-                  <a:srgbClr val="2A2010"/>
+                  <a:srgbClr val="6BA0F8"/>
                 </a:solidFill>
                 <a:latin typeface="Courier New" pitchFamily="34" charset="0"/>
                 <a:ea typeface="Courier New" pitchFamily="34" charset="-122"/>
@@ -12432,11 +12654,11 @@
             </a:avLst>
           </a:prstGeom>
           <a:solidFill>
-            <a:srgbClr val="17141F"/>
+            <a:srgbClr val="000000"/>
           </a:solidFill>
           <a:ln w="12700">
             <a:solidFill>
-              <a:srgbClr val="2E2A3A"/>
+              <a:srgbClr val="5E4F85"/>
             </a:solidFill>
             <a:prstDash val="solid"/>
           </a:ln>
@@ -12459,11 +12681,11 @@
             </a:avLst>
           </a:prstGeom>
           <a:solidFill>
-            <a:srgbClr val="1C1140"/>
+            <a:srgbClr val="1A0B3D"/>
           </a:solidFill>
           <a:ln w="12700">
             <a:solidFill>
-              <a:srgbClr val="C9A6FF"/>
+              <a:srgbClr val="A98BFF"/>
             </a:solidFill>
             <a:prstDash val="solid"/>
           </a:ln>
@@ -12484,7 +12706,7 @@
             <a:avLst/>
           </a:prstGeom>
           <a:solidFill>
-            <a:srgbClr val="C9A6FF"/>
+            <a:srgbClr val="A98BFF"/>
           </a:solidFill>
           <a:ln/>
         </p:spPr>
@@ -12504,7 +12726,7 @@
             <a:avLst/>
           </a:prstGeom>
           <a:solidFill>
-            <a:srgbClr val="C9A6FF"/>
+            <a:srgbClr val="A98BFF"/>
           </a:solidFill>
           <a:ln/>
         </p:spPr>
@@ -12565,11 +12787,11 @@
             </a:avLst>
           </a:prstGeom>
           <a:solidFill>
-            <a:srgbClr val="1C1140"/>
+            <a:srgbClr val="1A0B3D"/>
           </a:solidFill>
           <a:ln w="12700">
             <a:solidFill>
-              <a:srgbClr val="C9A6FF"/>
+              <a:srgbClr val="A98BFF"/>
             </a:solidFill>
             <a:prstDash val="solid"/>
           </a:ln>
@@ -12590,7 +12812,7 @@
             <a:avLst/>
           </a:prstGeom>
           <a:solidFill>
-            <a:srgbClr val="C9A6FF"/>
+            <a:srgbClr val="A98BFF"/>
           </a:solidFill>
           <a:ln/>
         </p:spPr>
@@ -12610,7 +12832,7 @@
             <a:avLst/>
           </a:prstGeom>
           <a:solidFill>
-            <a:srgbClr val="C9A6FF"/>
+            <a:srgbClr val="A98BFF"/>
           </a:solidFill>
           <a:ln/>
         </p:spPr>
@@ -12671,11 +12893,11 @@
             </a:avLst>
           </a:prstGeom>
           <a:solidFill>
-            <a:srgbClr val="1C1140"/>
+            <a:srgbClr val="1A0B3D"/>
           </a:solidFill>
           <a:ln w="12700">
             <a:solidFill>
-              <a:srgbClr val="C9A6FF"/>
+              <a:srgbClr val="A98BFF"/>
             </a:solidFill>
             <a:prstDash val="solid"/>
           </a:ln>
@@ -12696,7 +12918,7 @@
             <a:avLst/>
           </a:prstGeom>
           <a:solidFill>
-            <a:srgbClr val="C9A6FF"/>
+            <a:srgbClr val="A98BFF"/>
           </a:solidFill>
           <a:ln/>
         </p:spPr>
@@ -12716,7 +12938,7 @@
             <a:avLst/>
           </a:prstGeom>
           <a:solidFill>
-            <a:srgbClr val="C9A6FF"/>
+            <a:srgbClr val="A98BFF"/>
           </a:solidFill>
           <a:ln/>
         </p:spPr>
@@ -12777,11 +12999,11 @@
             </a:avLst>
           </a:prstGeom>
           <a:solidFill>
-            <a:srgbClr val="1C1140"/>
+            <a:srgbClr val="1A0B3D"/>
           </a:solidFill>
           <a:ln w="12700">
             <a:solidFill>
-              <a:srgbClr val="C9A6FF"/>
+              <a:srgbClr val="A98BFF"/>
             </a:solidFill>
             <a:prstDash val="solid"/>
           </a:ln>
@@ -12802,7 +13024,7 @@
             <a:avLst/>
           </a:prstGeom>
           <a:solidFill>
-            <a:srgbClr val="C9A6FF"/>
+            <a:srgbClr val="A98BFF"/>
           </a:solidFill>
           <a:ln/>
         </p:spPr>
@@ -12822,7 +13044,7 @@
             <a:avLst/>
           </a:prstGeom>
           <a:solidFill>
-            <a:srgbClr val="C9A6FF"/>
+            <a:srgbClr val="A98BFF"/>
           </a:solidFill>
           <a:ln/>
         </p:spPr>
@@ -12893,7 +13115,7 @@
             <a:r>
               <a:rPr lang="en-US" sz="1200" i="1" dirty="0">
                 <a:solidFill>
-                  <a:srgbClr val="8A82A0"/>
+                  <a:srgbClr val="9A94AA"/>
                 </a:solidFill>
                 <a:latin typeface="Montserrat" pitchFamily="34" charset="0"/>
                 <a:ea typeface="Montserrat" pitchFamily="34" charset="-122"/>
@@ -12935,7 +13157,7 @@
             <a:lvl1pPr>
               <a:defRPr sz="850">
                 <a:solidFill>
-                  <a:srgbClr val="8A82A0"/>
+                  <a:srgbClr val="9A94AA"/>
                 </a:solidFill>
                 <a:latin typeface="Courier New"/>
                 <a:ea typeface="Courier New"/>
@@ -13034,9 +13256,14 @@
             </a:avLst>
           </a:prstGeom>
           <a:solidFill>
-            <a:srgbClr val="E8A857"/>
+            <a:srgbClr val="0B1A38"/>
           </a:solidFill>
-          <a:ln/>
+          <a:ln w="12700">
+            <a:solidFill>
+              <a:srgbClr val="6BA0F8"/>
+            </a:solidFill>
+            <a:prstDash val="solid"/>
+          </a:ln>
         </p:spPr>
       </p:sp>
       <p:sp>
@@ -13066,7 +13293,7 @@
             <a:r>
               <a:rPr lang="en-US" sz="900" b="1" spc="100" kern="0" dirty="0">
                 <a:solidFill>
-                  <a:srgbClr val="2A2010"/>
+                  <a:srgbClr val="6BA0F8"/>
                 </a:solidFill>
                 <a:latin typeface="Courier New" pitchFamily="34" charset="0"/>
                 <a:ea typeface="Courier New" pitchFamily="34" charset="-122"/>
@@ -13119,11 +13346,11 @@
             </a:avLst>
           </a:prstGeom>
           <a:solidFill>
-            <a:srgbClr val="17141F"/>
+            <a:srgbClr val="000000"/>
           </a:solidFill>
           <a:ln w="12700">
             <a:solidFill>
-              <a:srgbClr val="2E2A3A"/>
+              <a:srgbClr val="5E4F85"/>
             </a:solidFill>
             <a:prstDash val="solid"/>
           </a:ln>
@@ -13144,7 +13371,7 @@
             <a:avLst/>
           </a:prstGeom>
           <a:solidFill>
-            <a:srgbClr val="2E1418"/>
+            <a:srgbClr val="1A0808"/>
           </a:solidFill>
           <a:ln/>
         </p:spPr>
@@ -13164,7 +13391,7 @@
             <a:avLst/>
           </a:prstGeom>
           <a:solidFill>
-            <a:srgbClr val="FF7B7B"/>
+            <a:srgbClr val="FF6B6B"/>
           </a:solidFill>
           <a:ln/>
         </p:spPr>
@@ -13184,7 +13411,7 @@
             <a:avLst/>
           </a:prstGeom>
           <a:solidFill>
-            <a:srgbClr val="FF7B7B"/>
+            <a:srgbClr val="FF6B6B"/>
           </a:solidFill>
           <a:ln/>
         </p:spPr>
@@ -13230,7 +13457,7 @@
             <a:r>
               <a:rPr lang="en-US" sz="1200" dirty="0">
                 <a:solidFill>
-                  <a:srgbClr val="AFA9BE"/>
+                  <a:srgbClr val="C9C4D6"/>
                 </a:solidFill>
                 <a:latin typeface="Montserrat" pitchFamily="34" charset="0"/>
                 <a:ea typeface="Montserrat" pitchFamily="34" charset="-122"/>
@@ -13259,11 +13486,11 @@
             </a:avLst>
           </a:prstGeom>
           <a:solidFill>
-            <a:srgbClr val="17141F"/>
+            <a:srgbClr val="000000"/>
           </a:solidFill>
           <a:ln w="12700">
             <a:solidFill>
-              <a:srgbClr val="2E2A3A"/>
+              <a:srgbClr val="5E4F85"/>
             </a:solidFill>
             <a:prstDash val="solid"/>
           </a:ln>
@@ -13284,7 +13511,7 @@
             <a:avLst/>
           </a:prstGeom>
           <a:solidFill>
-            <a:srgbClr val="2E1418"/>
+            <a:srgbClr val="1A0808"/>
           </a:solidFill>
           <a:ln/>
         </p:spPr>
@@ -13304,7 +13531,7 @@
             <a:avLst/>
           </a:prstGeom>
           <a:solidFill>
-            <a:srgbClr val="FF7B7B"/>
+            <a:srgbClr val="FF6B6B"/>
           </a:solidFill>
           <a:ln/>
         </p:spPr>
@@ -13324,7 +13551,7 @@
             <a:avLst/>
           </a:prstGeom>
           <a:solidFill>
-            <a:srgbClr val="FF7B7B"/>
+            <a:srgbClr val="FF6B6B"/>
           </a:solidFill>
           <a:ln/>
         </p:spPr>
@@ -13370,7 +13597,7 @@
             <a:r>
               <a:rPr lang="en-US" sz="1200" dirty="0">
                 <a:solidFill>
-                  <a:srgbClr val="AFA9BE"/>
+                  <a:srgbClr val="C9C4D6"/>
                 </a:solidFill>
                 <a:latin typeface="Montserrat" pitchFamily="34" charset="0"/>
                 <a:ea typeface="Montserrat" pitchFamily="34" charset="-122"/>
@@ -13399,11 +13626,11 @@
             </a:avLst>
           </a:prstGeom>
           <a:solidFill>
-            <a:srgbClr val="17141F"/>
+            <a:srgbClr val="000000"/>
           </a:solidFill>
           <a:ln w="12700">
             <a:solidFill>
-              <a:srgbClr val="2E2A3A"/>
+              <a:srgbClr val="5E4F85"/>
             </a:solidFill>
             <a:prstDash val="solid"/>
           </a:ln>
@@ -13424,7 +13651,7 @@
             <a:avLst/>
           </a:prstGeom>
           <a:solidFill>
-            <a:srgbClr val="2E1418"/>
+            <a:srgbClr val="1A0808"/>
           </a:solidFill>
           <a:ln/>
         </p:spPr>
@@ -13444,7 +13671,7 @@
             <a:avLst/>
           </a:prstGeom>
           <a:solidFill>
-            <a:srgbClr val="FF7B7B"/>
+            <a:srgbClr val="FF6B6B"/>
           </a:solidFill>
           <a:ln/>
         </p:spPr>
@@ -13464,7 +13691,7 @@
             <a:avLst/>
           </a:prstGeom>
           <a:solidFill>
-            <a:srgbClr val="FF7B7B"/>
+            <a:srgbClr val="FF6B6B"/>
           </a:solidFill>
           <a:ln/>
         </p:spPr>
@@ -13510,7 +13737,7 @@
             <a:r>
               <a:rPr lang="en-US" sz="1200" dirty="0">
                 <a:solidFill>
-                  <a:srgbClr val="AFA9BE"/>
+                  <a:srgbClr val="C9C4D6"/>
                 </a:solidFill>
                 <a:latin typeface="Montserrat" pitchFamily="34" charset="0"/>
                 <a:ea typeface="Montserrat" pitchFamily="34" charset="-122"/>
@@ -13539,11 +13766,11 @@
             </a:avLst>
           </a:prstGeom>
           <a:solidFill>
-            <a:srgbClr val="17141F"/>
+            <a:srgbClr val="000000"/>
           </a:solidFill>
           <a:ln w="12700">
             <a:solidFill>
-              <a:srgbClr val="2E2A3A"/>
+              <a:srgbClr val="5E4F85"/>
             </a:solidFill>
             <a:prstDash val="solid"/>
           </a:ln>
@@ -13564,7 +13791,7 @@
             <a:avLst/>
           </a:prstGeom>
           <a:solidFill>
-            <a:srgbClr val="2E1418"/>
+            <a:srgbClr val="1A0808"/>
           </a:solidFill>
           <a:ln/>
         </p:spPr>
@@ -13584,7 +13811,7 @@
             <a:avLst/>
           </a:prstGeom>
           <a:solidFill>
-            <a:srgbClr val="FF7B7B"/>
+            <a:srgbClr val="FF6B6B"/>
           </a:solidFill>
           <a:ln/>
         </p:spPr>
@@ -13604,7 +13831,7 @@
             <a:avLst/>
           </a:prstGeom>
           <a:solidFill>
-            <a:srgbClr val="FF7B7B"/>
+            <a:srgbClr val="FF6B6B"/>
           </a:solidFill>
           <a:ln/>
         </p:spPr>
@@ -13650,7 +13877,7 @@
             <a:r>
               <a:rPr lang="en-US" sz="1200" dirty="0">
                 <a:solidFill>
-                  <a:srgbClr val="AFA9BE"/>
+                  <a:srgbClr val="C9C4D6"/>
                 </a:solidFill>
                 <a:latin typeface="Montserrat" pitchFamily="34" charset="0"/>
                 <a:ea typeface="Montserrat" pitchFamily="34" charset="-122"/>
@@ -13692,7 +13919,7 @@
             <a:lvl1pPr>
               <a:defRPr sz="850">
                 <a:solidFill>
-                  <a:srgbClr val="8A82A0"/>
+                  <a:srgbClr val="9A94AA"/>
                 </a:solidFill>
                 <a:latin typeface="Courier New"/>
                 <a:ea typeface="Courier New"/>
@@ -13791,7 +14018,7 @@
             </a:avLst>
           </a:prstGeom>
           <a:solidFill>
-            <a:srgbClr val="5FD6A0"/>
+            <a:srgbClr val="5A05F4"/>
           </a:solidFill>
           <a:ln/>
         </p:spPr>
@@ -13823,7 +14050,7 @@
             <a:r>
               <a:rPr lang="en-US" sz="900" b="1" spc="100" kern="0" dirty="0">
                 <a:solidFill>
-                  <a:srgbClr val="102A20"/>
+                  <a:srgbClr val="FFFFFF"/>
                 </a:solidFill>
                 <a:latin typeface="Courier New" pitchFamily="34" charset="0"/>
                 <a:ea typeface="Courier New" pitchFamily="34" charset="-122"/>
@@ -13876,11 +14103,11 @@
             </a:avLst>
           </a:prstGeom>
           <a:solidFill>
-            <a:srgbClr val="17141F"/>
+            <a:srgbClr val="000000"/>
           </a:solidFill>
           <a:ln w="19050">
             <a:solidFill>
-              <a:srgbClr val="C9A6FF"/>
+              <a:srgbClr val="A98BFF"/>
             </a:solidFill>
             <a:prstDash val="solid"/>
           </a:ln>
@@ -13913,7 +14140,7 @@
             <a:r>
               <a:rPr lang="en-US" sz="1550" b="1" dirty="0">
                 <a:solidFill>
-                  <a:srgbClr val="C9A6FF"/>
+                  <a:srgbClr val="A98BFF"/>
                 </a:solidFill>
                 <a:latin typeface="Montserrat" pitchFamily="34" charset="0"/>
                 <a:ea typeface="Montserrat" pitchFamily="34" charset="-122"/>
@@ -13991,7 +14218,7 @@
             <a:r>
               <a:rPr lang="en-US" sz="950" b="1" spc="100" kern="0" dirty="0">
                 <a:solidFill>
-                  <a:srgbClr val="8A82A0"/>
+                  <a:srgbClr val="9A94AA"/>
                 </a:solidFill>
                 <a:latin typeface="Courier New" pitchFamily="34" charset="0"/>
                 <a:ea typeface="Courier New" pitchFamily="34" charset="-122"/>
@@ -14030,7 +14257,7 @@
             <a:r>
               <a:rPr lang="en-US" sz="1250" b="1" dirty="0">
                 <a:solidFill>
-                  <a:srgbClr val="C9A6FF"/>
+                  <a:srgbClr val="A98BFF"/>
                 </a:solidFill>
                 <a:latin typeface="Montserrat" pitchFamily="34" charset="0"/>
                 <a:ea typeface="Montserrat" pitchFamily="34" charset="-122"/>
@@ -14083,7 +14310,7 @@
             <a:r>
               <a:rPr lang="en-US" sz="1250" b="1" dirty="0">
                 <a:solidFill>
-                  <a:srgbClr val="C9A6FF"/>
+                  <a:srgbClr val="A98BFF"/>
                 </a:solidFill>
                 <a:latin typeface="Montserrat" pitchFamily="34" charset="0"/>
                 <a:ea typeface="Montserrat" pitchFamily="34" charset="-122"/>
@@ -14136,7 +14363,7 @@
             <a:r>
               <a:rPr lang="en-US" sz="1250" b="1" dirty="0">
                 <a:solidFill>
-                  <a:srgbClr val="C9A6FF"/>
+                  <a:srgbClr val="A98BFF"/>
                 </a:solidFill>
                 <a:latin typeface="Montserrat" pitchFamily="34" charset="0"/>
                 <a:ea typeface="Montserrat" pitchFamily="34" charset="-122"/>
@@ -14179,9 +14406,14 @@
             </a:avLst>
           </a:prstGeom>
           <a:solidFill>
-            <a:srgbClr val="2A2010"/>
+            <a:srgbClr val="0B1A38"/>
           </a:solidFill>
-          <a:ln/>
+          <a:ln w="12700">
+            <a:solidFill>
+              <a:srgbClr val="6BA0F8"/>
+            </a:solidFill>
+            <a:prstDash val="solid"/>
+          </a:ln>
         </p:spPr>
       </p:sp>
       <p:sp>
@@ -14211,7 +14443,7 @@
             <a:r>
               <a:rPr lang="en-US" sz="1450" b="1" dirty="0">
                 <a:solidFill>
-                  <a:srgbClr val="E8A857"/>
+                  <a:srgbClr val="6BA0F8"/>
                 </a:solidFill>
                 <a:latin typeface="Montserrat" pitchFamily="34" charset="0"/>
                 <a:ea typeface="Montserrat" pitchFamily="34" charset="-122"/>
@@ -14253,7 +14485,7 @@
             <a:r>
               <a:rPr lang="en-US" sz="1200" dirty="0">
                 <a:solidFill>
-                  <a:srgbClr val="FFFFFF"/>
+                  <a:srgbClr val="C9C4D6"/>
                 </a:solidFill>
                 <a:latin typeface="Montserrat" pitchFamily="34" charset="0"/>
                 <a:ea typeface="Montserrat" pitchFamily="34" charset="-122"/>
@@ -14273,7 +14505,7 @@
             <a:r>
               <a:rPr lang="en-US" sz="1200" dirty="0">
                 <a:solidFill>
-                  <a:srgbClr val="FFFFFF"/>
+                  <a:srgbClr val="C9C4D6"/>
                 </a:solidFill>
                 <a:latin typeface="Montserrat" pitchFamily="34" charset="0"/>
                 <a:ea typeface="Montserrat" pitchFamily="34" charset="-122"/>
@@ -14315,7 +14547,7 @@
             <a:lvl1pPr>
               <a:defRPr sz="850">
                 <a:solidFill>
-                  <a:srgbClr val="8A82A0"/>
+                  <a:srgbClr val="9A94AA"/>
                 </a:solidFill>
                 <a:latin typeface="Courier New"/>
                 <a:ea typeface="Courier New"/>
@@ -14424,7 +14656,7 @@
             <a:r>
               <a:rPr lang="en-US" sz="1100" b="1" spc="300" kern="0" dirty="0">
                 <a:solidFill>
-                  <a:srgbClr val="C9B8FB"/>
+                  <a:srgbClr val="C4B3F5"/>
                 </a:solidFill>
                 <a:latin typeface="Courier New" pitchFamily="34" charset="0"/>
                 <a:ea typeface="Courier New" pitchFamily="34" charset="-122"/>
@@ -14763,11 +14995,11 @@
             </a:avLst>
           </a:prstGeom>
           <a:solidFill>
-            <a:srgbClr val="17141F"/>
+            <a:srgbClr val="000000"/>
           </a:solidFill>
           <a:ln w="12700">
             <a:solidFill>
-              <a:srgbClr val="2E2A3A"/>
+              <a:srgbClr val="5E4F85"/>
             </a:solidFill>
             <a:prstDash val="solid"/>
           </a:ln>
@@ -14800,7 +15032,7 @@
             <a:r>
               <a:rPr lang="en-US" sz="1500" b="1" dirty="0">
                 <a:solidFill>
-                  <a:srgbClr val="C9A6FF"/>
+                  <a:srgbClr val="A98BFF"/>
                 </a:solidFill>
                 <a:latin typeface="Montserrat" pitchFamily="34" charset="0"/>
                 <a:ea typeface="Montserrat" pitchFamily="34" charset="-122"/>
@@ -14935,9 +15167,14 @@
             </a:avLst>
           </a:prstGeom>
           <a:solidFill>
-            <a:srgbClr val="C9A6FF"/>
+            <a:srgbClr val="1A0B3D"/>
           </a:solidFill>
-          <a:ln/>
+          <a:ln w="12700">
+            <a:solidFill>
+              <a:srgbClr val="5A05F4"/>
+            </a:solidFill>
+            <a:prstDash val="solid"/>
+          </a:ln>
         </p:spPr>
       </p:sp>
       <p:sp>
@@ -14967,7 +15204,7 @@
             <a:r>
               <a:rPr lang="en-US" sz="900" b="1" spc="100" kern="0" dirty="0">
                 <a:solidFill>
-                  <a:srgbClr val="1C1140"/>
+                  <a:srgbClr val="A98BFF"/>
                 </a:solidFill>
                 <a:latin typeface="Courier New" pitchFamily="34" charset="0"/>
                 <a:ea typeface="Courier New" pitchFamily="34" charset="-122"/>
@@ -15020,11 +15257,11 @@
             </a:avLst>
           </a:prstGeom>
           <a:solidFill>
-            <a:srgbClr val="17141F"/>
+            <a:srgbClr val="000000"/>
           </a:solidFill>
           <a:ln w="12700">
             <a:solidFill>
-              <a:srgbClr val="2E2A3A"/>
+              <a:srgbClr val="5E4F85"/>
             </a:solidFill>
             <a:prstDash val="solid"/>
           </a:ln>
@@ -15145,11 +15382,11 @@
             </a:avLst>
           </a:prstGeom>
           <a:solidFill>
-            <a:srgbClr val="17141F"/>
+            <a:srgbClr val="000000"/>
           </a:solidFill>
           <a:ln w="12700">
             <a:solidFill>
-              <a:srgbClr val="2E2A3A"/>
+              <a:srgbClr val="5E4F85"/>
             </a:solidFill>
             <a:prstDash val="solid"/>
           </a:ln>
@@ -15270,11 +15507,11 @@
             </a:avLst>
           </a:prstGeom>
           <a:solidFill>
-            <a:srgbClr val="17141F"/>
+            <a:srgbClr val="000000"/>
           </a:solidFill>
           <a:ln w="12700">
             <a:solidFill>
-              <a:srgbClr val="2E2A3A"/>
+              <a:srgbClr val="5E4F85"/>
             </a:solidFill>
             <a:prstDash val="solid"/>
           </a:ln>
@@ -15395,11 +15632,11 @@
             </a:avLst>
           </a:prstGeom>
           <a:solidFill>
-            <a:srgbClr val="17141F"/>
+            <a:srgbClr val="000000"/>
           </a:solidFill>
           <a:ln w="12700">
             <a:solidFill>
-              <a:srgbClr val="2E2A3A"/>
+              <a:srgbClr val="5E4F85"/>
             </a:solidFill>
             <a:prstDash val="solid"/>
           </a:ln>
@@ -15520,11 +15757,11 @@
             </a:avLst>
           </a:prstGeom>
           <a:solidFill>
-            <a:srgbClr val="17141F"/>
+            <a:srgbClr val="000000"/>
           </a:solidFill>
           <a:ln w="12700">
             <a:solidFill>
-              <a:srgbClr val="2E2A3A"/>
+              <a:srgbClr val="5E4F85"/>
             </a:solidFill>
             <a:prstDash val="solid"/>
           </a:ln>
@@ -15645,11 +15882,11 @@
             </a:avLst>
           </a:prstGeom>
           <a:solidFill>
-            <a:srgbClr val="17141F"/>
+            <a:srgbClr val="000000"/>
           </a:solidFill>
           <a:ln w="12700">
             <a:solidFill>
-              <a:srgbClr val="2E2A3A"/>
+              <a:srgbClr val="5E4F85"/>
             </a:solidFill>
             <a:prstDash val="solid"/>
           </a:ln>
@@ -15770,11 +16007,11 @@
             </a:avLst>
           </a:prstGeom>
           <a:solidFill>
-            <a:srgbClr val="17141F"/>
+            <a:srgbClr val="000000"/>
           </a:solidFill>
           <a:ln w="12700">
             <a:solidFill>
-              <a:srgbClr val="2E2A3A"/>
+              <a:srgbClr val="5E4F85"/>
             </a:solidFill>
             <a:prstDash val="solid"/>
           </a:ln>
@@ -15895,11 +16132,11 @@
             </a:avLst>
           </a:prstGeom>
           <a:solidFill>
-            <a:srgbClr val="17141F"/>
+            <a:srgbClr val="000000"/>
           </a:solidFill>
           <a:ln w="12700">
             <a:solidFill>
-              <a:srgbClr val="2E2A3A"/>
+              <a:srgbClr val="5E4F85"/>
             </a:solidFill>
             <a:prstDash val="solid"/>
           </a:ln>
@@ -16020,9 +16257,14 @@
             </a:avLst>
           </a:prstGeom>
           <a:solidFill>
-            <a:srgbClr val="2A2010"/>
+            <a:srgbClr val="0B1A38"/>
           </a:solidFill>
-          <a:ln/>
+          <a:ln w="12700">
+            <a:solidFill>
+              <a:srgbClr val="6BA0F8"/>
+            </a:solidFill>
+            <a:prstDash val="solid"/>
+          </a:ln>
         </p:spPr>
       </p:sp>
       <p:sp>
@@ -16040,7 +16282,7 @@
             <a:avLst/>
           </a:prstGeom>
           <a:solidFill>
-            <a:srgbClr val="E8A857"/>
+            <a:srgbClr val="5A05F4"/>
           </a:solidFill>
           <a:ln/>
         </p:spPr>
@@ -16072,7 +16314,7 @@
             <a:r>
               <a:rPr lang="en-US" sz="1200" b="1" dirty="0">
                 <a:solidFill>
-                  <a:srgbClr val="2A2010"/>
+                  <a:srgbClr val="FFFFFF"/>
                 </a:solidFill>
                 <a:latin typeface="Courier New" pitchFamily="34" charset="0"/>
                 <a:ea typeface="Courier New" pitchFamily="34" charset="-122"/>
@@ -16111,7 +16353,7 @@
             <a:r>
               <a:rPr lang="en-US" sz="1450" b="1" dirty="0">
                 <a:solidFill>
-                  <a:srgbClr val="E8A857"/>
+                  <a:srgbClr val="6BA0F8"/>
                 </a:solidFill>
                 <a:latin typeface="Montserrat" pitchFamily="34" charset="0"/>
                 <a:ea typeface="Montserrat" pitchFamily="34" charset="-122"/>
@@ -16140,11 +16382,11 @@
             </a:avLst>
           </a:prstGeom>
           <a:solidFill>
-            <a:srgbClr val="17141F"/>
+            <a:srgbClr val="000000"/>
           </a:solidFill>
           <a:ln w="12700">
             <a:solidFill>
-              <a:srgbClr val="2E2A3A"/>
+              <a:srgbClr val="5E4F85"/>
             </a:solidFill>
             <a:prstDash val="solid"/>
           </a:ln>
@@ -16265,11 +16507,11 @@
             </a:avLst>
           </a:prstGeom>
           <a:solidFill>
-            <a:srgbClr val="17141F"/>
+            <a:srgbClr val="000000"/>
           </a:solidFill>
           <a:ln w="12700">
             <a:solidFill>
-              <a:srgbClr val="2E2A3A"/>
+              <a:srgbClr val="5E4F85"/>
             </a:solidFill>
             <a:prstDash val="solid"/>
           </a:ln>
@@ -16390,11 +16632,11 @@
             </a:avLst>
           </a:prstGeom>
           <a:solidFill>
-            <a:srgbClr val="17141F"/>
+            <a:srgbClr val="000000"/>
           </a:solidFill>
           <a:ln w="12700">
             <a:solidFill>
-              <a:srgbClr val="2E2A3A"/>
+              <a:srgbClr val="5E4F85"/>
             </a:solidFill>
             <a:prstDash val="solid"/>
           </a:ln>
@@ -16472,7 +16714,7 @@
             <a:lvl1pPr>
               <a:defRPr sz="850">
                 <a:solidFill>
-                  <a:srgbClr val="8A82A0"/>
+                  <a:srgbClr val="9A94AA"/>
                 </a:solidFill>
                 <a:latin typeface="Courier New"/>
                 <a:ea typeface="Courier New"/>
@@ -16584,7 +16826,7 @@
             <a:r>
               <a:rPr lang="en-US" sz="1300" dirty="0">
                 <a:solidFill>
-                  <a:srgbClr val="AFA9BE"/>
+                  <a:srgbClr val="C9C4D6"/>
                 </a:solidFill>
                 <a:latin typeface="Montserrat" pitchFamily="34" charset="0"/>
                 <a:ea typeface="Montserrat" pitchFamily="34" charset="-122"/>
@@ -16613,9 +16855,14 @@
             </a:avLst>
           </a:prstGeom>
           <a:solidFill>
-            <a:srgbClr val="C9A6FF"/>
+            <a:srgbClr val="1A0B3D"/>
           </a:solidFill>
-          <a:ln/>
+          <a:ln w="12700">
+            <a:solidFill>
+              <a:srgbClr val="5A05F4"/>
+            </a:solidFill>
+            <a:prstDash val="solid"/>
+          </a:ln>
         </p:spPr>
       </p:sp>
       <p:sp>
@@ -16645,7 +16892,7 @@
             <a:r>
               <a:rPr lang="en-US" sz="900" b="1" spc="100" kern="0" dirty="0">
                 <a:solidFill>
-                  <a:srgbClr val="1C1140"/>
+                  <a:srgbClr val="A98BFF"/>
                 </a:solidFill>
                 <a:latin typeface="Courier New" pitchFamily="34" charset="0"/>
                 <a:ea typeface="Courier New" pitchFamily="34" charset="-122"/>
@@ -16698,11 +16945,11 @@
             </a:avLst>
           </a:prstGeom>
           <a:solidFill>
-            <a:srgbClr val="17141F"/>
+            <a:srgbClr val="000000"/>
           </a:solidFill>
           <a:ln w="12700">
             <a:solidFill>
-              <a:srgbClr val="2E2A3A"/>
+              <a:srgbClr val="5E4F85"/>
             </a:solidFill>
             <a:prstDash val="solid"/>
           </a:ln>
@@ -16735,7 +16982,7 @@
             <a:r>
               <a:rPr lang="en-US" sz="1250" b="1" dirty="0">
                 <a:solidFill>
-                  <a:srgbClr val="C9A6FF"/>
+                  <a:srgbClr val="A98BFF"/>
                 </a:solidFill>
                 <a:latin typeface="Courier New" pitchFamily="34" charset="0"/>
                 <a:ea typeface="Courier New" pitchFamily="34" charset="-122"/>
@@ -16777,7 +17024,7 @@
             <a:r>
               <a:rPr lang="en-US" sz="1150" dirty="0">
                 <a:solidFill>
-                  <a:srgbClr val="AFA9BE"/>
+                  <a:srgbClr val="C9C4D6"/>
                 </a:solidFill>
                 <a:latin typeface="Montserrat" pitchFamily="34" charset="0"/>
                 <a:ea typeface="Montserrat" pitchFamily="34" charset="-122"/>
@@ -16806,11 +17053,11 @@
             </a:avLst>
           </a:prstGeom>
           <a:solidFill>
-            <a:srgbClr val="17141F"/>
+            <a:srgbClr val="000000"/>
           </a:solidFill>
           <a:ln w="12700">
             <a:solidFill>
-              <a:srgbClr val="2E2A3A"/>
+              <a:srgbClr val="5E4F85"/>
             </a:solidFill>
             <a:prstDash val="solid"/>
           </a:ln>
@@ -16843,7 +17090,7 @@
             <a:r>
               <a:rPr lang="en-US" sz="1250" b="1" dirty="0">
                 <a:solidFill>
-                  <a:srgbClr val="C9A6FF"/>
+                  <a:srgbClr val="A98BFF"/>
                 </a:solidFill>
                 <a:latin typeface="Courier New" pitchFamily="34" charset="0"/>
                 <a:ea typeface="Courier New" pitchFamily="34" charset="-122"/>
@@ -16885,7 +17132,7 @@
             <a:r>
               <a:rPr lang="en-US" sz="1150" dirty="0">
                 <a:solidFill>
-                  <a:srgbClr val="AFA9BE"/>
+                  <a:srgbClr val="C9C4D6"/>
                 </a:solidFill>
                 <a:latin typeface="Montserrat" pitchFamily="34" charset="0"/>
                 <a:ea typeface="Montserrat" pitchFamily="34" charset="-122"/>
@@ -16914,11 +17161,11 @@
             </a:avLst>
           </a:prstGeom>
           <a:solidFill>
-            <a:srgbClr val="17141F"/>
+            <a:srgbClr val="000000"/>
           </a:solidFill>
           <a:ln w="12700">
             <a:solidFill>
-              <a:srgbClr val="2E2A3A"/>
+              <a:srgbClr val="5E4F85"/>
             </a:solidFill>
             <a:prstDash val="solid"/>
           </a:ln>
@@ -16951,7 +17198,7 @@
             <a:r>
               <a:rPr lang="en-US" sz="1250" b="1" dirty="0">
                 <a:solidFill>
-                  <a:srgbClr val="C9A6FF"/>
+                  <a:srgbClr val="A98BFF"/>
                 </a:solidFill>
                 <a:latin typeface="Courier New" pitchFamily="34" charset="0"/>
                 <a:ea typeface="Courier New" pitchFamily="34" charset="-122"/>
@@ -16993,7 +17240,7 @@
             <a:r>
               <a:rPr lang="en-US" sz="1150" dirty="0">
                 <a:solidFill>
-                  <a:srgbClr val="AFA9BE"/>
+                  <a:srgbClr val="C9C4D6"/>
                 </a:solidFill>
                 <a:latin typeface="Montserrat" pitchFamily="34" charset="0"/>
                 <a:ea typeface="Montserrat" pitchFamily="34" charset="-122"/>
@@ -17022,11 +17269,11 @@
             </a:avLst>
           </a:prstGeom>
           <a:solidFill>
-            <a:srgbClr val="17141F"/>
+            <a:srgbClr val="000000"/>
           </a:solidFill>
           <a:ln w="12700">
             <a:solidFill>
-              <a:srgbClr val="2E2A3A"/>
+              <a:srgbClr val="5E4F85"/>
             </a:solidFill>
             <a:prstDash val="solid"/>
           </a:ln>
@@ -17059,7 +17306,7 @@
             <a:r>
               <a:rPr lang="en-US" sz="1250" b="1" dirty="0">
                 <a:solidFill>
-                  <a:srgbClr val="C9A6FF"/>
+                  <a:srgbClr val="A98BFF"/>
                 </a:solidFill>
                 <a:latin typeface="Courier New" pitchFamily="34" charset="0"/>
                 <a:ea typeface="Courier New" pitchFamily="34" charset="-122"/>
@@ -17101,7 +17348,7 @@
             <a:r>
               <a:rPr lang="en-US" sz="1150" dirty="0">
                 <a:solidFill>
-                  <a:srgbClr val="AFA9BE"/>
+                  <a:srgbClr val="C9C4D6"/>
                 </a:solidFill>
                 <a:latin typeface="Montserrat" pitchFamily="34" charset="0"/>
                 <a:ea typeface="Montserrat" pitchFamily="34" charset="-122"/>
@@ -17130,11 +17377,11 @@
             </a:avLst>
           </a:prstGeom>
           <a:solidFill>
-            <a:srgbClr val="17141F"/>
+            <a:srgbClr val="000000"/>
           </a:solidFill>
           <a:ln w="12700">
             <a:solidFill>
-              <a:srgbClr val="2E2A3A"/>
+              <a:srgbClr val="5E4F85"/>
             </a:solidFill>
             <a:prstDash val="solid"/>
           </a:ln>
@@ -17167,7 +17414,7 @@
             <a:r>
               <a:rPr lang="en-US" sz="1250" b="1" dirty="0">
                 <a:solidFill>
-                  <a:srgbClr val="C9A6FF"/>
+                  <a:srgbClr val="A98BFF"/>
                 </a:solidFill>
                 <a:latin typeface="Courier New" pitchFamily="34" charset="0"/>
                 <a:ea typeface="Courier New" pitchFamily="34" charset="-122"/>
@@ -17209,7 +17456,7 @@
             <a:r>
               <a:rPr lang="en-US" sz="1150" dirty="0">
                 <a:solidFill>
-                  <a:srgbClr val="AFA9BE"/>
+                  <a:srgbClr val="C9C4D6"/>
                 </a:solidFill>
                 <a:latin typeface="Montserrat" pitchFamily="34" charset="0"/>
                 <a:ea typeface="Montserrat" pitchFamily="34" charset="-122"/>
@@ -17238,11 +17485,11 @@
             </a:avLst>
           </a:prstGeom>
           <a:solidFill>
-            <a:srgbClr val="17141F"/>
+            <a:srgbClr val="000000"/>
           </a:solidFill>
           <a:ln w="12700">
             <a:solidFill>
-              <a:srgbClr val="2E2A3A"/>
+              <a:srgbClr val="5E4F85"/>
             </a:solidFill>
             <a:prstDash val="solid"/>
           </a:ln>
@@ -17275,7 +17522,7 @@
             <a:r>
               <a:rPr lang="en-US" sz="1250" b="1" dirty="0">
                 <a:solidFill>
-                  <a:srgbClr val="C9A6FF"/>
+                  <a:srgbClr val="A98BFF"/>
                 </a:solidFill>
                 <a:latin typeface="Courier New" pitchFamily="34" charset="0"/>
                 <a:ea typeface="Courier New" pitchFamily="34" charset="-122"/>
@@ -17317,7 +17564,7 @@
             <a:r>
               <a:rPr lang="en-US" sz="1150" dirty="0">
                 <a:solidFill>
-                  <a:srgbClr val="AFA9BE"/>
+                  <a:srgbClr val="C9C4D6"/>
                 </a:solidFill>
                 <a:latin typeface="Montserrat" pitchFamily="34" charset="0"/>
                 <a:ea typeface="Montserrat" pitchFamily="34" charset="-122"/>
@@ -17346,11 +17593,11 @@
             </a:avLst>
           </a:prstGeom>
           <a:solidFill>
-            <a:srgbClr val="17141F"/>
+            <a:srgbClr val="000000"/>
           </a:solidFill>
           <a:ln w="12700">
             <a:solidFill>
-              <a:srgbClr val="2E2A3A"/>
+              <a:srgbClr val="5E4F85"/>
             </a:solidFill>
             <a:prstDash val="solid"/>
           </a:ln>
@@ -17428,7 +17675,7 @@
             <a:lvl1pPr>
               <a:defRPr sz="850">
                 <a:solidFill>
-                  <a:srgbClr val="8A82A0"/>
+                  <a:srgbClr val="9A94AA"/>
                 </a:solidFill>
                 <a:latin typeface="Courier New"/>
                 <a:ea typeface="Courier New"/>
@@ -17498,7 +17745,7 @@
             <a:r>
               <a:rPr lang="en-US" sz="2600" b="1" dirty="0">
                 <a:solidFill>
-                  <a:srgbClr val="C9A6FF"/>
+                  <a:srgbClr val="A98BFF"/>
                 </a:solidFill>
                 <a:latin typeface="Courier New" pitchFamily="34" charset="0"/>
                 <a:ea typeface="Courier New" pitchFamily="34" charset="-122"/>
@@ -17566,9 +17813,14 @@
             </a:avLst>
           </a:prstGeom>
           <a:solidFill>
-            <a:srgbClr val="C9A6FF"/>
+            <a:srgbClr val="1A0B3D"/>
           </a:solidFill>
-          <a:ln/>
+          <a:ln w="12700">
+            <a:solidFill>
+              <a:srgbClr val="5A05F4"/>
+            </a:solidFill>
+            <a:prstDash val="solid"/>
+          </a:ln>
         </p:spPr>
       </p:sp>
       <p:sp>
@@ -17598,7 +17850,7 @@
             <a:r>
               <a:rPr lang="en-US" sz="900" b="1" spc="100" kern="0" dirty="0">
                 <a:solidFill>
-                  <a:srgbClr val="1C1140"/>
+                  <a:srgbClr val="A98BFF"/>
                 </a:solidFill>
                 <a:latin typeface="Courier New" pitchFamily="34" charset="0"/>
                 <a:ea typeface="Courier New" pitchFamily="34" charset="-122"/>
@@ -17651,9 +17903,14 @@
             </a:avLst>
           </a:prstGeom>
           <a:solidFill>
-            <a:srgbClr val="102A20"/>
+            <a:srgbClr val="06180F"/>
           </a:solidFill>
-          <a:ln/>
+          <a:ln w="12700">
+            <a:solidFill>
+              <a:srgbClr val="3FCF8E"/>
+            </a:solidFill>
+            <a:prstDash val="solid"/>
+          </a:ln>
         </p:spPr>
       </p:sp>
       <p:sp>
@@ -17683,7 +17940,7 @@
             <a:r>
               <a:rPr lang="en-US" sz="1100" b="1" dirty="0">
                 <a:solidFill>
-                  <a:srgbClr val="5FD6A0"/>
+                  <a:srgbClr val="3FCF8E"/>
                 </a:solidFill>
                 <a:latin typeface="Courier New" pitchFamily="34" charset="0"/>
                 <a:ea typeface="Courier New" pitchFamily="34" charset="-122"/>
@@ -17712,7 +17969,7 @@
           <a:noFill/>
           <a:ln w="15875">
             <a:solidFill>
-              <a:srgbClr val="9B7BE8"/>
+              <a:srgbClr val="8F72E6"/>
             </a:solidFill>
             <a:prstDash val="solid"/>
           </a:ln>
@@ -17733,7 +17990,7 @@
             <a:avLst/>
           </a:prstGeom>
           <a:solidFill>
-            <a:srgbClr val="9B7BE8"/>
+            <a:srgbClr val="8F72E6"/>
           </a:solidFill>
           <a:ln/>
         </p:spPr>
@@ -17755,9 +18012,14 @@
             </a:avLst>
           </a:prstGeom>
           <a:solidFill>
-            <a:srgbClr val="2E1418"/>
+            <a:srgbClr val="1A0808"/>
           </a:solidFill>
-          <a:ln/>
+          <a:ln w="12700">
+            <a:solidFill>
+              <a:srgbClr val="FF6B6B"/>
+            </a:solidFill>
+            <a:prstDash val="solid"/>
+          </a:ln>
         </p:spPr>
       </p:sp>
       <p:sp>
@@ -17787,7 +18049,7 @@
             <a:r>
               <a:rPr lang="en-US" sz="1100" b="1" dirty="0">
                 <a:solidFill>
-                  <a:srgbClr val="FF7B7B"/>
+                  <a:srgbClr val="FF6B6B"/>
                 </a:solidFill>
                 <a:latin typeface="Courier New" pitchFamily="34" charset="0"/>
                 <a:ea typeface="Courier New" pitchFamily="34" charset="-122"/>
@@ -17816,7 +18078,7 @@
           <a:noFill/>
           <a:ln w="15875">
             <a:solidFill>
-              <a:srgbClr val="9B7BE8"/>
+              <a:srgbClr val="8F72E6"/>
             </a:solidFill>
             <a:prstDash val="solid"/>
           </a:ln>
@@ -17837,7 +18099,7 @@
             <a:avLst/>
           </a:prstGeom>
           <a:solidFill>
-            <a:srgbClr val="9B7BE8"/>
+            <a:srgbClr val="8F72E6"/>
           </a:solidFill>
           <a:ln/>
         </p:spPr>
@@ -17859,9 +18121,14 @@
             </a:avLst>
           </a:prstGeom>
           <a:solidFill>
-            <a:srgbClr val="2A2010"/>
+            <a:srgbClr val="0B1A38"/>
           </a:solidFill>
-          <a:ln/>
+          <a:ln w="12700">
+            <a:solidFill>
+              <a:srgbClr val="6BA0F8"/>
+            </a:solidFill>
+            <a:prstDash val="solid"/>
+          </a:ln>
         </p:spPr>
       </p:sp>
       <p:sp>
@@ -17891,7 +18158,7 @@
             <a:r>
               <a:rPr lang="en-US" sz="1100" b="1" dirty="0">
                 <a:solidFill>
-                  <a:srgbClr val="E8A857"/>
+                  <a:srgbClr val="6BA0F8"/>
                 </a:solidFill>
                 <a:latin typeface="Courier New" pitchFamily="34" charset="0"/>
                 <a:ea typeface="Courier New" pitchFamily="34" charset="-122"/>
@@ -17920,7 +18187,7 @@
           <a:noFill/>
           <a:ln w="15875">
             <a:solidFill>
-              <a:srgbClr val="9B7BE8"/>
+              <a:srgbClr val="8F72E6"/>
             </a:solidFill>
             <a:prstDash val="solid"/>
           </a:ln>
@@ -17941,7 +18208,7 @@
             <a:avLst/>
           </a:prstGeom>
           <a:solidFill>
-            <a:srgbClr val="9B7BE8"/>
+            <a:srgbClr val="8F72E6"/>
           </a:solidFill>
           <a:ln/>
         </p:spPr>
@@ -17963,9 +18230,14 @@
             </a:avLst>
           </a:prstGeom>
           <a:solidFill>
-            <a:srgbClr val="2E1418"/>
+            <a:srgbClr val="1A0808"/>
           </a:solidFill>
-          <a:ln/>
+          <a:ln w="12700">
+            <a:solidFill>
+              <a:srgbClr val="FF6B6B"/>
+            </a:solidFill>
+            <a:prstDash val="solid"/>
+          </a:ln>
         </p:spPr>
       </p:sp>
       <p:sp>
@@ -17995,7 +18267,7 @@
             <a:r>
               <a:rPr lang="en-US" sz="1100" b="1" dirty="0">
                 <a:solidFill>
-                  <a:srgbClr val="FF7B7B"/>
+                  <a:srgbClr val="FF6B6B"/>
                 </a:solidFill>
                 <a:latin typeface="Courier New" pitchFamily="34" charset="0"/>
                 <a:ea typeface="Courier New" pitchFamily="34" charset="-122"/>
@@ -18024,11 +18296,11 @@
             </a:avLst>
           </a:prstGeom>
           <a:solidFill>
-            <a:srgbClr val="17141F"/>
+            <a:srgbClr val="000000"/>
           </a:solidFill>
           <a:ln w="12700">
             <a:solidFill>
-              <a:srgbClr val="2E2A3A"/>
+              <a:srgbClr val="5E4F85"/>
             </a:solidFill>
             <a:prstDash val="solid"/>
           </a:ln>
@@ -18103,7 +18375,7 @@
             <a:r>
               <a:rPr lang="en-US" sz="1200" dirty="0">
                 <a:solidFill>
-                  <a:srgbClr val="AFA9BE"/>
+                  <a:srgbClr val="C9C4D6"/>
                 </a:solidFill>
                 <a:latin typeface="Montserrat" pitchFamily="34" charset="0"/>
                 <a:ea typeface="Montserrat" pitchFamily="34" charset="-122"/>
@@ -18132,9 +18404,14 @@
             </a:avLst>
           </a:prstGeom>
           <a:solidFill>
-            <a:srgbClr val="2A2010"/>
+            <a:srgbClr val="0B1A38"/>
           </a:solidFill>
-          <a:ln/>
+          <a:ln w="12700">
+            <a:solidFill>
+              <a:srgbClr val="6BA0F8"/>
+            </a:solidFill>
+            <a:prstDash val="solid"/>
+          </a:ln>
         </p:spPr>
       </p:sp>
       <p:sp>
@@ -18164,7 +18441,7 @@
             <a:r>
               <a:rPr lang="en-US" sz="1450" b="1" dirty="0">
                 <a:solidFill>
-                  <a:srgbClr val="E8A857"/>
+                  <a:srgbClr val="6BA0F8"/>
                 </a:solidFill>
                 <a:latin typeface="Montserrat" pitchFamily="34" charset="0"/>
                 <a:ea typeface="Montserrat" pitchFamily="34" charset="-122"/>
@@ -18206,7 +18483,7 @@
             <a:r>
               <a:rPr lang="en-US" sz="1200" dirty="0">
                 <a:solidFill>
-                  <a:srgbClr val="FFFFFF"/>
+                  <a:srgbClr val="C9C4D6"/>
                 </a:solidFill>
                 <a:latin typeface="Montserrat" pitchFamily="34" charset="0"/>
                 <a:ea typeface="Montserrat" pitchFamily="34" charset="-122"/>
@@ -18235,9 +18512,14 @@
             </a:avLst>
           </a:prstGeom>
           <a:solidFill>
-            <a:srgbClr val="102A20"/>
+            <a:srgbClr val="06180F"/>
           </a:solidFill>
-          <a:ln/>
+          <a:ln w="12700">
+            <a:solidFill>
+              <a:srgbClr val="3FCF8E"/>
+            </a:solidFill>
+            <a:prstDash val="solid"/>
+          </a:ln>
         </p:spPr>
       </p:sp>
       <p:sp>
@@ -18267,7 +18549,7 @@
             <a:r>
               <a:rPr lang="en-US" sz="950" b="1" spc="150" kern="0" dirty="0">
                 <a:solidFill>
-                  <a:srgbClr val="5FD6A0"/>
+                  <a:srgbClr val="3FCF8E"/>
                 </a:solidFill>
                 <a:latin typeface="Courier New" pitchFamily="34" charset="0"/>
                 <a:ea typeface="Courier New" pitchFamily="34" charset="-122"/>
@@ -18351,7 +18633,7 @@
             <a:lvl1pPr>
               <a:defRPr sz="850">
                 <a:solidFill>
-                  <a:srgbClr val="8A82A0"/>
+                  <a:srgbClr val="9A94AA"/>
                 </a:solidFill>
                 <a:latin typeface="Courier New"/>
                 <a:ea typeface="Courier New"/>
@@ -18421,7 +18703,7 @@
             <a:r>
               <a:rPr lang="en-US" sz="2600" b="1" dirty="0">
                 <a:solidFill>
-                  <a:srgbClr val="C9A6FF"/>
+                  <a:srgbClr val="A98BFF"/>
                 </a:solidFill>
                 <a:latin typeface="Courier New" pitchFamily="34" charset="0"/>
                 <a:ea typeface="Courier New" pitchFamily="34" charset="-122"/>
@@ -18489,9 +18771,14 @@
             </a:avLst>
           </a:prstGeom>
           <a:solidFill>
-            <a:srgbClr val="C9A6FF"/>
+            <a:srgbClr val="1A0B3D"/>
           </a:solidFill>
-          <a:ln/>
+          <a:ln w="12700">
+            <a:solidFill>
+              <a:srgbClr val="5A05F4"/>
+            </a:solidFill>
+            <a:prstDash val="solid"/>
+          </a:ln>
         </p:spPr>
       </p:sp>
       <p:sp>
@@ -18521,7 +18808,7 @@
             <a:r>
               <a:rPr lang="en-US" sz="900" b="1" spc="100" kern="0" dirty="0">
                 <a:solidFill>
-                  <a:srgbClr val="1C1140"/>
+                  <a:srgbClr val="A98BFF"/>
                 </a:solidFill>
                 <a:latin typeface="Courier New" pitchFamily="34" charset="0"/>
                 <a:ea typeface="Courier New" pitchFamily="34" charset="-122"/>
@@ -18574,11 +18861,11 @@
             </a:avLst>
           </a:prstGeom>
           <a:solidFill>
-            <a:srgbClr val="12101A"/>
+            <a:srgbClr val="07060C"/>
           </a:solidFill>
           <a:ln w="12700">
             <a:solidFill>
-              <a:srgbClr val="2E2A3A"/>
+              <a:srgbClr val="5E4F85"/>
             </a:solidFill>
             <a:prstDash val="solid"/>
           </a:ln>
@@ -18614,7 +18901,7 @@
             <a:r>
               <a:rPr lang="en-US" sz="1300" dirty="0">
                 <a:solidFill>
-                  <a:srgbClr val="C9A6FF"/>
+                  <a:srgbClr val="A98BFF"/>
                 </a:solidFill>
                 <a:latin typeface="Courier New" pitchFamily="34" charset="0"/>
                 <a:ea typeface="Courier New" pitchFamily="34" charset="-122"/>
@@ -18648,7 +18935,7 @@
             <a:r>
               <a:rPr lang="en-US" sz="1300" dirty="0">
                 <a:solidFill>
-                  <a:srgbClr val="C9A6FF"/>
+                  <a:srgbClr val="A98BFF"/>
                 </a:solidFill>
                 <a:latin typeface="Courier New" pitchFamily="34" charset="0"/>
                 <a:ea typeface="Courier New" pitchFamily="34" charset="-122"/>
@@ -18702,7 +18989,7 @@
             <a:r>
               <a:rPr lang="en-US" sz="1300" dirty="0">
                 <a:solidFill>
-                  <a:srgbClr val="C9A6FF"/>
+                  <a:srgbClr val="A98BFF"/>
                 </a:solidFill>
                 <a:latin typeface="Courier New" pitchFamily="34" charset="0"/>
                 <a:ea typeface="Courier New" pitchFamily="34" charset="-122"/>
@@ -18812,9 +19099,14 @@
             </a:avLst>
           </a:prstGeom>
           <a:solidFill>
-            <a:srgbClr val="2A2010"/>
+            <a:srgbClr val="0B1A38"/>
           </a:solidFill>
-          <a:ln/>
+          <a:ln w="12700">
+            <a:solidFill>
+              <a:srgbClr val="6BA0F8"/>
+            </a:solidFill>
+            <a:prstDash val="solid"/>
+          </a:ln>
         </p:spPr>
       </p:sp>
       <p:sp>
@@ -18844,7 +19136,7 @@
             <a:r>
               <a:rPr lang="en-US" sz="1450" b="1" dirty="0">
                 <a:solidFill>
-                  <a:srgbClr val="E8A857"/>
+                  <a:srgbClr val="6BA0F8"/>
                 </a:solidFill>
                 <a:latin typeface="Montserrat" pitchFamily="34" charset="0"/>
                 <a:ea typeface="Montserrat" pitchFamily="34" charset="-122"/>
@@ -18886,7 +19178,7 @@
             <a:r>
               <a:rPr lang="en-US" sz="1200" dirty="0">
                 <a:solidFill>
-                  <a:srgbClr val="FFFFFF"/>
+                  <a:srgbClr val="C9C4D6"/>
                 </a:solidFill>
                 <a:latin typeface="Montserrat" pitchFamily="34" charset="0"/>
                 <a:ea typeface="Montserrat" pitchFamily="34" charset="-122"/>
@@ -18915,11 +19207,11 @@
             </a:avLst>
           </a:prstGeom>
           <a:solidFill>
-            <a:srgbClr val="17141F"/>
+            <a:srgbClr val="000000"/>
           </a:solidFill>
           <a:ln w="12700">
             <a:solidFill>
-              <a:srgbClr val="2E2A3A"/>
+              <a:srgbClr val="5E4F85"/>
             </a:solidFill>
             <a:prstDash val="solid"/>
           </a:ln>
@@ -18994,7 +19286,7 @@
             <a:r>
               <a:rPr lang="en-US" sz="1200" dirty="0">
                 <a:solidFill>
-                  <a:srgbClr val="AFA9BE"/>
+                  <a:srgbClr val="C9C4D6"/>
                 </a:solidFill>
                 <a:latin typeface="Montserrat" pitchFamily="34" charset="0"/>
                 <a:ea typeface="Montserrat" pitchFamily="34" charset="-122"/>
@@ -19023,11 +19315,11 @@
             </a:avLst>
           </a:prstGeom>
           <a:solidFill>
-            <a:srgbClr val="17141F"/>
+            <a:srgbClr val="000000"/>
           </a:solidFill>
           <a:ln w="12700">
             <a:solidFill>
-              <a:srgbClr val="2E2A3A"/>
+              <a:srgbClr val="5E4F85"/>
             </a:solidFill>
             <a:prstDash val="solid"/>
           </a:ln>
@@ -19144,7 +19436,7 @@
             <a:lvl1pPr>
               <a:defRPr sz="850">
                 <a:solidFill>
-                  <a:srgbClr val="8A82A0"/>
+                  <a:srgbClr val="9A94AA"/>
                 </a:solidFill>
                 <a:latin typeface="Courier New"/>
                 <a:ea typeface="Courier New"/>
@@ -19214,7 +19506,7 @@
             <a:r>
               <a:rPr lang="en-US" sz="2600" b="1" dirty="0">
                 <a:solidFill>
-                  <a:srgbClr val="C9A6FF"/>
+                  <a:srgbClr val="A98BFF"/>
                 </a:solidFill>
                 <a:latin typeface="Courier New" pitchFamily="34" charset="0"/>
                 <a:ea typeface="Courier New" pitchFamily="34" charset="-122"/>
@@ -19295,7 +19587,7 @@
             <a:r>
               <a:rPr lang="en-US" sz="1300" dirty="0">
                 <a:solidFill>
-                  <a:srgbClr val="AFA9BE"/>
+                  <a:srgbClr val="C9C4D6"/>
                 </a:solidFill>
                 <a:latin typeface="Montserrat" pitchFamily="34" charset="0"/>
                 <a:ea typeface="Montserrat" pitchFamily="34" charset="-122"/>
@@ -19324,9 +19616,14 @@
             </a:avLst>
           </a:prstGeom>
           <a:solidFill>
-            <a:srgbClr val="C9A6FF"/>
+            <a:srgbClr val="1A0B3D"/>
           </a:solidFill>
-          <a:ln/>
+          <a:ln w="12700">
+            <a:solidFill>
+              <a:srgbClr val="5A05F4"/>
+            </a:solidFill>
+            <a:prstDash val="solid"/>
+          </a:ln>
         </p:spPr>
       </p:sp>
       <p:sp>
@@ -19356,7 +19653,7 @@
             <a:r>
               <a:rPr lang="en-US" sz="900" b="1" spc="100" kern="0" dirty="0">
                 <a:solidFill>
-                  <a:srgbClr val="1C1140"/>
+                  <a:srgbClr val="A98BFF"/>
                 </a:solidFill>
                 <a:latin typeface="Courier New" pitchFamily="34" charset="0"/>
                 <a:ea typeface="Courier New" pitchFamily="34" charset="-122"/>
@@ -19409,9 +19706,14 @@
             </a:avLst>
           </a:prstGeom>
           <a:solidFill>
-            <a:srgbClr val="1C1140"/>
+            <a:srgbClr val="1A0B3D"/>
           </a:solidFill>
-          <a:ln/>
+          <a:ln w="12700">
+            <a:solidFill>
+              <a:srgbClr val="5A05F4"/>
+            </a:solidFill>
+            <a:prstDash val="solid"/>
+          </a:ln>
         </p:spPr>
       </p:sp>
       <p:sp>
@@ -19429,7 +19731,7 @@
             <a:avLst/>
           </a:prstGeom>
           <a:solidFill>
-            <a:srgbClr val="C9A6FF"/>
+            <a:srgbClr val="5A05F4"/>
           </a:solidFill>
           <a:ln/>
         </p:spPr>
@@ -19461,7 +19763,7 @@
             <a:r>
               <a:rPr lang="en-US" sz="1200" b="1" dirty="0">
                 <a:solidFill>
-                  <a:srgbClr val="1C1140"/>
+                  <a:srgbClr val="FFFFFF"/>
                 </a:solidFill>
                 <a:latin typeface="Courier New" pitchFamily="34" charset="0"/>
                 <a:ea typeface="Courier New" pitchFamily="34" charset="-122"/>
@@ -19500,7 +19802,7 @@
             <a:r>
               <a:rPr lang="en-US" sz="1450" b="1" dirty="0">
                 <a:solidFill>
-                  <a:srgbClr val="C9A6FF"/>
+                  <a:srgbClr val="A98BFF"/>
                 </a:solidFill>
                 <a:latin typeface="Montserrat" pitchFamily="34" charset="0"/>
                 <a:ea typeface="Montserrat" pitchFamily="34" charset="-122"/>
@@ -19542,7 +19844,7 @@
             <a:r>
               <a:rPr lang="en-US" sz="1200" dirty="0">
                 <a:solidFill>
-                  <a:srgbClr val="FFFFFF"/>
+                  <a:srgbClr val="C9C4D6"/>
                 </a:solidFill>
                 <a:latin typeface="Montserrat" pitchFamily="34" charset="0"/>
                 <a:ea typeface="Montserrat" pitchFamily="34" charset="-122"/>
@@ -19571,9 +19873,14 @@
             </a:avLst>
           </a:prstGeom>
           <a:solidFill>
-            <a:srgbClr val="1C1140"/>
+            <a:srgbClr val="1A0B3D"/>
           </a:solidFill>
-          <a:ln/>
+          <a:ln w="12700">
+            <a:solidFill>
+              <a:srgbClr val="5A05F4"/>
+            </a:solidFill>
+            <a:prstDash val="solid"/>
+          </a:ln>
         </p:spPr>
       </p:sp>
       <p:sp>
@@ -19591,7 +19898,7 @@
             <a:avLst/>
           </a:prstGeom>
           <a:solidFill>
-            <a:srgbClr val="C9A6FF"/>
+            <a:srgbClr val="5A05F4"/>
           </a:solidFill>
           <a:ln/>
         </p:spPr>
@@ -19623,7 +19930,7 @@
             <a:r>
               <a:rPr lang="en-US" sz="1200" b="1" dirty="0">
                 <a:solidFill>
-                  <a:srgbClr val="1C1140"/>
+                  <a:srgbClr val="FFFFFF"/>
                 </a:solidFill>
                 <a:latin typeface="Courier New" pitchFamily="34" charset="0"/>
                 <a:ea typeface="Courier New" pitchFamily="34" charset="-122"/>
@@ -19662,7 +19969,7 @@
             <a:r>
               <a:rPr lang="en-US" sz="1450" b="1" dirty="0">
                 <a:solidFill>
-                  <a:srgbClr val="C9A6FF"/>
+                  <a:srgbClr val="A98BFF"/>
                 </a:solidFill>
                 <a:latin typeface="Montserrat" pitchFamily="34" charset="0"/>
                 <a:ea typeface="Montserrat" pitchFamily="34" charset="-122"/>
@@ -19704,7 +20011,7 @@
             <a:r>
               <a:rPr lang="en-US" sz="1200" dirty="0">
                 <a:solidFill>
-                  <a:srgbClr val="FFFFFF"/>
+                  <a:srgbClr val="C9C4D6"/>
                 </a:solidFill>
                 <a:latin typeface="Montserrat" pitchFamily="34" charset="0"/>
                 <a:ea typeface="Montserrat" pitchFamily="34" charset="-122"/>
@@ -19733,9 +20040,14 @@
             </a:avLst>
           </a:prstGeom>
           <a:solidFill>
-            <a:srgbClr val="1C1140"/>
+            <a:srgbClr val="1A0B3D"/>
           </a:solidFill>
-          <a:ln/>
+          <a:ln w="12700">
+            <a:solidFill>
+              <a:srgbClr val="5A05F4"/>
+            </a:solidFill>
+            <a:prstDash val="solid"/>
+          </a:ln>
         </p:spPr>
       </p:sp>
       <p:sp>
@@ -19753,7 +20065,7 @@
             <a:avLst/>
           </a:prstGeom>
           <a:solidFill>
-            <a:srgbClr val="C9A6FF"/>
+            <a:srgbClr val="5A05F4"/>
           </a:solidFill>
           <a:ln/>
         </p:spPr>
@@ -19785,7 +20097,7 @@
             <a:r>
               <a:rPr lang="en-US" sz="1200" b="1" dirty="0">
                 <a:solidFill>
-                  <a:srgbClr val="1C1140"/>
+                  <a:srgbClr val="FFFFFF"/>
                 </a:solidFill>
                 <a:latin typeface="Courier New" pitchFamily="34" charset="0"/>
                 <a:ea typeface="Courier New" pitchFamily="34" charset="-122"/>
@@ -19824,7 +20136,7 @@
             <a:r>
               <a:rPr lang="en-US" sz="1450" b="1" dirty="0">
                 <a:solidFill>
-                  <a:srgbClr val="C9A6FF"/>
+                  <a:srgbClr val="A98BFF"/>
                 </a:solidFill>
                 <a:latin typeface="Montserrat" pitchFamily="34" charset="0"/>
                 <a:ea typeface="Montserrat" pitchFamily="34" charset="-122"/>
@@ -19866,7 +20178,7 @@
             <a:r>
               <a:rPr lang="en-US" sz="1200" dirty="0">
                 <a:solidFill>
-                  <a:srgbClr val="FFFFFF"/>
+                  <a:srgbClr val="C9C4D6"/>
                 </a:solidFill>
                 <a:latin typeface="Montserrat" pitchFamily="34" charset="0"/>
                 <a:ea typeface="Montserrat" pitchFamily="34" charset="-122"/>
@@ -19905,7 +20217,7 @@
             <a:r>
               <a:rPr lang="en-US" sz="900" b="1" spc="150" kern="0" dirty="0">
                 <a:solidFill>
-                  <a:srgbClr val="8A82A0"/>
+                  <a:srgbClr val="9A94AA"/>
                 </a:solidFill>
                 <a:latin typeface="Courier New" pitchFamily="34" charset="0"/>
                 <a:ea typeface="Courier New" pitchFamily="34" charset="-122"/>
@@ -19973,7 +20285,7 @@
             </a:avLst>
           </a:prstGeom>
           <a:solidFill>
-            <a:srgbClr val="5FD6A0"/>
+            <a:srgbClr val="3FCF8E"/>
           </a:solidFill>
           <a:ln/>
         </p:spPr>
@@ -20005,7 +20317,7 @@
             <a:r>
               <a:rPr lang="en-US" sz="1150" b="1" dirty="0">
                 <a:solidFill>
-                  <a:srgbClr val="5FD6A0"/>
+                  <a:srgbClr val="3FCF8E"/>
                 </a:solidFill>
                 <a:latin typeface="Montserrat" pitchFamily="34" charset="0"/>
                 <a:ea typeface="Montserrat" pitchFamily="34" charset="-122"/>
@@ -20073,7 +20385,7 @@
             </a:avLst>
           </a:prstGeom>
           <a:solidFill>
-            <a:srgbClr val="FF7B7B"/>
+            <a:srgbClr val="FF6B6B"/>
           </a:solidFill>
           <a:ln/>
         </p:spPr>
@@ -20105,7 +20417,7 @@
             <a:r>
               <a:rPr lang="en-US" sz="1150" b="1" dirty="0">
                 <a:solidFill>
-                  <a:srgbClr val="FF7B7B"/>
+                  <a:srgbClr val="FF6B6B"/>
                 </a:solidFill>
                 <a:latin typeface="Montserrat" pitchFamily="34" charset="0"/>
                 <a:ea typeface="Montserrat" pitchFamily="34" charset="-122"/>
@@ -20134,9 +20446,14 @@
             </a:avLst>
           </a:prstGeom>
           <a:solidFill>
-            <a:srgbClr val="2E1418"/>
+            <a:srgbClr val="1A0808"/>
           </a:solidFill>
-          <a:ln/>
+          <a:ln w="12700">
+            <a:solidFill>
+              <a:srgbClr val="FF6B6B"/>
+            </a:solidFill>
+            <a:prstDash val="solid"/>
+          </a:ln>
         </p:spPr>
       </p:sp>
       <p:sp>
@@ -20166,7 +20483,7 @@
             <a:r>
               <a:rPr lang="en-US" sz="950" b="1" spc="150" kern="0" dirty="0">
                 <a:solidFill>
-                  <a:srgbClr val="FF7B7B"/>
+                  <a:srgbClr val="FF6B6B"/>
                 </a:solidFill>
                 <a:latin typeface="Courier New" pitchFamily="34" charset="0"/>
                 <a:ea typeface="Courier New" pitchFamily="34" charset="-122"/>
@@ -20250,7 +20567,7 @@
             <a:lvl1pPr>
               <a:defRPr sz="850">
                 <a:solidFill>
-                  <a:srgbClr val="8A82A0"/>
+                  <a:srgbClr val="9A94AA"/>
                 </a:solidFill>
                 <a:latin typeface="Courier New"/>
                 <a:ea typeface="Courier New"/>
@@ -20320,7 +20637,7 @@
             <a:r>
               <a:rPr lang="en-US" sz="2600" b="1" dirty="0">
                 <a:solidFill>
-                  <a:srgbClr val="C9A6FF"/>
+                  <a:srgbClr val="A98BFF"/>
                 </a:solidFill>
                 <a:latin typeface="Courier New" pitchFamily="34" charset="0"/>
                 <a:ea typeface="Courier New" pitchFamily="34" charset="-122"/>
@@ -20388,9 +20705,14 @@
             </a:avLst>
           </a:prstGeom>
           <a:solidFill>
-            <a:srgbClr val="C9A6FF"/>
+            <a:srgbClr val="1A0B3D"/>
           </a:solidFill>
-          <a:ln/>
+          <a:ln w="12700">
+            <a:solidFill>
+              <a:srgbClr val="5A05F4"/>
+            </a:solidFill>
+            <a:prstDash val="solid"/>
+          </a:ln>
         </p:spPr>
       </p:sp>
       <p:sp>
@@ -20420,7 +20742,7 @@
             <a:r>
               <a:rPr lang="en-US" sz="900" b="1" spc="100" kern="0" dirty="0">
                 <a:solidFill>
-                  <a:srgbClr val="1C1140"/>
+                  <a:srgbClr val="A98BFF"/>
                 </a:solidFill>
                 <a:latin typeface="Courier New" pitchFamily="34" charset="0"/>
                 <a:ea typeface="Courier New" pitchFamily="34" charset="-122"/>
@@ -20473,11 +20795,11 @@
             </a:avLst>
           </a:prstGeom>
           <a:solidFill>
-            <a:srgbClr val="12101A"/>
+            <a:srgbClr val="07060C"/>
           </a:solidFill>
           <a:ln w="12700">
             <a:solidFill>
-              <a:srgbClr val="2E2A3A"/>
+              <a:srgbClr val="5E4F85"/>
             </a:solidFill>
             <a:prstDash val="solid"/>
           </a:ln>
@@ -20513,7 +20835,7 @@
             <a:r>
               <a:rPr lang="en-US" sz="1150" dirty="0">
                 <a:solidFill>
-                  <a:srgbClr val="8A82A0"/>
+                  <a:srgbClr val="9A94AA"/>
                 </a:solidFill>
                 <a:latin typeface="Courier New" pitchFamily="34" charset="0"/>
                 <a:ea typeface="Courier New" pitchFamily="34" charset="-122"/>
@@ -20533,7 +20855,7 @@
             <a:r>
               <a:rPr lang="en-US" sz="1150" dirty="0">
                 <a:solidFill>
-                  <a:srgbClr val="C9A6FF"/>
+                  <a:srgbClr val="A98BFF"/>
                 </a:solidFill>
                 <a:latin typeface="Courier New" pitchFamily="34" charset="0"/>
                 <a:ea typeface="Courier New" pitchFamily="34" charset="-122"/>
@@ -20573,7 +20895,7 @@
             <a:r>
               <a:rPr lang="en-US" sz="1150" dirty="0">
                 <a:solidFill>
-                  <a:srgbClr val="7FD9A6"/>
+                  <a:srgbClr val="6BA0F8"/>
                 </a:solidFill>
                 <a:latin typeface="Courier New" pitchFamily="34" charset="0"/>
                 <a:ea typeface="Courier New" pitchFamily="34" charset="-122"/>
@@ -20593,7 +20915,7 @@
             <a:r>
               <a:rPr lang="en-US" sz="1150" dirty="0">
                 <a:solidFill>
-                  <a:srgbClr val="7FD9A6"/>
+                  <a:srgbClr val="6BA0F8"/>
                 </a:solidFill>
                 <a:latin typeface="Courier New" pitchFamily="34" charset="0"/>
                 <a:ea typeface="Courier New" pitchFamily="34" charset="-122"/>
@@ -20642,9 +20964,14 @@
             </a:avLst>
           </a:prstGeom>
           <a:solidFill>
-            <a:srgbClr val="2E1418"/>
+            <a:srgbClr val="1A0808"/>
           </a:solidFill>
-          <a:ln/>
+          <a:ln w="12700">
+            <a:solidFill>
+              <a:srgbClr val="FF6B6B"/>
+            </a:solidFill>
+            <a:prstDash val="solid"/>
+          </a:ln>
         </p:spPr>
       </p:sp>
       <p:sp>
@@ -20674,7 +21001,7 @@
             <a:r>
               <a:rPr lang="en-US" sz="3400" b="1" dirty="0">
                 <a:solidFill>
-                  <a:srgbClr val="FF7B7B"/>
+                  <a:srgbClr val="FF6B6B"/>
                 </a:solidFill>
                 <a:latin typeface="Montserrat" pitchFamily="34" charset="0"/>
                 <a:ea typeface="Montserrat" pitchFamily="34" charset="-122"/>
@@ -20713,7 +21040,7 @@
             <a:r>
               <a:rPr lang="en-US" sz="1150" dirty="0">
                 <a:solidFill>
-                  <a:srgbClr val="FF7B7B"/>
+                  <a:srgbClr val="C9C4D6"/>
                 </a:solidFill>
                 <a:latin typeface="Montserrat" pitchFamily="34" charset="0"/>
                 <a:ea typeface="Montserrat" pitchFamily="34" charset="-122"/>
@@ -20742,9 +21069,14 @@
             </a:avLst>
           </a:prstGeom>
           <a:solidFill>
-            <a:srgbClr val="2A2010"/>
+            <a:srgbClr val="0B1A38"/>
           </a:solidFill>
-          <a:ln/>
+          <a:ln w="12700">
+            <a:solidFill>
+              <a:srgbClr val="6BA0F8"/>
+            </a:solidFill>
+            <a:prstDash val="solid"/>
+          </a:ln>
         </p:spPr>
       </p:sp>
       <p:sp>
@@ -20774,7 +21106,7 @@
             <a:r>
               <a:rPr lang="en-US" sz="3400" b="1" dirty="0">
                 <a:solidFill>
-                  <a:srgbClr val="E8A857"/>
+                  <a:srgbClr val="6BA0F8"/>
                 </a:solidFill>
                 <a:latin typeface="Montserrat" pitchFamily="34" charset="0"/>
                 <a:ea typeface="Montserrat" pitchFamily="34" charset="-122"/>
@@ -20813,7 +21145,7 @@
             <a:r>
               <a:rPr lang="en-US" sz="1150" dirty="0">
                 <a:solidFill>
-                  <a:srgbClr val="E8A857"/>
+                  <a:srgbClr val="C9C4D6"/>
                 </a:solidFill>
                 <a:latin typeface="Montserrat" pitchFamily="34" charset="0"/>
                 <a:ea typeface="Montserrat" pitchFamily="34" charset="-122"/>
@@ -20906,11 +21238,11 @@
             </a:avLst>
           </a:prstGeom>
           <a:solidFill>
-            <a:srgbClr val="17141F"/>
+            <a:srgbClr val="000000"/>
           </a:solidFill>
           <a:ln w="12700">
             <a:solidFill>
-              <a:srgbClr val="2E2A3A"/>
+              <a:srgbClr val="5E4F85"/>
             </a:solidFill>
             <a:prstDash val="solid"/>
           </a:ln>
@@ -21027,7 +21359,7 @@
             <a:lvl1pPr>
               <a:defRPr sz="850">
                 <a:solidFill>
-                  <a:srgbClr val="8A82A0"/>
+                  <a:srgbClr val="9A94AA"/>
                 </a:solidFill>
                 <a:latin typeface="Courier New"/>
                 <a:ea typeface="Courier New"/>
@@ -21097,7 +21429,7 @@
             <a:r>
               <a:rPr lang="en-US" sz="2600" b="1" dirty="0">
                 <a:solidFill>
-                  <a:srgbClr val="C9A6FF"/>
+                  <a:srgbClr val="A98BFF"/>
                 </a:solidFill>
                 <a:latin typeface="Courier New" pitchFamily="34" charset="0"/>
                 <a:ea typeface="Courier New" pitchFamily="34" charset="-122"/>
@@ -21165,9 +21497,14 @@
             </a:avLst>
           </a:prstGeom>
           <a:solidFill>
-            <a:srgbClr val="C9A6FF"/>
+            <a:srgbClr val="1A0B3D"/>
           </a:solidFill>
-          <a:ln/>
+          <a:ln w="12700">
+            <a:solidFill>
+              <a:srgbClr val="5A05F4"/>
+            </a:solidFill>
+            <a:prstDash val="solid"/>
+          </a:ln>
         </p:spPr>
       </p:sp>
       <p:sp>
@@ -21197,7 +21534,7 @@
             <a:r>
               <a:rPr lang="en-US" sz="900" b="1" spc="100" kern="0" dirty="0">
                 <a:solidFill>
-                  <a:srgbClr val="1C1140"/>
+                  <a:srgbClr val="A98BFF"/>
                 </a:solidFill>
                 <a:latin typeface="Courier New" pitchFamily="34" charset="0"/>
                 <a:ea typeface="Courier New" pitchFamily="34" charset="-122"/>
@@ -21250,9 +21587,14 @@
             </a:avLst>
           </a:prstGeom>
           <a:solidFill>
-            <a:srgbClr val="2E1418"/>
+            <a:srgbClr val="1A0808"/>
           </a:solidFill>
-          <a:ln/>
+          <a:ln w="12700">
+            <a:solidFill>
+              <a:srgbClr val="FF6B6B"/>
+            </a:solidFill>
+            <a:prstDash val="solid"/>
+          </a:ln>
         </p:spPr>
       </p:sp>
       <p:sp>
@@ -21282,7 +21624,7 @@
             <a:r>
               <a:rPr lang="en-US" sz="1450" b="1" dirty="0">
                 <a:solidFill>
-                  <a:srgbClr val="FF7B7B"/>
+                  <a:srgbClr val="FF6B6B"/>
                 </a:solidFill>
                 <a:latin typeface="Montserrat" pitchFamily="34" charset="0"/>
                 <a:ea typeface="Montserrat" pitchFamily="34" charset="-122"/>
@@ -21324,7 +21666,7 @@
             <a:r>
               <a:rPr lang="en-US" sz="1200" dirty="0">
                 <a:solidFill>
-                  <a:srgbClr val="FFFFFF"/>
+                  <a:srgbClr val="C9C4D6"/>
                 </a:solidFill>
                 <a:latin typeface="Montserrat" pitchFamily="34" charset="0"/>
                 <a:ea typeface="Montserrat" pitchFamily="34" charset="-122"/>
@@ -21353,9 +21695,14 @@
             </a:avLst>
           </a:prstGeom>
           <a:solidFill>
-            <a:srgbClr val="102A20"/>
+            <a:srgbClr val="06180F"/>
           </a:solidFill>
-          <a:ln/>
+          <a:ln w="12700">
+            <a:solidFill>
+              <a:srgbClr val="3FCF8E"/>
+            </a:solidFill>
+            <a:prstDash val="solid"/>
+          </a:ln>
         </p:spPr>
       </p:sp>
       <p:sp>
@@ -21385,7 +21732,7 @@
             <a:r>
               <a:rPr lang="en-US" sz="1450" b="1" dirty="0">
                 <a:solidFill>
-                  <a:srgbClr val="5FD6A0"/>
+                  <a:srgbClr val="3FCF8E"/>
                 </a:solidFill>
                 <a:latin typeface="Montserrat" pitchFamily="34" charset="0"/>
                 <a:ea typeface="Montserrat" pitchFamily="34" charset="-122"/>
@@ -21427,7 +21774,7 @@
             <a:r>
               <a:rPr lang="en-US" sz="1200" dirty="0">
                 <a:solidFill>
-                  <a:srgbClr val="FFFFFF"/>
+                  <a:srgbClr val="C9C4D6"/>
                 </a:solidFill>
                 <a:latin typeface="Montserrat" pitchFamily="34" charset="0"/>
                 <a:ea typeface="Montserrat" pitchFamily="34" charset="-122"/>
@@ -21495,7 +21842,7 @@
             </a:avLst>
           </a:prstGeom>
           <a:solidFill>
-            <a:srgbClr val="5FD6A0"/>
+            <a:srgbClr val="3FCF8E"/>
           </a:solidFill>
           <a:ln/>
         </p:spPr>
@@ -21527,7 +21874,7 @@
             <a:r>
               <a:rPr lang="en-US" sz="1150" b="1" dirty="0">
                 <a:solidFill>
-                  <a:srgbClr val="5FD6A0"/>
+                  <a:srgbClr val="3FCF8E"/>
                 </a:solidFill>
                 <a:latin typeface="Montserrat" pitchFamily="34" charset="0"/>
                 <a:ea typeface="Montserrat" pitchFamily="34" charset="-122"/>
@@ -21595,7 +21942,7 @@
             </a:avLst>
           </a:prstGeom>
           <a:solidFill>
-            <a:srgbClr val="C9A6FF"/>
+            <a:srgbClr val="A98BFF"/>
           </a:solidFill>
           <a:ln/>
         </p:spPr>
@@ -21627,7 +21974,7 @@
             <a:r>
               <a:rPr lang="en-US" sz="1150" b="1" dirty="0">
                 <a:solidFill>
-                  <a:srgbClr val="C9A6FF"/>
+                  <a:srgbClr val="A98BFF"/>
                 </a:solidFill>
                 <a:latin typeface="Montserrat" pitchFamily="34" charset="0"/>
                 <a:ea typeface="Montserrat" pitchFamily="34" charset="-122"/>
@@ -21695,7 +22042,7 @@
             </a:avLst>
           </a:prstGeom>
           <a:solidFill>
-            <a:srgbClr val="FF7B7B"/>
+            <a:srgbClr val="FF6B6B"/>
           </a:solidFill>
           <a:ln/>
         </p:spPr>
@@ -21727,7 +22074,7 @@
             <a:r>
               <a:rPr lang="en-US" sz="1150" b="1" dirty="0">
                 <a:solidFill>
-                  <a:srgbClr val="FF7B7B"/>
+                  <a:srgbClr val="FF6B6B"/>
                 </a:solidFill>
                 <a:latin typeface="Montserrat" pitchFamily="34" charset="0"/>
                 <a:ea typeface="Montserrat" pitchFamily="34" charset="-122"/>
@@ -21756,9 +22103,14 @@
             </a:avLst>
           </a:prstGeom>
           <a:solidFill>
-            <a:srgbClr val="2A2010"/>
+            <a:srgbClr val="0B1A38"/>
           </a:solidFill>
-          <a:ln/>
+          <a:ln w="12700">
+            <a:solidFill>
+              <a:srgbClr val="6BA0F8"/>
+            </a:solidFill>
+            <a:prstDash val="solid"/>
+          </a:ln>
         </p:spPr>
       </p:sp>
       <p:sp>
@@ -21788,7 +22140,7 @@
             <a:r>
               <a:rPr lang="en-US" sz="950" b="1" spc="150" kern="0" dirty="0">
                 <a:solidFill>
-                  <a:srgbClr val="E8A857"/>
+                  <a:srgbClr val="6BA0F8"/>
                 </a:solidFill>
                 <a:latin typeface="Courier New" pitchFamily="34" charset="0"/>
                 <a:ea typeface="Courier New" pitchFamily="34" charset="-122"/>
@@ -21872,7 +22224,7 @@
             <a:lvl1pPr>
               <a:defRPr sz="850">
                 <a:solidFill>
-                  <a:srgbClr val="8A82A0"/>
+                  <a:srgbClr val="9A94AA"/>
                 </a:solidFill>
                 <a:latin typeface="Courier New"/>
                 <a:ea typeface="Courier New"/>

--- a/docs/decks/L04.pptx
+++ b/docs/decks/L04.pptx
@@ -6772,14 +6772,9 @@
             <a:avLst/>
           </a:prstGeom>
           <a:solidFill>
-            <a:srgbClr val="F5F3FA"/>
-          </a:solidFill>
-          <a:ln w="12700">
-            <a:solidFill>
-              <a:srgbClr val="106B41"/>
-            </a:solidFill>
-            <a:prstDash val="solid"/>
-          </a:ln>
+            <a:srgbClr val="106B41"/>
+          </a:solidFill>
+          <a:ln/>
         </p:spPr>
       </p:sp>
       <p:sp>
@@ -6809,7 +6804,7 @@
             <a:r>
               <a:rPr lang="en-US" sz="950" b="1" dirty="0">
                 <a:solidFill>
-                  <a:srgbClr val="106B41"/>
+                  <a:srgbClr val="FFFFFF"/>
                 </a:solidFill>
                 <a:latin typeface="Courier New" pitchFamily="34" charset="0"/>
                 <a:ea typeface="Courier New" pitchFamily="34" charset="-122"/>
@@ -6836,14 +6831,9 @@
             <a:avLst/>
           </a:prstGeom>
           <a:solidFill>
-            <a:srgbClr val="F5F3FA"/>
-          </a:solidFill>
-          <a:ln w="12700">
-            <a:solidFill>
-              <a:srgbClr val="B3261E"/>
-            </a:solidFill>
-            <a:prstDash val="solid"/>
-          </a:ln>
+            <a:srgbClr val="B3261E"/>
+          </a:solidFill>
+          <a:ln/>
         </p:spPr>
       </p:sp>
       <p:sp>
@@ -6873,7 +6863,7 @@
             <a:r>
               <a:rPr lang="en-US" sz="950" b="1" dirty="0">
                 <a:solidFill>
-                  <a:srgbClr val="B3261E"/>
+                  <a:srgbClr val="FFFFFF"/>
                 </a:solidFill>
                 <a:latin typeface="Courier New" pitchFamily="34" charset="0"/>
                 <a:ea typeface="Courier New" pitchFamily="34" charset="-122"/>
@@ -9897,11 +9887,69 @@
             <a:avLst/>
           </a:prstGeom>
           <a:solidFill>
-            <a:srgbClr val="F5F3FA"/>
-          </a:solidFill>
-          <a:ln w="12700">
+            <a:srgbClr val="106B41"/>
+          </a:solidFill>
+          <a:ln/>
+        </p:spPr>
+      </p:sp>
+      <p:sp>
+        <p:nvSpPr>
+          <p:cNvPr id="20" name="Shape 17"/>
+          <p:cNvSpPr/>
+          <p:nvPr/>
+        </p:nvSpPr>
+        <p:spPr>
+          <a:xfrm>
+            <a:off x="9418320" y="4462272"/>
+            <a:ext cx="1327709" cy="402336"/>
+          </a:xfrm>
+          <a:prstGeom prst="rect">
+            <a:avLst/>
+          </a:prstGeom>
+          <a:solidFill>
+            <a:srgbClr val="1A4FBF"/>
+          </a:solidFill>
+          <a:ln/>
+        </p:spPr>
+      </p:sp>
+      <p:sp>
+        <p:nvSpPr>
+          <p:cNvPr id="21" name="Shape 18"/>
+          <p:cNvSpPr/>
+          <p:nvPr/>
+        </p:nvSpPr>
+        <p:spPr>
+          <a:xfrm>
+            <a:off x="10746029" y="4462272"/>
+            <a:ext cx="885139" cy="402336"/>
+          </a:xfrm>
+          <a:prstGeom prst="rect">
+            <a:avLst/>
+          </a:prstGeom>
+          <a:solidFill>
+            <a:srgbClr val="B3261E"/>
+          </a:solidFill>
+          <a:ln/>
+        </p:spPr>
+      </p:sp>
+      <p:sp>
+        <p:nvSpPr>
+          <p:cNvPr id="22" name="Shape 19"/>
+          <p:cNvSpPr/>
+          <p:nvPr/>
+        </p:nvSpPr>
+        <p:spPr>
+          <a:xfrm>
+            <a:off x="9418320" y="4389120"/>
+            <a:ext cx="0" cy="548640"/>
+          </a:xfrm>
+          <a:prstGeom prst="line">
+            <a:avLst/>
+          </a:prstGeom>
+          <a:noFill/>
+          <a:ln w="19050">
             <a:solidFill>
-              <a:srgbClr val="106B41"/>
+              <a:srgbClr val="FFFFFF"/>
             </a:solidFill>
             <a:prstDash val="solid"/>
           </a:ln>
@@ -9909,63 +9957,13 @@
       </p:sp>
       <p:sp>
         <p:nvSpPr>
-          <p:cNvPr id="20" name="Shape 17"/>
-          <p:cNvSpPr/>
-          <p:nvPr/>
-        </p:nvSpPr>
-        <p:spPr>
-          <a:xfrm>
-            <a:off x="9418320" y="4462272"/>
-            <a:ext cx="1327709" cy="402336"/>
-          </a:xfrm>
-          <a:prstGeom prst="rect">
-            <a:avLst/>
-          </a:prstGeom>
-          <a:solidFill>
-            <a:srgbClr val="F5F3FA"/>
-          </a:solidFill>
-          <a:ln w="12700">
-            <a:solidFill>
-              <a:srgbClr val="1A4FBF"/>
-            </a:solidFill>
-            <a:prstDash val="solid"/>
-          </a:ln>
-        </p:spPr>
-      </p:sp>
-      <p:sp>
-        <p:nvSpPr>
-          <p:cNvPr id="21" name="Shape 18"/>
-          <p:cNvSpPr/>
-          <p:nvPr/>
-        </p:nvSpPr>
-        <p:spPr>
-          <a:xfrm>
-            <a:off x="10746029" y="4462272"/>
-            <a:ext cx="885139" cy="402336"/>
-          </a:xfrm>
-          <a:prstGeom prst="rect">
-            <a:avLst/>
-          </a:prstGeom>
-          <a:solidFill>
-            <a:srgbClr val="F5F3FA"/>
-          </a:solidFill>
-          <a:ln w="12700">
-            <a:solidFill>
-              <a:srgbClr val="B3261E"/>
-            </a:solidFill>
-            <a:prstDash val="solid"/>
-          </a:ln>
-        </p:spPr>
-      </p:sp>
-      <p:sp>
-        <p:nvSpPr>
-          <p:cNvPr id="22" name="Shape 19"/>
-          <p:cNvSpPr/>
-          <p:nvPr/>
-        </p:nvSpPr>
-        <p:spPr>
-          <a:xfrm>
-            <a:off x="9418320" y="4389120"/>
+          <p:cNvPr id="23" name="Shape 20"/>
+          <p:cNvSpPr/>
+          <p:nvPr/>
+        </p:nvSpPr>
+        <p:spPr>
+          <a:xfrm>
+            <a:off x="10746029" y="4389120"/>
             <a:ext cx="0" cy="548640"/>
           </a:xfrm>
           <a:prstGeom prst="line">
@@ -9974,30 +9972,7 @@
           <a:noFill/>
           <a:ln w="19050">
             <a:solidFill>
-              <a:srgbClr val="1A4FBF"/>
-            </a:solidFill>
-            <a:prstDash val="solid"/>
-          </a:ln>
-        </p:spPr>
-      </p:sp>
-      <p:sp>
-        <p:nvSpPr>
-          <p:cNvPr id="23" name="Shape 20"/>
-          <p:cNvSpPr/>
-          <p:nvPr/>
-        </p:nvSpPr>
-        <p:spPr>
-          <a:xfrm>
-            <a:off x="10746029" y="4389120"/>
-            <a:ext cx="0" cy="548640"/>
-          </a:xfrm>
-          <a:prstGeom prst="line">
-            <a:avLst/>
-          </a:prstGeom>
-          <a:noFill/>
-          <a:ln w="19050">
-            <a:solidFill>
-              <a:srgbClr val="B3261E"/>
+              <a:srgbClr val="FFFFFF"/>
             </a:solidFill>
             <a:prstDash val="solid"/>
           </a:ln>

--- a/docs/decks/L04.pptx
+++ b/docs/decks/L04.pptx
@@ -11666,11 +11666,11 @@
         <p:spPr>
           <a:xfrm>
             <a:off x="566928" y="1783080"/>
-            <a:ext cx="3520440" cy="1463040"/>
+            <a:ext cx="3520440" cy="1874520"/>
           </a:xfrm>
           <a:prstGeom prst="roundRect">
             <a:avLst>
-              <a:gd name="adj" fmla="val 7500"/>
+              <a:gd name="adj" fmla="val 5854"/>
             </a:avLst>
           </a:prstGeom>
           <a:solidFill>
@@ -11786,7 +11786,7 @@
         <p:spPr>
           <a:xfrm>
             <a:off x="768096" y="2468880"/>
-            <a:ext cx="3118104" cy="621792"/>
+            <a:ext cx="3118104" cy="1033272"/>
           </a:xfrm>
           <a:prstGeom prst="rect">
             <a:avLst/>
@@ -11828,11 +11828,11 @@
         <p:spPr>
           <a:xfrm>
             <a:off x="4270248" y="1783080"/>
-            <a:ext cx="3520440" cy="1463040"/>
+            <a:ext cx="3520440" cy="1874520"/>
           </a:xfrm>
           <a:prstGeom prst="roundRect">
             <a:avLst>
-              <a:gd name="adj" fmla="val 7500"/>
+              <a:gd name="adj" fmla="val 5854"/>
             </a:avLst>
           </a:prstGeom>
           <a:solidFill>
@@ -11948,7 +11948,7 @@
         <p:spPr>
           <a:xfrm>
             <a:off x="4471416" y="2468880"/>
-            <a:ext cx="3118104" cy="621792"/>
+            <a:ext cx="3118104" cy="1033272"/>
           </a:xfrm>
           <a:prstGeom prst="rect">
             <a:avLst/>
@@ -11990,11 +11990,11 @@
         <p:spPr>
           <a:xfrm>
             <a:off x="7973568" y="1783080"/>
-            <a:ext cx="3520440" cy="1463040"/>
+            <a:ext cx="3520440" cy="1874520"/>
           </a:xfrm>
           <a:prstGeom prst="roundRect">
             <a:avLst>
-              <a:gd name="adj" fmla="val 7500"/>
+              <a:gd name="adj" fmla="val 5854"/>
             </a:avLst>
           </a:prstGeom>
           <a:solidFill>
@@ -12110,7 +12110,7 @@
         <p:spPr>
           <a:xfrm>
             <a:off x="8174736" y="2468880"/>
-            <a:ext cx="3118104" cy="621792"/>
+            <a:ext cx="3118104" cy="1033272"/>
           </a:xfrm>
           <a:prstGeom prst="rect">
             <a:avLst/>
@@ -12151,12 +12151,12 @@
         </p:nvSpPr>
         <p:spPr>
           <a:xfrm>
-            <a:off x="566928" y="3520440"/>
-            <a:ext cx="3520440" cy="1463040"/>
+            <a:off x="566928" y="3886200"/>
+            <a:ext cx="3520440" cy="1874520"/>
           </a:xfrm>
           <a:prstGeom prst="roundRect">
             <a:avLst>
-              <a:gd name="adj" fmla="val 7500"/>
+              <a:gd name="adj" fmla="val 5854"/>
             </a:avLst>
           </a:prstGeom>
           <a:solidFill>
@@ -12173,7 +12173,7 @@
         </p:nvSpPr>
         <p:spPr>
           <a:xfrm>
-            <a:off x="768096" y="3703320"/>
+            <a:off x="768096" y="4069080"/>
             <a:ext cx="384048" cy="384048"/>
           </a:xfrm>
           <a:prstGeom prst="ellipse">
@@ -12193,7 +12193,7 @@
         </p:nvSpPr>
         <p:spPr>
           <a:xfrm>
-            <a:off x="768096" y="3703320"/>
+            <a:off x="768096" y="4069080"/>
             <a:ext cx="384048" cy="384048"/>
           </a:xfrm>
           <a:prstGeom prst="rect">
@@ -12232,7 +12232,7 @@
         </p:nvSpPr>
         <p:spPr>
           <a:xfrm>
-            <a:off x="1280160" y="3675888"/>
+            <a:off x="1280160" y="4041648"/>
             <a:ext cx="2606040" cy="438912"/>
           </a:xfrm>
           <a:prstGeom prst="rect">
@@ -12271,8 +12271,8 @@
         </p:nvSpPr>
         <p:spPr>
           <a:xfrm>
-            <a:off x="768096" y="4206240"/>
-            <a:ext cx="3118104" cy="621792"/>
+            <a:off x="768096" y="4572000"/>
+            <a:ext cx="3118104" cy="1033272"/>
           </a:xfrm>
           <a:prstGeom prst="rect">
             <a:avLst/>
@@ -12313,12 +12313,12 @@
         </p:nvSpPr>
         <p:spPr>
           <a:xfrm>
-            <a:off x="4270248" y="3520440"/>
-            <a:ext cx="3520440" cy="1463040"/>
+            <a:off x="4270248" y="3886200"/>
+            <a:ext cx="3520440" cy="1874520"/>
           </a:xfrm>
           <a:prstGeom prst="roundRect">
             <a:avLst>
-              <a:gd name="adj" fmla="val 7500"/>
+              <a:gd name="adj" fmla="val 5854"/>
             </a:avLst>
           </a:prstGeom>
           <a:solidFill>
@@ -12335,7 +12335,7 @@
         </p:nvSpPr>
         <p:spPr>
           <a:xfrm>
-            <a:off x="4471416" y="3703320"/>
+            <a:off x="4471416" y="4069080"/>
             <a:ext cx="384048" cy="384048"/>
           </a:xfrm>
           <a:prstGeom prst="ellipse">
@@ -12355,7 +12355,7 @@
         </p:nvSpPr>
         <p:spPr>
           <a:xfrm>
-            <a:off x="4471416" y="3703320"/>
+            <a:off x="4471416" y="4069080"/>
             <a:ext cx="384048" cy="384048"/>
           </a:xfrm>
           <a:prstGeom prst="rect">
@@ -12394,7 +12394,7 @@
         </p:nvSpPr>
         <p:spPr>
           <a:xfrm>
-            <a:off x="4983480" y="3675888"/>
+            <a:off x="4983480" y="4041648"/>
             <a:ext cx="2606040" cy="438912"/>
           </a:xfrm>
           <a:prstGeom prst="rect">
@@ -12433,8 +12433,8 @@
         </p:nvSpPr>
         <p:spPr>
           <a:xfrm>
-            <a:off x="4471416" y="4206240"/>
-            <a:ext cx="3118104" cy="621792"/>
+            <a:off x="4471416" y="4572000"/>
+            <a:ext cx="3118104" cy="1033272"/>
           </a:xfrm>
           <a:prstGeom prst="rect">
             <a:avLst/>
@@ -13621,11 +13621,11 @@
         <p:spPr>
           <a:xfrm>
             <a:off x="566928" y="1737360"/>
-            <a:ext cx="3566160" cy="1828800"/>
+            <a:ext cx="3566160" cy="2148840"/>
           </a:xfrm>
           <a:prstGeom prst="roundRect">
             <a:avLst>
-              <a:gd name="adj" fmla="val 6000"/>
+              <a:gd name="adj" fmla="val 5106"/>
             </a:avLst>
           </a:prstGeom>
           <a:solidFill>
@@ -13682,7 +13682,7 @@
         <p:spPr>
           <a:xfrm>
             <a:off x="768096" y="2423160"/>
-            <a:ext cx="3163824" cy="987552"/>
+            <a:ext cx="3163824" cy="1307592"/>
           </a:xfrm>
           <a:prstGeom prst="rect">
             <a:avLst/>
@@ -13724,11 +13724,11 @@
         <p:spPr>
           <a:xfrm>
             <a:off x="4315968" y="1737360"/>
-            <a:ext cx="3566160" cy="1828800"/>
+            <a:ext cx="3566160" cy="2148840"/>
           </a:xfrm>
           <a:prstGeom prst="roundRect">
             <a:avLst>
-              <a:gd name="adj" fmla="val 6000"/>
+              <a:gd name="adj" fmla="val 5106"/>
             </a:avLst>
           </a:prstGeom>
           <a:solidFill>
@@ -13785,7 +13785,7 @@
         <p:spPr>
           <a:xfrm>
             <a:off x="4517136" y="2423160"/>
-            <a:ext cx="3163824" cy="987552"/>
+            <a:ext cx="3163824" cy="1307592"/>
           </a:xfrm>
           <a:prstGeom prst="rect">
             <a:avLst/>
@@ -13827,11 +13827,11 @@
         <p:spPr>
           <a:xfrm>
             <a:off x="8065008" y="1737360"/>
-            <a:ext cx="3566160" cy="1828800"/>
+            <a:ext cx="3566160" cy="2148840"/>
           </a:xfrm>
           <a:prstGeom prst="roundRect">
             <a:avLst>
-              <a:gd name="adj" fmla="val 6000"/>
+              <a:gd name="adj" fmla="val 5106"/>
             </a:avLst>
           </a:prstGeom>
           <a:solidFill>
@@ -13888,7 +13888,7 @@
         <p:spPr>
           <a:xfrm>
             <a:off x="8266176" y="2423160"/>
-            <a:ext cx="3163824" cy="987552"/>
+            <a:ext cx="3163824" cy="1307592"/>
           </a:xfrm>
           <a:prstGeom prst="rect">
             <a:avLst/>
@@ -13929,12 +13929,12 @@
         </p:nvSpPr>
         <p:spPr>
           <a:xfrm>
-            <a:off x="566928" y="3977640"/>
-            <a:ext cx="11064240" cy="1234440"/>
+            <a:off x="566928" y="4297680"/>
+            <a:ext cx="11064240" cy="1600200"/>
           </a:xfrm>
           <a:prstGeom prst="roundRect">
             <a:avLst>
-              <a:gd name="adj" fmla="val 8889"/>
+              <a:gd name="adj" fmla="val 6857"/>
             </a:avLst>
           </a:prstGeom>
           <a:solidFill>
@@ -13956,8 +13956,8 @@
         </p:nvSpPr>
         <p:spPr>
           <a:xfrm>
-            <a:off x="786384" y="4123944"/>
-            <a:ext cx="10625328" cy="941832"/>
+            <a:off x="786384" y="4443984"/>
+            <a:ext cx="10625328" cy="1307592"/>
           </a:xfrm>
           <a:prstGeom prst="rect">
             <a:avLst/>
@@ -14223,11 +14223,11 @@
         <p:spPr>
           <a:xfrm>
             <a:off x="566928" y="1783080"/>
-            <a:ext cx="11064240" cy="1874520"/>
+            <a:ext cx="11064240" cy="3657600"/>
           </a:xfrm>
           <a:prstGeom prst="roundRect">
             <a:avLst>
-              <a:gd name="adj" fmla="val 5854"/>
+              <a:gd name="adj" fmla="val 3000"/>
             </a:avLst>
           </a:prstGeom>
           <a:solidFill>
@@ -14249,7 +14249,7 @@
         </p:nvSpPr>
         <p:spPr>
           <a:xfrm>
-            <a:off x="978408" y="2157984"/>
+            <a:off x="978408" y="2706624"/>
             <a:ext cx="256032" cy="256032"/>
           </a:xfrm>
           <a:prstGeom prst="roundRect">
@@ -14276,7 +14276,7 @@
         </p:nvSpPr>
         <p:spPr>
           <a:xfrm rot="2700000">
-            <a:off x="1041227" y="2297430"/>
+            <a:off x="1041227" y="2846070"/>
             <a:ext cx="58156" cy="27432"/>
           </a:xfrm>
           <a:prstGeom prst="rect">
@@ -14296,7 +14296,7 @@
         </p:nvSpPr>
         <p:spPr>
           <a:xfrm rot="-3000000">
-            <a:off x="1069025" y="2271370"/>
+            <a:off x="1069025" y="2820010"/>
             <a:ext cx="121432" cy="27432"/>
           </a:xfrm>
           <a:prstGeom prst="rect">
@@ -14316,24 +14316,24 @@
         </p:nvSpPr>
         <p:spPr>
           <a:xfrm>
-            <a:off x="1362456" y="2103120"/>
-            <a:ext cx="4617720" cy="384048"/>
-          </a:xfrm>
-          <a:prstGeom prst="rect">
-            <a:avLst/>
-          </a:prstGeom>
-          <a:noFill/>
-          <a:ln/>
-        </p:spPr>
-        <p:txBody>
-          <a:bodyPr wrap="square" lIns="0" tIns="0" rIns="0" bIns="0" rtlCol="0" anchor="ctr"/>
-          <a:lstStyle/>
-          <a:p>
-            <a:pPr indent="0" marL="0">
-              <a:buNone/>
-            </a:pPr>
-            <a:r>
-              <a:rPr lang="en-US" sz="1250" dirty="0">
+            <a:off x="1362456" y="2505456"/>
+            <a:ext cx="4617720" cy="658368"/>
+          </a:xfrm>
+          <a:prstGeom prst="rect">
+            <a:avLst/>
+          </a:prstGeom>
+          <a:noFill/>
+          <a:ln/>
+        </p:spPr>
+        <p:txBody>
+          <a:bodyPr wrap="square" lIns="0" tIns="0" rIns="0" bIns="0" rtlCol="0" anchor="ctr"/>
+          <a:lstStyle/>
+          <a:p>
+            <a:pPr indent="0" marL="0">
+              <a:buNone/>
+            </a:pPr>
+            <a:r>
+              <a:rPr lang="en-US" sz="1400" dirty="0">
                 <a:solidFill>
                   <a:srgbClr val="000000"/>
                 </a:solidFill>
@@ -14343,7 +14343,7 @@
               </a:rPr>
               <a:t>cost_usd заповнений ненульовими значеннями</a:t>
             </a:r>
-            <a:endParaRPr lang="en-US" sz="1250" dirty="0"/>
+            <a:endParaRPr lang="en-US" sz="1400" dirty="0"/>
           </a:p>
         </p:txBody>
       </p:sp>
@@ -14355,7 +14355,7 @@
         </p:nvSpPr>
         <p:spPr>
           <a:xfrm>
-            <a:off x="978408" y="2724912"/>
+            <a:off x="978408" y="4169664"/>
             <a:ext cx="256032" cy="256032"/>
           </a:xfrm>
           <a:prstGeom prst="roundRect">
@@ -14382,7 +14382,7 @@
         </p:nvSpPr>
         <p:spPr>
           <a:xfrm rot="2700000">
-            <a:off x="1041227" y="2864358"/>
+            <a:off x="1041227" y="4309110"/>
             <a:ext cx="58156" cy="27432"/>
           </a:xfrm>
           <a:prstGeom prst="rect">
@@ -14402,7 +14402,7 @@
         </p:nvSpPr>
         <p:spPr>
           <a:xfrm rot="-3000000">
-            <a:off x="1069025" y="2838298"/>
+            <a:off x="1069025" y="4283050"/>
             <a:ext cx="121432" cy="27432"/>
           </a:xfrm>
           <a:prstGeom prst="rect">
@@ -14422,24 +14422,24 @@
         </p:nvSpPr>
         <p:spPr>
           <a:xfrm>
-            <a:off x="1362456" y="2670048"/>
-            <a:ext cx="4617720" cy="384048"/>
-          </a:xfrm>
-          <a:prstGeom prst="rect">
-            <a:avLst/>
-          </a:prstGeom>
-          <a:noFill/>
-          <a:ln/>
-        </p:spPr>
-        <p:txBody>
-          <a:bodyPr wrap="square" lIns="0" tIns="0" rIns="0" bIns="0" rtlCol="0" anchor="ctr"/>
-          <a:lstStyle/>
-          <a:p>
-            <a:pPr indent="0" marL="0">
-              <a:buNone/>
-            </a:pPr>
-            <a:r>
-              <a:rPr lang="en-US" sz="1250" dirty="0">
+            <a:off x="1362456" y="3968496"/>
+            <a:ext cx="4617720" cy="658368"/>
+          </a:xfrm>
+          <a:prstGeom prst="rect">
+            <a:avLst/>
+          </a:prstGeom>
+          <a:noFill/>
+          <a:ln/>
+        </p:spPr>
+        <p:txBody>
+          <a:bodyPr wrap="square" lIns="0" tIns="0" rIns="0" bIns="0" rtlCol="0" anchor="ctr"/>
+          <a:lstStyle/>
+          <a:p>
+            <a:pPr indent="0" marL="0">
+              <a:buNone/>
+            </a:pPr>
+            <a:r>
+              <a:rPr lang="en-US" sz="1400" dirty="0">
                 <a:solidFill>
                   <a:srgbClr val="000000"/>
                 </a:solidFill>
@@ -14449,7 +14449,7 @@
               </a:rPr>
               <a:t>ескалація дорожча за FAQ — видно SELECT'ом</a:t>
             </a:r>
-            <a:endParaRPr lang="en-US" sz="1250" dirty="0"/>
+            <a:endParaRPr lang="en-US" sz="1400" dirty="0"/>
           </a:p>
         </p:txBody>
       </p:sp>
@@ -14461,7 +14461,7 @@
         </p:nvSpPr>
         <p:spPr>
           <a:xfrm>
-            <a:off x="6144768" y="2157984"/>
+            <a:off x="6144768" y="2706624"/>
             <a:ext cx="256032" cy="256032"/>
           </a:xfrm>
           <a:prstGeom prst="roundRect">
@@ -14488,7 +14488,7 @@
         </p:nvSpPr>
         <p:spPr>
           <a:xfrm rot="2700000">
-            <a:off x="6207587" y="2297430"/>
+            <a:off x="6207587" y="2846070"/>
             <a:ext cx="58156" cy="27432"/>
           </a:xfrm>
           <a:prstGeom prst="rect">
@@ -14508,7 +14508,7 @@
         </p:nvSpPr>
         <p:spPr>
           <a:xfrm rot="-3000000">
-            <a:off x="6235385" y="2271370"/>
+            <a:off x="6235385" y="2820010"/>
             <a:ext cx="121432" cy="27432"/>
           </a:xfrm>
           <a:prstGeom prst="rect">
@@ -14528,24 +14528,24 @@
         </p:nvSpPr>
         <p:spPr>
           <a:xfrm>
-            <a:off x="6528816" y="2103120"/>
-            <a:ext cx="4617720" cy="384048"/>
-          </a:xfrm>
-          <a:prstGeom prst="rect">
-            <a:avLst/>
-          </a:prstGeom>
-          <a:noFill/>
-          <a:ln/>
-        </p:spPr>
-        <p:txBody>
-          <a:bodyPr wrap="square" lIns="0" tIns="0" rIns="0" bIns="0" rtlCol="0" anchor="ctr"/>
-          <a:lstStyle/>
-          <a:p>
-            <a:pPr indent="0" marL="0">
-              <a:buNone/>
-            </a:pPr>
-            <a:r>
-              <a:rPr lang="en-US" sz="1250" dirty="0">
+            <a:off x="6528816" y="2505456"/>
+            <a:ext cx="4617720" cy="658368"/>
+          </a:xfrm>
+          <a:prstGeom prst="rect">
+            <a:avLst/>
+          </a:prstGeom>
+          <a:noFill/>
+          <a:ln/>
+        </p:spPr>
+        <p:txBody>
+          <a:bodyPr wrap="square" lIns="0" tIns="0" rIns="0" bIns="0" rtlCol="0" anchor="ctr"/>
+          <a:lstStyle/>
+          <a:p>
+            <a:pPr indent="0" marL="0">
+              <a:buNone/>
+            </a:pPr>
+            <a:r>
+              <a:rPr lang="en-US" sz="1400" dirty="0">
                 <a:solidFill>
                   <a:srgbClr val="000000"/>
                 </a:solidFill>
@@ -14555,7 +14555,7 @@
               </a:rPr>
               <a:t>GET /cost повертає today_usd і budget_usd</a:t>
             </a:r>
-            <a:endParaRPr lang="en-US" sz="1250" dirty="0"/>
+            <a:endParaRPr lang="en-US" sz="1400" dirty="0"/>
           </a:p>
         </p:txBody>
       </p:sp>
@@ -14567,7 +14567,7 @@
         </p:nvSpPr>
         <p:spPr>
           <a:xfrm>
-            <a:off x="6144768" y="2724912"/>
+            <a:off x="6144768" y="4169664"/>
             <a:ext cx="256032" cy="256032"/>
           </a:xfrm>
           <a:prstGeom prst="roundRect">
@@ -14594,7 +14594,7 @@
         </p:nvSpPr>
         <p:spPr>
           <a:xfrm rot="2700000">
-            <a:off x="6207587" y="2864358"/>
+            <a:off x="6207587" y="4309110"/>
             <a:ext cx="58156" cy="27432"/>
           </a:xfrm>
           <a:prstGeom prst="rect">
@@ -14614,7 +14614,7 @@
         </p:nvSpPr>
         <p:spPr>
           <a:xfrm rot="-3000000">
-            <a:off x="6235385" y="2838298"/>
+            <a:off x="6235385" y="4283050"/>
             <a:ext cx="121432" cy="27432"/>
           </a:xfrm>
           <a:prstGeom prst="rect">
@@ -14634,24 +14634,24 @@
         </p:nvSpPr>
         <p:spPr>
           <a:xfrm>
-            <a:off x="6528816" y="2670048"/>
-            <a:ext cx="4617720" cy="384048"/>
-          </a:xfrm>
-          <a:prstGeom prst="rect">
-            <a:avLst/>
-          </a:prstGeom>
-          <a:noFill/>
-          <a:ln/>
-        </p:spPr>
-        <p:txBody>
-          <a:bodyPr wrap="square" lIns="0" tIns="0" rIns="0" bIns="0" rtlCol="0" anchor="ctr"/>
-          <a:lstStyle/>
-          <a:p>
-            <a:pPr indent="0" marL="0">
-              <a:buNone/>
-            </a:pPr>
-            <a:r>
-              <a:rPr lang="en-US" sz="1250" dirty="0">
+            <a:off x="6528816" y="3968496"/>
+            <a:ext cx="4617720" cy="658368"/>
+          </a:xfrm>
+          <a:prstGeom prst="rect">
+            <a:avLst/>
+          </a:prstGeom>
+          <a:noFill/>
+          <a:ln/>
+        </p:spPr>
+        <p:txBody>
+          <a:bodyPr wrap="square" lIns="0" tIns="0" rIns="0" bIns="0" rtlCol="0" anchor="ctr"/>
+          <a:lstStyle/>
+          <a:p>
+            <a:pPr indent="0" marL="0">
+              <a:buNone/>
+            </a:pPr>
+            <a:r>
+              <a:rPr lang="en-US" sz="1400" dirty="0">
                 <a:solidFill>
                   <a:srgbClr val="000000"/>
                 </a:solidFill>
@@ -14661,7 +14661,7 @@
               </a:rPr>
               <a:t>поясню, чому звернення ≠ виклик</a:t>
             </a:r>
-            <a:endParaRPr lang="en-US" sz="1250" dirty="0"/>
+            <a:endParaRPr lang="en-US" sz="1400" dirty="0"/>
           </a:p>
         </p:txBody>
       </p:sp>
@@ -14673,7 +14673,7 @@
         </p:nvSpPr>
         <p:spPr>
           <a:xfrm>
-            <a:off x="566928" y="3886200"/>
+            <a:off x="566928" y="5669280"/>
             <a:ext cx="10972800" cy="320040"/>
           </a:xfrm>
           <a:prstGeom prst="rect">
@@ -18562,11 +18562,11 @@
         <p:spPr>
           <a:xfrm>
             <a:off x="566928" y="1783080"/>
-            <a:ext cx="3553968" cy="1188720"/>
+            <a:ext cx="3553968" cy="1481328"/>
           </a:xfrm>
           <a:prstGeom prst="roundRect">
             <a:avLst>
-              <a:gd name="adj" fmla="val 7692"/>
+              <a:gd name="adj" fmla="val 6173"/>
             </a:avLst>
           </a:prstGeom>
           <a:solidFill>
@@ -18628,7 +18628,7 @@
         <p:spPr>
           <a:xfrm>
             <a:off x="749808" y="2203704"/>
-            <a:ext cx="3188208" cy="658368"/>
+            <a:ext cx="3188208" cy="950976"/>
           </a:xfrm>
           <a:prstGeom prst="rect">
             <a:avLst/>
@@ -18670,11 +18670,11 @@
         <p:spPr>
           <a:xfrm>
             <a:off x="4322064" y="1783080"/>
-            <a:ext cx="3553968" cy="1188720"/>
+            <a:ext cx="3553968" cy="1481328"/>
           </a:xfrm>
           <a:prstGeom prst="roundRect">
             <a:avLst>
-              <a:gd name="adj" fmla="val 7692"/>
+              <a:gd name="adj" fmla="val 6173"/>
             </a:avLst>
           </a:prstGeom>
           <a:solidFill>
@@ -18736,7 +18736,7 @@
         <p:spPr>
           <a:xfrm>
             <a:off x="4504944" y="2203704"/>
-            <a:ext cx="3188208" cy="658368"/>
+            <a:ext cx="3188208" cy="950976"/>
           </a:xfrm>
           <a:prstGeom prst="rect">
             <a:avLst/>
@@ -18778,11 +18778,11 @@
         <p:spPr>
           <a:xfrm>
             <a:off x="8077200" y="1783080"/>
-            <a:ext cx="3553968" cy="1188720"/>
+            <a:ext cx="3553968" cy="1481328"/>
           </a:xfrm>
           <a:prstGeom prst="roundRect">
             <a:avLst>
-              <a:gd name="adj" fmla="val 7692"/>
+              <a:gd name="adj" fmla="val 6173"/>
             </a:avLst>
           </a:prstGeom>
           <a:solidFill>
@@ -18844,7 +18844,7 @@
         <p:spPr>
           <a:xfrm>
             <a:off x="8260080" y="2203704"/>
-            <a:ext cx="3188208" cy="658368"/>
+            <a:ext cx="3188208" cy="950976"/>
           </a:xfrm>
           <a:prstGeom prst="rect">
             <a:avLst/>
@@ -18885,12 +18885,12 @@
         </p:nvSpPr>
         <p:spPr>
           <a:xfrm>
-            <a:off x="566928" y="3172968"/>
-            <a:ext cx="3553968" cy="1188720"/>
+            <a:off x="566928" y="3465576"/>
+            <a:ext cx="3553968" cy="1481328"/>
           </a:xfrm>
           <a:prstGeom prst="roundRect">
             <a:avLst>
-              <a:gd name="adj" fmla="val 7692"/>
+              <a:gd name="adj" fmla="val 6173"/>
             </a:avLst>
           </a:prstGeom>
           <a:solidFill>
@@ -18912,7 +18912,7 @@
         </p:nvSpPr>
         <p:spPr>
           <a:xfrm>
-            <a:off x="749808" y="3282696"/>
+            <a:off x="749808" y="3575304"/>
             <a:ext cx="3188208" cy="310896"/>
           </a:xfrm>
           <a:prstGeom prst="rect">
@@ -18951,8 +18951,8 @@
         </p:nvSpPr>
         <p:spPr>
           <a:xfrm>
-            <a:off x="749808" y="3593592"/>
-            <a:ext cx="3188208" cy="658368"/>
+            <a:off x="749808" y="3886200"/>
+            <a:ext cx="3188208" cy="950976"/>
           </a:xfrm>
           <a:prstGeom prst="rect">
             <a:avLst/>
@@ -18993,12 +18993,12 @@
         </p:nvSpPr>
         <p:spPr>
           <a:xfrm>
-            <a:off x="4322064" y="3172968"/>
-            <a:ext cx="3553968" cy="1188720"/>
+            <a:off x="4322064" y="3465576"/>
+            <a:ext cx="3553968" cy="1481328"/>
           </a:xfrm>
           <a:prstGeom prst="roundRect">
             <a:avLst>
-              <a:gd name="adj" fmla="val 7692"/>
+              <a:gd name="adj" fmla="val 6173"/>
             </a:avLst>
           </a:prstGeom>
           <a:solidFill>
@@ -19020,7 +19020,7 @@
         </p:nvSpPr>
         <p:spPr>
           <a:xfrm>
-            <a:off x="4504944" y="3282696"/>
+            <a:off x="4504944" y="3575304"/>
             <a:ext cx="3188208" cy="310896"/>
           </a:xfrm>
           <a:prstGeom prst="rect">
@@ -19059,8 +19059,8 @@
         </p:nvSpPr>
         <p:spPr>
           <a:xfrm>
-            <a:off x="4504944" y="3593592"/>
-            <a:ext cx="3188208" cy="658368"/>
+            <a:off x="4504944" y="3886200"/>
+            <a:ext cx="3188208" cy="950976"/>
           </a:xfrm>
           <a:prstGeom prst="rect">
             <a:avLst/>
@@ -19101,12 +19101,12 @@
         </p:nvSpPr>
         <p:spPr>
           <a:xfrm>
-            <a:off x="8077200" y="3172968"/>
-            <a:ext cx="3553968" cy="1188720"/>
+            <a:off x="8077200" y="3465576"/>
+            <a:ext cx="3553968" cy="1481328"/>
           </a:xfrm>
           <a:prstGeom prst="roundRect">
             <a:avLst>
-              <a:gd name="adj" fmla="val 7692"/>
+              <a:gd name="adj" fmla="val 6173"/>
             </a:avLst>
           </a:prstGeom>
           <a:solidFill>
@@ -19128,7 +19128,7 @@
         </p:nvSpPr>
         <p:spPr>
           <a:xfrm>
-            <a:off x="8260080" y="3282696"/>
+            <a:off x="8260080" y="3575304"/>
             <a:ext cx="3188208" cy="310896"/>
           </a:xfrm>
           <a:prstGeom prst="rect">
@@ -19167,8 +19167,8 @@
         </p:nvSpPr>
         <p:spPr>
           <a:xfrm>
-            <a:off x="8260080" y="3593592"/>
-            <a:ext cx="3188208" cy="658368"/>
+            <a:off x="8260080" y="3886200"/>
+            <a:ext cx="3188208" cy="950976"/>
           </a:xfrm>
           <a:prstGeom prst="rect">
             <a:avLst/>
@@ -19209,7 +19209,7 @@
         </p:nvSpPr>
         <p:spPr>
           <a:xfrm>
-            <a:off x="566928" y="4526280"/>
+            <a:off x="566928" y="5138928"/>
             <a:ext cx="11064240" cy="777240"/>
           </a:xfrm>
           <a:prstGeom prst="roundRect">
@@ -19236,7 +19236,7 @@
         </p:nvSpPr>
         <p:spPr>
           <a:xfrm>
-            <a:off x="786384" y="4672584"/>
+            <a:off x="786384" y="5285232"/>
             <a:ext cx="10625328" cy="484632"/>
           </a:xfrm>
           <a:prstGeom prst="rect">

--- a/docs/decks/L04.pptx
+++ b/docs/decks/L04.pptx
@@ -31,9 +31,10 @@
     <p:sldId id="279" r:id="rId25"/>
     <p:sldId id="280" r:id="rId26"/>
     <p:sldId id="281" r:id="rId27"/>
+    <p:sldId id="282" r:id="rId28"/>
   </p:sldIdLst>
   <p:notesMasterIdLst>
-    <p:notesMasterId r:id="rId28"/>
+    <p:notesMasterId r:id="rId29"/>
   </p:notesMasterIdLst>
   <p:sldSz cx="12192000" cy="6858000"/>
   <p:notesSz cx="6858000" cy="12192000"/>
@@ -2135,6 +2136,94 @@
             <a:fld id="{F7021451-1387-4CA6-816F-3879F97B5CBC}" type="slidenum">
               <a:rPr lang="en-US"/>
               <a:t>26</a:t>
+            </a:fld>
+            <a:endParaRPr lang="en-US"/>
+          </a:p>
+        </p:txBody>
+      </p:sp>
+    </p:spTree>
+    <p:extLst>
+      <p:ext uri="{BB962C8B-B14F-4D97-AF65-F5344CB8AC3E}">
+        <p14:creationId xmlns:p14="http://schemas.microsoft.com/office/powerpoint/2010/main" val="1024086991"/>
+      </p:ext>
+    </p:extLst>
+  </p:cSld>
+  <p:clrMapOvr>
+    <a:masterClrMapping/>
+  </p:clrMapOvr>
+</p:notes>
+</file>
+
+<file path=ppt/notesSlides/notesSlide27.xml><?xml version="1.0" encoding="utf-8"?>
+<p:notes xmlns:a="http://schemas.openxmlformats.org/drawingml/2006/main" xmlns:r="http://schemas.openxmlformats.org/officeDocument/2006/relationships" xmlns:p="http://schemas.openxmlformats.org/presentationml/2006/main">
+  <p:cSld>
+    <p:spTree>
+      <p:nvGrpSpPr>
+        <p:cNvPr id="1" name=""/>
+        <p:cNvGrpSpPr/>
+        <p:nvPr/>
+      </p:nvGrpSpPr>
+      <p:grpSpPr>
+        <a:xfrm>
+          <a:off x="0" y="0"/>
+          <a:ext cx="0" cy="0"/>
+          <a:chOff x="0" y="0"/>
+          <a:chExt cx="0" cy="0"/>
+        </a:xfrm>
+      </p:grpSpPr>
+      <p:sp>
+        <p:nvSpPr>
+          <p:cNvPr id="2" name="Slide Image Placeholder 1"/>
+          <p:cNvSpPr>
+            <a:spLocks noGrp="1" noRot="1" noChangeAspect="1"/>
+          </p:cNvSpPr>
+          <p:nvPr>
+            <p:ph type="sldImg"/>
+          </p:nvPr>
+        </p:nvSpPr>
+        <p:spPr/>
+      </p:sp>
+      <p:sp>
+        <p:nvSpPr>
+          <p:cNvPr id="3" name="Notes Placeholder 2"/>
+          <p:cNvSpPr>
+            <a:spLocks noGrp="1"/>
+          </p:cNvSpPr>
+          <p:nvPr>
+            <p:ph type="body" idx="1"/>
+          </p:nvPr>
+        </p:nvSpPr>
+        <p:spPr/>
+        <p:txBody>
+          <a:bodyPr/>
+          <a:lstStyle/>
+          <a:p>
+            <a:r>
+              <a:rPr lang="en-US" dirty="0"/>
+              <a:t/>
+            </a:r>
+            <a:endParaRPr lang="en-US" dirty="0"/>
+          </a:p>
+        </p:txBody>
+      </p:sp>
+      <p:sp>
+        <p:nvSpPr>
+          <p:cNvPr id="4" name="Slide Number Placeholder 3"/>
+          <p:cNvSpPr>
+            <a:spLocks noGrp="1"/>
+          </p:cNvSpPr>
+          <p:nvPr>
+            <p:ph type="sldNum" sz="quarter" idx="10"/>
+          </p:nvPr>
+        </p:nvSpPr>
+        <p:spPr/>
+        <p:txBody>
+          <a:bodyPr/>
+          <a:lstStyle/>
+          <a:p>
+            <a:fld id="{F7021451-1387-4CA6-816F-3879F97B5CBC}" type="slidenum">
+              <a:rPr lang="en-US"/>
+              <a:t>27</a:t>
             </a:fld>
             <a:endParaRPr lang="en-US"/>
           </a:p>
@@ -16719,6 +16808,109 @@
               <a:t>Ми навчилися платити менше за той самий трафік. Наступний крок радикальніший: найдешевший запит — той, якого не було. Тиждень 3 починаємо з кешу: коли можна не ходити в модель узагалі і чому кеш без метрики — це віра, а не інженерія.</a:t>
             </a:r>
             <a:endParaRPr lang="en-US" sz="1250" dirty="0"/>
+          </a:p>
+        </p:txBody>
+      </p:sp>
+    </p:spTree>
+  </p:cSld>
+  <p:clrMapOvr>
+    <a:masterClrMapping/>
+  </p:clrMapOvr>
+</p:sld>
+</file>
+
+<file path=ppt/slides/slide27.xml><?xml version="1.0" encoding="utf-8"?>
+<p:sld xmlns:a="http://schemas.openxmlformats.org/drawingml/2006/main" xmlns:r="http://schemas.openxmlformats.org/officeDocument/2006/relationships" xmlns:p="http://schemas.openxmlformats.org/presentationml/2006/main">
+  <p:cSld name="Slide 27">
+    <p:spTree>
+      <p:nvGrpSpPr>
+        <p:cNvPr id="1" name=""/>
+        <p:cNvGrpSpPr/>
+        <p:nvPr/>
+      </p:nvGrpSpPr>
+      <p:grpSpPr>
+        <a:xfrm>
+          <a:off x="0" y="0"/>
+          <a:ext cx="0" cy="0"/>
+          <a:chOff x="0" y="0"/>
+          <a:chExt cx="0" cy="0"/>
+        </a:xfrm>
+      </p:grpSpPr>
+      <p:sp>
+        <p:nvSpPr>
+          <p:cNvPr id="2" name="Text 0"/>
+          <p:cNvSpPr/>
+          <p:nvPr/>
+        </p:nvSpPr>
+        <p:spPr>
+          <a:xfrm>
+            <a:off x="566928" y="384048"/>
+            <a:ext cx="5486400" cy="274320"/>
+          </a:xfrm>
+          <a:prstGeom prst="rect">
+            <a:avLst/>
+          </a:prstGeom>
+          <a:noFill/>
+          <a:ln/>
+        </p:spPr>
+        <p:txBody>
+          <a:bodyPr wrap="square" lIns="0" tIns="0" rIns="0" bIns="0" rtlCol="0" anchor="ctr"/>
+          <a:lstStyle/>
+          <a:p>
+            <a:pPr indent="0" marL="0">
+              <a:buNone/>
+            </a:pPr>
+            <a:r>
+              <a:rPr lang="en-US" sz="1200" b="1" spc="400" kern="0" dirty="0">
+                <a:solidFill>
+                  <a:srgbClr val="FFFFFF"/>
+                </a:solidFill>
+                <a:latin typeface="Montserrat" pitchFamily="34" charset="0"/>
+                <a:ea typeface="Montserrat" pitchFamily="34" charset="-122"/>
+                <a:cs typeface="Montserrat" pitchFamily="34" charset="-120"/>
+              </a:rPr>
+              <a:t>NEOVERSITY</a:t>
+            </a:r>
+            <a:endParaRPr lang="en-US" sz="1200" dirty="0"/>
+          </a:p>
+        </p:txBody>
+      </p:sp>
+      <p:sp>
+        <p:nvSpPr>
+          <p:cNvPr id="3" name="Text 1"/>
+          <p:cNvSpPr/>
+          <p:nvPr/>
+        </p:nvSpPr>
+        <p:spPr>
+          <a:xfrm>
+            <a:off x="566928" y="2834640"/>
+            <a:ext cx="11064240" cy="1463040"/>
+          </a:xfrm>
+          <a:prstGeom prst="rect">
+            <a:avLst/>
+          </a:prstGeom>
+          <a:noFill/>
+          <a:ln/>
+        </p:spPr>
+        <p:txBody>
+          <a:bodyPr wrap="square" lIns="0" tIns="0" rIns="0" bIns="0" rtlCol="0" anchor="ctr"/>
+          <a:lstStyle/>
+          <a:p>
+            <a:pPr indent="0" marL="0">
+              <a:buNone/>
+            </a:pPr>
+            <a:r>
+              <a:rPr lang="en-US" sz="7300" dirty="0">
+                <a:solidFill>
+                  <a:srgbClr val="FFFFFF"/>
+                </a:solidFill>
+                <a:latin typeface="Unbounded" pitchFamily="34" charset="0"/>
+                <a:ea typeface="Unbounded" pitchFamily="34" charset="-122"/>
+                <a:cs typeface="Unbounded" pitchFamily="34" charset="-120"/>
+              </a:rPr>
+              <a:t>ДЯКУЮ</a:t>
+            </a:r>
+            <a:endParaRPr lang="en-US" sz="7300" dirty="0"/>
           </a:p>
         </p:txBody>
       </p:sp>

--- a/docs/decks/L04.pptx
+++ b/docs/decks/L04.pptx
@@ -4,6 +4,9 @@
   <p:sldMasterIdLst>
     <p:sldMasterId id="2147483648" r:id="rId1"/>
   </p:sldMasterIdLst>
+  <p:notesMasterIdLst>
+    <p:notesMasterId r:id="rId29"/>
+  </p:notesMasterIdLst>
   <p:sldIdLst>
     <p:sldId id="256" r:id="rId2"/>
     <p:sldId id="257" r:id="rId3"/>
@@ -33,9 +36,6 @@
     <p:sldId id="281" r:id="rId27"/>
     <p:sldId id="282" r:id="rId28"/>
   </p:sldIdLst>
-  <p:notesMasterIdLst>
-    <p:notesMasterId r:id="rId29"/>
-  </p:notesMasterIdLst>
   <p:sldSz cx="12192000" cy="6858000"/>
   <p:notesSz cx="6858000" cy="12192000"/>
   <p:defaultTextStyle>
@@ -130,6 +130,11 @@
       </a:defRPr>
     </a:lvl9pPr>
   </p:defaultTextStyle>
+  <p:extLst>
+    <p:ext uri="{EFAFB233-063F-42B5-8137-9DF3F51BA10A}">
+      <p15:sldGuideLst xmlns:p15="http://schemas.microsoft.com/office/powerpoint/2012/main"/>
+    </p:ext>
+  </p:extLst>
 </p:presentation>
 </file>
 
@@ -155,234 +160,10 @@
           <a:chExt cx="0" cy="0"/>
         </a:xfrm>
       </p:grpSpPr>
-      <p:sp>
-        <p:nvSpPr>
-          <p:cNvPr id="2" name="Header Placeholder 1"/>
-          <p:cNvSpPr>
-            <a:spLocks noGrp="1"/>
-          </p:cNvSpPr>
-          <p:nvPr>
-            <p:ph type="hdr" sz="quarter"/>
-          </p:nvPr>
-        </p:nvSpPr>
-        <p:spPr>
-          <a:xfrm>
-            <a:off x="0" y="0"/>
-            <a:ext cx="2971800" cy="458788"/>
-          </a:xfrm>
-          <a:prstGeom prst="rect">
-            <a:avLst/>
-          </a:prstGeom>
-        </p:spPr>
-        <p:txBody>
-          <a:bodyPr vert="horz" lIns="91440" tIns="45720" rIns="91440" bIns="45720" rtlCol="0"/>
-          <a:lstStyle>
-            <a:lvl1pPr algn="l">
-              <a:defRPr sz="1200"/>
-            </a:lvl1pPr>
-          </a:lstStyle>
-          <a:p>
-            <a:endParaRPr lang="en-US"/>
-          </a:p>
-        </p:txBody>
-      </p:sp>
-      <p:sp>
-        <p:nvSpPr>
-          <p:cNvPr id="3" name="Date Placeholder 2"/>
-          <p:cNvSpPr>
-            <a:spLocks noGrp="1"/>
-          </p:cNvSpPr>
-          <p:nvPr>
-            <p:ph type="dt" idx="1"/>
-          </p:nvPr>
-        </p:nvSpPr>
-        <p:spPr>
-          <a:xfrm>
-            <a:off x="3884613" y="0"/>
-            <a:ext cx="2971800" cy="458788"/>
-          </a:xfrm>
-          <a:prstGeom prst="rect">
-            <a:avLst/>
-          </a:prstGeom>
-        </p:spPr>
-        <p:txBody>
-          <a:bodyPr vert="horz" lIns="91440" tIns="45720" rIns="91440" bIns="45720" rtlCol="0"/>
-          <a:lstStyle>
-            <a:lvl1pPr algn="r">
-              <a:defRPr sz="1200"/>
-            </a:lvl1pPr>
-          </a:lstStyle>
-          <a:p>
-            <a:fld id="{5282F153-3F37-0F45-9E97-73ACFA13230C}" type="datetimeFigureOut">
-              <a:rPr lang="en-US"/>
-              <a:t>7/23/19</a:t>
-            </a:fld>
-            <a:endParaRPr lang="en-US"/>
-          </a:p>
-        </p:txBody>
-      </p:sp>
-      <p:sp>
-        <p:nvSpPr>
-          <p:cNvPr id="4" name="Slide Image Placeholder 3"/>
-          <p:cNvSpPr>
-            <a:spLocks noGrp="1" noRot="1" noChangeAspect="1"/>
-          </p:cNvSpPr>
-          <p:nvPr>
-            <p:ph type="sldImg" idx="2"/>
-          </p:nvPr>
-        </p:nvSpPr>
-        <p:spPr>
-          <a:xfrm>
-            <a:off x="685800" y="1143000"/>
-            <a:ext cx="5486400" cy="3086100"/>
-          </a:xfrm>
-          <a:prstGeom prst="rect">
-            <a:avLst/>
-          </a:prstGeom>
-          <a:noFill/>
-          <a:ln w="12700">
-            <a:solidFill>
-              <a:prstClr val="black"/>
-            </a:solidFill>
-          </a:ln>
-        </p:spPr>
-        <p:txBody>
-          <a:bodyPr vert="horz" lIns="91440" tIns="45720" rIns="91440" bIns="45720" rtlCol="0" anchor="ctr"/>
-          <a:lstStyle/>
-          <a:p>
-            <a:endParaRPr lang="en-US"/>
-          </a:p>
-        </p:txBody>
-      </p:sp>
-      <p:sp>
-        <p:nvSpPr>
-          <p:cNvPr id="5" name="Notes Placeholder 4"/>
-          <p:cNvSpPr>
-            <a:spLocks noGrp="1"/>
-          </p:cNvSpPr>
-          <p:nvPr>
-            <p:ph type="body" sz="quarter" idx="3"/>
-          </p:nvPr>
-        </p:nvSpPr>
-        <p:spPr>
-          <a:xfrm>
-            <a:off x="685800" y="4400550"/>
-            <a:ext cx="5486400" cy="3600450"/>
-          </a:xfrm>
-          <a:prstGeom prst="rect">
-            <a:avLst/>
-          </a:prstGeom>
-        </p:spPr>
-        <p:txBody>
-          <a:bodyPr vert="horz" lIns="91440" tIns="45720" rIns="91440" bIns="45720" rtlCol="0"/>
-          <a:lstStyle/>
-          <a:p>
-            <a:pPr lvl="0"/>
-            <a:r>
-              <a:rPr lang="en-US"/>
-              <a:t>Click to edit Master text styles</a:t>
-            </a:r>
-          </a:p>
-          <a:p>
-            <a:pPr lvl="1"/>
-            <a:r>
-              <a:rPr lang="en-US"/>
-              <a:t>Second level</a:t>
-            </a:r>
-          </a:p>
-          <a:p>
-            <a:pPr lvl="2"/>
-            <a:r>
-              <a:rPr lang="en-US"/>
-              <a:t>Third level</a:t>
-            </a:r>
-          </a:p>
-          <a:p>
-            <a:pPr lvl="3"/>
-            <a:r>
-              <a:rPr lang="en-US"/>
-              <a:t>Fourth level</a:t>
-            </a:r>
-          </a:p>
-          <a:p>
-            <a:pPr lvl="4"/>
-            <a:r>
-              <a:rPr lang="en-US"/>
-              <a:t>Fifth level</a:t>
-            </a:r>
-          </a:p>
-        </p:txBody>
-      </p:sp>
-      <p:sp>
-        <p:nvSpPr>
-          <p:cNvPr id="6" name="Footer Placeholder 5"/>
-          <p:cNvSpPr>
-            <a:spLocks noGrp="1"/>
-          </p:cNvSpPr>
-          <p:nvPr>
-            <p:ph type="ftr" sz="quarter" idx="4"/>
-          </p:nvPr>
-        </p:nvSpPr>
-        <p:spPr>
-          <a:xfrm>
-            <a:off x="0" y="8685213"/>
-            <a:ext cx="2971800" cy="458787"/>
-          </a:xfrm>
-          <a:prstGeom prst="rect">
-            <a:avLst/>
-          </a:prstGeom>
-        </p:spPr>
-        <p:txBody>
-          <a:bodyPr vert="horz" lIns="91440" tIns="45720" rIns="91440" bIns="45720" rtlCol="0" anchor="b"/>
-          <a:lstStyle>
-            <a:lvl1pPr algn="l">
-              <a:defRPr sz="1200"/>
-            </a:lvl1pPr>
-          </a:lstStyle>
-          <a:p>
-            <a:endParaRPr lang="en-US"/>
-          </a:p>
-        </p:txBody>
-      </p:sp>
-      <p:sp>
-        <p:nvSpPr>
-          <p:cNvPr id="7" name="Slide Number Placeholder 6"/>
-          <p:cNvSpPr>
-            <a:spLocks noGrp="1"/>
-          </p:cNvSpPr>
-          <p:nvPr>
-            <p:ph type="sldNum" sz="quarter" idx="5"/>
-          </p:nvPr>
-        </p:nvSpPr>
-        <p:spPr>
-          <a:xfrm>
-            <a:off x="3884613" y="8685213"/>
-            <a:ext cx="2971800" cy="458787"/>
-          </a:xfrm>
-          <a:prstGeom prst="rect">
-            <a:avLst/>
-          </a:prstGeom>
-        </p:spPr>
-        <p:txBody>
-          <a:bodyPr vert="horz" lIns="91440" tIns="45720" rIns="91440" bIns="45720" rtlCol="0" anchor="b"/>
-          <a:lstStyle>
-            <a:lvl1pPr algn="r">
-              <a:defRPr sz="1200"/>
-            </a:lvl1pPr>
-          </a:lstStyle>
-          <a:p>
-            <a:fld id="{CE5E9CC1-C706-0F49-92D6-E571CC5EEA8F}" type="slidenum">
-              <a:rPr lang="en-US"/>
-              <a:t>‹#›</a:t>
-            </a:fld>
-            <a:endParaRPr lang="en-US"/>
-          </a:p>
-        </p:txBody>
-      </p:sp>
     </p:spTree>
     <p:extLst>
       <p:ext uri="{BB962C8B-B14F-4D97-AF65-F5344CB8AC3E}">
-        <p14:creationId xmlns:p14="http://schemas.microsoft.com/office/powerpoint/2010/main" val="1024086991"/>
+        <p14:creationId xmlns:p14="http://schemas.microsoft.com/office/powerpoint/2010/main" val="4030058338"/>
       </p:ext>
     </p:extLst>
   </p:cSld>
@@ -526,10 +307,6 @@
           <a:bodyPr/>
           <a:lstStyle/>
           <a:p>
-            <a:r>
-              <a:rPr lang="en-US" dirty="0"/>
-              <a:t/>
-            </a:r>
             <a:endParaRPr lang="en-US" dirty="0"/>
           </a:p>
         </p:txBody>
@@ -614,10 +391,6 @@
           <a:bodyPr/>
           <a:lstStyle/>
           <a:p>
-            <a:r>
-              <a:rPr lang="en-US" dirty="0"/>
-              <a:t/>
-            </a:r>
             <a:endParaRPr lang="en-US" dirty="0"/>
           </a:p>
         </p:txBody>
@@ -702,10 +475,6 @@
           <a:bodyPr/>
           <a:lstStyle/>
           <a:p>
-            <a:r>
-              <a:rPr lang="en-US" dirty="0"/>
-              <a:t/>
-            </a:r>
             <a:endParaRPr lang="en-US" dirty="0"/>
           </a:p>
         </p:txBody>
@@ -790,10 +559,6 @@
           <a:bodyPr/>
           <a:lstStyle/>
           <a:p>
-            <a:r>
-              <a:rPr lang="en-US" dirty="0"/>
-              <a:t/>
-            </a:r>
             <a:endParaRPr lang="en-US" dirty="0"/>
           </a:p>
         </p:txBody>
@@ -878,10 +643,6 @@
           <a:bodyPr/>
           <a:lstStyle/>
           <a:p>
-            <a:r>
-              <a:rPr lang="en-US" dirty="0"/>
-              <a:t/>
-            </a:r>
             <a:endParaRPr lang="en-US" dirty="0"/>
           </a:p>
         </p:txBody>
@@ -966,10 +727,6 @@
           <a:bodyPr/>
           <a:lstStyle/>
           <a:p>
-            <a:r>
-              <a:rPr lang="en-US" dirty="0"/>
-              <a:t/>
-            </a:r>
             <a:endParaRPr lang="en-US" dirty="0"/>
           </a:p>
         </p:txBody>
@@ -1054,10 +811,6 @@
           <a:bodyPr/>
           <a:lstStyle/>
           <a:p>
-            <a:r>
-              <a:rPr lang="en-US" dirty="0"/>
-              <a:t/>
-            </a:r>
             <a:endParaRPr lang="en-US" dirty="0"/>
           </a:p>
         </p:txBody>
@@ -1142,10 +895,6 @@
           <a:bodyPr/>
           <a:lstStyle/>
           <a:p>
-            <a:r>
-              <a:rPr lang="en-US" dirty="0"/>
-              <a:t/>
-            </a:r>
             <a:endParaRPr lang="en-US" dirty="0"/>
           </a:p>
         </p:txBody>
@@ -1230,10 +979,6 @@
           <a:bodyPr/>
           <a:lstStyle/>
           <a:p>
-            <a:r>
-              <a:rPr lang="en-US" dirty="0"/>
-              <a:t/>
-            </a:r>
             <a:endParaRPr lang="en-US" dirty="0"/>
           </a:p>
         </p:txBody>
@@ -1318,10 +1063,6 @@
           <a:bodyPr/>
           <a:lstStyle/>
           <a:p>
-            <a:r>
-              <a:rPr lang="en-US" dirty="0"/>
-              <a:t/>
-            </a:r>
             <a:endParaRPr lang="en-US" dirty="0"/>
           </a:p>
         </p:txBody>
@@ -1406,10 +1147,6 @@
           <a:bodyPr/>
           <a:lstStyle/>
           <a:p>
-            <a:r>
-              <a:rPr lang="en-US" dirty="0"/>
-              <a:t/>
-            </a:r>
             <a:endParaRPr lang="en-US" dirty="0"/>
           </a:p>
         </p:txBody>
@@ -1494,10 +1231,6 @@
           <a:bodyPr/>
           <a:lstStyle/>
           <a:p>
-            <a:r>
-              <a:rPr lang="en-US" dirty="0"/>
-              <a:t/>
-            </a:r>
             <a:endParaRPr lang="en-US" dirty="0"/>
           </a:p>
         </p:txBody>
@@ -1582,10 +1315,6 @@
           <a:bodyPr/>
           <a:lstStyle/>
           <a:p>
-            <a:r>
-              <a:rPr lang="en-US" dirty="0"/>
-              <a:t/>
-            </a:r>
             <a:endParaRPr lang="en-US" dirty="0"/>
           </a:p>
         </p:txBody>
@@ -1670,10 +1399,6 @@
           <a:bodyPr/>
           <a:lstStyle/>
           <a:p>
-            <a:r>
-              <a:rPr lang="en-US" dirty="0"/>
-              <a:t/>
-            </a:r>
             <a:endParaRPr lang="en-US" dirty="0"/>
           </a:p>
         </p:txBody>
@@ -1758,10 +1483,6 @@
           <a:bodyPr/>
           <a:lstStyle/>
           <a:p>
-            <a:r>
-              <a:rPr lang="en-US" dirty="0"/>
-              <a:t/>
-            </a:r>
             <a:endParaRPr lang="en-US" dirty="0"/>
           </a:p>
         </p:txBody>
@@ -1846,10 +1567,6 @@
           <a:bodyPr/>
           <a:lstStyle/>
           <a:p>
-            <a:r>
-              <a:rPr lang="en-US" dirty="0"/>
-              <a:t/>
-            </a:r>
             <a:endParaRPr lang="en-US" dirty="0"/>
           </a:p>
         </p:txBody>
@@ -1934,10 +1651,6 @@
           <a:bodyPr/>
           <a:lstStyle/>
           <a:p>
-            <a:r>
-              <a:rPr lang="en-US" dirty="0"/>
-              <a:t/>
-            </a:r>
             <a:endParaRPr lang="en-US" dirty="0"/>
           </a:p>
         </p:txBody>
@@ -2022,10 +1735,6 @@
           <a:bodyPr/>
           <a:lstStyle/>
           <a:p>
-            <a:r>
-              <a:rPr lang="en-US" dirty="0"/>
-              <a:t/>
-            </a:r>
             <a:endParaRPr lang="en-US" dirty="0"/>
           </a:p>
         </p:txBody>
@@ -2110,10 +1819,6 @@
           <a:bodyPr/>
           <a:lstStyle/>
           <a:p>
-            <a:r>
-              <a:rPr lang="en-US" dirty="0"/>
-              <a:t/>
-            </a:r>
             <a:endParaRPr lang="en-US" dirty="0"/>
           </a:p>
         </p:txBody>
@@ -2198,10 +1903,6 @@
           <a:bodyPr/>
           <a:lstStyle/>
           <a:p>
-            <a:r>
-              <a:rPr lang="en-US" dirty="0"/>
-              <a:t/>
-            </a:r>
             <a:endParaRPr lang="en-US" dirty="0"/>
           </a:p>
         </p:txBody>
@@ -2286,10 +1987,6 @@
           <a:bodyPr/>
           <a:lstStyle/>
           <a:p>
-            <a:r>
-              <a:rPr lang="en-US" dirty="0"/>
-              <a:t/>
-            </a:r>
             <a:endParaRPr lang="en-US" dirty="0"/>
           </a:p>
         </p:txBody>
@@ -2374,10 +2071,6 @@
           <a:bodyPr/>
           <a:lstStyle/>
           <a:p>
-            <a:r>
-              <a:rPr lang="en-US" dirty="0"/>
-              <a:t/>
-            </a:r>
             <a:endParaRPr lang="en-US" dirty="0"/>
           </a:p>
         </p:txBody>
@@ -2462,10 +2155,6 @@
           <a:bodyPr/>
           <a:lstStyle/>
           <a:p>
-            <a:r>
-              <a:rPr lang="en-US" dirty="0"/>
-              <a:t/>
-            </a:r>
             <a:endParaRPr lang="en-US" dirty="0"/>
           </a:p>
         </p:txBody>
@@ -2550,10 +2239,6 @@
           <a:bodyPr/>
           <a:lstStyle/>
           <a:p>
-            <a:r>
-              <a:rPr lang="en-US" dirty="0"/>
-              <a:t/>
-            </a:r>
             <a:endParaRPr lang="en-US" dirty="0"/>
           </a:p>
         </p:txBody>
@@ -2638,10 +2323,6 @@
           <a:bodyPr/>
           <a:lstStyle/>
           <a:p>
-            <a:r>
-              <a:rPr lang="en-US" dirty="0"/>
-              <a:t/>
-            </a:r>
             <a:endParaRPr lang="en-US" dirty="0"/>
           </a:p>
         </p:txBody>
@@ -2726,10 +2407,6 @@
           <a:bodyPr/>
           <a:lstStyle/>
           <a:p>
-            <a:r>
-              <a:rPr lang="en-US" dirty="0"/>
-              <a:t/>
-            </a:r>
             <a:endParaRPr lang="en-US" dirty="0"/>
           </a:p>
         </p:txBody>
@@ -2814,10 +2491,6 @@
           <a:bodyPr/>
           <a:lstStyle/>
           <a:p>
-            <a:r>
-              <a:rPr lang="en-US" dirty="0"/>
-              <a:t/>
-            </a:r>
             <a:endParaRPr lang="en-US" dirty="0"/>
           </a:p>
         </p:txBody>
@@ -2900,7 +2573,7 @@
           </a:prstGeom>
           <a:extLst>
             <a:ext uri="{C572A759-6A51-4108-AA02-DFA0A04FC94B}">
-              <ma14:wrappingTextBoxFlag xmlns:ma14="http://schemas.microsoft.com/office/mac/drawingml/2011/main" val="0"/>
+              <ma14:wrappingTextBoxFlag xmlns="" xmlns:ma14="http://schemas.microsoft.com/office/mac/drawingml/2011/main" val="0"/>
             </a:ext>
           </a:extLst>
         </p:spPr>
@@ -2921,8 +2594,8 @@
           <a:p>
             <a:pPr algn="l"/>
             <a:fld id="{F7021451-1387-4CA6-816F-3879F97B5CBC}" type="slidenum">
-              <a:rPr b="0" lang="en-US"/>
-              <a:t>1000</a:t>
+              <a:rPr lang="en-US" b="0"/>
+              <a:t>‹#›</a:t>
             </a:fld>
             <a:endParaRPr lang="en-US"/>
           </a:p>
@@ -2944,6 +2617,7 @@
         <a:solidFill>
           <a:srgbClr val="000000"/>
         </a:solidFill>
+        <a:effectLst/>
       </p:bgPr>
     </p:bg>
     <p:spTree>
@@ -2962,14 +2636,14 @@
       </p:grpSpPr>
       <p:pic>
         <p:nvPicPr>
-          <p:cNvPr id="2" name="Image 0" descr="preencoded.png">    </p:cNvPr>
+          <p:cNvPr id="2" name="Image 0" descr="preencoded.png"/>
           <p:cNvPicPr>
             <a:picLocks noChangeAspect="1"/>
           </p:cNvPicPr>
           <p:nvPr/>
         </p:nvPicPr>
         <p:blipFill>
-          <a:blip r:embed="rId1"/>
+          <a:blip r:embed="rId2"/>
           <a:stretch>
             <a:fillRect/>
           </a:stretch>
@@ -3000,6 +2674,7 @@
         <a:solidFill>
           <a:srgbClr val="000000"/>
         </a:solidFill>
+        <a:effectLst/>
       </p:bgPr>
     </p:bg>
     <p:spTree>
@@ -3018,14 +2693,14 @@
       </p:grpSpPr>
       <p:pic>
         <p:nvPicPr>
-          <p:cNvPr id="2" name="Image 0" descr="preencoded.png">    </p:cNvPr>
+          <p:cNvPr id="2" name="Image 0" descr="preencoded.png"/>
           <p:cNvPicPr>
             <a:picLocks noChangeAspect="1"/>
           </p:cNvPicPr>
           <p:nvPr/>
         </p:nvPicPr>
         <p:blipFill>
-          <a:blip r:embed="rId1"/>
+          <a:blip r:embed="rId2"/>
           <a:stretch>
             <a:fillRect/>
           </a:stretch>
@@ -3056,6 +2731,7 @@
         <a:solidFill>
           <a:srgbClr val="000000"/>
         </a:solidFill>
+        <a:effectLst/>
       </p:bgPr>
     </p:bg>
     <p:spTree>
@@ -3074,14 +2750,14 @@
       </p:grpSpPr>
       <p:pic>
         <p:nvPicPr>
-          <p:cNvPr id="2" name="Image 0" descr="preencoded.png">    </p:cNvPr>
+          <p:cNvPr id="2" name="Image 0" descr="preencoded.png"/>
           <p:cNvPicPr>
             <a:picLocks noChangeAspect="1"/>
           </p:cNvPicPr>
           <p:nvPr/>
         </p:nvPicPr>
         <p:blipFill>
-          <a:blip r:embed="rId1"/>
+          <a:blip r:embed="rId2"/>
           <a:stretch>
             <a:fillRect/>
           </a:stretch>
@@ -3107,6 +2783,11 @@
 <file path=ppt/slideMasters/slideMaster1.xml><?xml version="1.0" encoding="utf-8"?>
 <p:sldMaster xmlns:a="http://schemas.openxmlformats.org/drawingml/2006/main" xmlns:r="http://schemas.openxmlformats.org/officeDocument/2006/relationships" xmlns:p="http://schemas.openxmlformats.org/presentationml/2006/main">
   <p:cSld>
+    <p:bg>
+      <p:bgRef idx="1001">
+        <a:schemeClr val="bg1"/>
+      </p:bgRef>
+    </p:bg>
     <p:spTree>
       <p:nvGrpSpPr>
         <p:cNvPr id="1" name=""/>
@@ -3141,7 +2822,7 @@
           </a:prstGeom>
           <a:extLst>
             <a:ext uri="{C572A759-6A51-4108-AA02-DFA0A04FC94B}">
-              <ma14:wrappingTextBoxFlag xmlns:ma14="http://schemas.microsoft.com/office/mac/drawingml/2011/main" val="0"/>
+              <ma14:wrappingTextBoxFlag xmlns="" xmlns:ma14="http://schemas.microsoft.com/office/mac/drawingml/2011/main" val="0"/>
             </a:ext>
           </a:extLst>
         </p:spPr>
@@ -3162,8 +2843,8 @@
           <a:p>
             <a:pPr algn="l"/>
             <a:fld id="{F7021451-1387-4CA6-816F-3879F97B5CBC}" type="slidenum">
-              <a:rPr b="0" lang="en-US"/>
-              <a:t>null</a:t>
+              <a:rPr lang="en-US" b="0"/>
+              <a:t>‹#›</a:t>
             </a:fld>
             <a:endParaRPr lang="en-US"/>
           </a:p>
@@ -3470,11 +3151,11 @@
           <a:bodyPr wrap="square" lIns="0" tIns="0" rIns="0" bIns="0" rtlCol="0" anchor="ctr"/>
           <a:lstStyle/>
           <a:p>
-            <a:pPr indent="0" marL="0">
-              <a:buNone/>
-            </a:pPr>
-            <a:r>
-              <a:rPr lang="en-US" sz="1200" b="1" spc="400" kern="0" dirty="0">
+            <a:pPr marL="0" indent="0">
+              <a:buNone/>
+            </a:pPr>
+            <a:r>
+              <a:rPr lang="en-US" sz="1200" b="1" kern="0" spc="400" dirty="0">
                 <a:solidFill>
                   <a:srgbClr val="FFFFFF"/>
                 </a:solidFill>
@@ -3509,11 +3190,11 @@
           <a:bodyPr wrap="square" lIns="0" tIns="0" rIns="0" bIns="0" rtlCol="0" anchor="ctr"/>
           <a:lstStyle/>
           <a:p>
-            <a:pPr indent="0" marL="0">
-              <a:buNone/>
-            </a:pPr>
-            <a:r>
-              <a:rPr lang="en-US" sz="1200" b="1" spc="300" kern="0" dirty="0">
+            <a:pPr marL="0" indent="0">
+              <a:buNone/>
+            </a:pPr>
+            <a:r>
+              <a:rPr lang="en-US" sz="1200" b="1" kern="0" spc="300" dirty="0">
                 <a:solidFill>
                   <a:srgbClr val="C4B3F5"/>
                 </a:solidFill>
@@ -3548,7 +3229,7 @@
           <a:bodyPr wrap="square" lIns="0" tIns="0" rIns="0" bIns="0" rtlCol="0" anchor="t"/>
           <a:lstStyle/>
           <a:p>
-            <a:pPr indent="0" marL="0">
+            <a:pPr marL="0" indent="0">
               <a:lnSpc>
                 <a:spcPct val="102000"/>
               </a:lnSpc>
@@ -3568,7 +3249,7 @@
             <a:endParaRPr lang="en-US" sz="3600" dirty="0"/>
           </a:p>
           <a:p>
-            <a:pPr indent="0" marL="0">
+            <a:pPr marL="0" indent="0">
               <a:lnSpc>
                 <a:spcPct val="102000"/>
               </a:lnSpc>
@@ -3610,7 +3291,7 @@
           <a:bodyPr wrap="square" lIns="0" tIns="0" rIns="0" bIns="0" rtlCol="0" anchor="ctr"/>
           <a:lstStyle/>
           <a:p>
-            <a:pPr indent="0" marL="0">
+            <a:pPr marL="0" indent="0">
               <a:lnSpc>
                 <a:spcPct val="120000"/>
               </a:lnSpc>
@@ -3678,7 +3359,7 @@
           <a:bodyPr wrap="square" lIns="0" tIns="0" rIns="0" bIns="0" rtlCol="0" anchor="ctr"/>
           <a:lstStyle/>
           <a:p>
-            <a:pPr algn="ctr" indent="0" marL="0">
+            <a:pPr marL="0" indent="0" algn="ctr">
               <a:buNone/>
             </a:pPr>
             <a:r>
@@ -3739,7 +3420,7 @@
           <a:bodyPr wrap="square" lIns="0" tIns="0" rIns="0" bIns="0" rtlCol="0" anchor="ctr"/>
           <a:lstStyle/>
           <a:p>
-            <a:pPr algn="ctr" indent="0" marL="0">
+            <a:pPr marL="0" indent="0" algn="ctr">
               <a:buNone/>
             </a:pPr>
             <a:r>
@@ -3804,7 +3485,7 @@
           <a:bodyPr wrap="square" lIns="0" tIns="0" rIns="0" bIns="0" rtlCol="0" anchor="ctr"/>
           <a:lstStyle/>
           <a:p>
-            <a:pPr algn="ctr" indent="0" marL="0">
+            <a:pPr marL="0" indent="0" algn="ctr">
               <a:buNone/>
             </a:pPr>
             <a:r>
@@ -3869,7 +3550,7 @@
           <a:bodyPr wrap="square" lIns="0" tIns="0" rIns="0" bIns="0" rtlCol="0" anchor="ctr"/>
           <a:lstStyle/>
           <a:p>
-            <a:pPr algn="ctr" indent="0" marL="0">
+            <a:pPr marL="0" indent="0" algn="ctr">
               <a:buNone/>
             </a:pPr>
             <a:r>
@@ -3934,7 +3615,7 @@
           <a:bodyPr wrap="square" lIns="0" tIns="0" rIns="0" bIns="0" rtlCol="0" anchor="ctr"/>
           <a:lstStyle/>
           <a:p>
-            <a:pPr algn="ctr" indent="0" marL="0">
+            <a:pPr marL="0" indent="0" algn="ctr">
               <a:buNone/>
             </a:pPr>
             <a:r>
@@ -3999,7 +3680,7 @@
           <a:bodyPr wrap="square" lIns="0" tIns="0" rIns="0" bIns="0" rtlCol="0" anchor="ctr"/>
           <a:lstStyle/>
           <a:p>
-            <a:pPr algn="ctr" indent="0" marL="0">
+            <a:pPr marL="0" indent="0" algn="ctr">
               <a:buNone/>
             </a:pPr>
             <a:r>
@@ -4085,7 +3766,7 @@
           <a:bodyPr wrap="square" lIns="0" tIns="0" rIns="0" bIns="0" rtlCol="0" anchor="ctr"/>
           <a:lstStyle/>
           <a:p>
-            <a:pPr algn="l" indent="0" marL="0">
+            <a:pPr marL="0" indent="0" algn="l">
               <a:buNone/>
             </a:pPr>
             <a:r>
@@ -4124,7 +3805,7 @@
           <a:bodyPr wrap="square" lIns="0" tIns="0" rIns="0" bIns="0" rtlCol="0" anchor="ctr"/>
           <a:lstStyle/>
           <a:p>
-            <a:pPr indent="0" marL="0">
+            <a:pPr marL="0" indent="0">
               <a:buNone/>
             </a:pPr>
             <a:r>
@@ -4190,11 +3871,11 @@
           <a:bodyPr wrap="square" lIns="0" tIns="0" rIns="0" bIns="0" rtlCol="0" anchor="ctr"/>
           <a:lstStyle/>
           <a:p>
-            <a:pPr algn="ctr" indent="0" marL="0">
-              <a:buNone/>
-            </a:pPr>
-            <a:r>
-              <a:rPr lang="en-US" sz="900" b="1" spc="100" kern="0" dirty="0">
+            <a:pPr marL="0" indent="0" algn="ctr">
+              <a:buNone/>
+            </a:pPr>
+            <a:r>
+              <a:rPr lang="en-US" sz="900" b="1" kern="0" spc="100" dirty="0">
                 <a:solidFill>
                   <a:srgbClr val="5A05F4"/>
                 </a:solidFill>
@@ -4210,14 +3891,14 @@
       </p:sp>
       <p:pic>
         <p:nvPicPr>
-          <p:cNvPr id="7" name="Image 0" descr="preencoded.png">    </p:cNvPr>
+          <p:cNvPr id="7" name="Image 0" descr="preencoded.png"/>
           <p:cNvPicPr>
             <a:picLocks noChangeAspect="1"/>
           </p:cNvPicPr>
           <p:nvPr/>
         </p:nvPicPr>
         <p:blipFill>
-          <a:blip r:embed="rId1"/>
+          <a:blip r:embed="rId3"/>
           <a:stretch>
             <a:fillRect/>
           </a:stretch>
@@ -4275,7 +3956,7 @@
           <a:bodyPr wrap="square" lIns="0" tIns="0" rIns="0" bIns="0" rtlCol="0" anchor="ctr"/>
           <a:lstStyle/>
           <a:p>
-            <a:pPr indent="0" marL="0">
+            <a:pPr marL="0" indent="0">
               <a:buNone/>
             </a:pPr>
             <a:r>
@@ -4314,7 +3995,7 @@
           <a:bodyPr wrap="square" lIns="0" tIns="0" rIns="0" bIns="0" rtlCol="0" anchor="t"/>
           <a:lstStyle/>
           <a:p>
-            <a:pPr indent="0" marL="0">
+            <a:pPr marL="0" indent="0">
               <a:lnSpc>
                 <a:spcPct val="108000"/>
               </a:lnSpc>
@@ -4378,7 +4059,7 @@
           <a:bodyPr wrap="square" lIns="0" tIns="0" rIns="0" bIns="0" rtlCol="0" anchor="ctr"/>
           <a:lstStyle/>
           <a:p>
-            <a:pPr indent="0" marL="0">
+            <a:pPr marL="0" indent="0">
               <a:buNone/>
             </a:pPr>
             <a:r>
@@ -4417,7 +4098,7 @@
           <a:bodyPr wrap="square" lIns="0" tIns="0" rIns="0" bIns="0" rtlCol="0" anchor="t"/>
           <a:lstStyle/>
           <a:p>
-            <a:pPr indent="0" marL="0">
+            <a:pPr marL="0" indent="0">
               <a:lnSpc>
                 <a:spcPct val="108000"/>
               </a:lnSpc>
@@ -4459,7 +4140,7 @@
           <a:bodyPr wrap="square" lIns="0" tIns="0" rIns="0" bIns="0" rtlCol="0" anchor="ctr"/>
           <a:lstStyle/>
           <a:p>
-            <a:pPr algn="l" indent="0" marL="0">
+            <a:pPr marL="0" indent="0" algn="l">
               <a:buNone/>
             </a:pPr>
             <a:r>
@@ -4520,7 +4201,7 @@
           <a:bodyPr wrap="square" lIns="0" tIns="0" rIns="0" bIns="0" rtlCol="0" anchor="ctr"/>
           <a:lstStyle/>
           <a:p>
-            <a:pPr indent="0" marL="0">
+            <a:pPr marL="0" indent="0">
               <a:buNone/>
             </a:pPr>
             <a:r>
@@ -4559,7 +4240,7 @@
           <a:bodyPr wrap="square" lIns="0" tIns="0" rIns="0" bIns="0" rtlCol="0" anchor="ctr"/>
           <a:lstStyle/>
           <a:p>
-            <a:pPr algn="l" indent="0" marL="0">
+            <a:pPr marL="0" indent="0" algn="l">
               <a:buNone/>
             </a:pPr>
             <a:r>
@@ -4620,7 +4301,7 @@
           <a:bodyPr wrap="square" lIns="0" tIns="0" rIns="0" bIns="0" rtlCol="0" anchor="ctr"/>
           <a:lstStyle/>
           <a:p>
-            <a:pPr indent="0" marL="0">
+            <a:pPr marL="0" indent="0">
               <a:buNone/>
             </a:pPr>
             <a:r>
@@ -4659,7 +4340,7 @@
           <a:bodyPr wrap="square" lIns="0" tIns="0" rIns="0" bIns="0" rtlCol="0" anchor="ctr"/>
           <a:lstStyle/>
           <a:p>
-            <a:pPr algn="l" indent="0" marL="0">
+            <a:pPr marL="0" indent="0" algn="l">
               <a:buNone/>
             </a:pPr>
             <a:r>
@@ -4720,7 +4401,7 @@
           <a:bodyPr wrap="square" lIns="0" tIns="0" rIns="0" bIns="0" rtlCol="0" anchor="ctr"/>
           <a:lstStyle/>
           <a:p>
-            <a:pPr indent="0" marL="0">
+            <a:pPr marL="0" indent="0">
               <a:buNone/>
             </a:pPr>
             <a:r>
@@ -4786,11 +4467,11 @@
           <a:bodyPr wrap="square" lIns="0" tIns="0" rIns="0" bIns="0" rtlCol="0" anchor="ctr"/>
           <a:lstStyle/>
           <a:p>
-            <a:pPr indent="0" marL="0">
-              <a:buNone/>
-            </a:pPr>
-            <a:r>
-              <a:rPr lang="en-US" sz="950" b="1" spc="150" kern="0" dirty="0">
+            <a:pPr marL="0" indent="0">
+              <a:buNone/>
+            </a:pPr>
+            <a:r>
+              <a:rPr lang="en-US" sz="950" b="1" kern="0" spc="150" dirty="0">
                 <a:solidFill>
                   <a:srgbClr val="1A4FBF"/>
                 </a:solidFill>
@@ -4825,7 +4506,7 @@
           <a:bodyPr wrap="square" lIns="0" tIns="0" rIns="0" bIns="0" rtlCol="0" anchor="ctr"/>
           <a:lstStyle/>
           <a:p>
-            <a:pPr indent="0" marL="0">
+            <a:pPr marL="0" indent="0">
               <a:lnSpc>
                 <a:spcPct val="112000"/>
               </a:lnSpc>
@@ -4848,7 +4529,7 @@
       </p:sp>
       <p:sp>
         <p:nvSpPr>
-          <p:cNvPr id="25" name="Slide Number Placeholder 0"/>
+          <p:cNvPr id="26" name="Slide Number Placeholder 0"/>
           <p:cNvSpPr>
             <a:spLocks noGrp="1"/>
           </p:cNvSpPr>
@@ -4866,7 +4547,7 @@
           </a:prstGeom>
           <a:extLst>
             <a:ext uri="{C572A759-6A51-4108-AA02-DFA0A04FC94B}">
-              <ma14:wrappingTextBoxFlag xmlns:ma14="http://schemas.microsoft.com/office/mac/drawingml/2011/main" val="0"/>
+              <ma14:wrappingTextBoxFlag xmlns="" xmlns:ma14="http://schemas.microsoft.com/office/mac/drawingml/2011/main" val="0"/>
             </a:ext>
           </a:extLst>
         </p:spPr>
@@ -4887,7 +4568,7 @@
           <a:p>
             <a:pPr algn="l"/>
             <a:fld id="{F7021451-1387-4CA6-816F-3879F97B5CBC}" type="slidenum">
-              <a:rPr b="0" lang="en-US"/>
+              <a:rPr lang="en-US" b="0"/>
               <a:t>10</a:t>
             </a:fld>
             <a:endParaRPr lang="en-US"/>
@@ -4962,7 +4643,7 @@
           <a:bodyPr wrap="square" lIns="0" tIns="0" rIns="0" bIns="0" rtlCol="0" anchor="ctr"/>
           <a:lstStyle/>
           <a:p>
-            <a:pPr algn="l" indent="0" marL="0">
+            <a:pPr marL="0" indent="0" algn="l">
               <a:buNone/>
             </a:pPr>
             <a:r>
@@ -5001,7 +4682,7 @@
           <a:bodyPr wrap="square" lIns="0" tIns="0" rIns="0" bIns="0" rtlCol="0" anchor="ctr"/>
           <a:lstStyle/>
           <a:p>
-            <a:pPr indent="0" marL="0">
+            <a:pPr marL="0" indent="0">
               <a:buNone/>
             </a:pPr>
             <a:r>
@@ -5067,11 +4748,11 @@
           <a:bodyPr wrap="square" lIns="0" tIns="0" rIns="0" bIns="0" rtlCol="0" anchor="ctr"/>
           <a:lstStyle/>
           <a:p>
-            <a:pPr algn="ctr" indent="0" marL="0">
-              <a:buNone/>
-            </a:pPr>
-            <a:r>
-              <a:rPr lang="en-US" sz="900" b="1" spc="100" kern="0" dirty="0">
+            <a:pPr marL="0" indent="0" algn="ctr">
+              <a:buNone/>
+            </a:pPr>
+            <a:r>
+              <a:rPr lang="en-US" sz="900" b="1" kern="0" spc="100" dirty="0">
                 <a:solidFill>
                   <a:srgbClr val="5A05F4"/>
                 </a:solidFill>
@@ -5087,14 +4768,14 @@
       </p:sp>
       <p:pic>
         <p:nvPicPr>
-          <p:cNvPr id="7" name="Image 0" descr="preencoded.png">    </p:cNvPr>
+          <p:cNvPr id="7" name="Image 0" descr="preencoded.png"/>
           <p:cNvPicPr>
             <a:picLocks noChangeAspect="1"/>
           </p:cNvPicPr>
           <p:nvPr/>
         </p:nvPicPr>
         <p:blipFill>
-          <a:blip r:embed="rId1"/>
+          <a:blip r:embed="rId3"/>
           <a:stretch>
             <a:fillRect/>
           </a:stretch>
@@ -5157,7 +4838,7 @@
           <a:bodyPr wrap="square" lIns="0" tIns="0" rIns="0" bIns="0" rtlCol="0" anchor="t"/>
           <a:lstStyle/>
           <a:p>
-            <a:pPr indent="0" marL="0">
+            <a:pPr marL="0" indent="0">
               <a:lnSpc>
                 <a:spcPct val="130000"/>
               </a:lnSpc>
@@ -5177,7 +4858,7 @@
             <a:endParaRPr lang="en-US" sz="1200" dirty="0"/>
           </a:p>
           <a:p>
-            <a:pPr indent="0" marL="0">
+            <a:pPr marL="0" indent="0">
               <a:lnSpc>
                 <a:spcPct val="130000"/>
               </a:lnSpc>
@@ -5197,7 +4878,7 @@
             <a:endParaRPr lang="en-US" sz="1200" dirty="0"/>
           </a:p>
           <a:p>
-            <a:pPr indent="0" marL="0">
+            <a:pPr marL="0" indent="0">
               <a:lnSpc>
                 <a:spcPct val="130000"/>
               </a:lnSpc>
@@ -5217,7 +4898,7 @@
             <a:endParaRPr lang="en-US" sz="1200" dirty="0"/>
           </a:p>
           <a:p>
-            <a:pPr indent="0" marL="0">
+            <a:pPr marL="0" indent="0">
               <a:lnSpc>
                 <a:spcPct val="130000"/>
               </a:lnSpc>
@@ -5237,7 +4918,7 @@
             <a:endParaRPr lang="en-US" sz="1200" dirty="0"/>
           </a:p>
           <a:p>
-            <a:pPr indent="0" marL="0">
+            <a:pPr marL="0" indent="0">
               <a:lnSpc>
                 <a:spcPct val="130000"/>
               </a:lnSpc>
@@ -5301,7 +4982,7 @@
           <a:bodyPr wrap="square" lIns="0" tIns="0" rIns="0" bIns="0" rtlCol="0" anchor="ctr"/>
           <a:lstStyle/>
           <a:p>
-            <a:pPr indent="0" marL="0">
+            <a:pPr marL="0" indent="0">
               <a:buNone/>
             </a:pPr>
             <a:r>
@@ -5340,7 +5021,7 @@
           <a:bodyPr wrap="square" lIns="0" tIns="0" rIns="0" bIns="0" rtlCol="0" anchor="t"/>
           <a:lstStyle/>
           <a:p>
-            <a:pPr indent="0" marL="0">
+            <a:pPr marL="0" indent="0">
               <a:lnSpc>
                 <a:spcPct val="108000"/>
               </a:lnSpc>
@@ -5404,7 +5085,7 @@
           <a:bodyPr wrap="square" lIns="0" tIns="0" rIns="0" bIns="0" rtlCol="0" anchor="ctr"/>
           <a:lstStyle/>
           <a:p>
-            <a:pPr indent="0" marL="0">
+            <a:pPr marL="0" indent="0">
               <a:buNone/>
             </a:pPr>
             <a:r>
@@ -5443,7 +5124,7 @@
           <a:bodyPr wrap="square" lIns="0" tIns="0" rIns="0" bIns="0" rtlCol="0" anchor="t"/>
           <a:lstStyle/>
           <a:p>
-            <a:pPr indent="0" marL="0">
+            <a:pPr marL="0" indent="0">
               <a:lnSpc>
                 <a:spcPct val="108000"/>
               </a:lnSpc>
@@ -5484,7 +5165,7 @@
           </a:prstGeom>
           <a:extLst>
             <a:ext uri="{C572A759-6A51-4108-AA02-DFA0A04FC94B}">
-              <ma14:wrappingTextBoxFlag xmlns:ma14="http://schemas.microsoft.com/office/mac/drawingml/2011/main" val="0"/>
+              <ma14:wrappingTextBoxFlag xmlns="" xmlns:ma14="http://schemas.microsoft.com/office/mac/drawingml/2011/main" val="0"/>
             </a:ext>
           </a:extLst>
         </p:spPr>
@@ -5505,7 +5186,7 @@
           <a:p>
             <a:pPr algn="l"/>
             <a:fld id="{F7021451-1387-4CA6-816F-3879F97B5CBC}" type="slidenum">
-              <a:rPr b="0" lang="en-US"/>
+              <a:rPr lang="en-US" b="0"/>
               <a:t>11</a:t>
             </a:fld>
             <a:endParaRPr lang="en-US"/>
@@ -5580,7 +5261,7 @@
           <a:bodyPr wrap="square" lIns="0" tIns="0" rIns="0" bIns="0" rtlCol="0" anchor="ctr"/>
           <a:lstStyle/>
           <a:p>
-            <a:pPr algn="l" indent="0" marL="0">
+            <a:pPr marL="0" indent="0" algn="l">
               <a:buNone/>
             </a:pPr>
             <a:r>
@@ -5619,7 +5300,7 @@
           <a:bodyPr wrap="square" lIns="0" tIns="0" rIns="0" bIns="0" rtlCol="0" anchor="ctr"/>
           <a:lstStyle/>
           <a:p>
-            <a:pPr indent="0" marL="0">
+            <a:pPr marL="0" indent="0">
               <a:buNone/>
             </a:pPr>
             <a:r>
@@ -5685,11 +5366,11 @@
           <a:bodyPr wrap="square" lIns="0" tIns="0" rIns="0" bIns="0" rtlCol="0" anchor="ctr"/>
           <a:lstStyle/>
           <a:p>
-            <a:pPr algn="ctr" indent="0" marL="0">
-              <a:buNone/>
-            </a:pPr>
-            <a:r>
-              <a:rPr lang="en-US" sz="900" b="1" spc="100" kern="0" dirty="0">
+            <a:pPr marL="0" indent="0" algn="ctr">
+              <a:buNone/>
+            </a:pPr>
+            <a:r>
+              <a:rPr lang="en-US" sz="900" b="1" kern="0" spc="100" dirty="0">
                 <a:solidFill>
                   <a:srgbClr val="5A05F4"/>
                 </a:solidFill>
@@ -5705,14 +5386,14 @@
       </p:sp>
       <p:pic>
         <p:nvPicPr>
-          <p:cNvPr id="7" name="Image 0" descr="preencoded.png">    </p:cNvPr>
+          <p:cNvPr id="7" name="Image 0" descr="preencoded.png"/>
           <p:cNvPicPr>
             <a:picLocks noChangeAspect="1"/>
           </p:cNvPicPr>
           <p:nvPr/>
         </p:nvPicPr>
         <p:blipFill>
-          <a:blip r:embed="rId1"/>
+          <a:blip r:embed="rId3"/>
           <a:stretch>
             <a:fillRect/>
           </a:stretch>
@@ -5770,7 +5451,7 @@
           <a:bodyPr wrap="square" lIns="0" tIns="0" rIns="0" bIns="0" rtlCol="0" anchor="ctr"/>
           <a:lstStyle/>
           <a:p>
-            <a:pPr algn="ctr" indent="0" marL="0">
+            <a:pPr marL="0" indent="0" algn="ctr">
               <a:buNone/>
             </a:pPr>
             <a:r>
@@ -5874,7 +5555,7 @@
           <a:bodyPr wrap="square" lIns="0" tIns="0" rIns="0" bIns="0" rtlCol="0" anchor="ctr"/>
           <a:lstStyle/>
           <a:p>
-            <a:pPr algn="ctr" indent="0" marL="0">
+            <a:pPr marL="0" indent="0" algn="ctr">
               <a:buNone/>
             </a:pPr>
             <a:r>
@@ -5978,7 +5659,7 @@
           <a:bodyPr wrap="square" lIns="0" tIns="0" rIns="0" bIns="0" rtlCol="0" anchor="ctr"/>
           <a:lstStyle/>
           <a:p>
-            <a:pPr algn="ctr" indent="0" marL="0">
+            <a:pPr marL="0" indent="0" algn="ctr">
               <a:buNone/>
             </a:pPr>
             <a:r>
@@ -6082,7 +5763,7 @@
           <a:bodyPr wrap="square" lIns="0" tIns="0" rIns="0" bIns="0" rtlCol="0" anchor="ctr"/>
           <a:lstStyle/>
           <a:p>
-            <a:pPr algn="ctr" indent="0" marL="0">
+            <a:pPr marL="0" indent="0" algn="ctr">
               <a:buNone/>
             </a:pPr>
             <a:r>
@@ -6143,7 +5824,7 @@
           <a:bodyPr wrap="square" lIns="0" tIns="0" rIns="0" bIns="0" rtlCol="0" anchor="ctr"/>
           <a:lstStyle/>
           <a:p>
-            <a:pPr indent="0" marL="0">
+            <a:pPr marL="0" indent="0">
               <a:buNone/>
             </a:pPr>
             <a:r>
@@ -6182,7 +5863,7 @@
           <a:bodyPr wrap="square" lIns="0" tIns="0" rIns="0" bIns="0" rtlCol="0" anchor="t"/>
           <a:lstStyle/>
           <a:p>
-            <a:pPr indent="0" marL="0">
+            <a:pPr marL="0" indent="0">
               <a:buNone/>
             </a:pPr>
             <a:r>
@@ -6248,7 +5929,7 @@
           <a:bodyPr wrap="square" lIns="0" tIns="0" rIns="0" bIns="0" rtlCol="0" anchor="ctr"/>
           <a:lstStyle/>
           <a:p>
-            <a:pPr indent="0" marL="0">
+            <a:pPr marL="0" indent="0">
               <a:lnSpc>
                 <a:spcPct val="112000"/>
               </a:lnSpc>
@@ -6317,11 +5998,11 @@
           <a:bodyPr wrap="square" lIns="0" tIns="0" rIns="0" bIns="0" rtlCol="0" anchor="ctr"/>
           <a:lstStyle/>
           <a:p>
-            <a:pPr indent="0" marL="0">
-              <a:buNone/>
-            </a:pPr>
-            <a:r>
-              <a:rPr lang="en-US" sz="950" b="1" spc="150" kern="0" dirty="0">
+            <a:pPr marL="0" indent="0">
+              <a:buNone/>
+            </a:pPr>
+            <a:r>
+              <a:rPr lang="en-US" sz="950" b="1" kern="0" spc="150" dirty="0">
                 <a:solidFill>
                   <a:srgbClr val="106B41"/>
                 </a:solidFill>
@@ -6356,7 +6037,7 @@
           <a:bodyPr wrap="square" lIns="0" tIns="0" rIns="0" bIns="0" rtlCol="0" anchor="ctr"/>
           <a:lstStyle/>
           <a:p>
-            <a:pPr indent="0" marL="0">
+            <a:pPr marL="0" indent="0">
               <a:lnSpc>
                 <a:spcPct val="112000"/>
               </a:lnSpc>
@@ -6379,7 +6060,7 @@
       </p:sp>
       <p:sp>
         <p:nvSpPr>
-          <p:cNvPr id="25" name="Slide Number Placeholder 0"/>
+          <p:cNvPr id="30" name="Slide Number Placeholder 0"/>
           <p:cNvSpPr>
             <a:spLocks noGrp="1"/>
           </p:cNvSpPr>
@@ -6397,7 +6078,7 @@
           </a:prstGeom>
           <a:extLst>
             <a:ext uri="{C572A759-6A51-4108-AA02-DFA0A04FC94B}">
-              <ma14:wrappingTextBoxFlag xmlns:ma14="http://schemas.microsoft.com/office/mac/drawingml/2011/main" val="0"/>
+              <ma14:wrappingTextBoxFlag xmlns="" xmlns:ma14="http://schemas.microsoft.com/office/mac/drawingml/2011/main" val="0"/>
             </a:ext>
           </a:extLst>
         </p:spPr>
@@ -6418,7 +6099,7 @@
           <a:p>
             <a:pPr algn="l"/>
             <a:fld id="{F7021451-1387-4CA6-816F-3879F97B5CBC}" type="slidenum">
-              <a:rPr b="0" lang="en-US"/>
+              <a:rPr lang="en-US" b="0"/>
               <a:t>12</a:t>
             </a:fld>
             <a:endParaRPr lang="en-US"/>
@@ -6493,7 +6174,7 @@
           <a:bodyPr wrap="square" lIns="0" tIns="0" rIns="0" bIns="0" rtlCol="0" anchor="ctr"/>
           <a:lstStyle/>
           <a:p>
-            <a:pPr algn="l" indent="0" marL="0">
+            <a:pPr marL="0" indent="0" algn="l">
               <a:buNone/>
             </a:pPr>
             <a:r>
@@ -6532,7 +6213,7 @@
           <a:bodyPr wrap="square" lIns="0" tIns="0" rIns="0" bIns="0" rtlCol="0" anchor="ctr"/>
           <a:lstStyle/>
           <a:p>
-            <a:pPr indent="0" marL="0">
+            <a:pPr marL="0" indent="0">
               <a:buNone/>
             </a:pPr>
             <a:r>
@@ -6598,11 +6279,11 @@
           <a:bodyPr wrap="square" lIns="0" tIns="0" rIns="0" bIns="0" rtlCol="0" anchor="ctr"/>
           <a:lstStyle/>
           <a:p>
-            <a:pPr algn="ctr" indent="0" marL="0">
-              <a:buNone/>
-            </a:pPr>
-            <a:r>
-              <a:rPr lang="en-US" sz="900" b="1" spc="100" kern="0" dirty="0">
+            <a:pPr marL="0" indent="0" algn="ctr">
+              <a:buNone/>
+            </a:pPr>
+            <a:r>
+              <a:rPr lang="en-US" sz="900" b="1" kern="0" spc="100" dirty="0">
                 <a:solidFill>
                   <a:srgbClr val="5A05F4"/>
                 </a:solidFill>
@@ -6618,14 +6299,14 @@
       </p:sp>
       <p:pic>
         <p:nvPicPr>
-          <p:cNvPr id="7" name="Image 0" descr="preencoded.png">    </p:cNvPr>
+          <p:cNvPr id="7" name="Image 0" descr="preencoded.png"/>
           <p:cNvPicPr>
             <a:picLocks noChangeAspect="1"/>
           </p:cNvPicPr>
           <p:nvPr/>
         </p:nvPicPr>
         <p:blipFill>
-          <a:blip r:embed="rId1"/>
+          <a:blip r:embed="rId3"/>
           <a:stretch>
             <a:fillRect/>
           </a:stretch>
@@ -6683,7 +6364,7 @@
           <a:bodyPr wrap="square" lIns="0" tIns="0" rIns="0" bIns="0" rtlCol="0" anchor="ctr"/>
           <a:lstStyle/>
           <a:p>
-            <a:pPr indent="0" marL="0">
+            <a:pPr marL="0" indent="0">
               <a:buNone/>
             </a:pPr>
             <a:r>
@@ -6722,7 +6403,7 @@
           <a:bodyPr wrap="square" lIns="0" tIns="0" rIns="0" bIns="0" rtlCol="0" anchor="t"/>
           <a:lstStyle/>
           <a:p>
-            <a:pPr indent="0" marL="0">
+            <a:pPr marL="0" indent="0">
               <a:lnSpc>
                 <a:spcPct val="108000"/>
               </a:lnSpc>
@@ -6786,7 +6467,7 @@
           <a:bodyPr wrap="square" lIns="0" tIns="0" rIns="0" bIns="0" rtlCol="0" anchor="ctr"/>
           <a:lstStyle/>
           <a:p>
-            <a:pPr indent="0" marL="0">
+            <a:pPr marL="0" indent="0">
               <a:buNone/>
             </a:pPr>
             <a:r>
@@ -6825,7 +6506,7 @@
           <a:bodyPr wrap="square" lIns="0" tIns="0" rIns="0" bIns="0" rtlCol="0" anchor="t"/>
           <a:lstStyle/>
           <a:p>
-            <a:pPr indent="0" marL="0">
+            <a:pPr marL="0" indent="0">
               <a:lnSpc>
                 <a:spcPct val="108000"/>
               </a:lnSpc>
@@ -6887,7 +6568,7 @@
           <a:bodyPr wrap="square" lIns="0" tIns="0" rIns="0" bIns="0" rtlCol="0" anchor="ctr"/>
           <a:lstStyle/>
           <a:p>
-            <a:pPr algn="ctr" indent="0" marL="0">
+            <a:pPr marL="0" indent="0" algn="ctr">
               <a:buNone/>
             </a:pPr>
             <a:r>
@@ -6946,7 +6627,7 @@
           <a:bodyPr wrap="square" lIns="0" tIns="0" rIns="0" bIns="0" rtlCol="0" anchor="ctr"/>
           <a:lstStyle/>
           <a:p>
-            <a:pPr algn="ctr" indent="0" marL="0">
+            <a:pPr marL="0" indent="0" algn="ctr">
               <a:buNone/>
             </a:pPr>
             <a:r>
@@ -6985,11 +6666,11 @@
           <a:bodyPr wrap="square" lIns="0" tIns="0" rIns="0" bIns="0" rtlCol="0" anchor="ctr"/>
           <a:lstStyle/>
           <a:p>
-            <a:pPr indent="0" marL="0">
-              <a:buNone/>
-            </a:pPr>
-            <a:r>
-              <a:rPr lang="en-US" sz="850" spc="100" kern="0" dirty="0">
+            <a:pPr marL="0" indent="0">
+              <a:buNone/>
+            </a:pPr>
+            <a:r>
+              <a:rPr lang="en-US" sz="850" kern="0" spc="100" dirty="0">
                 <a:solidFill>
                   <a:srgbClr val="6B6B6B"/>
                 </a:solidFill>
@@ -7051,11 +6732,11 @@
           <a:bodyPr wrap="square" lIns="0" tIns="0" rIns="0" bIns="0" rtlCol="0" anchor="ctr"/>
           <a:lstStyle/>
           <a:p>
-            <a:pPr indent="0" marL="0">
-              <a:buNone/>
-            </a:pPr>
-            <a:r>
-              <a:rPr lang="en-US" sz="950" b="1" spc="150" kern="0" dirty="0">
+            <a:pPr marL="0" indent="0">
+              <a:buNone/>
+            </a:pPr>
+            <a:r>
+              <a:rPr lang="en-US" sz="950" b="1" kern="0" spc="150" dirty="0">
                 <a:solidFill>
                   <a:srgbClr val="B3261E"/>
                 </a:solidFill>
@@ -7090,7 +6771,7 @@
           <a:bodyPr wrap="square" lIns="0" tIns="0" rIns="0" bIns="0" rtlCol="0" anchor="ctr"/>
           <a:lstStyle/>
           <a:p>
-            <a:pPr indent="0" marL="0">
+            <a:pPr marL="0" indent="0">
               <a:lnSpc>
                 <a:spcPct val="112000"/>
               </a:lnSpc>
@@ -7131,7 +6812,7 @@
           </a:prstGeom>
           <a:extLst>
             <a:ext uri="{C572A759-6A51-4108-AA02-DFA0A04FC94B}">
-              <ma14:wrappingTextBoxFlag xmlns:ma14="http://schemas.microsoft.com/office/mac/drawingml/2011/main" val="0"/>
+              <ma14:wrappingTextBoxFlag xmlns="" xmlns:ma14="http://schemas.microsoft.com/office/mac/drawingml/2011/main" val="0"/>
             </a:ext>
           </a:extLst>
         </p:spPr>
@@ -7152,7 +6833,7 @@
           <a:p>
             <a:pPr algn="l"/>
             <a:fld id="{F7021451-1387-4CA6-816F-3879F97B5CBC}" type="slidenum">
-              <a:rPr b="0" lang="en-US"/>
+              <a:rPr lang="en-US" b="0"/>
               <a:t>13</a:t>
             </a:fld>
             <a:endParaRPr lang="en-US"/>
@@ -7227,7 +6908,7 @@
           <a:bodyPr wrap="square" lIns="0" tIns="0" rIns="0" bIns="0" rtlCol="0" anchor="ctr"/>
           <a:lstStyle/>
           <a:p>
-            <a:pPr algn="l" indent="0" marL="0">
+            <a:pPr marL="0" indent="0" algn="l">
               <a:buNone/>
             </a:pPr>
             <a:r>
@@ -7266,7 +6947,7 @@
           <a:bodyPr wrap="square" lIns="0" tIns="0" rIns="0" bIns="0" rtlCol="0" anchor="ctr"/>
           <a:lstStyle/>
           <a:p>
-            <a:pPr indent="0" marL="0">
+            <a:pPr marL="0" indent="0">
               <a:buNone/>
             </a:pPr>
             <a:r>
@@ -7332,11 +7013,11 @@
           <a:bodyPr wrap="square" lIns="0" tIns="0" rIns="0" bIns="0" rtlCol="0" anchor="ctr"/>
           <a:lstStyle/>
           <a:p>
-            <a:pPr algn="ctr" indent="0" marL="0">
-              <a:buNone/>
-            </a:pPr>
-            <a:r>
-              <a:rPr lang="en-US" sz="900" b="1" spc="100" kern="0" dirty="0">
+            <a:pPr marL="0" indent="0" algn="ctr">
+              <a:buNone/>
+            </a:pPr>
+            <a:r>
+              <a:rPr lang="en-US" sz="900" b="1" kern="0" spc="100" dirty="0">
                 <a:solidFill>
                   <a:srgbClr val="5A05F4"/>
                 </a:solidFill>
@@ -7352,14 +7033,14 @@
       </p:sp>
       <p:pic>
         <p:nvPicPr>
-          <p:cNvPr id="7" name="Image 0" descr="preencoded.png">    </p:cNvPr>
+          <p:cNvPr id="7" name="Image 0" descr="preencoded.png"/>
           <p:cNvPicPr>
             <a:picLocks noChangeAspect="1"/>
           </p:cNvPicPr>
           <p:nvPr/>
         </p:nvPicPr>
         <p:blipFill>
-          <a:blip r:embed="rId1"/>
+          <a:blip r:embed="rId3"/>
           <a:stretch>
             <a:fillRect/>
           </a:stretch>
@@ -7417,7 +7098,7 @@
           <a:bodyPr wrap="square" lIns="0" tIns="0" rIns="0" bIns="0" rtlCol="0" anchor="ctr"/>
           <a:lstStyle/>
           <a:p>
-            <a:pPr indent="0" marL="0">
+            <a:pPr marL="0" indent="0">
               <a:buNone/>
             </a:pPr>
             <a:r>
@@ -7456,7 +7137,7 @@
           <a:bodyPr wrap="square" lIns="0" tIns="0" rIns="0" bIns="0" rtlCol="0" anchor="t"/>
           <a:lstStyle/>
           <a:p>
-            <a:pPr indent="0" marL="0">
+            <a:pPr marL="0" indent="0">
               <a:buNone/>
             </a:pPr>
             <a:r>
@@ -7517,7 +7198,7 @@
           <a:bodyPr wrap="square" lIns="0" tIns="0" rIns="0" bIns="0" rtlCol="0" anchor="ctr"/>
           <a:lstStyle/>
           <a:p>
-            <a:pPr indent="0" marL="0">
+            <a:pPr marL="0" indent="0">
               <a:buNone/>
             </a:pPr>
             <a:r>
@@ -7556,7 +7237,7 @@
           <a:bodyPr wrap="square" lIns="0" tIns="0" rIns="0" bIns="0" rtlCol="0" anchor="t"/>
           <a:lstStyle/>
           <a:p>
-            <a:pPr indent="0" marL="0">
+            <a:pPr marL="0" indent="0">
               <a:buNone/>
             </a:pPr>
             <a:r>
@@ -7622,7 +7303,7 @@
           <a:bodyPr wrap="square" lIns="0" tIns="0" rIns="0" bIns="0" rtlCol="0" anchor="t"/>
           <a:lstStyle/>
           <a:p>
-            <a:pPr indent="0" marL="0">
+            <a:pPr marL="0" indent="0">
               <a:lnSpc>
                 <a:spcPct val="130000"/>
               </a:lnSpc>
@@ -7642,7 +7323,7 @@
             <a:endParaRPr lang="en-US" sz="1100" dirty="0"/>
           </a:p>
           <a:p>
-            <a:pPr indent="0" marL="0">
+            <a:pPr marL="0" indent="0">
               <a:lnSpc>
                 <a:spcPct val="130000"/>
               </a:lnSpc>
@@ -7662,7 +7343,7 @@
             <a:endParaRPr lang="en-US" sz="1100" dirty="0"/>
           </a:p>
           <a:p>
-            <a:pPr indent="0" marL="0">
+            <a:pPr marL="0" indent="0">
               <a:lnSpc>
                 <a:spcPct val="130000"/>
               </a:lnSpc>
@@ -7682,7 +7363,7 @@
             <a:endParaRPr lang="en-US" sz="1100" dirty="0"/>
           </a:p>
           <a:p>
-            <a:pPr indent="0" marL="0">
+            <a:pPr marL="0" indent="0">
               <a:lnSpc>
                 <a:spcPct val="130000"/>
               </a:lnSpc>
@@ -7702,7 +7383,7 @@
             <a:endParaRPr lang="en-US" sz="1100" dirty="0"/>
           </a:p>
           <a:p>
-            <a:pPr indent="0" marL="0">
+            <a:pPr marL="0" indent="0">
               <a:lnSpc>
                 <a:spcPct val="130000"/>
               </a:lnSpc>
@@ -7766,7 +7447,7 @@
           <a:bodyPr wrap="square" lIns="0" tIns="0" rIns="0" bIns="0" rtlCol="0" anchor="ctr"/>
           <a:lstStyle/>
           <a:p>
-            <a:pPr indent="0" marL="0">
+            <a:pPr marL="0" indent="0">
               <a:lnSpc>
                 <a:spcPct val="112000"/>
               </a:lnSpc>
@@ -7835,11 +7516,11 @@
           <a:bodyPr wrap="square" lIns="0" tIns="0" rIns="0" bIns="0" rtlCol="0" anchor="ctr"/>
           <a:lstStyle/>
           <a:p>
-            <a:pPr indent="0" marL="0">
-              <a:buNone/>
-            </a:pPr>
-            <a:r>
-              <a:rPr lang="en-US" sz="950" b="1" spc="150" kern="0" dirty="0">
+            <a:pPr marL="0" indent="0">
+              <a:buNone/>
+            </a:pPr>
+            <a:r>
+              <a:rPr lang="en-US" sz="950" b="1" kern="0" spc="150" dirty="0">
                 <a:solidFill>
                   <a:srgbClr val="B3261E"/>
                 </a:solidFill>
@@ -7874,7 +7555,7 @@
           <a:bodyPr wrap="square" lIns="0" tIns="0" rIns="0" bIns="0" rtlCol="0" anchor="ctr"/>
           <a:lstStyle/>
           <a:p>
-            <a:pPr indent="0" marL="0">
+            <a:pPr marL="0" indent="0">
               <a:lnSpc>
                 <a:spcPct val="112000"/>
               </a:lnSpc>
@@ -7915,7 +7596,7 @@
           </a:prstGeom>
           <a:extLst>
             <a:ext uri="{C572A759-6A51-4108-AA02-DFA0A04FC94B}">
-              <ma14:wrappingTextBoxFlag xmlns:ma14="http://schemas.microsoft.com/office/mac/drawingml/2011/main" val="0"/>
+              <ma14:wrappingTextBoxFlag xmlns="" xmlns:ma14="http://schemas.microsoft.com/office/mac/drawingml/2011/main" val="0"/>
             </a:ext>
           </a:extLst>
         </p:spPr>
@@ -7936,7 +7617,7 @@
           <a:p>
             <a:pPr algn="l"/>
             <a:fld id="{F7021451-1387-4CA6-816F-3879F97B5CBC}" type="slidenum">
-              <a:rPr b="0" lang="en-US"/>
+              <a:rPr lang="en-US" b="0"/>
               <a:t>14</a:t>
             </a:fld>
             <a:endParaRPr lang="en-US"/>
@@ -8011,7 +7692,7 @@
           <a:bodyPr wrap="square" lIns="0" tIns="0" rIns="0" bIns="0" rtlCol="0" anchor="ctr"/>
           <a:lstStyle/>
           <a:p>
-            <a:pPr algn="l" indent="0" marL="0">
+            <a:pPr marL="0" indent="0" algn="l">
               <a:buNone/>
             </a:pPr>
             <a:r>
@@ -8050,7 +7731,7 @@
           <a:bodyPr wrap="square" lIns="0" tIns="0" rIns="0" bIns="0" rtlCol="0" anchor="ctr"/>
           <a:lstStyle/>
           <a:p>
-            <a:pPr indent="0" marL="0">
+            <a:pPr marL="0" indent="0">
               <a:buNone/>
             </a:pPr>
             <a:r>
@@ -8116,11 +7797,11 @@
           <a:bodyPr wrap="square" lIns="0" tIns="0" rIns="0" bIns="0" rtlCol="0" anchor="ctr"/>
           <a:lstStyle/>
           <a:p>
-            <a:pPr algn="ctr" indent="0" marL="0">
-              <a:buNone/>
-            </a:pPr>
-            <a:r>
-              <a:rPr lang="en-US" sz="900" b="1" spc="100" kern="0" dirty="0">
+            <a:pPr marL="0" indent="0" algn="ctr">
+              <a:buNone/>
+            </a:pPr>
+            <a:r>
+              <a:rPr lang="en-US" sz="900" b="1" kern="0" spc="100" dirty="0">
                 <a:solidFill>
                   <a:srgbClr val="5A05F4"/>
                 </a:solidFill>
@@ -8136,14 +7817,14 @@
       </p:sp>
       <p:pic>
         <p:nvPicPr>
-          <p:cNvPr id="7" name="Image 0" descr="preencoded.png">    </p:cNvPr>
+          <p:cNvPr id="7" name="Image 0" descr="preencoded.png"/>
           <p:cNvPicPr>
             <a:picLocks noChangeAspect="1"/>
           </p:cNvPicPr>
           <p:nvPr/>
         </p:nvPicPr>
         <p:blipFill>
-          <a:blip r:embed="rId1"/>
+          <a:blip r:embed="rId3"/>
           <a:stretch>
             <a:fillRect/>
           </a:stretch>
@@ -8206,7 +7887,7 @@
           <a:bodyPr wrap="square" lIns="0" tIns="0" rIns="0" bIns="0" rtlCol="0" anchor="t"/>
           <a:lstStyle/>
           <a:p>
-            <a:pPr indent="0" marL="0">
+            <a:pPr marL="0" indent="0">
               <a:lnSpc>
                 <a:spcPct val="130000"/>
               </a:lnSpc>
@@ -8226,7 +7907,7 @@
             <a:endParaRPr lang="en-US" sz="1150" dirty="0"/>
           </a:p>
           <a:p>
-            <a:pPr indent="0" marL="0">
+            <a:pPr marL="0" indent="0">
               <a:lnSpc>
                 <a:spcPct val="130000"/>
               </a:lnSpc>
@@ -8246,7 +7927,7 @@
             <a:endParaRPr lang="en-US" sz="1150" dirty="0"/>
           </a:p>
           <a:p>
-            <a:pPr indent="0" marL="0">
+            <a:pPr marL="0" indent="0">
               <a:lnSpc>
                 <a:spcPct val="130000"/>
               </a:lnSpc>
@@ -8266,7 +7947,7 @@
             <a:endParaRPr lang="en-US" sz="1150" dirty="0"/>
           </a:p>
           <a:p>
-            <a:pPr indent="0" marL="0">
+            <a:pPr marL="0" indent="0">
               <a:lnSpc>
                 <a:spcPct val="130000"/>
               </a:lnSpc>
@@ -8286,7 +7967,7 @@
             <a:endParaRPr lang="en-US" sz="1150" dirty="0"/>
           </a:p>
           <a:p>
-            <a:pPr indent="0" marL="0">
+            <a:pPr marL="0" indent="0">
               <a:lnSpc>
                 <a:spcPct val="130000"/>
               </a:lnSpc>
@@ -8355,11 +8036,11 @@
           <a:bodyPr wrap="square" lIns="0" tIns="0" rIns="0" bIns="0" rtlCol="0" anchor="ctr"/>
           <a:lstStyle/>
           <a:p>
-            <a:pPr indent="0" marL="0">
-              <a:buNone/>
-            </a:pPr>
-            <a:r>
-              <a:rPr lang="en-US" sz="950" b="1" spc="100" kern="0" dirty="0">
+            <a:pPr marL="0" indent="0">
+              <a:buNone/>
+            </a:pPr>
+            <a:r>
+              <a:rPr lang="en-US" sz="950" b="1" kern="0" spc="100" dirty="0">
                 <a:solidFill>
                   <a:srgbClr val="6B6B6B"/>
                 </a:solidFill>
@@ -8394,7 +8075,7 @@
           <a:bodyPr wrap="square" lIns="0" tIns="0" rIns="0" bIns="0" rtlCol="0" anchor="ctr"/>
           <a:lstStyle/>
           <a:p>
-            <a:pPr indent="0" marL="0">
+            <a:pPr marL="0" indent="0">
               <a:buNone/>
             </a:pPr>
             <a:r>
@@ -8433,7 +8114,7 @@
           <a:bodyPr wrap="square" lIns="0" tIns="0" rIns="0" bIns="0" rtlCol="0" anchor="ctr"/>
           <a:lstStyle/>
           <a:p>
-            <a:pPr indent="0" marL="0">
+            <a:pPr marL="0" indent="0">
               <a:buNone/>
             </a:pPr>
             <a:r>
@@ -8499,11 +8180,11 @@
           <a:bodyPr wrap="square" lIns="0" tIns="0" rIns="0" bIns="0" rtlCol="0" anchor="ctr"/>
           <a:lstStyle/>
           <a:p>
-            <a:pPr indent="0" marL="0">
-              <a:buNone/>
-            </a:pPr>
-            <a:r>
-              <a:rPr lang="en-US" sz="950" b="1" spc="150" kern="0" dirty="0">
+            <a:pPr marL="0" indent="0">
+              <a:buNone/>
+            </a:pPr>
+            <a:r>
+              <a:rPr lang="en-US" sz="950" b="1" kern="0" spc="150" dirty="0">
                 <a:solidFill>
                   <a:srgbClr val="1A4FBF"/>
                 </a:solidFill>
@@ -8538,7 +8219,7 @@
           <a:bodyPr wrap="square" lIns="0" tIns="0" rIns="0" bIns="0" rtlCol="0" anchor="ctr"/>
           <a:lstStyle/>
           <a:p>
-            <a:pPr indent="0" marL="0">
+            <a:pPr marL="0" indent="0">
               <a:lnSpc>
                 <a:spcPct val="112000"/>
               </a:lnSpc>
@@ -8607,7 +8288,7 @@
           <a:bodyPr wrap="square" lIns="0" tIns="0" rIns="0" bIns="0" rtlCol="0" anchor="ctr"/>
           <a:lstStyle/>
           <a:p>
-            <a:pPr indent="0" marL="0">
+            <a:pPr marL="0" indent="0">
               <a:lnSpc>
                 <a:spcPct val="112000"/>
               </a:lnSpc>
@@ -8648,7 +8329,7 @@
           </a:prstGeom>
           <a:extLst>
             <a:ext uri="{C572A759-6A51-4108-AA02-DFA0A04FC94B}">
-              <ma14:wrappingTextBoxFlag xmlns:ma14="http://schemas.microsoft.com/office/mac/drawingml/2011/main" val="0"/>
+              <ma14:wrappingTextBoxFlag xmlns="" xmlns:ma14="http://schemas.microsoft.com/office/mac/drawingml/2011/main" val="0"/>
             </a:ext>
           </a:extLst>
         </p:spPr>
@@ -8669,7 +8350,7 @@
           <a:p>
             <a:pPr algn="l"/>
             <a:fld id="{F7021451-1387-4CA6-816F-3879F97B5CBC}" type="slidenum">
-              <a:rPr b="0" lang="en-US"/>
+              <a:rPr lang="en-US" b="0"/>
               <a:t>15</a:t>
             </a:fld>
             <a:endParaRPr lang="en-US"/>
@@ -8744,7 +8425,7 @@
           <a:bodyPr wrap="square" lIns="0" tIns="0" rIns="0" bIns="0" rtlCol="0" anchor="ctr"/>
           <a:lstStyle/>
           <a:p>
-            <a:pPr algn="l" indent="0" marL="0">
+            <a:pPr marL="0" indent="0" algn="l">
               <a:buNone/>
             </a:pPr>
             <a:r>
@@ -8783,7 +8464,7 @@
           <a:bodyPr wrap="square" lIns="0" tIns="0" rIns="0" bIns="0" rtlCol="0" anchor="ctr"/>
           <a:lstStyle/>
           <a:p>
-            <a:pPr indent="0" marL="0">
+            <a:pPr marL="0" indent="0">
               <a:buNone/>
             </a:pPr>
             <a:r>
@@ -8849,11 +8530,11 @@
           <a:bodyPr wrap="square" lIns="0" tIns="0" rIns="0" bIns="0" rtlCol="0" anchor="ctr"/>
           <a:lstStyle/>
           <a:p>
-            <a:pPr algn="ctr" indent="0" marL="0">
-              <a:buNone/>
-            </a:pPr>
-            <a:r>
-              <a:rPr lang="en-US" sz="900" b="1" spc="100" kern="0" dirty="0">
+            <a:pPr marL="0" indent="0" algn="ctr">
+              <a:buNone/>
+            </a:pPr>
+            <a:r>
+              <a:rPr lang="en-US" sz="900" b="1" kern="0" spc="100" dirty="0">
                 <a:solidFill>
                   <a:srgbClr val="5A05F4"/>
                 </a:solidFill>
@@ -8869,14 +8550,14 @@
       </p:sp>
       <p:pic>
         <p:nvPicPr>
-          <p:cNvPr id="7" name="Image 0" descr="preencoded.png">    </p:cNvPr>
+          <p:cNvPr id="7" name="Image 0" descr="preencoded.png"/>
           <p:cNvPicPr>
             <a:picLocks noChangeAspect="1"/>
           </p:cNvPicPr>
           <p:nvPr/>
         </p:nvPicPr>
         <p:blipFill>
-          <a:blip r:embed="rId1"/>
+          <a:blip r:embed="rId3"/>
           <a:stretch>
             <a:fillRect/>
           </a:stretch>
@@ -8939,7 +8620,7 @@
           <a:bodyPr wrap="square" lIns="0" tIns="0" rIns="0" bIns="0" rtlCol="0" anchor="t"/>
           <a:lstStyle/>
           <a:p>
-            <a:pPr indent="0" marL="0">
+            <a:pPr marL="0" indent="0">
               <a:lnSpc>
                 <a:spcPct val="130000"/>
               </a:lnSpc>
@@ -8981,7 +8662,7 @@
           <a:bodyPr wrap="square" lIns="0" tIns="0" rIns="0" bIns="0" rtlCol="0" anchor="ctr"/>
           <a:lstStyle/>
           <a:p>
-            <a:pPr algn="l" indent="0" marL="0">
+            <a:pPr marL="0" indent="0" algn="l">
               <a:buNone/>
             </a:pPr>
             <a:r>
@@ -9042,7 +8723,7 @@
           <a:bodyPr wrap="square" lIns="0" tIns="0" rIns="0" bIns="0" rtlCol="0" anchor="ctr"/>
           <a:lstStyle/>
           <a:p>
-            <a:pPr indent="0" marL="0">
+            <a:pPr marL="0" indent="0">
               <a:buNone/>
             </a:pPr>
             <a:r>
@@ -9081,7 +8762,7 @@
           <a:bodyPr wrap="square" lIns="0" tIns="0" rIns="0" bIns="0" rtlCol="0" anchor="ctr"/>
           <a:lstStyle/>
           <a:p>
-            <a:pPr algn="l" indent="0" marL="0">
+            <a:pPr marL="0" indent="0" algn="l">
               <a:buNone/>
             </a:pPr>
             <a:r>
@@ -9142,7 +8823,7 @@
           <a:bodyPr wrap="square" lIns="0" tIns="0" rIns="0" bIns="0" rtlCol="0" anchor="ctr"/>
           <a:lstStyle/>
           <a:p>
-            <a:pPr indent="0" marL="0">
+            <a:pPr marL="0" indent="0">
               <a:buNone/>
             </a:pPr>
             <a:r>
@@ -9203,7 +8884,7 @@
           <a:bodyPr wrap="square" lIns="0" tIns="0" rIns="0" bIns="0" rtlCol="0" anchor="ctr"/>
           <a:lstStyle/>
           <a:p>
-            <a:pPr indent="0" marL="0">
+            <a:pPr marL="0" indent="0">
               <a:lnSpc>
                 <a:spcPct val="112000"/>
               </a:lnSpc>
@@ -9272,11 +8953,11 @@
           <a:bodyPr wrap="square" lIns="0" tIns="0" rIns="0" bIns="0" rtlCol="0" anchor="ctr"/>
           <a:lstStyle/>
           <a:p>
-            <a:pPr indent="0" marL="0">
-              <a:buNone/>
-            </a:pPr>
-            <a:r>
-              <a:rPr lang="en-US" sz="950" b="1" spc="150" kern="0" dirty="0">
+            <a:pPr marL="0" indent="0">
+              <a:buNone/>
+            </a:pPr>
+            <a:r>
+              <a:rPr lang="en-US" sz="950" b="1" kern="0" spc="150" dirty="0">
                 <a:solidFill>
                   <a:srgbClr val="106B41"/>
                 </a:solidFill>
@@ -9311,7 +8992,7 @@
           <a:bodyPr wrap="square" lIns="0" tIns="0" rIns="0" bIns="0" rtlCol="0" anchor="ctr"/>
           <a:lstStyle/>
           <a:p>
-            <a:pPr indent="0" marL="0">
+            <a:pPr marL="0" indent="0">
               <a:lnSpc>
                 <a:spcPct val="112000"/>
               </a:lnSpc>
@@ -9352,7 +9033,7 @@
           </a:prstGeom>
           <a:extLst>
             <a:ext uri="{C572A759-6A51-4108-AA02-DFA0A04FC94B}">
-              <ma14:wrappingTextBoxFlag xmlns:ma14="http://schemas.microsoft.com/office/mac/drawingml/2011/main" val="0"/>
+              <ma14:wrappingTextBoxFlag xmlns="" xmlns:ma14="http://schemas.microsoft.com/office/mac/drawingml/2011/main" val="0"/>
             </a:ext>
           </a:extLst>
         </p:spPr>
@@ -9373,7 +9054,7 @@
           <a:p>
             <a:pPr algn="l"/>
             <a:fld id="{F7021451-1387-4CA6-816F-3879F97B5CBC}" type="slidenum">
-              <a:rPr b="0" lang="en-US"/>
+              <a:rPr lang="en-US" b="0"/>
               <a:t>16</a:t>
             </a:fld>
             <a:endParaRPr lang="en-US"/>
@@ -9448,7 +9129,7 @@
           <a:bodyPr wrap="square" lIns="0" tIns="0" rIns="0" bIns="0" rtlCol="0" anchor="ctr"/>
           <a:lstStyle/>
           <a:p>
-            <a:pPr algn="l" indent="0" marL="0">
+            <a:pPr marL="0" indent="0" algn="l">
               <a:buNone/>
             </a:pPr>
             <a:r>
@@ -9487,7 +9168,7 @@
           <a:bodyPr wrap="square" lIns="0" tIns="0" rIns="0" bIns="0" rtlCol="0" anchor="ctr"/>
           <a:lstStyle/>
           <a:p>
-            <a:pPr indent="0" marL="0">
+            <a:pPr marL="0" indent="0">
               <a:buNone/>
             </a:pPr>
             <a:r>
@@ -9553,11 +9234,11 @@
           <a:bodyPr wrap="square" lIns="0" tIns="0" rIns="0" bIns="0" rtlCol="0" anchor="ctr"/>
           <a:lstStyle/>
           <a:p>
-            <a:pPr algn="ctr" indent="0" marL="0">
-              <a:buNone/>
-            </a:pPr>
-            <a:r>
-              <a:rPr lang="en-US" sz="900" b="1" spc="100" kern="0" dirty="0">
+            <a:pPr marL="0" indent="0" algn="ctr">
+              <a:buNone/>
+            </a:pPr>
+            <a:r>
+              <a:rPr lang="en-US" sz="900" b="1" kern="0" spc="100" dirty="0">
                 <a:solidFill>
                   <a:srgbClr val="5A05F4"/>
                 </a:solidFill>
@@ -9619,11 +9300,11 @@
           <a:bodyPr wrap="square" lIns="0" tIns="0" rIns="0" bIns="0" rtlCol="0" anchor="ctr"/>
           <a:lstStyle/>
           <a:p>
-            <a:pPr algn="ctr" indent="0" marL="0">
-              <a:buNone/>
-            </a:pPr>
-            <a:r>
-              <a:rPr lang="en-US" sz="900" b="1" spc="100" kern="0" dirty="0">
+            <a:pPr marL="0" indent="0" algn="ctr">
+              <a:buNone/>
+            </a:pPr>
+            <a:r>
+              <a:rPr lang="en-US" sz="900" b="1" kern="0" spc="100" dirty="0">
                 <a:solidFill>
                   <a:srgbClr val="434343"/>
                 </a:solidFill>
@@ -9639,14 +9320,14 @@
       </p:sp>
       <p:pic>
         <p:nvPicPr>
-          <p:cNvPr id="9" name="Image 0" descr="preencoded.png">    </p:cNvPr>
+          <p:cNvPr id="9" name="Image 0" descr="preencoded.png"/>
           <p:cNvPicPr>
             <a:picLocks noChangeAspect="1"/>
           </p:cNvPicPr>
           <p:nvPr/>
         </p:nvPicPr>
         <p:blipFill>
-          <a:blip r:embed="rId1"/>
+          <a:blip r:embed="rId3"/>
           <a:stretch>
             <a:fillRect/>
           </a:stretch>
@@ -9704,7 +9385,7 @@
           <a:bodyPr wrap="square" lIns="0" tIns="0" rIns="0" bIns="0" rtlCol="0" anchor="ctr"/>
           <a:lstStyle/>
           <a:p>
-            <a:pPr indent="0" marL="0">
+            <a:pPr marL="0" indent="0">
               <a:buNone/>
             </a:pPr>
             <a:r>
@@ -9743,7 +9424,7 @@
           <a:bodyPr wrap="square" lIns="0" tIns="0" rIns="0" bIns="0" rtlCol="0" anchor="ctr"/>
           <a:lstStyle/>
           <a:p>
-            <a:pPr indent="0" marL="0">
+            <a:pPr marL="0" indent="0">
               <a:buNone/>
             </a:pPr>
             <a:r>
@@ -9804,7 +9485,7 @@
           <a:bodyPr wrap="square" lIns="0" tIns="0" rIns="0" bIns="0" rtlCol="0" anchor="ctr"/>
           <a:lstStyle/>
           <a:p>
-            <a:pPr indent="0" marL="0">
+            <a:pPr marL="0" indent="0">
               <a:buNone/>
             </a:pPr>
             <a:r>
@@ -9843,7 +9524,7 @@
           <a:bodyPr wrap="square" lIns="0" tIns="0" rIns="0" bIns="0" rtlCol="0" anchor="ctr"/>
           <a:lstStyle/>
           <a:p>
-            <a:pPr indent="0" marL="0">
+            <a:pPr marL="0" indent="0">
               <a:buNone/>
             </a:pPr>
             <a:r>
@@ -9904,7 +9585,7 @@
           <a:bodyPr wrap="square" lIns="0" tIns="0" rIns="0" bIns="0" rtlCol="0" anchor="ctr"/>
           <a:lstStyle/>
           <a:p>
-            <a:pPr indent="0" marL="0">
+            <a:pPr marL="0" indent="0">
               <a:buNone/>
             </a:pPr>
             <a:r>
@@ -9943,7 +9624,7 @@
           <a:bodyPr wrap="square" lIns="0" tIns="0" rIns="0" bIns="0" rtlCol="0" anchor="ctr"/>
           <a:lstStyle/>
           <a:p>
-            <a:pPr indent="0" marL="0">
+            <a:pPr marL="0" indent="0">
               <a:buNone/>
             </a:pPr>
             <a:r>
@@ -10088,7 +9769,7 @@
           <a:bodyPr wrap="square" lIns="0" tIns="0" rIns="0" bIns="0" rtlCol="0" anchor="ctr"/>
           <a:lstStyle/>
           <a:p>
-            <a:pPr indent="0" marL="0">
+            <a:pPr marL="0" indent="0">
               <a:buNone/>
             </a:pPr>
             <a:r>
@@ -10102,9 +9783,6 @@
               </a:rPr>
               <a:t>витрачений бюджет місяця:  </a:t>
             </a:r>
-            <a:pPr indent="0" marL="0">
-              <a:buNone/>
-            </a:pPr>
             <a:r>
               <a:rPr lang="en-US" sz="900" b="1" dirty="0">
                 <a:solidFill>
@@ -10116,9 +9794,6 @@
               </a:rPr>
               <a:t>до 80% — норма</a:t>
             </a:r>
-            <a:pPr indent="0" marL="0">
-              <a:buNone/>
-            </a:pPr>
             <a:r>
               <a:rPr lang="en-US" sz="900" dirty="0">
                 <a:solidFill>
@@ -10130,9 +9805,6 @@
               </a:rPr>
               <a:t>   ·   </a:t>
             </a:r>
-            <a:pPr indent="0" marL="0">
-              <a:buNone/>
-            </a:pPr>
             <a:r>
               <a:rPr lang="en-US" sz="900" b="1" dirty="0">
                 <a:solidFill>
@@ -10144,9 +9816,6 @@
               </a:rPr>
               <a:t>80% — алерт</a:t>
             </a:r>
-            <a:pPr indent="0" marL="0">
-              <a:buNone/>
-            </a:pPr>
             <a:r>
               <a:rPr lang="en-US" sz="900" dirty="0">
                 <a:solidFill>
@@ -10158,9 +9827,6 @@
               </a:rPr>
               <a:t>   ·   </a:t>
             </a:r>
-            <a:pPr indent="0" marL="0">
-              <a:buNone/>
-            </a:pPr>
             <a:r>
               <a:rPr lang="en-US" sz="900" b="1" dirty="0">
                 <a:solidFill>
@@ -10172,9 +9838,6 @@
               </a:rPr>
               <a:t>92% — деградація</a:t>
             </a:r>
-            <a:pPr indent="0" marL="0">
-              <a:buNone/>
-            </a:pPr>
             <a:r>
               <a:rPr lang="en-US" sz="900" dirty="0">
                 <a:solidFill>
@@ -10186,9 +9849,6 @@
               </a:rPr>
               <a:t>   ·   </a:t>
             </a:r>
-            <a:pPr indent="0" marL="0">
-              <a:buNone/>
-            </a:pPr>
             <a:r>
               <a:rPr lang="en-US" sz="900" b="1" dirty="0">
                 <a:solidFill>
@@ -10247,11 +9907,11 @@
           <a:bodyPr wrap="square" lIns="0" tIns="0" rIns="0" bIns="0" rtlCol="0" anchor="ctr"/>
           <a:lstStyle/>
           <a:p>
-            <a:pPr indent="0" marL="0">
-              <a:buNone/>
-            </a:pPr>
-            <a:r>
-              <a:rPr lang="en-US" sz="950" b="1" spc="150" kern="0" dirty="0">
+            <a:pPr marL="0" indent="0">
+              <a:buNone/>
+            </a:pPr>
+            <a:r>
+              <a:rPr lang="en-US" sz="950" b="1" kern="0" spc="150" dirty="0">
                 <a:solidFill>
                   <a:srgbClr val="FFFFFF"/>
                 </a:solidFill>
@@ -10286,7 +9946,7 @@
           <a:bodyPr wrap="square" lIns="0" tIns="0" rIns="0" bIns="0" rtlCol="0" anchor="ctr"/>
           <a:lstStyle/>
           <a:p>
-            <a:pPr indent="0" marL="0">
+            <a:pPr marL="0" indent="0">
               <a:lnSpc>
                 <a:spcPct val="112000"/>
               </a:lnSpc>
@@ -10309,7 +9969,7 @@
       </p:sp>
       <p:sp>
         <p:nvSpPr>
-          <p:cNvPr id="25" name="Slide Number Placeholder 0"/>
+          <p:cNvPr id="28" name="Slide Number Placeholder 0"/>
           <p:cNvSpPr>
             <a:spLocks noGrp="1"/>
           </p:cNvSpPr>
@@ -10327,7 +9987,7 @@
           </a:prstGeom>
           <a:extLst>
             <a:ext uri="{C572A759-6A51-4108-AA02-DFA0A04FC94B}">
-              <ma14:wrappingTextBoxFlag xmlns:ma14="http://schemas.microsoft.com/office/mac/drawingml/2011/main" val="0"/>
+              <ma14:wrappingTextBoxFlag xmlns="" xmlns:ma14="http://schemas.microsoft.com/office/mac/drawingml/2011/main" val="0"/>
             </a:ext>
           </a:extLst>
         </p:spPr>
@@ -10348,7 +10008,7 @@
           <a:p>
             <a:pPr algn="l"/>
             <a:fld id="{F7021451-1387-4CA6-816F-3879F97B5CBC}" type="slidenum">
-              <a:rPr b="0" lang="en-US"/>
+              <a:rPr lang="en-US" b="0"/>
               <a:t>17</a:t>
             </a:fld>
             <a:endParaRPr lang="en-US"/>
@@ -10401,11 +10061,11 @@
           <a:bodyPr wrap="square" lIns="0" tIns="0" rIns="0" bIns="0" rtlCol="0" anchor="ctr"/>
           <a:lstStyle/>
           <a:p>
-            <a:pPr indent="0" marL="0">
-              <a:buNone/>
-            </a:pPr>
-            <a:r>
-              <a:rPr lang="en-US" sz="1200" b="1" spc="400" kern="0" dirty="0">
+            <a:pPr marL="0" indent="0">
+              <a:buNone/>
+            </a:pPr>
+            <a:r>
+              <a:rPr lang="en-US" sz="1200" b="1" kern="0" spc="400" dirty="0">
                 <a:solidFill>
                   <a:srgbClr val="FFFFFF"/>
                 </a:solidFill>
@@ -10440,7 +10100,7 @@
           <a:bodyPr wrap="square" lIns="0" tIns="0" rIns="0" bIns="0" rtlCol="0" anchor="ctr"/>
           <a:lstStyle/>
           <a:p>
-            <a:pPr indent="0" marL="0">
+            <a:pPr marL="0" indent="0">
               <a:buNone/>
             </a:pPr>
             <a:r>
@@ -10479,7 +10139,7 @@
           <a:bodyPr wrap="square" lIns="0" tIns="0" rIns="0" bIns="0" rtlCol="0" anchor="t"/>
           <a:lstStyle/>
           <a:p>
-            <a:pPr indent="0" marL="0">
+            <a:pPr marL="0" indent="0">
               <a:buNone/>
             </a:pPr>
             <a:r>
@@ -10540,7 +10200,7 @@
           <a:bodyPr wrap="square" lIns="0" tIns="0" rIns="0" bIns="0" rtlCol="0" anchor="ctr"/>
           <a:lstStyle/>
           <a:p>
-            <a:pPr algn="ctr" indent="0" marL="0">
+            <a:pPr marL="0" indent="0" algn="ctr">
               <a:buNone/>
             </a:pPr>
             <a:r>
@@ -10626,7 +10286,7 @@
           <a:bodyPr wrap="square" lIns="0" tIns="0" rIns="0" bIns="0" rtlCol="0" anchor="ctr"/>
           <a:lstStyle/>
           <a:p>
-            <a:pPr indent="0" marL="0">
+            <a:pPr marL="0" indent="0">
               <a:buNone/>
             </a:pPr>
             <a:r>
@@ -10687,11 +10347,11 @@
           <a:bodyPr wrap="square" lIns="0" tIns="0" rIns="0" bIns="0" rtlCol="0" anchor="ctr"/>
           <a:lstStyle/>
           <a:p>
-            <a:pPr algn="ctr" indent="0" marL="0">
-              <a:buNone/>
-            </a:pPr>
-            <a:r>
-              <a:rPr lang="en-US" sz="900" b="1" spc="100" kern="0" dirty="0">
+            <a:pPr marL="0" indent="0" algn="ctr">
+              <a:buNone/>
+            </a:pPr>
+            <a:r>
+              <a:rPr lang="en-US" sz="900" b="1" kern="0" spc="100" dirty="0">
                 <a:solidFill>
                   <a:srgbClr val="FFFFFF"/>
                 </a:solidFill>
@@ -10707,14 +10367,14 @@
       </p:sp>
       <p:pic>
         <p:nvPicPr>
-          <p:cNvPr id="6" name="Image 0" descr="preencoded.png">    </p:cNvPr>
+          <p:cNvPr id="6" name="Image 0" descr="preencoded.png"/>
           <p:cNvPicPr>
             <a:picLocks noChangeAspect="1"/>
           </p:cNvPicPr>
           <p:nvPr/>
         </p:nvPicPr>
         <p:blipFill>
-          <a:blip r:embed="rId1"/>
+          <a:blip r:embed="rId3"/>
           <a:stretch>
             <a:fillRect/>
           </a:stretch>
@@ -10792,7 +10452,7 @@
           <a:bodyPr wrap="square" lIns="0" tIns="0" rIns="0" bIns="0" rtlCol="0" anchor="ctr"/>
           <a:lstStyle/>
           <a:p>
-            <a:pPr algn="ctr" indent="0" marL="0">
+            <a:pPr marL="0" indent="0" algn="ctr">
               <a:buNone/>
             </a:pPr>
             <a:r>
@@ -10831,7 +10491,7 @@
           <a:bodyPr wrap="square" lIns="0" tIns="0" rIns="0" bIns="0" rtlCol="0" anchor="ctr"/>
           <a:lstStyle/>
           <a:p>
-            <a:pPr indent="0" marL="0">
+            <a:pPr marL="0" indent="0">
               <a:buNone/>
             </a:pPr>
             <a:r>
@@ -10870,7 +10530,7 @@
           <a:bodyPr wrap="square" lIns="0" tIns="0" rIns="0" bIns="0" rtlCol="0" anchor="t"/>
           <a:lstStyle/>
           <a:p>
-            <a:pPr indent="0" marL="0">
+            <a:pPr marL="0" indent="0">
               <a:lnSpc>
                 <a:spcPct val="108000"/>
               </a:lnSpc>
@@ -10954,7 +10614,7 @@
           <a:bodyPr wrap="square" lIns="0" tIns="0" rIns="0" bIns="0" rtlCol="0" anchor="ctr"/>
           <a:lstStyle/>
           <a:p>
-            <a:pPr algn="ctr" indent="0" marL="0">
+            <a:pPr marL="0" indent="0" algn="ctr">
               <a:buNone/>
             </a:pPr>
             <a:r>
@@ -10993,7 +10653,7 @@
           <a:bodyPr wrap="square" lIns="0" tIns="0" rIns="0" bIns="0" rtlCol="0" anchor="ctr"/>
           <a:lstStyle/>
           <a:p>
-            <a:pPr indent="0" marL="0">
+            <a:pPr marL="0" indent="0">
               <a:buNone/>
             </a:pPr>
             <a:r>
@@ -11032,7 +10692,7 @@
           <a:bodyPr wrap="square" lIns="0" tIns="0" rIns="0" bIns="0" rtlCol="0" anchor="t"/>
           <a:lstStyle/>
           <a:p>
-            <a:pPr indent="0" marL="0">
+            <a:pPr marL="0" indent="0">
               <a:lnSpc>
                 <a:spcPct val="108000"/>
               </a:lnSpc>
@@ -11116,7 +10776,7 @@
           <a:bodyPr wrap="square" lIns="0" tIns="0" rIns="0" bIns="0" rtlCol="0" anchor="ctr"/>
           <a:lstStyle/>
           <a:p>
-            <a:pPr algn="ctr" indent="0" marL="0">
+            <a:pPr marL="0" indent="0" algn="ctr">
               <a:buNone/>
             </a:pPr>
             <a:r>
@@ -11155,7 +10815,7 @@
           <a:bodyPr wrap="square" lIns="0" tIns="0" rIns="0" bIns="0" rtlCol="0" anchor="ctr"/>
           <a:lstStyle/>
           <a:p>
-            <a:pPr indent="0" marL="0">
+            <a:pPr marL="0" indent="0">
               <a:buNone/>
             </a:pPr>
             <a:r>
@@ -11194,7 +10854,7 @@
           <a:bodyPr wrap="square" lIns="0" tIns="0" rIns="0" bIns="0" rtlCol="0" anchor="t"/>
           <a:lstStyle/>
           <a:p>
-            <a:pPr indent="0" marL="0">
+            <a:pPr marL="0" indent="0">
               <a:lnSpc>
                 <a:spcPct val="108000"/>
               </a:lnSpc>
@@ -11278,7 +10938,7 @@
           <a:bodyPr wrap="square" lIns="0" tIns="0" rIns="0" bIns="0" rtlCol="0" anchor="ctr"/>
           <a:lstStyle/>
           <a:p>
-            <a:pPr algn="ctr" indent="0" marL="0">
+            <a:pPr marL="0" indent="0" algn="ctr">
               <a:buNone/>
             </a:pPr>
             <a:r>
@@ -11317,7 +10977,7 @@
           <a:bodyPr wrap="square" lIns="0" tIns="0" rIns="0" bIns="0" rtlCol="0" anchor="ctr"/>
           <a:lstStyle/>
           <a:p>
-            <a:pPr indent="0" marL="0">
+            <a:pPr marL="0" indent="0">
               <a:buNone/>
             </a:pPr>
             <a:r>
@@ -11356,7 +11016,7 @@
           <a:bodyPr wrap="square" lIns="0" tIns="0" rIns="0" bIns="0" rtlCol="0" anchor="t"/>
           <a:lstStyle/>
           <a:p>
-            <a:pPr indent="0" marL="0">
+            <a:pPr marL="0" indent="0">
               <a:lnSpc>
                 <a:spcPct val="108000"/>
               </a:lnSpc>
@@ -11386,7 +11046,7 @@
         <p:spPr>
           <a:xfrm>
             <a:off x="566928" y="5074920"/>
-            <a:ext cx="11064240" cy="1051560"/>
+            <a:ext cx="11247120" cy="1051560"/>
           </a:xfrm>
           <a:prstGeom prst="roundRect">
             <a:avLst>
@@ -11420,11 +11080,11 @@
           <a:bodyPr wrap="square" lIns="0" tIns="0" rIns="0" bIns="0" rtlCol="0" anchor="ctr"/>
           <a:lstStyle/>
           <a:p>
-            <a:pPr indent="0" marL="0">
-              <a:buNone/>
-            </a:pPr>
-            <a:r>
-              <a:rPr lang="en-US" sz="950" b="1" spc="150" kern="0" dirty="0">
+            <a:pPr marL="0" indent="0">
+              <a:buNone/>
+            </a:pPr>
+            <a:r>
+              <a:rPr lang="en-US" sz="950" b="1" kern="0" spc="150" dirty="0">
                 <a:solidFill>
                   <a:srgbClr val="FFFFFF"/>
                 </a:solidFill>
@@ -11459,7 +11119,7 @@
           <a:bodyPr wrap="square" lIns="0" tIns="0" rIns="0" bIns="0" rtlCol="0" anchor="ctr"/>
           <a:lstStyle/>
           <a:p>
-            <a:pPr indent="0" marL="0">
+            <a:pPr marL="0" indent="0">
               <a:lnSpc>
                 <a:spcPct val="112000"/>
               </a:lnSpc>
@@ -11482,7 +11142,7 @@
       </p:sp>
       <p:sp>
         <p:nvSpPr>
-          <p:cNvPr id="25" name="Slide Number Placeholder 0"/>
+          <p:cNvPr id="30" name="Slide Number Placeholder 0"/>
           <p:cNvSpPr>
             <a:spLocks noGrp="1"/>
           </p:cNvSpPr>
@@ -11500,7 +11160,7 @@
           </a:prstGeom>
           <a:extLst>
             <a:ext uri="{C572A759-6A51-4108-AA02-DFA0A04FC94B}">
-              <ma14:wrappingTextBoxFlag xmlns:ma14="http://schemas.microsoft.com/office/mac/drawingml/2011/main" val="0"/>
+              <ma14:wrappingTextBoxFlag xmlns="" xmlns:ma14="http://schemas.microsoft.com/office/mac/drawingml/2011/main" val="0"/>
             </a:ext>
           </a:extLst>
         </p:spPr>
@@ -11521,7 +11181,7 @@
           <a:p>
             <a:pPr algn="l"/>
             <a:fld id="{F7021451-1387-4CA6-816F-3879F97B5CBC}" type="slidenum">
-              <a:rPr b="0" lang="en-US"/>
+              <a:rPr lang="en-US" b="0"/>
               <a:t>19</a:t>
             </a:fld>
             <a:endParaRPr lang="en-US"/>
@@ -11596,7 +11256,7 @@
           <a:bodyPr wrap="square" lIns="0" tIns="0" rIns="0" bIns="0" rtlCol="0" anchor="ctr"/>
           <a:lstStyle/>
           <a:p>
-            <a:pPr indent="0" marL="0">
+            <a:pPr marL="0" indent="0">
               <a:buNone/>
             </a:pPr>
             <a:r>
@@ -11635,7 +11295,7 @@
           <a:bodyPr wrap="square" lIns="0" tIns="0" rIns="0" bIns="0" rtlCol="0" anchor="t"/>
           <a:lstStyle/>
           <a:p>
-            <a:pPr indent="0" marL="0">
+            <a:pPr marL="0" indent="0">
               <a:lnSpc>
                 <a:spcPct val="100000"/>
               </a:lnSpc>
@@ -11704,11 +11364,11 @@
           <a:bodyPr wrap="square" lIns="0" tIns="0" rIns="0" bIns="0" rtlCol="0" anchor="ctr"/>
           <a:lstStyle/>
           <a:p>
-            <a:pPr algn="ctr" indent="0" marL="0">
-              <a:buNone/>
-            </a:pPr>
-            <a:r>
-              <a:rPr lang="en-US" sz="900" b="1" spc="100" kern="0" dirty="0">
+            <a:pPr marL="0" indent="0" algn="ctr">
+              <a:buNone/>
+            </a:pPr>
+            <a:r>
+              <a:rPr lang="en-US" sz="900" b="1" kern="0" spc="100" dirty="0">
                 <a:solidFill>
                   <a:srgbClr val="5A05F4"/>
                 </a:solidFill>
@@ -11724,14 +11384,14 @@
       </p:sp>
       <p:pic>
         <p:nvPicPr>
-          <p:cNvPr id="7" name="Image 0" descr="preencoded.png">    </p:cNvPr>
+          <p:cNvPr id="7" name="Image 0" descr="preencoded.png"/>
           <p:cNvPicPr>
             <a:picLocks noChangeAspect="1"/>
           </p:cNvPicPr>
           <p:nvPr/>
         </p:nvPicPr>
         <p:blipFill>
-          <a:blip r:embed="rId1"/>
+          <a:blip r:embed="rId3"/>
           <a:stretch>
             <a:fillRect/>
           </a:stretch>
@@ -11809,7 +11469,7 @@
           <a:bodyPr wrap="square" lIns="0" tIns="0" rIns="0" bIns="0" rtlCol="0" anchor="ctr"/>
           <a:lstStyle/>
           <a:p>
-            <a:pPr algn="ctr" indent="0" marL="0">
+            <a:pPr marL="0" indent="0" algn="ctr">
               <a:buNone/>
             </a:pPr>
             <a:r>
@@ -11848,7 +11508,7 @@
           <a:bodyPr wrap="square" lIns="0" tIns="0" rIns="0" bIns="0" rtlCol="0" anchor="ctr"/>
           <a:lstStyle/>
           <a:p>
-            <a:pPr indent="0" marL="0">
+            <a:pPr marL="0" indent="0">
               <a:buNone/>
             </a:pPr>
             <a:r>
@@ -11887,7 +11547,7 @@
           <a:bodyPr wrap="square" lIns="0" tIns="0" rIns="0" bIns="0" rtlCol="0" anchor="t"/>
           <a:lstStyle/>
           <a:p>
-            <a:pPr indent="0" marL="0">
+            <a:pPr marL="0" indent="0">
               <a:lnSpc>
                 <a:spcPct val="108000"/>
               </a:lnSpc>
@@ -11971,7 +11631,7 @@
           <a:bodyPr wrap="square" lIns="0" tIns="0" rIns="0" bIns="0" rtlCol="0" anchor="ctr"/>
           <a:lstStyle/>
           <a:p>
-            <a:pPr algn="ctr" indent="0" marL="0">
+            <a:pPr marL="0" indent="0" algn="ctr">
               <a:buNone/>
             </a:pPr>
             <a:r>
@@ -12010,7 +11670,7 @@
           <a:bodyPr wrap="square" lIns="0" tIns="0" rIns="0" bIns="0" rtlCol="0" anchor="ctr"/>
           <a:lstStyle/>
           <a:p>
-            <a:pPr indent="0" marL="0">
+            <a:pPr marL="0" indent="0">
               <a:buNone/>
             </a:pPr>
             <a:r>
@@ -12049,7 +11709,7 @@
           <a:bodyPr wrap="square" lIns="0" tIns="0" rIns="0" bIns="0" rtlCol="0" anchor="t"/>
           <a:lstStyle/>
           <a:p>
-            <a:pPr indent="0" marL="0">
+            <a:pPr marL="0" indent="0">
               <a:lnSpc>
                 <a:spcPct val="108000"/>
               </a:lnSpc>
@@ -12133,7 +11793,7 @@
           <a:bodyPr wrap="square" lIns="0" tIns="0" rIns="0" bIns="0" rtlCol="0" anchor="ctr"/>
           <a:lstStyle/>
           <a:p>
-            <a:pPr algn="ctr" indent="0" marL="0">
+            <a:pPr marL="0" indent="0" algn="ctr">
               <a:buNone/>
             </a:pPr>
             <a:r>
@@ -12172,7 +11832,7 @@
           <a:bodyPr wrap="square" lIns="0" tIns="0" rIns="0" bIns="0" rtlCol="0" anchor="ctr"/>
           <a:lstStyle/>
           <a:p>
-            <a:pPr indent="0" marL="0">
+            <a:pPr marL="0" indent="0">
               <a:buNone/>
             </a:pPr>
             <a:r>
@@ -12211,7 +11871,7 @@
           <a:bodyPr wrap="square" lIns="0" tIns="0" rIns="0" bIns="0" rtlCol="0" anchor="t"/>
           <a:lstStyle/>
           <a:p>
-            <a:pPr indent="0" marL="0">
+            <a:pPr marL="0" indent="0">
               <a:lnSpc>
                 <a:spcPct val="108000"/>
               </a:lnSpc>
@@ -12295,7 +11955,7 @@
           <a:bodyPr wrap="square" lIns="0" tIns="0" rIns="0" bIns="0" rtlCol="0" anchor="ctr"/>
           <a:lstStyle/>
           <a:p>
-            <a:pPr algn="ctr" indent="0" marL="0">
+            <a:pPr marL="0" indent="0" algn="ctr">
               <a:buNone/>
             </a:pPr>
             <a:r>
@@ -12334,7 +11994,7 @@
           <a:bodyPr wrap="square" lIns="0" tIns="0" rIns="0" bIns="0" rtlCol="0" anchor="ctr"/>
           <a:lstStyle/>
           <a:p>
-            <a:pPr indent="0" marL="0">
+            <a:pPr marL="0" indent="0">
               <a:buNone/>
             </a:pPr>
             <a:r>
@@ -12373,7 +12033,7 @@
           <a:bodyPr wrap="square" lIns="0" tIns="0" rIns="0" bIns="0" rtlCol="0" anchor="t"/>
           <a:lstStyle/>
           <a:p>
-            <a:pPr indent="0" marL="0">
+            <a:pPr marL="0" indent="0">
               <a:lnSpc>
                 <a:spcPct val="108000"/>
               </a:lnSpc>
@@ -12457,7 +12117,7 @@
           <a:bodyPr wrap="square" lIns="0" tIns="0" rIns="0" bIns="0" rtlCol="0" anchor="ctr"/>
           <a:lstStyle/>
           <a:p>
-            <a:pPr algn="ctr" indent="0" marL="0">
+            <a:pPr marL="0" indent="0" algn="ctr">
               <a:buNone/>
             </a:pPr>
             <a:r>
@@ -12496,7 +12156,7 @@
           <a:bodyPr wrap="square" lIns="0" tIns="0" rIns="0" bIns="0" rtlCol="0" anchor="ctr"/>
           <a:lstStyle/>
           <a:p>
-            <a:pPr indent="0" marL="0">
+            <a:pPr marL="0" indent="0">
               <a:buNone/>
             </a:pPr>
             <a:r>
@@ -12535,7 +12195,7 @@
           <a:bodyPr wrap="square" lIns="0" tIns="0" rIns="0" bIns="0" rtlCol="0" anchor="t"/>
           <a:lstStyle/>
           <a:p>
-            <a:pPr indent="0" marL="0">
+            <a:pPr marL="0" indent="0">
               <a:lnSpc>
                 <a:spcPct val="108000"/>
               </a:lnSpc>
@@ -12558,7 +12218,7 @@
       </p:sp>
       <p:sp>
         <p:nvSpPr>
-          <p:cNvPr id="25" name="Slide Number Placeholder 0"/>
+          <p:cNvPr id="33" name="Slide Number Placeholder 0"/>
           <p:cNvSpPr>
             <a:spLocks noGrp="1"/>
           </p:cNvSpPr>
@@ -12576,7 +12236,7 @@
           </a:prstGeom>
           <a:extLst>
             <a:ext uri="{C572A759-6A51-4108-AA02-DFA0A04FC94B}">
-              <ma14:wrappingTextBoxFlag xmlns:ma14="http://schemas.microsoft.com/office/mac/drawingml/2011/main" val="0"/>
+              <ma14:wrappingTextBoxFlag xmlns="" xmlns:ma14="http://schemas.microsoft.com/office/mac/drawingml/2011/main" val="0"/>
             </a:ext>
           </a:extLst>
         </p:spPr>
@@ -12597,7 +12257,7 @@
           <a:p>
             <a:pPr algn="l"/>
             <a:fld id="{F7021451-1387-4CA6-816F-3879F97B5CBC}" type="slidenum">
-              <a:rPr b="0" lang="en-US"/>
+              <a:rPr lang="en-US" b="0"/>
               <a:t>2</a:t>
             </a:fld>
             <a:endParaRPr lang="en-US"/>
@@ -12672,7 +12332,7 @@
           <a:bodyPr wrap="square" lIns="0" tIns="0" rIns="0" bIns="0" rtlCol="0" anchor="ctr"/>
           <a:lstStyle/>
           <a:p>
-            <a:pPr indent="0" marL="0">
+            <a:pPr marL="0" indent="0">
               <a:buNone/>
             </a:pPr>
             <a:r>
@@ -12733,11 +12393,11 @@
           <a:bodyPr wrap="square" lIns="0" tIns="0" rIns="0" bIns="0" rtlCol="0" anchor="ctr"/>
           <a:lstStyle/>
           <a:p>
-            <a:pPr algn="ctr" indent="0" marL="0">
-              <a:buNone/>
-            </a:pPr>
-            <a:r>
-              <a:rPr lang="en-US" sz="900" b="1" spc="100" kern="0" dirty="0">
+            <a:pPr marL="0" indent="0" algn="ctr">
+              <a:buNone/>
+            </a:pPr>
+            <a:r>
+              <a:rPr lang="en-US" sz="900" b="1" kern="0" spc="100" dirty="0">
                 <a:solidFill>
                   <a:srgbClr val="FFFFFF"/>
                 </a:solidFill>
@@ -12753,14 +12413,14 @@
       </p:sp>
       <p:pic>
         <p:nvPicPr>
-          <p:cNvPr id="6" name="Image 0" descr="preencoded.png">    </p:cNvPr>
+          <p:cNvPr id="6" name="Image 0" descr="preencoded.png"/>
           <p:cNvPicPr>
             <a:picLocks noChangeAspect="1"/>
           </p:cNvPicPr>
           <p:nvPr/>
         </p:nvPicPr>
         <p:blipFill>
-          <a:blip r:embed="rId1"/>
+          <a:blip r:embed="rId3"/>
           <a:stretch>
             <a:fillRect/>
           </a:stretch>
@@ -12816,7 +12476,7 @@
           <a:bodyPr wrap="square" lIns="0" tIns="0" rIns="0" bIns="0" rtlCol="0" anchor="ctr"/>
           <a:lstStyle/>
           <a:p>
-            <a:pPr algn="ctr" indent="0" marL="0">
+            <a:pPr marL="0" indent="0" algn="ctr">
               <a:buNone/>
             </a:pPr>
             <a:r>
@@ -12855,7 +12515,7 @@
           <a:bodyPr wrap="square" lIns="0" tIns="0" rIns="0" bIns="0" rtlCol="0" anchor="ctr"/>
           <a:lstStyle/>
           <a:p>
-            <a:pPr indent="0" marL="0">
+            <a:pPr marL="0" indent="0">
               <a:buNone/>
             </a:pPr>
             <a:r>
@@ -12869,9 +12529,6 @@
               </a:rPr>
               <a:t>Завести прайс  </a:t>
             </a:r>
-            <a:pPr indent="0" marL="0">
-              <a:buNone/>
-            </a:pPr>
             <a:r>
               <a:rPr lang="en-US" sz="1200" dirty="0">
                 <a:solidFill>
@@ -12928,7 +12585,7 @@
           <a:bodyPr wrap="square" lIns="0" tIns="0" rIns="0" bIns="0" rtlCol="0" anchor="ctr"/>
           <a:lstStyle/>
           <a:p>
-            <a:pPr algn="ctr" indent="0" marL="0">
+            <a:pPr marL="0" indent="0" algn="ctr">
               <a:buNone/>
             </a:pPr>
             <a:r>
@@ -12967,7 +12624,7 @@
           <a:bodyPr wrap="square" lIns="0" tIns="0" rIns="0" bIns="0" rtlCol="0" anchor="ctr"/>
           <a:lstStyle/>
           <a:p>
-            <a:pPr indent="0" marL="0">
+            <a:pPr marL="0" indent="0">
               <a:buNone/>
             </a:pPr>
             <a:r>
@@ -12981,9 +12638,6 @@
               </a:rPr>
               <a:t>Порахувати вартість  </a:t>
             </a:r>
-            <a:pPr indent="0" marL="0">
-              <a:buNone/>
-            </a:pPr>
             <a:r>
               <a:rPr lang="en-US" sz="1200" dirty="0">
                 <a:solidFill>
@@ -13040,7 +12694,7 @@
           <a:bodyPr wrap="square" lIns="0" tIns="0" rIns="0" bIns="0" rtlCol="0" anchor="ctr"/>
           <a:lstStyle/>
           <a:p>
-            <a:pPr algn="ctr" indent="0" marL="0">
+            <a:pPr marL="0" indent="0" algn="ctr">
               <a:buNone/>
             </a:pPr>
             <a:r>
@@ -13079,7 +12733,7 @@
           <a:bodyPr wrap="square" lIns="0" tIns="0" rIns="0" bIns="0" rtlCol="0" anchor="ctr"/>
           <a:lstStyle/>
           <a:p>
-            <a:pPr indent="0" marL="0">
+            <a:pPr marL="0" indent="0">
               <a:buNone/>
             </a:pPr>
             <a:r>
@@ -13093,9 +12747,6 @@
               </a:rPr>
               <a:t>Перевірити атрибуцію  </a:t>
             </a:r>
-            <a:pPr indent="0" marL="0">
-              <a:buNone/>
-            </a:pPr>
             <a:r>
               <a:rPr lang="en-US" sz="1200" dirty="0">
                 <a:solidFill>
@@ -13152,7 +12803,7 @@
           <a:bodyPr wrap="square" lIns="0" tIns="0" rIns="0" bIns="0" rtlCol="0" anchor="ctr"/>
           <a:lstStyle/>
           <a:p>
-            <a:pPr algn="ctr" indent="0" marL="0">
+            <a:pPr marL="0" indent="0" algn="ctr">
               <a:buNone/>
             </a:pPr>
             <a:r>
@@ -13191,7 +12842,7 @@
           <a:bodyPr wrap="square" lIns="0" tIns="0" rIns="0" bIns="0" rtlCol="0" anchor="ctr"/>
           <a:lstStyle/>
           <a:p>
-            <a:pPr indent="0" marL="0">
+            <a:pPr marL="0" indent="0">
               <a:buNone/>
             </a:pPr>
             <a:r>
@@ -13205,9 +12856,6 @@
               </a:rPr>
               <a:t>Оживити /cost  </a:t>
             </a:r>
-            <a:pPr indent="0" marL="0">
-              <a:buNone/>
-            </a:pPr>
             <a:r>
               <a:rPr lang="en-US" sz="1200" dirty="0">
                 <a:solidFill>
@@ -13264,7 +12912,7 @@
           <a:bodyPr wrap="square" lIns="0" tIns="0" rIns="0" bIns="0" rtlCol="0" anchor="ctr"/>
           <a:lstStyle/>
           <a:p>
-            <a:pPr algn="ctr" indent="0" marL="0">
+            <a:pPr marL="0" indent="0" algn="ctr">
               <a:buNone/>
             </a:pPr>
             <a:r>
@@ -13303,7 +12951,7 @@
           <a:bodyPr wrap="square" lIns="0" tIns="0" rIns="0" bIns="0" rtlCol="0" anchor="ctr"/>
           <a:lstStyle/>
           <a:p>
-            <a:pPr indent="0" marL="0">
+            <a:pPr marL="0" indent="0">
               <a:buNone/>
             </a:pPr>
             <a:r>
@@ -13317,9 +12965,6 @@
               </a:rPr>
               <a:t>Budget-політика · опційно  </a:t>
             </a:r>
-            <a:pPr indent="0" marL="0">
-              <a:buNone/>
-            </a:pPr>
             <a:r>
               <a:rPr lang="en-US" sz="1200" dirty="0">
                 <a:solidFill>
@@ -13355,7 +13000,7 @@
           </a:prstGeom>
           <a:extLst>
             <a:ext uri="{C572A759-6A51-4108-AA02-DFA0A04FC94B}">
-              <ma14:wrappingTextBoxFlag xmlns:ma14="http://schemas.microsoft.com/office/mac/drawingml/2011/main" val="0"/>
+              <ma14:wrappingTextBoxFlag xmlns="" xmlns:ma14="http://schemas.microsoft.com/office/mac/drawingml/2011/main" val="0"/>
             </a:ext>
           </a:extLst>
         </p:spPr>
@@ -13376,7 +13021,7 @@
           <a:p>
             <a:pPr algn="l"/>
             <a:fld id="{F7021451-1387-4CA6-816F-3879F97B5CBC}" type="slidenum">
-              <a:rPr b="0" lang="en-US"/>
+              <a:rPr lang="en-US" b="0"/>
               <a:t>20</a:t>
             </a:fld>
             <a:endParaRPr lang="en-US"/>
@@ -13429,11 +13074,11 @@
           <a:bodyPr wrap="square" lIns="0" tIns="0" rIns="0" bIns="0" rtlCol="0" anchor="ctr"/>
           <a:lstStyle/>
           <a:p>
-            <a:pPr indent="0" marL="0">
-              <a:buNone/>
-            </a:pPr>
-            <a:r>
-              <a:rPr lang="en-US" sz="1200" b="1" spc="400" kern="0" dirty="0">
+            <a:pPr marL="0" indent="0">
+              <a:buNone/>
+            </a:pPr>
+            <a:r>
+              <a:rPr lang="en-US" sz="1200" b="1" kern="0" spc="400" dirty="0">
                 <a:solidFill>
                   <a:srgbClr val="FFFFFF"/>
                 </a:solidFill>
@@ -13468,7 +13113,7 @@
           <a:bodyPr wrap="square" lIns="0" tIns="0" rIns="0" bIns="0" rtlCol="0" anchor="ctr"/>
           <a:lstStyle/>
           <a:p>
-            <a:pPr indent="0" marL="0">
+            <a:pPr marL="0" indent="0">
               <a:buNone/>
             </a:pPr>
             <a:r>
@@ -13507,7 +13152,7 @@
           <a:bodyPr wrap="square" lIns="0" tIns="0" rIns="0" bIns="0" rtlCol="0" anchor="t"/>
           <a:lstStyle/>
           <a:p>
-            <a:pPr indent="0" marL="0">
+            <a:pPr marL="0" indent="0">
               <a:buNone/>
             </a:pPr>
             <a:r>
@@ -13593,7 +13238,7 @@
           <a:bodyPr wrap="square" lIns="0" tIns="0" rIns="0" bIns="0" rtlCol="0" anchor="ctr"/>
           <a:lstStyle/>
           <a:p>
-            <a:pPr indent="0" marL="0">
+            <a:pPr marL="0" indent="0">
               <a:buNone/>
             </a:pPr>
             <a:r>
@@ -13659,11 +13304,11 @@
           <a:bodyPr wrap="square" lIns="0" tIns="0" rIns="0" bIns="0" rtlCol="0" anchor="ctr"/>
           <a:lstStyle/>
           <a:p>
-            <a:pPr algn="ctr" indent="0" marL="0">
-              <a:buNone/>
-            </a:pPr>
-            <a:r>
-              <a:rPr lang="en-US" sz="900" b="1" spc="100" kern="0" dirty="0">
+            <a:pPr marL="0" indent="0" algn="ctr">
+              <a:buNone/>
+            </a:pPr>
+            <a:r>
+              <a:rPr lang="en-US" sz="900" b="1" kern="0" spc="100" dirty="0">
                 <a:solidFill>
                   <a:srgbClr val="1A4FBF"/>
                 </a:solidFill>
@@ -13679,14 +13324,14 @@
       </p:sp>
       <p:pic>
         <p:nvPicPr>
-          <p:cNvPr id="6" name="Image 0" descr="preencoded.png">    </p:cNvPr>
+          <p:cNvPr id="6" name="Image 0" descr="preencoded.png"/>
           <p:cNvPicPr>
             <a:picLocks noChangeAspect="1"/>
           </p:cNvPicPr>
           <p:nvPr/>
         </p:nvPicPr>
         <p:blipFill>
-          <a:blip r:embed="rId1"/>
+          <a:blip r:embed="rId3"/>
           <a:stretch>
             <a:fillRect/>
           </a:stretch>
@@ -13744,7 +13389,7 @@
           <a:bodyPr wrap="square" lIns="0" tIns="0" rIns="0" bIns="0" rtlCol="0" anchor="ctr"/>
           <a:lstStyle/>
           <a:p>
-            <a:pPr indent="0" marL="0">
+            <a:pPr marL="0" indent="0">
               <a:buNone/>
             </a:pPr>
             <a:r>
@@ -13783,7 +13428,7 @@
           <a:bodyPr wrap="square" lIns="0" tIns="0" rIns="0" bIns="0" rtlCol="0" anchor="t"/>
           <a:lstStyle/>
           <a:p>
-            <a:pPr indent="0" marL="0">
+            <a:pPr marL="0" indent="0">
               <a:lnSpc>
                 <a:spcPct val="108000"/>
               </a:lnSpc>
@@ -13847,7 +13492,7 @@
           <a:bodyPr wrap="square" lIns="0" tIns="0" rIns="0" bIns="0" rtlCol="0" anchor="ctr"/>
           <a:lstStyle/>
           <a:p>
-            <a:pPr indent="0" marL="0">
+            <a:pPr marL="0" indent="0">
               <a:buNone/>
             </a:pPr>
             <a:r>
@@ -13886,7 +13531,7 @@
           <a:bodyPr wrap="square" lIns="0" tIns="0" rIns="0" bIns="0" rtlCol="0" anchor="t"/>
           <a:lstStyle/>
           <a:p>
-            <a:pPr indent="0" marL="0">
+            <a:pPr marL="0" indent="0">
               <a:lnSpc>
                 <a:spcPct val="108000"/>
               </a:lnSpc>
@@ -13950,7 +13595,7 @@
           <a:bodyPr wrap="square" lIns="0" tIns="0" rIns="0" bIns="0" rtlCol="0" anchor="ctr"/>
           <a:lstStyle/>
           <a:p>
-            <a:pPr indent="0" marL="0">
+            <a:pPr marL="0" indent="0">
               <a:buNone/>
             </a:pPr>
             <a:r>
@@ -13989,7 +13634,7 @@
           <a:bodyPr wrap="square" lIns="0" tIns="0" rIns="0" bIns="0" rtlCol="0" anchor="t"/>
           <a:lstStyle/>
           <a:p>
-            <a:pPr indent="0" marL="0">
+            <a:pPr marL="0" indent="0">
               <a:lnSpc>
                 <a:spcPct val="108000"/>
               </a:lnSpc>
@@ -14058,7 +13703,7 @@
           <a:bodyPr wrap="square" lIns="0" tIns="0" rIns="0" bIns="0" rtlCol="0" anchor="ctr"/>
           <a:lstStyle/>
           <a:p>
-            <a:pPr indent="0" marL="0">
+            <a:pPr marL="0" indent="0">
               <a:lnSpc>
                 <a:spcPct val="112000"/>
               </a:lnSpc>
@@ -14099,7 +13744,7 @@
           </a:prstGeom>
           <a:extLst>
             <a:ext uri="{C572A759-6A51-4108-AA02-DFA0A04FC94B}">
-              <ma14:wrappingTextBoxFlag xmlns:ma14="http://schemas.microsoft.com/office/mac/drawingml/2011/main" val="0"/>
+              <ma14:wrappingTextBoxFlag xmlns="" xmlns:ma14="http://schemas.microsoft.com/office/mac/drawingml/2011/main" val="0"/>
             </a:ext>
           </a:extLst>
         </p:spPr>
@@ -14120,7 +13765,7 @@
           <a:p>
             <a:pPr algn="l"/>
             <a:fld id="{F7021451-1387-4CA6-816F-3879F97B5CBC}" type="slidenum">
-              <a:rPr b="0" lang="en-US"/>
+              <a:rPr lang="en-US" b="0"/>
               <a:t>22</a:t>
             </a:fld>
             <a:endParaRPr lang="en-US"/>
@@ -14195,7 +13840,7 @@
           <a:bodyPr wrap="square" lIns="0" tIns="0" rIns="0" bIns="0" rtlCol="0" anchor="ctr"/>
           <a:lstStyle/>
           <a:p>
-            <a:pPr indent="0" marL="0">
+            <a:pPr marL="0" indent="0">
               <a:buNone/>
             </a:pPr>
             <a:r>
@@ -14261,11 +13906,11 @@
           <a:bodyPr wrap="square" lIns="0" tIns="0" rIns="0" bIns="0" rtlCol="0" anchor="ctr"/>
           <a:lstStyle/>
           <a:p>
-            <a:pPr algn="ctr" indent="0" marL="0">
-              <a:buNone/>
-            </a:pPr>
-            <a:r>
-              <a:rPr lang="en-US" sz="900" b="1" spc="100" kern="0" dirty="0">
+            <a:pPr marL="0" indent="0" algn="ctr">
+              <a:buNone/>
+            </a:pPr>
+            <a:r>
+              <a:rPr lang="en-US" sz="900" b="1" kern="0" spc="100" dirty="0">
                 <a:solidFill>
                   <a:srgbClr val="1A4FBF"/>
                 </a:solidFill>
@@ -14281,14 +13926,14 @@
       </p:sp>
       <p:pic>
         <p:nvPicPr>
-          <p:cNvPr id="6" name="Image 0" descr="preencoded.png">    </p:cNvPr>
+          <p:cNvPr id="6" name="Image 0" descr="preencoded.png"/>
           <p:cNvPicPr>
             <a:picLocks noChangeAspect="1"/>
           </p:cNvPicPr>
           <p:nvPr/>
         </p:nvPicPr>
         <p:blipFill>
-          <a:blip r:embed="rId1"/>
+          <a:blip r:embed="rId3"/>
           <a:stretch>
             <a:fillRect/>
           </a:stretch>
@@ -14418,7 +14063,7 @@
           <a:bodyPr wrap="square" lIns="0" tIns="0" rIns="0" bIns="0" rtlCol="0" anchor="ctr"/>
           <a:lstStyle/>
           <a:p>
-            <a:pPr indent="0" marL="0">
+            <a:pPr marL="0" indent="0">
               <a:buNone/>
             </a:pPr>
             <a:r>
@@ -14524,7 +14169,7 @@
           <a:bodyPr wrap="square" lIns="0" tIns="0" rIns="0" bIns="0" rtlCol="0" anchor="ctr"/>
           <a:lstStyle/>
           <a:p>
-            <a:pPr indent="0" marL="0">
+            <a:pPr marL="0" indent="0">
               <a:buNone/>
             </a:pPr>
             <a:r>
@@ -14630,7 +14275,7 @@
           <a:bodyPr wrap="square" lIns="0" tIns="0" rIns="0" bIns="0" rtlCol="0" anchor="ctr"/>
           <a:lstStyle/>
           <a:p>
-            <a:pPr indent="0" marL="0">
+            <a:pPr marL="0" indent="0">
               <a:buNone/>
             </a:pPr>
             <a:r>
@@ -14736,7 +14381,7 @@
           <a:bodyPr wrap="square" lIns="0" tIns="0" rIns="0" bIns="0" rtlCol="0" anchor="ctr"/>
           <a:lstStyle/>
           <a:p>
-            <a:pPr indent="0" marL="0">
+            <a:pPr marL="0" indent="0">
               <a:buNone/>
             </a:pPr>
             <a:r>
@@ -14775,7 +14420,7 @@
           <a:bodyPr wrap="square" lIns="0" tIns="0" rIns="0" bIns="0" rtlCol="0" anchor="ctr"/>
           <a:lstStyle/>
           <a:p>
-            <a:pPr indent="0" marL="0">
+            <a:pPr marL="0" indent="0">
               <a:buNone/>
             </a:pPr>
             <a:r>
@@ -14813,7 +14458,7 @@
           </a:prstGeom>
           <a:extLst>
             <a:ext uri="{C572A759-6A51-4108-AA02-DFA0A04FC94B}">
-              <ma14:wrappingTextBoxFlag xmlns:ma14="http://schemas.microsoft.com/office/mac/drawingml/2011/main" val="0"/>
+              <ma14:wrappingTextBoxFlag xmlns="" xmlns:ma14="http://schemas.microsoft.com/office/mac/drawingml/2011/main" val="0"/>
             </a:ext>
           </a:extLst>
         </p:spPr>
@@ -14834,7 +14479,7 @@
           <a:p>
             <a:pPr algn="l"/>
             <a:fld id="{F7021451-1387-4CA6-816F-3879F97B5CBC}" type="slidenum">
-              <a:rPr b="0" lang="en-US"/>
+              <a:rPr lang="en-US" b="0"/>
               <a:t>23</a:t>
             </a:fld>
             <a:endParaRPr lang="en-US"/>
@@ -14909,7 +14554,7 @@
           <a:bodyPr wrap="square" lIns="0" tIns="0" rIns="0" bIns="0" rtlCol="0" anchor="ctr"/>
           <a:lstStyle/>
           <a:p>
-            <a:pPr indent="0" marL="0">
+            <a:pPr marL="0" indent="0">
               <a:buNone/>
             </a:pPr>
             <a:r>
@@ -14975,11 +14620,11 @@
           <a:bodyPr wrap="square" lIns="0" tIns="0" rIns="0" bIns="0" rtlCol="0" anchor="ctr"/>
           <a:lstStyle/>
           <a:p>
-            <a:pPr algn="ctr" indent="0" marL="0">
-              <a:buNone/>
-            </a:pPr>
-            <a:r>
-              <a:rPr lang="en-US" sz="900" b="1" spc="100" kern="0" dirty="0">
+            <a:pPr marL="0" indent="0" algn="ctr">
+              <a:buNone/>
+            </a:pPr>
+            <a:r>
+              <a:rPr lang="en-US" sz="900" b="1" kern="0" spc="100" dirty="0">
                 <a:solidFill>
                   <a:srgbClr val="1A4FBF"/>
                 </a:solidFill>
@@ -14995,14 +14640,14 @@
       </p:sp>
       <p:pic>
         <p:nvPicPr>
-          <p:cNvPr id="6" name="Image 0" descr="preencoded.png">    </p:cNvPr>
+          <p:cNvPr id="6" name="Image 0" descr="preencoded.png"/>
           <p:cNvPicPr>
             <a:picLocks noChangeAspect="1"/>
           </p:cNvPicPr>
           <p:nvPr/>
         </p:nvPicPr>
         <p:blipFill>
-          <a:blip r:embed="rId1"/>
+          <a:blip r:embed="rId3"/>
           <a:stretch>
             <a:fillRect/>
           </a:stretch>
@@ -15130,7 +14775,7 @@
           <a:bodyPr wrap="square" lIns="0" tIns="0" rIns="0" bIns="0" rtlCol="0" anchor="ctr"/>
           <a:lstStyle/>
           <a:p>
-            <a:pPr indent="0" marL="0">
+            <a:pPr marL="0" indent="0">
               <a:buNone/>
             </a:pPr>
             <a:r>
@@ -15144,9 +14789,6 @@
               </a:rPr>
               <a:t>Нуль замість null у cost_usd   </a:t>
             </a:r>
-            <a:pPr indent="0" marL="0">
-              <a:buNone/>
-            </a:pPr>
             <a:r>
               <a:rPr lang="en-US" sz="1200" dirty="0">
                 <a:solidFill>
@@ -15275,7 +14917,7 @@
           <a:bodyPr wrap="square" lIns="0" tIns="0" rIns="0" bIns="0" rtlCol="0" anchor="ctr"/>
           <a:lstStyle/>
           <a:p>
-            <a:pPr indent="0" marL="0">
+            <a:pPr marL="0" indent="0">
               <a:buNone/>
             </a:pPr>
             <a:r>
@@ -15289,9 +14931,6 @@
               </a:rPr>
               <a:t>AVG по рядках лога   </a:t>
             </a:r>
-            <a:pPr indent="0" marL="0">
-              <a:buNone/>
-            </a:pPr>
             <a:r>
               <a:rPr lang="en-US" sz="1200" dirty="0">
                 <a:solidFill>
@@ -15420,7 +15059,7 @@
           <a:bodyPr wrap="square" lIns="0" tIns="0" rIns="0" bIns="0" rtlCol="0" anchor="ctr"/>
           <a:lstStyle/>
           <a:p>
-            <a:pPr indent="0" marL="0">
+            <a:pPr marL="0" indent="0">
               <a:buNone/>
             </a:pPr>
             <a:r>
@@ -15434,9 +15073,6 @@
               </a:rPr>
               <a:t>Прайс у голові або в вікі   </a:t>
             </a:r>
-            <a:pPr indent="0" marL="0">
-              <a:buNone/>
-            </a:pPr>
             <a:r>
               <a:rPr lang="en-US" sz="1200" dirty="0">
                 <a:solidFill>
@@ -15565,7 +15201,7 @@
           <a:bodyPr wrap="square" lIns="0" tIns="0" rIns="0" bIns="0" rtlCol="0" anchor="ctr"/>
           <a:lstStyle/>
           <a:p>
-            <a:pPr indent="0" marL="0">
+            <a:pPr marL="0" indent="0">
               <a:buNone/>
             </a:pPr>
             <a:r>
@@ -15579,9 +15215,6 @@
               </a:rPr>
               <a:t>Сума без атрибуції   </a:t>
             </a:r>
-            <a:pPr indent="0" marL="0">
-              <a:buNone/>
-            </a:pPr>
             <a:r>
               <a:rPr lang="en-US" sz="1200" dirty="0">
                 <a:solidFill>
@@ -15599,7 +15232,7 @@
       </p:sp>
       <p:sp>
         <p:nvSpPr>
-          <p:cNvPr id="25" name="Slide Number Placeholder 0"/>
+          <p:cNvPr id="27" name="Slide Number Placeholder 0"/>
           <p:cNvSpPr>
             <a:spLocks noGrp="1"/>
           </p:cNvSpPr>
@@ -15617,7 +15250,7 @@
           </a:prstGeom>
           <a:extLst>
             <a:ext uri="{C572A759-6A51-4108-AA02-DFA0A04FC94B}">
-              <ma14:wrappingTextBoxFlag xmlns:ma14="http://schemas.microsoft.com/office/mac/drawingml/2011/main" val="0"/>
+              <ma14:wrappingTextBoxFlag xmlns="" xmlns:ma14="http://schemas.microsoft.com/office/mac/drawingml/2011/main" val="0"/>
             </a:ext>
           </a:extLst>
         </p:spPr>
@@ -15638,7 +15271,7 @@
           <a:p>
             <a:pPr algn="l"/>
             <a:fld id="{F7021451-1387-4CA6-816F-3879F97B5CBC}" type="slidenum">
-              <a:rPr b="0" lang="en-US"/>
+              <a:rPr lang="en-US" b="0"/>
               <a:t>24</a:t>
             </a:fld>
             <a:endParaRPr lang="en-US"/>
@@ -15713,7 +15346,7 @@
           <a:bodyPr wrap="square" lIns="0" tIns="0" rIns="0" bIns="0" rtlCol="0" anchor="ctr"/>
           <a:lstStyle/>
           <a:p>
-            <a:pPr indent="0" marL="0">
+            <a:pPr marL="0" indent="0">
               <a:buNone/>
             </a:pPr>
             <a:r>
@@ -15774,11 +15407,11 @@
           <a:bodyPr wrap="square" lIns="0" tIns="0" rIns="0" bIns="0" rtlCol="0" anchor="ctr"/>
           <a:lstStyle/>
           <a:p>
-            <a:pPr algn="ctr" indent="0" marL="0">
-              <a:buNone/>
-            </a:pPr>
-            <a:r>
-              <a:rPr lang="en-US" sz="900" b="1" spc="100" kern="0" dirty="0">
+            <a:pPr marL="0" indent="0" algn="ctr">
+              <a:buNone/>
+            </a:pPr>
+            <a:r>
+              <a:rPr lang="en-US" sz="900" b="1" kern="0" spc="100" dirty="0">
                 <a:solidFill>
                   <a:srgbClr val="FFFFFF"/>
                 </a:solidFill>
@@ -15794,14 +15427,14 @@
       </p:sp>
       <p:pic>
         <p:nvPicPr>
-          <p:cNvPr id="6" name="Image 0" descr="preencoded.png">    </p:cNvPr>
+          <p:cNvPr id="6" name="Image 0" descr="preencoded.png"/>
           <p:cNvPicPr>
             <a:picLocks noChangeAspect="1"/>
           </p:cNvPicPr>
           <p:nvPr/>
         </p:nvPicPr>
         <p:blipFill>
-          <a:blip r:embed="rId1"/>
+          <a:blip r:embed="rId3"/>
           <a:stretch>
             <a:fillRect/>
           </a:stretch>
@@ -15864,7 +15497,7 @@
           <a:bodyPr wrap="square" lIns="0" tIns="0" rIns="0" bIns="0" rtlCol="0" anchor="ctr"/>
           <a:lstStyle/>
           <a:p>
-            <a:pPr indent="0" marL="0">
+            <a:pPr marL="0" indent="0">
               <a:buNone/>
             </a:pPr>
             <a:r>
@@ -15903,7 +15536,7 @@
           <a:bodyPr wrap="square" lIns="0" tIns="0" rIns="0" bIns="0" rtlCol="0" anchor="ctr"/>
           <a:lstStyle/>
           <a:p>
-            <a:pPr indent="0" marL="0">
+            <a:pPr marL="0" indent="0">
               <a:buNone/>
             </a:pPr>
             <a:r>
@@ -15942,11 +15575,11 @@
           <a:bodyPr wrap="square" lIns="0" tIns="0" rIns="0" bIns="0" rtlCol="0" anchor="ctr"/>
           <a:lstStyle/>
           <a:p>
-            <a:pPr indent="0" marL="0">
-              <a:buNone/>
-            </a:pPr>
-            <a:r>
-              <a:rPr lang="en-US" sz="950" b="1" spc="100" kern="0" dirty="0">
+            <a:pPr marL="0" indent="0">
+              <a:buNone/>
+            </a:pPr>
+            <a:r>
+              <a:rPr lang="en-US" sz="950" b="1" kern="0" spc="100" dirty="0">
                 <a:solidFill>
                   <a:srgbClr val="6B6B6B"/>
                 </a:solidFill>
@@ -15981,7 +15614,7 @@
           <a:bodyPr wrap="square" lIns="0" tIns="0" rIns="0" bIns="0" rtlCol="0" anchor="ctr"/>
           <a:lstStyle/>
           <a:p>
-            <a:pPr indent="0" marL="0">
+            <a:pPr marL="0" indent="0">
               <a:buNone/>
             </a:pPr>
             <a:r>
@@ -15995,9 +15628,6 @@
               </a:rPr>
               <a:t>•  </a:t>
             </a:r>
-            <a:pPr indent="0" marL="0">
-              <a:buNone/>
-            </a:pPr>
             <a:r>
               <a:rPr lang="en-US" sz="1250" dirty="0">
                 <a:solidFill>
@@ -16034,7 +15664,7 @@
           <a:bodyPr wrap="square" lIns="0" tIns="0" rIns="0" bIns="0" rtlCol="0" anchor="ctr"/>
           <a:lstStyle/>
           <a:p>
-            <a:pPr indent="0" marL="0">
+            <a:pPr marL="0" indent="0">
               <a:buNone/>
             </a:pPr>
             <a:r>
@@ -16048,9 +15678,6 @@
               </a:rPr>
               <a:t>•  </a:t>
             </a:r>
-            <a:pPr indent="0" marL="0">
-              <a:buNone/>
-            </a:pPr>
             <a:r>
               <a:rPr lang="en-US" sz="1250" dirty="0">
                 <a:solidFill>
@@ -16087,7 +15714,7 @@
           <a:bodyPr wrap="square" lIns="0" tIns="0" rIns="0" bIns="0" rtlCol="0" anchor="ctr"/>
           <a:lstStyle/>
           <a:p>
-            <a:pPr indent="0" marL="0">
+            <a:pPr marL="0" indent="0">
               <a:buNone/>
             </a:pPr>
             <a:r>
@@ -16101,9 +15728,6 @@
               </a:rPr>
               <a:t>•  </a:t>
             </a:r>
-            <a:pPr indent="0" marL="0">
-              <a:buNone/>
-            </a:pPr>
             <a:r>
               <a:rPr lang="en-US" sz="1250" dirty="0">
                 <a:solidFill>
@@ -16162,7 +15786,7 @@
           <a:bodyPr wrap="square" lIns="0" tIns="0" rIns="0" bIns="0" rtlCol="0" anchor="ctr"/>
           <a:lstStyle/>
           <a:p>
-            <a:pPr indent="0" marL="0">
+            <a:pPr marL="0" indent="0">
               <a:buNone/>
             </a:pPr>
             <a:r>
@@ -16201,7 +15825,7 @@
           <a:bodyPr wrap="square" lIns="0" tIns="0" rIns="0" bIns="0" rtlCol="0" anchor="t"/>
           <a:lstStyle/>
           <a:p>
-            <a:pPr indent="0" marL="0">
+            <a:pPr marL="0" indent="0">
               <a:lnSpc>
                 <a:spcPct val="108000"/>
               </a:lnSpc>
@@ -16221,7 +15845,7 @@
             <a:endParaRPr lang="en-US" sz="1200" dirty="0"/>
           </a:p>
           <a:p>
-            <a:pPr indent="0" marL="0">
+            <a:pPr marL="0" indent="0">
               <a:lnSpc>
                 <a:spcPct val="108000"/>
               </a:lnSpc>
@@ -16262,7 +15886,7 @@
           </a:prstGeom>
           <a:extLst>
             <a:ext uri="{C572A759-6A51-4108-AA02-DFA0A04FC94B}">
-              <ma14:wrappingTextBoxFlag xmlns:ma14="http://schemas.microsoft.com/office/mac/drawingml/2011/main" val="0"/>
+              <ma14:wrappingTextBoxFlag xmlns="" xmlns:ma14="http://schemas.microsoft.com/office/mac/drawingml/2011/main" val="0"/>
             </a:ext>
           </a:extLst>
         </p:spPr>
@@ -16283,7 +15907,7 @@
           <a:p>
             <a:pPr algn="l"/>
             <a:fld id="{F7021451-1387-4CA6-816F-3879F97B5CBC}" type="slidenum">
-              <a:rPr b="0" lang="en-US"/>
+              <a:rPr lang="en-US" b="0"/>
               <a:t>25</a:t>
             </a:fld>
             <a:endParaRPr lang="en-US"/>
@@ -16336,11 +15960,11 @@
           <a:bodyPr wrap="square" lIns="0" tIns="0" rIns="0" bIns="0" rtlCol="0" anchor="ctr"/>
           <a:lstStyle/>
           <a:p>
-            <a:pPr indent="0" marL="0">
-              <a:buNone/>
-            </a:pPr>
-            <a:r>
-              <a:rPr lang="en-US" sz="1200" b="1" spc="400" kern="0" dirty="0">
+            <a:pPr marL="0" indent="0">
+              <a:buNone/>
+            </a:pPr>
+            <a:r>
+              <a:rPr lang="en-US" sz="1200" b="1" kern="0" spc="400" dirty="0">
                 <a:solidFill>
                   <a:srgbClr val="FFFFFF"/>
                 </a:solidFill>
@@ -16375,11 +15999,11 @@
           <a:bodyPr wrap="square" lIns="0" tIns="0" rIns="0" bIns="0" rtlCol="0" anchor="ctr"/>
           <a:lstStyle/>
           <a:p>
-            <a:pPr indent="0" marL="0">
-              <a:buNone/>
-            </a:pPr>
-            <a:r>
-              <a:rPr lang="en-US" sz="1100" b="1" spc="300" kern="0" dirty="0">
+            <a:pPr marL="0" indent="0">
+              <a:buNone/>
+            </a:pPr>
+            <a:r>
+              <a:rPr lang="en-US" sz="1100" b="1" kern="0" spc="300" dirty="0">
                 <a:solidFill>
                   <a:srgbClr val="C4B3F5"/>
                 </a:solidFill>
@@ -16434,7 +16058,7 @@
           <a:bodyPr wrap="square" lIns="0" tIns="0" rIns="0" bIns="0" rtlCol="0" anchor="t"/>
           <a:lstStyle/>
           <a:p>
-            <a:pPr indent="0" marL="0">
+            <a:pPr marL="0" indent="0">
               <a:lnSpc>
                 <a:spcPct val="110000"/>
               </a:lnSpc>
@@ -16496,7 +16120,7 @@
           <a:bodyPr wrap="square" lIns="0" tIns="0" rIns="0" bIns="0" rtlCol="0" anchor="t"/>
           <a:lstStyle/>
           <a:p>
-            <a:pPr indent="0" marL="0">
+            <a:pPr marL="0" indent="0">
               <a:lnSpc>
                 <a:spcPct val="110000"/>
               </a:lnSpc>
@@ -16558,7 +16182,7 @@
           <a:bodyPr wrap="square" lIns="0" tIns="0" rIns="0" bIns="0" rtlCol="0" anchor="t"/>
           <a:lstStyle/>
           <a:p>
-            <a:pPr indent="0" marL="0">
+            <a:pPr marL="0" indent="0">
               <a:lnSpc>
                 <a:spcPct val="110000"/>
               </a:lnSpc>
@@ -16620,7 +16244,7 @@
           <a:bodyPr wrap="square" lIns="0" tIns="0" rIns="0" bIns="0" rtlCol="0" anchor="t"/>
           <a:lstStyle/>
           <a:p>
-            <a:pPr indent="0" marL="0">
+            <a:pPr marL="0" indent="0">
               <a:lnSpc>
                 <a:spcPct val="110000"/>
               </a:lnSpc>
@@ -16682,7 +16306,7 @@
           <a:bodyPr wrap="square" lIns="0" tIns="0" rIns="0" bIns="0" rtlCol="0" anchor="t"/>
           <a:lstStyle/>
           <a:p>
-            <a:pPr indent="0" marL="0">
+            <a:pPr marL="0" indent="0">
               <a:lnSpc>
                 <a:spcPct val="110000"/>
               </a:lnSpc>
@@ -16751,7 +16375,7 @@
           <a:bodyPr wrap="square" lIns="0" tIns="0" rIns="0" bIns="0" rtlCol="0" anchor="ctr"/>
           <a:lstStyle/>
           <a:p>
-            <a:pPr indent="0" marL="0">
+            <a:pPr marL="0" indent="0">
               <a:buNone/>
             </a:pPr>
             <a:r>
@@ -16790,7 +16414,7 @@
           <a:bodyPr wrap="square" lIns="0" tIns="0" rIns="0" bIns="0" rtlCol="0" anchor="t"/>
           <a:lstStyle/>
           <a:p>
-            <a:pPr indent="0" marL="0">
+            <a:pPr marL="0" indent="0">
               <a:lnSpc>
                 <a:spcPct val="115000"/>
               </a:lnSpc>
@@ -16857,11 +16481,11 @@
           <a:bodyPr wrap="square" lIns="0" tIns="0" rIns="0" bIns="0" rtlCol="0" anchor="ctr"/>
           <a:lstStyle/>
           <a:p>
-            <a:pPr indent="0" marL="0">
-              <a:buNone/>
-            </a:pPr>
-            <a:r>
-              <a:rPr lang="en-US" sz="1200" b="1" spc="400" kern="0" dirty="0">
+            <a:pPr marL="0" indent="0">
+              <a:buNone/>
+            </a:pPr>
+            <a:r>
+              <a:rPr lang="en-US" sz="1200" b="1" kern="0" spc="400" dirty="0">
                 <a:solidFill>
                   <a:srgbClr val="FFFFFF"/>
                 </a:solidFill>
@@ -16896,7 +16520,7 @@
           <a:bodyPr wrap="square" lIns="0" tIns="0" rIns="0" bIns="0" rtlCol="0" anchor="ctr"/>
           <a:lstStyle/>
           <a:p>
-            <a:pPr indent="0" marL="0">
+            <a:pPr marL="0" indent="0">
               <a:buNone/>
             </a:pPr>
             <a:r>
@@ -16982,7 +16606,7 @@
           <a:bodyPr wrap="square" lIns="0" tIns="0" rIns="0" bIns="0" rtlCol="0" anchor="ctr"/>
           <a:lstStyle/>
           <a:p>
-            <a:pPr indent="0" marL="0">
+            <a:pPr marL="0" indent="0">
               <a:buNone/>
             </a:pPr>
             <a:r>
@@ -17048,11 +16672,11 @@
           <a:bodyPr wrap="square" lIns="0" tIns="0" rIns="0" bIns="0" rtlCol="0" anchor="ctr"/>
           <a:lstStyle/>
           <a:p>
-            <a:pPr algn="ctr" indent="0" marL="0">
-              <a:buNone/>
-            </a:pPr>
-            <a:r>
-              <a:rPr lang="en-US" sz="900" b="1" spc="100" kern="0" dirty="0">
+            <a:pPr marL="0" indent="0" algn="ctr">
+              <a:buNone/>
+            </a:pPr>
+            <a:r>
+              <a:rPr lang="en-US" sz="900" b="1" kern="0" spc="100" dirty="0">
                 <a:solidFill>
                   <a:srgbClr val="5A05F4"/>
                 </a:solidFill>
@@ -17068,14 +16692,14 @@
       </p:sp>
       <p:pic>
         <p:nvPicPr>
-          <p:cNvPr id="6" name="Image 0" descr="preencoded.png">    </p:cNvPr>
+          <p:cNvPr id="6" name="Image 0" descr="preencoded.png"/>
           <p:cNvPicPr>
             <a:picLocks noChangeAspect="1"/>
           </p:cNvPicPr>
           <p:nvPr/>
         </p:nvPicPr>
         <p:blipFill>
-          <a:blip r:embed="rId1"/>
+          <a:blip r:embed="rId3"/>
           <a:stretch>
             <a:fillRect/>
           </a:stretch>
@@ -17153,7 +16777,7 @@
           <a:bodyPr wrap="square" lIns="0" tIns="0" rIns="0" bIns="0" rtlCol="0" anchor="ctr"/>
           <a:lstStyle/>
           <a:p>
-            <a:pPr algn="ctr" indent="0" marL="0">
+            <a:pPr marL="0" indent="0" algn="ctr">
               <a:buNone/>
             </a:pPr>
             <a:r>
@@ -17192,7 +16816,7 @@
           <a:bodyPr wrap="square" lIns="0" tIns="0" rIns="0" bIns="0" rtlCol="0" anchor="ctr"/>
           <a:lstStyle/>
           <a:p>
-            <a:pPr indent="0" marL="0">
+            <a:pPr marL="0" indent="0">
               <a:buNone/>
             </a:pPr>
             <a:r>
@@ -17273,7 +16897,7 @@
           <a:bodyPr wrap="square" lIns="0" tIns="0" rIns="0" bIns="0" rtlCol="0" anchor="ctr"/>
           <a:lstStyle/>
           <a:p>
-            <a:pPr algn="ctr" indent="0" marL="0">
+            <a:pPr marL="0" indent="0" algn="ctr">
               <a:buNone/>
             </a:pPr>
             <a:r>
@@ -17312,7 +16936,7 @@
           <a:bodyPr wrap="square" lIns="0" tIns="0" rIns="0" bIns="0" rtlCol="0" anchor="ctr"/>
           <a:lstStyle/>
           <a:p>
-            <a:pPr indent="0" marL="0">
+            <a:pPr marL="0" indent="0">
               <a:buNone/>
             </a:pPr>
             <a:r>
@@ -17393,7 +17017,7 @@
           <a:bodyPr wrap="square" lIns="0" tIns="0" rIns="0" bIns="0" rtlCol="0" anchor="ctr"/>
           <a:lstStyle/>
           <a:p>
-            <a:pPr algn="ctr" indent="0" marL="0">
+            <a:pPr marL="0" indent="0" algn="ctr">
               <a:buNone/>
             </a:pPr>
             <a:r>
@@ -17432,7 +17056,7 @@
           <a:bodyPr wrap="square" lIns="0" tIns="0" rIns="0" bIns="0" rtlCol="0" anchor="ctr"/>
           <a:lstStyle/>
           <a:p>
-            <a:pPr indent="0" marL="0">
+            <a:pPr marL="0" indent="0">
               <a:buNone/>
             </a:pPr>
             <a:r>
@@ -17513,7 +17137,7 @@
           <a:bodyPr wrap="square" lIns="0" tIns="0" rIns="0" bIns="0" rtlCol="0" anchor="ctr"/>
           <a:lstStyle/>
           <a:p>
-            <a:pPr algn="ctr" indent="0" marL="0">
+            <a:pPr marL="0" indent="0" algn="ctr">
               <a:buNone/>
             </a:pPr>
             <a:r>
@@ -17552,7 +17176,7 @@
           <a:bodyPr wrap="square" lIns="0" tIns="0" rIns="0" bIns="0" rtlCol="0" anchor="ctr"/>
           <a:lstStyle/>
           <a:p>
-            <a:pPr indent="0" marL="0">
+            <a:pPr marL="0" indent="0">
               <a:buNone/>
             </a:pPr>
             <a:r>
@@ -17633,7 +17257,7 @@
           <a:bodyPr wrap="square" lIns="0" tIns="0" rIns="0" bIns="0" rtlCol="0" anchor="ctr"/>
           <a:lstStyle/>
           <a:p>
-            <a:pPr algn="ctr" indent="0" marL="0">
+            <a:pPr marL="0" indent="0" algn="ctr">
               <a:buNone/>
             </a:pPr>
             <a:r>
@@ -17672,7 +17296,7 @@
           <a:bodyPr wrap="square" lIns="0" tIns="0" rIns="0" bIns="0" rtlCol="0" anchor="ctr"/>
           <a:lstStyle/>
           <a:p>
-            <a:pPr indent="0" marL="0">
+            <a:pPr marL="0" indent="0">
               <a:buNone/>
             </a:pPr>
             <a:r>
@@ -17753,7 +17377,7 @@
           <a:bodyPr wrap="square" lIns="0" tIns="0" rIns="0" bIns="0" rtlCol="0" anchor="ctr"/>
           <a:lstStyle/>
           <a:p>
-            <a:pPr algn="ctr" indent="0" marL="0">
+            <a:pPr marL="0" indent="0" algn="ctr">
               <a:buNone/>
             </a:pPr>
             <a:r>
@@ -17792,7 +17416,7 @@
           <a:bodyPr wrap="square" lIns="0" tIns="0" rIns="0" bIns="0" rtlCol="0" anchor="ctr"/>
           <a:lstStyle/>
           <a:p>
-            <a:pPr indent="0" marL="0">
+            <a:pPr marL="0" indent="0">
               <a:buNone/>
             </a:pPr>
             <a:r>
@@ -17873,7 +17497,7 @@
           <a:bodyPr wrap="square" lIns="0" tIns="0" rIns="0" bIns="0" rtlCol="0" anchor="ctr"/>
           <a:lstStyle/>
           <a:p>
-            <a:pPr algn="ctr" indent="0" marL="0">
+            <a:pPr marL="0" indent="0" algn="ctr">
               <a:buNone/>
             </a:pPr>
             <a:r>
@@ -17912,7 +17536,7 @@
           <a:bodyPr wrap="square" lIns="0" tIns="0" rIns="0" bIns="0" rtlCol="0" anchor="ctr"/>
           <a:lstStyle/>
           <a:p>
-            <a:pPr indent="0" marL="0">
+            <a:pPr marL="0" indent="0">
               <a:buNone/>
             </a:pPr>
             <a:r>
@@ -17993,7 +17617,7 @@
           <a:bodyPr wrap="square" lIns="0" tIns="0" rIns="0" bIns="0" rtlCol="0" anchor="ctr"/>
           <a:lstStyle/>
           <a:p>
-            <a:pPr algn="ctr" indent="0" marL="0">
+            <a:pPr marL="0" indent="0" algn="ctr">
               <a:buNone/>
             </a:pPr>
             <a:r>
@@ -18032,7 +17656,7 @@
           <a:bodyPr wrap="square" lIns="0" tIns="0" rIns="0" bIns="0" rtlCol="0" anchor="ctr"/>
           <a:lstStyle/>
           <a:p>
-            <a:pPr indent="0" marL="0">
+            <a:pPr marL="0" indent="0">
               <a:buNone/>
             </a:pPr>
             <a:r>
@@ -18113,7 +17737,7 @@
           <a:bodyPr wrap="square" lIns="0" tIns="0" rIns="0" bIns="0" rtlCol="0" anchor="ctr"/>
           <a:lstStyle/>
           <a:p>
-            <a:pPr algn="ctr" indent="0" marL="0">
+            <a:pPr marL="0" indent="0" algn="ctr">
               <a:buNone/>
             </a:pPr>
             <a:r>
@@ -18152,7 +17776,7 @@
           <a:bodyPr wrap="square" lIns="0" tIns="0" rIns="0" bIns="0" rtlCol="0" anchor="ctr"/>
           <a:lstStyle/>
           <a:p>
-            <a:pPr indent="0" marL="0">
+            <a:pPr marL="0" indent="0">
               <a:buNone/>
             </a:pPr>
             <a:r>
@@ -18233,7 +17857,7 @@
           <a:bodyPr wrap="square" lIns="0" tIns="0" rIns="0" bIns="0" rtlCol="0" anchor="ctr"/>
           <a:lstStyle/>
           <a:p>
-            <a:pPr algn="ctr" indent="0" marL="0">
+            <a:pPr marL="0" indent="0" algn="ctr">
               <a:buNone/>
             </a:pPr>
             <a:r>
@@ -18272,7 +17896,7 @@
           <a:bodyPr wrap="square" lIns="0" tIns="0" rIns="0" bIns="0" rtlCol="0" anchor="ctr"/>
           <a:lstStyle/>
           <a:p>
-            <a:pPr indent="0" marL="0">
+            <a:pPr marL="0" indent="0">
               <a:buNone/>
             </a:pPr>
             <a:r>
@@ -18353,7 +17977,7 @@
           <a:bodyPr wrap="square" lIns="0" tIns="0" rIns="0" bIns="0" rtlCol="0" anchor="ctr"/>
           <a:lstStyle/>
           <a:p>
-            <a:pPr algn="ctr" indent="0" marL="0">
+            <a:pPr marL="0" indent="0" algn="ctr">
               <a:buNone/>
             </a:pPr>
             <a:r>
@@ -18392,7 +18016,7 @@
           <a:bodyPr wrap="square" lIns="0" tIns="0" rIns="0" bIns="0" rtlCol="0" anchor="ctr"/>
           <a:lstStyle/>
           <a:p>
-            <a:pPr indent="0" marL="0">
+            <a:pPr marL="0" indent="0">
               <a:buNone/>
             </a:pPr>
             <a:r>
@@ -18419,7 +18043,7 @@
         <p:spPr>
           <a:xfrm>
             <a:off x="566928" y="5779008"/>
-            <a:ext cx="11064240" cy="402336"/>
+            <a:ext cx="10927080" cy="402336"/>
           </a:xfrm>
           <a:prstGeom prst="roundRect">
             <a:avLst>
@@ -18458,7 +18082,7 @@
           <a:bodyPr wrap="square" lIns="0" tIns="0" rIns="0" bIns="0" rtlCol="0" anchor="ctr"/>
           <a:lstStyle/>
           <a:p>
-            <a:pPr indent="0" marL="0">
+            <a:pPr marL="0" indent="0">
               <a:lnSpc>
                 <a:spcPct val="112000"/>
               </a:lnSpc>
@@ -18481,7 +18105,7 @@
       </p:sp>
       <p:sp>
         <p:nvSpPr>
-          <p:cNvPr id="25" name="Slide Number Placeholder 0"/>
+          <p:cNvPr id="53" name="Slide Number Placeholder 0"/>
           <p:cNvSpPr>
             <a:spLocks noGrp="1"/>
           </p:cNvSpPr>
@@ -18499,7 +18123,7 @@
           </a:prstGeom>
           <a:extLst>
             <a:ext uri="{C572A759-6A51-4108-AA02-DFA0A04FC94B}">
-              <ma14:wrappingTextBoxFlag xmlns:ma14="http://schemas.microsoft.com/office/mac/drawingml/2011/main" val="0"/>
+              <ma14:wrappingTextBoxFlag xmlns="" xmlns:ma14="http://schemas.microsoft.com/office/mac/drawingml/2011/main" val="0"/>
             </a:ext>
           </a:extLst>
         </p:spPr>
@@ -18520,7 +18144,7 @@
           <a:p>
             <a:pPr algn="l"/>
             <a:fld id="{F7021451-1387-4CA6-816F-3879F97B5CBC}" type="slidenum">
-              <a:rPr b="0" lang="en-US"/>
+              <a:rPr lang="en-US" b="0"/>
               <a:t>3</a:t>
             </a:fld>
             <a:endParaRPr lang="en-US"/>
@@ -18595,7 +18219,7 @@
           <a:bodyPr wrap="square" lIns="0" tIns="0" rIns="0" bIns="0" rtlCol="0" anchor="ctr"/>
           <a:lstStyle/>
           <a:p>
-            <a:pPr indent="0" marL="0">
+            <a:pPr marL="0" indent="0">
               <a:buNone/>
             </a:pPr>
             <a:r>
@@ -18634,7 +18258,7 @@
           <a:bodyPr wrap="square" lIns="0" tIns="0" rIns="0" bIns="0" rtlCol="0" anchor="t"/>
           <a:lstStyle/>
           <a:p>
-            <a:pPr indent="0" marL="0">
+            <a:pPr marL="0" indent="0">
               <a:lnSpc>
                 <a:spcPct val="100000"/>
               </a:lnSpc>
@@ -18703,11 +18327,11 @@
           <a:bodyPr wrap="square" lIns="0" tIns="0" rIns="0" bIns="0" rtlCol="0" anchor="ctr"/>
           <a:lstStyle/>
           <a:p>
-            <a:pPr algn="ctr" indent="0" marL="0">
-              <a:buNone/>
-            </a:pPr>
-            <a:r>
-              <a:rPr lang="en-US" sz="900" b="1" spc="100" kern="0" dirty="0">
+            <a:pPr marL="0" indent="0" algn="ctr">
+              <a:buNone/>
+            </a:pPr>
+            <a:r>
+              <a:rPr lang="en-US" sz="900" b="1" kern="0" spc="100" dirty="0">
                 <a:solidFill>
                   <a:srgbClr val="5A05F4"/>
                 </a:solidFill>
@@ -18723,14 +18347,14 @@
       </p:sp>
       <p:pic>
         <p:nvPicPr>
-          <p:cNvPr id="7" name="Image 0" descr="preencoded.png">    </p:cNvPr>
+          <p:cNvPr id="7" name="Image 0" descr="preencoded.png"/>
           <p:cNvPicPr>
             <a:picLocks noChangeAspect="1"/>
           </p:cNvPicPr>
           <p:nvPr/>
         </p:nvPicPr>
         <p:blipFill>
-          <a:blip r:embed="rId1"/>
+          <a:blip r:embed="rId3"/>
           <a:stretch>
             <a:fillRect/>
           </a:stretch>
@@ -18793,7 +18417,7 @@
           <a:bodyPr wrap="square" lIns="0" tIns="0" rIns="0" bIns="0" rtlCol="0" anchor="ctr"/>
           <a:lstStyle/>
           <a:p>
-            <a:pPr indent="0" marL="0">
+            <a:pPr marL="0" indent="0">
               <a:buNone/>
             </a:pPr>
             <a:r>
@@ -18832,7 +18456,7 @@
           <a:bodyPr wrap="square" lIns="0" tIns="0" rIns="0" bIns="0" rtlCol="0" anchor="t"/>
           <a:lstStyle/>
           <a:p>
-            <a:pPr indent="0" marL="0">
+            <a:pPr marL="0" indent="0">
               <a:lnSpc>
                 <a:spcPct val="105000"/>
               </a:lnSpc>
@@ -18901,7 +18525,7 @@
           <a:bodyPr wrap="square" lIns="0" tIns="0" rIns="0" bIns="0" rtlCol="0" anchor="ctr"/>
           <a:lstStyle/>
           <a:p>
-            <a:pPr indent="0" marL="0">
+            <a:pPr marL="0" indent="0">
               <a:buNone/>
             </a:pPr>
             <a:r>
@@ -18940,7 +18564,7 @@
           <a:bodyPr wrap="square" lIns="0" tIns="0" rIns="0" bIns="0" rtlCol="0" anchor="t"/>
           <a:lstStyle/>
           <a:p>
-            <a:pPr indent="0" marL="0">
+            <a:pPr marL="0" indent="0">
               <a:lnSpc>
                 <a:spcPct val="105000"/>
               </a:lnSpc>
@@ -19009,7 +18633,7 @@
           <a:bodyPr wrap="square" lIns="0" tIns="0" rIns="0" bIns="0" rtlCol="0" anchor="ctr"/>
           <a:lstStyle/>
           <a:p>
-            <a:pPr indent="0" marL="0">
+            <a:pPr marL="0" indent="0">
               <a:buNone/>
             </a:pPr>
             <a:r>
@@ -19048,7 +18672,7 @@
           <a:bodyPr wrap="square" lIns="0" tIns="0" rIns="0" bIns="0" rtlCol="0" anchor="t"/>
           <a:lstStyle/>
           <a:p>
-            <a:pPr indent="0" marL="0">
+            <a:pPr marL="0" indent="0">
               <a:lnSpc>
                 <a:spcPct val="105000"/>
               </a:lnSpc>
@@ -19117,7 +18741,7 @@
           <a:bodyPr wrap="square" lIns="0" tIns="0" rIns="0" bIns="0" rtlCol="0" anchor="ctr"/>
           <a:lstStyle/>
           <a:p>
-            <a:pPr indent="0" marL="0">
+            <a:pPr marL="0" indent="0">
               <a:buNone/>
             </a:pPr>
             <a:r>
@@ -19156,7 +18780,7 @@
           <a:bodyPr wrap="square" lIns="0" tIns="0" rIns="0" bIns="0" rtlCol="0" anchor="t"/>
           <a:lstStyle/>
           <a:p>
-            <a:pPr indent="0" marL="0">
+            <a:pPr marL="0" indent="0">
               <a:lnSpc>
                 <a:spcPct val="105000"/>
               </a:lnSpc>
@@ -19225,7 +18849,7 @@
           <a:bodyPr wrap="square" lIns="0" tIns="0" rIns="0" bIns="0" rtlCol="0" anchor="ctr"/>
           <a:lstStyle/>
           <a:p>
-            <a:pPr indent="0" marL="0">
+            <a:pPr marL="0" indent="0">
               <a:buNone/>
             </a:pPr>
             <a:r>
@@ -19264,7 +18888,7 @@
           <a:bodyPr wrap="square" lIns="0" tIns="0" rIns="0" bIns="0" rtlCol="0" anchor="t"/>
           <a:lstStyle/>
           <a:p>
-            <a:pPr indent="0" marL="0">
+            <a:pPr marL="0" indent="0">
               <a:lnSpc>
                 <a:spcPct val="105000"/>
               </a:lnSpc>
@@ -19333,7 +18957,7 @@
           <a:bodyPr wrap="square" lIns="0" tIns="0" rIns="0" bIns="0" rtlCol="0" anchor="ctr"/>
           <a:lstStyle/>
           <a:p>
-            <a:pPr indent="0" marL="0">
+            <a:pPr marL="0" indent="0">
               <a:buNone/>
             </a:pPr>
             <a:r>
@@ -19372,7 +18996,7 @@
           <a:bodyPr wrap="square" lIns="0" tIns="0" rIns="0" bIns="0" rtlCol="0" anchor="t"/>
           <a:lstStyle/>
           <a:p>
-            <a:pPr indent="0" marL="0">
+            <a:pPr marL="0" indent="0">
               <a:lnSpc>
                 <a:spcPct val="105000"/>
               </a:lnSpc>
@@ -19441,7 +19065,7 @@
           <a:bodyPr wrap="square" lIns="0" tIns="0" rIns="0" bIns="0" rtlCol="0" anchor="ctr"/>
           <a:lstStyle/>
           <a:p>
-            <a:pPr indent="0" marL="0">
+            <a:pPr marL="0" indent="0">
               <a:lnSpc>
                 <a:spcPct val="112000"/>
               </a:lnSpc>
@@ -19464,7 +19088,7 @@
       </p:sp>
       <p:sp>
         <p:nvSpPr>
-          <p:cNvPr id="25" name="Slide Number Placeholder 0"/>
+          <p:cNvPr id="28" name="Slide Number Placeholder 0"/>
           <p:cNvSpPr>
             <a:spLocks noGrp="1"/>
           </p:cNvSpPr>
@@ -19482,7 +19106,7 @@
           </a:prstGeom>
           <a:extLst>
             <a:ext uri="{C572A759-6A51-4108-AA02-DFA0A04FC94B}">
-              <ma14:wrappingTextBoxFlag xmlns:ma14="http://schemas.microsoft.com/office/mac/drawingml/2011/main" val="0"/>
+              <ma14:wrappingTextBoxFlag xmlns="" xmlns:ma14="http://schemas.microsoft.com/office/mac/drawingml/2011/main" val="0"/>
             </a:ext>
           </a:extLst>
         </p:spPr>
@@ -19503,7 +19127,7 @@
           <a:p>
             <a:pPr algn="l"/>
             <a:fld id="{F7021451-1387-4CA6-816F-3879F97B5CBC}" type="slidenum">
-              <a:rPr b="0" lang="en-US"/>
+              <a:rPr lang="en-US" b="0"/>
               <a:t>4</a:t>
             </a:fld>
             <a:endParaRPr lang="en-US"/>
@@ -19556,11 +19180,11 @@
           <a:bodyPr wrap="square" lIns="0" tIns="0" rIns="0" bIns="0" rtlCol="0" anchor="ctr"/>
           <a:lstStyle/>
           <a:p>
-            <a:pPr indent="0" marL="0">
-              <a:buNone/>
-            </a:pPr>
-            <a:r>
-              <a:rPr lang="en-US" sz="1200" b="1" spc="400" kern="0" dirty="0">
+            <a:pPr marL="0" indent="0">
+              <a:buNone/>
+            </a:pPr>
+            <a:r>
+              <a:rPr lang="en-US" sz="1200" b="1" kern="0" spc="400" dirty="0">
                 <a:solidFill>
                   <a:srgbClr val="FFFFFF"/>
                 </a:solidFill>
@@ -19595,7 +19219,7 @@
           <a:bodyPr wrap="square" lIns="0" tIns="0" rIns="0" bIns="0" rtlCol="0" anchor="ctr"/>
           <a:lstStyle/>
           <a:p>
-            <a:pPr indent="0" marL="0">
+            <a:pPr marL="0" indent="0">
               <a:buNone/>
             </a:pPr>
             <a:r>
@@ -19634,7 +19258,7 @@
           <a:bodyPr wrap="square" lIns="0" tIns="0" rIns="0" bIns="0" rtlCol="0" anchor="t"/>
           <a:lstStyle/>
           <a:p>
-            <a:pPr indent="0" marL="0">
+            <a:pPr marL="0" indent="0">
               <a:buNone/>
             </a:pPr>
             <a:r>
@@ -19720,7 +19344,7 @@
           <a:bodyPr wrap="square" lIns="0" tIns="0" rIns="0" bIns="0" rtlCol="0" anchor="ctr"/>
           <a:lstStyle/>
           <a:p>
-            <a:pPr algn="l" indent="0" marL="0">
+            <a:pPr marL="0" indent="0" algn="l">
               <a:buNone/>
             </a:pPr>
             <a:r>
@@ -19759,7 +19383,7 @@
           <a:bodyPr wrap="square" lIns="0" tIns="0" rIns="0" bIns="0" rtlCol="0" anchor="ctr"/>
           <a:lstStyle/>
           <a:p>
-            <a:pPr indent="0" marL="0">
+            <a:pPr marL="0" indent="0">
               <a:buNone/>
             </a:pPr>
             <a:r>
@@ -19825,11 +19449,11 @@
           <a:bodyPr wrap="square" lIns="0" tIns="0" rIns="0" bIns="0" rtlCol="0" anchor="ctr"/>
           <a:lstStyle/>
           <a:p>
-            <a:pPr algn="ctr" indent="0" marL="0">
-              <a:buNone/>
-            </a:pPr>
-            <a:r>
-              <a:rPr lang="en-US" sz="900" b="1" spc="100" kern="0" dirty="0">
+            <a:pPr marL="0" indent="0" algn="ctr">
+              <a:buNone/>
+            </a:pPr>
+            <a:r>
+              <a:rPr lang="en-US" sz="900" b="1" kern="0" spc="100" dirty="0">
                 <a:solidFill>
                   <a:srgbClr val="5A05F4"/>
                 </a:solidFill>
@@ -19845,14 +19469,14 @@
       </p:sp>
       <p:pic>
         <p:nvPicPr>
-          <p:cNvPr id="7" name="Image 0" descr="preencoded.png">    </p:cNvPr>
+          <p:cNvPr id="7" name="Image 0" descr="preencoded.png"/>
           <p:cNvPicPr>
             <a:picLocks noChangeAspect="1"/>
           </p:cNvPicPr>
           <p:nvPr/>
         </p:nvPicPr>
         <p:blipFill>
-          <a:blip r:embed="rId1"/>
+          <a:blip r:embed="rId3"/>
           <a:stretch>
             <a:fillRect/>
           </a:stretch>
@@ -19910,7 +19534,7 @@
           <a:bodyPr wrap="square" lIns="0" tIns="0" rIns="0" bIns="0" rtlCol="0" anchor="ctr"/>
           <a:lstStyle/>
           <a:p>
-            <a:pPr algn="ctr" indent="0" marL="0">
+            <a:pPr marL="0" indent="0" algn="ctr">
               <a:buNone/>
             </a:pPr>
             <a:r>
@@ -20014,7 +19638,7 @@
           <a:bodyPr wrap="square" lIns="0" tIns="0" rIns="0" bIns="0" rtlCol="0" anchor="ctr"/>
           <a:lstStyle/>
           <a:p>
-            <a:pPr algn="ctr" indent="0" marL="0">
+            <a:pPr marL="0" indent="0" algn="ctr">
               <a:buNone/>
             </a:pPr>
             <a:r>
@@ -20118,7 +19742,7 @@
           <a:bodyPr wrap="square" lIns="0" tIns="0" rIns="0" bIns="0" rtlCol="0" anchor="ctr"/>
           <a:lstStyle/>
           <a:p>
-            <a:pPr algn="ctr" indent="0" marL="0">
+            <a:pPr marL="0" indent="0" algn="ctr">
               <a:buNone/>
             </a:pPr>
             <a:r>
@@ -20222,7 +19846,7 @@
           <a:bodyPr wrap="square" lIns="0" tIns="0" rIns="0" bIns="0" rtlCol="0" anchor="ctr"/>
           <a:lstStyle/>
           <a:p>
-            <a:pPr algn="ctr" indent="0" marL="0">
+            <a:pPr marL="0" indent="0" algn="ctr">
               <a:buNone/>
             </a:pPr>
             <a:r>
@@ -20283,7 +19907,7 @@
           <a:bodyPr wrap="square" lIns="0" tIns="0" rIns="0" bIns="0" rtlCol="0" anchor="ctr"/>
           <a:lstStyle/>
           <a:p>
-            <a:pPr indent="0" marL="0">
+            <a:pPr marL="0" indent="0">
               <a:buNone/>
             </a:pPr>
             <a:r>
@@ -20322,7 +19946,7 @@
           <a:bodyPr wrap="square" lIns="0" tIns="0" rIns="0" bIns="0" rtlCol="0" anchor="t"/>
           <a:lstStyle/>
           <a:p>
-            <a:pPr indent="0" marL="0">
+            <a:pPr marL="0" indent="0">
               <a:lnSpc>
                 <a:spcPct val="108000"/>
               </a:lnSpc>
@@ -20386,7 +20010,7 @@
           <a:bodyPr wrap="square" lIns="0" tIns="0" rIns="0" bIns="0" rtlCol="0" anchor="ctr"/>
           <a:lstStyle/>
           <a:p>
-            <a:pPr indent="0" marL="0">
+            <a:pPr marL="0" indent="0">
               <a:buNone/>
             </a:pPr>
             <a:r>
@@ -20425,7 +20049,7 @@
           <a:bodyPr wrap="square" lIns="0" tIns="0" rIns="0" bIns="0" rtlCol="0" anchor="t"/>
           <a:lstStyle/>
           <a:p>
-            <a:pPr indent="0" marL="0">
+            <a:pPr marL="0" indent="0">
               <a:lnSpc>
                 <a:spcPct val="108000"/>
               </a:lnSpc>
@@ -20494,11 +20118,11 @@
           <a:bodyPr wrap="square" lIns="0" tIns="0" rIns="0" bIns="0" rtlCol="0" anchor="ctr"/>
           <a:lstStyle/>
           <a:p>
-            <a:pPr indent="0" marL="0">
-              <a:buNone/>
-            </a:pPr>
-            <a:r>
-              <a:rPr lang="en-US" sz="950" b="1" spc="150" kern="0" dirty="0">
+            <a:pPr marL="0" indent="0">
+              <a:buNone/>
+            </a:pPr>
+            <a:r>
+              <a:rPr lang="en-US" sz="950" b="1" kern="0" spc="150" dirty="0">
                 <a:solidFill>
                   <a:srgbClr val="106B41"/>
                 </a:solidFill>
@@ -20533,7 +20157,7 @@
           <a:bodyPr wrap="square" lIns="0" tIns="0" rIns="0" bIns="0" rtlCol="0" anchor="ctr"/>
           <a:lstStyle/>
           <a:p>
-            <a:pPr indent="0" marL="0">
+            <a:pPr marL="0" indent="0">
               <a:lnSpc>
                 <a:spcPct val="112000"/>
               </a:lnSpc>
@@ -20556,7 +20180,7 @@
       </p:sp>
       <p:sp>
         <p:nvSpPr>
-          <p:cNvPr id="25" name="Slide Number Placeholder 0"/>
+          <p:cNvPr id="31" name="Slide Number Placeholder 0"/>
           <p:cNvSpPr>
             <a:spLocks noGrp="1"/>
           </p:cNvSpPr>
@@ -20574,7 +20198,7 @@
           </a:prstGeom>
           <a:extLst>
             <a:ext uri="{C572A759-6A51-4108-AA02-DFA0A04FC94B}">
-              <ma14:wrappingTextBoxFlag xmlns:ma14="http://schemas.microsoft.com/office/mac/drawingml/2011/main" val="0"/>
+              <ma14:wrappingTextBoxFlag xmlns="" xmlns:ma14="http://schemas.microsoft.com/office/mac/drawingml/2011/main" val="0"/>
             </a:ext>
           </a:extLst>
         </p:spPr>
@@ -20595,7 +20219,7 @@
           <a:p>
             <a:pPr algn="l"/>
             <a:fld id="{F7021451-1387-4CA6-816F-3879F97B5CBC}" type="slidenum">
-              <a:rPr b="0" lang="en-US"/>
+              <a:rPr lang="en-US" b="0"/>
               <a:t>6</a:t>
             </a:fld>
             <a:endParaRPr lang="en-US"/>
@@ -20670,7 +20294,7 @@
           <a:bodyPr wrap="square" lIns="0" tIns="0" rIns="0" bIns="0" rtlCol="0" anchor="ctr"/>
           <a:lstStyle/>
           <a:p>
-            <a:pPr algn="l" indent="0" marL="0">
+            <a:pPr marL="0" indent="0" algn="l">
               <a:buNone/>
             </a:pPr>
             <a:r>
@@ -20709,7 +20333,7 @@
           <a:bodyPr wrap="square" lIns="0" tIns="0" rIns="0" bIns="0" rtlCol="0" anchor="ctr"/>
           <a:lstStyle/>
           <a:p>
-            <a:pPr indent="0" marL="0">
+            <a:pPr marL="0" indent="0">
               <a:buNone/>
             </a:pPr>
             <a:r>
@@ -20775,11 +20399,11 @@
           <a:bodyPr wrap="square" lIns="0" tIns="0" rIns="0" bIns="0" rtlCol="0" anchor="ctr"/>
           <a:lstStyle/>
           <a:p>
-            <a:pPr algn="ctr" indent="0" marL="0">
-              <a:buNone/>
-            </a:pPr>
-            <a:r>
-              <a:rPr lang="en-US" sz="900" b="1" spc="100" kern="0" dirty="0">
+            <a:pPr marL="0" indent="0" algn="ctr">
+              <a:buNone/>
+            </a:pPr>
+            <a:r>
+              <a:rPr lang="en-US" sz="900" b="1" kern="0" spc="100" dirty="0">
                 <a:solidFill>
                   <a:srgbClr val="5A05F4"/>
                 </a:solidFill>
@@ -20795,14 +20419,14 @@
       </p:sp>
       <p:pic>
         <p:nvPicPr>
-          <p:cNvPr id="7" name="Image 0" descr="preencoded.png">    </p:cNvPr>
+          <p:cNvPr id="7" name="Image 0" descr="preencoded.png"/>
           <p:cNvPicPr>
             <a:picLocks noChangeAspect="1"/>
           </p:cNvPicPr>
           <p:nvPr/>
         </p:nvPicPr>
         <p:blipFill>
-          <a:blip r:embed="rId1"/>
+          <a:blip r:embed="rId3"/>
           <a:stretch>
             <a:fillRect/>
           </a:stretch>
@@ -20865,7 +20489,7 @@
           <a:bodyPr wrap="square" lIns="0" tIns="0" rIns="0" bIns="0" rtlCol="0" anchor="t"/>
           <a:lstStyle/>
           <a:p>
-            <a:pPr indent="0" marL="0">
+            <a:pPr marL="0" indent="0">
               <a:lnSpc>
                 <a:spcPct val="130000"/>
               </a:lnSpc>
@@ -20882,7 +20506,43 @@
               </a:rPr>
               <a:t>"usage"</a:t>
             </a:r>
-            <a:pPr indent="0" marL="0">
+            <a:r>
+              <a:rPr lang="en-US" sz="1300" dirty="0">
+                <a:solidFill>
+                  <a:srgbClr val="D8D4E4"/>
+                </a:solidFill>
+                <a:latin typeface="Courier New" pitchFamily="34" charset="0"/>
+                <a:ea typeface="Courier New" pitchFamily="34" charset="-122"/>
+                <a:cs typeface="Courier New" pitchFamily="34" charset="-120"/>
+              </a:rPr>
+              <a:t>: { </a:t>
+            </a:r>
+            <a:r>
+              <a:rPr lang="en-US" sz="1300" dirty="0">
+                <a:solidFill>
+                  <a:srgbClr val="A98BFF"/>
+                </a:solidFill>
+                <a:latin typeface="Courier New" pitchFamily="34" charset="0"/>
+                <a:ea typeface="Courier New" pitchFamily="34" charset="-122"/>
+                <a:cs typeface="Courier New" pitchFamily="34" charset="-120"/>
+              </a:rPr>
+              <a:t>"prompt_tokens"</a:t>
+            </a:r>
+            <a:r>
+              <a:rPr lang="en-US" sz="1300" dirty="0">
+                <a:solidFill>
+                  <a:srgbClr val="D8D4E4"/>
+                </a:solidFill>
+                <a:latin typeface="Courier New" pitchFamily="34" charset="0"/>
+                <a:ea typeface="Courier New" pitchFamily="34" charset="-122"/>
+                <a:cs typeface="Courier New" pitchFamily="34" charset="-120"/>
+              </a:rPr>
+              <a:t>: 184,</a:t>
+            </a:r>
+            <a:endParaRPr lang="en-US" sz="1300" dirty="0"/>
+          </a:p>
+          <a:p>
+            <a:pPr marL="0" indent="0">
               <a:lnSpc>
                 <a:spcPct val="130000"/>
               </a:lnSpc>
@@ -20897,14 +20557,8 @@
                 <a:ea typeface="Courier New" pitchFamily="34" charset="-122"/>
                 <a:cs typeface="Courier New" pitchFamily="34" charset="-120"/>
               </a:rPr>
-              <a:t>: { </a:t>
-            </a:r>
-            <a:pPr indent="0" marL="0">
-              <a:lnSpc>
-                <a:spcPct val="130000"/>
-              </a:lnSpc>
-              <a:buNone/>
-            </a:pPr>
+              <a:t>          </a:t>
+            </a:r>
             <a:r>
               <a:rPr lang="en-US" sz="1300" dirty="0">
                 <a:solidFill>
@@ -20914,68 +20568,8 @@
                 <a:ea typeface="Courier New" pitchFamily="34" charset="-122"/>
                 <a:cs typeface="Courier New" pitchFamily="34" charset="-120"/>
               </a:rPr>
-              <a:t>"prompt_tokens"</a:t>
-            </a:r>
-            <a:pPr indent="0" marL="0">
-              <a:lnSpc>
-                <a:spcPct val="130000"/>
-              </a:lnSpc>
-              <a:buNone/>
-            </a:pPr>
-            <a:r>
-              <a:rPr lang="en-US" sz="1300" dirty="0">
-                <a:solidFill>
-                  <a:srgbClr val="D8D4E4"/>
-                </a:solidFill>
-                <a:latin typeface="Courier New" pitchFamily="34" charset="0"/>
-                <a:ea typeface="Courier New" pitchFamily="34" charset="-122"/>
-                <a:cs typeface="Courier New" pitchFamily="34" charset="-120"/>
-              </a:rPr>
-              <a:t>: 184,</a:t>
-            </a:r>
-            <a:endParaRPr lang="en-US" sz="1300" dirty="0"/>
-          </a:p>
-          <a:p>
-            <a:pPr indent="0" marL="0">
-              <a:lnSpc>
-                <a:spcPct val="130000"/>
-              </a:lnSpc>
-              <a:buNone/>
-            </a:pPr>
-            <a:r>
-              <a:rPr lang="en-US" sz="1300" dirty="0">
-                <a:solidFill>
-                  <a:srgbClr val="D8D4E4"/>
-                </a:solidFill>
-                <a:latin typeface="Courier New" pitchFamily="34" charset="0"/>
-                <a:ea typeface="Courier New" pitchFamily="34" charset="-122"/>
-                <a:cs typeface="Courier New" pitchFamily="34" charset="-120"/>
-              </a:rPr>
-              <a:t>          </a:t>
-            </a:r>
-            <a:pPr indent="0" marL="0">
-              <a:lnSpc>
-                <a:spcPct val="130000"/>
-              </a:lnSpc>
-              <a:buNone/>
-            </a:pPr>
-            <a:r>
-              <a:rPr lang="en-US" sz="1300" dirty="0">
-                <a:solidFill>
-                  <a:srgbClr val="A98BFF"/>
-                </a:solidFill>
-                <a:latin typeface="Courier New" pitchFamily="34" charset="0"/>
-                <a:ea typeface="Courier New" pitchFamily="34" charset="-122"/>
-                <a:cs typeface="Courier New" pitchFamily="34" charset="-120"/>
-              </a:rPr>
               <a:t>"completion_tokens"</a:t>
             </a:r>
-            <a:pPr indent="0" marL="0">
-              <a:lnSpc>
-                <a:spcPct val="130000"/>
-              </a:lnSpc>
-              <a:buNone/>
-            </a:pPr>
             <a:r>
               <a:rPr lang="en-US" sz="1300" dirty="0">
                 <a:solidFill>
@@ -21034,7 +20628,7 @@
           <a:bodyPr wrap="square" lIns="0" tIns="0" rIns="0" bIns="0" rtlCol="0" anchor="ctr"/>
           <a:lstStyle/>
           <a:p>
-            <a:pPr indent="0" marL="0">
+            <a:pPr marL="0" indent="0">
               <a:lnSpc>
                 <a:spcPct val="112000"/>
               </a:lnSpc>
@@ -21098,7 +20692,7 @@
           <a:bodyPr wrap="square" lIns="0" tIns="0" rIns="0" bIns="0" rtlCol="0" anchor="ctr"/>
           <a:lstStyle/>
           <a:p>
-            <a:pPr indent="0" marL="0">
+            <a:pPr marL="0" indent="0">
               <a:buNone/>
             </a:pPr>
             <a:r>
@@ -21137,7 +20731,7 @@
           <a:bodyPr wrap="square" lIns="0" tIns="0" rIns="0" bIns="0" rtlCol="0" anchor="t"/>
           <a:lstStyle/>
           <a:p>
-            <a:pPr indent="0" marL="0">
+            <a:pPr marL="0" indent="0">
               <a:lnSpc>
                 <a:spcPct val="108000"/>
               </a:lnSpc>
@@ -21201,7 +20795,7 @@
           <a:bodyPr wrap="square" lIns="0" tIns="0" rIns="0" bIns="0" rtlCol="0" anchor="ctr"/>
           <a:lstStyle/>
           <a:p>
-            <a:pPr indent="0" marL="0">
+            <a:pPr marL="0" indent="0">
               <a:buNone/>
             </a:pPr>
             <a:r>
@@ -21240,7 +20834,7 @@
           <a:bodyPr wrap="square" lIns="0" tIns="0" rIns="0" bIns="0" rtlCol="0" anchor="t"/>
           <a:lstStyle/>
           <a:p>
-            <a:pPr indent="0" marL="0">
+            <a:pPr marL="0" indent="0">
               <a:lnSpc>
                 <a:spcPct val="108000"/>
               </a:lnSpc>
@@ -21309,11 +20903,11 @@
           <a:bodyPr wrap="square" lIns="0" tIns="0" rIns="0" bIns="0" rtlCol="0" anchor="ctr"/>
           <a:lstStyle/>
           <a:p>
-            <a:pPr indent="0" marL="0">
-              <a:buNone/>
-            </a:pPr>
-            <a:r>
-              <a:rPr lang="en-US" sz="950" b="1" spc="150" kern="0" dirty="0">
+            <a:pPr marL="0" indent="0">
+              <a:buNone/>
+            </a:pPr>
+            <a:r>
+              <a:rPr lang="en-US" sz="950" b="1" kern="0" spc="150" dirty="0">
                 <a:solidFill>
                   <a:srgbClr val="434343"/>
                 </a:solidFill>
@@ -21348,7 +20942,7 @@
           <a:bodyPr wrap="square" lIns="0" tIns="0" rIns="0" bIns="0" rtlCol="0" anchor="ctr"/>
           <a:lstStyle/>
           <a:p>
-            <a:pPr indent="0" marL="0">
+            <a:pPr marL="0" indent="0">
               <a:lnSpc>
                 <a:spcPct val="112000"/>
               </a:lnSpc>
@@ -21389,7 +20983,7 @@
           </a:prstGeom>
           <a:extLst>
             <a:ext uri="{C572A759-6A51-4108-AA02-DFA0A04FC94B}">
-              <ma14:wrappingTextBoxFlag xmlns:ma14="http://schemas.microsoft.com/office/mac/drawingml/2011/main" val="0"/>
+              <ma14:wrappingTextBoxFlag xmlns="" xmlns:ma14="http://schemas.microsoft.com/office/mac/drawingml/2011/main" val="0"/>
             </a:ext>
           </a:extLst>
         </p:spPr>
@@ -21410,7 +21004,7 @@
           <a:p>
             <a:pPr algn="l"/>
             <a:fld id="{F7021451-1387-4CA6-816F-3879F97B5CBC}" type="slidenum">
-              <a:rPr b="0" lang="en-US"/>
+              <a:rPr lang="en-US" b="0"/>
               <a:t>7</a:t>
             </a:fld>
             <a:endParaRPr lang="en-US"/>
@@ -21485,7 +21079,7 @@
           <a:bodyPr wrap="square" lIns="0" tIns="0" rIns="0" bIns="0" rtlCol="0" anchor="ctr"/>
           <a:lstStyle/>
           <a:p>
-            <a:pPr algn="l" indent="0" marL="0">
+            <a:pPr marL="0" indent="0" algn="l">
               <a:buNone/>
             </a:pPr>
             <a:r>
@@ -21524,7 +21118,7 @@
           <a:bodyPr wrap="square" lIns="0" tIns="0" rIns="0" bIns="0" rtlCol="0" anchor="ctr"/>
           <a:lstStyle/>
           <a:p>
-            <a:pPr indent="0" marL="0">
+            <a:pPr marL="0" indent="0">
               <a:buNone/>
             </a:pPr>
             <a:r>
@@ -21563,7 +21157,7 @@
           <a:bodyPr wrap="square" lIns="0" tIns="0" rIns="0" bIns="0" rtlCol="0" anchor="t"/>
           <a:lstStyle/>
           <a:p>
-            <a:pPr indent="0" marL="0">
+            <a:pPr marL="0" indent="0">
               <a:lnSpc>
                 <a:spcPct val="100000"/>
               </a:lnSpc>
@@ -21632,11 +21226,11 @@
           <a:bodyPr wrap="square" lIns="0" tIns="0" rIns="0" bIns="0" rtlCol="0" anchor="ctr"/>
           <a:lstStyle/>
           <a:p>
-            <a:pPr algn="ctr" indent="0" marL="0">
-              <a:buNone/>
-            </a:pPr>
-            <a:r>
-              <a:rPr lang="en-US" sz="900" b="1" spc="100" kern="0" dirty="0">
+            <a:pPr marL="0" indent="0" algn="ctr">
+              <a:buNone/>
+            </a:pPr>
+            <a:r>
+              <a:rPr lang="en-US" sz="900" b="1" kern="0" spc="100" dirty="0">
                 <a:solidFill>
                   <a:srgbClr val="5A05F4"/>
                 </a:solidFill>
@@ -21652,14 +21246,14 @@
       </p:sp>
       <p:pic>
         <p:nvPicPr>
-          <p:cNvPr id="8" name="Image 0" descr="preencoded.png">    </p:cNvPr>
+          <p:cNvPr id="8" name="Image 0" descr="preencoded.png"/>
           <p:cNvPicPr>
             <a:picLocks noChangeAspect="1"/>
           </p:cNvPicPr>
           <p:nvPr/>
         </p:nvPicPr>
         <p:blipFill>
-          <a:blip r:embed="rId1"/>
+          <a:blip r:embed="rId3"/>
           <a:stretch>
             <a:fillRect/>
           </a:stretch>
@@ -21737,7 +21331,7 @@
           <a:bodyPr wrap="square" lIns="0" tIns="0" rIns="0" bIns="0" rtlCol="0" anchor="ctr"/>
           <a:lstStyle/>
           <a:p>
-            <a:pPr algn="ctr" indent="0" marL="0">
+            <a:pPr marL="0" indent="0" algn="ctr">
               <a:buNone/>
             </a:pPr>
             <a:r>
@@ -21776,7 +21370,7 @@
           <a:bodyPr wrap="square" lIns="0" tIns="0" rIns="0" bIns="0" rtlCol="0" anchor="ctr"/>
           <a:lstStyle/>
           <a:p>
-            <a:pPr indent="0" marL="0">
+            <a:pPr marL="0" indent="0">
               <a:buNone/>
             </a:pPr>
             <a:r>
@@ -21815,7 +21409,7 @@
           <a:bodyPr wrap="square" lIns="0" tIns="0" rIns="0" bIns="0" rtlCol="0" anchor="t"/>
           <a:lstStyle/>
           <a:p>
-            <a:pPr indent="0" marL="0">
+            <a:pPr marL="0" indent="0">
               <a:lnSpc>
                 <a:spcPct val="108000"/>
               </a:lnSpc>
@@ -21899,7 +21493,7 @@
           <a:bodyPr wrap="square" lIns="0" tIns="0" rIns="0" bIns="0" rtlCol="0" anchor="ctr"/>
           <a:lstStyle/>
           <a:p>
-            <a:pPr algn="ctr" indent="0" marL="0">
+            <a:pPr marL="0" indent="0" algn="ctr">
               <a:buNone/>
             </a:pPr>
             <a:r>
@@ -21938,7 +21532,7 @@
           <a:bodyPr wrap="square" lIns="0" tIns="0" rIns="0" bIns="0" rtlCol="0" anchor="ctr"/>
           <a:lstStyle/>
           <a:p>
-            <a:pPr indent="0" marL="0">
+            <a:pPr marL="0" indent="0">
               <a:buNone/>
             </a:pPr>
             <a:r>
@@ -21977,7 +21571,7 @@
           <a:bodyPr wrap="square" lIns="0" tIns="0" rIns="0" bIns="0" rtlCol="0" anchor="t"/>
           <a:lstStyle/>
           <a:p>
-            <a:pPr indent="0" marL="0">
+            <a:pPr marL="0" indent="0">
               <a:lnSpc>
                 <a:spcPct val="108000"/>
               </a:lnSpc>
@@ -22061,7 +21655,7 @@
           <a:bodyPr wrap="square" lIns="0" tIns="0" rIns="0" bIns="0" rtlCol="0" anchor="ctr"/>
           <a:lstStyle/>
           <a:p>
-            <a:pPr algn="ctr" indent="0" marL="0">
+            <a:pPr marL="0" indent="0" algn="ctr">
               <a:buNone/>
             </a:pPr>
             <a:r>
@@ -22100,7 +21694,7 @@
           <a:bodyPr wrap="square" lIns="0" tIns="0" rIns="0" bIns="0" rtlCol="0" anchor="ctr"/>
           <a:lstStyle/>
           <a:p>
-            <a:pPr indent="0" marL="0">
+            <a:pPr marL="0" indent="0">
               <a:buNone/>
             </a:pPr>
             <a:r>
@@ -22139,7 +21733,7 @@
           <a:bodyPr wrap="square" lIns="0" tIns="0" rIns="0" bIns="0" rtlCol="0" anchor="t"/>
           <a:lstStyle/>
           <a:p>
-            <a:pPr indent="0" marL="0">
+            <a:pPr marL="0" indent="0">
               <a:lnSpc>
                 <a:spcPct val="108000"/>
               </a:lnSpc>
@@ -22181,11 +21775,11 @@
           <a:bodyPr wrap="square" lIns="0" tIns="0" rIns="0" bIns="0" rtlCol="0" anchor="ctr"/>
           <a:lstStyle/>
           <a:p>
-            <a:pPr indent="0" marL="0">
-              <a:buNone/>
-            </a:pPr>
-            <a:r>
-              <a:rPr lang="en-US" sz="900" b="1" spc="150" kern="0" dirty="0">
+            <a:pPr marL="0" indent="0">
+              <a:buNone/>
+            </a:pPr>
+            <a:r>
+              <a:rPr lang="en-US" sz="900" b="1" kern="0" spc="150" dirty="0">
                 <a:solidFill>
                   <a:srgbClr val="6B6B6B"/>
                 </a:solidFill>
@@ -22220,7 +21814,7 @@
           <a:bodyPr wrap="square" lIns="0" tIns="0" rIns="0" bIns="0" rtlCol="0" anchor="ctr"/>
           <a:lstStyle/>
           <a:p>
-            <a:pPr algn="l" indent="0" marL="0">
+            <a:pPr marL="0" indent="0" algn="l">
               <a:buNone/>
             </a:pPr>
             <a:r>
@@ -22281,7 +21875,7 @@
           <a:bodyPr wrap="square" lIns="0" tIns="0" rIns="0" bIns="0" rtlCol="0" anchor="ctr"/>
           <a:lstStyle/>
           <a:p>
-            <a:pPr indent="0" marL="0">
+            <a:pPr marL="0" indent="0">
               <a:buNone/>
             </a:pPr>
             <a:r>
@@ -22320,7 +21914,7 @@
           <a:bodyPr wrap="square" lIns="0" tIns="0" rIns="0" bIns="0" rtlCol="0" anchor="ctr"/>
           <a:lstStyle/>
           <a:p>
-            <a:pPr algn="l" indent="0" marL="0">
+            <a:pPr marL="0" indent="0" algn="l">
               <a:buNone/>
             </a:pPr>
             <a:r>
@@ -22381,7 +21975,7 @@
           <a:bodyPr wrap="square" lIns="0" tIns="0" rIns="0" bIns="0" rtlCol="0" anchor="ctr"/>
           <a:lstStyle/>
           <a:p>
-            <a:pPr indent="0" marL="0">
+            <a:pPr marL="0" indent="0">
               <a:buNone/>
             </a:pPr>
             <a:r>
@@ -22408,7 +22002,7 @@
         <p:spPr>
           <a:xfrm>
             <a:off x="566928" y="4846320"/>
-            <a:ext cx="11064240" cy="1097280"/>
+            <a:ext cx="10927080" cy="1097280"/>
           </a:xfrm>
           <a:prstGeom prst="roundRect">
             <a:avLst>
@@ -22447,11 +22041,11 @@
           <a:bodyPr wrap="square" lIns="0" tIns="0" rIns="0" bIns="0" rtlCol="0" anchor="ctr"/>
           <a:lstStyle/>
           <a:p>
-            <a:pPr indent="0" marL="0">
-              <a:buNone/>
-            </a:pPr>
-            <a:r>
-              <a:rPr lang="en-US" sz="950" b="1" spc="150" kern="0" dirty="0">
+            <a:pPr marL="0" indent="0">
+              <a:buNone/>
+            </a:pPr>
+            <a:r>
+              <a:rPr lang="en-US" sz="950" b="1" kern="0" spc="150" dirty="0">
                 <a:solidFill>
                   <a:srgbClr val="B3261E"/>
                 </a:solidFill>
@@ -22486,7 +22080,7 @@
           <a:bodyPr wrap="square" lIns="0" tIns="0" rIns="0" bIns="0" rtlCol="0" anchor="ctr"/>
           <a:lstStyle/>
           <a:p>
-            <a:pPr indent="0" marL="0">
+            <a:pPr marL="0" indent="0">
               <a:lnSpc>
                 <a:spcPct val="112000"/>
               </a:lnSpc>
@@ -22509,7 +22103,7 @@
       </p:sp>
       <p:sp>
         <p:nvSpPr>
-          <p:cNvPr id="25" name="Slide Number Placeholder 0"/>
+          <p:cNvPr id="34" name="Slide Number Placeholder 0"/>
           <p:cNvSpPr>
             <a:spLocks noGrp="1"/>
           </p:cNvSpPr>
@@ -22527,7 +22121,7 @@
           </a:prstGeom>
           <a:extLst>
             <a:ext uri="{C572A759-6A51-4108-AA02-DFA0A04FC94B}">
-              <ma14:wrappingTextBoxFlag xmlns:ma14="http://schemas.microsoft.com/office/mac/drawingml/2011/main" val="0"/>
+              <ma14:wrappingTextBoxFlag xmlns="" xmlns:ma14="http://schemas.microsoft.com/office/mac/drawingml/2011/main" val="0"/>
             </a:ext>
           </a:extLst>
         </p:spPr>
@@ -22548,7 +22142,7 @@
           <a:p>
             <a:pPr algn="l"/>
             <a:fld id="{F7021451-1387-4CA6-816F-3879F97B5CBC}" type="slidenum">
-              <a:rPr b="0" lang="en-US"/>
+              <a:rPr lang="en-US" b="0"/>
               <a:t>8</a:t>
             </a:fld>
             <a:endParaRPr lang="en-US"/>
@@ -22623,7 +22217,7 @@
           <a:bodyPr wrap="square" lIns="0" tIns="0" rIns="0" bIns="0" rtlCol="0" anchor="ctr"/>
           <a:lstStyle/>
           <a:p>
-            <a:pPr algn="l" indent="0" marL="0">
+            <a:pPr marL="0" indent="0" algn="l">
               <a:buNone/>
             </a:pPr>
             <a:r>
@@ -22662,7 +22256,7 @@
           <a:bodyPr wrap="square" lIns="0" tIns="0" rIns="0" bIns="0" rtlCol="0" anchor="ctr"/>
           <a:lstStyle/>
           <a:p>
-            <a:pPr indent="0" marL="0">
+            <a:pPr marL="0" indent="0">
               <a:buNone/>
             </a:pPr>
             <a:r>
@@ -22728,11 +22322,11 @@
           <a:bodyPr wrap="square" lIns="0" tIns="0" rIns="0" bIns="0" rtlCol="0" anchor="ctr"/>
           <a:lstStyle/>
           <a:p>
-            <a:pPr algn="ctr" indent="0" marL="0">
-              <a:buNone/>
-            </a:pPr>
-            <a:r>
-              <a:rPr lang="en-US" sz="900" b="1" spc="100" kern="0" dirty="0">
+            <a:pPr marL="0" indent="0" algn="ctr">
+              <a:buNone/>
+            </a:pPr>
+            <a:r>
+              <a:rPr lang="en-US" sz="900" b="1" kern="0" spc="100" dirty="0">
                 <a:solidFill>
                   <a:srgbClr val="5A05F4"/>
                 </a:solidFill>
@@ -22748,14 +22342,14 @@
       </p:sp>
       <p:pic>
         <p:nvPicPr>
-          <p:cNvPr id="7" name="Image 0" descr="preencoded.png">    </p:cNvPr>
+          <p:cNvPr id="7" name="Image 0" descr="preencoded.png"/>
           <p:cNvPicPr>
             <a:picLocks noChangeAspect="1"/>
           </p:cNvPicPr>
           <p:nvPr/>
         </p:nvPicPr>
         <p:blipFill>
-          <a:blip r:embed="rId1"/>
+          <a:blip r:embed="rId3"/>
           <a:stretch>
             <a:fillRect/>
           </a:stretch>
@@ -22818,7 +22412,7 @@
           <a:bodyPr wrap="square" lIns="0" tIns="0" rIns="0" bIns="0" rtlCol="0" anchor="t"/>
           <a:lstStyle/>
           <a:p>
-            <a:pPr indent="0" marL="0">
+            <a:pPr marL="0" indent="0">
               <a:lnSpc>
                 <a:spcPct val="130000"/>
               </a:lnSpc>
@@ -22838,7 +22432,7 @@
             <a:endParaRPr lang="en-US" sz="1150" dirty="0"/>
           </a:p>
           <a:p>
-            <a:pPr indent="0" marL="0">
+            <a:pPr marL="0" indent="0">
               <a:lnSpc>
                 <a:spcPct val="130000"/>
               </a:lnSpc>
@@ -22858,7 +22452,7 @@
             <a:endParaRPr lang="en-US" sz="1150" dirty="0"/>
           </a:p>
           <a:p>
-            <a:pPr indent="0" marL="0">
+            <a:pPr marL="0" indent="0">
               <a:lnSpc>
                 <a:spcPct val="130000"/>
               </a:lnSpc>
@@ -22878,7 +22472,7 @@
             <a:endParaRPr lang="en-US" sz="1150" dirty="0"/>
           </a:p>
           <a:p>
-            <a:pPr indent="0" marL="0">
+            <a:pPr marL="0" indent="0">
               <a:lnSpc>
                 <a:spcPct val="130000"/>
               </a:lnSpc>
@@ -22898,7 +22492,7 @@
             <a:endParaRPr lang="en-US" sz="1150" dirty="0"/>
           </a:p>
           <a:p>
-            <a:pPr indent="0" marL="0">
+            <a:pPr marL="0" indent="0">
               <a:lnSpc>
                 <a:spcPct val="130000"/>
               </a:lnSpc>
@@ -22918,7 +22512,7 @@
             <a:endParaRPr lang="en-US" sz="1150" dirty="0"/>
           </a:p>
           <a:p>
-            <a:pPr indent="0" marL="0">
+            <a:pPr marL="0" indent="0">
               <a:lnSpc>
                 <a:spcPct val="130000"/>
               </a:lnSpc>
@@ -22982,7 +22576,7 @@
           <a:bodyPr wrap="square" lIns="0" tIns="0" rIns="0" bIns="0" rtlCol="0" anchor="ctr"/>
           <a:lstStyle/>
           <a:p>
-            <a:pPr indent="0" marL="0">
+            <a:pPr marL="0" indent="0">
               <a:buNone/>
             </a:pPr>
             <a:r>
@@ -23021,7 +22615,7 @@
           <a:bodyPr wrap="square" lIns="0" tIns="0" rIns="0" bIns="0" rtlCol="0" anchor="t"/>
           <a:lstStyle/>
           <a:p>
-            <a:pPr indent="0" marL="0">
+            <a:pPr marL="0" indent="0">
               <a:buNone/>
             </a:pPr>
             <a:r>
@@ -23082,7 +22676,7 @@
           <a:bodyPr wrap="square" lIns="0" tIns="0" rIns="0" bIns="0" rtlCol="0" anchor="ctr"/>
           <a:lstStyle/>
           <a:p>
-            <a:pPr indent="0" marL="0">
+            <a:pPr marL="0" indent="0">
               <a:buNone/>
             </a:pPr>
             <a:r>
@@ -23121,7 +22715,7 @@
           <a:bodyPr wrap="square" lIns="0" tIns="0" rIns="0" bIns="0" rtlCol="0" anchor="t"/>
           <a:lstStyle/>
           <a:p>
-            <a:pPr indent="0" marL="0">
+            <a:pPr marL="0" indent="0">
               <a:buNone/>
             </a:pPr>
             <a:r>
@@ -23182,7 +22776,7 @@
           <a:bodyPr wrap="square" lIns="0" tIns="0" rIns="0" bIns="0" rtlCol="0" anchor="ctr"/>
           <a:lstStyle/>
           <a:p>
-            <a:pPr indent="0" marL="0">
+            <a:pPr marL="0" indent="0">
               <a:lnSpc>
                 <a:spcPct val="112000"/>
               </a:lnSpc>
@@ -23251,11 +22845,11 @@
           <a:bodyPr wrap="square" lIns="0" tIns="0" rIns="0" bIns="0" rtlCol="0" anchor="ctr"/>
           <a:lstStyle/>
           <a:p>
-            <a:pPr indent="0" marL="0">
-              <a:buNone/>
-            </a:pPr>
-            <a:r>
-              <a:rPr lang="en-US" sz="950" b="1" spc="150" kern="0" dirty="0">
+            <a:pPr marL="0" indent="0">
+              <a:buNone/>
+            </a:pPr>
+            <a:r>
+              <a:rPr lang="en-US" sz="950" b="1" kern="0" spc="150" dirty="0">
                 <a:solidFill>
                   <a:srgbClr val="434343"/>
                 </a:solidFill>
@@ -23290,7 +22884,7 @@
           <a:bodyPr wrap="square" lIns="0" tIns="0" rIns="0" bIns="0" rtlCol="0" anchor="ctr"/>
           <a:lstStyle/>
           <a:p>
-            <a:pPr indent="0" marL="0">
+            <a:pPr marL="0" indent="0">
               <a:lnSpc>
                 <a:spcPct val="112000"/>
               </a:lnSpc>
@@ -23331,7 +22925,7 @@
           </a:prstGeom>
           <a:extLst>
             <a:ext uri="{C572A759-6A51-4108-AA02-DFA0A04FC94B}">
-              <ma14:wrappingTextBoxFlag xmlns:ma14="http://schemas.microsoft.com/office/mac/drawingml/2011/main" val="0"/>
+              <ma14:wrappingTextBoxFlag xmlns="" xmlns:ma14="http://schemas.microsoft.com/office/mac/drawingml/2011/main" val="0"/>
             </a:ext>
           </a:extLst>
         </p:spPr>
@@ -23352,7 +22946,7 @@
           <a:p>
             <a:pPr algn="l"/>
             <a:fld id="{F7021451-1387-4CA6-816F-3879F97B5CBC}" type="slidenum">
-              <a:rPr b="0" lang="en-US"/>
+              <a:rPr lang="en-US" b="0"/>
               <a:t>9</a:t>
             </a:fld>
             <a:endParaRPr lang="en-US"/>
@@ -23660,4 +23254,299 @@
     </a:ext>
   </a:extLst>
 </a:theme>
+</file>
+
+<file path=ppt/theme/theme2.xml><?xml version="1.0" encoding="utf-8"?>
+<a:theme xmlns:a="http://schemas.openxmlformats.org/drawingml/2006/main" name="Office Theme">
+  <a:themeElements>
+    <a:clrScheme name="Office">
+      <a:dk1>
+        <a:sysClr val="windowText" lastClr="000000"/>
+      </a:dk1>
+      <a:lt1>
+        <a:sysClr val="window" lastClr="FFFFFF"/>
+      </a:lt1>
+      <a:dk2>
+        <a:srgbClr val="44546A"/>
+      </a:dk2>
+      <a:lt2>
+        <a:srgbClr val="E7E6E6"/>
+      </a:lt2>
+      <a:accent1>
+        <a:srgbClr val="4472C4"/>
+      </a:accent1>
+      <a:accent2>
+        <a:srgbClr val="ED7D31"/>
+      </a:accent2>
+      <a:accent3>
+        <a:srgbClr val="A5A5A5"/>
+      </a:accent3>
+      <a:accent4>
+        <a:srgbClr val="FFC000"/>
+      </a:accent4>
+      <a:accent5>
+        <a:srgbClr val="5B9BD5"/>
+      </a:accent5>
+      <a:accent6>
+        <a:srgbClr val="70AD47"/>
+      </a:accent6>
+      <a:hlink>
+        <a:srgbClr val="0563C1"/>
+      </a:hlink>
+      <a:folHlink>
+        <a:srgbClr val="954F72"/>
+      </a:folHlink>
+    </a:clrScheme>
+    <a:fontScheme name="Office">
+      <a:majorFont>
+        <a:latin typeface="Calibri Light" panose="020F0302020204030204"/>
+        <a:ea typeface=""/>
+        <a:cs typeface=""/>
+        <a:font script="Jpan" typeface="游ゴシック Light"/>
+        <a:font script="Hang" typeface="맑은 고딕"/>
+        <a:font script="Hans" typeface="等线 Light"/>
+        <a:font script="Hant" typeface="新細明體"/>
+        <a:font script="Arab" typeface="Times New Roman"/>
+        <a:font script="Hebr" typeface="Times New Roman"/>
+        <a:font script="Thai" typeface="Angsana New"/>
+        <a:font script="Ethi" typeface="Nyala"/>
+        <a:font script="Beng" typeface="Vrinda"/>
+        <a:font script="Gujr" typeface="Shruti"/>
+        <a:font script="Khmr" typeface="MoolBoran"/>
+        <a:font script="Knda" typeface="Tunga"/>
+        <a:font script="Guru" typeface="Raavi"/>
+        <a:font script="Cans" typeface="Euphemia"/>
+        <a:font script="Cher" typeface="Plantagenet Cherokee"/>
+        <a:font script="Yiii" typeface="Microsoft Yi Baiti"/>
+        <a:font script="Tibt" typeface="Microsoft Himalaya"/>
+        <a:font script="Thaa" typeface="MV Boli"/>
+        <a:font script="Deva" typeface="Mangal"/>
+        <a:font script="Telu" typeface="Gautami"/>
+        <a:font script="Taml" typeface="Latha"/>
+        <a:font script="Syrc" typeface="Estrangelo Edessa"/>
+        <a:font script="Orya" typeface="Kalinga"/>
+        <a:font script="Mlym" typeface="Kartika"/>
+        <a:font script="Laoo" typeface="DokChampa"/>
+        <a:font script="Sinh" typeface="Iskoola Pota"/>
+        <a:font script="Mong" typeface="Mongolian Baiti"/>
+        <a:font script="Viet" typeface="Times New Roman"/>
+        <a:font script="Uigh" typeface="Microsoft Uighur"/>
+        <a:font script="Geor" typeface="Sylfaen"/>
+        <a:font script="Armn" typeface="Arial"/>
+        <a:font script="Bugi" typeface="Leelawadee UI"/>
+        <a:font script="Bopo" typeface="Microsoft JhengHei"/>
+        <a:font script="Java" typeface="Javanese Text"/>
+        <a:font script="Lisu" typeface="Segoe UI"/>
+        <a:font script="Mymr" typeface="Myanmar Text"/>
+        <a:font script="Nkoo" typeface="Ebrima"/>
+        <a:font script="Olck" typeface="Nirmala UI"/>
+        <a:font script="Osma" typeface="Ebrima"/>
+        <a:font script="Phag" typeface="Phagspa"/>
+        <a:font script="Syrn" typeface="Estrangelo Edessa"/>
+        <a:font script="Syrj" typeface="Estrangelo Edessa"/>
+        <a:font script="Syre" typeface="Estrangelo Edessa"/>
+        <a:font script="Sora" typeface="Nirmala UI"/>
+        <a:font script="Tale" typeface="Microsoft Tai Le"/>
+        <a:font script="Talu" typeface="Microsoft New Tai Lue"/>
+        <a:font script="Tfng" typeface="Ebrima"/>
+      </a:majorFont>
+      <a:minorFont>
+        <a:latin typeface="Calibri" panose="020F0502020204030204"/>
+        <a:ea typeface=""/>
+        <a:cs typeface=""/>
+        <a:font script="Jpan" typeface="游ゴシック"/>
+        <a:font script="Hang" typeface="맑은 고딕"/>
+        <a:font script="Hans" typeface="等线"/>
+        <a:font script="Hant" typeface="新細明體"/>
+        <a:font script="Arab" typeface="Arial"/>
+        <a:font script="Hebr" typeface="Arial"/>
+        <a:font script="Thai" typeface="Cordia New"/>
+        <a:font script="Ethi" typeface="Nyala"/>
+        <a:font script="Beng" typeface="Vrinda"/>
+        <a:font script="Gujr" typeface="Shruti"/>
+        <a:font script="Khmr" typeface="DaunPenh"/>
+        <a:font script="Knda" typeface="Tunga"/>
+        <a:font script="Guru" typeface="Raavi"/>
+        <a:font script="Cans" typeface="Euphemia"/>
+        <a:font script="Cher" typeface="Plantagenet Cherokee"/>
+        <a:font script="Yiii" typeface="Microsoft Yi Baiti"/>
+        <a:font script="Tibt" typeface="Microsoft Himalaya"/>
+        <a:font script="Thaa" typeface="MV Boli"/>
+        <a:font script="Deva" typeface="Mangal"/>
+        <a:font script="Telu" typeface="Gautami"/>
+        <a:font script="Taml" typeface="Latha"/>
+        <a:font script="Syrc" typeface="Estrangelo Edessa"/>
+        <a:font script="Orya" typeface="Kalinga"/>
+        <a:font script="Mlym" typeface="Kartika"/>
+        <a:font script="Laoo" typeface="DokChampa"/>
+        <a:font script="Sinh" typeface="Iskoola Pota"/>
+        <a:font script="Mong" typeface="Mongolian Baiti"/>
+        <a:font script="Viet" typeface="Arial"/>
+        <a:font script="Uigh" typeface="Microsoft Uighur"/>
+        <a:font script="Geor" typeface="Sylfaen"/>
+        <a:font script="Armn" typeface="Arial"/>
+        <a:font script="Bugi" typeface="Leelawadee UI"/>
+        <a:font script="Bopo" typeface="Microsoft JhengHei"/>
+        <a:font script="Java" typeface="Javanese Text"/>
+        <a:font script="Lisu" typeface="Segoe UI"/>
+        <a:font script="Mymr" typeface="Myanmar Text"/>
+        <a:font script="Nkoo" typeface="Ebrima"/>
+        <a:font script="Olck" typeface="Nirmala UI"/>
+        <a:font script="Osma" typeface="Ebrima"/>
+        <a:font script="Phag" typeface="Phagspa"/>
+        <a:font script="Syrn" typeface="Estrangelo Edessa"/>
+        <a:font script="Syrj" typeface="Estrangelo Edessa"/>
+        <a:font script="Syre" typeface="Estrangelo Edessa"/>
+        <a:font script="Sora" typeface="Nirmala UI"/>
+        <a:font script="Tale" typeface="Microsoft Tai Le"/>
+        <a:font script="Talu" typeface="Microsoft New Tai Lue"/>
+        <a:font script="Tfng" typeface="Ebrima"/>
+      </a:minorFont>
+    </a:fontScheme>
+    <a:fmtScheme name="Office">
+      <a:fillStyleLst>
+        <a:solidFill>
+          <a:schemeClr val="phClr"/>
+        </a:solidFill>
+        <a:gradFill rotWithShape="1">
+          <a:gsLst>
+            <a:gs pos="0">
+              <a:schemeClr val="phClr">
+                <a:lumMod val="110000"/>
+                <a:satMod val="105000"/>
+                <a:tint val="67000"/>
+              </a:schemeClr>
+            </a:gs>
+            <a:gs pos="50000">
+              <a:schemeClr val="phClr">
+                <a:lumMod val="105000"/>
+                <a:satMod val="103000"/>
+                <a:tint val="73000"/>
+              </a:schemeClr>
+            </a:gs>
+            <a:gs pos="100000">
+              <a:schemeClr val="phClr">
+                <a:lumMod val="105000"/>
+                <a:satMod val="109000"/>
+                <a:tint val="81000"/>
+              </a:schemeClr>
+            </a:gs>
+          </a:gsLst>
+          <a:lin ang="5400000" scaled="0"/>
+        </a:gradFill>
+        <a:gradFill rotWithShape="1">
+          <a:gsLst>
+            <a:gs pos="0">
+              <a:schemeClr val="phClr">
+                <a:satMod val="103000"/>
+                <a:lumMod val="102000"/>
+                <a:tint val="94000"/>
+              </a:schemeClr>
+            </a:gs>
+            <a:gs pos="50000">
+              <a:schemeClr val="phClr">
+                <a:satMod val="110000"/>
+                <a:lumMod val="100000"/>
+                <a:shade val="100000"/>
+              </a:schemeClr>
+            </a:gs>
+            <a:gs pos="100000">
+              <a:schemeClr val="phClr">
+                <a:lumMod val="99000"/>
+                <a:satMod val="120000"/>
+                <a:shade val="78000"/>
+              </a:schemeClr>
+            </a:gs>
+          </a:gsLst>
+          <a:lin ang="5400000" scaled="0"/>
+        </a:gradFill>
+      </a:fillStyleLst>
+      <a:lnStyleLst>
+        <a:ln w="6350" cap="flat" cmpd="sng" algn="ctr">
+          <a:solidFill>
+            <a:schemeClr val="phClr"/>
+          </a:solidFill>
+          <a:prstDash val="solid"/>
+          <a:miter lim="800000"/>
+        </a:ln>
+        <a:ln w="12700" cap="flat" cmpd="sng" algn="ctr">
+          <a:solidFill>
+            <a:schemeClr val="phClr"/>
+          </a:solidFill>
+          <a:prstDash val="solid"/>
+          <a:miter lim="800000"/>
+        </a:ln>
+        <a:ln w="19050" cap="flat" cmpd="sng" algn="ctr">
+          <a:solidFill>
+            <a:schemeClr val="phClr"/>
+          </a:solidFill>
+          <a:prstDash val="solid"/>
+          <a:miter lim="800000"/>
+        </a:ln>
+      </a:lnStyleLst>
+      <a:effectStyleLst>
+        <a:effectStyle>
+          <a:effectLst/>
+        </a:effectStyle>
+        <a:effectStyle>
+          <a:effectLst/>
+        </a:effectStyle>
+        <a:effectStyle>
+          <a:effectLst>
+            <a:outerShdw blurRad="57150" dist="19050" dir="5400000" algn="ctr" rotWithShape="0">
+              <a:srgbClr val="000000">
+                <a:alpha val="63000"/>
+              </a:srgbClr>
+            </a:outerShdw>
+          </a:effectLst>
+        </a:effectStyle>
+      </a:effectStyleLst>
+      <a:bgFillStyleLst>
+        <a:solidFill>
+          <a:schemeClr val="phClr"/>
+        </a:solidFill>
+        <a:solidFill>
+          <a:schemeClr val="phClr">
+            <a:tint val="95000"/>
+            <a:satMod val="170000"/>
+          </a:schemeClr>
+        </a:solidFill>
+        <a:gradFill rotWithShape="1">
+          <a:gsLst>
+            <a:gs pos="0">
+              <a:schemeClr val="phClr">
+                <a:tint val="93000"/>
+                <a:satMod val="150000"/>
+                <a:shade val="98000"/>
+                <a:lumMod val="102000"/>
+              </a:schemeClr>
+            </a:gs>
+            <a:gs pos="50000">
+              <a:schemeClr val="phClr">
+                <a:tint val="98000"/>
+                <a:satMod val="130000"/>
+                <a:shade val="90000"/>
+                <a:lumMod val="103000"/>
+              </a:schemeClr>
+            </a:gs>
+            <a:gs pos="100000">
+              <a:schemeClr val="phClr">
+                <a:shade val="63000"/>
+                <a:satMod val="120000"/>
+              </a:schemeClr>
+            </a:gs>
+          </a:gsLst>
+          <a:lin ang="5400000" scaled="0"/>
+        </a:gradFill>
+      </a:bgFillStyleLst>
+    </a:fmtScheme>
+  </a:themeElements>
+  <a:objectDefaults/>
+  <a:extraClrSchemeLst/>
+  <a:extLst>
+    <a:ext uri="{05A4C25C-085E-4340-85A3-A5531E510DB2}">
+      <thm15:themeFamily xmlns:thm15="http://schemas.microsoft.com/office/thememl/2012/main" name="Office Theme" id="{62F939B6-93AF-4DB8-9C6B-D6C7DFDC589F}" vid="{4A3C46E8-61CC-4603-A589-7422A47A8E4A}"/>
+    </a:ext>
+  </a:extLst>
+</a:theme>
 </file>
--- a/docs/decks/L04.pptx
+++ b/docs/decks/L04.pptx
@@ -4,9 +4,6 @@
   <p:sldMasterIdLst>
     <p:sldMasterId id="2147483648" r:id="rId1"/>
   </p:sldMasterIdLst>
-  <p:notesMasterIdLst>
-    <p:notesMasterId r:id="rId29"/>
-  </p:notesMasterIdLst>
   <p:sldIdLst>
     <p:sldId id="256" r:id="rId2"/>
     <p:sldId id="257" r:id="rId3"/>
@@ -36,6 +33,9 @@
     <p:sldId id="281" r:id="rId27"/>
     <p:sldId id="282" r:id="rId28"/>
   </p:sldIdLst>
+  <p:notesMasterIdLst>
+    <p:notesMasterId r:id="rId29"/>
+  </p:notesMasterIdLst>
   <p:sldSz cx="12192000" cy="6858000"/>
   <p:notesSz cx="6858000" cy="12192000"/>
   <p:defaultTextStyle>
@@ -130,11 +130,6 @@
       </a:defRPr>
     </a:lvl9pPr>
   </p:defaultTextStyle>
-  <p:extLst>
-    <p:ext uri="{EFAFB233-063F-42B5-8137-9DF3F51BA10A}">
-      <p15:sldGuideLst xmlns:p15="http://schemas.microsoft.com/office/powerpoint/2012/main"/>
-    </p:ext>
-  </p:extLst>
 </p:presentation>
 </file>
 
@@ -160,10 +155,234 @@
           <a:chExt cx="0" cy="0"/>
         </a:xfrm>
       </p:grpSpPr>
+      <p:sp>
+        <p:nvSpPr>
+          <p:cNvPr id="2" name="Header Placeholder 1"/>
+          <p:cNvSpPr>
+            <a:spLocks noGrp="1"/>
+          </p:cNvSpPr>
+          <p:nvPr>
+            <p:ph type="hdr" sz="quarter"/>
+          </p:nvPr>
+        </p:nvSpPr>
+        <p:spPr>
+          <a:xfrm>
+            <a:off x="0" y="0"/>
+            <a:ext cx="2971800" cy="458788"/>
+          </a:xfrm>
+          <a:prstGeom prst="rect">
+            <a:avLst/>
+          </a:prstGeom>
+        </p:spPr>
+        <p:txBody>
+          <a:bodyPr vert="horz" lIns="91440" tIns="45720" rIns="91440" bIns="45720" rtlCol="0"/>
+          <a:lstStyle>
+            <a:lvl1pPr algn="l">
+              <a:defRPr sz="1200"/>
+            </a:lvl1pPr>
+          </a:lstStyle>
+          <a:p>
+            <a:endParaRPr lang="en-US"/>
+          </a:p>
+        </p:txBody>
+      </p:sp>
+      <p:sp>
+        <p:nvSpPr>
+          <p:cNvPr id="3" name="Date Placeholder 2"/>
+          <p:cNvSpPr>
+            <a:spLocks noGrp="1"/>
+          </p:cNvSpPr>
+          <p:nvPr>
+            <p:ph type="dt" idx="1"/>
+          </p:nvPr>
+        </p:nvSpPr>
+        <p:spPr>
+          <a:xfrm>
+            <a:off x="3884613" y="0"/>
+            <a:ext cx="2971800" cy="458788"/>
+          </a:xfrm>
+          <a:prstGeom prst="rect">
+            <a:avLst/>
+          </a:prstGeom>
+        </p:spPr>
+        <p:txBody>
+          <a:bodyPr vert="horz" lIns="91440" tIns="45720" rIns="91440" bIns="45720" rtlCol="0"/>
+          <a:lstStyle>
+            <a:lvl1pPr algn="r">
+              <a:defRPr sz="1200"/>
+            </a:lvl1pPr>
+          </a:lstStyle>
+          <a:p>
+            <a:fld id="{5282F153-3F37-0F45-9E97-73ACFA13230C}" type="datetimeFigureOut">
+              <a:rPr lang="en-US"/>
+              <a:t>7/23/19</a:t>
+            </a:fld>
+            <a:endParaRPr lang="en-US"/>
+          </a:p>
+        </p:txBody>
+      </p:sp>
+      <p:sp>
+        <p:nvSpPr>
+          <p:cNvPr id="4" name="Slide Image Placeholder 3"/>
+          <p:cNvSpPr>
+            <a:spLocks noGrp="1" noRot="1" noChangeAspect="1"/>
+          </p:cNvSpPr>
+          <p:nvPr>
+            <p:ph type="sldImg" idx="2"/>
+          </p:nvPr>
+        </p:nvSpPr>
+        <p:spPr>
+          <a:xfrm>
+            <a:off x="685800" y="1143000"/>
+            <a:ext cx="5486400" cy="3086100"/>
+          </a:xfrm>
+          <a:prstGeom prst="rect">
+            <a:avLst/>
+          </a:prstGeom>
+          <a:noFill/>
+          <a:ln w="12700">
+            <a:solidFill>
+              <a:prstClr val="black"/>
+            </a:solidFill>
+          </a:ln>
+        </p:spPr>
+        <p:txBody>
+          <a:bodyPr vert="horz" lIns="91440" tIns="45720" rIns="91440" bIns="45720" rtlCol="0" anchor="ctr"/>
+          <a:lstStyle/>
+          <a:p>
+            <a:endParaRPr lang="en-US"/>
+          </a:p>
+        </p:txBody>
+      </p:sp>
+      <p:sp>
+        <p:nvSpPr>
+          <p:cNvPr id="5" name="Notes Placeholder 4"/>
+          <p:cNvSpPr>
+            <a:spLocks noGrp="1"/>
+          </p:cNvSpPr>
+          <p:nvPr>
+            <p:ph type="body" sz="quarter" idx="3"/>
+          </p:nvPr>
+        </p:nvSpPr>
+        <p:spPr>
+          <a:xfrm>
+            <a:off x="685800" y="4400550"/>
+            <a:ext cx="5486400" cy="3600450"/>
+          </a:xfrm>
+          <a:prstGeom prst="rect">
+            <a:avLst/>
+          </a:prstGeom>
+        </p:spPr>
+        <p:txBody>
+          <a:bodyPr vert="horz" lIns="91440" tIns="45720" rIns="91440" bIns="45720" rtlCol="0"/>
+          <a:lstStyle/>
+          <a:p>
+            <a:pPr lvl="0"/>
+            <a:r>
+              <a:rPr lang="en-US"/>
+              <a:t>Click to edit Master text styles</a:t>
+            </a:r>
+          </a:p>
+          <a:p>
+            <a:pPr lvl="1"/>
+            <a:r>
+              <a:rPr lang="en-US"/>
+              <a:t>Second level</a:t>
+            </a:r>
+          </a:p>
+          <a:p>
+            <a:pPr lvl="2"/>
+            <a:r>
+              <a:rPr lang="en-US"/>
+              <a:t>Third level</a:t>
+            </a:r>
+          </a:p>
+          <a:p>
+            <a:pPr lvl="3"/>
+            <a:r>
+              <a:rPr lang="en-US"/>
+              <a:t>Fourth level</a:t>
+            </a:r>
+          </a:p>
+          <a:p>
+            <a:pPr lvl="4"/>
+            <a:r>
+              <a:rPr lang="en-US"/>
+              <a:t>Fifth level</a:t>
+            </a:r>
+          </a:p>
+        </p:txBody>
+      </p:sp>
+      <p:sp>
+        <p:nvSpPr>
+          <p:cNvPr id="6" name="Footer Placeholder 5"/>
+          <p:cNvSpPr>
+            <a:spLocks noGrp="1"/>
+          </p:cNvSpPr>
+          <p:nvPr>
+            <p:ph type="ftr" sz="quarter" idx="4"/>
+          </p:nvPr>
+        </p:nvSpPr>
+        <p:spPr>
+          <a:xfrm>
+            <a:off x="0" y="8685213"/>
+            <a:ext cx="2971800" cy="458787"/>
+          </a:xfrm>
+          <a:prstGeom prst="rect">
+            <a:avLst/>
+          </a:prstGeom>
+        </p:spPr>
+        <p:txBody>
+          <a:bodyPr vert="horz" lIns="91440" tIns="45720" rIns="91440" bIns="45720" rtlCol="0" anchor="b"/>
+          <a:lstStyle>
+            <a:lvl1pPr algn="l">
+              <a:defRPr sz="1200"/>
+            </a:lvl1pPr>
+          </a:lstStyle>
+          <a:p>
+            <a:endParaRPr lang="en-US"/>
+          </a:p>
+        </p:txBody>
+      </p:sp>
+      <p:sp>
+        <p:nvSpPr>
+          <p:cNvPr id="7" name="Slide Number Placeholder 6"/>
+          <p:cNvSpPr>
+            <a:spLocks noGrp="1"/>
+          </p:cNvSpPr>
+          <p:nvPr>
+            <p:ph type="sldNum" sz="quarter" idx="5"/>
+          </p:nvPr>
+        </p:nvSpPr>
+        <p:spPr>
+          <a:xfrm>
+            <a:off x="3884613" y="8685213"/>
+            <a:ext cx="2971800" cy="458787"/>
+          </a:xfrm>
+          <a:prstGeom prst="rect">
+            <a:avLst/>
+          </a:prstGeom>
+        </p:spPr>
+        <p:txBody>
+          <a:bodyPr vert="horz" lIns="91440" tIns="45720" rIns="91440" bIns="45720" rtlCol="0" anchor="b"/>
+          <a:lstStyle>
+            <a:lvl1pPr algn="r">
+              <a:defRPr sz="1200"/>
+            </a:lvl1pPr>
+          </a:lstStyle>
+          <a:p>
+            <a:fld id="{CE5E9CC1-C706-0F49-92D6-E571CC5EEA8F}" type="slidenum">
+              <a:rPr lang="en-US"/>
+              <a:t>‹#›</a:t>
+            </a:fld>
+            <a:endParaRPr lang="en-US"/>
+          </a:p>
+        </p:txBody>
+      </p:sp>
     </p:spTree>
     <p:extLst>
       <p:ext uri="{BB962C8B-B14F-4D97-AF65-F5344CB8AC3E}">
-        <p14:creationId xmlns:p14="http://schemas.microsoft.com/office/powerpoint/2010/main" val="4030058338"/>
+        <p14:creationId xmlns:p14="http://schemas.microsoft.com/office/powerpoint/2010/main" val="1024086991"/>
       </p:ext>
     </p:extLst>
   </p:cSld>
@@ -307,6 +526,10 @@
           <a:bodyPr/>
           <a:lstStyle/>
           <a:p>
+            <a:r>
+              <a:rPr lang="en-US" dirty="0"/>
+              <a:t/>
+            </a:r>
             <a:endParaRPr lang="en-US" dirty="0"/>
           </a:p>
         </p:txBody>
@@ -391,6 +614,10 @@
           <a:bodyPr/>
           <a:lstStyle/>
           <a:p>
+            <a:r>
+              <a:rPr lang="en-US" dirty="0"/>
+              <a:t/>
+            </a:r>
             <a:endParaRPr lang="en-US" dirty="0"/>
           </a:p>
         </p:txBody>
@@ -475,6 +702,10 @@
           <a:bodyPr/>
           <a:lstStyle/>
           <a:p>
+            <a:r>
+              <a:rPr lang="en-US" dirty="0"/>
+              <a:t/>
+            </a:r>
             <a:endParaRPr lang="en-US" dirty="0"/>
           </a:p>
         </p:txBody>
@@ -559,6 +790,10 @@
           <a:bodyPr/>
           <a:lstStyle/>
           <a:p>
+            <a:r>
+              <a:rPr lang="en-US" dirty="0"/>
+              <a:t/>
+            </a:r>
             <a:endParaRPr lang="en-US" dirty="0"/>
           </a:p>
         </p:txBody>
@@ -643,6 +878,10 @@
           <a:bodyPr/>
           <a:lstStyle/>
           <a:p>
+            <a:r>
+              <a:rPr lang="en-US" dirty="0"/>
+              <a:t/>
+            </a:r>
             <a:endParaRPr lang="en-US" dirty="0"/>
           </a:p>
         </p:txBody>
@@ -727,6 +966,10 @@
           <a:bodyPr/>
           <a:lstStyle/>
           <a:p>
+            <a:r>
+              <a:rPr lang="en-US" dirty="0"/>
+              <a:t/>
+            </a:r>
             <a:endParaRPr lang="en-US" dirty="0"/>
           </a:p>
         </p:txBody>
@@ -811,6 +1054,10 @@
           <a:bodyPr/>
           <a:lstStyle/>
           <a:p>
+            <a:r>
+              <a:rPr lang="en-US" dirty="0"/>
+              <a:t/>
+            </a:r>
             <a:endParaRPr lang="en-US" dirty="0"/>
           </a:p>
         </p:txBody>
@@ -895,6 +1142,10 @@
           <a:bodyPr/>
           <a:lstStyle/>
           <a:p>
+            <a:r>
+              <a:rPr lang="en-US" dirty="0"/>
+              <a:t/>
+            </a:r>
             <a:endParaRPr lang="en-US" dirty="0"/>
           </a:p>
         </p:txBody>
@@ -979,6 +1230,10 @@
           <a:bodyPr/>
           <a:lstStyle/>
           <a:p>
+            <a:r>
+              <a:rPr lang="en-US" dirty="0"/>
+              <a:t/>
+            </a:r>
             <a:endParaRPr lang="en-US" dirty="0"/>
           </a:p>
         </p:txBody>
@@ -1063,6 +1318,10 @@
           <a:bodyPr/>
           <a:lstStyle/>
           <a:p>
+            <a:r>
+              <a:rPr lang="en-US" dirty="0"/>
+              <a:t/>
+            </a:r>
             <a:endParaRPr lang="en-US" dirty="0"/>
           </a:p>
         </p:txBody>
@@ -1147,6 +1406,10 @@
           <a:bodyPr/>
           <a:lstStyle/>
           <a:p>
+            <a:r>
+              <a:rPr lang="en-US" dirty="0"/>
+              <a:t/>
+            </a:r>
             <a:endParaRPr lang="en-US" dirty="0"/>
           </a:p>
         </p:txBody>
@@ -1231,6 +1494,10 @@
           <a:bodyPr/>
           <a:lstStyle/>
           <a:p>
+            <a:r>
+              <a:rPr lang="en-US" dirty="0"/>
+              <a:t/>
+            </a:r>
             <a:endParaRPr lang="en-US" dirty="0"/>
           </a:p>
         </p:txBody>
@@ -1315,6 +1582,10 @@
           <a:bodyPr/>
           <a:lstStyle/>
           <a:p>
+            <a:r>
+              <a:rPr lang="en-US" dirty="0"/>
+              <a:t/>
+            </a:r>
             <a:endParaRPr lang="en-US" dirty="0"/>
           </a:p>
         </p:txBody>
@@ -1399,6 +1670,10 @@
           <a:bodyPr/>
           <a:lstStyle/>
           <a:p>
+            <a:r>
+              <a:rPr lang="en-US" dirty="0"/>
+              <a:t/>
+            </a:r>
             <a:endParaRPr lang="en-US" dirty="0"/>
           </a:p>
         </p:txBody>
@@ -1483,6 +1758,10 @@
           <a:bodyPr/>
           <a:lstStyle/>
           <a:p>
+            <a:r>
+              <a:rPr lang="en-US" dirty="0"/>
+              <a:t/>
+            </a:r>
             <a:endParaRPr lang="en-US" dirty="0"/>
           </a:p>
         </p:txBody>
@@ -1567,6 +1846,10 @@
           <a:bodyPr/>
           <a:lstStyle/>
           <a:p>
+            <a:r>
+              <a:rPr lang="en-US" dirty="0"/>
+              <a:t/>
+            </a:r>
             <a:endParaRPr lang="en-US" dirty="0"/>
           </a:p>
         </p:txBody>
@@ -1651,6 +1934,10 @@
           <a:bodyPr/>
           <a:lstStyle/>
           <a:p>
+            <a:r>
+              <a:rPr lang="en-US" dirty="0"/>
+              <a:t/>
+            </a:r>
             <a:endParaRPr lang="en-US" dirty="0"/>
           </a:p>
         </p:txBody>
@@ -1735,6 +2022,10 @@
           <a:bodyPr/>
           <a:lstStyle/>
           <a:p>
+            <a:r>
+              <a:rPr lang="en-US" dirty="0"/>
+              <a:t/>
+            </a:r>
             <a:endParaRPr lang="en-US" dirty="0"/>
           </a:p>
         </p:txBody>
@@ -1819,6 +2110,10 @@
           <a:bodyPr/>
           <a:lstStyle/>
           <a:p>
+            <a:r>
+              <a:rPr lang="en-US" dirty="0"/>
+              <a:t/>
+            </a:r>
             <a:endParaRPr lang="en-US" dirty="0"/>
           </a:p>
         </p:txBody>
@@ -1903,6 +2198,10 @@
           <a:bodyPr/>
           <a:lstStyle/>
           <a:p>
+            <a:r>
+              <a:rPr lang="en-US" dirty="0"/>
+              <a:t/>
+            </a:r>
             <a:endParaRPr lang="en-US" dirty="0"/>
           </a:p>
         </p:txBody>
@@ -1987,6 +2286,10 @@
           <a:bodyPr/>
           <a:lstStyle/>
           <a:p>
+            <a:r>
+              <a:rPr lang="en-US" dirty="0"/>
+              <a:t/>
+            </a:r>
             <a:endParaRPr lang="en-US" dirty="0"/>
           </a:p>
         </p:txBody>
@@ -2071,6 +2374,10 @@
           <a:bodyPr/>
           <a:lstStyle/>
           <a:p>
+            <a:r>
+              <a:rPr lang="en-US" dirty="0"/>
+              <a:t/>
+            </a:r>
             <a:endParaRPr lang="en-US" dirty="0"/>
           </a:p>
         </p:txBody>
@@ -2155,6 +2462,10 @@
           <a:bodyPr/>
           <a:lstStyle/>
           <a:p>
+            <a:r>
+              <a:rPr lang="en-US" dirty="0"/>
+              <a:t/>
+            </a:r>
             <a:endParaRPr lang="en-US" dirty="0"/>
           </a:p>
         </p:txBody>
@@ -2239,6 +2550,10 @@
           <a:bodyPr/>
           <a:lstStyle/>
           <a:p>
+            <a:r>
+              <a:rPr lang="en-US" dirty="0"/>
+              <a:t/>
+            </a:r>
             <a:endParaRPr lang="en-US" dirty="0"/>
           </a:p>
         </p:txBody>
@@ -2323,6 +2638,10 @@
           <a:bodyPr/>
           <a:lstStyle/>
           <a:p>
+            <a:r>
+              <a:rPr lang="en-US" dirty="0"/>
+              <a:t/>
+            </a:r>
             <a:endParaRPr lang="en-US" dirty="0"/>
           </a:p>
         </p:txBody>
@@ -2407,6 +2726,10 @@
           <a:bodyPr/>
           <a:lstStyle/>
           <a:p>
+            <a:r>
+              <a:rPr lang="en-US" dirty="0"/>
+              <a:t/>
+            </a:r>
             <a:endParaRPr lang="en-US" dirty="0"/>
           </a:p>
         </p:txBody>
@@ -2491,6 +2814,10 @@
           <a:bodyPr/>
           <a:lstStyle/>
           <a:p>
+            <a:r>
+              <a:rPr lang="en-US" dirty="0"/>
+              <a:t/>
+            </a:r>
             <a:endParaRPr lang="en-US" dirty="0"/>
           </a:p>
         </p:txBody>
@@ -2573,7 +2900,7 @@
           </a:prstGeom>
           <a:extLst>
             <a:ext uri="{C572A759-6A51-4108-AA02-DFA0A04FC94B}">
-              <ma14:wrappingTextBoxFlag xmlns="" xmlns:ma14="http://schemas.microsoft.com/office/mac/drawingml/2011/main" val="0"/>
+              <ma14:wrappingTextBoxFlag xmlns:ma14="http://schemas.microsoft.com/office/mac/drawingml/2011/main" val="0"/>
             </a:ext>
           </a:extLst>
         </p:spPr>
@@ -2594,8 +2921,8 @@
           <a:p>
             <a:pPr algn="l"/>
             <a:fld id="{F7021451-1387-4CA6-816F-3879F97B5CBC}" type="slidenum">
-              <a:rPr lang="en-US" b="0"/>
-              <a:t>‹#›</a:t>
+              <a:rPr b="0" lang="en-US"/>
+              <a:t>1000</a:t>
             </a:fld>
             <a:endParaRPr lang="en-US"/>
           </a:p>
@@ -2617,7 +2944,6 @@
         <a:solidFill>
           <a:srgbClr val="000000"/>
         </a:solidFill>
-        <a:effectLst/>
       </p:bgPr>
     </p:bg>
     <p:spTree>
@@ -2636,14 +2962,14 @@
       </p:grpSpPr>
       <p:pic>
         <p:nvPicPr>
-          <p:cNvPr id="2" name="Image 0" descr="preencoded.png"/>
+          <p:cNvPr id="2" name="Image 0" descr="preencoded.png">    </p:cNvPr>
           <p:cNvPicPr>
             <a:picLocks noChangeAspect="1"/>
           </p:cNvPicPr>
           <p:nvPr/>
         </p:nvPicPr>
         <p:blipFill>
-          <a:blip r:embed="rId2"/>
+          <a:blip r:embed="rId1"/>
           <a:stretch>
             <a:fillRect/>
           </a:stretch>
@@ -2674,7 +3000,6 @@
         <a:solidFill>
           <a:srgbClr val="000000"/>
         </a:solidFill>
-        <a:effectLst/>
       </p:bgPr>
     </p:bg>
     <p:spTree>
@@ -2693,14 +3018,14 @@
       </p:grpSpPr>
       <p:pic>
         <p:nvPicPr>
-          <p:cNvPr id="2" name="Image 0" descr="preencoded.png"/>
+          <p:cNvPr id="2" name="Image 0" descr="preencoded.png">    </p:cNvPr>
           <p:cNvPicPr>
             <a:picLocks noChangeAspect="1"/>
           </p:cNvPicPr>
           <p:nvPr/>
         </p:nvPicPr>
         <p:blipFill>
-          <a:blip r:embed="rId2"/>
+          <a:blip r:embed="rId1"/>
           <a:stretch>
             <a:fillRect/>
           </a:stretch>
@@ -2731,7 +3056,6 @@
         <a:solidFill>
           <a:srgbClr val="000000"/>
         </a:solidFill>
-        <a:effectLst/>
       </p:bgPr>
     </p:bg>
     <p:spTree>
@@ -2750,14 +3074,14 @@
       </p:grpSpPr>
       <p:pic>
         <p:nvPicPr>
-          <p:cNvPr id="2" name="Image 0" descr="preencoded.png"/>
+          <p:cNvPr id="2" name="Image 0" descr="preencoded.png">    </p:cNvPr>
           <p:cNvPicPr>
             <a:picLocks noChangeAspect="1"/>
           </p:cNvPicPr>
           <p:nvPr/>
         </p:nvPicPr>
         <p:blipFill>
-          <a:blip r:embed="rId2"/>
+          <a:blip r:embed="rId1"/>
           <a:stretch>
             <a:fillRect/>
           </a:stretch>
@@ -2783,11 +3107,6 @@
 <file path=ppt/slideMasters/slideMaster1.xml><?xml version="1.0" encoding="utf-8"?>
 <p:sldMaster xmlns:a="http://schemas.openxmlformats.org/drawingml/2006/main" xmlns:r="http://schemas.openxmlformats.org/officeDocument/2006/relationships" xmlns:p="http://schemas.openxmlformats.org/presentationml/2006/main">
   <p:cSld>
-    <p:bg>
-      <p:bgRef idx="1001">
-        <a:schemeClr val="bg1"/>
-      </p:bgRef>
-    </p:bg>
     <p:spTree>
       <p:nvGrpSpPr>
         <p:cNvPr id="1" name=""/>
@@ -2822,7 +3141,7 @@
           </a:prstGeom>
           <a:extLst>
             <a:ext uri="{C572A759-6A51-4108-AA02-DFA0A04FC94B}">
-              <ma14:wrappingTextBoxFlag xmlns="" xmlns:ma14="http://schemas.microsoft.com/office/mac/drawingml/2011/main" val="0"/>
+              <ma14:wrappingTextBoxFlag xmlns:ma14="http://schemas.microsoft.com/office/mac/drawingml/2011/main" val="0"/>
             </a:ext>
           </a:extLst>
         </p:spPr>
@@ -2843,8 +3162,8 @@
           <a:p>
             <a:pPr algn="l"/>
             <a:fld id="{F7021451-1387-4CA6-816F-3879F97B5CBC}" type="slidenum">
-              <a:rPr lang="en-US" b="0"/>
-              <a:t>‹#›</a:t>
+              <a:rPr b="0" lang="en-US"/>
+              <a:t>null</a:t>
             </a:fld>
             <a:endParaRPr lang="en-US"/>
           </a:p>
@@ -3151,11 +3470,11 @@
           <a:bodyPr wrap="square" lIns="0" tIns="0" rIns="0" bIns="0" rtlCol="0" anchor="ctr"/>
           <a:lstStyle/>
           <a:p>
-            <a:pPr marL="0" indent="0">
-              <a:buNone/>
-            </a:pPr>
-            <a:r>
-              <a:rPr lang="en-US" sz="1200" b="1" kern="0" spc="400" dirty="0">
+            <a:pPr indent="0" marL="0">
+              <a:buNone/>
+            </a:pPr>
+            <a:r>
+              <a:rPr lang="en-US" sz="1200" b="1" spc="400" kern="0" dirty="0">
                 <a:solidFill>
                   <a:srgbClr val="FFFFFF"/>
                 </a:solidFill>
@@ -3190,11 +3509,11 @@
           <a:bodyPr wrap="square" lIns="0" tIns="0" rIns="0" bIns="0" rtlCol="0" anchor="ctr"/>
           <a:lstStyle/>
           <a:p>
-            <a:pPr marL="0" indent="0">
-              <a:buNone/>
-            </a:pPr>
-            <a:r>
-              <a:rPr lang="en-US" sz="1200" b="1" kern="0" spc="300" dirty="0">
+            <a:pPr indent="0" marL="0">
+              <a:buNone/>
+            </a:pPr>
+            <a:r>
+              <a:rPr lang="en-US" sz="1200" b="1" spc="300" kern="0" dirty="0">
                 <a:solidFill>
                   <a:srgbClr val="C4B3F5"/>
                 </a:solidFill>
@@ -3229,7 +3548,7 @@
           <a:bodyPr wrap="square" lIns="0" tIns="0" rIns="0" bIns="0" rtlCol="0" anchor="t"/>
           <a:lstStyle/>
           <a:p>
-            <a:pPr marL="0" indent="0">
+            <a:pPr indent="0" marL="0">
               <a:lnSpc>
                 <a:spcPct val="102000"/>
               </a:lnSpc>
@@ -3249,7 +3568,7 @@
             <a:endParaRPr lang="en-US" sz="3600" dirty="0"/>
           </a:p>
           <a:p>
-            <a:pPr marL="0" indent="0">
+            <a:pPr indent="0" marL="0">
               <a:lnSpc>
                 <a:spcPct val="102000"/>
               </a:lnSpc>
@@ -3291,7 +3610,7 @@
           <a:bodyPr wrap="square" lIns="0" tIns="0" rIns="0" bIns="0" rtlCol="0" anchor="ctr"/>
           <a:lstStyle/>
           <a:p>
-            <a:pPr marL="0" indent="0">
+            <a:pPr indent="0" marL="0">
               <a:lnSpc>
                 <a:spcPct val="120000"/>
               </a:lnSpc>
@@ -3359,7 +3678,7 @@
           <a:bodyPr wrap="square" lIns="0" tIns="0" rIns="0" bIns="0" rtlCol="0" anchor="ctr"/>
           <a:lstStyle/>
           <a:p>
-            <a:pPr marL="0" indent="0" algn="ctr">
+            <a:pPr algn="ctr" indent="0" marL="0">
               <a:buNone/>
             </a:pPr>
             <a:r>
@@ -3420,7 +3739,7 @@
           <a:bodyPr wrap="square" lIns="0" tIns="0" rIns="0" bIns="0" rtlCol="0" anchor="ctr"/>
           <a:lstStyle/>
           <a:p>
-            <a:pPr marL="0" indent="0" algn="ctr">
+            <a:pPr algn="ctr" indent="0" marL="0">
               <a:buNone/>
             </a:pPr>
             <a:r>
@@ -3485,7 +3804,7 @@
           <a:bodyPr wrap="square" lIns="0" tIns="0" rIns="0" bIns="0" rtlCol="0" anchor="ctr"/>
           <a:lstStyle/>
           <a:p>
-            <a:pPr marL="0" indent="0" algn="ctr">
+            <a:pPr algn="ctr" indent="0" marL="0">
               <a:buNone/>
             </a:pPr>
             <a:r>
@@ -3550,7 +3869,7 @@
           <a:bodyPr wrap="square" lIns="0" tIns="0" rIns="0" bIns="0" rtlCol="0" anchor="ctr"/>
           <a:lstStyle/>
           <a:p>
-            <a:pPr marL="0" indent="0" algn="ctr">
+            <a:pPr algn="ctr" indent="0" marL="0">
               <a:buNone/>
             </a:pPr>
             <a:r>
@@ -3615,7 +3934,7 @@
           <a:bodyPr wrap="square" lIns="0" tIns="0" rIns="0" bIns="0" rtlCol="0" anchor="ctr"/>
           <a:lstStyle/>
           <a:p>
-            <a:pPr marL="0" indent="0" algn="ctr">
+            <a:pPr algn="ctr" indent="0" marL="0">
               <a:buNone/>
             </a:pPr>
             <a:r>
@@ -3680,7 +3999,7 @@
           <a:bodyPr wrap="square" lIns="0" tIns="0" rIns="0" bIns="0" rtlCol="0" anchor="ctr"/>
           <a:lstStyle/>
           <a:p>
-            <a:pPr marL="0" indent="0" algn="ctr">
+            <a:pPr algn="ctr" indent="0" marL="0">
               <a:buNone/>
             </a:pPr>
             <a:r>
@@ -3766,7 +4085,7 @@
           <a:bodyPr wrap="square" lIns="0" tIns="0" rIns="0" bIns="0" rtlCol="0" anchor="ctr"/>
           <a:lstStyle/>
           <a:p>
-            <a:pPr marL="0" indent="0" algn="l">
+            <a:pPr algn="l" indent="0" marL="0">
               <a:buNone/>
             </a:pPr>
             <a:r>
@@ -3805,7 +4124,7 @@
           <a:bodyPr wrap="square" lIns="0" tIns="0" rIns="0" bIns="0" rtlCol="0" anchor="ctr"/>
           <a:lstStyle/>
           <a:p>
-            <a:pPr marL="0" indent="0">
+            <a:pPr indent="0" marL="0">
               <a:buNone/>
             </a:pPr>
             <a:r>
@@ -3871,11 +4190,11 @@
           <a:bodyPr wrap="square" lIns="0" tIns="0" rIns="0" bIns="0" rtlCol="0" anchor="ctr"/>
           <a:lstStyle/>
           <a:p>
-            <a:pPr marL="0" indent="0" algn="ctr">
-              <a:buNone/>
-            </a:pPr>
-            <a:r>
-              <a:rPr lang="en-US" sz="900" b="1" kern="0" spc="100" dirty="0">
+            <a:pPr algn="ctr" indent="0" marL="0">
+              <a:buNone/>
+            </a:pPr>
+            <a:r>
+              <a:rPr lang="en-US" sz="900" b="1" spc="100" kern="0" dirty="0">
                 <a:solidFill>
                   <a:srgbClr val="5A05F4"/>
                 </a:solidFill>
@@ -3891,14 +4210,14 @@
       </p:sp>
       <p:pic>
         <p:nvPicPr>
-          <p:cNvPr id="7" name="Image 0" descr="preencoded.png"/>
+          <p:cNvPr id="7" name="Image 0" descr="preencoded.png">    </p:cNvPr>
           <p:cNvPicPr>
             <a:picLocks noChangeAspect="1"/>
           </p:cNvPicPr>
           <p:nvPr/>
         </p:nvPicPr>
         <p:blipFill>
-          <a:blip r:embed="rId3"/>
+          <a:blip r:embed="rId1"/>
           <a:stretch>
             <a:fillRect/>
           </a:stretch>
@@ -3956,7 +4275,7 @@
           <a:bodyPr wrap="square" lIns="0" tIns="0" rIns="0" bIns="0" rtlCol="0" anchor="ctr"/>
           <a:lstStyle/>
           <a:p>
-            <a:pPr marL="0" indent="0">
+            <a:pPr indent="0" marL="0">
               <a:buNone/>
             </a:pPr>
             <a:r>
@@ -3995,7 +4314,7 @@
           <a:bodyPr wrap="square" lIns="0" tIns="0" rIns="0" bIns="0" rtlCol="0" anchor="t"/>
           <a:lstStyle/>
           <a:p>
-            <a:pPr marL="0" indent="0">
+            <a:pPr indent="0" marL="0">
               <a:lnSpc>
                 <a:spcPct val="108000"/>
               </a:lnSpc>
@@ -4059,7 +4378,7 @@
           <a:bodyPr wrap="square" lIns="0" tIns="0" rIns="0" bIns="0" rtlCol="0" anchor="ctr"/>
           <a:lstStyle/>
           <a:p>
-            <a:pPr marL="0" indent="0">
+            <a:pPr indent="0" marL="0">
               <a:buNone/>
             </a:pPr>
             <a:r>
@@ -4098,7 +4417,7 @@
           <a:bodyPr wrap="square" lIns="0" tIns="0" rIns="0" bIns="0" rtlCol="0" anchor="t"/>
           <a:lstStyle/>
           <a:p>
-            <a:pPr marL="0" indent="0">
+            <a:pPr indent="0" marL="0">
               <a:lnSpc>
                 <a:spcPct val="108000"/>
               </a:lnSpc>
@@ -4140,7 +4459,7 @@
           <a:bodyPr wrap="square" lIns="0" tIns="0" rIns="0" bIns="0" rtlCol="0" anchor="ctr"/>
           <a:lstStyle/>
           <a:p>
-            <a:pPr marL="0" indent="0" algn="l">
+            <a:pPr algn="l" indent="0" marL="0">
               <a:buNone/>
             </a:pPr>
             <a:r>
@@ -4201,7 +4520,7 @@
           <a:bodyPr wrap="square" lIns="0" tIns="0" rIns="0" bIns="0" rtlCol="0" anchor="ctr"/>
           <a:lstStyle/>
           <a:p>
-            <a:pPr marL="0" indent="0">
+            <a:pPr indent="0" marL="0">
               <a:buNone/>
             </a:pPr>
             <a:r>
@@ -4240,7 +4559,7 @@
           <a:bodyPr wrap="square" lIns="0" tIns="0" rIns="0" bIns="0" rtlCol="0" anchor="ctr"/>
           <a:lstStyle/>
           <a:p>
-            <a:pPr marL="0" indent="0" algn="l">
+            <a:pPr algn="l" indent="0" marL="0">
               <a:buNone/>
             </a:pPr>
             <a:r>
@@ -4301,7 +4620,7 @@
           <a:bodyPr wrap="square" lIns="0" tIns="0" rIns="0" bIns="0" rtlCol="0" anchor="ctr"/>
           <a:lstStyle/>
           <a:p>
-            <a:pPr marL="0" indent="0">
+            <a:pPr indent="0" marL="0">
               <a:buNone/>
             </a:pPr>
             <a:r>
@@ -4340,7 +4659,7 @@
           <a:bodyPr wrap="square" lIns="0" tIns="0" rIns="0" bIns="0" rtlCol="0" anchor="ctr"/>
           <a:lstStyle/>
           <a:p>
-            <a:pPr marL="0" indent="0" algn="l">
+            <a:pPr algn="l" indent="0" marL="0">
               <a:buNone/>
             </a:pPr>
             <a:r>
@@ -4401,7 +4720,7 @@
           <a:bodyPr wrap="square" lIns="0" tIns="0" rIns="0" bIns="0" rtlCol="0" anchor="ctr"/>
           <a:lstStyle/>
           <a:p>
-            <a:pPr marL="0" indent="0">
+            <a:pPr indent="0" marL="0">
               <a:buNone/>
             </a:pPr>
             <a:r>
@@ -4467,11 +4786,11 @@
           <a:bodyPr wrap="square" lIns="0" tIns="0" rIns="0" bIns="0" rtlCol="0" anchor="ctr"/>
           <a:lstStyle/>
           <a:p>
-            <a:pPr marL="0" indent="0">
-              <a:buNone/>
-            </a:pPr>
-            <a:r>
-              <a:rPr lang="en-US" sz="950" b="1" kern="0" spc="150" dirty="0">
+            <a:pPr indent="0" marL="0">
+              <a:buNone/>
+            </a:pPr>
+            <a:r>
+              <a:rPr lang="en-US" sz="950" b="1" spc="150" kern="0" dirty="0">
                 <a:solidFill>
                   <a:srgbClr val="1A4FBF"/>
                 </a:solidFill>
@@ -4506,7 +4825,7 @@
           <a:bodyPr wrap="square" lIns="0" tIns="0" rIns="0" bIns="0" rtlCol="0" anchor="ctr"/>
           <a:lstStyle/>
           <a:p>
-            <a:pPr marL="0" indent="0">
+            <a:pPr indent="0" marL="0">
               <a:lnSpc>
                 <a:spcPct val="112000"/>
               </a:lnSpc>
@@ -4529,7 +4848,7 @@
       </p:sp>
       <p:sp>
         <p:nvSpPr>
-          <p:cNvPr id="26" name="Slide Number Placeholder 0"/>
+          <p:cNvPr id="25" name="Slide Number Placeholder 0"/>
           <p:cNvSpPr>
             <a:spLocks noGrp="1"/>
           </p:cNvSpPr>
@@ -4547,7 +4866,7 @@
           </a:prstGeom>
           <a:extLst>
             <a:ext uri="{C572A759-6A51-4108-AA02-DFA0A04FC94B}">
-              <ma14:wrappingTextBoxFlag xmlns="" xmlns:ma14="http://schemas.microsoft.com/office/mac/drawingml/2011/main" val="0"/>
+              <ma14:wrappingTextBoxFlag xmlns:ma14="http://schemas.microsoft.com/office/mac/drawingml/2011/main" val="0"/>
             </a:ext>
           </a:extLst>
         </p:spPr>
@@ -4568,7 +4887,7 @@
           <a:p>
             <a:pPr algn="l"/>
             <a:fld id="{F7021451-1387-4CA6-816F-3879F97B5CBC}" type="slidenum">
-              <a:rPr lang="en-US" b="0"/>
+              <a:rPr b="0" lang="en-US"/>
               <a:t>10</a:t>
             </a:fld>
             <a:endParaRPr lang="en-US"/>
@@ -4643,7 +4962,7 @@
           <a:bodyPr wrap="square" lIns="0" tIns="0" rIns="0" bIns="0" rtlCol="0" anchor="ctr"/>
           <a:lstStyle/>
           <a:p>
-            <a:pPr marL="0" indent="0" algn="l">
+            <a:pPr algn="l" indent="0" marL="0">
               <a:buNone/>
             </a:pPr>
             <a:r>
@@ -4682,7 +5001,7 @@
           <a:bodyPr wrap="square" lIns="0" tIns="0" rIns="0" bIns="0" rtlCol="0" anchor="ctr"/>
           <a:lstStyle/>
           <a:p>
-            <a:pPr marL="0" indent="0">
+            <a:pPr indent="0" marL="0">
               <a:buNone/>
             </a:pPr>
             <a:r>
@@ -4748,11 +5067,11 @@
           <a:bodyPr wrap="square" lIns="0" tIns="0" rIns="0" bIns="0" rtlCol="0" anchor="ctr"/>
           <a:lstStyle/>
           <a:p>
-            <a:pPr marL="0" indent="0" algn="ctr">
-              <a:buNone/>
-            </a:pPr>
-            <a:r>
-              <a:rPr lang="en-US" sz="900" b="1" kern="0" spc="100" dirty="0">
+            <a:pPr algn="ctr" indent="0" marL="0">
+              <a:buNone/>
+            </a:pPr>
+            <a:r>
+              <a:rPr lang="en-US" sz="900" b="1" spc="100" kern="0" dirty="0">
                 <a:solidFill>
                   <a:srgbClr val="5A05F4"/>
                 </a:solidFill>
@@ -4768,14 +5087,14 @@
       </p:sp>
       <p:pic>
         <p:nvPicPr>
-          <p:cNvPr id="7" name="Image 0" descr="preencoded.png"/>
+          <p:cNvPr id="7" name="Image 0" descr="preencoded.png">    </p:cNvPr>
           <p:cNvPicPr>
             <a:picLocks noChangeAspect="1"/>
           </p:cNvPicPr>
           <p:nvPr/>
         </p:nvPicPr>
         <p:blipFill>
-          <a:blip r:embed="rId3"/>
+          <a:blip r:embed="rId1"/>
           <a:stretch>
             <a:fillRect/>
           </a:stretch>
@@ -4838,7 +5157,7 @@
           <a:bodyPr wrap="square" lIns="0" tIns="0" rIns="0" bIns="0" rtlCol="0" anchor="t"/>
           <a:lstStyle/>
           <a:p>
-            <a:pPr marL="0" indent="0">
+            <a:pPr indent="0" marL="0">
               <a:lnSpc>
                 <a:spcPct val="130000"/>
               </a:lnSpc>
@@ -4858,7 +5177,7 @@
             <a:endParaRPr lang="en-US" sz="1200" dirty="0"/>
           </a:p>
           <a:p>
-            <a:pPr marL="0" indent="0">
+            <a:pPr indent="0" marL="0">
               <a:lnSpc>
                 <a:spcPct val="130000"/>
               </a:lnSpc>
@@ -4878,7 +5197,7 @@
             <a:endParaRPr lang="en-US" sz="1200" dirty="0"/>
           </a:p>
           <a:p>
-            <a:pPr marL="0" indent="0">
+            <a:pPr indent="0" marL="0">
               <a:lnSpc>
                 <a:spcPct val="130000"/>
               </a:lnSpc>
@@ -4898,7 +5217,7 @@
             <a:endParaRPr lang="en-US" sz="1200" dirty="0"/>
           </a:p>
           <a:p>
-            <a:pPr marL="0" indent="0">
+            <a:pPr indent="0" marL="0">
               <a:lnSpc>
                 <a:spcPct val="130000"/>
               </a:lnSpc>
@@ -4918,7 +5237,7 @@
             <a:endParaRPr lang="en-US" sz="1200" dirty="0"/>
           </a:p>
           <a:p>
-            <a:pPr marL="0" indent="0">
+            <a:pPr indent="0" marL="0">
               <a:lnSpc>
                 <a:spcPct val="130000"/>
               </a:lnSpc>
@@ -4982,7 +5301,7 @@
           <a:bodyPr wrap="square" lIns="0" tIns="0" rIns="0" bIns="0" rtlCol="0" anchor="ctr"/>
           <a:lstStyle/>
           <a:p>
-            <a:pPr marL="0" indent="0">
+            <a:pPr indent="0" marL="0">
               <a:buNone/>
             </a:pPr>
             <a:r>
@@ -5021,7 +5340,7 @@
           <a:bodyPr wrap="square" lIns="0" tIns="0" rIns="0" bIns="0" rtlCol="0" anchor="t"/>
           <a:lstStyle/>
           <a:p>
-            <a:pPr marL="0" indent="0">
+            <a:pPr indent="0" marL="0">
               <a:lnSpc>
                 <a:spcPct val="108000"/>
               </a:lnSpc>
@@ -5085,7 +5404,7 @@
           <a:bodyPr wrap="square" lIns="0" tIns="0" rIns="0" bIns="0" rtlCol="0" anchor="ctr"/>
           <a:lstStyle/>
           <a:p>
-            <a:pPr marL="0" indent="0">
+            <a:pPr indent="0" marL="0">
               <a:buNone/>
             </a:pPr>
             <a:r>
@@ -5124,7 +5443,7 @@
           <a:bodyPr wrap="square" lIns="0" tIns="0" rIns="0" bIns="0" rtlCol="0" anchor="t"/>
           <a:lstStyle/>
           <a:p>
-            <a:pPr marL="0" indent="0">
+            <a:pPr indent="0" marL="0">
               <a:lnSpc>
                 <a:spcPct val="108000"/>
               </a:lnSpc>
@@ -5165,7 +5484,7 @@
           </a:prstGeom>
           <a:extLst>
             <a:ext uri="{C572A759-6A51-4108-AA02-DFA0A04FC94B}">
-              <ma14:wrappingTextBoxFlag xmlns="" xmlns:ma14="http://schemas.microsoft.com/office/mac/drawingml/2011/main" val="0"/>
+              <ma14:wrappingTextBoxFlag xmlns:ma14="http://schemas.microsoft.com/office/mac/drawingml/2011/main" val="0"/>
             </a:ext>
           </a:extLst>
         </p:spPr>
@@ -5186,7 +5505,7 @@
           <a:p>
             <a:pPr algn="l"/>
             <a:fld id="{F7021451-1387-4CA6-816F-3879F97B5CBC}" type="slidenum">
-              <a:rPr lang="en-US" b="0"/>
+              <a:rPr b="0" lang="en-US"/>
               <a:t>11</a:t>
             </a:fld>
             <a:endParaRPr lang="en-US"/>
@@ -5261,7 +5580,7 @@
           <a:bodyPr wrap="square" lIns="0" tIns="0" rIns="0" bIns="0" rtlCol="0" anchor="ctr"/>
           <a:lstStyle/>
           <a:p>
-            <a:pPr marL="0" indent="0" algn="l">
+            <a:pPr algn="l" indent="0" marL="0">
               <a:buNone/>
             </a:pPr>
             <a:r>
@@ -5300,7 +5619,7 @@
           <a:bodyPr wrap="square" lIns="0" tIns="0" rIns="0" bIns="0" rtlCol="0" anchor="ctr"/>
           <a:lstStyle/>
           <a:p>
-            <a:pPr marL="0" indent="0">
+            <a:pPr indent="0" marL="0">
               <a:buNone/>
             </a:pPr>
             <a:r>
@@ -5366,11 +5685,11 @@
           <a:bodyPr wrap="square" lIns="0" tIns="0" rIns="0" bIns="0" rtlCol="0" anchor="ctr"/>
           <a:lstStyle/>
           <a:p>
-            <a:pPr marL="0" indent="0" algn="ctr">
-              <a:buNone/>
-            </a:pPr>
-            <a:r>
-              <a:rPr lang="en-US" sz="900" b="1" kern="0" spc="100" dirty="0">
+            <a:pPr algn="ctr" indent="0" marL="0">
+              <a:buNone/>
+            </a:pPr>
+            <a:r>
+              <a:rPr lang="en-US" sz="900" b="1" spc="100" kern="0" dirty="0">
                 <a:solidFill>
                   <a:srgbClr val="5A05F4"/>
                 </a:solidFill>
@@ -5386,14 +5705,14 @@
       </p:sp>
       <p:pic>
         <p:nvPicPr>
-          <p:cNvPr id="7" name="Image 0" descr="preencoded.png"/>
+          <p:cNvPr id="7" name="Image 0" descr="preencoded.png">    </p:cNvPr>
           <p:cNvPicPr>
             <a:picLocks noChangeAspect="1"/>
           </p:cNvPicPr>
           <p:nvPr/>
         </p:nvPicPr>
         <p:blipFill>
-          <a:blip r:embed="rId3"/>
+          <a:blip r:embed="rId1"/>
           <a:stretch>
             <a:fillRect/>
           </a:stretch>
@@ -5451,7 +5770,7 @@
           <a:bodyPr wrap="square" lIns="0" tIns="0" rIns="0" bIns="0" rtlCol="0" anchor="ctr"/>
           <a:lstStyle/>
           <a:p>
-            <a:pPr marL="0" indent="0" algn="ctr">
+            <a:pPr algn="ctr" indent="0" marL="0">
               <a:buNone/>
             </a:pPr>
             <a:r>
@@ -5555,7 +5874,7 @@
           <a:bodyPr wrap="square" lIns="0" tIns="0" rIns="0" bIns="0" rtlCol="0" anchor="ctr"/>
           <a:lstStyle/>
           <a:p>
-            <a:pPr marL="0" indent="0" algn="ctr">
+            <a:pPr algn="ctr" indent="0" marL="0">
               <a:buNone/>
             </a:pPr>
             <a:r>
@@ -5659,7 +5978,7 @@
           <a:bodyPr wrap="square" lIns="0" tIns="0" rIns="0" bIns="0" rtlCol="0" anchor="ctr"/>
           <a:lstStyle/>
           <a:p>
-            <a:pPr marL="0" indent="0" algn="ctr">
+            <a:pPr algn="ctr" indent="0" marL="0">
               <a:buNone/>
             </a:pPr>
             <a:r>
@@ -5763,7 +6082,7 @@
           <a:bodyPr wrap="square" lIns="0" tIns="0" rIns="0" bIns="0" rtlCol="0" anchor="ctr"/>
           <a:lstStyle/>
           <a:p>
-            <a:pPr marL="0" indent="0" algn="ctr">
+            <a:pPr algn="ctr" indent="0" marL="0">
               <a:buNone/>
             </a:pPr>
             <a:r>
@@ -5824,7 +6143,7 @@
           <a:bodyPr wrap="square" lIns="0" tIns="0" rIns="0" bIns="0" rtlCol="0" anchor="ctr"/>
           <a:lstStyle/>
           <a:p>
-            <a:pPr marL="0" indent="0">
+            <a:pPr indent="0" marL="0">
               <a:buNone/>
             </a:pPr>
             <a:r>
@@ -5863,7 +6182,7 @@
           <a:bodyPr wrap="square" lIns="0" tIns="0" rIns="0" bIns="0" rtlCol="0" anchor="t"/>
           <a:lstStyle/>
           <a:p>
-            <a:pPr marL="0" indent="0">
+            <a:pPr indent="0" marL="0">
               <a:buNone/>
             </a:pPr>
             <a:r>
@@ -5929,7 +6248,7 @@
           <a:bodyPr wrap="square" lIns="0" tIns="0" rIns="0" bIns="0" rtlCol="0" anchor="ctr"/>
           <a:lstStyle/>
           <a:p>
-            <a:pPr marL="0" indent="0">
+            <a:pPr indent="0" marL="0">
               <a:lnSpc>
                 <a:spcPct val="112000"/>
               </a:lnSpc>
@@ -5979,30 +6298,89 @@
       </p:sp>
       <p:sp>
         <p:nvSpPr>
-          <p:cNvPr id="28" name="Text 25"/>
-          <p:cNvSpPr/>
-          <p:nvPr/>
-        </p:nvSpPr>
-        <p:spPr>
-          <a:xfrm>
-            <a:off x="786384" y="4700016"/>
-            <a:ext cx="10625328" cy="219456"/>
-          </a:xfrm>
-          <a:prstGeom prst="rect">
-            <a:avLst/>
-          </a:prstGeom>
-          <a:noFill/>
-          <a:ln/>
-        </p:spPr>
-        <p:txBody>
-          <a:bodyPr wrap="square" lIns="0" tIns="0" rIns="0" bIns="0" rtlCol="0" anchor="ctr"/>
-          <a:lstStyle/>
-          <a:p>
-            <a:pPr marL="0" indent="0">
-              <a:buNone/>
-            </a:pPr>
-            <a:r>
-              <a:rPr lang="en-US" sz="950" b="1" kern="0" spc="150" dirty="0">
+          <p:cNvPr id="28" name="Shape 25"/>
+          <p:cNvSpPr/>
+          <p:nvPr/>
+        </p:nvSpPr>
+        <p:spPr>
+          <a:xfrm>
+            <a:off x="749808" y="5033772"/>
+            <a:ext cx="310896" cy="310896"/>
+          </a:xfrm>
+          <a:prstGeom prst="ellipse">
+            <a:avLst/>
+          </a:prstGeom>
+          <a:solidFill>
+            <a:srgbClr val="106B41"/>
+          </a:solidFill>
+          <a:ln/>
+        </p:spPr>
+      </p:sp>
+      <p:sp>
+        <p:nvSpPr>
+          <p:cNvPr id="29" name="Text 26"/>
+          <p:cNvSpPr/>
+          <p:nvPr/>
+        </p:nvSpPr>
+        <p:spPr>
+          <a:xfrm>
+            <a:off x="749808" y="5033772"/>
+            <a:ext cx="310896" cy="310896"/>
+          </a:xfrm>
+          <a:prstGeom prst="rect">
+            <a:avLst/>
+          </a:prstGeom>
+          <a:noFill/>
+          <a:ln/>
+        </p:spPr>
+        <p:txBody>
+          <a:bodyPr wrap="square" lIns="0" tIns="0" rIns="0" bIns="0" rtlCol="0" anchor="ctr"/>
+          <a:lstStyle/>
+          <a:p>
+            <a:pPr algn="ctr" indent="0" marL="0">
+              <a:buNone/>
+            </a:pPr>
+            <a:r>
+              <a:rPr lang="en-US" sz="1200" b="1" dirty="0">
+                <a:solidFill>
+                  <a:srgbClr val="FFFFFF"/>
+                </a:solidFill>
+                <a:latin typeface="Arial" pitchFamily="34" charset="0"/>
+                <a:ea typeface="Arial" pitchFamily="34" charset="-122"/>
+                <a:cs typeface="Arial" pitchFamily="34" charset="-120"/>
+              </a:rPr>
+              <a:t>◆</a:t>
+            </a:r>
+            <a:endParaRPr lang="en-US" sz="1200" dirty="0"/>
+          </a:p>
+        </p:txBody>
+      </p:sp>
+      <p:sp>
+        <p:nvSpPr>
+          <p:cNvPr id="30" name="Text 27"/>
+          <p:cNvSpPr/>
+          <p:nvPr/>
+        </p:nvSpPr>
+        <p:spPr>
+          <a:xfrm>
+            <a:off x="1243584" y="4700016"/>
+            <a:ext cx="10168128" cy="219456"/>
+          </a:xfrm>
+          <a:prstGeom prst="rect">
+            <a:avLst/>
+          </a:prstGeom>
+          <a:noFill/>
+          <a:ln/>
+        </p:spPr>
+        <p:txBody>
+          <a:bodyPr wrap="square" lIns="0" tIns="0" rIns="0" bIns="0" rtlCol="0" anchor="ctr"/>
+          <a:lstStyle/>
+          <a:p>
+            <a:pPr indent="0" marL="0">
+              <a:buNone/>
+            </a:pPr>
+            <a:r>
+              <a:rPr lang="en-US" sz="950" b="1" spc="150" kern="0" dirty="0">
                 <a:solidFill>
                   <a:srgbClr val="106B41"/>
                 </a:solidFill>
@@ -6018,26 +6396,26 @@
       </p:sp>
       <p:sp>
         <p:nvSpPr>
-          <p:cNvPr id="29" name="Text 26"/>
-          <p:cNvSpPr/>
-          <p:nvPr/>
-        </p:nvSpPr>
-        <p:spPr>
-          <a:xfrm>
-            <a:off x="786384" y="4956048"/>
-            <a:ext cx="10625328" cy="722376"/>
-          </a:xfrm>
-          <a:prstGeom prst="rect">
-            <a:avLst/>
-          </a:prstGeom>
-          <a:noFill/>
-          <a:ln/>
-        </p:spPr>
-        <p:txBody>
-          <a:bodyPr wrap="square" lIns="0" tIns="0" rIns="0" bIns="0" rtlCol="0" anchor="ctr"/>
-          <a:lstStyle/>
-          <a:p>
-            <a:pPr marL="0" indent="0">
+          <p:cNvPr id="31" name="Text 28"/>
+          <p:cNvSpPr/>
+          <p:nvPr/>
+        </p:nvSpPr>
+        <p:spPr>
+          <a:xfrm>
+            <a:off x="1243584" y="4956048"/>
+            <a:ext cx="10168128" cy="722376"/>
+          </a:xfrm>
+          <a:prstGeom prst="rect">
+            <a:avLst/>
+          </a:prstGeom>
+          <a:noFill/>
+          <a:ln/>
+        </p:spPr>
+        <p:txBody>
+          <a:bodyPr wrap="square" lIns="0" tIns="0" rIns="0" bIns="0" rtlCol="0" anchor="ctr"/>
+          <a:lstStyle/>
+          <a:p>
+            <a:pPr indent="0" marL="0">
               <a:lnSpc>
                 <a:spcPct val="112000"/>
               </a:lnSpc>
@@ -6060,7 +6438,7 @@
       </p:sp>
       <p:sp>
         <p:nvSpPr>
-          <p:cNvPr id="30" name="Slide Number Placeholder 0"/>
+          <p:cNvPr id="25" name="Slide Number Placeholder 0"/>
           <p:cNvSpPr>
             <a:spLocks noGrp="1"/>
           </p:cNvSpPr>
@@ -6078,7 +6456,7 @@
           </a:prstGeom>
           <a:extLst>
             <a:ext uri="{C572A759-6A51-4108-AA02-DFA0A04FC94B}">
-              <ma14:wrappingTextBoxFlag xmlns="" xmlns:ma14="http://schemas.microsoft.com/office/mac/drawingml/2011/main" val="0"/>
+              <ma14:wrappingTextBoxFlag xmlns:ma14="http://schemas.microsoft.com/office/mac/drawingml/2011/main" val="0"/>
             </a:ext>
           </a:extLst>
         </p:spPr>
@@ -6099,7 +6477,7 @@
           <a:p>
             <a:pPr algn="l"/>
             <a:fld id="{F7021451-1387-4CA6-816F-3879F97B5CBC}" type="slidenum">
-              <a:rPr lang="en-US" b="0"/>
+              <a:rPr b="0" lang="en-US"/>
               <a:t>12</a:t>
             </a:fld>
             <a:endParaRPr lang="en-US"/>
@@ -6174,7 +6552,7 @@
           <a:bodyPr wrap="square" lIns="0" tIns="0" rIns="0" bIns="0" rtlCol="0" anchor="ctr"/>
           <a:lstStyle/>
           <a:p>
-            <a:pPr marL="0" indent="0" algn="l">
+            <a:pPr algn="l" indent="0" marL="0">
               <a:buNone/>
             </a:pPr>
             <a:r>
@@ -6213,7 +6591,7 @@
           <a:bodyPr wrap="square" lIns="0" tIns="0" rIns="0" bIns="0" rtlCol="0" anchor="ctr"/>
           <a:lstStyle/>
           <a:p>
-            <a:pPr marL="0" indent="0">
+            <a:pPr indent="0" marL="0">
               <a:buNone/>
             </a:pPr>
             <a:r>
@@ -6279,11 +6657,11 @@
           <a:bodyPr wrap="square" lIns="0" tIns="0" rIns="0" bIns="0" rtlCol="0" anchor="ctr"/>
           <a:lstStyle/>
           <a:p>
-            <a:pPr marL="0" indent="0" algn="ctr">
-              <a:buNone/>
-            </a:pPr>
-            <a:r>
-              <a:rPr lang="en-US" sz="900" b="1" kern="0" spc="100" dirty="0">
+            <a:pPr algn="ctr" indent="0" marL="0">
+              <a:buNone/>
+            </a:pPr>
+            <a:r>
+              <a:rPr lang="en-US" sz="900" b="1" spc="100" kern="0" dirty="0">
                 <a:solidFill>
                   <a:srgbClr val="5A05F4"/>
                 </a:solidFill>
@@ -6299,14 +6677,14 @@
       </p:sp>
       <p:pic>
         <p:nvPicPr>
-          <p:cNvPr id="7" name="Image 0" descr="preencoded.png"/>
+          <p:cNvPr id="7" name="Image 0" descr="preencoded.png">    </p:cNvPr>
           <p:cNvPicPr>
             <a:picLocks noChangeAspect="1"/>
           </p:cNvPicPr>
           <p:nvPr/>
         </p:nvPicPr>
         <p:blipFill>
-          <a:blip r:embed="rId3"/>
+          <a:blip r:embed="rId1"/>
           <a:stretch>
             <a:fillRect/>
           </a:stretch>
@@ -6364,7 +6742,7 @@
           <a:bodyPr wrap="square" lIns="0" tIns="0" rIns="0" bIns="0" rtlCol="0" anchor="ctr"/>
           <a:lstStyle/>
           <a:p>
-            <a:pPr marL="0" indent="0">
+            <a:pPr indent="0" marL="0">
               <a:buNone/>
             </a:pPr>
             <a:r>
@@ -6403,7 +6781,7 @@
           <a:bodyPr wrap="square" lIns="0" tIns="0" rIns="0" bIns="0" rtlCol="0" anchor="t"/>
           <a:lstStyle/>
           <a:p>
-            <a:pPr marL="0" indent="0">
+            <a:pPr indent="0" marL="0">
               <a:lnSpc>
                 <a:spcPct val="108000"/>
               </a:lnSpc>
@@ -6467,7 +6845,7 @@
           <a:bodyPr wrap="square" lIns="0" tIns="0" rIns="0" bIns="0" rtlCol="0" anchor="ctr"/>
           <a:lstStyle/>
           <a:p>
-            <a:pPr marL="0" indent="0">
+            <a:pPr indent="0" marL="0">
               <a:buNone/>
             </a:pPr>
             <a:r>
@@ -6506,7 +6884,7 @@
           <a:bodyPr wrap="square" lIns="0" tIns="0" rIns="0" bIns="0" rtlCol="0" anchor="t"/>
           <a:lstStyle/>
           <a:p>
-            <a:pPr marL="0" indent="0">
+            <a:pPr indent="0" marL="0">
               <a:lnSpc>
                 <a:spcPct val="108000"/>
               </a:lnSpc>
@@ -6568,7 +6946,7 @@
           <a:bodyPr wrap="square" lIns="0" tIns="0" rIns="0" bIns="0" rtlCol="0" anchor="ctr"/>
           <a:lstStyle/>
           <a:p>
-            <a:pPr marL="0" indent="0" algn="ctr">
+            <a:pPr algn="ctr" indent="0" marL="0">
               <a:buNone/>
             </a:pPr>
             <a:r>
@@ -6627,7 +7005,7 @@
           <a:bodyPr wrap="square" lIns="0" tIns="0" rIns="0" bIns="0" rtlCol="0" anchor="ctr"/>
           <a:lstStyle/>
           <a:p>
-            <a:pPr marL="0" indent="0" algn="ctr">
+            <a:pPr algn="ctr" indent="0" marL="0">
               <a:buNone/>
             </a:pPr>
             <a:r>
@@ -6666,11 +7044,11 @@
           <a:bodyPr wrap="square" lIns="0" tIns="0" rIns="0" bIns="0" rtlCol="0" anchor="ctr"/>
           <a:lstStyle/>
           <a:p>
-            <a:pPr marL="0" indent="0">
-              <a:buNone/>
-            </a:pPr>
-            <a:r>
-              <a:rPr lang="en-US" sz="850" kern="0" spc="100" dirty="0">
+            <a:pPr indent="0" marL="0">
+              <a:buNone/>
+            </a:pPr>
+            <a:r>
+              <a:rPr lang="en-US" sz="850" spc="100" kern="0" dirty="0">
                 <a:solidFill>
                   <a:srgbClr val="6B6B6B"/>
                 </a:solidFill>
@@ -6732,11 +7110,11 @@
           <a:bodyPr wrap="square" lIns="0" tIns="0" rIns="0" bIns="0" rtlCol="0" anchor="ctr"/>
           <a:lstStyle/>
           <a:p>
-            <a:pPr marL="0" indent="0">
-              <a:buNone/>
-            </a:pPr>
-            <a:r>
-              <a:rPr lang="en-US" sz="950" b="1" kern="0" spc="150" dirty="0">
+            <a:pPr indent="0" marL="0">
+              <a:buNone/>
+            </a:pPr>
+            <a:r>
+              <a:rPr lang="en-US" sz="950" b="1" spc="150" kern="0" dirty="0">
                 <a:solidFill>
                   <a:srgbClr val="B3261E"/>
                 </a:solidFill>
@@ -6771,7 +7149,7 @@
           <a:bodyPr wrap="square" lIns="0" tIns="0" rIns="0" bIns="0" rtlCol="0" anchor="ctr"/>
           <a:lstStyle/>
           <a:p>
-            <a:pPr marL="0" indent="0">
+            <a:pPr indent="0" marL="0">
               <a:lnSpc>
                 <a:spcPct val="112000"/>
               </a:lnSpc>
@@ -6812,7 +7190,7 @@
           </a:prstGeom>
           <a:extLst>
             <a:ext uri="{C572A759-6A51-4108-AA02-DFA0A04FC94B}">
-              <ma14:wrappingTextBoxFlag xmlns="" xmlns:ma14="http://schemas.microsoft.com/office/mac/drawingml/2011/main" val="0"/>
+              <ma14:wrappingTextBoxFlag xmlns:ma14="http://schemas.microsoft.com/office/mac/drawingml/2011/main" val="0"/>
             </a:ext>
           </a:extLst>
         </p:spPr>
@@ -6833,7 +7211,7 @@
           <a:p>
             <a:pPr algn="l"/>
             <a:fld id="{F7021451-1387-4CA6-816F-3879F97B5CBC}" type="slidenum">
-              <a:rPr lang="en-US" b="0"/>
+              <a:rPr b="0" lang="en-US"/>
               <a:t>13</a:t>
             </a:fld>
             <a:endParaRPr lang="en-US"/>
@@ -6908,7 +7286,7 @@
           <a:bodyPr wrap="square" lIns="0" tIns="0" rIns="0" bIns="0" rtlCol="0" anchor="ctr"/>
           <a:lstStyle/>
           <a:p>
-            <a:pPr marL="0" indent="0" algn="l">
+            <a:pPr algn="l" indent="0" marL="0">
               <a:buNone/>
             </a:pPr>
             <a:r>
@@ -6947,7 +7325,7 @@
           <a:bodyPr wrap="square" lIns="0" tIns="0" rIns="0" bIns="0" rtlCol="0" anchor="ctr"/>
           <a:lstStyle/>
           <a:p>
-            <a:pPr marL="0" indent="0">
+            <a:pPr indent="0" marL="0">
               <a:buNone/>
             </a:pPr>
             <a:r>
@@ -7013,11 +7391,11 @@
           <a:bodyPr wrap="square" lIns="0" tIns="0" rIns="0" bIns="0" rtlCol="0" anchor="ctr"/>
           <a:lstStyle/>
           <a:p>
-            <a:pPr marL="0" indent="0" algn="ctr">
-              <a:buNone/>
-            </a:pPr>
-            <a:r>
-              <a:rPr lang="en-US" sz="900" b="1" kern="0" spc="100" dirty="0">
+            <a:pPr algn="ctr" indent="0" marL="0">
+              <a:buNone/>
+            </a:pPr>
+            <a:r>
+              <a:rPr lang="en-US" sz="900" b="1" spc="100" kern="0" dirty="0">
                 <a:solidFill>
                   <a:srgbClr val="5A05F4"/>
                 </a:solidFill>
@@ -7033,14 +7411,14 @@
       </p:sp>
       <p:pic>
         <p:nvPicPr>
-          <p:cNvPr id="7" name="Image 0" descr="preencoded.png"/>
+          <p:cNvPr id="7" name="Image 0" descr="preencoded.png">    </p:cNvPr>
           <p:cNvPicPr>
             <a:picLocks noChangeAspect="1"/>
           </p:cNvPicPr>
           <p:nvPr/>
         </p:nvPicPr>
         <p:blipFill>
-          <a:blip r:embed="rId3"/>
+          <a:blip r:embed="rId1"/>
           <a:stretch>
             <a:fillRect/>
           </a:stretch>
@@ -7098,7 +7476,7 @@
           <a:bodyPr wrap="square" lIns="0" tIns="0" rIns="0" bIns="0" rtlCol="0" anchor="ctr"/>
           <a:lstStyle/>
           <a:p>
-            <a:pPr marL="0" indent="0">
+            <a:pPr indent="0" marL="0">
               <a:buNone/>
             </a:pPr>
             <a:r>
@@ -7137,7 +7515,7 @@
           <a:bodyPr wrap="square" lIns="0" tIns="0" rIns="0" bIns="0" rtlCol="0" anchor="t"/>
           <a:lstStyle/>
           <a:p>
-            <a:pPr marL="0" indent="0">
+            <a:pPr indent="0" marL="0">
               <a:buNone/>
             </a:pPr>
             <a:r>
@@ -7198,7 +7576,7 @@
           <a:bodyPr wrap="square" lIns="0" tIns="0" rIns="0" bIns="0" rtlCol="0" anchor="ctr"/>
           <a:lstStyle/>
           <a:p>
-            <a:pPr marL="0" indent="0">
+            <a:pPr indent="0" marL="0">
               <a:buNone/>
             </a:pPr>
             <a:r>
@@ -7237,7 +7615,7 @@
           <a:bodyPr wrap="square" lIns="0" tIns="0" rIns="0" bIns="0" rtlCol="0" anchor="t"/>
           <a:lstStyle/>
           <a:p>
-            <a:pPr marL="0" indent="0">
+            <a:pPr indent="0" marL="0">
               <a:buNone/>
             </a:pPr>
             <a:r>
@@ -7303,7 +7681,7 @@
           <a:bodyPr wrap="square" lIns="0" tIns="0" rIns="0" bIns="0" rtlCol="0" anchor="t"/>
           <a:lstStyle/>
           <a:p>
-            <a:pPr marL="0" indent="0">
+            <a:pPr indent="0" marL="0">
               <a:lnSpc>
                 <a:spcPct val="130000"/>
               </a:lnSpc>
@@ -7323,7 +7701,7 @@
             <a:endParaRPr lang="en-US" sz="1100" dirty="0"/>
           </a:p>
           <a:p>
-            <a:pPr marL="0" indent="0">
+            <a:pPr indent="0" marL="0">
               <a:lnSpc>
                 <a:spcPct val="130000"/>
               </a:lnSpc>
@@ -7343,7 +7721,7 @@
             <a:endParaRPr lang="en-US" sz="1100" dirty="0"/>
           </a:p>
           <a:p>
-            <a:pPr marL="0" indent="0">
+            <a:pPr indent="0" marL="0">
               <a:lnSpc>
                 <a:spcPct val="130000"/>
               </a:lnSpc>
@@ -7363,7 +7741,7 @@
             <a:endParaRPr lang="en-US" sz="1100" dirty="0"/>
           </a:p>
           <a:p>
-            <a:pPr marL="0" indent="0">
+            <a:pPr indent="0" marL="0">
               <a:lnSpc>
                 <a:spcPct val="130000"/>
               </a:lnSpc>
@@ -7383,7 +7761,7 @@
             <a:endParaRPr lang="en-US" sz="1100" dirty="0"/>
           </a:p>
           <a:p>
-            <a:pPr marL="0" indent="0">
+            <a:pPr indent="0" marL="0">
               <a:lnSpc>
                 <a:spcPct val="130000"/>
               </a:lnSpc>
@@ -7447,7 +7825,7 @@
           <a:bodyPr wrap="square" lIns="0" tIns="0" rIns="0" bIns="0" rtlCol="0" anchor="ctr"/>
           <a:lstStyle/>
           <a:p>
-            <a:pPr marL="0" indent="0">
+            <a:pPr indent="0" marL="0">
               <a:lnSpc>
                 <a:spcPct val="112000"/>
               </a:lnSpc>
@@ -7497,30 +7875,89 @@
       </p:sp>
       <p:sp>
         <p:nvSpPr>
-          <p:cNvPr id="19" name="Text 16"/>
-          <p:cNvSpPr/>
-          <p:nvPr/>
-        </p:nvSpPr>
-        <p:spPr>
-          <a:xfrm>
-            <a:off x="786384" y="5202936"/>
-            <a:ext cx="10625328" cy="219456"/>
-          </a:xfrm>
-          <a:prstGeom prst="rect">
-            <a:avLst/>
-          </a:prstGeom>
-          <a:noFill/>
-          <a:ln/>
-        </p:spPr>
-        <p:txBody>
-          <a:bodyPr wrap="square" lIns="0" tIns="0" rIns="0" bIns="0" rtlCol="0" anchor="ctr"/>
-          <a:lstStyle/>
-          <a:p>
-            <a:pPr marL="0" indent="0">
-              <a:buNone/>
-            </a:pPr>
-            <a:r>
-              <a:rPr lang="en-US" sz="950" b="1" kern="0" spc="150" dirty="0">
+          <p:cNvPr id="19" name="Shape 16"/>
+          <p:cNvSpPr/>
+          <p:nvPr/>
+        </p:nvSpPr>
+        <p:spPr>
+          <a:xfrm>
+            <a:off x="749808" y="5308092"/>
+            <a:ext cx="310896" cy="310896"/>
+          </a:xfrm>
+          <a:prstGeom prst="ellipse">
+            <a:avLst/>
+          </a:prstGeom>
+          <a:solidFill>
+            <a:srgbClr val="B3261E"/>
+          </a:solidFill>
+          <a:ln/>
+        </p:spPr>
+      </p:sp>
+      <p:sp>
+        <p:nvSpPr>
+          <p:cNvPr id="20" name="Text 17"/>
+          <p:cNvSpPr/>
+          <p:nvPr/>
+        </p:nvSpPr>
+        <p:spPr>
+          <a:xfrm>
+            <a:off x="749808" y="5308092"/>
+            <a:ext cx="310896" cy="310896"/>
+          </a:xfrm>
+          <a:prstGeom prst="rect">
+            <a:avLst/>
+          </a:prstGeom>
+          <a:noFill/>
+          <a:ln/>
+        </p:spPr>
+        <p:txBody>
+          <a:bodyPr wrap="square" lIns="0" tIns="0" rIns="0" bIns="0" rtlCol="0" anchor="ctr"/>
+          <a:lstStyle/>
+          <a:p>
+            <a:pPr algn="ctr" indent="0" marL="0">
+              <a:buNone/>
+            </a:pPr>
+            <a:r>
+              <a:rPr lang="en-US" sz="1200" b="1" dirty="0">
+                <a:solidFill>
+                  <a:srgbClr val="FFFFFF"/>
+                </a:solidFill>
+                <a:latin typeface="Arial" pitchFamily="34" charset="0"/>
+                <a:ea typeface="Arial" pitchFamily="34" charset="-122"/>
+                <a:cs typeface="Arial" pitchFamily="34" charset="-120"/>
+              </a:rPr>
+              <a:t>✕</a:t>
+            </a:r>
+            <a:endParaRPr lang="en-US" sz="1200" dirty="0"/>
+          </a:p>
+        </p:txBody>
+      </p:sp>
+      <p:sp>
+        <p:nvSpPr>
+          <p:cNvPr id="21" name="Text 18"/>
+          <p:cNvSpPr/>
+          <p:nvPr/>
+        </p:nvSpPr>
+        <p:spPr>
+          <a:xfrm>
+            <a:off x="1243584" y="5202936"/>
+            <a:ext cx="10168128" cy="219456"/>
+          </a:xfrm>
+          <a:prstGeom prst="rect">
+            <a:avLst/>
+          </a:prstGeom>
+          <a:noFill/>
+          <a:ln/>
+        </p:spPr>
+        <p:txBody>
+          <a:bodyPr wrap="square" lIns="0" tIns="0" rIns="0" bIns="0" rtlCol="0" anchor="ctr"/>
+          <a:lstStyle/>
+          <a:p>
+            <a:pPr indent="0" marL="0">
+              <a:buNone/>
+            </a:pPr>
+            <a:r>
+              <a:rPr lang="en-US" sz="950" b="1" spc="150" kern="0" dirty="0">
                 <a:solidFill>
                   <a:srgbClr val="B3261E"/>
                 </a:solidFill>
@@ -7536,26 +7973,26 @@
       </p:sp>
       <p:sp>
         <p:nvSpPr>
-          <p:cNvPr id="20" name="Text 17"/>
-          <p:cNvSpPr/>
-          <p:nvPr/>
-        </p:nvSpPr>
-        <p:spPr>
-          <a:xfrm>
-            <a:off x="786384" y="5458968"/>
-            <a:ext cx="10625328" cy="265176"/>
-          </a:xfrm>
-          <a:prstGeom prst="rect">
-            <a:avLst/>
-          </a:prstGeom>
-          <a:noFill/>
-          <a:ln/>
-        </p:spPr>
-        <p:txBody>
-          <a:bodyPr wrap="square" lIns="0" tIns="0" rIns="0" bIns="0" rtlCol="0" anchor="ctr"/>
-          <a:lstStyle/>
-          <a:p>
-            <a:pPr marL="0" indent="0">
+          <p:cNvPr id="22" name="Text 19"/>
+          <p:cNvSpPr/>
+          <p:nvPr/>
+        </p:nvSpPr>
+        <p:spPr>
+          <a:xfrm>
+            <a:off x="1243584" y="5458968"/>
+            <a:ext cx="10168128" cy="265176"/>
+          </a:xfrm>
+          <a:prstGeom prst="rect">
+            <a:avLst/>
+          </a:prstGeom>
+          <a:noFill/>
+          <a:ln/>
+        </p:spPr>
+        <p:txBody>
+          <a:bodyPr wrap="square" lIns="0" tIns="0" rIns="0" bIns="0" rtlCol="0" anchor="ctr"/>
+          <a:lstStyle/>
+          <a:p>
+            <a:pPr indent="0" marL="0">
               <a:lnSpc>
                 <a:spcPct val="112000"/>
               </a:lnSpc>
@@ -7596,7 +8033,7 @@
           </a:prstGeom>
           <a:extLst>
             <a:ext uri="{C572A759-6A51-4108-AA02-DFA0A04FC94B}">
-              <ma14:wrappingTextBoxFlag xmlns="" xmlns:ma14="http://schemas.microsoft.com/office/mac/drawingml/2011/main" val="0"/>
+              <ma14:wrappingTextBoxFlag xmlns:ma14="http://schemas.microsoft.com/office/mac/drawingml/2011/main" val="0"/>
             </a:ext>
           </a:extLst>
         </p:spPr>
@@ -7617,7 +8054,7 @@
           <a:p>
             <a:pPr algn="l"/>
             <a:fld id="{F7021451-1387-4CA6-816F-3879F97B5CBC}" type="slidenum">
-              <a:rPr lang="en-US" b="0"/>
+              <a:rPr b="0" lang="en-US"/>
               <a:t>14</a:t>
             </a:fld>
             <a:endParaRPr lang="en-US"/>
@@ -7692,7 +8129,7 @@
           <a:bodyPr wrap="square" lIns="0" tIns="0" rIns="0" bIns="0" rtlCol="0" anchor="ctr"/>
           <a:lstStyle/>
           <a:p>
-            <a:pPr marL="0" indent="0" algn="l">
+            <a:pPr algn="l" indent="0" marL="0">
               <a:buNone/>
             </a:pPr>
             <a:r>
@@ -7731,7 +8168,7 @@
           <a:bodyPr wrap="square" lIns="0" tIns="0" rIns="0" bIns="0" rtlCol="0" anchor="ctr"/>
           <a:lstStyle/>
           <a:p>
-            <a:pPr marL="0" indent="0">
+            <a:pPr indent="0" marL="0">
               <a:buNone/>
             </a:pPr>
             <a:r>
@@ -7797,11 +8234,11 @@
           <a:bodyPr wrap="square" lIns="0" tIns="0" rIns="0" bIns="0" rtlCol="0" anchor="ctr"/>
           <a:lstStyle/>
           <a:p>
-            <a:pPr marL="0" indent="0" algn="ctr">
-              <a:buNone/>
-            </a:pPr>
-            <a:r>
-              <a:rPr lang="en-US" sz="900" b="1" kern="0" spc="100" dirty="0">
+            <a:pPr algn="ctr" indent="0" marL="0">
+              <a:buNone/>
+            </a:pPr>
+            <a:r>
+              <a:rPr lang="en-US" sz="900" b="1" spc="100" kern="0" dirty="0">
                 <a:solidFill>
                   <a:srgbClr val="5A05F4"/>
                 </a:solidFill>
@@ -7817,14 +8254,14 @@
       </p:sp>
       <p:pic>
         <p:nvPicPr>
-          <p:cNvPr id="7" name="Image 0" descr="preencoded.png"/>
+          <p:cNvPr id="7" name="Image 0" descr="preencoded.png">    </p:cNvPr>
           <p:cNvPicPr>
             <a:picLocks noChangeAspect="1"/>
           </p:cNvPicPr>
           <p:nvPr/>
         </p:nvPicPr>
         <p:blipFill>
-          <a:blip r:embed="rId3"/>
+          <a:blip r:embed="rId1"/>
           <a:stretch>
             <a:fillRect/>
           </a:stretch>
@@ -7887,7 +8324,7 @@
           <a:bodyPr wrap="square" lIns="0" tIns="0" rIns="0" bIns="0" rtlCol="0" anchor="t"/>
           <a:lstStyle/>
           <a:p>
-            <a:pPr marL="0" indent="0">
+            <a:pPr indent="0" marL="0">
               <a:lnSpc>
                 <a:spcPct val="130000"/>
               </a:lnSpc>
@@ -7907,7 +8344,7 @@
             <a:endParaRPr lang="en-US" sz="1150" dirty="0"/>
           </a:p>
           <a:p>
-            <a:pPr marL="0" indent="0">
+            <a:pPr indent="0" marL="0">
               <a:lnSpc>
                 <a:spcPct val="130000"/>
               </a:lnSpc>
@@ -7927,7 +8364,7 @@
             <a:endParaRPr lang="en-US" sz="1150" dirty="0"/>
           </a:p>
           <a:p>
-            <a:pPr marL="0" indent="0">
+            <a:pPr indent="0" marL="0">
               <a:lnSpc>
                 <a:spcPct val="130000"/>
               </a:lnSpc>
@@ -7947,7 +8384,7 @@
             <a:endParaRPr lang="en-US" sz="1150" dirty="0"/>
           </a:p>
           <a:p>
-            <a:pPr marL="0" indent="0">
+            <a:pPr indent="0" marL="0">
               <a:lnSpc>
                 <a:spcPct val="130000"/>
               </a:lnSpc>
@@ -7967,7 +8404,7 @@
             <a:endParaRPr lang="en-US" sz="1150" dirty="0"/>
           </a:p>
           <a:p>
-            <a:pPr marL="0" indent="0">
+            <a:pPr indent="0" marL="0">
               <a:lnSpc>
                 <a:spcPct val="130000"/>
               </a:lnSpc>
@@ -8036,11 +8473,11 @@
           <a:bodyPr wrap="square" lIns="0" tIns="0" rIns="0" bIns="0" rtlCol="0" anchor="ctr"/>
           <a:lstStyle/>
           <a:p>
-            <a:pPr marL="0" indent="0">
-              <a:buNone/>
-            </a:pPr>
-            <a:r>
-              <a:rPr lang="en-US" sz="950" b="1" kern="0" spc="100" dirty="0">
+            <a:pPr indent="0" marL="0">
+              <a:buNone/>
+            </a:pPr>
+            <a:r>
+              <a:rPr lang="en-US" sz="950" b="1" spc="100" kern="0" dirty="0">
                 <a:solidFill>
                   <a:srgbClr val="6B6B6B"/>
                 </a:solidFill>
@@ -8075,7 +8512,7 @@
           <a:bodyPr wrap="square" lIns="0" tIns="0" rIns="0" bIns="0" rtlCol="0" anchor="ctr"/>
           <a:lstStyle/>
           <a:p>
-            <a:pPr marL="0" indent="0">
+            <a:pPr indent="0" marL="0">
               <a:buNone/>
             </a:pPr>
             <a:r>
@@ -8114,7 +8551,7 @@
           <a:bodyPr wrap="square" lIns="0" tIns="0" rIns="0" bIns="0" rtlCol="0" anchor="ctr"/>
           <a:lstStyle/>
           <a:p>
-            <a:pPr marL="0" indent="0">
+            <a:pPr indent="0" marL="0">
               <a:buNone/>
             </a:pPr>
             <a:r>
@@ -8180,11 +8617,11 @@
           <a:bodyPr wrap="square" lIns="0" tIns="0" rIns="0" bIns="0" rtlCol="0" anchor="ctr"/>
           <a:lstStyle/>
           <a:p>
-            <a:pPr marL="0" indent="0">
-              <a:buNone/>
-            </a:pPr>
-            <a:r>
-              <a:rPr lang="en-US" sz="950" b="1" kern="0" spc="150" dirty="0">
+            <a:pPr indent="0" marL="0">
+              <a:buNone/>
+            </a:pPr>
+            <a:r>
+              <a:rPr lang="en-US" sz="950" b="1" spc="150" kern="0" dirty="0">
                 <a:solidFill>
                   <a:srgbClr val="1A4FBF"/>
                 </a:solidFill>
@@ -8219,7 +8656,7 @@
           <a:bodyPr wrap="square" lIns="0" tIns="0" rIns="0" bIns="0" rtlCol="0" anchor="ctr"/>
           <a:lstStyle/>
           <a:p>
-            <a:pPr marL="0" indent="0">
+            <a:pPr indent="0" marL="0">
               <a:lnSpc>
                 <a:spcPct val="112000"/>
               </a:lnSpc>
@@ -8288,7 +8725,7 @@
           <a:bodyPr wrap="square" lIns="0" tIns="0" rIns="0" bIns="0" rtlCol="0" anchor="ctr"/>
           <a:lstStyle/>
           <a:p>
-            <a:pPr marL="0" indent="0">
+            <a:pPr indent="0" marL="0">
               <a:lnSpc>
                 <a:spcPct val="112000"/>
               </a:lnSpc>
@@ -8329,7 +8766,7 @@
           </a:prstGeom>
           <a:extLst>
             <a:ext uri="{C572A759-6A51-4108-AA02-DFA0A04FC94B}">
-              <ma14:wrappingTextBoxFlag xmlns="" xmlns:ma14="http://schemas.microsoft.com/office/mac/drawingml/2011/main" val="0"/>
+              <ma14:wrappingTextBoxFlag xmlns:ma14="http://schemas.microsoft.com/office/mac/drawingml/2011/main" val="0"/>
             </a:ext>
           </a:extLst>
         </p:spPr>
@@ -8350,7 +8787,7 @@
           <a:p>
             <a:pPr algn="l"/>
             <a:fld id="{F7021451-1387-4CA6-816F-3879F97B5CBC}" type="slidenum">
-              <a:rPr lang="en-US" b="0"/>
+              <a:rPr b="0" lang="en-US"/>
               <a:t>15</a:t>
             </a:fld>
             <a:endParaRPr lang="en-US"/>
@@ -8425,7 +8862,7 @@
           <a:bodyPr wrap="square" lIns="0" tIns="0" rIns="0" bIns="0" rtlCol="0" anchor="ctr"/>
           <a:lstStyle/>
           <a:p>
-            <a:pPr marL="0" indent="0" algn="l">
+            <a:pPr algn="l" indent="0" marL="0">
               <a:buNone/>
             </a:pPr>
             <a:r>
@@ -8464,7 +8901,7 @@
           <a:bodyPr wrap="square" lIns="0" tIns="0" rIns="0" bIns="0" rtlCol="0" anchor="ctr"/>
           <a:lstStyle/>
           <a:p>
-            <a:pPr marL="0" indent="0">
+            <a:pPr indent="0" marL="0">
               <a:buNone/>
             </a:pPr>
             <a:r>
@@ -8530,11 +8967,11 @@
           <a:bodyPr wrap="square" lIns="0" tIns="0" rIns="0" bIns="0" rtlCol="0" anchor="ctr"/>
           <a:lstStyle/>
           <a:p>
-            <a:pPr marL="0" indent="0" algn="ctr">
-              <a:buNone/>
-            </a:pPr>
-            <a:r>
-              <a:rPr lang="en-US" sz="900" b="1" kern="0" spc="100" dirty="0">
+            <a:pPr algn="ctr" indent="0" marL="0">
+              <a:buNone/>
+            </a:pPr>
+            <a:r>
+              <a:rPr lang="en-US" sz="900" b="1" spc="100" kern="0" dirty="0">
                 <a:solidFill>
                   <a:srgbClr val="5A05F4"/>
                 </a:solidFill>
@@ -8550,14 +8987,14 @@
       </p:sp>
       <p:pic>
         <p:nvPicPr>
-          <p:cNvPr id="7" name="Image 0" descr="preencoded.png"/>
+          <p:cNvPr id="7" name="Image 0" descr="preencoded.png">    </p:cNvPr>
           <p:cNvPicPr>
             <a:picLocks noChangeAspect="1"/>
           </p:cNvPicPr>
           <p:nvPr/>
         </p:nvPicPr>
         <p:blipFill>
-          <a:blip r:embed="rId3"/>
+          <a:blip r:embed="rId1"/>
           <a:stretch>
             <a:fillRect/>
           </a:stretch>
@@ -8620,7 +9057,7 @@
           <a:bodyPr wrap="square" lIns="0" tIns="0" rIns="0" bIns="0" rtlCol="0" anchor="t"/>
           <a:lstStyle/>
           <a:p>
-            <a:pPr marL="0" indent="0">
+            <a:pPr indent="0" marL="0">
               <a:lnSpc>
                 <a:spcPct val="130000"/>
               </a:lnSpc>
@@ -8662,7 +9099,7 @@
           <a:bodyPr wrap="square" lIns="0" tIns="0" rIns="0" bIns="0" rtlCol="0" anchor="ctr"/>
           <a:lstStyle/>
           <a:p>
-            <a:pPr marL="0" indent="0" algn="l">
+            <a:pPr algn="l" indent="0" marL="0">
               <a:buNone/>
             </a:pPr>
             <a:r>
@@ -8723,7 +9160,7 @@
           <a:bodyPr wrap="square" lIns="0" tIns="0" rIns="0" bIns="0" rtlCol="0" anchor="ctr"/>
           <a:lstStyle/>
           <a:p>
-            <a:pPr marL="0" indent="0">
+            <a:pPr indent="0" marL="0">
               <a:buNone/>
             </a:pPr>
             <a:r>
@@ -8762,7 +9199,7 @@
           <a:bodyPr wrap="square" lIns="0" tIns="0" rIns="0" bIns="0" rtlCol="0" anchor="ctr"/>
           <a:lstStyle/>
           <a:p>
-            <a:pPr marL="0" indent="0" algn="l">
+            <a:pPr algn="l" indent="0" marL="0">
               <a:buNone/>
             </a:pPr>
             <a:r>
@@ -8823,7 +9260,7 @@
           <a:bodyPr wrap="square" lIns="0" tIns="0" rIns="0" bIns="0" rtlCol="0" anchor="ctr"/>
           <a:lstStyle/>
           <a:p>
-            <a:pPr marL="0" indent="0">
+            <a:pPr indent="0" marL="0">
               <a:buNone/>
             </a:pPr>
             <a:r>
@@ -8884,7 +9321,7 @@
           <a:bodyPr wrap="square" lIns="0" tIns="0" rIns="0" bIns="0" rtlCol="0" anchor="ctr"/>
           <a:lstStyle/>
           <a:p>
-            <a:pPr marL="0" indent="0">
+            <a:pPr indent="0" marL="0">
               <a:lnSpc>
                 <a:spcPct val="112000"/>
               </a:lnSpc>
@@ -8953,11 +9390,11 @@
           <a:bodyPr wrap="square" lIns="0" tIns="0" rIns="0" bIns="0" rtlCol="0" anchor="ctr"/>
           <a:lstStyle/>
           <a:p>
-            <a:pPr marL="0" indent="0">
-              <a:buNone/>
-            </a:pPr>
-            <a:r>
-              <a:rPr lang="en-US" sz="950" b="1" kern="0" spc="150" dirty="0">
+            <a:pPr indent="0" marL="0">
+              <a:buNone/>
+            </a:pPr>
+            <a:r>
+              <a:rPr lang="en-US" sz="950" b="1" spc="150" kern="0" dirty="0">
                 <a:solidFill>
                   <a:srgbClr val="106B41"/>
                 </a:solidFill>
@@ -8992,7 +9429,7 @@
           <a:bodyPr wrap="square" lIns="0" tIns="0" rIns="0" bIns="0" rtlCol="0" anchor="ctr"/>
           <a:lstStyle/>
           <a:p>
-            <a:pPr marL="0" indent="0">
+            <a:pPr indent="0" marL="0">
               <a:lnSpc>
                 <a:spcPct val="112000"/>
               </a:lnSpc>
@@ -9033,7 +9470,7 @@
           </a:prstGeom>
           <a:extLst>
             <a:ext uri="{C572A759-6A51-4108-AA02-DFA0A04FC94B}">
-              <ma14:wrappingTextBoxFlag xmlns="" xmlns:ma14="http://schemas.microsoft.com/office/mac/drawingml/2011/main" val="0"/>
+              <ma14:wrappingTextBoxFlag xmlns:ma14="http://schemas.microsoft.com/office/mac/drawingml/2011/main" val="0"/>
             </a:ext>
           </a:extLst>
         </p:spPr>
@@ -9054,7 +9491,7 @@
           <a:p>
             <a:pPr algn="l"/>
             <a:fld id="{F7021451-1387-4CA6-816F-3879F97B5CBC}" type="slidenum">
-              <a:rPr lang="en-US" b="0"/>
+              <a:rPr b="0" lang="en-US"/>
               <a:t>16</a:t>
             </a:fld>
             <a:endParaRPr lang="en-US"/>
@@ -9129,7 +9566,7 @@
           <a:bodyPr wrap="square" lIns="0" tIns="0" rIns="0" bIns="0" rtlCol="0" anchor="ctr"/>
           <a:lstStyle/>
           <a:p>
-            <a:pPr marL="0" indent="0" algn="l">
+            <a:pPr algn="l" indent="0" marL="0">
               <a:buNone/>
             </a:pPr>
             <a:r>
@@ -9168,7 +9605,7 @@
           <a:bodyPr wrap="square" lIns="0" tIns="0" rIns="0" bIns="0" rtlCol="0" anchor="ctr"/>
           <a:lstStyle/>
           <a:p>
-            <a:pPr marL="0" indent="0">
+            <a:pPr indent="0" marL="0">
               <a:buNone/>
             </a:pPr>
             <a:r>
@@ -9234,11 +9671,11 @@
           <a:bodyPr wrap="square" lIns="0" tIns="0" rIns="0" bIns="0" rtlCol="0" anchor="ctr"/>
           <a:lstStyle/>
           <a:p>
-            <a:pPr marL="0" indent="0" algn="ctr">
-              <a:buNone/>
-            </a:pPr>
-            <a:r>
-              <a:rPr lang="en-US" sz="900" b="1" kern="0" spc="100" dirty="0">
+            <a:pPr algn="ctr" indent="0" marL="0">
+              <a:buNone/>
+            </a:pPr>
+            <a:r>
+              <a:rPr lang="en-US" sz="900" b="1" spc="100" kern="0" dirty="0">
                 <a:solidFill>
                   <a:srgbClr val="5A05F4"/>
                 </a:solidFill>
@@ -9300,11 +9737,11 @@
           <a:bodyPr wrap="square" lIns="0" tIns="0" rIns="0" bIns="0" rtlCol="0" anchor="ctr"/>
           <a:lstStyle/>
           <a:p>
-            <a:pPr marL="0" indent="0" algn="ctr">
-              <a:buNone/>
-            </a:pPr>
-            <a:r>
-              <a:rPr lang="en-US" sz="900" b="1" kern="0" spc="100" dirty="0">
+            <a:pPr algn="ctr" indent="0" marL="0">
+              <a:buNone/>
+            </a:pPr>
+            <a:r>
+              <a:rPr lang="en-US" sz="900" b="1" spc="100" kern="0" dirty="0">
                 <a:solidFill>
                   <a:srgbClr val="434343"/>
                 </a:solidFill>
@@ -9320,14 +9757,14 @@
       </p:sp>
       <p:pic>
         <p:nvPicPr>
-          <p:cNvPr id="9" name="Image 0" descr="preencoded.png"/>
+          <p:cNvPr id="9" name="Image 0" descr="preencoded.png">    </p:cNvPr>
           <p:cNvPicPr>
             <a:picLocks noChangeAspect="1"/>
           </p:cNvPicPr>
           <p:nvPr/>
         </p:nvPicPr>
         <p:blipFill>
-          <a:blip r:embed="rId3"/>
+          <a:blip r:embed="rId1"/>
           <a:stretch>
             <a:fillRect/>
           </a:stretch>
@@ -9385,7 +9822,7 @@
           <a:bodyPr wrap="square" lIns="0" tIns="0" rIns="0" bIns="0" rtlCol="0" anchor="ctr"/>
           <a:lstStyle/>
           <a:p>
-            <a:pPr marL="0" indent="0">
+            <a:pPr indent="0" marL="0">
               <a:buNone/>
             </a:pPr>
             <a:r>
@@ -9424,7 +9861,7 @@
           <a:bodyPr wrap="square" lIns="0" tIns="0" rIns="0" bIns="0" rtlCol="0" anchor="ctr"/>
           <a:lstStyle/>
           <a:p>
-            <a:pPr marL="0" indent="0">
+            <a:pPr indent="0" marL="0">
               <a:buNone/>
             </a:pPr>
             <a:r>
@@ -9485,7 +9922,7 @@
           <a:bodyPr wrap="square" lIns="0" tIns="0" rIns="0" bIns="0" rtlCol="0" anchor="ctr"/>
           <a:lstStyle/>
           <a:p>
-            <a:pPr marL="0" indent="0">
+            <a:pPr indent="0" marL="0">
               <a:buNone/>
             </a:pPr>
             <a:r>
@@ -9524,7 +9961,7 @@
           <a:bodyPr wrap="square" lIns="0" tIns="0" rIns="0" bIns="0" rtlCol="0" anchor="ctr"/>
           <a:lstStyle/>
           <a:p>
-            <a:pPr marL="0" indent="0">
+            <a:pPr indent="0" marL="0">
               <a:buNone/>
             </a:pPr>
             <a:r>
@@ -9585,7 +10022,7 @@
           <a:bodyPr wrap="square" lIns="0" tIns="0" rIns="0" bIns="0" rtlCol="0" anchor="ctr"/>
           <a:lstStyle/>
           <a:p>
-            <a:pPr marL="0" indent="0">
+            <a:pPr indent="0" marL="0">
               <a:buNone/>
             </a:pPr>
             <a:r>
@@ -9624,7 +10061,7 @@
           <a:bodyPr wrap="square" lIns="0" tIns="0" rIns="0" bIns="0" rtlCol="0" anchor="ctr"/>
           <a:lstStyle/>
           <a:p>
-            <a:pPr marL="0" indent="0">
+            <a:pPr indent="0" marL="0">
               <a:buNone/>
             </a:pPr>
             <a:r>
@@ -9769,7 +10206,7 @@
           <a:bodyPr wrap="square" lIns="0" tIns="0" rIns="0" bIns="0" rtlCol="0" anchor="ctr"/>
           <a:lstStyle/>
           <a:p>
-            <a:pPr marL="0" indent="0">
+            <a:pPr indent="0" marL="0">
               <a:buNone/>
             </a:pPr>
             <a:r>
@@ -9783,6 +10220,9 @@
               </a:rPr>
               <a:t>витрачений бюджет місяця:  </a:t>
             </a:r>
+            <a:pPr indent="0" marL="0">
+              <a:buNone/>
+            </a:pPr>
             <a:r>
               <a:rPr lang="en-US" sz="900" b="1" dirty="0">
                 <a:solidFill>
@@ -9794,6 +10234,9 @@
               </a:rPr>
               <a:t>до 80% — норма</a:t>
             </a:r>
+            <a:pPr indent="0" marL="0">
+              <a:buNone/>
+            </a:pPr>
             <a:r>
               <a:rPr lang="en-US" sz="900" dirty="0">
                 <a:solidFill>
@@ -9805,6 +10248,9 @@
               </a:rPr>
               <a:t>   ·   </a:t>
             </a:r>
+            <a:pPr indent="0" marL="0">
+              <a:buNone/>
+            </a:pPr>
             <a:r>
               <a:rPr lang="en-US" sz="900" b="1" dirty="0">
                 <a:solidFill>
@@ -9816,6 +10262,9 @@
               </a:rPr>
               <a:t>80% — алерт</a:t>
             </a:r>
+            <a:pPr indent="0" marL="0">
+              <a:buNone/>
+            </a:pPr>
             <a:r>
               <a:rPr lang="en-US" sz="900" dirty="0">
                 <a:solidFill>
@@ -9827,6 +10276,9 @@
               </a:rPr>
               <a:t>   ·   </a:t>
             </a:r>
+            <a:pPr indent="0" marL="0">
+              <a:buNone/>
+            </a:pPr>
             <a:r>
               <a:rPr lang="en-US" sz="900" b="1" dirty="0">
                 <a:solidFill>
@@ -9838,6 +10290,9 @@
               </a:rPr>
               <a:t>92% — деградація</a:t>
             </a:r>
+            <a:pPr indent="0" marL="0">
+              <a:buNone/>
+            </a:pPr>
             <a:r>
               <a:rPr lang="en-US" sz="900" dirty="0">
                 <a:solidFill>
@@ -9849,6 +10304,9 @@
               </a:rPr>
               <a:t>   ·   </a:t>
             </a:r>
+            <a:pPr indent="0" marL="0">
+              <a:buNone/>
+            </a:pPr>
             <a:r>
               <a:rPr lang="en-US" sz="900" b="1" dirty="0">
                 <a:solidFill>
@@ -9907,11 +10365,11 @@
           <a:bodyPr wrap="square" lIns="0" tIns="0" rIns="0" bIns="0" rtlCol="0" anchor="ctr"/>
           <a:lstStyle/>
           <a:p>
-            <a:pPr marL="0" indent="0">
-              <a:buNone/>
-            </a:pPr>
-            <a:r>
-              <a:rPr lang="en-US" sz="950" b="1" kern="0" spc="150" dirty="0">
+            <a:pPr indent="0" marL="0">
+              <a:buNone/>
+            </a:pPr>
+            <a:r>
+              <a:rPr lang="en-US" sz="950" b="1" spc="150" kern="0" dirty="0">
                 <a:solidFill>
                   <a:srgbClr val="FFFFFF"/>
                 </a:solidFill>
@@ -9946,7 +10404,7 @@
           <a:bodyPr wrap="square" lIns="0" tIns="0" rIns="0" bIns="0" rtlCol="0" anchor="ctr"/>
           <a:lstStyle/>
           <a:p>
-            <a:pPr marL="0" indent="0">
+            <a:pPr indent="0" marL="0">
               <a:lnSpc>
                 <a:spcPct val="112000"/>
               </a:lnSpc>
@@ -9969,7 +10427,7 @@
       </p:sp>
       <p:sp>
         <p:nvSpPr>
-          <p:cNvPr id="28" name="Slide Number Placeholder 0"/>
+          <p:cNvPr id="25" name="Slide Number Placeholder 0"/>
           <p:cNvSpPr>
             <a:spLocks noGrp="1"/>
           </p:cNvSpPr>
@@ -9987,7 +10445,7 @@
           </a:prstGeom>
           <a:extLst>
             <a:ext uri="{C572A759-6A51-4108-AA02-DFA0A04FC94B}">
-              <ma14:wrappingTextBoxFlag xmlns="" xmlns:ma14="http://schemas.microsoft.com/office/mac/drawingml/2011/main" val="0"/>
+              <ma14:wrappingTextBoxFlag xmlns:ma14="http://schemas.microsoft.com/office/mac/drawingml/2011/main" val="0"/>
             </a:ext>
           </a:extLst>
         </p:spPr>
@@ -10008,7 +10466,7 @@
           <a:p>
             <a:pPr algn="l"/>
             <a:fld id="{F7021451-1387-4CA6-816F-3879F97B5CBC}" type="slidenum">
-              <a:rPr lang="en-US" b="0"/>
+              <a:rPr b="0" lang="en-US"/>
               <a:t>17</a:t>
             </a:fld>
             <a:endParaRPr lang="en-US"/>
@@ -10061,11 +10519,11 @@
           <a:bodyPr wrap="square" lIns="0" tIns="0" rIns="0" bIns="0" rtlCol="0" anchor="ctr"/>
           <a:lstStyle/>
           <a:p>
-            <a:pPr marL="0" indent="0">
-              <a:buNone/>
-            </a:pPr>
-            <a:r>
-              <a:rPr lang="en-US" sz="1200" b="1" kern="0" spc="400" dirty="0">
+            <a:pPr indent="0" marL="0">
+              <a:buNone/>
+            </a:pPr>
+            <a:r>
+              <a:rPr lang="en-US" sz="1200" b="1" spc="400" kern="0" dirty="0">
                 <a:solidFill>
                   <a:srgbClr val="FFFFFF"/>
                 </a:solidFill>
@@ -10100,7 +10558,7 @@
           <a:bodyPr wrap="square" lIns="0" tIns="0" rIns="0" bIns="0" rtlCol="0" anchor="ctr"/>
           <a:lstStyle/>
           <a:p>
-            <a:pPr marL="0" indent="0">
+            <a:pPr indent="0" marL="0">
               <a:buNone/>
             </a:pPr>
             <a:r>
@@ -10139,7 +10597,7 @@
           <a:bodyPr wrap="square" lIns="0" tIns="0" rIns="0" bIns="0" rtlCol="0" anchor="t"/>
           <a:lstStyle/>
           <a:p>
-            <a:pPr marL="0" indent="0">
+            <a:pPr indent="0" marL="0">
               <a:buNone/>
             </a:pPr>
             <a:r>
@@ -10200,7 +10658,7 @@
           <a:bodyPr wrap="square" lIns="0" tIns="0" rIns="0" bIns="0" rtlCol="0" anchor="ctr"/>
           <a:lstStyle/>
           <a:p>
-            <a:pPr marL="0" indent="0" algn="ctr">
+            <a:pPr algn="ctr" indent="0" marL="0">
               <a:buNone/>
             </a:pPr>
             <a:r>
@@ -10286,7 +10744,7 @@
           <a:bodyPr wrap="square" lIns="0" tIns="0" rIns="0" bIns="0" rtlCol="0" anchor="ctr"/>
           <a:lstStyle/>
           <a:p>
-            <a:pPr marL="0" indent="0">
+            <a:pPr indent="0" marL="0">
               <a:buNone/>
             </a:pPr>
             <a:r>
@@ -10347,11 +10805,11 @@
           <a:bodyPr wrap="square" lIns="0" tIns="0" rIns="0" bIns="0" rtlCol="0" anchor="ctr"/>
           <a:lstStyle/>
           <a:p>
-            <a:pPr marL="0" indent="0" algn="ctr">
-              <a:buNone/>
-            </a:pPr>
-            <a:r>
-              <a:rPr lang="en-US" sz="900" b="1" kern="0" spc="100" dirty="0">
+            <a:pPr algn="ctr" indent="0" marL="0">
+              <a:buNone/>
+            </a:pPr>
+            <a:r>
+              <a:rPr lang="en-US" sz="900" b="1" spc="100" kern="0" dirty="0">
                 <a:solidFill>
                   <a:srgbClr val="FFFFFF"/>
                 </a:solidFill>
@@ -10367,14 +10825,14 @@
       </p:sp>
       <p:pic>
         <p:nvPicPr>
-          <p:cNvPr id="6" name="Image 0" descr="preencoded.png"/>
+          <p:cNvPr id="6" name="Image 0" descr="preencoded.png">    </p:cNvPr>
           <p:cNvPicPr>
             <a:picLocks noChangeAspect="1"/>
           </p:cNvPicPr>
           <p:nvPr/>
         </p:nvPicPr>
         <p:blipFill>
-          <a:blip r:embed="rId3"/>
+          <a:blip r:embed="rId1"/>
           <a:stretch>
             <a:fillRect/>
           </a:stretch>
@@ -10452,7 +10910,7 @@
           <a:bodyPr wrap="square" lIns="0" tIns="0" rIns="0" bIns="0" rtlCol="0" anchor="ctr"/>
           <a:lstStyle/>
           <a:p>
-            <a:pPr marL="0" indent="0" algn="ctr">
+            <a:pPr algn="ctr" indent="0" marL="0">
               <a:buNone/>
             </a:pPr>
             <a:r>
@@ -10491,7 +10949,7 @@
           <a:bodyPr wrap="square" lIns="0" tIns="0" rIns="0" bIns="0" rtlCol="0" anchor="ctr"/>
           <a:lstStyle/>
           <a:p>
-            <a:pPr marL="0" indent="0">
+            <a:pPr indent="0" marL="0">
               <a:buNone/>
             </a:pPr>
             <a:r>
@@ -10530,7 +10988,7 @@
           <a:bodyPr wrap="square" lIns="0" tIns="0" rIns="0" bIns="0" rtlCol="0" anchor="t"/>
           <a:lstStyle/>
           <a:p>
-            <a:pPr marL="0" indent="0">
+            <a:pPr indent="0" marL="0">
               <a:lnSpc>
                 <a:spcPct val="108000"/>
               </a:lnSpc>
@@ -10614,7 +11072,7 @@
           <a:bodyPr wrap="square" lIns="0" tIns="0" rIns="0" bIns="0" rtlCol="0" anchor="ctr"/>
           <a:lstStyle/>
           <a:p>
-            <a:pPr marL="0" indent="0" algn="ctr">
+            <a:pPr algn="ctr" indent="0" marL="0">
               <a:buNone/>
             </a:pPr>
             <a:r>
@@ -10653,7 +11111,7 @@
           <a:bodyPr wrap="square" lIns="0" tIns="0" rIns="0" bIns="0" rtlCol="0" anchor="ctr"/>
           <a:lstStyle/>
           <a:p>
-            <a:pPr marL="0" indent="0">
+            <a:pPr indent="0" marL="0">
               <a:buNone/>
             </a:pPr>
             <a:r>
@@ -10692,7 +11150,7 @@
           <a:bodyPr wrap="square" lIns="0" tIns="0" rIns="0" bIns="0" rtlCol="0" anchor="t"/>
           <a:lstStyle/>
           <a:p>
-            <a:pPr marL="0" indent="0">
+            <a:pPr indent="0" marL="0">
               <a:lnSpc>
                 <a:spcPct val="108000"/>
               </a:lnSpc>
@@ -10776,7 +11234,7 @@
           <a:bodyPr wrap="square" lIns="0" tIns="0" rIns="0" bIns="0" rtlCol="0" anchor="ctr"/>
           <a:lstStyle/>
           <a:p>
-            <a:pPr marL="0" indent="0" algn="ctr">
+            <a:pPr algn="ctr" indent="0" marL="0">
               <a:buNone/>
             </a:pPr>
             <a:r>
@@ -10815,7 +11273,7 @@
           <a:bodyPr wrap="square" lIns="0" tIns="0" rIns="0" bIns="0" rtlCol="0" anchor="ctr"/>
           <a:lstStyle/>
           <a:p>
-            <a:pPr marL="0" indent="0">
+            <a:pPr indent="0" marL="0">
               <a:buNone/>
             </a:pPr>
             <a:r>
@@ -10854,7 +11312,7 @@
           <a:bodyPr wrap="square" lIns="0" tIns="0" rIns="0" bIns="0" rtlCol="0" anchor="t"/>
           <a:lstStyle/>
           <a:p>
-            <a:pPr marL="0" indent="0">
+            <a:pPr indent="0" marL="0">
               <a:lnSpc>
                 <a:spcPct val="108000"/>
               </a:lnSpc>
@@ -10938,7 +11396,7 @@
           <a:bodyPr wrap="square" lIns="0" tIns="0" rIns="0" bIns="0" rtlCol="0" anchor="ctr"/>
           <a:lstStyle/>
           <a:p>
-            <a:pPr marL="0" indent="0" algn="ctr">
+            <a:pPr algn="ctr" indent="0" marL="0">
               <a:buNone/>
             </a:pPr>
             <a:r>
@@ -10977,7 +11435,7 @@
           <a:bodyPr wrap="square" lIns="0" tIns="0" rIns="0" bIns="0" rtlCol="0" anchor="ctr"/>
           <a:lstStyle/>
           <a:p>
-            <a:pPr marL="0" indent="0">
+            <a:pPr indent="0" marL="0">
               <a:buNone/>
             </a:pPr>
             <a:r>
@@ -11016,7 +11474,7 @@
           <a:bodyPr wrap="square" lIns="0" tIns="0" rIns="0" bIns="0" rtlCol="0" anchor="t"/>
           <a:lstStyle/>
           <a:p>
-            <a:pPr marL="0" indent="0">
+            <a:pPr indent="0" marL="0">
               <a:lnSpc>
                 <a:spcPct val="108000"/>
               </a:lnSpc>
@@ -11046,7 +11504,7 @@
         <p:spPr>
           <a:xfrm>
             <a:off x="566928" y="5074920"/>
-            <a:ext cx="11247120" cy="1051560"/>
+            <a:ext cx="11064240" cy="1051560"/>
           </a:xfrm>
           <a:prstGeom prst="roundRect">
             <a:avLst>
@@ -11061,30 +11519,89 @@
       </p:sp>
       <p:sp>
         <p:nvSpPr>
-          <p:cNvPr id="28" name="Text 25"/>
-          <p:cNvSpPr/>
-          <p:nvPr/>
-        </p:nvSpPr>
-        <p:spPr>
-          <a:xfrm>
-            <a:off x="786384" y="5202936"/>
-            <a:ext cx="10625328" cy="219456"/>
-          </a:xfrm>
-          <a:prstGeom prst="rect">
-            <a:avLst/>
-          </a:prstGeom>
-          <a:noFill/>
-          <a:ln/>
-        </p:spPr>
-        <p:txBody>
-          <a:bodyPr wrap="square" lIns="0" tIns="0" rIns="0" bIns="0" rtlCol="0" anchor="ctr"/>
-          <a:lstStyle/>
-          <a:p>
-            <a:pPr marL="0" indent="0">
-              <a:buNone/>
-            </a:pPr>
-            <a:r>
-              <a:rPr lang="en-US" sz="950" b="1" kern="0" spc="150" dirty="0">
+          <p:cNvPr id="28" name="Shape 25"/>
+          <p:cNvSpPr/>
+          <p:nvPr/>
+        </p:nvSpPr>
+        <p:spPr>
+          <a:xfrm>
+            <a:off x="749808" y="5445252"/>
+            <a:ext cx="310896" cy="310896"/>
+          </a:xfrm>
+          <a:prstGeom prst="ellipse">
+            <a:avLst/>
+          </a:prstGeom>
+          <a:solidFill>
+            <a:srgbClr val="FFFFFF"/>
+          </a:solidFill>
+          <a:ln/>
+        </p:spPr>
+      </p:sp>
+      <p:sp>
+        <p:nvSpPr>
+          <p:cNvPr id="29" name="Text 26"/>
+          <p:cNvSpPr/>
+          <p:nvPr/>
+        </p:nvSpPr>
+        <p:spPr>
+          <a:xfrm>
+            <a:off x="749808" y="5445252"/>
+            <a:ext cx="310896" cy="310896"/>
+          </a:xfrm>
+          <a:prstGeom prst="rect">
+            <a:avLst/>
+          </a:prstGeom>
+          <a:noFill/>
+          <a:ln/>
+        </p:spPr>
+        <p:txBody>
+          <a:bodyPr wrap="square" lIns="0" tIns="0" rIns="0" bIns="0" rtlCol="0" anchor="ctr"/>
+          <a:lstStyle/>
+          <a:p>
+            <a:pPr algn="ctr" indent="0" marL="0">
+              <a:buNone/>
+            </a:pPr>
+            <a:r>
+              <a:rPr lang="en-US" sz="1200" b="1" dirty="0">
+                <a:solidFill>
+                  <a:srgbClr val="5A05F4"/>
+                </a:solidFill>
+                <a:latin typeface="Arial" pitchFamily="34" charset="0"/>
+                <a:ea typeface="Arial" pitchFamily="34" charset="-122"/>
+                <a:cs typeface="Arial" pitchFamily="34" charset="-120"/>
+              </a:rPr>
+              <a:t>?</a:t>
+            </a:r>
+            <a:endParaRPr lang="en-US" sz="1200" dirty="0"/>
+          </a:p>
+        </p:txBody>
+      </p:sp>
+      <p:sp>
+        <p:nvSpPr>
+          <p:cNvPr id="30" name="Text 27"/>
+          <p:cNvSpPr/>
+          <p:nvPr/>
+        </p:nvSpPr>
+        <p:spPr>
+          <a:xfrm>
+            <a:off x="1243584" y="5202936"/>
+            <a:ext cx="10168128" cy="219456"/>
+          </a:xfrm>
+          <a:prstGeom prst="rect">
+            <a:avLst/>
+          </a:prstGeom>
+          <a:noFill/>
+          <a:ln/>
+        </p:spPr>
+        <p:txBody>
+          <a:bodyPr wrap="square" lIns="0" tIns="0" rIns="0" bIns="0" rtlCol="0" anchor="ctr"/>
+          <a:lstStyle/>
+          <a:p>
+            <a:pPr indent="0" marL="0">
+              <a:buNone/>
+            </a:pPr>
+            <a:r>
+              <a:rPr lang="en-US" sz="950" b="1" spc="150" kern="0" dirty="0">
                 <a:solidFill>
                   <a:srgbClr val="FFFFFF"/>
                 </a:solidFill>
@@ -11100,26 +11617,26 @@
       </p:sp>
       <p:sp>
         <p:nvSpPr>
-          <p:cNvPr id="29" name="Text 26"/>
-          <p:cNvSpPr/>
-          <p:nvPr/>
-        </p:nvSpPr>
-        <p:spPr>
-          <a:xfrm>
-            <a:off x="786384" y="5458968"/>
-            <a:ext cx="10625328" cy="539496"/>
-          </a:xfrm>
-          <a:prstGeom prst="rect">
-            <a:avLst/>
-          </a:prstGeom>
-          <a:noFill/>
-          <a:ln/>
-        </p:spPr>
-        <p:txBody>
-          <a:bodyPr wrap="square" lIns="0" tIns="0" rIns="0" bIns="0" rtlCol="0" anchor="ctr"/>
-          <a:lstStyle/>
-          <a:p>
-            <a:pPr marL="0" indent="0">
+          <p:cNvPr id="31" name="Text 28"/>
+          <p:cNvSpPr/>
+          <p:nvPr/>
+        </p:nvSpPr>
+        <p:spPr>
+          <a:xfrm>
+            <a:off x="1243584" y="5458968"/>
+            <a:ext cx="10168128" cy="539496"/>
+          </a:xfrm>
+          <a:prstGeom prst="rect">
+            <a:avLst/>
+          </a:prstGeom>
+          <a:noFill/>
+          <a:ln/>
+        </p:spPr>
+        <p:txBody>
+          <a:bodyPr wrap="square" lIns="0" tIns="0" rIns="0" bIns="0" rtlCol="0" anchor="ctr"/>
+          <a:lstStyle/>
+          <a:p>
+            <a:pPr indent="0" marL="0">
               <a:lnSpc>
                 <a:spcPct val="112000"/>
               </a:lnSpc>
@@ -11142,7 +11659,7 @@
       </p:sp>
       <p:sp>
         <p:nvSpPr>
-          <p:cNvPr id="30" name="Slide Number Placeholder 0"/>
+          <p:cNvPr id="25" name="Slide Number Placeholder 0"/>
           <p:cNvSpPr>
             <a:spLocks noGrp="1"/>
           </p:cNvSpPr>
@@ -11160,7 +11677,7 @@
           </a:prstGeom>
           <a:extLst>
             <a:ext uri="{C572A759-6A51-4108-AA02-DFA0A04FC94B}">
-              <ma14:wrappingTextBoxFlag xmlns="" xmlns:ma14="http://schemas.microsoft.com/office/mac/drawingml/2011/main" val="0"/>
+              <ma14:wrappingTextBoxFlag xmlns:ma14="http://schemas.microsoft.com/office/mac/drawingml/2011/main" val="0"/>
             </a:ext>
           </a:extLst>
         </p:spPr>
@@ -11181,7 +11698,7 @@
           <a:p>
             <a:pPr algn="l"/>
             <a:fld id="{F7021451-1387-4CA6-816F-3879F97B5CBC}" type="slidenum">
-              <a:rPr lang="en-US" b="0"/>
+              <a:rPr b="0" lang="en-US"/>
               <a:t>19</a:t>
             </a:fld>
             <a:endParaRPr lang="en-US"/>
@@ -11256,7 +11773,7 @@
           <a:bodyPr wrap="square" lIns="0" tIns="0" rIns="0" bIns="0" rtlCol="0" anchor="ctr"/>
           <a:lstStyle/>
           <a:p>
-            <a:pPr marL="0" indent="0">
+            <a:pPr indent="0" marL="0">
               <a:buNone/>
             </a:pPr>
             <a:r>
@@ -11295,7 +11812,7 @@
           <a:bodyPr wrap="square" lIns="0" tIns="0" rIns="0" bIns="0" rtlCol="0" anchor="t"/>
           <a:lstStyle/>
           <a:p>
-            <a:pPr marL="0" indent="0">
+            <a:pPr indent="0" marL="0">
               <a:lnSpc>
                 <a:spcPct val="100000"/>
               </a:lnSpc>
@@ -11364,11 +11881,11 @@
           <a:bodyPr wrap="square" lIns="0" tIns="0" rIns="0" bIns="0" rtlCol="0" anchor="ctr"/>
           <a:lstStyle/>
           <a:p>
-            <a:pPr marL="0" indent="0" algn="ctr">
-              <a:buNone/>
-            </a:pPr>
-            <a:r>
-              <a:rPr lang="en-US" sz="900" b="1" kern="0" spc="100" dirty="0">
+            <a:pPr algn="ctr" indent="0" marL="0">
+              <a:buNone/>
+            </a:pPr>
+            <a:r>
+              <a:rPr lang="en-US" sz="900" b="1" spc="100" kern="0" dirty="0">
                 <a:solidFill>
                   <a:srgbClr val="5A05F4"/>
                 </a:solidFill>
@@ -11384,14 +11901,14 @@
       </p:sp>
       <p:pic>
         <p:nvPicPr>
-          <p:cNvPr id="7" name="Image 0" descr="preencoded.png"/>
+          <p:cNvPr id="7" name="Image 0" descr="preencoded.png">    </p:cNvPr>
           <p:cNvPicPr>
             <a:picLocks noChangeAspect="1"/>
           </p:cNvPicPr>
           <p:nvPr/>
         </p:nvPicPr>
         <p:blipFill>
-          <a:blip r:embed="rId3"/>
+          <a:blip r:embed="rId1"/>
           <a:stretch>
             <a:fillRect/>
           </a:stretch>
@@ -11469,7 +11986,7 @@
           <a:bodyPr wrap="square" lIns="0" tIns="0" rIns="0" bIns="0" rtlCol="0" anchor="ctr"/>
           <a:lstStyle/>
           <a:p>
-            <a:pPr marL="0" indent="0" algn="ctr">
+            <a:pPr algn="ctr" indent="0" marL="0">
               <a:buNone/>
             </a:pPr>
             <a:r>
@@ -11508,7 +12025,7 @@
           <a:bodyPr wrap="square" lIns="0" tIns="0" rIns="0" bIns="0" rtlCol="0" anchor="ctr"/>
           <a:lstStyle/>
           <a:p>
-            <a:pPr marL="0" indent="0">
+            <a:pPr indent="0" marL="0">
               <a:buNone/>
             </a:pPr>
             <a:r>
@@ -11547,7 +12064,7 @@
           <a:bodyPr wrap="square" lIns="0" tIns="0" rIns="0" bIns="0" rtlCol="0" anchor="t"/>
           <a:lstStyle/>
           <a:p>
-            <a:pPr marL="0" indent="0">
+            <a:pPr indent="0" marL="0">
               <a:lnSpc>
                 <a:spcPct val="108000"/>
               </a:lnSpc>
@@ -11631,7 +12148,7 @@
           <a:bodyPr wrap="square" lIns="0" tIns="0" rIns="0" bIns="0" rtlCol="0" anchor="ctr"/>
           <a:lstStyle/>
           <a:p>
-            <a:pPr marL="0" indent="0" algn="ctr">
+            <a:pPr algn="ctr" indent="0" marL="0">
               <a:buNone/>
             </a:pPr>
             <a:r>
@@ -11670,7 +12187,7 @@
           <a:bodyPr wrap="square" lIns="0" tIns="0" rIns="0" bIns="0" rtlCol="0" anchor="ctr"/>
           <a:lstStyle/>
           <a:p>
-            <a:pPr marL="0" indent="0">
+            <a:pPr indent="0" marL="0">
               <a:buNone/>
             </a:pPr>
             <a:r>
@@ -11709,7 +12226,7 @@
           <a:bodyPr wrap="square" lIns="0" tIns="0" rIns="0" bIns="0" rtlCol="0" anchor="t"/>
           <a:lstStyle/>
           <a:p>
-            <a:pPr marL="0" indent="0">
+            <a:pPr indent="0" marL="0">
               <a:lnSpc>
                 <a:spcPct val="108000"/>
               </a:lnSpc>
@@ -11793,7 +12310,7 @@
           <a:bodyPr wrap="square" lIns="0" tIns="0" rIns="0" bIns="0" rtlCol="0" anchor="ctr"/>
           <a:lstStyle/>
           <a:p>
-            <a:pPr marL="0" indent="0" algn="ctr">
+            <a:pPr algn="ctr" indent="0" marL="0">
               <a:buNone/>
             </a:pPr>
             <a:r>
@@ -11832,7 +12349,7 @@
           <a:bodyPr wrap="square" lIns="0" tIns="0" rIns="0" bIns="0" rtlCol="0" anchor="ctr"/>
           <a:lstStyle/>
           <a:p>
-            <a:pPr marL="0" indent="0">
+            <a:pPr indent="0" marL="0">
               <a:buNone/>
             </a:pPr>
             <a:r>
@@ -11871,7 +12388,7 @@
           <a:bodyPr wrap="square" lIns="0" tIns="0" rIns="0" bIns="0" rtlCol="0" anchor="t"/>
           <a:lstStyle/>
           <a:p>
-            <a:pPr marL="0" indent="0">
+            <a:pPr indent="0" marL="0">
               <a:lnSpc>
                 <a:spcPct val="108000"/>
               </a:lnSpc>
@@ -11955,7 +12472,7 @@
           <a:bodyPr wrap="square" lIns="0" tIns="0" rIns="0" bIns="0" rtlCol="0" anchor="ctr"/>
           <a:lstStyle/>
           <a:p>
-            <a:pPr marL="0" indent="0" algn="ctr">
+            <a:pPr algn="ctr" indent="0" marL="0">
               <a:buNone/>
             </a:pPr>
             <a:r>
@@ -11994,7 +12511,7 @@
           <a:bodyPr wrap="square" lIns="0" tIns="0" rIns="0" bIns="0" rtlCol="0" anchor="ctr"/>
           <a:lstStyle/>
           <a:p>
-            <a:pPr marL="0" indent="0">
+            <a:pPr indent="0" marL="0">
               <a:buNone/>
             </a:pPr>
             <a:r>
@@ -12033,7 +12550,7 @@
           <a:bodyPr wrap="square" lIns="0" tIns="0" rIns="0" bIns="0" rtlCol="0" anchor="t"/>
           <a:lstStyle/>
           <a:p>
-            <a:pPr marL="0" indent="0">
+            <a:pPr indent="0" marL="0">
               <a:lnSpc>
                 <a:spcPct val="108000"/>
               </a:lnSpc>
@@ -12117,7 +12634,7 @@
           <a:bodyPr wrap="square" lIns="0" tIns="0" rIns="0" bIns="0" rtlCol="0" anchor="ctr"/>
           <a:lstStyle/>
           <a:p>
-            <a:pPr marL="0" indent="0" algn="ctr">
+            <a:pPr algn="ctr" indent="0" marL="0">
               <a:buNone/>
             </a:pPr>
             <a:r>
@@ -12156,7 +12673,7 @@
           <a:bodyPr wrap="square" lIns="0" tIns="0" rIns="0" bIns="0" rtlCol="0" anchor="ctr"/>
           <a:lstStyle/>
           <a:p>
-            <a:pPr marL="0" indent="0">
+            <a:pPr indent="0" marL="0">
               <a:buNone/>
             </a:pPr>
             <a:r>
@@ -12195,7 +12712,7 @@
           <a:bodyPr wrap="square" lIns="0" tIns="0" rIns="0" bIns="0" rtlCol="0" anchor="t"/>
           <a:lstStyle/>
           <a:p>
-            <a:pPr marL="0" indent="0">
+            <a:pPr indent="0" marL="0">
               <a:lnSpc>
                 <a:spcPct val="108000"/>
               </a:lnSpc>
@@ -12218,7 +12735,7 @@
       </p:sp>
       <p:sp>
         <p:nvSpPr>
-          <p:cNvPr id="33" name="Slide Number Placeholder 0"/>
+          <p:cNvPr id="25" name="Slide Number Placeholder 0"/>
           <p:cNvSpPr>
             <a:spLocks noGrp="1"/>
           </p:cNvSpPr>
@@ -12236,7 +12753,7 @@
           </a:prstGeom>
           <a:extLst>
             <a:ext uri="{C572A759-6A51-4108-AA02-DFA0A04FC94B}">
-              <ma14:wrappingTextBoxFlag xmlns="" xmlns:ma14="http://schemas.microsoft.com/office/mac/drawingml/2011/main" val="0"/>
+              <ma14:wrappingTextBoxFlag xmlns:ma14="http://schemas.microsoft.com/office/mac/drawingml/2011/main" val="0"/>
             </a:ext>
           </a:extLst>
         </p:spPr>
@@ -12257,7 +12774,7 @@
           <a:p>
             <a:pPr algn="l"/>
             <a:fld id="{F7021451-1387-4CA6-816F-3879F97B5CBC}" type="slidenum">
-              <a:rPr lang="en-US" b="0"/>
+              <a:rPr b="0" lang="en-US"/>
               <a:t>2</a:t>
             </a:fld>
             <a:endParaRPr lang="en-US"/>
@@ -12332,7 +12849,7 @@
           <a:bodyPr wrap="square" lIns="0" tIns="0" rIns="0" bIns="0" rtlCol="0" anchor="ctr"/>
           <a:lstStyle/>
           <a:p>
-            <a:pPr marL="0" indent="0">
+            <a:pPr indent="0" marL="0">
               <a:buNone/>
             </a:pPr>
             <a:r>
@@ -12393,11 +12910,11 @@
           <a:bodyPr wrap="square" lIns="0" tIns="0" rIns="0" bIns="0" rtlCol="0" anchor="ctr"/>
           <a:lstStyle/>
           <a:p>
-            <a:pPr marL="0" indent="0" algn="ctr">
-              <a:buNone/>
-            </a:pPr>
-            <a:r>
-              <a:rPr lang="en-US" sz="900" b="1" kern="0" spc="100" dirty="0">
+            <a:pPr algn="ctr" indent="0" marL="0">
+              <a:buNone/>
+            </a:pPr>
+            <a:r>
+              <a:rPr lang="en-US" sz="900" b="1" spc="100" kern="0" dirty="0">
                 <a:solidFill>
                   <a:srgbClr val="FFFFFF"/>
                 </a:solidFill>
@@ -12413,14 +12930,14 @@
       </p:sp>
       <p:pic>
         <p:nvPicPr>
-          <p:cNvPr id="6" name="Image 0" descr="preencoded.png"/>
+          <p:cNvPr id="6" name="Image 0" descr="preencoded.png">    </p:cNvPr>
           <p:cNvPicPr>
             <a:picLocks noChangeAspect="1"/>
           </p:cNvPicPr>
           <p:nvPr/>
         </p:nvPicPr>
         <p:blipFill>
-          <a:blip r:embed="rId3"/>
+          <a:blip r:embed="rId1"/>
           <a:stretch>
             <a:fillRect/>
           </a:stretch>
@@ -12476,7 +12993,7 @@
           <a:bodyPr wrap="square" lIns="0" tIns="0" rIns="0" bIns="0" rtlCol="0" anchor="ctr"/>
           <a:lstStyle/>
           <a:p>
-            <a:pPr marL="0" indent="0" algn="ctr">
+            <a:pPr algn="ctr" indent="0" marL="0">
               <a:buNone/>
             </a:pPr>
             <a:r>
@@ -12515,7 +13032,7 @@
           <a:bodyPr wrap="square" lIns="0" tIns="0" rIns="0" bIns="0" rtlCol="0" anchor="ctr"/>
           <a:lstStyle/>
           <a:p>
-            <a:pPr marL="0" indent="0">
+            <a:pPr indent="0" marL="0">
               <a:buNone/>
             </a:pPr>
             <a:r>
@@ -12529,6 +13046,9 @@
               </a:rPr>
               <a:t>Завести прайс  </a:t>
             </a:r>
+            <a:pPr indent="0" marL="0">
+              <a:buNone/>
+            </a:pPr>
             <a:r>
               <a:rPr lang="en-US" sz="1200" dirty="0">
                 <a:solidFill>
@@ -12585,7 +13105,7 @@
           <a:bodyPr wrap="square" lIns="0" tIns="0" rIns="0" bIns="0" rtlCol="0" anchor="ctr"/>
           <a:lstStyle/>
           <a:p>
-            <a:pPr marL="0" indent="0" algn="ctr">
+            <a:pPr algn="ctr" indent="0" marL="0">
               <a:buNone/>
             </a:pPr>
             <a:r>
@@ -12624,7 +13144,7 @@
           <a:bodyPr wrap="square" lIns="0" tIns="0" rIns="0" bIns="0" rtlCol="0" anchor="ctr"/>
           <a:lstStyle/>
           <a:p>
-            <a:pPr marL="0" indent="0">
+            <a:pPr indent="0" marL="0">
               <a:buNone/>
             </a:pPr>
             <a:r>
@@ -12638,6 +13158,9 @@
               </a:rPr>
               <a:t>Порахувати вартість  </a:t>
             </a:r>
+            <a:pPr indent="0" marL="0">
+              <a:buNone/>
+            </a:pPr>
             <a:r>
               <a:rPr lang="en-US" sz="1200" dirty="0">
                 <a:solidFill>
@@ -12694,7 +13217,7 @@
           <a:bodyPr wrap="square" lIns="0" tIns="0" rIns="0" bIns="0" rtlCol="0" anchor="ctr"/>
           <a:lstStyle/>
           <a:p>
-            <a:pPr marL="0" indent="0" algn="ctr">
+            <a:pPr algn="ctr" indent="0" marL="0">
               <a:buNone/>
             </a:pPr>
             <a:r>
@@ -12733,7 +13256,7 @@
           <a:bodyPr wrap="square" lIns="0" tIns="0" rIns="0" bIns="0" rtlCol="0" anchor="ctr"/>
           <a:lstStyle/>
           <a:p>
-            <a:pPr marL="0" indent="0">
+            <a:pPr indent="0" marL="0">
               <a:buNone/>
             </a:pPr>
             <a:r>
@@ -12747,6 +13270,9 @@
               </a:rPr>
               <a:t>Перевірити атрибуцію  </a:t>
             </a:r>
+            <a:pPr indent="0" marL="0">
+              <a:buNone/>
+            </a:pPr>
             <a:r>
               <a:rPr lang="en-US" sz="1200" dirty="0">
                 <a:solidFill>
@@ -12803,7 +13329,7 @@
           <a:bodyPr wrap="square" lIns="0" tIns="0" rIns="0" bIns="0" rtlCol="0" anchor="ctr"/>
           <a:lstStyle/>
           <a:p>
-            <a:pPr marL="0" indent="0" algn="ctr">
+            <a:pPr algn="ctr" indent="0" marL="0">
               <a:buNone/>
             </a:pPr>
             <a:r>
@@ -12842,7 +13368,7 @@
           <a:bodyPr wrap="square" lIns="0" tIns="0" rIns="0" bIns="0" rtlCol="0" anchor="ctr"/>
           <a:lstStyle/>
           <a:p>
-            <a:pPr marL="0" indent="0">
+            <a:pPr indent="0" marL="0">
               <a:buNone/>
             </a:pPr>
             <a:r>
@@ -12856,6 +13382,9 @@
               </a:rPr>
               <a:t>Оживити /cost  </a:t>
             </a:r>
+            <a:pPr indent="0" marL="0">
+              <a:buNone/>
+            </a:pPr>
             <a:r>
               <a:rPr lang="en-US" sz="1200" dirty="0">
                 <a:solidFill>
@@ -12912,7 +13441,7 @@
           <a:bodyPr wrap="square" lIns="0" tIns="0" rIns="0" bIns="0" rtlCol="0" anchor="ctr"/>
           <a:lstStyle/>
           <a:p>
-            <a:pPr marL="0" indent="0" algn="ctr">
+            <a:pPr algn="ctr" indent="0" marL="0">
               <a:buNone/>
             </a:pPr>
             <a:r>
@@ -12951,7 +13480,7 @@
           <a:bodyPr wrap="square" lIns="0" tIns="0" rIns="0" bIns="0" rtlCol="0" anchor="ctr"/>
           <a:lstStyle/>
           <a:p>
-            <a:pPr marL="0" indent="0">
+            <a:pPr indent="0" marL="0">
               <a:buNone/>
             </a:pPr>
             <a:r>
@@ -12965,6 +13494,9 @@
               </a:rPr>
               <a:t>Budget-політика · опційно  </a:t>
             </a:r>
+            <a:pPr indent="0" marL="0">
+              <a:buNone/>
+            </a:pPr>
             <a:r>
               <a:rPr lang="en-US" sz="1200" dirty="0">
                 <a:solidFill>
@@ -13000,7 +13532,7 @@
           </a:prstGeom>
           <a:extLst>
             <a:ext uri="{C572A759-6A51-4108-AA02-DFA0A04FC94B}">
-              <ma14:wrappingTextBoxFlag xmlns="" xmlns:ma14="http://schemas.microsoft.com/office/mac/drawingml/2011/main" val="0"/>
+              <ma14:wrappingTextBoxFlag xmlns:ma14="http://schemas.microsoft.com/office/mac/drawingml/2011/main" val="0"/>
             </a:ext>
           </a:extLst>
         </p:spPr>
@@ -13021,7 +13553,7 @@
           <a:p>
             <a:pPr algn="l"/>
             <a:fld id="{F7021451-1387-4CA6-816F-3879F97B5CBC}" type="slidenum">
-              <a:rPr lang="en-US" b="0"/>
+              <a:rPr b="0" lang="en-US"/>
               <a:t>20</a:t>
             </a:fld>
             <a:endParaRPr lang="en-US"/>
@@ -13074,11 +13606,11 @@
           <a:bodyPr wrap="square" lIns="0" tIns="0" rIns="0" bIns="0" rtlCol="0" anchor="ctr"/>
           <a:lstStyle/>
           <a:p>
-            <a:pPr marL="0" indent="0">
-              <a:buNone/>
-            </a:pPr>
-            <a:r>
-              <a:rPr lang="en-US" sz="1200" b="1" kern="0" spc="400" dirty="0">
+            <a:pPr indent="0" marL="0">
+              <a:buNone/>
+            </a:pPr>
+            <a:r>
+              <a:rPr lang="en-US" sz="1200" b="1" spc="400" kern="0" dirty="0">
                 <a:solidFill>
                   <a:srgbClr val="FFFFFF"/>
                 </a:solidFill>
@@ -13113,7 +13645,7 @@
           <a:bodyPr wrap="square" lIns="0" tIns="0" rIns="0" bIns="0" rtlCol="0" anchor="ctr"/>
           <a:lstStyle/>
           <a:p>
-            <a:pPr marL="0" indent="0">
+            <a:pPr indent="0" marL="0">
               <a:buNone/>
             </a:pPr>
             <a:r>
@@ -13152,7 +13684,7 @@
           <a:bodyPr wrap="square" lIns="0" tIns="0" rIns="0" bIns="0" rtlCol="0" anchor="t"/>
           <a:lstStyle/>
           <a:p>
-            <a:pPr marL="0" indent="0">
+            <a:pPr indent="0" marL="0">
               <a:buNone/>
             </a:pPr>
             <a:r>
@@ -13238,7 +13770,7 @@
           <a:bodyPr wrap="square" lIns="0" tIns="0" rIns="0" bIns="0" rtlCol="0" anchor="ctr"/>
           <a:lstStyle/>
           <a:p>
-            <a:pPr marL="0" indent="0">
+            <a:pPr indent="0" marL="0">
               <a:buNone/>
             </a:pPr>
             <a:r>
@@ -13304,11 +13836,11 @@
           <a:bodyPr wrap="square" lIns="0" tIns="0" rIns="0" bIns="0" rtlCol="0" anchor="ctr"/>
           <a:lstStyle/>
           <a:p>
-            <a:pPr marL="0" indent="0" algn="ctr">
-              <a:buNone/>
-            </a:pPr>
-            <a:r>
-              <a:rPr lang="en-US" sz="900" b="1" kern="0" spc="100" dirty="0">
+            <a:pPr algn="ctr" indent="0" marL="0">
+              <a:buNone/>
+            </a:pPr>
+            <a:r>
+              <a:rPr lang="en-US" sz="900" b="1" spc="100" kern="0" dirty="0">
                 <a:solidFill>
                   <a:srgbClr val="1A4FBF"/>
                 </a:solidFill>
@@ -13324,14 +13856,14 @@
       </p:sp>
       <p:pic>
         <p:nvPicPr>
-          <p:cNvPr id="6" name="Image 0" descr="preencoded.png"/>
+          <p:cNvPr id="6" name="Image 0" descr="preencoded.png">    </p:cNvPr>
           <p:cNvPicPr>
             <a:picLocks noChangeAspect="1"/>
           </p:cNvPicPr>
           <p:nvPr/>
         </p:nvPicPr>
         <p:blipFill>
-          <a:blip r:embed="rId3"/>
+          <a:blip r:embed="rId1"/>
           <a:stretch>
             <a:fillRect/>
           </a:stretch>
@@ -13389,7 +13921,7 @@
           <a:bodyPr wrap="square" lIns="0" tIns="0" rIns="0" bIns="0" rtlCol="0" anchor="ctr"/>
           <a:lstStyle/>
           <a:p>
-            <a:pPr marL="0" indent="0">
+            <a:pPr indent="0" marL="0">
               <a:buNone/>
             </a:pPr>
             <a:r>
@@ -13428,7 +13960,7 @@
           <a:bodyPr wrap="square" lIns="0" tIns="0" rIns="0" bIns="0" rtlCol="0" anchor="t"/>
           <a:lstStyle/>
           <a:p>
-            <a:pPr marL="0" indent="0">
+            <a:pPr indent="0" marL="0">
               <a:lnSpc>
                 <a:spcPct val="108000"/>
               </a:lnSpc>
@@ -13492,7 +14024,7 @@
           <a:bodyPr wrap="square" lIns="0" tIns="0" rIns="0" bIns="0" rtlCol="0" anchor="ctr"/>
           <a:lstStyle/>
           <a:p>
-            <a:pPr marL="0" indent="0">
+            <a:pPr indent="0" marL="0">
               <a:buNone/>
             </a:pPr>
             <a:r>
@@ -13531,7 +14063,7 @@
           <a:bodyPr wrap="square" lIns="0" tIns="0" rIns="0" bIns="0" rtlCol="0" anchor="t"/>
           <a:lstStyle/>
           <a:p>
-            <a:pPr marL="0" indent="0">
+            <a:pPr indent="0" marL="0">
               <a:lnSpc>
                 <a:spcPct val="108000"/>
               </a:lnSpc>
@@ -13595,7 +14127,7 @@
           <a:bodyPr wrap="square" lIns="0" tIns="0" rIns="0" bIns="0" rtlCol="0" anchor="ctr"/>
           <a:lstStyle/>
           <a:p>
-            <a:pPr marL="0" indent="0">
+            <a:pPr indent="0" marL="0">
               <a:buNone/>
             </a:pPr>
             <a:r>
@@ -13634,7 +14166,7 @@
           <a:bodyPr wrap="square" lIns="0" tIns="0" rIns="0" bIns="0" rtlCol="0" anchor="t"/>
           <a:lstStyle/>
           <a:p>
-            <a:pPr marL="0" indent="0">
+            <a:pPr indent="0" marL="0">
               <a:lnSpc>
                 <a:spcPct val="108000"/>
               </a:lnSpc>
@@ -13703,7 +14235,7 @@
           <a:bodyPr wrap="square" lIns="0" tIns="0" rIns="0" bIns="0" rtlCol="0" anchor="ctr"/>
           <a:lstStyle/>
           <a:p>
-            <a:pPr marL="0" indent="0">
+            <a:pPr indent="0" marL="0">
               <a:lnSpc>
                 <a:spcPct val="112000"/>
               </a:lnSpc>
@@ -13744,7 +14276,7 @@
           </a:prstGeom>
           <a:extLst>
             <a:ext uri="{C572A759-6A51-4108-AA02-DFA0A04FC94B}">
-              <ma14:wrappingTextBoxFlag xmlns="" xmlns:ma14="http://schemas.microsoft.com/office/mac/drawingml/2011/main" val="0"/>
+              <ma14:wrappingTextBoxFlag xmlns:ma14="http://schemas.microsoft.com/office/mac/drawingml/2011/main" val="0"/>
             </a:ext>
           </a:extLst>
         </p:spPr>
@@ -13765,7 +14297,7 @@
           <a:p>
             <a:pPr algn="l"/>
             <a:fld id="{F7021451-1387-4CA6-816F-3879F97B5CBC}" type="slidenum">
-              <a:rPr lang="en-US" b="0"/>
+              <a:rPr b="0" lang="en-US"/>
               <a:t>22</a:t>
             </a:fld>
             <a:endParaRPr lang="en-US"/>
@@ -13840,7 +14372,7 @@
           <a:bodyPr wrap="square" lIns="0" tIns="0" rIns="0" bIns="0" rtlCol="0" anchor="ctr"/>
           <a:lstStyle/>
           <a:p>
-            <a:pPr marL="0" indent="0">
+            <a:pPr indent="0" marL="0">
               <a:buNone/>
             </a:pPr>
             <a:r>
@@ -13906,11 +14438,11 @@
           <a:bodyPr wrap="square" lIns="0" tIns="0" rIns="0" bIns="0" rtlCol="0" anchor="ctr"/>
           <a:lstStyle/>
           <a:p>
-            <a:pPr marL="0" indent="0" algn="ctr">
-              <a:buNone/>
-            </a:pPr>
-            <a:r>
-              <a:rPr lang="en-US" sz="900" b="1" kern="0" spc="100" dirty="0">
+            <a:pPr algn="ctr" indent="0" marL="0">
+              <a:buNone/>
+            </a:pPr>
+            <a:r>
+              <a:rPr lang="en-US" sz="900" b="1" spc="100" kern="0" dirty="0">
                 <a:solidFill>
                   <a:srgbClr val="1A4FBF"/>
                 </a:solidFill>
@@ -13926,14 +14458,14 @@
       </p:sp>
       <p:pic>
         <p:nvPicPr>
-          <p:cNvPr id="6" name="Image 0" descr="preencoded.png"/>
+          <p:cNvPr id="6" name="Image 0" descr="preencoded.png">    </p:cNvPr>
           <p:cNvPicPr>
             <a:picLocks noChangeAspect="1"/>
           </p:cNvPicPr>
           <p:nvPr/>
         </p:nvPicPr>
         <p:blipFill>
-          <a:blip r:embed="rId3"/>
+          <a:blip r:embed="rId1"/>
           <a:stretch>
             <a:fillRect/>
           </a:stretch>
@@ -14063,7 +14595,7 @@
           <a:bodyPr wrap="square" lIns="0" tIns="0" rIns="0" bIns="0" rtlCol="0" anchor="ctr"/>
           <a:lstStyle/>
           <a:p>
-            <a:pPr marL="0" indent="0">
+            <a:pPr indent="0" marL="0">
               <a:buNone/>
             </a:pPr>
             <a:r>
@@ -14169,7 +14701,7 @@
           <a:bodyPr wrap="square" lIns="0" tIns="0" rIns="0" bIns="0" rtlCol="0" anchor="ctr"/>
           <a:lstStyle/>
           <a:p>
-            <a:pPr marL="0" indent="0">
+            <a:pPr indent="0" marL="0">
               <a:buNone/>
             </a:pPr>
             <a:r>
@@ -14275,7 +14807,7 @@
           <a:bodyPr wrap="square" lIns="0" tIns="0" rIns="0" bIns="0" rtlCol="0" anchor="ctr"/>
           <a:lstStyle/>
           <a:p>
-            <a:pPr marL="0" indent="0">
+            <a:pPr indent="0" marL="0">
               <a:buNone/>
             </a:pPr>
             <a:r>
@@ -14381,7 +14913,7 @@
           <a:bodyPr wrap="square" lIns="0" tIns="0" rIns="0" bIns="0" rtlCol="0" anchor="ctr"/>
           <a:lstStyle/>
           <a:p>
-            <a:pPr marL="0" indent="0">
+            <a:pPr indent="0" marL="0">
               <a:buNone/>
             </a:pPr>
             <a:r>
@@ -14420,7 +14952,7 @@
           <a:bodyPr wrap="square" lIns="0" tIns="0" rIns="0" bIns="0" rtlCol="0" anchor="ctr"/>
           <a:lstStyle/>
           <a:p>
-            <a:pPr marL="0" indent="0">
+            <a:pPr indent="0" marL="0">
               <a:buNone/>
             </a:pPr>
             <a:r>
@@ -14458,7 +14990,7 @@
           </a:prstGeom>
           <a:extLst>
             <a:ext uri="{C572A759-6A51-4108-AA02-DFA0A04FC94B}">
-              <ma14:wrappingTextBoxFlag xmlns="" xmlns:ma14="http://schemas.microsoft.com/office/mac/drawingml/2011/main" val="0"/>
+              <ma14:wrappingTextBoxFlag xmlns:ma14="http://schemas.microsoft.com/office/mac/drawingml/2011/main" val="0"/>
             </a:ext>
           </a:extLst>
         </p:spPr>
@@ -14479,7 +15011,7 @@
           <a:p>
             <a:pPr algn="l"/>
             <a:fld id="{F7021451-1387-4CA6-816F-3879F97B5CBC}" type="slidenum">
-              <a:rPr lang="en-US" b="0"/>
+              <a:rPr b="0" lang="en-US"/>
               <a:t>23</a:t>
             </a:fld>
             <a:endParaRPr lang="en-US"/>
@@ -14554,7 +15086,7 @@
           <a:bodyPr wrap="square" lIns="0" tIns="0" rIns="0" bIns="0" rtlCol="0" anchor="ctr"/>
           <a:lstStyle/>
           <a:p>
-            <a:pPr marL="0" indent="0">
+            <a:pPr indent="0" marL="0">
               <a:buNone/>
             </a:pPr>
             <a:r>
@@ -14620,11 +15152,11 @@
           <a:bodyPr wrap="square" lIns="0" tIns="0" rIns="0" bIns="0" rtlCol="0" anchor="ctr"/>
           <a:lstStyle/>
           <a:p>
-            <a:pPr marL="0" indent="0" algn="ctr">
-              <a:buNone/>
-            </a:pPr>
-            <a:r>
-              <a:rPr lang="en-US" sz="900" b="1" kern="0" spc="100" dirty="0">
+            <a:pPr algn="ctr" indent="0" marL="0">
+              <a:buNone/>
+            </a:pPr>
+            <a:r>
+              <a:rPr lang="en-US" sz="900" b="1" spc="100" kern="0" dirty="0">
                 <a:solidFill>
                   <a:srgbClr val="1A4FBF"/>
                 </a:solidFill>
@@ -14640,14 +15172,14 @@
       </p:sp>
       <p:pic>
         <p:nvPicPr>
-          <p:cNvPr id="6" name="Image 0" descr="preencoded.png"/>
+          <p:cNvPr id="6" name="Image 0" descr="preencoded.png">    </p:cNvPr>
           <p:cNvPicPr>
             <a:picLocks noChangeAspect="1"/>
           </p:cNvPicPr>
           <p:nvPr/>
         </p:nvPicPr>
         <p:blipFill>
-          <a:blip r:embed="rId3"/>
+          <a:blip r:embed="rId1"/>
           <a:stretch>
             <a:fillRect/>
           </a:stretch>
@@ -14775,7 +15307,7 @@
           <a:bodyPr wrap="square" lIns="0" tIns="0" rIns="0" bIns="0" rtlCol="0" anchor="ctr"/>
           <a:lstStyle/>
           <a:p>
-            <a:pPr marL="0" indent="0">
+            <a:pPr indent="0" marL="0">
               <a:buNone/>
             </a:pPr>
             <a:r>
@@ -14789,6 +15321,9 @@
               </a:rPr>
               <a:t>Нуль замість null у cost_usd   </a:t>
             </a:r>
+            <a:pPr indent="0" marL="0">
+              <a:buNone/>
+            </a:pPr>
             <a:r>
               <a:rPr lang="en-US" sz="1200" dirty="0">
                 <a:solidFill>
@@ -14917,7 +15452,7 @@
           <a:bodyPr wrap="square" lIns="0" tIns="0" rIns="0" bIns="0" rtlCol="0" anchor="ctr"/>
           <a:lstStyle/>
           <a:p>
-            <a:pPr marL="0" indent="0">
+            <a:pPr indent="0" marL="0">
               <a:buNone/>
             </a:pPr>
             <a:r>
@@ -14931,6 +15466,9 @@
               </a:rPr>
               <a:t>AVG по рядках лога   </a:t>
             </a:r>
+            <a:pPr indent="0" marL="0">
+              <a:buNone/>
+            </a:pPr>
             <a:r>
               <a:rPr lang="en-US" sz="1200" dirty="0">
                 <a:solidFill>
@@ -15059,7 +15597,7 @@
           <a:bodyPr wrap="square" lIns="0" tIns="0" rIns="0" bIns="0" rtlCol="0" anchor="ctr"/>
           <a:lstStyle/>
           <a:p>
-            <a:pPr marL="0" indent="0">
+            <a:pPr indent="0" marL="0">
               <a:buNone/>
             </a:pPr>
             <a:r>
@@ -15073,6 +15611,9 @@
               </a:rPr>
               <a:t>Прайс у голові або в вікі   </a:t>
             </a:r>
+            <a:pPr indent="0" marL="0">
+              <a:buNone/>
+            </a:pPr>
             <a:r>
               <a:rPr lang="en-US" sz="1200" dirty="0">
                 <a:solidFill>
@@ -15201,7 +15742,7 @@
           <a:bodyPr wrap="square" lIns="0" tIns="0" rIns="0" bIns="0" rtlCol="0" anchor="ctr"/>
           <a:lstStyle/>
           <a:p>
-            <a:pPr marL="0" indent="0">
+            <a:pPr indent="0" marL="0">
               <a:buNone/>
             </a:pPr>
             <a:r>
@@ -15215,6 +15756,9 @@
               </a:rPr>
               <a:t>Сума без атрибуції   </a:t>
             </a:r>
+            <a:pPr indent="0" marL="0">
+              <a:buNone/>
+            </a:pPr>
             <a:r>
               <a:rPr lang="en-US" sz="1200" dirty="0">
                 <a:solidFill>
@@ -15232,7 +15776,7 @@
       </p:sp>
       <p:sp>
         <p:nvSpPr>
-          <p:cNvPr id="27" name="Slide Number Placeholder 0"/>
+          <p:cNvPr id="25" name="Slide Number Placeholder 0"/>
           <p:cNvSpPr>
             <a:spLocks noGrp="1"/>
           </p:cNvSpPr>
@@ -15250,7 +15794,7 @@
           </a:prstGeom>
           <a:extLst>
             <a:ext uri="{C572A759-6A51-4108-AA02-DFA0A04FC94B}">
-              <ma14:wrappingTextBoxFlag xmlns="" xmlns:ma14="http://schemas.microsoft.com/office/mac/drawingml/2011/main" val="0"/>
+              <ma14:wrappingTextBoxFlag xmlns:ma14="http://schemas.microsoft.com/office/mac/drawingml/2011/main" val="0"/>
             </a:ext>
           </a:extLst>
         </p:spPr>
@@ -15271,7 +15815,7 @@
           <a:p>
             <a:pPr algn="l"/>
             <a:fld id="{F7021451-1387-4CA6-816F-3879F97B5CBC}" type="slidenum">
-              <a:rPr lang="en-US" b="0"/>
+              <a:rPr b="0" lang="en-US"/>
               <a:t>24</a:t>
             </a:fld>
             <a:endParaRPr lang="en-US"/>
@@ -15346,7 +15890,7 @@
           <a:bodyPr wrap="square" lIns="0" tIns="0" rIns="0" bIns="0" rtlCol="0" anchor="ctr"/>
           <a:lstStyle/>
           <a:p>
-            <a:pPr marL="0" indent="0">
+            <a:pPr indent="0" marL="0">
               <a:buNone/>
             </a:pPr>
             <a:r>
@@ -15407,11 +15951,11 @@
           <a:bodyPr wrap="square" lIns="0" tIns="0" rIns="0" bIns="0" rtlCol="0" anchor="ctr"/>
           <a:lstStyle/>
           <a:p>
-            <a:pPr marL="0" indent="0" algn="ctr">
-              <a:buNone/>
-            </a:pPr>
-            <a:r>
-              <a:rPr lang="en-US" sz="900" b="1" kern="0" spc="100" dirty="0">
+            <a:pPr algn="ctr" indent="0" marL="0">
+              <a:buNone/>
+            </a:pPr>
+            <a:r>
+              <a:rPr lang="en-US" sz="900" b="1" spc="100" kern="0" dirty="0">
                 <a:solidFill>
                   <a:srgbClr val="FFFFFF"/>
                 </a:solidFill>
@@ -15427,14 +15971,14 @@
       </p:sp>
       <p:pic>
         <p:nvPicPr>
-          <p:cNvPr id="6" name="Image 0" descr="preencoded.png"/>
+          <p:cNvPr id="6" name="Image 0" descr="preencoded.png">    </p:cNvPr>
           <p:cNvPicPr>
             <a:picLocks noChangeAspect="1"/>
           </p:cNvPicPr>
           <p:nvPr/>
         </p:nvPicPr>
         <p:blipFill>
-          <a:blip r:embed="rId3"/>
+          <a:blip r:embed="rId1"/>
           <a:stretch>
             <a:fillRect/>
           </a:stretch>
@@ -15497,7 +16041,7 @@
           <a:bodyPr wrap="square" lIns="0" tIns="0" rIns="0" bIns="0" rtlCol="0" anchor="ctr"/>
           <a:lstStyle/>
           <a:p>
-            <a:pPr marL="0" indent="0">
+            <a:pPr indent="0" marL="0">
               <a:buNone/>
             </a:pPr>
             <a:r>
@@ -15536,7 +16080,7 @@
           <a:bodyPr wrap="square" lIns="0" tIns="0" rIns="0" bIns="0" rtlCol="0" anchor="ctr"/>
           <a:lstStyle/>
           <a:p>
-            <a:pPr marL="0" indent="0">
+            <a:pPr indent="0" marL="0">
               <a:buNone/>
             </a:pPr>
             <a:r>
@@ -15575,11 +16119,11 @@
           <a:bodyPr wrap="square" lIns="0" tIns="0" rIns="0" bIns="0" rtlCol="0" anchor="ctr"/>
           <a:lstStyle/>
           <a:p>
-            <a:pPr marL="0" indent="0">
-              <a:buNone/>
-            </a:pPr>
-            <a:r>
-              <a:rPr lang="en-US" sz="950" b="1" kern="0" spc="100" dirty="0">
+            <a:pPr indent="0" marL="0">
+              <a:buNone/>
+            </a:pPr>
+            <a:r>
+              <a:rPr lang="en-US" sz="950" b="1" spc="100" kern="0" dirty="0">
                 <a:solidFill>
                   <a:srgbClr val="6B6B6B"/>
                 </a:solidFill>
@@ -15614,7 +16158,7 @@
           <a:bodyPr wrap="square" lIns="0" tIns="0" rIns="0" bIns="0" rtlCol="0" anchor="ctr"/>
           <a:lstStyle/>
           <a:p>
-            <a:pPr marL="0" indent="0">
+            <a:pPr indent="0" marL="0">
               <a:buNone/>
             </a:pPr>
             <a:r>
@@ -15628,6 +16172,9 @@
               </a:rPr>
               <a:t>•  </a:t>
             </a:r>
+            <a:pPr indent="0" marL="0">
+              <a:buNone/>
+            </a:pPr>
             <a:r>
               <a:rPr lang="en-US" sz="1250" dirty="0">
                 <a:solidFill>
@@ -15664,7 +16211,7 @@
           <a:bodyPr wrap="square" lIns="0" tIns="0" rIns="0" bIns="0" rtlCol="0" anchor="ctr"/>
           <a:lstStyle/>
           <a:p>
-            <a:pPr marL="0" indent="0">
+            <a:pPr indent="0" marL="0">
               <a:buNone/>
             </a:pPr>
             <a:r>
@@ -15678,6 +16225,9 @@
               </a:rPr>
               <a:t>•  </a:t>
             </a:r>
+            <a:pPr indent="0" marL="0">
+              <a:buNone/>
+            </a:pPr>
             <a:r>
               <a:rPr lang="en-US" sz="1250" dirty="0">
                 <a:solidFill>
@@ -15714,7 +16264,7 @@
           <a:bodyPr wrap="square" lIns="0" tIns="0" rIns="0" bIns="0" rtlCol="0" anchor="ctr"/>
           <a:lstStyle/>
           <a:p>
-            <a:pPr marL="0" indent="0">
+            <a:pPr indent="0" marL="0">
               <a:buNone/>
             </a:pPr>
             <a:r>
@@ -15728,6 +16278,9 @@
               </a:rPr>
               <a:t>•  </a:t>
             </a:r>
+            <a:pPr indent="0" marL="0">
+              <a:buNone/>
+            </a:pPr>
             <a:r>
               <a:rPr lang="en-US" sz="1250" dirty="0">
                 <a:solidFill>
@@ -15786,7 +16339,7 @@
           <a:bodyPr wrap="square" lIns="0" tIns="0" rIns="0" bIns="0" rtlCol="0" anchor="ctr"/>
           <a:lstStyle/>
           <a:p>
-            <a:pPr marL="0" indent="0">
+            <a:pPr indent="0" marL="0">
               <a:buNone/>
             </a:pPr>
             <a:r>
@@ -15825,7 +16378,7 @@
           <a:bodyPr wrap="square" lIns="0" tIns="0" rIns="0" bIns="0" rtlCol="0" anchor="t"/>
           <a:lstStyle/>
           <a:p>
-            <a:pPr marL="0" indent="0">
+            <a:pPr indent="0" marL="0">
               <a:lnSpc>
                 <a:spcPct val="108000"/>
               </a:lnSpc>
@@ -15845,7 +16398,7 @@
             <a:endParaRPr lang="en-US" sz="1200" dirty="0"/>
           </a:p>
           <a:p>
-            <a:pPr marL="0" indent="0">
+            <a:pPr indent="0" marL="0">
               <a:lnSpc>
                 <a:spcPct val="108000"/>
               </a:lnSpc>
@@ -15886,7 +16439,7 @@
           </a:prstGeom>
           <a:extLst>
             <a:ext uri="{C572A759-6A51-4108-AA02-DFA0A04FC94B}">
-              <ma14:wrappingTextBoxFlag xmlns="" xmlns:ma14="http://schemas.microsoft.com/office/mac/drawingml/2011/main" val="0"/>
+              <ma14:wrappingTextBoxFlag xmlns:ma14="http://schemas.microsoft.com/office/mac/drawingml/2011/main" val="0"/>
             </a:ext>
           </a:extLst>
         </p:spPr>
@@ -15907,7 +16460,7 @@
           <a:p>
             <a:pPr algn="l"/>
             <a:fld id="{F7021451-1387-4CA6-816F-3879F97B5CBC}" type="slidenum">
-              <a:rPr lang="en-US" b="0"/>
+              <a:rPr b="0" lang="en-US"/>
               <a:t>25</a:t>
             </a:fld>
             <a:endParaRPr lang="en-US"/>
@@ -15960,11 +16513,11 @@
           <a:bodyPr wrap="square" lIns="0" tIns="0" rIns="0" bIns="0" rtlCol="0" anchor="ctr"/>
           <a:lstStyle/>
           <a:p>
-            <a:pPr marL="0" indent="0">
-              <a:buNone/>
-            </a:pPr>
-            <a:r>
-              <a:rPr lang="en-US" sz="1200" b="1" kern="0" spc="400" dirty="0">
+            <a:pPr indent="0" marL="0">
+              <a:buNone/>
+            </a:pPr>
+            <a:r>
+              <a:rPr lang="en-US" sz="1200" b="1" spc="400" kern="0" dirty="0">
                 <a:solidFill>
                   <a:srgbClr val="FFFFFF"/>
                 </a:solidFill>
@@ -15999,11 +16552,11 @@
           <a:bodyPr wrap="square" lIns="0" tIns="0" rIns="0" bIns="0" rtlCol="0" anchor="ctr"/>
           <a:lstStyle/>
           <a:p>
-            <a:pPr marL="0" indent="0">
-              <a:buNone/>
-            </a:pPr>
-            <a:r>
-              <a:rPr lang="en-US" sz="1100" b="1" kern="0" spc="300" dirty="0">
+            <a:pPr indent="0" marL="0">
+              <a:buNone/>
+            </a:pPr>
+            <a:r>
+              <a:rPr lang="en-US" sz="1100" b="1" spc="300" kern="0" dirty="0">
                 <a:solidFill>
                   <a:srgbClr val="C4B3F5"/>
                 </a:solidFill>
@@ -16058,7 +16611,7 @@
           <a:bodyPr wrap="square" lIns="0" tIns="0" rIns="0" bIns="0" rtlCol="0" anchor="t"/>
           <a:lstStyle/>
           <a:p>
-            <a:pPr marL="0" indent="0">
+            <a:pPr indent="0" marL="0">
               <a:lnSpc>
                 <a:spcPct val="110000"/>
               </a:lnSpc>
@@ -16120,7 +16673,7 @@
           <a:bodyPr wrap="square" lIns="0" tIns="0" rIns="0" bIns="0" rtlCol="0" anchor="t"/>
           <a:lstStyle/>
           <a:p>
-            <a:pPr marL="0" indent="0">
+            <a:pPr indent="0" marL="0">
               <a:lnSpc>
                 <a:spcPct val="110000"/>
               </a:lnSpc>
@@ -16182,7 +16735,7 @@
           <a:bodyPr wrap="square" lIns="0" tIns="0" rIns="0" bIns="0" rtlCol="0" anchor="t"/>
           <a:lstStyle/>
           <a:p>
-            <a:pPr marL="0" indent="0">
+            <a:pPr indent="0" marL="0">
               <a:lnSpc>
                 <a:spcPct val="110000"/>
               </a:lnSpc>
@@ -16244,7 +16797,7 @@
           <a:bodyPr wrap="square" lIns="0" tIns="0" rIns="0" bIns="0" rtlCol="0" anchor="t"/>
           <a:lstStyle/>
           <a:p>
-            <a:pPr marL="0" indent="0">
+            <a:pPr indent="0" marL="0">
               <a:lnSpc>
                 <a:spcPct val="110000"/>
               </a:lnSpc>
@@ -16306,7 +16859,7 @@
           <a:bodyPr wrap="square" lIns="0" tIns="0" rIns="0" bIns="0" rtlCol="0" anchor="t"/>
           <a:lstStyle/>
           <a:p>
-            <a:pPr marL="0" indent="0">
+            <a:pPr indent="0" marL="0">
               <a:lnSpc>
                 <a:spcPct val="110000"/>
               </a:lnSpc>
@@ -16375,7 +16928,7 @@
           <a:bodyPr wrap="square" lIns="0" tIns="0" rIns="0" bIns="0" rtlCol="0" anchor="ctr"/>
           <a:lstStyle/>
           <a:p>
-            <a:pPr marL="0" indent="0">
+            <a:pPr indent="0" marL="0">
               <a:buNone/>
             </a:pPr>
             <a:r>
@@ -16414,7 +16967,7 @@
           <a:bodyPr wrap="square" lIns="0" tIns="0" rIns="0" bIns="0" rtlCol="0" anchor="t"/>
           <a:lstStyle/>
           <a:p>
-            <a:pPr marL="0" indent="0">
+            <a:pPr indent="0" marL="0">
               <a:lnSpc>
                 <a:spcPct val="115000"/>
               </a:lnSpc>
@@ -16481,11 +17034,11 @@
           <a:bodyPr wrap="square" lIns="0" tIns="0" rIns="0" bIns="0" rtlCol="0" anchor="ctr"/>
           <a:lstStyle/>
           <a:p>
-            <a:pPr marL="0" indent="0">
-              <a:buNone/>
-            </a:pPr>
-            <a:r>
-              <a:rPr lang="en-US" sz="1200" b="1" kern="0" spc="400" dirty="0">
+            <a:pPr indent="0" marL="0">
+              <a:buNone/>
+            </a:pPr>
+            <a:r>
+              <a:rPr lang="en-US" sz="1200" b="1" spc="400" kern="0" dirty="0">
                 <a:solidFill>
                   <a:srgbClr val="FFFFFF"/>
                 </a:solidFill>
@@ -16520,7 +17073,7 @@
           <a:bodyPr wrap="square" lIns="0" tIns="0" rIns="0" bIns="0" rtlCol="0" anchor="ctr"/>
           <a:lstStyle/>
           <a:p>
-            <a:pPr marL="0" indent="0">
+            <a:pPr indent="0" marL="0">
               <a:buNone/>
             </a:pPr>
             <a:r>
@@ -16606,7 +17159,7 @@
           <a:bodyPr wrap="square" lIns="0" tIns="0" rIns="0" bIns="0" rtlCol="0" anchor="ctr"/>
           <a:lstStyle/>
           <a:p>
-            <a:pPr marL="0" indent="0">
+            <a:pPr indent="0" marL="0">
               <a:buNone/>
             </a:pPr>
             <a:r>
@@ -16672,11 +17225,11 @@
           <a:bodyPr wrap="square" lIns="0" tIns="0" rIns="0" bIns="0" rtlCol="0" anchor="ctr"/>
           <a:lstStyle/>
           <a:p>
-            <a:pPr marL="0" indent="0" algn="ctr">
-              <a:buNone/>
-            </a:pPr>
-            <a:r>
-              <a:rPr lang="en-US" sz="900" b="1" kern="0" spc="100" dirty="0">
+            <a:pPr algn="ctr" indent="0" marL="0">
+              <a:buNone/>
+            </a:pPr>
+            <a:r>
+              <a:rPr lang="en-US" sz="900" b="1" spc="100" kern="0" dirty="0">
                 <a:solidFill>
                   <a:srgbClr val="5A05F4"/>
                 </a:solidFill>
@@ -16692,14 +17245,14 @@
       </p:sp>
       <p:pic>
         <p:nvPicPr>
-          <p:cNvPr id="6" name="Image 0" descr="preencoded.png"/>
+          <p:cNvPr id="6" name="Image 0" descr="preencoded.png">    </p:cNvPr>
           <p:cNvPicPr>
             <a:picLocks noChangeAspect="1"/>
           </p:cNvPicPr>
           <p:nvPr/>
         </p:nvPicPr>
         <p:blipFill>
-          <a:blip r:embed="rId3"/>
+          <a:blip r:embed="rId1"/>
           <a:stretch>
             <a:fillRect/>
           </a:stretch>
@@ -16777,7 +17330,7 @@
           <a:bodyPr wrap="square" lIns="0" tIns="0" rIns="0" bIns="0" rtlCol="0" anchor="ctr"/>
           <a:lstStyle/>
           <a:p>
-            <a:pPr marL="0" indent="0" algn="ctr">
+            <a:pPr algn="ctr" indent="0" marL="0">
               <a:buNone/>
             </a:pPr>
             <a:r>
@@ -16816,7 +17369,7 @@
           <a:bodyPr wrap="square" lIns="0" tIns="0" rIns="0" bIns="0" rtlCol="0" anchor="ctr"/>
           <a:lstStyle/>
           <a:p>
-            <a:pPr marL="0" indent="0">
+            <a:pPr indent="0" marL="0">
               <a:buNone/>
             </a:pPr>
             <a:r>
@@ -16897,7 +17450,7 @@
           <a:bodyPr wrap="square" lIns="0" tIns="0" rIns="0" bIns="0" rtlCol="0" anchor="ctr"/>
           <a:lstStyle/>
           <a:p>
-            <a:pPr marL="0" indent="0" algn="ctr">
+            <a:pPr algn="ctr" indent="0" marL="0">
               <a:buNone/>
             </a:pPr>
             <a:r>
@@ -16936,7 +17489,7 @@
           <a:bodyPr wrap="square" lIns="0" tIns="0" rIns="0" bIns="0" rtlCol="0" anchor="ctr"/>
           <a:lstStyle/>
           <a:p>
-            <a:pPr marL="0" indent="0">
+            <a:pPr indent="0" marL="0">
               <a:buNone/>
             </a:pPr>
             <a:r>
@@ -17017,7 +17570,7 @@
           <a:bodyPr wrap="square" lIns="0" tIns="0" rIns="0" bIns="0" rtlCol="0" anchor="ctr"/>
           <a:lstStyle/>
           <a:p>
-            <a:pPr marL="0" indent="0" algn="ctr">
+            <a:pPr algn="ctr" indent="0" marL="0">
               <a:buNone/>
             </a:pPr>
             <a:r>
@@ -17056,7 +17609,7 @@
           <a:bodyPr wrap="square" lIns="0" tIns="0" rIns="0" bIns="0" rtlCol="0" anchor="ctr"/>
           <a:lstStyle/>
           <a:p>
-            <a:pPr marL="0" indent="0">
+            <a:pPr indent="0" marL="0">
               <a:buNone/>
             </a:pPr>
             <a:r>
@@ -17137,7 +17690,7 @@
           <a:bodyPr wrap="square" lIns="0" tIns="0" rIns="0" bIns="0" rtlCol="0" anchor="ctr"/>
           <a:lstStyle/>
           <a:p>
-            <a:pPr marL="0" indent="0" algn="ctr">
+            <a:pPr algn="ctr" indent="0" marL="0">
               <a:buNone/>
             </a:pPr>
             <a:r>
@@ -17176,7 +17729,7 @@
           <a:bodyPr wrap="square" lIns="0" tIns="0" rIns="0" bIns="0" rtlCol="0" anchor="ctr"/>
           <a:lstStyle/>
           <a:p>
-            <a:pPr marL="0" indent="0">
+            <a:pPr indent="0" marL="0">
               <a:buNone/>
             </a:pPr>
             <a:r>
@@ -17257,7 +17810,7 @@
           <a:bodyPr wrap="square" lIns="0" tIns="0" rIns="0" bIns="0" rtlCol="0" anchor="ctr"/>
           <a:lstStyle/>
           <a:p>
-            <a:pPr marL="0" indent="0" algn="ctr">
+            <a:pPr algn="ctr" indent="0" marL="0">
               <a:buNone/>
             </a:pPr>
             <a:r>
@@ -17296,7 +17849,7 @@
           <a:bodyPr wrap="square" lIns="0" tIns="0" rIns="0" bIns="0" rtlCol="0" anchor="ctr"/>
           <a:lstStyle/>
           <a:p>
-            <a:pPr marL="0" indent="0">
+            <a:pPr indent="0" marL="0">
               <a:buNone/>
             </a:pPr>
             <a:r>
@@ -17377,7 +17930,7 @@
           <a:bodyPr wrap="square" lIns="0" tIns="0" rIns="0" bIns="0" rtlCol="0" anchor="ctr"/>
           <a:lstStyle/>
           <a:p>
-            <a:pPr marL="0" indent="0" algn="ctr">
+            <a:pPr algn="ctr" indent="0" marL="0">
               <a:buNone/>
             </a:pPr>
             <a:r>
@@ -17416,7 +17969,7 @@
           <a:bodyPr wrap="square" lIns="0" tIns="0" rIns="0" bIns="0" rtlCol="0" anchor="ctr"/>
           <a:lstStyle/>
           <a:p>
-            <a:pPr marL="0" indent="0">
+            <a:pPr indent="0" marL="0">
               <a:buNone/>
             </a:pPr>
             <a:r>
@@ -17497,7 +18050,7 @@
           <a:bodyPr wrap="square" lIns="0" tIns="0" rIns="0" bIns="0" rtlCol="0" anchor="ctr"/>
           <a:lstStyle/>
           <a:p>
-            <a:pPr marL="0" indent="0" algn="ctr">
+            <a:pPr algn="ctr" indent="0" marL="0">
               <a:buNone/>
             </a:pPr>
             <a:r>
@@ -17536,7 +18089,7 @@
           <a:bodyPr wrap="square" lIns="0" tIns="0" rIns="0" bIns="0" rtlCol="0" anchor="ctr"/>
           <a:lstStyle/>
           <a:p>
-            <a:pPr marL="0" indent="0">
+            <a:pPr indent="0" marL="0">
               <a:buNone/>
             </a:pPr>
             <a:r>
@@ -17617,7 +18170,7 @@
           <a:bodyPr wrap="square" lIns="0" tIns="0" rIns="0" bIns="0" rtlCol="0" anchor="ctr"/>
           <a:lstStyle/>
           <a:p>
-            <a:pPr marL="0" indent="0" algn="ctr">
+            <a:pPr algn="ctr" indent="0" marL="0">
               <a:buNone/>
             </a:pPr>
             <a:r>
@@ -17656,7 +18209,7 @@
           <a:bodyPr wrap="square" lIns="0" tIns="0" rIns="0" bIns="0" rtlCol="0" anchor="ctr"/>
           <a:lstStyle/>
           <a:p>
-            <a:pPr marL="0" indent="0">
+            <a:pPr indent="0" marL="0">
               <a:buNone/>
             </a:pPr>
             <a:r>
@@ -17737,7 +18290,7 @@
           <a:bodyPr wrap="square" lIns="0" tIns="0" rIns="0" bIns="0" rtlCol="0" anchor="ctr"/>
           <a:lstStyle/>
           <a:p>
-            <a:pPr marL="0" indent="0" algn="ctr">
+            <a:pPr algn="ctr" indent="0" marL="0">
               <a:buNone/>
             </a:pPr>
             <a:r>
@@ -17776,7 +18329,7 @@
           <a:bodyPr wrap="square" lIns="0" tIns="0" rIns="0" bIns="0" rtlCol="0" anchor="ctr"/>
           <a:lstStyle/>
           <a:p>
-            <a:pPr marL="0" indent="0">
+            <a:pPr indent="0" marL="0">
               <a:buNone/>
             </a:pPr>
             <a:r>
@@ -17857,7 +18410,7 @@
           <a:bodyPr wrap="square" lIns="0" tIns="0" rIns="0" bIns="0" rtlCol="0" anchor="ctr"/>
           <a:lstStyle/>
           <a:p>
-            <a:pPr marL="0" indent="0" algn="ctr">
+            <a:pPr algn="ctr" indent="0" marL="0">
               <a:buNone/>
             </a:pPr>
             <a:r>
@@ -17896,7 +18449,7 @@
           <a:bodyPr wrap="square" lIns="0" tIns="0" rIns="0" bIns="0" rtlCol="0" anchor="ctr"/>
           <a:lstStyle/>
           <a:p>
-            <a:pPr marL="0" indent="0">
+            <a:pPr indent="0" marL="0">
               <a:buNone/>
             </a:pPr>
             <a:r>
@@ -17977,7 +18530,7 @@
           <a:bodyPr wrap="square" lIns="0" tIns="0" rIns="0" bIns="0" rtlCol="0" anchor="ctr"/>
           <a:lstStyle/>
           <a:p>
-            <a:pPr marL="0" indent="0" algn="ctr">
+            <a:pPr algn="ctr" indent="0" marL="0">
               <a:buNone/>
             </a:pPr>
             <a:r>
@@ -18016,7 +18569,7 @@
           <a:bodyPr wrap="square" lIns="0" tIns="0" rIns="0" bIns="0" rtlCol="0" anchor="ctr"/>
           <a:lstStyle/>
           <a:p>
-            <a:pPr marL="0" indent="0">
+            <a:pPr indent="0" marL="0">
               <a:buNone/>
             </a:pPr>
             <a:r>
@@ -18043,7 +18596,7 @@
         <p:spPr>
           <a:xfrm>
             <a:off x="566928" y="5779008"/>
-            <a:ext cx="10927080" cy="402336"/>
+            <a:ext cx="11064240" cy="402336"/>
           </a:xfrm>
           <a:prstGeom prst="roundRect">
             <a:avLst>
@@ -18082,7 +18635,7 @@
           <a:bodyPr wrap="square" lIns="0" tIns="0" rIns="0" bIns="0" rtlCol="0" anchor="ctr"/>
           <a:lstStyle/>
           <a:p>
-            <a:pPr marL="0" indent="0">
+            <a:pPr indent="0" marL="0">
               <a:lnSpc>
                 <a:spcPct val="112000"/>
               </a:lnSpc>
@@ -18105,7 +18658,7 @@
       </p:sp>
       <p:sp>
         <p:nvSpPr>
-          <p:cNvPr id="53" name="Slide Number Placeholder 0"/>
+          <p:cNvPr id="25" name="Slide Number Placeholder 0"/>
           <p:cNvSpPr>
             <a:spLocks noGrp="1"/>
           </p:cNvSpPr>
@@ -18123,7 +18676,7 @@
           </a:prstGeom>
           <a:extLst>
             <a:ext uri="{C572A759-6A51-4108-AA02-DFA0A04FC94B}">
-              <ma14:wrappingTextBoxFlag xmlns="" xmlns:ma14="http://schemas.microsoft.com/office/mac/drawingml/2011/main" val="0"/>
+              <ma14:wrappingTextBoxFlag xmlns:ma14="http://schemas.microsoft.com/office/mac/drawingml/2011/main" val="0"/>
             </a:ext>
           </a:extLst>
         </p:spPr>
@@ -18144,7 +18697,7 @@
           <a:p>
             <a:pPr algn="l"/>
             <a:fld id="{F7021451-1387-4CA6-816F-3879F97B5CBC}" type="slidenum">
-              <a:rPr lang="en-US" b="0"/>
+              <a:rPr b="0" lang="en-US"/>
               <a:t>3</a:t>
             </a:fld>
             <a:endParaRPr lang="en-US"/>
@@ -18219,7 +18772,7 @@
           <a:bodyPr wrap="square" lIns="0" tIns="0" rIns="0" bIns="0" rtlCol="0" anchor="ctr"/>
           <a:lstStyle/>
           <a:p>
-            <a:pPr marL="0" indent="0">
+            <a:pPr indent="0" marL="0">
               <a:buNone/>
             </a:pPr>
             <a:r>
@@ -18258,7 +18811,7 @@
           <a:bodyPr wrap="square" lIns="0" tIns="0" rIns="0" bIns="0" rtlCol="0" anchor="t"/>
           <a:lstStyle/>
           <a:p>
-            <a:pPr marL="0" indent="0">
+            <a:pPr indent="0" marL="0">
               <a:lnSpc>
                 <a:spcPct val="100000"/>
               </a:lnSpc>
@@ -18327,11 +18880,11 @@
           <a:bodyPr wrap="square" lIns="0" tIns="0" rIns="0" bIns="0" rtlCol="0" anchor="ctr"/>
           <a:lstStyle/>
           <a:p>
-            <a:pPr marL="0" indent="0" algn="ctr">
-              <a:buNone/>
-            </a:pPr>
-            <a:r>
-              <a:rPr lang="en-US" sz="900" b="1" kern="0" spc="100" dirty="0">
+            <a:pPr algn="ctr" indent="0" marL="0">
+              <a:buNone/>
+            </a:pPr>
+            <a:r>
+              <a:rPr lang="en-US" sz="900" b="1" spc="100" kern="0" dirty="0">
                 <a:solidFill>
                   <a:srgbClr val="5A05F4"/>
                 </a:solidFill>
@@ -18347,14 +18900,14 @@
       </p:sp>
       <p:pic>
         <p:nvPicPr>
-          <p:cNvPr id="7" name="Image 0" descr="preencoded.png"/>
+          <p:cNvPr id="7" name="Image 0" descr="preencoded.png">    </p:cNvPr>
           <p:cNvPicPr>
             <a:picLocks noChangeAspect="1"/>
           </p:cNvPicPr>
           <p:nvPr/>
         </p:nvPicPr>
         <p:blipFill>
-          <a:blip r:embed="rId3"/>
+          <a:blip r:embed="rId1"/>
           <a:stretch>
             <a:fillRect/>
           </a:stretch>
@@ -18417,7 +18970,7 @@
           <a:bodyPr wrap="square" lIns="0" tIns="0" rIns="0" bIns="0" rtlCol="0" anchor="ctr"/>
           <a:lstStyle/>
           <a:p>
-            <a:pPr marL="0" indent="0">
+            <a:pPr indent="0" marL="0">
               <a:buNone/>
             </a:pPr>
             <a:r>
@@ -18456,7 +19009,7 @@
           <a:bodyPr wrap="square" lIns="0" tIns="0" rIns="0" bIns="0" rtlCol="0" anchor="t"/>
           <a:lstStyle/>
           <a:p>
-            <a:pPr marL="0" indent="0">
+            <a:pPr indent="0" marL="0">
               <a:lnSpc>
                 <a:spcPct val="105000"/>
               </a:lnSpc>
@@ -18525,7 +19078,7 @@
           <a:bodyPr wrap="square" lIns="0" tIns="0" rIns="0" bIns="0" rtlCol="0" anchor="ctr"/>
           <a:lstStyle/>
           <a:p>
-            <a:pPr marL="0" indent="0">
+            <a:pPr indent="0" marL="0">
               <a:buNone/>
             </a:pPr>
             <a:r>
@@ -18564,7 +19117,7 @@
           <a:bodyPr wrap="square" lIns="0" tIns="0" rIns="0" bIns="0" rtlCol="0" anchor="t"/>
           <a:lstStyle/>
           <a:p>
-            <a:pPr marL="0" indent="0">
+            <a:pPr indent="0" marL="0">
               <a:lnSpc>
                 <a:spcPct val="105000"/>
               </a:lnSpc>
@@ -18633,7 +19186,7 @@
           <a:bodyPr wrap="square" lIns="0" tIns="0" rIns="0" bIns="0" rtlCol="0" anchor="ctr"/>
           <a:lstStyle/>
           <a:p>
-            <a:pPr marL="0" indent="0">
+            <a:pPr indent="0" marL="0">
               <a:buNone/>
             </a:pPr>
             <a:r>
@@ -18672,7 +19225,7 @@
           <a:bodyPr wrap="square" lIns="0" tIns="0" rIns="0" bIns="0" rtlCol="0" anchor="t"/>
           <a:lstStyle/>
           <a:p>
-            <a:pPr marL="0" indent="0">
+            <a:pPr indent="0" marL="0">
               <a:lnSpc>
                 <a:spcPct val="105000"/>
               </a:lnSpc>
@@ -18741,7 +19294,7 @@
           <a:bodyPr wrap="square" lIns="0" tIns="0" rIns="0" bIns="0" rtlCol="0" anchor="ctr"/>
           <a:lstStyle/>
           <a:p>
-            <a:pPr marL="0" indent="0">
+            <a:pPr indent="0" marL="0">
               <a:buNone/>
             </a:pPr>
             <a:r>
@@ -18780,7 +19333,7 @@
           <a:bodyPr wrap="square" lIns="0" tIns="0" rIns="0" bIns="0" rtlCol="0" anchor="t"/>
           <a:lstStyle/>
           <a:p>
-            <a:pPr marL="0" indent="0">
+            <a:pPr indent="0" marL="0">
               <a:lnSpc>
                 <a:spcPct val="105000"/>
               </a:lnSpc>
@@ -18849,7 +19402,7 @@
           <a:bodyPr wrap="square" lIns="0" tIns="0" rIns="0" bIns="0" rtlCol="0" anchor="ctr"/>
           <a:lstStyle/>
           <a:p>
-            <a:pPr marL="0" indent="0">
+            <a:pPr indent="0" marL="0">
               <a:buNone/>
             </a:pPr>
             <a:r>
@@ -18888,7 +19441,7 @@
           <a:bodyPr wrap="square" lIns="0" tIns="0" rIns="0" bIns="0" rtlCol="0" anchor="t"/>
           <a:lstStyle/>
           <a:p>
-            <a:pPr marL="0" indent="0">
+            <a:pPr indent="0" marL="0">
               <a:lnSpc>
                 <a:spcPct val="105000"/>
               </a:lnSpc>
@@ -18957,7 +19510,7 @@
           <a:bodyPr wrap="square" lIns="0" tIns="0" rIns="0" bIns="0" rtlCol="0" anchor="ctr"/>
           <a:lstStyle/>
           <a:p>
-            <a:pPr marL="0" indent="0">
+            <a:pPr indent="0" marL="0">
               <a:buNone/>
             </a:pPr>
             <a:r>
@@ -18996,7 +19549,7 @@
           <a:bodyPr wrap="square" lIns="0" tIns="0" rIns="0" bIns="0" rtlCol="0" anchor="t"/>
           <a:lstStyle/>
           <a:p>
-            <a:pPr marL="0" indent="0">
+            <a:pPr indent="0" marL="0">
               <a:lnSpc>
                 <a:spcPct val="105000"/>
               </a:lnSpc>
@@ -19065,7 +19618,7 @@
           <a:bodyPr wrap="square" lIns="0" tIns="0" rIns="0" bIns="0" rtlCol="0" anchor="ctr"/>
           <a:lstStyle/>
           <a:p>
-            <a:pPr marL="0" indent="0">
+            <a:pPr indent="0" marL="0">
               <a:lnSpc>
                 <a:spcPct val="112000"/>
               </a:lnSpc>
@@ -19088,7 +19641,7 @@
       </p:sp>
       <p:sp>
         <p:nvSpPr>
-          <p:cNvPr id="28" name="Slide Number Placeholder 0"/>
+          <p:cNvPr id="25" name="Slide Number Placeholder 0"/>
           <p:cNvSpPr>
             <a:spLocks noGrp="1"/>
           </p:cNvSpPr>
@@ -19106,7 +19659,7 @@
           </a:prstGeom>
           <a:extLst>
             <a:ext uri="{C572A759-6A51-4108-AA02-DFA0A04FC94B}">
-              <ma14:wrappingTextBoxFlag xmlns="" xmlns:ma14="http://schemas.microsoft.com/office/mac/drawingml/2011/main" val="0"/>
+              <ma14:wrappingTextBoxFlag xmlns:ma14="http://schemas.microsoft.com/office/mac/drawingml/2011/main" val="0"/>
             </a:ext>
           </a:extLst>
         </p:spPr>
@@ -19127,7 +19680,7 @@
           <a:p>
             <a:pPr algn="l"/>
             <a:fld id="{F7021451-1387-4CA6-816F-3879F97B5CBC}" type="slidenum">
-              <a:rPr lang="en-US" b="0"/>
+              <a:rPr b="0" lang="en-US"/>
               <a:t>4</a:t>
             </a:fld>
             <a:endParaRPr lang="en-US"/>
@@ -19180,11 +19733,11 @@
           <a:bodyPr wrap="square" lIns="0" tIns="0" rIns="0" bIns="0" rtlCol="0" anchor="ctr"/>
           <a:lstStyle/>
           <a:p>
-            <a:pPr marL="0" indent="0">
-              <a:buNone/>
-            </a:pPr>
-            <a:r>
-              <a:rPr lang="en-US" sz="1200" b="1" kern="0" spc="400" dirty="0">
+            <a:pPr indent="0" marL="0">
+              <a:buNone/>
+            </a:pPr>
+            <a:r>
+              <a:rPr lang="en-US" sz="1200" b="1" spc="400" kern="0" dirty="0">
                 <a:solidFill>
                   <a:srgbClr val="FFFFFF"/>
                 </a:solidFill>
@@ -19219,7 +19772,7 @@
           <a:bodyPr wrap="square" lIns="0" tIns="0" rIns="0" bIns="0" rtlCol="0" anchor="ctr"/>
           <a:lstStyle/>
           <a:p>
-            <a:pPr marL="0" indent="0">
+            <a:pPr indent="0" marL="0">
               <a:buNone/>
             </a:pPr>
             <a:r>
@@ -19258,7 +19811,7 @@
           <a:bodyPr wrap="square" lIns="0" tIns="0" rIns="0" bIns="0" rtlCol="0" anchor="t"/>
           <a:lstStyle/>
           <a:p>
-            <a:pPr marL="0" indent="0">
+            <a:pPr indent="0" marL="0">
               <a:buNone/>
             </a:pPr>
             <a:r>
@@ -19344,7 +19897,7 @@
           <a:bodyPr wrap="square" lIns="0" tIns="0" rIns="0" bIns="0" rtlCol="0" anchor="ctr"/>
           <a:lstStyle/>
           <a:p>
-            <a:pPr marL="0" indent="0" algn="l">
+            <a:pPr algn="l" indent="0" marL="0">
               <a:buNone/>
             </a:pPr>
             <a:r>
@@ -19383,7 +19936,7 @@
           <a:bodyPr wrap="square" lIns="0" tIns="0" rIns="0" bIns="0" rtlCol="0" anchor="ctr"/>
           <a:lstStyle/>
           <a:p>
-            <a:pPr marL="0" indent="0">
+            <a:pPr indent="0" marL="0">
               <a:buNone/>
             </a:pPr>
             <a:r>
@@ -19449,11 +20002,11 @@
           <a:bodyPr wrap="square" lIns="0" tIns="0" rIns="0" bIns="0" rtlCol="0" anchor="ctr"/>
           <a:lstStyle/>
           <a:p>
-            <a:pPr marL="0" indent="0" algn="ctr">
-              <a:buNone/>
-            </a:pPr>
-            <a:r>
-              <a:rPr lang="en-US" sz="900" b="1" kern="0" spc="100" dirty="0">
+            <a:pPr algn="ctr" indent="0" marL="0">
+              <a:buNone/>
+            </a:pPr>
+            <a:r>
+              <a:rPr lang="en-US" sz="900" b="1" spc="100" kern="0" dirty="0">
                 <a:solidFill>
                   <a:srgbClr val="5A05F4"/>
                 </a:solidFill>
@@ -19469,14 +20022,14 @@
       </p:sp>
       <p:pic>
         <p:nvPicPr>
-          <p:cNvPr id="7" name="Image 0" descr="preencoded.png"/>
+          <p:cNvPr id="7" name="Image 0" descr="preencoded.png">    </p:cNvPr>
           <p:cNvPicPr>
             <a:picLocks noChangeAspect="1"/>
           </p:cNvPicPr>
           <p:nvPr/>
         </p:nvPicPr>
         <p:blipFill>
-          <a:blip r:embed="rId3"/>
+          <a:blip r:embed="rId1"/>
           <a:stretch>
             <a:fillRect/>
           </a:stretch>
@@ -19534,7 +20087,7 @@
           <a:bodyPr wrap="square" lIns="0" tIns="0" rIns="0" bIns="0" rtlCol="0" anchor="ctr"/>
           <a:lstStyle/>
           <a:p>
-            <a:pPr marL="0" indent="0" algn="ctr">
+            <a:pPr algn="ctr" indent="0" marL="0">
               <a:buNone/>
             </a:pPr>
             <a:r>
@@ -19638,7 +20191,7 @@
           <a:bodyPr wrap="square" lIns="0" tIns="0" rIns="0" bIns="0" rtlCol="0" anchor="ctr"/>
           <a:lstStyle/>
           <a:p>
-            <a:pPr marL="0" indent="0" algn="ctr">
+            <a:pPr algn="ctr" indent="0" marL="0">
               <a:buNone/>
             </a:pPr>
             <a:r>
@@ -19742,7 +20295,7 @@
           <a:bodyPr wrap="square" lIns="0" tIns="0" rIns="0" bIns="0" rtlCol="0" anchor="ctr"/>
           <a:lstStyle/>
           <a:p>
-            <a:pPr marL="0" indent="0" algn="ctr">
+            <a:pPr algn="ctr" indent="0" marL="0">
               <a:buNone/>
             </a:pPr>
             <a:r>
@@ -19846,7 +20399,7 @@
           <a:bodyPr wrap="square" lIns="0" tIns="0" rIns="0" bIns="0" rtlCol="0" anchor="ctr"/>
           <a:lstStyle/>
           <a:p>
-            <a:pPr marL="0" indent="0" algn="ctr">
+            <a:pPr algn="ctr" indent="0" marL="0">
               <a:buNone/>
             </a:pPr>
             <a:r>
@@ -19907,7 +20460,7 @@
           <a:bodyPr wrap="square" lIns="0" tIns="0" rIns="0" bIns="0" rtlCol="0" anchor="ctr"/>
           <a:lstStyle/>
           <a:p>
-            <a:pPr marL="0" indent="0">
+            <a:pPr indent="0" marL="0">
               <a:buNone/>
             </a:pPr>
             <a:r>
@@ -19946,7 +20499,7 @@
           <a:bodyPr wrap="square" lIns="0" tIns="0" rIns="0" bIns="0" rtlCol="0" anchor="t"/>
           <a:lstStyle/>
           <a:p>
-            <a:pPr marL="0" indent="0">
+            <a:pPr indent="0" marL="0">
               <a:lnSpc>
                 <a:spcPct val="108000"/>
               </a:lnSpc>
@@ -20010,7 +20563,7 @@
           <a:bodyPr wrap="square" lIns="0" tIns="0" rIns="0" bIns="0" rtlCol="0" anchor="ctr"/>
           <a:lstStyle/>
           <a:p>
-            <a:pPr marL="0" indent="0">
+            <a:pPr indent="0" marL="0">
               <a:buNone/>
             </a:pPr>
             <a:r>
@@ -20049,7 +20602,7 @@
           <a:bodyPr wrap="square" lIns="0" tIns="0" rIns="0" bIns="0" rtlCol="0" anchor="t"/>
           <a:lstStyle/>
           <a:p>
-            <a:pPr marL="0" indent="0">
+            <a:pPr indent="0" marL="0">
               <a:lnSpc>
                 <a:spcPct val="108000"/>
               </a:lnSpc>
@@ -20099,30 +20652,89 @@
       </p:sp>
       <p:sp>
         <p:nvSpPr>
-          <p:cNvPr id="29" name="Text 26"/>
-          <p:cNvSpPr/>
-          <p:nvPr/>
-        </p:nvSpPr>
-        <p:spPr>
-          <a:xfrm>
-            <a:off x="786384" y="5020056"/>
-            <a:ext cx="10625328" cy="219456"/>
-          </a:xfrm>
-          <a:prstGeom prst="rect">
-            <a:avLst/>
-          </a:prstGeom>
-          <a:noFill/>
-          <a:ln/>
-        </p:spPr>
-        <p:txBody>
-          <a:bodyPr wrap="square" lIns="0" tIns="0" rIns="0" bIns="0" rtlCol="0" anchor="ctr"/>
-          <a:lstStyle/>
-          <a:p>
-            <a:pPr marL="0" indent="0">
-              <a:buNone/>
-            </a:pPr>
-            <a:r>
-              <a:rPr lang="en-US" sz="950" b="1" kern="0" spc="150" dirty="0">
+          <p:cNvPr id="29" name="Shape 26"/>
+          <p:cNvSpPr/>
+          <p:nvPr/>
+        </p:nvSpPr>
+        <p:spPr>
+          <a:xfrm>
+            <a:off x="749808" y="5193792"/>
+            <a:ext cx="310896" cy="310896"/>
+          </a:xfrm>
+          <a:prstGeom prst="ellipse">
+            <a:avLst/>
+          </a:prstGeom>
+          <a:solidFill>
+            <a:srgbClr val="106B41"/>
+          </a:solidFill>
+          <a:ln/>
+        </p:spPr>
+      </p:sp>
+      <p:sp>
+        <p:nvSpPr>
+          <p:cNvPr id="30" name="Text 27"/>
+          <p:cNvSpPr/>
+          <p:nvPr/>
+        </p:nvSpPr>
+        <p:spPr>
+          <a:xfrm>
+            <a:off x="749808" y="5193792"/>
+            <a:ext cx="310896" cy="310896"/>
+          </a:xfrm>
+          <a:prstGeom prst="rect">
+            <a:avLst/>
+          </a:prstGeom>
+          <a:noFill/>
+          <a:ln/>
+        </p:spPr>
+        <p:txBody>
+          <a:bodyPr wrap="square" lIns="0" tIns="0" rIns="0" bIns="0" rtlCol="0" anchor="ctr"/>
+          <a:lstStyle/>
+          <a:p>
+            <a:pPr algn="ctr" indent="0" marL="0">
+              <a:buNone/>
+            </a:pPr>
+            <a:r>
+              <a:rPr lang="en-US" sz="1200" b="1" dirty="0">
+                <a:solidFill>
+                  <a:srgbClr val="FFFFFF"/>
+                </a:solidFill>
+                <a:latin typeface="Arial" pitchFamily="34" charset="0"/>
+                <a:ea typeface="Arial" pitchFamily="34" charset="-122"/>
+                <a:cs typeface="Arial" pitchFamily="34" charset="-120"/>
+              </a:rPr>
+              <a:t>◆</a:t>
+            </a:r>
+            <a:endParaRPr lang="en-US" sz="1200" dirty="0"/>
+          </a:p>
+        </p:txBody>
+      </p:sp>
+      <p:sp>
+        <p:nvSpPr>
+          <p:cNvPr id="31" name="Text 28"/>
+          <p:cNvSpPr/>
+          <p:nvPr/>
+        </p:nvSpPr>
+        <p:spPr>
+          <a:xfrm>
+            <a:off x="1243584" y="5020056"/>
+            <a:ext cx="10168128" cy="219456"/>
+          </a:xfrm>
+          <a:prstGeom prst="rect">
+            <a:avLst/>
+          </a:prstGeom>
+          <a:noFill/>
+          <a:ln/>
+        </p:spPr>
+        <p:txBody>
+          <a:bodyPr wrap="square" lIns="0" tIns="0" rIns="0" bIns="0" rtlCol="0" anchor="ctr"/>
+          <a:lstStyle/>
+          <a:p>
+            <a:pPr indent="0" marL="0">
+              <a:buNone/>
+            </a:pPr>
+            <a:r>
+              <a:rPr lang="en-US" sz="950" b="1" spc="150" kern="0" dirty="0">
                 <a:solidFill>
                   <a:srgbClr val="106B41"/>
                 </a:solidFill>
@@ -20138,26 +20750,26 @@
       </p:sp>
       <p:sp>
         <p:nvSpPr>
-          <p:cNvPr id="30" name="Text 27"/>
-          <p:cNvSpPr/>
-          <p:nvPr/>
-        </p:nvSpPr>
-        <p:spPr>
-          <a:xfrm>
-            <a:off x="786384" y="5276088"/>
-            <a:ext cx="10625328" cy="402336"/>
-          </a:xfrm>
-          <a:prstGeom prst="rect">
-            <a:avLst/>
-          </a:prstGeom>
-          <a:noFill/>
-          <a:ln/>
-        </p:spPr>
-        <p:txBody>
-          <a:bodyPr wrap="square" lIns="0" tIns="0" rIns="0" bIns="0" rtlCol="0" anchor="ctr"/>
-          <a:lstStyle/>
-          <a:p>
-            <a:pPr marL="0" indent="0">
+          <p:cNvPr id="32" name="Text 29"/>
+          <p:cNvSpPr/>
+          <p:nvPr/>
+        </p:nvSpPr>
+        <p:spPr>
+          <a:xfrm>
+            <a:off x="1243584" y="5276088"/>
+            <a:ext cx="10168128" cy="402336"/>
+          </a:xfrm>
+          <a:prstGeom prst="rect">
+            <a:avLst/>
+          </a:prstGeom>
+          <a:noFill/>
+          <a:ln/>
+        </p:spPr>
+        <p:txBody>
+          <a:bodyPr wrap="square" lIns="0" tIns="0" rIns="0" bIns="0" rtlCol="0" anchor="ctr"/>
+          <a:lstStyle/>
+          <a:p>
+            <a:pPr indent="0" marL="0">
               <a:lnSpc>
                 <a:spcPct val="112000"/>
               </a:lnSpc>
@@ -20180,7 +20792,7 @@
       </p:sp>
       <p:sp>
         <p:nvSpPr>
-          <p:cNvPr id="31" name="Slide Number Placeholder 0"/>
+          <p:cNvPr id="25" name="Slide Number Placeholder 0"/>
           <p:cNvSpPr>
             <a:spLocks noGrp="1"/>
           </p:cNvSpPr>
@@ -20198,7 +20810,7 @@
           </a:prstGeom>
           <a:extLst>
             <a:ext uri="{C572A759-6A51-4108-AA02-DFA0A04FC94B}">
-              <ma14:wrappingTextBoxFlag xmlns="" xmlns:ma14="http://schemas.microsoft.com/office/mac/drawingml/2011/main" val="0"/>
+              <ma14:wrappingTextBoxFlag xmlns:ma14="http://schemas.microsoft.com/office/mac/drawingml/2011/main" val="0"/>
             </a:ext>
           </a:extLst>
         </p:spPr>
@@ -20219,7 +20831,7 @@
           <a:p>
             <a:pPr algn="l"/>
             <a:fld id="{F7021451-1387-4CA6-816F-3879F97B5CBC}" type="slidenum">
-              <a:rPr lang="en-US" b="0"/>
+              <a:rPr b="0" lang="en-US"/>
               <a:t>6</a:t>
             </a:fld>
             <a:endParaRPr lang="en-US"/>
@@ -20294,7 +20906,7 @@
           <a:bodyPr wrap="square" lIns="0" tIns="0" rIns="0" bIns="0" rtlCol="0" anchor="ctr"/>
           <a:lstStyle/>
           <a:p>
-            <a:pPr marL="0" indent="0" algn="l">
+            <a:pPr algn="l" indent="0" marL="0">
               <a:buNone/>
             </a:pPr>
             <a:r>
@@ -20333,7 +20945,7 @@
           <a:bodyPr wrap="square" lIns="0" tIns="0" rIns="0" bIns="0" rtlCol="0" anchor="ctr"/>
           <a:lstStyle/>
           <a:p>
-            <a:pPr marL="0" indent="0">
+            <a:pPr indent="0" marL="0">
               <a:buNone/>
             </a:pPr>
             <a:r>
@@ -20399,11 +21011,11 @@
           <a:bodyPr wrap="square" lIns="0" tIns="0" rIns="0" bIns="0" rtlCol="0" anchor="ctr"/>
           <a:lstStyle/>
           <a:p>
-            <a:pPr marL="0" indent="0" algn="ctr">
-              <a:buNone/>
-            </a:pPr>
-            <a:r>
-              <a:rPr lang="en-US" sz="900" b="1" kern="0" spc="100" dirty="0">
+            <a:pPr algn="ctr" indent="0" marL="0">
+              <a:buNone/>
+            </a:pPr>
+            <a:r>
+              <a:rPr lang="en-US" sz="900" b="1" spc="100" kern="0" dirty="0">
                 <a:solidFill>
                   <a:srgbClr val="5A05F4"/>
                 </a:solidFill>
@@ -20419,14 +21031,14 @@
       </p:sp>
       <p:pic>
         <p:nvPicPr>
-          <p:cNvPr id="7" name="Image 0" descr="preencoded.png"/>
+          <p:cNvPr id="7" name="Image 0" descr="preencoded.png">    </p:cNvPr>
           <p:cNvPicPr>
             <a:picLocks noChangeAspect="1"/>
           </p:cNvPicPr>
           <p:nvPr/>
         </p:nvPicPr>
         <p:blipFill>
-          <a:blip r:embed="rId3"/>
+          <a:blip r:embed="rId1"/>
           <a:stretch>
             <a:fillRect/>
           </a:stretch>
@@ -20489,7 +21101,7 @@
           <a:bodyPr wrap="square" lIns="0" tIns="0" rIns="0" bIns="0" rtlCol="0" anchor="t"/>
           <a:lstStyle/>
           <a:p>
-            <a:pPr marL="0" indent="0">
+            <a:pPr indent="0" marL="0">
               <a:lnSpc>
                 <a:spcPct val="130000"/>
               </a:lnSpc>
@@ -20506,6 +21118,12 @@
               </a:rPr>
               <a:t>"usage"</a:t>
             </a:r>
+            <a:pPr indent="0" marL="0">
+              <a:lnSpc>
+                <a:spcPct val="130000"/>
+              </a:lnSpc>
+              <a:buNone/>
+            </a:pPr>
             <a:r>
               <a:rPr lang="en-US" sz="1300" dirty="0">
                 <a:solidFill>
@@ -20517,6 +21135,12 @@
               </a:rPr>
               <a:t>: { </a:t>
             </a:r>
+            <a:pPr indent="0" marL="0">
+              <a:lnSpc>
+                <a:spcPct val="130000"/>
+              </a:lnSpc>
+              <a:buNone/>
+            </a:pPr>
             <a:r>
               <a:rPr lang="en-US" sz="1300" dirty="0">
                 <a:solidFill>
@@ -20528,6 +21152,12 @@
               </a:rPr>
               <a:t>"prompt_tokens"</a:t>
             </a:r>
+            <a:pPr indent="0" marL="0">
+              <a:lnSpc>
+                <a:spcPct val="130000"/>
+              </a:lnSpc>
+              <a:buNone/>
+            </a:pPr>
             <a:r>
               <a:rPr lang="en-US" sz="1300" dirty="0">
                 <a:solidFill>
@@ -20542,7 +21172,7 @@
             <a:endParaRPr lang="en-US" sz="1300" dirty="0"/>
           </a:p>
           <a:p>
-            <a:pPr marL="0" indent="0">
+            <a:pPr indent="0" marL="0">
               <a:lnSpc>
                 <a:spcPct val="130000"/>
               </a:lnSpc>
@@ -20559,6 +21189,12 @@
               </a:rPr>
               <a:t>          </a:t>
             </a:r>
+            <a:pPr indent="0" marL="0">
+              <a:lnSpc>
+                <a:spcPct val="130000"/>
+              </a:lnSpc>
+              <a:buNone/>
+            </a:pPr>
             <a:r>
               <a:rPr lang="en-US" sz="1300" dirty="0">
                 <a:solidFill>
@@ -20570,6 +21206,12 @@
               </a:rPr>
               <a:t>"completion_tokens"</a:t>
             </a:r>
+            <a:pPr indent="0" marL="0">
+              <a:lnSpc>
+                <a:spcPct val="130000"/>
+              </a:lnSpc>
+              <a:buNone/>
+            </a:pPr>
             <a:r>
               <a:rPr lang="en-US" sz="1300" dirty="0">
                 <a:solidFill>
@@ -20628,7 +21270,7 @@
           <a:bodyPr wrap="square" lIns="0" tIns="0" rIns="0" bIns="0" rtlCol="0" anchor="ctr"/>
           <a:lstStyle/>
           <a:p>
-            <a:pPr marL="0" indent="0">
+            <a:pPr indent="0" marL="0">
               <a:lnSpc>
                 <a:spcPct val="112000"/>
               </a:lnSpc>
@@ -20692,7 +21334,7 @@
           <a:bodyPr wrap="square" lIns="0" tIns="0" rIns="0" bIns="0" rtlCol="0" anchor="ctr"/>
           <a:lstStyle/>
           <a:p>
-            <a:pPr marL="0" indent="0">
+            <a:pPr indent="0" marL="0">
               <a:buNone/>
             </a:pPr>
             <a:r>
@@ -20731,7 +21373,7 @@
           <a:bodyPr wrap="square" lIns="0" tIns="0" rIns="0" bIns="0" rtlCol="0" anchor="t"/>
           <a:lstStyle/>
           <a:p>
-            <a:pPr marL="0" indent="0">
+            <a:pPr indent="0" marL="0">
               <a:lnSpc>
                 <a:spcPct val="108000"/>
               </a:lnSpc>
@@ -20795,7 +21437,7 @@
           <a:bodyPr wrap="square" lIns="0" tIns="0" rIns="0" bIns="0" rtlCol="0" anchor="ctr"/>
           <a:lstStyle/>
           <a:p>
-            <a:pPr marL="0" indent="0">
+            <a:pPr indent="0" marL="0">
               <a:buNone/>
             </a:pPr>
             <a:r>
@@ -20834,7 +21476,7 @@
           <a:bodyPr wrap="square" lIns="0" tIns="0" rIns="0" bIns="0" rtlCol="0" anchor="t"/>
           <a:lstStyle/>
           <a:p>
-            <a:pPr marL="0" indent="0">
+            <a:pPr indent="0" marL="0">
               <a:lnSpc>
                 <a:spcPct val="108000"/>
               </a:lnSpc>
@@ -20903,11 +21545,11 @@
           <a:bodyPr wrap="square" lIns="0" tIns="0" rIns="0" bIns="0" rtlCol="0" anchor="ctr"/>
           <a:lstStyle/>
           <a:p>
-            <a:pPr marL="0" indent="0">
-              <a:buNone/>
-            </a:pPr>
-            <a:r>
-              <a:rPr lang="en-US" sz="950" b="1" kern="0" spc="150" dirty="0">
+            <a:pPr indent="0" marL="0">
+              <a:buNone/>
+            </a:pPr>
+            <a:r>
+              <a:rPr lang="en-US" sz="950" b="1" spc="150" kern="0" dirty="0">
                 <a:solidFill>
                   <a:srgbClr val="434343"/>
                 </a:solidFill>
@@ -20942,7 +21584,7 @@
           <a:bodyPr wrap="square" lIns="0" tIns="0" rIns="0" bIns="0" rtlCol="0" anchor="ctr"/>
           <a:lstStyle/>
           <a:p>
-            <a:pPr marL="0" indent="0">
+            <a:pPr indent="0" marL="0">
               <a:lnSpc>
                 <a:spcPct val="112000"/>
               </a:lnSpc>
@@ -20983,7 +21625,7 @@
           </a:prstGeom>
           <a:extLst>
             <a:ext uri="{C572A759-6A51-4108-AA02-DFA0A04FC94B}">
-              <ma14:wrappingTextBoxFlag xmlns="" xmlns:ma14="http://schemas.microsoft.com/office/mac/drawingml/2011/main" val="0"/>
+              <ma14:wrappingTextBoxFlag xmlns:ma14="http://schemas.microsoft.com/office/mac/drawingml/2011/main" val="0"/>
             </a:ext>
           </a:extLst>
         </p:spPr>
@@ -21004,7 +21646,7 @@
           <a:p>
             <a:pPr algn="l"/>
             <a:fld id="{F7021451-1387-4CA6-816F-3879F97B5CBC}" type="slidenum">
-              <a:rPr lang="en-US" b="0"/>
+              <a:rPr b="0" lang="en-US"/>
               <a:t>7</a:t>
             </a:fld>
             <a:endParaRPr lang="en-US"/>
@@ -21079,7 +21721,7 @@
           <a:bodyPr wrap="square" lIns="0" tIns="0" rIns="0" bIns="0" rtlCol="0" anchor="ctr"/>
           <a:lstStyle/>
           <a:p>
-            <a:pPr marL="0" indent="0" algn="l">
+            <a:pPr algn="l" indent="0" marL="0">
               <a:buNone/>
             </a:pPr>
             <a:r>
@@ -21118,7 +21760,7 @@
           <a:bodyPr wrap="square" lIns="0" tIns="0" rIns="0" bIns="0" rtlCol="0" anchor="ctr"/>
           <a:lstStyle/>
           <a:p>
-            <a:pPr marL="0" indent="0">
+            <a:pPr indent="0" marL="0">
               <a:buNone/>
             </a:pPr>
             <a:r>
@@ -21157,7 +21799,7 @@
           <a:bodyPr wrap="square" lIns="0" tIns="0" rIns="0" bIns="0" rtlCol="0" anchor="t"/>
           <a:lstStyle/>
           <a:p>
-            <a:pPr marL="0" indent="0">
+            <a:pPr indent="0" marL="0">
               <a:lnSpc>
                 <a:spcPct val="100000"/>
               </a:lnSpc>
@@ -21226,11 +21868,11 @@
           <a:bodyPr wrap="square" lIns="0" tIns="0" rIns="0" bIns="0" rtlCol="0" anchor="ctr"/>
           <a:lstStyle/>
           <a:p>
-            <a:pPr marL="0" indent="0" algn="ctr">
-              <a:buNone/>
-            </a:pPr>
-            <a:r>
-              <a:rPr lang="en-US" sz="900" b="1" kern="0" spc="100" dirty="0">
+            <a:pPr algn="ctr" indent="0" marL="0">
+              <a:buNone/>
+            </a:pPr>
+            <a:r>
+              <a:rPr lang="en-US" sz="900" b="1" spc="100" kern="0" dirty="0">
                 <a:solidFill>
                   <a:srgbClr val="5A05F4"/>
                 </a:solidFill>
@@ -21246,14 +21888,14 @@
       </p:sp>
       <p:pic>
         <p:nvPicPr>
-          <p:cNvPr id="8" name="Image 0" descr="preencoded.png"/>
+          <p:cNvPr id="8" name="Image 0" descr="preencoded.png">    </p:cNvPr>
           <p:cNvPicPr>
             <a:picLocks noChangeAspect="1"/>
           </p:cNvPicPr>
           <p:nvPr/>
         </p:nvPicPr>
         <p:blipFill>
-          <a:blip r:embed="rId3"/>
+          <a:blip r:embed="rId1"/>
           <a:stretch>
             <a:fillRect/>
           </a:stretch>
@@ -21331,7 +21973,7 @@
           <a:bodyPr wrap="square" lIns="0" tIns="0" rIns="0" bIns="0" rtlCol="0" anchor="ctr"/>
           <a:lstStyle/>
           <a:p>
-            <a:pPr marL="0" indent="0" algn="ctr">
+            <a:pPr algn="ctr" indent="0" marL="0">
               <a:buNone/>
             </a:pPr>
             <a:r>
@@ -21370,7 +22012,7 @@
           <a:bodyPr wrap="square" lIns="0" tIns="0" rIns="0" bIns="0" rtlCol="0" anchor="ctr"/>
           <a:lstStyle/>
           <a:p>
-            <a:pPr marL="0" indent="0">
+            <a:pPr indent="0" marL="0">
               <a:buNone/>
             </a:pPr>
             <a:r>
@@ -21409,7 +22051,7 @@
           <a:bodyPr wrap="square" lIns="0" tIns="0" rIns="0" bIns="0" rtlCol="0" anchor="t"/>
           <a:lstStyle/>
           <a:p>
-            <a:pPr marL="0" indent="0">
+            <a:pPr indent="0" marL="0">
               <a:lnSpc>
                 <a:spcPct val="108000"/>
               </a:lnSpc>
@@ -21493,7 +22135,7 @@
           <a:bodyPr wrap="square" lIns="0" tIns="0" rIns="0" bIns="0" rtlCol="0" anchor="ctr"/>
           <a:lstStyle/>
           <a:p>
-            <a:pPr marL="0" indent="0" algn="ctr">
+            <a:pPr algn="ctr" indent="0" marL="0">
               <a:buNone/>
             </a:pPr>
             <a:r>
@@ -21532,7 +22174,7 @@
           <a:bodyPr wrap="square" lIns="0" tIns="0" rIns="0" bIns="0" rtlCol="0" anchor="ctr"/>
           <a:lstStyle/>
           <a:p>
-            <a:pPr marL="0" indent="0">
+            <a:pPr indent="0" marL="0">
               <a:buNone/>
             </a:pPr>
             <a:r>
@@ -21571,7 +22213,7 @@
           <a:bodyPr wrap="square" lIns="0" tIns="0" rIns="0" bIns="0" rtlCol="0" anchor="t"/>
           <a:lstStyle/>
           <a:p>
-            <a:pPr marL="0" indent="0">
+            <a:pPr indent="0" marL="0">
               <a:lnSpc>
                 <a:spcPct val="108000"/>
               </a:lnSpc>
@@ -21655,7 +22297,7 @@
           <a:bodyPr wrap="square" lIns="0" tIns="0" rIns="0" bIns="0" rtlCol="0" anchor="ctr"/>
           <a:lstStyle/>
           <a:p>
-            <a:pPr marL="0" indent="0" algn="ctr">
+            <a:pPr algn="ctr" indent="0" marL="0">
               <a:buNone/>
             </a:pPr>
             <a:r>
@@ -21694,7 +22336,7 @@
           <a:bodyPr wrap="square" lIns="0" tIns="0" rIns="0" bIns="0" rtlCol="0" anchor="ctr"/>
           <a:lstStyle/>
           <a:p>
-            <a:pPr marL="0" indent="0">
+            <a:pPr indent="0" marL="0">
               <a:buNone/>
             </a:pPr>
             <a:r>
@@ -21733,7 +22375,7 @@
           <a:bodyPr wrap="square" lIns="0" tIns="0" rIns="0" bIns="0" rtlCol="0" anchor="t"/>
           <a:lstStyle/>
           <a:p>
-            <a:pPr marL="0" indent="0">
+            <a:pPr indent="0" marL="0">
               <a:lnSpc>
                 <a:spcPct val="108000"/>
               </a:lnSpc>
@@ -21775,11 +22417,11 @@
           <a:bodyPr wrap="square" lIns="0" tIns="0" rIns="0" bIns="0" rtlCol="0" anchor="ctr"/>
           <a:lstStyle/>
           <a:p>
-            <a:pPr marL="0" indent="0">
-              <a:buNone/>
-            </a:pPr>
-            <a:r>
-              <a:rPr lang="en-US" sz="900" b="1" kern="0" spc="150" dirty="0">
+            <a:pPr indent="0" marL="0">
+              <a:buNone/>
+            </a:pPr>
+            <a:r>
+              <a:rPr lang="en-US" sz="900" b="1" spc="150" kern="0" dirty="0">
                 <a:solidFill>
                   <a:srgbClr val="6B6B6B"/>
                 </a:solidFill>
@@ -21814,7 +22456,7 @@
           <a:bodyPr wrap="square" lIns="0" tIns="0" rIns="0" bIns="0" rtlCol="0" anchor="ctr"/>
           <a:lstStyle/>
           <a:p>
-            <a:pPr marL="0" indent="0" algn="l">
+            <a:pPr algn="l" indent="0" marL="0">
               <a:buNone/>
             </a:pPr>
             <a:r>
@@ -21875,7 +22517,7 @@
           <a:bodyPr wrap="square" lIns="0" tIns="0" rIns="0" bIns="0" rtlCol="0" anchor="ctr"/>
           <a:lstStyle/>
           <a:p>
-            <a:pPr marL="0" indent="0">
+            <a:pPr indent="0" marL="0">
               <a:buNone/>
             </a:pPr>
             <a:r>
@@ -21914,7 +22556,7 @@
           <a:bodyPr wrap="square" lIns="0" tIns="0" rIns="0" bIns="0" rtlCol="0" anchor="ctr"/>
           <a:lstStyle/>
           <a:p>
-            <a:pPr marL="0" indent="0" algn="l">
+            <a:pPr algn="l" indent="0" marL="0">
               <a:buNone/>
             </a:pPr>
             <a:r>
@@ -21975,7 +22617,7 @@
           <a:bodyPr wrap="square" lIns="0" tIns="0" rIns="0" bIns="0" rtlCol="0" anchor="ctr"/>
           <a:lstStyle/>
           <a:p>
-            <a:pPr marL="0" indent="0">
+            <a:pPr indent="0" marL="0">
               <a:buNone/>
             </a:pPr>
             <a:r>
@@ -22002,7 +22644,7 @@
         <p:spPr>
           <a:xfrm>
             <a:off x="566928" y="4846320"/>
-            <a:ext cx="10927080" cy="1097280"/>
+            <a:ext cx="11064240" cy="1097280"/>
           </a:xfrm>
           <a:prstGeom prst="roundRect">
             <a:avLst>
@@ -22022,30 +22664,89 @@
       </p:sp>
       <p:sp>
         <p:nvSpPr>
-          <p:cNvPr id="32" name="Text 29"/>
-          <p:cNvSpPr/>
-          <p:nvPr/>
-        </p:nvSpPr>
-        <p:spPr>
-          <a:xfrm>
-            <a:off x="786384" y="4974336"/>
-            <a:ext cx="10625328" cy="219456"/>
-          </a:xfrm>
-          <a:prstGeom prst="rect">
-            <a:avLst/>
-          </a:prstGeom>
-          <a:noFill/>
-          <a:ln/>
-        </p:spPr>
-        <p:txBody>
-          <a:bodyPr wrap="square" lIns="0" tIns="0" rIns="0" bIns="0" rtlCol="0" anchor="ctr"/>
-          <a:lstStyle/>
-          <a:p>
-            <a:pPr marL="0" indent="0">
-              <a:buNone/>
-            </a:pPr>
-            <a:r>
-              <a:rPr lang="en-US" sz="950" b="1" kern="0" spc="150" dirty="0">
+          <p:cNvPr id="32" name="Shape 29"/>
+          <p:cNvSpPr/>
+          <p:nvPr/>
+        </p:nvSpPr>
+        <p:spPr>
+          <a:xfrm>
+            <a:off x="749808" y="5239512"/>
+            <a:ext cx="310896" cy="310896"/>
+          </a:xfrm>
+          <a:prstGeom prst="ellipse">
+            <a:avLst/>
+          </a:prstGeom>
+          <a:solidFill>
+            <a:srgbClr val="B3261E"/>
+          </a:solidFill>
+          <a:ln/>
+        </p:spPr>
+      </p:sp>
+      <p:sp>
+        <p:nvSpPr>
+          <p:cNvPr id="33" name="Text 30"/>
+          <p:cNvSpPr/>
+          <p:nvPr/>
+        </p:nvSpPr>
+        <p:spPr>
+          <a:xfrm>
+            <a:off x="749808" y="5239512"/>
+            <a:ext cx="310896" cy="310896"/>
+          </a:xfrm>
+          <a:prstGeom prst="rect">
+            <a:avLst/>
+          </a:prstGeom>
+          <a:noFill/>
+          <a:ln/>
+        </p:spPr>
+        <p:txBody>
+          <a:bodyPr wrap="square" lIns="0" tIns="0" rIns="0" bIns="0" rtlCol="0" anchor="ctr"/>
+          <a:lstStyle/>
+          <a:p>
+            <a:pPr algn="ctr" indent="0" marL="0">
+              <a:buNone/>
+            </a:pPr>
+            <a:r>
+              <a:rPr lang="en-US" sz="1200" b="1" dirty="0">
+                <a:solidFill>
+                  <a:srgbClr val="FFFFFF"/>
+                </a:solidFill>
+                <a:latin typeface="Arial" pitchFamily="34" charset="0"/>
+                <a:ea typeface="Arial" pitchFamily="34" charset="-122"/>
+                <a:cs typeface="Arial" pitchFamily="34" charset="-120"/>
+              </a:rPr>
+              <a:t>✕</a:t>
+            </a:r>
+            <a:endParaRPr lang="en-US" sz="1200" dirty="0"/>
+          </a:p>
+        </p:txBody>
+      </p:sp>
+      <p:sp>
+        <p:nvSpPr>
+          <p:cNvPr id="34" name="Text 31"/>
+          <p:cNvSpPr/>
+          <p:nvPr/>
+        </p:nvSpPr>
+        <p:spPr>
+          <a:xfrm>
+            <a:off x="1243584" y="4974336"/>
+            <a:ext cx="10168128" cy="219456"/>
+          </a:xfrm>
+          <a:prstGeom prst="rect">
+            <a:avLst/>
+          </a:prstGeom>
+          <a:noFill/>
+          <a:ln/>
+        </p:spPr>
+        <p:txBody>
+          <a:bodyPr wrap="square" lIns="0" tIns="0" rIns="0" bIns="0" rtlCol="0" anchor="ctr"/>
+          <a:lstStyle/>
+          <a:p>
+            <a:pPr indent="0" marL="0">
+              <a:buNone/>
+            </a:pPr>
+            <a:r>
+              <a:rPr lang="en-US" sz="950" b="1" spc="150" kern="0" dirty="0">
                 <a:solidFill>
                   <a:srgbClr val="B3261E"/>
                 </a:solidFill>
@@ -22061,26 +22762,26 @@
       </p:sp>
       <p:sp>
         <p:nvSpPr>
-          <p:cNvPr id="33" name="Text 30"/>
-          <p:cNvSpPr/>
-          <p:nvPr/>
-        </p:nvSpPr>
-        <p:spPr>
-          <a:xfrm>
-            <a:off x="786384" y="5230368"/>
-            <a:ext cx="10625328" cy="585216"/>
-          </a:xfrm>
-          <a:prstGeom prst="rect">
-            <a:avLst/>
-          </a:prstGeom>
-          <a:noFill/>
-          <a:ln/>
-        </p:spPr>
-        <p:txBody>
-          <a:bodyPr wrap="square" lIns="0" tIns="0" rIns="0" bIns="0" rtlCol="0" anchor="ctr"/>
-          <a:lstStyle/>
-          <a:p>
-            <a:pPr marL="0" indent="0">
+          <p:cNvPr id="35" name="Text 32"/>
+          <p:cNvSpPr/>
+          <p:nvPr/>
+        </p:nvSpPr>
+        <p:spPr>
+          <a:xfrm>
+            <a:off x="1243584" y="5230368"/>
+            <a:ext cx="10168128" cy="585216"/>
+          </a:xfrm>
+          <a:prstGeom prst="rect">
+            <a:avLst/>
+          </a:prstGeom>
+          <a:noFill/>
+          <a:ln/>
+        </p:spPr>
+        <p:txBody>
+          <a:bodyPr wrap="square" lIns="0" tIns="0" rIns="0" bIns="0" rtlCol="0" anchor="ctr"/>
+          <a:lstStyle/>
+          <a:p>
+            <a:pPr indent="0" marL="0">
               <a:lnSpc>
                 <a:spcPct val="112000"/>
               </a:lnSpc>
@@ -22103,7 +22804,7 @@
       </p:sp>
       <p:sp>
         <p:nvSpPr>
-          <p:cNvPr id="34" name="Slide Number Placeholder 0"/>
+          <p:cNvPr id="25" name="Slide Number Placeholder 0"/>
           <p:cNvSpPr>
             <a:spLocks noGrp="1"/>
           </p:cNvSpPr>
@@ -22121,7 +22822,7 @@
           </a:prstGeom>
           <a:extLst>
             <a:ext uri="{C572A759-6A51-4108-AA02-DFA0A04FC94B}">
-              <ma14:wrappingTextBoxFlag xmlns="" xmlns:ma14="http://schemas.microsoft.com/office/mac/drawingml/2011/main" val="0"/>
+              <ma14:wrappingTextBoxFlag xmlns:ma14="http://schemas.microsoft.com/office/mac/drawingml/2011/main" val="0"/>
             </a:ext>
           </a:extLst>
         </p:spPr>
@@ -22142,7 +22843,7 @@
           <a:p>
             <a:pPr algn="l"/>
             <a:fld id="{F7021451-1387-4CA6-816F-3879F97B5CBC}" type="slidenum">
-              <a:rPr lang="en-US" b="0"/>
+              <a:rPr b="0" lang="en-US"/>
               <a:t>8</a:t>
             </a:fld>
             <a:endParaRPr lang="en-US"/>
@@ -22217,7 +22918,7 @@
           <a:bodyPr wrap="square" lIns="0" tIns="0" rIns="0" bIns="0" rtlCol="0" anchor="ctr"/>
           <a:lstStyle/>
           <a:p>
-            <a:pPr marL="0" indent="0" algn="l">
+            <a:pPr algn="l" indent="0" marL="0">
               <a:buNone/>
             </a:pPr>
             <a:r>
@@ -22256,7 +22957,7 @@
           <a:bodyPr wrap="square" lIns="0" tIns="0" rIns="0" bIns="0" rtlCol="0" anchor="ctr"/>
           <a:lstStyle/>
           <a:p>
-            <a:pPr marL="0" indent="0">
+            <a:pPr indent="0" marL="0">
               <a:buNone/>
             </a:pPr>
             <a:r>
@@ -22322,11 +23023,11 @@
           <a:bodyPr wrap="square" lIns="0" tIns="0" rIns="0" bIns="0" rtlCol="0" anchor="ctr"/>
           <a:lstStyle/>
           <a:p>
-            <a:pPr marL="0" indent="0" algn="ctr">
-              <a:buNone/>
-            </a:pPr>
-            <a:r>
-              <a:rPr lang="en-US" sz="900" b="1" kern="0" spc="100" dirty="0">
+            <a:pPr algn="ctr" indent="0" marL="0">
+              <a:buNone/>
+            </a:pPr>
+            <a:r>
+              <a:rPr lang="en-US" sz="900" b="1" spc="100" kern="0" dirty="0">
                 <a:solidFill>
                   <a:srgbClr val="5A05F4"/>
                 </a:solidFill>
@@ -22342,14 +23043,14 @@
       </p:sp>
       <p:pic>
         <p:nvPicPr>
-          <p:cNvPr id="7" name="Image 0" descr="preencoded.png"/>
+          <p:cNvPr id="7" name="Image 0" descr="preencoded.png">    </p:cNvPr>
           <p:cNvPicPr>
             <a:picLocks noChangeAspect="1"/>
           </p:cNvPicPr>
           <p:nvPr/>
         </p:nvPicPr>
         <p:blipFill>
-          <a:blip r:embed="rId3"/>
+          <a:blip r:embed="rId1"/>
           <a:stretch>
             <a:fillRect/>
           </a:stretch>
@@ -22412,7 +23113,7 @@
           <a:bodyPr wrap="square" lIns="0" tIns="0" rIns="0" bIns="0" rtlCol="0" anchor="t"/>
           <a:lstStyle/>
           <a:p>
-            <a:pPr marL="0" indent="0">
+            <a:pPr indent="0" marL="0">
               <a:lnSpc>
                 <a:spcPct val="130000"/>
               </a:lnSpc>
@@ -22432,7 +23133,7 @@
             <a:endParaRPr lang="en-US" sz="1150" dirty="0"/>
           </a:p>
           <a:p>
-            <a:pPr marL="0" indent="0">
+            <a:pPr indent="0" marL="0">
               <a:lnSpc>
                 <a:spcPct val="130000"/>
               </a:lnSpc>
@@ -22452,7 +23153,7 @@
             <a:endParaRPr lang="en-US" sz="1150" dirty="0"/>
           </a:p>
           <a:p>
-            <a:pPr marL="0" indent="0">
+            <a:pPr indent="0" marL="0">
               <a:lnSpc>
                 <a:spcPct val="130000"/>
               </a:lnSpc>
@@ -22472,7 +23173,7 @@
             <a:endParaRPr lang="en-US" sz="1150" dirty="0"/>
           </a:p>
           <a:p>
-            <a:pPr marL="0" indent="0">
+            <a:pPr indent="0" marL="0">
               <a:lnSpc>
                 <a:spcPct val="130000"/>
               </a:lnSpc>
@@ -22492,7 +23193,7 @@
             <a:endParaRPr lang="en-US" sz="1150" dirty="0"/>
           </a:p>
           <a:p>
-            <a:pPr marL="0" indent="0">
+            <a:pPr indent="0" marL="0">
               <a:lnSpc>
                 <a:spcPct val="130000"/>
               </a:lnSpc>
@@ -22512,7 +23213,7 @@
             <a:endParaRPr lang="en-US" sz="1150" dirty="0"/>
           </a:p>
           <a:p>
-            <a:pPr marL="0" indent="0">
+            <a:pPr indent="0" marL="0">
               <a:lnSpc>
                 <a:spcPct val="130000"/>
               </a:lnSpc>
@@ -22576,7 +23277,7 @@
           <a:bodyPr wrap="square" lIns="0" tIns="0" rIns="0" bIns="0" rtlCol="0" anchor="ctr"/>
           <a:lstStyle/>
           <a:p>
-            <a:pPr marL="0" indent="0">
+            <a:pPr indent="0" marL="0">
               <a:buNone/>
             </a:pPr>
             <a:r>
@@ -22615,7 +23316,7 @@
           <a:bodyPr wrap="square" lIns="0" tIns="0" rIns="0" bIns="0" rtlCol="0" anchor="t"/>
           <a:lstStyle/>
           <a:p>
-            <a:pPr marL="0" indent="0">
+            <a:pPr indent="0" marL="0">
               <a:buNone/>
             </a:pPr>
             <a:r>
@@ -22676,7 +23377,7 @@
           <a:bodyPr wrap="square" lIns="0" tIns="0" rIns="0" bIns="0" rtlCol="0" anchor="ctr"/>
           <a:lstStyle/>
           <a:p>
-            <a:pPr marL="0" indent="0">
+            <a:pPr indent="0" marL="0">
               <a:buNone/>
             </a:pPr>
             <a:r>
@@ -22715,7 +23416,7 @@
           <a:bodyPr wrap="square" lIns="0" tIns="0" rIns="0" bIns="0" rtlCol="0" anchor="t"/>
           <a:lstStyle/>
           <a:p>
-            <a:pPr marL="0" indent="0">
+            <a:pPr indent="0" marL="0">
               <a:buNone/>
             </a:pPr>
             <a:r>
@@ -22776,7 +23477,7 @@
           <a:bodyPr wrap="square" lIns="0" tIns="0" rIns="0" bIns="0" rtlCol="0" anchor="ctr"/>
           <a:lstStyle/>
           <a:p>
-            <a:pPr marL="0" indent="0">
+            <a:pPr indent="0" marL="0">
               <a:lnSpc>
                 <a:spcPct val="112000"/>
               </a:lnSpc>
@@ -22845,11 +23546,11 @@
           <a:bodyPr wrap="square" lIns="0" tIns="0" rIns="0" bIns="0" rtlCol="0" anchor="ctr"/>
           <a:lstStyle/>
           <a:p>
-            <a:pPr marL="0" indent="0">
-              <a:buNone/>
-            </a:pPr>
-            <a:r>
-              <a:rPr lang="en-US" sz="950" b="1" kern="0" spc="150" dirty="0">
+            <a:pPr indent="0" marL="0">
+              <a:buNone/>
+            </a:pPr>
+            <a:r>
+              <a:rPr lang="en-US" sz="950" b="1" spc="150" kern="0" dirty="0">
                 <a:solidFill>
                   <a:srgbClr val="434343"/>
                 </a:solidFill>
@@ -22884,7 +23585,7 @@
           <a:bodyPr wrap="square" lIns="0" tIns="0" rIns="0" bIns="0" rtlCol="0" anchor="ctr"/>
           <a:lstStyle/>
           <a:p>
-            <a:pPr marL="0" indent="0">
+            <a:pPr indent="0" marL="0">
               <a:lnSpc>
                 <a:spcPct val="112000"/>
               </a:lnSpc>
@@ -22925,7 +23626,7 @@
           </a:prstGeom>
           <a:extLst>
             <a:ext uri="{C572A759-6A51-4108-AA02-DFA0A04FC94B}">
-              <ma14:wrappingTextBoxFlag xmlns="" xmlns:ma14="http://schemas.microsoft.com/office/mac/drawingml/2011/main" val="0"/>
+              <ma14:wrappingTextBoxFlag xmlns:ma14="http://schemas.microsoft.com/office/mac/drawingml/2011/main" val="0"/>
             </a:ext>
           </a:extLst>
         </p:spPr>
@@ -22946,7 +23647,7 @@
           <a:p>
             <a:pPr algn="l"/>
             <a:fld id="{F7021451-1387-4CA6-816F-3879F97B5CBC}" type="slidenum">
-              <a:rPr lang="en-US" b="0"/>
+              <a:rPr b="0" lang="en-US"/>
               <a:t>9</a:t>
             </a:fld>
             <a:endParaRPr lang="en-US"/>
@@ -23254,299 +23955,4 @@
     </a:ext>
   </a:extLst>
 </a:theme>
-</file>
-
-<file path=ppt/theme/theme2.xml><?xml version="1.0" encoding="utf-8"?>
-<a:theme xmlns:a="http://schemas.openxmlformats.org/drawingml/2006/main" name="Office Theme">
-  <a:themeElements>
-    <a:clrScheme name="Office">
-      <a:dk1>
-        <a:sysClr val="windowText" lastClr="000000"/>
-      </a:dk1>
-      <a:lt1>
-        <a:sysClr val="window" lastClr="FFFFFF"/>
-      </a:lt1>
-      <a:dk2>
-        <a:srgbClr val="44546A"/>
-      </a:dk2>
-      <a:lt2>
-        <a:srgbClr val="E7E6E6"/>
-      </a:lt2>
-      <a:accent1>
-        <a:srgbClr val="4472C4"/>
-      </a:accent1>
-      <a:accent2>
-        <a:srgbClr val="ED7D31"/>
-      </a:accent2>
-      <a:accent3>
-        <a:srgbClr val="A5A5A5"/>
-      </a:accent3>
-      <a:accent4>
-        <a:srgbClr val="FFC000"/>
-      </a:accent4>
-      <a:accent5>
-        <a:srgbClr val="5B9BD5"/>
-      </a:accent5>
-      <a:accent6>
-        <a:srgbClr val="70AD47"/>
-      </a:accent6>
-      <a:hlink>
-        <a:srgbClr val="0563C1"/>
-      </a:hlink>
-      <a:folHlink>
-        <a:srgbClr val="954F72"/>
-      </a:folHlink>
-    </a:clrScheme>
-    <a:fontScheme name="Office">
-      <a:majorFont>
-        <a:latin typeface="Calibri Light" panose="020F0302020204030204"/>
-        <a:ea typeface=""/>
-        <a:cs typeface=""/>
-        <a:font script="Jpan" typeface="游ゴシック Light"/>
-        <a:font script="Hang" typeface="맑은 고딕"/>
-        <a:font script="Hans" typeface="等线 Light"/>
-        <a:font script="Hant" typeface="新細明體"/>
-        <a:font script="Arab" typeface="Times New Roman"/>
-        <a:font script="Hebr" typeface="Times New Roman"/>
-        <a:font script="Thai" typeface="Angsana New"/>
-        <a:font script="Ethi" typeface="Nyala"/>
-        <a:font script="Beng" typeface="Vrinda"/>
-        <a:font script="Gujr" typeface="Shruti"/>
-        <a:font script="Khmr" typeface="MoolBoran"/>
-        <a:font script="Knda" typeface="Tunga"/>
-        <a:font script="Guru" typeface="Raavi"/>
-        <a:font script="Cans" typeface="Euphemia"/>
-        <a:font script="Cher" typeface="Plantagenet Cherokee"/>
-        <a:font script="Yiii" typeface="Microsoft Yi Baiti"/>
-        <a:font script="Tibt" typeface="Microsoft Himalaya"/>
-        <a:font script="Thaa" typeface="MV Boli"/>
-        <a:font script="Deva" typeface="Mangal"/>
-        <a:font script="Telu" typeface="Gautami"/>
-        <a:font script="Taml" typeface="Latha"/>
-        <a:font script="Syrc" typeface="Estrangelo Edessa"/>
-        <a:font script="Orya" typeface="Kalinga"/>
-        <a:font script="Mlym" typeface="Kartika"/>
-        <a:font script="Laoo" typeface="DokChampa"/>
-        <a:font script="Sinh" typeface="Iskoola Pota"/>
-        <a:font script="Mong" typeface="Mongolian Baiti"/>
-        <a:font script="Viet" typeface="Times New Roman"/>
-        <a:font script="Uigh" typeface="Microsoft Uighur"/>
-        <a:font script="Geor" typeface="Sylfaen"/>
-        <a:font script="Armn" typeface="Arial"/>
-        <a:font script="Bugi" typeface="Leelawadee UI"/>
-        <a:font script="Bopo" typeface="Microsoft JhengHei"/>
-        <a:font script="Java" typeface="Javanese Text"/>
-        <a:font script="Lisu" typeface="Segoe UI"/>
-        <a:font script="Mymr" typeface="Myanmar Text"/>
-        <a:font script="Nkoo" typeface="Ebrima"/>
-        <a:font script="Olck" typeface="Nirmala UI"/>
-        <a:font script="Osma" typeface="Ebrima"/>
-        <a:font script="Phag" typeface="Phagspa"/>
-        <a:font script="Syrn" typeface="Estrangelo Edessa"/>
-        <a:font script="Syrj" typeface="Estrangelo Edessa"/>
-        <a:font script="Syre" typeface="Estrangelo Edessa"/>
-        <a:font script="Sora" typeface="Nirmala UI"/>
-        <a:font script="Tale" typeface="Microsoft Tai Le"/>
-        <a:font script="Talu" typeface="Microsoft New Tai Lue"/>
-        <a:font script="Tfng" typeface="Ebrima"/>
-      </a:majorFont>
-      <a:minorFont>
-        <a:latin typeface="Calibri" panose="020F0502020204030204"/>
-        <a:ea typeface=""/>
-        <a:cs typeface=""/>
-        <a:font script="Jpan" typeface="游ゴシック"/>
-        <a:font script="Hang" typeface="맑은 고딕"/>
-        <a:font script="Hans" typeface="等线"/>
-        <a:font script="Hant" typeface="新細明體"/>
-        <a:font script="Arab" typeface="Arial"/>
-        <a:font script="Hebr" typeface="Arial"/>
-        <a:font script="Thai" typeface="Cordia New"/>
-        <a:font script="Ethi" typeface="Nyala"/>
-        <a:font script="Beng" typeface="Vrinda"/>
-        <a:font script="Gujr" typeface="Shruti"/>
-        <a:font script="Khmr" typeface="DaunPenh"/>
-        <a:font script="Knda" typeface="Tunga"/>
-        <a:font script="Guru" typeface="Raavi"/>
-        <a:font script="Cans" typeface="Euphemia"/>
-        <a:font script="Cher" typeface="Plantagenet Cherokee"/>
-        <a:font script="Yiii" typeface="Microsoft Yi Baiti"/>
-        <a:font script="Tibt" typeface="Microsoft Himalaya"/>
-        <a:font script="Thaa" typeface="MV Boli"/>
-        <a:font script="Deva" typeface="Mangal"/>
-        <a:font script="Telu" typeface="Gautami"/>
-        <a:font script="Taml" typeface="Latha"/>
-        <a:font script="Syrc" typeface="Estrangelo Edessa"/>
-        <a:font script="Orya" typeface="Kalinga"/>
-        <a:font script="Mlym" typeface="Kartika"/>
-        <a:font script="Laoo" typeface="DokChampa"/>
-        <a:font script="Sinh" typeface="Iskoola Pota"/>
-        <a:font script="Mong" typeface="Mongolian Baiti"/>
-        <a:font script="Viet" typeface="Arial"/>
-        <a:font script="Uigh" typeface="Microsoft Uighur"/>
-        <a:font script="Geor" typeface="Sylfaen"/>
-        <a:font script="Armn" typeface="Arial"/>
-        <a:font script="Bugi" typeface="Leelawadee UI"/>
-        <a:font script="Bopo" typeface="Microsoft JhengHei"/>
-        <a:font script="Java" typeface="Javanese Text"/>
-        <a:font script="Lisu" typeface="Segoe UI"/>
-        <a:font script="Mymr" typeface="Myanmar Text"/>
-        <a:font script="Nkoo" typeface="Ebrima"/>
-        <a:font script="Olck" typeface="Nirmala UI"/>
-        <a:font script="Osma" typeface="Ebrima"/>
-        <a:font script="Phag" typeface="Phagspa"/>
-        <a:font script="Syrn" typeface="Estrangelo Edessa"/>
-        <a:font script="Syrj" typeface="Estrangelo Edessa"/>
-        <a:font script="Syre" typeface="Estrangelo Edessa"/>
-        <a:font script="Sora" typeface="Nirmala UI"/>
-        <a:font script="Tale" typeface="Microsoft Tai Le"/>
-        <a:font script="Talu" typeface="Microsoft New Tai Lue"/>
-        <a:font script="Tfng" typeface="Ebrima"/>
-      </a:minorFont>
-    </a:fontScheme>
-    <a:fmtScheme name="Office">
-      <a:fillStyleLst>
-        <a:solidFill>
-          <a:schemeClr val="phClr"/>
-        </a:solidFill>
-        <a:gradFill rotWithShape="1">
-          <a:gsLst>
-            <a:gs pos="0">
-              <a:schemeClr val="phClr">
-                <a:lumMod val="110000"/>
-                <a:satMod val="105000"/>
-                <a:tint val="67000"/>
-              </a:schemeClr>
-            </a:gs>
-            <a:gs pos="50000">
-              <a:schemeClr val="phClr">
-                <a:lumMod val="105000"/>
-                <a:satMod val="103000"/>
-                <a:tint val="73000"/>
-              </a:schemeClr>
-            </a:gs>
-            <a:gs pos="100000">
-              <a:schemeClr val="phClr">
-                <a:lumMod val="105000"/>
-                <a:satMod val="109000"/>
-                <a:tint val="81000"/>
-              </a:schemeClr>
-            </a:gs>
-          </a:gsLst>
-          <a:lin ang="5400000" scaled="0"/>
-        </a:gradFill>
-        <a:gradFill rotWithShape="1">
-          <a:gsLst>
-            <a:gs pos="0">
-              <a:schemeClr val="phClr">
-                <a:satMod val="103000"/>
-                <a:lumMod val="102000"/>
-                <a:tint val="94000"/>
-              </a:schemeClr>
-            </a:gs>
-            <a:gs pos="50000">
-              <a:schemeClr val="phClr">
-                <a:satMod val="110000"/>
-                <a:lumMod val="100000"/>
-                <a:shade val="100000"/>
-              </a:schemeClr>
-            </a:gs>
-            <a:gs pos="100000">
-              <a:schemeClr val="phClr">
-                <a:lumMod val="99000"/>
-                <a:satMod val="120000"/>
-                <a:shade val="78000"/>
-              </a:schemeClr>
-            </a:gs>
-          </a:gsLst>
-          <a:lin ang="5400000" scaled="0"/>
-        </a:gradFill>
-      </a:fillStyleLst>
-      <a:lnStyleLst>
-        <a:ln w="6350" cap="flat" cmpd="sng" algn="ctr">
-          <a:solidFill>
-            <a:schemeClr val="phClr"/>
-          </a:solidFill>
-          <a:prstDash val="solid"/>
-          <a:miter lim="800000"/>
-        </a:ln>
-        <a:ln w="12700" cap="flat" cmpd="sng" algn="ctr">
-          <a:solidFill>
-            <a:schemeClr val="phClr"/>
-          </a:solidFill>
-          <a:prstDash val="solid"/>
-          <a:miter lim="800000"/>
-        </a:ln>
-        <a:ln w="19050" cap="flat" cmpd="sng" algn="ctr">
-          <a:solidFill>
-            <a:schemeClr val="phClr"/>
-          </a:solidFill>
-          <a:prstDash val="solid"/>
-          <a:miter lim="800000"/>
-        </a:ln>
-      </a:lnStyleLst>
-      <a:effectStyleLst>
-        <a:effectStyle>
-          <a:effectLst/>
-        </a:effectStyle>
-        <a:effectStyle>
-          <a:effectLst/>
-        </a:effectStyle>
-        <a:effectStyle>
-          <a:effectLst>
-            <a:outerShdw blurRad="57150" dist="19050" dir="5400000" algn="ctr" rotWithShape="0">
-              <a:srgbClr val="000000">
-                <a:alpha val="63000"/>
-              </a:srgbClr>
-            </a:outerShdw>
-          </a:effectLst>
-        </a:effectStyle>
-      </a:effectStyleLst>
-      <a:bgFillStyleLst>
-        <a:solidFill>
-          <a:schemeClr val="phClr"/>
-        </a:solidFill>
-        <a:solidFill>
-          <a:schemeClr val="phClr">
-            <a:tint val="95000"/>
-            <a:satMod val="170000"/>
-          </a:schemeClr>
-        </a:solidFill>
-        <a:gradFill rotWithShape="1">
-          <a:gsLst>
-            <a:gs pos="0">
-              <a:schemeClr val="phClr">
-                <a:tint val="93000"/>
-                <a:satMod val="150000"/>
-                <a:shade val="98000"/>
-                <a:lumMod val="102000"/>
-              </a:schemeClr>
-            </a:gs>
-            <a:gs pos="50000">
-              <a:schemeClr val="phClr">
-                <a:tint val="98000"/>
-                <a:satMod val="130000"/>
-                <a:shade val="90000"/>
-                <a:lumMod val="103000"/>
-              </a:schemeClr>
-            </a:gs>
-            <a:gs pos="100000">
-              <a:schemeClr val="phClr">
-                <a:shade val="63000"/>
-                <a:satMod val="120000"/>
-              </a:schemeClr>
-            </a:gs>
-          </a:gsLst>
-          <a:lin ang="5400000" scaled="0"/>
-        </a:gradFill>
-      </a:bgFillStyleLst>
-    </a:fmtScheme>
-  </a:themeElements>
-  <a:objectDefaults/>
-  <a:extraClrSchemeLst/>
-  <a:extLst>
-    <a:ext uri="{05A4C25C-085E-4340-85A3-A5531E510DB2}">
-      <thm15:themeFamily xmlns:thm15="http://schemas.microsoft.com/office/thememl/2012/main" name="Office Theme" id="{62F939B6-93AF-4DB8-9C6B-D6C7DFDC589F}" vid="{4A3C46E8-61CC-4603-A589-7422A47A8E4A}"/>
-    </a:ext>
-  </a:extLst>
-</a:theme>
 </file>
--- a/docs/decks/L04.pptx
+++ b/docs/decks/L04.pptx
@@ -3521,7 +3521,7 @@
                 <a:ea typeface="Courier New" pitchFamily="34" charset="-122"/>
                 <a:cs typeface="Courier New" pitchFamily="34" charset="-120"/>
               </a:rPr>
-              <a:t>ТИЖДЕНЬ 2 · УРОК 4 З 12</a:t>
+              <a:t>ТИЖДЕНЬ 2 · ТЕМА 4 З 12</a:t>
             </a:r>
             <a:endParaRPr lang="en-US" sz="1200" dirty="0"/>
           </a:p>
@@ -4329,7 +4329,7 @@
                 <a:ea typeface="Montserrat" pitchFamily="34" charset="-122"/>
                 <a:cs typeface="Montserrat" pitchFamily="34" charset="-120"/>
               </a:rPr>
-              <a:t>не разовий баг, а викривлення всіх рішень, які ви ухвалюєте за цифрами</a:t>
+              <a:t>не разовий баг, а викривлення всіх рішень, які Ви ухвалюєте за цифрами</a:t>
             </a:r>
             <a:endParaRPr lang="en-US" sz="1200" dirty="0"/>
           </a:p>
@@ -5782,7 +5782,7 @@
                 <a:ea typeface="Courier New" pitchFamily="34" charset="-122"/>
                 <a:cs typeface="Courier New" pitchFamily="34" charset="-120"/>
               </a:rPr>
-              <a:t>ретрай (урок 7)</a:t>
+              <a:t>ретрай (Тема 7)</a:t>
             </a:r>
             <a:endParaRPr lang="en-US" sz="1100" dirty="0"/>
           </a:p>
@@ -5886,7 +5886,7 @@
                 <a:ea typeface="Courier New" pitchFamily="34" charset="-122"/>
                 <a:cs typeface="Courier New" pitchFamily="34" charset="-120"/>
               </a:rPr>
-              <a:t>fallback (урок 7)</a:t>
+              <a:t>fallback (Тема 7)</a:t>
             </a:r>
             <a:endParaRPr lang="en-US" sz="1100" dirty="0"/>
           </a:p>
@@ -5990,7 +5990,7 @@
                 <a:ea typeface="Courier New" pitchFamily="34" charset="-122"/>
                 <a:cs typeface="Courier New" pitchFamily="34" charset="-120"/>
               </a:rPr>
-              <a:t>tool-цикл (урок 6)</a:t>
+              <a:t>tool-цикл (Тема 6)</a:t>
             </a:r>
             <a:endParaRPr lang="en-US" sz="1100" dirty="0"/>
           </a:p>
@@ -6094,7 +6094,7 @@
                 <a:ea typeface="Courier New" pitchFamily="34" charset="-122"/>
                 <a:cs typeface="Courier New" pitchFamily="34" charset="-120"/>
               </a:rPr>
-              <a:t>класифікатор (уроки 3 і 8)</a:t>
+              <a:t>класифікатор (Теми 3 і 8)</a:t>
             </a:r>
             <a:endParaRPr lang="en-US" sz="1100" dirty="0"/>
           </a:p>
@@ -7164,7 +7164,7 @@
                 <a:ea typeface="Montserrat" pitchFamily="34" charset="-122"/>
                 <a:cs typeface="Montserrat" pitchFamily="34" charset="-120"/>
               </a:rPr>
-              <a:t>Дешева модель, яка вдвічі частіше ескалює на людину, не економить нічого: ви зменшили ціну виклику і збільшили ціну результату. Порівнювати прайси безглуздо — порівнюйте вартість вирішеного звернення.</a:t>
+              <a:t>Дешева модель, яка вдвічі частіше ескалює на людину, не економить нічого: Ви зменшили ціну виклику і збільшили ціну результату. Порівнювати прайси безглуздо — порівнюйте вартість вирішеного звернення.</a:t>
             </a:r>
             <a:endParaRPr lang="en-US" sz="1300" dirty="0"/>
           </a:p>
@@ -8563,7 +8563,7 @@
                 <a:ea typeface="Montserrat" pitchFamily="34" charset="-122"/>
                 <a:cs typeface="Montserrat" pitchFamily="34" charset="-120"/>
               </a:rPr>
-              <a:t>плитка була «—» з уроку 1 — тепер жива</a:t>
+              <a:t>плитка була «—» з Теми 1 — тепер жива</a:t>
             </a:r>
             <a:endParaRPr lang="en-US" sz="1150" dirty="0"/>
           </a:p>
@@ -10756,7 +10756,7 @@
                 <a:ea typeface="Unbounded" pitchFamily="34" charset="-122"/>
                 <a:cs typeface="Unbounded" pitchFamily="34" charset="-120"/>
               </a:rPr>
-              <a:t>Зараз ви побачите — і навіщо</a:t>
+              <a:t>Зараз Ви побачите — і навіщо</a:t>
             </a:r>
             <a:endParaRPr lang="en-US" sz="2400" dirty="0"/>
           </a:p>
@@ -11785,7 +11785,7 @@
                 <a:ea typeface="Unbounded" pitchFamily="34" charset="-122"/>
                 <a:cs typeface="Unbounded" pitchFamily="34" charset="-120"/>
               </a:rPr>
-              <a:t>Що ви зможете після уроку</a:t>
+              <a:t>Що Ви зможете після теми</a:t>
             </a:r>
             <a:endParaRPr lang="en-US" sz="2400" dirty="0"/>
           </a:p>
@@ -16092,7 +16092,7 @@
                 <a:ea typeface="Montserrat" pitchFamily="34" charset="-122"/>
                 <a:cs typeface="Montserrat" pitchFamily="34" charset="-120"/>
               </a:rPr>
-              <a:t>Обидва уроки тижня здаються одним PR: маршрутизація з уроку 3 плюс сьогоднішній облік вартості.</a:t>
+              <a:t>обидві теми тижня здаються одним PR: маршрутизація з Теми 3 плюс сьогоднішній облік вартості.</a:t>
             </a:r>
             <a:endParaRPr lang="en-US" sz="1250" dirty="0"/>
           </a:p>
@@ -16564,7 +16564,7 @@
                 <a:ea typeface="Courier New" pitchFamily="34" charset="-122"/>
                 <a:cs typeface="Courier New" pitchFamily="34" charset="-120"/>
               </a:rPr>
-              <a:t>ПІДСУМОК УРОКУ 4</a:t>
+              <a:t>ПІДСУМОК ТЕМИ 4</a:t>
             </a:r>
             <a:endParaRPr lang="en-US" sz="1100" dirty="0"/>
           </a:p>
@@ -16940,7 +16940,7 @@
                 <a:ea typeface="Montserrat" pitchFamily="34" charset="-122"/>
                 <a:cs typeface="Montserrat" pitchFamily="34" charset="-120"/>
               </a:rPr>
-              <a:t>Наступний крок → Урок 5 · Кешування: точний кеш, метрика і semantic cache</a:t>
+              <a:t>Наступний крок → Тема 5 · Кешування: точний кеш, метрика і semantic cache</a:t>
             </a:r>
             <a:endParaRPr lang="en-US" sz="1500" dirty="0"/>
           </a:p>
@@ -18826,7 +18826,7 @@
                 <a:ea typeface="Montserrat" pitchFamily="34" charset="-122"/>
                 <a:cs typeface="Montserrat" pitchFamily="34" charset="-120"/>
               </a:rPr>
-              <a:t>Шість слів сьогоднішнього уроку</a:t>
+              <a:t>Шість слів сьогоднішньої теми</a:t>
             </a:r>
             <a:endParaRPr lang="en-US" sz="1300" dirty="0"/>
           </a:p>
@@ -21772,7 +21772,7 @@
                 <a:ea typeface="Unbounded" pitchFamily="34" charset="-122"/>
                 <a:cs typeface="Unbounded" pitchFamily="34" charset="-120"/>
               </a:rPr>
-              <a:t>Скільки коштує ваша мова</a:t>
+              <a:t>Скільки коштує Ваша мова</a:t>
             </a:r>
             <a:endParaRPr lang="en-US" sz="2400" dirty="0"/>
           </a:p>

--- a/docs/decks/L04.pptx
+++ b/docs/decks/L04.pptx
@@ -10856,7 +10856,7 @@
         <p:spPr>
           <a:xfrm>
             <a:off x="566928" y="1737360"/>
-            <a:ext cx="5532120" cy="1463040"/>
+            <a:ext cx="3611880" cy="1463040"/>
           </a:xfrm>
           <a:prstGeom prst="roundRect">
             <a:avLst>
@@ -10937,7 +10937,7 @@
         <p:spPr>
           <a:xfrm>
             <a:off x="1280160" y="1892808"/>
-            <a:ext cx="4617720" cy="438912"/>
+            <a:ext cx="2697480" cy="438912"/>
           </a:xfrm>
           <a:prstGeom prst="rect">
             <a:avLst/>
@@ -10976,7 +10976,7 @@
         <p:spPr>
           <a:xfrm>
             <a:off x="768096" y="2423160"/>
-            <a:ext cx="5129784" cy="621792"/>
+            <a:ext cx="3209544" cy="621792"/>
           </a:xfrm>
           <a:prstGeom prst="rect">
             <a:avLst/>
@@ -11017,8 +11017,8 @@
         </p:nvSpPr>
         <p:spPr>
           <a:xfrm>
-            <a:off x="6281928" y="1737360"/>
-            <a:ext cx="5532120" cy="1463040"/>
+            <a:off x="4361688" y="1737360"/>
+            <a:ext cx="3611880" cy="1463040"/>
           </a:xfrm>
           <a:prstGeom prst="roundRect">
             <a:avLst>
@@ -11039,7 +11039,7 @@
         </p:nvSpPr>
         <p:spPr>
           <a:xfrm>
-            <a:off x="6483096" y="1920240"/>
+            <a:off x="4562856" y="1920240"/>
             <a:ext cx="384048" cy="384048"/>
           </a:xfrm>
           <a:prstGeom prst="ellipse">
@@ -11059,7 +11059,7 @@
         </p:nvSpPr>
         <p:spPr>
           <a:xfrm>
-            <a:off x="6483096" y="1920240"/>
+            <a:off x="4562856" y="1920240"/>
             <a:ext cx="384048" cy="384048"/>
           </a:xfrm>
           <a:prstGeom prst="rect">
@@ -11098,8 +11098,8 @@
         </p:nvSpPr>
         <p:spPr>
           <a:xfrm>
-            <a:off x="6995160" y="1892808"/>
-            <a:ext cx="4617720" cy="438912"/>
+            <a:off x="5074920" y="1892808"/>
+            <a:ext cx="2697480" cy="438912"/>
           </a:xfrm>
           <a:prstGeom prst="rect">
             <a:avLst/>
@@ -11137,8 +11137,8 @@
         </p:nvSpPr>
         <p:spPr>
           <a:xfrm>
-            <a:off x="6483096" y="2423160"/>
-            <a:ext cx="5129784" cy="621792"/>
+            <a:off x="4562856" y="2423160"/>
+            <a:ext cx="3209544" cy="621792"/>
           </a:xfrm>
           <a:prstGeom prst="rect">
             <a:avLst/>
@@ -11180,7 +11180,7 @@
         <p:spPr>
           <a:xfrm>
             <a:off x="566928" y="3383280"/>
-            <a:ext cx="5532120" cy="1463040"/>
+            <a:ext cx="3611880" cy="1463040"/>
           </a:xfrm>
           <a:prstGeom prst="roundRect">
             <a:avLst>
@@ -11261,7 +11261,7 @@
         <p:spPr>
           <a:xfrm>
             <a:off x="1280160" y="3538728"/>
-            <a:ext cx="4617720" cy="438912"/>
+            <a:ext cx="2697480" cy="438912"/>
           </a:xfrm>
           <a:prstGeom prst="rect">
             <a:avLst/>
@@ -11300,7 +11300,7 @@
         <p:spPr>
           <a:xfrm>
             <a:off x="768096" y="4069080"/>
-            <a:ext cx="5129784" cy="621792"/>
+            <a:ext cx="3209544" cy="621792"/>
           </a:xfrm>
           <a:prstGeom prst="rect">
             <a:avLst/>
@@ -11341,8 +11341,8 @@
         </p:nvSpPr>
         <p:spPr>
           <a:xfrm>
-            <a:off x="6281928" y="3383280"/>
-            <a:ext cx="5532120" cy="1463040"/>
+            <a:off x="4361688" y="3383280"/>
+            <a:ext cx="3611880" cy="1463040"/>
           </a:xfrm>
           <a:prstGeom prst="roundRect">
             <a:avLst>
@@ -11363,7 +11363,7 @@
         </p:nvSpPr>
         <p:spPr>
           <a:xfrm>
-            <a:off x="6483096" y="3566160"/>
+            <a:off x="4562856" y="3566160"/>
             <a:ext cx="384048" cy="384048"/>
           </a:xfrm>
           <a:prstGeom prst="ellipse">
@@ -11383,7 +11383,7 @@
         </p:nvSpPr>
         <p:spPr>
           <a:xfrm>
-            <a:off x="6483096" y="3566160"/>
+            <a:off x="4562856" y="3566160"/>
             <a:ext cx="384048" cy="384048"/>
           </a:xfrm>
           <a:prstGeom prst="rect">
@@ -11422,8 +11422,8 @@
         </p:nvSpPr>
         <p:spPr>
           <a:xfrm>
-            <a:off x="6995160" y="3538728"/>
-            <a:ext cx="4617720" cy="438912"/>
+            <a:off x="5074920" y="3538728"/>
+            <a:ext cx="2697480" cy="438912"/>
           </a:xfrm>
           <a:prstGeom prst="rect">
             <a:avLst/>
@@ -11461,8 +11461,8 @@
         </p:nvSpPr>
         <p:spPr>
           <a:xfrm>
-            <a:off x="6483096" y="4069080"/>
-            <a:ext cx="5129784" cy="621792"/>
+            <a:off x="4562856" y="4069080"/>
+            <a:ext cx="3209544" cy="621792"/>
           </a:xfrm>
           <a:prstGeom prst="rect">
             <a:avLst/>
@@ -11498,6 +11498,484 @@
       <p:sp>
         <p:nvSpPr>
           <p:cNvPr id="27" name="Shape 24"/>
+          <p:cNvSpPr/>
+          <p:nvPr/>
+        </p:nvSpPr>
+        <p:spPr>
+          <a:xfrm>
+            <a:off x="8156448" y="1737360"/>
+            <a:ext cx="3474720" cy="3108960"/>
+          </a:xfrm>
+          <a:prstGeom prst="roundRect">
+            <a:avLst>
+              <a:gd name="adj" fmla="val 2353"/>
+            </a:avLst>
+          </a:prstGeom>
+          <a:solidFill>
+            <a:srgbClr val="0A0810"/>
+          </a:solidFill>
+          <a:ln w="12700">
+            <a:solidFill>
+              <a:srgbClr val="D9D9D9"/>
+            </a:solidFill>
+            <a:prstDash val="solid"/>
+          </a:ln>
+        </p:spPr>
+      </p:sp>
+      <p:sp>
+        <p:nvSpPr>
+          <p:cNvPr id="28" name="Shape 25"/>
+          <p:cNvSpPr/>
+          <p:nvPr/>
+        </p:nvSpPr>
+        <p:spPr>
+          <a:xfrm>
+            <a:off x="8284464" y="1856232"/>
+            <a:ext cx="73152" cy="73152"/>
+          </a:xfrm>
+          <a:prstGeom prst="ellipse">
+            <a:avLst/>
+          </a:prstGeom>
+          <a:solidFill>
+            <a:srgbClr val="FF6B6B"/>
+          </a:solidFill>
+          <a:ln/>
+        </p:spPr>
+      </p:sp>
+      <p:sp>
+        <p:nvSpPr>
+          <p:cNvPr id="29" name="Shape 26"/>
+          <p:cNvSpPr/>
+          <p:nvPr/>
+        </p:nvSpPr>
+        <p:spPr>
+          <a:xfrm>
+            <a:off x="8430768" y="1856232"/>
+            <a:ext cx="73152" cy="73152"/>
+          </a:xfrm>
+          <a:prstGeom prst="ellipse">
+            <a:avLst/>
+          </a:prstGeom>
+          <a:solidFill>
+            <a:srgbClr val="6BA0F8"/>
+          </a:solidFill>
+          <a:ln/>
+        </p:spPr>
+      </p:sp>
+      <p:sp>
+        <p:nvSpPr>
+          <p:cNvPr id="30" name="Shape 27"/>
+          <p:cNvSpPr/>
+          <p:nvPr/>
+        </p:nvSpPr>
+        <p:spPr>
+          <a:xfrm>
+            <a:off x="8577072" y="1856232"/>
+            <a:ext cx="73152" cy="73152"/>
+          </a:xfrm>
+          <a:prstGeom prst="ellipse">
+            <a:avLst/>
+          </a:prstGeom>
+          <a:solidFill>
+            <a:srgbClr val="3FCF8E"/>
+          </a:solidFill>
+          <a:ln/>
+        </p:spPr>
+      </p:sp>
+      <p:sp>
+        <p:nvSpPr>
+          <p:cNvPr id="31" name="Text 28"/>
+          <p:cNvSpPr/>
+          <p:nvPr/>
+        </p:nvSpPr>
+        <p:spPr>
+          <a:xfrm>
+            <a:off x="8759952" y="1737360"/>
+            <a:ext cx="2761488" cy="310896"/>
+          </a:xfrm>
+          <a:prstGeom prst="rect">
+            <a:avLst/>
+          </a:prstGeom>
+          <a:noFill/>
+          <a:ln/>
+        </p:spPr>
+        <p:txBody>
+          <a:bodyPr wrap="square" lIns="0" tIns="0" rIns="0" bIns="0" rtlCol="0" anchor="ctr"/>
+          <a:lstStyle/>
+          <a:p>
+            <a:pPr indent="0" marL="0">
+              <a:buNone/>
+            </a:pPr>
+            <a:r>
+              <a:rPr lang="en-US" sz="800" dirty="0">
+                <a:solidFill>
+                  <a:srgbClr val="9A94AA"/>
+                </a:solidFill>
+                <a:latin typeface="Courier New" pitchFamily="34" charset="0"/>
+                <a:ea typeface="Courier New" pitchFamily="34" charset="-122"/>
+                <a:cs typeface="Courier New" pitchFamily="34" charset="-120"/>
+              </a:rPr>
+              <a:t>psql · requests</a:t>
+            </a:r>
+            <a:endParaRPr lang="en-US" sz="800" dirty="0"/>
+          </a:p>
+        </p:txBody>
+      </p:sp>
+      <p:sp>
+        <p:nvSpPr>
+          <p:cNvPr id="32" name="Shape 29"/>
+          <p:cNvSpPr/>
+          <p:nvPr/>
+        </p:nvSpPr>
+        <p:spPr>
+          <a:xfrm>
+            <a:off x="8156448" y="2048256"/>
+            <a:ext cx="3474720" cy="0"/>
+          </a:xfrm>
+          <a:prstGeom prst="line">
+            <a:avLst/>
+          </a:prstGeom>
+          <a:noFill/>
+          <a:ln w="9525">
+            <a:solidFill>
+              <a:srgbClr val="2A2438"/>
+            </a:solidFill>
+            <a:prstDash val="solid"/>
+          </a:ln>
+        </p:spPr>
+      </p:sp>
+      <p:sp>
+        <p:nvSpPr>
+          <p:cNvPr id="33" name="Text 30"/>
+          <p:cNvSpPr/>
+          <p:nvPr/>
+        </p:nvSpPr>
+        <p:spPr>
+          <a:xfrm>
+            <a:off x="8321040" y="2157984"/>
+            <a:ext cx="3145536" cy="221513"/>
+          </a:xfrm>
+          <a:prstGeom prst="rect">
+            <a:avLst/>
+          </a:prstGeom>
+          <a:noFill/>
+          <a:ln/>
+        </p:spPr>
+        <p:txBody>
+          <a:bodyPr wrap="square" lIns="0" tIns="0" rIns="0" bIns="0" rtlCol="0" anchor="ctr"/>
+          <a:lstStyle/>
+          <a:p>
+            <a:pPr indent="0" marL="0">
+              <a:buNone/>
+            </a:pPr>
+            <a:r>
+              <a:rPr lang="en-US" sz="950" dirty="0">
+                <a:solidFill>
+                  <a:srgbClr val="D8D4E4"/>
+                </a:solidFill>
+                <a:latin typeface="Courier New" pitchFamily="34" charset="0"/>
+                <a:ea typeface="Courier New" pitchFamily="34" charset="-122"/>
+                <a:cs typeface="Courier New" pitchFamily="34" charset="-120"/>
+              </a:rPr>
+              <a:t>SELECT model, cost_usd</a:t>
+            </a:r>
+            <a:endParaRPr lang="en-US" sz="950" dirty="0"/>
+          </a:p>
+        </p:txBody>
+      </p:sp>
+      <p:sp>
+        <p:nvSpPr>
+          <p:cNvPr id="34" name="Text 31"/>
+          <p:cNvSpPr/>
+          <p:nvPr/>
+        </p:nvSpPr>
+        <p:spPr>
+          <a:xfrm>
+            <a:off x="8321040" y="2379497"/>
+            <a:ext cx="3145536" cy="221513"/>
+          </a:xfrm>
+          <a:prstGeom prst="rect">
+            <a:avLst/>
+          </a:prstGeom>
+          <a:noFill/>
+          <a:ln/>
+        </p:spPr>
+        <p:txBody>
+          <a:bodyPr wrap="square" lIns="0" tIns="0" rIns="0" bIns="0" rtlCol="0" anchor="ctr"/>
+          <a:lstStyle/>
+          <a:p>
+            <a:pPr indent="0" marL="0">
+              <a:buNone/>
+            </a:pPr>
+            <a:r>
+              <a:rPr lang="en-US" sz="950" dirty="0">
+                <a:solidFill>
+                  <a:srgbClr val="D8D4E4"/>
+                </a:solidFill>
+                <a:latin typeface="Courier New" pitchFamily="34" charset="0"/>
+                <a:ea typeface="Courier New" pitchFamily="34" charset="-122"/>
+                <a:cs typeface="Courier New" pitchFamily="34" charset="-120"/>
+              </a:rPr>
+              <a:t>  FROM requests</a:t>
+            </a:r>
+            <a:endParaRPr lang="en-US" sz="950" dirty="0"/>
+          </a:p>
+        </p:txBody>
+      </p:sp>
+      <p:sp>
+        <p:nvSpPr>
+          <p:cNvPr id="35" name="Text 32"/>
+          <p:cNvSpPr/>
+          <p:nvPr/>
+        </p:nvSpPr>
+        <p:spPr>
+          <a:xfrm>
+            <a:off x="8321040" y="2601011"/>
+            <a:ext cx="3145536" cy="221513"/>
+          </a:xfrm>
+          <a:prstGeom prst="rect">
+            <a:avLst/>
+          </a:prstGeom>
+          <a:noFill/>
+          <a:ln/>
+        </p:spPr>
+        <p:txBody>
+          <a:bodyPr wrap="square" lIns="0" tIns="0" rIns="0" bIns="0" rtlCol="0" anchor="ctr"/>
+          <a:lstStyle/>
+          <a:p>
+            <a:pPr indent="0" marL="0">
+              <a:buNone/>
+            </a:pPr>
+            <a:r>
+              <a:rPr lang="en-US" sz="950" dirty="0">
+                <a:solidFill>
+                  <a:srgbClr val="D8D4E4"/>
+                </a:solidFill>
+                <a:latin typeface="Courier New" pitchFamily="34" charset="0"/>
+                <a:ea typeface="Courier New" pitchFamily="34" charset="-122"/>
+                <a:cs typeface="Courier New" pitchFamily="34" charset="-120"/>
+              </a:rPr>
+              <a:t>  ORDER BY created_at DESC</a:t>
+            </a:r>
+            <a:endParaRPr lang="en-US" sz="950" dirty="0"/>
+          </a:p>
+        </p:txBody>
+      </p:sp>
+      <p:sp>
+        <p:nvSpPr>
+          <p:cNvPr id="36" name="Text 33"/>
+          <p:cNvSpPr/>
+          <p:nvPr/>
+        </p:nvSpPr>
+        <p:spPr>
+          <a:xfrm>
+            <a:off x="8321040" y="2822524"/>
+            <a:ext cx="3145536" cy="221513"/>
+          </a:xfrm>
+          <a:prstGeom prst="rect">
+            <a:avLst/>
+          </a:prstGeom>
+          <a:noFill/>
+          <a:ln/>
+        </p:spPr>
+        <p:txBody>
+          <a:bodyPr wrap="square" lIns="0" tIns="0" rIns="0" bIns="0" rtlCol="0" anchor="ctr"/>
+          <a:lstStyle/>
+          <a:p>
+            <a:pPr indent="0" marL="0">
+              <a:buNone/>
+            </a:pPr>
+            <a:r>
+              <a:rPr lang="en-US" sz="950" dirty="0">
+                <a:solidFill>
+                  <a:srgbClr val="D8D4E4"/>
+                </a:solidFill>
+                <a:latin typeface="Courier New" pitchFamily="34" charset="0"/>
+                <a:ea typeface="Courier New" pitchFamily="34" charset="-122"/>
+                <a:cs typeface="Courier New" pitchFamily="34" charset="-120"/>
+              </a:rPr>
+              <a:t>  LIMIT 2;</a:t>
+            </a:r>
+            <a:endParaRPr lang="en-US" sz="950" dirty="0"/>
+          </a:p>
+        </p:txBody>
+      </p:sp>
+      <p:sp>
+        <p:nvSpPr>
+          <p:cNvPr id="37" name="Text 34"/>
+          <p:cNvSpPr/>
+          <p:nvPr/>
+        </p:nvSpPr>
+        <p:spPr>
+          <a:xfrm>
+            <a:off x="8321040" y="3044038"/>
+            <a:ext cx="3145536" cy="221513"/>
+          </a:xfrm>
+          <a:prstGeom prst="rect">
+            <a:avLst/>
+          </a:prstGeom>
+          <a:noFill/>
+          <a:ln/>
+        </p:spPr>
+        <p:txBody>
+          <a:bodyPr wrap="square" lIns="0" tIns="0" rIns="0" bIns="0" rtlCol="0" anchor="ctr"/>
+          <a:lstStyle/>
+          <a:p>
+            <a:pPr indent="0" marL="0">
+              <a:buNone/>
+            </a:pPr>
+            <a:endParaRPr lang="en-US" sz="950" dirty="0"/>
+          </a:p>
+        </p:txBody>
+      </p:sp>
+      <p:sp>
+        <p:nvSpPr>
+          <p:cNvPr id="38" name="Text 35"/>
+          <p:cNvSpPr/>
+          <p:nvPr/>
+        </p:nvSpPr>
+        <p:spPr>
+          <a:xfrm>
+            <a:off x="8321040" y="3265551"/>
+            <a:ext cx="3145536" cy="221513"/>
+          </a:xfrm>
+          <a:prstGeom prst="rect">
+            <a:avLst/>
+          </a:prstGeom>
+          <a:noFill/>
+          <a:ln/>
+        </p:spPr>
+        <p:txBody>
+          <a:bodyPr wrap="square" lIns="0" tIns="0" rIns="0" bIns="0" rtlCol="0" anchor="ctr"/>
+          <a:lstStyle/>
+          <a:p>
+            <a:pPr indent="0" marL="0">
+              <a:buNone/>
+            </a:pPr>
+            <a:r>
+              <a:rPr lang="en-US" sz="950" dirty="0">
+                <a:solidFill>
+                  <a:srgbClr val="FF6B6B"/>
+                </a:solidFill>
+                <a:latin typeface="Courier New" pitchFamily="34" charset="0"/>
+                <a:ea typeface="Courier New" pitchFamily="34" charset="-122"/>
+                <a:cs typeface="Courier New" pitchFamily="34" charset="-120"/>
+              </a:rPr>
+              <a:t> mock-strong | 0.0042</a:t>
+            </a:r>
+            <a:endParaRPr lang="en-US" sz="950" dirty="0"/>
+          </a:p>
+        </p:txBody>
+      </p:sp>
+      <p:sp>
+        <p:nvSpPr>
+          <p:cNvPr id="39" name="Text 36"/>
+          <p:cNvSpPr/>
+          <p:nvPr/>
+        </p:nvSpPr>
+        <p:spPr>
+          <a:xfrm>
+            <a:off x="8321040" y="3487064"/>
+            <a:ext cx="3145536" cy="221513"/>
+          </a:xfrm>
+          <a:prstGeom prst="rect">
+            <a:avLst/>
+          </a:prstGeom>
+          <a:noFill/>
+          <a:ln/>
+        </p:spPr>
+        <p:txBody>
+          <a:bodyPr wrap="square" lIns="0" tIns="0" rIns="0" bIns="0" rtlCol="0" anchor="ctr"/>
+          <a:lstStyle/>
+          <a:p>
+            <a:pPr indent="0" marL="0">
+              <a:buNone/>
+            </a:pPr>
+            <a:r>
+              <a:rPr lang="en-US" sz="950" dirty="0">
+                <a:solidFill>
+                  <a:srgbClr val="3FCF8E"/>
+                </a:solidFill>
+                <a:latin typeface="Courier New" pitchFamily="34" charset="0"/>
+                <a:ea typeface="Courier New" pitchFamily="34" charset="-122"/>
+                <a:cs typeface="Courier New" pitchFamily="34" charset="-120"/>
+              </a:rPr>
+              <a:t> mock-mini   | 0.0003</a:t>
+            </a:r>
+            <a:endParaRPr lang="en-US" sz="950" dirty="0"/>
+          </a:p>
+        </p:txBody>
+      </p:sp>
+      <p:sp>
+        <p:nvSpPr>
+          <p:cNvPr id="40" name="Text 37"/>
+          <p:cNvSpPr/>
+          <p:nvPr/>
+        </p:nvSpPr>
+        <p:spPr>
+          <a:xfrm>
+            <a:off x="8321040" y="3708578"/>
+            <a:ext cx="3145536" cy="221513"/>
+          </a:xfrm>
+          <a:prstGeom prst="rect">
+            <a:avLst/>
+          </a:prstGeom>
+          <a:noFill/>
+          <a:ln/>
+        </p:spPr>
+        <p:txBody>
+          <a:bodyPr wrap="square" lIns="0" tIns="0" rIns="0" bIns="0" rtlCol="0" anchor="ctr"/>
+          <a:lstStyle/>
+          <a:p>
+            <a:pPr indent="0" marL="0">
+              <a:buNone/>
+            </a:pPr>
+            <a:endParaRPr lang="en-US" sz="950" dirty="0"/>
+          </a:p>
+        </p:txBody>
+      </p:sp>
+      <p:sp>
+        <p:nvSpPr>
+          <p:cNvPr id="41" name="Text 38"/>
+          <p:cNvSpPr/>
+          <p:nvPr/>
+        </p:nvSpPr>
+        <p:spPr>
+          <a:xfrm>
+            <a:off x="8321040" y="3930091"/>
+            <a:ext cx="3145536" cy="221513"/>
+          </a:xfrm>
+          <a:prstGeom prst="rect">
+            <a:avLst/>
+          </a:prstGeom>
+          <a:noFill/>
+          <a:ln/>
+        </p:spPr>
+        <p:txBody>
+          <a:bodyPr wrap="square" lIns="0" tIns="0" rIns="0" bIns="0" rtlCol="0" anchor="ctr"/>
+          <a:lstStyle/>
+          <a:p>
+            <a:pPr indent="0" marL="0">
+              <a:buNone/>
+            </a:pPr>
+            <a:r>
+              <a:rPr lang="en-US" sz="950" dirty="0">
+                <a:solidFill>
+                  <a:srgbClr val="6BA0F8"/>
+                </a:solidFill>
+                <a:latin typeface="Courier New" pitchFamily="34" charset="0"/>
+                <a:ea typeface="Courier New" pitchFamily="34" charset="-122"/>
+                <a:cs typeface="Courier New" pitchFamily="34" charset="-120"/>
+              </a:rPr>
+              <a:t>ескалація ≈ ×14 дорожча</a:t>
+            </a:r>
+            <a:endParaRPr lang="en-US" sz="950" dirty="0"/>
+          </a:p>
+        </p:txBody>
+      </p:sp>
+      <p:sp>
+        <p:nvSpPr>
+          <p:cNvPr id="42" name="Shape 39"/>
           <p:cNvSpPr/>
           <p:nvPr/>
         </p:nvSpPr>
@@ -11519,7 +11997,7 @@
       </p:sp>
       <p:sp>
         <p:nvSpPr>
-          <p:cNvPr id="28" name="Shape 25"/>
+          <p:cNvPr id="43" name="Shape 40"/>
           <p:cNvSpPr/>
           <p:nvPr/>
         </p:nvSpPr>
@@ -11539,7 +12017,7 @@
       </p:sp>
       <p:sp>
         <p:nvSpPr>
-          <p:cNvPr id="29" name="Text 26"/>
+          <p:cNvPr id="44" name="Text 41"/>
           <p:cNvSpPr/>
           <p:nvPr/>
         </p:nvSpPr>
@@ -11578,7 +12056,7 @@
       </p:sp>
       <p:sp>
         <p:nvSpPr>
-          <p:cNvPr id="30" name="Text 27"/>
+          <p:cNvPr id="45" name="Text 42"/>
           <p:cNvSpPr/>
           <p:nvPr/>
         </p:nvSpPr>
@@ -11617,7 +12095,7 @@
       </p:sp>
       <p:sp>
         <p:nvSpPr>
-          <p:cNvPr id="31" name="Text 28"/>
+          <p:cNvPr id="46" name="Text 43"/>
           <p:cNvSpPr/>
           <p:nvPr/>
         </p:nvSpPr>
@@ -13887,11 +14365,11 @@
         <p:spPr>
           <a:xfrm>
             <a:off x="566928" y="1737360"/>
-            <a:ext cx="3566160" cy="2148840"/>
+            <a:ext cx="7223760" cy="1051560"/>
           </a:xfrm>
           <a:prstGeom prst="roundRect">
             <a:avLst>
-              <a:gd name="adj" fmla="val 5106"/>
+              <a:gd name="adj" fmla="val 10435"/>
             </a:avLst>
           </a:prstGeom>
           <a:solidFill>
@@ -13909,7 +14387,7 @@
         <p:spPr>
           <a:xfrm>
             <a:off x="768096" y="1892808"/>
-            <a:ext cx="3163824" cy="438912"/>
+            <a:ext cx="6821424" cy="438912"/>
           </a:xfrm>
           <a:prstGeom prst="rect">
             <a:avLst/>
@@ -13948,7 +14426,7 @@
         <p:spPr>
           <a:xfrm>
             <a:off x="768096" y="2423160"/>
-            <a:ext cx="3163824" cy="1307592"/>
+            <a:ext cx="6821424" cy="210312"/>
           </a:xfrm>
           <a:prstGeom prst="rect">
             <a:avLst/>
@@ -13989,12 +14467,12 @@
         </p:nvSpPr>
         <p:spPr>
           <a:xfrm>
-            <a:off x="4315968" y="1737360"/>
-            <a:ext cx="3566160" cy="2148840"/>
+            <a:off x="566928" y="2926080"/>
+            <a:ext cx="7223760" cy="1051560"/>
           </a:xfrm>
           <a:prstGeom prst="roundRect">
             <a:avLst>
-              <a:gd name="adj" fmla="val 5106"/>
+              <a:gd name="adj" fmla="val 10435"/>
             </a:avLst>
           </a:prstGeom>
           <a:solidFill>
@@ -14011,8 +14489,8 @@
         </p:nvSpPr>
         <p:spPr>
           <a:xfrm>
-            <a:off x="4517136" y="1892808"/>
-            <a:ext cx="3163824" cy="438912"/>
+            <a:off x="768096" y="3081528"/>
+            <a:ext cx="6821424" cy="438912"/>
           </a:xfrm>
           <a:prstGeom prst="rect">
             <a:avLst/>
@@ -14050,8 +14528,8 @@
         </p:nvSpPr>
         <p:spPr>
           <a:xfrm>
-            <a:off x="4517136" y="2423160"/>
-            <a:ext cx="3163824" cy="1307592"/>
+            <a:off x="768096" y="3611880"/>
+            <a:ext cx="6821424" cy="210312"/>
           </a:xfrm>
           <a:prstGeom prst="rect">
             <a:avLst/>
@@ -14092,12 +14570,12 @@
         </p:nvSpPr>
         <p:spPr>
           <a:xfrm>
-            <a:off x="8065008" y="1737360"/>
-            <a:ext cx="3566160" cy="2148840"/>
+            <a:off x="566928" y="4114800"/>
+            <a:ext cx="7223760" cy="1051560"/>
           </a:xfrm>
           <a:prstGeom prst="roundRect">
             <a:avLst>
-              <a:gd name="adj" fmla="val 5106"/>
+              <a:gd name="adj" fmla="val 10435"/>
             </a:avLst>
           </a:prstGeom>
           <a:solidFill>
@@ -14114,8 +14592,8 @@
         </p:nvSpPr>
         <p:spPr>
           <a:xfrm>
-            <a:off x="8266176" y="1892808"/>
-            <a:ext cx="3163824" cy="438912"/>
+            <a:off x="768096" y="4270248"/>
+            <a:ext cx="6821424" cy="438912"/>
           </a:xfrm>
           <a:prstGeom prst="rect">
             <a:avLst/>
@@ -14153,8 +14631,8 @@
         </p:nvSpPr>
         <p:spPr>
           <a:xfrm>
-            <a:off x="8266176" y="2423160"/>
-            <a:ext cx="3163824" cy="1307592"/>
+            <a:off x="768096" y="4800600"/>
+            <a:ext cx="6821424" cy="210312"/>
           </a:xfrm>
           <a:prstGeom prst="rect">
             <a:avLst/>
@@ -14195,16 +14673,16 @@
         </p:nvSpPr>
         <p:spPr>
           <a:xfrm>
-            <a:off x="566928" y="4297680"/>
-            <a:ext cx="11064240" cy="1600200"/>
+            <a:off x="8156448" y="1737360"/>
+            <a:ext cx="3474720" cy="3429000"/>
           </a:xfrm>
           <a:prstGeom prst="roundRect">
             <a:avLst>
-              <a:gd name="adj" fmla="val 6857"/>
+              <a:gd name="adj" fmla="val 2133"/>
             </a:avLst>
           </a:prstGeom>
           <a:solidFill>
-            <a:srgbClr val="FFFFFF"/>
+            <a:srgbClr val="0A0810"/>
           </a:solidFill>
           <a:ln w="12700">
             <a:solidFill>
@@ -14216,14 +14694,793 @@
       </p:sp>
       <p:sp>
         <p:nvSpPr>
-          <p:cNvPr id="17" name="Text 14"/>
-          <p:cNvSpPr/>
-          <p:nvPr/>
-        </p:nvSpPr>
-        <p:spPr>
-          <a:xfrm>
-            <a:off x="786384" y="4443984"/>
-            <a:ext cx="10625328" cy="1307592"/>
+          <p:cNvPr id="17" name="Shape 14"/>
+          <p:cNvSpPr/>
+          <p:nvPr/>
+        </p:nvSpPr>
+        <p:spPr>
+          <a:xfrm>
+            <a:off x="8284464" y="1856232"/>
+            <a:ext cx="73152" cy="73152"/>
+          </a:xfrm>
+          <a:prstGeom prst="ellipse">
+            <a:avLst/>
+          </a:prstGeom>
+          <a:solidFill>
+            <a:srgbClr val="FF6B6B"/>
+          </a:solidFill>
+          <a:ln/>
+        </p:spPr>
+      </p:sp>
+      <p:sp>
+        <p:nvSpPr>
+          <p:cNvPr id="18" name="Shape 15"/>
+          <p:cNvSpPr/>
+          <p:nvPr/>
+        </p:nvSpPr>
+        <p:spPr>
+          <a:xfrm>
+            <a:off x="8430768" y="1856232"/>
+            <a:ext cx="73152" cy="73152"/>
+          </a:xfrm>
+          <a:prstGeom prst="ellipse">
+            <a:avLst/>
+          </a:prstGeom>
+          <a:solidFill>
+            <a:srgbClr val="6BA0F8"/>
+          </a:solidFill>
+          <a:ln/>
+        </p:spPr>
+      </p:sp>
+      <p:sp>
+        <p:nvSpPr>
+          <p:cNvPr id="19" name="Shape 16"/>
+          <p:cNvSpPr/>
+          <p:nvPr/>
+        </p:nvSpPr>
+        <p:spPr>
+          <a:xfrm>
+            <a:off x="8577072" y="1856232"/>
+            <a:ext cx="73152" cy="73152"/>
+          </a:xfrm>
+          <a:prstGeom prst="ellipse">
+            <a:avLst/>
+          </a:prstGeom>
+          <a:solidFill>
+            <a:srgbClr val="3FCF8E"/>
+          </a:solidFill>
+          <a:ln/>
+        </p:spPr>
+      </p:sp>
+      <p:sp>
+        <p:nvSpPr>
+          <p:cNvPr id="20" name="Text 17"/>
+          <p:cNvSpPr/>
+          <p:nvPr/>
+        </p:nvSpPr>
+        <p:spPr>
+          <a:xfrm>
+            <a:off x="8759952" y="1737360"/>
+            <a:ext cx="2761488" cy="310896"/>
+          </a:xfrm>
+          <a:prstGeom prst="rect">
+            <a:avLst/>
+          </a:prstGeom>
+          <a:noFill/>
+          <a:ln/>
+        </p:spPr>
+        <p:txBody>
+          <a:bodyPr wrap="square" lIns="0" tIns="0" rIns="0" bIns="0" rtlCol="0" anchor="ctr"/>
+          <a:lstStyle/>
+          <a:p>
+            <a:pPr indent="0" marL="0">
+              <a:buNone/>
+            </a:pPr>
+            <a:r>
+              <a:rPr lang="en-US" sz="800" dirty="0">
+                <a:solidFill>
+                  <a:srgbClr val="9A94AA"/>
+                </a:solidFill>
+                <a:latin typeface="Courier New" pitchFamily="34" charset="0"/>
+                <a:ea typeface="Courier New" pitchFamily="34" charset="-122"/>
+                <a:cs typeface="Courier New" pitchFamily="34" charset="-120"/>
+              </a:rPr>
+              <a:t>консоль · після Теми 4</a:t>
+            </a:r>
+            <a:endParaRPr lang="en-US" sz="800" dirty="0"/>
+          </a:p>
+        </p:txBody>
+      </p:sp>
+      <p:sp>
+        <p:nvSpPr>
+          <p:cNvPr id="21" name="Shape 18"/>
+          <p:cNvSpPr/>
+          <p:nvPr/>
+        </p:nvSpPr>
+        <p:spPr>
+          <a:xfrm>
+            <a:off x="8156448" y="2048256"/>
+            <a:ext cx="3474720" cy="0"/>
+          </a:xfrm>
+          <a:prstGeom prst="line">
+            <a:avLst/>
+          </a:prstGeom>
+          <a:noFill/>
+          <a:ln w="9525">
+            <a:solidFill>
+              <a:srgbClr val="2A2438"/>
+            </a:solidFill>
+            <a:prstDash val="solid"/>
+          </a:ln>
+        </p:spPr>
+      </p:sp>
+      <p:sp>
+        <p:nvSpPr>
+          <p:cNvPr id="22" name="Shape 19"/>
+          <p:cNvSpPr/>
+          <p:nvPr/>
+        </p:nvSpPr>
+        <p:spPr>
+          <a:xfrm>
+            <a:off x="8266176" y="2139696"/>
+            <a:ext cx="1011936" cy="1421892"/>
+          </a:xfrm>
+          <a:prstGeom prst="roundRect">
+            <a:avLst>
+              <a:gd name="adj" fmla="val 4518"/>
+            </a:avLst>
+          </a:prstGeom>
+          <a:solidFill>
+            <a:srgbClr val="0A0810"/>
+          </a:solidFill>
+          <a:ln w="12700">
+            <a:solidFill>
+              <a:srgbClr val="2A2438"/>
+            </a:solidFill>
+            <a:prstDash val="solid"/>
+          </a:ln>
+        </p:spPr>
+      </p:sp>
+      <p:sp>
+        <p:nvSpPr>
+          <p:cNvPr id="23" name="Text 20"/>
+          <p:cNvSpPr/>
+          <p:nvPr/>
+        </p:nvSpPr>
+        <p:spPr>
+          <a:xfrm>
+            <a:off x="8339328" y="2176272"/>
+            <a:ext cx="865632" cy="369692"/>
+          </a:xfrm>
+          <a:prstGeom prst="rect">
+            <a:avLst/>
+          </a:prstGeom>
+          <a:noFill/>
+          <a:ln/>
+        </p:spPr>
+        <p:txBody>
+          <a:bodyPr wrap="square" lIns="0" tIns="0" rIns="0" bIns="0" rtlCol="0" anchor="t"/>
+          <a:lstStyle/>
+          <a:p>
+            <a:pPr indent="0" marL="0">
+              <a:buNone/>
+            </a:pPr>
+            <a:r>
+              <a:rPr lang="en-US" sz="750" dirty="0">
+                <a:solidFill>
+                  <a:srgbClr val="9A94AA"/>
+                </a:solidFill>
+                <a:latin typeface="Courier New" pitchFamily="34" charset="0"/>
+                <a:ea typeface="Courier New" pitchFamily="34" charset="-122"/>
+                <a:cs typeface="Courier New" pitchFamily="34" charset="-120"/>
+              </a:rPr>
+              <a:t>requests</a:t>
+            </a:r>
+            <a:endParaRPr lang="en-US" sz="750" dirty="0"/>
+          </a:p>
+        </p:txBody>
+      </p:sp>
+      <p:sp>
+        <p:nvSpPr>
+          <p:cNvPr id="24" name="Text 21"/>
+          <p:cNvSpPr/>
+          <p:nvPr/>
+        </p:nvSpPr>
+        <p:spPr>
+          <a:xfrm>
+            <a:off x="8339328" y="2623139"/>
+            <a:ext cx="865632" cy="824697"/>
+          </a:xfrm>
+          <a:prstGeom prst="rect">
+            <a:avLst/>
+          </a:prstGeom>
+          <a:noFill/>
+          <a:ln/>
+        </p:spPr>
+        <p:txBody>
+          <a:bodyPr wrap="square" lIns="0" tIns="0" rIns="0" bIns="0" rtlCol="0" anchor="ctr"/>
+          <a:lstStyle/>
+          <a:p>
+            <a:pPr indent="0" marL="0">
+              <a:buNone/>
+            </a:pPr>
+            <a:r>
+              <a:rPr lang="en-US" sz="1300" b="1" dirty="0">
+                <a:solidFill>
+                  <a:srgbClr val="D8D4E4"/>
+                </a:solidFill>
+                <a:latin typeface="Courier New" pitchFamily="34" charset="0"/>
+                <a:ea typeface="Courier New" pitchFamily="34" charset="-122"/>
+                <a:cs typeface="Courier New" pitchFamily="34" charset="-120"/>
+              </a:rPr>
+              <a:t>10</a:t>
+            </a:r>
+            <a:endParaRPr lang="en-US" sz="1300" dirty="0"/>
+          </a:p>
+        </p:txBody>
+      </p:sp>
+      <p:sp>
+        <p:nvSpPr>
+          <p:cNvPr id="25" name="Shape 22"/>
+          <p:cNvSpPr/>
+          <p:nvPr/>
+        </p:nvSpPr>
+        <p:spPr>
+          <a:xfrm>
+            <a:off x="9387840" y="2139696"/>
+            <a:ext cx="1011936" cy="1421892"/>
+          </a:xfrm>
+          <a:prstGeom prst="roundRect">
+            <a:avLst>
+              <a:gd name="adj" fmla="val 4518"/>
+            </a:avLst>
+          </a:prstGeom>
+          <a:solidFill>
+            <a:srgbClr val="0A0810"/>
+          </a:solidFill>
+          <a:ln w="12700">
+            <a:solidFill>
+              <a:srgbClr val="2A2438"/>
+            </a:solidFill>
+            <a:prstDash val="solid"/>
+          </a:ln>
+        </p:spPr>
+      </p:sp>
+      <p:sp>
+        <p:nvSpPr>
+          <p:cNvPr id="26" name="Text 23"/>
+          <p:cNvSpPr/>
+          <p:nvPr/>
+        </p:nvSpPr>
+        <p:spPr>
+          <a:xfrm>
+            <a:off x="9460992" y="2176272"/>
+            <a:ext cx="865632" cy="369692"/>
+          </a:xfrm>
+          <a:prstGeom prst="rect">
+            <a:avLst/>
+          </a:prstGeom>
+          <a:noFill/>
+          <a:ln/>
+        </p:spPr>
+        <p:txBody>
+          <a:bodyPr wrap="square" lIns="0" tIns="0" rIns="0" bIns="0" rtlCol="0" anchor="t"/>
+          <a:lstStyle/>
+          <a:p>
+            <a:pPr indent="0" marL="0">
+              <a:buNone/>
+            </a:pPr>
+            <a:r>
+              <a:rPr lang="en-US" sz="750" dirty="0">
+                <a:solidFill>
+                  <a:srgbClr val="9A94AA"/>
+                </a:solidFill>
+                <a:latin typeface="Courier New" pitchFamily="34" charset="0"/>
+                <a:ea typeface="Courier New" pitchFamily="34" charset="-122"/>
+                <a:cs typeface="Courier New" pitchFamily="34" charset="-120"/>
+              </a:rPr>
+              <a:t>cost</a:t>
+            </a:r>
+            <a:endParaRPr lang="en-US" sz="750" dirty="0"/>
+          </a:p>
+        </p:txBody>
+      </p:sp>
+      <p:sp>
+        <p:nvSpPr>
+          <p:cNvPr id="27" name="Text 24"/>
+          <p:cNvSpPr/>
+          <p:nvPr/>
+        </p:nvSpPr>
+        <p:spPr>
+          <a:xfrm>
+            <a:off x="9460992" y="2623139"/>
+            <a:ext cx="865632" cy="824697"/>
+          </a:xfrm>
+          <a:prstGeom prst="rect">
+            <a:avLst/>
+          </a:prstGeom>
+          <a:noFill/>
+          <a:ln/>
+        </p:spPr>
+        <p:txBody>
+          <a:bodyPr wrap="square" lIns="0" tIns="0" rIns="0" bIns="0" rtlCol="0" anchor="ctr"/>
+          <a:lstStyle/>
+          <a:p>
+            <a:pPr indent="0" marL="0">
+              <a:buNone/>
+            </a:pPr>
+            <a:r>
+              <a:rPr lang="en-US" sz="1300" b="1" dirty="0">
+                <a:solidFill>
+                  <a:srgbClr val="D8D4E4"/>
+                </a:solidFill>
+                <a:latin typeface="Courier New" pitchFamily="34" charset="0"/>
+                <a:ea typeface="Courier New" pitchFamily="34" charset="-122"/>
+                <a:cs typeface="Courier New" pitchFamily="34" charset="-120"/>
+              </a:rPr>
+              <a:t>$0.0045 / $5</a:t>
+            </a:r>
+            <a:endParaRPr lang="en-US" sz="1300" dirty="0"/>
+          </a:p>
+        </p:txBody>
+      </p:sp>
+      <p:sp>
+        <p:nvSpPr>
+          <p:cNvPr id="28" name="Shape 25"/>
+          <p:cNvSpPr/>
+          <p:nvPr/>
+        </p:nvSpPr>
+        <p:spPr>
+          <a:xfrm>
+            <a:off x="10509504" y="2139696"/>
+            <a:ext cx="1011936" cy="1421892"/>
+          </a:xfrm>
+          <a:prstGeom prst="roundRect">
+            <a:avLst>
+              <a:gd name="adj" fmla="val 4518"/>
+            </a:avLst>
+          </a:prstGeom>
+          <a:solidFill>
+            <a:srgbClr val="0A0810"/>
+          </a:solidFill>
+          <a:ln w="12700">
+            <a:solidFill>
+              <a:srgbClr val="2A2438"/>
+            </a:solidFill>
+            <a:prstDash val="solid"/>
+          </a:ln>
+        </p:spPr>
+      </p:sp>
+      <p:sp>
+        <p:nvSpPr>
+          <p:cNvPr id="29" name="Text 26"/>
+          <p:cNvSpPr/>
+          <p:nvPr/>
+        </p:nvSpPr>
+        <p:spPr>
+          <a:xfrm>
+            <a:off x="10582656" y="2176272"/>
+            <a:ext cx="865632" cy="369692"/>
+          </a:xfrm>
+          <a:prstGeom prst="rect">
+            <a:avLst/>
+          </a:prstGeom>
+          <a:noFill/>
+          <a:ln/>
+        </p:spPr>
+        <p:txBody>
+          <a:bodyPr wrap="square" lIns="0" tIns="0" rIns="0" bIns="0" rtlCol="0" anchor="t"/>
+          <a:lstStyle/>
+          <a:p>
+            <a:pPr indent="0" marL="0">
+              <a:buNone/>
+            </a:pPr>
+            <a:r>
+              <a:rPr lang="en-US" sz="750" dirty="0">
+                <a:solidFill>
+                  <a:srgbClr val="9A94AA"/>
+                </a:solidFill>
+                <a:latin typeface="Courier New" pitchFamily="34" charset="0"/>
+                <a:ea typeface="Courier New" pitchFamily="34" charset="-122"/>
+                <a:cs typeface="Courier New" pitchFamily="34" charset="-120"/>
+              </a:rPr>
+              <a:t>p95</a:t>
+            </a:r>
+            <a:endParaRPr lang="en-US" sz="750" dirty="0"/>
+          </a:p>
+        </p:txBody>
+      </p:sp>
+      <p:sp>
+        <p:nvSpPr>
+          <p:cNvPr id="30" name="Text 27"/>
+          <p:cNvSpPr/>
+          <p:nvPr/>
+        </p:nvSpPr>
+        <p:spPr>
+          <a:xfrm>
+            <a:off x="10582656" y="2623139"/>
+            <a:ext cx="865632" cy="824697"/>
+          </a:xfrm>
+          <a:prstGeom prst="rect">
+            <a:avLst/>
+          </a:prstGeom>
+          <a:noFill/>
+          <a:ln/>
+        </p:spPr>
+        <p:txBody>
+          <a:bodyPr wrap="square" lIns="0" tIns="0" rIns="0" bIns="0" rtlCol="0" anchor="ctr"/>
+          <a:lstStyle/>
+          <a:p>
+            <a:pPr indent="0" marL="0">
+              <a:buNone/>
+            </a:pPr>
+            <a:r>
+              <a:rPr lang="en-US" sz="1500" dirty="0">
+                <a:solidFill>
+                  <a:srgbClr val="9A94AA"/>
+                </a:solidFill>
+                <a:latin typeface="Courier New" pitchFamily="34" charset="0"/>
+                <a:ea typeface="Courier New" pitchFamily="34" charset="-122"/>
+                <a:cs typeface="Courier New" pitchFamily="34" charset="-120"/>
+              </a:rPr>
+              <a:t>—</a:t>
+            </a:r>
+            <a:endParaRPr lang="en-US" sz="1500" dirty="0"/>
+          </a:p>
+        </p:txBody>
+      </p:sp>
+      <p:sp>
+        <p:nvSpPr>
+          <p:cNvPr id="31" name="Shape 28"/>
+          <p:cNvSpPr/>
+          <p:nvPr/>
+        </p:nvSpPr>
+        <p:spPr>
+          <a:xfrm>
+            <a:off x="8266176" y="3653028"/>
+            <a:ext cx="1011936" cy="1421892"/>
+          </a:xfrm>
+          <a:prstGeom prst="roundRect">
+            <a:avLst>
+              <a:gd name="adj" fmla="val 4518"/>
+            </a:avLst>
+          </a:prstGeom>
+          <a:solidFill>
+            <a:srgbClr val="0A0810"/>
+          </a:solidFill>
+          <a:ln w="12700">
+            <a:solidFill>
+              <a:srgbClr val="2A2438"/>
+            </a:solidFill>
+            <a:prstDash val="solid"/>
+          </a:ln>
+        </p:spPr>
+      </p:sp>
+      <p:sp>
+        <p:nvSpPr>
+          <p:cNvPr id="32" name="Text 29"/>
+          <p:cNvSpPr/>
+          <p:nvPr/>
+        </p:nvSpPr>
+        <p:spPr>
+          <a:xfrm>
+            <a:off x="8339328" y="3689604"/>
+            <a:ext cx="865632" cy="369692"/>
+          </a:xfrm>
+          <a:prstGeom prst="rect">
+            <a:avLst/>
+          </a:prstGeom>
+          <a:noFill/>
+          <a:ln/>
+        </p:spPr>
+        <p:txBody>
+          <a:bodyPr wrap="square" lIns="0" tIns="0" rIns="0" bIns="0" rtlCol="0" anchor="t"/>
+          <a:lstStyle/>
+          <a:p>
+            <a:pPr indent="0" marL="0">
+              <a:buNone/>
+            </a:pPr>
+            <a:r>
+              <a:rPr lang="en-US" sz="750" dirty="0">
+                <a:solidFill>
+                  <a:srgbClr val="9A94AA"/>
+                </a:solidFill>
+                <a:latin typeface="Courier New" pitchFamily="34" charset="0"/>
+                <a:ea typeface="Courier New" pitchFamily="34" charset="-122"/>
+                <a:cs typeface="Courier New" pitchFamily="34" charset="-120"/>
+              </a:rPr>
+              <a:t>error</a:t>
+            </a:r>
+            <a:endParaRPr lang="en-US" sz="750" dirty="0"/>
+          </a:p>
+        </p:txBody>
+      </p:sp>
+      <p:sp>
+        <p:nvSpPr>
+          <p:cNvPr id="33" name="Text 30"/>
+          <p:cNvSpPr/>
+          <p:nvPr/>
+        </p:nvSpPr>
+        <p:spPr>
+          <a:xfrm>
+            <a:off x="8339328" y="4136471"/>
+            <a:ext cx="865632" cy="824697"/>
+          </a:xfrm>
+          <a:prstGeom prst="rect">
+            <a:avLst/>
+          </a:prstGeom>
+          <a:noFill/>
+          <a:ln/>
+        </p:spPr>
+        <p:txBody>
+          <a:bodyPr wrap="square" lIns="0" tIns="0" rIns="0" bIns="0" rtlCol="0" anchor="ctr"/>
+          <a:lstStyle/>
+          <a:p>
+            <a:pPr indent="0" marL="0">
+              <a:buNone/>
+            </a:pPr>
+            <a:r>
+              <a:rPr lang="en-US" sz="1500" dirty="0">
+                <a:solidFill>
+                  <a:srgbClr val="9A94AA"/>
+                </a:solidFill>
+                <a:latin typeface="Courier New" pitchFamily="34" charset="0"/>
+                <a:ea typeface="Courier New" pitchFamily="34" charset="-122"/>
+                <a:cs typeface="Courier New" pitchFamily="34" charset="-120"/>
+              </a:rPr>
+              <a:t>—</a:t>
+            </a:r>
+            <a:endParaRPr lang="en-US" sz="1500" dirty="0"/>
+          </a:p>
+        </p:txBody>
+      </p:sp>
+      <p:sp>
+        <p:nvSpPr>
+          <p:cNvPr id="34" name="Shape 31"/>
+          <p:cNvSpPr/>
+          <p:nvPr/>
+        </p:nvSpPr>
+        <p:spPr>
+          <a:xfrm>
+            <a:off x="9387840" y="3653028"/>
+            <a:ext cx="1011936" cy="1421892"/>
+          </a:xfrm>
+          <a:prstGeom prst="roundRect">
+            <a:avLst>
+              <a:gd name="adj" fmla="val 4518"/>
+            </a:avLst>
+          </a:prstGeom>
+          <a:solidFill>
+            <a:srgbClr val="0A0810"/>
+          </a:solidFill>
+          <a:ln w="12700">
+            <a:solidFill>
+              <a:srgbClr val="2A2438"/>
+            </a:solidFill>
+            <a:prstDash val="solid"/>
+          </a:ln>
+        </p:spPr>
+      </p:sp>
+      <p:sp>
+        <p:nvSpPr>
+          <p:cNvPr id="35" name="Text 32"/>
+          <p:cNvSpPr/>
+          <p:nvPr/>
+        </p:nvSpPr>
+        <p:spPr>
+          <a:xfrm>
+            <a:off x="9460992" y="3689604"/>
+            <a:ext cx="865632" cy="369692"/>
+          </a:xfrm>
+          <a:prstGeom prst="rect">
+            <a:avLst/>
+          </a:prstGeom>
+          <a:noFill/>
+          <a:ln/>
+        </p:spPr>
+        <p:txBody>
+          <a:bodyPr wrap="square" lIns="0" tIns="0" rIns="0" bIns="0" rtlCol="0" anchor="t"/>
+          <a:lstStyle/>
+          <a:p>
+            <a:pPr indent="0" marL="0">
+              <a:buNone/>
+            </a:pPr>
+            <a:r>
+              <a:rPr lang="en-US" sz="750" dirty="0">
+                <a:solidFill>
+                  <a:srgbClr val="9A94AA"/>
+                </a:solidFill>
+                <a:latin typeface="Courier New" pitchFamily="34" charset="0"/>
+                <a:ea typeface="Courier New" pitchFamily="34" charset="-122"/>
+                <a:cs typeface="Courier New" pitchFamily="34" charset="-120"/>
+              </a:rPr>
+              <a:t>cache-hit</a:t>
+            </a:r>
+            <a:endParaRPr lang="en-US" sz="750" dirty="0"/>
+          </a:p>
+        </p:txBody>
+      </p:sp>
+      <p:sp>
+        <p:nvSpPr>
+          <p:cNvPr id="36" name="Text 33"/>
+          <p:cNvSpPr/>
+          <p:nvPr/>
+        </p:nvSpPr>
+        <p:spPr>
+          <a:xfrm>
+            <a:off x="9460992" y="4136471"/>
+            <a:ext cx="865632" cy="824697"/>
+          </a:xfrm>
+          <a:prstGeom prst="rect">
+            <a:avLst/>
+          </a:prstGeom>
+          <a:noFill/>
+          <a:ln/>
+        </p:spPr>
+        <p:txBody>
+          <a:bodyPr wrap="square" lIns="0" tIns="0" rIns="0" bIns="0" rtlCol="0" anchor="ctr"/>
+          <a:lstStyle/>
+          <a:p>
+            <a:pPr indent="0" marL="0">
+              <a:buNone/>
+            </a:pPr>
+            <a:r>
+              <a:rPr lang="en-US" sz="1500" dirty="0">
+                <a:solidFill>
+                  <a:srgbClr val="9A94AA"/>
+                </a:solidFill>
+                <a:latin typeface="Courier New" pitchFamily="34" charset="0"/>
+                <a:ea typeface="Courier New" pitchFamily="34" charset="-122"/>
+                <a:cs typeface="Courier New" pitchFamily="34" charset="-120"/>
+              </a:rPr>
+              <a:t>—</a:t>
+            </a:r>
+            <a:endParaRPr lang="en-US" sz="1500" dirty="0"/>
+          </a:p>
+        </p:txBody>
+      </p:sp>
+      <p:sp>
+        <p:nvSpPr>
+          <p:cNvPr id="37" name="Shape 34"/>
+          <p:cNvSpPr/>
+          <p:nvPr/>
+        </p:nvSpPr>
+        <p:spPr>
+          <a:xfrm>
+            <a:off x="10509504" y="3653028"/>
+            <a:ext cx="1011936" cy="1421892"/>
+          </a:xfrm>
+          <a:prstGeom prst="roundRect">
+            <a:avLst>
+              <a:gd name="adj" fmla="val 4518"/>
+            </a:avLst>
+          </a:prstGeom>
+          <a:solidFill>
+            <a:srgbClr val="0A0810"/>
+          </a:solidFill>
+          <a:ln w="12700">
+            <a:solidFill>
+              <a:srgbClr val="2A2438"/>
+            </a:solidFill>
+            <a:prstDash val="solid"/>
+          </a:ln>
+        </p:spPr>
+      </p:sp>
+      <p:sp>
+        <p:nvSpPr>
+          <p:cNvPr id="38" name="Text 35"/>
+          <p:cNvSpPr/>
+          <p:nvPr/>
+        </p:nvSpPr>
+        <p:spPr>
+          <a:xfrm>
+            <a:off x="10582656" y="3689604"/>
+            <a:ext cx="865632" cy="369692"/>
+          </a:xfrm>
+          <a:prstGeom prst="rect">
+            <a:avLst/>
+          </a:prstGeom>
+          <a:noFill/>
+          <a:ln/>
+        </p:spPr>
+        <p:txBody>
+          <a:bodyPr wrap="square" lIns="0" tIns="0" rIns="0" bIns="0" rtlCol="0" anchor="t"/>
+          <a:lstStyle/>
+          <a:p>
+            <a:pPr indent="0" marL="0">
+              <a:buNone/>
+            </a:pPr>
+            <a:r>
+              <a:rPr lang="en-US" sz="750" dirty="0">
+                <a:solidFill>
+                  <a:srgbClr val="9A94AA"/>
+                </a:solidFill>
+                <a:latin typeface="Courier New" pitchFamily="34" charset="0"/>
+                <a:ea typeface="Courier New" pitchFamily="34" charset="-122"/>
+                <a:cs typeface="Courier New" pitchFamily="34" charset="-120"/>
+              </a:rPr>
+              <a:t>fallback</a:t>
+            </a:r>
+            <a:endParaRPr lang="en-US" sz="750" dirty="0"/>
+          </a:p>
+        </p:txBody>
+      </p:sp>
+      <p:sp>
+        <p:nvSpPr>
+          <p:cNvPr id="39" name="Text 36"/>
+          <p:cNvSpPr/>
+          <p:nvPr/>
+        </p:nvSpPr>
+        <p:spPr>
+          <a:xfrm>
+            <a:off x="10582656" y="4136471"/>
+            <a:ext cx="865632" cy="824697"/>
+          </a:xfrm>
+          <a:prstGeom prst="rect">
+            <a:avLst/>
+          </a:prstGeom>
+          <a:noFill/>
+          <a:ln/>
+        </p:spPr>
+        <p:txBody>
+          <a:bodyPr wrap="square" lIns="0" tIns="0" rIns="0" bIns="0" rtlCol="0" anchor="ctr"/>
+          <a:lstStyle/>
+          <a:p>
+            <a:pPr indent="0" marL="0">
+              <a:buNone/>
+            </a:pPr>
+            <a:r>
+              <a:rPr lang="en-US" sz="1500" dirty="0">
+                <a:solidFill>
+                  <a:srgbClr val="9A94AA"/>
+                </a:solidFill>
+                <a:latin typeface="Courier New" pitchFamily="34" charset="0"/>
+                <a:ea typeface="Courier New" pitchFamily="34" charset="-122"/>
+                <a:cs typeface="Courier New" pitchFamily="34" charset="-120"/>
+              </a:rPr>
+              <a:t>—</a:t>
+            </a:r>
+            <a:endParaRPr lang="en-US" sz="1500" dirty="0"/>
+          </a:p>
+        </p:txBody>
+      </p:sp>
+      <p:sp>
+        <p:nvSpPr>
+          <p:cNvPr id="40" name="Shape 37"/>
+          <p:cNvSpPr/>
+          <p:nvPr/>
+        </p:nvSpPr>
+        <p:spPr>
+          <a:xfrm>
+            <a:off x="566928" y="5349240"/>
+            <a:ext cx="11064240" cy="731520"/>
+          </a:xfrm>
+          <a:prstGeom prst="roundRect">
+            <a:avLst>
+              <a:gd name="adj" fmla="val 15000"/>
+            </a:avLst>
+          </a:prstGeom>
+          <a:solidFill>
+            <a:srgbClr val="FFFFFF"/>
+          </a:solidFill>
+          <a:ln w="12700">
+            <a:solidFill>
+              <a:srgbClr val="D9D9D9"/>
+            </a:solidFill>
+            <a:prstDash val="solid"/>
+          </a:ln>
+        </p:spPr>
+      </p:sp>
+      <p:sp>
+        <p:nvSpPr>
+          <p:cNvPr id="41" name="Text 38"/>
+          <p:cNvSpPr/>
+          <p:nvPr/>
+        </p:nvSpPr>
+        <p:spPr>
+          <a:xfrm>
+            <a:off x="786384" y="5495544"/>
+            <a:ext cx="10625328" cy="438912"/>
           </a:xfrm>
           <a:prstGeom prst="rect">
             <a:avLst/>

--- a/docs/decks/L04.pptx
+++ b/docs/decks/L04.pptx
@@ -10218,7 +10218,7 @@
                 <a:ea typeface="Courier New" pitchFamily="34" charset="-122"/>
                 <a:cs typeface="Courier New" pitchFamily="34" charset="-120"/>
               </a:rPr>
-              <a:t>витрачений бюджет місяця:  </a:t>
+              <a:t>витрачений бюджет дня:  </a:t>
             </a:r>
             <a:pPr indent="0" marL="0">
               <a:buNone/>
@@ -13746,7 +13746,7 @@
                 <a:ea typeface="Montserrat" pitchFamily="34" charset="-122"/>
                 <a:cs typeface="Montserrat" pitchFamily="34" charset="-120"/>
               </a:rPr>
-              <a:t>Перевірити атрибуцію  </a:t>
+              <a:t>Оживити /cost  </a:t>
             </a:r>
             <a:pPr indent="0" marL="0">
               <a:buNone/>
@@ -13760,7 +13760,7 @@
                 <a:ea typeface="Montserrat" pitchFamily="34" charset="-122"/>
                 <a:cs typeface="Montserrat" pitchFamily="34" charset="-120"/>
               </a:rPr>
-              <a:t>GROUP BY model і за днем: цифри сходяться з очікуванням</a:t>
+              <a:t>SUM за сьогодні + бюджет → плитка в консолі</a:t>
             </a:r>
             <a:endParaRPr lang="en-US" sz="1400" dirty="0"/>
           </a:p>
@@ -13858,7 +13858,7 @@
                 <a:ea typeface="Montserrat" pitchFamily="34" charset="-122"/>
                 <a:cs typeface="Montserrat" pitchFamily="34" charset="-120"/>
               </a:rPr>
-              <a:t>Оживити /cost  </a:t>
+              <a:t>Проговорити пороги  </a:t>
             </a:r>
             <a:pPr indent="0" marL="0">
               <a:buNone/>
@@ -13872,7 +13872,7 @@
                 <a:ea typeface="Montserrat" pitchFamily="34" charset="-122"/>
                 <a:cs typeface="Montserrat" pitchFamily="34" charset="-120"/>
               </a:rPr>
-              <a:t>SUM за сьогодні + бюджет → плитка в консолі</a:t>
+              <a:t>без коду: що робити при 80% — одним реченням поруч із fallback-порядком</a:t>
             </a:r>
             <a:endParaRPr lang="en-US" sz="1400" dirty="0"/>
           </a:p>
@@ -13970,7 +13970,7 @@
                 <a:ea typeface="Montserrat" pitchFamily="34" charset="-122"/>
                 <a:cs typeface="Montserrat" pitchFamily="34" charset="-120"/>
               </a:rPr>
-              <a:t>Budget-політика · опційно  </a:t>
+              <a:t>Політика в коді · опційно  </a:t>
             </a:r>
             <a:pPr indent="0" marL="0">
               <a:buNone/>
@@ -14174,7 +14174,7 @@
                 <a:ea typeface="Montserrat" pitchFamily="34" charset="-122"/>
                 <a:cs typeface="Montserrat" pitchFamily="34" charset="-120"/>
               </a:rPr>
-              <a:t>що це довело · перевір себе · антипатерни тижня</a:t>
+              <a:t>що це довело · перевірте себе · антипатерни тижня</a:t>
             </a:r>
             <a:endParaRPr lang="en-US" sz="1500" dirty="0"/>
           </a:p>
@@ -15641,7 +15641,7 @@
                 <a:ea typeface="Unbounded" pitchFamily="34" charset="-122"/>
                 <a:cs typeface="Unbounded" pitchFamily="34" charset="-120"/>
               </a:rPr>
-              <a:t>Перевір себе</a:t>
+              <a:t>Перевірте себе</a:t>
             </a:r>
             <a:endParaRPr lang="en-US" sz="2400" dirty="0"/>
           </a:p>
@@ -17883,7 +17883,7 @@
                 <a:ea typeface="Montserrat" pitchFamily="34" charset="-122"/>
                 <a:cs typeface="Montserrat" pitchFamily="34" charset="-120"/>
               </a:rPr>
-              <a:t>вартість з'являється в момент відповіді, а не в рахунку наприкінці місяця</a:t>
+              <a:t>рахується все, що ходить у модель: бойовий трафік, ретраї, перевірки якості, службові виклики</a:t>
             </a:r>
             <a:endParaRPr lang="en-US" sz="1500" dirty="0"/>
           </a:p>
@@ -17945,7 +17945,7 @@
                 <a:ea typeface="Montserrat" pitchFamily="34" charset="-122"/>
                 <a:cs typeface="Montserrat" pitchFamily="34" charset="-120"/>
               </a:rPr>
-              <a:t>usage — єдине джерело правди; вхідні й вихідні токени рахуються окремо</a:t>
+              <a:t>вартість відома в момент відповіді: usage → формула → cost_usd, null замість нуля</a:t>
             </a:r>
             <a:endParaRPr lang="en-US" sz="1500" dirty="0"/>
           </a:p>
@@ -18007,7 +18007,7 @@
                 <a:ea typeface="Montserrat" pitchFamily="34" charset="-122"/>
                 <a:cs typeface="Montserrat" pitchFamily="34" charset="-120"/>
               </a:rPr>
-              <a:t>прайс живе поруч із точкою рішення: ціна моделі — вхідний параметр вибору</a:t>
+              <a:t>звернення ≠ виклик: вартість міряється в одиницях бізнесу — аж до ціни вирішеного звернення</a:t>
             </a:r>
             <a:endParaRPr lang="en-US" sz="1500" dirty="0"/>
           </a:p>
@@ -18069,7 +18069,7 @@
                 <a:ea typeface="Montserrat" pitchFamily="34" charset="-122"/>
                 <a:cs typeface="Montserrat" pitchFamily="34" charset="-120"/>
               </a:rPr>
-              <a:t>звернення ≠ виклик: одне питання дає до чотирьох рядків лога</a:t>
+              <a:t>атрибуція важливіша за суму: поля в момент запиту → розслідування сплеску за три GROUP BY</a:t>
             </a:r>
             <a:endParaRPr lang="en-US" sz="1500" dirty="0"/>
           </a:p>
@@ -18131,7 +18131,7 @@
                 <a:ea typeface="Montserrat" pitchFamily="34" charset="-122"/>
                 <a:cs typeface="Montserrat" pitchFamily="34" charset="-120"/>
               </a:rPr>
-              <a:t>атрибуція важливіша за суму: «$310 на ескалаціях» веде до дії, «$400» — ні</a:t>
+              <a:t>маршрутизація — найбільший важіль вартості; бюджет поруч із витратою — поріг дії</a:t>
             </a:r>
             <a:endParaRPr lang="en-US" sz="1500" dirty="0"/>
           </a:p>
